--- a/slides/00-DailyAnnouncements.pptx
+++ b/slides/00-DailyAnnouncements.pptx
@@ -5,7 +5,7 @@
     <p:sldMasterId id="2147484006" r:id="rId1"/>
   </p:sldMasterIdLst>
   <p:notesMasterIdLst>
-    <p:notesMasterId r:id="rId23"/>
+    <p:notesMasterId r:id="rId24"/>
   </p:notesMasterIdLst>
   <p:sldIdLst>
     <p:sldId id="256" r:id="rId2"/>
@@ -28,7 +28,8 @@
     <p:sldId id="531" r:id="rId19"/>
     <p:sldId id="532" r:id="rId20"/>
     <p:sldId id="533" r:id="rId21"/>
-    <p:sldId id="515" r:id="rId22"/>
+    <p:sldId id="534" r:id="rId22"/>
+    <p:sldId id="515" r:id="rId23"/>
   </p:sldIdLst>
   <p:sldSz cx="12192000" cy="6858000"/>
   <p:notesSz cx="6858000" cy="9144000"/>
@@ -217,7 +218,7 @@
           <a:p>
             <a:fld id="{C5B45307-6ED4-B142-BD64-10F739779302}" type="datetimeFigureOut">
               <a:rPr lang="en-US" smtClean="0"/>
-              <a:t>12/2/25</a:t>
+              <a:t>12/4/25</a:t>
             </a:fld>
             <a:endParaRPr lang="en-US"/>
           </a:p>
@@ -4850,7 +4851,7 @@
           <a:p>
             <a:fld id="{4313F670-7F9A-774D-B73D-573401E44297}" type="datetime1">
               <a:rPr lang="en-US" smtClean="0"/>
-              <a:t>12/2/25</a:t>
+              <a:t>12/4/25</a:t>
             </a:fld>
             <a:endParaRPr lang="en-US"/>
           </a:p>
@@ -5117,7 +5118,7 @@
           <a:p>
             <a:fld id="{446F9669-A8A7-2D40-9D01-B35FC337AA30}" type="datetime1">
               <a:rPr lang="en-US" smtClean="0"/>
-              <a:t>12/2/25</a:t>
+              <a:t>12/4/25</a:t>
             </a:fld>
             <a:endParaRPr lang="en-US"/>
           </a:p>
@@ -5313,7 +5314,7 @@
           <a:p>
             <a:fld id="{FA76CF18-F41B-6B48-B3E5-599E9795C2C3}" type="datetime1">
               <a:rPr lang="en-US" smtClean="0"/>
-              <a:t>12/2/25</a:t>
+              <a:t>12/4/25</a:t>
             </a:fld>
             <a:endParaRPr lang="en-US"/>
           </a:p>
@@ -5576,7 +5577,7 @@
           <a:p>
             <a:fld id="{B9654854-6457-164F-A077-6B3035079B82}" type="datetime1">
               <a:rPr lang="en-US" smtClean="0"/>
-              <a:t>12/2/25</a:t>
+              <a:t>12/4/25</a:t>
             </a:fld>
             <a:endParaRPr lang="en-US"/>
           </a:p>
@@ -6010,7 +6011,7 @@
           <a:p>
             <a:fld id="{CE3DBFD7-E611-8C40-AC73-0C29FF63F0CD}" type="datetime1">
               <a:rPr lang="en-US" smtClean="0"/>
-              <a:t>12/2/25</a:t>
+              <a:t>12/4/25</a:t>
             </a:fld>
             <a:endParaRPr lang="en-US"/>
           </a:p>
@@ -6556,7 +6557,7 @@
           <a:p>
             <a:fld id="{C8B63B06-0493-2840-9F37-30C9412BBF17}" type="datetime1">
               <a:rPr lang="en-US" smtClean="0"/>
-              <a:t>12/2/25</a:t>
+              <a:t>12/4/25</a:t>
             </a:fld>
             <a:endParaRPr lang="en-US"/>
           </a:p>
@@ -7276,7 +7277,7 @@
           <a:p>
             <a:fld id="{72B5C0FA-8C46-E84D-B6D7-B673F2CA0A0E}" type="datetime1">
               <a:rPr lang="en-US" smtClean="0"/>
-              <a:t>12/2/25</a:t>
+              <a:t>12/4/25</a:t>
             </a:fld>
             <a:endParaRPr lang="en-US"/>
           </a:p>
@@ -7446,7 +7447,7 @@
           <a:p>
             <a:fld id="{60B9CDE1-97B4-BF46-B69C-B86855B18820}" type="datetime1">
               <a:rPr lang="en-US" smtClean="0"/>
-              <a:t>12/2/25</a:t>
+              <a:t>12/4/25</a:t>
             </a:fld>
             <a:endParaRPr lang="en-US"/>
           </a:p>
@@ -7626,7 +7627,7 @@
           <a:p>
             <a:fld id="{BE51D3A4-F9E5-FD49-AA87-B395F50451DC}" type="datetime1">
               <a:rPr lang="en-US" smtClean="0"/>
-              <a:t>12/2/25</a:t>
+              <a:t>12/4/25</a:t>
             </a:fld>
             <a:endParaRPr lang="en-US"/>
           </a:p>
@@ -7796,7 +7797,7 @@
           <a:p>
             <a:fld id="{880DFB37-B0AE-9449-85EC-14F9C83B6084}" type="datetime1">
               <a:rPr lang="en-US" smtClean="0"/>
-              <a:t>12/2/25</a:t>
+              <a:t>12/4/25</a:t>
             </a:fld>
             <a:endParaRPr lang="en-US"/>
           </a:p>
@@ -8046,7 +8047,7 @@
           <a:p>
             <a:fld id="{C939124A-616E-6944-A21A-1839F5DBE7BB}" type="datetime1">
               <a:rPr lang="en-US" smtClean="0"/>
-              <a:t>12/2/25</a:t>
+              <a:t>12/4/25</a:t>
             </a:fld>
             <a:endParaRPr lang="en-US"/>
           </a:p>
@@ -8278,7 +8279,7 @@
           <a:p>
             <a:fld id="{C6E9A026-D48C-FD43-8676-CD625DD5D84B}" type="datetime1">
               <a:rPr lang="en-US" smtClean="0"/>
-              <a:t>12/2/25</a:t>
+              <a:t>12/4/25</a:t>
             </a:fld>
             <a:endParaRPr lang="en-US"/>
           </a:p>
@@ -8664,7 +8665,7 @@
           <a:p>
             <a:fld id="{EA35111E-23A3-1440-99A3-C4C665908E3D}" type="datetime1">
               <a:rPr lang="en-US" smtClean="0"/>
-              <a:t>12/2/25</a:t>
+              <a:t>12/4/25</a:t>
             </a:fld>
             <a:endParaRPr lang="en-US"/>
           </a:p>
@@ -8787,7 +8788,7 @@
           <a:p>
             <a:fld id="{249983B9-88EF-D74B-BA6D-6A3BF17C2B38}" type="datetime1">
               <a:rPr lang="en-US" smtClean="0"/>
-              <a:t>12/2/25</a:t>
+              <a:t>12/4/25</a:t>
             </a:fld>
             <a:endParaRPr lang="en-US"/>
           </a:p>
@@ -8882,7 +8883,7 @@
           <a:p>
             <a:fld id="{E2A00AEF-B4EC-084A-8DB8-A225C7981CBB}" type="datetime1">
               <a:rPr lang="en-US" smtClean="0"/>
-              <a:t>12/2/25</a:t>
+              <a:t>12/4/25</a:t>
             </a:fld>
             <a:endParaRPr lang="en-US"/>
           </a:p>
@@ -9131,7 +9132,7 @@
           <a:p>
             <a:fld id="{97860299-21CD-A94A-A7B0-44E787F8D42C}" type="datetime1">
               <a:rPr lang="en-US" smtClean="0"/>
-              <a:t>12/2/25</a:t>
+              <a:t>12/4/25</a:t>
             </a:fld>
             <a:endParaRPr lang="en-US"/>
           </a:p>
@@ -9416,7 +9417,7 @@
           <a:p>
             <a:fld id="{3DFD19CF-4E62-D246-BA61-7B528271315F}" type="datetime1">
               <a:rPr lang="en-US" smtClean="0"/>
-              <a:t>12/2/25</a:t>
+              <a:t>12/4/25</a:t>
             </a:fld>
             <a:endParaRPr lang="en-US"/>
           </a:p>
@@ -12483,7 +12484,7 @@
           <a:p>
             <a:fld id="{92FF8978-FE14-CC4A-93A6-934EB06543C0}" type="datetime1">
               <a:rPr lang="en-US" smtClean="0"/>
-              <a:t>12/2/25</a:t>
+              <a:t>12/4/25</a:t>
             </a:fld>
             <a:endParaRPr lang="en-US"/>
           </a:p>
@@ -15872,6 +15873,280 @@
   <p:cSld>
     <p:spTree>
       <p:nvGrpSpPr>
+        <p:cNvPr id="1" name="">
+          <a:extLst>
+            <a:ext uri="{FF2B5EF4-FFF2-40B4-BE49-F238E27FC236}">
+              <a16:creationId xmlns:a16="http://schemas.microsoft.com/office/drawing/2014/main" id="{A80440D3-AACD-9613-35AF-8DE0251197AC}"/>
+            </a:ext>
+          </a:extLst>
+        </p:cNvPr>
+        <p:cNvGrpSpPr/>
+        <p:nvPr/>
+      </p:nvGrpSpPr>
+      <p:grpSpPr>
+        <a:xfrm>
+          <a:off x="0" y="0"/>
+          <a:ext cx="0" cy="0"/>
+          <a:chOff x="0" y="0"/>
+          <a:chExt cx="0" cy="0"/>
+        </a:xfrm>
+      </p:grpSpPr>
+      <p:sp>
+        <p:nvSpPr>
+          <p:cNvPr id="6146" name="Rectangle 2">
+            <a:extLst>
+              <a:ext uri="{FF2B5EF4-FFF2-40B4-BE49-F238E27FC236}">
+                <a16:creationId xmlns:a16="http://schemas.microsoft.com/office/drawing/2014/main" id="{AB91B9A7-8D39-AA4D-A3D1-47ED5555CF3B}"/>
+              </a:ext>
+            </a:extLst>
+          </p:cNvPr>
+          <p:cNvSpPr>
+            <a:spLocks noGrp="1" noChangeArrowheads="1"/>
+          </p:cNvSpPr>
+          <p:nvPr>
+            <p:ph type="title"/>
+            <p:custDataLst>
+              <p:tags r:id="rId1"/>
+            </p:custDataLst>
+          </p:nvPr>
+        </p:nvSpPr>
+        <p:spPr>
+          <a:xfrm>
+            <a:off x="1141413" y="284084"/>
+            <a:ext cx="9905998" cy="620791"/>
+          </a:xfrm>
+        </p:spPr>
+        <p:txBody>
+          <a:bodyPr/>
+          <a:lstStyle/>
+          <a:p>
+            <a:pPr algn="ctr"/>
+            <a:r>
+              <a:rPr lang="en-US" dirty="0"/>
+              <a:t>Lecture 23: </a:t>
+            </a:r>
+            <a:r>
+              <a:rPr lang="en-US" dirty="0" err="1"/>
+              <a:t>THursday</a:t>
+            </a:r>
+            <a:r>
+              <a:rPr lang="en-US" dirty="0"/>
+              <a:t>, Dec 4</a:t>
+            </a:r>
+          </a:p>
+        </p:txBody>
+      </p:sp>
+      <p:sp>
+        <p:nvSpPr>
+          <p:cNvPr id="6147" name="Rectangle 3">
+            <a:extLst>
+              <a:ext uri="{FF2B5EF4-FFF2-40B4-BE49-F238E27FC236}">
+                <a16:creationId xmlns:a16="http://schemas.microsoft.com/office/drawing/2014/main" id="{87139A4B-4D58-F93D-7E27-76B8A627D27A}"/>
+              </a:ext>
+            </a:extLst>
+          </p:cNvPr>
+          <p:cNvSpPr>
+            <a:spLocks noGrp="1" noChangeArrowheads="1"/>
+          </p:cNvSpPr>
+          <p:nvPr>
+            <p:ph idx="1"/>
+            <p:custDataLst>
+              <p:tags r:id="rId2"/>
+            </p:custDataLst>
+          </p:nvPr>
+        </p:nvSpPr>
+        <p:spPr>
+          <a:xfrm>
+            <a:off x="1294151" y="1098548"/>
+            <a:ext cx="9905998" cy="5387311"/>
+          </a:xfrm>
+        </p:spPr>
+        <p:txBody>
+          <a:bodyPr>
+            <a:normAutofit fontScale="62500" lnSpcReduction="20000"/>
+          </a:bodyPr>
+          <a:lstStyle/>
+          <a:p>
+            <a:r>
+              <a:rPr lang="en-US" dirty="0">
+                <a:latin typeface="Arial" panose="020B0604020202020204" pitchFamily="34" charset="0"/>
+                <a:cs typeface="Arial" panose="020B0604020202020204" pitchFamily="34" charset="0"/>
+              </a:rPr>
+              <a:t>This is the second to last lecture!!</a:t>
+            </a:r>
+          </a:p>
+          <a:p>
+            <a:r>
+              <a:rPr lang="en-US" dirty="0">
+                <a:latin typeface="Arial" panose="020B0604020202020204" pitchFamily="34" charset="0"/>
+                <a:cs typeface="Arial" panose="020B0604020202020204" pitchFamily="34" charset="0"/>
+              </a:rPr>
+              <a:t>Module 4 homework should be finished today or tomorrow if late</a:t>
+            </a:r>
+          </a:p>
+          <a:p>
+            <a:r>
+              <a:rPr lang="en-US" dirty="0">
+                <a:latin typeface="Arial" panose="020B0604020202020204" pitchFamily="34" charset="0"/>
+                <a:cs typeface="Arial" panose="020B0604020202020204" pitchFamily="34" charset="0"/>
+              </a:rPr>
+              <a:t>Quiz 4 is returned</a:t>
+            </a:r>
+          </a:p>
+          <a:p>
+            <a:pPr lvl="1"/>
+            <a:r>
+              <a:rPr lang="en-US" dirty="0">
+                <a:latin typeface="Arial" panose="020B0604020202020204" pitchFamily="34" charset="0"/>
+                <a:cs typeface="Arial" panose="020B0604020202020204" pitchFamily="34" charset="0"/>
+              </a:rPr>
+              <a:t>Average was a bit lower this time but not bad at all.</a:t>
+            </a:r>
+          </a:p>
+          <a:p>
+            <a:r>
+              <a:rPr lang="en-US" dirty="0">
+                <a:latin typeface="Arial" panose="020B0604020202020204" pitchFamily="34" charset="0"/>
+                <a:cs typeface="Arial" panose="020B0604020202020204" pitchFamily="34" charset="0"/>
+              </a:rPr>
+              <a:t>Homework…will probably be extended for everybody. </a:t>
+            </a:r>
+          </a:p>
+          <a:p>
+            <a:pPr lvl="1"/>
+            <a:r>
+              <a:rPr lang="en-US" dirty="0">
+                <a:latin typeface="Arial" panose="020B0604020202020204" pitchFamily="34" charset="0"/>
+                <a:cs typeface="Arial" panose="020B0604020202020204" pitchFamily="34" charset="0"/>
+              </a:rPr>
+              <a:t>Stay tuned, I’m just checking with other instructors to make sure we are all in agreement.</a:t>
+            </a:r>
+          </a:p>
+          <a:p>
+            <a:r>
+              <a:rPr lang="en-US" dirty="0">
+                <a:latin typeface="Arial" panose="020B0604020202020204" pitchFamily="34" charset="0"/>
+                <a:cs typeface="Arial" panose="020B0604020202020204" pitchFamily="34" charset="0"/>
+              </a:rPr>
+              <a:t>Our final exam is on Saturday Dec. 13 from 7-10pm.</a:t>
+            </a:r>
+          </a:p>
+          <a:p>
+            <a:pPr lvl="1"/>
+            <a:r>
+              <a:rPr lang="en-US" dirty="0">
+                <a:latin typeface="Arial" panose="020B0604020202020204" pitchFamily="34" charset="0"/>
+                <a:cs typeface="Arial" panose="020B0604020202020204" pitchFamily="34" charset="0"/>
+              </a:rPr>
+              <a:t>Floryan section will be in Rice 130!! NOT our normal classroom.</a:t>
+            </a:r>
+          </a:p>
+          <a:p>
+            <a:pPr lvl="1"/>
+            <a:r>
+              <a:rPr lang="en-US" dirty="0">
+                <a:latin typeface="Arial" panose="020B0604020202020204" pitchFamily="34" charset="0"/>
+                <a:cs typeface="Arial" panose="020B0604020202020204" pitchFamily="34" charset="0"/>
+              </a:rPr>
+              <a:t>Pettit section in Mec 205!! Also NOT normal classroom.</a:t>
+            </a:r>
+          </a:p>
+          <a:p>
+            <a:pPr lvl="1"/>
+            <a:r>
+              <a:rPr lang="en-US" dirty="0">
+                <a:latin typeface="Arial" panose="020B0604020202020204" pitchFamily="34" charset="0"/>
+                <a:cs typeface="Arial" panose="020B0604020202020204" pitchFamily="34" charset="0"/>
+              </a:rPr>
+              <a:t>Remember that you will take cumulative, quiz 5, and up to two of quiz 1-4 retakes</a:t>
+            </a:r>
+          </a:p>
+          <a:p>
+            <a:r>
+              <a:rPr lang="en-US" dirty="0">
+                <a:latin typeface="Arial" panose="020B0604020202020204" pitchFamily="34" charset="0"/>
+                <a:cs typeface="Arial" panose="020B0604020202020204" pitchFamily="34" charset="0"/>
+              </a:rPr>
+              <a:t>Please remember that I am asking for NO laptop / phones!</a:t>
+            </a:r>
+          </a:p>
+          <a:p>
+            <a:pPr lvl="1"/>
+            <a:r>
+              <a:rPr lang="en-US" dirty="0">
+                <a:latin typeface="Arial" panose="020B0604020202020204" pitchFamily="34" charset="0"/>
+                <a:cs typeface="Arial" panose="020B0604020202020204" pitchFamily="34" charset="0"/>
+              </a:rPr>
+              <a:t>This makes the learning environment better for everybody. I appreciate it!</a:t>
+            </a:r>
+          </a:p>
+          <a:p>
+            <a:r>
+              <a:rPr lang="en-US" dirty="0">
+                <a:latin typeface="Arial" panose="020B0604020202020204" pitchFamily="34" charset="0"/>
+                <a:cs typeface="Arial" panose="020B0604020202020204" pitchFamily="34" charset="0"/>
+              </a:rPr>
+              <a:t>Chase will hold a final exam review session!</a:t>
+            </a:r>
+          </a:p>
+          <a:p>
+            <a:pPr lvl="1"/>
+            <a:r>
+              <a:rPr lang="en-US" dirty="0">
+                <a:latin typeface="Arial" panose="020B0604020202020204" pitchFamily="34" charset="0"/>
+                <a:cs typeface="Arial" panose="020B0604020202020204" pitchFamily="34" charset="0"/>
+              </a:rPr>
+              <a:t>Wednesday Dec. 10 at 4-5pm in Mec 205</a:t>
+            </a:r>
+          </a:p>
+          <a:p>
+            <a:r>
+              <a:rPr lang="en-US" dirty="0">
+                <a:latin typeface="Arial" panose="020B0604020202020204" pitchFamily="34" charset="0"/>
+                <a:cs typeface="Arial" panose="020B0604020202020204" pitchFamily="34" charset="0"/>
+              </a:rPr>
+              <a:t>Lecture recordings are on Panopto</a:t>
+            </a:r>
+          </a:p>
+          <a:p>
+            <a:pPr lvl="1"/>
+            <a:r>
+              <a:rPr lang="en-US" dirty="0">
+                <a:latin typeface="Arial" panose="020B0604020202020204" pitchFamily="34" charset="0"/>
+                <a:cs typeface="Arial" panose="020B0604020202020204" pitchFamily="34" charset="0"/>
+              </a:rPr>
+              <a:t>There are folders for Floryan and Pettit (little hard to find but they are there)</a:t>
+            </a:r>
+          </a:p>
+          <a:p>
+            <a:r>
+              <a:rPr lang="en-US" dirty="0">
+                <a:latin typeface="Arial" panose="020B0604020202020204" pitchFamily="34" charset="0"/>
+                <a:cs typeface="Arial" panose="020B0604020202020204" pitchFamily="34" charset="0"/>
+              </a:rPr>
+              <a:t>Today we continue with reductions!</a:t>
+            </a:r>
+          </a:p>
+        </p:txBody>
+      </p:sp>
+    </p:spTree>
+    <p:extLst>
+      <p:ext uri="{BB962C8B-B14F-4D97-AF65-F5344CB8AC3E}">
+        <p14:creationId xmlns:p14="http://schemas.microsoft.com/office/powerpoint/2010/main" val="1911655295"/>
+      </p:ext>
+    </p:extLst>
+  </p:cSld>
+  <p:clrMapOvr>
+    <a:masterClrMapping/>
+  </p:clrMapOvr>
+</p:sld>
+</file>
+
+<file path=ppt/slides/slide22.xml><?xml version="1.0" encoding="utf-8"?>
+<p:sld xmlns:a="http://schemas.openxmlformats.org/drawingml/2006/main" xmlns:r="http://schemas.openxmlformats.org/officeDocument/2006/relationships" xmlns:p="http://schemas.openxmlformats.org/presentationml/2006/main">
+  <p:cSld>
+    <p:spTree>
+      <p:nvGrpSpPr>
         <p:cNvPr id="1" name=""/>
         <p:cNvGrpSpPr/>
         <p:nvPr/>
@@ -16208,7 +16483,7 @@
           <p:nvPr>
             <p:extLst>
               <p:ext uri="{D42A27DB-BD31-4B8C-83A1-F6EECF244321}">
-                <p14:modId xmlns:p14="http://schemas.microsoft.com/office/powerpoint/2010/main" val="4288407215"/>
+                <p14:modId xmlns:p14="http://schemas.microsoft.com/office/powerpoint/2010/main" val="1250329912"/>
               </p:ext>
             </p:extLst>
           </p:nvPr>
@@ -16318,7 +16593,7 @@
                       <a:pPr algn="ctr"/>
                       <a:r>
                         <a:rPr lang="en-US" i="0" dirty="0"/>
-                        <a:t>20</a:t>
+                        <a:t>21</a:t>
                       </a:r>
                     </a:p>
                   </a:txBody>
@@ -16332,7 +16607,7 @@
                       <a:pPr algn="ctr"/>
                       <a:r>
                         <a:rPr lang="en-US" b="1" i="0" dirty="0"/>
-                        <a:t>75.0%</a:t>
+                        <a:t>71.4%</a:t>
                       </a:r>
                     </a:p>
                   </a:txBody>
@@ -17502,7 +17777,7 @@
           <p:nvPr>
             <p:extLst>
               <p:ext uri="{D42A27DB-BD31-4B8C-83A1-F6EECF244321}">
-                <p14:modId xmlns:p14="http://schemas.microsoft.com/office/powerpoint/2010/main" val="42157553"/>
+                <p14:modId xmlns:p14="http://schemas.microsoft.com/office/powerpoint/2010/main" val="158929332"/>
               </p:ext>
             </p:extLst>
           </p:nvPr>
@@ -17612,7 +17887,7 @@
                       <a:pPr algn="ctr"/>
                       <a:r>
                         <a:rPr lang="en-US" i="0" dirty="0"/>
-                        <a:t>20</a:t>
+                        <a:t>21</a:t>
                       </a:r>
                     </a:p>
                   </a:txBody>
@@ -17626,7 +17901,7 @@
                       <a:pPr algn="ctr"/>
                       <a:r>
                         <a:rPr lang="en-US" b="1" i="0" dirty="0"/>
-                        <a:t>20.0%</a:t>
+                        <a:t>19.0%</a:t>
                       </a:r>
                     </a:p>
                   </a:txBody>
@@ -19613,6 +19888,18 @@
 </file>
 
 <file path=ppt/tags/tag43.xml><?xml version="1.0" encoding="utf-8"?>
+<p:tagLst xmlns:a="http://schemas.openxmlformats.org/drawingml/2006/main" xmlns:r="http://schemas.openxmlformats.org/officeDocument/2006/relationships" xmlns:p="http://schemas.openxmlformats.org/presentationml/2006/main">
+  <p:tag name="_INSTRUCTOR VIEW19C14C36-AC8E-43BC-9DB6-C2AAF774C7DC|PANE__TAG" val="_"/>
+</p:tagLst>
+</file>
+
+<file path=ppt/tags/tag44.xml><?xml version="1.0" encoding="utf-8"?>
+<p:tagLst xmlns:a="http://schemas.openxmlformats.org/drawingml/2006/main" xmlns:r="http://schemas.openxmlformats.org/officeDocument/2006/relationships" xmlns:p="http://schemas.openxmlformats.org/presentationml/2006/main">
+  <p:tag name="_INSTRUCTOR VIEW19C14C36-AC8E-43BC-9DB6-C2AAF774C7DC|PANE__TAG" val="_"/>
+</p:tagLst>
+</file>
+
+<file path=ppt/tags/tag45.xml><?xml version="1.0" encoding="utf-8"?>
 <p:tagLst xmlns:a="http://schemas.openxmlformats.org/drawingml/2006/main" xmlns:r="http://schemas.openxmlformats.org/officeDocument/2006/relationships" xmlns:p="http://schemas.openxmlformats.org/presentationml/2006/main">
   <p:tag name="_INSTRUCTOR VIEW19C14C36-AC8E-43BC-9DB6-C2AAF774C7DC|PANE__TAG" val="_"/>
 </p:tagLst>

--- a/slides/00-DailyAnnouncements.pptx
+++ b/slides/00-DailyAnnouncements.pptx
@@ -5,31 +5,12 @@
     <p:sldMasterId id="2147484006" r:id="rId1"/>
   </p:sldMasterIdLst>
   <p:notesMasterIdLst>
-    <p:notesMasterId r:id="rId24"/>
+    <p:notesMasterId r:id="rId5"/>
   </p:notesMasterIdLst>
   <p:sldIdLst>
     <p:sldId id="256" r:id="rId2"/>
     <p:sldId id="505" r:id="rId3"/>
-    <p:sldId id="516" r:id="rId4"/>
-    <p:sldId id="517" r:id="rId5"/>
-    <p:sldId id="518" r:id="rId6"/>
-    <p:sldId id="519" r:id="rId7"/>
-    <p:sldId id="520" r:id="rId8"/>
-    <p:sldId id="521" r:id="rId9"/>
-    <p:sldId id="522" r:id="rId10"/>
-    <p:sldId id="523" r:id="rId11"/>
-    <p:sldId id="524" r:id="rId12"/>
-    <p:sldId id="525" r:id="rId13"/>
-    <p:sldId id="526" r:id="rId14"/>
-    <p:sldId id="527" r:id="rId15"/>
-    <p:sldId id="528" r:id="rId16"/>
-    <p:sldId id="529" r:id="rId17"/>
-    <p:sldId id="530" r:id="rId18"/>
-    <p:sldId id="531" r:id="rId19"/>
-    <p:sldId id="532" r:id="rId20"/>
-    <p:sldId id="533" r:id="rId21"/>
-    <p:sldId id="534" r:id="rId22"/>
-    <p:sldId id="515" r:id="rId23"/>
+    <p:sldId id="515" r:id="rId4"/>
   </p:sldIdLst>
   <p:sldSz cx="12192000" cy="6858000"/>
   <p:notesSz cx="6858000" cy="9144000"/>
@@ -218,7 +199,7 @@
           <a:p>
             <a:fld id="{C5B45307-6ED4-B142-BD64-10F739779302}" type="datetimeFigureOut">
               <a:rPr lang="en-US" smtClean="0"/>
-              <a:t>12/4/25</a:t>
+              <a:t>7/14/26</a:t>
             </a:fld>
             <a:endParaRPr lang="en-US"/>
           </a:p>
@@ -626,7 +607,7 @@
           <a:noFill/>
           <a:extLst>
             <a:ext uri="{909E8E84-426E-40dd-AFC4-6F175D3DCCD1}">
-              <a14:hiddenFill xmlns:a14="http://schemas.microsoft.com/office/drawing/2010/main" xmlns="">
+              <a14:hiddenFill xmlns="" xmlns:a14="http://schemas.microsoft.com/office/drawing/2010/main">
                 <a:solidFill>
                   <a:srgbClr val="FFFFFF"/>
                 </a:solidFill>
@@ -685,7 +666,7 @@
             </a:ln>
             <a:extLst>
               <a:ext uri="{91240B29-F687-4f45-9708-019B960494DF}">
-                <a14:hiddenLine xmlns:a14="http://schemas.microsoft.com/office/drawing/2010/main" xmlns="" w="9525">
+                <a14:hiddenLine xmlns="" xmlns:a14="http://schemas.microsoft.com/office/drawing/2010/main" w="9525">
                   <a:solidFill>
                     <a:srgbClr val="000000"/>
                   </a:solidFill>
@@ -775,7 +756,7 @@
             </a:ln>
             <a:extLst>
               <a:ext uri="{91240B29-F687-4f45-9708-019B960494DF}">
-                <a14:hiddenLine xmlns:a14="http://schemas.microsoft.com/office/drawing/2010/main" xmlns="" w="9525">
+                <a14:hiddenLine xmlns="" xmlns:a14="http://schemas.microsoft.com/office/drawing/2010/main" w="9525">
                   <a:solidFill>
                     <a:srgbClr val="000000"/>
                   </a:solidFill>
@@ -865,7 +846,7 @@
             </a:ln>
             <a:extLst>
               <a:ext uri="{91240B29-F687-4f45-9708-019B960494DF}">
-                <a14:hiddenLine xmlns:a14="http://schemas.microsoft.com/office/drawing/2010/main" xmlns="" w="9525">
+                <a14:hiddenLine xmlns="" xmlns:a14="http://schemas.microsoft.com/office/drawing/2010/main" w="9525">
                   <a:solidFill>
                     <a:srgbClr val="000000"/>
                   </a:solidFill>
@@ -899,7 +880,7 @@
             </a:ln>
             <a:extLst>
               <a:ext uri="{91240B29-F687-4f45-9708-019B960494DF}">
-                <a14:hiddenLine xmlns:a14="http://schemas.microsoft.com/office/drawing/2010/main" xmlns="" w="9525">
+                <a14:hiddenLine xmlns="" xmlns:a14="http://schemas.microsoft.com/office/drawing/2010/main" w="9525">
                   <a:solidFill>
                     <a:srgbClr val="000000"/>
                   </a:solidFill>
@@ -989,7 +970,7 @@
             </a:ln>
             <a:extLst>
               <a:ext uri="{91240B29-F687-4f45-9708-019B960494DF}">
-                <a14:hiddenLine xmlns:a14="http://schemas.microsoft.com/office/drawing/2010/main" xmlns="" w="9525">
+                <a14:hiddenLine xmlns="" xmlns:a14="http://schemas.microsoft.com/office/drawing/2010/main" w="9525">
                   <a:solidFill>
                     <a:srgbClr val="000000"/>
                   </a:solidFill>
@@ -1051,7 +1032,7 @@
             </a:ln>
             <a:extLst>
               <a:ext uri="{91240B29-F687-4f45-9708-019B960494DF}">
-                <a14:hiddenLine xmlns:a14="http://schemas.microsoft.com/office/drawing/2010/main" xmlns="" w="9525">
+                <a14:hiddenLine xmlns="" xmlns:a14="http://schemas.microsoft.com/office/drawing/2010/main" w="9525">
                   <a:solidFill>
                     <a:srgbClr val="000000"/>
                   </a:solidFill>
@@ -1113,7 +1094,7 @@
             </a:ln>
             <a:extLst>
               <a:ext uri="{91240B29-F687-4f45-9708-019B960494DF}">
-                <a14:hiddenLine xmlns:a14="http://schemas.microsoft.com/office/drawing/2010/main" xmlns="" w="9525">
+                <a14:hiddenLine xmlns="" xmlns:a14="http://schemas.microsoft.com/office/drawing/2010/main" w="9525">
                   <a:solidFill>
                     <a:srgbClr val="000000"/>
                   </a:solidFill>
@@ -1203,7 +1184,7 @@
             </a:ln>
             <a:extLst>
               <a:ext uri="{91240B29-F687-4f45-9708-019B960494DF}">
-                <a14:hiddenLine xmlns:a14="http://schemas.microsoft.com/office/drawing/2010/main" xmlns="" w="9525">
+                <a14:hiddenLine xmlns="" xmlns:a14="http://schemas.microsoft.com/office/drawing/2010/main" w="9525">
                   <a:solidFill>
                     <a:srgbClr val="000000"/>
                   </a:solidFill>
@@ -1265,7 +1246,7 @@
             </a:ln>
             <a:extLst>
               <a:ext uri="{91240B29-F687-4f45-9708-019B960494DF}">
-                <a14:hiddenLine xmlns:a14="http://schemas.microsoft.com/office/drawing/2010/main" xmlns="" w="9525">
+                <a14:hiddenLine xmlns="" xmlns:a14="http://schemas.microsoft.com/office/drawing/2010/main" w="9525">
                   <a:solidFill>
                     <a:srgbClr val="000000"/>
                   </a:solidFill>
@@ -1327,7 +1308,7 @@
             </a:ln>
             <a:extLst>
               <a:ext uri="{91240B29-F687-4f45-9708-019B960494DF}">
-                <a14:hiddenLine xmlns:a14="http://schemas.microsoft.com/office/drawing/2010/main" xmlns="" w="9525">
+                <a14:hiddenLine xmlns="" xmlns:a14="http://schemas.microsoft.com/office/drawing/2010/main" w="9525">
                   <a:solidFill>
                     <a:srgbClr val="000000"/>
                   </a:solidFill>
@@ -1417,7 +1398,7 @@
             </a:ln>
             <a:extLst>
               <a:ext uri="{91240B29-F687-4f45-9708-019B960494DF}">
-                <a14:hiddenLine xmlns:a14="http://schemas.microsoft.com/office/drawing/2010/main" xmlns="" w="9525">
+                <a14:hiddenLine xmlns="" xmlns:a14="http://schemas.microsoft.com/office/drawing/2010/main" w="9525">
                   <a:solidFill>
                     <a:srgbClr val="000000"/>
                   </a:solidFill>
@@ -1507,7 +1488,7 @@
             </a:ln>
             <a:extLst>
               <a:ext uri="{91240B29-F687-4f45-9708-019B960494DF}">
-                <a14:hiddenLine xmlns:a14="http://schemas.microsoft.com/office/drawing/2010/main" xmlns="" w="9525">
+                <a14:hiddenLine xmlns="" xmlns:a14="http://schemas.microsoft.com/office/drawing/2010/main" w="9525">
                   <a:solidFill>
                     <a:srgbClr val="000000"/>
                   </a:solidFill>
@@ -1569,7 +1550,7 @@
             </a:ln>
             <a:extLst>
               <a:ext uri="{91240B29-F687-4f45-9708-019B960494DF}">
-                <a14:hiddenLine xmlns:a14="http://schemas.microsoft.com/office/drawing/2010/main" xmlns="" w="9525">
+                <a14:hiddenLine xmlns="" xmlns:a14="http://schemas.microsoft.com/office/drawing/2010/main" w="9525">
                   <a:solidFill>
                     <a:srgbClr val="000000"/>
                   </a:solidFill>
@@ -1679,7 +1660,7 @@
             </a:ln>
             <a:extLst>
               <a:ext uri="{91240B29-F687-4f45-9708-019B960494DF}">
-                <a14:hiddenLine xmlns:a14="http://schemas.microsoft.com/office/drawing/2010/main" xmlns="" w="9525">
+                <a14:hiddenLine xmlns="" xmlns:a14="http://schemas.microsoft.com/office/drawing/2010/main" w="9525">
                   <a:solidFill>
                     <a:srgbClr val="000000"/>
                   </a:solidFill>
@@ -1741,7 +1722,7 @@
             </a:ln>
             <a:extLst>
               <a:ext uri="{91240B29-F687-4f45-9708-019B960494DF}">
-                <a14:hiddenLine xmlns:a14="http://schemas.microsoft.com/office/drawing/2010/main" xmlns="" w="9525">
+                <a14:hiddenLine xmlns="" xmlns:a14="http://schemas.microsoft.com/office/drawing/2010/main" w="9525">
                   <a:solidFill>
                     <a:srgbClr val="000000"/>
                   </a:solidFill>
@@ -1831,7 +1812,7 @@
             </a:ln>
             <a:extLst>
               <a:ext uri="{91240B29-F687-4f45-9708-019B960494DF}">
-                <a14:hiddenLine xmlns:a14="http://schemas.microsoft.com/office/drawing/2010/main" xmlns="" w="9525">
+                <a14:hiddenLine xmlns="" xmlns:a14="http://schemas.microsoft.com/office/drawing/2010/main" w="9525">
                   <a:solidFill>
                     <a:srgbClr val="000000"/>
                   </a:solidFill>
@@ -1921,7 +1902,7 @@
             </a:ln>
             <a:extLst>
               <a:ext uri="{91240B29-F687-4f45-9708-019B960494DF}">
-                <a14:hiddenLine xmlns:a14="http://schemas.microsoft.com/office/drawing/2010/main" xmlns="" w="9525">
+                <a14:hiddenLine xmlns="" xmlns:a14="http://schemas.microsoft.com/office/drawing/2010/main" w="9525">
                   <a:solidFill>
                     <a:srgbClr val="000000"/>
                   </a:solidFill>
@@ -1983,7 +1964,7 @@
             </a:ln>
             <a:extLst>
               <a:ext uri="{91240B29-F687-4f45-9708-019B960494DF}">
-                <a14:hiddenLine xmlns:a14="http://schemas.microsoft.com/office/drawing/2010/main" xmlns="" w="9525">
+                <a14:hiddenLine xmlns="" xmlns:a14="http://schemas.microsoft.com/office/drawing/2010/main" w="9525">
                   <a:solidFill>
                     <a:srgbClr val="000000"/>
                   </a:solidFill>
@@ -2073,7 +2054,7 @@
             </a:ln>
             <a:extLst>
               <a:ext uri="{91240B29-F687-4f45-9708-019B960494DF}">
-                <a14:hiddenLine xmlns:a14="http://schemas.microsoft.com/office/drawing/2010/main" xmlns="" w="9525">
+                <a14:hiddenLine xmlns="" xmlns:a14="http://schemas.microsoft.com/office/drawing/2010/main" w="9525">
                   <a:solidFill>
                     <a:srgbClr val="000000"/>
                   </a:solidFill>
@@ -2163,7 +2144,7 @@
             </a:ln>
             <a:extLst>
               <a:ext uri="{91240B29-F687-4f45-9708-019B960494DF}">
-                <a14:hiddenLine xmlns:a14="http://schemas.microsoft.com/office/drawing/2010/main" xmlns="" w="9525">
+                <a14:hiddenLine xmlns="" xmlns:a14="http://schemas.microsoft.com/office/drawing/2010/main" w="9525">
                   <a:solidFill>
                     <a:srgbClr val="000000"/>
                   </a:solidFill>
@@ -2219,7 +2200,7 @@
             </a:ln>
             <a:extLst>
               <a:ext uri="{91240B29-F687-4f45-9708-019B960494DF}">
-                <a14:hiddenLine xmlns:a14="http://schemas.microsoft.com/office/drawing/2010/main" xmlns="" w="9525">
+                <a14:hiddenLine xmlns="" xmlns:a14="http://schemas.microsoft.com/office/drawing/2010/main" w="9525">
                   <a:solidFill>
                     <a:srgbClr val="000000"/>
                   </a:solidFill>
@@ -2309,7 +2290,7 @@
             </a:ln>
             <a:extLst>
               <a:ext uri="{91240B29-F687-4f45-9708-019B960494DF}">
-                <a14:hiddenLine xmlns:a14="http://schemas.microsoft.com/office/drawing/2010/main" xmlns="" w="9525">
+                <a14:hiddenLine xmlns="" xmlns:a14="http://schemas.microsoft.com/office/drawing/2010/main" w="9525">
                   <a:solidFill>
                     <a:srgbClr val="000000"/>
                   </a:solidFill>
@@ -2365,7 +2346,7 @@
             </a:ln>
             <a:extLst>
               <a:ext uri="{91240B29-F687-4f45-9708-019B960494DF}">
-                <a14:hiddenLine xmlns:a14="http://schemas.microsoft.com/office/drawing/2010/main" xmlns="" w="9525">
+                <a14:hiddenLine xmlns="" xmlns:a14="http://schemas.microsoft.com/office/drawing/2010/main" w="9525">
                   <a:solidFill>
                     <a:srgbClr val="000000"/>
                   </a:solidFill>
@@ -2455,7 +2436,7 @@
             </a:ln>
             <a:extLst>
               <a:ext uri="{91240B29-F687-4f45-9708-019B960494DF}">
-                <a14:hiddenLine xmlns:a14="http://schemas.microsoft.com/office/drawing/2010/main" xmlns="" w="9525">
+                <a14:hiddenLine xmlns="" xmlns:a14="http://schemas.microsoft.com/office/drawing/2010/main" w="9525">
                   <a:solidFill>
                     <a:srgbClr val="000000"/>
                   </a:solidFill>
@@ -2523,7 +2504,7 @@
             </a:ln>
             <a:extLst>
               <a:ext uri="{91240B29-F687-4f45-9708-019B960494DF}">
-                <a14:hiddenLine xmlns:a14="http://schemas.microsoft.com/office/drawing/2010/main" xmlns="" w="9525">
+                <a14:hiddenLine xmlns="" xmlns:a14="http://schemas.microsoft.com/office/drawing/2010/main" w="9525">
                   <a:solidFill>
                     <a:srgbClr val="000000"/>
                   </a:solidFill>
@@ -2613,7 +2594,7 @@
             </a:ln>
             <a:extLst>
               <a:ext uri="{91240B29-F687-4f45-9708-019B960494DF}">
-                <a14:hiddenLine xmlns:a14="http://schemas.microsoft.com/office/drawing/2010/main" xmlns="" w="9525">
+                <a14:hiddenLine xmlns="" xmlns:a14="http://schemas.microsoft.com/office/drawing/2010/main" w="9525">
                   <a:solidFill>
                     <a:srgbClr val="000000"/>
                   </a:solidFill>
@@ -2681,7 +2662,7 @@
             </a:ln>
             <a:extLst>
               <a:ext uri="{91240B29-F687-4f45-9708-019B960494DF}">
-                <a14:hiddenLine xmlns:a14="http://schemas.microsoft.com/office/drawing/2010/main" xmlns="" w="9525">
+                <a14:hiddenLine xmlns="" xmlns:a14="http://schemas.microsoft.com/office/drawing/2010/main" w="9525">
                   <a:solidFill>
                     <a:srgbClr val="000000"/>
                   </a:solidFill>
@@ -2771,7 +2752,7 @@
             </a:ln>
             <a:extLst>
               <a:ext uri="{91240B29-F687-4f45-9708-019B960494DF}">
-                <a14:hiddenLine xmlns:a14="http://schemas.microsoft.com/office/drawing/2010/main" xmlns="" w="9525">
+                <a14:hiddenLine xmlns="" xmlns:a14="http://schemas.microsoft.com/office/drawing/2010/main" w="9525">
                   <a:solidFill>
                     <a:srgbClr val="000000"/>
                   </a:solidFill>
@@ -2805,7 +2786,7 @@
             </a:ln>
             <a:extLst>
               <a:ext uri="{91240B29-F687-4f45-9708-019B960494DF}">
-                <a14:hiddenLine xmlns:a14="http://schemas.microsoft.com/office/drawing/2010/main" xmlns="" w="9525">
+                <a14:hiddenLine xmlns="" xmlns:a14="http://schemas.microsoft.com/office/drawing/2010/main" w="9525">
                   <a:solidFill>
                     <a:srgbClr val="000000"/>
                   </a:solidFill>
@@ -2895,7 +2876,7 @@
             </a:ln>
             <a:extLst>
               <a:ext uri="{91240B29-F687-4f45-9708-019B960494DF}">
-                <a14:hiddenLine xmlns:a14="http://schemas.microsoft.com/office/drawing/2010/main" xmlns="" w="9525">
+                <a14:hiddenLine xmlns="" xmlns:a14="http://schemas.microsoft.com/office/drawing/2010/main" w="9525">
                   <a:solidFill>
                     <a:srgbClr val="000000"/>
                   </a:solidFill>
@@ -2957,7 +2938,7 @@
             </a:ln>
             <a:extLst>
               <a:ext uri="{91240B29-F687-4f45-9708-019B960494DF}">
-                <a14:hiddenLine xmlns:a14="http://schemas.microsoft.com/office/drawing/2010/main" xmlns="" w="9525">
+                <a14:hiddenLine xmlns="" xmlns:a14="http://schemas.microsoft.com/office/drawing/2010/main" w="9525">
                   <a:solidFill>
                     <a:srgbClr val="000000"/>
                   </a:solidFill>
@@ -3019,7 +3000,7 @@
             </a:ln>
             <a:extLst>
               <a:ext uri="{91240B29-F687-4f45-9708-019B960494DF}">
-                <a14:hiddenLine xmlns:a14="http://schemas.microsoft.com/office/drawing/2010/main" xmlns="" w="9525">
+                <a14:hiddenLine xmlns="" xmlns:a14="http://schemas.microsoft.com/office/drawing/2010/main" w="9525">
                   <a:solidFill>
                     <a:srgbClr val="000000"/>
                   </a:solidFill>
@@ -3109,7 +3090,7 @@
             </a:ln>
             <a:extLst>
               <a:ext uri="{91240B29-F687-4f45-9708-019B960494DF}">
-                <a14:hiddenLine xmlns:a14="http://schemas.microsoft.com/office/drawing/2010/main" xmlns="" w="9525">
+                <a14:hiddenLine xmlns="" xmlns:a14="http://schemas.microsoft.com/office/drawing/2010/main" w="9525">
                   <a:solidFill>
                     <a:srgbClr val="000000"/>
                   </a:solidFill>
@@ -3177,7 +3158,7 @@
             </a:ln>
             <a:extLst>
               <a:ext uri="{91240B29-F687-4f45-9708-019B960494DF}">
-                <a14:hiddenLine xmlns:a14="http://schemas.microsoft.com/office/drawing/2010/main" xmlns="" w="9525">
+                <a14:hiddenLine xmlns="" xmlns:a14="http://schemas.microsoft.com/office/drawing/2010/main" w="9525">
                   <a:solidFill>
                     <a:srgbClr val="000000"/>
                   </a:solidFill>
@@ -3239,7 +3220,7 @@
             </a:ln>
             <a:extLst>
               <a:ext uri="{91240B29-F687-4f45-9708-019B960494DF}">
-                <a14:hiddenLine xmlns:a14="http://schemas.microsoft.com/office/drawing/2010/main" xmlns="" w="9525">
+                <a14:hiddenLine xmlns="" xmlns:a14="http://schemas.microsoft.com/office/drawing/2010/main" w="9525">
                   <a:solidFill>
                     <a:srgbClr val="000000"/>
                   </a:solidFill>
@@ -3329,7 +3310,7 @@
             </a:ln>
             <a:extLst>
               <a:ext uri="{91240B29-F687-4f45-9708-019B960494DF}">
-                <a14:hiddenLine xmlns:a14="http://schemas.microsoft.com/office/drawing/2010/main" xmlns="" w="9525">
+                <a14:hiddenLine xmlns="" xmlns:a14="http://schemas.microsoft.com/office/drawing/2010/main" w="9525">
                   <a:solidFill>
                     <a:srgbClr val="000000"/>
                   </a:solidFill>
@@ -3391,7 +3372,7 @@
             </a:ln>
             <a:extLst>
               <a:ext uri="{91240B29-F687-4f45-9708-019B960494DF}">
-                <a14:hiddenLine xmlns:a14="http://schemas.microsoft.com/office/drawing/2010/main" xmlns="" w="9525">
+                <a14:hiddenLine xmlns="" xmlns:a14="http://schemas.microsoft.com/office/drawing/2010/main" w="9525">
                   <a:solidFill>
                     <a:srgbClr val="000000"/>
                   </a:solidFill>
@@ -3481,7 +3462,7 @@
             </a:ln>
             <a:extLst>
               <a:ext uri="{91240B29-F687-4f45-9708-019B960494DF}">
-                <a14:hiddenLine xmlns:a14="http://schemas.microsoft.com/office/drawing/2010/main" xmlns="" w="9525">
+                <a14:hiddenLine xmlns="" xmlns:a14="http://schemas.microsoft.com/office/drawing/2010/main" w="9525">
                   <a:solidFill>
                     <a:srgbClr val="000000"/>
                   </a:solidFill>
@@ -3543,7 +3524,7 @@
             </a:ln>
             <a:extLst>
               <a:ext uri="{91240B29-F687-4f45-9708-019B960494DF}">
-                <a14:hiddenLine xmlns:a14="http://schemas.microsoft.com/office/drawing/2010/main" xmlns="" w="9525">
+                <a14:hiddenLine xmlns="" xmlns:a14="http://schemas.microsoft.com/office/drawing/2010/main" w="9525">
                   <a:solidFill>
                     <a:srgbClr val="000000"/>
                   </a:solidFill>
@@ -3633,7 +3614,7 @@
             </a:ln>
             <a:extLst>
               <a:ext uri="{91240B29-F687-4f45-9708-019B960494DF}">
-                <a14:hiddenLine xmlns:a14="http://schemas.microsoft.com/office/drawing/2010/main" xmlns="" w="9525">
+                <a14:hiddenLine xmlns="" xmlns:a14="http://schemas.microsoft.com/office/drawing/2010/main" w="9525">
                   <a:solidFill>
                     <a:srgbClr val="000000"/>
                   </a:solidFill>
@@ -3667,7 +3648,7 @@
             </a:ln>
             <a:extLst>
               <a:ext uri="{91240B29-F687-4f45-9708-019B960494DF}">
-                <a14:hiddenLine xmlns:a14="http://schemas.microsoft.com/office/drawing/2010/main" xmlns="" w="9525">
+                <a14:hiddenLine xmlns="" xmlns:a14="http://schemas.microsoft.com/office/drawing/2010/main" w="9525">
                   <a:solidFill>
                     <a:srgbClr val="000000"/>
                   </a:solidFill>
@@ -3732,7 +3713,7 @@
             </a:ln>
             <a:extLst>
               <a:ext uri="{91240B29-F687-4f45-9708-019B960494DF}">
-                <a14:hiddenLine xmlns:a14="http://schemas.microsoft.com/office/drawing/2010/main" xmlns="" w="9525">
+                <a14:hiddenLine xmlns="" xmlns:a14="http://schemas.microsoft.com/office/drawing/2010/main" w="9525">
                   <a:solidFill>
                     <a:srgbClr val="000000"/>
                   </a:solidFill>
@@ -3822,7 +3803,7 @@
             </a:ln>
             <a:extLst>
               <a:ext uri="{91240B29-F687-4f45-9708-019B960494DF}">
-                <a14:hiddenLine xmlns:a14="http://schemas.microsoft.com/office/drawing/2010/main" xmlns="" w="9525">
+                <a14:hiddenLine xmlns="" xmlns:a14="http://schemas.microsoft.com/office/drawing/2010/main" w="9525">
                   <a:solidFill>
                     <a:srgbClr val="000000"/>
                   </a:solidFill>
@@ -3884,7 +3865,7 @@
             </a:ln>
             <a:extLst>
               <a:ext uri="{91240B29-F687-4f45-9708-019B960494DF}">
-                <a14:hiddenLine xmlns:a14="http://schemas.microsoft.com/office/drawing/2010/main" xmlns="" w="9525">
+                <a14:hiddenLine xmlns="" xmlns:a14="http://schemas.microsoft.com/office/drawing/2010/main" w="9525">
                   <a:solidFill>
                     <a:srgbClr val="000000"/>
                   </a:solidFill>
@@ -3974,7 +3955,7 @@
             </a:ln>
             <a:extLst>
               <a:ext uri="{91240B29-F687-4f45-9708-019B960494DF}">
-                <a14:hiddenLine xmlns:a14="http://schemas.microsoft.com/office/drawing/2010/main" xmlns="" w="9525">
+                <a14:hiddenLine xmlns="" xmlns:a14="http://schemas.microsoft.com/office/drawing/2010/main" w="9525">
                   <a:solidFill>
                     <a:srgbClr val="000000"/>
                   </a:solidFill>
@@ -4064,7 +4045,7 @@
             </a:ln>
             <a:extLst>
               <a:ext uri="{91240B29-F687-4f45-9708-019B960494DF}">
-                <a14:hiddenLine xmlns:a14="http://schemas.microsoft.com/office/drawing/2010/main" xmlns="" w="9525">
+                <a14:hiddenLine xmlns="" xmlns:a14="http://schemas.microsoft.com/office/drawing/2010/main" w="9525">
                   <a:solidFill>
                     <a:srgbClr val="000000"/>
                   </a:solidFill>
@@ -4129,7 +4110,7 @@
             </a:ln>
             <a:extLst>
               <a:ext uri="{91240B29-F687-4f45-9708-019B960494DF}">
-                <a14:hiddenLine xmlns:a14="http://schemas.microsoft.com/office/drawing/2010/main" xmlns="" w="9525">
+                <a14:hiddenLine xmlns="" xmlns:a14="http://schemas.microsoft.com/office/drawing/2010/main" w="9525">
                   <a:solidFill>
                     <a:srgbClr val="000000"/>
                   </a:solidFill>
@@ -4191,7 +4172,7 @@
             </a:ln>
             <a:extLst>
               <a:ext uri="{91240B29-F687-4f45-9708-019B960494DF}">
-                <a14:hiddenLine xmlns:a14="http://schemas.microsoft.com/office/drawing/2010/main" xmlns="" w="9525">
+                <a14:hiddenLine xmlns="" xmlns:a14="http://schemas.microsoft.com/office/drawing/2010/main" w="9525">
                   <a:solidFill>
                     <a:srgbClr val="000000"/>
                   </a:solidFill>
@@ -4281,7 +4262,7 @@
             </a:ln>
             <a:extLst>
               <a:ext uri="{91240B29-F687-4f45-9708-019B960494DF}">
-                <a14:hiddenLine xmlns:a14="http://schemas.microsoft.com/office/drawing/2010/main" xmlns="" w="9525">
+                <a14:hiddenLine xmlns="" xmlns:a14="http://schemas.microsoft.com/office/drawing/2010/main" w="9525">
                   <a:solidFill>
                     <a:srgbClr val="000000"/>
                   </a:solidFill>
@@ -4371,7 +4352,7 @@
             </a:ln>
             <a:extLst>
               <a:ext uri="{91240B29-F687-4f45-9708-019B960494DF}">
-                <a14:hiddenLine xmlns:a14="http://schemas.microsoft.com/office/drawing/2010/main" xmlns="" w="9525">
+                <a14:hiddenLine xmlns="" xmlns:a14="http://schemas.microsoft.com/office/drawing/2010/main" w="9525">
                   <a:solidFill>
                     <a:srgbClr val="000000"/>
                   </a:solidFill>
@@ -4433,7 +4414,7 @@
             </a:ln>
             <a:extLst>
               <a:ext uri="{91240B29-F687-4f45-9708-019B960494DF}">
-                <a14:hiddenLine xmlns:a14="http://schemas.microsoft.com/office/drawing/2010/main" xmlns="" w="9525">
+                <a14:hiddenLine xmlns="" xmlns:a14="http://schemas.microsoft.com/office/drawing/2010/main" w="9525">
                   <a:solidFill>
                     <a:srgbClr val="000000"/>
                   </a:solidFill>
@@ -4553,7 +4534,7 @@
             </a:ln>
             <a:extLst>
               <a:ext uri="{91240B29-F687-4f45-9708-019B960494DF}">
-                <a14:hiddenLine xmlns:a14="http://schemas.microsoft.com/office/drawing/2010/main" xmlns="" w="9525">
+                <a14:hiddenLine xmlns="" xmlns:a14="http://schemas.microsoft.com/office/drawing/2010/main" w="9525">
                   <a:solidFill>
                     <a:srgbClr val="000000"/>
                   </a:solidFill>
@@ -4621,7 +4602,7 @@
             </a:ln>
             <a:extLst>
               <a:ext uri="{91240B29-F687-4f45-9708-019B960494DF}">
-                <a14:hiddenLine xmlns:a14="http://schemas.microsoft.com/office/drawing/2010/main" xmlns="" w="9525">
+                <a14:hiddenLine xmlns="" xmlns:a14="http://schemas.microsoft.com/office/drawing/2010/main" w="9525">
                   <a:solidFill>
                     <a:srgbClr val="000000"/>
                   </a:solidFill>
@@ -4711,7 +4692,7 @@
             </a:ln>
             <a:extLst>
               <a:ext uri="{91240B29-F687-4f45-9708-019B960494DF}">
-                <a14:hiddenLine xmlns:a14="http://schemas.microsoft.com/office/drawing/2010/main" xmlns="" w="9525">
+                <a14:hiddenLine xmlns="" xmlns:a14="http://schemas.microsoft.com/office/drawing/2010/main" w="9525">
                   <a:solidFill>
                     <a:srgbClr val="000000"/>
                   </a:solidFill>
@@ -4851,7 +4832,7 @@
           <a:p>
             <a:fld id="{4313F670-7F9A-774D-B73D-573401E44297}" type="datetime1">
               <a:rPr lang="en-US" smtClean="0"/>
-              <a:t>12/4/25</a:t>
+              <a:t>7/14/26</a:t>
             </a:fld>
             <a:endParaRPr lang="en-US"/>
           </a:p>
@@ -5118,7 +5099,7 @@
           <a:p>
             <a:fld id="{446F9669-A8A7-2D40-9D01-B35FC337AA30}" type="datetime1">
               <a:rPr lang="en-US" smtClean="0"/>
-              <a:t>12/4/25</a:t>
+              <a:t>7/14/26</a:t>
             </a:fld>
             <a:endParaRPr lang="en-US"/>
           </a:p>
@@ -5314,7 +5295,7 @@
           <a:p>
             <a:fld id="{FA76CF18-F41B-6B48-B3E5-599E9795C2C3}" type="datetime1">
               <a:rPr lang="en-US" smtClean="0"/>
-              <a:t>12/4/25</a:t>
+              <a:t>7/14/26</a:t>
             </a:fld>
             <a:endParaRPr lang="en-US"/>
           </a:p>
@@ -5577,7 +5558,7 @@
           <a:p>
             <a:fld id="{B9654854-6457-164F-A077-6B3035079B82}" type="datetime1">
               <a:rPr lang="en-US" smtClean="0"/>
-              <a:t>12/4/25</a:t>
+              <a:t>7/14/26</a:t>
             </a:fld>
             <a:endParaRPr lang="en-US"/>
           </a:p>
@@ -6011,7 +5992,7 @@
           <a:p>
             <a:fld id="{CE3DBFD7-E611-8C40-AC73-0C29FF63F0CD}" type="datetime1">
               <a:rPr lang="en-US" smtClean="0"/>
-              <a:t>12/4/25</a:t>
+              <a:t>7/14/26</a:t>
             </a:fld>
             <a:endParaRPr lang="en-US"/>
           </a:p>
@@ -6557,7 +6538,7 @@
           <a:p>
             <a:fld id="{C8B63B06-0493-2840-9F37-30C9412BBF17}" type="datetime1">
               <a:rPr lang="en-US" smtClean="0"/>
-              <a:t>12/4/25</a:t>
+              <a:t>7/14/26</a:t>
             </a:fld>
             <a:endParaRPr lang="en-US"/>
           </a:p>
@@ -7277,7 +7258,7 @@
           <a:p>
             <a:fld id="{72B5C0FA-8C46-E84D-B6D7-B673F2CA0A0E}" type="datetime1">
               <a:rPr lang="en-US" smtClean="0"/>
-              <a:t>12/4/25</a:t>
+              <a:t>7/14/26</a:t>
             </a:fld>
             <a:endParaRPr lang="en-US"/>
           </a:p>
@@ -7447,7 +7428,7 @@
           <a:p>
             <a:fld id="{60B9CDE1-97B4-BF46-B69C-B86855B18820}" type="datetime1">
               <a:rPr lang="en-US" smtClean="0"/>
-              <a:t>12/4/25</a:t>
+              <a:t>7/14/26</a:t>
             </a:fld>
             <a:endParaRPr lang="en-US"/>
           </a:p>
@@ -7627,7 +7608,7 @@
           <a:p>
             <a:fld id="{BE51D3A4-F9E5-FD49-AA87-B395F50451DC}" type="datetime1">
               <a:rPr lang="en-US" smtClean="0"/>
-              <a:t>12/4/25</a:t>
+              <a:t>7/14/26</a:t>
             </a:fld>
             <a:endParaRPr lang="en-US"/>
           </a:p>
@@ -7797,7 +7778,7 @@
           <a:p>
             <a:fld id="{880DFB37-B0AE-9449-85EC-14F9C83B6084}" type="datetime1">
               <a:rPr lang="en-US" smtClean="0"/>
-              <a:t>12/4/25</a:t>
+              <a:t>7/14/26</a:t>
             </a:fld>
             <a:endParaRPr lang="en-US"/>
           </a:p>
@@ -8047,7 +8028,7 @@
           <a:p>
             <a:fld id="{C939124A-616E-6944-A21A-1839F5DBE7BB}" type="datetime1">
               <a:rPr lang="en-US" smtClean="0"/>
-              <a:t>12/4/25</a:t>
+              <a:t>7/14/26</a:t>
             </a:fld>
             <a:endParaRPr lang="en-US"/>
           </a:p>
@@ -8279,7 +8260,7 @@
           <a:p>
             <a:fld id="{C6E9A026-D48C-FD43-8676-CD625DD5D84B}" type="datetime1">
               <a:rPr lang="en-US" smtClean="0"/>
-              <a:t>12/4/25</a:t>
+              <a:t>7/14/26</a:t>
             </a:fld>
             <a:endParaRPr lang="en-US"/>
           </a:p>
@@ -8665,7 +8646,7 @@
           <a:p>
             <a:fld id="{EA35111E-23A3-1440-99A3-C4C665908E3D}" type="datetime1">
               <a:rPr lang="en-US" smtClean="0"/>
-              <a:t>12/4/25</a:t>
+              <a:t>7/14/26</a:t>
             </a:fld>
             <a:endParaRPr lang="en-US"/>
           </a:p>
@@ -8788,7 +8769,7 @@
           <a:p>
             <a:fld id="{249983B9-88EF-D74B-BA6D-6A3BF17C2B38}" type="datetime1">
               <a:rPr lang="en-US" smtClean="0"/>
-              <a:t>12/4/25</a:t>
+              <a:t>7/14/26</a:t>
             </a:fld>
             <a:endParaRPr lang="en-US"/>
           </a:p>
@@ -8883,7 +8864,7 @@
           <a:p>
             <a:fld id="{E2A00AEF-B4EC-084A-8DB8-A225C7981CBB}" type="datetime1">
               <a:rPr lang="en-US" smtClean="0"/>
-              <a:t>12/4/25</a:t>
+              <a:t>7/14/26</a:t>
             </a:fld>
             <a:endParaRPr lang="en-US"/>
           </a:p>
@@ -9132,7 +9113,7 @@
           <a:p>
             <a:fld id="{97860299-21CD-A94A-A7B0-44E787F8D42C}" type="datetime1">
               <a:rPr lang="en-US" smtClean="0"/>
-              <a:t>12/4/25</a:t>
+              <a:t>7/14/26</a:t>
             </a:fld>
             <a:endParaRPr lang="en-US"/>
           </a:p>
@@ -9417,7 +9398,7 @@
           <a:p>
             <a:fld id="{3DFD19CF-4E62-D246-BA61-7B528271315F}" type="datetime1">
               <a:rPr lang="en-US" smtClean="0"/>
-              <a:t>12/4/25</a:t>
+              <a:t>7/14/26</a:t>
             </a:fld>
             <a:endParaRPr lang="en-US"/>
           </a:p>
@@ -9540,7 +9521,7 @@
           <a:noFill/>
           <a:extLst>
             <a:ext uri="{909E8E84-426E-40dd-AFC4-6F175D3DCCD1}">
-              <a14:hiddenFill xmlns:a14="http://schemas.microsoft.com/office/drawing/2010/main" xmlns="">
+              <a14:hiddenFill xmlns="" xmlns:a14="http://schemas.microsoft.com/office/drawing/2010/main">
                 <a:solidFill>
                   <a:srgbClr val="FFFFFF"/>
                 </a:solidFill>
@@ -9614,7 +9595,7 @@
               </a:ln>
               <a:extLst>
                 <a:ext uri="{91240B29-F687-4f45-9708-019B960494DF}">
-                  <a14:hiddenLine xmlns:a14="http://schemas.microsoft.com/office/drawing/2010/main" xmlns="" w="9525">
+                  <a14:hiddenLine xmlns="" xmlns:a14="http://schemas.microsoft.com/office/drawing/2010/main" w="9525">
                     <a:solidFill>
                       <a:srgbClr val="000000"/>
                     </a:solidFill>
@@ -9704,7 +9685,7 @@
               </a:ln>
               <a:extLst>
                 <a:ext uri="{91240B29-F687-4f45-9708-019B960494DF}">
-                  <a14:hiddenLine xmlns:a14="http://schemas.microsoft.com/office/drawing/2010/main" xmlns="" w="9525">
+                  <a14:hiddenLine xmlns="" xmlns:a14="http://schemas.microsoft.com/office/drawing/2010/main" w="9525">
                     <a:solidFill>
                       <a:srgbClr val="000000"/>
                     </a:solidFill>
@@ -9794,7 +9775,7 @@
               </a:ln>
               <a:extLst>
                 <a:ext uri="{91240B29-F687-4f45-9708-019B960494DF}">
-                  <a14:hiddenLine xmlns:a14="http://schemas.microsoft.com/office/drawing/2010/main" xmlns="" w="9525">
+                  <a14:hiddenLine xmlns="" xmlns:a14="http://schemas.microsoft.com/office/drawing/2010/main" w="9525">
                     <a:solidFill>
                       <a:srgbClr val="000000"/>
                     </a:solidFill>
@@ -9856,7 +9837,7 @@
               </a:ln>
               <a:extLst>
                 <a:ext uri="{91240B29-F687-4f45-9708-019B960494DF}">
-                  <a14:hiddenLine xmlns:a14="http://schemas.microsoft.com/office/drawing/2010/main" xmlns="" w="9525">
+                  <a14:hiddenLine xmlns="" xmlns:a14="http://schemas.microsoft.com/office/drawing/2010/main" w="9525">
                     <a:solidFill>
                       <a:srgbClr val="000000"/>
                     </a:solidFill>
@@ -9946,7 +9927,7 @@
               </a:ln>
               <a:extLst>
                 <a:ext uri="{91240B29-F687-4f45-9708-019B960494DF}">
-                  <a14:hiddenLine xmlns:a14="http://schemas.microsoft.com/office/drawing/2010/main" xmlns="" w="9525">
+                  <a14:hiddenLine xmlns="" xmlns:a14="http://schemas.microsoft.com/office/drawing/2010/main" w="9525">
                     <a:solidFill>
                       <a:srgbClr val="000000"/>
                     </a:solidFill>
@@ -10008,7 +9989,7 @@
               </a:ln>
               <a:extLst>
                 <a:ext uri="{91240B29-F687-4f45-9708-019B960494DF}">
-                  <a14:hiddenLine xmlns:a14="http://schemas.microsoft.com/office/drawing/2010/main" xmlns="" w="9525">
+                  <a14:hiddenLine xmlns="" xmlns:a14="http://schemas.microsoft.com/office/drawing/2010/main" w="9525">
                     <a:solidFill>
                       <a:srgbClr val="000000"/>
                     </a:solidFill>
@@ -10070,7 +10051,7 @@
               </a:ln>
               <a:extLst>
                 <a:ext uri="{91240B29-F687-4f45-9708-019B960494DF}">
-                  <a14:hiddenLine xmlns:a14="http://schemas.microsoft.com/office/drawing/2010/main" xmlns="" w="9525">
+                  <a14:hiddenLine xmlns="" xmlns:a14="http://schemas.microsoft.com/office/drawing/2010/main" w="9525">
                     <a:solidFill>
                       <a:srgbClr val="000000"/>
                     </a:solidFill>
@@ -10160,7 +10141,7 @@
               </a:ln>
               <a:extLst>
                 <a:ext uri="{91240B29-F687-4f45-9708-019B960494DF}">
-                  <a14:hiddenLine xmlns:a14="http://schemas.microsoft.com/office/drawing/2010/main" xmlns="" w="9525">
+                  <a14:hiddenLine xmlns="" xmlns:a14="http://schemas.microsoft.com/office/drawing/2010/main" w="9525">
                     <a:solidFill>
                       <a:srgbClr val="000000"/>
                     </a:solidFill>
@@ -10250,7 +10231,7 @@
               </a:ln>
               <a:extLst>
                 <a:ext uri="{91240B29-F687-4f45-9708-019B960494DF}">
-                  <a14:hiddenLine xmlns:a14="http://schemas.microsoft.com/office/drawing/2010/main" xmlns="" w="9525">
+                  <a14:hiddenLine xmlns="" xmlns:a14="http://schemas.microsoft.com/office/drawing/2010/main" w="9525">
                     <a:solidFill>
                       <a:srgbClr val="000000"/>
                     </a:solidFill>
@@ -10312,7 +10293,7 @@
               </a:ln>
               <a:extLst>
                 <a:ext uri="{91240B29-F687-4f45-9708-019B960494DF}">
-                  <a14:hiddenLine xmlns:a14="http://schemas.microsoft.com/office/drawing/2010/main" xmlns="" w="9525">
+                  <a14:hiddenLine xmlns="" xmlns:a14="http://schemas.microsoft.com/office/drawing/2010/main" w="9525">
                     <a:solidFill>
                       <a:srgbClr val="000000"/>
                     </a:solidFill>
@@ -10422,7 +10403,7 @@
               </a:ln>
               <a:extLst>
                 <a:ext uri="{91240B29-F687-4f45-9708-019B960494DF}">
-                  <a14:hiddenLine xmlns:a14="http://schemas.microsoft.com/office/drawing/2010/main" xmlns="" w="9525">
+                  <a14:hiddenLine xmlns="" xmlns:a14="http://schemas.microsoft.com/office/drawing/2010/main" w="9525">
                     <a:solidFill>
                       <a:srgbClr val="000000"/>
                     </a:solidFill>
@@ -10506,7 +10487,7 @@
               </a:ln>
               <a:extLst>
                 <a:ext uri="{91240B29-F687-4f45-9708-019B960494DF}">
-                  <a14:hiddenLine xmlns:a14="http://schemas.microsoft.com/office/drawing/2010/main" xmlns="" w="9525">
+                  <a14:hiddenLine xmlns="" xmlns:a14="http://schemas.microsoft.com/office/drawing/2010/main" w="9525">
                     <a:solidFill>
                       <a:srgbClr val="000000"/>
                     </a:solidFill>
@@ -10568,7 +10549,7 @@
               </a:ln>
               <a:extLst>
                 <a:ext uri="{91240B29-F687-4f45-9708-019B960494DF}">
-                  <a14:hiddenLine xmlns:a14="http://schemas.microsoft.com/office/drawing/2010/main" xmlns="" w="9525">
+                  <a14:hiddenLine xmlns="" xmlns:a14="http://schemas.microsoft.com/office/drawing/2010/main" w="9525">
                     <a:solidFill>
                       <a:srgbClr val="000000"/>
                     </a:solidFill>
@@ -10630,7 +10611,7 @@
               </a:ln>
               <a:extLst>
                 <a:ext uri="{91240B29-F687-4f45-9708-019B960494DF}">
-                  <a14:hiddenLine xmlns:a14="http://schemas.microsoft.com/office/drawing/2010/main" xmlns="" w="9525">
+                  <a14:hiddenLine xmlns="" xmlns:a14="http://schemas.microsoft.com/office/drawing/2010/main" w="9525">
                     <a:solidFill>
                       <a:srgbClr val="000000"/>
                     </a:solidFill>
@@ -10720,7 +10701,7 @@
               </a:ln>
               <a:extLst>
                 <a:ext uri="{91240B29-F687-4f45-9708-019B960494DF}">
-                  <a14:hiddenLine xmlns:a14="http://schemas.microsoft.com/office/drawing/2010/main" xmlns="" w="9525">
+                  <a14:hiddenLine xmlns="" xmlns:a14="http://schemas.microsoft.com/office/drawing/2010/main" w="9525">
                     <a:solidFill>
                       <a:srgbClr val="000000"/>
                     </a:solidFill>
@@ -10754,7 +10735,7 @@
               </a:ln>
               <a:extLst>
                 <a:ext uri="{91240B29-F687-4f45-9708-019B960494DF}">
-                  <a14:hiddenLine xmlns:a14="http://schemas.microsoft.com/office/drawing/2010/main" xmlns="" w="9525">
+                  <a14:hiddenLine xmlns="" xmlns:a14="http://schemas.microsoft.com/office/drawing/2010/main" w="9525">
                     <a:solidFill>
                       <a:srgbClr val="000000"/>
                     </a:solidFill>
@@ -10819,7 +10800,7 @@
               </a:ln>
               <a:extLst>
                 <a:ext uri="{91240B29-F687-4f45-9708-019B960494DF}">
-                  <a14:hiddenLine xmlns:a14="http://schemas.microsoft.com/office/drawing/2010/main" xmlns="" w="9525">
+                  <a14:hiddenLine xmlns="" xmlns:a14="http://schemas.microsoft.com/office/drawing/2010/main" w="9525">
                     <a:solidFill>
                       <a:srgbClr val="000000"/>
                     </a:solidFill>
@@ -10909,7 +10890,7 @@
               </a:ln>
               <a:extLst>
                 <a:ext uri="{91240B29-F687-4f45-9708-019B960494DF}">
-                  <a14:hiddenLine xmlns:a14="http://schemas.microsoft.com/office/drawing/2010/main" xmlns="" w="9525">
+                  <a14:hiddenLine xmlns="" xmlns:a14="http://schemas.microsoft.com/office/drawing/2010/main" w="9525">
                     <a:solidFill>
                       <a:srgbClr val="000000"/>
                     </a:solidFill>
@@ -10971,7 +10952,7 @@
               </a:ln>
               <a:extLst>
                 <a:ext uri="{91240B29-F687-4f45-9708-019B960494DF}">
-                  <a14:hiddenLine xmlns:a14="http://schemas.microsoft.com/office/drawing/2010/main" xmlns="" w="9525">
+                  <a14:hiddenLine xmlns="" xmlns:a14="http://schemas.microsoft.com/office/drawing/2010/main" w="9525">
                     <a:solidFill>
                       <a:srgbClr val="000000"/>
                     </a:solidFill>
@@ -11061,7 +11042,7 @@
               </a:ln>
               <a:extLst>
                 <a:ext uri="{91240B29-F687-4f45-9708-019B960494DF}">
-                  <a14:hiddenLine xmlns:a14="http://schemas.microsoft.com/office/drawing/2010/main" xmlns="" w="9525">
+                  <a14:hiddenLine xmlns="" xmlns:a14="http://schemas.microsoft.com/office/drawing/2010/main" w="9525">
                     <a:solidFill>
                       <a:srgbClr val="000000"/>
                     </a:solidFill>
@@ -11126,7 +11107,7 @@
               </a:ln>
               <a:extLst>
                 <a:ext uri="{91240B29-F687-4f45-9708-019B960494DF}">
-                  <a14:hiddenLine xmlns:a14="http://schemas.microsoft.com/office/drawing/2010/main" xmlns="" w="9525">
+                  <a14:hiddenLine xmlns="" xmlns:a14="http://schemas.microsoft.com/office/drawing/2010/main" w="9525">
                     <a:solidFill>
                       <a:srgbClr val="000000"/>
                     </a:solidFill>
@@ -11188,7 +11169,7 @@
               </a:ln>
               <a:extLst>
                 <a:ext uri="{91240B29-F687-4f45-9708-019B960494DF}">
-                  <a14:hiddenLine xmlns:a14="http://schemas.microsoft.com/office/drawing/2010/main" xmlns="" w="9525">
+                  <a14:hiddenLine xmlns="" xmlns:a14="http://schemas.microsoft.com/office/drawing/2010/main" w="9525">
                     <a:solidFill>
                       <a:srgbClr val="000000"/>
                     </a:solidFill>
@@ -11278,7 +11259,7 @@
               </a:ln>
               <a:extLst>
                 <a:ext uri="{91240B29-F687-4f45-9708-019B960494DF}">
-                  <a14:hiddenLine xmlns:a14="http://schemas.microsoft.com/office/drawing/2010/main" xmlns="" w="9525">
+                  <a14:hiddenLine xmlns="" xmlns:a14="http://schemas.microsoft.com/office/drawing/2010/main" w="9525">
                     <a:solidFill>
                       <a:srgbClr val="000000"/>
                     </a:solidFill>
@@ -11368,7 +11349,7 @@
               </a:ln>
               <a:extLst>
                 <a:ext uri="{91240B29-F687-4f45-9708-019B960494DF}">
-                  <a14:hiddenLine xmlns:a14="http://schemas.microsoft.com/office/drawing/2010/main" xmlns="" w="9525">
+                  <a14:hiddenLine xmlns="" xmlns:a14="http://schemas.microsoft.com/office/drawing/2010/main" w="9525">
                     <a:solidFill>
                       <a:srgbClr val="000000"/>
                     </a:solidFill>
@@ -11433,7 +11414,7 @@
               </a:ln>
               <a:extLst>
                 <a:ext uri="{91240B29-F687-4f45-9708-019B960494DF}">
-                  <a14:hiddenLine xmlns:a14="http://schemas.microsoft.com/office/drawing/2010/main" xmlns="" w="9525">
+                  <a14:hiddenLine xmlns="" xmlns:a14="http://schemas.microsoft.com/office/drawing/2010/main" w="9525">
                     <a:solidFill>
                       <a:srgbClr val="000000"/>
                     </a:solidFill>
@@ -11553,7 +11534,7 @@
               </a:ln>
               <a:extLst>
                 <a:ext uri="{91240B29-F687-4f45-9708-019B960494DF}">
-                  <a14:hiddenLine xmlns:a14="http://schemas.microsoft.com/office/drawing/2010/main" xmlns="" w="9525">
+                  <a14:hiddenLine xmlns="" xmlns:a14="http://schemas.microsoft.com/office/drawing/2010/main" w="9525">
                     <a:solidFill>
                       <a:srgbClr val="000000"/>
                     </a:solidFill>
@@ -11634,7 +11615,7 @@
               </a:ln>
               <a:extLst>
                 <a:ext uri="{91240B29-F687-4f45-9708-019B960494DF}">
-                  <a14:hiddenLine xmlns:a14="http://schemas.microsoft.com/office/drawing/2010/main" xmlns="" w="9525">
+                  <a14:hiddenLine xmlns="" xmlns:a14="http://schemas.microsoft.com/office/drawing/2010/main" w="9525">
                     <a:solidFill>
                       <a:srgbClr val="000000"/>
                     </a:solidFill>
@@ -11749,7 +11730,7 @@
               </a:ln>
               <a:extLst>
                 <a:ext uri="{91240B29-F687-4f45-9708-019B960494DF}">
-                  <a14:hiddenLine xmlns:a14="http://schemas.microsoft.com/office/drawing/2010/main" xmlns="" w="9525">
+                  <a14:hiddenLine xmlns="" xmlns:a14="http://schemas.microsoft.com/office/drawing/2010/main" w="9525">
                     <a:solidFill>
                       <a:srgbClr val="000000"/>
                     </a:solidFill>
@@ -11839,7 +11820,7 @@
               </a:ln>
               <a:extLst>
                 <a:ext uri="{91240B29-F687-4f45-9708-019B960494DF}">
-                  <a14:hiddenLine xmlns:a14="http://schemas.microsoft.com/office/drawing/2010/main" xmlns="" w="9525">
+                  <a14:hiddenLine xmlns="" xmlns:a14="http://schemas.microsoft.com/office/drawing/2010/main" w="9525">
                     <a:solidFill>
                       <a:srgbClr val="000000"/>
                     </a:solidFill>
@@ -11904,7 +11885,7 @@
               </a:ln>
               <a:extLst>
                 <a:ext uri="{91240B29-F687-4f45-9708-019B960494DF}">
-                  <a14:hiddenLine xmlns:a14="http://schemas.microsoft.com/office/drawing/2010/main" xmlns="" w="9525">
+                  <a14:hiddenLine xmlns="" xmlns:a14="http://schemas.microsoft.com/office/drawing/2010/main" w="9525">
                     <a:solidFill>
                       <a:srgbClr val="000000"/>
                     </a:solidFill>
@@ -11994,7 +11975,7 @@
               </a:ln>
               <a:extLst>
                 <a:ext uri="{91240B29-F687-4f45-9708-019B960494DF}">
-                  <a14:hiddenLine xmlns:a14="http://schemas.microsoft.com/office/drawing/2010/main" xmlns="" w="9525">
+                  <a14:hiddenLine xmlns="" xmlns:a14="http://schemas.microsoft.com/office/drawing/2010/main" w="9525">
                     <a:solidFill>
                       <a:srgbClr val="000000"/>
                     </a:solidFill>
@@ -12062,7 +12043,7 @@
               </a:ln>
               <a:extLst>
                 <a:ext uri="{91240B29-F687-4f45-9708-019B960494DF}">
-                  <a14:hiddenLine xmlns:a14="http://schemas.microsoft.com/office/drawing/2010/main" xmlns="" w="9525">
+                  <a14:hiddenLine xmlns="" xmlns:a14="http://schemas.microsoft.com/office/drawing/2010/main" w="9525">
                     <a:solidFill>
                       <a:srgbClr val="000000"/>
                     </a:solidFill>
@@ -12152,7 +12133,7 @@
               </a:ln>
               <a:extLst>
                 <a:ext uri="{91240B29-F687-4f45-9708-019B960494DF}">
-                  <a14:hiddenLine xmlns:a14="http://schemas.microsoft.com/office/drawing/2010/main" xmlns="" w="9525">
+                  <a14:hiddenLine xmlns="" xmlns:a14="http://schemas.microsoft.com/office/drawing/2010/main" w="9525">
                     <a:solidFill>
                       <a:srgbClr val="000000"/>
                     </a:solidFill>
@@ -12220,7 +12201,7 @@
               </a:ln>
               <a:extLst>
                 <a:ext uri="{91240B29-F687-4f45-9708-019B960494DF}">
-                  <a14:hiddenLine xmlns:a14="http://schemas.microsoft.com/office/drawing/2010/main" xmlns="" w="9525">
+                  <a14:hiddenLine xmlns="" xmlns:a14="http://schemas.microsoft.com/office/drawing/2010/main" w="9525">
                     <a:solidFill>
                       <a:srgbClr val="000000"/>
                     </a:solidFill>
@@ -12310,7 +12291,7 @@
               </a:ln>
               <a:extLst>
                 <a:ext uri="{91240B29-F687-4f45-9708-019B960494DF}">
-                  <a14:hiddenLine xmlns:a14="http://schemas.microsoft.com/office/drawing/2010/main" xmlns="" w="9525">
+                  <a14:hiddenLine xmlns="" xmlns:a14="http://schemas.microsoft.com/office/drawing/2010/main" w="9525">
                     <a:solidFill>
                       <a:srgbClr val="000000"/>
                     </a:solidFill>
@@ -12344,7 +12325,7 @@
               </a:ln>
               <a:extLst>
                 <a:ext uri="{91240B29-F687-4f45-9708-019B960494DF}">
-                  <a14:hiddenLine xmlns:a14="http://schemas.microsoft.com/office/drawing/2010/main" xmlns="" w="9525">
+                  <a14:hiddenLine xmlns="" xmlns:a14="http://schemas.microsoft.com/office/drawing/2010/main" w="9525">
                     <a:solidFill>
                       <a:srgbClr val="000000"/>
                     </a:solidFill>
@@ -12484,7 +12465,7 @@
           <a:p>
             <a:fld id="{92FF8978-FE14-CC4A-93A6-934EB06543C0}" type="datetime1">
               <a:rPr lang="en-US" smtClean="0"/>
-              <a:t>12/4/25</a:t>
+              <a:t>7/14/26</a:t>
             </a:fld>
             <a:endParaRPr lang="en-US"/>
           </a:p>
@@ -13002,2447 +12983,6 @@
 </p:sld>
 </file>
 
-<file path=ppt/slides/slide10.xml><?xml version="1.0" encoding="utf-8"?>
-<p:sld xmlns:a="http://schemas.openxmlformats.org/drawingml/2006/main" xmlns:r="http://schemas.openxmlformats.org/officeDocument/2006/relationships" xmlns:p="http://schemas.openxmlformats.org/presentationml/2006/main">
-  <p:cSld>
-    <p:spTree>
-      <p:nvGrpSpPr>
-        <p:cNvPr id="1" name="">
-          <a:extLst>
-            <a:ext uri="{FF2B5EF4-FFF2-40B4-BE49-F238E27FC236}">
-              <a16:creationId xmlns:a16="http://schemas.microsoft.com/office/drawing/2014/main" id="{D7288F31-4C84-AC80-5B71-5C80270DAE8D}"/>
-            </a:ext>
-          </a:extLst>
-        </p:cNvPr>
-        <p:cNvGrpSpPr/>
-        <p:nvPr/>
-      </p:nvGrpSpPr>
-      <p:grpSpPr>
-        <a:xfrm>
-          <a:off x="0" y="0"/>
-          <a:ext cx="0" cy="0"/>
-          <a:chOff x="0" y="0"/>
-          <a:chExt cx="0" cy="0"/>
-        </a:xfrm>
-      </p:grpSpPr>
-      <p:sp>
-        <p:nvSpPr>
-          <p:cNvPr id="6146" name="Rectangle 2">
-            <a:extLst>
-              <a:ext uri="{FF2B5EF4-FFF2-40B4-BE49-F238E27FC236}">
-                <a16:creationId xmlns:a16="http://schemas.microsoft.com/office/drawing/2014/main" id="{97B890CE-291F-CF87-AB00-564F45A1A857}"/>
-              </a:ext>
-            </a:extLst>
-          </p:cNvPr>
-          <p:cNvSpPr>
-            <a:spLocks noGrp="1" noChangeArrowheads="1"/>
-          </p:cNvSpPr>
-          <p:nvPr>
-            <p:ph type="title"/>
-            <p:custDataLst>
-              <p:tags r:id="rId1"/>
-            </p:custDataLst>
-          </p:nvPr>
-        </p:nvSpPr>
-        <p:spPr>
-          <a:xfrm>
-            <a:off x="1141413" y="284084"/>
-            <a:ext cx="9905998" cy="620791"/>
-          </a:xfrm>
-        </p:spPr>
-        <p:txBody>
-          <a:bodyPr/>
-          <a:lstStyle/>
-          <a:p>
-            <a:pPr algn="ctr"/>
-            <a:r>
-              <a:rPr lang="en-US" dirty="0"/>
-              <a:t>Lecture 11: Thursday, Oct 2</a:t>
-            </a:r>
-          </a:p>
-        </p:txBody>
-      </p:sp>
-      <p:sp>
-        <p:nvSpPr>
-          <p:cNvPr id="6147" name="Rectangle 3">
-            <a:extLst>
-              <a:ext uri="{FF2B5EF4-FFF2-40B4-BE49-F238E27FC236}">
-                <a16:creationId xmlns:a16="http://schemas.microsoft.com/office/drawing/2014/main" id="{7A78CEC4-04CE-3F71-9681-B9D020ED19B1}"/>
-              </a:ext>
-            </a:extLst>
-          </p:cNvPr>
-          <p:cNvSpPr>
-            <a:spLocks noGrp="1" noChangeArrowheads="1"/>
-          </p:cNvSpPr>
-          <p:nvPr>
-            <p:ph idx="1"/>
-            <p:custDataLst>
-              <p:tags r:id="rId2"/>
-            </p:custDataLst>
-          </p:nvPr>
-        </p:nvSpPr>
-        <p:spPr>
-          <a:xfrm>
-            <a:off x="1294151" y="1098548"/>
-            <a:ext cx="9905998" cy="5387311"/>
-          </a:xfrm>
-        </p:spPr>
-        <p:txBody>
-          <a:bodyPr>
-            <a:normAutofit fontScale="77500" lnSpcReduction="20000"/>
-          </a:bodyPr>
-          <a:lstStyle/>
-          <a:p>
-            <a:r>
-              <a:rPr lang="en-US" dirty="0">
-                <a:latin typeface="Arial" panose="020B0604020202020204" pitchFamily="34" charset="0"/>
-                <a:cs typeface="Arial" panose="020B0604020202020204" pitchFamily="34" charset="0"/>
-              </a:rPr>
-              <a:t>Welcome to October, the objectively best month of the year </a:t>
-            </a:r>
-            <a:r>
-              <a:rPr lang="en-US" dirty="0">
-                <a:latin typeface="Arial" panose="020B0604020202020204" pitchFamily="34" charset="0"/>
-                <a:cs typeface="Arial" panose="020B0604020202020204" pitchFamily="34" charset="0"/>
-                <a:sym typeface="Wingdings" pitchFamily="2" charset="2"/>
-              </a:rPr>
-              <a:t></a:t>
-            </a:r>
-            <a:endParaRPr lang="en-US" dirty="0">
-              <a:latin typeface="Arial" panose="020B0604020202020204" pitchFamily="34" charset="0"/>
-              <a:cs typeface="Arial" panose="020B0604020202020204" pitchFamily="34" charset="0"/>
-            </a:endParaRPr>
-          </a:p>
-          <a:p>
-            <a:r>
-              <a:rPr lang="en-US" dirty="0">
-                <a:latin typeface="Arial" panose="020B0604020202020204" pitchFamily="34" charset="0"/>
-                <a:cs typeface="Arial" panose="020B0604020202020204" pitchFamily="34" charset="0"/>
-              </a:rPr>
-              <a:t>First homework has been returned (for everybody)</a:t>
-            </a:r>
-          </a:p>
-          <a:p>
-            <a:r>
-              <a:rPr lang="en-US" dirty="0">
-                <a:latin typeface="Arial" panose="020B0604020202020204" pitchFamily="34" charset="0"/>
-                <a:cs typeface="Arial" panose="020B0604020202020204" pitchFamily="34" charset="0"/>
-              </a:rPr>
-              <a:t>Module 2 homework is due tonight. How is it going so far?</a:t>
-            </a:r>
-          </a:p>
-          <a:p>
-            <a:r>
-              <a:rPr lang="en-US" dirty="0">
-                <a:latin typeface="Arial" panose="020B0604020202020204" pitchFamily="34" charset="0"/>
-                <a:cs typeface="Arial" panose="020B0604020202020204" pitchFamily="34" charset="0"/>
-              </a:rPr>
-              <a:t>Quiz 1 regrades are still open for a bit</a:t>
-            </a:r>
-          </a:p>
-          <a:p>
-            <a:r>
-              <a:rPr lang="en-US" dirty="0">
-                <a:latin typeface="Arial" panose="020B0604020202020204" pitchFamily="34" charset="0"/>
-                <a:cs typeface="Arial" panose="020B0604020202020204" pitchFamily="34" charset="0"/>
-              </a:rPr>
-              <a:t>Quiz 2 is NEXT Thursday.</a:t>
-            </a:r>
-          </a:p>
-          <a:p>
-            <a:pPr lvl="1"/>
-            <a:r>
-              <a:rPr lang="en-US" dirty="0">
-                <a:latin typeface="Arial" panose="020B0604020202020204" pitchFamily="34" charset="0"/>
-                <a:cs typeface="Arial" panose="020B0604020202020204" pitchFamily="34" charset="0"/>
-              </a:rPr>
-              <a:t>Same format, etc. Usually students consider quiz 2 to be much harder so be prepared</a:t>
-            </a:r>
-          </a:p>
-          <a:p>
-            <a:r>
-              <a:rPr lang="en-US" dirty="0">
-                <a:latin typeface="Arial" panose="020B0604020202020204" pitchFamily="34" charset="0"/>
-                <a:cs typeface="Arial" panose="020B0604020202020204" pitchFamily="34" charset="0"/>
-              </a:rPr>
-              <a:t>Please remember that I am asking for NO laptop / phones!</a:t>
-            </a:r>
-          </a:p>
-          <a:p>
-            <a:pPr lvl="1"/>
-            <a:r>
-              <a:rPr lang="en-US" dirty="0">
-                <a:latin typeface="Arial" panose="020B0604020202020204" pitchFamily="34" charset="0"/>
-                <a:cs typeface="Arial" panose="020B0604020202020204" pitchFamily="34" charset="0"/>
-              </a:rPr>
-              <a:t>This makes the learning environment better for everybody. I appreciate it!</a:t>
-            </a:r>
-          </a:p>
-          <a:p>
-            <a:r>
-              <a:rPr lang="en-US" dirty="0">
-                <a:latin typeface="Arial" panose="020B0604020202020204" pitchFamily="34" charset="0"/>
-                <a:cs typeface="Arial" panose="020B0604020202020204" pitchFamily="34" charset="0"/>
-              </a:rPr>
-              <a:t>Discussion Section: Chase will be holding every week</a:t>
-            </a:r>
-          </a:p>
-          <a:p>
-            <a:pPr lvl="1"/>
-            <a:r>
-              <a:rPr lang="en-US" dirty="0">
-                <a:latin typeface="Arial" panose="020B0604020202020204" pitchFamily="34" charset="0"/>
-                <a:cs typeface="Arial" panose="020B0604020202020204" pitchFamily="34" charset="0"/>
-              </a:rPr>
-              <a:t>Wednesday 4-5pm in Rice 110</a:t>
-            </a:r>
-          </a:p>
-          <a:p>
-            <a:pPr lvl="1"/>
-            <a:r>
-              <a:rPr lang="en-US" dirty="0">
-                <a:latin typeface="Arial" panose="020B0604020202020204" pitchFamily="34" charset="0"/>
-                <a:cs typeface="Arial" panose="020B0604020202020204" pitchFamily="34" charset="0"/>
-              </a:rPr>
-              <a:t>Will be in THN E316 on quiz weeks since attendance is higher</a:t>
-            </a:r>
-          </a:p>
-          <a:p>
-            <a:r>
-              <a:rPr lang="en-US" dirty="0">
-                <a:latin typeface="Arial" panose="020B0604020202020204" pitchFamily="34" charset="0"/>
-                <a:cs typeface="Arial" panose="020B0604020202020204" pitchFamily="34" charset="0"/>
-              </a:rPr>
-              <a:t>Lecture recordings are on Panopto</a:t>
-            </a:r>
-          </a:p>
-          <a:p>
-            <a:pPr lvl="1"/>
-            <a:r>
-              <a:rPr lang="en-US" dirty="0">
-                <a:latin typeface="Arial" panose="020B0604020202020204" pitchFamily="34" charset="0"/>
-                <a:cs typeface="Arial" panose="020B0604020202020204" pitchFamily="34" charset="0"/>
-              </a:rPr>
-              <a:t>There are folders for Floryan and Pettit (little hard to find but they are there)</a:t>
-            </a:r>
-          </a:p>
-          <a:p>
-            <a:r>
-              <a:rPr lang="en-US" dirty="0">
-                <a:latin typeface="Arial" panose="020B0604020202020204" pitchFamily="34" charset="0"/>
-                <a:cs typeface="Arial" panose="020B0604020202020204" pitchFamily="34" charset="0"/>
-              </a:rPr>
-              <a:t>Today we continue with module 3 (which is NOT on next week’s quiz remember)</a:t>
-            </a:r>
-          </a:p>
-        </p:txBody>
-      </p:sp>
-    </p:spTree>
-    <p:extLst>
-      <p:ext uri="{BB962C8B-B14F-4D97-AF65-F5344CB8AC3E}">
-        <p14:creationId xmlns:p14="http://schemas.microsoft.com/office/powerpoint/2010/main" val="1136558929"/>
-      </p:ext>
-    </p:extLst>
-  </p:cSld>
-  <p:clrMapOvr>
-    <a:masterClrMapping/>
-  </p:clrMapOvr>
-</p:sld>
-</file>
-
-<file path=ppt/slides/slide11.xml><?xml version="1.0" encoding="utf-8"?>
-<p:sld xmlns:a="http://schemas.openxmlformats.org/drawingml/2006/main" xmlns:r="http://schemas.openxmlformats.org/officeDocument/2006/relationships" xmlns:p="http://schemas.openxmlformats.org/presentationml/2006/main">
-  <p:cSld>
-    <p:spTree>
-      <p:nvGrpSpPr>
-        <p:cNvPr id="1" name="">
-          <a:extLst>
-            <a:ext uri="{FF2B5EF4-FFF2-40B4-BE49-F238E27FC236}">
-              <a16:creationId xmlns:a16="http://schemas.microsoft.com/office/drawing/2014/main" id="{DD8D8675-F727-23EA-93E3-E5ABFA0DFE1D}"/>
-            </a:ext>
-          </a:extLst>
-        </p:cNvPr>
-        <p:cNvGrpSpPr/>
-        <p:nvPr/>
-      </p:nvGrpSpPr>
-      <p:grpSpPr>
-        <a:xfrm>
-          <a:off x="0" y="0"/>
-          <a:ext cx="0" cy="0"/>
-          <a:chOff x="0" y="0"/>
-          <a:chExt cx="0" cy="0"/>
-        </a:xfrm>
-      </p:grpSpPr>
-      <p:sp>
-        <p:nvSpPr>
-          <p:cNvPr id="6146" name="Rectangle 2">
-            <a:extLst>
-              <a:ext uri="{FF2B5EF4-FFF2-40B4-BE49-F238E27FC236}">
-                <a16:creationId xmlns:a16="http://schemas.microsoft.com/office/drawing/2014/main" id="{CA0FDF9E-8DE2-D56B-DC31-8C4DAF349B29}"/>
-              </a:ext>
-            </a:extLst>
-          </p:cNvPr>
-          <p:cNvSpPr>
-            <a:spLocks noGrp="1" noChangeArrowheads="1"/>
-          </p:cNvSpPr>
-          <p:nvPr>
-            <p:ph type="title"/>
-            <p:custDataLst>
-              <p:tags r:id="rId1"/>
-            </p:custDataLst>
-          </p:nvPr>
-        </p:nvSpPr>
-        <p:spPr>
-          <a:xfrm>
-            <a:off x="1141413" y="284084"/>
-            <a:ext cx="9905998" cy="620791"/>
-          </a:xfrm>
-        </p:spPr>
-        <p:txBody>
-          <a:bodyPr/>
-          <a:lstStyle/>
-          <a:p>
-            <a:pPr algn="ctr"/>
-            <a:r>
-              <a:rPr lang="en-US" dirty="0"/>
-              <a:t>Lecture 12: Tuesday, Oct 7</a:t>
-            </a:r>
-          </a:p>
-        </p:txBody>
-      </p:sp>
-      <p:sp>
-        <p:nvSpPr>
-          <p:cNvPr id="6147" name="Rectangle 3">
-            <a:extLst>
-              <a:ext uri="{FF2B5EF4-FFF2-40B4-BE49-F238E27FC236}">
-                <a16:creationId xmlns:a16="http://schemas.microsoft.com/office/drawing/2014/main" id="{ED7FD271-027D-205F-95AA-90811D39A407}"/>
-              </a:ext>
-            </a:extLst>
-          </p:cNvPr>
-          <p:cNvSpPr>
-            <a:spLocks noGrp="1" noChangeArrowheads="1"/>
-          </p:cNvSpPr>
-          <p:nvPr>
-            <p:ph idx="1"/>
-            <p:custDataLst>
-              <p:tags r:id="rId2"/>
-            </p:custDataLst>
-          </p:nvPr>
-        </p:nvSpPr>
-        <p:spPr>
-          <a:xfrm>
-            <a:off x="1294151" y="1098548"/>
-            <a:ext cx="9905998" cy="5387311"/>
-          </a:xfrm>
-        </p:spPr>
-        <p:txBody>
-          <a:bodyPr>
-            <a:normAutofit fontScale="85000" lnSpcReduction="10000"/>
-          </a:bodyPr>
-          <a:lstStyle/>
-          <a:p>
-            <a:r>
-              <a:rPr lang="en-US" dirty="0">
-                <a:latin typeface="Arial" panose="020B0604020202020204" pitchFamily="34" charset="0"/>
-                <a:cs typeface="Arial" panose="020B0604020202020204" pitchFamily="34" charset="0"/>
-              </a:rPr>
-              <a:t>Welcome to October, the objectively best month of the year </a:t>
-            </a:r>
-            <a:r>
-              <a:rPr lang="en-US" dirty="0">
-                <a:latin typeface="Arial" panose="020B0604020202020204" pitchFamily="34" charset="0"/>
-                <a:cs typeface="Arial" panose="020B0604020202020204" pitchFamily="34" charset="0"/>
-                <a:sym typeface="Wingdings" pitchFamily="2" charset="2"/>
-              </a:rPr>
-              <a:t></a:t>
-            </a:r>
-            <a:endParaRPr lang="en-US" dirty="0">
-              <a:latin typeface="Arial" panose="020B0604020202020204" pitchFamily="34" charset="0"/>
-              <a:cs typeface="Arial" panose="020B0604020202020204" pitchFamily="34" charset="0"/>
-            </a:endParaRPr>
-          </a:p>
-          <a:p>
-            <a:r>
-              <a:rPr lang="en-US" dirty="0">
-                <a:latin typeface="Arial" panose="020B0604020202020204" pitchFamily="34" charset="0"/>
-                <a:cs typeface="Arial" panose="020B0604020202020204" pitchFamily="34" charset="0"/>
-              </a:rPr>
-              <a:t>First homework has been returned (for everybody)</a:t>
-            </a:r>
-          </a:p>
-          <a:p>
-            <a:r>
-              <a:rPr lang="en-US" dirty="0">
-                <a:latin typeface="Arial" panose="020B0604020202020204" pitchFamily="34" charset="0"/>
-                <a:cs typeface="Arial" panose="020B0604020202020204" pitchFamily="34" charset="0"/>
-              </a:rPr>
-              <a:t>Module 2 HW is in, should have feedback to you by quiz if on time</a:t>
-            </a:r>
-          </a:p>
-          <a:p>
-            <a:r>
-              <a:rPr lang="en-US" dirty="0">
-                <a:latin typeface="Arial" panose="020B0604020202020204" pitchFamily="34" charset="0"/>
-                <a:cs typeface="Arial" panose="020B0604020202020204" pitchFamily="34" charset="0"/>
-              </a:rPr>
-              <a:t>Quiz 2 is THIS Thursday.</a:t>
-            </a:r>
-          </a:p>
-          <a:p>
-            <a:pPr lvl="1"/>
-            <a:r>
-              <a:rPr lang="en-US" dirty="0">
-                <a:latin typeface="Arial" panose="020B0604020202020204" pitchFamily="34" charset="0"/>
-                <a:cs typeface="Arial" panose="020B0604020202020204" pitchFamily="34" charset="0"/>
-              </a:rPr>
-              <a:t>Same format, etc. Usually students consider quiz 2 to be much harder so be prepared</a:t>
-            </a:r>
-          </a:p>
-          <a:p>
-            <a:r>
-              <a:rPr lang="en-US" dirty="0">
-                <a:latin typeface="Arial" panose="020B0604020202020204" pitchFamily="34" charset="0"/>
-                <a:cs typeface="Arial" panose="020B0604020202020204" pitchFamily="34" charset="0"/>
-              </a:rPr>
-              <a:t>Please remember that I am asking for NO laptop / phones!</a:t>
-            </a:r>
-          </a:p>
-          <a:p>
-            <a:pPr lvl="1"/>
-            <a:r>
-              <a:rPr lang="en-US" dirty="0">
-                <a:latin typeface="Arial" panose="020B0604020202020204" pitchFamily="34" charset="0"/>
-                <a:cs typeface="Arial" panose="020B0604020202020204" pitchFamily="34" charset="0"/>
-              </a:rPr>
-              <a:t>This makes the learning environment better for everybody. I appreciate it!</a:t>
-            </a:r>
-          </a:p>
-          <a:p>
-            <a:r>
-              <a:rPr lang="en-US" dirty="0">
-                <a:latin typeface="Arial" panose="020B0604020202020204" pitchFamily="34" charset="0"/>
-                <a:cs typeface="Arial" panose="020B0604020202020204" pitchFamily="34" charset="0"/>
-              </a:rPr>
-              <a:t>Discussion Section: Chase will be holding every week</a:t>
-            </a:r>
-          </a:p>
-          <a:p>
-            <a:pPr lvl="1"/>
-            <a:r>
-              <a:rPr lang="en-US" dirty="0">
-                <a:latin typeface="Arial" panose="020B0604020202020204" pitchFamily="34" charset="0"/>
-                <a:cs typeface="Arial" panose="020B0604020202020204" pitchFamily="34" charset="0"/>
-              </a:rPr>
-              <a:t>Wednesday 4-5pm in Rice 110</a:t>
-            </a:r>
-          </a:p>
-          <a:p>
-            <a:pPr lvl="1"/>
-            <a:r>
-              <a:rPr lang="en-US" dirty="0">
-                <a:latin typeface="Arial" panose="020B0604020202020204" pitchFamily="34" charset="0"/>
-                <a:cs typeface="Arial" panose="020B0604020202020204" pitchFamily="34" charset="0"/>
-              </a:rPr>
-              <a:t>Will be in </a:t>
-            </a:r>
-            <a:r>
-              <a:rPr lang="en-US" b="1" dirty="0">
-                <a:latin typeface="Arial" panose="020B0604020202020204" pitchFamily="34" charset="0"/>
-                <a:cs typeface="Arial" panose="020B0604020202020204" pitchFamily="34" charset="0"/>
-              </a:rPr>
-              <a:t>THN E316 </a:t>
-            </a:r>
-            <a:r>
-              <a:rPr lang="en-US" dirty="0">
-                <a:latin typeface="Arial" panose="020B0604020202020204" pitchFamily="34" charset="0"/>
-                <a:cs typeface="Arial" panose="020B0604020202020204" pitchFamily="34" charset="0"/>
-              </a:rPr>
-              <a:t>on quiz weeks since attendance is higher</a:t>
-            </a:r>
-          </a:p>
-          <a:p>
-            <a:r>
-              <a:rPr lang="en-US" dirty="0">
-                <a:latin typeface="Arial" panose="020B0604020202020204" pitchFamily="34" charset="0"/>
-                <a:cs typeface="Arial" panose="020B0604020202020204" pitchFamily="34" charset="0"/>
-              </a:rPr>
-              <a:t>Lecture recordings are on Panopto</a:t>
-            </a:r>
-          </a:p>
-          <a:p>
-            <a:pPr lvl="1"/>
-            <a:r>
-              <a:rPr lang="en-US" dirty="0">
-                <a:latin typeface="Arial" panose="020B0604020202020204" pitchFamily="34" charset="0"/>
-                <a:cs typeface="Arial" panose="020B0604020202020204" pitchFamily="34" charset="0"/>
-              </a:rPr>
-              <a:t>There are folders for Floryan and Pettit (little hard to find but they are there)</a:t>
-            </a:r>
-          </a:p>
-          <a:p>
-            <a:r>
-              <a:rPr lang="en-US" dirty="0">
-                <a:latin typeface="Arial" panose="020B0604020202020204" pitchFamily="34" charset="0"/>
-                <a:cs typeface="Arial" panose="020B0604020202020204" pitchFamily="34" charset="0"/>
-              </a:rPr>
-              <a:t>Today we continue with module 3 (which is NOT on next week’s quiz remember)</a:t>
-            </a:r>
-          </a:p>
-        </p:txBody>
-      </p:sp>
-    </p:spTree>
-    <p:extLst>
-      <p:ext uri="{BB962C8B-B14F-4D97-AF65-F5344CB8AC3E}">
-        <p14:creationId xmlns:p14="http://schemas.microsoft.com/office/powerpoint/2010/main" val="2532650147"/>
-      </p:ext>
-    </p:extLst>
-  </p:cSld>
-  <p:clrMapOvr>
-    <a:masterClrMapping/>
-  </p:clrMapOvr>
-</p:sld>
-</file>
-
-<file path=ppt/slides/slide12.xml><?xml version="1.0" encoding="utf-8"?>
-<p:sld xmlns:a="http://schemas.openxmlformats.org/drawingml/2006/main" xmlns:r="http://schemas.openxmlformats.org/officeDocument/2006/relationships" xmlns:p="http://schemas.openxmlformats.org/presentationml/2006/main">
-  <p:cSld>
-    <p:spTree>
-      <p:nvGrpSpPr>
-        <p:cNvPr id="1" name="">
-          <a:extLst>
-            <a:ext uri="{FF2B5EF4-FFF2-40B4-BE49-F238E27FC236}">
-              <a16:creationId xmlns:a16="http://schemas.microsoft.com/office/drawing/2014/main" id="{AECF61F1-ED65-C1C6-12A3-A7CF1C4953A9}"/>
-            </a:ext>
-          </a:extLst>
-        </p:cNvPr>
-        <p:cNvGrpSpPr/>
-        <p:nvPr/>
-      </p:nvGrpSpPr>
-      <p:grpSpPr>
-        <a:xfrm>
-          <a:off x="0" y="0"/>
-          <a:ext cx="0" cy="0"/>
-          <a:chOff x="0" y="0"/>
-          <a:chExt cx="0" cy="0"/>
-        </a:xfrm>
-      </p:grpSpPr>
-      <p:sp>
-        <p:nvSpPr>
-          <p:cNvPr id="6146" name="Rectangle 2">
-            <a:extLst>
-              <a:ext uri="{FF2B5EF4-FFF2-40B4-BE49-F238E27FC236}">
-                <a16:creationId xmlns:a16="http://schemas.microsoft.com/office/drawing/2014/main" id="{02F0AA3A-89C2-E6C4-B0BF-4188D0DA06C9}"/>
-              </a:ext>
-            </a:extLst>
-          </p:cNvPr>
-          <p:cNvSpPr>
-            <a:spLocks noGrp="1" noChangeArrowheads="1"/>
-          </p:cNvSpPr>
-          <p:nvPr>
-            <p:ph type="title"/>
-            <p:custDataLst>
-              <p:tags r:id="rId1"/>
-            </p:custDataLst>
-          </p:nvPr>
-        </p:nvSpPr>
-        <p:spPr>
-          <a:xfrm>
-            <a:off x="1141413" y="284084"/>
-            <a:ext cx="9905998" cy="620791"/>
-          </a:xfrm>
-        </p:spPr>
-        <p:txBody>
-          <a:bodyPr/>
-          <a:lstStyle/>
-          <a:p>
-            <a:pPr algn="ctr"/>
-            <a:r>
-              <a:rPr lang="en-US" dirty="0"/>
-              <a:t>Lecture 13: </a:t>
-            </a:r>
-            <a:r>
-              <a:rPr lang="en-US" dirty="0" err="1"/>
-              <a:t>THursday</a:t>
-            </a:r>
-            <a:r>
-              <a:rPr lang="en-US" dirty="0"/>
-              <a:t>, Oct 16</a:t>
-            </a:r>
-          </a:p>
-        </p:txBody>
-      </p:sp>
-      <p:sp>
-        <p:nvSpPr>
-          <p:cNvPr id="6147" name="Rectangle 3">
-            <a:extLst>
-              <a:ext uri="{FF2B5EF4-FFF2-40B4-BE49-F238E27FC236}">
-                <a16:creationId xmlns:a16="http://schemas.microsoft.com/office/drawing/2014/main" id="{7D4D5F4B-0536-401B-BC7E-2DD7E5A2FC81}"/>
-              </a:ext>
-            </a:extLst>
-          </p:cNvPr>
-          <p:cNvSpPr>
-            <a:spLocks noGrp="1" noChangeArrowheads="1"/>
-          </p:cNvSpPr>
-          <p:nvPr>
-            <p:ph idx="1"/>
-            <p:custDataLst>
-              <p:tags r:id="rId2"/>
-            </p:custDataLst>
-          </p:nvPr>
-        </p:nvSpPr>
-        <p:spPr>
-          <a:xfrm>
-            <a:off x="1294151" y="1098548"/>
-            <a:ext cx="9905998" cy="5387311"/>
-          </a:xfrm>
-        </p:spPr>
-        <p:txBody>
-          <a:bodyPr>
-            <a:normAutofit fontScale="92500" lnSpcReduction="20000"/>
-          </a:bodyPr>
-          <a:lstStyle/>
-          <a:p>
-            <a:r>
-              <a:rPr lang="en-US" dirty="0">
-                <a:latin typeface="Arial" panose="020B0604020202020204" pitchFamily="34" charset="0"/>
-                <a:cs typeface="Arial" panose="020B0604020202020204" pitchFamily="34" charset="0"/>
-              </a:rPr>
-              <a:t>Second homework has been returned (if on time)</a:t>
-            </a:r>
-          </a:p>
-          <a:p>
-            <a:pPr lvl="1"/>
-            <a:r>
-              <a:rPr lang="en-US" dirty="0">
-                <a:latin typeface="Arial" panose="020B0604020202020204" pitchFamily="34" charset="0"/>
-                <a:cs typeface="Arial" panose="020B0604020202020204" pitchFamily="34" charset="0"/>
-              </a:rPr>
-              <a:t>If late, we are working through it now.</a:t>
-            </a:r>
-          </a:p>
-          <a:p>
-            <a:r>
-              <a:rPr lang="en-US" dirty="0">
-                <a:latin typeface="Arial" panose="020B0604020202020204" pitchFamily="34" charset="0"/>
-                <a:cs typeface="Arial" panose="020B0604020202020204" pitchFamily="34" charset="0"/>
-              </a:rPr>
-              <a:t>You took quiz 2 – It will be graded tonight</a:t>
-            </a:r>
-          </a:p>
-          <a:p>
-            <a:r>
-              <a:rPr lang="en-US" dirty="0">
-                <a:latin typeface="Arial" panose="020B0604020202020204" pitchFamily="34" charset="0"/>
-                <a:cs typeface="Arial" panose="020B0604020202020204" pitchFamily="34" charset="0"/>
-              </a:rPr>
-              <a:t>Programming assignment is due tonight</a:t>
-            </a:r>
-          </a:p>
-          <a:p>
-            <a:pPr lvl="1"/>
-            <a:r>
-              <a:rPr lang="en-US" dirty="0">
-                <a:latin typeface="Arial" panose="020B0604020202020204" pitchFamily="34" charset="0"/>
-                <a:cs typeface="Arial" panose="020B0604020202020204" pitchFamily="34" charset="0"/>
-              </a:rPr>
-              <a:t>Try to finish it on time please. </a:t>
-            </a:r>
-          </a:p>
-          <a:p>
-            <a:r>
-              <a:rPr lang="en-US" dirty="0">
-                <a:latin typeface="Arial" panose="020B0604020202020204" pitchFamily="34" charset="0"/>
-                <a:cs typeface="Arial" panose="020B0604020202020204" pitchFamily="34" charset="0"/>
-              </a:rPr>
-              <a:t>Please remember that I am asking for NO laptop / phones!</a:t>
-            </a:r>
-          </a:p>
-          <a:p>
-            <a:pPr lvl="1"/>
-            <a:r>
-              <a:rPr lang="en-US" dirty="0">
-                <a:latin typeface="Arial" panose="020B0604020202020204" pitchFamily="34" charset="0"/>
-                <a:cs typeface="Arial" panose="020B0604020202020204" pitchFamily="34" charset="0"/>
-              </a:rPr>
-              <a:t>This makes the learning environment better for everybody. I appreciate it!</a:t>
-            </a:r>
-          </a:p>
-          <a:p>
-            <a:r>
-              <a:rPr lang="en-US" dirty="0">
-                <a:latin typeface="Arial" panose="020B0604020202020204" pitchFamily="34" charset="0"/>
-                <a:cs typeface="Arial" panose="020B0604020202020204" pitchFamily="34" charset="0"/>
-              </a:rPr>
-              <a:t>Discussion Section: Chase will be holding every week</a:t>
-            </a:r>
-          </a:p>
-          <a:p>
-            <a:pPr lvl="1"/>
-            <a:r>
-              <a:rPr lang="en-US" dirty="0">
-                <a:latin typeface="Arial" panose="020B0604020202020204" pitchFamily="34" charset="0"/>
-                <a:cs typeface="Arial" panose="020B0604020202020204" pitchFamily="34" charset="0"/>
-              </a:rPr>
-              <a:t>Wednesday 4-5pm in Rice 110</a:t>
-            </a:r>
-          </a:p>
-          <a:p>
-            <a:pPr lvl="1"/>
-            <a:r>
-              <a:rPr lang="en-US" dirty="0">
-                <a:latin typeface="Arial" panose="020B0604020202020204" pitchFamily="34" charset="0"/>
-                <a:cs typeface="Arial" panose="020B0604020202020204" pitchFamily="34" charset="0"/>
-              </a:rPr>
-              <a:t>Will be in </a:t>
-            </a:r>
-            <a:r>
-              <a:rPr lang="en-US" b="1" dirty="0">
-                <a:latin typeface="Arial" panose="020B0604020202020204" pitchFamily="34" charset="0"/>
-                <a:cs typeface="Arial" panose="020B0604020202020204" pitchFamily="34" charset="0"/>
-              </a:rPr>
-              <a:t>THN E316 </a:t>
-            </a:r>
-            <a:r>
-              <a:rPr lang="en-US" dirty="0">
-                <a:latin typeface="Arial" panose="020B0604020202020204" pitchFamily="34" charset="0"/>
-                <a:cs typeface="Arial" panose="020B0604020202020204" pitchFamily="34" charset="0"/>
-              </a:rPr>
-              <a:t>on quiz weeks since attendance is higher</a:t>
-            </a:r>
-          </a:p>
-          <a:p>
-            <a:r>
-              <a:rPr lang="en-US" dirty="0">
-                <a:latin typeface="Arial" panose="020B0604020202020204" pitchFamily="34" charset="0"/>
-                <a:cs typeface="Arial" panose="020B0604020202020204" pitchFamily="34" charset="0"/>
-              </a:rPr>
-              <a:t>Lecture recordings are on Panopto</a:t>
-            </a:r>
-          </a:p>
-          <a:p>
-            <a:pPr lvl="1"/>
-            <a:r>
-              <a:rPr lang="en-US" dirty="0">
-                <a:latin typeface="Arial" panose="020B0604020202020204" pitchFamily="34" charset="0"/>
-                <a:cs typeface="Arial" panose="020B0604020202020204" pitchFamily="34" charset="0"/>
-              </a:rPr>
-              <a:t>There are folders for Floryan and Pettit (little hard to find but they are there)</a:t>
-            </a:r>
-          </a:p>
-          <a:p>
-            <a:r>
-              <a:rPr lang="en-US" dirty="0">
-                <a:latin typeface="Arial" panose="020B0604020202020204" pitchFamily="34" charset="0"/>
-                <a:cs typeface="Arial" panose="020B0604020202020204" pitchFamily="34" charset="0"/>
-              </a:rPr>
-              <a:t>Today we continue with module 3</a:t>
-            </a:r>
-          </a:p>
-        </p:txBody>
-      </p:sp>
-    </p:spTree>
-    <p:extLst>
-      <p:ext uri="{BB962C8B-B14F-4D97-AF65-F5344CB8AC3E}">
-        <p14:creationId xmlns:p14="http://schemas.microsoft.com/office/powerpoint/2010/main" val="841879372"/>
-      </p:ext>
-    </p:extLst>
-  </p:cSld>
-  <p:clrMapOvr>
-    <a:masterClrMapping/>
-  </p:clrMapOvr>
-</p:sld>
-</file>
-
-<file path=ppt/slides/slide13.xml><?xml version="1.0" encoding="utf-8"?>
-<p:sld xmlns:a="http://schemas.openxmlformats.org/drawingml/2006/main" xmlns:r="http://schemas.openxmlformats.org/officeDocument/2006/relationships" xmlns:p="http://schemas.openxmlformats.org/presentationml/2006/main">
-  <p:cSld>
-    <p:spTree>
-      <p:nvGrpSpPr>
-        <p:cNvPr id="1" name="">
-          <a:extLst>
-            <a:ext uri="{FF2B5EF4-FFF2-40B4-BE49-F238E27FC236}">
-              <a16:creationId xmlns:a16="http://schemas.microsoft.com/office/drawing/2014/main" id="{C708C37F-F769-C8DA-A516-4D62E3388D69}"/>
-            </a:ext>
-          </a:extLst>
-        </p:cNvPr>
-        <p:cNvGrpSpPr/>
-        <p:nvPr/>
-      </p:nvGrpSpPr>
-      <p:grpSpPr>
-        <a:xfrm>
-          <a:off x="0" y="0"/>
-          <a:ext cx="0" cy="0"/>
-          <a:chOff x="0" y="0"/>
-          <a:chExt cx="0" cy="0"/>
-        </a:xfrm>
-      </p:grpSpPr>
-      <p:sp>
-        <p:nvSpPr>
-          <p:cNvPr id="6146" name="Rectangle 2">
-            <a:extLst>
-              <a:ext uri="{FF2B5EF4-FFF2-40B4-BE49-F238E27FC236}">
-                <a16:creationId xmlns:a16="http://schemas.microsoft.com/office/drawing/2014/main" id="{B28AA7C4-A23C-62F3-A9EA-DEFF9A0077E2}"/>
-              </a:ext>
-            </a:extLst>
-          </p:cNvPr>
-          <p:cNvSpPr>
-            <a:spLocks noGrp="1" noChangeArrowheads="1"/>
-          </p:cNvSpPr>
-          <p:nvPr>
-            <p:ph type="title"/>
-            <p:custDataLst>
-              <p:tags r:id="rId1"/>
-            </p:custDataLst>
-          </p:nvPr>
-        </p:nvSpPr>
-        <p:spPr>
-          <a:xfrm>
-            <a:off x="1141413" y="284084"/>
-            <a:ext cx="9905998" cy="620791"/>
-          </a:xfrm>
-        </p:spPr>
-        <p:txBody>
-          <a:bodyPr/>
-          <a:lstStyle/>
-          <a:p>
-            <a:pPr algn="ctr"/>
-            <a:r>
-              <a:rPr lang="en-US" dirty="0"/>
-              <a:t>Lecture 14: </a:t>
-            </a:r>
-            <a:r>
-              <a:rPr lang="en-US" dirty="0" err="1"/>
-              <a:t>TUesday</a:t>
-            </a:r>
-            <a:r>
-              <a:rPr lang="en-US" dirty="0"/>
-              <a:t>, Oct 21</a:t>
-            </a:r>
-          </a:p>
-        </p:txBody>
-      </p:sp>
-      <p:sp>
-        <p:nvSpPr>
-          <p:cNvPr id="6147" name="Rectangle 3">
-            <a:extLst>
-              <a:ext uri="{FF2B5EF4-FFF2-40B4-BE49-F238E27FC236}">
-                <a16:creationId xmlns:a16="http://schemas.microsoft.com/office/drawing/2014/main" id="{8D812F3F-2BFB-D2A5-B299-10F808427CB0}"/>
-              </a:ext>
-            </a:extLst>
-          </p:cNvPr>
-          <p:cNvSpPr>
-            <a:spLocks noGrp="1" noChangeArrowheads="1"/>
-          </p:cNvSpPr>
-          <p:nvPr>
-            <p:ph idx="1"/>
-            <p:custDataLst>
-              <p:tags r:id="rId2"/>
-            </p:custDataLst>
-          </p:nvPr>
-        </p:nvSpPr>
-        <p:spPr>
-          <a:xfrm>
-            <a:off x="1294151" y="1098548"/>
-            <a:ext cx="9905998" cy="5387311"/>
-          </a:xfrm>
-        </p:spPr>
-        <p:txBody>
-          <a:bodyPr>
-            <a:normAutofit fontScale="85000" lnSpcReduction="10000"/>
-          </a:bodyPr>
-          <a:lstStyle/>
-          <a:p>
-            <a:r>
-              <a:rPr lang="en-US" dirty="0">
-                <a:latin typeface="Arial" panose="020B0604020202020204" pitchFamily="34" charset="0"/>
-                <a:cs typeface="Arial" panose="020B0604020202020204" pitchFamily="34" charset="0"/>
-              </a:rPr>
-              <a:t>Second homework has been returned (if on time)</a:t>
-            </a:r>
-          </a:p>
-          <a:p>
-            <a:pPr lvl="1"/>
-            <a:r>
-              <a:rPr lang="en-US" dirty="0">
-                <a:latin typeface="Arial" panose="020B0604020202020204" pitchFamily="34" charset="0"/>
-                <a:cs typeface="Arial" panose="020B0604020202020204" pitchFamily="34" charset="0"/>
-              </a:rPr>
-              <a:t>If late, we are working through it now.</a:t>
-            </a:r>
-          </a:p>
-          <a:p>
-            <a:r>
-              <a:rPr lang="en-US" dirty="0">
-                <a:latin typeface="Arial" panose="020B0604020202020204" pitchFamily="34" charset="0"/>
-                <a:cs typeface="Arial" panose="020B0604020202020204" pitchFamily="34" charset="0"/>
-              </a:rPr>
-              <a:t>Quiz 2 is graded (you all did very well)</a:t>
-            </a:r>
-          </a:p>
-          <a:p>
-            <a:r>
-              <a:rPr lang="en-US" dirty="0">
-                <a:latin typeface="Arial" panose="020B0604020202020204" pitchFamily="34" charset="0"/>
-                <a:cs typeface="Arial" panose="020B0604020202020204" pitchFamily="34" charset="0"/>
-              </a:rPr>
-              <a:t>Programming assignment is due (late period) tonight</a:t>
-            </a:r>
-          </a:p>
-          <a:p>
-            <a:r>
-              <a:rPr lang="en-US" dirty="0">
-                <a:latin typeface="Arial" panose="020B0604020202020204" pitchFamily="34" charset="0"/>
-                <a:cs typeface="Arial" panose="020B0604020202020204" pitchFamily="34" charset="0"/>
-              </a:rPr>
-              <a:t>Module 3 written homework is due this Thursday!!</a:t>
-            </a:r>
-          </a:p>
-          <a:p>
-            <a:r>
-              <a:rPr lang="en-US" dirty="0">
-                <a:latin typeface="Arial" panose="020B0604020202020204" pitchFamily="34" charset="0"/>
-                <a:cs typeface="Arial" panose="020B0604020202020204" pitchFamily="34" charset="0"/>
-              </a:rPr>
-              <a:t>Please remember that I am asking for NO laptop / phones!</a:t>
-            </a:r>
-          </a:p>
-          <a:p>
-            <a:pPr lvl="1"/>
-            <a:r>
-              <a:rPr lang="en-US" dirty="0">
-                <a:latin typeface="Arial" panose="020B0604020202020204" pitchFamily="34" charset="0"/>
-                <a:cs typeface="Arial" panose="020B0604020202020204" pitchFamily="34" charset="0"/>
-              </a:rPr>
-              <a:t>This makes the learning environment better for everybody. I appreciate it!</a:t>
-            </a:r>
-          </a:p>
-          <a:p>
-            <a:r>
-              <a:rPr lang="en-US" dirty="0">
-                <a:latin typeface="Arial" panose="020B0604020202020204" pitchFamily="34" charset="0"/>
-                <a:cs typeface="Arial" panose="020B0604020202020204" pitchFamily="34" charset="0"/>
-              </a:rPr>
-              <a:t>Discussion Section: Chase will be holding every week</a:t>
-            </a:r>
-          </a:p>
-          <a:p>
-            <a:pPr lvl="1"/>
-            <a:r>
-              <a:rPr lang="en-US" dirty="0">
-                <a:latin typeface="Arial" panose="020B0604020202020204" pitchFamily="34" charset="0"/>
-                <a:cs typeface="Arial" panose="020B0604020202020204" pitchFamily="34" charset="0"/>
-              </a:rPr>
-              <a:t>Wednesday 4-5pm in Rice 110</a:t>
-            </a:r>
-          </a:p>
-          <a:p>
-            <a:pPr lvl="1"/>
-            <a:r>
-              <a:rPr lang="en-US" dirty="0">
-                <a:latin typeface="Arial" panose="020B0604020202020204" pitchFamily="34" charset="0"/>
-                <a:cs typeface="Arial" panose="020B0604020202020204" pitchFamily="34" charset="0"/>
-              </a:rPr>
-              <a:t>Will be in </a:t>
-            </a:r>
-            <a:r>
-              <a:rPr lang="en-US" b="1" dirty="0">
-                <a:latin typeface="Arial" panose="020B0604020202020204" pitchFamily="34" charset="0"/>
-                <a:cs typeface="Arial" panose="020B0604020202020204" pitchFamily="34" charset="0"/>
-              </a:rPr>
-              <a:t>THN E316 </a:t>
-            </a:r>
-            <a:r>
-              <a:rPr lang="en-US" dirty="0">
-                <a:latin typeface="Arial" panose="020B0604020202020204" pitchFamily="34" charset="0"/>
-                <a:cs typeface="Arial" panose="020B0604020202020204" pitchFamily="34" charset="0"/>
-              </a:rPr>
-              <a:t>on quiz weeks since attendance is higher</a:t>
-            </a:r>
-          </a:p>
-          <a:p>
-            <a:r>
-              <a:rPr lang="en-US" dirty="0">
-                <a:latin typeface="Arial" panose="020B0604020202020204" pitchFamily="34" charset="0"/>
-                <a:cs typeface="Arial" panose="020B0604020202020204" pitchFamily="34" charset="0"/>
-              </a:rPr>
-              <a:t>Lecture recordings are on Panopto</a:t>
-            </a:r>
-          </a:p>
-          <a:p>
-            <a:pPr lvl="1"/>
-            <a:r>
-              <a:rPr lang="en-US" dirty="0">
-                <a:latin typeface="Arial" panose="020B0604020202020204" pitchFamily="34" charset="0"/>
-                <a:cs typeface="Arial" panose="020B0604020202020204" pitchFamily="34" charset="0"/>
-              </a:rPr>
-              <a:t>There are folders for Floryan and Pettit (little hard to find but they are there)</a:t>
-            </a:r>
-          </a:p>
-          <a:p>
-            <a:r>
-              <a:rPr lang="en-US" dirty="0">
-                <a:latin typeface="Arial" panose="020B0604020202020204" pitchFamily="34" charset="0"/>
-                <a:cs typeface="Arial" panose="020B0604020202020204" pitchFamily="34" charset="0"/>
-              </a:rPr>
-              <a:t>Today we continue with module 3</a:t>
-            </a:r>
-          </a:p>
-        </p:txBody>
-      </p:sp>
-    </p:spTree>
-    <p:extLst>
-      <p:ext uri="{BB962C8B-B14F-4D97-AF65-F5344CB8AC3E}">
-        <p14:creationId xmlns:p14="http://schemas.microsoft.com/office/powerpoint/2010/main" val="282431153"/>
-      </p:ext>
-    </p:extLst>
-  </p:cSld>
-  <p:clrMapOvr>
-    <a:masterClrMapping/>
-  </p:clrMapOvr>
-</p:sld>
-</file>
-
-<file path=ppt/slides/slide14.xml><?xml version="1.0" encoding="utf-8"?>
-<p:sld xmlns:a="http://schemas.openxmlformats.org/drawingml/2006/main" xmlns:r="http://schemas.openxmlformats.org/officeDocument/2006/relationships" xmlns:p="http://schemas.openxmlformats.org/presentationml/2006/main">
-  <p:cSld>
-    <p:spTree>
-      <p:nvGrpSpPr>
-        <p:cNvPr id="1" name="">
-          <a:extLst>
-            <a:ext uri="{FF2B5EF4-FFF2-40B4-BE49-F238E27FC236}">
-              <a16:creationId xmlns:a16="http://schemas.microsoft.com/office/drawing/2014/main" id="{58CD01BE-7E43-9717-7945-031EFF39EB37}"/>
-            </a:ext>
-          </a:extLst>
-        </p:cNvPr>
-        <p:cNvGrpSpPr/>
-        <p:nvPr/>
-      </p:nvGrpSpPr>
-      <p:grpSpPr>
-        <a:xfrm>
-          <a:off x="0" y="0"/>
-          <a:ext cx="0" cy="0"/>
-          <a:chOff x="0" y="0"/>
-          <a:chExt cx="0" cy="0"/>
-        </a:xfrm>
-      </p:grpSpPr>
-      <p:sp>
-        <p:nvSpPr>
-          <p:cNvPr id="6146" name="Rectangle 2">
-            <a:extLst>
-              <a:ext uri="{FF2B5EF4-FFF2-40B4-BE49-F238E27FC236}">
-                <a16:creationId xmlns:a16="http://schemas.microsoft.com/office/drawing/2014/main" id="{F4BEBF37-2531-651A-E46A-04891275F74D}"/>
-              </a:ext>
-            </a:extLst>
-          </p:cNvPr>
-          <p:cNvSpPr>
-            <a:spLocks noGrp="1" noChangeArrowheads="1"/>
-          </p:cNvSpPr>
-          <p:nvPr>
-            <p:ph type="title"/>
-            <p:custDataLst>
-              <p:tags r:id="rId1"/>
-            </p:custDataLst>
-          </p:nvPr>
-        </p:nvSpPr>
-        <p:spPr>
-          <a:xfrm>
-            <a:off x="1141413" y="284084"/>
-            <a:ext cx="9905998" cy="620791"/>
-          </a:xfrm>
-        </p:spPr>
-        <p:txBody>
-          <a:bodyPr/>
-          <a:lstStyle/>
-          <a:p>
-            <a:pPr algn="ctr"/>
-            <a:r>
-              <a:rPr lang="en-US" dirty="0"/>
-              <a:t>Lecture 15: Thursday, Oct 23</a:t>
-            </a:r>
-          </a:p>
-        </p:txBody>
-      </p:sp>
-      <p:sp>
-        <p:nvSpPr>
-          <p:cNvPr id="6147" name="Rectangle 3">
-            <a:extLst>
-              <a:ext uri="{FF2B5EF4-FFF2-40B4-BE49-F238E27FC236}">
-                <a16:creationId xmlns:a16="http://schemas.microsoft.com/office/drawing/2014/main" id="{DC8B4247-9E8E-5088-6E9F-A5F5CF4BC292}"/>
-              </a:ext>
-            </a:extLst>
-          </p:cNvPr>
-          <p:cNvSpPr>
-            <a:spLocks noGrp="1" noChangeArrowheads="1"/>
-          </p:cNvSpPr>
-          <p:nvPr>
-            <p:ph idx="1"/>
-            <p:custDataLst>
-              <p:tags r:id="rId2"/>
-            </p:custDataLst>
-          </p:nvPr>
-        </p:nvSpPr>
-        <p:spPr>
-          <a:xfrm>
-            <a:off x="1294151" y="1098548"/>
-            <a:ext cx="9905998" cy="5387311"/>
-          </a:xfrm>
-        </p:spPr>
-        <p:txBody>
-          <a:bodyPr>
-            <a:normAutofit fontScale="92500" lnSpcReduction="10000"/>
-          </a:bodyPr>
-          <a:lstStyle/>
-          <a:p>
-            <a:r>
-              <a:rPr lang="en-US" dirty="0">
-                <a:latin typeface="Arial" panose="020B0604020202020204" pitchFamily="34" charset="0"/>
-                <a:cs typeface="Arial" panose="020B0604020202020204" pitchFamily="34" charset="0"/>
-              </a:rPr>
-              <a:t>Second homework has been returned (if on time)</a:t>
-            </a:r>
-          </a:p>
-          <a:p>
-            <a:pPr lvl="1"/>
-            <a:r>
-              <a:rPr lang="en-US" dirty="0">
-                <a:latin typeface="Arial" panose="020B0604020202020204" pitchFamily="34" charset="0"/>
-                <a:cs typeface="Arial" panose="020B0604020202020204" pitchFamily="34" charset="0"/>
-              </a:rPr>
-              <a:t>Still working through a few but almost done!</a:t>
-            </a:r>
-          </a:p>
-          <a:p>
-            <a:r>
-              <a:rPr lang="en-US" dirty="0">
-                <a:latin typeface="Arial" panose="020B0604020202020204" pitchFamily="34" charset="0"/>
-                <a:cs typeface="Arial" panose="020B0604020202020204" pitchFamily="34" charset="0"/>
-              </a:rPr>
-              <a:t>Quiz 2 is graded (you all did very well)</a:t>
-            </a:r>
-          </a:p>
-          <a:p>
-            <a:r>
-              <a:rPr lang="en-US" dirty="0">
-                <a:latin typeface="Arial" panose="020B0604020202020204" pitchFamily="34" charset="0"/>
-                <a:cs typeface="Arial" panose="020B0604020202020204" pitchFamily="34" charset="0"/>
-              </a:rPr>
-              <a:t>Module 3 written homework is due tonight!</a:t>
-            </a:r>
-          </a:p>
-          <a:p>
-            <a:r>
-              <a:rPr lang="en-US" dirty="0">
-                <a:latin typeface="Arial" panose="020B0604020202020204" pitchFamily="34" charset="0"/>
-                <a:cs typeface="Arial" panose="020B0604020202020204" pitchFamily="34" charset="0"/>
-              </a:rPr>
-              <a:t>Please remember that I am asking for NO laptop / phones!</a:t>
-            </a:r>
-          </a:p>
-          <a:p>
-            <a:pPr lvl="1"/>
-            <a:r>
-              <a:rPr lang="en-US" dirty="0">
-                <a:latin typeface="Arial" panose="020B0604020202020204" pitchFamily="34" charset="0"/>
-                <a:cs typeface="Arial" panose="020B0604020202020204" pitchFamily="34" charset="0"/>
-              </a:rPr>
-              <a:t>This makes the learning environment better for everybody. I appreciate it!</a:t>
-            </a:r>
-          </a:p>
-          <a:p>
-            <a:r>
-              <a:rPr lang="en-US" dirty="0">
-                <a:latin typeface="Arial" panose="020B0604020202020204" pitchFamily="34" charset="0"/>
-                <a:cs typeface="Arial" panose="020B0604020202020204" pitchFamily="34" charset="0"/>
-              </a:rPr>
-              <a:t>Discussion Section: Chase will be holding every week</a:t>
-            </a:r>
-          </a:p>
-          <a:p>
-            <a:pPr lvl="1"/>
-            <a:r>
-              <a:rPr lang="en-US" dirty="0">
-                <a:latin typeface="Arial" panose="020B0604020202020204" pitchFamily="34" charset="0"/>
-                <a:cs typeface="Arial" panose="020B0604020202020204" pitchFamily="34" charset="0"/>
-              </a:rPr>
-              <a:t>Wednesday 4-5pm in Rice 110</a:t>
-            </a:r>
-          </a:p>
-          <a:p>
-            <a:pPr lvl="1"/>
-            <a:r>
-              <a:rPr lang="en-US" dirty="0">
-                <a:latin typeface="Arial" panose="020B0604020202020204" pitchFamily="34" charset="0"/>
-                <a:cs typeface="Arial" panose="020B0604020202020204" pitchFamily="34" charset="0"/>
-              </a:rPr>
-              <a:t>Will be in </a:t>
-            </a:r>
-            <a:r>
-              <a:rPr lang="en-US" b="1" dirty="0">
-                <a:latin typeface="Arial" panose="020B0604020202020204" pitchFamily="34" charset="0"/>
-                <a:cs typeface="Arial" panose="020B0604020202020204" pitchFamily="34" charset="0"/>
-              </a:rPr>
-              <a:t>THN E316 </a:t>
-            </a:r>
-            <a:r>
-              <a:rPr lang="en-US" dirty="0">
-                <a:latin typeface="Arial" panose="020B0604020202020204" pitchFamily="34" charset="0"/>
-                <a:cs typeface="Arial" panose="020B0604020202020204" pitchFamily="34" charset="0"/>
-              </a:rPr>
-              <a:t>on quiz weeks since attendance is higher</a:t>
-            </a:r>
-          </a:p>
-          <a:p>
-            <a:r>
-              <a:rPr lang="en-US" dirty="0">
-                <a:latin typeface="Arial" panose="020B0604020202020204" pitchFamily="34" charset="0"/>
-                <a:cs typeface="Arial" panose="020B0604020202020204" pitchFamily="34" charset="0"/>
-              </a:rPr>
-              <a:t>Lecture recordings are on Panopto</a:t>
-            </a:r>
-          </a:p>
-          <a:p>
-            <a:pPr lvl="1"/>
-            <a:r>
-              <a:rPr lang="en-US" dirty="0">
-                <a:latin typeface="Arial" panose="020B0604020202020204" pitchFamily="34" charset="0"/>
-                <a:cs typeface="Arial" panose="020B0604020202020204" pitchFamily="34" charset="0"/>
-              </a:rPr>
-              <a:t>There are folders for Floryan and Pettit (little hard to find but they are there)</a:t>
-            </a:r>
-          </a:p>
-          <a:p>
-            <a:r>
-              <a:rPr lang="en-US" dirty="0">
-                <a:latin typeface="Arial" panose="020B0604020202020204" pitchFamily="34" charset="0"/>
-                <a:cs typeface="Arial" panose="020B0604020202020204" pitchFamily="34" charset="0"/>
-              </a:rPr>
-              <a:t>Today we continue with start module 4!</a:t>
-            </a:r>
-          </a:p>
-        </p:txBody>
-      </p:sp>
-    </p:spTree>
-    <p:extLst>
-      <p:ext uri="{BB962C8B-B14F-4D97-AF65-F5344CB8AC3E}">
-        <p14:creationId xmlns:p14="http://schemas.microsoft.com/office/powerpoint/2010/main" val="3143439204"/>
-      </p:ext>
-    </p:extLst>
-  </p:cSld>
-  <p:clrMapOvr>
-    <a:masterClrMapping/>
-  </p:clrMapOvr>
-</p:sld>
-</file>
-
-<file path=ppt/slides/slide15.xml><?xml version="1.0" encoding="utf-8"?>
-<p:sld xmlns:a="http://schemas.openxmlformats.org/drawingml/2006/main" xmlns:r="http://schemas.openxmlformats.org/officeDocument/2006/relationships" xmlns:p="http://schemas.openxmlformats.org/presentationml/2006/main">
-  <p:cSld>
-    <p:spTree>
-      <p:nvGrpSpPr>
-        <p:cNvPr id="1" name="">
-          <a:extLst>
-            <a:ext uri="{FF2B5EF4-FFF2-40B4-BE49-F238E27FC236}">
-              <a16:creationId xmlns:a16="http://schemas.microsoft.com/office/drawing/2014/main" id="{BE9ACC90-C038-61B0-A430-1AA2843CE827}"/>
-            </a:ext>
-          </a:extLst>
-        </p:cNvPr>
-        <p:cNvGrpSpPr/>
-        <p:nvPr/>
-      </p:nvGrpSpPr>
-      <p:grpSpPr>
-        <a:xfrm>
-          <a:off x="0" y="0"/>
-          <a:ext cx="0" cy="0"/>
-          <a:chOff x="0" y="0"/>
-          <a:chExt cx="0" cy="0"/>
-        </a:xfrm>
-      </p:grpSpPr>
-      <p:sp>
-        <p:nvSpPr>
-          <p:cNvPr id="6146" name="Rectangle 2">
-            <a:extLst>
-              <a:ext uri="{FF2B5EF4-FFF2-40B4-BE49-F238E27FC236}">
-                <a16:creationId xmlns:a16="http://schemas.microsoft.com/office/drawing/2014/main" id="{BA78802C-A6A8-7CC8-AA1B-F4CE0A5D6268}"/>
-              </a:ext>
-            </a:extLst>
-          </p:cNvPr>
-          <p:cNvSpPr>
-            <a:spLocks noGrp="1" noChangeArrowheads="1"/>
-          </p:cNvSpPr>
-          <p:nvPr>
-            <p:ph type="title"/>
-            <p:custDataLst>
-              <p:tags r:id="rId1"/>
-            </p:custDataLst>
-          </p:nvPr>
-        </p:nvSpPr>
-        <p:spPr>
-          <a:xfrm>
-            <a:off x="1141413" y="284084"/>
-            <a:ext cx="9905998" cy="620791"/>
-          </a:xfrm>
-        </p:spPr>
-        <p:txBody>
-          <a:bodyPr/>
-          <a:lstStyle/>
-          <a:p>
-            <a:pPr algn="ctr"/>
-            <a:r>
-              <a:rPr lang="en-US" dirty="0"/>
-              <a:t>Lecture 16: Tuesday, Oct 28</a:t>
-            </a:r>
-          </a:p>
-        </p:txBody>
-      </p:sp>
-      <p:sp>
-        <p:nvSpPr>
-          <p:cNvPr id="6147" name="Rectangle 3">
-            <a:extLst>
-              <a:ext uri="{FF2B5EF4-FFF2-40B4-BE49-F238E27FC236}">
-                <a16:creationId xmlns:a16="http://schemas.microsoft.com/office/drawing/2014/main" id="{3DF67CEA-DD1D-FB82-B7D1-3F2DB37FB592}"/>
-              </a:ext>
-            </a:extLst>
-          </p:cNvPr>
-          <p:cNvSpPr>
-            <a:spLocks noGrp="1" noChangeArrowheads="1"/>
-          </p:cNvSpPr>
-          <p:nvPr>
-            <p:ph idx="1"/>
-            <p:custDataLst>
-              <p:tags r:id="rId2"/>
-            </p:custDataLst>
-          </p:nvPr>
-        </p:nvSpPr>
-        <p:spPr>
-          <a:xfrm>
-            <a:off x="1294151" y="1098548"/>
-            <a:ext cx="9905998" cy="5387311"/>
-          </a:xfrm>
-        </p:spPr>
-        <p:txBody>
-          <a:bodyPr>
-            <a:normAutofit fontScale="85000" lnSpcReduction="10000"/>
-          </a:bodyPr>
-          <a:lstStyle/>
-          <a:p>
-            <a:r>
-              <a:rPr lang="en-US" dirty="0">
-                <a:latin typeface="Arial" panose="020B0604020202020204" pitchFamily="34" charset="0"/>
-                <a:cs typeface="Arial" panose="020B0604020202020204" pitchFamily="34" charset="0"/>
-              </a:rPr>
-              <a:t>Floryan is leveling up to level 4!</a:t>
-            </a:r>
-          </a:p>
-          <a:p>
-            <a:r>
-              <a:rPr lang="en-US" dirty="0">
-                <a:latin typeface="Arial" panose="020B0604020202020204" pitchFamily="34" charset="0"/>
-                <a:cs typeface="Arial" panose="020B0604020202020204" pitchFamily="34" charset="0"/>
-              </a:rPr>
-              <a:t>Second homework has been fully returned</a:t>
-            </a:r>
-          </a:p>
-          <a:p>
-            <a:r>
-              <a:rPr lang="en-US" dirty="0">
-                <a:latin typeface="Arial" panose="020B0604020202020204" pitchFamily="34" charset="0"/>
-                <a:cs typeface="Arial" panose="020B0604020202020204" pitchFamily="34" charset="0"/>
-              </a:rPr>
-              <a:t>Module 3 homework is in and on-time submissions are being graded</a:t>
-            </a:r>
-          </a:p>
-          <a:p>
-            <a:r>
-              <a:rPr lang="en-US" dirty="0">
-                <a:latin typeface="Arial" panose="020B0604020202020204" pitchFamily="34" charset="0"/>
-                <a:cs typeface="Arial" panose="020B0604020202020204" pitchFamily="34" charset="0"/>
-              </a:rPr>
-              <a:t>Quiz 3 is on Thursday.</a:t>
-            </a:r>
-          </a:p>
-          <a:p>
-            <a:pPr lvl="1"/>
-            <a:r>
-              <a:rPr lang="en-US" dirty="0">
-                <a:latin typeface="Arial" panose="020B0604020202020204" pitchFamily="34" charset="0"/>
-                <a:cs typeface="Arial" panose="020B0604020202020204" pitchFamily="34" charset="0"/>
-              </a:rPr>
-              <a:t>Same procedure as last times…you should know the drill by now.</a:t>
-            </a:r>
-          </a:p>
-          <a:p>
-            <a:r>
-              <a:rPr lang="en-US" dirty="0">
-                <a:latin typeface="Arial" panose="020B0604020202020204" pitchFamily="34" charset="0"/>
-                <a:cs typeface="Arial" panose="020B0604020202020204" pitchFamily="34" charset="0"/>
-              </a:rPr>
-              <a:t>Please remember that I am asking for NO laptop / phones!</a:t>
-            </a:r>
-          </a:p>
-          <a:p>
-            <a:pPr lvl="1"/>
-            <a:r>
-              <a:rPr lang="en-US" dirty="0">
-                <a:latin typeface="Arial" panose="020B0604020202020204" pitchFamily="34" charset="0"/>
-                <a:cs typeface="Arial" panose="020B0604020202020204" pitchFamily="34" charset="0"/>
-              </a:rPr>
-              <a:t>This makes the learning environment better for everybody. I appreciate it!</a:t>
-            </a:r>
-          </a:p>
-          <a:p>
-            <a:r>
-              <a:rPr lang="en-US" dirty="0">
-                <a:latin typeface="Arial" panose="020B0604020202020204" pitchFamily="34" charset="0"/>
-                <a:cs typeface="Arial" panose="020B0604020202020204" pitchFamily="34" charset="0"/>
-              </a:rPr>
-              <a:t>Discussion Section: Chase will be holding every week</a:t>
-            </a:r>
-          </a:p>
-          <a:p>
-            <a:pPr lvl="1"/>
-            <a:r>
-              <a:rPr lang="en-US" dirty="0">
-                <a:latin typeface="Arial" panose="020B0604020202020204" pitchFamily="34" charset="0"/>
-                <a:cs typeface="Arial" panose="020B0604020202020204" pitchFamily="34" charset="0"/>
-              </a:rPr>
-              <a:t>Wednesday 4-5pm in Rice 110</a:t>
-            </a:r>
-          </a:p>
-          <a:p>
-            <a:pPr lvl="1"/>
-            <a:r>
-              <a:rPr lang="en-US" dirty="0">
-                <a:latin typeface="Arial" panose="020B0604020202020204" pitchFamily="34" charset="0"/>
-                <a:cs typeface="Arial" panose="020B0604020202020204" pitchFamily="34" charset="0"/>
-              </a:rPr>
-              <a:t>Will be in </a:t>
-            </a:r>
-            <a:r>
-              <a:rPr lang="en-US" b="1" dirty="0">
-                <a:latin typeface="Arial" panose="020B0604020202020204" pitchFamily="34" charset="0"/>
-                <a:cs typeface="Arial" panose="020B0604020202020204" pitchFamily="34" charset="0"/>
-              </a:rPr>
-              <a:t>THN E316 </a:t>
-            </a:r>
-            <a:r>
-              <a:rPr lang="en-US" dirty="0">
-                <a:latin typeface="Arial" panose="020B0604020202020204" pitchFamily="34" charset="0"/>
-                <a:cs typeface="Arial" panose="020B0604020202020204" pitchFamily="34" charset="0"/>
-              </a:rPr>
-              <a:t>on quiz weeks since attendance is higher</a:t>
-            </a:r>
-          </a:p>
-          <a:p>
-            <a:r>
-              <a:rPr lang="en-US" dirty="0">
-                <a:latin typeface="Arial" panose="020B0604020202020204" pitchFamily="34" charset="0"/>
-                <a:cs typeface="Arial" panose="020B0604020202020204" pitchFamily="34" charset="0"/>
-              </a:rPr>
-              <a:t>Lecture recordings are on Panopto</a:t>
-            </a:r>
-          </a:p>
-          <a:p>
-            <a:pPr lvl="1"/>
-            <a:r>
-              <a:rPr lang="en-US" dirty="0">
-                <a:latin typeface="Arial" panose="020B0604020202020204" pitchFamily="34" charset="0"/>
-                <a:cs typeface="Arial" panose="020B0604020202020204" pitchFamily="34" charset="0"/>
-              </a:rPr>
-              <a:t>There are folders for Floryan and Pettit (little hard to find but they are there)</a:t>
-            </a:r>
-          </a:p>
-          <a:p>
-            <a:r>
-              <a:rPr lang="en-US" dirty="0">
-                <a:latin typeface="Arial" panose="020B0604020202020204" pitchFamily="34" charset="0"/>
-                <a:cs typeface="Arial" panose="020B0604020202020204" pitchFamily="34" charset="0"/>
-              </a:rPr>
-              <a:t>Today we continue with module 4!</a:t>
-            </a:r>
-          </a:p>
-        </p:txBody>
-      </p:sp>
-    </p:spTree>
-    <p:extLst>
-      <p:ext uri="{BB962C8B-B14F-4D97-AF65-F5344CB8AC3E}">
-        <p14:creationId xmlns:p14="http://schemas.microsoft.com/office/powerpoint/2010/main" val="1735827982"/>
-      </p:ext>
-    </p:extLst>
-  </p:cSld>
-  <p:clrMapOvr>
-    <a:masterClrMapping/>
-  </p:clrMapOvr>
-</p:sld>
-</file>
-
-<file path=ppt/slides/slide16.xml><?xml version="1.0" encoding="utf-8"?>
-<p:sld xmlns:a="http://schemas.openxmlformats.org/drawingml/2006/main" xmlns:r="http://schemas.openxmlformats.org/officeDocument/2006/relationships" xmlns:p="http://schemas.openxmlformats.org/presentationml/2006/main">
-  <p:cSld>
-    <p:spTree>
-      <p:nvGrpSpPr>
-        <p:cNvPr id="1" name="">
-          <a:extLst>
-            <a:ext uri="{FF2B5EF4-FFF2-40B4-BE49-F238E27FC236}">
-              <a16:creationId xmlns:a16="http://schemas.microsoft.com/office/drawing/2014/main" id="{6D879659-F574-827E-92B7-225709E9DBFA}"/>
-            </a:ext>
-          </a:extLst>
-        </p:cNvPr>
-        <p:cNvGrpSpPr/>
-        <p:nvPr/>
-      </p:nvGrpSpPr>
-      <p:grpSpPr>
-        <a:xfrm>
-          <a:off x="0" y="0"/>
-          <a:ext cx="0" cy="0"/>
-          <a:chOff x="0" y="0"/>
-          <a:chExt cx="0" cy="0"/>
-        </a:xfrm>
-      </p:grpSpPr>
-      <p:sp>
-        <p:nvSpPr>
-          <p:cNvPr id="6146" name="Rectangle 2">
-            <a:extLst>
-              <a:ext uri="{FF2B5EF4-FFF2-40B4-BE49-F238E27FC236}">
-                <a16:creationId xmlns:a16="http://schemas.microsoft.com/office/drawing/2014/main" id="{A5F88625-BA0B-8EBF-195D-55F9260D71FC}"/>
-              </a:ext>
-            </a:extLst>
-          </p:cNvPr>
-          <p:cNvSpPr>
-            <a:spLocks noGrp="1" noChangeArrowheads="1"/>
-          </p:cNvSpPr>
-          <p:nvPr>
-            <p:ph type="title"/>
-            <p:custDataLst>
-              <p:tags r:id="rId1"/>
-            </p:custDataLst>
-          </p:nvPr>
-        </p:nvSpPr>
-        <p:spPr>
-          <a:xfrm>
-            <a:off x="1141413" y="284084"/>
-            <a:ext cx="9905998" cy="620791"/>
-          </a:xfrm>
-        </p:spPr>
-        <p:txBody>
-          <a:bodyPr/>
-          <a:lstStyle/>
-          <a:p>
-            <a:pPr algn="ctr"/>
-            <a:r>
-              <a:rPr lang="en-US" dirty="0"/>
-              <a:t>Lecture 17: Thursday, Nov 6</a:t>
-            </a:r>
-          </a:p>
-        </p:txBody>
-      </p:sp>
-      <p:sp>
-        <p:nvSpPr>
-          <p:cNvPr id="6147" name="Rectangle 3">
-            <a:extLst>
-              <a:ext uri="{FF2B5EF4-FFF2-40B4-BE49-F238E27FC236}">
-                <a16:creationId xmlns:a16="http://schemas.microsoft.com/office/drawing/2014/main" id="{7B51AFA1-4F7B-9CE5-A64F-1DA5BDAEE742}"/>
-              </a:ext>
-            </a:extLst>
-          </p:cNvPr>
-          <p:cNvSpPr>
-            <a:spLocks noGrp="1" noChangeArrowheads="1"/>
-          </p:cNvSpPr>
-          <p:nvPr>
-            <p:ph idx="1"/>
-            <p:custDataLst>
-              <p:tags r:id="rId2"/>
-            </p:custDataLst>
-          </p:nvPr>
-        </p:nvSpPr>
-        <p:spPr>
-          <a:xfrm>
-            <a:off x="1294151" y="1098548"/>
-            <a:ext cx="9905998" cy="5387311"/>
-          </a:xfrm>
-        </p:spPr>
-        <p:txBody>
-          <a:bodyPr>
-            <a:normAutofit fontScale="92500" lnSpcReduction="20000"/>
-          </a:bodyPr>
-          <a:lstStyle/>
-          <a:p>
-            <a:r>
-              <a:rPr lang="en-US" dirty="0">
-                <a:latin typeface="Arial" panose="020B0604020202020204" pitchFamily="34" charset="0"/>
-                <a:cs typeface="Arial" panose="020B0604020202020204" pitchFamily="34" charset="0"/>
-              </a:rPr>
-              <a:t>Second homework has been fully returned</a:t>
-            </a:r>
-          </a:p>
-          <a:p>
-            <a:r>
-              <a:rPr lang="en-US" dirty="0">
-                <a:latin typeface="Arial" panose="020B0604020202020204" pitchFamily="34" charset="0"/>
-                <a:cs typeface="Arial" panose="020B0604020202020204" pitchFamily="34" charset="0"/>
-              </a:rPr>
-              <a:t>Module 3 homework is in and on-time submissions are graded</a:t>
-            </a:r>
-          </a:p>
-          <a:p>
-            <a:pPr lvl="1"/>
-            <a:r>
-              <a:rPr lang="en-US" dirty="0">
-                <a:latin typeface="Arial" panose="020B0604020202020204" pitchFamily="34" charset="0"/>
-                <a:cs typeface="Arial" panose="020B0604020202020204" pitchFamily="34" charset="0"/>
-              </a:rPr>
-              <a:t>Late submissions being graded.</a:t>
-            </a:r>
-          </a:p>
-          <a:p>
-            <a:r>
-              <a:rPr lang="en-US" dirty="0">
-                <a:latin typeface="Arial" panose="020B0604020202020204" pitchFamily="34" charset="0"/>
-                <a:cs typeface="Arial" panose="020B0604020202020204" pitchFamily="34" charset="0"/>
-              </a:rPr>
-              <a:t>Quiz 3 is being graded tonight</a:t>
-            </a:r>
-          </a:p>
-          <a:p>
-            <a:pPr lvl="1"/>
-            <a:r>
-              <a:rPr lang="en-US" dirty="0">
-                <a:latin typeface="Arial" panose="020B0604020202020204" pitchFamily="34" charset="0"/>
-                <a:cs typeface="Arial" panose="020B0604020202020204" pitchFamily="34" charset="0"/>
-              </a:rPr>
-              <a:t>You should get your grade / feedback this evening. Stay tuned!</a:t>
-            </a:r>
-          </a:p>
-          <a:p>
-            <a:r>
-              <a:rPr lang="en-US" dirty="0">
-                <a:latin typeface="Arial" panose="020B0604020202020204" pitchFamily="34" charset="0"/>
-                <a:cs typeface="Arial" panose="020B0604020202020204" pitchFamily="34" charset="0"/>
-              </a:rPr>
-              <a:t>Please remember that I am asking for NO laptop / phones!</a:t>
-            </a:r>
-          </a:p>
-          <a:p>
-            <a:pPr lvl="1"/>
-            <a:r>
-              <a:rPr lang="en-US" dirty="0">
-                <a:latin typeface="Arial" panose="020B0604020202020204" pitchFamily="34" charset="0"/>
-                <a:cs typeface="Arial" panose="020B0604020202020204" pitchFamily="34" charset="0"/>
-              </a:rPr>
-              <a:t>This makes the learning environment better for everybody. I appreciate it!</a:t>
-            </a:r>
-          </a:p>
-          <a:p>
-            <a:r>
-              <a:rPr lang="en-US" dirty="0">
-                <a:latin typeface="Arial" panose="020B0604020202020204" pitchFamily="34" charset="0"/>
-                <a:cs typeface="Arial" panose="020B0604020202020204" pitchFamily="34" charset="0"/>
-              </a:rPr>
-              <a:t>Discussion Section: Chase will be holding every week</a:t>
-            </a:r>
-          </a:p>
-          <a:p>
-            <a:pPr lvl="1"/>
-            <a:r>
-              <a:rPr lang="en-US" dirty="0">
-                <a:latin typeface="Arial" panose="020B0604020202020204" pitchFamily="34" charset="0"/>
-                <a:cs typeface="Arial" panose="020B0604020202020204" pitchFamily="34" charset="0"/>
-              </a:rPr>
-              <a:t>Wednesday 4-5pm in Rice 110</a:t>
-            </a:r>
-          </a:p>
-          <a:p>
-            <a:pPr lvl="1"/>
-            <a:r>
-              <a:rPr lang="en-US" dirty="0">
-                <a:latin typeface="Arial" panose="020B0604020202020204" pitchFamily="34" charset="0"/>
-                <a:cs typeface="Arial" panose="020B0604020202020204" pitchFamily="34" charset="0"/>
-              </a:rPr>
-              <a:t>Will be in </a:t>
-            </a:r>
-            <a:r>
-              <a:rPr lang="en-US" b="1" dirty="0">
-                <a:latin typeface="Arial" panose="020B0604020202020204" pitchFamily="34" charset="0"/>
-                <a:cs typeface="Arial" panose="020B0604020202020204" pitchFamily="34" charset="0"/>
-              </a:rPr>
-              <a:t>THN E316 </a:t>
-            </a:r>
-            <a:r>
-              <a:rPr lang="en-US" dirty="0">
-                <a:latin typeface="Arial" panose="020B0604020202020204" pitchFamily="34" charset="0"/>
-                <a:cs typeface="Arial" panose="020B0604020202020204" pitchFamily="34" charset="0"/>
-              </a:rPr>
-              <a:t>on quiz weeks since attendance is higher</a:t>
-            </a:r>
-          </a:p>
-          <a:p>
-            <a:r>
-              <a:rPr lang="en-US" dirty="0">
-                <a:latin typeface="Arial" panose="020B0604020202020204" pitchFamily="34" charset="0"/>
-                <a:cs typeface="Arial" panose="020B0604020202020204" pitchFamily="34" charset="0"/>
-              </a:rPr>
-              <a:t>Lecture recordings are on Panopto</a:t>
-            </a:r>
-          </a:p>
-          <a:p>
-            <a:pPr lvl="1"/>
-            <a:r>
-              <a:rPr lang="en-US" dirty="0">
-                <a:latin typeface="Arial" panose="020B0604020202020204" pitchFamily="34" charset="0"/>
-                <a:cs typeface="Arial" panose="020B0604020202020204" pitchFamily="34" charset="0"/>
-              </a:rPr>
-              <a:t>There are folders for Floryan and Pettit (little hard to find but they are there)</a:t>
-            </a:r>
-          </a:p>
-          <a:p>
-            <a:r>
-              <a:rPr lang="en-US" dirty="0">
-                <a:latin typeface="Arial" panose="020B0604020202020204" pitchFamily="34" charset="0"/>
-                <a:cs typeface="Arial" panose="020B0604020202020204" pitchFamily="34" charset="0"/>
-              </a:rPr>
-              <a:t>Today we continue with module 4!</a:t>
-            </a:r>
-          </a:p>
-        </p:txBody>
-      </p:sp>
-    </p:spTree>
-    <p:extLst>
-      <p:ext uri="{BB962C8B-B14F-4D97-AF65-F5344CB8AC3E}">
-        <p14:creationId xmlns:p14="http://schemas.microsoft.com/office/powerpoint/2010/main" val="1230144144"/>
-      </p:ext>
-    </p:extLst>
-  </p:cSld>
-  <p:clrMapOvr>
-    <a:masterClrMapping/>
-  </p:clrMapOvr>
-</p:sld>
-</file>
-
-<file path=ppt/slides/slide17.xml><?xml version="1.0" encoding="utf-8"?>
-<p:sld xmlns:a="http://schemas.openxmlformats.org/drawingml/2006/main" xmlns:r="http://schemas.openxmlformats.org/officeDocument/2006/relationships" xmlns:p="http://schemas.openxmlformats.org/presentationml/2006/main">
-  <p:cSld>
-    <p:spTree>
-      <p:nvGrpSpPr>
-        <p:cNvPr id="1" name="">
-          <a:extLst>
-            <a:ext uri="{FF2B5EF4-FFF2-40B4-BE49-F238E27FC236}">
-              <a16:creationId xmlns:a16="http://schemas.microsoft.com/office/drawing/2014/main" id="{1488CC1B-C90A-4358-7DFC-E357744619B4}"/>
-            </a:ext>
-          </a:extLst>
-        </p:cNvPr>
-        <p:cNvGrpSpPr/>
-        <p:nvPr/>
-      </p:nvGrpSpPr>
-      <p:grpSpPr>
-        <a:xfrm>
-          <a:off x="0" y="0"/>
-          <a:ext cx="0" cy="0"/>
-          <a:chOff x="0" y="0"/>
-          <a:chExt cx="0" cy="0"/>
-        </a:xfrm>
-      </p:grpSpPr>
-      <p:sp>
-        <p:nvSpPr>
-          <p:cNvPr id="6146" name="Rectangle 2">
-            <a:extLst>
-              <a:ext uri="{FF2B5EF4-FFF2-40B4-BE49-F238E27FC236}">
-                <a16:creationId xmlns:a16="http://schemas.microsoft.com/office/drawing/2014/main" id="{BE407FFB-7DE3-1D4A-C7F9-92B125FDAD05}"/>
-              </a:ext>
-            </a:extLst>
-          </p:cNvPr>
-          <p:cNvSpPr>
-            <a:spLocks noGrp="1" noChangeArrowheads="1"/>
-          </p:cNvSpPr>
-          <p:nvPr>
-            <p:ph type="title"/>
-            <p:custDataLst>
-              <p:tags r:id="rId1"/>
-            </p:custDataLst>
-          </p:nvPr>
-        </p:nvSpPr>
-        <p:spPr>
-          <a:xfrm>
-            <a:off x="1141413" y="284084"/>
-            <a:ext cx="9905998" cy="620791"/>
-          </a:xfrm>
-        </p:spPr>
-        <p:txBody>
-          <a:bodyPr/>
-          <a:lstStyle/>
-          <a:p>
-            <a:pPr algn="ctr"/>
-            <a:r>
-              <a:rPr lang="en-US" dirty="0"/>
-              <a:t>Lecture 18: Tuesday, Nov 11</a:t>
-            </a:r>
-          </a:p>
-        </p:txBody>
-      </p:sp>
-      <p:sp>
-        <p:nvSpPr>
-          <p:cNvPr id="6147" name="Rectangle 3">
-            <a:extLst>
-              <a:ext uri="{FF2B5EF4-FFF2-40B4-BE49-F238E27FC236}">
-                <a16:creationId xmlns:a16="http://schemas.microsoft.com/office/drawing/2014/main" id="{54F1EDA9-B5F6-B35E-B6CC-809EA183A345}"/>
-              </a:ext>
-            </a:extLst>
-          </p:cNvPr>
-          <p:cNvSpPr>
-            <a:spLocks noGrp="1" noChangeArrowheads="1"/>
-          </p:cNvSpPr>
-          <p:nvPr>
-            <p:ph idx="1"/>
-            <p:custDataLst>
-              <p:tags r:id="rId2"/>
-            </p:custDataLst>
-          </p:nvPr>
-        </p:nvSpPr>
-        <p:spPr>
-          <a:xfrm>
-            <a:off x="1294151" y="1098548"/>
-            <a:ext cx="9905998" cy="5387311"/>
-          </a:xfrm>
-        </p:spPr>
-        <p:txBody>
-          <a:bodyPr>
-            <a:normAutofit fontScale="92500" lnSpcReduction="20000"/>
-          </a:bodyPr>
-          <a:lstStyle/>
-          <a:p>
-            <a:r>
-              <a:rPr lang="en-US" dirty="0">
-                <a:latin typeface="Arial" panose="020B0604020202020204" pitchFamily="34" charset="0"/>
-                <a:cs typeface="Arial" panose="020B0604020202020204" pitchFamily="34" charset="0"/>
-              </a:rPr>
-              <a:t>Module 3 homework is in and on-time submissions are graded</a:t>
-            </a:r>
-          </a:p>
-          <a:p>
-            <a:pPr lvl="1"/>
-            <a:r>
-              <a:rPr lang="en-US" dirty="0">
-                <a:latin typeface="Arial" panose="020B0604020202020204" pitchFamily="34" charset="0"/>
-                <a:cs typeface="Arial" panose="020B0604020202020204" pitchFamily="34" charset="0"/>
-              </a:rPr>
-              <a:t>Late submissions being graded.</a:t>
-            </a:r>
-          </a:p>
-          <a:p>
-            <a:r>
-              <a:rPr lang="en-US" dirty="0">
-                <a:latin typeface="Arial" panose="020B0604020202020204" pitchFamily="34" charset="0"/>
-                <a:cs typeface="Arial" panose="020B0604020202020204" pitchFamily="34" charset="0"/>
-              </a:rPr>
-              <a:t>Quiz 3 is returned</a:t>
-            </a:r>
-          </a:p>
-          <a:p>
-            <a:pPr lvl="1"/>
-            <a:r>
-              <a:rPr lang="en-US" dirty="0">
-                <a:latin typeface="Arial" panose="020B0604020202020204" pitchFamily="34" charset="0"/>
-                <a:cs typeface="Arial" panose="020B0604020202020204" pitchFamily="34" charset="0"/>
-              </a:rPr>
-              <a:t>Regrades will be turned on this week, stay tuned</a:t>
-            </a:r>
-          </a:p>
-          <a:p>
-            <a:r>
-              <a:rPr lang="en-US" dirty="0">
-                <a:latin typeface="Arial" panose="020B0604020202020204" pitchFamily="34" charset="0"/>
-                <a:cs typeface="Arial" panose="020B0604020202020204" pitchFamily="34" charset="0"/>
-              </a:rPr>
-              <a:t>Module 4 homework is due THIS Thursday!!</a:t>
-            </a:r>
-          </a:p>
-          <a:p>
-            <a:r>
-              <a:rPr lang="en-US" dirty="0">
-                <a:latin typeface="Arial" panose="020B0604020202020204" pitchFamily="34" charset="0"/>
-                <a:cs typeface="Arial" panose="020B0604020202020204" pitchFamily="34" charset="0"/>
-              </a:rPr>
-              <a:t>Please remember that I am asking for NO laptop / phones!</a:t>
-            </a:r>
-          </a:p>
-          <a:p>
-            <a:pPr lvl="1"/>
-            <a:r>
-              <a:rPr lang="en-US" dirty="0">
-                <a:latin typeface="Arial" panose="020B0604020202020204" pitchFamily="34" charset="0"/>
-                <a:cs typeface="Arial" panose="020B0604020202020204" pitchFamily="34" charset="0"/>
-              </a:rPr>
-              <a:t>This makes the learning environment better for everybody. I appreciate it!</a:t>
-            </a:r>
-          </a:p>
-          <a:p>
-            <a:r>
-              <a:rPr lang="en-US" dirty="0">
-                <a:latin typeface="Arial" panose="020B0604020202020204" pitchFamily="34" charset="0"/>
-                <a:cs typeface="Arial" panose="020B0604020202020204" pitchFamily="34" charset="0"/>
-              </a:rPr>
-              <a:t>Discussion Section: Chase will be holding every week</a:t>
-            </a:r>
-          </a:p>
-          <a:p>
-            <a:pPr lvl="1"/>
-            <a:r>
-              <a:rPr lang="en-US" dirty="0">
-                <a:latin typeface="Arial" panose="020B0604020202020204" pitchFamily="34" charset="0"/>
-                <a:cs typeface="Arial" panose="020B0604020202020204" pitchFamily="34" charset="0"/>
-              </a:rPr>
-              <a:t>Wednesday 4-5pm in Rice 110</a:t>
-            </a:r>
-          </a:p>
-          <a:p>
-            <a:pPr lvl="1"/>
-            <a:r>
-              <a:rPr lang="en-US" dirty="0">
-                <a:latin typeface="Arial" panose="020B0604020202020204" pitchFamily="34" charset="0"/>
-                <a:cs typeface="Arial" panose="020B0604020202020204" pitchFamily="34" charset="0"/>
-              </a:rPr>
-              <a:t>Will be in </a:t>
-            </a:r>
-            <a:r>
-              <a:rPr lang="en-US" b="1" dirty="0">
-                <a:latin typeface="Arial" panose="020B0604020202020204" pitchFamily="34" charset="0"/>
-                <a:cs typeface="Arial" panose="020B0604020202020204" pitchFamily="34" charset="0"/>
-              </a:rPr>
-              <a:t>THN E316 </a:t>
-            </a:r>
-            <a:r>
-              <a:rPr lang="en-US" dirty="0">
-                <a:latin typeface="Arial" panose="020B0604020202020204" pitchFamily="34" charset="0"/>
-                <a:cs typeface="Arial" panose="020B0604020202020204" pitchFamily="34" charset="0"/>
-              </a:rPr>
-              <a:t>on quiz weeks since attendance is higher</a:t>
-            </a:r>
-          </a:p>
-          <a:p>
-            <a:r>
-              <a:rPr lang="en-US" dirty="0">
-                <a:latin typeface="Arial" panose="020B0604020202020204" pitchFamily="34" charset="0"/>
-                <a:cs typeface="Arial" panose="020B0604020202020204" pitchFamily="34" charset="0"/>
-              </a:rPr>
-              <a:t>Lecture recordings are on Panopto</a:t>
-            </a:r>
-          </a:p>
-          <a:p>
-            <a:pPr lvl="1"/>
-            <a:r>
-              <a:rPr lang="en-US" dirty="0">
-                <a:latin typeface="Arial" panose="020B0604020202020204" pitchFamily="34" charset="0"/>
-                <a:cs typeface="Arial" panose="020B0604020202020204" pitchFamily="34" charset="0"/>
-              </a:rPr>
-              <a:t>There are folders for Floryan and Pettit (little hard to find but they are there)</a:t>
-            </a:r>
-          </a:p>
-          <a:p>
-            <a:r>
-              <a:rPr lang="en-US" dirty="0">
-                <a:latin typeface="Arial" panose="020B0604020202020204" pitchFamily="34" charset="0"/>
-                <a:cs typeface="Arial" panose="020B0604020202020204" pitchFamily="34" charset="0"/>
-              </a:rPr>
-              <a:t>Today we continue with module 4!</a:t>
-            </a:r>
-          </a:p>
-        </p:txBody>
-      </p:sp>
-    </p:spTree>
-    <p:extLst>
-      <p:ext uri="{BB962C8B-B14F-4D97-AF65-F5344CB8AC3E}">
-        <p14:creationId xmlns:p14="http://schemas.microsoft.com/office/powerpoint/2010/main" val="1301499389"/>
-      </p:ext>
-    </p:extLst>
-  </p:cSld>
-  <p:clrMapOvr>
-    <a:masterClrMapping/>
-  </p:clrMapOvr>
-</p:sld>
-</file>
-
-<file path=ppt/slides/slide18.xml><?xml version="1.0" encoding="utf-8"?>
-<p:sld xmlns:a="http://schemas.openxmlformats.org/drawingml/2006/main" xmlns:r="http://schemas.openxmlformats.org/officeDocument/2006/relationships" xmlns:p="http://schemas.openxmlformats.org/presentationml/2006/main">
-  <p:cSld>
-    <p:spTree>
-      <p:nvGrpSpPr>
-        <p:cNvPr id="1" name="">
-          <a:extLst>
-            <a:ext uri="{FF2B5EF4-FFF2-40B4-BE49-F238E27FC236}">
-              <a16:creationId xmlns:a16="http://schemas.microsoft.com/office/drawing/2014/main" id="{587FCE47-66D0-107F-1672-4B55CC033646}"/>
-            </a:ext>
-          </a:extLst>
-        </p:cNvPr>
-        <p:cNvGrpSpPr/>
-        <p:nvPr/>
-      </p:nvGrpSpPr>
-      <p:grpSpPr>
-        <a:xfrm>
-          <a:off x="0" y="0"/>
-          <a:ext cx="0" cy="0"/>
-          <a:chOff x="0" y="0"/>
-          <a:chExt cx="0" cy="0"/>
-        </a:xfrm>
-      </p:grpSpPr>
-      <p:sp>
-        <p:nvSpPr>
-          <p:cNvPr id="6146" name="Rectangle 2">
-            <a:extLst>
-              <a:ext uri="{FF2B5EF4-FFF2-40B4-BE49-F238E27FC236}">
-                <a16:creationId xmlns:a16="http://schemas.microsoft.com/office/drawing/2014/main" id="{F2877BCB-7397-1989-7746-FED26A14C587}"/>
-              </a:ext>
-            </a:extLst>
-          </p:cNvPr>
-          <p:cNvSpPr>
-            <a:spLocks noGrp="1" noChangeArrowheads="1"/>
-          </p:cNvSpPr>
-          <p:nvPr>
-            <p:ph type="title"/>
-            <p:custDataLst>
-              <p:tags r:id="rId1"/>
-            </p:custDataLst>
-          </p:nvPr>
-        </p:nvSpPr>
-        <p:spPr>
-          <a:xfrm>
-            <a:off x="1141413" y="284084"/>
-            <a:ext cx="9905998" cy="620791"/>
-          </a:xfrm>
-        </p:spPr>
-        <p:txBody>
-          <a:bodyPr/>
-          <a:lstStyle/>
-          <a:p>
-            <a:pPr algn="ctr"/>
-            <a:r>
-              <a:rPr lang="en-US" dirty="0"/>
-              <a:t>Lecture 19: Thursday, Nov 13</a:t>
-            </a:r>
-          </a:p>
-        </p:txBody>
-      </p:sp>
-      <p:sp>
-        <p:nvSpPr>
-          <p:cNvPr id="6147" name="Rectangle 3">
-            <a:extLst>
-              <a:ext uri="{FF2B5EF4-FFF2-40B4-BE49-F238E27FC236}">
-                <a16:creationId xmlns:a16="http://schemas.microsoft.com/office/drawing/2014/main" id="{3739E882-6477-8F3F-56E7-1EBC906FA018}"/>
-              </a:ext>
-            </a:extLst>
-          </p:cNvPr>
-          <p:cNvSpPr>
-            <a:spLocks noGrp="1" noChangeArrowheads="1"/>
-          </p:cNvSpPr>
-          <p:nvPr>
-            <p:ph idx="1"/>
-            <p:custDataLst>
-              <p:tags r:id="rId2"/>
-            </p:custDataLst>
-          </p:nvPr>
-        </p:nvSpPr>
-        <p:spPr>
-          <a:xfrm>
-            <a:off x="1294151" y="1098548"/>
-            <a:ext cx="9905998" cy="5387311"/>
-          </a:xfrm>
-        </p:spPr>
-        <p:txBody>
-          <a:bodyPr>
-            <a:normAutofit fontScale="85000" lnSpcReduction="20000"/>
-          </a:bodyPr>
-          <a:lstStyle/>
-          <a:p>
-            <a:r>
-              <a:rPr lang="en-US" dirty="0">
-                <a:latin typeface="Arial" panose="020B0604020202020204" pitchFamily="34" charset="0"/>
-                <a:cs typeface="Arial" panose="020B0604020202020204" pitchFamily="34" charset="0"/>
-              </a:rPr>
-              <a:t>Module 3 homework is in and on-time submissions are graded</a:t>
-            </a:r>
-          </a:p>
-          <a:p>
-            <a:pPr lvl="1"/>
-            <a:r>
-              <a:rPr lang="en-US" dirty="0">
-                <a:latin typeface="Arial" panose="020B0604020202020204" pitchFamily="34" charset="0"/>
-                <a:cs typeface="Arial" panose="020B0604020202020204" pitchFamily="34" charset="0"/>
-              </a:rPr>
-              <a:t>Late submissions being graded.</a:t>
-            </a:r>
-          </a:p>
-          <a:p>
-            <a:r>
-              <a:rPr lang="en-US" dirty="0">
-                <a:latin typeface="Arial" panose="020B0604020202020204" pitchFamily="34" charset="0"/>
-                <a:cs typeface="Arial" panose="020B0604020202020204" pitchFamily="34" charset="0"/>
-              </a:rPr>
-              <a:t>Quiz 3 is returned</a:t>
-            </a:r>
-          </a:p>
-          <a:p>
-            <a:pPr lvl="1"/>
-            <a:r>
-              <a:rPr lang="en-US" dirty="0">
-                <a:latin typeface="Arial" panose="020B0604020202020204" pitchFamily="34" charset="0"/>
-                <a:cs typeface="Arial" panose="020B0604020202020204" pitchFamily="34" charset="0"/>
-              </a:rPr>
-              <a:t>Regrades are ON and turn of tomorrow (Friday) at noon</a:t>
-            </a:r>
-          </a:p>
-          <a:p>
-            <a:r>
-              <a:rPr lang="en-US" dirty="0">
-                <a:latin typeface="Arial" panose="020B0604020202020204" pitchFamily="34" charset="0"/>
-                <a:cs typeface="Arial" panose="020B0604020202020204" pitchFamily="34" charset="0"/>
-              </a:rPr>
-              <a:t>Module 4 homework is due today!!</a:t>
-            </a:r>
-          </a:p>
-          <a:p>
-            <a:pPr lvl="1"/>
-            <a:r>
-              <a:rPr lang="en-US" dirty="0">
-                <a:latin typeface="Arial" panose="020B0604020202020204" pitchFamily="34" charset="0"/>
-                <a:cs typeface="Arial" panose="020B0604020202020204" pitchFamily="34" charset="0"/>
-              </a:rPr>
-              <a:t>You should NOT do #7, we will go over the solution today together</a:t>
-            </a:r>
-          </a:p>
-          <a:p>
-            <a:r>
-              <a:rPr lang="en-US" dirty="0">
-                <a:latin typeface="Arial" panose="020B0604020202020204" pitchFamily="34" charset="0"/>
-                <a:cs typeface="Arial" panose="020B0604020202020204" pitchFamily="34" charset="0"/>
-              </a:rPr>
-              <a:t>Please remember that I am asking for NO laptop / phones!</a:t>
-            </a:r>
-          </a:p>
-          <a:p>
-            <a:pPr lvl="1"/>
-            <a:r>
-              <a:rPr lang="en-US" dirty="0">
-                <a:latin typeface="Arial" panose="020B0604020202020204" pitchFamily="34" charset="0"/>
-                <a:cs typeface="Arial" panose="020B0604020202020204" pitchFamily="34" charset="0"/>
-              </a:rPr>
-              <a:t>This makes the learning environment better for everybody. I appreciate it!</a:t>
-            </a:r>
-          </a:p>
-          <a:p>
-            <a:r>
-              <a:rPr lang="en-US" dirty="0">
-                <a:latin typeface="Arial" panose="020B0604020202020204" pitchFamily="34" charset="0"/>
-                <a:cs typeface="Arial" panose="020B0604020202020204" pitchFamily="34" charset="0"/>
-              </a:rPr>
-              <a:t>Discussion Section: Chase will be holding every week</a:t>
-            </a:r>
-          </a:p>
-          <a:p>
-            <a:pPr lvl="1"/>
-            <a:r>
-              <a:rPr lang="en-US" dirty="0">
-                <a:latin typeface="Arial" panose="020B0604020202020204" pitchFamily="34" charset="0"/>
-                <a:cs typeface="Arial" panose="020B0604020202020204" pitchFamily="34" charset="0"/>
-              </a:rPr>
-              <a:t>Wednesday 4-5pm in Rice 110</a:t>
-            </a:r>
-          </a:p>
-          <a:p>
-            <a:pPr lvl="1"/>
-            <a:r>
-              <a:rPr lang="en-US" dirty="0">
-                <a:latin typeface="Arial" panose="020B0604020202020204" pitchFamily="34" charset="0"/>
-                <a:cs typeface="Arial" panose="020B0604020202020204" pitchFamily="34" charset="0"/>
-              </a:rPr>
-              <a:t>Will be in </a:t>
-            </a:r>
-            <a:r>
-              <a:rPr lang="en-US" b="1" dirty="0">
-                <a:latin typeface="Arial" panose="020B0604020202020204" pitchFamily="34" charset="0"/>
-                <a:cs typeface="Arial" panose="020B0604020202020204" pitchFamily="34" charset="0"/>
-              </a:rPr>
-              <a:t>THN E316 </a:t>
-            </a:r>
-            <a:r>
-              <a:rPr lang="en-US" dirty="0">
-                <a:latin typeface="Arial" panose="020B0604020202020204" pitchFamily="34" charset="0"/>
-                <a:cs typeface="Arial" panose="020B0604020202020204" pitchFamily="34" charset="0"/>
-              </a:rPr>
-              <a:t>on quiz weeks since attendance is higher</a:t>
-            </a:r>
-          </a:p>
-          <a:p>
-            <a:r>
-              <a:rPr lang="en-US" dirty="0">
-                <a:latin typeface="Arial" panose="020B0604020202020204" pitchFamily="34" charset="0"/>
-                <a:cs typeface="Arial" panose="020B0604020202020204" pitchFamily="34" charset="0"/>
-              </a:rPr>
-              <a:t>Lecture recordings are on Panopto</a:t>
-            </a:r>
-          </a:p>
-          <a:p>
-            <a:pPr lvl="1"/>
-            <a:r>
-              <a:rPr lang="en-US" dirty="0">
-                <a:latin typeface="Arial" panose="020B0604020202020204" pitchFamily="34" charset="0"/>
-                <a:cs typeface="Arial" panose="020B0604020202020204" pitchFamily="34" charset="0"/>
-              </a:rPr>
-              <a:t>There are folders for Floryan and Pettit (little hard to find but they are there)</a:t>
-            </a:r>
-          </a:p>
-          <a:p>
-            <a:r>
-              <a:rPr lang="en-US" dirty="0">
-                <a:latin typeface="Arial" panose="020B0604020202020204" pitchFamily="34" charset="0"/>
-                <a:cs typeface="Arial" panose="020B0604020202020204" pitchFamily="34" charset="0"/>
-              </a:rPr>
-              <a:t>Today we finish module 4!</a:t>
-            </a:r>
-          </a:p>
-        </p:txBody>
-      </p:sp>
-    </p:spTree>
-    <p:extLst>
-      <p:ext uri="{BB962C8B-B14F-4D97-AF65-F5344CB8AC3E}">
-        <p14:creationId xmlns:p14="http://schemas.microsoft.com/office/powerpoint/2010/main" val="213561816"/>
-      </p:ext>
-    </p:extLst>
-  </p:cSld>
-  <p:clrMapOvr>
-    <a:masterClrMapping/>
-  </p:clrMapOvr>
-</p:sld>
-</file>
-
-<file path=ppt/slides/slide19.xml><?xml version="1.0" encoding="utf-8"?>
-<p:sld xmlns:a="http://schemas.openxmlformats.org/drawingml/2006/main" xmlns:r="http://schemas.openxmlformats.org/officeDocument/2006/relationships" xmlns:p="http://schemas.openxmlformats.org/presentationml/2006/main">
-  <p:cSld>
-    <p:spTree>
-      <p:nvGrpSpPr>
-        <p:cNvPr id="1" name="">
-          <a:extLst>
-            <a:ext uri="{FF2B5EF4-FFF2-40B4-BE49-F238E27FC236}">
-              <a16:creationId xmlns:a16="http://schemas.microsoft.com/office/drawing/2014/main" id="{CCE2522F-8802-3EE7-3F33-955A15C4F065}"/>
-            </a:ext>
-          </a:extLst>
-        </p:cNvPr>
-        <p:cNvGrpSpPr/>
-        <p:nvPr/>
-      </p:nvGrpSpPr>
-      <p:grpSpPr>
-        <a:xfrm>
-          <a:off x="0" y="0"/>
-          <a:ext cx="0" cy="0"/>
-          <a:chOff x="0" y="0"/>
-          <a:chExt cx="0" cy="0"/>
-        </a:xfrm>
-      </p:grpSpPr>
-      <p:sp>
-        <p:nvSpPr>
-          <p:cNvPr id="6146" name="Rectangle 2">
-            <a:extLst>
-              <a:ext uri="{FF2B5EF4-FFF2-40B4-BE49-F238E27FC236}">
-                <a16:creationId xmlns:a16="http://schemas.microsoft.com/office/drawing/2014/main" id="{DAC9D42C-A043-14E8-9BFE-BCD3C133554B}"/>
-              </a:ext>
-            </a:extLst>
-          </p:cNvPr>
-          <p:cNvSpPr>
-            <a:spLocks noGrp="1" noChangeArrowheads="1"/>
-          </p:cNvSpPr>
-          <p:nvPr>
-            <p:ph type="title"/>
-            <p:custDataLst>
-              <p:tags r:id="rId1"/>
-            </p:custDataLst>
-          </p:nvPr>
-        </p:nvSpPr>
-        <p:spPr>
-          <a:xfrm>
-            <a:off x="1141413" y="284084"/>
-            <a:ext cx="9905998" cy="620791"/>
-          </a:xfrm>
-        </p:spPr>
-        <p:txBody>
-          <a:bodyPr/>
-          <a:lstStyle/>
-          <a:p>
-            <a:pPr algn="ctr"/>
-            <a:r>
-              <a:rPr lang="en-US" dirty="0"/>
-              <a:t>Lecture 20: Tuesday, Nov 18</a:t>
-            </a:r>
-          </a:p>
-        </p:txBody>
-      </p:sp>
-      <p:sp>
-        <p:nvSpPr>
-          <p:cNvPr id="6147" name="Rectangle 3">
-            <a:extLst>
-              <a:ext uri="{FF2B5EF4-FFF2-40B4-BE49-F238E27FC236}">
-                <a16:creationId xmlns:a16="http://schemas.microsoft.com/office/drawing/2014/main" id="{A78D9B83-FDA6-29E7-D5E8-77EBC602083F}"/>
-              </a:ext>
-            </a:extLst>
-          </p:cNvPr>
-          <p:cNvSpPr>
-            <a:spLocks noGrp="1" noChangeArrowheads="1"/>
-          </p:cNvSpPr>
-          <p:nvPr>
-            <p:ph idx="1"/>
-            <p:custDataLst>
-              <p:tags r:id="rId2"/>
-            </p:custDataLst>
-          </p:nvPr>
-        </p:nvSpPr>
-        <p:spPr>
-          <a:xfrm>
-            <a:off x="1294151" y="1098548"/>
-            <a:ext cx="9905998" cy="5387311"/>
-          </a:xfrm>
-        </p:spPr>
-        <p:txBody>
-          <a:bodyPr>
-            <a:normAutofit fontScale="92500" lnSpcReduction="20000"/>
-          </a:bodyPr>
-          <a:lstStyle/>
-          <a:p>
-            <a:r>
-              <a:rPr lang="en-US" dirty="0">
-                <a:latin typeface="Arial" panose="020B0604020202020204" pitchFamily="34" charset="0"/>
-                <a:cs typeface="Arial" panose="020B0604020202020204" pitchFamily="34" charset="0"/>
-              </a:rPr>
-              <a:t>Module 3 homework fully graded.</a:t>
-            </a:r>
-          </a:p>
-          <a:p>
-            <a:r>
-              <a:rPr lang="en-US" dirty="0">
-                <a:latin typeface="Arial" panose="020B0604020202020204" pitchFamily="34" charset="0"/>
-                <a:cs typeface="Arial" panose="020B0604020202020204" pitchFamily="34" charset="0"/>
-              </a:rPr>
-              <a:t>Module 4 homework is being graded. On time submissions should be done soon.</a:t>
-            </a:r>
-          </a:p>
-          <a:p>
-            <a:r>
-              <a:rPr lang="en-US" dirty="0">
-                <a:latin typeface="Arial" panose="020B0604020202020204" pitchFamily="34" charset="0"/>
-                <a:cs typeface="Arial" panose="020B0604020202020204" pitchFamily="34" charset="0"/>
-              </a:rPr>
-              <a:t>Quiz 3 is returned</a:t>
-            </a:r>
-          </a:p>
-          <a:p>
-            <a:pPr lvl="1"/>
-            <a:r>
-              <a:rPr lang="en-US" dirty="0">
-                <a:latin typeface="Arial" panose="020B0604020202020204" pitchFamily="34" charset="0"/>
-                <a:cs typeface="Arial" panose="020B0604020202020204" pitchFamily="34" charset="0"/>
-              </a:rPr>
-              <a:t>Regrades are now off</a:t>
-            </a:r>
-          </a:p>
-          <a:p>
-            <a:r>
-              <a:rPr lang="en-US" dirty="0">
-                <a:latin typeface="Arial" panose="020B0604020202020204" pitchFamily="34" charset="0"/>
-                <a:cs typeface="Arial" panose="020B0604020202020204" pitchFamily="34" charset="0"/>
-              </a:rPr>
-              <a:t>Please remember that I am asking for NO laptop / phones!</a:t>
-            </a:r>
-          </a:p>
-          <a:p>
-            <a:pPr lvl="1"/>
-            <a:r>
-              <a:rPr lang="en-US" dirty="0">
-                <a:latin typeface="Arial" panose="020B0604020202020204" pitchFamily="34" charset="0"/>
-                <a:cs typeface="Arial" panose="020B0604020202020204" pitchFamily="34" charset="0"/>
-              </a:rPr>
-              <a:t>This makes the learning environment better for everybody. I appreciate it!</a:t>
-            </a:r>
-          </a:p>
-          <a:p>
-            <a:r>
-              <a:rPr lang="en-US" dirty="0">
-                <a:latin typeface="Arial" panose="020B0604020202020204" pitchFamily="34" charset="0"/>
-                <a:cs typeface="Arial" panose="020B0604020202020204" pitchFamily="34" charset="0"/>
-              </a:rPr>
-              <a:t>Discussion Section: Chase will be holding every week</a:t>
-            </a:r>
-          </a:p>
-          <a:p>
-            <a:pPr lvl="1"/>
-            <a:r>
-              <a:rPr lang="en-US" dirty="0">
-                <a:latin typeface="Arial" panose="020B0604020202020204" pitchFamily="34" charset="0"/>
-                <a:cs typeface="Arial" panose="020B0604020202020204" pitchFamily="34" charset="0"/>
-              </a:rPr>
-              <a:t>Wednesday 4-5pm in Rice 110</a:t>
-            </a:r>
-          </a:p>
-          <a:p>
-            <a:pPr lvl="1"/>
-            <a:r>
-              <a:rPr lang="en-US" dirty="0">
-                <a:latin typeface="Arial" panose="020B0604020202020204" pitchFamily="34" charset="0"/>
-                <a:cs typeface="Arial" panose="020B0604020202020204" pitchFamily="34" charset="0"/>
-              </a:rPr>
-              <a:t>Will be in </a:t>
-            </a:r>
-            <a:r>
-              <a:rPr lang="en-US" b="1" dirty="0">
-                <a:latin typeface="Arial" panose="020B0604020202020204" pitchFamily="34" charset="0"/>
-                <a:cs typeface="Arial" panose="020B0604020202020204" pitchFamily="34" charset="0"/>
-              </a:rPr>
-              <a:t>THN E316 </a:t>
-            </a:r>
-            <a:r>
-              <a:rPr lang="en-US" dirty="0">
-                <a:latin typeface="Arial" panose="020B0604020202020204" pitchFamily="34" charset="0"/>
-                <a:cs typeface="Arial" panose="020B0604020202020204" pitchFamily="34" charset="0"/>
-              </a:rPr>
-              <a:t>on quiz weeks since attendance is higher</a:t>
-            </a:r>
-          </a:p>
-          <a:p>
-            <a:r>
-              <a:rPr lang="en-US" dirty="0">
-                <a:latin typeface="Arial" panose="020B0604020202020204" pitchFamily="34" charset="0"/>
-                <a:cs typeface="Arial" panose="020B0604020202020204" pitchFamily="34" charset="0"/>
-              </a:rPr>
-              <a:t>Lecture recordings are on Panopto</a:t>
-            </a:r>
-          </a:p>
-          <a:p>
-            <a:pPr lvl="1"/>
-            <a:r>
-              <a:rPr lang="en-US" dirty="0">
-                <a:latin typeface="Arial" panose="020B0604020202020204" pitchFamily="34" charset="0"/>
-                <a:cs typeface="Arial" panose="020B0604020202020204" pitchFamily="34" charset="0"/>
-              </a:rPr>
-              <a:t>There are folders for Floryan and Pettit (little hard to find but they are there)</a:t>
-            </a:r>
-          </a:p>
-          <a:p>
-            <a:r>
-              <a:rPr lang="en-US" dirty="0">
-                <a:latin typeface="Arial" panose="020B0604020202020204" pitchFamily="34" charset="0"/>
-                <a:cs typeface="Arial" panose="020B0604020202020204" pitchFamily="34" charset="0"/>
-              </a:rPr>
-              <a:t>Today we start module 5!</a:t>
-            </a:r>
-          </a:p>
-        </p:txBody>
-      </p:sp>
-    </p:spTree>
-    <p:extLst>
-      <p:ext uri="{BB962C8B-B14F-4D97-AF65-F5344CB8AC3E}">
-        <p14:creationId xmlns:p14="http://schemas.microsoft.com/office/powerpoint/2010/main" val="3104379270"/>
-      </p:ext>
-    </p:extLst>
-  </p:cSld>
-  <p:clrMapOvr>
-    <a:masterClrMapping/>
-  </p:clrMapOvr>
-</p:sld>
-</file>
-
 <file path=ppt/slides/slide2.xml><?xml version="1.0" encoding="utf-8"?>
 <p:sld xmlns:a="http://schemas.openxmlformats.org/drawingml/2006/main" xmlns:r="http://schemas.openxmlformats.org/officeDocument/2006/relationships" xmlns:p="http://schemas.openxmlformats.org/presentationml/2006/main">
   <p:cSld>
@@ -15486,7 +13026,7 @@
             <a:pPr algn="ctr"/>
             <a:r>
               <a:rPr lang="en-US" dirty="0"/>
-              <a:t>Lecture 3: Tuesday, Sep 2</a:t>
+              <a:t>Week 1: Tuesday</a:t>
             </a:r>
           </a:p>
         </p:txBody>
@@ -15512,7 +13052,7 @@
         </p:spPr>
         <p:txBody>
           <a:bodyPr>
-            <a:normAutofit lnSpcReduction="10000"/>
+            <a:normAutofit/>
           </a:bodyPr>
           <a:lstStyle/>
           <a:p>
@@ -15521,7 +13061,7 @@
                 <a:latin typeface="Arial" panose="020B0604020202020204" pitchFamily="34" charset="0"/>
                 <a:cs typeface="Arial" panose="020B0604020202020204" pitchFamily="34" charset="0"/>
               </a:rPr>
-              <a:t>First homework is due NEXT Thursday evening at midnight</a:t>
+              <a:t>First homework is due Tomorrow evening (Wednesday)</a:t>
             </a:r>
           </a:p>
           <a:p>
@@ -15531,7 +13071,7 @@
                 <a:latin typeface="Arial" panose="020B0604020202020204" pitchFamily="34" charset="0"/>
                 <a:cs typeface="Arial" panose="020B0604020202020204" pitchFamily="34" charset="0"/>
               </a:rPr>
-              <a:t>You have plenty of time, but you might want to glance at it</a:t>
+              <a:t>3 day extension if you really need it but you really should try not to use it for this one.</a:t>
             </a:r>
           </a:p>
           <a:p>
@@ -15559,55 +13099,16 @@
                 <a:latin typeface="Arial" panose="020B0604020202020204" pitchFamily="34" charset="0"/>
                 <a:cs typeface="Arial" panose="020B0604020202020204" pitchFamily="34" charset="0"/>
               </a:rPr>
-              <a:t>Lecture recordings are on Panopto</a:t>
+              <a:t>I’ll start properly taking attendance today.</a:t>
             </a:r>
           </a:p>
           <a:p>
-            <a:pPr lvl="1"/>
             <a:r>
               <a:rPr lang="en-US" dirty="0">
                 <a:latin typeface="Arial" panose="020B0604020202020204" pitchFamily="34" charset="0"/>
                 <a:cs typeface="Arial" panose="020B0604020202020204" pitchFamily="34" charset="0"/>
               </a:rPr>
-              <a:t>There are folders for Floryan and Pettit (little hard to find but they are there)</a:t>
-            </a:r>
-          </a:p>
-          <a:p>
-            <a:r>
-              <a:rPr lang="en-US" dirty="0">
-                <a:latin typeface="Arial" panose="020B0604020202020204" pitchFamily="34" charset="0"/>
-                <a:cs typeface="Arial" panose="020B0604020202020204" pitchFamily="34" charset="0"/>
-              </a:rPr>
-              <a:t>Last Thursday</a:t>
-            </a:r>
-          </a:p>
-          <a:p>
-            <a:pPr lvl="1"/>
-            <a:r>
-              <a:rPr lang="en-US" dirty="0">
-                <a:latin typeface="Arial" panose="020B0604020202020204" pitchFamily="34" charset="0"/>
-                <a:cs typeface="Arial" panose="020B0604020202020204" pitchFamily="34" charset="0"/>
-              </a:rPr>
-              <a:t>Sorry for missing. I could literally only whisper and sort of screech yell.</a:t>
-            </a:r>
-          </a:p>
-          <a:p>
-            <a:pPr lvl="1"/>
-            <a:r>
-              <a:rPr lang="en-US" dirty="0">
-                <a:latin typeface="Arial" panose="020B0604020202020204" pitchFamily="34" charset="0"/>
-                <a:cs typeface="Arial" panose="020B0604020202020204" pitchFamily="34" charset="0"/>
-              </a:rPr>
-              <a:t>The recording was about alphabets, strings, functions. Any questions?</a:t>
-            </a:r>
-          </a:p>
-          <a:p>
-            <a:r>
-              <a:rPr lang="en-US" dirty="0">
-                <a:latin typeface="Arial" panose="020B0604020202020204" pitchFamily="34" charset="0"/>
-                <a:cs typeface="Arial" panose="020B0604020202020204" pitchFamily="34" charset="0"/>
-              </a:rPr>
-              <a:t>Today we continue with module 1 and start talking about bijections and sizes of sets. Short module, should be done today or Thursday.</a:t>
+              <a:t>We will finish our warm-up / module 0 material today and hopefully begin module 1 (where the class REALLY begins)</a:t>
             </a:r>
           </a:p>
           <a:p>
@@ -15631,518 +13132,7 @@
 </p:sld>
 </file>
 
-<file path=ppt/slides/slide20.xml><?xml version="1.0" encoding="utf-8"?>
-<p:sld xmlns:a="http://schemas.openxmlformats.org/drawingml/2006/main" xmlns:r="http://schemas.openxmlformats.org/officeDocument/2006/relationships" xmlns:p="http://schemas.openxmlformats.org/presentationml/2006/main">
-  <p:cSld>
-    <p:spTree>
-      <p:nvGrpSpPr>
-        <p:cNvPr id="1" name="">
-          <a:extLst>
-            <a:ext uri="{FF2B5EF4-FFF2-40B4-BE49-F238E27FC236}">
-              <a16:creationId xmlns:a16="http://schemas.microsoft.com/office/drawing/2014/main" id="{16938F1E-7944-D904-AC91-F2DF01303F37}"/>
-            </a:ext>
-          </a:extLst>
-        </p:cNvPr>
-        <p:cNvGrpSpPr/>
-        <p:nvPr/>
-      </p:nvGrpSpPr>
-      <p:grpSpPr>
-        <a:xfrm>
-          <a:off x="0" y="0"/>
-          <a:ext cx="0" cy="0"/>
-          <a:chOff x="0" y="0"/>
-          <a:chExt cx="0" cy="0"/>
-        </a:xfrm>
-      </p:grpSpPr>
-      <p:sp>
-        <p:nvSpPr>
-          <p:cNvPr id="6146" name="Rectangle 2">
-            <a:extLst>
-              <a:ext uri="{FF2B5EF4-FFF2-40B4-BE49-F238E27FC236}">
-                <a16:creationId xmlns:a16="http://schemas.microsoft.com/office/drawing/2014/main" id="{69FDBA25-8A31-DAB3-BDC4-69B4C57BBAFB}"/>
-              </a:ext>
-            </a:extLst>
-          </p:cNvPr>
-          <p:cNvSpPr>
-            <a:spLocks noGrp="1" noChangeArrowheads="1"/>
-          </p:cNvSpPr>
-          <p:nvPr>
-            <p:ph type="title"/>
-            <p:custDataLst>
-              <p:tags r:id="rId1"/>
-            </p:custDataLst>
-          </p:nvPr>
-        </p:nvSpPr>
-        <p:spPr>
-          <a:xfrm>
-            <a:off x="1141413" y="284084"/>
-            <a:ext cx="9905998" cy="620791"/>
-          </a:xfrm>
-        </p:spPr>
-        <p:txBody>
-          <a:bodyPr/>
-          <a:lstStyle/>
-          <a:p>
-            <a:pPr algn="ctr"/>
-            <a:r>
-              <a:rPr lang="en-US" dirty="0"/>
-              <a:t>Lecture 22: Tuesday, Dec 2</a:t>
-            </a:r>
-          </a:p>
-        </p:txBody>
-      </p:sp>
-      <p:sp>
-        <p:nvSpPr>
-          <p:cNvPr id="6147" name="Rectangle 3">
-            <a:extLst>
-              <a:ext uri="{FF2B5EF4-FFF2-40B4-BE49-F238E27FC236}">
-                <a16:creationId xmlns:a16="http://schemas.microsoft.com/office/drawing/2014/main" id="{92DBF0D6-4CDC-61F5-42C5-35E957026A1C}"/>
-              </a:ext>
-            </a:extLst>
-          </p:cNvPr>
-          <p:cNvSpPr>
-            <a:spLocks noGrp="1" noChangeArrowheads="1"/>
-          </p:cNvSpPr>
-          <p:nvPr>
-            <p:ph idx="1"/>
-            <p:custDataLst>
-              <p:tags r:id="rId2"/>
-            </p:custDataLst>
-          </p:nvPr>
-        </p:nvSpPr>
-        <p:spPr>
-          <a:xfrm>
-            <a:off x="1294151" y="1098548"/>
-            <a:ext cx="9905998" cy="5387311"/>
-          </a:xfrm>
-        </p:spPr>
-        <p:txBody>
-          <a:bodyPr>
-            <a:normAutofit fontScale="85000" lnSpcReduction="20000"/>
-          </a:bodyPr>
-          <a:lstStyle/>
-          <a:p>
-            <a:r>
-              <a:rPr lang="en-US" dirty="0">
-                <a:latin typeface="Arial" panose="020B0604020202020204" pitchFamily="34" charset="0"/>
-                <a:cs typeface="Arial" panose="020B0604020202020204" pitchFamily="34" charset="0"/>
-              </a:rPr>
-              <a:t>Module 4 homework is being graded (late submissions)</a:t>
-            </a:r>
-          </a:p>
-          <a:p>
-            <a:r>
-              <a:rPr lang="en-US" dirty="0">
-                <a:latin typeface="Arial" panose="020B0604020202020204" pitchFamily="34" charset="0"/>
-                <a:cs typeface="Arial" panose="020B0604020202020204" pitchFamily="34" charset="0"/>
-              </a:rPr>
-              <a:t>Quiz 4 is returned</a:t>
-            </a:r>
-          </a:p>
-          <a:p>
-            <a:pPr lvl="1"/>
-            <a:r>
-              <a:rPr lang="en-US" dirty="0">
-                <a:latin typeface="Arial" panose="020B0604020202020204" pitchFamily="34" charset="0"/>
-                <a:cs typeface="Arial" panose="020B0604020202020204" pitchFamily="34" charset="0"/>
-              </a:rPr>
-              <a:t>Average was a bit lower this time but not bad at all.</a:t>
-            </a:r>
-          </a:p>
-          <a:p>
-            <a:r>
-              <a:rPr lang="en-US" dirty="0">
-                <a:latin typeface="Arial" panose="020B0604020202020204" pitchFamily="34" charset="0"/>
-                <a:cs typeface="Arial" panose="020B0604020202020204" pitchFamily="34" charset="0"/>
-              </a:rPr>
-              <a:t>Everyone watch the recorded lecture from last Tuesday?</a:t>
-            </a:r>
-          </a:p>
-          <a:p>
-            <a:r>
-              <a:rPr lang="en-US" dirty="0">
-                <a:latin typeface="Arial" panose="020B0604020202020204" pitchFamily="34" charset="0"/>
-                <a:cs typeface="Arial" panose="020B0604020202020204" pitchFamily="34" charset="0"/>
-              </a:rPr>
-              <a:t>Our final exam is on Saturday Dec. 13 from 7-10pm.</a:t>
-            </a:r>
-          </a:p>
-          <a:p>
-            <a:pPr lvl="1"/>
-            <a:r>
-              <a:rPr lang="en-US" dirty="0">
-                <a:latin typeface="Arial" panose="020B0604020202020204" pitchFamily="34" charset="0"/>
-                <a:cs typeface="Arial" panose="020B0604020202020204" pitchFamily="34" charset="0"/>
-              </a:rPr>
-              <a:t>Our section will be in Rice 130!! NOT our normal classroom.</a:t>
-            </a:r>
-          </a:p>
-          <a:p>
-            <a:pPr lvl="1"/>
-            <a:r>
-              <a:rPr lang="en-US" dirty="0">
-                <a:latin typeface="Arial" panose="020B0604020202020204" pitchFamily="34" charset="0"/>
-                <a:cs typeface="Arial" panose="020B0604020202020204" pitchFamily="34" charset="0"/>
-              </a:rPr>
-              <a:t>Remember that you will take cumulative, quiz 5, and up to two of quiz 1-4 retakes</a:t>
-            </a:r>
-          </a:p>
-          <a:p>
-            <a:r>
-              <a:rPr lang="en-US" dirty="0">
-                <a:latin typeface="Arial" panose="020B0604020202020204" pitchFamily="34" charset="0"/>
-                <a:cs typeface="Arial" panose="020B0604020202020204" pitchFamily="34" charset="0"/>
-              </a:rPr>
-              <a:t>Please remember that I am asking for NO laptop / phones!</a:t>
-            </a:r>
-          </a:p>
-          <a:p>
-            <a:pPr lvl="1"/>
-            <a:r>
-              <a:rPr lang="en-US" dirty="0">
-                <a:latin typeface="Arial" panose="020B0604020202020204" pitchFamily="34" charset="0"/>
-                <a:cs typeface="Arial" panose="020B0604020202020204" pitchFamily="34" charset="0"/>
-              </a:rPr>
-              <a:t>This makes the learning environment better for everybody. I appreciate it!</a:t>
-            </a:r>
-          </a:p>
-          <a:p>
-            <a:r>
-              <a:rPr lang="en-US" dirty="0">
-                <a:latin typeface="Arial" panose="020B0604020202020204" pitchFamily="34" charset="0"/>
-                <a:cs typeface="Arial" panose="020B0604020202020204" pitchFamily="34" charset="0"/>
-              </a:rPr>
-              <a:t>Chase will hold a final exam review session!</a:t>
-            </a:r>
-          </a:p>
-          <a:p>
-            <a:pPr lvl="1"/>
-            <a:r>
-              <a:rPr lang="en-US" dirty="0">
-                <a:latin typeface="Arial" panose="020B0604020202020204" pitchFamily="34" charset="0"/>
-                <a:cs typeface="Arial" panose="020B0604020202020204" pitchFamily="34" charset="0"/>
-              </a:rPr>
-              <a:t>Wednesday Dec. 10 at 4-5pm in Mec 205</a:t>
-            </a:r>
-          </a:p>
-          <a:p>
-            <a:r>
-              <a:rPr lang="en-US" dirty="0">
-                <a:latin typeface="Arial" panose="020B0604020202020204" pitchFamily="34" charset="0"/>
-                <a:cs typeface="Arial" panose="020B0604020202020204" pitchFamily="34" charset="0"/>
-              </a:rPr>
-              <a:t>Lecture recordings are on Panopto</a:t>
-            </a:r>
-          </a:p>
-          <a:p>
-            <a:pPr lvl="1"/>
-            <a:r>
-              <a:rPr lang="en-US" dirty="0">
-                <a:latin typeface="Arial" panose="020B0604020202020204" pitchFamily="34" charset="0"/>
-                <a:cs typeface="Arial" panose="020B0604020202020204" pitchFamily="34" charset="0"/>
-              </a:rPr>
-              <a:t>There are folders for Floryan and Pettit (little hard to find but they are there)</a:t>
-            </a:r>
-          </a:p>
-          <a:p>
-            <a:r>
-              <a:rPr lang="en-US" dirty="0">
-                <a:latin typeface="Arial" panose="020B0604020202020204" pitchFamily="34" charset="0"/>
-                <a:cs typeface="Arial" panose="020B0604020202020204" pitchFamily="34" charset="0"/>
-              </a:rPr>
-              <a:t>Today we start module 5!</a:t>
-            </a:r>
-          </a:p>
-        </p:txBody>
-      </p:sp>
-    </p:spTree>
-    <p:extLst>
-      <p:ext uri="{BB962C8B-B14F-4D97-AF65-F5344CB8AC3E}">
-        <p14:creationId xmlns:p14="http://schemas.microsoft.com/office/powerpoint/2010/main" val="2552700426"/>
-      </p:ext>
-    </p:extLst>
-  </p:cSld>
-  <p:clrMapOvr>
-    <a:masterClrMapping/>
-  </p:clrMapOvr>
-</p:sld>
-</file>
-
-<file path=ppt/slides/slide21.xml><?xml version="1.0" encoding="utf-8"?>
-<p:sld xmlns:a="http://schemas.openxmlformats.org/drawingml/2006/main" xmlns:r="http://schemas.openxmlformats.org/officeDocument/2006/relationships" xmlns:p="http://schemas.openxmlformats.org/presentationml/2006/main">
-  <p:cSld>
-    <p:spTree>
-      <p:nvGrpSpPr>
-        <p:cNvPr id="1" name="">
-          <a:extLst>
-            <a:ext uri="{FF2B5EF4-FFF2-40B4-BE49-F238E27FC236}">
-              <a16:creationId xmlns:a16="http://schemas.microsoft.com/office/drawing/2014/main" id="{A80440D3-AACD-9613-35AF-8DE0251197AC}"/>
-            </a:ext>
-          </a:extLst>
-        </p:cNvPr>
-        <p:cNvGrpSpPr/>
-        <p:nvPr/>
-      </p:nvGrpSpPr>
-      <p:grpSpPr>
-        <a:xfrm>
-          <a:off x="0" y="0"/>
-          <a:ext cx="0" cy="0"/>
-          <a:chOff x="0" y="0"/>
-          <a:chExt cx="0" cy="0"/>
-        </a:xfrm>
-      </p:grpSpPr>
-      <p:sp>
-        <p:nvSpPr>
-          <p:cNvPr id="6146" name="Rectangle 2">
-            <a:extLst>
-              <a:ext uri="{FF2B5EF4-FFF2-40B4-BE49-F238E27FC236}">
-                <a16:creationId xmlns:a16="http://schemas.microsoft.com/office/drawing/2014/main" id="{AB91B9A7-8D39-AA4D-A3D1-47ED5555CF3B}"/>
-              </a:ext>
-            </a:extLst>
-          </p:cNvPr>
-          <p:cNvSpPr>
-            <a:spLocks noGrp="1" noChangeArrowheads="1"/>
-          </p:cNvSpPr>
-          <p:nvPr>
-            <p:ph type="title"/>
-            <p:custDataLst>
-              <p:tags r:id="rId1"/>
-            </p:custDataLst>
-          </p:nvPr>
-        </p:nvSpPr>
-        <p:spPr>
-          <a:xfrm>
-            <a:off x="1141413" y="284084"/>
-            <a:ext cx="9905998" cy="620791"/>
-          </a:xfrm>
-        </p:spPr>
-        <p:txBody>
-          <a:bodyPr/>
-          <a:lstStyle/>
-          <a:p>
-            <a:pPr algn="ctr"/>
-            <a:r>
-              <a:rPr lang="en-US" dirty="0"/>
-              <a:t>Lecture 23: </a:t>
-            </a:r>
-            <a:r>
-              <a:rPr lang="en-US" dirty="0" err="1"/>
-              <a:t>THursday</a:t>
-            </a:r>
-            <a:r>
-              <a:rPr lang="en-US" dirty="0"/>
-              <a:t>, Dec 4</a:t>
-            </a:r>
-          </a:p>
-        </p:txBody>
-      </p:sp>
-      <p:sp>
-        <p:nvSpPr>
-          <p:cNvPr id="6147" name="Rectangle 3">
-            <a:extLst>
-              <a:ext uri="{FF2B5EF4-FFF2-40B4-BE49-F238E27FC236}">
-                <a16:creationId xmlns:a16="http://schemas.microsoft.com/office/drawing/2014/main" id="{87139A4B-4D58-F93D-7E27-76B8A627D27A}"/>
-              </a:ext>
-            </a:extLst>
-          </p:cNvPr>
-          <p:cNvSpPr>
-            <a:spLocks noGrp="1" noChangeArrowheads="1"/>
-          </p:cNvSpPr>
-          <p:nvPr>
-            <p:ph idx="1"/>
-            <p:custDataLst>
-              <p:tags r:id="rId2"/>
-            </p:custDataLst>
-          </p:nvPr>
-        </p:nvSpPr>
-        <p:spPr>
-          <a:xfrm>
-            <a:off x="1294151" y="1098548"/>
-            <a:ext cx="9905998" cy="5387311"/>
-          </a:xfrm>
-        </p:spPr>
-        <p:txBody>
-          <a:bodyPr>
-            <a:normAutofit fontScale="62500" lnSpcReduction="20000"/>
-          </a:bodyPr>
-          <a:lstStyle/>
-          <a:p>
-            <a:r>
-              <a:rPr lang="en-US" dirty="0">
-                <a:latin typeface="Arial" panose="020B0604020202020204" pitchFamily="34" charset="0"/>
-                <a:cs typeface="Arial" panose="020B0604020202020204" pitchFamily="34" charset="0"/>
-              </a:rPr>
-              <a:t>This is the second to last lecture!!</a:t>
-            </a:r>
-          </a:p>
-          <a:p>
-            <a:r>
-              <a:rPr lang="en-US" dirty="0">
-                <a:latin typeface="Arial" panose="020B0604020202020204" pitchFamily="34" charset="0"/>
-                <a:cs typeface="Arial" panose="020B0604020202020204" pitchFamily="34" charset="0"/>
-              </a:rPr>
-              <a:t>Module 4 homework should be finished today or tomorrow if late</a:t>
-            </a:r>
-          </a:p>
-          <a:p>
-            <a:r>
-              <a:rPr lang="en-US" dirty="0">
-                <a:latin typeface="Arial" panose="020B0604020202020204" pitchFamily="34" charset="0"/>
-                <a:cs typeface="Arial" panose="020B0604020202020204" pitchFamily="34" charset="0"/>
-              </a:rPr>
-              <a:t>Quiz 4 is returned</a:t>
-            </a:r>
-          </a:p>
-          <a:p>
-            <a:pPr lvl="1"/>
-            <a:r>
-              <a:rPr lang="en-US" dirty="0">
-                <a:latin typeface="Arial" panose="020B0604020202020204" pitchFamily="34" charset="0"/>
-                <a:cs typeface="Arial" panose="020B0604020202020204" pitchFamily="34" charset="0"/>
-              </a:rPr>
-              <a:t>Average was a bit lower this time but not bad at all.</a:t>
-            </a:r>
-          </a:p>
-          <a:p>
-            <a:r>
-              <a:rPr lang="en-US" dirty="0">
-                <a:latin typeface="Arial" panose="020B0604020202020204" pitchFamily="34" charset="0"/>
-                <a:cs typeface="Arial" panose="020B0604020202020204" pitchFamily="34" charset="0"/>
-              </a:rPr>
-              <a:t>Homework…will probably be extended for everybody. </a:t>
-            </a:r>
-          </a:p>
-          <a:p>
-            <a:pPr lvl="1"/>
-            <a:r>
-              <a:rPr lang="en-US" dirty="0">
-                <a:latin typeface="Arial" panose="020B0604020202020204" pitchFamily="34" charset="0"/>
-                <a:cs typeface="Arial" panose="020B0604020202020204" pitchFamily="34" charset="0"/>
-              </a:rPr>
-              <a:t>Stay tuned, I’m just checking with other instructors to make sure we are all in agreement.</a:t>
-            </a:r>
-          </a:p>
-          <a:p>
-            <a:r>
-              <a:rPr lang="en-US" dirty="0">
-                <a:latin typeface="Arial" panose="020B0604020202020204" pitchFamily="34" charset="0"/>
-                <a:cs typeface="Arial" panose="020B0604020202020204" pitchFamily="34" charset="0"/>
-              </a:rPr>
-              <a:t>Our final exam is on Saturday Dec. 13 from 7-10pm.</a:t>
-            </a:r>
-          </a:p>
-          <a:p>
-            <a:pPr lvl="1"/>
-            <a:r>
-              <a:rPr lang="en-US" dirty="0">
-                <a:latin typeface="Arial" panose="020B0604020202020204" pitchFamily="34" charset="0"/>
-                <a:cs typeface="Arial" panose="020B0604020202020204" pitchFamily="34" charset="0"/>
-              </a:rPr>
-              <a:t>Floryan section will be in Rice 130!! NOT our normal classroom.</a:t>
-            </a:r>
-          </a:p>
-          <a:p>
-            <a:pPr lvl="1"/>
-            <a:r>
-              <a:rPr lang="en-US" dirty="0">
-                <a:latin typeface="Arial" panose="020B0604020202020204" pitchFamily="34" charset="0"/>
-                <a:cs typeface="Arial" panose="020B0604020202020204" pitchFamily="34" charset="0"/>
-              </a:rPr>
-              <a:t>Pettit section in Mec 205!! Also NOT normal classroom.</a:t>
-            </a:r>
-          </a:p>
-          <a:p>
-            <a:pPr lvl="1"/>
-            <a:r>
-              <a:rPr lang="en-US" dirty="0">
-                <a:latin typeface="Arial" panose="020B0604020202020204" pitchFamily="34" charset="0"/>
-                <a:cs typeface="Arial" panose="020B0604020202020204" pitchFamily="34" charset="0"/>
-              </a:rPr>
-              <a:t>Remember that you will take cumulative, quiz 5, and up to two of quiz 1-4 retakes</a:t>
-            </a:r>
-          </a:p>
-          <a:p>
-            <a:r>
-              <a:rPr lang="en-US" dirty="0">
-                <a:latin typeface="Arial" panose="020B0604020202020204" pitchFamily="34" charset="0"/>
-                <a:cs typeface="Arial" panose="020B0604020202020204" pitchFamily="34" charset="0"/>
-              </a:rPr>
-              <a:t>Please remember that I am asking for NO laptop / phones!</a:t>
-            </a:r>
-          </a:p>
-          <a:p>
-            <a:pPr lvl="1"/>
-            <a:r>
-              <a:rPr lang="en-US" dirty="0">
-                <a:latin typeface="Arial" panose="020B0604020202020204" pitchFamily="34" charset="0"/>
-                <a:cs typeface="Arial" panose="020B0604020202020204" pitchFamily="34" charset="0"/>
-              </a:rPr>
-              <a:t>This makes the learning environment better for everybody. I appreciate it!</a:t>
-            </a:r>
-          </a:p>
-          <a:p>
-            <a:r>
-              <a:rPr lang="en-US" dirty="0">
-                <a:latin typeface="Arial" panose="020B0604020202020204" pitchFamily="34" charset="0"/>
-                <a:cs typeface="Arial" panose="020B0604020202020204" pitchFamily="34" charset="0"/>
-              </a:rPr>
-              <a:t>Chase will hold a final exam review session!</a:t>
-            </a:r>
-          </a:p>
-          <a:p>
-            <a:pPr lvl="1"/>
-            <a:r>
-              <a:rPr lang="en-US" dirty="0">
-                <a:latin typeface="Arial" panose="020B0604020202020204" pitchFamily="34" charset="0"/>
-                <a:cs typeface="Arial" panose="020B0604020202020204" pitchFamily="34" charset="0"/>
-              </a:rPr>
-              <a:t>Wednesday Dec. 10 at 4-5pm in Mec 205</a:t>
-            </a:r>
-          </a:p>
-          <a:p>
-            <a:r>
-              <a:rPr lang="en-US" dirty="0">
-                <a:latin typeface="Arial" panose="020B0604020202020204" pitchFamily="34" charset="0"/>
-                <a:cs typeface="Arial" panose="020B0604020202020204" pitchFamily="34" charset="0"/>
-              </a:rPr>
-              <a:t>Lecture recordings are on Panopto</a:t>
-            </a:r>
-          </a:p>
-          <a:p>
-            <a:pPr lvl="1"/>
-            <a:r>
-              <a:rPr lang="en-US" dirty="0">
-                <a:latin typeface="Arial" panose="020B0604020202020204" pitchFamily="34" charset="0"/>
-                <a:cs typeface="Arial" panose="020B0604020202020204" pitchFamily="34" charset="0"/>
-              </a:rPr>
-              <a:t>There are folders for Floryan and Pettit (little hard to find but they are there)</a:t>
-            </a:r>
-          </a:p>
-          <a:p>
-            <a:r>
-              <a:rPr lang="en-US" dirty="0">
-                <a:latin typeface="Arial" panose="020B0604020202020204" pitchFamily="34" charset="0"/>
-                <a:cs typeface="Arial" panose="020B0604020202020204" pitchFamily="34" charset="0"/>
-              </a:rPr>
-              <a:t>Today we continue with reductions!</a:t>
-            </a:r>
-          </a:p>
-        </p:txBody>
-      </p:sp>
-    </p:spTree>
-    <p:extLst>
-      <p:ext uri="{BB962C8B-B14F-4D97-AF65-F5344CB8AC3E}">
-        <p14:creationId xmlns:p14="http://schemas.microsoft.com/office/powerpoint/2010/main" val="1911655295"/>
-      </p:ext>
-    </p:extLst>
-  </p:cSld>
-  <p:clrMapOvr>
-    <a:masterClrMapping/>
-  </p:clrMapOvr>
-</p:sld>
-</file>
-
-<file path=ppt/slides/slide22.xml><?xml version="1.0" encoding="utf-8"?>
+<file path=ppt/slides/slide3.xml><?xml version="1.0" encoding="utf-8"?>
 <p:sld xmlns:a="http://schemas.openxmlformats.org/drawingml/2006/main" xmlns:r="http://schemas.openxmlformats.org/officeDocument/2006/relationships" xmlns:p="http://schemas.openxmlformats.org/presentationml/2006/main">
   <p:cSld>
     <p:spTree>
@@ -18010,1722 +15000,7 @@
 </p:sld>
 </file>
 
-<file path=ppt/slides/slide3.xml><?xml version="1.0" encoding="utf-8"?>
-<p:sld xmlns:a="http://schemas.openxmlformats.org/drawingml/2006/main" xmlns:r="http://schemas.openxmlformats.org/officeDocument/2006/relationships" xmlns:p="http://schemas.openxmlformats.org/presentationml/2006/main">
-  <p:cSld>
-    <p:spTree>
-      <p:nvGrpSpPr>
-        <p:cNvPr id="1" name="">
-          <a:extLst>
-            <a:ext uri="{FF2B5EF4-FFF2-40B4-BE49-F238E27FC236}">
-              <a16:creationId xmlns:a16="http://schemas.microsoft.com/office/drawing/2014/main" id="{F73DA1C1-74ED-23F1-75FA-FC2ABD662F11}"/>
-            </a:ext>
-          </a:extLst>
-        </p:cNvPr>
-        <p:cNvGrpSpPr/>
-        <p:nvPr/>
-      </p:nvGrpSpPr>
-      <p:grpSpPr>
-        <a:xfrm>
-          <a:off x="0" y="0"/>
-          <a:ext cx="0" cy="0"/>
-          <a:chOff x="0" y="0"/>
-          <a:chExt cx="0" cy="0"/>
-        </a:xfrm>
-      </p:grpSpPr>
-      <p:sp>
-        <p:nvSpPr>
-          <p:cNvPr id="6146" name="Rectangle 2">
-            <a:extLst>
-              <a:ext uri="{FF2B5EF4-FFF2-40B4-BE49-F238E27FC236}">
-                <a16:creationId xmlns:a16="http://schemas.microsoft.com/office/drawing/2014/main" id="{1DF7C322-969D-DF71-3530-1647CD1F2CBF}"/>
-              </a:ext>
-            </a:extLst>
-          </p:cNvPr>
-          <p:cNvSpPr>
-            <a:spLocks noGrp="1" noChangeArrowheads="1"/>
-          </p:cNvSpPr>
-          <p:nvPr>
-            <p:ph type="title"/>
-            <p:custDataLst>
-              <p:tags r:id="rId1"/>
-            </p:custDataLst>
-          </p:nvPr>
-        </p:nvSpPr>
-        <p:spPr>
-          <a:xfrm>
-            <a:off x="1141413" y="284084"/>
-            <a:ext cx="9905998" cy="620791"/>
-          </a:xfrm>
-        </p:spPr>
-        <p:txBody>
-          <a:bodyPr/>
-          <a:lstStyle/>
-          <a:p>
-            <a:pPr algn="ctr"/>
-            <a:r>
-              <a:rPr lang="en-US" dirty="0"/>
-              <a:t>Lecture 4: Thursday, Sep 4</a:t>
-            </a:r>
-          </a:p>
-        </p:txBody>
-      </p:sp>
-      <p:sp>
-        <p:nvSpPr>
-          <p:cNvPr id="6147" name="Rectangle 3">
-            <a:extLst>
-              <a:ext uri="{FF2B5EF4-FFF2-40B4-BE49-F238E27FC236}">
-                <a16:creationId xmlns:a16="http://schemas.microsoft.com/office/drawing/2014/main" id="{F75D85D9-C9C8-43EC-3A73-16C518CA64C1}"/>
-              </a:ext>
-            </a:extLst>
-          </p:cNvPr>
-          <p:cNvSpPr>
-            <a:spLocks noGrp="1" noChangeArrowheads="1"/>
-          </p:cNvSpPr>
-          <p:nvPr>
-            <p:ph idx="1"/>
-            <p:custDataLst>
-              <p:tags r:id="rId2"/>
-            </p:custDataLst>
-          </p:nvPr>
-        </p:nvSpPr>
-        <p:spPr>
-          <a:xfrm>
-            <a:off x="1294151" y="1098549"/>
-            <a:ext cx="9600522" cy="5149850"/>
-          </a:xfrm>
-        </p:spPr>
-        <p:txBody>
-          <a:bodyPr>
-            <a:normAutofit/>
-          </a:bodyPr>
-          <a:lstStyle/>
-          <a:p>
-            <a:r>
-              <a:rPr lang="en-US" dirty="0">
-                <a:latin typeface="Arial" panose="020B0604020202020204" pitchFamily="34" charset="0"/>
-                <a:cs typeface="Arial" panose="020B0604020202020204" pitchFamily="34" charset="0"/>
-              </a:rPr>
-              <a:t>First homework is due NEXT Thursday evening at midnight</a:t>
-            </a:r>
-          </a:p>
-          <a:p>
-            <a:pPr lvl="1"/>
-            <a:r>
-              <a:rPr lang="en-US" dirty="0">
-                <a:latin typeface="Arial" panose="020B0604020202020204" pitchFamily="34" charset="0"/>
-                <a:cs typeface="Arial" panose="020B0604020202020204" pitchFamily="34" charset="0"/>
-              </a:rPr>
-              <a:t>You have plenty of time, but you might want to glance at it</a:t>
-            </a:r>
-          </a:p>
-          <a:p>
-            <a:r>
-              <a:rPr lang="en-US" dirty="0">
-                <a:latin typeface="Arial" panose="020B0604020202020204" pitchFamily="34" charset="0"/>
-                <a:cs typeface="Arial" panose="020B0604020202020204" pitchFamily="34" charset="0"/>
-              </a:rPr>
-              <a:t>Please remember that I am asking for NO laptop / phones!</a:t>
-            </a:r>
-          </a:p>
-          <a:p>
-            <a:pPr lvl="1"/>
-            <a:r>
-              <a:rPr lang="en-US" dirty="0">
-                <a:latin typeface="Arial" panose="020B0604020202020204" pitchFamily="34" charset="0"/>
-                <a:cs typeface="Arial" panose="020B0604020202020204" pitchFamily="34" charset="0"/>
-              </a:rPr>
-              <a:t>This makes the learning environment better for everybody. I appreciate it!</a:t>
-            </a:r>
-          </a:p>
-          <a:p>
-            <a:r>
-              <a:rPr lang="en-US" dirty="0">
-                <a:latin typeface="Arial" panose="020B0604020202020204" pitchFamily="34" charset="0"/>
-                <a:cs typeface="Arial" panose="020B0604020202020204" pitchFamily="34" charset="0"/>
-              </a:rPr>
-              <a:t>Lecture recordings are on Panopto</a:t>
-            </a:r>
-          </a:p>
-          <a:p>
-            <a:pPr lvl="1"/>
-            <a:r>
-              <a:rPr lang="en-US" dirty="0">
-                <a:latin typeface="Arial" panose="020B0604020202020204" pitchFamily="34" charset="0"/>
-                <a:cs typeface="Arial" panose="020B0604020202020204" pitchFamily="34" charset="0"/>
-              </a:rPr>
-              <a:t>There are folders for Floryan and Pettit (little hard to find but they are there)</a:t>
-            </a:r>
-          </a:p>
-          <a:p>
-            <a:r>
-              <a:rPr lang="en-US" dirty="0">
-                <a:latin typeface="Arial" panose="020B0604020202020204" pitchFamily="34" charset="0"/>
-                <a:cs typeface="Arial" panose="020B0604020202020204" pitchFamily="34" charset="0"/>
-              </a:rPr>
-              <a:t>TA office hours start NEXT week. Schedule is finalized (or close to) on website. Check it out!</a:t>
-            </a:r>
-          </a:p>
-          <a:p>
-            <a:r>
-              <a:rPr lang="en-US" dirty="0">
-                <a:latin typeface="Arial" panose="020B0604020202020204" pitchFamily="34" charset="0"/>
-                <a:cs typeface="Arial" panose="020B0604020202020204" pitchFamily="34" charset="0"/>
-              </a:rPr>
-              <a:t>Today we will finish module 1 and probably begin module 2 (where the REAL class begins)</a:t>
-            </a:r>
-          </a:p>
-        </p:txBody>
-      </p:sp>
-    </p:spTree>
-    <p:extLst>
-      <p:ext uri="{BB962C8B-B14F-4D97-AF65-F5344CB8AC3E}">
-        <p14:creationId xmlns:p14="http://schemas.microsoft.com/office/powerpoint/2010/main" val="371835523"/>
-      </p:ext>
-    </p:extLst>
-  </p:cSld>
-  <p:clrMapOvr>
-    <a:masterClrMapping/>
-  </p:clrMapOvr>
-</p:sld>
-</file>
-
-<file path=ppt/slides/slide4.xml><?xml version="1.0" encoding="utf-8"?>
-<p:sld xmlns:a="http://schemas.openxmlformats.org/drawingml/2006/main" xmlns:r="http://schemas.openxmlformats.org/officeDocument/2006/relationships" xmlns:p="http://schemas.openxmlformats.org/presentationml/2006/main">
-  <p:cSld>
-    <p:spTree>
-      <p:nvGrpSpPr>
-        <p:cNvPr id="1" name="">
-          <a:extLst>
-            <a:ext uri="{FF2B5EF4-FFF2-40B4-BE49-F238E27FC236}">
-              <a16:creationId xmlns:a16="http://schemas.microsoft.com/office/drawing/2014/main" id="{1DD20B1A-BFF3-A32F-3B9C-B80933BA47E6}"/>
-            </a:ext>
-          </a:extLst>
-        </p:cNvPr>
-        <p:cNvGrpSpPr/>
-        <p:nvPr/>
-      </p:nvGrpSpPr>
-      <p:grpSpPr>
-        <a:xfrm>
-          <a:off x="0" y="0"/>
-          <a:ext cx="0" cy="0"/>
-          <a:chOff x="0" y="0"/>
-          <a:chExt cx="0" cy="0"/>
-        </a:xfrm>
-      </p:grpSpPr>
-      <p:sp>
-        <p:nvSpPr>
-          <p:cNvPr id="6146" name="Rectangle 2">
-            <a:extLst>
-              <a:ext uri="{FF2B5EF4-FFF2-40B4-BE49-F238E27FC236}">
-                <a16:creationId xmlns:a16="http://schemas.microsoft.com/office/drawing/2014/main" id="{25A34AA6-4298-337A-326D-724E5336D348}"/>
-              </a:ext>
-            </a:extLst>
-          </p:cNvPr>
-          <p:cNvSpPr>
-            <a:spLocks noGrp="1" noChangeArrowheads="1"/>
-          </p:cNvSpPr>
-          <p:nvPr>
-            <p:ph type="title"/>
-            <p:custDataLst>
-              <p:tags r:id="rId1"/>
-            </p:custDataLst>
-          </p:nvPr>
-        </p:nvSpPr>
-        <p:spPr>
-          <a:xfrm>
-            <a:off x="1141413" y="284084"/>
-            <a:ext cx="9905998" cy="620791"/>
-          </a:xfrm>
-        </p:spPr>
-        <p:txBody>
-          <a:bodyPr/>
-          <a:lstStyle/>
-          <a:p>
-            <a:pPr algn="ctr"/>
-            <a:r>
-              <a:rPr lang="en-US" dirty="0"/>
-              <a:t>Lecture 5: Tuesday, Sep 9</a:t>
-            </a:r>
-          </a:p>
-        </p:txBody>
-      </p:sp>
-      <p:sp>
-        <p:nvSpPr>
-          <p:cNvPr id="6147" name="Rectangle 3">
-            <a:extLst>
-              <a:ext uri="{FF2B5EF4-FFF2-40B4-BE49-F238E27FC236}">
-                <a16:creationId xmlns:a16="http://schemas.microsoft.com/office/drawing/2014/main" id="{96A7F3C2-3852-79DE-DAF1-6BC608BE8C59}"/>
-              </a:ext>
-            </a:extLst>
-          </p:cNvPr>
-          <p:cNvSpPr>
-            <a:spLocks noGrp="1" noChangeArrowheads="1"/>
-          </p:cNvSpPr>
-          <p:nvPr>
-            <p:ph idx="1"/>
-            <p:custDataLst>
-              <p:tags r:id="rId2"/>
-            </p:custDataLst>
-          </p:nvPr>
-        </p:nvSpPr>
-        <p:spPr>
-          <a:xfrm>
-            <a:off x="1294151" y="1098548"/>
-            <a:ext cx="9905998" cy="5387311"/>
-          </a:xfrm>
-        </p:spPr>
-        <p:txBody>
-          <a:bodyPr>
-            <a:normAutofit fontScale="70000" lnSpcReduction="20000"/>
-          </a:bodyPr>
-          <a:lstStyle/>
-          <a:p>
-            <a:r>
-              <a:rPr lang="en-US" dirty="0">
-                <a:latin typeface="Arial" panose="020B0604020202020204" pitchFamily="34" charset="0"/>
-                <a:cs typeface="Arial" panose="020B0604020202020204" pitchFamily="34" charset="0"/>
-              </a:rPr>
-              <a:t>First homework is due THIS Thursday evening at midnight</a:t>
-            </a:r>
-          </a:p>
-          <a:p>
-            <a:pPr lvl="1"/>
-            <a:r>
-              <a:rPr lang="en-US" dirty="0">
-                <a:latin typeface="Arial" panose="020B0604020202020204" pitchFamily="34" charset="0"/>
-                <a:cs typeface="Arial" panose="020B0604020202020204" pitchFamily="34" charset="0"/>
-              </a:rPr>
-              <a:t>You have plenty of time, but you might want to glance at it</a:t>
-            </a:r>
-          </a:p>
-          <a:p>
-            <a:pPr lvl="1"/>
-            <a:r>
-              <a:rPr lang="en-US" dirty="0">
-                <a:latin typeface="Arial" panose="020B0604020202020204" pitchFamily="34" charset="0"/>
-                <a:cs typeface="Arial" panose="020B0604020202020204" pitchFamily="34" charset="0"/>
-              </a:rPr>
-              <a:t>Remember to try not to use extensions unless you absolutely need it!</a:t>
-            </a:r>
-          </a:p>
-          <a:p>
-            <a:r>
-              <a:rPr lang="en-US" dirty="0">
-                <a:latin typeface="Arial" panose="020B0604020202020204" pitchFamily="34" charset="0"/>
-                <a:cs typeface="Arial" panose="020B0604020202020204" pitchFamily="34" charset="0"/>
-              </a:rPr>
-              <a:t>Quiz 1 is next Thursday in class (yay!)</a:t>
-            </a:r>
-          </a:p>
-          <a:p>
-            <a:r>
-              <a:rPr lang="en-US" dirty="0">
-                <a:latin typeface="Arial" panose="020B0604020202020204" pitchFamily="34" charset="0"/>
-                <a:cs typeface="Arial" panose="020B0604020202020204" pitchFamily="34" charset="0"/>
-              </a:rPr>
-              <a:t>Extensions reminder: Only one person from a group needs the extension (the person submitting the homework)</a:t>
-            </a:r>
-          </a:p>
-          <a:p>
-            <a:r>
-              <a:rPr lang="en-US" dirty="0">
-                <a:latin typeface="Arial" panose="020B0604020202020204" pitchFamily="34" charset="0"/>
-                <a:cs typeface="Arial" panose="020B0604020202020204" pitchFamily="34" charset="0"/>
-              </a:rPr>
-              <a:t>Please remember that I am asking for NO laptop / phones!</a:t>
-            </a:r>
-          </a:p>
-          <a:p>
-            <a:pPr lvl="1"/>
-            <a:r>
-              <a:rPr lang="en-US" dirty="0">
-                <a:latin typeface="Arial" panose="020B0604020202020204" pitchFamily="34" charset="0"/>
-                <a:cs typeface="Arial" panose="020B0604020202020204" pitchFamily="34" charset="0"/>
-              </a:rPr>
-              <a:t>This makes the learning environment better for everybody. I appreciate it!</a:t>
-            </a:r>
-          </a:p>
-          <a:p>
-            <a:r>
-              <a:rPr lang="en-US" dirty="0">
-                <a:latin typeface="Arial" panose="020B0604020202020204" pitchFamily="34" charset="0"/>
-                <a:cs typeface="Arial" panose="020B0604020202020204" pitchFamily="34" charset="0"/>
-              </a:rPr>
-              <a:t>Discussion Section: Chase will be holding every week</a:t>
-            </a:r>
-          </a:p>
-          <a:p>
-            <a:pPr lvl="1"/>
-            <a:r>
-              <a:rPr lang="en-US" dirty="0">
-                <a:latin typeface="Arial" panose="020B0604020202020204" pitchFamily="34" charset="0"/>
-                <a:cs typeface="Arial" panose="020B0604020202020204" pitchFamily="34" charset="0"/>
-              </a:rPr>
-              <a:t>Wednesday 4-5pm in Rice 110</a:t>
-            </a:r>
-          </a:p>
-          <a:p>
-            <a:pPr lvl="1"/>
-            <a:r>
-              <a:rPr lang="en-US" dirty="0">
-                <a:latin typeface="Arial" panose="020B0604020202020204" pitchFamily="34" charset="0"/>
-                <a:cs typeface="Arial" panose="020B0604020202020204" pitchFamily="34" charset="0"/>
-              </a:rPr>
-              <a:t>Begins tomorrow!</a:t>
-            </a:r>
-          </a:p>
-          <a:p>
-            <a:r>
-              <a:rPr lang="en-US" dirty="0">
-                <a:latin typeface="Arial" panose="020B0604020202020204" pitchFamily="34" charset="0"/>
-                <a:cs typeface="Arial" panose="020B0604020202020204" pitchFamily="34" charset="0"/>
-              </a:rPr>
-              <a:t>Lecture recordings are on Panopto</a:t>
-            </a:r>
-          </a:p>
-          <a:p>
-            <a:pPr lvl="1"/>
-            <a:r>
-              <a:rPr lang="en-US" dirty="0">
-                <a:latin typeface="Arial" panose="020B0604020202020204" pitchFamily="34" charset="0"/>
-                <a:cs typeface="Arial" panose="020B0604020202020204" pitchFamily="34" charset="0"/>
-              </a:rPr>
-              <a:t>There are folders for Floryan and Pettit (little hard to find but they are there)</a:t>
-            </a:r>
-          </a:p>
-          <a:p>
-            <a:r>
-              <a:rPr lang="en-US" dirty="0">
-                <a:latin typeface="Arial" panose="020B0604020202020204" pitchFamily="34" charset="0"/>
-                <a:cs typeface="Arial" panose="020B0604020202020204" pitchFamily="34" charset="0"/>
-              </a:rPr>
-              <a:t>TA office hours start this week. Check it out!</a:t>
-            </a:r>
-          </a:p>
-          <a:p>
-            <a:r>
-              <a:rPr lang="en-US" dirty="0">
-                <a:latin typeface="Arial" panose="020B0604020202020204" pitchFamily="34" charset="0"/>
-                <a:cs typeface="Arial" panose="020B0604020202020204" pitchFamily="34" charset="0"/>
-              </a:rPr>
-              <a:t>Today we will finish module 1 and probably begin module 2 (where the REAL class begins)</a:t>
-            </a:r>
-          </a:p>
-        </p:txBody>
-      </p:sp>
-    </p:spTree>
-    <p:extLst>
-      <p:ext uri="{BB962C8B-B14F-4D97-AF65-F5344CB8AC3E}">
-        <p14:creationId xmlns:p14="http://schemas.microsoft.com/office/powerpoint/2010/main" val="290670527"/>
-      </p:ext>
-    </p:extLst>
-  </p:cSld>
-  <p:clrMapOvr>
-    <a:masterClrMapping/>
-  </p:clrMapOvr>
-</p:sld>
-</file>
-
-<file path=ppt/slides/slide5.xml><?xml version="1.0" encoding="utf-8"?>
-<p:sld xmlns:a="http://schemas.openxmlformats.org/drawingml/2006/main" xmlns:r="http://schemas.openxmlformats.org/officeDocument/2006/relationships" xmlns:p="http://schemas.openxmlformats.org/presentationml/2006/main">
-  <p:cSld>
-    <p:spTree>
-      <p:nvGrpSpPr>
-        <p:cNvPr id="1" name="">
-          <a:extLst>
-            <a:ext uri="{FF2B5EF4-FFF2-40B4-BE49-F238E27FC236}">
-              <a16:creationId xmlns:a16="http://schemas.microsoft.com/office/drawing/2014/main" id="{11AFCFD4-6876-8A61-ADFF-B6FA19181ABA}"/>
-            </a:ext>
-          </a:extLst>
-        </p:cNvPr>
-        <p:cNvGrpSpPr/>
-        <p:nvPr/>
-      </p:nvGrpSpPr>
-      <p:grpSpPr>
-        <a:xfrm>
-          <a:off x="0" y="0"/>
-          <a:ext cx="0" cy="0"/>
-          <a:chOff x="0" y="0"/>
-          <a:chExt cx="0" cy="0"/>
-        </a:xfrm>
-      </p:grpSpPr>
-      <p:sp>
-        <p:nvSpPr>
-          <p:cNvPr id="6146" name="Rectangle 2">
-            <a:extLst>
-              <a:ext uri="{FF2B5EF4-FFF2-40B4-BE49-F238E27FC236}">
-                <a16:creationId xmlns:a16="http://schemas.microsoft.com/office/drawing/2014/main" id="{BE9B033B-F4A4-E000-DB85-D8029F399E6B}"/>
-              </a:ext>
-            </a:extLst>
-          </p:cNvPr>
-          <p:cNvSpPr>
-            <a:spLocks noGrp="1" noChangeArrowheads="1"/>
-          </p:cNvSpPr>
-          <p:nvPr>
-            <p:ph type="title"/>
-            <p:custDataLst>
-              <p:tags r:id="rId1"/>
-            </p:custDataLst>
-          </p:nvPr>
-        </p:nvSpPr>
-        <p:spPr>
-          <a:xfrm>
-            <a:off x="1141413" y="284084"/>
-            <a:ext cx="9905998" cy="620791"/>
-          </a:xfrm>
-        </p:spPr>
-        <p:txBody>
-          <a:bodyPr/>
-          <a:lstStyle/>
-          <a:p>
-            <a:pPr algn="ctr"/>
-            <a:r>
-              <a:rPr lang="en-US" dirty="0"/>
-              <a:t>Lecture 6: Thursday, Sep 11</a:t>
-            </a:r>
-          </a:p>
-        </p:txBody>
-      </p:sp>
-      <p:sp>
-        <p:nvSpPr>
-          <p:cNvPr id="6147" name="Rectangle 3">
-            <a:extLst>
-              <a:ext uri="{FF2B5EF4-FFF2-40B4-BE49-F238E27FC236}">
-                <a16:creationId xmlns:a16="http://schemas.microsoft.com/office/drawing/2014/main" id="{1FE823F3-6D86-F92E-F94A-567C01F8D54E}"/>
-              </a:ext>
-            </a:extLst>
-          </p:cNvPr>
-          <p:cNvSpPr>
-            <a:spLocks noGrp="1" noChangeArrowheads="1"/>
-          </p:cNvSpPr>
-          <p:nvPr>
-            <p:ph idx="1"/>
-            <p:custDataLst>
-              <p:tags r:id="rId2"/>
-            </p:custDataLst>
-          </p:nvPr>
-        </p:nvSpPr>
-        <p:spPr>
-          <a:xfrm>
-            <a:off x="1294151" y="1098548"/>
-            <a:ext cx="9905998" cy="5387311"/>
-          </a:xfrm>
-        </p:spPr>
-        <p:txBody>
-          <a:bodyPr>
-            <a:normAutofit fontScale="62500" lnSpcReduction="20000"/>
-          </a:bodyPr>
-          <a:lstStyle/>
-          <a:p>
-            <a:r>
-              <a:rPr lang="en-US" dirty="0">
-                <a:latin typeface="Arial" panose="020B0604020202020204" pitchFamily="34" charset="0"/>
-                <a:cs typeface="Arial" panose="020B0604020202020204" pitchFamily="34" charset="0"/>
-              </a:rPr>
-              <a:t>First homework is due TONIGHT at midnight</a:t>
-            </a:r>
-          </a:p>
-          <a:p>
-            <a:pPr lvl="1"/>
-            <a:r>
-              <a:rPr lang="en-US" dirty="0">
-                <a:latin typeface="Arial" panose="020B0604020202020204" pitchFamily="34" charset="0"/>
-                <a:cs typeface="Arial" panose="020B0604020202020204" pitchFamily="34" charset="0"/>
-              </a:rPr>
-              <a:t>Please try to be on time for this first one. We are aiming for &gt;75% on time!</a:t>
-            </a:r>
-          </a:p>
-          <a:p>
-            <a:r>
-              <a:rPr lang="en-US" dirty="0">
-                <a:latin typeface="Arial" panose="020B0604020202020204" pitchFamily="34" charset="0"/>
-                <a:cs typeface="Arial" panose="020B0604020202020204" pitchFamily="34" charset="0"/>
-              </a:rPr>
-              <a:t>Quiz 1 is next Thursday in class (yay!)</a:t>
-            </a:r>
-          </a:p>
-          <a:p>
-            <a:pPr lvl="1"/>
-            <a:r>
-              <a:rPr lang="en-US" dirty="0">
-                <a:latin typeface="Arial" panose="020B0604020202020204" pitchFamily="34" charset="0"/>
-                <a:cs typeface="Arial" panose="020B0604020202020204" pitchFamily="34" charset="0"/>
-              </a:rPr>
-              <a:t>Attend your enrollment schedule only!</a:t>
-            </a:r>
-          </a:p>
-          <a:p>
-            <a:pPr lvl="1"/>
-            <a:r>
-              <a:rPr lang="en-US" dirty="0">
-                <a:latin typeface="Arial" panose="020B0604020202020204" pitchFamily="34" charset="0"/>
-                <a:cs typeface="Arial" panose="020B0604020202020204" pitchFamily="34" charset="0"/>
-              </a:rPr>
-              <a:t>You will have 1 hour (NOT 1 </a:t>
-            </a:r>
-            <a:r>
-              <a:rPr lang="en-US" dirty="0" err="1">
-                <a:latin typeface="Arial" panose="020B0604020202020204" pitchFamily="34" charset="0"/>
-                <a:cs typeface="Arial" panose="020B0604020202020204" pitchFamily="34" charset="0"/>
-              </a:rPr>
-              <a:t>hr</a:t>
-            </a:r>
-            <a:r>
-              <a:rPr lang="en-US" dirty="0">
-                <a:latin typeface="Arial" panose="020B0604020202020204" pitchFamily="34" charset="0"/>
-                <a:cs typeface="Arial" panose="020B0604020202020204" pitchFamily="34" charset="0"/>
-              </a:rPr>
-              <a:t> 15 mins)</a:t>
-            </a:r>
-          </a:p>
-          <a:p>
-            <a:pPr lvl="1"/>
-            <a:r>
-              <a:rPr lang="en-US" dirty="0">
-                <a:latin typeface="Arial" panose="020B0604020202020204" pitchFamily="34" charset="0"/>
-                <a:cs typeface="Arial" panose="020B0604020202020204" pitchFamily="34" charset="0"/>
-              </a:rPr>
-              <a:t>See website for some example old quizzes</a:t>
-            </a:r>
-          </a:p>
-          <a:p>
-            <a:r>
-              <a:rPr lang="en-US" dirty="0">
-                <a:latin typeface="Arial" panose="020B0604020202020204" pitchFamily="34" charset="0"/>
-                <a:cs typeface="Arial" panose="020B0604020202020204" pitchFamily="34" charset="0"/>
-              </a:rPr>
-              <a:t>Extensions reminder: Only one person from a group needs the extension (the person submitting the homework)</a:t>
-            </a:r>
-          </a:p>
-          <a:p>
-            <a:r>
-              <a:rPr lang="en-US" dirty="0">
-                <a:latin typeface="Arial" panose="020B0604020202020204" pitchFamily="34" charset="0"/>
-                <a:cs typeface="Arial" panose="020B0604020202020204" pitchFamily="34" charset="0"/>
-              </a:rPr>
-              <a:t>Please remember that I am asking for NO laptop / phones!</a:t>
-            </a:r>
-          </a:p>
-          <a:p>
-            <a:pPr lvl="1"/>
-            <a:r>
-              <a:rPr lang="en-US" dirty="0">
-                <a:latin typeface="Arial" panose="020B0604020202020204" pitchFamily="34" charset="0"/>
-                <a:cs typeface="Arial" panose="020B0604020202020204" pitchFamily="34" charset="0"/>
-              </a:rPr>
-              <a:t>This makes the learning environment better for everybody. I appreciate it!</a:t>
-            </a:r>
-          </a:p>
-          <a:p>
-            <a:r>
-              <a:rPr lang="en-US" dirty="0">
-                <a:latin typeface="Arial" panose="020B0604020202020204" pitchFamily="34" charset="0"/>
-                <a:cs typeface="Arial" panose="020B0604020202020204" pitchFamily="34" charset="0"/>
-              </a:rPr>
-              <a:t>Discussion Section: Chase will be holding every week</a:t>
-            </a:r>
-          </a:p>
-          <a:p>
-            <a:pPr lvl="1"/>
-            <a:r>
-              <a:rPr lang="en-US" dirty="0">
-                <a:latin typeface="Arial" panose="020B0604020202020204" pitchFamily="34" charset="0"/>
-                <a:cs typeface="Arial" panose="020B0604020202020204" pitchFamily="34" charset="0"/>
-              </a:rPr>
-              <a:t>Wednesday 4-5pm in Rice 110</a:t>
-            </a:r>
-          </a:p>
-          <a:p>
-            <a:pPr lvl="1"/>
-            <a:r>
-              <a:rPr lang="en-US" dirty="0">
-                <a:latin typeface="Arial" panose="020B0604020202020204" pitchFamily="34" charset="0"/>
-                <a:cs typeface="Arial" panose="020B0604020202020204" pitchFamily="34" charset="0"/>
-              </a:rPr>
-              <a:t>He said he will try to record if he is able in that room</a:t>
-            </a:r>
-          </a:p>
-          <a:p>
-            <a:r>
-              <a:rPr lang="en-US" dirty="0">
-                <a:latin typeface="Arial" panose="020B0604020202020204" pitchFamily="34" charset="0"/>
-                <a:cs typeface="Arial" panose="020B0604020202020204" pitchFamily="34" charset="0"/>
-              </a:rPr>
-              <a:t>Lecture recordings are on Panopto</a:t>
-            </a:r>
-          </a:p>
-          <a:p>
-            <a:pPr lvl="1"/>
-            <a:r>
-              <a:rPr lang="en-US" dirty="0">
-                <a:latin typeface="Arial" panose="020B0604020202020204" pitchFamily="34" charset="0"/>
-                <a:cs typeface="Arial" panose="020B0604020202020204" pitchFamily="34" charset="0"/>
-              </a:rPr>
-              <a:t>There are folders for Floryan and Pettit (little hard to find but they are there)</a:t>
-            </a:r>
-          </a:p>
-          <a:p>
-            <a:r>
-              <a:rPr lang="en-US" dirty="0">
-                <a:latin typeface="Arial" panose="020B0604020202020204" pitchFamily="34" charset="0"/>
-                <a:cs typeface="Arial" panose="020B0604020202020204" pitchFamily="34" charset="0"/>
-              </a:rPr>
-              <a:t>TA office hours start this week. Check it out!</a:t>
-            </a:r>
-          </a:p>
-          <a:p>
-            <a:r>
-              <a:rPr lang="en-US" dirty="0">
-                <a:latin typeface="Arial" panose="020B0604020202020204" pitchFamily="34" charset="0"/>
-                <a:cs typeface="Arial" panose="020B0604020202020204" pitchFamily="34" charset="0"/>
-              </a:rPr>
-              <a:t>Today we continue with </a:t>
-            </a:r>
-            <a:r>
-              <a:rPr lang="en-US">
-                <a:latin typeface="Arial" panose="020B0604020202020204" pitchFamily="34" charset="0"/>
-                <a:cs typeface="Arial" panose="020B0604020202020204" pitchFamily="34" charset="0"/>
-              </a:rPr>
-              <a:t>module 2</a:t>
-            </a:r>
-            <a:endParaRPr lang="en-US" dirty="0">
-              <a:latin typeface="Arial" panose="020B0604020202020204" pitchFamily="34" charset="0"/>
-              <a:cs typeface="Arial" panose="020B0604020202020204" pitchFamily="34" charset="0"/>
-            </a:endParaRPr>
-          </a:p>
-        </p:txBody>
-      </p:sp>
-    </p:spTree>
-    <p:extLst>
-      <p:ext uri="{BB962C8B-B14F-4D97-AF65-F5344CB8AC3E}">
-        <p14:creationId xmlns:p14="http://schemas.microsoft.com/office/powerpoint/2010/main" val="1839907482"/>
-      </p:ext>
-    </p:extLst>
-  </p:cSld>
-  <p:clrMapOvr>
-    <a:masterClrMapping/>
-  </p:clrMapOvr>
-</p:sld>
-</file>
-
-<file path=ppt/slides/slide6.xml><?xml version="1.0" encoding="utf-8"?>
-<p:sld xmlns:a="http://schemas.openxmlformats.org/drawingml/2006/main" xmlns:r="http://schemas.openxmlformats.org/officeDocument/2006/relationships" xmlns:p="http://schemas.openxmlformats.org/presentationml/2006/main">
-  <p:cSld>
-    <p:spTree>
-      <p:nvGrpSpPr>
-        <p:cNvPr id="1" name="">
-          <a:extLst>
-            <a:ext uri="{FF2B5EF4-FFF2-40B4-BE49-F238E27FC236}">
-              <a16:creationId xmlns:a16="http://schemas.microsoft.com/office/drawing/2014/main" id="{3F496B5F-6683-D7D6-0F56-F07D111D3FB8}"/>
-            </a:ext>
-          </a:extLst>
-        </p:cNvPr>
-        <p:cNvGrpSpPr/>
-        <p:nvPr/>
-      </p:nvGrpSpPr>
-      <p:grpSpPr>
-        <a:xfrm>
-          <a:off x="0" y="0"/>
-          <a:ext cx="0" cy="0"/>
-          <a:chOff x="0" y="0"/>
-          <a:chExt cx="0" cy="0"/>
-        </a:xfrm>
-      </p:grpSpPr>
-      <p:sp>
-        <p:nvSpPr>
-          <p:cNvPr id="6146" name="Rectangle 2">
-            <a:extLst>
-              <a:ext uri="{FF2B5EF4-FFF2-40B4-BE49-F238E27FC236}">
-                <a16:creationId xmlns:a16="http://schemas.microsoft.com/office/drawing/2014/main" id="{0C3258A8-FFED-846F-0C01-8681E0C98C31}"/>
-              </a:ext>
-            </a:extLst>
-          </p:cNvPr>
-          <p:cNvSpPr>
-            <a:spLocks noGrp="1" noChangeArrowheads="1"/>
-          </p:cNvSpPr>
-          <p:nvPr>
-            <p:ph type="title"/>
-            <p:custDataLst>
-              <p:tags r:id="rId1"/>
-            </p:custDataLst>
-          </p:nvPr>
-        </p:nvSpPr>
-        <p:spPr>
-          <a:xfrm>
-            <a:off x="1141413" y="284084"/>
-            <a:ext cx="9905998" cy="620791"/>
-          </a:xfrm>
-        </p:spPr>
-        <p:txBody>
-          <a:bodyPr/>
-          <a:lstStyle/>
-          <a:p>
-            <a:pPr algn="ctr"/>
-            <a:r>
-              <a:rPr lang="en-US" dirty="0"/>
-              <a:t>Lecture 7: Tuesday, Sep 16</a:t>
-            </a:r>
-          </a:p>
-        </p:txBody>
-      </p:sp>
-      <p:sp>
-        <p:nvSpPr>
-          <p:cNvPr id="6147" name="Rectangle 3">
-            <a:extLst>
-              <a:ext uri="{FF2B5EF4-FFF2-40B4-BE49-F238E27FC236}">
-                <a16:creationId xmlns:a16="http://schemas.microsoft.com/office/drawing/2014/main" id="{3EE4C4AB-A46E-FD4A-C65B-D8EA0C8113D0}"/>
-              </a:ext>
-            </a:extLst>
-          </p:cNvPr>
-          <p:cNvSpPr>
-            <a:spLocks noGrp="1" noChangeArrowheads="1"/>
-          </p:cNvSpPr>
-          <p:nvPr>
-            <p:ph idx="1"/>
-            <p:custDataLst>
-              <p:tags r:id="rId2"/>
-            </p:custDataLst>
-          </p:nvPr>
-        </p:nvSpPr>
-        <p:spPr>
-          <a:xfrm>
-            <a:off x="1294151" y="1098548"/>
-            <a:ext cx="9905998" cy="5387311"/>
-          </a:xfrm>
-        </p:spPr>
-        <p:txBody>
-          <a:bodyPr>
-            <a:normAutofit fontScale="62500" lnSpcReduction="20000"/>
-          </a:bodyPr>
-          <a:lstStyle/>
-          <a:p>
-            <a:r>
-              <a:rPr lang="en-US" dirty="0">
-                <a:latin typeface="Arial" panose="020B0604020202020204" pitchFamily="34" charset="0"/>
-                <a:cs typeface="Arial" panose="020B0604020202020204" pitchFamily="34" charset="0"/>
-              </a:rPr>
-              <a:t>First homework was due last Thursday</a:t>
-            </a:r>
-          </a:p>
-          <a:p>
-            <a:pPr lvl="1"/>
-            <a:r>
-              <a:rPr lang="en-US" dirty="0">
-                <a:latin typeface="Arial" panose="020B0604020202020204" pitchFamily="34" charset="0"/>
-                <a:cs typeface="Arial" panose="020B0604020202020204" pitchFamily="34" charset="0"/>
-              </a:rPr>
-              <a:t>Extension period through Tonight!</a:t>
-            </a:r>
-          </a:p>
-          <a:p>
-            <a:r>
-              <a:rPr lang="en-US" dirty="0">
-                <a:latin typeface="Arial" panose="020B0604020202020204" pitchFamily="34" charset="0"/>
-                <a:cs typeface="Arial" panose="020B0604020202020204" pitchFamily="34" charset="0"/>
-              </a:rPr>
-              <a:t>OH: Make sure to glance at Piazza for office hour changes / cancellations before attending</a:t>
-            </a:r>
-          </a:p>
-          <a:p>
-            <a:pPr lvl="1"/>
-            <a:r>
-              <a:rPr lang="en-US" dirty="0">
-                <a:latin typeface="Arial" panose="020B0604020202020204" pitchFamily="34" charset="0"/>
-                <a:cs typeface="Arial" panose="020B0604020202020204" pitchFamily="34" charset="0"/>
-              </a:rPr>
-              <a:t>We don’t want you to make a wasteful trip. We will try not to change OH too often!</a:t>
-            </a:r>
-          </a:p>
-          <a:p>
-            <a:r>
-              <a:rPr lang="en-US" dirty="0">
-                <a:latin typeface="Arial" panose="020B0604020202020204" pitchFamily="34" charset="0"/>
-                <a:cs typeface="Arial" panose="020B0604020202020204" pitchFamily="34" charset="0"/>
-              </a:rPr>
-              <a:t>Quiz 1 is THIS Thursday in class (yay!)</a:t>
-            </a:r>
-          </a:p>
-          <a:p>
-            <a:pPr lvl="1"/>
-            <a:r>
-              <a:rPr lang="en-US" dirty="0">
-                <a:latin typeface="Arial" panose="020B0604020202020204" pitchFamily="34" charset="0"/>
-                <a:cs typeface="Arial" panose="020B0604020202020204" pitchFamily="34" charset="0"/>
-              </a:rPr>
-              <a:t>Attend your enrollment schedule only!</a:t>
-            </a:r>
-          </a:p>
-          <a:p>
-            <a:pPr lvl="1"/>
-            <a:r>
-              <a:rPr lang="en-US" dirty="0">
-                <a:latin typeface="Arial" panose="020B0604020202020204" pitchFamily="34" charset="0"/>
-                <a:cs typeface="Arial" panose="020B0604020202020204" pitchFamily="34" charset="0"/>
-              </a:rPr>
-              <a:t>You will have 1 hour (NOT 1 </a:t>
-            </a:r>
-            <a:r>
-              <a:rPr lang="en-US" dirty="0" err="1">
-                <a:latin typeface="Arial" panose="020B0604020202020204" pitchFamily="34" charset="0"/>
-                <a:cs typeface="Arial" panose="020B0604020202020204" pitchFamily="34" charset="0"/>
-              </a:rPr>
-              <a:t>hr</a:t>
-            </a:r>
-            <a:r>
-              <a:rPr lang="en-US" dirty="0">
-                <a:latin typeface="Arial" panose="020B0604020202020204" pitchFamily="34" charset="0"/>
-                <a:cs typeface="Arial" panose="020B0604020202020204" pitchFamily="34" charset="0"/>
-              </a:rPr>
-              <a:t> 15 mins)</a:t>
-            </a:r>
-          </a:p>
-          <a:p>
-            <a:pPr lvl="1"/>
-            <a:r>
-              <a:rPr lang="en-US" dirty="0">
-                <a:latin typeface="Arial" panose="020B0604020202020204" pitchFamily="34" charset="0"/>
-                <a:cs typeface="Arial" panose="020B0604020202020204" pitchFamily="34" charset="0"/>
-              </a:rPr>
-              <a:t>See website for some example old quizzes</a:t>
-            </a:r>
-          </a:p>
-          <a:p>
-            <a:r>
-              <a:rPr lang="en-US" dirty="0">
-                <a:latin typeface="Arial" panose="020B0604020202020204" pitchFamily="34" charset="0"/>
-                <a:cs typeface="Arial" panose="020B0604020202020204" pitchFamily="34" charset="0"/>
-              </a:rPr>
-              <a:t>Please remember that I am asking for NO laptop / phones!</a:t>
-            </a:r>
-          </a:p>
-          <a:p>
-            <a:pPr lvl="1"/>
-            <a:r>
-              <a:rPr lang="en-US" dirty="0">
-                <a:latin typeface="Arial" panose="020B0604020202020204" pitchFamily="34" charset="0"/>
-                <a:cs typeface="Arial" panose="020B0604020202020204" pitchFamily="34" charset="0"/>
-              </a:rPr>
-              <a:t>This makes the learning environment better for everybody. I appreciate it!</a:t>
-            </a:r>
-          </a:p>
-          <a:p>
-            <a:r>
-              <a:rPr lang="en-US" dirty="0">
-                <a:latin typeface="Arial" panose="020B0604020202020204" pitchFamily="34" charset="0"/>
-                <a:cs typeface="Arial" panose="020B0604020202020204" pitchFamily="34" charset="0"/>
-              </a:rPr>
-              <a:t>Discussion Section: Chase will be holding every week</a:t>
-            </a:r>
-          </a:p>
-          <a:p>
-            <a:pPr lvl="1"/>
-            <a:r>
-              <a:rPr lang="en-US" dirty="0">
-                <a:latin typeface="Arial" panose="020B0604020202020204" pitchFamily="34" charset="0"/>
-                <a:cs typeface="Arial" panose="020B0604020202020204" pitchFamily="34" charset="0"/>
-              </a:rPr>
-              <a:t>Wednesday 4-5pm in Rice 110</a:t>
-            </a:r>
-          </a:p>
-          <a:p>
-            <a:pPr lvl="1"/>
-            <a:r>
-              <a:rPr lang="en-US" dirty="0">
-                <a:latin typeface="Arial" panose="020B0604020202020204" pitchFamily="34" charset="0"/>
-                <a:cs typeface="Arial" panose="020B0604020202020204" pitchFamily="34" charset="0"/>
-              </a:rPr>
-              <a:t>He decided not to record (room was annoying to setup and worried about attendance dropping if recorded…sorry)</a:t>
-            </a:r>
-          </a:p>
-          <a:p>
-            <a:r>
-              <a:rPr lang="en-US" dirty="0">
-                <a:latin typeface="Arial" panose="020B0604020202020204" pitchFamily="34" charset="0"/>
-                <a:cs typeface="Arial" panose="020B0604020202020204" pitchFamily="34" charset="0"/>
-              </a:rPr>
-              <a:t>Lecture recordings are on Panopto</a:t>
-            </a:r>
-          </a:p>
-          <a:p>
-            <a:pPr lvl="1"/>
-            <a:r>
-              <a:rPr lang="en-US" dirty="0">
-                <a:latin typeface="Arial" panose="020B0604020202020204" pitchFamily="34" charset="0"/>
-                <a:cs typeface="Arial" panose="020B0604020202020204" pitchFamily="34" charset="0"/>
-              </a:rPr>
-              <a:t>There are folders for Floryan and Pettit (little hard to find but they are there)</a:t>
-            </a:r>
-          </a:p>
-          <a:p>
-            <a:r>
-              <a:rPr lang="en-US" dirty="0">
-                <a:latin typeface="Arial" panose="020B0604020202020204" pitchFamily="34" charset="0"/>
-                <a:cs typeface="Arial" panose="020B0604020202020204" pitchFamily="34" charset="0"/>
-              </a:rPr>
-              <a:t>TA office hours have started. Any issues with that?</a:t>
-            </a:r>
-          </a:p>
-          <a:p>
-            <a:r>
-              <a:rPr lang="en-US" dirty="0">
-                <a:latin typeface="Arial" panose="020B0604020202020204" pitchFamily="34" charset="0"/>
-                <a:cs typeface="Arial" panose="020B0604020202020204" pitchFamily="34" charset="0"/>
-              </a:rPr>
-              <a:t>Today we continue with module 2</a:t>
-            </a:r>
-          </a:p>
-        </p:txBody>
-      </p:sp>
-    </p:spTree>
-    <p:extLst>
-      <p:ext uri="{BB962C8B-B14F-4D97-AF65-F5344CB8AC3E}">
-        <p14:creationId xmlns:p14="http://schemas.microsoft.com/office/powerpoint/2010/main" val="4180394416"/>
-      </p:ext>
-    </p:extLst>
-  </p:cSld>
-  <p:clrMapOvr>
-    <a:masterClrMapping/>
-  </p:clrMapOvr>
-</p:sld>
-</file>
-
-<file path=ppt/slides/slide7.xml><?xml version="1.0" encoding="utf-8"?>
-<p:sld xmlns:a="http://schemas.openxmlformats.org/drawingml/2006/main" xmlns:r="http://schemas.openxmlformats.org/officeDocument/2006/relationships" xmlns:p="http://schemas.openxmlformats.org/presentationml/2006/main">
-  <p:cSld>
-    <p:spTree>
-      <p:nvGrpSpPr>
-        <p:cNvPr id="1" name="">
-          <a:extLst>
-            <a:ext uri="{FF2B5EF4-FFF2-40B4-BE49-F238E27FC236}">
-              <a16:creationId xmlns:a16="http://schemas.microsoft.com/office/drawing/2014/main" id="{67C8FD63-F2C8-6BA9-B681-B941DE68C46E}"/>
-            </a:ext>
-          </a:extLst>
-        </p:cNvPr>
-        <p:cNvGrpSpPr/>
-        <p:nvPr/>
-      </p:nvGrpSpPr>
-      <p:grpSpPr>
-        <a:xfrm>
-          <a:off x="0" y="0"/>
-          <a:ext cx="0" cy="0"/>
-          <a:chOff x="0" y="0"/>
-          <a:chExt cx="0" cy="0"/>
-        </a:xfrm>
-      </p:grpSpPr>
-      <p:sp>
-        <p:nvSpPr>
-          <p:cNvPr id="6146" name="Rectangle 2">
-            <a:extLst>
-              <a:ext uri="{FF2B5EF4-FFF2-40B4-BE49-F238E27FC236}">
-                <a16:creationId xmlns:a16="http://schemas.microsoft.com/office/drawing/2014/main" id="{54A42E4A-4F40-DF08-0015-4E99F92B7288}"/>
-              </a:ext>
-            </a:extLst>
-          </p:cNvPr>
-          <p:cNvSpPr>
-            <a:spLocks noGrp="1" noChangeArrowheads="1"/>
-          </p:cNvSpPr>
-          <p:nvPr>
-            <p:ph type="title"/>
-            <p:custDataLst>
-              <p:tags r:id="rId1"/>
-            </p:custDataLst>
-          </p:nvPr>
-        </p:nvSpPr>
-        <p:spPr>
-          <a:xfrm>
-            <a:off x="1141413" y="284084"/>
-            <a:ext cx="9905998" cy="620791"/>
-          </a:xfrm>
-        </p:spPr>
-        <p:txBody>
-          <a:bodyPr/>
-          <a:lstStyle/>
-          <a:p>
-            <a:pPr algn="ctr"/>
-            <a:r>
-              <a:rPr lang="en-US" dirty="0"/>
-              <a:t>Lecture 8: Tuesday, Sep 23</a:t>
-            </a:r>
-          </a:p>
-        </p:txBody>
-      </p:sp>
-      <p:sp>
-        <p:nvSpPr>
-          <p:cNvPr id="6147" name="Rectangle 3">
-            <a:extLst>
-              <a:ext uri="{FF2B5EF4-FFF2-40B4-BE49-F238E27FC236}">
-                <a16:creationId xmlns:a16="http://schemas.microsoft.com/office/drawing/2014/main" id="{65F096BC-936A-901A-0B51-A56E8CD55725}"/>
-              </a:ext>
-            </a:extLst>
-          </p:cNvPr>
-          <p:cNvSpPr>
-            <a:spLocks noGrp="1" noChangeArrowheads="1"/>
-          </p:cNvSpPr>
-          <p:nvPr>
-            <p:ph idx="1"/>
-            <p:custDataLst>
-              <p:tags r:id="rId2"/>
-            </p:custDataLst>
-          </p:nvPr>
-        </p:nvSpPr>
-        <p:spPr>
-          <a:xfrm>
-            <a:off x="1294151" y="1098548"/>
-            <a:ext cx="9905998" cy="5387311"/>
-          </a:xfrm>
-        </p:spPr>
-        <p:txBody>
-          <a:bodyPr>
-            <a:normAutofit fontScale="77500" lnSpcReduction="20000"/>
-          </a:bodyPr>
-          <a:lstStyle/>
-          <a:p>
-            <a:r>
-              <a:rPr lang="en-US" dirty="0">
-                <a:latin typeface="Arial" panose="020B0604020202020204" pitchFamily="34" charset="0"/>
-                <a:cs typeface="Arial" panose="020B0604020202020204" pitchFamily="34" charset="0"/>
-              </a:rPr>
-              <a:t>First homework has been returned if on time. Still a few late submissions we are going through</a:t>
-            </a:r>
-          </a:p>
-          <a:p>
-            <a:r>
-              <a:rPr lang="en-US" dirty="0">
-                <a:latin typeface="Arial" panose="020B0604020202020204" pitchFamily="34" charset="0"/>
-                <a:cs typeface="Arial" panose="020B0604020202020204" pitchFamily="34" charset="0"/>
-              </a:rPr>
-              <a:t>No homework this week. Yay!</a:t>
-            </a:r>
-          </a:p>
-          <a:p>
-            <a:r>
-              <a:rPr lang="en-US" dirty="0">
-                <a:latin typeface="Arial" panose="020B0604020202020204" pitchFamily="34" charset="0"/>
-                <a:cs typeface="Arial" panose="020B0604020202020204" pitchFamily="34" charset="0"/>
-              </a:rPr>
-              <a:t>Quiz 1 was last week</a:t>
-            </a:r>
-          </a:p>
-          <a:p>
-            <a:pPr lvl="1"/>
-            <a:r>
-              <a:rPr lang="en-US" dirty="0">
-                <a:latin typeface="Arial" panose="020B0604020202020204" pitchFamily="34" charset="0"/>
-                <a:cs typeface="Arial" panose="020B0604020202020204" pitchFamily="34" charset="0"/>
-              </a:rPr>
-              <a:t>How did it go?</a:t>
-            </a:r>
-          </a:p>
-          <a:p>
-            <a:pPr lvl="1"/>
-            <a:r>
-              <a:rPr lang="en-US" dirty="0">
-                <a:latin typeface="Arial" panose="020B0604020202020204" pitchFamily="34" charset="0"/>
-                <a:cs typeface="Arial" panose="020B0604020202020204" pitchFamily="34" charset="0"/>
-              </a:rPr>
-              <a:t>We plan (hope) to have it graded tomorrow evening</a:t>
-            </a:r>
-          </a:p>
-          <a:p>
-            <a:pPr lvl="1"/>
-            <a:r>
-              <a:rPr lang="en-US" dirty="0">
-                <a:latin typeface="Arial" panose="020B0604020202020204" pitchFamily="34" charset="0"/>
-                <a:cs typeface="Arial" panose="020B0604020202020204" pitchFamily="34" charset="0"/>
-              </a:rPr>
-              <a:t>Quizzes start happening pretty regularly (every three weeks)</a:t>
-            </a:r>
-          </a:p>
-          <a:p>
-            <a:r>
-              <a:rPr lang="en-US" dirty="0">
-                <a:latin typeface="Arial" panose="020B0604020202020204" pitchFamily="34" charset="0"/>
-                <a:cs typeface="Arial" panose="020B0604020202020204" pitchFamily="34" charset="0"/>
-              </a:rPr>
-              <a:t>Please remember that I am asking for NO laptop / phones!</a:t>
-            </a:r>
-          </a:p>
-          <a:p>
-            <a:pPr lvl="1"/>
-            <a:r>
-              <a:rPr lang="en-US" dirty="0">
-                <a:latin typeface="Arial" panose="020B0604020202020204" pitchFamily="34" charset="0"/>
-                <a:cs typeface="Arial" panose="020B0604020202020204" pitchFamily="34" charset="0"/>
-              </a:rPr>
-              <a:t>This makes the learning environment better for everybody. I appreciate it!</a:t>
-            </a:r>
-          </a:p>
-          <a:p>
-            <a:r>
-              <a:rPr lang="en-US" dirty="0">
-                <a:latin typeface="Arial" panose="020B0604020202020204" pitchFamily="34" charset="0"/>
-                <a:cs typeface="Arial" panose="020B0604020202020204" pitchFamily="34" charset="0"/>
-              </a:rPr>
-              <a:t>Discussion Section: Chase will be holding every week</a:t>
-            </a:r>
-          </a:p>
-          <a:p>
-            <a:pPr lvl="1"/>
-            <a:r>
-              <a:rPr lang="en-US" dirty="0">
-                <a:latin typeface="Arial" panose="020B0604020202020204" pitchFamily="34" charset="0"/>
-                <a:cs typeface="Arial" panose="020B0604020202020204" pitchFamily="34" charset="0"/>
-              </a:rPr>
-              <a:t>Wednesday 4-5pm in Rice 110</a:t>
-            </a:r>
-          </a:p>
-          <a:p>
-            <a:pPr lvl="1"/>
-            <a:r>
-              <a:rPr lang="en-US" dirty="0">
-                <a:latin typeface="Arial" panose="020B0604020202020204" pitchFamily="34" charset="0"/>
-                <a:cs typeface="Arial" panose="020B0604020202020204" pitchFamily="34" charset="0"/>
-              </a:rPr>
-              <a:t>Going to try to get a classroom for quiz weeks since it was so busy</a:t>
-            </a:r>
-          </a:p>
-          <a:p>
-            <a:r>
-              <a:rPr lang="en-US" dirty="0">
-                <a:latin typeface="Arial" panose="020B0604020202020204" pitchFamily="34" charset="0"/>
-                <a:cs typeface="Arial" panose="020B0604020202020204" pitchFamily="34" charset="0"/>
-              </a:rPr>
-              <a:t>Lecture recordings are on Panopto</a:t>
-            </a:r>
-          </a:p>
-          <a:p>
-            <a:pPr lvl="1"/>
-            <a:r>
-              <a:rPr lang="en-US" dirty="0">
-                <a:latin typeface="Arial" panose="020B0604020202020204" pitchFamily="34" charset="0"/>
-                <a:cs typeface="Arial" panose="020B0604020202020204" pitchFamily="34" charset="0"/>
-              </a:rPr>
-              <a:t>There are folders for Floryan and Pettit (little hard to find but they are there)</a:t>
-            </a:r>
-          </a:p>
-          <a:p>
-            <a:r>
-              <a:rPr lang="en-US" dirty="0">
-                <a:latin typeface="Arial" panose="020B0604020202020204" pitchFamily="34" charset="0"/>
-                <a:cs typeface="Arial" panose="020B0604020202020204" pitchFamily="34" charset="0"/>
-              </a:rPr>
-              <a:t>Today we continue with module 2</a:t>
-            </a:r>
-          </a:p>
-        </p:txBody>
-      </p:sp>
-    </p:spTree>
-    <p:extLst>
-      <p:ext uri="{BB962C8B-B14F-4D97-AF65-F5344CB8AC3E}">
-        <p14:creationId xmlns:p14="http://schemas.microsoft.com/office/powerpoint/2010/main" val="2744830545"/>
-      </p:ext>
-    </p:extLst>
-  </p:cSld>
-  <p:clrMapOvr>
-    <a:masterClrMapping/>
-  </p:clrMapOvr>
-</p:sld>
-</file>
-
-<file path=ppt/slides/slide8.xml><?xml version="1.0" encoding="utf-8"?>
-<p:sld xmlns:a="http://schemas.openxmlformats.org/drawingml/2006/main" xmlns:r="http://schemas.openxmlformats.org/officeDocument/2006/relationships" xmlns:p="http://schemas.openxmlformats.org/presentationml/2006/main">
-  <p:cSld>
-    <p:spTree>
-      <p:nvGrpSpPr>
-        <p:cNvPr id="1" name="">
-          <a:extLst>
-            <a:ext uri="{FF2B5EF4-FFF2-40B4-BE49-F238E27FC236}">
-              <a16:creationId xmlns:a16="http://schemas.microsoft.com/office/drawing/2014/main" id="{26F9C757-6691-85BD-663D-1D76AACFD819}"/>
-            </a:ext>
-          </a:extLst>
-        </p:cNvPr>
-        <p:cNvGrpSpPr/>
-        <p:nvPr/>
-      </p:nvGrpSpPr>
-      <p:grpSpPr>
-        <a:xfrm>
-          <a:off x="0" y="0"/>
-          <a:ext cx="0" cy="0"/>
-          <a:chOff x="0" y="0"/>
-          <a:chExt cx="0" cy="0"/>
-        </a:xfrm>
-      </p:grpSpPr>
-      <p:sp>
-        <p:nvSpPr>
-          <p:cNvPr id="6146" name="Rectangle 2">
-            <a:extLst>
-              <a:ext uri="{FF2B5EF4-FFF2-40B4-BE49-F238E27FC236}">
-                <a16:creationId xmlns:a16="http://schemas.microsoft.com/office/drawing/2014/main" id="{6574F87F-3A8E-FF64-9CB1-2364183208CF}"/>
-              </a:ext>
-            </a:extLst>
-          </p:cNvPr>
-          <p:cNvSpPr>
-            <a:spLocks noGrp="1" noChangeArrowheads="1"/>
-          </p:cNvSpPr>
-          <p:nvPr>
-            <p:ph type="title"/>
-            <p:custDataLst>
-              <p:tags r:id="rId1"/>
-            </p:custDataLst>
-          </p:nvPr>
-        </p:nvSpPr>
-        <p:spPr>
-          <a:xfrm>
-            <a:off x="1141413" y="284084"/>
-            <a:ext cx="9905998" cy="620791"/>
-          </a:xfrm>
-        </p:spPr>
-        <p:txBody>
-          <a:bodyPr/>
-          <a:lstStyle/>
-          <a:p>
-            <a:pPr algn="ctr"/>
-            <a:r>
-              <a:rPr lang="en-US" dirty="0"/>
-              <a:t>Lecture 9: Thursday, Sep 25</a:t>
-            </a:r>
-          </a:p>
-        </p:txBody>
-      </p:sp>
-      <p:sp>
-        <p:nvSpPr>
-          <p:cNvPr id="6147" name="Rectangle 3">
-            <a:extLst>
-              <a:ext uri="{FF2B5EF4-FFF2-40B4-BE49-F238E27FC236}">
-                <a16:creationId xmlns:a16="http://schemas.microsoft.com/office/drawing/2014/main" id="{C8B599B9-A2DB-A288-D017-08B2E5DA9573}"/>
-              </a:ext>
-            </a:extLst>
-          </p:cNvPr>
-          <p:cNvSpPr>
-            <a:spLocks noGrp="1" noChangeArrowheads="1"/>
-          </p:cNvSpPr>
-          <p:nvPr>
-            <p:ph idx="1"/>
-            <p:custDataLst>
-              <p:tags r:id="rId2"/>
-            </p:custDataLst>
-          </p:nvPr>
-        </p:nvSpPr>
-        <p:spPr>
-          <a:xfrm>
-            <a:off x="1294151" y="1098548"/>
-            <a:ext cx="9905998" cy="5387311"/>
-          </a:xfrm>
-        </p:spPr>
-        <p:txBody>
-          <a:bodyPr>
-            <a:normAutofit fontScale="92500" lnSpcReduction="20000"/>
-          </a:bodyPr>
-          <a:lstStyle/>
-          <a:p>
-            <a:r>
-              <a:rPr lang="en-US" dirty="0">
-                <a:latin typeface="Arial" panose="020B0604020202020204" pitchFamily="34" charset="0"/>
-                <a:cs typeface="Arial" panose="020B0604020202020204" pitchFamily="34" charset="0"/>
-              </a:rPr>
-              <a:t>First homework has been returned if on time. Still a few late submissions we are going through</a:t>
-            </a:r>
-          </a:p>
-          <a:p>
-            <a:r>
-              <a:rPr lang="en-US" dirty="0">
-                <a:latin typeface="Arial" panose="020B0604020202020204" pitchFamily="34" charset="0"/>
-                <a:cs typeface="Arial" panose="020B0604020202020204" pitchFamily="34" charset="0"/>
-              </a:rPr>
-              <a:t>No homework this week. Yay!</a:t>
-            </a:r>
-          </a:p>
-          <a:p>
-            <a:r>
-              <a:rPr lang="en-US" dirty="0">
-                <a:latin typeface="Arial" panose="020B0604020202020204" pitchFamily="34" charset="0"/>
-                <a:cs typeface="Arial" panose="020B0604020202020204" pitchFamily="34" charset="0"/>
-              </a:rPr>
-              <a:t>Quiz 1 is graded</a:t>
-            </a:r>
-          </a:p>
-          <a:p>
-            <a:pPr lvl="1"/>
-            <a:r>
-              <a:rPr lang="en-US" dirty="0">
-                <a:latin typeface="Arial" panose="020B0604020202020204" pitchFamily="34" charset="0"/>
-                <a:cs typeface="Arial" panose="020B0604020202020204" pitchFamily="34" charset="0"/>
-              </a:rPr>
-              <a:t>Quizzes start happening pretty regularly (every three weeks)</a:t>
-            </a:r>
-          </a:p>
-          <a:p>
-            <a:r>
-              <a:rPr lang="en-US" dirty="0">
-                <a:latin typeface="Arial" panose="020B0604020202020204" pitchFamily="34" charset="0"/>
-                <a:cs typeface="Arial" panose="020B0604020202020204" pitchFamily="34" charset="0"/>
-              </a:rPr>
-              <a:t>Please remember that I am asking for NO laptop / phones!</a:t>
-            </a:r>
-          </a:p>
-          <a:p>
-            <a:pPr lvl="1"/>
-            <a:r>
-              <a:rPr lang="en-US" dirty="0">
-                <a:latin typeface="Arial" panose="020B0604020202020204" pitchFamily="34" charset="0"/>
-                <a:cs typeface="Arial" panose="020B0604020202020204" pitchFamily="34" charset="0"/>
-              </a:rPr>
-              <a:t>This makes the learning environment better for everybody. I appreciate it!</a:t>
-            </a:r>
-          </a:p>
-          <a:p>
-            <a:r>
-              <a:rPr lang="en-US" dirty="0">
-                <a:latin typeface="Arial" panose="020B0604020202020204" pitchFamily="34" charset="0"/>
-                <a:cs typeface="Arial" panose="020B0604020202020204" pitchFamily="34" charset="0"/>
-              </a:rPr>
-              <a:t>Discussion Section: Chase will be holding every week</a:t>
-            </a:r>
-          </a:p>
-          <a:p>
-            <a:pPr lvl="1"/>
-            <a:r>
-              <a:rPr lang="en-US" dirty="0">
-                <a:latin typeface="Arial" panose="020B0604020202020204" pitchFamily="34" charset="0"/>
-                <a:cs typeface="Arial" panose="020B0604020202020204" pitchFamily="34" charset="0"/>
-              </a:rPr>
-              <a:t>Wednesday 4-5pm in Rice 110</a:t>
-            </a:r>
-          </a:p>
-          <a:p>
-            <a:pPr lvl="1"/>
-            <a:r>
-              <a:rPr lang="en-US" dirty="0">
-                <a:latin typeface="Arial" panose="020B0604020202020204" pitchFamily="34" charset="0"/>
-                <a:cs typeface="Arial" panose="020B0604020202020204" pitchFamily="34" charset="0"/>
-              </a:rPr>
-              <a:t>Going to try to get a classroom for quiz weeks since it was so busy</a:t>
-            </a:r>
-          </a:p>
-          <a:p>
-            <a:r>
-              <a:rPr lang="en-US" dirty="0">
-                <a:latin typeface="Arial" panose="020B0604020202020204" pitchFamily="34" charset="0"/>
-                <a:cs typeface="Arial" panose="020B0604020202020204" pitchFamily="34" charset="0"/>
-              </a:rPr>
-              <a:t>Lecture recordings are on Panopto</a:t>
-            </a:r>
-          </a:p>
-          <a:p>
-            <a:pPr lvl="1"/>
-            <a:r>
-              <a:rPr lang="en-US" dirty="0">
-                <a:latin typeface="Arial" panose="020B0604020202020204" pitchFamily="34" charset="0"/>
-                <a:cs typeface="Arial" panose="020B0604020202020204" pitchFamily="34" charset="0"/>
-              </a:rPr>
-              <a:t>There are folders for Floryan and Pettit (little hard to find but they are there)</a:t>
-            </a:r>
-          </a:p>
-          <a:p>
-            <a:r>
-              <a:rPr lang="en-US" dirty="0">
-                <a:latin typeface="Arial" panose="020B0604020202020204" pitchFamily="34" charset="0"/>
-                <a:cs typeface="Arial" panose="020B0604020202020204" pitchFamily="34" charset="0"/>
-              </a:rPr>
-              <a:t>Today we continue with module 2 (and possibly finish)</a:t>
-            </a:r>
-          </a:p>
-        </p:txBody>
-      </p:sp>
-    </p:spTree>
-    <p:extLst>
-      <p:ext uri="{BB962C8B-B14F-4D97-AF65-F5344CB8AC3E}">
-        <p14:creationId xmlns:p14="http://schemas.microsoft.com/office/powerpoint/2010/main" val="3763546915"/>
-      </p:ext>
-    </p:extLst>
-  </p:cSld>
-  <p:clrMapOvr>
-    <a:masterClrMapping/>
-  </p:clrMapOvr>
-</p:sld>
-</file>
-
-<file path=ppt/slides/slide9.xml><?xml version="1.0" encoding="utf-8"?>
-<p:sld xmlns:a="http://schemas.openxmlformats.org/drawingml/2006/main" xmlns:r="http://schemas.openxmlformats.org/officeDocument/2006/relationships" xmlns:p="http://schemas.openxmlformats.org/presentationml/2006/main">
-  <p:cSld>
-    <p:spTree>
-      <p:nvGrpSpPr>
-        <p:cNvPr id="1" name="">
-          <a:extLst>
-            <a:ext uri="{FF2B5EF4-FFF2-40B4-BE49-F238E27FC236}">
-              <a16:creationId xmlns:a16="http://schemas.microsoft.com/office/drawing/2014/main" id="{14EEC395-8DBC-9BA8-3727-56502AEF210B}"/>
-            </a:ext>
-          </a:extLst>
-        </p:cNvPr>
-        <p:cNvGrpSpPr/>
-        <p:nvPr/>
-      </p:nvGrpSpPr>
-      <p:grpSpPr>
-        <a:xfrm>
-          <a:off x="0" y="0"/>
-          <a:ext cx="0" cy="0"/>
-          <a:chOff x="0" y="0"/>
-          <a:chExt cx="0" cy="0"/>
-        </a:xfrm>
-      </p:grpSpPr>
-      <p:sp>
-        <p:nvSpPr>
-          <p:cNvPr id="6146" name="Rectangle 2">
-            <a:extLst>
-              <a:ext uri="{FF2B5EF4-FFF2-40B4-BE49-F238E27FC236}">
-                <a16:creationId xmlns:a16="http://schemas.microsoft.com/office/drawing/2014/main" id="{787A9AFD-41AC-B9DF-6535-F7CC3FB6E2BD}"/>
-              </a:ext>
-            </a:extLst>
-          </p:cNvPr>
-          <p:cNvSpPr>
-            <a:spLocks noGrp="1" noChangeArrowheads="1"/>
-          </p:cNvSpPr>
-          <p:nvPr>
-            <p:ph type="title"/>
-            <p:custDataLst>
-              <p:tags r:id="rId1"/>
-            </p:custDataLst>
-          </p:nvPr>
-        </p:nvSpPr>
-        <p:spPr>
-          <a:xfrm>
-            <a:off x="1141413" y="284084"/>
-            <a:ext cx="9905998" cy="620791"/>
-          </a:xfrm>
-        </p:spPr>
-        <p:txBody>
-          <a:bodyPr/>
-          <a:lstStyle/>
-          <a:p>
-            <a:pPr algn="ctr"/>
-            <a:r>
-              <a:rPr lang="en-US" dirty="0"/>
-              <a:t>Lecture 10: Tuesday, Sep 30</a:t>
-            </a:r>
-          </a:p>
-        </p:txBody>
-      </p:sp>
-      <p:sp>
-        <p:nvSpPr>
-          <p:cNvPr id="6147" name="Rectangle 3">
-            <a:extLst>
-              <a:ext uri="{FF2B5EF4-FFF2-40B4-BE49-F238E27FC236}">
-                <a16:creationId xmlns:a16="http://schemas.microsoft.com/office/drawing/2014/main" id="{ED68F8F3-88C4-8250-F78C-8417AC935AB1}"/>
-              </a:ext>
-            </a:extLst>
-          </p:cNvPr>
-          <p:cNvSpPr>
-            <a:spLocks noGrp="1" noChangeArrowheads="1"/>
-          </p:cNvSpPr>
-          <p:nvPr>
-            <p:ph idx="1"/>
-            <p:custDataLst>
-              <p:tags r:id="rId2"/>
-            </p:custDataLst>
-          </p:nvPr>
-        </p:nvSpPr>
-        <p:spPr>
-          <a:xfrm>
-            <a:off x="1294151" y="1098548"/>
-            <a:ext cx="9905998" cy="5387311"/>
-          </a:xfrm>
-        </p:spPr>
-        <p:txBody>
-          <a:bodyPr>
-            <a:normAutofit fontScale="92500" lnSpcReduction="10000"/>
-          </a:bodyPr>
-          <a:lstStyle/>
-          <a:p>
-            <a:r>
-              <a:rPr lang="en-US" dirty="0">
-                <a:latin typeface="Arial" panose="020B0604020202020204" pitchFamily="34" charset="0"/>
-                <a:cs typeface="Arial" panose="020B0604020202020204" pitchFamily="34" charset="0"/>
-              </a:rPr>
-              <a:t>First homework has been returned (for everybody)</a:t>
-            </a:r>
-          </a:p>
-          <a:p>
-            <a:r>
-              <a:rPr lang="en-US" dirty="0">
-                <a:latin typeface="Arial" panose="020B0604020202020204" pitchFamily="34" charset="0"/>
-                <a:cs typeface="Arial" panose="020B0604020202020204" pitchFamily="34" charset="0"/>
-              </a:rPr>
-              <a:t>Quiz 1 is graded</a:t>
-            </a:r>
-          </a:p>
-          <a:p>
-            <a:pPr lvl="1"/>
-            <a:r>
-              <a:rPr lang="en-US" dirty="0">
-                <a:latin typeface="Arial" panose="020B0604020202020204" pitchFamily="34" charset="0"/>
-                <a:cs typeface="Arial" panose="020B0604020202020204" pitchFamily="34" charset="0"/>
-              </a:rPr>
-              <a:t>Quizzes start happening pretty regularly (every three weeks)</a:t>
-            </a:r>
-          </a:p>
-          <a:p>
-            <a:pPr lvl="1"/>
-            <a:r>
-              <a:rPr lang="en-US" dirty="0">
-                <a:latin typeface="Arial" panose="020B0604020202020204" pitchFamily="34" charset="0"/>
-                <a:cs typeface="Arial" panose="020B0604020202020204" pitchFamily="34" charset="0"/>
-              </a:rPr>
-              <a:t>Regrades open (see email for details / dates)</a:t>
-            </a:r>
-          </a:p>
-          <a:p>
-            <a:r>
-              <a:rPr lang="en-US" dirty="0">
-                <a:latin typeface="Arial" panose="020B0604020202020204" pitchFamily="34" charset="0"/>
-                <a:cs typeface="Arial" panose="020B0604020202020204" pitchFamily="34" charset="0"/>
-              </a:rPr>
-              <a:t>Please remember that I am asking for NO laptop / phones!</a:t>
-            </a:r>
-          </a:p>
-          <a:p>
-            <a:pPr lvl="1"/>
-            <a:r>
-              <a:rPr lang="en-US" dirty="0">
-                <a:latin typeface="Arial" panose="020B0604020202020204" pitchFamily="34" charset="0"/>
-                <a:cs typeface="Arial" panose="020B0604020202020204" pitchFamily="34" charset="0"/>
-              </a:rPr>
-              <a:t>This makes the learning environment better for everybody. I appreciate it!</a:t>
-            </a:r>
-          </a:p>
-          <a:p>
-            <a:r>
-              <a:rPr lang="en-US" dirty="0">
-                <a:latin typeface="Arial" panose="020B0604020202020204" pitchFamily="34" charset="0"/>
-                <a:cs typeface="Arial" panose="020B0604020202020204" pitchFamily="34" charset="0"/>
-              </a:rPr>
-              <a:t>Discussion Section: Chase will be holding every week</a:t>
-            </a:r>
-          </a:p>
-          <a:p>
-            <a:pPr lvl="1"/>
-            <a:r>
-              <a:rPr lang="en-US" dirty="0">
-                <a:latin typeface="Arial" panose="020B0604020202020204" pitchFamily="34" charset="0"/>
-                <a:cs typeface="Arial" panose="020B0604020202020204" pitchFamily="34" charset="0"/>
-              </a:rPr>
-              <a:t>Wednesday 4-5pm in Rice 110</a:t>
-            </a:r>
-          </a:p>
-          <a:p>
-            <a:pPr lvl="1"/>
-            <a:r>
-              <a:rPr lang="en-US" dirty="0">
-                <a:latin typeface="Arial" panose="020B0604020202020204" pitchFamily="34" charset="0"/>
-                <a:cs typeface="Arial" panose="020B0604020202020204" pitchFamily="34" charset="0"/>
-              </a:rPr>
-              <a:t>Going to try to get a classroom for quiz weeks since it was so busy</a:t>
-            </a:r>
-          </a:p>
-          <a:p>
-            <a:r>
-              <a:rPr lang="en-US" dirty="0">
-                <a:latin typeface="Arial" panose="020B0604020202020204" pitchFamily="34" charset="0"/>
-                <a:cs typeface="Arial" panose="020B0604020202020204" pitchFamily="34" charset="0"/>
-              </a:rPr>
-              <a:t>Lecture recordings are on Panopto</a:t>
-            </a:r>
-          </a:p>
-          <a:p>
-            <a:pPr lvl="1"/>
-            <a:r>
-              <a:rPr lang="en-US" dirty="0">
-                <a:latin typeface="Arial" panose="020B0604020202020204" pitchFamily="34" charset="0"/>
-                <a:cs typeface="Arial" panose="020B0604020202020204" pitchFamily="34" charset="0"/>
-              </a:rPr>
-              <a:t>There are folders for Floryan and Pettit (little hard to find but they are there)</a:t>
-            </a:r>
-          </a:p>
-          <a:p>
-            <a:r>
-              <a:rPr lang="en-US" dirty="0">
-                <a:latin typeface="Arial" panose="020B0604020202020204" pitchFamily="34" charset="0"/>
-                <a:cs typeface="Arial" panose="020B0604020202020204" pitchFamily="34" charset="0"/>
-              </a:rPr>
-              <a:t>Today we finish module 2 (and start module 3)</a:t>
-            </a:r>
-          </a:p>
-        </p:txBody>
-      </p:sp>
-    </p:spTree>
-    <p:extLst>
-      <p:ext uri="{BB962C8B-B14F-4D97-AF65-F5344CB8AC3E}">
-        <p14:creationId xmlns:p14="http://schemas.microsoft.com/office/powerpoint/2010/main" val="2065606085"/>
-      </p:ext>
-    </p:extLst>
-  </p:cSld>
-  <p:clrMapOvr>
-    <a:masterClrMapping/>
-  </p:clrMapOvr>
-</p:sld>
-</file>
-
 <file path=ppt/tags/tag1.xml><?xml version="1.0" encoding="utf-8"?>
-<p:tagLst xmlns:a="http://schemas.openxmlformats.org/drawingml/2006/main" xmlns:r="http://schemas.openxmlformats.org/officeDocument/2006/relationships" xmlns:p="http://schemas.openxmlformats.org/presentationml/2006/main">
-  <p:tag name="_INSTRUCTOR VIEW19C14C36-AC8E-43BC-9DB6-C2AAF774C7DC|PANE__TAG" val="_"/>
-</p:tagLst>
-</file>
-
-<file path=ppt/tags/tag10.xml><?xml version="1.0" encoding="utf-8"?>
-<p:tagLst xmlns:a="http://schemas.openxmlformats.org/drawingml/2006/main" xmlns:r="http://schemas.openxmlformats.org/officeDocument/2006/relationships" xmlns:p="http://schemas.openxmlformats.org/presentationml/2006/main">
-  <p:tag name="_INSTRUCTOR VIEW19C14C36-AC8E-43BC-9DB6-C2AAF774C7DC|PANE__TAG" val="_"/>
-</p:tagLst>
-</file>
-
-<file path=ppt/tags/tag11.xml><?xml version="1.0" encoding="utf-8"?>
-<p:tagLst xmlns:a="http://schemas.openxmlformats.org/drawingml/2006/main" xmlns:r="http://schemas.openxmlformats.org/officeDocument/2006/relationships" xmlns:p="http://schemas.openxmlformats.org/presentationml/2006/main">
-  <p:tag name="_INSTRUCTOR VIEW19C14C36-AC8E-43BC-9DB6-C2AAF774C7DC|PANE__TAG" val="_"/>
-</p:tagLst>
-</file>
-
-<file path=ppt/tags/tag12.xml><?xml version="1.0" encoding="utf-8"?>
-<p:tagLst xmlns:a="http://schemas.openxmlformats.org/drawingml/2006/main" xmlns:r="http://schemas.openxmlformats.org/officeDocument/2006/relationships" xmlns:p="http://schemas.openxmlformats.org/presentationml/2006/main">
-  <p:tag name="_INSTRUCTOR VIEW19C14C36-AC8E-43BC-9DB6-C2AAF774C7DC|PANE__TAG" val="_"/>
-</p:tagLst>
-</file>
-
-<file path=ppt/tags/tag13.xml><?xml version="1.0" encoding="utf-8"?>
-<p:tagLst xmlns:a="http://schemas.openxmlformats.org/drawingml/2006/main" xmlns:r="http://schemas.openxmlformats.org/officeDocument/2006/relationships" xmlns:p="http://schemas.openxmlformats.org/presentationml/2006/main">
-  <p:tag name="_INSTRUCTOR VIEW19C14C36-AC8E-43BC-9DB6-C2AAF774C7DC|PANE__TAG" val="_"/>
-</p:tagLst>
-</file>
-
-<file path=ppt/tags/tag14.xml><?xml version="1.0" encoding="utf-8"?>
-<p:tagLst xmlns:a="http://schemas.openxmlformats.org/drawingml/2006/main" xmlns:r="http://schemas.openxmlformats.org/officeDocument/2006/relationships" xmlns:p="http://schemas.openxmlformats.org/presentationml/2006/main">
-  <p:tag name="_INSTRUCTOR VIEW19C14C36-AC8E-43BC-9DB6-C2AAF774C7DC|PANE__TAG" val="_"/>
-</p:tagLst>
-</file>
-
-<file path=ppt/tags/tag15.xml><?xml version="1.0" encoding="utf-8"?>
-<p:tagLst xmlns:a="http://schemas.openxmlformats.org/drawingml/2006/main" xmlns:r="http://schemas.openxmlformats.org/officeDocument/2006/relationships" xmlns:p="http://schemas.openxmlformats.org/presentationml/2006/main">
-  <p:tag name="_INSTRUCTOR VIEW19C14C36-AC8E-43BC-9DB6-C2AAF774C7DC|PANE__TAG" val="_"/>
-</p:tagLst>
-</file>
-
-<file path=ppt/tags/tag16.xml><?xml version="1.0" encoding="utf-8"?>
-<p:tagLst xmlns:a="http://schemas.openxmlformats.org/drawingml/2006/main" xmlns:r="http://schemas.openxmlformats.org/officeDocument/2006/relationships" xmlns:p="http://schemas.openxmlformats.org/presentationml/2006/main">
-  <p:tag name="_INSTRUCTOR VIEW19C14C36-AC8E-43BC-9DB6-C2AAF774C7DC|PANE__TAG" val="_"/>
-</p:tagLst>
-</file>
-
-<file path=ppt/tags/tag17.xml><?xml version="1.0" encoding="utf-8"?>
-<p:tagLst xmlns:a="http://schemas.openxmlformats.org/drawingml/2006/main" xmlns:r="http://schemas.openxmlformats.org/officeDocument/2006/relationships" xmlns:p="http://schemas.openxmlformats.org/presentationml/2006/main">
-  <p:tag name="_INSTRUCTOR VIEW19C14C36-AC8E-43BC-9DB6-C2AAF774C7DC|PANE__TAG" val="_"/>
-</p:tagLst>
-</file>
-
-<file path=ppt/tags/tag18.xml><?xml version="1.0" encoding="utf-8"?>
-<p:tagLst xmlns:a="http://schemas.openxmlformats.org/drawingml/2006/main" xmlns:r="http://schemas.openxmlformats.org/officeDocument/2006/relationships" xmlns:p="http://schemas.openxmlformats.org/presentationml/2006/main">
-  <p:tag name="_INSTRUCTOR VIEW19C14C36-AC8E-43BC-9DB6-C2AAF774C7DC|PANE__TAG" val="_"/>
-</p:tagLst>
-</file>
-
-<file path=ppt/tags/tag19.xml><?xml version="1.0" encoding="utf-8"?>
 <p:tagLst xmlns:a="http://schemas.openxmlformats.org/drawingml/2006/main" xmlns:r="http://schemas.openxmlformats.org/officeDocument/2006/relationships" xmlns:p="http://schemas.openxmlformats.org/presentationml/2006/main">
   <p:tag name="_INSTRUCTOR VIEW19C14C36-AC8E-43BC-9DB6-C2AAF774C7DC|PANE__TAG" val="_"/>
 </p:tagLst>
@@ -19737,169 +15012,13 @@
 </p:tagLst>
 </file>
 
-<file path=ppt/tags/tag20.xml><?xml version="1.0" encoding="utf-8"?>
-<p:tagLst xmlns:a="http://schemas.openxmlformats.org/drawingml/2006/main" xmlns:r="http://schemas.openxmlformats.org/officeDocument/2006/relationships" xmlns:p="http://schemas.openxmlformats.org/presentationml/2006/main">
-  <p:tag name="_INSTRUCTOR VIEW19C14C36-AC8E-43BC-9DB6-C2AAF774C7DC|PANE__TAG" val="_"/>
-</p:tagLst>
-</file>
-
-<file path=ppt/tags/tag21.xml><?xml version="1.0" encoding="utf-8"?>
-<p:tagLst xmlns:a="http://schemas.openxmlformats.org/drawingml/2006/main" xmlns:r="http://schemas.openxmlformats.org/officeDocument/2006/relationships" xmlns:p="http://schemas.openxmlformats.org/presentationml/2006/main">
-  <p:tag name="_INSTRUCTOR VIEW19C14C36-AC8E-43BC-9DB6-C2AAF774C7DC|PANE__TAG" val="_"/>
-</p:tagLst>
-</file>
-
-<file path=ppt/tags/tag22.xml><?xml version="1.0" encoding="utf-8"?>
-<p:tagLst xmlns:a="http://schemas.openxmlformats.org/drawingml/2006/main" xmlns:r="http://schemas.openxmlformats.org/officeDocument/2006/relationships" xmlns:p="http://schemas.openxmlformats.org/presentationml/2006/main">
-  <p:tag name="_INSTRUCTOR VIEW19C14C36-AC8E-43BC-9DB6-C2AAF774C7DC|PANE__TAG" val="_"/>
-</p:tagLst>
-</file>
-
-<file path=ppt/tags/tag23.xml><?xml version="1.0" encoding="utf-8"?>
-<p:tagLst xmlns:a="http://schemas.openxmlformats.org/drawingml/2006/main" xmlns:r="http://schemas.openxmlformats.org/officeDocument/2006/relationships" xmlns:p="http://schemas.openxmlformats.org/presentationml/2006/main">
-  <p:tag name="_INSTRUCTOR VIEW19C14C36-AC8E-43BC-9DB6-C2AAF774C7DC|PANE__TAG" val="_"/>
-</p:tagLst>
-</file>
-
-<file path=ppt/tags/tag24.xml><?xml version="1.0" encoding="utf-8"?>
-<p:tagLst xmlns:a="http://schemas.openxmlformats.org/drawingml/2006/main" xmlns:r="http://schemas.openxmlformats.org/officeDocument/2006/relationships" xmlns:p="http://schemas.openxmlformats.org/presentationml/2006/main">
-  <p:tag name="_INSTRUCTOR VIEW19C14C36-AC8E-43BC-9DB6-C2AAF774C7DC|PANE__TAG" val="_"/>
-</p:tagLst>
-</file>
-
-<file path=ppt/tags/tag25.xml><?xml version="1.0" encoding="utf-8"?>
-<p:tagLst xmlns:a="http://schemas.openxmlformats.org/drawingml/2006/main" xmlns:r="http://schemas.openxmlformats.org/officeDocument/2006/relationships" xmlns:p="http://schemas.openxmlformats.org/presentationml/2006/main">
-  <p:tag name="_INSTRUCTOR VIEW19C14C36-AC8E-43BC-9DB6-C2AAF774C7DC|PANE__TAG" val="_"/>
-</p:tagLst>
-</file>
-
-<file path=ppt/tags/tag26.xml><?xml version="1.0" encoding="utf-8"?>
-<p:tagLst xmlns:a="http://schemas.openxmlformats.org/drawingml/2006/main" xmlns:r="http://schemas.openxmlformats.org/officeDocument/2006/relationships" xmlns:p="http://schemas.openxmlformats.org/presentationml/2006/main">
-  <p:tag name="_INSTRUCTOR VIEW19C14C36-AC8E-43BC-9DB6-C2AAF774C7DC|PANE__TAG" val="_"/>
-</p:tagLst>
-</file>
-
-<file path=ppt/tags/tag27.xml><?xml version="1.0" encoding="utf-8"?>
-<p:tagLst xmlns:a="http://schemas.openxmlformats.org/drawingml/2006/main" xmlns:r="http://schemas.openxmlformats.org/officeDocument/2006/relationships" xmlns:p="http://schemas.openxmlformats.org/presentationml/2006/main">
-  <p:tag name="_INSTRUCTOR VIEW19C14C36-AC8E-43BC-9DB6-C2AAF774C7DC|PANE__TAG" val="_"/>
-</p:tagLst>
-</file>
-
-<file path=ppt/tags/tag28.xml><?xml version="1.0" encoding="utf-8"?>
-<p:tagLst xmlns:a="http://schemas.openxmlformats.org/drawingml/2006/main" xmlns:r="http://schemas.openxmlformats.org/officeDocument/2006/relationships" xmlns:p="http://schemas.openxmlformats.org/presentationml/2006/main">
-  <p:tag name="_INSTRUCTOR VIEW19C14C36-AC8E-43BC-9DB6-C2AAF774C7DC|PANE__TAG" val="_"/>
-</p:tagLst>
-</file>
-
-<file path=ppt/tags/tag29.xml><?xml version="1.0" encoding="utf-8"?>
-<p:tagLst xmlns:a="http://schemas.openxmlformats.org/drawingml/2006/main" xmlns:r="http://schemas.openxmlformats.org/officeDocument/2006/relationships" xmlns:p="http://schemas.openxmlformats.org/presentationml/2006/main">
-  <p:tag name="_INSTRUCTOR VIEW19C14C36-AC8E-43BC-9DB6-C2AAF774C7DC|PANE__TAG" val="_"/>
-</p:tagLst>
-</file>
-
 <file path=ppt/tags/tag3.xml><?xml version="1.0" encoding="utf-8"?>
 <p:tagLst xmlns:a="http://schemas.openxmlformats.org/drawingml/2006/main" xmlns:r="http://schemas.openxmlformats.org/officeDocument/2006/relationships" xmlns:p="http://schemas.openxmlformats.org/presentationml/2006/main">
   <p:tag name="_INSTRUCTOR VIEW19C14C36-AC8E-43BC-9DB6-C2AAF774C7DC|PANE__TAG" val="_"/>
 </p:tagLst>
 </file>
 
-<file path=ppt/tags/tag30.xml><?xml version="1.0" encoding="utf-8"?>
-<p:tagLst xmlns:a="http://schemas.openxmlformats.org/drawingml/2006/main" xmlns:r="http://schemas.openxmlformats.org/officeDocument/2006/relationships" xmlns:p="http://schemas.openxmlformats.org/presentationml/2006/main">
-  <p:tag name="_INSTRUCTOR VIEW19C14C36-AC8E-43BC-9DB6-C2AAF774C7DC|PANE__TAG" val="_"/>
-</p:tagLst>
-</file>
-
-<file path=ppt/tags/tag31.xml><?xml version="1.0" encoding="utf-8"?>
-<p:tagLst xmlns:a="http://schemas.openxmlformats.org/drawingml/2006/main" xmlns:r="http://schemas.openxmlformats.org/officeDocument/2006/relationships" xmlns:p="http://schemas.openxmlformats.org/presentationml/2006/main">
-  <p:tag name="_INSTRUCTOR VIEW19C14C36-AC8E-43BC-9DB6-C2AAF774C7DC|PANE__TAG" val="_"/>
-</p:tagLst>
-</file>
-
-<file path=ppt/tags/tag32.xml><?xml version="1.0" encoding="utf-8"?>
-<p:tagLst xmlns:a="http://schemas.openxmlformats.org/drawingml/2006/main" xmlns:r="http://schemas.openxmlformats.org/officeDocument/2006/relationships" xmlns:p="http://schemas.openxmlformats.org/presentationml/2006/main">
-  <p:tag name="_INSTRUCTOR VIEW19C14C36-AC8E-43BC-9DB6-C2AAF774C7DC|PANE__TAG" val="_"/>
-</p:tagLst>
-</file>
-
-<file path=ppt/tags/tag33.xml><?xml version="1.0" encoding="utf-8"?>
-<p:tagLst xmlns:a="http://schemas.openxmlformats.org/drawingml/2006/main" xmlns:r="http://schemas.openxmlformats.org/officeDocument/2006/relationships" xmlns:p="http://schemas.openxmlformats.org/presentationml/2006/main">
-  <p:tag name="_INSTRUCTOR VIEW19C14C36-AC8E-43BC-9DB6-C2AAF774C7DC|PANE__TAG" val="_"/>
-</p:tagLst>
-</file>
-
-<file path=ppt/tags/tag34.xml><?xml version="1.0" encoding="utf-8"?>
-<p:tagLst xmlns:a="http://schemas.openxmlformats.org/drawingml/2006/main" xmlns:r="http://schemas.openxmlformats.org/officeDocument/2006/relationships" xmlns:p="http://schemas.openxmlformats.org/presentationml/2006/main">
-  <p:tag name="_INSTRUCTOR VIEW19C14C36-AC8E-43BC-9DB6-C2AAF774C7DC|PANE__TAG" val="_"/>
-</p:tagLst>
-</file>
-
-<file path=ppt/tags/tag35.xml><?xml version="1.0" encoding="utf-8"?>
-<p:tagLst xmlns:a="http://schemas.openxmlformats.org/drawingml/2006/main" xmlns:r="http://schemas.openxmlformats.org/officeDocument/2006/relationships" xmlns:p="http://schemas.openxmlformats.org/presentationml/2006/main">
-  <p:tag name="_INSTRUCTOR VIEW19C14C36-AC8E-43BC-9DB6-C2AAF774C7DC|PANE__TAG" val="_"/>
-</p:tagLst>
-</file>
-
-<file path=ppt/tags/tag36.xml><?xml version="1.0" encoding="utf-8"?>
-<p:tagLst xmlns:a="http://schemas.openxmlformats.org/drawingml/2006/main" xmlns:r="http://schemas.openxmlformats.org/officeDocument/2006/relationships" xmlns:p="http://schemas.openxmlformats.org/presentationml/2006/main">
-  <p:tag name="_INSTRUCTOR VIEW19C14C36-AC8E-43BC-9DB6-C2AAF774C7DC|PANE__TAG" val="_"/>
-</p:tagLst>
-</file>
-
-<file path=ppt/tags/tag37.xml><?xml version="1.0" encoding="utf-8"?>
-<p:tagLst xmlns:a="http://schemas.openxmlformats.org/drawingml/2006/main" xmlns:r="http://schemas.openxmlformats.org/officeDocument/2006/relationships" xmlns:p="http://schemas.openxmlformats.org/presentationml/2006/main">
-  <p:tag name="_INSTRUCTOR VIEW19C14C36-AC8E-43BC-9DB6-C2AAF774C7DC|PANE__TAG" val="_"/>
-</p:tagLst>
-</file>
-
-<file path=ppt/tags/tag38.xml><?xml version="1.0" encoding="utf-8"?>
-<p:tagLst xmlns:a="http://schemas.openxmlformats.org/drawingml/2006/main" xmlns:r="http://schemas.openxmlformats.org/officeDocument/2006/relationships" xmlns:p="http://schemas.openxmlformats.org/presentationml/2006/main">
-  <p:tag name="_INSTRUCTOR VIEW19C14C36-AC8E-43BC-9DB6-C2AAF774C7DC|PANE__TAG" val="_"/>
-</p:tagLst>
-</file>
-
-<file path=ppt/tags/tag39.xml><?xml version="1.0" encoding="utf-8"?>
-<p:tagLst xmlns:a="http://schemas.openxmlformats.org/drawingml/2006/main" xmlns:r="http://schemas.openxmlformats.org/officeDocument/2006/relationships" xmlns:p="http://schemas.openxmlformats.org/presentationml/2006/main">
-  <p:tag name="_INSTRUCTOR VIEW19C14C36-AC8E-43BC-9DB6-C2AAF774C7DC|PANE__TAG" val="_"/>
-</p:tagLst>
-</file>
-
 <file path=ppt/tags/tag4.xml><?xml version="1.0" encoding="utf-8"?>
-<p:tagLst xmlns:a="http://schemas.openxmlformats.org/drawingml/2006/main" xmlns:r="http://schemas.openxmlformats.org/officeDocument/2006/relationships" xmlns:p="http://schemas.openxmlformats.org/presentationml/2006/main">
-  <p:tag name="_INSTRUCTOR VIEW19C14C36-AC8E-43BC-9DB6-C2AAF774C7DC|PANE__TAG" val="_"/>
-</p:tagLst>
-</file>
-
-<file path=ppt/tags/tag40.xml><?xml version="1.0" encoding="utf-8"?>
-<p:tagLst xmlns:a="http://schemas.openxmlformats.org/drawingml/2006/main" xmlns:r="http://schemas.openxmlformats.org/officeDocument/2006/relationships" xmlns:p="http://schemas.openxmlformats.org/presentationml/2006/main">
-  <p:tag name="_INSTRUCTOR VIEW19C14C36-AC8E-43BC-9DB6-C2AAF774C7DC|PANE__TAG" val="_"/>
-</p:tagLst>
-</file>
-
-<file path=ppt/tags/tag41.xml><?xml version="1.0" encoding="utf-8"?>
-<p:tagLst xmlns:a="http://schemas.openxmlformats.org/drawingml/2006/main" xmlns:r="http://schemas.openxmlformats.org/officeDocument/2006/relationships" xmlns:p="http://schemas.openxmlformats.org/presentationml/2006/main">
-  <p:tag name="_INSTRUCTOR VIEW19C14C36-AC8E-43BC-9DB6-C2AAF774C7DC|PANE__TAG" val="_"/>
-</p:tagLst>
-</file>
-
-<file path=ppt/tags/tag42.xml><?xml version="1.0" encoding="utf-8"?>
-<p:tagLst xmlns:a="http://schemas.openxmlformats.org/drawingml/2006/main" xmlns:r="http://schemas.openxmlformats.org/officeDocument/2006/relationships" xmlns:p="http://schemas.openxmlformats.org/presentationml/2006/main">
-  <p:tag name="_INSTRUCTOR VIEW19C14C36-AC8E-43BC-9DB6-C2AAF774C7DC|PANE__TAG" val="_"/>
-</p:tagLst>
-</file>
-
-<file path=ppt/tags/tag43.xml><?xml version="1.0" encoding="utf-8"?>
-<p:tagLst xmlns:a="http://schemas.openxmlformats.org/drawingml/2006/main" xmlns:r="http://schemas.openxmlformats.org/officeDocument/2006/relationships" xmlns:p="http://schemas.openxmlformats.org/presentationml/2006/main">
-  <p:tag name="_INSTRUCTOR VIEW19C14C36-AC8E-43BC-9DB6-C2AAF774C7DC|PANE__TAG" val="_"/>
-</p:tagLst>
-</file>
-
-<file path=ppt/tags/tag44.xml><?xml version="1.0" encoding="utf-8"?>
-<p:tagLst xmlns:a="http://schemas.openxmlformats.org/drawingml/2006/main" xmlns:r="http://schemas.openxmlformats.org/officeDocument/2006/relationships" xmlns:p="http://schemas.openxmlformats.org/presentationml/2006/main">
-  <p:tag name="_INSTRUCTOR VIEW19C14C36-AC8E-43BC-9DB6-C2AAF774C7DC|PANE__TAG" val="_"/>
-</p:tagLst>
-</file>
-
-<file path=ppt/tags/tag45.xml><?xml version="1.0" encoding="utf-8"?>
 <p:tagLst xmlns:a="http://schemas.openxmlformats.org/drawingml/2006/main" xmlns:r="http://schemas.openxmlformats.org/officeDocument/2006/relationships" xmlns:p="http://schemas.openxmlformats.org/presentationml/2006/main">
   <p:tag name="_INSTRUCTOR VIEW19C14C36-AC8E-43BC-9DB6-C2AAF774C7DC|PANE__TAG" val="_"/>
 </p:tagLst>
@@ -19918,18 +15037,6 @@
 </file>
 
 <file path=ppt/tags/tag7.xml><?xml version="1.0" encoding="utf-8"?>
-<p:tagLst xmlns:a="http://schemas.openxmlformats.org/drawingml/2006/main" xmlns:r="http://schemas.openxmlformats.org/officeDocument/2006/relationships" xmlns:p="http://schemas.openxmlformats.org/presentationml/2006/main">
-  <p:tag name="_INSTRUCTOR VIEW19C14C36-AC8E-43BC-9DB6-C2AAF774C7DC|PANE__TAG" val="_"/>
-</p:tagLst>
-</file>
-
-<file path=ppt/tags/tag8.xml><?xml version="1.0" encoding="utf-8"?>
-<p:tagLst xmlns:a="http://schemas.openxmlformats.org/drawingml/2006/main" xmlns:r="http://schemas.openxmlformats.org/officeDocument/2006/relationships" xmlns:p="http://schemas.openxmlformats.org/presentationml/2006/main">
-  <p:tag name="_INSTRUCTOR VIEW19C14C36-AC8E-43BC-9DB6-C2AAF774C7DC|PANE__TAG" val="_"/>
-</p:tagLst>
-</file>
-
-<file path=ppt/tags/tag9.xml><?xml version="1.0" encoding="utf-8"?>
 <p:tagLst xmlns:a="http://schemas.openxmlformats.org/drawingml/2006/main" xmlns:r="http://schemas.openxmlformats.org/officeDocument/2006/relationships" xmlns:p="http://schemas.openxmlformats.org/presentationml/2006/main">
   <p:tag name="_INSTRUCTOR VIEW19C14C36-AC8E-43BC-9DB6-C2AAF774C7DC|PANE__TAG" val="_"/>
 </p:tagLst>

--- a/slides/00-DailyAnnouncements.pptx
+++ b/slides/00-DailyAnnouncements.pptx
@@ -5,12 +5,13 @@
     <p:sldMasterId id="2147484006" r:id="rId1"/>
   </p:sldMasterIdLst>
   <p:notesMasterIdLst>
-    <p:notesMasterId r:id="rId5"/>
+    <p:notesMasterId r:id="rId6"/>
   </p:notesMasterIdLst>
   <p:sldIdLst>
     <p:sldId id="256" r:id="rId2"/>
     <p:sldId id="505" r:id="rId3"/>
-    <p:sldId id="515" r:id="rId4"/>
+    <p:sldId id="516" r:id="rId4"/>
+    <p:sldId id="515" r:id="rId5"/>
   </p:sldIdLst>
   <p:sldSz cx="12192000" cy="6858000"/>
   <p:notesSz cx="6858000" cy="9144000"/>
@@ -199,7 +200,7 @@
           <a:p>
             <a:fld id="{C5B45307-6ED4-B142-BD64-10F739779302}" type="datetimeFigureOut">
               <a:rPr lang="en-US" smtClean="0"/>
-              <a:t>7/14/26</a:t>
+              <a:t>7/15/26</a:t>
             </a:fld>
             <a:endParaRPr lang="en-US"/>
           </a:p>
@@ -607,7 +608,7 @@
           <a:noFill/>
           <a:extLst>
             <a:ext uri="{909E8E84-426E-40dd-AFC4-6F175D3DCCD1}">
-              <a14:hiddenFill xmlns="" xmlns:a14="http://schemas.microsoft.com/office/drawing/2010/main">
+              <a14:hiddenFill xmlns:a14="http://schemas.microsoft.com/office/drawing/2010/main" xmlns="">
                 <a:solidFill>
                   <a:srgbClr val="FFFFFF"/>
                 </a:solidFill>
@@ -666,7 +667,7 @@
             </a:ln>
             <a:extLst>
               <a:ext uri="{91240B29-F687-4f45-9708-019B960494DF}">
-                <a14:hiddenLine xmlns="" xmlns:a14="http://schemas.microsoft.com/office/drawing/2010/main" w="9525">
+                <a14:hiddenLine xmlns:a14="http://schemas.microsoft.com/office/drawing/2010/main" xmlns="" w="9525">
                   <a:solidFill>
                     <a:srgbClr val="000000"/>
                   </a:solidFill>
@@ -756,7 +757,7 @@
             </a:ln>
             <a:extLst>
               <a:ext uri="{91240B29-F687-4f45-9708-019B960494DF}">
-                <a14:hiddenLine xmlns="" xmlns:a14="http://schemas.microsoft.com/office/drawing/2010/main" w="9525">
+                <a14:hiddenLine xmlns:a14="http://schemas.microsoft.com/office/drawing/2010/main" xmlns="" w="9525">
                   <a:solidFill>
                     <a:srgbClr val="000000"/>
                   </a:solidFill>
@@ -846,7 +847,7 @@
             </a:ln>
             <a:extLst>
               <a:ext uri="{91240B29-F687-4f45-9708-019B960494DF}">
-                <a14:hiddenLine xmlns="" xmlns:a14="http://schemas.microsoft.com/office/drawing/2010/main" w="9525">
+                <a14:hiddenLine xmlns:a14="http://schemas.microsoft.com/office/drawing/2010/main" xmlns="" w="9525">
                   <a:solidFill>
                     <a:srgbClr val="000000"/>
                   </a:solidFill>
@@ -880,7 +881,7 @@
             </a:ln>
             <a:extLst>
               <a:ext uri="{91240B29-F687-4f45-9708-019B960494DF}">
-                <a14:hiddenLine xmlns="" xmlns:a14="http://schemas.microsoft.com/office/drawing/2010/main" w="9525">
+                <a14:hiddenLine xmlns:a14="http://schemas.microsoft.com/office/drawing/2010/main" xmlns="" w="9525">
                   <a:solidFill>
                     <a:srgbClr val="000000"/>
                   </a:solidFill>
@@ -970,7 +971,7 @@
             </a:ln>
             <a:extLst>
               <a:ext uri="{91240B29-F687-4f45-9708-019B960494DF}">
-                <a14:hiddenLine xmlns="" xmlns:a14="http://schemas.microsoft.com/office/drawing/2010/main" w="9525">
+                <a14:hiddenLine xmlns:a14="http://schemas.microsoft.com/office/drawing/2010/main" xmlns="" w="9525">
                   <a:solidFill>
                     <a:srgbClr val="000000"/>
                   </a:solidFill>
@@ -1032,7 +1033,7 @@
             </a:ln>
             <a:extLst>
               <a:ext uri="{91240B29-F687-4f45-9708-019B960494DF}">
-                <a14:hiddenLine xmlns="" xmlns:a14="http://schemas.microsoft.com/office/drawing/2010/main" w="9525">
+                <a14:hiddenLine xmlns:a14="http://schemas.microsoft.com/office/drawing/2010/main" xmlns="" w="9525">
                   <a:solidFill>
                     <a:srgbClr val="000000"/>
                   </a:solidFill>
@@ -1094,7 +1095,7 @@
             </a:ln>
             <a:extLst>
               <a:ext uri="{91240B29-F687-4f45-9708-019B960494DF}">
-                <a14:hiddenLine xmlns="" xmlns:a14="http://schemas.microsoft.com/office/drawing/2010/main" w="9525">
+                <a14:hiddenLine xmlns:a14="http://schemas.microsoft.com/office/drawing/2010/main" xmlns="" w="9525">
                   <a:solidFill>
                     <a:srgbClr val="000000"/>
                   </a:solidFill>
@@ -1184,7 +1185,7 @@
             </a:ln>
             <a:extLst>
               <a:ext uri="{91240B29-F687-4f45-9708-019B960494DF}">
-                <a14:hiddenLine xmlns="" xmlns:a14="http://schemas.microsoft.com/office/drawing/2010/main" w="9525">
+                <a14:hiddenLine xmlns:a14="http://schemas.microsoft.com/office/drawing/2010/main" xmlns="" w="9525">
                   <a:solidFill>
                     <a:srgbClr val="000000"/>
                   </a:solidFill>
@@ -1246,7 +1247,7 @@
             </a:ln>
             <a:extLst>
               <a:ext uri="{91240B29-F687-4f45-9708-019B960494DF}">
-                <a14:hiddenLine xmlns="" xmlns:a14="http://schemas.microsoft.com/office/drawing/2010/main" w="9525">
+                <a14:hiddenLine xmlns:a14="http://schemas.microsoft.com/office/drawing/2010/main" xmlns="" w="9525">
                   <a:solidFill>
                     <a:srgbClr val="000000"/>
                   </a:solidFill>
@@ -1308,7 +1309,7 @@
             </a:ln>
             <a:extLst>
               <a:ext uri="{91240B29-F687-4f45-9708-019B960494DF}">
-                <a14:hiddenLine xmlns="" xmlns:a14="http://schemas.microsoft.com/office/drawing/2010/main" w="9525">
+                <a14:hiddenLine xmlns:a14="http://schemas.microsoft.com/office/drawing/2010/main" xmlns="" w="9525">
                   <a:solidFill>
                     <a:srgbClr val="000000"/>
                   </a:solidFill>
@@ -1398,7 +1399,7 @@
             </a:ln>
             <a:extLst>
               <a:ext uri="{91240B29-F687-4f45-9708-019B960494DF}">
-                <a14:hiddenLine xmlns="" xmlns:a14="http://schemas.microsoft.com/office/drawing/2010/main" w="9525">
+                <a14:hiddenLine xmlns:a14="http://schemas.microsoft.com/office/drawing/2010/main" xmlns="" w="9525">
                   <a:solidFill>
                     <a:srgbClr val="000000"/>
                   </a:solidFill>
@@ -1488,7 +1489,7 @@
             </a:ln>
             <a:extLst>
               <a:ext uri="{91240B29-F687-4f45-9708-019B960494DF}">
-                <a14:hiddenLine xmlns="" xmlns:a14="http://schemas.microsoft.com/office/drawing/2010/main" w="9525">
+                <a14:hiddenLine xmlns:a14="http://schemas.microsoft.com/office/drawing/2010/main" xmlns="" w="9525">
                   <a:solidFill>
                     <a:srgbClr val="000000"/>
                   </a:solidFill>
@@ -1550,7 +1551,7 @@
             </a:ln>
             <a:extLst>
               <a:ext uri="{91240B29-F687-4f45-9708-019B960494DF}">
-                <a14:hiddenLine xmlns="" xmlns:a14="http://schemas.microsoft.com/office/drawing/2010/main" w="9525">
+                <a14:hiddenLine xmlns:a14="http://schemas.microsoft.com/office/drawing/2010/main" xmlns="" w="9525">
                   <a:solidFill>
                     <a:srgbClr val="000000"/>
                   </a:solidFill>
@@ -1660,7 +1661,7 @@
             </a:ln>
             <a:extLst>
               <a:ext uri="{91240B29-F687-4f45-9708-019B960494DF}">
-                <a14:hiddenLine xmlns="" xmlns:a14="http://schemas.microsoft.com/office/drawing/2010/main" w="9525">
+                <a14:hiddenLine xmlns:a14="http://schemas.microsoft.com/office/drawing/2010/main" xmlns="" w="9525">
                   <a:solidFill>
                     <a:srgbClr val="000000"/>
                   </a:solidFill>
@@ -1722,7 +1723,7 @@
             </a:ln>
             <a:extLst>
               <a:ext uri="{91240B29-F687-4f45-9708-019B960494DF}">
-                <a14:hiddenLine xmlns="" xmlns:a14="http://schemas.microsoft.com/office/drawing/2010/main" w="9525">
+                <a14:hiddenLine xmlns:a14="http://schemas.microsoft.com/office/drawing/2010/main" xmlns="" w="9525">
                   <a:solidFill>
                     <a:srgbClr val="000000"/>
                   </a:solidFill>
@@ -1812,7 +1813,7 @@
             </a:ln>
             <a:extLst>
               <a:ext uri="{91240B29-F687-4f45-9708-019B960494DF}">
-                <a14:hiddenLine xmlns="" xmlns:a14="http://schemas.microsoft.com/office/drawing/2010/main" w="9525">
+                <a14:hiddenLine xmlns:a14="http://schemas.microsoft.com/office/drawing/2010/main" xmlns="" w="9525">
                   <a:solidFill>
                     <a:srgbClr val="000000"/>
                   </a:solidFill>
@@ -1902,7 +1903,7 @@
             </a:ln>
             <a:extLst>
               <a:ext uri="{91240B29-F687-4f45-9708-019B960494DF}">
-                <a14:hiddenLine xmlns="" xmlns:a14="http://schemas.microsoft.com/office/drawing/2010/main" w="9525">
+                <a14:hiddenLine xmlns:a14="http://schemas.microsoft.com/office/drawing/2010/main" xmlns="" w="9525">
                   <a:solidFill>
                     <a:srgbClr val="000000"/>
                   </a:solidFill>
@@ -1964,7 +1965,7 @@
             </a:ln>
             <a:extLst>
               <a:ext uri="{91240B29-F687-4f45-9708-019B960494DF}">
-                <a14:hiddenLine xmlns="" xmlns:a14="http://schemas.microsoft.com/office/drawing/2010/main" w="9525">
+                <a14:hiddenLine xmlns:a14="http://schemas.microsoft.com/office/drawing/2010/main" xmlns="" w="9525">
                   <a:solidFill>
                     <a:srgbClr val="000000"/>
                   </a:solidFill>
@@ -2054,7 +2055,7 @@
             </a:ln>
             <a:extLst>
               <a:ext uri="{91240B29-F687-4f45-9708-019B960494DF}">
-                <a14:hiddenLine xmlns="" xmlns:a14="http://schemas.microsoft.com/office/drawing/2010/main" w="9525">
+                <a14:hiddenLine xmlns:a14="http://schemas.microsoft.com/office/drawing/2010/main" xmlns="" w="9525">
                   <a:solidFill>
                     <a:srgbClr val="000000"/>
                   </a:solidFill>
@@ -2144,7 +2145,7 @@
             </a:ln>
             <a:extLst>
               <a:ext uri="{91240B29-F687-4f45-9708-019B960494DF}">
-                <a14:hiddenLine xmlns="" xmlns:a14="http://schemas.microsoft.com/office/drawing/2010/main" w="9525">
+                <a14:hiddenLine xmlns:a14="http://schemas.microsoft.com/office/drawing/2010/main" xmlns="" w="9525">
                   <a:solidFill>
                     <a:srgbClr val="000000"/>
                   </a:solidFill>
@@ -2200,7 +2201,7 @@
             </a:ln>
             <a:extLst>
               <a:ext uri="{91240B29-F687-4f45-9708-019B960494DF}">
-                <a14:hiddenLine xmlns="" xmlns:a14="http://schemas.microsoft.com/office/drawing/2010/main" w="9525">
+                <a14:hiddenLine xmlns:a14="http://schemas.microsoft.com/office/drawing/2010/main" xmlns="" w="9525">
                   <a:solidFill>
                     <a:srgbClr val="000000"/>
                   </a:solidFill>
@@ -2290,7 +2291,7 @@
             </a:ln>
             <a:extLst>
               <a:ext uri="{91240B29-F687-4f45-9708-019B960494DF}">
-                <a14:hiddenLine xmlns="" xmlns:a14="http://schemas.microsoft.com/office/drawing/2010/main" w="9525">
+                <a14:hiddenLine xmlns:a14="http://schemas.microsoft.com/office/drawing/2010/main" xmlns="" w="9525">
                   <a:solidFill>
                     <a:srgbClr val="000000"/>
                   </a:solidFill>
@@ -2346,7 +2347,7 @@
             </a:ln>
             <a:extLst>
               <a:ext uri="{91240B29-F687-4f45-9708-019B960494DF}">
-                <a14:hiddenLine xmlns="" xmlns:a14="http://schemas.microsoft.com/office/drawing/2010/main" w="9525">
+                <a14:hiddenLine xmlns:a14="http://schemas.microsoft.com/office/drawing/2010/main" xmlns="" w="9525">
                   <a:solidFill>
                     <a:srgbClr val="000000"/>
                   </a:solidFill>
@@ -2436,7 +2437,7 @@
             </a:ln>
             <a:extLst>
               <a:ext uri="{91240B29-F687-4f45-9708-019B960494DF}">
-                <a14:hiddenLine xmlns="" xmlns:a14="http://schemas.microsoft.com/office/drawing/2010/main" w="9525">
+                <a14:hiddenLine xmlns:a14="http://schemas.microsoft.com/office/drawing/2010/main" xmlns="" w="9525">
                   <a:solidFill>
                     <a:srgbClr val="000000"/>
                   </a:solidFill>
@@ -2504,7 +2505,7 @@
             </a:ln>
             <a:extLst>
               <a:ext uri="{91240B29-F687-4f45-9708-019B960494DF}">
-                <a14:hiddenLine xmlns="" xmlns:a14="http://schemas.microsoft.com/office/drawing/2010/main" w="9525">
+                <a14:hiddenLine xmlns:a14="http://schemas.microsoft.com/office/drawing/2010/main" xmlns="" w="9525">
                   <a:solidFill>
                     <a:srgbClr val="000000"/>
                   </a:solidFill>
@@ -2594,7 +2595,7 @@
             </a:ln>
             <a:extLst>
               <a:ext uri="{91240B29-F687-4f45-9708-019B960494DF}">
-                <a14:hiddenLine xmlns="" xmlns:a14="http://schemas.microsoft.com/office/drawing/2010/main" w="9525">
+                <a14:hiddenLine xmlns:a14="http://schemas.microsoft.com/office/drawing/2010/main" xmlns="" w="9525">
                   <a:solidFill>
                     <a:srgbClr val="000000"/>
                   </a:solidFill>
@@ -2662,7 +2663,7 @@
             </a:ln>
             <a:extLst>
               <a:ext uri="{91240B29-F687-4f45-9708-019B960494DF}">
-                <a14:hiddenLine xmlns="" xmlns:a14="http://schemas.microsoft.com/office/drawing/2010/main" w="9525">
+                <a14:hiddenLine xmlns:a14="http://schemas.microsoft.com/office/drawing/2010/main" xmlns="" w="9525">
                   <a:solidFill>
                     <a:srgbClr val="000000"/>
                   </a:solidFill>
@@ -2752,7 +2753,7 @@
             </a:ln>
             <a:extLst>
               <a:ext uri="{91240B29-F687-4f45-9708-019B960494DF}">
-                <a14:hiddenLine xmlns="" xmlns:a14="http://schemas.microsoft.com/office/drawing/2010/main" w="9525">
+                <a14:hiddenLine xmlns:a14="http://schemas.microsoft.com/office/drawing/2010/main" xmlns="" w="9525">
                   <a:solidFill>
                     <a:srgbClr val="000000"/>
                   </a:solidFill>
@@ -2786,7 +2787,7 @@
             </a:ln>
             <a:extLst>
               <a:ext uri="{91240B29-F687-4f45-9708-019B960494DF}">
-                <a14:hiddenLine xmlns="" xmlns:a14="http://schemas.microsoft.com/office/drawing/2010/main" w="9525">
+                <a14:hiddenLine xmlns:a14="http://schemas.microsoft.com/office/drawing/2010/main" xmlns="" w="9525">
                   <a:solidFill>
                     <a:srgbClr val="000000"/>
                   </a:solidFill>
@@ -2876,7 +2877,7 @@
             </a:ln>
             <a:extLst>
               <a:ext uri="{91240B29-F687-4f45-9708-019B960494DF}">
-                <a14:hiddenLine xmlns="" xmlns:a14="http://schemas.microsoft.com/office/drawing/2010/main" w="9525">
+                <a14:hiddenLine xmlns:a14="http://schemas.microsoft.com/office/drawing/2010/main" xmlns="" w="9525">
                   <a:solidFill>
                     <a:srgbClr val="000000"/>
                   </a:solidFill>
@@ -2938,7 +2939,7 @@
             </a:ln>
             <a:extLst>
               <a:ext uri="{91240B29-F687-4f45-9708-019B960494DF}">
-                <a14:hiddenLine xmlns="" xmlns:a14="http://schemas.microsoft.com/office/drawing/2010/main" w="9525">
+                <a14:hiddenLine xmlns:a14="http://schemas.microsoft.com/office/drawing/2010/main" xmlns="" w="9525">
                   <a:solidFill>
                     <a:srgbClr val="000000"/>
                   </a:solidFill>
@@ -3000,7 +3001,7 @@
             </a:ln>
             <a:extLst>
               <a:ext uri="{91240B29-F687-4f45-9708-019B960494DF}">
-                <a14:hiddenLine xmlns="" xmlns:a14="http://schemas.microsoft.com/office/drawing/2010/main" w="9525">
+                <a14:hiddenLine xmlns:a14="http://schemas.microsoft.com/office/drawing/2010/main" xmlns="" w="9525">
                   <a:solidFill>
                     <a:srgbClr val="000000"/>
                   </a:solidFill>
@@ -3090,7 +3091,7 @@
             </a:ln>
             <a:extLst>
               <a:ext uri="{91240B29-F687-4f45-9708-019B960494DF}">
-                <a14:hiddenLine xmlns="" xmlns:a14="http://schemas.microsoft.com/office/drawing/2010/main" w="9525">
+                <a14:hiddenLine xmlns:a14="http://schemas.microsoft.com/office/drawing/2010/main" xmlns="" w="9525">
                   <a:solidFill>
                     <a:srgbClr val="000000"/>
                   </a:solidFill>
@@ -3158,7 +3159,7 @@
             </a:ln>
             <a:extLst>
               <a:ext uri="{91240B29-F687-4f45-9708-019B960494DF}">
-                <a14:hiddenLine xmlns="" xmlns:a14="http://schemas.microsoft.com/office/drawing/2010/main" w="9525">
+                <a14:hiddenLine xmlns:a14="http://schemas.microsoft.com/office/drawing/2010/main" xmlns="" w="9525">
                   <a:solidFill>
                     <a:srgbClr val="000000"/>
                   </a:solidFill>
@@ -3220,7 +3221,7 @@
             </a:ln>
             <a:extLst>
               <a:ext uri="{91240B29-F687-4f45-9708-019B960494DF}">
-                <a14:hiddenLine xmlns="" xmlns:a14="http://schemas.microsoft.com/office/drawing/2010/main" w="9525">
+                <a14:hiddenLine xmlns:a14="http://schemas.microsoft.com/office/drawing/2010/main" xmlns="" w="9525">
                   <a:solidFill>
                     <a:srgbClr val="000000"/>
                   </a:solidFill>
@@ -3310,7 +3311,7 @@
             </a:ln>
             <a:extLst>
               <a:ext uri="{91240B29-F687-4f45-9708-019B960494DF}">
-                <a14:hiddenLine xmlns="" xmlns:a14="http://schemas.microsoft.com/office/drawing/2010/main" w="9525">
+                <a14:hiddenLine xmlns:a14="http://schemas.microsoft.com/office/drawing/2010/main" xmlns="" w="9525">
                   <a:solidFill>
                     <a:srgbClr val="000000"/>
                   </a:solidFill>
@@ -3372,7 +3373,7 @@
             </a:ln>
             <a:extLst>
               <a:ext uri="{91240B29-F687-4f45-9708-019B960494DF}">
-                <a14:hiddenLine xmlns="" xmlns:a14="http://schemas.microsoft.com/office/drawing/2010/main" w="9525">
+                <a14:hiddenLine xmlns:a14="http://schemas.microsoft.com/office/drawing/2010/main" xmlns="" w="9525">
                   <a:solidFill>
                     <a:srgbClr val="000000"/>
                   </a:solidFill>
@@ -3462,7 +3463,7 @@
             </a:ln>
             <a:extLst>
               <a:ext uri="{91240B29-F687-4f45-9708-019B960494DF}">
-                <a14:hiddenLine xmlns="" xmlns:a14="http://schemas.microsoft.com/office/drawing/2010/main" w="9525">
+                <a14:hiddenLine xmlns:a14="http://schemas.microsoft.com/office/drawing/2010/main" xmlns="" w="9525">
                   <a:solidFill>
                     <a:srgbClr val="000000"/>
                   </a:solidFill>
@@ -3524,7 +3525,7 @@
             </a:ln>
             <a:extLst>
               <a:ext uri="{91240B29-F687-4f45-9708-019B960494DF}">
-                <a14:hiddenLine xmlns="" xmlns:a14="http://schemas.microsoft.com/office/drawing/2010/main" w="9525">
+                <a14:hiddenLine xmlns:a14="http://schemas.microsoft.com/office/drawing/2010/main" xmlns="" w="9525">
                   <a:solidFill>
                     <a:srgbClr val="000000"/>
                   </a:solidFill>
@@ -3614,7 +3615,7 @@
             </a:ln>
             <a:extLst>
               <a:ext uri="{91240B29-F687-4f45-9708-019B960494DF}">
-                <a14:hiddenLine xmlns="" xmlns:a14="http://schemas.microsoft.com/office/drawing/2010/main" w="9525">
+                <a14:hiddenLine xmlns:a14="http://schemas.microsoft.com/office/drawing/2010/main" xmlns="" w="9525">
                   <a:solidFill>
                     <a:srgbClr val="000000"/>
                   </a:solidFill>
@@ -3648,7 +3649,7 @@
             </a:ln>
             <a:extLst>
               <a:ext uri="{91240B29-F687-4f45-9708-019B960494DF}">
-                <a14:hiddenLine xmlns="" xmlns:a14="http://schemas.microsoft.com/office/drawing/2010/main" w="9525">
+                <a14:hiddenLine xmlns:a14="http://schemas.microsoft.com/office/drawing/2010/main" xmlns="" w="9525">
                   <a:solidFill>
                     <a:srgbClr val="000000"/>
                   </a:solidFill>
@@ -3713,7 +3714,7 @@
             </a:ln>
             <a:extLst>
               <a:ext uri="{91240B29-F687-4f45-9708-019B960494DF}">
-                <a14:hiddenLine xmlns="" xmlns:a14="http://schemas.microsoft.com/office/drawing/2010/main" w="9525">
+                <a14:hiddenLine xmlns:a14="http://schemas.microsoft.com/office/drawing/2010/main" xmlns="" w="9525">
                   <a:solidFill>
                     <a:srgbClr val="000000"/>
                   </a:solidFill>
@@ -3803,7 +3804,7 @@
             </a:ln>
             <a:extLst>
               <a:ext uri="{91240B29-F687-4f45-9708-019B960494DF}">
-                <a14:hiddenLine xmlns="" xmlns:a14="http://schemas.microsoft.com/office/drawing/2010/main" w="9525">
+                <a14:hiddenLine xmlns:a14="http://schemas.microsoft.com/office/drawing/2010/main" xmlns="" w="9525">
                   <a:solidFill>
                     <a:srgbClr val="000000"/>
                   </a:solidFill>
@@ -3865,7 +3866,7 @@
             </a:ln>
             <a:extLst>
               <a:ext uri="{91240B29-F687-4f45-9708-019B960494DF}">
-                <a14:hiddenLine xmlns="" xmlns:a14="http://schemas.microsoft.com/office/drawing/2010/main" w="9525">
+                <a14:hiddenLine xmlns:a14="http://schemas.microsoft.com/office/drawing/2010/main" xmlns="" w="9525">
                   <a:solidFill>
                     <a:srgbClr val="000000"/>
                   </a:solidFill>
@@ -3955,7 +3956,7 @@
             </a:ln>
             <a:extLst>
               <a:ext uri="{91240B29-F687-4f45-9708-019B960494DF}">
-                <a14:hiddenLine xmlns="" xmlns:a14="http://schemas.microsoft.com/office/drawing/2010/main" w="9525">
+                <a14:hiddenLine xmlns:a14="http://schemas.microsoft.com/office/drawing/2010/main" xmlns="" w="9525">
                   <a:solidFill>
                     <a:srgbClr val="000000"/>
                   </a:solidFill>
@@ -4045,7 +4046,7 @@
             </a:ln>
             <a:extLst>
               <a:ext uri="{91240B29-F687-4f45-9708-019B960494DF}">
-                <a14:hiddenLine xmlns="" xmlns:a14="http://schemas.microsoft.com/office/drawing/2010/main" w="9525">
+                <a14:hiddenLine xmlns:a14="http://schemas.microsoft.com/office/drawing/2010/main" xmlns="" w="9525">
                   <a:solidFill>
                     <a:srgbClr val="000000"/>
                   </a:solidFill>
@@ -4110,7 +4111,7 @@
             </a:ln>
             <a:extLst>
               <a:ext uri="{91240B29-F687-4f45-9708-019B960494DF}">
-                <a14:hiddenLine xmlns="" xmlns:a14="http://schemas.microsoft.com/office/drawing/2010/main" w="9525">
+                <a14:hiddenLine xmlns:a14="http://schemas.microsoft.com/office/drawing/2010/main" xmlns="" w="9525">
                   <a:solidFill>
                     <a:srgbClr val="000000"/>
                   </a:solidFill>
@@ -4172,7 +4173,7 @@
             </a:ln>
             <a:extLst>
               <a:ext uri="{91240B29-F687-4f45-9708-019B960494DF}">
-                <a14:hiddenLine xmlns="" xmlns:a14="http://schemas.microsoft.com/office/drawing/2010/main" w="9525">
+                <a14:hiddenLine xmlns:a14="http://schemas.microsoft.com/office/drawing/2010/main" xmlns="" w="9525">
                   <a:solidFill>
                     <a:srgbClr val="000000"/>
                   </a:solidFill>
@@ -4262,7 +4263,7 @@
             </a:ln>
             <a:extLst>
               <a:ext uri="{91240B29-F687-4f45-9708-019B960494DF}">
-                <a14:hiddenLine xmlns="" xmlns:a14="http://schemas.microsoft.com/office/drawing/2010/main" w="9525">
+                <a14:hiddenLine xmlns:a14="http://schemas.microsoft.com/office/drawing/2010/main" xmlns="" w="9525">
                   <a:solidFill>
                     <a:srgbClr val="000000"/>
                   </a:solidFill>
@@ -4352,7 +4353,7 @@
             </a:ln>
             <a:extLst>
               <a:ext uri="{91240B29-F687-4f45-9708-019B960494DF}">
-                <a14:hiddenLine xmlns="" xmlns:a14="http://schemas.microsoft.com/office/drawing/2010/main" w="9525">
+                <a14:hiddenLine xmlns:a14="http://schemas.microsoft.com/office/drawing/2010/main" xmlns="" w="9525">
                   <a:solidFill>
                     <a:srgbClr val="000000"/>
                   </a:solidFill>
@@ -4414,7 +4415,7 @@
             </a:ln>
             <a:extLst>
               <a:ext uri="{91240B29-F687-4f45-9708-019B960494DF}">
-                <a14:hiddenLine xmlns="" xmlns:a14="http://schemas.microsoft.com/office/drawing/2010/main" w="9525">
+                <a14:hiddenLine xmlns:a14="http://schemas.microsoft.com/office/drawing/2010/main" xmlns="" w="9525">
                   <a:solidFill>
                     <a:srgbClr val="000000"/>
                   </a:solidFill>
@@ -4534,7 +4535,7 @@
             </a:ln>
             <a:extLst>
               <a:ext uri="{91240B29-F687-4f45-9708-019B960494DF}">
-                <a14:hiddenLine xmlns="" xmlns:a14="http://schemas.microsoft.com/office/drawing/2010/main" w="9525">
+                <a14:hiddenLine xmlns:a14="http://schemas.microsoft.com/office/drawing/2010/main" xmlns="" w="9525">
                   <a:solidFill>
                     <a:srgbClr val="000000"/>
                   </a:solidFill>
@@ -4602,7 +4603,7 @@
             </a:ln>
             <a:extLst>
               <a:ext uri="{91240B29-F687-4f45-9708-019B960494DF}">
-                <a14:hiddenLine xmlns="" xmlns:a14="http://schemas.microsoft.com/office/drawing/2010/main" w="9525">
+                <a14:hiddenLine xmlns:a14="http://schemas.microsoft.com/office/drawing/2010/main" xmlns="" w="9525">
                   <a:solidFill>
                     <a:srgbClr val="000000"/>
                   </a:solidFill>
@@ -4692,7 +4693,7 @@
             </a:ln>
             <a:extLst>
               <a:ext uri="{91240B29-F687-4f45-9708-019B960494DF}">
-                <a14:hiddenLine xmlns="" xmlns:a14="http://schemas.microsoft.com/office/drawing/2010/main" w="9525">
+                <a14:hiddenLine xmlns:a14="http://schemas.microsoft.com/office/drawing/2010/main" xmlns="" w="9525">
                   <a:solidFill>
                     <a:srgbClr val="000000"/>
                   </a:solidFill>
@@ -4832,7 +4833,7 @@
           <a:p>
             <a:fld id="{4313F670-7F9A-774D-B73D-573401E44297}" type="datetime1">
               <a:rPr lang="en-US" smtClean="0"/>
-              <a:t>7/14/26</a:t>
+              <a:t>7/15/26</a:t>
             </a:fld>
             <a:endParaRPr lang="en-US"/>
           </a:p>
@@ -5099,7 +5100,7 @@
           <a:p>
             <a:fld id="{446F9669-A8A7-2D40-9D01-B35FC337AA30}" type="datetime1">
               <a:rPr lang="en-US" smtClean="0"/>
-              <a:t>7/14/26</a:t>
+              <a:t>7/15/26</a:t>
             </a:fld>
             <a:endParaRPr lang="en-US"/>
           </a:p>
@@ -5295,7 +5296,7 @@
           <a:p>
             <a:fld id="{FA76CF18-F41B-6B48-B3E5-599E9795C2C3}" type="datetime1">
               <a:rPr lang="en-US" smtClean="0"/>
-              <a:t>7/14/26</a:t>
+              <a:t>7/15/26</a:t>
             </a:fld>
             <a:endParaRPr lang="en-US"/>
           </a:p>
@@ -5558,7 +5559,7 @@
           <a:p>
             <a:fld id="{B9654854-6457-164F-A077-6B3035079B82}" type="datetime1">
               <a:rPr lang="en-US" smtClean="0"/>
-              <a:t>7/14/26</a:t>
+              <a:t>7/15/26</a:t>
             </a:fld>
             <a:endParaRPr lang="en-US"/>
           </a:p>
@@ -5992,7 +5993,7 @@
           <a:p>
             <a:fld id="{CE3DBFD7-E611-8C40-AC73-0C29FF63F0CD}" type="datetime1">
               <a:rPr lang="en-US" smtClean="0"/>
-              <a:t>7/14/26</a:t>
+              <a:t>7/15/26</a:t>
             </a:fld>
             <a:endParaRPr lang="en-US"/>
           </a:p>
@@ -6538,7 +6539,7 @@
           <a:p>
             <a:fld id="{C8B63B06-0493-2840-9F37-30C9412BBF17}" type="datetime1">
               <a:rPr lang="en-US" smtClean="0"/>
-              <a:t>7/14/26</a:t>
+              <a:t>7/15/26</a:t>
             </a:fld>
             <a:endParaRPr lang="en-US"/>
           </a:p>
@@ -7258,7 +7259,7 @@
           <a:p>
             <a:fld id="{72B5C0FA-8C46-E84D-B6D7-B673F2CA0A0E}" type="datetime1">
               <a:rPr lang="en-US" smtClean="0"/>
-              <a:t>7/14/26</a:t>
+              <a:t>7/15/26</a:t>
             </a:fld>
             <a:endParaRPr lang="en-US"/>
           </a:p>
@@ -7428,7 +7429,7 @@
           <a:p>
             <a:fld id="{60B9CDE1-97B4-BF46-B69C-B86855B18820}" type="datetime1">
               <a:rPr lang="en-US" smtClean="0"/>
-              <a:t>7/14/26</a:t>
+              <a:t>7/15/26</a:t>
             </a:fld>
             <a:endParaRPr lang="en-US"/>
           </a:p>
@@ -7608,7 +7609,7 @@
           <a:p>
             <a:fld id="{BE51D3A4-F9E5-FD49-AA87-B395F50451DC}" type="datetime1">
               <a:rPr lang="en-US" smtClean="0"/>
-              <a:t>7/14/26</a:t>
+              <a:t>7/15/26</a:t>
             </a:fld>
             <a:endParaRPr lang="en-US"/>
           </a:p>
@@ -7778,7 +7779,7 @@
           <a:p>
             <a:fld id="{880DFB37-B0AE-9449-85EC-14F9C83B6084}" type="datetime1">
               <a:rPr lang="en-US" smtClean="0"/>
-              <a:t>7/14/26</a:t>
+              <a:t>7/15/26</a:t>
             </a:fld>
             <a:endParaRPr lang="en-US"/>
           </a:p>
@@ -8028,7 +8029,7 @@
           <a:p>
             <a:fld id="{C939124A-616E-6944-A21A-1839F5DBE7BB}" type="datetime1">
               <a:rPr lang="en-US" smtClean="0"/>
-              <a:t>7/14/26</a:t>
+              <a:t>7/15/26</a:t>
             </a:fld>
             <a:endParaRPr lang="en-US"/>
           </a:p>
@@ -8260,7 +8261,7 @@
           <a:p>
             <a:fld id="{C6E9A026-D48C-FD43-8676-CD625DD5D84B}" type="datetime1">
               <a:rPr lang="en-US" smtClean="0"/>
-              <a:t>7/14/26</a:t>
+              <a:t>7/15/26</a:t>
             </a:fld>
             <a:endParaRPr lang="en-US"/>
           </a:p>
@@ -8646,7 +8647,7 @@
           <a:p>
             <a:fld id="{EA35111E-23A3-1440-99A3-C4C665908E3D}" type="datetime1">
               <a:rPr lang="en-US" smtClean="0"/>
-              <a:t>7/14/26</a:t>
+              <a:t>7/15/26</a:t>
             </a:fld>
             <a:endParaRPr lang="en-US"/>
           </a:p>
@@ -8769,7 +8770,7 @@
           <a:p>
             <a:fld id="{249983B9-88EF-D74B-BA6D-6A3BF17C2B38}" type="datetime1">
               <a:rPr lang="en-US" smtClean="0"/>
-              <a:t>7/14/26</a:t>
+              <a:t>7/15/26</a:t>
             </a:fld>
             <a:endParaRPr lang="en-US"/>
           </a:p>
@@ -8864,7 +8865,7 @@
           <a:p>
             <a:fld id="{E2A00AEF-B4EC-084A-8DB8-A225C7981CBB}" type="datetime1">
               <a:rPr lang="en-US" smtClean="0"/>
-              <a:t>7/14/26</a:t>
+              <a:t>7/15/26</a:t>
             </a:fld>
             <a:endParaRPr lang="en-US"/>
           </a:p>
@@ -9113,7 +9114,7 @@
           <a:p>
             <a:fld id="{97860299-21CD-A94A-A7B0-44E787F8D42C}" type="datetime1">
               <a:rPr lang="en-US" smtClean="0"/>
-              <a:t>7/14/26</a:t>
+              <a:t>7/15/26</a:t>
             </a:fld>
             <a:endParaRPr lang="en-US"/>
           </a:p>
@@ -9398,7 +9399,7 @@
           <a:p>
             <a:fld id="{3DFD19CF-4E62-D246-BA61-7B528271315F}" type="datetime1">
               <a:rPr lang="en-US" smtClean="0"/>
-              <a:t>7/14/26</a:t>
+              <a:t>7/15/26</a:t>
             </a:fld>
             <a:endParaRPr lang="en-US"/>
           </a:p>
@@ -9521,7 +9522,7 @@
           <a:noFill/>
           <a:extLst>
             <a:ext uri="{909E8E84-426E-40dd-AFC4-6F175D3DCCD1}">
-              <a14:hiddenFill xmlns="" xmlns:a14="http://schemas.microsoft.com/office/drawing/2010/main">
+              <a14:hiddenFill xmlns:a14="http://schemas.microsoft.com/office/drawing/2010/main" xmlns="">
                 <a:solidFill>
                   <a:srgbClr val="FFFFFF"/>
                 </a:solidFill>
@@ -9595,7 +9596,7 @@
               </a:ln>
               <a:extLst>
                 <a:ext uri="{91240B29-F687-4f45-9708-019B960494DF}">
-                  <a14:hiddenLine xmlns="" xmlns:a14="http://schemas.microsoft.com/office/drawing/2010/main" w="9525">
+                  <a14:hiddenLine xmlns:a14="http://schemas.microsoft.com/office/drawing/2010/main" xmlns="" w="9525">
                     <a:solidFill>
                       <a:srgbClr val="000000"/>
                     </a:solidFill>
@@ -9685,7 +9686,7 @@
               </a:ln>
               <a:extLst>
                 <a:ext uri="{91240B29-F687-4f45-9708-019B960494DF}">
-                  <a14:hiddenLine xmlns="" xmlns:a14="http://schemas.microsoft.com/office/drawing/2010/main" w="9525">
+                  <a14:hiddenLine xmlns:a14="http://schemas.microsoft.com/office/drawing/2010/main" xmlns="" w="9525">
                     <a:solidFill>
                       <a:srgbClr val="000000"/>
                     </a:solidFill>
@@ -9775,7 +9776,7 @@
               </a:ln>
               <a:extLst>
                 <a:ext uri="{91240B29-F687-4f45-9708-019B960494DF}">
-                  <a14:hiddenLine xmlns="" xmlns:a14="http://schemas.microsoft.com/office/drawing/2010/main" w="9525">
+                  <a14:hiddenLine xmlns:a14="http://schemas.microsoft.com/office/drawing/2010/main" xmlns="" w="9525">
                     <a:solidFill>
                       <a:srgbClr val="000000"/>
                     </a:solidFill>
@@ -9837,7 +9838,7 @@
               </a:ln>
               <a:extLst>
                 <a:ext uri="{91240B29-F687-4f45-9708-019B960494DF}">
-                  <a14:hiddenLine xmlns="" xmlns:a14="http://schemas.microsoft.com/office/drawing/2010/main" w="9525">
+                  <a14:hiddenLine xmlns:a14="http://schemas.microsoft.com/office/drawing/2010/main" xmlns="" w="9525">
                     <a:solidFill>
                       <a:srgbClr val="000000"/>
                     </a:solidFill>
@@ -9927,7 +9928,7 @@
               </a:ln>
               <a:extLst>
                 <a:ext uri="{91240B29-F687-4f45-9708-019B960494DF}">
-                  <a14:hiddenLine xmlns="" xmlns:a14="http://schemas.microsoft.com/office/drawing/2010/main" w="9525">
+                  <a14:hiddenLine xmlns:a14="http://schemas.microsoft.com/office/drawing/2010/main" xmlns="" w="9525">
                     <a:solidFill>
                       <a:srgbClr val="000000"/>
                     </a:solidFill>
@@ -9989,7 +9990,7 @@
               </a:ln>
               <a:extLst>
                 <a:ext uri="{91240B29-F687-4f45-9708-019B960494DF}">
-                  <a14:hiddenLine xmlns="" xmlns:a14="http://schemas.microsoft.com/office/drawing/2010/main" w="9525">
+                  <a14:hiddenLine xmlns:a14="http://schemas.microsoft.com/office/drawing/2010/main" xmlns="" w="9525">
                     <a:solidFill>
                       <a:srgbClr val="000000"/>
                     </a:solidFill>
@@ -10051,7 +10052,7 @@
               </a:ln>
               <a:extLst>
                 <a:ext uri="{91240B29-F687-4f45-9708-019B960494DF}">
-                  <a14:hiddenLine xmlns="" xmlns:a14="http://schemas.microsoft.com/office/drawing/2010/main" w="9525">
+                  <a14:hiddenLine xmlns:a14="http://schemas.microsoft.com/office/drawing/2010/main" xmlns="" w="9525">
                     <a:solidFill>
                       <a:srgbClr val="000000"/>
                     </a:solidFill>
@@ -10141,7 +10142,7 @@
               </a:ln>
               <a:extLst>
                 <a:ext uri="{91240B29-F687-4f45-9708-019B960494DF}">
-                  <a14:hiddenLine xmlns="" xmlns:a14="http://schemas.microsoft.com/office/drawing/2010/main" w="9525">
+                  <a14:hiddenLine xmlns:a14="http://schemas.microsoft.com/office/drawing/2010/main" xmlns="" w="9525">
                     <a:solidFill>
                       <a:srgbClr val="000000"/>
                     </a:solidFill>
@@ -10231,7 +10232,7 @@
               </a:ln>
               <a:extLst>
                 <a:ext uri="{91240B29-F687-4f45-9708-019B960494DF}">
-                  <a14:hiddenLine xmlns="" xmlns:a14="http://schemas.microsoft.com/office/drawing/2010/main" w="9525">
+                  <a14:hiddenLine xmlns:a14="http://schemas.microsoft.com/office/drawing/2010/main" xmlns="" w="9525">
                     <a:solidFill>
                       <a:srgbClr val="000000"/>
                     </a:solidFill>
@@ -10293,7 +10294,7 @@
               </a:ln>
               <a:extLst>
                 <a:ext uri="{91240B29-F687-4f45-9708-019B960494DF}">
-                  <a14:hiddenLine xmlns="" xmlns:a14="http://schemas.microsoft.com/office/drawing/2010/main" w="9525">
+                  <a14:hiddenLine xmlns:a14="http://schemas.microsoft.com/office/drawing/2010/main" xmlns="" w="9525">
                     <a:solidFill>
                       <a:srgbClr val="000000"/>
                     </a:solidFill>
@@ -10403,7 +10404,7 @@
               </a:ln>
               <a:extLst>
                 <a:ext uri="{91240B29-F687-4f45-9708-019B960494DF}">
-                  <a14:hiddenLine xmlns="" xmlns:a14="http://schemas.microsoft.com/office/drawing/2010/main" w="9525">
+                  <a14:hiddenLine xmlns:a14="http://schemas.microsoft.com/office/drawing/2010/main" xmlns="" w="9525">
                     <a:solidFill>
                       <a:srgbClr val="000000"/>
                     </a:solidFill>
@@ -10487,7 +10488,7 @@
               </a:ln>
               <a:extLst>
                 <a:ext uri="{91240B29-F687-4f45-9708-019B960494DF}">
-                  <a14:hiddenLine xmlns="" xmlns:a14="http://schemas.microsoft.com/office/drawing/2010/main" w="9525">
+                  <a14:hiddenLine xmlns:a14="http://schemas.microsoft.com/office/drawing/2010/main" xmlns="" w="9525">
                     <a:solidFill>
                       <a:srgbClr val="000000"/>
                     </a:solidFill>
@@ -10549,7 +10550,7 @@
               </a:ln>
               <a:extLst>
                 <a:ext uri="{91240B29-F687-4f45-9708-019B960494DF}">
-                  <a14:hiddenLine xmlns="" xmlns:a14="http://schemas.microsoft.com/office/drawing/2010/main" w="9525">
+                  <a14:hiddenLine xmlns:a14="http://schemas.microsoft.com/office/drawing/2010/main" xmlns="" w="9525">
                     <a:solidFill>
                       <a:srgbClr val="000000"/>
                     </a:solidFill>
@@ -10611,7 +10612,7 @@
               </a:ln>
               <a:extLst>
                 <a:ext uri="{91240B29-F687-4f45-9708-019B960494DF}">
-                  <a14:hiddenLine xmlns="" xmlns:a14="http://schemas.microsoft.com/office/drawing/2010/main" w="9525">
+                  <a14:hiddenLine xmlns:a14="http://schemas.microsoft.com/office/drawing/2010/main" xmlns="" w="9525">
                     <a:solidFill>
                       <a:srgbClr val="000000"/>
                     </a:solidFill>
@@ -10701,7 +10702,7 @@
               </a:ln>
               <a:extLst>
                 <a:ext uri="{91240B29-F687-4f45-9708-019B960494DF}">
-                  <a14:hiddenLine xmlns="" xmlns:a14="http://schemas.microsoft.com/office/drawing/2010/main" w="9525">
+                  <a14:hiddenLine xmlns:a14="http://schemas.microsoft.com/office/drawing/2010/main" xmlns="" w="9525">
                     <a:solidFill>
                       <a:srgbClr val="000000"/>
                     </a:solidFill>
@@ -10735,7 +10736,7 @@
               </a:ln>
               <a:extLst>
                 <a:ext uri="{91240B29-F687-4f45-9708-019B960494DF}">
-                  <a14:hiddenLine xmlns="" xmlns:a14="http://schemas.microsoft.com/office/drawing/2010/main" w="9525">
+                  <a14:hiddenLine xmlns:a14="http://schemas.microsoft.com/office/drawing/2010/main" xmlns="" w="9525">
                     <a:solidFill>
                       <a:srgbClr val="000000"/>
                     </a:solidFill>
@@ -10800,7 +10801,7 @@
               </a:ln>
               <a:extLst>
                 <a:ext uri="{91240B29-F687-4f45-9708-019B960494DF}">
-                  <a14:hiddenLine xmlns="" xmlns:a14="http://schemas.microsoft.com/office/drawing/2010/main" w="9525">
+                  <a14:hiddenLine xmlns:a14="http://schemas.microsoft.com/office/drawing/2010/main" xmlns="" w="9525">
                     <a:solidFill>
                       <a:srgbClr val="000000"/>
                     </a:solidFill>
@@ -10890,7 +10891,7 @@
               </a:ln>
               <a:extLst>
                 <a:ext uri="{91240B29-F687-4f45-9708-019B960494DF}">
-                  <a14:hiddenLine xmlns="" xmlns:a14="http://schemas.microsoft.com/office/drawing/2010/main" w="9525">
+                  <a14:hiddenLine xmlns:a14="http://schemas.microsoft.com/office/drawing/2010/main" xmlns="" w="9525">
                     <a:solidFill>
                       <a:srgbClr val="000000"/>
                     </a:solidFill>
@@ -10952,7 +10953,7 @@
               </a:ln>
               <a:extLst>
                 <a:ext uri="{91240B29-F687-4f45-9708-019B960494DF}">
-                  <a14:hiddenLine xmlns="" xmlns:a14="http://schemas.microsoft.com/office/drawing/2010/main" w="9525">
+                  <a14:hiddenLine xmlns:a14="http://schemas.microsoft.com/office/drawing/2010/main" xmlns="" w="9525">
                     <a:solidFill>
                       <a:srgbClr val="000000"/>
                     </a:solidFill>
@@ -11042,7 +11043,7 @@
               </a:ln>
               <a:extLst>
                 <a:ext uri="{91240B29-F687-4f45-9708-019B960494DF}">
-                  <a14:hiddenLine xmlns="" xmlns:a14="http://schemas.microsoft.com/office/drawing/2010/main" w="9525">
+                  <a14:hiddenLine xmlns:a14="http://schemas.microsoft.com/office/drawing/2010/main" xmlns="" w="9525">
                     <a:solidFill>
                       <a:srgbClr val="000000"/>
                     </a:solidFill>
@@ -11107,7 +11108,7 @@
               </a:ln>
               <a:extLst>
                 <a:ext uri="{91240B29-F687-4f45-9708-019B960494DF}">
-                  <a14:hiddenLine xmlns="" xmlns:a14="http://schemas.microsoft.com/office/drawing/2010/main" w="9525">
+                  <a14:hiddenLine xmlns:a14="http://schemas.microsoft.com/office/drawing/2010/main" xmlns="" w="9525">
                     <a:solidFill>
                       <a:srgbClr val="000000"/>
                     </a:solidFill>
@@ -11169,7 +11170,7 @@
               </a:ln>
               <a:extLst>
                 <a:ext uri="{91240B29-F687-4f45-9708-019B960494DF}">
-                  <a14:hiddenLine xmlns="" xmlns:a14="http://schemas.microsoft.com/office/drawing/2010/main" w="9525">
+                  <a14:hiddenLine xmlns:a14="http://schemas.microsoft.com/office/drawing/2010/main" xmlns="" w="9525">
                     <a:solidFill>
                       <a:srgbClr val="000000"/>
                     </a:solidFill>
@@ -11259,7 +11260,7 @@
               </a:ln>
               <a:extLst>
                 <a:ext uri="{91240B29-F687-4f45-9708-019B960494DF}">
-                  <a14:hiddenLine xmlns="" xmlns:a14="http://schemas.microsoft.com/office/drawing/2010/main" w="9525">
+                  <a14:hiddenLine xmlns:a14="http://schemas.microsoft.com/office/drawing/2010/main" xmlns="" w="9525">
                     <a:solidFill>
                       <a:srgbClr val="000000"/>
                     </a:solidFill>
@@ -11349,7 +11350,7 @@
               </a:ln>
               <a:extLst>
                 <a:ext uri="{91240B29-F687-4f45-9708-019B960494DF}">
-                  <a14:hiddenLine xmlns="" xmlns:a14="http://schemas.microsoft.com/office/drawing/2010/main" w="9525">
+                  <a14:hiddenLine xmlns:a14="http://schemas.microsoft.com/office/drawing/2010/main" xmlns="" w="9525">
                     <a:solidFill>
                       <a:srgbClr val="000000"/>
                     </a:solidFill>
@@ -11414,7 +11415,7 @@
               </a:ln>
               <a:extLst>
                 <a:ext uri="{91240B29-F687-4f45-9708-019B960494DF}">
-                  <a14:hiddenLine xmlns="" xmlns:a14="http://schemas.microsoft.com/office/drawing/2010/main" w="9525">
+                  <a14:hiddenLine xmlns:a14="http://schemas.microsoft.com/office/drawing/2010/main" xmlns="" w="9525">
                     <a:solidFill>
                       <a:srgbClr val="000000"/>
                     </a:solidFill>
@@ -11534,7 +11535,7 @@
               </a:ln>
               <a:extLst>
                 <a:ext uri="{91240B29-F687-4f45-9708-019B960494DF}">
-                  <a14:hiddenLine xmlns="" xmlns:a14="http://schemas.microsoft.com/office/drawing/2010/main" w="9525">
+                  <a14:hiddenLine xmlns:a14="http://schemas.microsoft.com/office/drawing/2010/main" xmlns="" w="9525">
                     <a:solidFill>
                       <a:srgbClr val="000000"/>
                     </a:solidFill>
@@ -11615,7 +11616,7 @@
               </a:ln>
               <a:extLst>
                 <a:ext uri="{91240B29-F687-4f45-9708-019B960494DF}">
-                  <a14:hiddenLine xmlns="" xmlns:a14="http://schemas.microsoft.com/office/drawing/2010/main" w="9525">
+                  <a14:hiddenLine xmlns:a14="http://schemas.microsoft.com/office/drawing/2010/main" xmlns="" w="9525">
                     <a:solidFill>
                       <a:srgbClr val="000000"/>
                     </a:solidFill>
@@ -11730,7 +11731,7 @@
               </a:ln>
               <a:extLst>
                 <a:ext uri="{91240B29-F687-4f45-9708-019B960494DF}">
-                  <a14:hiddenLine xmlns="" xmlns:a14="http://schemas.microsoft.com/office/drawing/2010/main" w="9525">
+                  <a14:hiddenLine xmlns:a14="http://schemas.microsoft.com/office/drawing/2010/main" xmlns="" w="9525">
                     <a:solidFill>
                       <a:srgbClr val="000000"/>
                     </a:solidFill>
@@ -11820,7 +11821,7 @@
               </a:ln>
               <a:extLst>
                 <a:ext uri="{91240B29-F687-4f45-9708-019B960494DF}">
-                  <a14:hiddenLine xmlns="" xmlns:a14="http://schemas.microsoft.com/office/drawing/2010/main" w="9525">
+                  <a14:hiddenLine xmlns:a14="http://schemas.microsoft.com/office/drawing/2010/main" xmlns="" w="9525">
                     <a:solidFill>
                       <a:srgbClr val="000000"/>
                     </a:solidFill>
@@ -11885,7 +11886,7 @@
               </a:ln>
               <a:extLst>
                 <a:ext uri="{91240B29-F687-4f45-9708-019B960494DF}">
-                  <a14:hiddenLine xmlns="" xmlns:a14="http://schemas.microsoft.com/office/drawing/2010/main" w="9525">
+                  <a14:hiddenLine xmlns:a14="http://schemas.microsoft.com/office/drawing/2010/main" xmlns="" w="9525">
                     <a:solidFill>
                       <a:srgbClr val="000000"/>
                     </a:solidFill>
@@ -11975,7 +11976,7 @@
               </a:ln>
               <a:extLst>
                 <a:ext uri="{91240B29-F687-4f45-9708-019B960494DF}">
-                  <a14:hiddenLine xmlns="" xmlns:a14="http://schemas.microsoft.com/office/drawing/2010/main" w="9525">
+                  <a14:hiddenLine xmlns:a14="http://schemas.microsoft.com/office/drawing/2010/main" xmlns="" w="9525">
                     <a:solidFill>
                       <a:srgbClr val="000000"/>
                     </a:solidFill>
@@ -12043,7 +12044,7 @@
               </a:ln>
               <a:extLst>
                 <a:ext uri="{91240B29-F687-4f45-9708-019B960494DF}">
-                  <a14:hiddenLine xmlns="" xmlns:a14="http://schemas.microsoft.com/office/drawing/2010/main" w="9525">
+                  <a14:hiddenLine xmlns:a14="http://schemas.microsoft.com/office/drawing/2010/main" xmlns="" w="9525">
                     <a:solidFill>
                       <a:srgbClr val="000000"/>
                     </a:solidFill>
@@ -12133,7 +12134,7 @@
               </a:ln>
               <a:extLst>
                 <a:ext uri="{91240B29-F687-4f45-9708-019B960494DF}">
-                  <a14:hiddenLine xmlns="" xmlns:a14="http://schemas.microsoft.com/office/drawing/2010/main" w="9525">
+                  <a14:hiddenLine xmlns:a14="http://schemas.microsoft.com/office/drawing/2010/main" xmlns="" w="9525">
                     <a:solidFill>
                       <a:srgbClr val="000000"/>
                     </a:solidFill>
@@ -12201,7 +12202,7 @@
               </a:ln>
               <a:extLst>
                 <a:ext uri="{91240B29-F687-4f45-9708-019B960494DF}">
-                  <a14:hiddenLine xmlns="" xmlns:a14="http://schemas.microsoft.com/office/drawing/2010/main" w="9525">
+                  <a14:hiddenLine xmlns:a14="http://schemas.microsoft.com/office/drawing/2010/main" xmlns="" w="9525">
                     <a:solidFill>
                       <a:srgbClr val="000000"/>
                     </a:solidFill>
@@ -12291,7 +12292,7 @@
               </a:ln>
               <a:extLst>
                 <a:ext uri="{91240B29-F687-4f45-9708-019B960494DF}">
-                  <a14:hiddenLine xmlns="" xmlns:a14="http://schemas.microsoft.com/office/drawing/2010/main" w="9525">
+                  <a14:hiddenLine xmlns:a14="http://schemas.microsoft.com/office/drawing/2010/main" xmlns="" w="9525">
                     <a:solidFill>
                       <a:srgbClr val="000000"/>
                     </a:solidFill>
@@ -12325,7 +12326,7 @@
               </a:ln>
               <a:extLst>
                 <a:ext uri="{91240B29-F687-4f45-9708-019B960494DF}">
-                  <a14:hiddenLine xmlns="" xmlns:a14="http://schemas.microsoft.com/office/drawing/2010/main" w="9525">
+                  <a14:hiddenLine xmlns:a14="http://schemas.microsoft.com/office/drawing/2010/main" xmlns="" w="9525">
                     <a:solidFill>
                       <a:srgbClr val="000000"/>
                     </a:solidFill>
@@ -12465,7 +12466,7 @@
           <a:p>
             <a:fld id="{92FF8978-FE14-CC4A-93A6-934EB06543C0}" type="datetime1">
               <a:rPr lang="en-US" smtClean="0"/>
-              <a:t>7/14/26</a:t>
+              <a:t>7/15/26</a:t>
             </a:fld>
             <a:endParaRPr lang="en-US"/>
           </a:p>
@@ -13133,6 +13134,183 @@
 </file>
 
 <file path=ppt/slides/slide3.xml><?xml version="1.0" encoding="utf-8"?>
+<p:sld xmlns:a="http://schemas.openxmlformats.org/drawingml/2006/main" xmlns:r="http://schemas.openxmlformats.org/officeDocument/2006/relationships" xmlns:p="http://schemas.openxmlformats.org/presentationml/2006/main">
+  <p:cSld>
+    <p:spTree>
+      <p:nvGrpSpPr>
+        <p:cNvPr id="1" name="">
+          <a:extLst>
+            <a:ext uri="{FF2B5EF4-FFF2-40B4-BE49-F238E27FC236}">
+              <a16:creationId xmlns:a16="http://schemas.microsoft.com/office/drawing/2014/main" id="{FCA32411-328E-66E8-E6F4-EF539979CE9D}"/>
+            </a:ext>
+          </a:extLst>
+        </p:cNvPr>
+        <p:cNvGrpSpPr/>
+        <p:nvPr/>
+      </p:nvGrpSpPr>
+      <p:grpSpPr>
+        <a:xfrm>
+          <a:off x="0" y="0"/>
+          <a:ext cx="0" cy="0"/>
+          <a:chOff x="0" y="0"/>
+          <a:chExt cx="0" cy="0"/>
+        </a:xfrm>
+      </p:grpSpPr>
+      <p:sp>
+        <p:nvSpPr>
+          <p:cNvPr id="6146" name="Rectangle 2">
+            <a:extLst>
+              <a:ext uri="{FF2B5EF4-FFF2-40B4-BE49-F238E27FC236}">
+                <a16:creationId xmlns:a16="http://schemas.microsoft.com/office/drawing/2014/main" id="{D6CDF740-7CD2-4A8A-F4A5-5B9BBC68854B}"/>
+              </a:ext>
+            </a:extLst>
+          </p:cNvPr>
+          <p:cNvSpPr>
+            <a:spLocks noGrp="1" noChangeArrowheads="1"/>
+          </p:cNvSpPr>
+          <p:nvPr>
+            <p:ph type="title"/>
+            <p:custDataLst>
+              <p:tags r:id="rId1"/>
+            </p:custDataLst>
+          </p:nvPr>
+        </p:nvSpPr>
+        <p:spPr>
+          <a:xfrm>
+            <a:off x="1141413" y="284084"/>
+            <a:ext cx="9905998" cy="620791"/>
+          </a:xfrm>
+        </p:spPr>
+        <p:txBody>
+          <a:bodyPr/>
+          <a:lstStyle/>
+          <a:p>
+            <a:pPr algn="ctr"/>
+            <a:r>
+              <a:rPr lang="en-US" dirty="0"/>
+              <a:t>Week 1: Wednesday</a:t>
+            </a:r>
+          </a:p>
+        </p:txBody>
+      </p:sp>
+      <p:sp>
+        <p:nvSpPr>
+          <p:cNvPr id="6147" name="Rectangle 3">
+            <a:extLst>
+              <a:ext uri="{FF2B5EF4-FFF2-40B4-BE49-F238E27FC236}">
+                <a16:creationId xmlns:a16="http://schemas.microsoft.com/office/drawing/2014/main" id="{79392D12-A499-BDA8-BD1E-87BBE9A531AD}"/>
+              </a:ext>
+            </a:extLst>
+          </p:cNvPr>
+          <p:cNvSpPr>
+            <a:spLocks noGrp="1" noChangeArrowheads="1"/>
+          </p:cNvSpPr>
+          <p:nvPr>
+            <p:ph idx="1"/>
+            <p:custDataLst>
+              <p:tags r:id="rId2"/>
+            </p:custDataLst>
+          </p:nvPr>
+        </p:nvSpPr>
+        <p:spPr>
+          <a:xfrm>
+            <a:off x="1294151" y="1098549"/>
+            <a:ext cx="9600522" cy="5149850"/>
+          </a:xfrm>
+        </p:spPr>
+        <p:txBody>
+          <a:bodyPr>
+            <a:normAutofit/>
+          </a:bodyPr>
+          <a:lstStyle/>
+          <a:p>
+            <a:r>
+              <a:rPr lang="en-US" dirty="0">
+                <a:latin typeface="Arial" panose="020B0604020202020204" pitchFamily="34" charset="0"/>
+                <a:cs typeface="Arial" panose="020B0604020202020204" pitchFamily="34" charset="0"/>
+              </a:rPr>
+              <a:t>First homework is due Tonight! (Wednesday)</a:t>
+            </a:r>
+          </a:p>
+          <a:p>
+            <a:pPr lvl="1"/>
+            <a:r>
+              <a:rPr lang="en-US" dirty="0">
+                <a:latin typeface="Arial" panose="020B0604020202020204" pitchFamily="34" charset="0"/>
+                <a:cs typeface="Arial" panose="020B0604020202020204" pitchFamily="34" charset="0"/>
+              </a:rPr>
+              <a:t>3 day extension if you really need it but you really should try not to use it for this one.</a:t>
+            </a:r>
+          </a:p>
+          <a:p>
+            <a:r>
+              <a:rPr lang="en-US" dirty="0">
+                <a:latin typeface="Arial" panose="020B0604020202020204" pitchFamily="34" charset="0"/>
+                <a:cs typeface="Arial" panose="020B0604020202020204" pitchFamily="34" charset="0"/>
+              </a:rPr>
+              <a:t>Please remember that I am asking for NO laptop / phones!</a:t>
+            </a:r>
+          </a:p>
+          <a:p>
+            <a:pPr lvl="1"/>
+            <a:r>
+              <a:rPr lang="en-US" dirty="0">
+                <a:latin typeface="Arial" panose="020B0604020202020204" pitchFamily="34" charset="0"/>
+                <a:cs typeface="Arial" panose="020B0604020202020204" pitchFamily="34" charset="0"/>
+              </a:rPr>
+              <a:t>This makes the learning environment better for everybody. I appreciate it!</a:t>
+            </a:r>
+          </a:p>
+          <a:p>
+            <a:r>
+              <a:rPr lang="en-US" dirty="0">
+                <a:latin typeface="Arial" panose="020B0604020202020204" pitchFamily="34" charset="0"/>
+                <a:cs typeface="Arial" panose="020B0604020202020204" pitchFamily="34" charset="0"/>
+              </a:rPr>
+              <a:t>Attendance continues today as usual.</a:t>
+            </a:r>
+          </a:p>
+          <a:p>
+            <a:r>
+              <a:rPr lang="en-US" dirty="0">
+                <a:latin typeface="Arial" panose="020B0604020202020204" pitchFamily="34" charset="0"/>
+                <a:cs typeface="Arial" panose="020B0604020202020204" pitchFamily="34" charset="0"/>
+              </a:rPr>
+              <a:t>We begin module 1 today (the real class begins).</a:t>
+            </a:r>
+          </a:p>
+          <a:p>
+            <a:pPr lvl="1"/>
+            <a:r>
+              <a:rPr lang="en-US" dirty="0">
+                <a:latin typeface="Arial" panose="020B0604020202020204" pitchFamily="34" charset="0"/>
+                <a:cs typeface="Arial" panose="020B0604020202020204" pitchFamily="34" charset="0"/>
+              </a:rPr>
+              <a:t>It will likely take us at least the rest of this week to get through.</a:t>
+            </a:r>
+          </a:p>
+          <a:p>
+            <a:endParaRPr lang="en-US" dirty="0">
+              <a:latin typeface="Arial" panose="020B0604020202020204" pitchFamily="34" charset="0"/>
+              <a:cs typeface="Arial" panose="020B0604020202020204" pitchFamily="34" charset="0"/>
+            </a:endParaRPr>
+          </a:p>
+        </p:txBody>
+      </p:sp>
+    </p:spTree>
+    <p:extLst>
+      <p:ext uri="{BB962C8B-B14F-4D97-AF65-F5344CB8AC3E}">
+        <p14:creationId xmlns:p14="http://schemas.microsoft.com/office/powerpoint/2010/main" val="3784255301"/>
+      </p:ext>
+    </p:extLst>
+  </p:cSld>
+  <p:clrMapOvr>
+    <a:masterClrMapping/>
+  </p:clrMapOvr>
+</p:sld>
+</file>
+
+<file path=ppt/slides/slide4.xml><?xml version="1.0" encoding="utf-8"?>
 <p:sld xmlns:a="http://schemas.openxmlformats.org/drawingml/2006/main" xmlns:r="http://schemas.openxmlformats.org/officeDocument/2006/relationships" xmlns:p="http://schemas.openxmlformats.org/presentationml/2006/main">
   <p:cSld>
     <p:spTree>
@@ -15042,6 +15220,18 @@
 </p:tagLst>
 </file>
 
+<file path=ppt/tags/tag8.xml><?xml version="1.0" encoding="utf-8"?>
+<p:tagLst xmlns:a="http://schemas.openxmlformats.org/drawingml/2006/main" xmlns:r="http://schemas.openxmlformats.org/officeDocument/2006/relationships" xmlns:p="http://schemas.openxmlformats.org/presentationml/2006/main">
+  <p:tag name="_INSTRUCTOR VIEW19C14C36-AC8E-43BC-9DB6-C2AAF774C7DC|PANE__TAG" val="_"/>
+</p:tagLst>
+</file>
+
+<file path=ppt/tags/tag9.xml><?xml version="1.0" encoding="utf-8"?>
+<p:tagLst xmlns:a="http://schemas.openxmlformats.org/drawingml/2006/main" xmlns:r="http://schemas.openxmlformats.org/officeDocument/2006/relationships" xmlns:p="http://schemas.openxmlformats.org/presentationml/2006/main">
+  <p:tag name="_INSTRUCTOR VIEW19C14C36-AC8E-43BC-9DB6-C2AAF774C7DC|PANE__TAG" val="_"/>
+</p:tagLst>
+</file>
+
 <file path=ppt/theme/theme1.xml><?xml version="1.0" encoding="utf-8"?>
 <a:theme xmlns:a="http://schemas.openxmlformats.org/drawingml/2006/main" name="Circuit">
   <a:themeElements>

--- a/slides/00-DailyAnnouncements.pptx
+++ b/slides/00-DailyAnnouncements.pptx
@@ -5,13 +5,14 @@
     <p:sldMasterId id="2147484006" r:id="rId1"/>
   </p:sldMasterIdLst>
   <p:notesMasterIdLst>
-    <p:notesMasterId r:id="rId6"/>
+    <p:notesMasterId r:id="rId7"/>
   </p:notesMasterIdLst>
   <p:sldIdLst>
     <p:sldId id="256" r:id="rId2"/>
     <p:sldId id="505" r:id="rId3"/>
     <p:sldId id="516" r:id="rId4"/>
-    <p:sldId id="515" r:id="rId5"/>
+    <p:sldId id="517" r:id="rId5"/>
+    <p:sldId id="515" r:id="rId6"/>
   </p:sldIdLst>
   <p:sldSz cx="12192000" cy="6858000"/>
   <p:notesSz cx="6858000" cy="9144000"/>
@@ -200,7 +201,7 @@
           <a:p>
             <a:fld id="{C5B45307-6ED4-B142-BD64-10F739779302}" type="datetimeFigureOut">
               <a:rPr lang="en-US" smtClean="0"/>
-              <a:t>7/15/26</a:t>
+              <a:t>7/16/26</a:t>
             </a:fld>
             <a:endParaRPr lang="en-US"/>
           </a:p>
@@ -608,7 +609,7 @@
           <a:noFill/>
           <a:extLst>
             <a:ext uri="{909E8E84-426E-40dd-AFC4-6F175D3DCCD1}">
-              <a14:hiddenFill xmlns:a14="http://schemas.microsoft.com/office/drawing/2010/main" xmlns="">
+              <a14:hiddenFill xmlns="" xmlns:a14="http://schemas.microsoft.com/office/drawing/2010/main">
                 <a:solidFill>
                   <a:srgbClr val="FFFFFF"/>
                 </a:solidFill>
@@ -667,7 +668,7 @@
             </a:ln>
             <a:extLst>
               <a:ext uri="{91240B29-F687-4f45-9708-019B960494DF}">
-                <a14:hiddenLine xmlns:a14="http://schemas.microsoft.com/office/drawing/2010/main" xmlns="" w="9525">
+                <a14:hiddenLine xmlns="" xmlns:a14="http://schemas.microsoft.com/office/drawing/2010/main" w="9525">
                   <a:solidFill>
                     <a:srgbClr val="000000"/>
                   </a:solidFill>
@@ -757,7 +758,7 @@
             </a:ln>
             <a:extLst>
               <a:ext uri="{91240B29-F687-4f45-9708-019B960494DF}">
-                <a14:hiddenLine xmlns:a14="http://schemas.microsoft.com/office/drawing/2010/main" xmlns="" w="9525">
+                <a14:hiddenLine xmlns="" xmlns:a14="http://schemas.microsoft.com/office/drawing/2010/main" w="9525">
                   <a:solidFill>
                     <a:srgbClr val="000000"/>
                   </a:solidFill>
@@ -847,7 +848,7 @@
             </a:ln>
             <a:extLst>
               <a:ext uri="{91240B29-F687-4f45-9708-019B960494DF}">
-                <a14:hiddenLine xmlns:a14="http://schemas.microsoft.com/office/drawing/2010/main" xmlns="" w="9525">
+                <a14:hiddenLine xmlns="" xmlns:a14="http://schemas.microsoft.com/office/drawing/2010/main" w="9525">
                   <a:solidFill>
                     <a:srgbClr val="000000"/>
                   </a:solidFill>
@@ -881,7 +882,7 @@
             </a:ln>
             <a:extLst>
               <a:ext uri="{91240B29-F687-4f45-9708-019B960494DF}">
-                <a14:hiddenLine xmlns:a14="http://schemas.microsoft.com/office/drawing/2010/main" xmlns="" w="9525">
+                <a14:hiddenLine xmlns="" xmlns:a14="http://schemas.microsoft.com/office/drawing/2010/main" w="9525">
                   <a:solidFill>
                     <a:srgbClr val="000000"/>
                   </a:solidFill>
@@ -971,7 +972,7 @@
             </a:ln>
             <a:extLst>
               <a:ext uri="{91240B29-F687-4f45-9708-019B960494DF}">
-                <a14:hiddenLine xmlns:a14="http://schemas.microsoft.com/office/drawing/2010/main" xmlns="" w="9525">
+                <a14:hiddenLine xmlns="" xmlns:a14="http://schemas.microsoft.com/office/drawing/2010/main" w="9525">
                   <a:solidFill>
                     <a:srgbClr val="000000"/>
                   </a:solidFill>
@@ -1033,7 +1034,7 @@
             </a:ln>
             <a:extLst>
               <a:ext uri="{91240B29-F687-4f45-9708-019B960494DF}">
-                <a14:hiddenLine xmlns:a14="http://schemas.microsoft.com/office/drawing/2010/main" xmlns="" w="9525">
+                <a14:hiddenLine xmlns="" xmlns:a14="http://schemas.microsoft.com/office/drawing/2010/main" w="9525">
                   <a:solidFill>
                     <a:srgbClr val="000000"/>
                   </a:solidFill>
@@ -1095,7 +1096,7 @@
             </a:ln>
             <a:extLst>
               <a:ext uri="{91240B29-F687-4f45-9708-019B960494DF}">
-                <a14:hiddenLine xmlns:a14="http://schemas.microsoft.com/office/drawing/2010/main" xmlns="" w="9525">
+                <a14:hiddenLine xmlns="" xmlns:a14="http://schemas.microsoft.com/office/drawing/2010/main" w="9525">
                   <a:solidFill>
                     <a:srgbClr val="000000"/>
                   </a:solidFill>
@@ -1185,7 +1186,7 @@
             </a:ln>
             <a:extLst>
               <a:ext uri="{91240B29-F687-4f45-9708-019B960494DF}">
-                <a14:hiddenLine xmlns:a14="http://schemas.microsoft.com/office/drawing/2010/main" xmlns="" w="9525">
+                <a14:hiddenLine xmlns="" xmlns:a14="http://schemas.microsoft.com/office/drawing/2010/main" w="9525">
                   <a:solidFill>
                     <a:srgbClr val="000000"/>
                   </a:solidFill>
@@ -1247,7 +1248,7 @@
             </a:ln>
             <a:extLst>
               <a:ext uri="{91240B29-F687-4f45-9708-019B960494DF}">
-                <a14:hiddenLine xmlns:a14="http://schemas.microsoft.com/office/drawing/2010/main" xmlns="" w="9525">
+                <a14:hiddenLine xmlns="" xmlns:a14="http://schemas.microsoft.com/office/drawing/2010/main" w="9525">
                   <a:solidFill>
                     <a:srgbClr val="000000"/>
                   </a:solidFill>
@@ -1309,7 +1310,7 @@
             </a:ln>
             <a:extLst>
               <a:ext uri="{91240B29-F687-4f45-9708-019B960494DF}">
-                <a14:hiddenLine xmlns:a14="http://schemas.microsoft.com/office/drawing/2010/main" xmlns="" w="9525">
+                <a14:hiddenLine xmlns="" xmlns:a14="http://schemas.microsoft.com/office/drawing/2010/main" w="9525">
                   <a:solidFill>
                     <a:srgbClr val="000000"/>
                   </a:solidFill>
@@ -1399,7 +1400,7 @@
             </a:ln>
             <a:extLst>
               <a:ext uri="{91240B29-F687-4f45-9708-019B960494DF}">
-                <a14:hiddenLine xmlns:a14="http://schemas.microsoft.com/office/drawing/2010/main" xmlns="" w="9525">
+                <a14:hiddenLine xmlns="" xmlns:a14="http://schemas.microsoft.com/office/drawing/2010/main" w="9525">
                   <a:solidFill>
                     <a:srgbClr val="000000"/>
                   </a:solidFill>
@@ -1489,7 +1490,7 @@
             </a:ln>
             <a:extLst>
               <a:ext uri="{91240B29-F687-4f45-9708-019B960494DF}">
-                <a14:hiddenLine xmlns:a14="http://schemas.microsoft.com/office/drawing/2010/main" xmlns="" w="9525">
+                <a14:hiddenLine xmlns="" xmlns:a14="http://schemas.microsoft.com/office/drawing/2010/main" w="9525">
                   <a:solidFill>
                     <a:srgbClr val="000000"/>
                   </a:solidFill>
@@ -1551,7 +1552,7 @@
             </a:ln>
             <a:extLst>
               <a:ext uri="{91240B29-F687-4f45-9708-019B960494DF}">
-                <a14:hiddenLine xmlns:a14="http://schemas.microsoft.com/office/drawing/2010/main" xmlns="" w="9525">
+                <a14:hiddenLine xmlns="" xmlns:a14="http://schemas.microsoft.com/office/drawing/2010/main" w="9525">
                   <a:solidFill>
                     <a:srgbClr val="000000"/>
                   </a:solidFill>
@@ -1661,7 +1662,7 @@
             </a:ln>
             <a:extLst>
               <a:ext uri="{91240B29-F687-4f45-9708-019B960494DF}">
-                <a14:hiddenLine xmlns:a14="http://schemas.microsoft.com/office/drawing/2010/main" xmlns="" w="9525">
+                <a14:hiddenLine xmlns="" xmlns:a14="http://schemas.microsoft.com/office/drawing/2010/main" w="9525">
                   <a:solidFill>
                     <a:srgbClr val="000000"/>
                   </a:solidFill>
@@ -1723,7 +1724,7 @@
             </a:ln>
             <a:extLst>
               <a:ext uri="{91240B29-F687-4f45-9708-019B960494DF}">
-                <a14:hiddenLine xmlns:a14="http://schemas.microsoft.com/office/drawing/2010/main" xmlns="" w="9525">
+                <a14:hiddenLine xmlns="" xmlns:a14="http://schemas.microsoft.com/office/drawing/2010/main" w="9525">
                   <a:solidFill>
                     <a:srgbClr val="000000"/>
                   </a:solidFill>
@@ -1813,7 +1814,7 @@
             </a:ln>
             <a:extLst>
               <a:ext uri="{91240B29-F687-4f45-9708-019B960494DF}">
-                <a14:hiddenLine xmlns:a14="http://schemas.microsoft.com/office/drawing/2010/main" xmlns="" w="9525">
+                <a14:hiddenLine xmlns="" xmlns:a14="http://schemas.microsoft.com/office/drawing/2010/main" w="9525">
                   <a:solidFill>
                     <a:srgbClr val="000000"/>
                   </a:solidFill>
@@ -1903,7 +1904,7 @@
             </a:ln>
             <a:extLst>
               <a:ext uri="{91240B29-F687-4f45-9708-019B960494DF}">
-                <a14:hiddenLine xmlns:a14="http://schemas.microsoft.com/office/drawing/2010/main" xmlns="" w="9525">
+                <a14:hiddenLine xmlns="" xmlns:a14="http://schemas.microsoft.com/office/drawing/2010/main" w="9525">
                   <a:solidFill>
                     <a:srgbClr val="000000"/>
                   </a:solidFill>
@@ -1965,7 +1966,7 @@
             </a:ln>
             <a:extLst>
               <a:ext uri="{91240B29-F687-4f45-9708-019B960494DF}">
-                <a14:hiddenLine xmlns:a14="http://schemas.microsoft.com/office/drawing/2010/main" xmlns="" w="9525">
+                <a14:hiddenLine xmlns="" xmlns:a14="http://schemas.microsoft.com/office/drawing/2010/main" w="9525">
                   <a:solidFill>
                     <a:srgbClr val="000000"/>
                   </a:solidFill>
@@ -2055,7 +2056,7 @@
             </a:ln>
             <a:extLst>
               <a:ext uri="{91240B29-F687-4f45-9708-019B960494DF}">
-                <a14:hiddenLine xmlns:a14="http://schemas.microsoft.com/office/drawing/2010/main" xmlns="" w="9525">
+                <a14:hiddenLine xmlns="" xmlns:a14="http://schemas.microsoft.com/office/drawing/2010/main" w="9525">
                   <a:solidFill>
                     <a:srgbClr val="000000"/>
                   </a:solidFill>
@@ -2145,7 +2146,7 @@
             </a:ln>
             <a:extLst>
               <a:ext uri="{91240B29-F687-4f45-9708-019B960494DF}">
-                <a14:hiddenLine xmlns:a14="http://schemas.microsoft.com/office/drawing/2010/main" xmlns="" w="9525">
+                <a14:hiddenLine xmlns="" xmlns:a14="http://schemas.microsoft.com/office/drawing/2010/main" w="9525">
                   <a:solidFill>
                     <a:srgbClr val="000000"/>
                   </a:solidFill>
@@ -2201,7 +2202,7 @@
             </a:ln>
             <a:extLst>
               <a:ext uri="{91240B29-F687-4f45-9708-019B960494DF}">
-                <a14:hiddenLine xmlns:a14="http://schemas.microsoft.com/office/drawing/2010/main" xmlns="" w="9525">
+                <a14:hiddenLine xmlns="" xmlns:a14="http://schemas.microsoft.com/office/drawing/2010/main" w="9525">
                   <a:solidFill>
                     <a:srgbClr val="000000"/>
                   </a:solidFill>
@@ -2291,7 +2292,7 @@
             </a:ln>
             <a:extLst>
               <a:ext uri="{91240B29-F687-4f45-9708-019B960494DF}">
-                <a14:hiddenLine xmlns:a14="http://schemas.microsoft.com/office/drawing/2010/main" xmlns="" w="9525">
+                <a14:hiddenLine xmlns="" xmlns:a14="http://schemas.microsoft.com/office/drawing/2010/main" w="9525">
                   <a:solidFill>
                     <a:srgbClr val="000000"/>
                   </a:solidFill>
@@ -2347,7 +2348,7 @@
             </a:ln>
             <a:extLst>
               <a:ext uri="{91240B29-F687-4f45-9708-019B960494DF}">
-                <a14:hiddenLine xmlns:a14="http://schemas.microsoft.com/office/drawing/2010/main" xmlns="" w="9525">
+                <a14:hiddenLine xmlns="" xmlns:a14="http://schemas.microsoft.com/office/drawing/2010/main" w="9525">
                   <a:solidFill>
                     <a:srgbClr val="000000"/>
                   </a:solidFill>
@@ -2437,7 +2438,7 @@
             </a:ln>
             <a:extLst>
               <a:ext uri="{91240B29-F687-4f45-9708-019B960494DF}">
-                <a14:hiddenLine xmlns:a14="http://schemas.microsoft.com/office/drawing/2010/main" xmlns="" w="9525">
+                <a14:hiddenLine xmlns="" xmlns:a14="http://schemas.microsoft.com/office/drawing/2010/main" w="9525">
                   <a:solidFill>
                     <a:srgbClr val="000000"/>
                   </a:solidFill>
@@ -2505,7 +2506,7 @@
             </a:ln>
             <a:extLst>
               <a:ext uri="{91240B29-F687-4f45-9708-019B960494DF}">
-                <a14:hiddenLine xmlns:a14="http://schemas.microsoft.com/office/drawing/2010/main" xmlns="" w="9525">
+                <a14:hiddenLine xmlns="" xmlns:a14="http://schemas.microsoft.com/office/drawing/2010/main" w="9525">
                   <a:solidFill>
                     <a:srgbClr val="000000"/>
                   </a:solidFill>
@@ -2595,7 +2596,7 @@
             </a:ln>
             <a:extLst>
               <a:ext uri="{91240B29-F687-4f45-9708-019B960494DF}">
-                <a14:hiddenLine xmlns:a14="http://schemas.microsoft.com/office/drawing/2010/main" xmlns="" w="9525">
+                <a14:hiddenLine xmlns="" xmlns:a14="http://schemas.microsoft.com/office/drawing/2010/main" w="9525">
                   <a:solidFill>
                     <a:srgbClr val="000000"/>
                   </a:solidFill>
@@ -2663,7 +2664,7 @@
             </a:ln>
             <a:extLst>
               <a:ext uri="{91240B29-F687-4f45-9708-019B960494DF}">
-                <a14:hiddenLine xmlns:a14="http://schemas.microsoft.com/office/drawing/2010/main" xmlns="" w="9525">
+                <a14:hiddenLine xmlns="" xmlns:a14="http://schemas.microsoft.com/office/drawing/2010/main" w="9525">
                   <a:solidFill>
                     <a:srgbClr val="000000"/>
                   </a:solidFill>
@@ -2753,7 +2754,7 @@
             </a:ln>
             <a:extLst>
               <a:ext uri="{91240B29-F687-4f45-9708-019B960494DF}">
-                <a14:hiddenLine xmlns:a14="http://schemas.microsoft.com/office/drawing/2010/main" xmlns="" w="9525">
+                <a14:hiddenLine xmlns="" xmlns:a14="http://schemas.microsoft.com/office/drawing/2010/main" w="9525">
                   <a:solidFill>
                     <a:srgbClr val="000000"/>
                   </a:solidFill>
@@ -2787,7 +2788,7 @@
             </a:ln>
             <a:extLst>
               <a:ext uri="{91240B29-F687-4f45-9708-019B960494DF}">
-                <a14:hiddenLine xmlns:a14="http://schemas.microsoft.com/office/drawing/2010/main" xmlns="" w="9525">
+                <a14:hiddenLine xmlns="" xmlns:a14="http://schemas.microsoft.com/office/drawing/2010/main" w="9525">
                   <a:solidFill>
                     <a:srgbClr val="000000"/>
                   </a:solidFill>
@@ -2877,7 +2878,7 @@
             </a:ln>
             <a:extLst>
               <a:ext uri="{91240B29-F687-4f45-9708-019B960494DF}">
-                <a14:hiddenLine xmlns:a14="http://schemas.microsoft.com/office/drawing/2010/main" xmlns="" w="9525">
+                <a14:hiddenLine xmlns="" xmlns:a14="http://schemas.microsoft.com/office/drawing/2010/main" w="9525">
                   <a:solidFill>
                     <a:srgbClr val="000000"/>
                   </a:solidFill>
@@ -2939,7 +2940,7 @@
             </a:ln>
             <a:extLst>
               <a:ext uri="{91240B29-F687-4f45-9708-019B960494DF}">
-                <a14:hiddenLine xmlns:a14="http://schemas.microsoft.com/office/drawing/2010/main" xmlns="" w="9525">
+                <a14:hiddenLine xmlns="" xmlns:a14="http://schemas.microsoft.com/office/drawing/2010/main" w="9525">
                   <a:solidFill>
                     <a:srgbClr val="000000"/>
                   </a:solidFill>
@@ -3001,7 +3002,7 @@
             </a:ln>
             <a:extLst>
               <a:ext uri="{91240B29-F687-4f45-9708-019B960494DF}">
-                <a14:hiddenLine xmlns:a14="http://schemas.microsoft.com/office/drawing/2010/main" xmlns="" w="9525">
+                <a14:hiddenLine xmlns="" xmlns:a14="http://schemas.microsoft.com/office/drawing/2010/main" w="9525">
                   <a:solidFill>
                     <a:srgbClr val="000000"/>
                   </a:solidFill>
@@ -3091,7 +3092,7 @@
             </a:ln>
             <a:extLst>
               <a:ext uri="{91240B29-F687-4f45-9708-019B960494DF}">
-                <a14:hiddenLine xmlns:a14="http://schemas.microsoft.com/office/drawing/2010/main" xmlns="" w="9525">
+                <a14:hiddenLine xmlns="" xmlns:a14="http://schemas.microsoft.com/office/drawing/2010/main" w="9525">
                   <a:solidFill>
                     <a:srgbClr val="000000"/>
                   </a:solidFill>
@@ -3159,7 +3160,7 @@
             </a:ln>
             <a:extLst>
               <a:ext uri="{91240B29-F687-4f45-9708-019B960494DF}">
-                <a14:hiddenLine xmlns:a14="http://schemas.microsoft.com/office/drawing/2010/main" xmlns="" w="9525">
+                <a14:hiddenLine xmlns="" xmlns:a14="http://schemas.microsoft.com/office/drawing/2010/main" w="9525">
                   <a:solidFill>
                     <a:srgbClr val="000000"/>
                   </a:solidFill>
@@ -3221,7 +3222,7 @@
             </a:ln>
             <a:extLst>
               <a:ext uri="{91240B29-F687-4f45-9708-019B960494DF}">
-                <a14:hiddenLine xmlns:a14="http://schemas.microsoft.com/office/drawing/2010/main" xmlns="" w="9525">
+                <a14:hiddenLine xmlns="" xmlns:a14="http://schemas.microsoft.com/office/drawing/2010/main" w="9525">
                   <a:solidFill>
                     <a:srgbClr val="000000"/>
                   </a:solidFill>
@@ -3311,7 +3312,7 @@
             </a:ln>
             <a:extLst>
               <a:ext uri="{91240B29-F687-4f45-9708-019B960494DF}">
-                <a14:hiddenLine xmlns:a14="http://schemas.microsoft.com/office/drawing/2010/main" xmlns="" w="9525">
+                <a14:hiddenLine xmlns="" xmlns:a14="http://schemas.microsoft.com/office/drawing/2010/main" w="9525">
                   <a:solidFill>
                     <a:srgbClr val="000000"/>
                   </a:solidFill>
@@ -3373,7 +3374,7 @@
             </a:ln>
             <a:extLst>
               <a:ext uri="{91240B29-F687-4f45-9708-019B960494DF}">
-                <a14:hiddenLine xmlns:a14="http://schemas.microsoft.com/office/drawing/2010/main" xmlns="" w="9525">
+                <a14:hiddenLine xmlns="" xmlns:a14="http://schemas.microsoft.com/office/drawing/2010/main" w="9525">
                   <a:solidFill>
                     <a:srgbClr val="000000"/>
                   </a:solidFill>
@@ -3463,7 +3464,7 @@
             </a:ln>
             <a:extLst>
               <a:ext uri="{91240B29-F687-4f45-9708-019B960494DF}">
-                <a14:hiddenLine xmlns:a14="http://schemas.microsoft.com/office/drawing/2010/main" xmlns="" w="9525">
+                <a14:hiddenLine xmlns="" xmlns:a14="http://schemas.microsoft.com/office/drawing/2010/main" w="9525">
                   <a:solidFill>
                     <a:srgbClr val="000000"/>
                   </a:solidFill>
@@ -3525,7 +3526,7 @@
             </a:ln>
             <a:extLst>
               <a:ext uri="{91240B29-F687-4f45-9708-019B960494DF}">
-                <a14:hiddenLine xmlns:a14="http://schemas.microsoft.com/office/drawing/2010/main" xmlns="" w="9525">
+                <a14:hiddenLine xmlns="" xmlns:a14="http://schemas.microsoft.com/office/drawing/2010/main" w="9525">
                   <a:solidFill>
                     <a:srgbClr val="000000"/>
                   </a:solidFill>
@@ -3615,7 +3616,7 @@
             </a:ln>
             <a:extLst>
               <a:ext uri="{91240B29-F687-4f45-9708-019B960494DF}">
-                <a14:hiddenLine xmlns:a14="http://schemas.microsoft.com/office/drawing/2010/main" xmlns="" w="9525">
+                <a14:hiddenLine xmlns="" xmlns:a14="http://schemas.microsoft.com/office/drawing/2010/main" w="9525">
                   <a:solidFill>
                     <a:srgbClr val="000000"/>
                   </a:solidFill>
@@ -3649,7 +3650,7 @@
             </a:ln>
             <a:extLst>
               <a:ext uri="{91240B29-F687-4f45-9708-019B960494DF}">
-                <a14:hiddenLine xmlns:a14="http://schemas.microsoft.com/office/drawing/2010/main" xmlns="" w="9525">
+                <a14:hiddenLine xmlns="" xmlns:a14="http://schemas.microsoft.com/office/drawing/2010/main" w="9525">
                   <a:solidFill>
                     <a:srgbClr val="000000"/>
                   </a:solidFill>
@@ -3714,7 +3715,7 @@
             </a:ln>
             <a:extLst>
               <a:ext uri="{91240B29-F687-4f45-9708-019B960494DF}">
-                <a14:hiddenLine xmlns:a14="http://schemas.microsoft.com/office/drawing/2010/main" xmlns="" w="9525">
+                <a14:hiddenLine xmlns="" xmlns:a14="http://schemas.microsoft.com/office/drawing/2010/main" w="9525">
                   <a:solidFill>
                     <a:srgbClr val="000000"/>
                   </a:solidFill>
@@ -3804,7 +3805,7 @@
             </a:ln>
             <a:extLst>
               <a:ext uri="{91240B29-F687-4f45-9708-019B960494DF}">
-                <a14:hiddenLine xmlns:a14="http://schemas.microsoft.com/office/drawing/2010/main" xmlns="" w="9525">
+                <a14:hiddenLine xmlns="" xmlns:a14="http://schemas.microsoft.com/office/drawing/2010/main" w="9525">
                   <a:solidFill>
                     <a:srgbClr val="000000"/>
                   </a:solidFill>
@@ -3866,7 +3867,7 @@
             </a:ln>
             <a:extLst>
               <a:ext uri="{91240B29-F687-4f45-9708-019B960494DF}">
-                <a14:hiddenLine xmlns:a14="http://schemas.microsoft.com/office/drawing/2010/main" xmlns="" w="9525">
+                <a14:hiddenLine xmlns="" xmlns:a14="http://schemas.microsoft.com/office/drawing/2010/main" w="9525">
                   <a:solidFill>
                     <a:srgbClr val="000000"/>
                   </a:solidFill>
@@ -3956,7 +3957,7 @@
             </a:ln>
             <a:extLst>
               <a:ext uri="{91240B29-F687-4f45-9708-019B960494DF}">
-                <a14:hiddenLine xmlns:a14="http://schemas.microsoft.com/office/drawing/2010/main" xmlns="" w="9525">
+                <a14:hiddenLine xmlns="" xmlns:a14="http://schemas.microsoft.com/office/drawing/2010/main" w="9525">
                   <a:solidFill>
                     <a:srgbClr val="000000"/>
                   </a:solidFill>
@@ -4046,7 +4047,7 @@
             </a:ln>
             <a:extLst>
               <a:ext uri="{91240B29-F687-4f45-9708-019B960494DF}">
-                <a14:hiddenLine xmlns:a14="http://schemas.microsoft.com/office/drawing/2010/main" xmlns="" w="9525">
+                <a14:hiddenLine xmlns="" xmlns:a14="http://schemas.microsoft.com/office/drawing/2010/main" w="9525">
                   <a:solidFill>
                     <a:srgbClr val="000000"/>
                   </a:solidFill>
@@ -4111,7 +4112,7 @@
             </a:ln>
             <a:extLst>
               <a:ext uri="{91240B29-F687-4f45-9708-019B960494DF}">
-                <a14:hiddenLine xmlns:a14="http://schemas.microsoft.com/office/drawing/2010/main" xmlns="" w="9525">
+                <a14:hiddenLine xmlns="" xmlns:a14="http://schemas.microsoft.com/office/drawing/2010/main" w="9525">
                   <a:solidFill>
                     <a:srgbClr val="000000"/>
                   </a:solidFill>
@@ -4173,7 +4174,7 @@
             </a:ln>
             <a:extLst>
               <a:ext uri="{91240B29-F687-4f45-9708-019B960494DF}">
-                <a14:hiddenLine xmlns:a14="http://schemas.microsoft.com/office/drawing/2010/main" xmlns="" w="9525">
+                <a14:hiddenLine xmlns="" xmlns:a14="http://schemas.microsoft.com/office/drawing/2010/main" w="9525">
                   <a:solidFill>
                     <a:srgbClr val="000000"/>
                   </a:solidFill>
@@ -4263,7 +4264,7 @@
             </a:ln>
             <a:extLst>
               <a:ext uri="{91240B29-F687-4f45-9708-019B960494DF}">
-                <a14:hiddenLine xmlns:a14="http://schemas.microsoft.com/office/drawing/2010/main" xmlns="" w="9525">
+                <a14:hiddenLine xmlns="" xmlns:a14="http://schemas.microsoft.com/office/drawing/2010/main" w="9525">
                   <a:solidFill>
                     <a:srgbClr val="000000"/>
                   </a:solidFill>
@@ -4353,7 +4354,7 @@
             </a:ln>
             <a:extLst>
               <a:ext uri="{91240B29-F687-4f45-9708-019B960494DF}">
-                <a14:hiddenLine xmlns:a14="http://schemas.microsoft.com/office/drawing/2010/main" xmlns="" w="9525">
+                <a14:hiddenLine xmlns="" xmlns:a14="http://schemas.microsoft.com/office/drawing/2010/main" w="9525">
                   <a:solidFill>
                     <a:srgbClr val="000000"/>
                   </a:solidFill>
@@ -4415,7 +4416,7 @@
             </a:ln>
             <a:extLst>
               <a:ext uri="{91240B29-F687-4f45-9708-019B960494DF}">
-                <a14:hiddenLine xmlns:a14="http://schemas.microsoft.com/office/drawing/2010/main" xmlns="" w="9525">
+                <a14:hiddenLine xmlns="" xmlns:a14="http://schemas.microsoft.com/office/drawing/2010/main" w="9525">
                   <a:solidFill>
                     <a:srgbClr val="000000"/>
                   </a:solidFill>
@@ -4535,7 +4536,7 @@
             </a:ln>
             <a:extLst>
               <a:ext uri="{91240B29-F687-4f45-9708-019B960494DF}">
-                <a14:hiddenLine xmlns:a14="http://schemas.microsoft.com/office/drawing/2010/main" xmlns="" w="9525">
+                <a14:hiddenLine xmlns="" xmlns:a14="http://schemas.microsoft.com/office/drawing/2010/main" w="9525">
                   <a:solidFill>
                     <a:srgbClr val="000000"/>
                   </a:solidFill>
@@ -4603,7 +4604,7 @@
             </a:ln>
             <a:extLst>
               <a:ext uri="{91240B29-F687-4f45-9708-019B960494DF}">
-                <a14:hiddenLine xmlns:a14="http://schemas.microsoft.com/office/drawing/2010/main" xmlns="" w="9525">
+                <a14:hiddenLine xmlns="" xmlns:a14="http://schemas.microsoft.com/office/drawing/2010/main" w="9525">
                   <a:solidFill>
                     <a:srgbClr val="000000"/>
                   </a:solidFill>
@@ -4693,7 +4694,7 @@
             </a:ln>
             <a:extLst>
               <a:ext uri="{91240B29-F687-4f45-9708-019B960494DF}">
-                <a14:hiddenLine xmlns:a14="http://schemas.microsoft.com/office/drawing/2010/main" xmlns="" w="9525">
+                <a14:hiddenLine xmlns="" xmlns:a14="http://schemas.microsoft.com/office/drawing/2010/main" w="9525">
                   <a:solidFill>
                     <a:srgbClr val="000000"/>
                   </a:solidFill>
@@ -4833,7 +4834,7 @@
           <a:p>
             <a:fld id="{4313F670-7F9A-774D-B73D-573401E44297}" type="datetime1">
               <a:rPr lang="en-US" smtClean="0"/>
-              <a:t>7/15/26</a:t>
+              <a:t>7/16/26</a:t>
             </a:fld>
             <a:endParaRPr lang="en-US"/>
           </a:p>
@@ -5100,7 +5101,7 @@
           <a:p>
             <a:fld id="{446F9669-A8A7-2D40-9D01-B35FC337AA30}" type="datetime1">
               <a:rPr lang="en-US" smtClean="0"/>
-              <a:t>7/15/26</a:t>
+              <a:t>7/16/26</a:t>
             </a:fld>
             <a:endParaRPr lang="en-US"/>
           </a:p>
@@ -5296,7 +5297,7 @@
           <a:p>
             <a:fld id="{FA76CF18-F41B-6B48-B3E5-599E9795C2C3}" type="datetime1">
               <a:rPr lang="en-US" smtClean="0"/>
-              <a:t>7/15/26</a:t>
+              <a:t>7/16/26</a:t>
             </a:fld>
             <a:endParaRPr lang="en-US"/>
           </a:p>
@@ -5559,7 +5560,7 @@
           <a:p>
             <a:fld id="{B9654854-6457-164F-A077-6B3035079B82}" type="datetime1">
               <a:rPr lang="en-US" smtClean="0"/>
-              <a:t>7/15/26</a:t>
+              <a:t>7/16/26</a:t>
             </a:fld>
             <a:endParaRPr lang="en-US"/>
           </a:p>
@@ -5993,7 +5994,7 @@
           <a:p>
             <a:fld id="{CE3DBFD7-E611-8C40-AC73-0C29FF63F0CD}" type="datetime1">
               <a:rPr lang="en-US" smtClean="0"/>
-              <a:t>7/15/26</a:t>
+              <a:t>7/16/26</a:t>
             </a:fld>
             <a:endParaRPr lang="en-US"/>
           </a:p>
@@ -6539,7 +6540,7 @@
           <a:p>
             <a:fld id="{C8B63B06-0493-2840-9F37-30C9412BBF17}" type="datetime1">
               <a:rPr lang="en-US" smtClean="0"/>
-              <a:t>7/15/26</a:t>
+              <a:t>7/16/26</a:t>
             </a:fld>
             <a:endParaRPr lang="en-US"/>
           </a:p>
@@ -7259,7 +7260,7 @@
           <a:p>
             <a:fld id="{72B5C0FA-8C46-E84D-B6D7-B673F2CA0A0E}" type="datetime1">
               <a:rPr lang="en-US" smtClean="0"/>
-              <a:t>7/15/26</a:t>
+              <a:t>7/16/26</a:t>
             </a:fld>
             <a:endParaRPr lang="en-US"/>
           </a:p>
@@ -7429,7 +7430,7 @@
           <a:p>
             <a:fld id="{60B9CDE1-97B4-BF46-B69C-B86855B18820}" type="datetime1">
               <a:rPr lang="en-US" smtClean="0"/>
-              <a:t>7/15/26</a:t>
+              <a:t>7/16/26</a:t>
             </a:fld>
             <a:endParaRPr lang="en-US"/>
           </a:p>
@@ -7609,7 +7610,7 @@
           <a:p>
             <a:fld id="{BE51D3A4-F9E5-FD49-AA87-B395F50451DC}" type="datetime1">
               <a:rPr lang="en-US" smtClean="0"/>
-              <a:t>7/15/26</a:t>
+              <a:t>7/16/26</a:t>
             </a:fld>
             <a:endParaRPr lang="en-US"/>
           </a:p>
@@ -7779,7 +7780,7 @@
           <a:p>
             <a:fld id="{880DFB37-B0AE-9449-85EC-14F9C83B6084}" type="datetime1">
               <a:rPr lang="en-US" smtClean="0"/>
-              <a:t>7/15/26</a:t>
+              <a:t>7/16/26</a:t>
             </a:fld>
             <a:endParaRPr lang="en-US"/>
           </a:p>
@@ -8029,7 +8030,7 @@
           <a:p>
             <a:fld id="{C939124A-616E-6944-A21A-1839F5DBE7BB}" type="datetime1">
               <a:rPr lang="en-US" smtClean="0"/>
-              <a:t>7/15/26</a:t>
+              <a:t>7/16/26</a:t>
             </a:fld>
             <a:endParaRPr lang="en-US"/>
           </a:p>
@@ -8261,7 +8262,7 @@
           <a:p>
             <a:fld id="{C6E9A026-D48C-FD43-8676-CD625DD5D84B}" type="datetime1">
               <a:rPr lang="en-US" smtClean="0"/>
-              <a:t>7/15/26</a:t>
+              <a:t>7/16/26</a:t>
             </a:fld>
             <a:endParaRPr lang="en-US"/>
           </a:p>
@@ -8647,7 +8648,7 @@
           <a:p>
             <a:fld id="{EA35111E-23A3-1440-99A3-C4C665908E3D}" type="datetime1">
               <a:rPr lang="en-US" smtClean="0"/>
-              <a:t>7/15/26</a:t>
+              <a:t>7/16/26</a:t>
             </a:fld>
             <a:endParaRPr lang="en-US"/>
           </a:p>
@@ -8770,7 +8771,7 @@
           <a:p>
             <a:fld id="{249983B9-88EF-D74B-BA6D-6A3BF17C2B38}" type="datetime1">
               <a:rPr lang="en-US" smtClean="0"/>
-              <a:t>7/15/26</a:t>
+              <a:t>7/16/26</a:t>
             </a:fld>
             <a:endParaRPr lang="en-US"/>
           </a:p>
@@ -8865,7 +8866,7 @@
           <a:p>
             <a:fld id="{E2A00AEF-B4EC-084A-8DB8-A225C7981CBB}" type="datetime1">
               <a:rPr lang="en-US" smtClean="0"/>
-              <a:t>7/15/26</a:t>
+              <a:t>7/16/26</a:t>
             </a:fld>
             <a:endParaRPr lang="en-US"/>
           </a:p>
@@ -9114,7 +9115,7 @@
           <a:p>
             <a:fld id="{97860299-21CD-A94A-A7B0-44E787F8D42C}" type="datetime1">
               <a:rPr lang="en-US" smtClean="0"/>
-              <a:t>7/15/26</a:t>
+              <a:t>7/16/26</a:t>
             </a:fld>
             <a:endParaRPr lang="en-US"/>
           </a:p>
@@ -9399,7 +9400,7 @@
           <a:p>
             <a:fld id="{3DFD19CF-4E62-D246-BA61-7B528271315F}" type="datetime1">
               <a:rPr lang="en-US" smtClean="0"/>
-              <a:t>7/15/26</a:t>
+              <a:t>7/16/26</a:t>
             </a:fld>
             <a:endParaRPr lang="en-US"/>
           </a:p>
@@ -9522,7 +9523,7 @@
           <a:noFill/>
           <a:extLst>
             <a:ext uri="{909E8E84-426E-40dd-AFC4-6F175D3DCCD1}">
-              <a14:hiddenFill xmlns:a14="http://schemas.microsoft.com/office/drawing/2010/main" xmlns="">
+              <a14:hiddenFill xmlns="" xmlns:a14="http://schemas.microsoft.com/office/drawing/2010/main">
                 <a:solidFill>
                   <a:srgbClr val="FFFFFF"/>
                 </a:solidFill>
@@ -9596,7 +9597,7 @@
               </a:ln>
               <a:extLst>
                 <a:ext uri="{91240B29-F687-4f45-9708-019B960494DF}">
-                  <a14:hiddenLine xmlns:a14="http://schemas.microsoft.com/office/drawing/2010/main" xmlns="" w="9525">
+                  <a14:hiddenLine xmlns="" xmlns:a14="http://schemas.microsoft.com/office/drawing/2010/main" w="9525">
                     <a:solidFill>
                       <a:srgbClr val="000000"/>
                     </a:solidFill>
@@ -9686,7 +9687,7 @@
               </a:ln>
               <a:extLst>
                 <a:ext uri="{91240B29-F687-4f45-9708-019B960494DF}">
-                  <a14:hiddenLine xmlns:a14="http://schemas.microsoft.com/office/drawing/2010/main" xmlns="" w="9525">
+                  <a14:hiddenLine xmlns="" xmlns:a14="http://schemas.microsoft.com/office/drawing/2010/main" w="9525">
                     <a:solidFill>
                       <a:srgbClr val="000000"/>
                     </a:solidFill>
@@ -9776,7 +9777,7 @@
               </a:ln>
               <a:extLst>
                 <a:ext uri="{91240B29-F687-4f45-9708-019B960494DF}">
-                  <a14:hiddenLine xmlns:a14="http://schemas.microsoft.com/office/drawing/2010/main" xmlns="" w="9525">
+                  <a14:hiddenLine xmlns="" xmlns:a14="http://schemas.microsoft.com/office/drawing/2010/main" w="9525">
                     <a:solidFill>
                       <a:srgbClr val="000000"/>
                     </a:solidFill>
@@ -9838,7 +9839,7 @@
               </a:ln>
               <a:extLst>
                 <a:ext uri="{91240B29-F687-4f45-9708-019B960494DF}">
-                  <a14:hiddenLine xmlns:a14="http://schemas.microsoft.com/office/drawing/2010/main" xmlns="" w="9525">
+                  <a14:hiddenLine xmlns="" xmlns:a14="http://schemas.microsoft.com/office/drawing/2010/main" w="9525">
                     <a:solidFill>
                       <a:srgbClr val="000000"/>
                     </a:solidFill>
@@ -9928,7 +9929,7 @@
               </a:ln>
               <a:extLst>
                 <a:ext uri="{91240B29-F687-4f45-9708-019B960494DF}">
-                  <a14:hiddenLine xmlns:a14="http://schemas.microsoft.com/office/drawing/2010/main" xmlns="" w="9525">
+                  <a14:hiddenLine xmlns="" xmlns:a14="http://schemas.microsoft.com/office/drawing/2010/main" w="9525">
                     <a:solidFill>
                       <a:srgbClr val="000000"/>
                     </a:solidFill>
@@ -9990,7 +9991,7 @@
               </a:ln>
               <a:extLst>
                 <a:ext uri="{91240B29-F687-4f45-9708-019B960494DF}">
-                  <a14:hiddenLine xmlns:a14="http://schemas.microsoft.com/office/drawing/2010/main" xmlns="" w="9525">
+                  <a14:hiddenLine xmlns="" xmlns:a14="http://schemas.microsoft.com/office/drawing/2010/main" w="9525">
                     <a:solidFill>
                       <a:srgbClr val="000000"/>
                     </a:solidFill>
@@ -10052,7 +10053,7 @@
               </a:ln>
               <a:extLst>
                 <a:ext uri="{91240B29-F687-4f45-9708-019B960494DF}">
-                  <a14:hiddenLine xmlns:a14="http://schemas.microsoft.com/office/drawing/2010/main" xmlns="" w="9525">
+                  <a14:hiddenLine xmlns="" xmlns:a14="http://schemas.microsoft.com/office/drawing/2010/main" w="9525">
                     <a:solidFill>
                       <a:srgbClr val="000000"/>
                     </a:solidFill>
@@ -10142,7 +10143,7 @@
               </a:ln>
               <a:extLst>
                 <a:ext uri="{91240B29-F687-4f45-9708-019B960494DF}">
-                  <a14:hiddenLine xmlns:a14="http://schemas.microsoft.com/office/drawing/2010/main" xmlns="" w="9525">
+                  <a14:hiddenLine xmlns="" xmlns:a14="http://schemas.microsoft.com/office/drawing/2010/main" w="9525">
                     <a:solidFill>
                       <a:srgbClr val="000000"/>
                     </a:solidFill>
@@ -10232,7 +10233,7 @@
               </a:ln>
               <a:extLst>
                 <a:ext uri="{91240B29-F687-4f45-9708-019B960494DF}">
-                  <a14:hiddenLine xmlns:a14="http://schemas.microsoft.com/office/drawing/2010/main" xmlns="" w="9525">
+                  <a14:hiddenLine xmlns="" xmlns:a14="http://schemas.microsoft.com/office/drawing/2010/main" w="9525">
                     <a:solidFill>
                       <a:srgbClr val="000000"/>
                     </a:solidFill>
@@ -10294,7 +10295,7 @@
               </a:ln>
               <a:extLst>
                 <a:ext uri="{91240B29-F687-4f45-9708-019B960494DF}">
-                  <a14:hiddenLine xmlns:a14="http://schemas.microsoft.com/office/drawing/2010/main" xmlns="" w="9525">
+                  <a14:hiddenLine xmlns="" xmlns:a14="http://schemas.microsoft.com/office/drawing/2010/main" w="9525">
                     <a:solidFill>
                       <a:srgbClr val="000000"/>
                     </a:solidFill>
@@ -10404,7 +10405,7 @@
               </a:ln>
               <a:extLst>
                 <a:ext uri="{91240B29-F687-4f45-9708-019B960494DF}">
-                  <a14:hiddenLine xmlns:a14="http://schemas.microsoft.com/office/drawing/2010/main" xmlns="" w="9525">
+                  <a14:hiddenLine xmlns="" xmlns:a14="http://schemas.microsoft.com/office/drawing/2010/main" w="9525">
                     <a:solidFill>
                       <a:srgbClr val="000000"/>
                     </a:solidFill>
@@ -10488,7 +10489,7 @@
               </a:ln>
               <a:extLst>
                 <a:ext uri="{91240B29-F687-4f45-9708-019B960494DF}">
-                  <a14:hiddenLine xmlns:a14="http://schemas.microsoft.com/office/drawing/2010/main" xmlns="" w="9525">
+                  <a14:hiddenLine xmlns="" xmlns:a14="http://schemas.microsoft.com/office/drawing/2010/main" w="9525">
                     <a:solidFill>
                       <a:srgbClr val="000000"/>
                     </a:solidFill>
@@ -10550,7 +10551,7 @@
               </a:ln>
               <a:extLst>
                 <a:ext uri="{91240B29-F687-4f45-9708-019B960494DF}">
-                  <a14:hiddenLine xmlns:a14="http://schemas.microsoft.com/office/drawing/2010/main" xmlns="" w="9525">
+                  <a14:hiddenLine xmlns="" xmlns:a14="http://schemas.microsoft.com/office/drawing/2010/main" w="9525">
                     <a:solidFill>
                       <a:srgbClr val="000000"/>
                     </a:solidFill>
@@ -10612,7 +10613,7 @@
               </a:ln>
               <a:extLst>
                 <a:ext uri="{91240B29-F687-4f45-9708-019B960494DF}">
-                  <a14:hiddenLine xmlns:a14="http://schemas.microsoft.com/office/drawing/2010/main" xmlns="" w="9525">
+                  <a14:hiddenLine xmlns="" xmlns:a14="http://schemas.microsoft.com/office/drawing/2010/main" w="9525">
                     <a:solidFill>
                       <a:srgbClr val="000000"/>
                     </a:solidFill>
@@ -10702,7 +10703,7 @@
               </a:ln>
               <a:extLst>
                 <a:ext uri="{91240B29-F687-4f45-9708-019B960494DF}">
-                  <a14:hiddenLine xmlns:a14="http://schemas.microsoft.com/office/drawing/2010/main" xmlns="" w="9525">
+                  <a14:hiddenLine xmlns="" xmlns:a14="http://schemas.microsoft.com/office/drawing/2010/main" w="9525">
                     <a:solidFill>
                       <a:srgbClr val="000000"/>
                     </a:solidFill>
@@ -10736,7 +10737,7 @@
               </a:ln>
               <a:extLst>
                 <a:ext uri="{91240B29-F687-4f45-9708-019B960494DF}">
-                  <a14:hiddenLine xmlns:a14="http://schemas.microsoft.com/office/drawing/2010/main" xmlns="" w="9525">
+                  <a14:hiddenLine xmlns="" xmlns:a14="http://schemas.microsoft.com/office/drawing/2010/main" w="9525">
                     <a:solidFill>
                       <a:srgbClr val="000000"/>
                     </a:solidFill>
@@ -10801,7 +10802,7 @@
               </a:ln>
               <a:extLst>
                 <a:ext uri="{91240B29-F687-4f45-9708-019B960494DF}">
-                  <a14:hiddenLine xmlns:a14="http://schemas.microsoft.com/office/drawing/2010/main" xmlns="" w="9525">
+                  <a14:hiddenLine xmlns="" xmlns:a14="http://schemas.microsoft.com/office/drawing/2010/main" w="9525">
                     <a:solidFill>
                       <a:srgbClr val="000000"/>
                     </a:solidFill>
@@ -10891,7 +10892,7 @@
               </a:ln>
               <a:extLst>
                 <a:ext uri="{91240B29-F687-4f45-9708-019B960494DF}">
-                  <a14:hiddenLine xmlns:a14="http://schemas.microsoft.com/office/drawing/2010/main" xmlns="" w="9525">
+                  <a14:hiddenLine xmlns="" xmlns:a14="http://schemas.microsoft.com/office/drawing/2010/main" w="9525">
                     <a:solidFill>
                       <a:srgbClr val="000000"/>
                     </a:solidFill>
@@ -10953,7 +10954,7 @@
               </a:ln>
               <a:extLst>
                 <a:ext uri="{91240B29-F687-4f45-9708-019B960494DF}">
-                  <a14:hiddenLine xmlns:a14="http://schemas.microsoft.com/office/drawing/2010/main" xmlns="" w="9525">
+                  <a14:hiddenLine xmlns="" xmlns:a14="http://schemas.microsoft.com/office/drawing/2010/main" w="9525">
                     <a:solidFill>
                       <a:srgbClr val="000000"/>
                     </a:solidFill>
@@ -11043,7 +11044,7 @@
               </a:ln>
               <a:extLst>
                 <a:ext uri="{91240B29-F687-4f45-9708-019B960494DF}">
-                  <a14:hiddenLine xmlns:a14="http://schemas.microsoft.com/office/drawing/2010/main" xmlns="" w="9525">
+                  <a14:hiddenLine xmlns="" xmlns:a14="http://schemas.microsoft.com/office/drawing/2010/main" w="9525">
                     <a:solidFill>
                       <a:srgbClr val="000000"/>
                     </a:solidFill>
@@ -11108,7 +11109,7 @@
               </a:ln>
               <a:extLst>
                 <a:ext uri="{91240B29-F687-4f45-9708-019B960494DF}">
-                  <a14:hiddenLine xmlns:a14="http://schemas.microsoft.com/office/drawing/2010/main" xmlns="" w="9525">
+                  <a14:hiddenLine xmlns="" xmlns:a14="http://schemas.microsoft.com/office/drawing/2010/main" w="9525">
                     <a:solidFill>
                       <a:srgbClr val="000000"/>
                     </a:solidFill>
@@ -11170,7 +11171,7 @@
               </a:ln>
               <a:extLst>
                 <a:ext uri="{91240B29-F687-4f45-9708-019B960494DF}">
-                  <a14:hiddenLine xmlns:a14="http://schemas.microsoft.com/office/drawing/2010/main" xmlns="" w="9525">
+                  <a14:hiddenLine xmlns="" xmlns:a14="http://schemas.microsoft.com/office/drawing/2010/main" w="9525">
                     <a:solidFill>
                       <a:srgbClr val="000000"/>
                     </a:solidFill>
@@ -11260,7 +11261,7 @@
               </a:ln>
               <a:extLst>
                 <a:ext uri="{91240B29-F687-4f45-9708-019B960494DF}">
-                  <a14:hiddenLine xmlns:a14="http://schemas.microsoft.com/office/drawing/2010/main" xmlns="" w="9525">
+                  <a14:hiddenLine xmlns="" xmlns:a14="http://schemas.microsoft.com/office/drawing/2010/main" w="9525">
                     <a:solidFill>
                       <a:srgbClr val="000000"/>
                     </a:solidFill>
@@ -11350,7 +11351,7 @@
               </a:ln>
               <a:extLst>
                 <a:ext uri="{91240B29-F687-4f45-9708-019B960494DF}">
-                  <a14:hiddenLine xmlns:a14="http://schemas.microsoft.com/office/drawing/2010/main" xmlns="" w="9525">
+                  <a14:hiddenLine xmlns="" xmlns:a14="http://schemas.microsoft.com/office/drawing/2010/main" w="9525">
                     <a:solidFill>
                       <a:srgbClr val="000000"/>
                     </a:solidFill>
@@ -11415,7 +11416,7 @@
               </a:ln>
               <a:extLst>
                 <a:ext uri="{91240B29-F687-4f45-9708-019B960494DF}">
-                  <a14:hiddenLine xmlns:a14="http://schemas.microsoft.com/office/drawing/2010/main" xmlns="" w="9525">
+                  <a14:hiddenLine xmlns="" xmlns:a14="http://schemas.microsoft.com/office/drawing/2010/main" w="9525">
                     <a:solidFill>
                       <a:srgbClr val="000000"/>
                     </a:solidFill>
@@ -11535,7 +11536,7 @@
               </a:ln>
               <a:extLst>
                 <a:ext uri="{91240B29-F687-4f45-9708-019B960494DF}">
-                  <a14:hiddenLine xmlns:a14="http://schemas.microsoft.com/office/drawing/2010/main" xmlns="" w="9525">
+                  <a14:hiddenLine xmlns="" xmlns:a14="http://schemas.microsoft.com/office/drawing/2010/main" w="9525">
                     <a:solidFill>
                       <a:srgbClr val="000000"/>
                     </a:solidFill>
@@ -11616,7 +11617,7 @@
               </a:ln>
               <a:extLst>
                 <a:ext uri="{91240B29-F687-4f45-9708-019B960494DF}">
-                  <a14:hiddenLine xmlns:a14="http://schemas.microsoft.com/office/drawing/2010/main" xmlns="" w="9525">
+                  <a14:hiddenLine xmlns="" xmlns:a14="http://schemas.microsoft.com/office/drawing/2010/main" w="9525">
                     <a:solidFill>
                       <a:srgbClr val="000000"/>
                     </a:solidFill>
@@ -11731,7 +11732,7 @@
               </a:ln>
               <a:extLst>
                 <a:ext uri="{91240B29-F687-4f45-9708-019B960494DF}">
-                  <a14:hiddenLine xmlns:a14="http://schemas.microsoft.com/office/drawing/2010/main" xmlns="" w="9525">
+                  <a14:hiddenLine xmlns="" xmlns:a14="http://schemas.microsoft.com/office/drawing/2010/main" w="9525">
                     <a:solidFill>
                       <a:srgbClr val="000000"/>
                     </a:solidFill>
@@ -11821,7 +11822,7 @@
               </a:ln>
               <a:extLst>
                 <a:ext uri="{91240B29-F687-4f45-9708-019B960494DF}">
-                  <a14:hiddenLine xmlns:a14="http://schemas.microsoft.com/office/drawing/2010/main" xmlns="" w="9525">
+                  <a14:hiddenLine xmlns="" xmlns:a14="http://schemas.microsoft.com/office/drawing/2010/main" w="9525">
                     <a:solidFill>
                       <a:srgbClr val="000000"/>
                     </a:solidFill>
@@ -11886,7 +11887,7 @@
               </a:ln>
               <a:extLst>
                 <a:ext uri="{91240B29-F687-4f45-9708-019B960494DF}">
-                  <a14:hiddenLine xmlns:a14="http://schemas.microsoft.com/office/drawing/2010/main" xmlns="" w="9525">
+                  <a14:hiddenLine xmlns="" xmlns:a14="http://schemas.microsoft.com/office/drawing/2010/main" w="9525">
                     <a:solidFill>
                       <a:srgbClr val="000000"/>
                     </a:solidFill>
@@ -11976,7 +11977,7 @@
               </a:ln>
               <a:extLst>
                 <a:ext uri="{91240B29-F687-4f45-9708-019B960494DF}">
-                  <a14:hiddenLine xmlns:a14="http://schemas.microsoft.com/office/drawing/2010/main" xmlns="" w="9525">
+                  <a14:hiddenLine xmlns="" xmlns:a14="http://schemas.microsoft.com/office/drawing/2010/main" w="9525">
                     <a:solidFill>
                       <a:srgbClr val="000000"/>
                     </a:solidFill>
@@ -12044,7 +12045,7 @@
               </a:ln>
               <a:extLst>
                 <a:ext uri="{91240B29-F687-4f45-9708-019B960494DF}">
-                  <a14:hiddenLine xmlns:a14="http://schemas.microsoft.com/office/drawing/2010/main" xmlns="" w="9525">
+                  <a14:hiddenLine xmlns="" xmlns:a14="http://schemas.microsoft.com/office/drawing/2010/main" w="9525">
                     <a:solidFill>
                       <a:srgbClr val="000000"/>
                     </a:solidFill>
@@ -12134,7 +12135,7 @@
               </a:ln>
               <a:extLst>
                 <a:ext uri="{91240B29-F687-4f45-9708-019B960494DF}">
-                  <a14:hiddenLine xmlns:a14="http://schemas.microsoft.com/office/drawing/2010/main" xmlns="" w="9525">
+                  <a14:hiddenLine xmlns="" xmlns:a14="http://schemas.microsoft.com/office/drawing/2010/main" w="9525">
                     <a:solidFill>
                       <a:srgbClr val="000000"/>
                     </a:solidFill>
@@ -12202,7 +12203,7 @@
               </a:ln>
               <a:extLst>
                 <a:ext uri="{91240B29-F687-4f45-9708-019B960494DF}">
-                  <a14:hiddenLine xmlns:a14="http://schemas.microsoft.com/office/drawing/2010/main" xmlns="" w="9525">
+                  <a14:hiddenLine xmlns="" xmlns:a14="http://schemas.microsoft.com/office/drawing/2010/main" w="9525">
                     <a:solidFill>
                       <a:srgbClr val="000000"/>
                     </a:solidFill>
@@ -12292,7 +12293,7 @@
               </a:ln>
               <a:extLst>
                 <a:ext uri="{91240B29-F687-4f45-9708-019B960494DF}">
-                  <a14:hiddenLine xmlns:a14="http://schemas.microsoft.com/office/drawing/2010/main" xmlns="" w="9525">
+                  <a14:hiddenLine xmlns="" xmlns:a14="http://schemas.microsoft.com/office/drawing/2010/main" w="9525">
                     <a:solidFill>
                       <a:srgbClr val="000000"/>
                     </a:solidFill>
@@ -12326,7 +12327,7 @@
               </a:ln>
               <a:extLst>
                 <a:ext uri="{91240B29-F687-4f45-9708-019B960494DF}">
-                  <a14:hiddenLine xmlns:a14="http://schemas.microsoft.com/office/drawing/2010/main" xmlns="" w="9525">
+                  <a14:hiddenLine xmlns="" xmlns:a14="http://schemas.microsoft.com/office/drawing/2010/main" w="9525">
                     <a:solidFill>
                       <a:srgbClr val="000000"/>
                     </a:solidFill>
@@ -12466,7 +12467,7 @@
           <a:p>
             <a:fld id="{92FF8978-FE14-CC4A-93A6-934EB06543C0}" type="datetime1">
               <a:rPr lang="en-US" smtClean="0"/>
-              <a:t>7/15/26</a:t>
+              <a:t>7/16/26</a:t>
             </a:fld>
             <a:endParaRPr lang="en-US"/>
           </a:p>
@@ -13311,6 +13312,202 @@
 </file>
 
 <file path=ppt/slides/slide4.xml><?xml version="1.0" encoding="utf-8"?>
+<p:sld xmlns:a="http://schemas.openxmlformats.org/drawingml/2006/main" xmlns:r="http://schemas.openxmlformats.org/officeDocument/2006/relationships" xmlns:p="http://schemas.openxmlformats.org/presentationml/2006/main">
+  <p:cSld>
+    <p:spTree>
+      <p:nvGrpSpPr>
+        <p:cNvPr id="1" name="">
+          <a:extLst>
+            <a:ext uri="{FF2B5EF4-FFF2-40B4-BE49-F238E27FC236}">
+              <a16:creationId xmlns:a16="http://schemas.microsoft.com/office/drawing/2014/main" id="{F30DD5C3-86C3-C7EE-D5BD-294A52F15C43}"/>
+            </a:ext>
+          </a:extLst>
+        </p:cNvPr>
+        <p:cNvGrpSpPr/>
+        <p:nvPr/>
+      </p:nvGrpSpPr>
+      <p:grpSpPr>
+        <a:xfrm>
+          <a:off x="0" y="0"/>
+          <a:ext cx="0" cy="0"/>
+          <a:chOff x="0" y="0"/>
+          <a:chExt cx="0" cy="0"/>
+        </a:xfrm>
+      </p:grpSpPr>
+      <p:sp>
+        <p:nvSpPr>
+          <p:cNvPr id="6146" name="Rectangle 2">
+            <a:extLst>
+              <a:ext uri="{FF2B5EF4-FFF2-40B4-BE49-F238E27FC236}">
+                <a16:creationId xmlns:a16="http://schemas.microsoft.com/office/drawing/2014/main" id="{53FBB78A-EE2B-4915-3BB5-0642F7776F81}"/>
+              </a:ext>
+            </a:extLst>
+          </p:cNvPr>
+          <p:cNvSpPr>
+            <a:spLocks noGrp="1" noChangeArrowheads="1"/>
+          </p:cNvSpPr>
+          <p:nvPr>
+            <p:ph type="title"/>
+            <p:custDataLst>
+              <p:tags r:id="rId1"/>
+            </p:custDataLst>
+          </p:nvPr>
+        </p:nvSpPr>
+        <p:spPr>
+          <a:xfrm>
+            <a:off x="1141413" y="284084"/>
+            <a:ext cx="9905998" cy="620791"/>
+          </a:xfrm>
+        </p:spPr>
+        <p:txBody>
+          <a:bodyPr/>
+          <a:lstStyle/>
+          <a:p>
+            <a:pPr algn="ctr"/>
+            <a:r>
+              <a:rPr lang="en-US" dirty="0"/>
+              <a:t>Week 1: Thursday</a:t>
+            </a:r>
+          </a:p>
+        </p:txBody>
+      </p:sp>
+      <p:sp>
+        <p:nvSpPr>
+          <p:cNvPr id="6147" name="Rectangle 3">
+            <a:extLst>
+              <a:ext uri="{FF2B5EF4-FFF2-40B4-BE49-F238E27FC236}">
+                <a16:creationId xmlns:a16="http://schemas.microsoft.com/office/drawing/2014/main" id="{696409BF-2B2C-9B95-39C5-A3B9EEEF888A}"/>
+              </a:ext>
+            </a:extLst>
+          </p:cNvPr>
+          <p:cNvSpPr>
+            <a:spLocks noGrp="1" noChangeArrowheads="1"/>
+          </p:cNvSpPr>
+          <p:nvPr>
+            <p:ph idx="1"/>
+            <p:custDataLst>
+              <p:tags r:id="rId2"/>
+            </p:custDataLst>
+          </p:nvPr>
+        </p:nvSpPr>
+        <p:spPr>
+          <a:xfrm>
+            <a:off x="1294151" y="1098549"/>
+            <a:ext cx="9600522" cy="5149850"/>
+          </a:xfrm>
+        </p:spPr>
+        <p:txBody>
+          <a:bodyPr>
+            <a:normAutofit lnSpcReduction="10000"/>
+          </a:bodyPr>
+          <a:lstStyle/>
+          <a:p>
+            <a:r>
+              <a:rPr lang="en-US" dirty="0">
+                <a:latin typeface="Arial" panose="020B0604020202020204" pitchFamily="34" charset="0"/>
+                <a:cs typeface="Arial" panose="020B0604020202020204" pitchFamily="34" charset="0"/>
+              </a:rPr>
+              <a:t>First homework was due last night! (Wednesday)</a:t>
+            </a:r>
+          </a:p>
+          <a:p>
+            <a:pPr lvl="1"/>
+            <a:r>
+              <a:rPr lang="en-US" dirty="0">
+                <a:latin typeface="Arial" panose="020B0604020202020204" pitchFamily="34" charset="0"/>
+                <a:cs typeface="Arial" panose="020B0604020202020204" pitchFamily="34" charset="0"/>
+              </a:rPr>
+              <a:t>How’d it go?</a:t>
+            </a:r>
+          </a:p>
+          <a:p>
+            <a:pPr lvl="1"/>
+            <a:r>
+              <a:rPr lang="en-US" dirty="0">
+                <a:latin typeface="Arial" panose="020B0604020202020204" pitchFamily="34" charset="0"/>
+                <a:cs typeface="Arial" panose="020B0604020202020204" pitchFamily="34" charset="0"/>
+              </a:rPr>
+              <a:t>3 day extension if you really need it but you really should try not to use it for this one.</a:t>
+            </a:r>
+          </a:p>
+          <a:p>
+            <a:r>
+              <a:rPr lang="en-US" dirty="0">
+                <a:latin typeface="Arial" panose="020B0604020202020204" pitchFamily="34" charset="0"/>
+                <a:cs typeface="Arial" panose="020B0604020202020204" pitchFamily="34" charset="0"/>
+              </a:rPr>
+              <a:t>Lecture recordings from last Fall are posted on Panopto on Canvas through Module 1 (keep in mind it was called Module 2 back then)</a:t>
+            </a:r>
+          </a:p>
+          <a:p>
+            <a:r>
+              <a:rPr lang="en-US" dirty="0">
+                <a:latin typeface="Arial" panose="020B0604020202020204" pitchFamily="34" charset="0"/>
+                <a:cs typeface="Arial" panose="020B0604020202020204" pitchFamily="34" charset="0"/>
+              </a:rPr>
+              <a:t>Please remember that I am asking for NO laptop / phones!</a:t>
+            </a:r>
+          </a:p>
+          <a:p>
+            <a:pPr lvl="1"/>
+            <a:r>
+              <a:rPr lang="en-US" dirty="0">
+                <a:latin typeface="Arial" panose="020B0604020202020204" pitchFamily="34" charset="0"/>
+                <a:cs typeface="Arial" panose="020B0604020202020204" pitchFamily="34" charset="0"/>
+              </a:rPr>
+              <a:t>This makes the learning environment better for everybody. I appreciate it!</a:t>
+            </a:r>
+          </a:p>
+          <a:p>
+            <a:r>
+              <a:rPr lang="en-US" dirty="0">
+                <a:latin typeface="Arial" panose="020B0604020202020204" pitchFamily="34" charset="0"/>
+                <a:cs typeface="Arial" panose="020B0604020202020204" pitchFamily="34" charset="0"/>
+              </a:rPr>
+              <a:t>Attendance continues today as usual.</a:t>
+            </a:r>
+          </a:p>
+          <a:p>
+            <a:r>
+              <a:rPr lang="en-US" dirty="0">
+                <a:latin typeface="Arial" panose="020B0604020202020204" pitchFamily="34" charset="0"/>
+                <a:cs typeface="Arial" panose="020B0604020202020204" pitchFamily="34" charset="0"/>
+              </a:rPr>
+              <a:t>We continue module 1 today.</a:t>
+            </a:r>
+          </a:p>
+          <a:p>
+            <a:pPr lvl="1"/>
+            <a:r>
+              <a:rPr lang="en-US" dirty="0">
+                <a:latin typeface="Arial" panose="020B0604020202020204" pitchFamily="34" charset="0"/>
+                <a:cs typeface="Arial" panose="020B0604020202020204" pitchFamily="34" charset="0"/>
+              </a:rPr>
+              <a:t>It will likely take us at least the rest of this week to get through.</a:t>
+            </a:r>
+          </a:p>
+          <a:p>
+            <a:endParaRPr lang="en-US" dirty="0">
+              <a:latin typeface="Arial" panose="020B0604020202020204" pitchFamily="34" charset="0"/>
+              <a:cs typeface="Arial" panose="020B0604020202020204" pitchFamily="34" charset="0"/>
+            </a:endParaRPr>
+          </a:p>
+        </p:txBody>
+      </p:sp>
+    </p:spTree>
+    <p:extLst>
+      <p:ext uri="{BB962C8B-B14F-4D97-AF65-F5344CB8AC3E}">
+        <p14:creationId xmlns:p14="http://schemas.microsoft.com/office/powerpoint/2010/main" val="1277214941"/>
+      </p:ext>
+    </p:extLst>
+  </p:cSld>
+  <p:clrMapOvr>
+    <a:masterClrMapping/>
+  </p:clrMapOvr>
+</p:sld>
+</file>
+
+<file path=ppt/slides/slide5.xml><?xml version="1.0" encoding="utf-8"?>
 <p:sld xmlns:a="http://schemas.openxmlformats.org/drawingml/2006/main" xmlns:r="http://schemas.openxmlformats.org/officeDocument/2006/relationships" xmlns:p="http://schemas.openxmlformats.org/presentationml/2006/main">
   <p:cSld>
     <p:spTree>
@@ -15184,6 +15381,18 @@
 </p:tagLst>
 </file>
 
+<file path=ppt/tags/tag10.xml><?xml version="1.0" encoding="utf-8"?>
+<p:tagLst xmlns:a="http://schemas.openxmlformats.org/drawingml/2006/main" xmlns:r="http://schemas.openxmlformats.org/officeDocument/2006/relationships" xmlns:p="http://schemas.openxmlformats.org/presentationml/2006/main">
+  <p:tag name="_INSTRUCTOR VIEW19C14C36-AC8E-43BC-9DB6-C2AAF774C7DC|PANE__TAG" val="_"/>
+</p:tagLst>
+</file>
+
+<file path=ppt/tags/tag11.xml><?xml version="1.0" encoding="utf-8"?>
+<p:tagLst xmlns:a="http://schemas.openxmlformats.org/drawingml/2006/main" xmlns:r="http://schemas.openxmlformats.org/officeDocument/2006/relationships" xmlns:p="http://schemas.openxmlformats.org/presentationml/2006/main">
+  <p:tag name="_INSTRUCTOR VIEW19C14C36-AC8E-43BC-9DB6-C2AAF774C7DC|PANE__TAG" val="_"/>
+</p:tagLst>
+</file>
+
 <file path=ppt/tags/tag2.xml><?xml version="1.0" encoding="utf-8"?>
 <p:tagLst xmlns:a="http://schemas.openxmlformats.org/drawingml/2006/main" xmlns:r="http://schemas.openxmlformats.org/officeDocument/2006/relationships" xmlns:p="http://schemas.openxmlformats.org/presentationml/2006/main">
   <p:tag name="_INSTRUCTOR VIEW19C14C36-AC8E-43BC-9DB6-C2AAF774C7DC|PANE__TAG" val="_"/>

--- a/slides/00-DailyAnnouncements.pptx
+++ b/slides/00-DailyAnnouncements.pptx
@@ -609,7 +609,7 @@
           <a:noFill/>
           <a:extLst>
             <a:ext uri="{909E8E84-426E-40dd-AFC4-6F175D3DCCD1}">
-              <a14:hiddenFill xmlns="" xmlns:a14="http://schemas.microsoft.com/office/drawing/2010/main">
+              <a14:hiddenFill xmlns:a14="http://schemas.microsoft.com/office/drawing/2010/main" xmlns="">
                 <a:solidFill>
                   <a:srgbClr val="FFFFFF"/>
                 </a:solidFill>
@@ -668,7 +668,7 @@
             </a:ln>
             <a:extLst>
               <a:ext uri="{91240B29-F687-4f45-9708-019B960494DF}">
-                <a14:hiddenLine xmlns="" xmlns:a14="http://schemas.microsoft.com/office/drawing/2010/main" w="9525">
+                <a14:hiddenLine xmlns:a14="http://schemas.microsoft.com/office/drawing/2010/main" xmlns="" w="9525">
                   <a:solidFill>
                     <a:srgbClr val="000000"/>
                   </a:solidFill>
@@ -758,7 +758,7 @@
             </a:ln>
             <a:extLst>
               <a:ext uri="{91240B29-F687-4f45-9708-019B960494DF}">
-                <a14:hiddenLine xmlns="" xmlns:a14="http://schemas.microsoft.com/office/drawing/2010/main" w="9525">
+                <a14:hiddenLine xmlns:a14="http://schemas.microsoft.com/office/drawing/2010/main" xmlns="" w="9525">
                   <a:solidFill>
                     <a:srgbClr val="000000"/>
                   </a:solidFill>
@@ -848,7 +848,7 @@
             </a:ln>
             <a:extLst>
               <a:ext uri="{91240B29-F687-4f45-9708-019B960494DF}">
-                <a14:hiddenLine xmlns="" xmlns:a14="http://schemas.microsoft.com/office/drawing/2010/main" w="9525">
+                <a14:hiddenLine xmlns:a14="http://schemas.microsoft.com/office/drawing/2010/main" xmlns="" w="9525">
                   <a:solidFill>
                     <a:srgbClr val="000000"/>
                   </a:solidFill>
@@ -882,7 +882,7 @@
             </a:ln>
             <a:extLst>
               <a:ext uri="{91240B29-F687-4f45-9708-019B960494DF}">
-                <a14:hiddenLine xmlns="" xmlns:a14="http://schemas.microsoft.com/office/drawing/2010/main" w="9525">
+                <a14:hiddenLine xmlns:a14="http://schemas.microsoft.com/office/drawing/2010/main" xmlns="" w="9525">
                   <a:solidFill>
                     <a:srgbClr val="000000"/>
                   </a:solidFill>
@@ -972,7 +972,7 @@
             </a:ln>
             <a:extLst>
               <a:ext uri="{91240B29-F687-4f45-9708-019B960494DF}">
-                <a14:hiddenLine xmlns="" xmlns:a14="http://schemas.microsoft.com/office/drawing/2010/main" w="9525">
+                <a14:hiddenLine xmlns:a14="http://schemas.microsoft.com/office/drawing/2010/main" xmlns="" w="9525">
                   <a:solidFill>
                     <a:srgbClr val="000000"/>
                   </a:solidFill>
@@ -1034,7 +1034,7 @@
             </a:ln>
             <a:extLst>
               <a:ext uri="{91240B29-F687-4f45-9708-019B960494DF}">
-                <a14:hiddenLine xmlns="" xmlns:a14="http://schemas.microsoft.com/office/drawing/2010/main" w="9525">
+                <a14:hiddenLine xmlns:a14="http://schemas.microsoft.com/office/drawing/2010/main" xmlns="" w="9525">
                   <a:solidFill>
                     <a:srgbClr val="000000"/>
                   </a:solidFill>
@@ -1096,7 +1096,7 @@
             </a:ln>
             <a:extLst>
               <a:ext uri="{91240B29-F687-4f45-9708-019B960494DF}">
-                <a14:hiddenLine xmlns="" xmlns:a14="http://schemas.microsoft.com/office/drawing/2010/main" w="9525">
+                <a14:hiddenLine xmlns:a14="http://schemas.microsoft.com/office/drawing/2010/main" xmlns="" w="9525">
                   <a:solidFill>
                     <a:srgbClr val="000000"/>
                   </a:solidFill>
@@ -1186,7 +1186,7 @@
             </a:ln>
             <a:extLst>
               <a:ext uri="{91240B29-F687-4f45-9708-019B960494DF}">
-                <a14:hiddenLine xmlns="" xmlns:a14="http://schemas.microsoft.com/office/drawing/2010/main" w="9525">
+                <a14:hiddenLine xmlns:a14="http://schemas.microsoft.com/office/drawing/2010/main" xmlns="" w="9525">
                   <a:solidFill>
                     <a:srgbClr val="000000"/>
                   </a:solidFill>
@@ -1248,7 +1248,7 @@
             </a:ln>
             <a:extLst>
               <a:ext uri="{91240B29-F687-4f45-9708-019B960494DF}">
-                <a14:hiddenLine xmlns="" xmlns:a14="http://schemas.microsoft.com/office/drawing/2010/main" w="9525">
+                <a14:hiddenLine xmlns:a14="http://schemas.microsoft.com/office/drawing/2010/main" xmlns="" w="9525">
                   <a:solidFill>
                     <a:srgbClr val="000000"/>
                   </a:solidFill>
@@ -1310,7 +1310,7 @@
             </a:ln>
             <a:extLst>
               <a:ext uri="{91240B29-F687-4f45-9708-019B960494DF}">
-                <a14:hiddenLine xmlns="" xmlns:a14="http://schemas.microsoft.com/office/drawing/2010/main" w="9525">
+                <a14:hiddenLine xmlns:a14="http://schemas.microsoft.com/office/drawing/2010/main" xmlns="" w="9525">
                   <a:solidFill>
                     <a:srgbClr val="000000"/>
                   </a:solidFill>
@@ -1400,7 +1400,7 @@
             </a:ln>
             <a:extLst>
               <a:ext uri="{91240B29-F687-4f45-9708-019B960494DF}">
-                <a14:hiddenLine xmlns="" xmlns:a14="http://schemas.microsoft.com/office/drawing/2010/main" w="9525">
+                <a14:hiddenLine xmlns:a14="http://schemas.microsoft.com/office/drawing/2010/main" xmlns="" w="9525">
                   <a:solidFill>
                     <a:srgbClr val="000000"/>
                   </a:solidFill>
@@ -1490,7 +1490,7 @@
             </a:ln>
             <a:extLst>
               <a:ext uri="{91240B29-F687-4f45-9708-019B960494DF}">
-                <a14:hiddenLine xmlns="" xmlns:a14="http://schemas.microsoft.com/office/drawing/2010/main" w="9525">
+                <a14:hiddenLine xmlns:a14="http://schemas.microsoft.com/office/drawing/2010/main" xmlns="" w="9525">
                   <a:solidFill>
                     <a:srgbClr val="000000"/>
                   </a:solidFill>
@@ -1552,7 +1552,7 @@
             </a:ln>
             <a:extLst>
               <a:ext uri="{91240B29-F687-4f45-9708-019B960494DF}">
-                <a14:hiddenLine xmlns="" xmlns:a14="http://schemas.microsoft.com/office/drawing/2010/main" w="9525">
+                <a14:hiddenLine xmlns:a14="http://schemas.microsoft.com/office/drawing/2010/main" xmlns="" w="9525">
                   <a:solidFill>
                     <a:srgbClr val="000000"/>
                   </a:solidFill>
@@ -1662,7 +1662,7 @@
             </a:ln>
             <a:extLst>
               <a:ext uri="{91240B29-F687-4f45-9708-019B960494DF}">
-                <a14:hiddenLine xmlns="" xmlns:a14="http://schemas.microsoft.com/office/drawing/2010/main" w="9525">
+                <a14:hiddenLine xmlns:a14="http://schemas.microsoft.com/office/drawing/2010/main" xmlns="" w="9525">
                   <a:solidFill>
                     <a:srgbClr val="000000"/>
                   </a:solidFill>
@@ -1724,7 +1724,7 @@
             </a:ln>
             <a:extLst>
               <a:ext uri="{91240B29-F687-4f45-9708-019B960494DF}">
-                <a14:hiddenLine xmlns="" xmlns:a14="http://schemas.microsoft.com/office/drawing/2010/main" w="9525">
+                <a14:hiddenLine xmlns:a14="http://schemas.microsoft.com/office/drawing/2010/main" xmlns="" w="9525">
                   <a:solidFill>
                     <a:srgbClr val="000000"/>
                   </a:solidFill>
@@ -1814,7 +1814,7 @@
             </a:ln>
             <a:extLst>
               <a:ext uri="{91240B29-F687-4f45-9708-019B960494DF}">
-                <a14:hiddenLine xmlns="" xmlns:a14="http://schemas.microsoft.com/office/drawing/2010/main" w="9525">
+                <a14:hiddenLine xmlns:a14="http://schemas.microsoft.com/office/drawing/2010/main" xmlns="" w="9525">
                   <a:solidFill>
                     <a:srgbClr val="000000"/>
                   </a:solidFill>
@@ -1904,7 +1904,7 @@
             </a:ln>
             <a:extLst>
               <a:ext uri="{91240B29-F687-4f45-9708-019B960494DF}">
-                <a14:hiddenLine xmlns="" xmlns:a14="http://schemas.microsoft.com/office/drawing/2010/main" w="9525">
+                <a14:hiddenLine xmlns:a14="http://schemas.microsoft.com/office/drawing/2010/main" xmlns="" w="9525">
                   <a:solidFill>
                     <a:srgbClr val="000000"/>
                   </a:solidFill>
@@ -1966,7 +1966,7 @@
             </a:ln>
             <a:extLst>
               <a:ext uri="{91240B29-F687-4f45-9708-019B960494DF}">
-                <a14:hiddenLine xmlns="" xmlns:a14="http://schemas.microsoft.com/office/drawing/2010/main" w="9525">
+                <a14:hiddenLine xmlns:a14="http://schemas.microsoft.com/office/drawing/2010/main" xmlns="" w="9525">
                   <a:solidFill>
                     <a:srgbClr val="000000"/>
                   </a:solidFill>
@@ -2056,7 +2056,7 @@
             </a:ln>
             <a:extLst>
               <a:ext uri="{91240B29-F687-4f45-9708-019B960494DF}">
-                <a14:hiddenLine xmlns="" xmlns:a14="http://schemas.microsoft.com/office/drawing/2010/main" w="9525">
+                <a14:hiddenLine xmlns:a14="http://schemas.microsoft.com/office/drawing/2010/main" xmlns="" w="9525">
                   <a:solidFill>
                     <a:srgbClr val="000000"/>
                   </a:solidFill>
@@ -2146,7 +2146,7 @@
             </a:ln>
             <a:extLst>
               <a:ext uri="{91240B29-F687-4f45-9708-019B960494DF}">
-                <a14:hiddenLine xmlns="" xmlns:a14="http://schemas.microsoft.com/office/drawing/2010/main" w="9525">
+                <a14:hiddenLine xmlns:a14="http://schemas.microsoft.com/office/drawing/2010/main" xmlns="" w="9525">
                   <a:solidFill>
                     <a:srgbClr val="000000"/>
                   </a:solidFill>
@@ -2202,7 +2202,7 @@
             </a:ln>
             <a:extLst>
               <a:ext uri="{91240B29-F687-4f45-9708-019B960494DF}">
-                <a14:hiddenLine xmlns="" xmlns:a14="http://schemas.microsoft.com/office/drawing/2010/main" w="9525">
+                <a14:hiddenLine xmlns:a14="http://schemas.microsoft.com/office/drawing/2010/main" xmlns="" w="9525">
                   <a:solidFill>
                     <a:srgbClr val="000000"/>
                   </a:solidFill>
@@ -2292,7 +2292,7 @@
             </a:ln>
             <a:extLst>
               <a:ext uri="{91240B29-F687-4f45-9708-019B960494DF}">
-                <a14:hiddenLine xmlns="" xmlns:a14="http://schemas.microsoft.com/office/drawing/2010/main" w="9525">
+                <a14:hiddenLine xmlns:a14="http://schemas.microsoft.com/office/drawing/2010/main" xmlns="" w="9525">
                   <a:solidFill>
                     <a:srgbClr val="000000"/>
                   </a:solidFill>
@@ -2348,7 +2348,7 @@
             </a:ln>
             <a:extLst>
               <a:ext uri="{91240B29-F687-4f45-9708-019B960494DF}">
-                <a14:hiddenLine xmlns="" xmlns:a14="http://schemas.microsoft.com/office/drawing/2010/main" w="9525">
+                <a14:hiddenLine xmlns:a14="http://schemas.microsoft.com/office/drawing/2010/main" xmlns="" w="9525">
                   <a:solidFill>
                     <a:srgbClr val="000000"/>
                   </a:solidFill>
@@ -2438,7 +2438,7 @@
             </a:ln>
             <a:extLst>
               <a:ext uri="{91240B29-F687-4f45-9708-019B960494DF}">
-                <a14:hiddenLine xmlns="" xmlns:a14="http://schemas.microsoft.com/office/drawing/2010/main" w="9525">
+                <a14:hiddenLine xmlns:a14="http://schemas.microsoft.com/office/drawing/2010/main" xmlns="" w="9525">
                   <a:solidFill>
                     <a:srgbClr val="000000"/>
                   </a:solidFill>
@@ -2506,7 +2506,7 @@
             </a:ln>
             <a:extLst>
               <a:ext uri="{91240B29-F687-4f45-9708-019B960494DF}">
-                <a14:hiddenLine xmlns="" xmlns:a14="http://schemas.microsoft.com/office/drawing/2010/main" w="9525">
+                <a14:hiddenLine xmlns:a14="http://schemas.microsoft.com/office/drawing/2010/main" xmlns="" w="9525">
                   <a:solidFill>
                     <a:srgbClr val="000000"/>
                   </a:solidFill>
@@ -2596,7 +2596,7 @@
             </a:ln>
             <a:extLst>
               <a:ext uri="{91240B29-F687-4f45-9708-019B960494DF}">
-                <a14:hiddenLine xmlns="" xmlns:a14="http://schemas.microsoft.com/office/drawing/2010/main" w="9525">
+                <a14:hiddenLine xmlns:a14="http://schemas.microsoft.com/office/drawing/2010/main" xmlns="" w="9525">
                   <a:solidFill>
                     <a:srgbClr val="000000"/>
                   </a:solidFill>
@@ -2664,7 +2664,7 @@
             </a:ln>
             <a:extLst>
               <a:ext uri="{91240B29-F687-4f45-9708-019B960494DF}">
-                <a14:hiddenLine xmlns="" xmlns:a14="http://schemas.microsoft.com/office/drawing/2010/main" w="9525">
+                <a14:hiddenLine xmlns:a14="http://schemas.microsoft.com/office/drawing/2010/main" xmlns="" w="9525">
                   <a:solidFill>
                     <a:srgbClr val="000000"/>
                   </a:solidFill>
@@ -2754,7 +2754,7 @@
             </a:ln>
             <a:extLst>
               <a:ext uri="{91240B29-F687-4f45-9708-019B960494DF}">
-                <a14:hiddenLine xmlns="" xmlns:a14="http://schemas.microsoft.com/office/drawing/2010/main" w="9525">
+                <a14:hiddenLine xmlns:a14="http://schemas.microsoft.com/office/drawing/2010/main" xmlns="" w="9525">
                   <a:solidFill>
                     <a:srgbClr val="000000"/>
                   </a:solidFill>
@@ -2788,7 +2788,7 @@
             </a:ln>
             <a:extLst>
               <a:ext uri="{91240B29-F687-4f45-9708-019B960494DF}">
-                <a14:hiddenLine xmlns="" xmlns:a14="http://schemas.microsoft.com/office/drawing/2010/main" w="9525">
+                <a14:hiddenLine xmlns:a14="http://schemas.microsoft.com/office/drawing/2010/main" xmlns="" w="9525">
                   <a:solidFill>
                     <a:srgbClr val="000000"/>
                   </a:solidFill>
@@ -2878,7 +2878,7 @@
             </a:ln>
             <a:extLst>
               <a:ext uri="{91240B29-F687-4f45-9708-019B960494DF}">
-                <a14:hiddenLine xmlns="" xmlns:a14="http://schemas.microsoft.com/office/drawing/2010/main" w="9525">
+                <a14:hiddenLine xmlns:a14="http://schemas.microsoft.com/office/drawing/2010/main" xmlns="" w="9525">
                   <a:solidFill>
                     <a:srgbClr val="000000"/>
                   </a:solidFill>
@@ -2940,7 +2940,7 @@
             </a:ln>
             <a:extLst>
               <a:ext uri="{91240B29-F687-4f45-9708-019B960494DF}">
-                <a14:hiddenLine xmlns="" xmlns:a14="http://schemas.microsoft.com/office/drawing/2010/main" w="9525">
+                <a14:hiddenLine xmlns:a14="http://schemas.microsoft.com/office/drawing/2010/main" xmlns="" w="9525">
                   <a:solidFill>
                     <a:srgbClr val="000000"/>
                   </a:solidFill>
@@ -3002,7 +3002,7 @@
             </a:ln>
             <a:extLst>
               <a:ext uri="{91240B29-F687-4f45-9708-019B960494DF}">
-                <a14:hiddenLine xmlns="" xmlns:a14="http://schemas.microsoft.com/office/drawing/2010/main" w="9525">
+                <a14:hiddenLine xmlns:a14="http://schemas.microsoft.com/office/drawing/2010/main" xmlns="" w="9525">
                   <a:solidFill>
                     <a:srgbClr val="000000"/>
                   </a:solidFill>
@@ -3092,7 +3092,7 @@
             </a:ln>
             <a:extLst>
               <a:ext uri="{91240B29-F687-4f45-9708-019B960494DF}">
-                <a14:hiddenLine xmlns="" xmlns:a14="http://schemas.microsoft.com/office/drawing/2010/main" w="9525">
+                <a14:hiddenLine xmlns:a14="http://schemas.microsoft.com/office/drawing/2010/main" xmlns="" w="9525">
                   <a:solidFill>
                     <a:srgbClr val="000000"/>
                   </a:solidFill>
@@ -3160,7 +3160,7 @@
             </a:ln>
             <a:extLst>
               <a:ext uri="{91240B29-F687-4f45-9708-019B960494DF}">
-                <a14:hiddenLine xmlns="" xmlns:a14="http://schemas.microsoft.com/office/drawing/2010/main" w="9525">
+                <a14:hiddenLine xmlns:a14="http://schemas.microsoft.com/office/drawing/2010/main" xmlns="" w="9525">
                   <a:solidFill>
                     <a:srgbClr val="000000"/>
                   </a:solidFill>
@@ -3222,7 +3222,7 @@
             </a:ln>
             <a:extLst>
               <a:ext uri="{91240B29-F687-4f45-9708-019B960494DF}">
-                <a14:hiddenLine xmlns="" xmlns:a14="http://schemas.microsoft.com/office/drawing/2010/main" w="9525">
+                <a14:hiddenLine xmlns:a14="http://schemas.microsoft.com/office/drawing/2010/main" xmlns="" w="9525">
                   <a:solidFill>
                     <a:srgbClr val="000000"/>
                   </a:solidFill>
@@ -3312,7 +3312,7 @@
             </a:ln>
             <a:extLst>
               <a:ext uri="{91240B29-F687-4f45-9708-019B960494DF}">
-                <a14:hiddenLine xmlns="" xmlns:a14="http://schemas.microsoft.com/office/drawing/2010/main" w="9525">
+                <a14:hiddenLine xmlns:a14="http://schemas.microsoft.com/office/drawing/2010/main" xmlns="" w="9525">
                   <a:solidFill>
                     <a:srgbClr val="000000"/>
                   </a:solidFill>
@@ -3374,7 +3374,7 @@
             </a:ln>
             <a:extLst>
               <a:ext uri="{91240B29-F687-4f45-9708-019B960494DF}">
-                <a14:hiddenLine xmlns="" xmlns:a14="http://schemas.microsoft.com/office/drawing/2010/main" w="9525">
+                <a14:hiddenLine xmlns:a14="http://schemas.microsoft.com/office/drawing/2010/main" xmlns="" w="9525">
                   <a:solidFill>
                     <a:srgbClr val="000000"/>
                   </a:solidFill>
@@ -3464,7 +3464,7 @@
             </a:ln>
             <a:extLst>
               <a:ext uri="{91240B29-F687-4f45-9708-019B960494DF}">
-                <a14:hiddenLine xmlns="" xmlns:a14="http://schemas.microsoft.com/office/drawing/2010/main" w="9525">
+                <a14:hiddenLine xmlns:a14="http://schemas.microsoft.com/office/drawing/2010/main" xmlns="" w="9525">
                   <a:solidFill>
                     <a:srgbClr val="000000"/>
                   </a:solidFill>
@@ -3526,7 +3526,7 @@
             </a:ln>
             <a:extLst>
               <a:ext uri="{91240B29-F687-4f45-9708-019B960494DF}">
-                <a14:hiddenLine xmlns="" xmlns:a14="http://schemas.microsoft.com/office/drawing/2010/main" w="9525">
+                <a14:hiddenLine xmlns:a14="http://schemas.microsoft.com/office/drawing/2010/main" xmlns="" w="9525">
                   <a:solidFill>
                     <a:srgbClr val="000000"/>
                   </a:solidFill>
@@ -3616,7 +3616,7 @@
             </a:ln>
             <a:extLst>
               <a:ext uri="{91240B29-F687-4f45-9708-019B960494DF}">
-                <a14:hiddenLine xmlns="" xmlns:a14="http://schemas.microsoft.com/office/drawing/2010/main" w="9525">
+                <a14:hiddenLine xmlns:a14="http://schemas.microsoft.com/office/drawing/2010/main" xmlns="" w="9525">
                   <a:solidFill>
                     <a:srgbClr val="000000"/>
                   </a:solidFill>
@@ -3650,7 +3650,7 @@
             </a:ln>
             <a:extLst>
               <a:ext uri="{91240B29-F687-4f45-9708-019B960494DF}">
-                <a14:hiddenLine xmlns="" xmlns:a14="http://schemas.microsoft.com/office/drawing/2010/main" w="9525">
+                <a14:hiddenLine xmlns:a14="http://schemas.microsoft.com/office/drawing/2010/main" xmlns="" w="9525">
                   <a:solidFill>
                     <a:srgbClr val="000000"/>
                   </a:solidFill>
@@ -3715,7 +3715,7 @@
             </a:ln>
             <a:extLst>
               <a:ext uri="{91240B29-F687-4f45-9708-019B960494DF}">
-                <a14:hiddenLine xmlns="" xmlns:a14="http://schemas.microsoft.com/office/drawing/2010/main" w="9525">
+                <a14:hiddenLine xmlns:a14="http://schemas.microsoft.com/office/drawing/2010/main" xmlns="" w="9525">
                   <a:solidFill>
                     <a:srgbClr val="000000"/>
                   </a:solidFill>
@@ -3805,7 +3805,7 @@
             </a:ln>
             <a:extLst>
               <a:ext uri="{91240B29-F687-4f45-9708-019B960494DF}">
-                <a14:hiddenLine xmlns="" xmlns:a14="http://schemas.microsoft.com/office/drawing/2010/main" w="9525">
+                <a14:hiddenLine xmlns:a14="http://schemas.microsoft.com/office/drawing/2010/main" xmlns="" w="9525">
                   <a:solidFill>
                     <a:srgbClr val="000000"/>
                   </a:solidFill>
@@ -3867,7 +3867,7 @@
             </a:ln>
             <a:extLst>
               <a:ext uri="{91240B29-F687-4f45-9708-019B960494DF}">
-                <a14:hiddenLine xmlns="" xmlns:a14="http://schemas.microsoft.com/office/drawing/2010/main" w="9525">
+                <a14:hiddenLine xmlns:a14="http://schemas.microsoft.com/office/drawing/2010/main" xmlns="" w="9525">
                   <a:solidFill>
                     <a:srgbClr val="000000"/>
                   </a:solidFill>
@@ -3957,7 +3957,7 @@
             </a:ln>
             <a:extLst>
               <a:ext uri="{91240B29-F687-4f45-9708-019B960494DF}">
-                <a14:hiddenLine xmlns="" xmlns:a14="http://schemas.microsoft.com/office/drawing/2010/main" w="9525">
+                <a14:hiddenLine xmlns:a14="http://schemas.microsoft.com/office/drawing/2010/main" xmlns="" w="9525">
                   <a:solidFill>
                     <a:srgbClr val="000000"/>
                   </a:solidFill>
@@ -4047,7 +4047,7 @@
             </a:ln>
             <a:extLst>
               <a:ext uri="{91240B29-F687-4f45-9708-019B960494DF}">
-                <a14:hiddenLine xmlns="" xmlns:a14="http://schemas.microsoft.com/office/drawing/2010/main" w="9525">
+                <a14:hiddenLine xmlns:a14="http://schemas.microsoft.com/office/drawing/2010/main" xmlns="" w="9525">
                   <a:solidFill>
                     <a:srgbClr val="000000"/>
                   </a:solidFill>
@@ -4112,7 +4112,7 @@
             </a:ln>
             <a:extLst>
               <a:ext uri="{91240B29-F687-4f45-9708-019B960494DF}">
-                <a14:hiddenLine xmlns="" xmlns:a14="http://schemas.microsoft.com/office/drawing/2010/main" w="9525">
+                <a14:hiddenLine xmlns:a14="http://schemas.microsoft.com/office/drawing/2010/main" xmlns="" w="9525">
                   <a:solidFill>
                     <a:srgbClr val="000000"/>
                   </a:solidFill>
@@ -4174,7 +4174,7 @@
             </a:ln>
             <a:extLst>
               <a:ext uri="{91240B29-F687-4f45-9708-019B960494DF}">
-                <a14:hiddenLine xmlns="" xmlns:a14="http://schemas.microsoft.com/office/drawing/2010/main" w="9525">
+                <a14:hiddenLine xmlns:a14="http://schemas.microsoft.com/office/drawing/2010/main" xmlns="" w="9525">
                   <a:solidFill>
                     <a:srgbClr val="000000"/>
                   </a:solidFill>
@@ -4264,7 +4264,7 @@
             </a:ln>
             <a:extLst>
               <a:ext uri="{91240B29-F687-4f45-9708-019B960494DF}">
-                <a14:hiddenLine xmlns="" xmlns:a14="http://schemas.microsoft.com/office/drawing/2010/main" w="9525">
+                <a14:hiddenLine xmlns:a14="http://schemas.microsoft.com/office/drawing/2010/main" xmlns="" w="9525">
                   <a:solidFill>
                     <a:srgbClr val="000000"/>
                   </a:solidFill>
@@ -4354,7 +4354,7 @@
             </a:ln>
             <a:extLst>
               <a:ext uri="{91240B29-F687-4f45-9708-019B960494DF}">
-                <a14:hiddenLine xmlns="" xmlns:a14="http://schemas.microsoft.com/office/drawing/2010/main" w="9525">
+                <a14:hiddenLine xmlns:a14="http://schemas.microsoft.com/office/drawing/2010/main" xmlns="" w="9525">
                   <a:solidFill>
                     <a:srgbClr val="000000"/>
                   </a:solidFill>
@@ -4416,7 +4416,7 @@
             </a:ln>
             <a:extLst>
               <a:ext uri="{91240B29-F687-4f45-9708-019B960494DF}">
-                <a14:hiddenLine xmlns="" xmlns:a14="http://schemas.microsoft.com/office/drawing/2010/main" w="9525">
+                <a14:hiddenLine xmlns:a14="http://schemas.microsoft.com/office/drawing/2010/main" xmlns="" w="9525">
                   <a:solidFill>
                     <a:srgbClr val="000000"/>
                   </a:solidFill>
@@ -4536,7 +4536,7 @@
             </a:ln>
             <a:extLst>
               <a:ext uri="{91240B29-F687-4f45-9708-019B960494DF}">
-                <a14:hiddenLine xmlns="" xmlns:a14="http://schemas.microsoft.com/office/drawing/2010/main" w="9525">
+                <a14:hiddenLine xmlns:a14="http://schemas.microsoft.com/office/drawing/2010/main" xmlns="" w="9525">
                   <a:solidFill>
                     <a:srgbClr val="000000"/>
                   </a:solidFill>
@@ -4604,7 +4604,7 @@
             </a:ln>
             <a:extLst>
               <a:ext uri="{91240B29-F687-4f45-9708-019B960494DF}">
-                <a14:hiddenLine xmlns="" xmlns:a14="http://schemas.microsoft.com/office/drawing/2010/main" w="9525">
+                <a14:hiddenLine xmlns:a14="http://schemas.microsoft.com/office/drawing/2010/main" xmlns="" w="9525">
                   <a:solidFill>
                     <a:srgbClr val="000000"/>
                   </a:solidFill>
@@ -4694,7 +4694,7 @@
             </a:ln>
             <a:extLst>
               <a:ext uri="{91240B29-F687-4f45-9708-019B960494DF}">
-                <a14:hiddenLine xmlns="" xmlns:a14="http://schemas.microsoft.com/office/drawing/2010/main" w="9525">
+                <a14:hiddenLine xmlns:a14="http://schemas.microsoft.com/office/drawing/2010/main" xmlns="" w="9525">
                   <a:solidFill>
                     <a:srgbClr val="000000"/>
                   </a:solidFill>
@@ -9523,7 +9523,7 @@
           <a:noFill/>
           <a:extLst>
             <a:ext uri="{909E8E84-426E-40dd-AFC4-6F175D3DCCD1}">
-              <a14:hiddenFill xmlns="" xmlns:a14="http://schemas.microsoft.com/office/drawing/2010/main">
+              <a14:hiddenFill xmlns:a14="http://schemas.microsoft.com/office/drawing/2010/main" xmlns="">
                 <a:solidFill>
                   <a:srgbClr val="FFFFFF"/>
                 </a:solidFill>
@@ -9597,7 +9597,7 @@
               </a:ln>
               <a:extLst>
                 <a:ext uri="{91240B29-F687-4f45-9708-019B960494DF}">
-                  <a14:hiddenLine xmlns="" xmlns:a14="http://schemas.microsoft.com/office/drawing/2010/main" w="9525">
+                  <a14:hiddenLine xmlns:a14="http://schemas.microsoft.com/office/drawing/2010/main" xmlns="" w="9525">
                     <a:solidFill>
                       <a:srgbClr val="000000"/>
                     </a:solidFill>
@@ -9687,7 +9687,7 @@
               </a:ln>
               <a:extLst>
                 <a:ext uri="{91240B29-F687-4f45-9708-019B960494DF}">
-                  <a14:hiddenLine xmlns="" xmlns:a14="http://schemas.microsoft.com/office/drawing/2010/main" w="9525">
+                  <a14:hiddenLine xmlns:a14="http://schemas.microsoft.com/office/drawing/2010/main" xmlns="" w="9525">
                     <a:solidFill>
                       <a:srgbClr val="000000"/>
                     </a:solidFill>
@@ -9777,7 +9777,7 @@
               </a:ln>
               <a:extLst>
                 <a:ext uri="{91240B29-F687-4f45-9708-019B960494DF}">
-                  <a14:hiddenLine xmlns="" xmlns:a14="http://schemas.microsoft.com/office/drawing/2010/main" w="9525">
+                  <a14:hiddenLine xmlns:a14="http://schemas.microsoft.com/office/drawing/2010/main" xmlns="" w="9525">
                     <a:solidFill>
                       <a:srgbClr val="000000"/>
                     </a:solidFill>
@@ -9839,7 +9839,7 @@
               </a:ln>
               <a:extLst>
                 <a:ext uri="{91240B29-F687-4f45-9708-019B960494DF}">
-                  <a14:hiddenLine xmlns="" xmlns:a14="http://schemas.microsoft.com/office/drawing/2010/main" w="9525">
+                  <a14:hiddenLine xmlns:a14="http://schemas.microsoft.com/office/drawing/2010/main" xmlns="" w="9525">
                     <a:solidFill>
                       <a:srgbClr val="000000"/>
                     </a:solidFill>
@@ -9929,7 +9929,7 @@
               </a:ln>
               <a:extLst>
                 <a:ext uri="{91240B29-F687-4f45-9708-019B960494DF}">
-                  <a14:hiddenLine xmlns="" xmlns:a14="http://schemas.microsoft.com/office/drawing/2010/main" w="9525">
+                  <a14:hiddenLine xmlns:a14="http://schemas.microsoft.com/office/drawing/2010/main" xmlns="" w="9525">
                     <a:solidFill>
                       <a:srgbClr val="000000"/>
                     </a:solidFill>
@@ -9991,7 +9991,7 @@
               </a:ln>
               <a:extLst>
                 <a:ext uri="{91240B29-F687-4f45-9708-019B960494DF}">
-                  <a14:hiddenLine xmlns="" xmlns:a14="http://schemas.microsoft.com/office/drawing/2010/main" w="9525">
+                  <a14:hiddenLine xmlns:a14="http://schemas.microsoft.com/office/drawing/2010/main" xmlns="" w="9525">
                     <a:solidFill>
                       <a:srgbClr val="000000"/>
                     </a:solidFill>
@@ -10053,7 +10053,7 @@
               </a:ln>
               <a:extLst>
                 <a:ext uri="{91240B29-F687-4f45-9708-019B960494DF}">
-                  <a14:hiddenLine xmlns="" xmlns:a14="http://schemas.microsoft.com/office/drawing/2010/main" w="9525">
+                  <a14:hiddenLine xmlns:a14="http://schemas.microsoft.com/office/drawing/2010/main" xmlns="" w="9525">
                     <a:solidFill>
                       <a:srgbClr val="000000"/>
                     </a:solidFill>
@@ -10143,7 +10143,7 @@
               </a:ln>
               <a:extLst>
                 <a:ext uri="{91240B29-F687-4f45-9708-019B960494DF}">
-                  <a14:hiddenLine xmlns="" xmlns:a14="http://schemas.microsoft.com/office/drawing/2010/main" w="9525">
+                  <a14:hiddenLine xmlns:a14="http://schemas.microsoft.com/office/drawing/2010/main" xmlns="" w="9525">
                     <a:solidFill>
                       <a:srgbClr val="000000"/>
                     </a:solidFill>
@@ -10233,7 +10233,7 @@
               </a:ln>
               <a:extLst>
                 <a:ext uri="{91240B29-F687-4f45-9708-019B960494DF}">
-                  <a14:hiddenLine xmlns="" xmlns:a14="http://schemas.microsoft.com/office/drawing/2010/main" w="9525">
+                  <a14:hiddenLine xmlns:a14="http://schemas.microsoft.com/office/drawing/2010/main" xmlns="" w="9525">
                     <a:solidFill>
                       <a:srgbClr val="000000"/>
                     </a:solidFill>
@@ -10295,7 +10295,7 @@
               </a:ln>
               <a:extLst>
                 <a:ext uri="{91240B29-F687-4f45-9708-019B960494DF}">
-                  <a14:hiddenLine xmlns="" xmlns:a14="http://schemas.microsoft.com/office/drawing/2010/main" w="9525">
+                  <a14:hiddenLine xmlns:a14="http://schemas.microsoft.com/office/drawing/2010/main" xmlns="" w="9525">
                     <a:solidFill>
                       <a:srgbClr val="000000"/>
                     </a:solidFill>
@@ -10405,7 +10405,7 @@
               </a:ln>
               <a:extLst>
                 <a:ext uri="{91240B29-F687-4f45-9708-019B960494DF}">
-                  <a14:hiddenLine xmlns="" xmlns:a14="http://schemas.microsoft.com/office/drawing/2010/main" w="9525">
+                  <a14:hiddenLine xmlns:a14="http://schemas.microsoft.com/office/drawing/2010/main" xmlns="" w="9525">
                     <a:solidFill>
                       <a:srgbClr val="000000"/>
                     </a:solidFill>
@@ -10489,7 +10489,7 @@
               </a:ln>
               <a:extLst>
                 <a:ext uri="{91240B29-F687-4f45-9708-019B960494DF}">
-                  <a14:hiddenLine xmlns="" xmlns:a14="http://schemas.microsoft.com/office/drawing/2010/main" w="9525">
+                  <a14:hiddenLine xmlns:a14="http://schemas.microsoft.com/office/drawing/2010/main" xmlns="" w="9525">
                     <a:solidFill>
                       <a:srgbClr val="000000"/>
                     </a:solidFill>
@@ -10551,7 +10551,7 @@
               </a:ln>
               <a:extLst>
                 <a:ext uri="{91240B29-F687-4f45-9708-019B960494DF}">
-                  <a14:hiddenLine xmlns="" xmlns:a14="http://schemas.microsoft.com/office/drawing/2010/main" w="9525">
+                  <a14:hiddenLine xmlns:a14="http://schemas.microsoft.com/office/drawing/2010/main" xmlns="" w="9525">
                     <a:solidFill>
                       <a:srgbClr val="000000"/>
                     </a:solidFill>
@@ -10613,7 +10613,7 @@
               </a:ln>
               <a:extLst>
                 <a:ext uri="{91240B29-F687-4f45-9708-019B960494DF}">
-                  <a14:hiddenLine xmlns="" xmlns:a14="http://schemas.microsoft.com/office/drawing/2010/main" w="9525">
+                  <a14:hiddenLine xmlns:a14="http://schemas.microsoft.com/office/drawing/2010/main" xmlns="" w="9525">
                     <a:solidFill>
                       <a:srgbClr val="000000"/>
                     </a:solidFill>
@@ -10703,7 +10703,7 @@
               </a:ln>
               <a:extLst>
                 <a:ext uri="{91240B29-F687-4f45-9708-019B960494DF}">
-                  <a14:hiddenLine xmlns="" xmlns:a14="http://schemas.microsoft.com/office/drawing/2010/main" w="9525">
+                  <a14:hiddenLine xmlns:a14="http://schemas.microsoft.com/office/drawing/2010/main" xmlns="" w="9525">
                     <a:solidFill>
                       <a:srgbClr val="000000"/>
                     </a:solidFill>
@@ -10737,7 +10737,7 @@
               </a:ln>
               <a:extLst>
                 <a:ext uri="{91240B29-F687-4f45-9708-019B960494DF}">
-                  <a14:hiddenLine xmlns="" xmlns:a14="http://schemas.microsoft.com/office/drawing/2010/main" w="9525">
+                  <a14:hiddenLine xmlns:a14="http://schemas.microsoft.com/office/drawing/2010/main" xmlns="" w="9525">
                     <a:solidFill>
                       <a:srgbClr val="000000"/>
                     </a:solidFill>
@@ -10802,7 +10802,7 @@
               </a:ln>
               <a:extLst>
                 <a:ext uri="{91240B29-F687-4f45-9708-019B960494DF}">
-                  <a14:hiddenLine xmlns="" xmlns:a14="http://schemas.microsoft.com/office/drawing/2010/main" w="9525">
+                  <a14:hiddenLine xmlns:a14="http://schemas.microsoft.com/office/drawing/2010/main" xmlns="" w="9525">
                     <a:solidFill>
                       <a:srgbClr val="000000"/>
                     </a:solidFill>
@@ -10892,7 +10892,7 @@
               </a:ln>
               <a:extLst>
                 <a:ext uri="{91240B29-F687-4f45-9708-019B960494DF}">
-                  <a14:hiddenLine xmlns="" xmlns:a14="http://schemas.microsoft.com/office/drawing/2010/main" w="9525">
+                  <a14:hiddenLine xmlns:a14="http://schemas.microsoft.com/office/drawing/2010/main" xmlns="" w="9525">
                     <a:solidFill>
                       <a:srgbClr val="000000"/>
                     </a:solidFill>
@@ -10954,7 +10954,7 @@
               </a:ln>
               <a:extLst>
                 <a:ext uri="{91240B29-F687-4f45-9708-019B960494DF}">
-                  <a14:hiddenLine xmlns="" xmlns:a14="http://schemas.microsoft.com/office/drawing/2010/main" w="9525">
+                  <a14:hiddenLine xmlns:a14="http://schemas.microsoft.com/office/drawing/2010/main" xmlns="" w="9525">
                     <a:solidFill>
                       <a:srgbClr val="000000"/>
                     </a:solidFill>
@@ -11044,7 +11044,7 @@
               </a:ln>
               <a:extLst>
                 <a:ext uri="{91240B29-F687-4f45-9708-019B960494DF}">
-                  <a14:hiddenLine xmlns="" xmlns:a14="http://schemas.microsoft.com/office/drawing/2010/main" w="9525">
+                  <a14:hiddenLine xmlns:a14="http://schemas.microsoft.com/office/drawing/2010/main" xmlns="" w="9525">
                     <a:solidFill>
                       <a:srgbClr val="000000"/>
                     </a:solidFill>
@@ -11109,7 +11109,7 @@
               </a:ln>
               <a:extLst>
                 <a:ext uri="{91240B29-F687-4f45-9708-019B960494DF}">
-                  <a14:hiddenLine xmlns="" xmlns:a14="http://schemas.microsoft.com/office/drawing/2010/main" w="9525">
+                  <a14:hiddenLine xmlns:a14="http://schemas.microsoft.com/office/drawing/2010/main" xmlns="" w="9525">
                     <a:solidFill>
                       <a:srgbClr val="000000"/>
                     </a:solidFill>
@@ -11171,7 +11171,7 @@
               </a:ln>
               <a:extLst>
                 <a:ext uri="{91240B29-F687-4f45-9708-019B960494DF}">
-                  <a14:hiddenLine xmlns="" xmlns:a14="http://schemas.microsoft.com/office/drawing/2010/main" w="9525">
+                  <a14:hiddenLine xmlns:a14="http://schemas.microsoft.com/office/drawing/2010/main" xmlns="" w="9525">
                     <a:solidFill>
                       <a:srgbClr val="000000"/>
                     </a:solidFill>
@@ -11261,7 +11261,7 @@
               </a:ln>
               <a:extLst>
                 <a:ext uri="{91240B29-F687-4f45-9708-019B960494DF}">
-                  <a14:hiddenLine xmlns="" xmlns:a14="http://schemas.microsoft.com/office/drawing/2010/main" w="9525">
+                  <a14:hiddenLine xmlns:a14="http://schemas.microsoft.com/office/drawing/2010/main" xmlns="" w="9525">
                     <a:solidFill>
                       <a:srgbClr val="000000"/>
                     </a:solidFill>
@@ -11351,7 +11351,7 @@
               </a:ln>
               <a:extLst>
                 <a:ext uri="{91240B29-F687-4f45-9708-019B960494DF}">
-                  <a14:hiddenLine xmlns="" xmlns:a14="http://schemas.microsoft.com/office/drawing/2010/main" w="9525">
+                  <a14:hiddenLine xmlns:a14="http://schemas.microsoft.com/office/drawing/2010/main" xmlns="" w="9525">
                     <a:solidFill>
                       <a:srgbClr val="000000"/>
                     </a:solidFill>
@@ -11416,7 +11416,7 @@
               </a:ln>
               <a:extLst>
                 <a:ext uri="{91240B29-F687-4f45-9708-019B960494DF}">
-                  <a14:hiddenLine xmlns="" xmlns:a14="http://schemas.microsoft.com/office/drawing/2010/main" w="9525">
+                  <a14:hiddenLine xmlns:a14="http://schemas.microsoft.com/office/drawing/2010/main" xmlns="" w="9525">
                     <a:solidFill>
                       <a:srgbClr val="000000"/>
                     </a:solidFill>
@@ -11536,7 +11536,7 @@
               </a:ln>
               <a:extLst>
                 <a:ext uri="{91240B29-F687-4f45-9708-019B960494DF}">
-                  <a14:hiddenLine xmlns="" xmlns:a14="http://schemas.microsoft.com/office/drawing/2010/main" w="9525">
+                  <a14:hiddenLine xmlns:a14="http://schemas.microsoft.com/office/drawing/2010/main" xmlns="" w="9525">
                     <a:solidFill>
                       <a:srgbClr val="000000"/>
                     </a:solidFill>
@@ -11617,7 +11617,7 @@
               </a:ln>
               <a:extLst>
                 <a:ext uri="{91240B29-F687-4f45-9708-019B960494DF}">
-                  <a14:hiddenLine xmlns="" xmlns:a14="http://schemas.microsoft.com/office/drawing/2010/main" w="9525">
+                  <a14:hiddenLine xmlns:a14="http://schemas.microsoft.com/office/drawing/2010/main" xmlns="" w="9525">
                     <a:solidFill>
                       <a:srgbClr val="000000"/>
                     </a:solidFill>
@@ -11732,7 +11732,7 @@
               </a:ln>
               <a:extLst>
                 <a:ext uri="{91240B29-F687-4f45-9708-019B960494DF}">
-                  <a14:hiddenLine xmlns="" xmlns:a14="http://schemas.microsoft.com/office/drawing/2010/main" w="9525">
+                  <a14:hiddenLine xmlns:a14="http://schemas.microsoft.com/office/drawing/2010/main" xmlns="" w="9525">
                     <a:solidFill>
                       <a:srgbClr val="000000"/>
                     </a:solidFill>
@@ -11822,7 +11822,7 @@
               </a:ln>
               <a:extLst>
                 <a:ext uri="{91240B29-F687-4f45-9708-019B960494DF}">
-                  <a14:hiddenLine xmlns="" xmlns:a14="http://schemas.microsoft.com/office/drawing/2010/main" w="9525">
+                  <a14:hiddenLine xmlns:a14="http://schemas.microsoft.com/office/drawing/2010/main" xmlns="" w="9525">
                     <a:solidFill>
                       <a:srgbClr val="000000"/>
                     </a:solidFill>
@@ -11887,7 +11887,7 @@
               </a:ln>
               <a:extLst>
                 <a:ext uri="{91240B29-F687-4f45-9708-019B960494DF}">
-                  <a14:hiddenLine xmlns="" xmlns:a14="http://schemas.microsoft.com/office/drawing/2010/main" w="9525">
+                  <a14:hiddenLine xmlns:a14="http://schemas.microsoft.com/office/drawing/2010/main" xmlns="" w="9525">
                     <a:solidFill>
                       <a:srgbClr val="000000"/>
                     </a:solidFill>
@@ -11977,7 +11977,7 @@
               </a:ln>
               <a:extLst>
                 <a:ext uri="{91240B29-F687-4f45-9708-019B960494DF}">
-                  <a14:hiddenLine xmlns="" xmlns:a14="http://schemas.microsoft.com/office/drawing/2010/main" w="9525">
+                  <a14:hiddenLine xmlns:a14="http://schemas.microsoft.com/office/drawing/2010/main" xmlns="" w="9525">
                     <a:solidFill>
                       <a:srgbClr val="000000"/>
                     </a:solidFill>
@@ -12045,7 +12045,7 @@
               </a:ln>
               <a:extLst>
                 <a:ext uri="{91240B29-F687-4f45-9708-019B960494DF}">
-                  <a14:hiddenLine xmlns="" xmlns:a14="http://schemas.microsoft.com/office/drawing/2010/main" w="9525">
+                  <a14:hiddenLine xmlns:a14="http://schemas.microsoft.com/office/drawing/2010/main" xmlns="" w="9525">
                     <a:solidFill>
                       <a:srgbClr val="000000"/>
                     </a:solidFill>
@@ -12135,7 +12135,7 @@
               </a:ln>
               <a:extLst>
                 <a:ext uri="{91240B29-F687-4f45-9708-019B960494DF}">
-                  <a14:hiddenLine xmlns="" xmlns:a14="http://schemas.microsoft.com/office/drawing/2010/main" w="9525">
+                  <a14:hiddenLine xmlns:a14="http://schemas.microsoft.com/office/drawing/2010/main" xmlns="" w="9525">
                     <a:solidFill>
                       <a:srgbClr val="000000"/>
                     </a:solidFill>
@@ -12203,7 +12203,7 @@
               </a:ln>
               <a:extLst>
                 <a:ext uri="{91240B29-F687-4f45-9708-019B960494DF}">
-                  <a14:hiddenLine xmlns="" xmlns:a14="http://schemas.microsoft.com/office/drawing/2010/main" w="9525">
+                  <a14:hiddenLine xmlns:a14="http://schemas.microsoft.com/office/drawing/2010/main" xmlns="" w="9525">
                     <a:solidFill>
                       <a:srgbClr val="000000"/>
                     </a:solidFill>
@@ -12293,7 +12293,7 @@
               </a:ln>
               <a:extLst>
                 <a:ext uri="{91240B29-F687-4f45-9708-019B960494DF}">
-                  <a14:hiddenLine xmlns="" xmlns:a14="http://schemas.microsoft.com/office/drawing/2010/main" w="9525">
+                  <a14:hiddenLine xmlns:a14="http://schemas.microsoft.com/office/drawing/2010/main" xmlns="" w="9525">
                     <a:solidFill>
                       <a:srgbClr val="000000"/>
                     </a:solidFill>
@@ -12327,7 +12327,7 @@
               </a:ln>
               <a:extLst>
                 <a:ext uri="{91240B29-F687-4f45-9708-019B960494DF}">
-                  <a14:hiddenLine xmlns="" xmlns:a14="http://schemas.microsoft.com/office/drawing/2010/main" w="9525">
+                  <a14:hiddenLine xmlns:a14="http://schemas.microsoft.com/office/drawing/2010/main" xmlns="" w="9525">
                     <a:solidFill>
                       <a:srgbClr val="000000"/>
                     </a:solidFill>
@@ -13398,7 +13398,7 @@
         </p:spPr>
         <p:txBody>
           <a:bodyPr>
-            <a:normAutofit lnSpcReduction="10000"/>
+            <a:normAutofit fontScale="92500" lnSpcReduction="10000"/>
           </a:bodyPr>
           <a:lstStyle/>
           <a:p>
@@ -13436,7 +13436,27 @@
                 <a:latin typeface="Arial" panose="020B0604020202020204" pitchFamily="34" charset="0"/>
                 <a:cs typeface="Arial" panose="020B0604020202020204" pitchFamily="34" charset="0"/>
               </a:rPr>
-              <a:t>Lecture recordings from last Fall are posted on Panopto on Canvas through Module 1 (keep in mind it was called Module 2 back then)</a:t>
+              <a:t>Lecture recordings from last Fall are posted on Panopto on Canvas</a:t>
+            </a:r>
+          </a:p>
+          <a:p>
+            <a:pPr lvl="1"/>
+            <a:r>
+              <a:rPr lang="en-US" dirty="0">
+                <a:latin typeface="Arial" panose="020B0604020202020204" pitchFamily="34" charset="0"/>
+                <a:cs typeface="Arial" panose="020B0604020202020204" pitchFamily="34" charset="0"/>
+              </a:rPr>
+              <a:t>I posted ALL the videos FYI</a:t>
+            </a:r>
+          </a:p>
+          <a:p>
+            <a:pPr lvl="1"/>
+            <a:r>
+              <a:rPr lang="en-US" dirty="0">
+                <a:latin typeface="Arial" panose="020B0604020202020204" pitchFamily="34" charset="0"/>
+                <a:cs typeface="Arial" panose="020B0604020202020204" pitchFamily="34" charset="0"/>
+              </a:rPr>
+              <a:t>For this module, you watch from oldest through “Pump. Lemma + Begin Mod 3”</a:t>
             </a:r>
           </a:p>
           <a:p>

--- a/slides/00-DailyAnnouncements.pptx
+++ b/slides/00-DailyAnnouncements.pptx
@@ -5,14 +5,16 @@
     <p:sldMasterId id="2147484006" r:id="rId1"/>
   </p:sldMasterIdLst>
   <p:notesMasterIdLst>
-    <p:notesMasterId r:id="rId7"/>
+    <p:notesMasterId r:id="rId9"/>
   </p:notesMasterIdLst>
   <p:sldIdLst>
     <p:sldId id="256" r:id="rId2"/>
     <p:sldId id="505" r:id="rId3"/>
     <p:sldId id="516" r:id="rId4"/>
     <p:sldId id="517" r:id="rId5"/>
-    <p:sldId id="515" r:id="rId6"/>
+    <p:sldId id="518" r:id="rId6"/>
+    <p:sldId id="519" r:id="rId7"/>
+    <p:sldId id="515" r:id="rId8"/>
   </p:sldIdLst>
   <p:sldSz cx="12192000" cy="6858000"/>
   <p:notesSz cx="6858000" cy="9144000"/>
@@ -201,7 +203,7 @@
           <a:p>
             <a:fld id="{C5B45307-6ED4-B142-BD64-10F739779302}" type="datetimeFigureOut">
               <a:rPr lang="en-US" smtClean="0"/>
-              <a:t>7/16/26</a:t>
+              <a:t>7/17/26</a:t>
             </a:fld>
             <a:endParaRPr lang="en-US"/>
           </a:p>
@@ -609,7 +611,7 @@
           <a:noFill/>
           <a:extLst>
             <a:ext uri="{909E8E84-426E-40dd-AFC4-6F175D3DCCD1}">
-              <a14:hiddenFill xmlns:a14="http://schemas.microsoft.com/office/drawing/2010/main" xmlns="">
+              <a14:hiddenFill xmlns="" xmlns:a14="http://schemas.microsoft.com/office/drawing/2010/main">
                 <a:solidFill>
                   <a:srgbClr val="FFFFFF"/>
                 </a:solidFill>
@@ -668,7 +670,7 @@
             </a:ln>
             <a:extLst>
               <a:ext uri="{91240B29-F687-4f45-9708-019B960494DF}">
-                <a14:hiddenLine xmlns:a14="http://schemas.microsoft.com/office/drawing/2010/main" xmlns="" w="9525">
+                <a14:hiddenLine xmlns="" xmlns:a14="http://schemas.microsoft.com/office/drawing/2010/main" w="9525">
                   <a:solidFill>
                     <a:srgbClr val="000000"/>
                   </a:solidFill>
@@ -758,7 +760,7 @@
             </a:ln>
             <a:extLst>
               <a:ext uri="{91240B29-F687-4f45-9708-019B960494DF}">
-                <a14:hiddenLine xmlns:a14="http://schemas.microsoft.com/office/drawing/2010/main" xmlns="" w="9525">
+                <a14:hiddenLine xmlns="" xmlns:a14="http://schemas.microsoft.com/office/drawing/2010/main" w="9525">
                   <a:solidFill>
                     <a:srgbClr val="000000"/>
                   </a:solidFill>
@@ -848,7 +850,7 @@
             </a:ln>
             <a:extLst>
               <a:ext uri="{91240B29-F687-4f45-9708-019B960494DF}">
-                <a14:hiddenLine xmlns:a14="http://schemas.microsoft.com/office/drawing/2010/main" xmlns="" w="9525">
+                <a14:hiddenLine xmlns="" xmlns:a14="http://schemas.microsoft.com/office/drawing/2010/main" w="9525">
                   <a:solidFill>
                     <a:srgbClr val="000000"/>
                   </a:solidFill>
@@ -882,7 +884,7 @@
             </a:ln>
             <a:extLst>
               <a:ext uri="{91240B29-F687-4f45-9708-019B960494DF}">
-                <a14:hiddenLine xmlns:a14="http://schemas.microsoft.com/office/drawing/2010/main" xmlns="" w="9525">
+                <a14:hiddenLine xmlns="" xmlns:a14="http://schemas.microsoft.com/office/drawing/2010/main" w="9525">
                   <a:solidFill>
                     <a:srgbClr val="000000"/>
                   </a:solidFill>
@@ -972,7 +974,7 @@
             </a:ln>
             <a:extLst>
               <a:ext uri="{91240B29-F687-4f45-9708-019B960494DF}">
-                <a14:hiddenLine xmlns:a14="http://schemas.microsoft.com/office/drawing/2010/main" xmlns="" w="9525">
+                <a14:hiddenLine xmlns="" xmlns:a14="http://schemas.microsoft.com/office/drawing/2010/main" w="9525">
                   <a:solidFill>
                     <a:srgbClr val="000000"/>
                   </a:solidFill>
@@ -1034,7 +1036,7 @@
             </a:ln>
             <a:extLst>
               <a:ext uri="{91240B29-F687-4f45-9708-019B960494DF}">
-                <a14:hiddenLine xmlns:a14="http://schemas.microsoft.com/office/drawing/2010/main" xmlns="" w="9525">
+                <a14:hiddenLine xmlns="" xmlns:a14="http://schemas.microsoft.com/office/drawing/2010/main" w="9525">
                   <a:solidFill>
                     <a:srgbClr val="000000"/>
                   </a:solidFill>
@@ -1096,7 +1098,7 @@
             </a:ln>
             <a:extLst>
               <a:ext uri="{91240B29-F687-4f45-9708-019B960494DF}">
-                <a14:hiddenLine xmlns:a14="http://schemas.microsoft.com/office/drawing/2010/main" xmlns="" w="9525">
+                <a14:hiddenLine xmlns="" xmlns:a14="http://schemas.microsoft.com/office/drawing/2010/main" w="9525">
                   <a:solidFill>
                     <a:srgbClr val="000000"/>
                   </a:solidFill>
@@ -1186,7 +1188,7 @@
             </a:ln>
             <a:extLst>
               <a:ext uri="{91240B29-F687-4f45-9708-019B960494DF}">
-                <a14:hiddenLine xmlns:a14="http://schemas.microsoft.com/office/drawing/2010/main" xmlns="" w="9525">
+                <a14:hiddenLine xmlns="" xmlns:a14="http://schemas.microsoft.com/office/drawing/2010/main" w="9525">
                   <a:solidFill>
                     <a:srgbClr val="000000"/>
                   </a:solidFill>
@@ -1248,7 +1250,7 @@
             </a:ln>
             <a:extLst>
               <a:ext uri="{91240B29-F687-4f45-9708-019B960494DF}">
-                <a14:hiddenLine xmlns:a14="http://schemas.microsoft.com/office/drawing/2010/main" xmlns="" w="9525">
+                <a14:hiddenLine xmlns="" xmlns:a14="http://schemas.microsoft.com/office/drawing/2010/main" w="9525">
                   <a:solidFill>
                     <a:srgbClr val="000000"/>
                   </a:solidFill>
@@ -1310,7 +1312,7 @@
             </a:ln>
             <a:extLst>
               <a:ext uri="{91240B29-F687-4f45-9708-019B960494DF}">
-                <a14:hiddenLine xmlns:a14="http://schemas.microsoft.com/office/drawing/2010/main" xmlns="" w="9525">
+                <a14:hiddenLine xmlns="" xmlns:a14="http://schemas.microsoft.com/office/drawing/2010/main" w="9525">
                   <a:solidFill>
                     <a:srgbClr val="000000"/>
                   </a:solidFill>
@@ -1400,7 +1402,7 @@
             </a:ln>
             <a:extLst>
               <a:ext uri="{91240B29-F687-4f45-9708-019B960494DF}">
-                <a14:hiddenLine xmlns:a14="http://schemas.microsoft.com/office/drawing/2010/main" xmlns="" w="9525">
+                <a14:hiddenLine xmlns="" xmlns:a14="http://schemas.microsoft.com/office/drawing/2010/main" w="9525">
                   <a:solidFill>
                     <a:srgbClr val="000000"/>
                   </a:solidFill>
@@ -1490,7 +1492,7 @@
             </a:ln>
             <a:extLst>
               <a:ext uri="{91240B29-F687-4f45-9708-019B960494DF}">
-                <a14:hiddenLine xmlns:a14="http://schemas.microsoft.com/office/drawing/2010/main" xmlns="" w="9525">
+                <a14:hiddenLine xmlns="" xmlns:a14="http://schemas.microsoft.com/office/drawing/2010/main" w="9525">
                   <a:solidFill>
                     <a:srgbClr val="000000"/>
                   </a:solidFill>
@@ -1552,7 +1554,7 @@
             </a:ln>
             <a:extLst>
               <a:ext uri="{91240B29-F687-4f45-9708-019B960494DF}">
-                <a14:hiddenLine xmlns:a14="http://schemas.microsoft.com/office/drawing/2010/main" xmlns="" w="9525">
+                <a14:hiddenLine xmlns="" xmlns:a14="http://schemas.microsoft.com/office/drawing/2010/main" w="9525">
                   <a:solidFill>
                     <a:srgbClr val="000000"/>
                   </a:solidFill>
@@ -1662,7 +1664,7 @@
             </a:ln>
             <a:extLst>
               <a:ext uri="{91240B29-F687-4f45-9708-019B960494DF}">
-                <a14:hiddenLine xmlns:a14="http://schemas.microsoft.com/office/drawing/2010/main" xmlns="" w="9525">
+                <a14:hiddenLine xmlns="" xmlns:a14="http://schemas.microsoft.com/office/drawing/2010/main" w="9525">
                   <a:solidFill>
                     <a:srgbClr val="000000"/>
                   </a:solidFill>
@@ -1724,7 +1726,7 @@
             </a:ln>
             <a:extLst>
               <a:ext uri="{91240B29-F687-4f45-9708-019B960494DF}">
-                <a14:hiddenLine xmlns:a14="http://schemas.microsoft.com/office/drawing/2010/main" xmlns="" w="9525">
+                <a14:hiddenLine xmlns="" xmlns:a14="http://schemas.microsoft.com/office/drawing/2010/main" w="9525">
                   <a:solidFill>
                     <a:srgbClr val="000000"/>
                   </a:solidFill>
@@ -1814,7 +1816,7 @@
             </a:ln>
             <a:extLst>
               <a:ext uri="{91240B29-F687-4f45-9708-019B960494DF}">
-                <a14:hiddenLine xmlns:a14="http://schemas.microsoft.com/office/drawing/2010/main" xmlns="" w="9525">
+                <a14:hiddenLine xmlns="" xmlns:a14="http://schemas.microsoft.com/office/drawing/2010/main" w="9525">
                   <a:solidFill>
                     <a:srgbClr val="000000"/>
                   </a:solidFill>
@@ -1904,7 +1906,7 @@
             </a:ln>
             <a:extLst>
               <a:ext uri="{91240B29-F687-4f45-9708-019B960494DF}">
-                <a14:hiddenLine xmlns:a14="http://schemas.microsoft.com/office/drawing/2010/main" xmlns="" w="9525">
+                <a14:hiddenLine xmlns="" xmlns:a14="http://schemas.microsoft.com/office/drawing/2010/main" w="9525">
                   <a:solidFill>
                     <a:srgbClr val="000000"/>
                   </a:solidFill>
@@ -1966,7 +1968,7 @@
             </a:ln>
             <a:extLst>
               <a:ext uri="{91240B29-F687-4f45-9708-019B960494DF}">
-                <a14:hiddenLine xmlns:a14="http://schemas.microsoft.com/office/drawing/2010/main" xmlns="" w="9525">
+                <a14:hiddenLine xmlns="" xmlns:a14="http://schemas.microsoft.com/office/drawing/2010/main" w="9525">
                   <a:solidFill>
                     <a:srgbClr val="000000"/>
                   </a:solidFill>
@@ -2056,7 +2058,7 @@
             </a:ln>
             <a:extLst>
               <a:ext uri="{91240B29-F687-4f45-9708-019B960494DF}">
-                <a14:hiddenLine xmlns:a14="http://schemas.microsoft.com/office/drawing/2010/main" xmlns="" w="9525">
+                <a14:hiddenLine xmlns="" xmlns:a14="http://schemas.microsoft.com/office/drawing/2010/main" w="9525">
                   <a:solidFill>
                     <a:srgbClr val="000000"/>
                   </a:solidFill>
@@ -2146,7 +2148,7 @@
             </a:ln>
             <a:extLst>
               <a:ext uri="{91240B29-F687-4f45-9708-019B960494DF}">
-                <a14:hiddenLine xmlns:a14="http://schemas.microsoft.com/office/drawing/2010/main" xmlns="" w="9525">
+                <a14:hiddenLine xmlns="" xmlns:a14="http://schemas.microsoft.com/office/drawing/2010/main" w="9525">
                   <a:solidFill>
                     <a:srgbClr val="000000"/>
                   </a:solidFill>
@@ -2202,7 +2204,7 @@
             </a:ln>
             <a:extLst>
               <a:ext uri="{91240B29-F687-4f45-9708-019B960494DF}">
-                <a14:hiddenLine xmlns:a14="http://schemas.microsoft.com/office/drawing/2010/main" xmlns="" w="9525">
+                <a14:hiddenLine xmlns="" xmlns:a14="http://schemas.microsoft.com/office/drawing/2010/main" w="9525">
                   <a:solidFill>
                     <a:srgbClr val="000000"/>
                   </a:solidFill>
@@ -2292,7 +2294,7 @@
             </a:ln>
             <a:extLst>
               <a:ext uri="{91240B29-F687-4f45-9708-019B960494DF}">
-                <a14:hiddenLine xmlns:a14="http://schemas.microsoft.com/office/drawing/2010/main" xmlns="" w="9525">
+                <a14:hiddenLine xmlns="" xmlns:a14="http://schemas.microsoft.com/office/drawing/2010/main" w="9525">
                   <a:solidFill>
                     <a:srgbClr val="000000"/>
                   </a:solidFill>
@@ -2348,7 +2350,7 @@
             </a:ln>
             <a:extLst>
               <a:ext uri="{91240B29-F687-4f45-9708-019B960494DF}">
-                <a14:hiddenLine xmlns:a14="http://schemas.microsoft.com/office/drawing/2010/main" xmlns="" w="9525">
+                <a14:hiddenLine xmlns="" xmlns:a14="http://schemas.microsoft.com/office/drawing/2010/main" w="9525">
                   <a:solidFill>
                     <a:srgbClr val="000000"/>
                   </a:solidFill>
@@ -2438,7 +2440,7 @@
             </a:ln>
             <a:extLst>
               <a:ext uri="{91240B29-F687-4f45-9708-019B960494DF}">
-                <a14:hiddenLine xmlns:a14="http://schemas.microsoft.com/office/drawing/2010/main" xmlns="" w="9525">
+                <a14:hiddenLine xmlns="" xmlns:a14="http://schemas.microsoft.com/office/drawing/2010/main" w="9525">
                   <a:solidFill>
                     <a:srgbClr val="000000"/>
                   </a:solidFill>
@@ -2506,7 +2508,7 @@
             </a:ln>
             <a:extLst>
               <a:ext uri="{91240B29-F687-4f45-9708-019B960494DF}">
-                <a14:hiddenLine xmlns:a14="http://schemas.microsoft.com/office/drawing/2010/main" xmlns="" w="9525">
+                <a14:hiddenLine xmlns="" xmlns:a14="http://schemas.microsoft.com/office/drawing/2010/main" w="9525">
                   <a:solidFill>
                     <a:srgbClr val="000000"/>
                   </a:solidFill>
@@ -2596,7 +2598,7 @@
             </a:ln>
             <a:extLst>
               <a:ext uri="{91240B29-F687-4f45-9708-019B960494DF}">
-                <a14:hiddenLine xmlns:a14="http://schemas.microsoft.com/office/drawing/2010/main" xmlns="" w="9525">
+                <a14:hiddenLine xmlns="" xmlns:a14="http://schemas.microsoft.com/office/drawing/2010/main" w="9525">
                   <a:solidFill>
                     <a:srgbClr val="000000"/>
                   </a:solidFill>
@@ -2664,7 +2666,7 @@
             </a:ln>
             <a:extLst>
               <a:ext uri="{91240B29-F687-4f45-9708-019B960494DF}">
-                <a14:hiddenLine xmlns:a14="http://schemas.microsoft.com/office/drawing/2010/main" xmlns="" w="9525">
+                <a14:hiddenLine xmlns="" xmlns:a14="http://schemas.microsoft.com/office/drawing/2010/main" w="9525">
                   <a:solidFill>
                     <a:srgbClr val="000000"/>
                   </a:solidFill>
@@ -2754,7 +2756,7 @@
             </a:ln>
             <a:extLst>
               <a:ext uri="{91240B29-F687-4f45-9708-019B960494DF}">
-                <a14:hiddenLine xmlns:a14="http://schemas.microsoft.com/office/drawing/2010/main" xmlns="" w="9525">
+                <a14:hiddenLine xmlns="" xmlns:a14="http://schemas.microsoft.com/office/drawing/2010/main" w="9525">
                   <a:solidFill>
                     <a:srgbClr val="000000"/>
                   </a:solidFill>
@@ -2788,7 +2790,7 @@
             </a:ln>
             <a:extLst>
               <a:ext uri="{91240B29-F687-4f45-9708-019B960494DF}">
-                <a14:hiddenLine xmlns:a14="http://schemas.microsoft.com/office/drawing/2010/main" xmlns="" w="9525">
+                <a14:hiddenLine xmlns="" xmlns:a14="http://schemas.microsoft.com/office/drawing/2010/main" w="9525">
                   <a:solidFill>
                     <a:srgbClr val="000000"/>
                   </a:solidFill>
@@ -2878,7 +2880,7 @@
             </a:ln>
             <a:extLst>
               <a:ext uri="{91240B29-F687-4f45-9708-019B960494DF}">
-                <a14:hiddenLine xmlns:a14="http://schemas.microsoft.com/office/drawing/2010/main" xmlns="" w="9525">
+                <a14:hiddenLine xmlns="" xmlns:a14="http://schemas.microsoft.com/office/drawing/2010/main" w="9525">
                   <a:solidFill>
                     <a:srgbClr val="000000"/>
                   </a:solidFill>
@@ -2940,7 +2942,7 @@
             </a:ln>
             <a:extLst>
               <a:ext uri="{91240B29-F687-4f45-9708-019B960494DF}">
-                <a14:hiddenLine xmlns:a14="http://schemas.microsoft.com/office/drawing/2010/main" xmlns="" w="9525">
+                <a14:hiddenLine xmlns="" xmlns:a14="http://schemas.microsoft.com/office/drawing/2010/main" w="9525">
                   <a:solidFill>
                     <a:srgbClr val="000000"/>
                   </a:solidFill>
@@ -3002,7 +3004,7 @@
             </a:ln>
             <a:extLst>
               <a:ext uri="{91240B29-F687-4f45-9708-019B960494DF}">
-                <a14:hiddenLine xmlns:a14="http://schemas.microsoft.com/office/drawing/2010/main" xmlns="" w="9525">
+                <a14:hiddenLine xmlns="" xmlns:a14="http://schemas.microsoft.com/office/drawing/2010/main" w="9525">
                   <a:solidFill>
                     <a:srgbClr val="000000"/>
                   </a:solidFill>
@@ -3092,7 +3094,7 @@
             </a:ln>
             <a:extLst>
               <a:ext uri="{91240B29-F687-4f45-9708-019B960494DF}">
-                <a14:hiddenLine xmlns:a14="http://schemas.microsoft.com/office/drawing/2010/main" xmlns="" w="9525">
+                <a14:hiddenLine xmlns="" xmlns:a14="http://schemas.microsoft.com/office/drawing/2010/main" w="9525">
                   <a:solidFill>
                     <a:srgbClr val="000000"/>
                   </a:solidFill>
@@ -3160,7 +3162,7 @@
             </a:ln>
             <a:extLst>
               <a:ext uri="{91240B29-F687-4f45-9708-019B960494DF}">
-                <a14:hiddenLine xmlns:a14="http://schemas.microsoft.com/office/drawing/2010/main" xmlns="" w="9525">
+                <a14:hiddenLine xmlns="" xmlns:a14="http://schemas.microsoft.com/office/drawing/2010/main" w="9525">
                   <a:solidFill>
                     <a:srgbClr val="000000"/>
                   </a:solidFill>
@@ -3222,7 +3224,7 @@
             </a:ln>
             <a:extLst>
               <a:ext uri="{91240B29-F687-4f45-9708-019B960494DF}">
-                <a14:hiddenLine xmlns:a14="http://schemas.microsoft.com/office/drawing/2010/main" xmlns="" w="9525">
+                <a14:hiddenLine xmlns="" xmlns:a14="http://schemas.microsoft.com/office/drawing/2010/main" w="9525">
                   <a:solidFill>
                     <a:srgbClr val="000000"/>
                   </a:solidFill>
@@ -3312,7 +3314,7 @@
             </a:ln>
             <a:extLst>
               <a:ext uri="{91240B29-F687-4f45-9708-019B960494DF}">
-                <a14:hiddenLine xmlns:a14="http://schemas.microsoft.com/office/drawing/2010/main" xmlns="" w="9525">
+                <a14:hiddenLine xmlns="" xmlns:a14="http://schemas.microsoft.com/office/drawing/2010/main" w="9525">
                   <a:solidFill>
                     <a:srgbClr val="000000"/>
                   </a:solidFill>
@@ -3374,7 +3376,7 @@
             </a:ln>
             <a:extLst>
               <a:ext uri="{91240B29-F687-4f45-9708-019B960494DF}">
-                <a14:hiddenLine xmlns:a14="http://schemas.microsoft.com/office/drawing/2010/main" xmlns="" w="9525">
+                <a14:hiddenLine xmlns="" xmlns:a14="http://schemas.microsoft.com/office/drawing/2010/main" w="9525">
                   <a:solidFill>
                     <a:srgbClr val="000000"/>
                   </a:solidFill>
@@ -3464,7 +3466,7 @@
             </a:ln>
             <a:extLst>
               <a:ext uri="{91240B29-F687-4f45-9708-019B960494DF}">
-                <a14:hiddenLine xmlns:a14="http://schemas.microsoft.com/office/drawing/2010/main" xmlns="" w="9525">
+                <a14:hiddenLine xmlns="" xmlns:a14="http://schemas.microsoft.com/office/drawing/2010/main" w="9525">
                   <a:solidFill>
                     <a:srgbClr val="000000"/>
                   </a:solidFill>
@@ -3526,7 +3528,7 @@
             </a:ln>
             <a:extLst>
               <a:ext uri="{91240B29-F687-4f45-9708-019B960494DF}">
-                <a14:hiddenLine xmlns:a14="http://schemas.microsoft.com/office/drawing/2010/main" xmlns="" w="9525">
+                <a14:hiddenLine xmlns="" xmlns:a14="http://schemas.microsoft.com/office/drawing/2010/main" w="9525">
                   <a:solidFill>
                     <a:srgbClr val="000000"/>
                   </a:solidFill>
@@ -3616,7 +3618,7 @@
             </a:ln>
             <a:extLst>
               <a:ext uri="{91240B29-F687-4f45-9708-019B960494DF}">
-                <a14:hiddenLine xmlns:a14="http://schemas.microsoft.com/office/drawing/2010/main" xmlns="" w="9525">
+                <a14:hiddenLine xmlns="" xmlns:a14="http://schemas.microsoft.com/office/drawing/2010/main" w="9525">
                   <a:solidFill>
                     <a:srgbClr val="000000"/>
                   </a:solidFill>
@@ -3650,7 +3652,7 @@
             </a:ln>
             <a:extLst>
               <a:ext uri="{91240B29-F687-4f45-9708-019B960494DF}">
-                <a14:hiddenLine xmlns:a14="http://schemas.microsoft.com/office/drawing/2010/main" xmlns="" w="9525">
+                <a14:hiddenLine xmlns="" xmlns:a14="http://schemas.microsoft.com/office/drawing/2010/main" w="9525">
                   <a:solidFill>
                     <a:srgbClr val="000000"/>
                   </a:solidFill>
@@ -3715,7 +3717,7 @@
             </a:ln>
             <a:extLst>
               <a:ext uri="{91240B29-F687-4f45-9708-019B960494DF}">
-                <a14:hiddenLine xmlns:a14="http://schemas.microsoft.com/office/drawing/2010/main" xmlns="" w="9525">
+                <a14:hiddenLine xmlns="" xmlns:a14="http://schemas.microsoft.com/office/drawing/2010/main" w="9525">
                   <a:solidFill>
                     <a:srgbClr val="000000"/>
                   </a:solidFill>
@@ -3805,7 +3807,7 @@
             </a:ln>
             <a:extLst>
               <a:ext uri="{91240B29-F687-4f45-9708-019B960494DF}">
-                <a14:hiddenLine xmlns:a14="http://schemas.microsoft.com/office/drawing/2010/main" xmlns="" w="9525">
+                <a14:hiddenLine xmlns="" xmlns:a14="http://schemas.microsoft.com/office/drawing/2010/main" w="9525">
                   <a:solidFill>
                     <a:srgbClr val="000000"/>
                   </a:solidFill>
@@ -3867,7 +3869,7 @@
             </a:ln>
             <a:extLst>
               <a:ext uri="{91240B29-F687-4f45-9708-019B960494DF}">
-                <a14:hiddenLine xmlns:a14="http://schemas.microsoft.com/office/drawing/2010/main" xmlns="" w="9525">
+                <a14:hiddenLine xmlns="" xmlns:a14="http://schemas.microsoft.com/office/drawing/2010/main" w="9525">
                   <a:solidFill>
                     <a:srgbClr val="000000"/>
                   </a:solidFill>
@@ -3957,7 +3959,7 @@
             </a:ln>
             <a:extLst>
               <a:ext uri="{91240B29-F687-4f45-9708-019B960494DF}">
-                <a14:hiddenLine xmlns:a14="http://schemas.microsoft.com/office/drawing/2010/main" xmlns="" w="9525">
+                <a14:hiddenLine xmlns="" xmlns:a14="http://schemas.microsoft.com/office/drawing/2010/main" w="9525">
                   <a:solidFill>
                     <a:srgbClr val="000000"/>
                   </a:solidFill>
@@ -4047,7 +4049,7 @@
             </a:ln>
             <a:extLst>
               <a:ext uri="{91240B29-F687-4f45-9708-019B960494DF}">
-                <a14:hiddenLine xmlns:a14="http://schemas.microsoft.com/office/drawing/2010/main" xmlns="" w="9525">
+                <a14:hiddenLine xmlns="" xmlns:a14="http://schemas.microsoft.com/office/drawing/2010/main" w="9525">
                   <a:solidFill>
                     <a:srgbClr val="000000"/>
                   </a:solidFill>
@@ -4112,7 +4114,7 @@
             </a:ln>
             <a:extLst>
               <a:ext uri="{91240B29-F687-4f45-9708-019B960494DF}">
-                <a14:hiddenLine xmlns:a14="http://schemas.microsoft.com/office/drawing/2010/main" xmlns="" w="9525">
+                <a14:hiddenLine xmlns="" xmlns:a14="http://schemas.microsoft.com/office/drawing/2010/main" w="9525">
                   <a:solidFill>
                     <a:srgbClr val="000000"/>
                   </a:solidFill>
@@ -4174,7 +4176,7 @@
             </a:ln>
             <a:extLst>
               <a:ext uri="{91240B29-F687-4f45-9708-019B960494DF}">
-                <a14:hiddenLine xmlns:a14="http://schemas.microsoft.com/office/drawing/2010/main" xmlns="" w="9525">
+                <a14:hiddenLine xmlns="" xmlns:a14="http://schemas.microsoft.com/office/drawing/2010/main" w="9525">
                   <a:solidFill>
                     <a:srgbClr val="000000"/>
                   </a:solidFill>
@@ -4264,7 +4266,7 @@
             </a:ln>
             <a:extLst>
               <a:ext uri="{91240B29-F687-4f45-9708-019B960494DF}">
-                <a14:hiddenLine xmlns:a14="http://schemas.microsoft.com/office/drawing/2010/main" xmlns="" w="9525">
+                <a14:hiddenLine xmlns="" xmlns:a14="http://schemas.microsoft.com/office/drawing/2010/main" w="9525">
                   <a:solidFill>
                     <a:srgbClr val="000000"/>
                   </a:solidFill>
@@ -4354,7 +4356,7 @@
             </a:ln>
             <a:extLst>
               <a:ext uri="{91240B29-F687-4f45-9708-019B960494DF}">
-                <a14:hiddenLine xmlns:a14="http://schemas.microsoft.com/office/drawing/2010/main" xmlns="" w="9525">
+                <a14:hiddenLine xmlns="" xmlns:a14="http://schemas.microsoft.com/office/drawing/2010/main" w="9525">
                   <a:solidFill>
                     <a:srgbClr val="000000"/>
                   </a:solidFill>
@@ -4416,7 +4418,7 @@
             </a:ln>
             <a:extLst>
               <a:ext uri="{91240B29-F687-4f45-9708-019B960494DF}">
-                <a14:hiddenLine xmlns:a14="http://schemas.microsoft.com/office/drawing/2010/main" xmlns="" w="9525">
+                <a14:hiddenLine xmlns="" xmlns:a14="http://schemas.microsoft.com/office/drawing/2010/main" w="9525">
                   <a:solidFill>
                     <a:srgbClr val="000000"/>
                   </a:solidFill>
@@ -4536,7 +4538,7 @@
             </a:ln>
             <a:extLst>
               <a:ext uri="{91240B29-F687-4f45-9708-019B960494DF}">
-                <a14:hiddenLine xmlns:a14="http://schemas.microsoft.com/office/drawing/2010/main" xmlns="" w="9525">
+                <a14:hiddenLine xmlns="" xmlns:a14="http://schemas.microsoft.com/office/drawing/2010/main" w="9525">
                   <a:solidFill>
                     <a:srgbClr val="000000"/>
                   </a:solidFill>
@@ -4604,7 +4606,7 @@
             </a:ln>
             <a:extLst>
               <a:ext uri="{91240B29-F687-4f45-9708-019B960494DF}">
-                <a14:hiddenLine xmlns:a14="http://schemas.microsoft.com/office/drawing/2010/main" xmlns="" w="9525">
+                <a14:hiddenLine xmlns="" xmlns:a14="http://schemas.microsoft.com/office/drawing/2010/main" w="9525">
                   <a:solidFill>
                     <a:srgbClr val="000000"/>
                   </a:solidFill>
@@ -4694,7 +4696,7 @@
             </a:ln>
             <a:extLst>
               <a:ext uri="{91240B29-F687-4f45-9708-019B960494DF}">
-                <a14:hiddenLine xmlns:a14="http://schemas.microsoft.com/office/drawing/2010/main" xmlns="" w="9525">
+                <a14:hiddenLine xmlns="" xmlns:a14="http://schemas.microsoft.com/office/drawing/2010/main" w="9525">
                   <a:solidFill>
                     <a:srgbClr val="000000"/>
                   </a:solidFill>
@@ -4834,7 +4836,7 @@
           <a:p>
             <a:fld id="{4313F670-7F9A-774D-B73D-573401E44297}" type="datetime1">
               <a:rPr lang="en-US" smtClean="0"/>
-              <a:t>7/16/26</a:t>
+              <a:t>7/17/26</a:t>
             </a:fld>
             <a:endParaRPr lang="en-US"/>
           </a:p>
@@ -5101,7 +5103,7 @@
           <a:p>
             <a:fld id="{446F9669-A8A7-2D40-9D01-B35FC337AA30}" type="datetime1">
               <a:rPr lang="en-US" smtClean="0"/>
-              <a:t>7/16/26</a:t>
+              <a:t>7/17/26</a:t>
             </a:fld>
             <a:endParaRPr lang="en-US"/>
           </a:p>
@@ -5297,7 +5299,7 @@
           <a:p>
             <a:fld id="{FA76CF18-F41B-6B48-B3E5-599E9795C2C3}" type="datetime1">
               <a:rPr lang="en-US" smtClean="0"/>
-              <a:t>7/16/26</a:t>
+              <a:t>7/17/26</a:t>
             </a:fld>
             <a:endParaRPr lang="en-US"/>
           </a:p>
@@ -5560,7 +5562,7 @@
           <a:p>
             <a:fld id="{B9654854-6457-164F-A077-6B3035079B82}" type="datetime1">
               <a:rPr lang="en-US" smtClean="0"/>
-              <a:t>7/16/26</a:t>
+              <a:t>7/17/26</a:t>
             </a:fld>
             <a:endParaRPr lang="en-US"/>
           </a:p>
@@ -5994,7 +5996,7 @@
           <a:p>
             <a:fld id="{CE3DBFD7-E611-8C40-AC73-0C29FF63F0CD}" type="datetime1">
               <a:rPr lang="en-US" smtClean="0"/>
-              <a:t>7/16/26</a:t>
+              <a:t>7/17/26</a:t>
             </a:fld>
             <a:endParaRPr lang="en-US"/>
           </a:p>
@@ -6540,7 +6542,7 @@
           <a:p>
             <a:fld id="{C8B63B06-0493-2840-9F37-30C9412BBF17}" type="datetime1">
               <a:rPr lang="en-US" smtClean="0"/>
-              <a:t>7/16/26</a:t>
+              <a:t>7/17/26</a:t>
             </a:fld>
             <a:endParaRPr lang="en-US"/>
           </a:p>
@@ -7260,7 +7262,7 @@
           <a:p>
             <a:fld id="{72B5C0FA-8C46-E84D-B6D7-B673F2CA0A0E}" type="datetime1">
               <a:rPr lang="en-US" smtClean="0"/>
-              <a:t>7/16/26</a:t>
+              <a:t>7/17/26</a:t>
             </a:fld>
             <a:endParaRPr lang="en-US"/>
           </a:p>
@@ -7430,7 +7432,7 @@
           <a:p>
             <a:fld id="{60B9CDE1-97B4-BF46-B69C-B86855B18820}" type="datetime1">
               <a:rPr lang="en-US" smtClean="0"/>
-              <a:t>7/16/26</a:t>
+              <a:t>7/17/26</a:t>
             </a:fld>
             <a:endParaRPr lang="en-US"/>
           </a:p>
@@ -7610,7 +7612,7 @@
           <a:p>
             <a:fld id="{BE51D3A4-F9E5-FD49-AA87-B395F50451DC}" type="datetime1">
               <a:rPr lang="en-US" smtClean="0"/>
-              <a:t>7/16/26</a:t>
+              <a:t>7/17/26</a:t>
             </a:fld>
             <a:endParaRPr lang="en-US"/>
           </a:p>
@@ -7780,7 +7782,7 @@
           <a:p>
             <a:fld id="{880DFB37-B0AE-9449-85EC-14F9C83B6084}" type="datetime1">
               <a:rPr lang="en-US" smtClean="0"/>
-              <a:t>7/16/26</a:t>
+              <a:t>7/17/26</a:t>
             </a:fld>
             <a:endParaRPr lang="en-US"/>
           </a:p>
@@ -8030,7 +8032,7 @@
           <a:p>
             <a:fld id="{C939124A-616E-6944-A21A-1839F5DBE7BB}" type="datetime1">
               <a:rPr lang="en-US" smtClean="0"/>
-              <a:t>7/16/26</a:t>
+              <a:t>7/17/26</a:t>
             </a:fld>
             <a:endParaRPr lang="en-US"/>
           </a:p>
@@ -8262,7 +8264,7 @@
           <a:p>
             <a:fld id="{C6E9A026-D48C-FD43-8676-CD625DD5D84B}" type="datetime1">
               <a:rPr lang="en-US" smtClean="0"/>
-              <a:t>7/16/26</a:t>
+              <a:t>7/17/26</a:t>
             </a:fld>
             <a:endParaRPr lang="en-US"/>
           </a:p>
@@ -8648,7 +8650,7 @@
           <a:p>
             <a:fld id="{EA35111E-23A3-1440-99A3-C4C665908E3D}" type="datetime1">
               <a:rPr lang="en-US" smtClean="0"/>
-              <a:t>7/16/26</a:t>
+              <a:t>7/17/26</a:t>
             </a:fld>
             <a:endParaRPr lang="en-US"/>
           </a:p>
@@ -8771,7 +8773,7 @@
           <a:p>
             <a:fld id="{249983B9-88EF-D74B-BA6D-6A3BF17C2B38}" type="datetime1">
               <a:rPr lang="en-US" smtClean="0"/>
-              <a:t>7/16/26</a:t>
+              <a:t>7/17/26</a:t>
             </a:fld>
             <a:endParaRPr lang="en-US"/>
           </a:p>
@@ -8866,7 +8868,7 @@
           <a:p>
             <a:fld id="{E2A00AEF-B4EC-084A-8DB8-A225C7981CBB}" type="datetime1">
               <a:rPr lang="en-US" smtClean="0"/>
-              <a:t>7/16/26</a:t>
+              <a:t>7/17/26</a:t>
             </a:fld>
             <a:endParaRPr lang="en-US"/>
           </a:p>
@@ -9115,7 +9117,7 @@
           <a:p>
             <a:fld id="{97860299-21CD-A94A-A7B0-44E787F8D42C}" type="datetime1">
               <a:rPr lang="en-US" smtClean="0"/>
-              <a:t>7/16/26</a:t>
+              <a:t>7/17/26</a:t>
             </a:fld>
             <a:endParaRPr lang="en-US"/>
           </a:p>
@@ -9400,7 +9402,7 @@
           <a:p>
             <a:fld id="{3DFD19CF-4E62-D246-BA61-7B528271315F}" type="datetime1">
               <a:rPr lang="en-US" smtClean="0"/>
-              <a:t>7/16/26</a:t>
+              <a:t>7/17/26</a:t>
             </a:fld>
             <a:endParaRPr lang="en-US"/>
           </a:p>
@@ -9523,7 +9525,7 @@
           <a:noFill/>
           <a:extLst>
             <a:ext uri="{909E8E84-426E-40dd-AFC4-6F175D3DCCD1}">
-              <a14:hiddenFill xmlns:a14="http://schemas.microsoft.com/office/drawing/2010/main" xmlns="">
+              <a14:hiddenFill xmlns="" xmlns:a14="http://schemas.microsoft.com/office/drawing/2010/main">
                 <a:solidFill>
                   <a:srgbClr val="FFFFFF"/>
                 </a:solidFill>
@@ -9597,7 +9599,7 @@
               </a:ln>
               <a:extLst>
                 <a:ext uri="{91240B29-F687-4f45-9708-019B960494DF}">
-                  <a14:hiddenLine xmlns:a14="http://schemas.microsoft.com/office/drawing/2010/main" xmlns="" w="9525">
+                  <a14:hiddenLine xmlns="" xmlns:a14="http://schemas.microsoft.com/office/drawing/2010/main" w="9525">
                     <a:solidFill>
                       <a:srgbClr val="000000"/>
                     </a:solidFill>
@@ -9687,7 +9689,7 @@
               </a:ln>
               <a:extLst>
                 <a:ext uri="{91240B29-F687-4f45-9708-019B960494DF}">
-                  <a14:hiddenLine xmlns:a14="http://schemas.microsoft.com/office/drawing/2010/main" xmlns="" w="9525">
+                  <a14:hiddenLine xmlns="" xmlns:a14="http://schemas.microsoft.com/office/drawing/2010/main" w="9525">
                     <a:solidFill>
                       <a:srgbClr val="000000"/>
                     </a:solidFill>
@@ -9777,7 +9779,7 @@
               </a:ln>
               <a:extLst>
                 <a:ext uri="{91240B29-F687-4f45-9708-019B960494DF}">
-                  <a14:hiddenLine xmlns:a14="http://schemas.microsoft.com/office/drawing/2010/main" xmlns="" w="9525">
+                  <a14:hiddenLine xmlns="" xmlns:a14="http://schemas.microsoft.com/office/drawing/2010/main" w="9525">
                     <a:solidFill>
                       <a:srgbClr val="000000"/>
                     </a:solidFill>
@@ -9839,7 +9841,7 @@
               </a:ln>
               <a:extLst>
                 <a:ext uri="{91240B29-F687-4f45-9708-019B960494DF}">
-                  <a14:hiddenLine xmlns:a14="http://schemas.microsoft.com/office/drawing/2010/main" xmlns="" w="9525">
+                  <a14:hiddenLine xmlns="" xmlns:a14="http://schemas.microsoft.com/office/drawing/2010/main" w="9525">
                     <a:solidFill>
                       <a:srgbClr val="000000"/>
                     </a:solidFill>
@@ -9929,7 +9931,7 @@
               </a:ln>
               <a:extLst>
                 <a:ext uri="{91240B29-F687-4f45-9708-019B960494DF}">
-                  <a14:hiddenLine xmlns:a14="http://schemas.microsoft.com/office/drawing/2010/main" xmlns="" w="9525">
+                  <a14:hiddenLine xmlns="" xmlns:a14="http://schemas.microsoft.com/office/drawing/2010/main" w="9525">
                     <a:solidFill>
                       <a:srgbClr val="000000"/>
                     </a:solidFill>
@@ -9991,7 +9993,7 @@
               </a:ln>
               <a:extLst>
                 <a:ext uri="{91240B29-F687-4f45-9708-019B960494DF}">
-                  <a14:hiddenLine xmlns:a14="http://schemas.microsoft.com/office/drawing/2010/main" xmlns="" w="9525">
+                  <a14:hiddenLine xmlns="" xmlns:a14="http://schemas.microsoft.com/office/drawing/2010/main" w="9525">
                     <a:solidFill>
                       <a:srgbClr val="000000"/>
                     </a:solidFill>
@@ -10053,7 +10055,7 @@
               </a:ln>
               <a:extLst>
                 <a:ext uri="{91240B29-F687-4f45-9708-019B960494DF}">
-                  <a14:hiddenLine xmlns:a14="http://schemas.microsoft.com/office/drawing/2010/main" xmlns="" w="9525">
+                  <a14:hiddenLine xmlns="" xmlns:a14="http://schemas.microsoft.com/office/drawing/2010/main" w="9525">
                     <a:solidFill>
                       <a:srgbClr val="000000"/>
                     </a:solidFill>
@@ -10143,7 +10145,7 @@
               </a:ln>
               <a:extLst>
                 <a:ext uri="{91240B29-F687-4f45-9708-019B960494DF}">
-                  <a14:hiddenLine xmlns:a14="http://schemas.microsoft.com/office/drawing/2010/main" xmlns="" w="9525">
+                  <a14:hiddenLine xmlns="" xmlns:a14="http://schemas.microsoft.com/office/drawing/2010/main" w="9525">
                     <a:solidFill>
                       <a:srgbClr val="000000"/>
                     </a:solidFill>
@@ -10233,7 +10235,7 @@
               </a:ln>
               <a:extLst>
                 <a:ext uri="{91240B29-F687-4f45-9708-019B960494DF}">
-                  <a14:hiddenLine xmlns:a14="http://schemas.microsoft.com/office/drawing/2010/main" xmlns="" w="9525">
+                  <a14:hiddenLine xmlns="" xmlns:a14="http://schemas.microsoft.com/office/drawing/2010/main" w="9525">
                     <a:solidFill>
                       <a:srgbClr val="000000"/>
                     </a:solidFill>
@@ -10295,7 +10297,7 @@
               </a:ln>
               <a:extLst>
                 <a:ext uri="{91240B29-F687-4f45-9708-019B960494DF}">
-                  <a14:hiddenLine xmlns:a14="http://schemas.microsoft.com/office/drawing/2010/main" xmlns="" w="9525">
+                  <a14:hiddenLine xmlns="" xmlns:a14="http://schemas.microsoft.com/office/drawing/2010/main" w="9525">
                     <a:solidFill>
                       <a:srgbClr val="000000"/>
                     </a:solidFill>
@@ -10405,7 +10407,7 @@
               </a:ln>
               <a:extLst>
                 <a:ext uri="{91240B29-F687-4f45-9708-019B960494DF}">
-                  <a14:hiddenLine xmlns:a14="http://schemas.microsoft.com/office/drawing/2010/main" xmlns="" w="9525">
+                  <a14:hiddenLine xmlns="" xmlns:a14="http://schemas.microsoft.com/office/drawing/2010/main" w="9525">
                     <a:solidFill>
                       <a:srgbClr val="000000"/>
                     </a:solidFill>
@@ -10489,7 +10491,7 @@
               </a:ln>
               <a:extLst>
                 <a:ext uri="{91240B29-F687-4f45-9708-019B960494DF}">
-                  <a14:hiddenLine xmlns:a14="http://schemas.microsoft.com/office/drawing/2010/main" xmlns="" w="9525">
+                  <a14:hiddenLine xmlns="" xmlns:a14="http://schemas.microsoft.com/office/drawing/2010/main" w="9525">
                     <a:solidFill>
                       <a:srgbClr val="000000"/>
                     </a:solidFill>
@@ -10551,7 +10553,7 @@
               </a:ln>
               <a:extLst>
                 <a:ext uri="{91240B29-F687-4f45-9708-019B960494DF}">
-                  <a14:hiddenLine xmlns:a14="http://schemas.microsoft.com/office/drawing/2010/main" xmlns="" w="9525">
+                  <a14:hiddenLine xmlns="" xmlns:a14="http://schemas.microsoft.com/office/drawing/2010/main" w="9525">
                     <a:solidFill>
                       <a:srgbClr val="000000"/>
                     </a:solidFill>
@@ -10613,7 +10615,7 @@
               </a:ln>
               <a:extLst>
                 <a:ext uri="{91240B29-F687-4f45-9708-019B960494DF}">
-                  <a14:hiddenLine xmlns:a14="http://schemas.microsoft.com/office/drawing/2010/main" xmlns="" w="9525">
+                  <a14:hiddenLine xmlns="" xmlns:a14="http://schemas.microsoft.com/office/drawing/2010/main" w="9525">
                     <a:solidFill>
                       <a:srgbClr val="000000"/>
                     </a:solidFill>
@@ -10703,7 +10705,7 @@
               </a:ln>
               <a:extLst>
                 <a:ext uri="{91240B29-F687-4f45-9708-019B960494DF}">
-                  <a14:hiddenLine xmlns:a14="http://schemas.microsoft.com/office/drawing/2010/main" xmlns="" w="9525">
+                  <a14:hiddenLine xmlns="" xmlns:a14="http://schemas.microsoft.com/office/drawing/2010/main" w="9525">
                     <a:solidFill>
                       <a:srgbClr val="000000"/>
                     </a:solidFill>
@@ -10737,7 +10739,7 @@
               </a:ln>
               <a:extLst>
                 <a:ext uri="{91240B29-F687-4f45-9708-019B960494DF}">
-                  <a14:hiddenLine xmlns:a14="http://schemas.microsoft.com/office/drawing/2010/main" xmlns="" w="9525">
+                  <a14:hiddenLine xmlns="" xmlns:a14="http://schemas.microsoft.com/office/drawing/2010/main" w="9525">
                     <a:solidFill>
                       <a:srgbClr val="000000"/>
                     </a:solidFill>
@@ -10802,7 +10804,7 @@
               </a:ln>
               <a:extLst>
                 <a:ext uri="{91240B29-F687-4f45-9708-019B960494DF}">
-                  <a14:hiddenLine xmlns:a14="http://schemas.microsoft.com/office/drawing/2010/main" xmlns="" w="9525">
+                  <a14:hiddenLine xmlns="" xmlns:a14="http://schemas.microsoft.com/office/drawing/2010/main" w="9525">
                     <a:solidFill>
                       <a:srgbClr val="000000"/>
                     </a:solidFill>
@@ -10892,7 +10894,7 @@
               </a:ln>
               <a:extLst>
                 <a:ext uri="{91240B29-F687-4f45-9708-019B960494DF}">
-                  <a14:hiddenLine xmlns:a14="http://schemas.microsoft.com/office/drawing/2010/main" xmlns="" w="9525">
+                  <a14:hiddenLine xmlns="" xmlns:a14="http://schemas.microsoft.com/office/drawing/2010/main" w="9525">
                     <a:solidFill>
                       <a:srgbClr val="000000"/>
                     </a:solidFill>
@@ -10954,7 +10956,7 @@
               </a:ln>
               <a:extLst>
                 <a:ext uri="{91240B29-F687-4f45-9708-019B960494DF}">
-                  <a14:hiddenLine xmlns:a14="http://schemas.microsoft.com/office/drawing/2010/main" xmlns="" w="9525">
+                  <a14:hiddenLine xmlns="" xmlns:a14="http://schemas.microsoft.com/office/drawing/2010/main" w="9525">
                     <a:solidFill>
                       <a:srgbClr val="000000"/>
                     </a:solidFill>
@@ -11044,7 +11046,7 @@
               </a:ln>
               <a:extLst>
                 <a:ext uri="{91240B29-F687-4f45-9708-019B960494DF}">
-                  <a14:hiddenLine xmlns:a14="http://schemas.microsoft.com/office/drawing/2010/main" xmlns="" w="9525">
+                  <a14:hiddenLine xmlns="" xmlns:a14="http://schemas.microsoft.com/office/drawing/2010/main" w="9525">
                     <a:solidFill>
                       <a:srgbClr val="000000"/>
                     </a:solidFill>
@@ -11109,7 +11111,7 @@
               </a:ln>
               <a:extLst>
                 <a:ext uri="{91240B29-F687-4f45-9708-019B960494DF}">
-                  <a14:hiddenLine xmlns:a14="http://schemas.microsoft.com/office/drawing/2010/main" xmlns="" w="9525">
+                  <a14:hiddenLine xmlns="" xmlns:a14="http://schemas.microsoft.com/office/drawing/2010/main" w="9525">
                     <a:solidFill>
                       <a:srgbClr val="000000"/>
                     </a:solidFill>
@@ -11171,7 +11173,7 @@
               </a:ln>
               <a:extLst>
                 <a:ext uri="{91240B29-F687-4f45-9708-019B960494DF}">
-                  <a14:hiddenLine xmlns:a14="http://schemas.microsoft.com/office/drawing/2010/main" xmlns="" w="9525">
+                  <a14:hiddenLine xmlns="" xmlns:a14="http://schemas.microsoft.com/office/drawing/2010/main" w="9525">
                     <a:solidFill>
                       <a:srgbClr val="000000"/>
                     </a:solidFill>
@@ -11261,7 +11263,7 @@
               </a:ln>
               <a:extLst>
                 <a:ext uri="{91240B29-F687-4f45-9708-019B960494DF}">
-                  <a14:hiddenLine xmlns:a14="http://schemas.microsoft.com/office/drawing/2010/main" xmlns="" w="9525">
+                  <a14:hiddenLine xmlns="" xmlns:a14="http://schemas.microsoft.com/office/drawing/2010/main" w="9525">
                     <a:solidFill>
                       <a:srgbClr val="000000"/>
                     </a:solidFill>
@@ -11351,7 +11353,7 @@
               </a:ln>
               <a:extLst>
                 <a:ext uri="{91240B29-F687-4f45-9708-019B960494DF}">
-                  <a14:hiddenLine xmlns:a14="http://schemas.microsoft.com/office/drawing/2010/main" xmlns="" w="9525">
+                  <a14:hiddenLine xmlns="" xmlns:a14="http://schemas.microsoft.com/office/drawing/2010/main" w="9525">
                     <a:solidFill>
                       <a:srgbClr val="000000"/>
                     </a:solidFill>
@@ -11416,7 +11418,7 @@
               </a:ln>
               <a:extLst>
                 <a:ext uri="{91240B29-F687-4f45-9708-019B960494DF}">
-                  <a14:hiddenLine xmlns:a14="http://schemas.microsoft.com/office/drawing/2010/main" xmlns="" w="9525">
+                  <a14:hiddenLine xmlns="" xmlns:a14="http://schemas.microsoft.com/office/drawing/2010/main" w="9525">
                     <a:solidFill>
                       <a:srgbClr val="000000"/>
                     </a:solidFill>
@@ -11536,7 +11538,7 @@
               </a:ln>
               <a:extLst>
                 <a:ext uri="{91240B29-F687-4f45-9708-019B960494DF}">
-                  <a14:hiddenLine xmlns:a14="http://schemas.microsoft.com/office/drawing/2010/main" xmlns="" w="9525">
+                  <a14:hiddenLine xmlns="" xmlns:a14="http://schemas.microsoft.com/office/drawing/2010/main" w="9525">
                     <a:solidFill>
                       <a:srgbClr val="000000"/>
                     </a:solidFill>
@@ -11617,7 +11619,7 @@
               </a:ln>
               <a:extLst>
                 <a:ext uri="{91240B29-F687-4f45-9708-019B960494DF}">
-                  <a14:hiddenLine xmlns:a14="http://schemas.microsoft.com/office/drawing/2010/main" xmlns="" w="9525">
+                  <a14:hiddenLine xmlns="" xmlns:a14="http://schemas.microsoft.com/office/drawing/2010/main" w="9525">
                     <a:solidFill>
                       <a:srgbClr val="000000"/>
                     </a:solidFill>
@@ -11732,7 +11734,7 @@
               </a:ln>
               <a:extLst>
                 <a:ext uri="{91240B29-F687-4f45-9708-019B960494DF}">
-                  <a14:hiddenLine xmlns:a14="http://schemas.microsoft.com/office/drawing/2010/main" xmlns="" w="9525">
+                  <a14:hiddenLine xmlns="" xmlns:a14="http://schemas.microsoft.com/office/drawing/2010/main" w="9525">
                     <a:solidFill>
                       <a:srgbClr val="000000"/>
                     </a:solidFill>
@@ -11822,7 +11824,7 @@
               </a:ln>
               <a:extLst>
                 <a:ext uri="{91240B29-F687-4f45-9708-019B960494DF}">
-                  <a14:hiddenLine xmlns:a14="http://schemas.microsoft.com/office/drawing/2010/main" xmlns="" w="9525">
+                  <a14:hiddenLine xmlns="" xmlns:a14="http://schemas.microsoft.com/office/drawing/2010/main" w="9525">
                     <a:solidFill>
                       <a:srgbClr val="000000"/>
                     </a:solidFill>
@@ -11887,7 +11889,7 @@
               </a:ln>
               <a:extLst>
                 <a:ext uri="{91240B29-F687-4f45-9708-019B960494DF}">
-                  <a14:hiddenLine xmlns:a14="http://schemas.microsoft.com/office/drawing/2010/main" xmlns="" w="9525">
+                  <a14:hiddenLine xmlns="" xmlns:a14="http://schemas.microsoft.com/office/drawing/2010/main" w="9525">
                     <a:solidFill>
                       <a:srgbClr val="000000"/>
                     </a:solidFill>
@@ -11977,7 +11979,7 @@
               </a:ln>
               <a:extLst>
                 <a:ext uri="{91240B29-F687-4f45-9708-019B960494DF}">
-                  <a14:hiddenLine xmlns:a14="http://schemas.microsoft.com/office/drawing/2010/main" xmlns="" w="9525">
+                  <a14:hiddenLine xmlns="" xmlns:a14="http://schemas.microsoft.com/office/drawing/2010/main" w="9525">
                     <a:solidFill>
                       <a:srgbClr val="000000"/>
                     </a:solidFill>
@@ -12045,7 +12047,7 @@
               </a:ln>
               <a:extLst>
                 <a:ext uri="{91240B29-F687-4f45-9708-019B960494DF}">
-                  <a14:hiddenLine xmlns:a14="http://schemas.microsoft.com/office/drawing/2010/main" xmlns="" w="9525">
+                  <a14:hiddenLine xmlns="" xmlns:a14="http://schemas.microsoft.com/office/drawing/2010/main" w="9525">
                     <a:solidFill>
                       <a:srgbClr val="000000"/>
                     </a:solidFill>
@@ -12135,7 +12137,7 @@
               </a:ln>
               <a:extLst>
                 <a:ext uri="{91240B29-F687-4f45-9708-019B960494DF}">
-                  <a14:hiddenLine xmlns:a14="http://schemas.microsoft.com/office/drawing/2010/main" xmlns="" w="9525">
+                  <a14:hiddenLine xmlns="" xmlns:a14="http://schemas.microsoft.com/office/drawing/2010/main" w="9525">
                     <a:solidFill>
                       <a:srgbClr val="000000"/>
                     </a:solidFill>
@@ -12203,7 +12205,7 @@
               </a:ln>
               <a:extLst>
                 <a:ext uri="{91240B29-F687-4f45-9708-019B960494DF}">
-                  <a14:hiddenLine xmlns:a14="http://schemas.microsoft.com/office/drawing/2010/main" xmlns="" w="9525">
+                  <a14:hiddenLine xmlns="" xmlns:a14="http://schemas.microsoft.com/office/drawing/2010/main" w="9525">
                     <a:solidFill>
                       <a:srgbClr val="000000"/>
                     </a:solidFill>
@@ -12293,7 +12295,7 @@
               </a:ln>
               <a:extLst>
                 <a:ext uri="{91240B29-F687-4f45-9708-019B960494DF}">
-                  <a14:hiddenLine xmlns:a14="http://schemas.microsoft.com/office/drawing/2010/main" xmlns="" w="9525">
+                  <a14:hiddenLine xmlns="" xmlns:a14="http://schemas.microsoft.com/office/drawing/2010/main" w="9525">
                     <a:solidFill>
                       <a:srgbClr val="000000"/>
                     </a:solidFill>
@@ -12327,7 +12329,7 @@
               </a:ln>
               <a:extLst>
                 <a:ext uri="{91240B29-F687-4f45-9708-019B960494DF}">
-                  <a14:hiddenLine xmlns:a14="http://schemas.microsoft.com/office/drawing/2010/main" xmlns="" w="9525">
+                  <a14:hiddenLine xmlns="" xmlns:a14="http://schemas.microsoft.com/office/drawing/2010/main" w="9525">
                     <a:solidFill>
                       <a:srgbClr val="000000"/>
                     </a:solidFill>
@@ -12467,7 +12469,7 @@
           <a:p>
             <a:fld id="{92FF8978-FE14-CC4A-93A6-934EB06543C0}" type="datetime1">
               <a:rPr lang="en-US" smtClean="0"/>
-              <a:t>7/16/26</a:t>
+              <a:t>7/17/26</a:t>
             </a:fld>
             <a:endParaRPr lang="en-US"/>
           </a:p>
@@ -13528,6 +13530,483 @@
 </file>
 
 <file path=ppt/slides/slide5.xml><?xml version="1.0" encoding="utf-8"?>
+<p:sld xmlns:a="http://schemas.openxmlformats.org/drawingml/2006/main" xmlns:r="http://schemas.openxmlformats.org/officeDocument/2006/relationships" xmlns:p="http://schemas.openxmlformats.org/presentationml/2006/main">
+  <p:cSld>
+    <p:spTree>
+      <p:nvGrpSpPr>
+        <p:cNvPr id="1" name="">
+          <a:extLst>
+            <a:ext uri="{FF2B5EF4-FFF2-40B4-BE49-F238E27FC236}">
+              <a16:creationId xmlns:a16="http://schemas.microsoft.com/office/drawing/2014/main" id="{E773EF14-B052-5E3A-8D08-B0118A24F73E}"/>
+            </a:ext>
+          </a:extLst>
+        </p:cNvPr>
+        <p:cNvGrpSpPr/>
+        <p:nvPr/>
+      </p:nvGrpSpPr>
+      <p:grpSpPr>
+        <a:xfrm>
+          <a:off x="0" y="0"/>
+          <a:ext cx="0" cy="0"/>
+          <a:chOff x="0" y="0"/>
+          <a:chExt cx="0" cy="0"/>
+        </a:xfrm>
+      </p:grpSpPr>
+      <p:sp>
+        <p:nvSpPr>
+          <p:cNvPr id="6146" name="Rectangle 2">
+            <a:extLst>
+              <a:ext uri="{FF2B5EF4-FFF2-40B4-BE49-F238E27FC236}">
+                <a16:creationId xmlns:a16="http://schemas.microsoft.com/office/drawing/2014/main" id="{15323A48-AB50-B349-6F02-2114F4A6D311}"/>
+              </a:ext>
+            </a:extLst>
+          </p:cNvPr>
+          <p:cNvSpPr>
+            <a:spLocks noGrp="1" noChangeArrowheads="1"/>
+          </p:cNvSpPr>
+          <p:nvPr>
+            <p:ph type="title"/>
+            <p:custDataLst>
+              <p:tags r:id="rId1"/>
+            </p:custDataLst>
+          </p:nvPr>
+        </p:nvSpPr>
+        <p:spPr>
+          <a:xfrm>
+            <a:off x="1141413" y="284084"/>
+            <a:ext cx="9905998" cy="620791"/>
+          </a:xfrm>
+        </p:spPr>
+        <p:txBody>
+          <a:bodyPr/>
+          <a:lstStyle/>
+          <a:p>
+            <a:pPr algn="ctr"/>
+            <a:r>
+              <a:rPr lang="en-US" dirty="0"/>
+              <a:t>Week 1: Friday</a:t>
+            </a:r>
+          </a:p>
+        </p:txBody>
+      </p:sp>
+      <p:sp>
+        <p:nvSpPr>
+          <p:cNvPr id="6147" name="Rectangle 3">
+            <a:extLst>
+              <a:ext uri="{FF2B5EF4-FFF2-40B4-BE49-F238E27FC236}">
+                <a16:creationId xmlns:a16="http://schemas.microsoft.com/office/drawing/2014/main" id="{B9696856-70BF-C0BE-54A8-02E39A481C9B}"/>
+              </a:ext>
+            </a:extLst>
+          </p:cNvPr>
+          <p:cNvSpPr>
+            <a:spLocks noGrp="1" noChangeArrowheads="1"/>
+          </p:cNvSpPr>
+          <p:nvPr>
+            <p:ph idx="1"/>
+            <p:custDataLst>
+              <p:tags r:id="rId2"/>
+            </p:custDataLst>
+          </p:nvPr>
+        </p:nvSpPr>
+        <p:spPr>
+          <a:xfrm>
+            <a:off x="1294151" y="1098549"/>
+            <a:ext cx="9600522" cy="5149850"/>
+          </a:xfrm>
+        </p:spPr>
+        <p:txBody>
+          <a:bodyPr>
+            <a:normAutofit fontScale="77500" lnSpcReduction="20000"/>
+          </a:bodyPr>
+          <a:lstStyle/>
+          <a:p>
+            <a:r>
+              <a:rPr lang="en-US" dirty="0">
+                <a:latin typeface="Arial" panose="020B0604020202020204" pitchFamily="34" charset="0"/>
+                <a:cs typeface="Arial" panose="020B0604020202020204" pitchFamily="34" charset="0"/>
+              </a:rPr>
+              <a:t>End of week 1!!</a:t>
+            </a:r>
+          </a:p>
+          <a:p>
+            <a:r>
+              <a:rPr lang="en-US" dirty="0">
+                <a:latin typeface="Arial" panose="020B0604020202020204" pitchFamily="34" charset="0"/>
+                <a:cs typeface="Arial" panose="020B0604020202020204" pitchFamily="34" charset="0"/>
+              </a:rPr>
+              <a:t>First homework is in extension period</a:t>
+            </a:r>
+          </a:p>
+          <a:p>
+            <a:pPr lvl="1"/>
+            <a:r>
+              <a:rPr lang="en-US" dirty="0">
+                <a:latin typeface="Arial" panose="020B0604020202020204" pitchFamily="34" charset="0"/>
+                <a:cs typeface="Arial" panose="020B0604020202020204" pitchFamily="34" charset="0"/>
+              </a:rPr>
+              <a:t>How’d it go?</a:t>
+            </a:r>
+          </a:p>
+          <a:p>
+            <a:r>
+              <a:rPr lang="en-US" dirty="0">
+                <a:latin typeface="Arial" panose="020B0604020202020204" pitchFamily="34" charset="0"/>
+                <a:cs typeface="Arial" panose="020B0604020202020204" pitchFamily="34" charset="0"/>
+              </a:rPr>
+              <a:t>Module 1 Written HW is due next Tuesday</a:t>
+            </a:r>
+          </a:p>
+          <a:p>
+            <a:pPr lvl="1"/>
+            <a:r>
+              <a:rPr lang="en-US" dirty="0">
+                <a:latin typeface="Arial" panose="020B0604020202020204" pitchFamily="34" charset="0"/>
+                <a:cs typeface="Arial" panose="020B0604020202020204" pitchFamily="34" charset="0"/>
+              </a:rPr>
+              <a:t>We will probably finish the module on Monday but you can get started over the weekend</a:t>
+            </a:r>
+          </a:p>
+          <a:p>
+            <a:r>
+              <a:rPr lang="en-US" dirty="0">
+                <a:latin typeface="Arial" panose="020B0604020202020204" pitchFamily="34" charset="0"/>
+                <a:cs typeface="Arial" panose="020B0604020202020204" pitchFamily="34" charset="0"/>
+              </a:rPr>
+              <a:t>Be aware there is a programming assignment due on Thursday as well!</a:t>
+            </a:r>
+          </a:p>
+          <a:p>
+            <a:r>
+              <a:rPr lang="en-US" dirty="0">
+                <a:latin typeface="Arial" panose="020B0604020202020204" pitchFamily="34" charset="0"/>
+                <a:cs typeface="Arial" panose="020B0604020202020204" pitchFamily="34" charset="0"/>
+              </a:rPr>
+              <a:t>Lecture recordings from last Fall are posted on Panopto on Canvas</a:t>
+            </a:r>
+          </a:p>
+          <a:p>
+            <a:pPr lvl="1"/>
+            <a:r>
+              <a:rPr lang="en-US" dirty="0">
+                <a:latin typeface="Arial" panose="020B0604020202020204" pitchFamily="34" charset="0"/>
+                <a:cs typeface="Arial" panose="020B0604020202020204" pitchFamily="34" charset="0"/>
+              </a:rPr>
+              <a:t>I posted ALL the videos FYI</a:t>
+            </a:r>
+          </a:p>
+          <a:p>
+            <a:pPr lvl="1"/>
+            <a:r>
+              <a:rPr lang="en-US" dirty="0">
+                <a:latin typeface="Arial" panose="020B0604020202020204" pitchFamily="34" charset="0"/>
+                <a:cs typeface="Arial" panose="020B0604020202020204" pitchFamily="34" charset="0"/>
+              </a:rPr>
+              <a:t>For this module, you watch from oldest through “Pump. Lemma + Begin Mod 3”</a:t>
+            </a:r>
+          </a:p>
+          <a:p>
+            <a:r>
+              <a:rPr lang="en-US" dirty="0">
+                <a:latin typeface="Arial" panose="020B0604020202020204" pitchFamily="34" charset="0"/>
+                <a:cs typeface="Arial" panose="020B0604020202020204" pitchFamily="34" charset="0"/>
+              </a:rPr>
+              <a:t>Please remember that I am asking for NO laptop / phones!</a:t>
+            </a:r>
+          </a:p>
+          <a:p>
+            <a:pPr lvl="1"/>
+            <a:r>
+              <a:rPr lang="en-US" dirty="0">
+                <a:latin typeface="Arial" panose="020B0604020202020204" pitchFamily="34" charset="0"/>
+                <a:cs typeface="Arial" panose="020B0604020202020204" pitchFamily="34" charset="0"/>
+              </a:rPr>
+              <a:t>This makes the learning environment better for everybody. I appreciate it!</a:t>
+            </a:r>
+          </a:p>
+          <a:p>
+            <a:r>
+              <a:rPr lang="en-US" dirty="0">
+                <a:latin typeface="Arial" panose="020B0604020202020204" pitchFamily="34" charset="0"/>
+                <a:cs typeface="Arial" panose="020B0604020202020204" pitchFamily="34" charset="0"/>
+              </a:rPr>
+              <a:t>Attendance continues today as usual.</a:t>
+            </a:r>
+          </a:p>
+          <a:p>
+            <a:r>
+              <a:rPr lang="en-US" dirty="0">
+                <a:latin typeface="Arial" panose="020B0604020202020204" pitchFamily="34" charset="0"/>
+                <a:cs typeface="Arial" panose="020B0604020202020204" pitchFamily="34" charset="0"/>
+              </a:rPr>
+              <a:t>We continue module 1 today.</a:t>
+            </a:r>
+          </a:p>
+          <a:p>
+            <a:pPr lvl="1"/>
+            <a:r>
+              <a:rPr lang="en-US" dirty="0">
+                <a:latin typeface="Arial" panose="020B0604020202020204" pitchFamily="34" charset="0"/>
+                <a:cs typeface="Arial" panose="020B0604020202020204" pitchFamily="34" charset="0"/>
+              </a:rPr>
+              <a:t>I doubt we will finish it today</a:t>
+            </a:r>
+          </a:p>
+          <a:p>
+            <a:endParaRPr lang="en-US" dirty="0">
+              <a:latin typeface="Arial" panose="020B0604020202020204" pitchFamily="34" charset="0"/>
+              <a:cs typeface="Arial" panose="020B0604020202020204" pitchFamily="34" charset="0"/>
+            </a:endParaRPr>
+          </a:p>
+        </p:txBody>
+      </p:sp>
+    </p:spTree>
+    <p:extLst>
+      <p:ext uri="{BB962C8B-B14F-4D97-AF65-F5344CB8AC3E}">
+        <p14:creationId xmlns:p14="http://schemas.microsoft.com/office/powerpoint/2010/main" val="2034039482"/>
+      </p:ext>
+    </p:extLst>
+  </p:cSld>
+  <p:clrMapOvr>
+    <a:masterClrMapping/>
+  </p:clrMapOvr>
+</p:sld>
+</file>
+
+<file path=ppt/slides/slide6.xml><?xml version="1.0" encoding="utf-8"?>
+<p:sld xmlns:a="http://schemas.openxmlformats.org/drawingml/2006/main" xmlns:r="http://schemas.openxmlformats.org/officeDocument/2006/relationships" xmlns:p="http://schemas.openxmlformats.org/presentationml/2006/main">
+  <p:cSld>
+    <p:spTree>
+      <p:nvGrpSpPr>
+        <p:cNvPr id="1" name="">
+          <a:extLst>
+            <a:ext uri="{FF2B5EF4-FFF2-40B4-BE49-F238E27FC236}">
+              <a16:creationId xmlns:a16="http://schemas.microsoft.com/office/drawing/2014/main" id="{F0060D86-CB61-694B-AA47-6AB7A1979855}"/>
+            </a:ext>
+          </a:extLst>
+        </p:cNvPr>
+        <p:cNvGrpSpPr/>
+        <p:nvPr/>
+      </p:nvGrpSpPr>
+      <p:grpSpPr>
+        <a:xfrm>
+          <a:off x="0" y="0"/>
+          <a:ext cx="0" cy="0"/>
+          <a:chOff x="0" y="0"/>
+          <a:chExt cx="0" cy="0"/>
+        </a:xfrm>
+      </p:grpSpPr>
+      <p:sp>
+        <p:nvSpPr>
+          <p:cNvPr id="6146" name="Rectangle 2">
+            <a:extLst>
+              <a:ext uri="{FF2B5EF4-FFF2-40B4-BE49-F238E27FC236}">
+                <a16:creationId xmlns:a16="http://schemas.microsoft.com/office/drawing/2014/main" id="{377F11AF-F344-C8D4-C139-9305CB2B84C9}"/>
+              </a:ext>
+            </a:extLst>
+          </p:cNvPr>
+          <p:cNvSpPr>
+            <a:spLocks noGrp="1" noChangeArrowheads="1"/>
+          </p:cNvSpPr>
+          <p:nvPr>
+            <p:ph type="title"/>
+            <p:custDataLst>
+              <p:tags r:id="rId1"/>
+            </p:custDataLst>
+          </p:nvPr>
+        </p:nvSpPr>
+        <p:spPr>
+          <a:xfrm>
+            <a:off x="1141413" y="284084"/>
+            <a:ext cx="9905998" cy="620791"/>
+          </a:xfrm>
+        </p:spPr>
+        <p:txBody>
+          <a:bodyPr/>
+          <a:lstStyle/>
+          <a:p>
+            <a:pPr algn="ctr"/>
+            <a:r>
+              <a:rPr lang="en-US" dirty="0"/>
+              <a:t>Week 2: Monday</a:t>
+            </a:r>
+          </a:p>
+        </p:txBody>
+      </p:sp>
+      <p:sp>
+        <p:nvSpPr>
+          <p:cNvPr id="6147" name="Rectangle 3">
+            <a:extLst>
+              <a:ext uri="{FF2B5EF4-FFF2-40B4-BE49-F238E27FC236}">
+                <a16:creationId xmlns:a16="http://schemas.microsoft.com/office/drawing/2014/main" id="{AB649171-4125-074F-B3EE-CC029B85A7F8}"/>
+              </a:ext>
+            </a:extLst>
+          </p:cNvPr>
+          <p:cNvSpPr>
+            <a:spLocks noGrp="1" noChangeArrowheads="1"/>
+          </p:cNvSpPr>
+          <p:nvPr>
+            <p:ph idx="1"/>
+            <p:custDataLst>
+              <p:tags r:id="rId2"/>
+            </p:custDataLst>
+          </p:nvPr>
+        </p:nvSpPr>
+        <p:spPr>
+          <a:xfrm>
+            <a:off x="1294151" y="1098548"/>
+            <a:ext cx="9600522" cy="5475367"/>
+          </a:xfrm>
+        </p:spPr>
+        <p:txBody>
+          <a:bodyPr>
+            <a:normAutofit fontScale="92500" lnSpcReduction="20000"/>
+          </a:bodyPr>
+          <a:lstStyle/>
+          <a:p>
+            <a:r>
+              <a:rPr lang="en-US" dirty="0">
+                <a:latin typeface="Arial" panose="020B0604020202020204" pitchFamily="34" charset="0"/>
+                <a:cs typeface="Arial" panose="020B0604020202020204" pitchFamily="34" charset="0"/>
+              </a:rPr>
+              <a:t>Welcome to week 2!!</a:t>
+            </a:r>
+          </a:p>
+          <a:p>
+            <a:r>
+              <a:rPr lang="en-US" dirty="0">
+                <a:latin typeface="Arial" panose="020B0604020202020204" pitchFamily="34" charset="0"/>
+                <a:cs typeface="Arial" panose="020B0604020202020204" pitchFamily="34" charset="0"/>
+              </a:rPr>
+              <a:t>First homework is “graded”. Remember that this was a spot-check grade</a:t>
+            </a:r>
+          </a:p>
+          <a:p>
+            <a:r>
+              <a:rPr lang="en-US" dirty="0">
+                <a:latin typeface="Arial" panose="020B0604020202020204" pitchFamily="34" charset="0"/>
+                <a:cs typeface="Arial" panose="020B0604020202020204" pitchFamily="34" charset="0"/>
+              </a:rPr>
+              <a:t>This week:</a:t>
+            </a:r>
+          </a:p>
+          <a:p>
+            <a:pPr lvl="1"/>
+            <a:r>
+              <a:rPr lang="en-US" dirty="0">
+                <a:latin typeface="Arial" panose="020B0604020202020204" pitchFamily="34" charset="0"/>
+                <a:cs typeface="Arial" panose="020B0604020202020204" pitchFamily="34" charset="0"/>
+              </a:rPr>
+              <a:t>Written Mod. 2 assignment due Tuesday evening</a:t>
+            </a:r>
+          </a:p>
+          <a:p>
+            <a:pPr lvl="1"/>
+            <a:r>
+              <a:rPr lang="en-US" dirty="0">
+                <a:latin typeface="Arial" panose="020B0604020202020204" pitchFamily="34" charset="0"/>
+                <a:cs typeface="Arial" panose="020B0604020202020204" pitchFamily="34" charset="0"/>
+              </a:rPr>
+              <a:t>Programming assignment due Thursday evening</a:t>
+            </a:r>
+          </a:p>
+          <a:p>
+            <a:pPr lvl="1"/>
+            <a:r>
+              <a:rPr lang="en-US" dirty="0">
+                <a:latin typeface="Arial" panose="020B0604020202020204" pitchFamily="34" charset="0"/>
+                <a:cs typeface="Arial" panose="020B0604020202020204" pitchFamily="34" charset="0"/>
+              </a:rPr>
+              <a:t>First Midterm is on Friday (no lecture on Friday)</a:t>
+            </a:r>
+          </a:p>
+          <a:p>
+            <a:r>
+              <a:rPr lang="en-US" dirty="0">
+                <a:latin typeface="Arial" panose="020B0604020202020204" pitchFamily="34" charset="0"/>
+                <a:cs typeface="Arial" panose="020B0604020202020204" pitchFamily="34" charset="0"/>
+              </a:rPr>
+              <a:t>Lecture recordings from last Fall are posted on Panopto on Canvas</a:t>
+            </a:r>
+          </a:p>
+          <a:p>
+            <a:pPr lvl="1"/>
+            <a:r>
+              <a:rPr lang="en-US" dirty="0">
+                <a:latin typeface="Arial" panose="020B0604020202020204" pitchFamily="34" charset="0"/>
+                <a:cs typeface="Arial" panose="020B0604020202020204" pitchFamily="34" charset="0"/>
+              </a:rPr>
+              <a:t>I posted ALL the videos FYI</a:t>
+            </a:r>
+          </a:p>
+          <a:p>
+            <a:pPr lvl="1"/>
+            <a:r>
+              <a:rPr lang="en-US" dirty="0">
+                <a:latin typeface="Arial" panose="020B0604020202020204" pitchFamily="34" charset="0"/>
+                <a:cs typeface="Arial" panose="020B0604020202020204" pitchFamily="34" charset="0"/>
+              </a:rPr>
+              <a:t>For this module, you watch from oldest through “Pump. Lemma + Begin Mod 3”</a:t>
+            </a:r>
+          </a:p>
+          <a:p>
+            <a:r>
+              <a:rPr lang="en-US" dirty="0">
+                <a:latin typeface="Arial" panose="020B0604020202020204" pitchFamily="34" charset="0"/>
+                <a:cs typeface="Arial" panose="020B0604020202020204" pitchFamily="34" charset="0"/>
+              </a:rPr>
+              <a:t>Please remember that I am asking for NO laptop / phones!</a:t>
+            </a:r>
+          </a:p>
+          <a:p>
+            <a:pPr lvl="1"/>
+            <a:r>
+              <a:rPr lang="en-US" dirty="0">
+                <a:latin typeface="Arial" panose="020B0604020202020204" pitchFamily="34" charset="0"/>
+                <a:cs typeface="Arial" panose="020B0604020202020204" pitchFamily="34" charset="0"/>
+              </a:rPr>
+              <a:t>This makes the learning environment better for everybody. I appreciate it!</a:t>
+            </a:r>
+          </a:p>
+          <a:p>
+            <a:r>
+              <a:rPr lang="en-US" dirty="0">
+                <a:latin typeface="Arial" panose="020B0604020202020204" pitchFamily="34" charset="0"/>
+                <a:cs typeface="Arial" panose="020B0604020202020204" pitchFamily="34" charset="0"/>
+              </a:rPr>
+              <a:t>Attendance continues today as usual.</a:t>
+            </a:r>
+          </a:p>
+          <a:p>
+            <a:r>
+              <a:rPr lang="en-US" dirty="0">
+                <a:latin typeface="Arial" panose="020B0604020202020204" pitchFamily="34" charset="0"/>
+                <a:cs typeface="Arial" panose="020B0604020202020204" pitchFamily="34" charset="0"/>
+              </a:rPr>
+              <a:t>We should finish module 1 today</a:t>
+            </a:r>
+          </a:p>
+          <a:p>
+            <a:endParaRPr lang="en-US" dirty="0">
+              <a:latin typeface="Arial" panose="020B0604020202020204" pitchFamily="34" charset="0"/>
+              <a:cs typeface="Arial" panose="020B0604020202020204" pitchFamily="34" charset="0"/>
+            </a:endParaRPr>
+          </a:p>
+        </p:txBody>
+      </p:sp>
+    </p:spTree>
+    <p:extLst>
+      <p:ext uri="{BB962C8B-B14F-4D97-AF65-F5344CB8AC3E}">
+        <p14:creationId xmlns:p14="http://schemas.microsoft.com/office/powerpoint/2010/main" val="2728786617"/>
+      </p:ext>
+    </p:extLst>
+  </p:cSld>
+  <p:clrMapOvr>
+    <a:masterClrMapping/>
+  </p:clrMapOvr>
+</p:sld>
+</file>
+
+<file path=ppt/slides/slide7.xml><?xml version="1.0" encoding="utf-8"?>
 <p:sld xmlns:a="http://schemas.openxmlformats.org/drawingml/2006/main" xmlns:r="http://schemas.openxmlformats.org/officeDocument/2006/relationships" xmlns:p="http://schemas.openxmlformats.org/presentationml/2006/main">
   <p:cSld>
     <p:spTree>
@@ -15413,6 +15892,30 @@
 </p:tagLst>
 </file>
 
+<file path=ppt/tags/tag12.xml><?xml version="1.0" encoding="utf-8"?>
+<p:tagLst xmlns:a="http://schemas.openxmlformats.org/drawingml/2006/main" xmlns:r="http://schemas.openxmlformats.org/officeDocument/2006/relationships" xmlns:p="http://schemas.openxmlformats.org/presentationml/2006/main">
+  <p:tag name="_INSTRUCTOR VIEW19C14C36-AC8E-43BC-9DB6-C2AAF774C7DC|PANE__TAG" val="_"/>
+</p:tagLst>
+</file>
+
+<file path=ppt/tags/tag13.xml><?xml version="1.0" encoding="utf-8"?>
+<p:tagLst xmlns:a="http://schemas.openxmlformats.org/drawingml/2006/main" xmlns:r="http://schemas.openxmlformats.org/officeDocument/2006/relationships" xmlns:p="http://schemas.openxmlformats.org/presentationml/2006/main">
+  <p:tag name="_INSTRUCTOR VIEW19C14C36-AC8E-43BC-9DB6-C2AAF774C7DC|PANE__TAG" val="_"/>
+</p:tagLst>
+</file>
+
+<file path=ppt/tags/tag14.xml><?xml version="1.0" encoding="utf-8"?>
+<p:tagLst xmlns:a="http://schemas.openxmlformats.org/drawingml/2006/main" xmlns:r="http://schemas.openxmlformats.org/officeDocument/2006/relationships" xmlns:p="http://schemas.openxmlformats.org/presentationml/2006/main">
+  <p:tag name="_INSTRUCTOR VIEW19C14C36-AC8E-43BC-9DB6-C2AAF774C7DC|PANE__TAG" val="_"/>
+</p:tagLst>
+</file>
+
+<file path=ppt/tags/tag15.xml><?xml version="1.0" encoding="utf-8"?>
+<p:tagLst xmlns:a="http://schemas.openxmlformats.org/drawingml/2006/main" xmlns:r="http://schemas.openxmlformats.org/officeDocument/2006/relationships" xmlns:p="http://schemas.openxmlformats.org/presentationml/2006/main">
+  <p:tag name="_INSTRUCTOR VIEW19C14C36-AC8E-43BC-9DB6-C2AAF774C7DC|PANE__TAG" val="_"/>
+</p:tagLst>
+</file>
+
 <file path=ppt/tags/tag2.xml><?xml version="1.0" encoding="utf-8"?>
 <p:tagLst xmlns:a="http://schemas.openxmlformats.org/drawingml/2006/main" xmlns:r="http://schemas.openxmlformats.org/officeDocument/2006/relationships" xmlns:p="http://schemas.openxmlformats.org/presentationml/2006/main">
   <p:tag name="_INSTRUCTOR VIEW19C14C36-AC8E-43BC-9DB6-C2AAF774C7DC|PANE__TAG" val="_"/>

--- a/slides/00-DailyAnnouncements.pptx
+++ b/slides/00-DailyAnnouncements.pptx
@@ -5,7 +5,7 @@
     <p:sldMasterId id="2147484006" r:id="rId1"/>
   </p:sldMasterIdLst>
   <p:notesMasterIdLst>
-    <p:notesMasterId r:id="rId9"/>
+    <p:notesMasterId r:id="rId10"/>
   </p:notesMasterIdLst>
   <p:sldIdLst>
     <p:sldId id="256" r:id="rId2"/>
@@ -14,7 +14,8 @@
     <p:sldId id="517" r:id="rId5"/>
     <p:sldId id="518" r:id="rId6"/>
     <p:sldId id="519" r:id="rId7"/>
-    <p:sldId id="515" r:id="rId8"/>
+    <p:sldId id="520" r:id="rId8"/>
+    <p:sldId id="515" r:id="rId9"/>
   </p:sldIdLst>
   <p:sldSz cx="12192000" cy="6858000"/>
   <p:notesSz cx="6858000" cy="9144000"/>
@@ -203,7 +204,7 @@
           <a:p>
             <a:fld id="{C5B45307-6ED4-B142-BD64-10F739779302}" type="datetimeFigureOut">
               <a:rPr lang="en-US" smtClean="0"/>
-              <a:t>7/17/26</a:t>
+              <a:t>7/21/26</a:t>
             </a:fld>
             <a:endParaRPr lang="en-US"/>
           </a:p>
@@ -611,7 +612,7 @@
           <a:noFill/>
           <a:extLst>
             <a:ext uri="{909E8E84-426E-40dd-AFC4-6F175D3DCCD1}">
-              <a14:hiddenFill xmlns="" xmlns:a14="http://schemas.microsoft.com/office/drawing/2010/main">
+              <a14:hiddenFill xmlns:a14="http://schemas.microsoft.com/office/drawing/2010/main" xmlns="">
                 <a:solidFill>
                   <a:srgbClr val="FFFFFF"/>
                 </a:solidFill>
@@ -670,7 +671,7 @@
             </a:ln>
             <a:extLst>
               <a:ext uri="{91240B29-F687-4f45-9708-019B960494DF}">
-                <a14:hiddenLine xmlns="" xmlns:a14="http://schemas.microsoft.com/office/drawing/2010/main" w="9525">
+                <a14:hiddenLine xmlns:a14="http://schemas.microsoft.com/office/drawing/2010/main" xmlns="" w="9525">
                   <a:solidFill>
                     <a:srgbClr val="000000"/>
                   </a:solidFill>
@@ -760,7 +761,7 @@
             </a:ln>
             <a:extLst>
               <a:ext uri="{91240B29-F687-4f45-9708-019B960494DF}">
-                <a14:hiddenLine xmlns="" xmlns:a14="http://schemas.microsoft.com/office/drawing/2010/main" w="9525">
+                <a14:hiddenLine xmlns:a14="http://schemas.microsoft.com/office/drawing/2010/main" xmlns="" w="9525">
                   <a:solidFill>
                     <a:srgbClr val="000000"/>
                   </a:solidFill>
@@ -850,7 +851,7 @@
             </a:ln>
             <a:extLst>
               <a:ext uri="{91240B29-F687-4f45-9708-019B960494DF}">
-                <a14:hiddenLine xmlns="" xmlns:a14="http://schemas.microsoft.com/office/drawing/2010/main" w="9525">
+                <a14:hiddenLine xmlns:a14="http://schemas.microsoft.com/office/drawing/2010/main" xmlns="" w="9525">
                   <a:solidFill>
                     <a:srgbClr val="000000"/>
                   </a:solidFill>
@@ -884,7 +885,7 @@
             </a:ln>
             <a:extLst>
               <a:ext uri="{91240B29-F687-4f45-9708-019B960494DF}">
-                <a14:hiddenLine xmlns="" xmlns:a14="http://schemas.microsoft.com/office/drawing/2010/main" w="9525">
+                <a14:hiddenLine xmlns:a14="http://schemas.microsoft.com/office/drawing/2010/main" xmlns="" w="9525">
                   <a:solidFill>
                     <a:srgbClr val="000000"/>
                   </a:solidFill>
@@ -974,7 +975,7 @@
             </a:ln>
             <a:extLst>
               <a:ext uri="{91240B29-F687-4f45-9708-019B960494DF}">
-                <a14:hiddenLine xmlns="" xmlns:a14="http://schemas.microsoft.com/office/drawing/2010/main" w="9525">
+                <a14:hiddenLine xmlns:a14="http://schemas.microsoft.com/office/drawing/2010/main" xmlns="" w="9525">
                   <a:solidFill>
                     <a:srgbClr val="000000"/>
                   </a:solidFill>
@@ -1036,7 +1037,7 @@
             </a:ln>
             <a:extLst>
               <a:ext uri="{91240B29-F687-4f45-9708-019B960494DF}">
-                <a14:hiddenLine xmlns="" xmlns:a14="http://schemas.microsoft.com/office/drawing/2010/main" w="9525">
+                <a14:hiddenLine xmlns:a14="http://schemas.microsoft.com/office/drawing/2010/main" xmlns="" w="9525">
                   <a:solidFill>
                     <a:srgbClr val="000000"/>
                   </a:solidFill>
@@ -1098,7 +1099,7 @@
             </a:ln>
             <a:extLst>
               <a:ext uri="{91240B29-F687-4f45-9708-019B960494DF}">
-                <a14:hiddenLine xmlns="" xmlns:a14="http://schemas.microsoft.com/office/drawing/2010/main" w="9525">
+                <a14:hiddenLine xmlns:a14="http://schemas.microsoft.com/office/drawing/2010/main" xmlns="" w="9525">
                   <a:solidFill>
                     <a:srgbClr val="000000"/>
                   </a:solidFill>
@@ -1188,7 +1189,7 @@
             </a:ln>
             <a:extLst>
               <a:ext uri="{91240B29-F687-4f45-9708-019B960494DF}">
-                <a14:hiddenLine xmlns="" xmlns:a14="http://schemas.microsoft.com/office/drawing/2010/main" w="9525">
+                <a14:hiddenLine xmlns:a14="http://schemas.microsoft.com/office/drawing/2010/main" xmlns="" w="9525">
                   <a:solidFill>
                     <a:srgbClr val="000000"/>
                   </a:solidFill>
@@ -1250,7 +1251,7 @@
             </a:ln>
             <a:extLst>
               <a:ext uri="{91240B29-F687-4f45-9708-019B960494DF}">
-                <a14:hiddenLine xmlns="" xmlns:a14="http://schemas.microsoft.com/office/drawing/2010/main" w="9525">
+                <a14:hiddenLine xmlns:a14="http://schemas.microsoft.com/office/drawing/2010/main" xmlns="" w="9525">
                   <a:solidFill>
                     <a:srgbClr val="000000"/>
                   </a:solidFill>
@@ -1312,7 +1313,7 @@
             </a:ln>
             <a:extLst>
               <a:ext uri="{91240B29-F687-4f45-9708-019B960494DF}">
-                <a14:hiddenLine xmlns="" xmlns:a14="http://schemas.microsoft.com/office/drawing/2010/main" w="9525">
+                <a14:hiddenLine xmlns:a14="http://schemas.microsoft.com/office/drawing/2010/main" xmlns="" w="9525">
                   <a:solidFill>
                     <a:srgbClr val="000000"/>
                   </a:solidFill>
@@ -1402,7 +1403,7 @@
             </a:ln>
             <a:extLst>
               <a:ext uri="{91240B29-F687-4f45-9708-019B960494DF}">
-                <a14:hiddenLine xmlns="" xmlns:a14="http://schemas.microsoft.com/office/drawing/2010/main" w="9525">
+                <a14:hiddenLine xmlns:a14="http://schemas.microsoft.com/office/drawing/2010/main" xmlns="" w="9525">
                   <a:solidFill>
                     <a:srgbClr val="000000"/>
                   </a:solidFill>
@@ -1492,7 +1493,7 @@
             </a:ln>
             <a:extLst>
               <a:ext uri="{91240B29-F687-4f45-9708-019B960494DF}">
-                <a14:hiddenLine xmlns="" xmlns:a14="http://schemas.microsoft.com/office/drawing/2010/main" w="9525">
+                <a14:hiddenLine xmlns:a14="http://schemas.microsoft.com/office/drawing/2010/main" xmlns="" w="9525">
                   <a:solidFill>
                     <a:srgbClr val="000000"/>
                   </a:solidFill>
@@ -1554,7 +1555,7 @@
             </a:ln>
             <a:extLst>
               <a:ext uri="{91240B29-F687-4f45-9708-019B960494DF}">
-                <a14:hiddenLine xmlns="" xmlns:a14="http://schemas.microsoft.com/office/drawing/2010/main" w="9525">
+                <a14:hiddenLine xmlns:a14="http://schemas.microsoft.com/office/drawing/2010/main" xmlns="" w="9525">
                   <a:solidFill>
                     <a:srgbClr val="000000"/>
                   </a:solidFill>
@@ -1664,7 +1665,7 @@
             </a:ln>
             <a:extLst>
               <a:ext uri="{91240B29-F687-4f45-9708-019B960494DF}">
-                <a14:hiddenLine xmlns="" xmlns:a14="http://schemas.microsoft.com/office/drawing/2010/main" w="9525">
+                <a14:hiddenLine xmlns:a14="http://schemas.microsoft.com/office/drawing/2010/main" xmlns="" w="9525">
                   <a:solidFill>
                     <a:srgbClr val="000000"/>
                   </a:solidFill>
@@ -1726,7 +1727,7 @@
             </a:ln>
             <a:extLst>
               <a:ext uri="{91240B29-F687-4f45-9708-019B960494DF}">
-                <a14:hiddenLine xmlns="" xmlns:a14="http://schemas.microsoft.com/office/drawing/2010/main" w="9525">
+                <a14:hiddenLine xmlns:a14="http://schemas.microsoft.com/office/drawing/2010/main" xmlns="" w="9525">
                   <a:solidFill>
                     <a:srgbClr val="000000"/>
                   </a:solidFill>
@@ -1816,7 +1817,7 @@
             </a:ln>
             <a:extLst>
               <a:ext uri="{91240B29-F687-4f45-9708-019B960494DF}">
-                <a14:hiddenLine xmlns="" xmlns:a14="http://schemas.microsoft.com/office/drawing/2010/main" w="9525">
+                <a14:hiddenLine xmlns:a14="http://schemas.microsoft.com/office/drawing/2010/main" xmlns="" w="9525">
                   <a:solidFill>
                     <a:srgbClr val="000000"/>
                   </a:solidFill>
@@ -1906,7 +1907,7 @@
             </a:ln>
             <a:extLst>
               <a:ext uri="{91240B29-F687-4f45-9708-019B960494DF}">
-                <a14:hiddenLine xmlns="" xmlns:a14="http://schemas.microsoft.com/office/drawing/2010/main" w="9525">
+                <a14:hiddenLine xmlns:a14="http://schemas.microsoft.com/office/drawing/2010/main" xmlns="" w="9525">
                   <a:solidFill>
                     <a:srgbClr val="000000"/>
                   </a:solidFill>
@@ -1968,7 +1969,7 @@
             </a:ln>
             <a:extLst>
               <a:ext uri="{91240B29-F687-4f45-9708-019B960494DF}">
-                <a14:hiddenLine xmlns="" xmlns:a14="http://schemas.microsoft.com/office/drawing/2010/main" w="9525">
+                <a14:hiddenLine xmlns:a14="http://schemas.microsoft.com/office/drawing/2010/main" xmlns="" w="9525">
                   <a:solidFill>
                     <a:srgbClr val="000000"/>
                   </a:solidFill>
@@ -2058,7 +2059,7 @@
             </a:ln>
             <a:extLst>
               <a:ext uri="{91240B29-F687-4f45-9708-019B960494DF}">
-                <a14:hiddenLine xmlns="" xmlns:a14="http://schemas.microsoft.com/office/drawing/2010/main" w="9525">
+                <a14:hiddenLine xmlns:a14="http://schemas.microsoft.com/office/drawing/2010/main" xmlns="" w="9525">
                   <a:solidFill>
                     <a:srgbClr val="000000"/>
                   </a:solidFill>
@@ -2148,7 +2149,7 @@
             </a:ln>
             <a:extLst>
               <a:ext uri="{91240B29-F687-4f45-9708-019B960494DF}">
-                <a14:hiddenLine xmlns="" xmlns:a14="http://schemas.microsoft.com/office/drawing/2010/main" w="9525">
+                <a14:hiddenLine xmlns:a14="http://schemas.microsoft.com/office/drawing/2010/main" xmlns="" w="9525">
                   <a:solidFill>
                     <a:srgbClr val="000000"/>
                   </a:solidFill>
@@ -2204,7 +2205,7 @@
             </a:ln>
             <a:extLst>
               <a:ext uri="{91240B29-F687-4f45-9708-019B960494DF}">
-                <a14:hiddenLine xmlns="" xmlns:a14="http://schemas.microsoft.com/office/drawing/2010/main" w="9525">
+                <a14:hiddenLine xmlns:a14="http://schemas.microsoft.com/office/drawing/2010/main" xmlns="" w="9525">
                   <a:solidFill>
                     <a:srgbClr val="000000"/>
                   </a:solidFill>
@@ -2294,7 +2295,7 @@
             </a:ln>
             <a:extLst>
               <a:ext uri="{91240B29-F687-4f45-9708-019B960494DF}">
-                <a14:hiddenLine xmlns="" xmlns:a14="http://schemas.microsoft.com/office/drawing/2010/main" w="9525">
+                <a14:hiddenLine xmlns:a14="http://schemas.microsoft.com/office/drawing/2010/main" xmlns="" w="9525">
                   <a:solidFill>
                     <a:srgbClr val="000000"/>
                   </a:solidFill>
@@ -2350,7 +2351,7 @@
             </a:ln>
             <a:extLst>
               <a:ext uri="{91240B29-F687-4f45-9708-019B960494DF}">
-                <a14:hiddenLine xmlns="" xmlns:a14="http://schemas.microsoft.com/office/drawing/2010/main" w="9525">
+                <a14:hiddenLine xmlns:a14="http://schemas.microsoft.com/office/drawing/2010/main" xmlns="" w="9525">
                   <a:solidFill>
                     <a:srgbClr val="000000"/>
                   </a:solidFill>
@@ -2440,7 +2441,7 @@
             </a:ln>
             <a:extLst>
               <a:ext uri="{91240B29-F687-4f45-9708-019B960494DF}">
-                <a14:hiddenLine xmlns="" xmlns:a14="http://schemas.microsoft.com/office/drawing/2010/main" w="9525">
+                <a14:hiddenLine xmlns:a14="http://schemas.microsoft.com/office/drawing/2010/main" xmlns="" w="9525">
                   <a:solidFill>
                     <a:srgbClr val="000000"/>
                   </a:solidFill>
@@ -2508,7 +2509,7 @@
             </a:ln>
             <a:extLst>
               <a:ext uri="{91240B29-F687-4f45-9708-019B960494DF}">
-                <a14:hiddenLine xmlns="" xmlns:a14="http://schemas.microsoft.com/office/drawing/2010/main" w="9525">
+                <a14:hiddenLine xmlns:a14="http://schemas.microsoft.com/office/drawing/2010/main" xmlns="" w="9525">
                   <a:solidFill>
                     <a:srgbClr val="000000"/>
                   </a:solidFill>
@@ -2598,7 +2599,7 @@
             </a:ln>
             <a:extLst>
               <a:ext uri="{91240B29-F687-4f45-9708-019B960494DF}">
-                <a14:hiddenLine xmlns="" xmlns:a14="http://schemas.microsoft.com/office/drawing/2010/main" w="9525">
+                <a14:hiddenLine xmlns:a14="http://schemas.microsoft.com/office/drawing/2010/main" xmlns="" w="9525">
                   <a:solidFill>
                     <a:srgbClr val="000000"/>
                   </a:solidFill>
@@ -2666,7 +2667,7 @@
             </a:ln>
             <a:extLst>
               <a:ext uri="{91240B29-F687-4f45-9708-019B960494DF}">
-                <a14:hiddenLine xmlns="" xmlns:a14="http://schemas.microsoft.com/office/drawing/2010/main" w="9525">
+                <a14:hiddenLine xmlns:a14="http://schemas.microsoft.com/office/drawing/2010/main" xmlns="" w="9525">
                   <a:solidFill>
                     <a:srgbClr val="000000"/>
                   </a:solidFill>
@@ -2756,7 +2757,7 @@
             </a:ln>
             <a:extLst>
               <a:ext uri="{91240B29-F687-4f45-9708-019B960494DF}">
-                <a14:hiddenLine xmlns="" xmlns:a14="http://schemas.microsoft.com/office/drawing/2010/main" w="9525">
+                <a14:hiddenLine xmlns:a14="http://schemas.microsoft.com/office/drawing/2010/main" xmlns="" w="9525">
                   <a:solidFill>
                     <a:srgbClr val="000000"/>
                   </a:solidFill>
@@ -2790,7 +2791,7 @@
             </a:ln>
             <a:extLst>
               <a:ext uri="{91240B29-F687-4f45-9708-019B960494DF}">
-                <a14:hiddenLine xmlns="" xmlns:a14="http://schemas.microsoft.com/office/drawing/2010/main" w="9525">
+                <a14:hiddenLine xmlns:a14="http://schemas.microsoft.com/office/drawing/2010/main" xmlns="" w="9525">
                   <a:solidFill>
                     <a:srgbClr val="000000"/>
                   </a:solidFill>
@@ -2880,7 +2881,7 @@
             </a:ln>
             <a:extLst>
               <a:ext uri="{91240B29-F687-4f45-9708-019B960494DF}">
-                <a14:hiddenLine xmlns="" xmlns:a14="http://schemas.microsoft.com/office/drawing/2010/main" w="9525">
+                <a14:hiddenLine xmlns:a14="http://schemas.microsoft.com/office/drawing/2010/main" xmlns="" w="9525">
                   <a:solidFill>
                     <a:srgbClr val="000000"/>
                   </a:solidFill>
@@ -2942,7 +2943,7 @@
             </a:ln>
             <a:extLst>
               <a:ext uri="{91240B29-F687-4f45-9708-019B960494DF}">
-                <a14:hiddenLine xmlns="" xmlns:a14="http://schemas.microsoft.com/office/drawing/2010/main" w="9525">
+                <a14:hiddenLine xmlns:a14="http://schemas.microsoft.com/office/drawing/2010/main" xmlns="" w="9525">
                   <a:solidFill>
                     <a:srgbClr val="000000"/>
                   </a:solidFill>
@@ -3004,7 +3005,7 @@
             </a:ln>
             <a:extLst>
               <a:ext uri="{91240B29-F687-4f45-9708-019B960494DF}">
-                <a14:hiddenLine xmlns="" xmlns:a14="http://schemas.microsoft.com/office/drawing/2010/main" w="9525">
+                <a14:hiddenLine xmlns:a14="http://schemas.microsoft.com/office/drawing/2010/main" xmlns="" w="9525">
                   <a:solidFill>
                     <a:srgbClr val="000000"/>
                   </a:solidFill>
@@ -3094,7 +3095,7 @@
             </a:ln>
             <a:extLst>
               <a:ext uri="{91240B29-F687-4f45-9708-019B960494DF}">
-                <a14:hiddenLine xmlns="" xmlns:a14="http://schemas.microsoft.com/office/drawing/2010/main" w="9525">
+                <a14:hiddenLine xmlns:a14="http://schemas.microsoft.com/office/drawing/2010/main" xmlns="" w="9525">
                   <a:solidFill>
                     <a:srgbClr val="000000"/>
                   </a:solidFill>
@@ -3162,7 +3163,7 @@
             </a:ln>
             <a:extLst>
               <a:ext uri="{91240B29-F687-4f45-9708-019B960494DF}">
-                <a14:hiddenLine xmlns="" xmlns:a14="http://schemas.microsoft.com/office/drawing/2010/main" w="9525">
+                <a14:hiddenLine xmlns:a14="http://schemas.microsoft.com/office/drawing/2010/main" xmlns="" w="9525">
                   <a:solidFill>
                     <a:srgbClr val="000000"/>
                   </a:solidFill>
@@ -3224,7 +3225,7 @@
             </a:ln>
             <a:extLst>
               <a:ext uri="{91240B29-F687-4f45-9708-019B960494DF}">
-                <a14:hiddenLine xmlns="" xmlns:a14="http://schemas.microsoft.com/office/drawing/2010/main" w="9525">
+                <a14:hiddenLine xmlns:a14="http://schemas.microsoft.com/office/drawing/2010/main" xmlns="" w="9525">
                   <a:solidFill>
                     <a:srgbClr val="000000"/>
                   </a:solidFill>
@@ -3314,7 +3315,7 @@
             </a:ln>
             <a:extLst>
               <a:ext uri="{91240B29-F687-4f45-9708-019B960494DF}">
-                <a14:hiddenLine xmlns="" xmlns:a14="http://schemas.microsoft.com/office/drawing/2010/main" w="9525">
+                <a14:hiddenLine xmlns:a14="http://schemas.microsoft.com/office/drawing/2010/main" xmlns="" w="9525">
                   <a:solidFill>
                     <a:srgbClr val="000000"/>
                   </a:solidFill>
@@ -3376,7 +3377,7 @@
             </a:ln>
             <a:extLst>
               <a:ext uri="{91240B29-F687-4f45-9708-019B960494DF}">
-                <a14:hiddenLine xmlns="" xmlns:a14="http://schemas.microsoft.com/office/drawing/2010/main" w="9525">
+                <a14:hiddenLine xmlns:a14="http://schemas.microsoft.com/office/drawing/2010/main" xmlns="" w="9525">
                   <a:solidFill>
                     <a:srgbClr val="000000"/>
                   </a:solidFill>
@@ -3466,7 +3467,7 @@
             </a:ln>
             <a:extLst>
               <a:ext uri="{91240B29-F687-4f45-9708-019B960494DF}">
-                <a14:hiddenLine xmlns="" xmlns:a14="http://schemas.microsoft.com/office/drawing/2010/main" w="9525">
+                <a14:hiddenLine xmlns:a14="http://schemas.microsoft.com/office/drawing/2010/main" xmlns="" w="9525">
                   <a:solidFill>
                     <a:srgbClr val="000000"/>
                   </a:solidFill>
@@ -3528,7 +3529,7 @@
             </a:ln>
             <a:extLst>
               <a:ext uri="{91240B29-F687-4f45-9708-019B960494DF}">
-                <a14:hiddenLine xmlns="" xmlns:a14="http://schemas.microsoft.com/office/drawing/2010/main" w="9525">
+                <a14:hiddenLine xmlns:a14="http://schemas.microsoft.com/office/drawing/2010/main" xmlns="" w="9525">
                   <a:solidFill>
                     <a:srgbClr val="000000"/>
                   </a:solidFill>
@@ -3618,7 +3619,7 @@
             </a:ln>
             <a:extLst>
               <a:ext uri="{91240B29-F687-4f45-9708-019B960494DF}">
-                <a14:hiddenLine xmlns="" xmlns:a14="http://schemas.microsoft.com/office/drawing/2010/main" w="9525">
+                <a14:hiddenLine xmlns:a14="http://schemas.microsoft.com/office/drawing/2010/main" xmlns="" w="9525">
                   <a:solidFill>
                     <a:srgbClr val="000000"/>
                   </a:solidFill>
@@ -3652,7 +3653,7 @@
             </a:ln>
             <a:extLst>
               <a:ext uri="{91240B29-F687-4f45-9708-019B960494DF}">
-                <a14:hiddenLine xmlns="" xmlns:a14="http://schemas.microsoft.com/office/drawing/2010/main" w="9525">
+                <a14:hiddenLine xmlns:a14="http://schemas.microsoft.com/office/drawing/2010/main" xmlns="" w="9525">
                   <a:solidFill>
                     <a:srgbClr val="000000"/>
                   </a:solidFill>
@@ -3717,7 +3718,7 @@
             </a:ln>
             <a:extLst>
               <a:ext uri="{91240B29-F687-4f45-9708-019B960494DF}">
-                <a14:hiddenLine xmlns="" xmlns:a14="http://schemas.microsoft.com/office/drawing/2010/main" w="9525">
+                <a14:hiddenLine xmlns:a14="http://schemas.microsoft.com/office/drawing/2010/main" xmlns="" w="9525">
                   <a:solidFill>
                     <a:srgbClr val="000000"/>
                   </a:solidFill>
@@ -3807,7 +3808,7 @@
             </a:ln>
             <a:extLst>
               <a:ext uri="{91240B29-F687-4f45-9708-019B960494DF}">
-                <a14:hiddenLine xmlns="" xmlns:a14="http://schemas.microsoft.com/office/drawing/2010/main" w="9525">
+                <a14:hiddenLine xmlns:a14="http://schemas.microsoft.com/office/drawing/2010/main" xmlns="" w="9525">
                   <a:solidFill>
                     <a:srgbClr val="000000"/>
                   </a:solidFill>
@@ -3869,7 +3870,7 @@
             </a:ln>
             <a:extLst>
               <a:ext uri="{91240B29-F687-4f45-9708-019B960494DF}">
-                <a14:hiddenLine xmlns="" xmlns:a14="http://schemas.microsoft.com/office/drawing/2010/main" w="9525">
+                <a14:hiddenLine xmlns:a14="http://schemas.microsoft.com/office/drawing/2010/main" xmlns="" w="9525">
                   <a:solidFill>
                     <a:srgbClr val="000000"/>
                   </a:solidFill>
@@ -3959,7 +3960,7 @@
             </a:ln>
             <a:extLst>
               <a:ext uri="{91240B29-F687-4f45-9708-019B960494DF}">
-                <a14:hiddenLine xmlns="" xmlns:a14="http://schemas.microsoft.com/office/drawing/2010/main" w="9525">
+                <a14:hiddenLine xmlns:a14="http://schemas.microsoft.com/office/drawing/2010/main" xmlns="" w="9525">
                   <a:solidFill>
                     <a:srgbClr val="000000"/>
                   </a:solidFill>
@@ -4049,7 +4050,7 @@
             </a:ln>
             <a:extLst>
               <a:ext uri="{91240B29-F687-4f45-9708-019B960494DF}">
-                <a14:hiddenLine xmlns="" xmlns:a14="http://schemas.microsoft.com/office/drawing/2010/main" w="9525">
+                <a14:hiddenLine xmlns:a14="http://schemas.microsoft.com/office/drawing/2010/main" xmlns="" w="9525">
                   <a:solidFill>
                     <a:srgbClr val="000000"/>
                   </a:solidFill>
@@ -4114,7 +4115,7 @@
             </a:ln>
             <a:extLst>
               <a:ext uri="{91240B29-F687-4f45-9708-019B960494DF}">
-                <a14:hiddenLine xmlns="" xmlns:a14="http://schemas.microsoft.com/office/drawing/2010/main" w="9525">
+                <a14:hiddenLine xmlns:a14="http://schemas.microsoft.com/office/drawing/2010/main" xmlns="" w="9525">
                   <a:solidFill>
                     <a:srgbClr val="000000"/>
                   </a:solidFill>
@@ -4176,7 +4177,7 @@
             </a:ln>
             <a:extLst>
               <a:ext uri="{91240B29-F687-4f45-9708-019B960494DF}">
-                <a14:hiddenLine xmlns="" xmlns:a14="http://schemas.microsoft.com/office/drawing/2010/main" w="9525">
+                <a14:hiddenLine xmlns:a14="http://schemas.microsoft.com/office/drawing/2010/main" xmlns="" w="9525">
                   <a:solidFill>
                     <a:srgbClr val="000000"/>
                   </a:solidFill>
@@ -4266,7 +4267,7 @@
             </a:ln>
             <a:extLst>
               <a:ext uri="{91240B29-F687-4f45-9708-019B960494DF}">
-                <a14:hiddenLine xmlns="" xmlns:a14="http://schemas.microsoft.com/office/drawing/2010/main" w="9525">
+                <a14:hiddenLine xmlns:a14="http://schemas.microsoft.com/office/drawing/2010/main" xmlns="" w="9525">
                   <a:solidFill>
                     <a:srgbClr val="000000"/>
                   </a:solidFill>
@@ -4356,7 +4357,7 @@
             </a:ln>
             <a:extLst>
               <a:ext uri="{91240B29-F687-4f45-9708-019B960494DF}">
-                <a14:hiddenLine xmlns="" xmlns:a14="http://schemas.microsoft.com/office/drawing/2010/main" w="9525">
+                <a14:hiddenLine xmlns:a14="http://schemas.microsoft.com/office/drawing/2010/main" xmlns="" w="9525">
                   <a:solidFill>
                     <a:srgbClr val="000000"/>
                   </a:solidFill>
@@ -4418,7 +4419,7 @@
             </a:ln>
             <a:extLst>
               <a:ext uri="{91240B29-F687-4f45-9708-019B960494DF}">
-                <a14:hiddenLine xmlns="" xmlns:a14="http://schemas.microsoft.com/office/drawing/2010/main" w="9525">
+                <a14:hiddenLine xmlns:a14="http://schemas.microsoft.com/office/drawing/2010/main" xmlns="" w="9525">
                   <a:solidFill>
                     <a:srgbClr val="000000"/>
                   </a:solidFill>
@@ -4538,7 +4539,7 @@
             </a:ln>
             <a:extLst>
               <a:ext uri="{91240B29-F687-4f45-9708-019B960494DF}">
-                <a14:hiddenLine xmlns="" xmlns:a14="http://schemas.microsoft.com/office/drawing/2010/main" w="9525">
+                <a14:hiddenLine xmlns:a14="http://schemas.microsoft.com/office/drawing/2010/main" xmlns="" w="9525">
                   <a:solidFill>
                     <a:srgbClr val="000000"/>
                   </a:solidFill>
@@ -4606,7 +4607,7 @@
             </a:ln>
             <a:extLst>
               <a:ext uri="{91240B29-F687-4f45-9708-019B960494DF}">
-                <a14:hiddenLine xmlns="" xmlns:a14="http://schemas.microsoft.com/office/drawing/2010/main" w="9525">
+                <a14:hiddenLine xmlns:a14="http://schemas.microsoft.com/office/drawing/2010/main" xmlns="" w="9525">
                   <a:solidFill>
                     <a:srgbClr val="000000"/>
                   </a:solidFill>
@@ -4696,7 +4697,7 @@
             </a:ln>
             <a:extLst>
               <a:ext uri="{91240B29-F687-4f45-9708-019B960494DF}">
-                <a14:hiddenLine xmlns="" xmlns:a14="http://schemas.microsoft.com/office/drawing/2010/main" w="9525">
+                <a14:hiddenLine xmlns:a14="http://schemas.microsoft.com/office/drawing/2010/main" xmlns="" w="9525">
                   <a:solidFill>
                     <a:srgbClr val="000000"/>
                   </a:solidFill>
@@ -4836,7 +4837,7 @@
           <a:p>
             <a:fld id="{4313F670-7F9A-774D-B73D-573401E44297}" type="datetime1">
               <a:rPr lang="en-US" smtClean="0"/>
-              <a:t>7/17/26</a:t>
+              <a:t>7/21/26</a:t>
             </a:fld>
             <a:endParaRPr lang="en-US"/>
           </a:p>
@@ -5103,7 +5104,7 @@
           <a:p>
             <a:fld id="{446F9669-A8A7-2D40-9D01-B35FC337AA30}" type="datetime1">
               <a:rPr lang="en-US" smtClean="0"/>
-              <a:t>7/17/26</a:t>
+              <a:t>7/21/26</a:t>
             </a:fld>
             <a:endParaRPr lang="en-US"/>
           </a:p>
@@ -5299,7 +5300,7 @@
           <a:p>
             <a:fld id="{FA76CF18-F41B-6B48-B3E5-599E9795C2C3}" type="datetime1">
               <a:rPr lang="en-US" smtClean="0"/>
-              <a:t>7/17/26</a:t>
+              <a:t>7/21/26</a:t>
             </a:fld>
             <a:endParaRPr lang="en-US"/>
           </a:p>
@@ -5562,7 +5563,7 @@
           <a:p>
             <a:fld id="{B9654854-6457-164F-A077-6B3035079B82}" type="datetime1">
               <a:rPr lang="en-US" smtClean="0"/>
-              <a:t>7/17/26</a:t>
+              <a:t>7/21/26</a:t>
             </a:fld>
             <a:endParaRPr lang="en-US"/>
           </a:p>
@@ -5996,7 +5997,7 @@
           <a:p>
             <a:fld id="{CE3DBFD7-E611-8C40-AC73-0C29FF63F0CD}" type="datetime1">
               <a:rPr lang="en-US" smtClean="0"/>
-              <a:t>7/17/26</a:t>
+              <a:t>7/21/26</a:t>
             </a:fld>
             <a:endParaRPr lang="en-US"/>
           </a:p>
@@ -6542,7 +6543,7 @@
           <a:p>
             <a:fld id="{C8B63B06-0493-2840-9F37-30C9412BBF17}" type="datetime1">
               <a:rPr lang="en-US" smtClean="0"/>
-              <a:t>7/17/26</a:t>
+              <a:t>7/21/26</a:t>
             </a:fld>
             <a:endParaRPr lang="en-US"/>
           </a:p>
@@ -7262,7 +7263,7 @@
           <a:p>
             <a:fld id="{72B5C0FA-8C46-E84D-B6D7-B673F2CA0A0E}" type="datetime1">
               <a:rPr lang="en-US" smtClean="0"/>
-              <a:t>7/17/26</a:t>
+              <a:t>7/21/26</a:t>
             </a:fld>
             <a:endParaRPr lang="en-US"/>
           </a:p>
@@ -7432,7 +7433,7 @@
           <a:p>
             <a:fld id="{60B9CDE1-97B4-BF46-B69C-B86855B18820}" type="datetime1">
               <a:rPr lang="en-US" smtClean="0"/>
-              <a:t>7/17/26</a:t>
+              <a:t>7/21/26</a:t>
             </a:fld>
             <a:endParaRPr lang="en-US"/>
           </a:p>
@@ -7612,7 +7613,7 @@
           <a:p>
             <a:fld id="{BE51D3A4-F9E5-FD49-AA87-B395F50451DC}" type="datetime1">
               <a:rPr lang="en-US" smtClean="0"/>
-              <a:t>7/17/26</a:t>
+              <a:t>7/21/26</a:t>
             </a:fld>
             <a:endParaRPr lang="en-US"/>
           </a:p>
@@ -7782,7 +7783,7 @@
           <a:p>
             <a:fld id="{880DFB37-B0AE-9449-85EC-14F9C83B6084}" type="datetime1">
               <a:rPr lang="en-US" smtClean="0"/>
-              <a:t>7/17/26</a:t>
+              <a:t>7/21/26</a:t>
             </a:fld>
             <a:endParaRPr lang="en-US"/>
           </a:p>
@@ -8032,7 +8033,7 @@
           <a:p>
             <a:fld id="{C939124A-616E-6944-A21A-1839F5DBE7BB}" type="datetime1">
               <a:rPr lang="en-US" smtClean="0"/>
-              <a:t>7/17/26</a:t>
+              <a:t>7/21/26</a:t>
             </a:fld>
             <a:endParaRPr lang="en-US"/>
           </a:p>
@@ -8264,7 +8265,7 @@
           <a:p>
             <a:fld id="{C6E9A026-D48C-FD43-8676-CD625DD5D84B}" type="datetime1">
               <a:rPr lang="en-US" smtClean="0"/>
-              <a:t>7/17/26</a:t>
+              <a:t>7/21/26</a:t>
             </a:fld>
             <a:endParaRPr lang="en-US"/>
           </a:p>
@@ -8650,7 +8651,7 @@
           <a:p>
             <a:fld id="{EA35111E-23A3-1440-99A3-C4C665908E3D}" type="datetime1">
               <a:rPr lang="en-US" smtClean="0"/>
-              <a:t>7/17/26</a:t>
+              <a:t>7/21/26</a:t>
             </a:fld>
             <a:endParaRPr lang="en-US"/>
           </a:p>
@@ -8773,7 +8774,7 @@
           <a:p>
             <a:fld id="{249983B9-88EF-D74B-BA6D-6A3BF17C2B38}" type="datetime1">
               <a:rPr lang="en-US" smtClean="0"/>
-              <a:t>7/17/26</a:t>
+              <a:t>7/21/26</a:t>
             </a:fld>
             <a:endParaRPr lang="en-US"/>
           </a:p>
@@ -8868,7 +8869,7 @@
           <a:p>
             <a:fld id="{E2A00AEF-B4EC-084A-8DB8-A225C7981CBB}" type="datetime1">
               <a:rPr lang="en-US" smtClean="0"/>
-              <a:t>7/17/26</a:t>
+              <a:t>7/21/26</a:t>
             </a:fld>
             <a:endParaRPr lang="en-US"/>
           </a:p>
@@ -9117,7 +9118,7 @@
           <a:p>
             <a:fld id="{97860299-21CD-A94A-A7B0-44E787F8D42C}" type="datetime1">
               <a:rPr lang="en-US" smtClean="0"/>
-              <a:t>7/17/26</a:t>
+              <a:t>7/21/26</a:t>
             </a:fld>
             <a:endParaRPr lang="en-US"/>
           </a:p>
@@ -9402,7 +9403,7 @@
           <a:p>
             <a:fld id="{3DFD19CF-4E62-D246-BA61-7B528271315F}" type="datetime1">
               <a:rPr lang="en-US" smtClean="0"/>
-              <a:t>7/17/26</a:t>
+              <a:t>7/21/26</a:t>
             </a:fld>
             <a:endParaRPr lang="en-US"/>
           </a:p>
@@ -9525,7 +9526,7 @@
           <a:noFill/>
           <a:extLst>
             <a:ext uri="{909E8E84-426E-40dd-AFC4-6F175D3DCCD1}">
-              <a14:hiddenFill xmlns="" xmlns:a14="http://schemas.microsoft.com/office/drawing/2010/main">
+              <a14:hiddenFill xmlns:a14="http://schemas.microsoft.com/office/drawing/2010/main" xmlns="">
                 <a:solidFill>
                   <a:srgbClr val="FFFFFF"/>
                 </a:solidFill>
@@ -9599,7 +9600,7 @@
               </a:ln>
               <a:extLst>
                 <a:ext uri="{91240B29-F687-4f45-9708-019B960494DF}">
-                  <a14:hiddenLine xmlns="" xmlns:a14="http://schemas.microsoft.com/office/drawing/2010/main" w="9525">
+                  <a14:hiddenLine xmlns:a14="http://schemas.microsoft.com/office/drawing/2010/main" xmlns="" w="9525">
                     <a:solidFill>
                       <a:srgbClr val="000000"/>
                     </a:solidFill>
@@ -9689,7 +9690,7 @@
               </a:ln>
               <a:extLst>
                 <a:ext uri="{91240B29-F687-4f45-9708-019B960494DF}">
-                  <a14:hiddenLine xmlns="" xmlns:a14="http://schemas.microsoft.com/office/drawing/2010/main" w="9525">
+                  <a14:hiddenLine xmlns:a14="http://schemas.microsoft.com/office/drawing/2010/main" xmlns="" w="9525">
                     <a:solidFill>
                       <a:srgbClr val="000000"/>
                     </a:solidFill>
@@ -9779,7 +9780,7 @@
               </a:ln>
               <a:extLst>
                 <a:ext uri="{91240B29-F687-4f45-9708-019B960494DF}">
-                  <a14:hiddenLine xmlns="" xmlns:a14="http://schemas.microsoft.com/office/drawing/2010/main" w="9525">
+                  <a14:hiddenLine xmlns:a14="http://schemas.microsoft.com/office/drawing/2010/main" xmlns="" w="9525">
                     <a:solidFill>
                       <a:srgbClr val="000000"/>
                     </a:solidFill>
@@ -9841,7 +9842,7 @@
               </a:ln>
               <a:extLst>
                 <a:ext uri="{91240B29-F687-4f45-9708-019B960494DF}">
-                  <a14:hiddenLine xmlns="" xmlns:a14="http://schemas.microsoft.com/office/drawing/2010/main" w="9525">
+                  <a14:hiddenLine xmlns:a14="http://schemas.microsoft.com/office/drawing/2010/main" xmlns="" w="9525">
                     <a:solidFill>
                       <a:srgbClr val="000000"/>
                     </a:solidFill>
@@ -9931,7 +9932,7 @@
               </a:ln>
               <a:extLst>
                 <a:ext uri="{91240B29-F687-4f45-9708-019B960494DF}">
-                  <a14:hiddenLine xmlns="" xmlns:a14="http://schemas.microsoft.com/office/drawing/2010/main" w="9525">
+                  <a14:hiddenLine xmlns:a14="http://schemas.microsoft.com/office/drawing/2010/main" xmlns="" w="9525">
                     <a:solidFill>
                       <a:srgbClr val="000000"/>
                     </a:solidFill>
@@ -9993,7 +9994,7 @@
               </a:ln>
               <a:extLst>
                 <a:ext uri="{91240B29-F687-4f45-9708-019B960494DF}">
-                  <a14:hiddenLine xmlns="" xmlns:a14="http://schemas.microsoft.com/office/drawing/2010/main" w="9525">
+                  <a14:hiddenLine xmlns:a14="http://schemas.microsoft.com/office/drawing/2010/main" xmlns="" w="9525">
                     <a:solidFill>
                       <a:srgbClr val="000000"/>
                     </a:solidFill>
@@ -10055,7 +10056,7 @@
               </a:ln>
               <a:extLst>
                 <a:ext uri="{91240B29-F687-4f45-9708-019B960494DF}">
-                  <a14:hiddenLine xmlns="" xmlns:a14="http://schemas.microsoft.com/office/drawing/2010/main" w="9525">
+                  <a14:hiddenLine xmlns:a14="http://schemas.microsoft.com/office/drawing/2010/main" xmlns="" w="9525">
                     <a:solidFill>
                       <a:srgbClr val="000000"/>
                     </a:solidFill>
@@ -10145,7 +10146,7 @@
               </a:ln>
               <a:extLst>
                 <a:ext uri="{91240B29-F687-4f45-9708-019B960494DF}">
-                  <a14:hiddenLine xmlns="" xmlns:a14="http://schemas.microsoft.com/office/drawing/2010/main" w="9525">
+                  <a14:hiddenLine xmlns:a14="http://schemas.microsoft.com/office/drawing/2010/main" xmlns="" w="9525">
                     <a:solidFill>
                       <a:srgbClr val="000000"/>
                     </a:solidFill>
@@ -10235,7 +10236,7 @@
               </a:ln>
               <a:extLst>
                 <a:ext uri="{91240B29-F687-4f45-9708-019B960494DF}">
-                  <a14:hiddenLine xmlns="" xmlns:a14="http://schemas.microsoft.com/office/drawing/2010/main" w="9525">
+                  <a14:hiddenLine xmlns:a14="http://schemas.microsoft.com/office/drawing/2010/main" xmlns="" w="9525">
                     <a:solidFill>
                       <a:srgbClr val="000000"/>
                     </a:solidFill>
@@ -10297,7 +10298,7 @@
               </a:ln>
               <a:extLst>
                 <a:ext uri="{91240B29-F687-4f45-9708-019B960494DF}">
-                  <a14:hiddenLine xmlns="" xmlns:a14="http://schemas.microsoft.com/office/drawing/2010/main" w="9525">
+                  <a14:hiddenLine xmlns:a14="http://schemas.microsoft.com/office/drawing/2010/main" xmlns="" w="9525">
                     <a:solidFill>
                       <a:srgbClr val="000000"/>
                     </a:solidFill>
@@ -10407,7 +10408,7 @@
               </a:ln>
               <a:extLst>
                 <a:ext uri="{91240B29-F687-4f45-9708-019B960494DF}">
-                  <a14:hiddenLine xmlns="" xmlns:a14="http://schemas.microsoft.com/office/drawing/2010/main" w="9525">
+                  <a14:hiddenLine xmlns:a14="http://schemas.microsoft.com/office/drawing/2010/main" xmlns="" w="9525">
                     <a:solidFill>
                       <a:srgbClr val="000000"/>
                     </a:solidFill>
@@ -10491,7 +10492,7 @@
               </a:ln>
               <a:extLst>
                 <a:ext uri="{91240B29-F687-4f45-9708-019B960494DF}">
-                  <a14:hiddenLine xmlns="" xmlns:a14="http://schemas.microsoft.com/office/drawing/2010/main" w="9525">
+                  <a14:hiddenLine xmlns:a14="http://schemas.microsoft.com/office/drawing/2010/main" xmlns="" w="9525">
                     <a:solidFill>
                       <a:srgbClr val="000000"/>
                     </a:solidFill>
@@ -10553,7 +10554,7 @@
               </a:ln>
               <a:extLst>
                 <a:ext uri="{91240B29-F687-4f45-9708-019B960494DF}">
-                  <a14:hiddenLine xmlns="" xmlns:a14="http://schemas.microsoft.com/office/drawing/2010/main" w="9525">
+                  <a14:hiddenLine xmlns:a14="http://schemas.microsoft.com/office/drawing/2010/main" xmlns="" w="9525">
                     <a:solidFill>
                       <a:srgbClr val="000000"/>
                     </a:solidFill>
@@ -10615,7 +10616,7 @@
               </a:ln>
               <a:extLst>
                 <a:ext uri="{91240B29-F687-4f45-9708-019B960494DF}">
-                  <a14:hiddenLine xmlns="" xmlns:a14="http://schemas.microsoft.com/office/drawing/2010/main" w="9525">
+                  <a14:hiddenLine xmlns:a14="http://schemas.microsoft.com/office/drawing/2010/main" xmlns="" w="9525">
                     <a:solidFill>
                       <a:srgbClr val="000000"/>
                     </a:solidFill>
@@ -10705,7 +10706,7 @@
               </a:ln>
               <a:extLst>
                 <a:ext uri="{91240B29-F687-4f45-9708-019B960494DF}">
-                  <a14:hiddenLine xmlns="" xmlns:a14="http://schemas.microsoft.com/office/drawing/2010/main" w="9525">
+                  <a14:hiddenLine xmlns:a14="http://schemas.microsoft.com/office/drawing/2010/main" xmlns="" w="9525">
                     <a:solidFill>
                       <a:srgbClr val="000000"/>
                     </a:solidFill>
@@ -10739,7 +10740,7 @@
               </a:ln>
               <a:extLst>
                 <a:ext uri="{91240B29-F687-4f45-9708-019B960494DF}">
-                  <a14:hiddenLine xmlns="" xmlns:a14="http://schemas.microsoft.com/office/drawing/2010/main" w="9525">
+                  <a14:hiddenLine xmlns:a14="http://schemas.microsoft.com/office/drawing/2010/main" xmlns="" w="9525">
                     <a:solidFill>
                       <a:srgbClr val="000000"/>
                     </a:solidFill>
@@ -10804,7 +10805,7 @@
               </a:ln>
               <a:extLst>
                 <a:ext uri="{91240B29-F687-4f45-9708-019B960494DF}">
-                  <a14:hiddenLine xmlns="" xmlns:a14="http://schemas.microsoft.com/office/drawing/2010/main" w="9525">
+                  <a14:hiddenLine xmlns:a14="http://schemas.microsoft.com/office/drawing/2010/main" xmlns="" w="9525">
                     <a:solidFill>
                       <a:srgbClr val="000000"/>
                     </a:solidFill>
@@ -10894,7 +10895,7 @@
               </a:ln>
               <a:extLst>
                 <a:ext uri="{91240B29-F687-4f45-9708-019B960494DF}">
-                  <a14:hiddenLine xmlns="" xmlns:a14="http://schemas.microsoft.com/office/drawing/2010/main" w="9525">
+                  <a14:hiddenLine xmlns:a14="http://schemas.microsoft.com/office/drawing/2010/main" xmlns="" w="9525">
                     <a:solidFill>
                       <a:srgbClr val="000000"/>
                     </a:solidFill>
@@ -10956,7 +10957,7 @@
               </a:ln>
               <a:extLst>
                 <a:ext uri="{91240B29-F687-4f45-9708-019B960494DF}">
-                  <a14:hiddenLine xmlns="" xmlns:a14="http://schemas.microsoft.com/office/drawing/2010/main" w="9525">
+                  <a14:hiddenLine xmlns:a14="http://schemas.microsoft.com/office/drawing/2010/main" xmlns="" w="9525">
                     <a:solidFill>
                       <a:srgbClr val="000000"/>
                     </a:solidFill>
@@ -11046,7 +11047,7 @@
               </a:ln>
               <a:extLst>
                 <a:ext uri="{91240B29-F687-4f45-9708-019B960494DF}">
-                  <a14:hiddenLine xmlns="" xmlns:a14="http://schemas.microsoft.com/office/drawing/2010/main" w="9525">
+                  <a14:hiddenLine xmlns:a14="http://schemas.microsoft.com/office/drawing/2010/main" xmlns="" w="9525">
                     <a:solidFill>
                       <a:srgbClr val="000000"/>
                     </a:solidFill>
@@ -11111,7 +11112,7 @@
               </a:ln>
               <a:extLst>
                 <a:ext uri="{91240B29-F687-4f45-9708-019B960494DF}">
-                  <a14:hiddenLine xmlns="" xmlns:a14="http://schemas.microsoft.com/office/drawing/2010/main" w="9525">
+                  <a14:hiddenLine xmlns:a14="http://schemas.microsoft.com/office/drawing/2010/main" xmlns="" w="9525">
                     <a:solidFill>
                       <a:srgbClr val="000000"/>
                     </a:solidFill>
@@ -11173,7 +11174,7 @@
               </a:ln>
               <a:extLst>
                 <a:ext uri="{91240B29-F687-4f45-9708-019B960494DF}">
-                  <a14:hiddenLine xmlns="" xmlns:a14="http://schemas.microsoft.com/office/drawing/2010/main" w="9525">
+                  <a14:hiddenLine xmlns:a14="http://schemas.microsoft.com/office/drawing/2010/main" xmlns="" w="9525">
                     <a:solidFill>
                       <a:srgbClr val="000000"/>
                     </a:solidFill>
@@ -11263,7 +11264,7 @@
               </a:ln>
               <a:extLst>
                 <a:ext uri="{91240B29-F687-4f45-9708-019B960494DF}">
-                  <a14:hiddenLine xmlns="" xmlns:a14="http://schemas.microsoft.com/office/drawing/2010/main" w="9525">
+                  <a14:hiddenLine xmlns:a14="http://schemas.microsoft.com/office/drawing/2010/main" xmlns="" w="9525">
                     <a:solidFill>
                       <a:srgbClr val="000000"/>
                     </a:solidFill>
@@ -11353,7 +11354,7 @@
               </a:ln>
               <a:extLst>
                 <a:ext uri="{91240B29-F687-4f45-9708-019B960494DF}">
-                  <a14:hiddenLine xmlns="" xmlns:a14="http://schemas.microsoft.com/office/drawing/2010/main" w="9525">
+                  <a14:hiddenLine xmlns:a14="http://schemas.microsoft.com/office/drawing/2010/main" xmlns="" w="9525">
                     <a:solidFill>
                       <a:srgbClr val="000000"/>
                     </a:solidFill>
@@ -11418,7 +11419,7 @@
               </a:ln>
               <a:extLst>
                 <a:ext uri="{91240B29-F687-4f45-9708-019B960494DF}">
-                  <a14:hiddenLine xmlns="" xmlns:a14="http://schemas.microsoft.com/office/drawing/2010/main" w="9525">
+                  <a14:hiddenLine xmlns:a14="http://schemas.microsoft.com/office/drawing/2010/main" xmlns="" w="9525">
                     <a:solidFill>
                       <a:srgbClr val="000000"/>
                     </a:solidFill>
@@ -11538,7 +11539,7 @@
               </a:ln>
               <a:extLst>
                 <a:ext uri="{91240B29-F687-4f45-9708-019B960494DF}">
-                  <a14:hiddenLine xmlns="" xmlns:a14="http://schemas.microsoft.com/office/drawing/2010/main" w="9525">
+                  <a14:hiddenLine xmlns:a14="http://schemas.microsoft.com/office/drawing/2010/main" xmlns="" w="9525">
                     <a:solidFill>
                       <a:srgbClr val="000000"/>
                     </a:solidFill>
@@ -11619,7 +11620,7 @@
               </a:ln>
               <a:extLst>
                 <a:ext uri="{91240B29-F687-4f45-9708-019B960494DF}">
-                  <a14:hiddenLine xmlns="" xmlns:a14="http://schemas.microsoft.com/office/drawing/2010/main" w="9525">
+                  <a14:hiddenLine xmlns:a14="http://schemas.microsoft.com/office/drawing/2010/main" xmlns="" w="9525">
                     <a:solidFill>
                       <a:srgbClr val="000000"/>
                     </a:solidFill>
@@ -11734,7 +11735,7 @@
               </a:ln>
               <a:extLst>
                 <a:ext uri="{91240B29-F687-4f45-9708-019B960494DF}">
-                  <a14:hiddenLine xmlns="" xmlns:a14="http://schemas.microsoft.com/office/drawing/2010/main" w="9525">
+                  <a14:hiddenLine xmlns:a14="http://schemas.microsoft.com/office/drawing/2010/main" xmlns="" w="9525">
                     <a:solidFill>
                       <a:srgbClr val="000000"/>
                     </a:solidFill>
@@ -11824,7 +11825,7 @@
               </a:ln>
               <a:extLst>
                 <a:ext uri="{91240B29-F687-4f45-9708-019B960494DF}">
-                  <a14:hiddenLine xmlns="" xmlns:a14="http://schemas.microsoft.com/office/drawing/2010/main" w="9525">
+                  <a14:hiddenLine xmlns:a14="http://schemas.microsoft.com/office/drawing/2010/main" xmlns="" w="9525">
                     <a:solidFill>
                       <a:srgbClr val="000000"/>
                     </a:solidFill>
@@ -11889,7 +11890,7 @@
               </a:ln>
               <a:extLst>
                 <a:ext uri="{91240B29-F687-4f45-9708-019B960494DF}">
-                  <a14:hiddenLine xmlns="" xmlns:a14="http://schemas.microsoft.com/office/drawing/2010/main" w="9525">
+                  <a14:hiddenLine xmlns:a14="http://schemas.microsoft.com/office/drawing/2010/main" xmlns="" w="9525">
                     <a:solidFill>
                       <a:srgbClr val="000000"/>
                     </a:solidFill>
@@ -11979,7 +11980,7 @@
               </a:ln>
               <a:extLst>
                 <a:ext uri="{91240B29-F687-4f45-9708-019B960494DF}">
-                  <a14:hiddenLine xmlns="" xmlns:a14="http://schemas.microsoft.com/office/drawing/2010/main" w="9525">
+                  <a14:hiddenLine xmlns:a14="http://schemas.microsoft.com/office/drawing/2010/main" xmlns="" w="9525">
                     <a:solidFill>
                       <a:srgbClr val="000000"/>
                     </a:solidFill>
@@ -12047,7 +12048,7 @@
               </a:ln>
               <a:extLst>
                 <a:ext uri="{91240B29-F687-4f45-9708-019B960494DF}">
-                  <a14:hiddenLine xmlns="" xmlns:a14="http://schemas.microsoft.com/office/drawing/2010/main" w="9525">
+                  <a14:hiddenLine xmlns:a14="http://schemas.microsoft.com/office/drawing/2010/main" xmlns="" w="9525">
                     <a:solidFill>
                       <a:srgbClr val="000000"/>
                     </a:solidFill>
@@ -12137,7 +12138,7 @@
               </a:ln>
               <a:extLst>
                 <a:ext uri="{91240B29-F687-4f45-9708-019B960494DF}">
-                  <a14:hiddenLine xmlns="" xmlns:a14="http://schemas.microsoft.com/office/drawing/2010/main" w="9525">
+                  <a14:hiddenLine xmlns:a14="http://schemas.microsoft.com/office/drawing/2010/main" xmlns="" w="9525">
                     <a:solidFill>
                       <a:srgbClr val="000000"/>
                     </a:solidFill>
@@ -12205,7 +12206,7 @@
               </a:ln>
               <a:extLst>
                 <a:ext uri="{91240B29-F687-4f45-9708-019B960494DF}">
-                  <a14:hiddenLine xmlns="" xmlns:a14="http://schemas.microsoft.com/office/drawing/2010/main" w="9525">
+                  <a14:hiddenLine xmlns:a14="http://schemas.microsoft.com/office/drawing/2010/main" xmlns="" w="9525">
                     <a:solidFill>
                       <a:srgbClr val="000000"/>
                     </a:solidFill>
@@ -12295,7 +12296,7 @@
               </a:ln>
               <a:extLst>
                 <a:ext uri="{91240B29-F687-4f45-9708-019B960494DF}">
-                  <a14:hiddenLine xmlns="" xmlns:a14="http://schemas.microsoft.com/office/drawing/2010/main" w="9525">
+                  <a14:hiddenLine xmlns:a14="http://schemas.microsoft.com/office/drawing/2010/main" xmlns="" w="9525">
                     <a:solidFill>
                       <a:srgbClr val="000000"/>
                     </a:solidFill>
@@ -12329,7 +12330,7 @@
               </a:ln>
               <a:extLst>
                 <a:ext uri="{91240B29-F687-4f45-9708-019B960494DF}">
-                  <a14:hiddenLine xmlns="" xmlns:a14="http://schemas.microsoft.com/office/drawing/2010/main" w="9525">
+                  <a14:hiddenLine xmlns:a14="http://schemas.microsoft.com/office/drawing/2010/main" xmlns="" w="9525">
                     <a:solidFill>
                       <a:srgbClr val="000000"/>
                     </a:solidFill>
@@ -12469,7 +12470,7 @@
           <a:p>
             <a:fld id="{92FF8978-FE14-CC4A-93A6-934EB06543C0}" type="datetime1">
               <a:rPr lang="en-US" smtClean="0"/>
-              <a:t>7/17/26</a:t>
+              <a:t>7/21/26</a:t>
             </a:fld>
             <a:endParaRPr lang="en-US"/>
           </a:p>
@@ -14007,6 +14008,256 @@
 </file>
 
 <file path=ppt/slides/slide7.xml><?xml version="1.0" encoding="utf-8"?>
+<p:sld xmlns:a="http://schemas.openxmlformats.org/drawingml/2006/main" xmlns:r="http://schemas.openxmlformats.org/officeDocument/2006/relationships" xmlns:p="http://schemas.openxmlformats.org/presentationml/2006/main">
+  <p:cSld>
+    <p:spTree>
+      <p:nvGrpSpPr>
+        <p:cNvPr id="1" name="">
+          <a:extLst>
+            <a:ext uri="{FF2B5EF4-FFF2-40B4-BE49-F238E27FC236}">
+              <a16:creationId xmlns:a16="http://schemas.microsoft.com/office/drawing/2014/main" id="{10A534A6-C91A-6236-8C47-1EE87A38EC62}"/>
+            </a:ext>
+          </a:extLst>
+        </p:cNvPr>
+        <p:cNvGrpSpPr/>
+        <p:nvPr/>
+      </p:nvGrpSpPr>
+      <p:grpSpPr>
+        <a:xfrm>
+          <a:off x="0" y="0"/>
+          <a:ext cx="0" cy="0"/>
+          <a:chOff x="0" y="0"/>
+          <a:chExt cx="0" cy="0"/>
+        </a:xfrm>
+      </p:grpSpPr>
+      <p:sp>
+        <p:nvSpPr>
+          <p:cNvPr id="6146" name="Rectangle 2">
+            <a:extLst>
+              <a:ext uri="{FF2B5EF4-FFF2-40B4-BE49-F238E27FC236}">
+                <a16:creationId xmlns:a16="http://schemas.microsoft.com/office/drawing/2014/main" id="{8FA1C635-2C54-9B7E-1432-EEA3313AAA24}"/>
+              </a:ext>
+            </a:extLst>
+          </p:cNvPr>
+          <p:cNvSpPr>
+            <a:spLocks noGrp="1" noChangeArrowheads="1"/>
+          </p:cNvSpPr>
+          <p:nvPr>
+            <p:ph type="title"/>
+            <p:custDataLst>
+              <p:tags r:id="rId1"/>
+            </p:custDataLst>
+          </p:nvPr>
+        </p:nvSpPr>
+        <p:spPr>
+          <a:xfrm>
+            <a:off x="1141413" y="284084"/>
+            <a:ext cx="9905998" cy="620791"/>
+          </a:xfrm>
+        </p:spPr>
+        <p:txBody>
+          <a:bodyPr/>
+          <a:lstStyle/>
+          <a:p>
+            <a:pPr algn="ctr"/>
+            <a:r>
+              <a:rPr lang="en-US" dirty="0"/>
+              <a:t>Week 2: Tuesday</a:t>
+            </a:r>
+          </a:p>
+        </p:txBody>
+      </p:sp>
+      <p:sp>
+        <p:nvSpPr>
+          <p:cNvPr id="6147" name="Rectangle 3">
+            <a:extLst>
+              <a:ext uri="{FF2B5EF4-FFF2-40B4-BE49-F238E27FC236}">
+                <a16:creationId xmlns:a16="http://schemas.microsoft.com/office/drawing/2014/main" id="{A2A40684-18FF-B302-48CF-E12AF1B700D6}"/>
+              </a:ext>
+            </a:extLst>
+          </p:cNvPr>
+          <p:cNvSpPr>
+            <a:spLocks noGrp="1" noChangeArrowheads="1"/>
+          </p:cNvSpPr>
+          <p:nvPr>
+            <p:ph idx="1"/>
+            <p:custDataLst>
+              <p:tags r:id="rId2"/>
+            </p:custDataLst>
+          </p:nvPr>
+        </p:nvSpPr>
+        <p:spPr>
+          <a:xfrm>
+            <a:off x="1294151" y="1098548"/>
+            <a:ext cx="9600522" cy="5475367"/>
+          </a:xfrm>
+        </p:spPr>
+        <p:txBody>
+          <a:bodyPr>
+            <a:normAutofit fontScale="92500" lnSpcReduction="10000"/>
+          </a:bodyPr>
+          <a:lstStyle/>
+          <a:p>
+            <a:r>
+              <a:rPr lang="en-US" dirty="0">
+                <a:latin typeface="Arial" panose="020B0604020202020204" pitchFamily="34" charset="0"/>
+                <a:cs typeface="Arial" panose="020B0604020202020204" pitchFamily="34" charset="0"/>
+              </a:rPr>
+              <a:t>Welcome to week 2!!</a:t>
+            </a:r>
+          </a:p>
+          <a:p>
+            <a:r>
+              <a:rPr lang="en-US" dirty="0">
+                <a:latin typeface="Arial" panose="020B0604020202020204" pitchFamily="34" charset="0"/>
+                <a:cs typeface="Arial" panose="020B0604020202020204" pitchFamily="34" charset="0"/>
+              </a:rPr>
+              <a:t>This week:</a:t>
+            </a:r>
+          </a:p>
+          <a:p>
+            <a:pPr lvl="1"/>
+            <a:r>
+              <a:rPr lang="en-US" dirty="0">
+                <a:latin typeface="Arial" panose="020B0604020202020204" pitchFamily="34" charset="0"/>
+                <a:cs typeface="Arial" panose="020B0604020202020204" pitchFamily="34" charset="0"/>
+              </a:rPr>
+              <a:t>Written Mod. 2 assignment due </a:t>
+            </a:r>
+            <a:r>
+              <a:rPr lang="en-US" b="1" i="1" u="sng" dirty="0">
+                <a:latin typeface="Arial" panose="020B0604020202020204" pitchFamily="34" charset="0"/>
+                <a:cs typeface="Arial" panose="020B0604020202020204" pitchFamily="34" charset="0"/>
+              </a:rPr>
+              <a:t>TONIGHT</a:t>
+            </a:r>
+            <a:r>
+              <a:rPr lang="en-US" dirty="0">
+                <a:latin typeface="Arial" panose="020B0604020202020204" pitchFamily="34" charset="0"/>
+                <a:cs typeface="Arial" panose="020B0604020202020204" pitchFamily="34" charset="0"/>
+              </a:rPr>
+              <a:t>!!</a:t>
+            </a:r>
+          </a:p>
+          <a:p>
+            <a:pPr lvl="1"/>
+            <a:r>
+              <a:rPr lang="en-US" dirty="0">
+                <a:latin typeface="Arial" panose="020B0604020202020204" pitchFamily="34" charset="0"/>
+                <a:cs typeface="Arial" panose="020B0604020202020204" pitchFamily="34" charset="0"/>
+              </a:rPr>
+              <a:t>Programming assignment due Thursday evening</a:t>
+            </a:r>
+          </a:p>
+          <a:p>
+            <a:pPr lvl="1"/>
+            <a:r>
+              <a:rPr lang="en-US" dirty="0">
+                <a:latin typeface="Arial" panose="020B0604020202020204" pitchFamily="34" charset="0"/>
+                <a:cs typeface="Arial" panose="020B0604020202020204" pitchFamily="34" charset="0"/>
+              </a:rPr>
+              <a:t>First Midterm is on Friday (no lecture on Friday)</a:t>
+            </a:r>
+          </a:p>
+          <a:p>
+            <a:r>
+              <a:rPr lang="en-US" dirty="0">
+                <a:latin typeface="Arial" panose="020B0604020202020204" pitchFamily="34" charset="0"/>
+                <a:cs typeface="Arial" panose="020B0604020202020204" pitchFamily="34" charset="0"/>
+              </a:rPr>
+              <a:t>Lecture recordings from last Fall are posted on Panopto on Canvas</a:t>
+            </a:r>
+          </a:p>
+          <a:p>
+            <a:pPr lvl="1"/>
+            <a:r>
+              <a:rPr lang="en-US" dirty="0">
+                <a:latin typeface="Arial" panose="020B0604020202020204" pitchFamily="34" charset="0"/>
+                <a:cs typeface="Arial" panose="020B0604020202020204" pitchFamily="34" charset="0"/>
+              </a:rPr>
+              <a:t>I posted ALL the videos FYI</a:t>
+            </a:r>
+          </a:p>
+          <a:p>
+            <a:pPr lvl="1"/>
+            <a:r>
+              <a:rPr lang="en-US" dirty="0">
+                <a:latin typeface="Arial" panose="020B0604020202020204" pitchFamily="34" charset="0"/>
+                <a:cs typeface="Arial" panose="020B0604020202020204" pitchFamily="34" charset="0"/>
+              </a:rPr>
+              <a:t>For this module, you watch from oldest through “Pump. Lemma + Begin Mod 3”</a:t>
+            </a:r>
+          </a:p>
+          <a:p>
+            <a:r>
+              <a:rPr lang="en-US" dirty="0">
+                <a:latin typeface="Arial" panose="020B0604020202020204" pitchFamily="34" charset="0"/>
+                <a:cs typeface="Arial" panose="020B0604020202020204" pitchFamily="34" charset="0"/>
+              </a:rPr>
+              <a:t>Please remember that I am asking for NO laptop / phones!</a:t>
+            </a:r>
+          </a:p>
+          <a:p>
+            <a:pPr lvl="1"/>
+            <a:r>
+              <a:rPr lang="en-US" dirty="0">
+                <a:latin typeface="Arial" panose="020B0604020202020204" pitchFamily="34" charset="0"/>
+                <a:cs typeface="Arial" panose="020B0604020202020204" pitchFamily="34" charset="0"/>
+              </a:rPr>
+              <a:t>This makes the learning environment better for everybody. I appreciate it!</a:t>
+            </a:r>
+          </a:p>
+          <a:p>
+            <a:r>
+              <a:rPr lang="en-US" dirty="0">
+                <a:latin typeface="Arial" panose="020B0604020202020204" pitchFamily="34" charset="0"/>
+                <a:cs typeface="Arial" panose="020B0604020202020204" pitchFamily="34" charset="0"/>
+              </a:rPr>
+              <a:t>Attendance continues today as usual.</a:t>
+            </a:r>
+          </a:p>
+          <a:p>
+            <a:r>
+              <a:rPr lang="en-US" dirty="0">
+                <a:latin typeface="Arial" panose="020B0604020202020204" pitchFamily="34" charset="0"/>
+                <a:cs typeface="Arial" panose="020B0604020202020204" pitchFamily="34" charset="0"/>
+              </a:rPr>
+              <a:t>Today we begin Module 2! The </a:t>
+            </a:r>
+            <a:r>
+              <a:rPr lang="en-US">
+                <a:latin typeface="Arial" panose="020B0604020202020204" pitchFamily="34" charset="0"/>
+                <a:cs typeface="Arial" panose="020B0604020202020204" pitchFamily="34" charset="0"/>
+              </a:rPr>
+              <a:t>Context-Free Languages!</a:t>
+            </a:r>
+            <a:endParaRPr lang="en-US" dirty="0">
+              <a:latin typeface="Arial" panose="020B0604020202020204" pitchFamily="34" charset="0"/>
+              <a:cs typeface="Arial" panose="020B0604020202020204" pitchFamily="34" charset="0"/>
+            </a:endParaRPr>
+          </a:p>
+          <a:p>
+            <a:endParaRPr lang="en-US" dirty="0">
+              <a:latin typeface="Arial" panose="020B0604020202020204" pitchFamily="34" charset="0"/>
+              <a:cs typeface="Arial" panose="020B0604020202020204" pitchFamily="34" charset="0"/>
+            </a:endParaRPr>
+          </a:p>
+        </p:txBody>
+      </p:sp>
+    </p:spTree>
+    <p:extLst>
+      <p:ext uri="{BB962C8B-B14F-4D97-AF65-F5344CB8AC3E}">
+        <p14:creationId xmlns:p14="http://schemas.microsoft.com/office/powerpoint/2010/main" val="105140071"/>
+      </p:ext>
+    </p:extLst>
+  </p:cSld>
+  <p:clrMapOvr>
+    <a:masterClrMapping/>
+  </p:clrMapOvr>
+</p:sld>
+</file>
+
+<file path=ppt/slides/slide8.xml><?xml version="1.0" encoding="utf-8"?>
 <p:sld xmlns:a="http://schemas.openxmlformats.org/drawingml/2006/main" xmlns:r="http://schemas.openxmlformats.org/officeDocument/2006/relationships" xmlns:p="http://schemas.openxmlformats.org/presentationml/2006/main">
   <p:cSld>
     <p:spTree>
@@ -15916,6 +16167,18 @@
 </p:tagLst>
 </file>
 
+<file path=ppt/tags/tag16.xml><?xml version="1.0" encoding="utf-8"?>
+<p:tagLst xmlns:a="http://schemas.openxmlformats.org/drawingml/2006/main" xmlns:r="http://schemas.openxmlformats.org/officeDocument/2006/relationships" xmlns:p="http://schemas.openxmlformats.org/presentationml/2006/main">
+  <p:tag name="_INSTRUCTOR VIEW19C14C36-AC8E-43BC-9DB6-C2AAF774C7DC|PANE__TAG" val="_"/>
+</p:tagLst>
+</file>
+
+<file path=ppt/tags/tag17.xml><?xml version="1.0" encoding="utf-8"?>
+<p:tagLst xmlns:a="http://schemas.openxmlformats.org/drawingml/2006/main" xmlns:r="http://schemas.openxmlformats.org/officeDocument/2006/relationships" xmlns:p="http://schemas.openxmlformats.org/presentationml/2006/main">
+  <p:tag name="_INSTRUCTOR VIEW19C14C36-AC8E-43BC-9DB6-C2AAF774C7DC|PANE__TAG" val="_"/>
+</p:tagLst>
+</file>
+
 <file path=ppt/tags/tag2.xml><?xml version="1.0" encoding="utf-8"?>
 <p:tagLst xmlns:a="http://schemas.openxmlformats.org/drawingml/2006/main" xmlns:r="http://schemas.openxmlformats.org/officeDocument/2006/relationships" xmlns:p="http://schemas.openxmlformats.org/presentationml/2006/main">
   <p:tag name="_INSTRUCTOR VIEW19C14C36-AC8E-43BC-9DB6-C2AAF774C7DC|PANE__TAG" val="_"/>

--- a/slides/00-DailyAnnouncements.pptx
+++ b/slides/00-DailyAnnouncements.pptx
@@ -5,7 +5,7 @@
     <p:sldMasterId id="2147484006" r:id="rId1"/>
   </p:sldMasterIdLst>
   <p:notesMasterIdLst>
-    <p:notesMasterId r:id="rId10"/>
+    <p:notesMasterId r:id="rId11"/>
   </p:notesMasterIdLst>
   <p:sldIdLst>
     <p:sldId id="256" r:id="rId2"/>
@@ -15,7 +15,8 @@
     <p:sldId id="518" r:id="rId6"/>
     <p:sldId id="519" r:id="rId7"/>
     <p:sldId id="520" r:id="rId8"/>
-    <p:sldId id="515" r:id="rId9"/>
+    <p:sldId id="521" r:id="rId9"/>
+    <p:sldId id="515" r:id="rId10"/>
   </p:sldIdLst>
   <p:sldSz cx="12192000" cy="6858000"/>
   <p:notesSz cx="6858000" cy="9144000"/>
@@ -204,7 +205,7 @@
           <a:p>
             <a:fld id="{C5B45307-6ED4-B142-BD64-10F739779302}" type="datetimeFigureOut">
               <a:rPr lang="en-US" smtClean="0"/>
-              <a:t>7/21/26</a:t>
+              <a:t>7/22/26</a:t>
             </a:fld>
             <a:endParaRPr lang="en-US"/>
           </a:p>
@@ -612,7 +613,7 @@
           <a:noFill/>
           <a:extLst>
             <a:ext uri="{909E8E84-426E-40dd-AFC4-6F175D3DCCD1}">
-              <a14:hiddenFill xmlns:a14="http://schemas.microsoft.com/office/drawing/2010/main" xmlns="">
+              <a14:hiddenFill xmlns="" xmlns:a14="http://schemas.microsoft.com/office/drawing/2010/main">
                 <a:solidFill>
                   <a:srgbClr val="FFFFFF"/>
                 </a:solidFill>
@@ -671,7 +672,7 @@
             </a:ln>
             <a:extLst>
               <a:ext uri="{91240B29-F687-4f45-9708-019B960494DF}">
-                <a14:hiddenLine xmlns:a14="http://schemas.microsoft.com/office/drawing/2010/main" xmlns="" w="9525">
+                <a14:hiddenLine xmlns="" xmlns:a14="http://schemas.microsoft.com/office/drawing/2010/main" w="9525">
                   <a:solidFill>
                     <a:srgbClr val="000000"/>
                   </a:solidFill>
@@ -761,7 +762,7 @@
             </a:ln>
             <a:extLst>
               <a:ext uri="{91240B29-F687-4f45-9708-019B960494DF}">
-                <a14:hiddenLine xmlns:a14="http://schemas.microsoft.com/office/drawing/2010/main" xmlns="" w="9525">
+                <a14:hiddenLine xmlns="" xmlns:a14="http://schemas.microsoft.com/office/drawing/2010/main" w="9525">
                   <a:solidFill>
                     <a:srgbClr val="000000"/>
                   </a:solidFill>
@@ -851,7 +852,7 @@
             </a:ln>
             <a:extLst>
               <a:ext uri="{91240B29-F687-4f45-9708-019B960494DF}">
-                <a14:hiddenLine xmlns:a14="http://schemas.microsoft.com/office/drawing/2010/main" xmlns="" w="9525">
+                <a14:hiddenLine xmlns="" xmlns:a14="http://schemas.microsoft.com/office/drawing/2010/main" w="9525">
                   <a:solidFill>
                     <a:srgbClr val="000000"/>
                   </a:solidFill>
@@ -885,7 +886,7 @@
             </a:ln>
             <a:extLst>
               <a:ext uri="{91240B29-F687-4f45-9708-019B960494DF}">
-                <a14:hiddenLine xmlns:a14="http://schemas.microsoft.com/office/drawing/2010/main" xmlns="" w="9525">
+                <a14:hiddenLine xmlns="" xmlns:a14="http://schemas.microsoft.com/office/drawing/2010/main" w="9525">
                   <a:solidFill>
                     <a:srgbClr val="000000"/>
                   </a:solidFill>
@@ -975,7 +976,7 @@
             </a:ln>
             <a:extLst>
               <a:ext uri="{91240B29-F687-4f45-9708-019B960494DF}">
-                <a14:hiddenLine xmlns:a14="http://schemas.microsoft.com/office/drawing/2010/main" xmlns="" w="9525">
+                <a14:hiddenLine xmlns="" xmlns:a14="http://schemas.microsoft.com/office/drawing/2010/main" w="9525">
                   <a:solidFill>
                     <a:srgbClr val="000000"/>
                   </a:solidFill>
@@ -1037,7 +1038,7 @@
             </a:ln>
             <a:extLst>
               <a:ext uri="{91240B29-F687-4f45-9708-019B960494DF}">
-                <a14:hiddenLine xmlns:a14="http://schemas.microsoft.com/office/drawing/2010/main" xmlns="" w="9525">
+                <a14:hiddenLine xmlns="" xmlns:a14="http://schemas.microsoft.com/office/drawing/2010/main" w="9525">
                   <a:solidFill>
                     <a:srgbClr val="000000"/>
                   </a:solidFill>
@@ -1099,7 +1100,7 @@
             </a:ln>
             <a:extLst>
               <a:ext uri="{91240B29-F687-4f45-9708-019B960494DF}">
-                <a14:hiddenLine xmlns:a14="http://schemas.microsoft.com/office/drawing/2010/main" xmlns="" w="9525">
+                <a14:hiddenLine xmlns="" xmlns:a14="http://schemas.microsoft.com/office/drawing/2010/main" w="9525">
                   <a:solidFill>
                     <a:srgbClr val="000000"/>
                   </a:solidFill>
@@ -1189,7 +1190,7 @@
             </a:ln>
             <a:extLst>
               <a:ext uri="{91240B29-F687-4f45-9708-019B960494DF}">
-                <a14:hiddenLine xmlns:a14="http://schemas.microsoft.com/office/drawing/2010/main" xmlns="" w="9525">
+                <a14:hiddenLine xmlns="" xmlns:a14="http://schemas.microsoft.com/office/drawing/2010/main" w="9525">
                   <a:solidFill>
                     <a:srgbClr val="000000"/>
                   </a:solidFill>
@@ -1251,7 +1252,7 @@
             </a:ln>
             <a:extLst>
               <a:ext uri="{91240B29-F687-4f45-9708-019B960494DF}">
-                <a14:hiddenLine xmlns:a14="http://schemas.microsoft.com/office/drawing/2010/main" xmlns="" w="9525">
+                <a14:hiddenLine xmlns="" xmlns:a14="http://schemas.microsoft.com/office/drawing/2010/main" w="9525">
                   <a:solidFill>
                     <a:srgbClr val="000000"/>
                   </a:solidFill>
@@ -1313,7 +1314,7 @@
             </a:ln>
             <a:extLst>
               <a:ext uri="{91240B29-F687-4f45-9708-019B960494DF}">
-                <a14:hiddenLine xmlns:a14="http://schemas.microsoft.com/office/drawing/2010/main" xmlns="" w="9525">
+                <a14:hiddenLine xmlns="" xmlns:a14="http://schemas.microsoft.com/office/drawing/2010/main" w="9525">
                   <a:solidFill>
                     <a:srgbClr val="000000"/>
                   </a:solidFill>
@@ -1403,7 +1404,7 @@
             </a:ln>
             <a:extLst>
               <a:ext uri="{91240B29-F687-4f45-9708-019B960494DF}">
-                <a14:hiddenLine xmlns:a14="http://schemas.microsoft.com/office/drawing/2010/main" xmlns="" w="9525">
+                <a14:hiddenLine xmlns="" xmlns:a14="http://schemas.microsoft.com/office/drawing/2010/main" w="9525">
                   <a:solidFill>
                     <a:srgbClr val="000000"/>
                   </a:solidFill>
@@ -1493,7 +1494,7 @@
             </a:ln>
             <a:extLst>
               <a:ext uri="{91240B29-F687-4f45-9708-019B960494DF}">
-                <a14:hiddenLine xmlns:a14="http://schemas.microsoft.com/office/drawing/2010/main" xmlns="" w="9525">
+                <a14:hiddenLine xmlns="" xmlns:a14="http://schemas.microsoft.com/office/drawing/2010/main" w="9525">
                   <a:solidFill>
                     <a:srgbClr val="000000"/>
                   </a:solidFill>
@@ -1555,7 +1556,7 @@
             </a:ln>
             <a:extLst>
               <a:ext uri="{91240B29-F687-4f45-9708-019B960494DF}">
-                <a14:hiddenLine xmlns:a14="http://schemas.microsoft.com/office/drawing/2010/main" xmlns="" w="9525">
+                <a14:hiddenLine xmlns="" xmlns:a14="http://schemas.microsoft.com/office/drawing/2010/main" w="9525">
                   <a:solidFill>
                     <a:srgbClr val="000000"/>
                   </a:solidFill>
@@ -1665,7 +1666,7 @@
             </a:ln>
             <a:extLst>
               <a:ext uri="{91240B29-F687-4f45-9708-019B960494DF}">
-                <a14:hiddenLine xmlns:a14="http://schemas.microsoft.com/office/drawing/2010/main" xmlns="" w="9525">
+                <a14:hiddenLine xmlns="" xmlns:a14="http://schemas.microsoft.com/office/drawing/2010/main" w="9525">
                   <a:solidFill>
                     <a:srgbClr val="000000"/>
                   </a:solidFill>
@@ -1727,7 +1728,7 @@
             </a:ln>
             <a:extLst>
               <a:ext uri="{91240B29-F687-4f45-9708-019B960494DF}">
-                <a14:hiddenLine xmlns:a14="http://schemas.microsoft.com/office/drawing/2010/main" xmlns="" w="9525">
+                <a14:hiddenLine xmlns="" xmlns:a14="http://schemas.microsoft.com/office/drawing/2010/main" w="9525">
                   <a:solidFill>
                     <a:srgbClr val="000000"/>
                   </a:solidFill>
@@ -1817,7 +1818,7 @@
             </a:ln>
             <a:extLst>
               <a:ext uri="{91240B29-F687-4f45-9708-019B960494DF}">
-                <a14:hiddenLine xmlns:a14="http://schemas.microsoft.com/office/drawing/2010/main" xmlns="" w="9525">
+                <a14:hiddenLine xmlns="" xmlns:a14="http://schemas.microsoft.com/office/drawing/2010/main" w="9525">
                   <a:solidFill>
                     <a:srgbClr val="000000"/>
                   </a:solidFill>
@@ -1907,7 +1908,7 @@
             </a:ln>
             <a:extLst>
               <a:ext uri="{91240B29-F687-4f45-9708-019B960494DF}">
-                <a14:hiddenLine xmlns:a14="http://schemas.microsoft.com/office/drawing/2010/main" xmlns="" w="9525">
+                <a14:hiddenLine xmlns="" xmlns:a14="http://schemas.microsoft.com/office/drawing/2010/main" w="9525">
                   <a:solidFill>
                     <a:srgbClr val="000000"/>
                   </a:solidFill>
@@ -1969,7 +1970,7 @@
             </a:ln>
             <a:extLst>
               <a:ext uri="{91240B29-F687-4f45-9708-019B960494DF}">
-                <a14:hiddenLine xmlns:a14="http://schemas.microsoft.com/office/drawing/2010/main" xmlns="" w="9525">
+                <a14:hiddenLine xmlns="" xmlns:a14="http://schemas.microsoft.com/office/drawing/2010/main" w="9525">
                   <a:solidFill>
                     <a:srgbClr val="000000"/>
                   </a:solidFill>
@@ -2059,7 +2060,7 @@
             </a:ln>
             <a:extLst>
               <a:ext uri="{91240B29-F687-4f45-9708-019B960494DF}">
-                <a14:hiddenLine xmlns:a14="http://schemas.microsoft.com/office/drawing/2010/main" xmlns="" w="9525">
+                <a14:hiddenLine xmlns="" xmlns:a14="http://schemas.microsoft.com/office/drawing/2010/main" w="9525">
                   <a:solidFill>
                     <a:srgbClr val="000000"/>
                   </a:solidFill>
@@ -2149,7 +2150,7 @@
             </a:ln>
             <a:extLst>
               <a:ext uri="{91240B29-F687-4f45-9708-019B960494DF}">
-                <a14:hiddenLine xmlns:a14="http://schemas.microsoft.com/office/drawing/2010/main" xmlns="" w="9525">
+                <a14:hiddenLine xmlns="" xmlns:a14="http://schemas.microsoft.com/office/drawing/2010/main" w="9525">
                   <a:solidFill>
                     <a:srgbClr val="000000"/>
                   </a:solidFill>
@@ -2205,7 +2206,7 @@
             </a:ln>
             <a:extLst>
               <a:ext uri="{91240B29-F687-4f45-9708-019B960494DF}">
-                <a14:hiddenLine xmlns:a14="http://schemas.microsoft.com/office/drawing/2010/main" xmlns="" w="9525">
+                <a14:hiddenLine xmlns="" xmlns:a14="http://schemas.microsoft.com/office/drawing/2010/main" w="9525">
                   <a:solidFill>
                     <a:srgbClr val="000000"/>
                   </a:solidFill>
@@ -2295,7 +2296,7 @@
             </a:ln>
             <a:extLst>
               <a:ext uri="{91240B29-F687-4f45-9708-019B960494DF}">
-                <a14:hiddenLine xmlns:a14="http://schemas.microsoft.com/office/drawing/2010/main" xmlns="" w="9525">
+                <a14:hiddenLine xmlns="" xmlns:a14="http://schemas.microsoft.com/office/drawing/2010/main" w="9525">
                   <a:solidFill>
                     <a:srgbClr val="000000"/>
                   </a:solidFill>
@@ -2351,7 +2352,7 @@
             </a:ln>
             <a:extLst>
               <a:ext uri="{91240B29-F687-4f45-9708-019B960494DF}">
-                <a14:hiddenLine xmlns:a14="http://schemas.microsoft.com/office/drawing/2010/main" xmlns="" w="9525">
+                <a14:hiddenLine xmlns="" xmlns:a14="http://schemas.microsoft.com/office/drawing/2010/main" w="9525">
                   <a:solidFill>
                     <a:srgbClr val="000000"/>
                   </a:solidFill>
@@ -2441,7 +2442,7 @@
             </a:ln>
             <a:extLst>
               <a:ext uri="{91240B29-F687-4f45-9708-019B960494DF}">
-                <a14:hiddenLine xmlns:a14="http://schemas.microsoft.com/office/drawing/2010/main" xmlns="" w="9525">
+                <a14:hiddenLine xmlns="" xmlns:a14="http://schemas.microsoft.com/office/drawing/2010/main" w="9525">
                   <a:solidFill>
                     <a:srgbClr val="000000"/>
                   </a:solidFill>
@@ -2509,7 +2510,7 @@
             </a:ln>
             <a:extLst>
               <a:ext uri="{91240B29-F687-4f45-9708-019B960494DF}">
-                <a14:hiddenLine xmlns:a14="http://schemas.microsoft.com/office/drawing/2010/main" xmlns="" w="9525">
+                <a14:hiddenLine xmlns="" xmlns:a14="http://schemas.microsoft.com/office/drawing/2010/main" w="9525">
                   <a:solidFill>
                     <a:srgbClr val="000000"/>
                   </a:solidFill>
@@ -2599,7 +2600,7 @@
             </a:ln>
             <a:extLst>
               <a:ext uri="{91240B29-F687-4f45-9708-019B960494DF}">
-                <a14:hiddenLine xmlns:a14="http://schemas.microsoft.com/office/drawing/2010/main" xmlns="" w="9525">
+                <a14:hiddenLine xmlns="" xmlns:a14="http://schemas.microsoft.com/office/drawing/2010/main" w="9525">
                   <a:solidFill>
                     <a:srgbClr val="000000"/>
                   </a:solidFill>
@@ -2667,7 +2668,7 @@
             </a:ln>
             <a:extLst>
               <a:ext uri="{91240B29-F687-4f45-9708-019B960494DF}">
-                <a14:hiddenLine xmlns:a14="http://schemas.microsoft.com/office/drawing/2010/main" xmlns="" w="9525">
+                <a14:hiddenLine xmlns="" xmlns:a14="http://schemas.microsoft.com/office/drawing/2010/main" w="9525">
                   <a:solidFill>
                     <a:srgbClr val="000000"/>
                   </a:solidFill>
@@ -2757,7 +2758,7 @@
             </a:ln>
             <a:extLst>
               <a:ext uri="{91240B29-F687-4f45-9708-019B960494DF}">
-                <a14:hiddenLine xmlns:a14="http://schemas.microsoft.com/office/drawing/2010/main" xmlns="" w="9525">
+                <a14:hiddenLine xmlns="" xmlns:a14="http://schemas.microsoft.com/office/drawing/2010/main" w="9525">
                   <a:solidFill>
                     <a:srgbClr val="000000"/>
                   </a:solidFill>
@@ -2791,7 +2792,7 @@
             </a:ln>
             <a:extLst>
               <a:ext uri="{91240B29-F687-4f45-9708-019B960494DF}">
-                <a14:hiddenLine xmlns:a14="http://schemas.microsoft.com/office/drawing/2010/main" xmlns="" w="9525">
+                <a14:hiddenLine xmlns="" xmlns:a14="http://schemas.microsoft.com/office/drawing/2010/main" w="9525">
                   <a:solidFill>
                     <a:srgbClr val="000000"/>
                   </a:solidFill>
@@ -2881,7 +2882,7 @@
             </a:ln>
             <a:extLst>
               <a:ext uri="{91240B29-F687-4f45-9708-019B960494DF}">
-                <a14:hiddenLine xmlns:a14="http://schemas.microsoft.com/office/drawing/2010/main" xmlns="" w="9525">
+                <a14:hiddenLine xmlns="" xmlns:a14="http://schemas.microsoft.com/office/drawing/2010/main" w="9525">
                   <a:solidFill>
                     <a:srgbClr val="000000"/>
                   </a:solidFill>
@@ -2943,7 +2944,7 @@
             </a:ln>
             <a:extLst>
               <a:ext uri="{91240B29-F687-4f45-9708-019B960494DF}">
-                <a14:hiddenLine xmlns:a14="http://schemas.microsoft.com/office/drawing/2010/main" xmlns="" w="9525">
+                <a14:hiddenLine xmlns="" xmlns:a14="http://schemas.microsoft.com/office/drawing/2010/main" w="9525">
                   <a:solidFill>
                     <a:srgbClr val="000000"/>
                   </a:solidFill>
@@ -3005,7 +3006,7 @@
             </a:ln>
             <a:extLst>
               <a:ext uri="{91240B29-F687-4f45-9708-019B960494DF}">
-                <a14:hiddenLine xmlns:a14="http://schemas.microsoft.com/office/drawing/2010/main" xmlns="" w="9525">
+                <a14:hiddenLine xmlns="" xmlns:a14="http://schemas.microsoft.com/office/drawing/2010/main" w="9525">
                   <a:solidFill>
                     <a:srgbClr val="000000"/>
                   </a:solidFill>
@@ -3095,7 +3096,7 @@
             </a:ln>
             <a:extLst>
               <a:ext uri="{91240B29-F687-4f45-9708-019B960494DF}">
-                <a14:hiddenLine xmlns:a14="http://schemas.microsoft.com/office/drawing/2010/main" xmlns="" w="9525">
+                <a14:hiddenLine xmlns="" xmlns:a14="http://schemas.microsoft.com/office/drawing/2010/main" w="9525">
                   <a:solidFill>
                     <a:srgbClr val="000000"/>
                   </a:solidFill>
@@ -3163,7 +3164,7 @@
             </a:ln>
             <a:extLst>
               <a:ext uri="{91240B29-F687-4f45-9708-019B960494DF}">
-                <a14:hiddenLine xmlns:a14="http://schemas.microsoft.com/office/drawing/2010/main" xmlns="" w="9525">
+                <a14:hiddenLine xmlns="" xmlns:a14="http://schemas.microsoft.com/office/drawing/2010/main" w="9525">
                   <a:solidFill>
                     <a:srgbClr val="000000"/>
                   </a:solidFill>
@@ -3225,7 +3226,7 @@
             </a:ln>
             <a:extLst>
               <a:ext uri="{91240B29-F687-4f45-9708-019B960494DF}">
-                <a14:hiddenLine xmlns:a14="http://schemas.microsoft.com/office/drawing/2010/main" xmlns="" w="9525">
+                <a14:hiddenLine xmlns="" xmlns:a14="http://schemas.microsoft.com/office/drawing/2010/main" w="9525">
                   <a:solidFill>
                     <a:srgbClr val="000000"/>
                   </a:solidFill>
@@ -3315,7 +3316,7 @@
             </a:ln>
             <a:extLst>
               <a:ext uri="{91240B29-F687-4f45-9708-019B960494DF}">
-                <a14:hiddenLine xmlns:a14="http://schemas.microsoft.com/office/drawing/2010/main" xmlns="" w="9525">
+                <a14:hiddenLine xmlns="" xmlns:a14="http://schemas.microsoft.com/office/drawing/2010/main" w="9525">
                   <a:solidFill>
                     <a:srgbClr val="000000"/>
                   </a:solidFill>
@@ -3377,7 +3378,7 @@
             </a:ln>
             <a:extLst>
               <a:ext uri="{91240B29-F687-4f45-9708-019B960494DF}">
-                <a14:hiddenLine xmlns:a14="http://schemas.microsoft.com/office/drawing/2010/main" xmlns="" w="9525">
+                <a14:hiddenLine xmlns="" xmlns:a14="http://schemas.microsoft.com/office/drawing/2010/main" w="9525">
                   <a:solidFill>
                     <a:srgbClr val="000000"/>
                   </a:solidFill>
@@ -3467,7 +3468,7 @@
             </a:ln>
             <a:extLst>
               <a:ext uri="{91240B29-F687-4f45-9708-019B960494DF}">
-                <a14:hiddenLine xmlns:a14="http://schemas.microsoft.com/office/drawing/2010/main" xmlns="" w="9525">
+                <a14:hiddenLine xmlns="" xmlns:a14="http://schemas.microsoft.com/office/drawing/2010/main" w="9525">
                   <a:solidFill>
                     <a:srgbClr val="000000"/>
                   </a:solidFill>
@@ -3529,7 +3530,7 @@
             </a:ln>
             <a:extLst>
               <a:ext uri="{91240B29-F687-4f45-9708-019B960494DF}">
-                <a14:hiddenLine xmlns:a14="http://schemas.microsoft.com/office/drawing/2010/main" xmlns="" w="9525">
+                <a14:hiddenLine xmlns="" xmlns:a14="http://schemas.microsoft.com/office/drawing/2010/main" w="9525">
                   <a:solidFill>
                     <a:srgbClr val="000000"/>
                   </a:solidFill>
@@ -3619,7 +3620,7 @@
             </a:ln>
             <a:extLst>
               <a:ext uri="{91240B29-F687-4f45-9708-019B960494DF}">
-                <a14:hiddenLine xmlns:a14="http://schemas.microsoft.com/office/drawing/2010/main" xmlns="" w="9525">
+                <a14:hiddenLine xmlns="" xmlns:a14="http://schemas.microsoft.com/office/drawing/2010/main" w="9525">
                   <a:solidFill>
                     <a:srgbClr val="000000"/>
                   </a:solidFill>
@@ -3653,7 +3654,7 @@
             </a:ln>
             <a:extLst>
               <a:ext uri="{91240B29-F687-4f45-9708-019B960494DF}">
-                <a14:hiddenLine xmlns:a14="http://schemas.microsoft.com/office/drawing/2010/main" xmlns="" w="9525">
+                <a14:hiddenLine xmlns="" xmlns:a14="http://schemas.microsoft.com/office/drawing/2010/main" w="9525">
                   <a:solidFill>
                     <a:srgbClr val="000000"/>
                   </a:solidFill>
@@ -3718,7 +3719,7 @@
             </a:ln>
             <a:extLst>
               <a:ext uri="{91240B29-F687-4f45-9708-019B960494DF}">
-                <a14:hiddenLine xmlns:a14="http://schemas.microsoft.com/office/drawing/2010/main" xmlns="" w="9525">
+                <a14:hiddenLine xmlns="" xmlns:a14="http://schemas.microsoft.com/office/drawing/2010/main" w="9525">
                   <a:solidFill>
                     <a:srgbClr val="000000"/>
                   </a:solidFill>
@@ -3808,7 +3809,7 @@
             </a:ln>
             <a:extLst>
               <a:ext uri="{91240B29-F687-4f45-9708-019B960494DF}">
-                <a14:hiddenLine xmlns:a14="http://schemas.microsoft.com/office/drawing/2010/main" xmlns="" w="9525">
+                <a14:hiddenLine xmlns="" xmlns:a14="http://schemas.microsoft.com/office/drawing/2010/main" w="9525">
                   <a:solidFill>
                     <a:srgbClr val="000000"/>
                   </a:solidFill>
@@ -3870,7 +3871,7 @@
             </a:ln>
             <a:extLst>
               <a:ext uri="{91240B29-F687-4f45-9708-019B960494DF}">
-                <a14:hiddenLine xmlns:a14="http://schemas.microsoft.com/office/drawing/2010/main" xmlns="" w="9525">
+                <a14:hiddenLine xmlns="" xmlns:a14="http://schemas.microsoft.com/office/drawing/2010/main" w="9525">
                   <a:solidFill>
                     <a:srgbClr val="000000"/>
                   </a:solidFill>
@@ -3960,7 +3961,7 @@
             </a:ln>
             <a:extLst>
               <a:ext uri="{91240B29-F687-4f45-9708-019B960494DF}">
-                <a14:hiddenLine xmlns:a14="http://schemas.microsoft.com/office/drawing/2010/main" xmlns="" w="9525">
+                <a14:hiddenLine xmlns="" xmlns:a14="http://schemas.microsoft.com/office/drawing/2010/main" w="9525">
                   <a:solidFill>
                     <a:srgbClr val="000000"/>
                   </a:solidFill>
@@ -4050,7 +4051,7 @@
             </a:ln>
             <a:extLst>
               <a:ext uri="{91240B29-F687-4f45-9708-019B960494DF}">
-                <a14:hiddenLine xmlns:a14="http://schemas.microsoft.com/office/drawing/2010/main" xmlns="" w="9525">
+                <a14:hiddenLine xmlns="" xmlns:a14="http://schemas.microsoft.com/office/drawing/2010/main" w="9525">
                   <a:solidFill>
                     <a:srgbClr val="000000"/>
                   </a:solidFill>
@@ -4115,7 +4116,7 @@
             </a:ln>
             <a:extLst>
               <a:ext uri="{91240B29-F687-4f45-9708-019B960494DF}">
-                <a14:hiddenLine xmlns:a14="http://schemas.microsoft.com/office/drawing/2010/main" xmlns="" w="9525">
+                <a14:hiddenLine xmlns="" xmlns:a14="http://schemas.microsoft.com/office/drawing/2010/main" w="9525">
                   <a:solidFill>
                     <a:srgbClr val="000000"/>
                   </a:solidFill>
@@ -4177,7 +4178,7 @@
             </a:ln>
             <a:extLst>
               <a:ext uri="{91240B29-F687-4f45-9708-019B960494DF}">
-                <a14:hiddenLine xmlns:a14="http://schemas.microsoft.com/office/drawing/2010/main" xmlns="" w="9525">
+                <a14:hiddenLine xmlns="" xmlns:a14="http://schemas.microsoft.com/office/drawing/2010/main" w="9525">
                   <a:solidFill>
                     <a:srgbClr val="000000"/>
                   </a:solidFill>
@@ -4267,7 +4268,7 @@
             </a:ln>
             <a:extLst>
               <a:ext uri="{91240B29-F687-4f45-9708-019B960494DF}">
-                <a14:hiddenLine xmlns:a14="http://schemas.microsoft.com/office/drawing/2010/main" xmlns="" w="9525">
+                <a14:hiddenLine xmlns="" xmlns:a14="http://schemas.microsoft.com/office/drawing/2010/main" w="9525">
                   <a:solidFill>
                     <a:srgbClr val="000000"/>
                   </a:solidFill>
@@ -4357,7 +4358,7 @@
             </a:ln>
             <a:extLst>
               <a:ext uri="{91240B29-F687-4f45-9708-019B960494DF}">
-                <a14:hiddenLine xmlns:a14="http://schemas.microsoft.com/office/drawing/2010/main" xmlns="" w="9525">
+                <a14:hiddenLine xmlns="" xmlns:a14="http://schemas.microsoft.com/office/drawing/2010/main" w="9525">
                   <a:solidFill>
                     <a:srgbClr val="000000"/>
                   </a:solidFill>
@@ -4419,7 +4420,7 @@
             </a:ln>
             <a:extLst>
               <a:ext uri="{91240B29-F687-4f45-9708-019B960494DF}">
-                <a14:hiddenLine xmlns:a14="http://schemas.microsoft.com/office/drawing/2010/main" xmlns="" w="9525">
+                <a14:hiddenLine xmlns="" xmlns:a14="http://schemas.microsoft.com/office/drawing/2010/main" w="9525">
                   <a:solidFill>
                     <a:srgbClr val="000000"/>
                   </a:solidFill>
@@ -4539,7 +4540,7 @@
             </a:ln>
             <a:extLst>
               <a:ext uri="{91240B29-F687-4f45-9708-019B960494DF}">
-                <a14:hiddenLine xmlns:a14="http://schemas.microsoft.com/office/drawing/2010/main" xmlns="" w="9525">
+                <a14:hiddenLine xmlns="" xmlns:a14="http://schemas.microsoft.com/office/drawing/2010/main" w="9525">
                   <a:solidFill>
                     <a:srgbClr val="000000"/>
                   </a:solidFill>
@@ -4607,7 +4608,7 @@
             </a:ln>
             <a:extLst>
               <a:ext uri="{91240B29-F687-4f45-9708-019B960494DF}">
-                <a14:hiddenLine xmlns:a14="http://schemas.microsoft.com/office/drawing/2010/main" xmlns="" w="9525">
+                <a14:hiddenLine xmlns="" xmlns:a14="http://schemas.microsoft.com/office/drawing/2010/main" w="9525">
                   <a:solidFill>
                     <a:srgbClr val="000000"/>
                   </a:solidFill>
@@ -4697,7 +4698,7 @@
             </a:ln>
             <a:extLst>
               <a:ext uri="{91240B29-F687-4f45-9708-019B960494DF}">
-                <a14:hiddenLine xmlns:a14="http://schemas.microsoft.com/office/drawing/2010/main" xmlns="" w="9525">
+                <a14:hiddenLine xmlns="" xmlns:a14="http://schemas.microsoft.com/office/drawing/2010/main" w="9525">
                   <a:solidFill>
                     <a:srgbClr val="000000"/>
                   </a:solidFill>
@@ -4837,7 +4838,7 @@
           <a:p>
             <a:fld id="{4313F670-7F9A-774D-B73D-573401E44297}" type="datetime1">
               <a:rPr lang="en-US" smtClean="0"/>
-              <a:t>7/21/26</a:t>
+              <a:t>7/22/26</a:t>
             </a:fld>
             <a:endParaRPr lang="en-US"/>
           </a:p>
@@ -5104,7 +5105,7 @@
           <a:p>
             <a:fld id="{446F9669-A8A7-2D40-9D01-B35FC337AA30}" type="datetime1">
               <a:rPr lang="en-US" smtClean="0"/>
-              <a:t>7/21/26</a:t>
+              <a:t>7/22/26</a:t>
             </a:fld>
             <a:endParaRPr lang="en-US"/>
           </a:p>
@@ -5300,7 +5301,7 @@
           <a:p>
             <a:fld id="{FA76CF18-F41B-6B48-B3E5-599E9795C2C3}" type="datetime1">
               <a:rPr lang="en-US" smtClean="0"/>
-              <a:t>7/21/26</a:t>
+              <a:t>7/22/26</a:t>
             </a:fld>
             <a:endParaRPr lang="en-US"/>
           </a:p>
@@ -5563,7 +5564,7 @@
           <a:p>
             <a:fld id="{B9654854-6457-164F-A077-6B3035079B82}" type="datetime1">
               <a:rPr lang="en-US" smtClean="0"/>
-              <a:t>7/21/26</a:t>
+              <a:t>7/22/26</a:t>
             </a:fld>
             <a:endParaRPr lang="en-US"/>
           </a:p>
@@ -5997,7 +5998,7 @@
           <a:p>
             <a:fld id="{CE3DBFD7-E611-8C40-AC73-0C29FF63F0CD}" type="datetime1">
               <a:rPr lang="en-US" smtClean="0"/>
-              <a:t>7/21/26</a:t>
+              <a:t>7/22/26</a:t>
             </a:fld>
             <a:endParaRPr lang="en-US"/>
           </a:p>
@@ -6543,7 +6544,7 @@
           <a:p>
             <a:fld id="{C8B63B06-0493-2840-9F37-30C9412BBF17}" type="datetime1">
               <a:rPr lang="en-US" smtClean="0"/>
-              <a:t>7/21/26</a:t>
+              <a:t>7/22/26</a:t>
             </a:fld>
             <a:endParaRPr lang="en-US"/>
           </a:p>
@@ -7263,7 +7264,7 @@
           <a:p>
             <a:fld id="{72B5C0FA-8C46-E84D-B6D7-B673F2CA0A0E}" type="datetime1">
               <a:rPr lang="en-US" smtClean="0"/>
-              <a:t>7/21/26</a:t>
+              <a:t>7/22/26</a:t>
             </a:fld>
             <a:endParaRPr lang="en-US"/>
           </a:p>
@@ -7433,7 +7434,7 @@
           <a:p>
             <a:fld id="{60B9CDE1-97B4-BF46-B69C-B86855B18820}" type="datetime1">
               <a:rPr lang="en-US" smtClean="0"/>
-              <a:t>7/21/26</a:t>
+              <a:t>7/22/26</a:t>
             </a:fld>
             <a:endParaRPr lang="en-US"/>
           </a:p>
@@ -7613,7 +7614,7 @@
           <a:p>
             <a:fld id="{BE51D3A4-F9E5-FD49-AA87-B395F50451DC}" type="datetime1">
               <a:rPr lang="en-US" smtClean="0"/>
-              <a:t>7/21/26</a:t>
+              <a:t>7/22/26</a:t>
             </a:fld>
             <a:endParaRPr lang="en-US"/>
           </a:p>
@@ -7783,7 +7784,7 @@
           <a:p>
             <a:fld id="{880DFB37-B0AE-9449-85EC-14F9C83B6084}" type="datetime1">
               <a:rPr lang="en-US" smtClean="0"/>
-              <a:t>7/21/26</a:t>
+              <a:t>7/22/26</a:t>
             </a:fld>
             <a:endParaRPr lang="en-US"/>
           </a:p>
@@ -8033,7 +8034,7 @@
           <a:p>
             <a:fld id="{C939124A-616E-6944-A21A-1839F5DBE7BB}" type="datetime1">
               <a:rPr lang="en-US" smtClean="0"/>
-              <a:t>7/21/26</a:t>
+              <a:t>7/22/26</a:t>
             </a:fld>
             <a:endParaRPr lang="en-US"/>
           </a:p>
@@ -8265,7 +8266,7 @@
           <a:p>
             <a:fld id="{C6E9A026-D48C-FD43-8676-CD625DD5D84B}" type="datetime1">
               <a:rPr lang="en-US" smtClean="0"/>
-              <a:t>7/21/26</a:t>
+              <a:t>7/22/26</a:t>
             </a:fld>
             <a:endParaRPr lang="en-US"/>
           </a:p>
@@ -8651,7 +8652,7 @@
           <a:p>
             <a:fld id="{EA35111E-23A3-1440-99A3-C4C665908E3D}" type="datetime1">
               <a:rPr lang="en-US" smtClean="0"/>
-              <a:t>7/21/26</a:t>
+              <a:t>7/22/26</a:t>
             </a:fld>
             <a:endParaRPr lang="en-US"/>
           </a:p>
@@ -8774,7 +8775,7 @@
           <a:p>
             <a:fld id="{249983B9-88EF-D74B-BA6D-6A3BF17C2B38}" type="datetime1">
               <a:rPr lang="en-US" smtClean="0"/>
-              <a:t>7/21/26</a:t>
+              <a:t>7/22/26</a:t>
             </a:fld>
             <a:endParaRPr lang="en-US"/>
           </a:p>
@@ -8869,7 +8870,7 @@
           <a:p>
             <a:fld id="{E2A00AEF-B4EC-084A-8DB8-A225C7981CBB}" type="datetime1">
               <a:rPr lang="en-US" smtClean="0"/>
-              <a:t>7/21/26</a:t>
+              <a:t>7/22/26</a:t>
             </a:fld>
             <a:endParaRPr lang="en-US"/>
           </a:p>
@@ -9118,7 +9119,7 @@
           <a:p>
             <a:fld id="{97860299-21CD-A94A-A7B0-44E787F8D42C}" type="datetime1">
               <a:rPr lang="en-US" smtClean="0"/>
-              <a:t>7/21/26</a:t>
+              <a:t>7/22/26</a:t>
             </a:fld>
             <a:endParaRPr lang="en-US"/>
           </a:p>
@@ -9403,7 +9404,7 @@
           <a:p>
             <a:fld id="{3DFD19CF-4E62-D246-BA61-7B528271315F}" type="datetime1">
               <a:rPr lang="en-US" smtClean="0"/>
-              <a:t>7/21/26</a:t>
+              <a:t>7/22/26</a:t>
             </a:fld>
             <a:endParaRPr lang="en-US"/>
           </a:p>
@@ -9526,7 +9527,7 @@
           <a:noFill/>
           <a:extLst>
             <a:ext uri="{909E8E84-426E-40dd-AFC4-6F175D3DCCD1}">
-              <a14:hiddenFill xmlns:a14="http://schemas.microsoft.com/office/drawing/2010/main" xmlns="">
+              <a14:hiddenFill xmlns="" xmlns:a14="http://schemas.microsoft.com/office/drawing/2010/main">
                 <a:solidFill>
                   <a:srgbClr val="FFFFFF"/>
                 </a:solidFill>
@@ -9600,7 +9601,7 @@
               </a:ln>
               <a:extLst>
                 <a:ext uri="{91240B29-F687-4f45-9708-019B960494DF}">
-                  <a14:hiddenLine xmlns:a14="http://schemas.microsoft.com/office/drawing/2010/main" xmlns="" w="9525">
+                  <a14:hiddenLine xmlns="" xmlns:a14="http://schemas.microsoft.com/office/drawing/2010/main" w="9525">
                     <a:solidFill>
                       <a:srgbClr val="000000"/>
                     </a:solidFill>
@@ -9690,7 +9691,7 @@
               </a:ln>
               <a:extLst>
                 <a:ext uri="{91240B29-F687-4f45-9708-019B960494DF}">
-                  <a14:hiddenLine xmlns:a14="http://schemas.microsoft.com/office/drawing/2010/main" xmlns="" w="9525">
+                  <a14:hiddenLine xmlns="" xmlns:a14="http://schemas.microsoft.com/office/drawing/2010/main" w="9525">
                     <a:solidFill>
                       <a:srgbClr val="000000"/>
                     </a:solidFill>
@@ -9780,7 +9781,7 @@
               </a:ln>
               <a:extLst>
                 <a:ext uri="{91240B29-F687-4f45-9708-019B960494DF}">
-                  <a14:hiddenLine xmlns:a14="http://schemas.microsoft.com/office/drawing/2010/main" xmlns="" w="9525">
+                  <a14:hiddenLine xmlns="" xmlns:a14="http://schemas.microsoft.com/office/drawing/2010/main" w="9525">
                     <a:solidFill>
                       <a:srgbClr val="000000"/>
                     </a:solidFill>
@@ -9842,7 +9843,7 @@
               </a:ln>
               <a:extLst>
                 <a:ext uri="{91240B29-F687-4f45-9708-019B960494DF}">
-                  <a14:hiddenLine xmlns:a14="http://schemas.microsoft.com/office/drawing/2010/main" xmlns="" w="9525">
+                  <a14:hiddenLine xmlns="" xmlns:a14="http://schemas.microsoft.com/office/drawing/2010/main" w="9525">
                     <a:solidFill>
                       <a:srgbClr val="000000"/>
                     </a:solidFill>
@@ -9932,7 +9933,7 @@
               </a:ln>
               <a:extLst>
                 <a:ext uri="{91240B29-F687-4f45-9708-019B960494DF}">
-                  <a14:hiddenLine xmlns:a14="http://schemas.microsoft.com/office/drawing/2010/main" xmlns="" w="9525">
+                  <a14:hiddenLine xmlns="" xmlns:a14="http://schemas.microsoft.com/office/drawing/2010/main" w="9525">
                     <a:solidFill>
                       <a:srgbClr val="000000"/>
                     </a:solidFill>
@@ -9994,7 +9995,7 @@
               </a:ln>
               <a:extLst>
                 <a:ext uri="{91240B29-F687-4f45-9708-019B960494DF}">
-                  <a14:hiddenLine xmlns:a14="http://schemas.microsoft.com/office/drawing/2010/main" xmlns="" w="9525">
+                  <a14:hiddenLine xmlns="" xmlns:a14="http://schemas.microsoft.com/office/drawing/2010/main" w="9525">
                     <a:solidFill>
                       <a:srgbClr val="000000"/>
                     </a:solidFill>
@@ -10056,7 +10057,7 @@
               </a:ln>
               <a:extLst>
                 <a:ext uri="{91240B29-F687-4f45-9708-019B960494DF}">
-                  <a14:hiddenLine xmlns:a14="http://schemas.microsoft.com/office/drawing/2010/main" xmlns="" w="9525">
+                  <a14:hiddenLine xmlns="" xmlns:a14="http://schemas.microsoft.com/office/drawing/2010/main" w="9525">
                     <a:solidFill>
                       <a:srgbClr val="000000"/>
                     </a:solidFill>
@@ -10146,7 +10147,7 @@
               </a:ln>
               <a:extLst>
                 <a:ext uri="{91240B29-F687-4f45-9708-019B960494DF}">
-                  <a14:hiddenLine xmlns:a14="http://schemas.microsoft.com/office/drawing/2010/main" xmlns="" w="9525">
+                  <a14:hiddenLine xmlns="" xmlns:a14="http://schemas.microsoft.com/office/drawing/2010/main" w="9525">
                     <a:solidFill>
                       <a:srgbClr val="000000"/>
                     </a:solidFill>
@@ -10236,7 +10237,7 @@
               </a:ln>
               <a:extLst>
                 <a:ext uri="{91240B29-F687-4f45-9708-019B960494DF}">
-                  <a14:hiddenLine xmlns:a14="http://schemas.microsoft.com/office/drawing/2010/main" xmlns="" w="9525">
+                  <a14:hiddenLine xmlns="" xmlns:a14="http://schemas.microsoft.com/office/drawing/2010/main" w="9525">
                     <a:solidFill>
                       <a:srgbClr val="000000"/>
                     </a:solidFill>
@@ -10298,7 +10299,7 @@
               </a:ln>
               <a:extLst>
                 <a:ext uri="{91240B29-F687-4f45-9708-019B960494DF}">
-                  <a14:hiddenLine xmlns:a14="http://schemas.microsoft.com/office/drawing/2010/main" xmlns="" w="9525">
+                  <a14:hiddenLine xmlns="" xmlns:a14="http://schemas.microsoft.com/office/drawing/2010/main" w="9525">
                     <a:solidFill>
                       <a:srgbClr val="000000"/>
                     </a:solidFill>
@@ -10408,7 +10409,7 @@
               </a:ln>
               <a:extLst>
                 <a:ext uri="{91240B29-F687-4f45-9708-019B960494DF}">
-                  <a14:hiddenLine xmlns:a14="http://schemas.microsoft.com/office/drawing/2010/main" xmlns="" w="9525">
+                  <a14:hiddenLine xmlns="" xmlns:a14="http://schemas.microsoft.com/office/drawing/2010/main" w="9525">
                     <a:solidFill>
                       <a:srgbClr val="000000"/>
                     </a:solidFill>
@@ -10492,7 +10493,7 @@
               </a:ln>
               <a:extLst>
                 <a:ext uri="{91240B29-F687-4f45-9708-019B960494DF}">
-                  <a14:hiddenLine xmlns:a14="http://schemas.microsoft.com/office/drawing/2010/main" xmlns="" w="9525">
+                  <a14:hiddenLine xmlns="" xmlns:a14="http://schemas.microsoft.com/office/drawing/2010/main" w="9525">
                     <a:solidFill>
                       <a:srgbClr val="000000"/>
                     </a:solidFill>
@@ -10554,7 +10555,7 @@
               </a:ln>
               <a:extLst>
                 <a:ext uri="{91240B29-F687-4f45-9708-019B960494DF}">
-                  <a14:hiddenLine xmlns:a14="http://schemas.microsoft.com/office/drawing/2010/main" xmlns="" w="9525">
+                  <a14:hiddenLine xmlns="" xmlns:a14="http://schemas.microsoft.com/office/drawing/2010/main" w="9525">
                     <a:solidFill>
                       <a:srgbClr val="000000"/>
                     </a:solidFill>
@@ -10616,7 +10617,7 @@
               </a:ln>
               <a:extLst>
                 <a:ext uri="{91240B29-F687-4f45-9708-019B960494DF}">
-                  <a14:hiddenLine xmlns:a14="http://schemas.microsoft.com/office/drawing/2010/main" xmlns="" w="9525">
+                  <a14:hiddenLine xmlns="" xmlns:a14="http://schemas.microsoft.com/office/drawing/2010/main" w="9525">
                     <a:solidFill>
                       <a:srgbClr val="000000"/>
                     </a:solidFill>
@@ -10706,7 +10707,7 @@
               </a:ln>
               <a:extLst>
                 <a:ext uri="{91240B29-F687-4f45-9708-019B960494DF}">
-                  <a14:hiddenLine xmlns:a14="http://schemas.microsoft.com/office/drawing/2010/main" xmlns="" w="9525">
+                  <a14:hiddenLine xmlns="" xmlns:a14="http://schemas.microsoft.com/office/drawing/2010/main" w="9525">
                     <a:solidFill>
                       <a:srgbClr val="000000"/>
                     </a:solidFill>
@@ -10740,7 +10741,7 @@
               </a:ln>
               <a:extLst>
                 <a:ext uri="{91240B29-F687-4f45-9708-019B960494DF}">
-                  <a14:hiddenLine xmlns:a14="http://schemas.microsoft.com/office/drawing/2010/main" xmlns="" w="9525">
+                  <a14:hiddenLine xmlns="" xmlns:a14="http://schemas.microsoft.com/office/drawing/2010/main" w="9525">
                     <a:solidFill>
                       <a:srgbClr val="000000"/>
                     </a:solidFill>
@@ -10805,7 +10806,7 @@
               </a:ln>
               <a:extLst>
                 <a:ext uri="{91240B29-F687-4f45-9708-019B960494DF}">
-                  <a14:hiddenLine xmlns:a14="http://schemas.microsoft.com/office/drawing/2010/main" xmlns="" w="9525">
+                  <a14:hiddenLine xmlns="" xmlns:a14="http://schemas.microsoft.com/office/drawing/2010/main" w="9525">
                     <a:solidFill>
                       <a:srgbClr val="000000"/>
                     </a:solidFill>
@@ -10895,7 +10896,7 @@
               </a:ln>
               <a:extLst>
                 <a:ext uri="{91240B29-F687-4f45-9708-019B960494DF}">
-                  <a14:hiddenLine xmlns:a14="http://schemas.microsoft.com/office/drawing/2010/main" xmlns="" w="9525">
+                  <a14:hiddenLine xmlns="" xmlns:a14="http://schemas.microsoft.com/office/drawing/2010/main" w="9525">
                     <a:solidFill>
                       <a:srgbClr val="000000"/>
                     </a:solidFill>
@@ -10957,7 +10958,7 @@
               </a:ln>
               <a:extLst>
                 <a:ext uri="{91240B29-F687-4f45-9708-019B960494DF}">
-                  <a14:hiddenLine xmlns:a14="http://schemas.microsoft.com/office/drawing/2010/main" xmlns="" w="9525">
+                  <a14:hiddenLine xmlns="" xmlns:a14="http://schemas.microsoft.com/office/drawing/2010/main" w="9525">
                     <a:solidFill>
                       <a:srgbClr val="000000"/>
                     </a:solidFill>
@@ -11047,7 +11048,7 @@
               </a:ln>
               <a:extLst>
                 <a:ext uri="{91240B29-F687-4f45-9708-019B960494DF}">
-                  <a14:hiddenLine xmlns:a14="http://schemas.microsoft.com/office/drawing/2010/main" xmlns="" w="9525">
+                  <a14:hiddenLine xmlns="" xmlns:a14="http://schemas.microsoft.com/office/drawing/2010/main" w="9525">
                     <a:solidFill>
                       <a:srgbClr val="000000"/>
                     </a:solidFill>
@@ -11112,7 +11113,7 @@
               </a:ln>
               <a:extLst>
                 <a:ext uri="{91240B29-F687-4f45-9708-019B960494DF}">
-                  <a14:hiddenLine xmlns:a14="http://schemas.microsoft.com/office/drawing/2010/main" xmlns="" w="9525">
+                  <a14:hiddenLine xmlns="" xmlns:a14="http://schemas.microsoft.com/office/drawing/2010/main" w="9525">
                     <a:solidFill>
                       <a:srgbClr val="000000"/>
                     </a:solidFill>
@@ -11174,7 +11175,7 @@
               </a:ln>
               <a:extLst>
                 <a:ext uri="{91240B29-F687-4f45-9708-019B960494DF}">
-                  <a14:hiddenLine xmlns:a14="http://schemas.microsoft.com/office/drawing/2010/main" xmlns="" w="9525">
+                  <a14:hiddenLine xmlns="" xmlns:a14="http://schemas.microsoft.com/office/drawing/2010/main" w="9525">
                     <a:solidFill>
                       <a:srgbClr val="000000"/>
                     </a:solidFill>
@@ -11264,7 +11265,7 @@
               </a:ln>
               <a:extLst>
                 <a:ext uri="{91240B29-F687-4f45-9708-019B960494DF}">
-                  <a14:hiddenLine xmlns:a14="http://schemas.microsoft.com/office/drawing/2010/main" xmlns="" w="9525">
+                  <a14:hiddenLine xmlns="" xmlns:a14="http://schemas.microsoft.com/office/drawing/2010/main" w="9525">
                     <a:solidFill>
                       <a:srgbClr val="000000"/>
                     </a:solidFill>
@@ -11354,7 +11355,7 @@
               </a:ln>
               <a:extLst>
                 <a:ext uri="{91240B29-F687-4f45-9708-019B960494DF}">
-                  <a14:hiddenLine xmlns:a14="http://schemas.microsoft.com/office/drawing/2010/main" xmlns="" w="9525">
+                  <a14:hiddenLine xmlns="" xmlns:a14="http://schemas.microsoft.com/office/drawing/2010/main" w="9525">
                     <a:solidFill>
                       <a:srgbClr val="000000"/>
                     </a:solidFill>
@@ -11419,7 +11420,7 @@
               </a:ln>
               <a:extLst>
                 <a:ext uri="{91240B29-F687-4f45-9708-019B960494DF}">
-                  <a14:hiddenLine xmlns:a14="http://schemas.microsoft.com/office/drawing/2010/main" xmlns="" w="9525">
+                  <a14:hiddenLine xmlns="" xmlns:a14="http://schemas.microsoft.com/office/drawing/2010/main" w="9525">
                     <a:solidFill>
                       <a:srgbClr val="000000"/>
                     </a:solidFill>
@@ -11539,7 +11540,7 @@
               </a:ln>
               <a:extLst>
                 <a:ext uri="{91240B29-F687-4f45-9708-019B960494DF}">
-                  <a14:hiddenLine xmlns:a14="http://schemas.microsoft.com/office/drawing/2010/main" xmlns="" w="9525">
+                  <a14:hiddenLine xmlns="" xmlns:a14="http://schemas.microsoft.com/office/drawing/2010/main" w="9525">
                     <a:solidFill>
                       <a:srgbClr val="000000"/>
                     </a:solidFill>
@@ -11620,7 +11621,7 @@
               </a:ln>
               <a:extLst>
                 <a:ext uri="{91240B29-F687-4f45-9708-019B960494DF}">
-                  <a14:hiddenLine xmlns:a14="http://schemas.microsoft.com/office/drawing/2010/main" xmlns="" w="9525">
+                  <a14:hiddenLine xmlns="" xmlns:a14="http://schemas.microsoft.com/office/drawing/2010/main" w="9525">
                     <a:solidFill>
                       <a:srgbClr val="000000"/>
                     </a:solidFill>
@@ -11735,7 +11736,7 @@
               </a:ln>
               <a:extLst>
                 <a:ext uri="{91240B29-F687-4f45-9708-019B960494DF}">
-                  <a14:hiddenLine xmlns:a14="http://schemas.microsoft.com/office/drawing/2010/main" xmlns="" w="9525">
+                  <a14:hiddenLine xmlns="" xmlns:a14="http://schemas.microsoft.com/office/drawing/2010/main" w="9525">
                     <a:solidFill>
                       <a:srgbClr val="000000"/>
                     </a:solidFill>
@@ -11825,7 +11826,7 @@
               </a:ln>
               <a:extLst>
                 <a:ext uri="{91240B29-F687-4f45-9708-019B960494DF}">
-                  <a14:hiddenLine xmlns:a14="http://schemas.microsoft.com/office/drawing/2010/main" xmlns="" w="9525">
+                  <a14:hiddenLine xmlns="" xmlns:a14="http://schemas.microsoft.com/office/drawing/2010/main" w="9525">
                     <a:solidFill>
                       <a:srgbClr val="000000"/>
                     </a:solidFill>
@@ -11890,7 +11891,7 @@
               </a:ln>
               <a:extLst>
                 <a:ext uri="{91240B29-F687-4f45-9708-019B960494DF}">
-                  <a14:hiddenLine xmlns:a14="http://schemas.microsoft.com/office/drawing/2010/main" xmlns="" w="9525">
+                  <a14:hiddenLine xmlns="" xmlns:a14="http://schemas.microsoft.com/office/drawing/2010/main" w="9525">
                     <a:solidFill>
                       <a:srgbClr val="000000"/>
                     </a:solidFill>
@@ -11980,7 +11981,7 @@
               </a:ln>
               <a:extLst>
                 <a:ext uri="{91240B29-F687-4f45-9708-019B960494DF}">
-                  <a14:hiddenLine xmlns:a14="http://schemas.microsoft.com/office/drawing/2010/main" xmlns="" w="9525">
+                  <a14:hiddenLine xmlns="" xmlns:a14="http://schemas.microsoft.com/office/drawing/2010/main" w="9525">
                     <a:solidFill>
                       <a:srgbClr val="000000"/>
                     </a:solidFill>
@@ -12048,7 +12049,7 @@
               </a:ln>
               <a:extLst>
                 <a:ext uri="{91240B29-F687-4f45-9708-019B960494DF}">
-                  <a14:hiddenLine xmlns:a14="http://schemas.microsoft.com/office/drawing/2010/main" xmlns="" w="9525">
+                  <a14:hiddenLine xmlns="" xmlns:a14="http://schemas.microsoft.com/office/drawing/2010/main" w="9525">
                     <a:solidFill>
                       <a:srgbClr val="000000"/>
                     </a:solidFill>
@@ -12138,7 +12139,7 @@
               </a:ln>
               <a:extLst>
                 <a:ext uri="{91240B29-F687-4f45-9708-019B960494DF}">
-                  <a14:hiddenLine xmlns:a14="http://schemas.microsoft.com/office/drawing/2010/main" xmlns="" w="9525">
+                  <a14:hiddenLine xmlns="" xmlns:a14="http://schemas.microsoft.com/office/drawing/2010/main" w="9525">
                     <a:solidFill>
                       <a:srgbClr val="000000"/>
                     </a:solidFill>
@@ -12206,7 +12207,7 @@
               </a:ln>
               <a:extLst>
                 <a:ext uri="{91240B29-F687-4f45-9708-019B960494DF}">
-                  <a14:hiddenLine xmlns:a14="http://schemas.microsoft.com/office/drawing/2010/main" xmlns="" w="9525">
+                  <a14:hiddenLine xmlns="" xmlns:a14="http://schemas.microsoft.com/office/drawing/2010/main" w="9525">
                     <a:solidFill>
                       <a:srgbClr val="000000"/>
                     </a:solidFill>
@@ -12296,7 +12297,7 @@
               </a:ln>
               <a:extLst>
                 <a:ext uri="{91240B29-F687-4f45-9708-019B960494DF}">
-                  <a14:hiddenLine xmlns:a14="http://schemas.microsoft.com/office/drawing/2010/main" xmlns="" w="9525">
+                  <a14:hiddenLine xmlns="" xmlns:a14="http://schemas.microsoft.com/office/drawing/2010/main" w="9525">
                     <a:solidFill>
                       <a:srgbClr val="000000"/>
                     </a:solidFill>
@@ -12330,7 +12331,7 @@
               </a:ln>
               <a:extLst>
                 <a:ext uri="{91240B29-F687-4f45-9708-019B960494DF}">
-                  <a14:hiddenLine xmlns:a14="http://schemas.microsoft.com/office/drawing/2010/main" xmlns="" w="9525">
+                  <a14:hiddenLine xmlns="" xmlns:a14="http://schemas.microsoft.com/office/drawing/2010/main" w="9525">
                     <a:solidFill>
                       <a:srgbClr val="000000"/>
                     </a:solidFill>
@@ -12470,7 +12471,7 @@
           <a:p>
             <a:fld id="{92FF8978-FE14-CC4A-93A6-934EB06543C0}" type="datetime1">
               <a:rPr lang="en-US" smtClean="0"/>
-              <a:t>7/21/26</a:t>
+              <a:t>7/22/26</a:t>
             </a:fld>
             <a:endParaRPr lang="en-US"/>
           </a:p>
@@ -14258,6 +14259,235 @@
 </file>
 
 <file path=ppt/slides/slide8.xml><?xml version="1.0" encoding="utf-8"?>
+<p:sld xmlns:a="http://schemas.openxmlformats.org/drawingml/2006/main" xmlns:r="http://schemas.openxmlformats.org/officeDocument/2006/relationships" xmlns:p="http://schemas.openxmlformats.org/presentationml/2006/main">
+  <p:cSld>
+    <p:spTree>
+      <p:nvGrpSpPr>
+        <p:cNvPr id="1" name="">
+          <a:extLst>
+            <a:ext uri="{FF2B5EF4-FFF2-40B4-BE49-F238E27FC236}">
+              <a16:creationId xmlns:a16="http://schemas.microsoft.com/office/drawing/2014/main" id="{63DC3DD8-4F8B-8749-5855-A11573B83898}"/>
+            </a:ext>
+          </a:extLst>
+        </p:cNvPr>
+        <p:cNvGrpSpPr/>
+        <p:nvPr/>
+      </p:nvGrpSpPr>
+      <p:grpSpPr>
+        <a:xfrm>
+          <a:off x="0" y="0"/>
+          <a:ext cx="0" cy="0"/>
+          <a:chOff x="0" y="0"/>
+          <a:chExt cx="0" cy="0"/>
+        </a:xfrm>
+      </p:grpSpPr>
+      <p:sp>
+        <p:nvSpPr>
+          <p:cNvPr id="6146" name="Rectangle 2">
+            <a:extLst>
+              <a:ext uri="{FF2B5EF4-FFF2-40B4-BE49-F238E27FC236}">
+                <a16:creationId xmlns:a16="http://schemas.microsoft.com/office/drawing/2014/main" id="{E24F0431-C398-C850-F3EC-F25D9C4D7F33}"/>
+              </a:ext>
+            </a:extLst>
+          </p:cNvPr>
+          <p:cNvSpPr>
+            <a:spLocks noGrp="1" noChangeArrowheads="1"/>
+          </p:cNvSpPr>
+          <p:nvPr>
+            <p:ph type="title"/>
+            <p:custDataLst>
+              <p:tags r:id="rId1"/>
+            </p:custDataLst>
+          </p:nvPr>
+        </p:nvSpPr>
+        <p:spPr>
+          <a:xfrm>
+            <a:off x="1141413" y="284084"/>
+            <a:ext cx="9905998" cy="620791"/>
+          </a:xfrm>
+        </p:spPr>
+        <p:txBody>
+          <a:bodyPr/>
+          <a:lstStyle/>
+          <a:p>
+            <a:pPr algn="ctr"/>
+            <a:r>
+              <a:rPr lang="en-US" dirty="0"/>
+              <a:t>Week 2: Wednesday</a:t>
+            </a:r>
+          </a:p>
+        </p:txBody>
+      </p:sp>
+      <p:sp>
+        <p:nvSpPr>
+          <p:cNvPr id="6147" name="Rectangle 3">
+            <a:extLst>
+              <a:ext uri="{FF2B5EF4-FFF2-40B4-BE49-F238E27FC236}">
+                <a16:creationId xmlns:a16="http://schemas.microsoft.com/office/drawing/2014/main" id="{40F36F83-327D-A4E3-9A28-E1CB7B524CEB}"/>
+              </a:ext>
+            </a:extLst>
+          </p:cNvPr>
+          <p:cNvSpPr>
+            <a:spLocks noGrp="1" noChangeArrowheads="1"/>
+          </p:cNvSpPr>
+          <p:nvPr>
+            <p:ph idx="1"/>
+            <p:custDataLst>
+              <p:tags r:id="rId2"/>
+            </p:custDataLst>
+          </p:nvPr>
+        </p:nvSpPr>
+        <p:spPr>
+          <a:xfrm>
+            <a:off x="1294151" y="1098548"/>
+            <a:ext cx="9600522" cy="5475367"/>
+          </a:xfrm>
+        </p:spPr>
+        <p:txBody>
+          <a:bodyPr>
+            <a:normAutofit lnSpcReduction="10000"/>
+          </a:bodyPr>
+          <a:lstStyle/>
+          <a:p>
+            <a:r>
+              <a:rPr lang="en-US" dirty="0">
+                <a:latin typeface="Arial" panose="020B0604020202020204" pitchFamily="34" charset="0"/>
+                <a:cs typeface="Arial" panose="020B0604020202020204" pitchFamily="34" charset="0"/>
+              </a:rPr>
+              <a:t>Welcome to week 2!!</a:t>
+            </a:r>
+          </a:p>
+          <a:p>
+            <a:r>
+              <a:rPr lang="en-US" dirty="0">
+                <a:latin typeface="Arial" panose="020B0604020202020204" pitchFamily="34" charset="0"/>
+                <a:cs typeface="Arial" panose="020B0604020202020204" pitchFamily="34" charset="0"/>
+              </a:rPr>
+              <a:t>This week:</a:t>
+            </a:r>
+          </a:p>
+          <a:p>
+            <a:pPr lvl="1"/>
+            <a:r>
+              <a:rPr lang="en-US" dirty="0">
+                <a:latin typeface="Arial" panose="020B0604020202020204" pitchFamily="34" charset="0"/>
+                <a:cs typeface="Arial" panose="020B0604020202020204" pitchFamily="34" charset="0"/>
+              </a:rPr>
+              <a:t>Programming assignment due Thursday evening</a:t>
+            </a:r>
+          </a:p>
+          <a:p>
+            <a:pPr lvl="1"/>
+            <a:r>
+              <a:rPr lang="en-US" dirty="0">
+                <a:latin typeface="Arial" panose="020B0604020202020204" pitchFamily="34" charset="0"/>
+                <a:cs typeface="Arial" panose="020B0604020202020204" pitchFamily="34" charset="0"/>
+              </a:rPr>
+              <a:t>First Midterm is on Friday (no lecture on Friday)</a:t>
+            </a:r>
+          </a:p>
+          <a:p>
+            <a:r>
+              <a:rPr lang="en-US" dirty="0">
+                <a:latin typeface="Arial" panose="020B0604020202020204" pitchFamily="34" charset="0"/>
+                <a:cs typeface="Arial" panose="020B0604020202020204" pitchFamily="34" charset="0"/>
+              </a:rPr>
+              <a:t>Lecture recordings from last Fall are posted on Panopto on Canvas</a:t>
+            </a:r>
+          </a:p>
+          <a:p>
+            <a:pPr lvl="1"/>
+            <a:r>
+              <a:rPr lang="en-US" dirty="0">
+                <a:latin typeface="Arial" panose="020B0604020202020204" pitchFamily="34" charset="0"/>
+                <a:cs typeface="Arial" panose="020B0604020202020204" pitchFamily="34" charset="0"/>
+              </a:rPr>
+              <a:t>I posted ALL the videos FYI</a:t>
+            </a:r>
+          </a:p>
+          <a:p>
+            <a:pPr lvl="1"/>
+            <a:r>
+              <a:rPr lang="en-US" dirty="0">
+                <a:latin typeface="Arial" panose="020B0604020202020204" pitchFamily="34" charset="0"/>
+                <a:cs typeface="Arial" panose="020B0604020202020204" pitchFamily="34" charset="0"/>
+              </a:rPr>
+              <a:t>For this module, you watch from oldest through “Pump. Lemma + Begin Mod 3”</a:t>
+            </a:r>
+          </a:p>
+          <a:p>
+            <a:r>
+              <a:rPr lang="en-US" dirty="0">
+                <a:latin typeface="Arial" panose="020B0604020202020204" pitchFamily="34" charset="0"/>
+                <a:cs typeface="Arial" panose="020B0604020202020204" pitchFamily="34" charset="0"/>
+              </a:rPr>
+              <a:t>Please remember that I am asking for NO laptop / phones!</a:t>
+            </a:r>
+          </a:p>
+          <a:p>
+            <a:pPr lvl="1"/>
+            <a:r>
+              <a:rPr lang="en-US" dirty="0">
+                <a:latin typeface="Arial" panose="020B0604020202020204" pitchFamily="34" charset="0"/>
+                <a:cs typeface="Arial" panose="020B0604020202020204" pitchFamily="34" charset="0"/>
+              </a:rPr>
+              <a:t>This makes the learning environment better for everybody. I appreciate it!</a:t>
+            </a:r>
+          </a:p>
+          <a:p>
+            <a:r>
+              <a:rPr lang="en-US" dirty="0">
+                <a:latin typeface="Arial" panose="020B0604020202020204" pitchFamily="34" charset="0"/>
+                <a:cs typeface="Arial" panose="020B0604020202020204" pitchFamily="34" charset="0"/>
+              </a:rPr>
+              <a:t>Attendance continues today as usual.</a:t>
+            </a:r>
+          </a:p>
+          <a:p>
+            <a:r>
+              <a:rPr lang="en-US" dirty="0">
+                <a:latin typeface="Arial" panose="020B0604020202020204" pitchFamily="34" charset="0"/>
+                <a:cs typeface="Arial" panose="020B0604020202020204" pitchFamily="34" charset="0"/>
+              </a:rPr>
+              <a:t>Today </a:t>
+            </a:r>
+            <a:r>
+              <a:rPr lang="en-US">
+                <a:latin typeface="Arial" panose="020B0604020202020204" pitchFamily="34" charset="0"/>
+                <a:cs typeface="Arial" panose="020B0604020202020204" pitchFamily="34" charset="0"/>
+              </a:rPr>
+              <a:t>we continue </a:t>
+            </a:r>
+            <a:r>
+              <a:rPr lang="en-US" dirty="0">
+                <a:latin typeface="Arial" panose="020B0604020202020204" pitchFamily="34" charset="0"/>
+                <a:cs typeface="Arial" panose="020B0604020202020204" pitchFamily="34" charset="0"/>
+              </a:rPr>
+              <a:t>Module 2! The Context-Free Languages!</a:t>
+            </a:r>
+          </a:p>
+          <a:p>
+            <a:endParaRPr lang="en-US" dirty="0">
+              <a:latin typeface="Arial" panose="020B0604020202020204" pitchFamily="34" charset="0"/>
+              <a:cs typeface="Arial" panose="020B0604020202020204" pitchFamily="34" charset="0"/>
+            </a:endParaRPr>
+          </a:p>
+        </p:txBody>
+      </p:sp>
+    </p:spTree>
+    <p:extLst>
+      <p:ext uri="{BB962C8B-B14F-4D97-AF65-F5344CB8AC3E}">
+        <p14:creationId xmlns:p14="http://schemas.microsoft.com/office/powerpoint/2010/main" val="3983308769"/>
+      </p:ext>
+    </p:extLst>
+  </p:cSld>
+  <p:clrMapOvr>
+    <a:masterClrMapping/>
+  </p:clrMapOvr>
+</p:sld>
+</file>
+
+<file path=ppt/slides/slide9.xml><?xml version="1.0" encoding="utf-8"?>
 <p:sld xmlns:a="http://schemas.openxmlformats.org/drawingml/2006/main" xmlns:r="http://schemas.openxmlformats.org/officeDocument/2006/relationships" xmlns:p="http://schemas.openxmlformats.org/presentationml/2006/main">
   <p:cSld>
     <p:spTree>
@@ -16179,6 +16409,18 @@
 </p:tagLst>
 </file>
 
+<file path=ppt/tags/tag18.xml><?xml version="1.0" encoding="utf-8"?>
+<p:tagLst xmlns:a="http://schemas.openxmlformats.org/drawingml/2006/main" xmlns:r="http://schemas.openxmlformats.org/officeDocument/2006/relationships" xmlns:p="http://schemas.openxmlformats.org/presentationml/2006/main">
+  <p:tag name="_INSTRUCTOR VIEW19C14C36-AC8E-43BC-9DB6-C2AAF774C7DC|PANE__TAG" val="_"/>
+</p:tagLst>
+</file>
+
+<file path=ppt/tags/tag19.xml><?xml version="1.0" encoding="utf-8"?>
+<p:tagLst xmlns:a="http://schemas.openxmlformats.org/drawingml/2006/main" xmlns:r="http://schemas.openxmlformats.org/officeDocument/2006/relationships" xmlns:p="http://schemas.openxmlformats.org/presentationml/2006/main">
+  <p:tag name="_INSTRUCTOR VIEW19C14C36-AC8E-43BC-9DB6-C2AAF774C7DC|PANE__TAG" val="_"/>
+</p:tagLst>
+</file>
+
 <file path=ppt/tags/tag2.xml><?xml version="1.0" encoding="utf-8"?>
 <p:tagLst xmlns:a="http://schemas.openxmlformats.org/drawingml/2006/main" xmlns:r="http://schemas.openxmlformats.org/officeDocument/2006/relationships" xmlns:p="http://schemas.openxmlformats.org/presentationml/2006/main">
   <p:tag name="_INSTRUCTOR VIEW19C14C36-AC8E-43BC-9DB6-C2AAF774C7DC|PANE__TAG" val="_"/>

--- a/slides/00-DailyAnnouncements.pptx
+++ b/slides/00-DailyAnnouncements.pptx
@@ -5,7 +5,7 @@
     <p:sldMasterId id="2147484006" r:id="rId1"/>
   </p:sldMasterIdLst>
   <p:notesMasterIdLst>
-    <p:notesMasterId r:id="rId11"/>
+    <p:notesMasterId r:id="rId12"/>
   </p:notesMasterIdLst>
   <p:sldIdLst>
     <p:sldId id="256" r:id="rId2"/>
@@ -16,7 +16,8 @@
     <p:sldId id="519" r:id="rId7"/>
     <p:sldId id="520" r:id="rId8"/>
     <p:sldId id="521" r:id="rId9"/>
-    <p:sldId id="515" r:id="rId10"/>
+    <p:sldId id="522" r:id="rId10"/>
+    <p:sldId id="515" r:id="rId11"/>
   </p:sldIdLst>
   <p:sldSz cx="12192000" cy="6858000"/>
   <p:notesSz cx="6858000" cy="9144000"/>
@@ -205,7 +206,7 @@
           <a:p>
             <a:fld id="{C5B45307-6ED4-B142-BD64-10F739779302}" type="datetimeFigureOut">
               <a:rPr lang="en-US" smtClean="0"/>
-              <a:t>7/22/26</a:t>
+              <a:t>7/23/26</a:t>
             </a:fld>
             <a:endParaRPr lang="en-US"/>
           </a:p>
@@ -4838,7 +4839,7 @@
           <a:p>
             <a:fld id="{4313F670-7F9A-774D-B73D-573401E44297}" type="datetime1">
               <a:rPr lang="en-US" smtClean="0"/>
-              <a:t>7/22/26</a:t>
+              <a:t>7/23/26</a:t>
             </a:fld>
             <a:endParaRPr lang="en-US"/>
           </a:p>
@@ -5105,7 +5106,7 @@
           <a:p>
             <a:fld id="{446F9669-A8A7-2D40-9D01-B35FC337AA30}" type="datetime1">
               <a:rPr lang="en-US" smtClean="0"/>
-              <a:t>7/22/26</a:t>
+              <a:t>7/23/26</a:t>
             </a:fld>
             <a:endParaRPr lang="en-US"/>
           </a:p>
@@ -5301,7 +5302,7 @@
           <a:p>
             <a:fld id="{FA76CF18-F41B-6B48-B3E5-599E9795C2C3}" type="datetime1">
               <a:rPr lang="en-US" smtClean="0"/>
-              <a:t>7/22/26</a:t>
+              <a:t>7/23/26</a:t>
             </a:fld>
             <a:endParaRPr lang="en-US"/>
           </a:p>
@@ -5564,7 +5565,7 @@
           <a:p>
             <a:fld id="{B9654854-6457-164F-A077-6B3035079B82}" type="datetime1">
               <a:rPr lang="en-US" smtClean="0"/>
-              <a:t>7/22/26</a:t>
+              <a:t>7/23/26</a:t>
             </a:fld>
             <a:endParaRPr lang="en-US"/>
           </a:p>
@@ -5998,7 +5999,7 @@
           <a:p>
             <a:fld id="{CE3DBFD7-E611-8C40-AC73-0C29FF63F0CD}" type="datetime1">
               <a:rPr lang="en-US" smtClean="0"/>
-              <a:t>7/22/26</a:t>
+              <a:t>7/23/26</a:t>
             </a:fld>
             <a:endParaRPr lang="en-US"/>
           </a:p>
@@ -6544,7 +6545,7 @@
           <a:p>
             <a:fld id="{C8B63B06-0493-2840-9F37-30C9412BBF17}" type="datetime1">
               <a:rPr lang="en-US" smtClean="0"/>
-              <a:t>7/22/26</a:t>
+              <a:t>7/23/26</a:t>
             </a:fld>
             <a:endParaRPr lang="en-US"/>
           </a:p>
@@ -7264,7 +7265,7 @@
           <a:p>
             <a:fld id="{72B5C0FA-8C46-E84D-B6D7-B673F2CA0A0E}" type="datetime1">
               <a:rPr lang="en-US" smtClean="0"/>
-              <a:t>7/22/26</a:t>
+              <a:t>7/23/26</a:t>
             </a:fld>
             <a:endParaRPr lang="en-US"/>
           </a:p>
@@ -7434,7 +7435,7 @@
           <a:p>
             <a:fld id="{60B9CDE1-97B4-BF46-B69C-B86855B18820}" type="datetime1">
               <a:rPr lang="en-US" smtClean="0"/>
-              <a:t>7/22/26</a:t>
+              <a:t>7/23/26</a:t>
             </a:fld>
             <a:endParaRPr lang="en-US"/>
           </a:p>
@@ -7614,7 +7615,7 @@
           <a:p>
             <a:fld id="{BE51D3A4-F9E5-FD49-AA87-B395F50451DC}" type="datetime1">
               <a:rPr lang="en-US" smtClean="0"/>
-              <a:t>7/22/26</a:t>
+              <a:t>7/23/26</a:t>
             </a:fld>
             <a:endParaRPr lang="en-US"/>
           </a:p>
@@ -7784,7 +7785,7 @@
           <a:p>
             <a:fld id="{880DFB37-B0AE-9449-85EC-14F9C83B6084}" type="datetime1">
               <a:rPr lang="en-US" smtClean="0"/>
-              <a:t>7/22/26</a:t>
+              <a:t>7/23/26</a:t>
             </a:fld>
             <a:endParaRPr lang="en-US"/>
           </a:p>
@@ -8034,7 +8035,7 @@
           <a:p>
             <a:fld id="{C939124A-616E-6944-A21A-1839F5DBE7BB}" type="datetime1">
               <a:rPr lang="en-US" smtClean="0"/>
-              <a:t>7/22/26</a:t>
+              <a:t>7/23/26</a:t>
             </a:fld>
             <a:endParaRPr lang="en-US"/>
           </a:p>
@@ -8266,7 +8267,7 @@
           <a:p>
             <a:fld id="{C6E9A026-D48C-FD43-8676-CD625DD5D84B}" type="datetime1">
               <a:rPr lang="en-US" smtClean="0"/>
-              <a:t>7/22/26</a:t>
+              <a:t>7/23/26</a:t>
             </a:fld>
             <a:endParaRPr lang="en-US"/>
           </a:p>
@@ -8652,7 +8653,7 @@
           <a:p>
             <a:fld id="{EA35111E-23A3-1440-99A3-C4C665908E3D}" type="datetime1">
               <a:rPr lang="en-US" smtClean="0"/>
-              <a:t>7/22/26</a:t>
+              <a:t>7/23/26</a:t>
             </a:fld>
             <a:endParaRPr lang="en-US"/>
           </a:p>
@@ -8775,7 +8776,7 @@
           <a:p>
             <a:fld id="{249983B9-88EF-D74B-BA6D-6A3BF17C2B38}" type="datetime1">
               <a:rPr lang="en-US" smtClean="0"/>
-              <a:t>7/22/26</a:t>
+              <a:t>7/23/26</a:t>
             </a:fld>
             <a:endParaRPr lang="en-US"/>
           </a:p>
@@ -8870,7 +8871,7 @@
           <a:p>
             <a:fld id="{E2A00AEF-B4EC-084A-8DB8-A225C7981CBB}" type="datetime1">
               <a:rPr lang="en-US" smtClean="0"/>
-              <a:t>7/22/26</a:t>
+              <a:t>7/23/26</a:t>
             </a:fld>
             <a:endParaRPr lang="en-US"/>
           </a:p>
@@ -9119,7 +9120,7 @@
           <a:p>
             <a:fld id="{97860299-21CD-A94A-A7B0-44E787F8D42C}" type="datetime1">
               <a:rPr lang="en-US" smtClean="0"/>
-              <a:t>7/22/26</a:t>
+              <a:t>7/23/26</a:t>
             </a:fld>
             <a:endParaRPr lang="en-US"/>
           </a:p>
@@ -9404,7 +9405,7 @@
           <a:p>
             <a:fld id="{3DFD19CF-4E62-D246-BA61-7B528271315F}" type="datetime1">
               <a:rPr lang="en-US" smtClean="0"/>
-              <a:t>7/22/26</a:t>
+              <a:t>7/23/26</a:t>
             </a:fld>
             <a:endParaRPr lang="en-US"/>
           </a:p>
@@ -12471,7 +12472,7 @@
           <a:p>
             <a:fld id="{92FF8978-FE14-CC4A-93A6-934EB06543C0}" type="datetime1">
               <a:rPr lang="en-US" smtClean="0"/>
-              <a:t>7/22/26</a:t>
+              <a:t>7/23/26</a:t>
             </a:fld>
             <a:endParaRPr lang="en-US"/>
           </a:p>
@@ -12989,1505 +12990,7 @@
 </p:sld>
 </file>
 
-<file path=ppt/slides/slide2.xml><?xml version="1.0" encoding="utf-8"?>
-<p:sld xmlns:a="http://schemas.openxmlformats.org/drawingml/2006/main" xmlns:r="http://schemas.openxmlformats.org/officeDocument/2006/relationships" xmlns:p="http://schemas.openxmlformats.org/presentationml/2006/main">
-  <p:cSld>
-    <p:spTree>
-      <p:nvGrpSpPr>
-        <p:cNvPr id="1" name=""/>
-        <p:cNvGrpSpPr/>
-        <p:nvPr/>
-      </p:nvGrpSpPr>
-      <p:grpSpPr>
-        <a:xfrm>
-          <a:off x="0" y="0"/>
-          <a:ext cx="0" cy="0"/>
-          <a:chOff x="0" y="0"/>
-          <a:chExt cx="0" cy="0"/>
-        </a:xfrm>
-      </p:grpSpPr>
-      <p:sp>
-        <p:nvSpPr>
-          <p:cNvPr id="6146" name="Rectangle 2"/>
-          <p:cNvSpPr>
-            <a:spLocks noGrp="1" noChangeArrowheads="1"/>
-          </p:cNvSpPr>
-          <p:nvPr>
-            <p:ph type="title"/>
-            <p:custDataLst>
-              <p:tags r:id="rId1"/>
-            </p:custDataLst>
-          </p:nvPr>
-        </p:nvSpPr>
-        <p:spPr>
-          <a:xfrm>
-            <a:off x="1141413" y="284084"/>
-            <a:ext cx="9905998" cy="620791"/>
-          </a:xfrm>
-        </p:spPr>
-        <p:txBody>
-          <a:bodyPr/>
-          <a:lstStyle/>
-          <a:p>
-            <a:pPr algn="ctr"/>
-            <a:r>
-              <a:rPr lang="en-US" dirty="0"/>
-              <a:t>Week 1: Tuesday</a:t>
-            </a:r>
-          </a:p>
-        </p:txBody>
-      </p:sp>
-      <p:sp>
-        <p:nvSpPr>
-          <p:cNvPr id="6147" name="Rectangle 3"/>
-          <p:cNvSpPr>
-            <a:spLocks noGrp="1" noChangeArrowheads="1"/>
-          </p:cNvSpPr>
-          <p:nvPr>
-            <p:ph idx="1"/>
-            <p:custDataLst>
-              <p:tags r:id="rId2"/>
-            </p:custDataLst>
-          </p:nvPr>
-        </p:nvSpPr>
-        <p:spPr>
-          <a:xfrm>
-            <a:off x="1294151" y="1098549"/>
-            <a:ext cx="9600522" cy="5149850"/>
-          </a:xfrm>
-        </p:spPr>
-        <p:txBody>
-          <a:bodyPr>
-            <a:normAutofit/>
-          </a:bodyPr>
-          <a:lstStyle/>
-          <a:p>
-            <a:r>
-              <a:rPr lang="en-US" dirty="0">
-                <a:latin typeface="Arial" panose="020B0604020202020204" pitchFamily="34" charset="0"/>
-                <a:cs typeface="Arial" panose="020B0604020202020204" pitchFamily="34" charset="0"/>
-              </a:rPr>
-              <a:t>First homework is due Tomorrow evening (Wednesday)</a:t>
-            </a:r>
-          </a:p>
-          <a:p>
-            <a:pPr lvl="1"/>
-            <a:r>
-              <a:rPr lang="en-US" dirty="0">
-                <a:latin typeface="Arial" panose="020B0604020202020204" pitchFamily="34" charset="0"/>
-                <a:cs typeface="Arial" panose="020B0604020202020204" pitchFamily="34" charset="0"/>
-              </a:rPr>
-              <a:t>3 day extension if you really need it but you really should try not to use it for this one.</a:t>
-            </a:r>
-          </a:p>
-          <a:p>
-            <a:r>
-              <a:rPr lang="en-US" dirty="0">
-                <a:latin typeface="Arial" panose="020B0604020202020204" pitchFamily="34" charset="0"/>
-                <a:cs typeface="Arial" panose="020B0604020202020204" pitchFamily="34" charset="0"/>
-              </a:rPr>
-              <a:t>Please remember that I am asking for NO laptop / phones!</a:t>
-            </a:r>
-          </a:p>
-          <a:p>
-            <a:pPr lvl="1"/>
-            <a:r>
-              <a:rPr lang="en-US" dirty="0">
-                <a:latin typeface="Arial" panose="020B0604020202020204" pitchFamily="34" charset="0"/>
-                <a:cs typeface="Arial" panose="020B0604020202020204" pitchFamily="34" charset="0"/>
-              </a:rPr>
-              <a:t>This makes the learning environment better for everybody. I appreciate it!</a:t>
-            </a:r>
-          </a:p>
-          <a:p>
-            <a:r>
-              <a:rPr lang="en-US" dirty="0">
-                <a:latin typeface="Arial" panose="020B0604020202020204" pitchFamily="34" charset="0"/>
-                <a:cs typeface="Arial" panose="020B0604020202020204" pitchFamily="34" charset="0"/>
-              </a:rPr>
-              <a:t>I’ll start properly taking attendance today.</a:t>
-            </a:r>
-          </a:p>
-          <a:p>
-            <a:r>
-              <a:rPr lang="en-US" dirty="0">
-                <a:latin typeface="Arial" panose="020B0604020202020204" pitchFamily="34" charset="0"/>
-                <a:cs typeface="Arial" panose="020B0604020202020204" pitchFamily="34" charset="0"/>
-              </a:rPr>
-              <a:t>We will finish our warm-up / module 0 material today and hopefully begin module 1 (where the class REALLY begins)</a:t>
-            </a:r>
-          </a:p>
-          <a:p>
-            <a:endParaRPr lang="en-US" dirty="0">
-              <a:latin typeface="Arial" panose="020B0604020202020204" pitchFamily="34" charset="0"/>
-              <a:cs typeface="Arial" panose="020B0604020202020204" pitchFamily="34" charset="0"/>
-            </a:endParaRPr>
-          </a:p>
-        </p:txBody>
-      </p:sp>
-    </p:spTree>
-    <p:extLst>
-      <p:ext uri="{BB962C8B-B14F-4D97-AF65-F5344CB8AC3E}">
-        <p14:creationId xmlns:p14="http://schemas.microsoft.com/office/powerpoint/2010/main" val="2431754002"/>
-      </p:ext>
-    </p:extLst>
-  </p:cSld>
-  <p:clrMapOvr>
-    <a:masterClrMapping/>
-  </p:clrMapOvr>
-</p:sld>
-</file>
-
-<file path=ppt/slides/slide3.xml><?xml version="1.0" encoding="utf-8"?>
-<p:sld xmlns:a="http://schemas.openxmlformats.org/drawingml/2006/main" xmlns:r="http://schemas.openxmlformats.org/officeDocument/2006/relationships" xmlns:p="http://schemas.openxmlformats.org/presentationml/2006/main">
-  <p:cSld>
-    <p:spTree>
-      <p:nvGrpSpPr>
-        <p:cNvPr id="1" name="">
-          <a:extLst>
-            <a:ext uri="{FF2B5EF4-FFF2-40B4-BE49-F238E27FC236}">
-              <a16:creationId xmlns:a16="http://schemas.microsoft.com/office/drawing/2014/main" id="{FCA32411-328E-66E8-E6F4-EF539979CE9D}"/>
-            </a:ext>
-          </a:extLst>
-        </p:cNvPr>
-        <p:cNvGrpSpPr/>
-        <p:nvPr/>
-      </p:nvGrpSpPr>
-      <p:grpSpPr>
-        <a:xfrm>
-          <a:off x="0" y="0"/>
-          <a:ext cx="0" cy="0"/>
-          <a:chOff x="0" y="0"/>
-          <a:chExt cx="0" cy="0"/>
-        </a:xfrm>
-      </p:grpSpPr>
-      <p:sp>
-        <p:nvSpPr>
-          <p:cNvPr id="6146" name="Rectangle 2">
-            <a:extLst>
-              <a:ext uri="{FF2B5EF4-FFF2-40B4-BE49-F238E27FC236}">
-                <a16:creationId xmlns:a16="http://schemas.microsoft.com/office/drawing/2014/main" id="{D6CDF740-7CD2-4A8A-F4A5-5B9BBC68854B}"/>
-              </a:ext>
-            </a:extLst>
-          </p:cNvPr>
-          <p:cNvSpPr>
-            <a:spLocks noGrp="1" noChangeArrowheads="1"/>
-          </p:cNvSpPr>
-          <p:nvPr>
-            <p:ph type="title"/>
-            <p:custDataLst>
-              <p:tags r:id="rId1"/>
-            </p:custDataLst>
-          </p:nvPr>
-        </p:nvSpPr>
-        <p:spPr>
-          <a:xfrm>
-            <a:off x="1141413" y="284084"/>
-            <a:ext cx="9905998" cy="620791"/>
-          </a:xfrm>
-        </p:spPr>
-        <p:txBody>
-          <a:bodyPr/>
-          <a:lstStyle/>
-          <a:p>
-            <a:pPr algn="ctr"/>
-            <a:r>
-              <a:rPr lang="en-US" dirty="0"/>
-              <a:t>Week 1: Wednesday</a:t>
-            </a:r>
-          </a:p>
-        </p:txBody>
-      </p:sp>
-      <p:sp>
-        <p:nvSpPr>
-          <p:cNvPr id="6147" name="Rectangle 3">
-            <a:extLst>
-              <a:ext uri="{FF2B5EF4-FFF2-40B4-BE49-F238E27FC236}">
-                <a16:creationId xmlns:a16="http://schemas.microsoft.com/office/drawing/2014/main" id="{79392D12-A499-BDA8-BD1E-87BBE9A531AD}"/>
-              </a:ext>
-            </a:extLst>
-          </p:cNvPr>
-          <p:cNvSpPr>
-            <a:spLocks noGrp="1" noChangeArrowheads="1"/>
-          </p:cNvSpPr>
-          <p:nvPr>
-            <p:ph idx="1"/>
-            <p:custDataLst>
-              <p:tags r:id="rId2"/>
-            </p:custDataLst>
-          </p:nvPr>
-        </p:nvSpPr>
-        <p:spPr>
-          <a:xfrm>
-            <a:off x="1294151" y="1098549"/>
-            <a:ext cx="9600522" cy="5149850"/>
-          </a:xfrm>
-        </p:spPr>
-        <p:txBody>
-          <a:bodyPr>
-            <a:normAutofit/>
-          </a:bodyPr>
-          <a:lstStyle/>
-          <a:p>
-            <a:r>
-              <a:rPr lang="en-US" dirty="0">
-                <a:latin typeface="Arial" panose="020B0604020202020204" pitchFamily="34" charset="0"/>
-                <a:cs typeface="Arial" panose="020B0604020202020204" pitchFamily="34" charset="0"/>
-              </a:rPr>
-              <a:t>First homework is due Tonight! (Wednesday)</a:t>
-            </a:r>
-          </a:p>
-          <a:p>
-            <a:pPr lvl="1"/>
-            <a:r>
-              <a:rPr lang="en-US" dirty="0">
-                <a:latin typeface="Arial" panose="020B0604020202020204" pitchFamily="34" charset="0"/>
-                <a:cs typeface="Arial" panose="020B0604020202020204" pitchFamily="34" charset="0"/>
-              </a:rPr>
-              <a:t>3 day extension if you really need it but you really should try not to use it for this one.</a:t>
-            </a:r>
-          </a:p>
-          <a:p>
-            <a:r>
-              <a:rPr lang="en-US" dirty="0">
-                <a:latin typeface="Arial" panose="020B0604020202020204" pitchFamily="34" charset="0"/>
-                <a:cs typeface="Arial" panose="020B0604020202020204" pitchFamily="34" charset="0"/>
-              </a:rPr>
-              <a:t>Please remember that I am asking for NO laptop / phones!</a:t>
-            </a:r>
-          </a:p>
-          <a:p>
-            <a:pPr lvl="1"/>
-            <a:r>
-              <a:rPr lang="en-US" dirty="0">
-                <a:latin typeface="Arial" panose="020B0604020202020204" pitchFamily="34" charset="0"/>
-                <a:cs typeface="Arial" panose="020B0604020202020204" pitchFamily="34" charset="0"/>
-              </a:rPr>
-              <a:t>This makes the learning environment better for everybody. I appreciate it!</a:t>
-            </a:r>
-          </a:p>
-          <a:p>
-            <a:r>
-              <a:rPr lang="en-US" dirty="0">
-                <a:latin typeface="Arial" panose="020B0604020202020204" pitchFamily="34" charset="0"/>
-                <a:cs typeface="Arial" panose="020B0604020202020204" pitchFamily="34" charset="0"/>
-              </a:rPr>
-              <a:t>Attendance continues today as usual.</a:t>
-            </a:r>
-          </a:p>
-          <a:p>
-            <a:r>
-              <a:rPr lang="en-US" dirty="0">
-                <a:latin typeface="Arial" panose="020B0604020202020204" pitchFamily="34" charset="0"/>
-                <a:cs typeface="Arial" panose="020B0604020202020204" pitchFamily="34" charset="0"/>
-              </a:rPr>
-              <a:t>We begin module 1 today (the real class begins).</a:t>
-            </a:r>
-          </a:p>
-          <a:p>
-            <a:pPr lvl="1"/>
-            <a:r>
-              <a:rPr lang="en-US" dirty="0">
-                <a:latin typeface="Arial" panose="020B0604020202020204" pitchFamily="34" charset="0"/>
-                <a:cs typeface="Arial" panose="020B0604020202020204" pitchFamily="34" charset="0"/>
-              </a:rPr>
-              <a:t>It will likely take us at least the rest of this week to get through.</a:t>
-            </a:r>
-          </a:p>
-          <a:p>
-            <a:endParaRPr lang="en-US" dirty="0">
-              <a:latin typeface="Arial" panose="020B0604020202020204" pitchFamily="34" charset="0"/>
-              <a:cs typeface="Arial" panose="020B0604020202020204" pitchFamily="34" charset="0"/>
-            </a:endParaRPr>
-          </a:p>
-        </p:txBody>
-      </p:sp>
-    </p:spTree>
-    <p:extLst>
-      <p:ext uri="{BB962C8B-B14F-4D97-AF65-F5344CB8AC3E}">
-        <p14:creationId xmlns:p14="http://schemas.microsoft.com/office/powerpoint/2010/main" val="3784255301"/>
-      </p:ext>
-    </p:extLst>
-  </p:cSld>
-  <p:clrMapOvr>
-    <a:masterClrMapping/>
-  </p:clrMapOvr>
-</p:sld>
-</file>
-
-<file path=ppt/slides/slide4.xml><?xml version="1.0" encoding="utf-8"?>
-<p:sld xmlns:a="http://schemas.openxmlformats.org/drawingml/2006/main" xmlns:r="http://schemas.openxmlformats.org/officeDocument/2006/relationships" xmlns:p="http://schemas.openxmlformats.org/presentationml/2006/main">
-  <p:cSld>
-    <p:spTree>
-      <p:nvGrpSpPr>
-        <p:cNvPr id="1" name="">
-          <a:extLst>
-            <a:ext uri="{FF2B5EF4-FFF2-40B4-BE49-F238E27FC236}">
-              <a16:creationId xmlns:a16="http://schemas.microsoft.com/office/drawing/2014/main" id="{F30DD5C3-86C3-C7EE-D5BD-294A52F15C43}"/>
-            </a:ext>
-          </a:extLst>
-        </p:cNvPr>
-        <p:cNvGrpSpPr/>
-        <p:nvPr/>
-      </p:nvGrpSpPr>
-      <p:grpSpPr>
-        <a:xfrm>
-          <a:off x="0" y="0"/>
-          <a:ext cx="0" cy="0"/>
-          <a:chOff x="0" y="0"/>
-          <a:chExt cx="0" cy="0"/>
-        </a:xfrm>
-      </p:grpSpPr>
-      <p:sp>
-        <p:nvSpPr>
-          <p:cNvPr id="6146" name="Rectangle 2">
-            <a:extLst>
-              <a:ext uri="{FF2B5EF4-FFF2-40B4-BE49-F238E27FC236}">
-                <a16:creationId xmlns:a16="http://schemas.microsoft.com/office/drawing/2014/main" id="{53FBB78A-EE2B-4915-3BB5-0642F7776F81}"/>
-              </a:ext>
-            </a:extLst>
-          </p:cNvPr>
-          <p:cNvSpPr>
-            <a:spLocks noGrp="1" noChangeArrowheads="1"/>
-          </p:cNvSpPr>
-          <p:nvPr>
-            <p:ph type="title"/>
-            <p:custDataLst>
-              <p:tags r:id="rId1"/>
-            </p:custDataLst>
-          </p:nvPr>
-        </p:nvSpPr>
-        <p:spPr>
-          <a:xfrm>
-            <a:off x="1141413" y="284084"/>
-            <a:ext cx="9905998" cy="620791"/>
-          </a:xfrm>
-        </p:spPr>
-        <p:txBody>
-          <a:bodyPr/>
-          <a:lstStyle/>
-          <a:p>
-            <a:pPr algn="ctr"/>
-            <a:r>
-              <a:rPr lang="en-US" dirty="0"/>
-              <a:t>Week 1: Thursday</a:t>
-            </a:r>
-          </a:p>
-        </p:txBody>
-      </p:sp>
-      <p:sp>
-        <p:nvSpPr>
-          <p:cNvPr id="6147" name="Rectangle 3">
-            <a:extLst>
-              <a:ext uri="{FF2B5EF4-FFF2-40B4-BE49-F238E27FC236}">
-                <a16:creationId xmlns:a16="http://schemas.microsoft.com/office/drawing/2014/main" id="{696409BF-2B2C-9B95-39C5-A3B9EEEF888A}"/>
-              </a:ext>
-            </a:extLst>
-          </p:cNvPr>
-          <p:cNvSpPr>
-            <a:spLocks noGrp="1" noChangeArrowheads="1"/>
-          </p:cNvSpPr>
-          <p:nvPr>
-            <p:ph idx="1"/>
-            <p:custDataLst>
-              <p:tags r:id="rId2"/>
-            </p:custDataLst>
-          </p:nvPr>
-        </p:nvSpPr>
-        <p:spPr>
-          <a:xfrm>
-            <a:off x="1294151" y="1098549"/>
-            <a:ext cx="9600522" cy="5149850"/>
-          </a:xfrm>
-        </p:spPr>
-        <p:txBody>
-          <a:bodyPr>
-            <a:normAutofit fontScale="92500" lnSpcReduction="10000"/>
-          </a:bodyPr>
-          <a:lstStyle/>
-          <a:p>
-            <a:r>
-              <a:rPr lang="en-US" dirty="0">
-                <a:latin typeface="Arial" panose="020B0604020202020204" pitchFamily="34" charset="0"/>
-                <a:cs typeface="Arial" panose="020B0604020202020204" pitchFamily="34" charset="0"/>
-              </a:rPr>
-              <a:t>First homework was due last night! (Wednesday)</a:t>
-            </a:r>
-          </a:p>
-          <a:p>
-            <a:pPr lvl="1"/>
-            <a:r>
-              <a:rPr lang="en-US" dirty="0">
-                <a:latin typeface="Arial" panose="020B0604020202020204" pitchFamily="34" charset="0"/>
-                <a:cs typeface="Arial" panose="020B0604020202020204" pitchFamily="34" charset="0"/>
-              </a:rPr>
-              <a:t>How’d it go?</a:t>
-            </a:r>
-          </a:p>
-          <a:p>
-            <a:pPr lvl="1"/>
-            <a:r>
-              <a:rPr lang="en-US" dirty="0">
-                <a:latin typeface="Arial" panose="020B0604020202020204" pitchFamily="34" charset="0"/>
-                <a:cs typeface="Arial" panose="020B0604020202020204" pitchFamily="34" charset="0"/>
-              </a:rPr>
-              <a:t>3 day extension if you really need it but you really should try not to use it for this one.</a:t>
-            </a:r>
-          </a:p>
-          <a:p>
-            <a:r>
-              <a:rPr lang="en-US" dirty="0">
-                <a:latin typeface="Arial" panose="020B0604020202020204" pitchFamily="34" charset="0"/>
-                <a:cs typeface="Arial" panose="020B0604020202020204" pitchFamily="34" charset="0"/>
-              </a:rPr>
-              <a:t>Lecture recordings from last Fall are posted on Panopto on Canvas</a:t>
-            </a:r>
-          </a:p>
-          <a:p>
-            <a:pPr lvl="1"/>
-            <a:r>
-              <a:rPr lang="en-US" dirty="0">
-                <a:latin typeface="Arial" panose="020B0604020202020204" pitchFamily="34" charset="0"/>
-                <a:cs typeface="Arial" panose="020B0604020202020204" pitchFamily="34" charset="0"/>
-              </a:rPr>
-              <a:t>I posted ALL the videos FYI</a:t>
-            </a:r>
-          </a:p>
-          <a:p>
-            <a:pPr lvl="1"/>
-            <a:r>
-              <a:rPr lang="en-US" dirty="0">
-                <a:latin typeface="Arial" panose="020B0604020202020204" pitchFamily="34" charset="0"/>
-                <a:cs typeface="Arial" panose="020B0604020202020204" pitchFamily="34" charset="0"/>
-              </a:rPr>
-              <a:t>For this module, you watch from oldest through “Pump. Lemma + Begin Mod 3”</a:t>
-            </a:r>
-          </a:p>
-          <a:p>
-            <a:r>
-              <a:rPr lang="en-US" dirty="0">
-                <a:latin typeface="Arial" panose="020B0604020202020204" pitchFamily="34" charset="0"/>
-                <a:cs typeface="Arial" panose="020B0604020202020204" pitchFamily="34" charset="0"/>
-              </a:rPr>
-              <a:t>Please remember that I am asking for NO laptop / phones!</a:t>
-            </a:r>
-          </a:p>
-          <a:p>
-            <a:pPr lvl="1"/>
-            <a:r>
-              <a:rPr lang="en-US" dirty="0">
-                <a:latin typeface="Arial" panose="020B0604020202020204" pitchFamily="34" charset="0"/>
-                <a:cs typeface="Arial" panose="020B0604020202020204" pitchFamily="34" charset="0"/>
-              </a:rPr>
-              <a:t>This makes the learning environment better for everybody. I appreciate it!</a:t>
-            </a:r>
-          </a:p>
-          <a:p>
-            <a:r>
-              <a:rPr lang="en-US" dirty="0">
-                <a:latin typeface="Arial" panose="020B0604020202020204" pitchFamily="34" charset="0"/>
-                <a:cs typeface="Arial" panose="020B0604020202020204" pitchFamily="34" charset="0"/>
-              </a:rPr>
-              <a:t>Attendance continues today as usual.</a:t>
-            </a:r>
-          </a:p>
-          <a:p>
-            <a:r>
-              <a:rPr lang="en-US" dirty="0">
-                <a:latin typeface="Arial" panose="020B0604020202020204" pitchFamily="34" charset="0"/>
-                <a:cs typeface="Arial" panose="020B0604020202020204" pitchFamily="34" charset="0"/>
-              </a:rPr>
-              <a:t>We continue module 1 today.</a:t>
-            </a:r>
-          </a:p>
-          <a:p>
-            <a:pPr lvl="1"/>
-            <a:r>
-              <a:rPr lang="en-US" dirty="0">
-                <a:latin typeface="Arial" panose="020B0604020202020204" pitchFamily="34" charset="0"/>
-                <a:cs typeface="Arial" panose="020B0604020202020204" pitchFamily="34" charset="0"/>
-              </a:rPr>
-              <a:t>It will likely take us at least the rest of this week to get through.</a:t>
-            </a:r>
-          </a:p>
-          <a:p>
-            <a:endParaRPr lang="en-US" dirty="0">
-              <a:latin typeface="Arial" panose="020B0604020202020204" pitchFamily="34" charset="0"/>
-              <a:cs typeface="Arial" panose="020B0604020202020204" pitchFamily="34" charset="0"/>
-            </a:endParaRPr>
-          </a:p>
-        </p:txBody>
-      </p:sp>
-    </p:spTree>
-    <p:extLst>
-      <p:ext uri="{BB962C8B-B14F-4D97-AF65-F5344CB8AC3E}">
-        <p14:creationId xmlns:p14="http://schemas.microsoft.com/office/powerpoint/2010/main" val="1277214941"/>
-      </p:ext>
-    </p:extLst>
-  </p:cSld>
-  <p:clrMapOvr>
-    <a:masterClrMapping/>
-  </p:clrMapOvr>
-</p:sld>
-</file>
-
-<file path=ppt/slides/slide5.xml><?xml version="1.0" encoding="utf-8"?>
-<p:sld xmlns:a="http://schemas.openxmlformats.org/drawingml/2006/main" xmlns:r="http://schemas.openxmlformats.org/officeDocument/2006/relationships" xmlns:p="http://schemas.openxmlformats.org/presentationml/2006/main">
-  <p:cSld>
-    <p:spTree>
-      <p:nvGrpSpPr>
-        <p:cNvPr id="1" name="">
-          <a:extLst>
-            <a:ext uri="{FF2B5EF4-FFF2-40B4-BE49-F238E27FC236}">
-              <a16:creationId xmlns:a16="http://schemas.microsoft.com/office/drawing/2014/main" id="{E773EF14-B052-5E3A-8D08-B0118A24F73E}"/>
-            </a:ext>
-          </a:extLst>
-        </p:cNvPr>
-        <p:cNvGrpSpPr/>
-        <p:nvPr/>
-      </p:nvGrpSpPr>
-      <p:grpSpPr>
-        <a:xfrm>
-          <a:off x="0" y="0"/>
-          <a:ext cx="0" cy="0"/>
-          <a:chOff x="0" y="0"/>
-          <a:chExt cx="0" cy="0"/>
-        </a:xfrm>
-      </p:grpSpPr>
-      <p:sp>
-        <p:nvSpPr>
-          <p:cNvPr id="6146" name="Rectangle 2">
-            <a:extLst>
-              <a:ext uri="{FF2B5EF4-FFF2-40B4-BE49-F238E27FC236}">
-                <a16:creationId xmlns:a16="http://schemas.microsoft.com/office/drawing/2014/main" id="{15323A48-AB50-B349-6F02-2114F4A6D311}"/>
-              </a:ext>
-            </a:extLst>
-          </p:cNvPr>
-          <p:cNvSpPr>
-            <a:spLocks noGrp="1" noChangeArrowheads="1"/>
-          </p:cNvSpPr>
-          <p:nvPr>
-            <p:ph type="title"/>
-            <p:custDataLst>
-              <p:tags r:id="rId1"/>
-            </p:custDataLst>
-          </p:nvPr>
-        </p:nvSpPr>
-        <p:spPr>
-          <a:xfrm>
-            <a:off x="1141413" y="284084"/>
-            <a:ext cx="9905998" cy="620791"/>
-          </a:xfrm>
-        </p:spPr>
-        <p:txBody>
-          <a:bodyPr/>
-          <a:lstStyle/>
-          <a:p>
-            <a:pPr algn="ctr"/>
-            <a:r>
-              <a:rPr lang="en-US" dirty="0"/>
-              <a:t>Week 1: Friday</a:t>
-            </a:r>
-          </a:p>
-        </p:txBody>
-      </p:sp>
-      <p:sp>
-        <p:nvSpPr>
-          <p:cNvPr id="6147" name="Rectangle 3">
-            <a:extLst>
-              <a:ext uri="{FF2B5EF4-FFF2-40B4-BE49-F238E27FC236}">
-                <a16:creationId xmlns:a16="http://schemas.microsoft.com/office/drawing/2014/main" id="{B9696856-70BF-C0BE-54A8-02E39A481C9B}"/>
-              </a:ext>
-            </a:extLst>
-          </p:cNvPr>
-          <p:cNvSpPr>
-            <a:spLocks noGrp="1" noChangeArrowheads="1"/>
-          </p:cNvSpPr>
-          <p:nvPr>
-            <p:ph idx="1"/>
-            <p:custDataLst>
-              <p:tags r:id="rId2"/>
-            </p:custDataLst>
-          </p:nvPr>
-        </p:nvSpPr>
-        <p:spPr>
-          <a:xfrm>
-            <a:off x="1294151" y="1098549"/>
-            <a:ext cx="9600522" cy="5149850"/>
-          </a:xfrm>
-        </p:spPr>
-        <p:txBody>
-          <a:bodyPr>
-            <a:normAutofit fontScale="77500" lnSpcReduction="20000"/>
-          </a:bodyPr>
-          <a:lstStyle/>
-          <a:p>
-            <a:r>
-              <a:rPr lang="en-US" dirty="0">
-                <a:latin typeface="Arial" panose="020B0604020202020204" pitchFamily="34" charset="0"/>
-                <a:cs typeface="Arial" panose="020B0604020202020204" pitchFamily="34" charset="0"/>
-              </a:rPr>
-              <a:t>End of week 1!!</a:t>
-            </a:r>
-          </a:p>
-          <a:p>
-            <a:r>
-              <a:rPr lang="en-US" dirty="0">
-                <a:latin typeface="Arial" panose="020B0604020202020204" pitchFamily="34" charset="0"/>
-                <a:cs typeface="Arial" panose="020B0604020202020204" pitchFamily="34" charset="0"/>
-              </a:rPr>
-              <a:t>First homework is in extension period</a:t>
-            </a:r>
-          </a:p>
-          <a:p>
-            <a:pPr lvl="1"/>
-            <a:r>
-              <a:rPr lang="en-US" dirty="0">
-                <a:latin typeface="Arial" panose="020B0604020202020204" pitchFamily="34" charset="0"/>
-                <a:cs typeface="Arial" panose="020B0604020202020204" pitchFamily="34" charset="0"/>
-              </a:rPr>
-              <a:t>How’d it go?</a:t>
-            </a:r>
-          </a:p>
-          <a:p>
-            <a:r>
-              <a:rPr lang="en-US" dirty="0">
-                <a:latin typeface="Arial" panose="020B0604020202020204" pitchFamily="34" charset="0"/>
-                <a:cs typeface="Arial" panose="020B0604020202020204" pitchFamily="34" charset="0"/>
-              </a:rPr>
-              <a:t>Module 1 Written HW is due next Tuesday</a:t>
-            </a:r>
-          </a:p>
-          <a:p>
-            <a:pPr lvl="1"/>
-            <a:r>
-              <a:rPr lang="en-US" dirty="0">
-                <a:latin typeface="Arial" panose="020B0604020202020204" pitchFamily="34" charset="0"/>
-                <a:cs typeface="Arial" panose="020B0604020202020204" pitchFamily="34" charset="0"/>
-              </a:rPr>
-              <a:t>We will probably finish the module on Monday but you can get started over the weekend</a:t>
-            </a:r>
-          </a:p>
-          <a:p>
-            <a:r>
-              <a:rPr lang="en-US" dirty="0">
-                <a:latin typeface="Arial" panose="020B0604020202020204" pitchFamily="34" charset="0"/>
-                <a:cs typeface="Arial" panose="020B0604020202020204" pitchFamily="34" charset="0"/>
-              </a:rPr>
-              <a:t>Be aware there is a programming assignment due on Thursday as well!</a:t>
-            </a:r>
-          </a:p>
-          <a:p>
-            <a:r>
-              <a:rPr lang="en-US" dirty="0">
-                <a:latin typeface="Arial" panose="020B0604020202020204" pitchFamily="34" charset="0"/>
-                <a:cs typeface="Arial" panose="020B0604020202020204" pitchFamily="34" charset="0"/>
-              </a:rPr>
-              <a:t>Lecture recordings from last Fall are posted on Panopto on Canvas</a:t>
-            </a:r>
-          </a:p>
-          <a:p>
-            <a:pPr lvl="1"/>
-            <a:r>
-              <a:rPr lang="en-US" dirty="0">
-                <a:latin typeface="Arial" panose="020B0604020202020204" pitchFamily="34" charset="0"/>
-                <a:cs typeface="Arial" panose="020B0604020202020204" pitchFamily="34" charset="0"/>
-              </a:rPr>
-              <a:t>I posted ALL the videos FYI</a:t>
-            </a:r>
-          </a:p>
-          <a:p>
-            <a:pPr lvl="1"/>
-            <a:r>
-              <a:rPr lang="en-US" dirty="0">
-                <a:latin typeface="Arial" panose="020B0604020202020204" pitchFamily="34" charset="0"/>
-                <a:cs typeface="Arial" panose="020B0604020202020204" pitchFamily="34" charset="0"/>
-              </a:rPr>
-              <a:t>For this module, you watch from oldest through “Pump. Lemma + Begin Mod 3”</a:t>
-            </a:r>
-          </a:p>
-          <a:p>
-            <a:r>
-              <a:rPr lang="en-US" dirty="0">
-                <a:latin typeface="Arial" panose="020B0604020202020204" pitchFamily="34" charset="0"/>
-                <a:cs typeface="Arial" panose="020B0604020202020204" pitchFamily="34" charset="0"/>
-              </a:rPr>
-              <a:t>Please remember that I am asking for NO laptop / phones!</a:t>
-            </a:r>
-          </a:p>
-          <a:p>
-            <a:pPr lvl="1"/>
-            <a:r>
-              <a:rPr lang="en-US" dirty="0">
-                <a:latin typeface="Arial" panose="020B0604020202020204" pitchFamily="34" charset="0"/>
-                <a:cs typeface="Arial" panose="020B0604020202020204" pitchFamily="34" charset="0"/>
-              </a:rPr>
-              <a:t>This makes the learning environment better for everybody. I appreciate it!</a:t>
-            </a:r>
-          </a:p>
-          <a:p>
-            <a:r>
-              <a:rPr lang="en-US" dirty="0">
-                <a:latin typeface="Arial" panose="020B0604020202020204" pitchFamily="34" charset="0"/>
-                <a:cs typeface="Arial" panose="020B0604020202020204" pitchFamily="34" charset="0"/>
-              </a:rPr>
-              <a:t>Attendance continues today as usual.</a:t>
-            </a:r>
-          </a:p>
-          <a:p>
-            <a:r>
-              <a:rPr lang="en-US" dirty="0">
-                <a:latin typeface="Arial" panose="020B0604020202020204" pitchFamily="34" charset="0"/>
-                <a:cs typeface="Arial" panose="020B0604020202020204" pitchFamily="34" charset="0"/>
-              </a:rPr>
-              <a:t>We continue module 1 today.</a:t>
-            </a:r>
-          </a:p>
-          <a:p>
-            <a:pPr lvl="1"/>
-            <a:r>
-              <a:rPr lang="en-US" dirty="0">
-                <a:latin typeface="Arial" panose="020B0604020202020204" pitchFamily="34" charset="0"/>
-                <a:cs typeface="Arial" panose="020B0604020202020204" pitchFamily="34" charset="0"/>
-              </a:rPr>
-              <a:t>I doubt we will finish it today</a:t>
-            </a:r>
-          </a:p>
-          <a:p>
-            <a:endParaRPr lang="en-US" dirty="0">
-              <a:latin typeface="Arial" panose="020B0604020202020204" pitchFamily="34" charset="0"/>
-              <a:cs typeface="Arial" panose="020B0604020202020204" pitchFamily="34" charset="0"/>
-            </a:endParaRPr>
-          </a:p>
-        </p:txBody>
-      </p:sp>
-    </p:spTree>
-    <p:extLst>
-      <p:ext uri="{BB962C8B-B14F-4D97-AF65-F5344CB8AC3E}">
-        <p14:creationId xmlns:p14="http://schemas.microsoft.com/office/powerpoint/2010/main" val="2034039482"/>
-      </p:ext>
-    </p:extLst>
-  </p:cSld>
-  <p:clrMapOvr>
-    <a:masterClrMapping/>
-  </p:clrMapOvr>
-</p:sld>
-</file>
-
-<file path=ppt/slides/slide6.xml><?xml version="1.0" encoding="utf-8"?>
-<p:sld xmlns:a="http://schemas.openxmlformats.org/drawingml/2006/main" xmlns:r="http://schemas.openxmlformats.org/officeDocument/2006/relationships" xmlns:p="http://schemas.openxmlformats.org/presentationml/2006/main">
-  <p:cSld>
-    <p:spTree>
-      <p:nvGrpSpPr>
-        <p:cNvPr id="1" name="">
-          <a:extLst>
-            <a:ext uri="{FF2B5EF4-FFF2-40B4-BE49-F238E27FC236}">
-              <a16:creationId xmlns:a16="http://schemas.microsoft.com/office/drawing/2014/main" id="{F0060D86-CB61-694B-AA47-6AB7A1979855}"/>
-            </a:ext>
-          </a:extLst>
-        </p:cNvPr>
-        <p:cNvGrpSpPr/>
-        <p:nvPr/>
-      </p:nvGrpSpPr>
-      <p:grpSpPr>
-        <a:xfrm>
-          <a:off x="0" y="0"/>
-          <a:ext cx="0" cy="0"/>
-          <a:chOff x="0" y="0"/>
-          <a:chExt cx="0" cy="0"/>
-        </a:xfrm>
-      </p:grpSpPr>
-      <p:sp>
-        <p:nvSpPr>
-          <p:cNvPr id="6146" name="Rectangle 2">
-            <a:extLst>
-              <a:ext uri="{FF2B5EF4-FFF2-40B4-BE49-F238E27FC236}">
-                <a16:creationId xmlns:a16="http://schemas.microsoft.com/office/drawing/2014/main" id="{377F11AF-F344-C8D4-C139-9305CB2B84C9}"/>
-              </a:ext>
-            </a:extLst>
-          </p:cNvPr>
-          <p:cNvSpPr>
-            <a:spLocks noGrp="1" noChangeArrowheads="1"/>
-          </p:cNvSpPr>
-          <p:nvPr>
-            <p:ph type="title"/>
-            <p:custDataLst>
-              <p:tags r:id="rId1"/>
-            </p:custDataLst>
-          </p:nvPr>
-        </p:nvSpPr>
-        <p:spPr>
-          <a:xfrm>
-            <a:off x="1141413" y="284084"/>
-            <a:ext cx="9905998" cy="620791"/>
-          </a:xfrm>
-        </p:spPr>
-        <p:txBody>
-          <a:bodyPr/>
-          <a:lstStyle/>
-          <a:p>
-            <a:pPr algn="ctr"/>
-            <a:r>
-              <a:rPr lang="en-US" dirty="0"/>
-              <a:t>Week 2: Monday</a:t>
-            </a:r>
-          </a:p>
-        </p:txBody>
-      </p:sp>
-      <p:sp>
-        <p:nvSpPr>
-          <p:cNvPr id="6147" name="Rectangle 3">
-            <a:extLst>
-              <a:ext uri="{FF2B5EF4-FFF2-40B4-BE49-F238E27FC236}">
-                <a16:creationId xmlns:a16="http://schemas.microsoft.com/office/drawing/2014/main" id="{AB649171-4125-074F-B3EE-CC029B85A7F8}"/>
-              </a:ext>
-            </a:extLst>
-          </p:cNvPr>
-          <p:cNvSpPr>
-            <a:spLocks noGrp="1" noChangeArrowheads="1"/>
-          </p:cNvSpPr>
-          <p:nvPr>
-            <p:ph idx="1"/>
-            <p:custDataLst>
-              <p:tags r:id="rId2"/>
-            </p:custDataLst>
-          </p:nvPr>
-        </p:nvSpPr>
-        <p:spPr>
-          <a:xfrm>
-            <a:off x="1294151" y="1098548"/>
-            <a:ext cx="9600522" cy="5475367"/>
-          </a:xfrm>
-        </p:spPr>
-        <p:txBody>
-          <a:bodyPr>
-            <a:normAutofit fontScale="92500" lnSpcReduction="20000"/>
-          </a:bodyPr>
-          <a:lstStyle/>
-          <a:p>
-            <a:r>
-              <a:rPr lang="en-US" dirty="0">
-                <a:latin typeface="Arial" panose="020B0604020202020204" pitchFamily="34" charset="0"/>
-                <a:cs typeface="Arial" panose="020B0604020202020204" pitchFamily="34" charset="0"/>
-              </a:rPr>
-              <a:t>Welcome to week 2!!</a:t>
-            </a:r>
-          </a:p>
-          <a:p>
-            <a:r>
-              <a:rPr lang="en-US" dirty="0">
-                <a:latin typeface="Arial" panose="020B0604020202020204" pitchFamily="34" charset="0"/>
-                <a:cs typeface="Arial" panose="020B0604020202020204" pitchFamily="34" charset="0"/>
-              </a:rPr>
-              <a:t>First homework is “graded”. Remember that this was a spot-check grade</a:t>
-            </a:r>
-          </a:p>
-          <a:p>
-            <a:r>
-              <a:rPr lang="en-US" dirty="0">
-                <a:latin typeface="Arial" panose="020B0604020202020204" pitchFamily="34" charset="0"/>
-                <a:cs typeface="Arial" panose="020B0604020202020204" pitchFamily="34" charset="0"/>
-              </a:rPr>
-              <a:t>This week:</a:t>
-            </a:r>
-          </a:p>
-          <a:p>
-            <a:pPr lvl="1"/>
-            <a:r>
-              <a:rPr lang="en-US" dirty="0">
-                <a:latin typeface="Arial" panose="020B0604020202020204" pitchFamily="34" charset="0"/>
-                <a:cs typeface="Arial" panose="020B0604020202020204" pitchFamily="34" charset="0"/>
-              </a:rPr>
-              <a:t>Written Mod. 2 assignment due Tuesday evening</a:t>
-            </a:r>
-          </a:p>
-          <a:p>
-            <a:pPr lvl="1"/>
-            <a:r>
-              <a:rPr lang="en-US" dirty="0">
-                <a:latin typeface="Arial" panose="020B0604020202020204" pitchFamily="34" charset="0"/>
-                <a:cs typeface="Arial" panose="020B0604020202020204" pitchFamily="34" charset="0"/>
-              </a:rPr>
-              <a:t>Programming assignment due Thursday evening</a:t>
-            </a:r>
-          </a:p>
-          <a:p>
-            <a:pPr lvl="1"/>
-            <a:r>
-              <a:rPr lang="en-US" dirty="0">
-                <a:latin typeface="Arial" panose="020B0604020202020204" pitchFamily="34" charset="0"/>
-                <a:cs typeface="Arial" panose="020B0604020202020204" pitchFamily="34" charset="0"/>
-              </a:rPr>
-              <a:t>First Midterm is on Friday (no lecture on Friday)</a:t>
-            </a:r>
-          </a:p>
-          <a:p>
-            <a:r>
-              <a:rPr lang="en-US" dirty="0">
-                <a:latin typeface="Arial" panose="020B0604020202020204" pitchFamily="34" charset="0"/>
-                <a:cs typeface="Arial" panose="020B0604020202020204" pitchFamily="34" charset="0"/>
-              </a:rPr>
-              <a:t>Lecture recordings from last Fall are posted on Panopto on Canvas</a:t>
-            </a:r>
-          </a:p>
-          <a:p>
-            <a:pPr lvl="1"/>
-            <a:r>
-              <a:rPr lang="en-US" dirty="0">
-                <a:latin typeface="Arial" panose="020B0604020202020204" pitchFamily="34" charset="0"/>
-                <a:cs typeface="Arial" panose="020B0604020202020204" pitchFamily="34" charset="0"/>
-              </a:rPr>
-              <a:t>I posted ALL the videos FYI</a:t>
-            </a:r>
-          </a:p>
-          <a:p>
-            <a:pPr lvl="1"/>
-            <a:r>
-              <a:rPr lang="en-US" dirty="0">
-                <a:latin typeface="Arial" panose="020B0604020202020204" pitchFamily="34" charset="0"/>
-                <a:cs typeface="Arial" panose="020B0604020202020204" pitchFamily="34" charset="0"/>
-              </a:rPr>
-              <a:t>For this module, you watch from oldest through “Pump. Lemma + Begin Mod 3”</a:t>
-            </a:r>
-          </a:p>
-          <a:p>
-            <a:r>
-              <a:rPr lang="en-US" dirty="0">
-                <a:latin typeface="Arial" panose="020B0604020202020204" pitchFamily="34" charset="0"/>
-                <a:cs typeface="Arial" panose="020B0604020202020204" pitchFamily="34" charset="0"/>
-              </a:rPr>
-              <a:t>Please remember that I am asking for NO laptop / phones!</a:t>
-            </a:r>
-          </a:p>
-          <a:p>
-            <a:pPr lvl="1"/>
-            <a:r>
-              <a:rPr lang="en-US" dirty="0">
-                <a:latin typeface="Arial" panose="020B0604020202020204" pitchFamily="34" charset="0"/>
-                <a:cs typeface="Arial" panose="020B0604020202020204" pitchFamily="34" charset="0"/>
-              </a:rPr>
-              <a:t>This makes the learning environment better for everybody. I appreciate it!</a:t>
-            </a:r>
-          </a:p>
-          <a:p>
-            <a:r>
-              <a:rPr lang="en-US" dirty="0">
-                <a:latin typeface="Arial" panose="020B0604020202020204" pitchFamily="34" charset="0"/>
-                <a:cs typeface="Arial" panose="020B0604020202020204" pitchFamily="34" charset="0"/>
-              </a:rPr>
-              <a:t>Attendance continues today as usual.</a:t>
-            </a:r>
-          </a:p>
-          <a:p>
-            <a:r>
-              <a:rPr lang="en-US" dirty="0">
-                <a:latin typeface="Arial" panose="020B0604020202020204" pitchFamily="34" charset="0"/>
-                <a:cs typeface="Arial" panose="020B0604020202020204" pitchFamily="34" charset="0"/>
-              </a:rPr>
-              <a:t>We should finish module 1 today</a:t>
-            </a:r>
-          </a:p>
-          <a:p>
-            <a:endParaRPr lang="en-US" dirty="0">
-              <a:latin typeface="Arial" panose="020B0604020202020204" pitchFamily="34" charset="0"/>
-              <a:cs typeface="Arial" panose="020B0604020202020204" pitchFamily="34" charset="0"/>
-            </a:endParaRPr>
-          </a:p>
-        </p:txBody>
-      </p:sp>
-    </p:spTree>
-    <p:extLst>
-      <p:ext uri="{BB962C8B-B14F-4D97-AF65-F5344CB8AC3E}">
-        <p14:creationId xmlns:p14="http://schemas.microsoft.com/office/powerpoint/2010/main" val="2728786617"/>
-      </p:ext>
-    </p:extLst>
-  </p:cSld>
-  <p:clrMapOvr>
-    <a:masterClrMapping/>
-  </p:clrMapOvr>
-</p:sld>
-</file>
-
-<file path=ppt/slides/slide7.xml><?xml version="1.0" encoding="utf-8"?>
-<p:sld xmlns:a="http://schemas.openxmlformats.org/drawingml/2006/main" xmlns:r="http://schemas.openxmlformats.org/officeDocument/2006/relationships" xmlns:p="http://schemas.openxmlformats.org/presentationml/2006/main">
-  <p:cSld>
-    <p:spTree>
-      <p:nvGrpSpPr>
-        <p:cNvPr id="1" name="">
-          <a:extLst>
-            <a:ext uri="{FF2B5EF4-FFF2-40B4-BE49-F238E27FC236}">
-              <a16:creationId xmlns:a16="http://schemas.microsoft.com/office/drawing/2014/main" id="{10A534A6-C91A-6236-8C47-1EE87A38EC62}"/>
-            </a:ext>
-          </a:extLst>
-        </p:cNvPr>
-        <p:cNvGrpSpPr/>
-        <p:nvPr/>
-      </p:nvGrpSpPr>
-      <p:grpSpPr>
-        <a:xfrm>
-          <a:off x="0" y="0"/>
-          <a:ext cx="0" cy="0"/>
-          <a:chOff x="0" y="0"/>
-          <a:chExt cx="0" cy="0"/>
-        </a:xfrm>
-      </p:grpSpPr>
-      <p:sp>
-        <p:nvSpPr>
-          <p:cNvPr id="6146" name="Rectangle 2">
-            <a:extLst>
-              <a:ext uri="{FF2B5EF4-FFF2-40B4-BE49-F238E27FC236}">
-                <a16:creationId xmlns:a16="http://schemas.microsoft.com/office/drawing/2014/main" id="{8FA1C635-2C54-9B7E-1432-EEA3313AAA24}"/>
-              </a:ext>
-            </a:extLst>
-          </p:cNvPr>
-          <p:cNvSpPr>
-            <a:spLocks noGrp="1" noChangeArrowheads="1"/>
-          </p:cNvSpPr>
-          <p:nvPr>
-            <p:ph type="title"/>
-            <p:custDataLst>
-              <p:tags r:id="rId1"/>
-            </p:custDataLst>
-          </p:nvPr>
-        </p:nvSpPr>
-        <p:spPr>
-          <a:xfrm>
-            <a:off x="1141413" y="284084"/>
-            <a:ext cx="9905998" cy="620791"/>
-          </a:xfrm>
-        </p:spPr>
-        <p:txBody>
-          <a:bodyPr/>
-          <a:lstStyle/>
-          <a:p>
-            <a:pPr algn="ctr"/>
-            <a:r>
-              <a:rPr lang="en-US" dirty="0"/>
-              <a:t>Week 2: Tuesday</a:t>
-            </a:r>
-          </a:p>
-        </p:txBody>
-      </p:sp>
-      <p:sp>
-        <p:nvSpPr>
-          <p:cNvPr id="6147" name="Rectangle 3">
-            <a:extLst>
-              <a:ext uri="{FF2B5EF4-FFF2-40B4-BE49-F238E27FC236}">
-                <a16:creationId xmlns:a16="http://schemas.microsoft.com/office/drawing/2014/main" id="{A2A40684-18FF-B302-48CF-E12AF1B700D6}"/>
-              </a:ext>
-            </a:extLst>
-          </p:cNvPr>
-          <p:cNvSpPr>
-            <a:spLocks noGrp="1" noChangeArrowheads="1"/>
-          </p:cNvSpPr>
-          <p:nvPr>
-            <p:ph idx="1"/>
-            <p:custDataLst>
-              <p:tags r:id="rId2"/>
-            </p:custDataLst>
-          </p:nvPr>
-        </p:nvSpPr>
-        <p:spPr>
-          <a:xfrm>
-            <a:off x="1294151" y="1098548"/>
-            <a:ext cx="9600522" cy="5475367"/>
-          </a:xfrm>
-        </p:spPr>
-        <p:txBody>
-          <a:bodyPr>
-            <a:normAutofit fontScale="92500" lnSpcReduction="10000"/>
-          </a:bodyPr>
-          <a:lstStyle/>
-          <a:p>
-            <a:r>
-              <a:rPr lang="en-US" dirty="0">
-                <a:latin typeface="Arial" panose="020B0604020202020204" pitchFamily="34" charset="0"/>
-                <a:cs typeface="Arial" panose="020B0604020202020204" pitchFamily="34" charset="0"/>
-              </a:rPr>
-              <a:t>Welcome to week 2!!</a:t>
-            </a:r>
-          </a:p>
-          <a:p>
-            <a:r>
-              <a:rPr lang="en-US" dirty="0">
-                <a:latin typeface="Arial" panose="020B0604020202020204" pitchFamily="34" charset="0"/>
-                <a:cs typeface="Arial" panose="020B0604020202020204" pitchFamily="34" charset="0"/>
-              </a:rPr>
-              <a:t>This week:</a:t>
-            </a:r>
-          </a:p>
-          <a:p>
-            <a:pPr lvl="1"/>
-            <a:r>
-              <a:rPr lang="en-US" dirty="0">
-                <a:latin typeface="Arial" panose="020B0604020202020204" pitchFamily="34" charset="0"/>
-                <a:cs typeface="Arial" panose="020B0604020202020204" pitchFamily="34" charset="0"/>
-              </a:rPr>
-              <a:t>Written Mod. 2 assignment due </a:t>
-            </a:r>
-            <a:r>
-              <a:rPr lang="en-US" b="1" i="1" u="sng" dirty="0">
-                <a:latin typeface="Arial" panose="020B0604020202020204" pitchFamily="34" charset="0"/>
-                <a:cs typeface="Arial" panose="020B0604020202020204" pitchFamily="34" charset="0"/>
-              </a:rPr>
-              <a:t>TONIGHT</a:t>
-            </a:r>
-            <a:r>
-              <a:rPr lang="en-US" dirty="0">
-                <a:latin typeface="Arial" panose="020B0604020202020204" pitchFamily="34" charset="0"/>
-                <a:cs typeface="Arial" panose="020B0604020202020204" pitchFamily="34" charset="0"/>
-              </a:rPr>
-              <a:t>!!</a:t>
-            </a:r>
-          </a:p>
-          <a:p>
-            <a:pPr lvl="1"/>
-            <a:r>
-              <a:rPr lang="en-US" dirty="0">
-                <a:latin typeface="Arial" panose="020B0604020202020204" pitchFamily="34" charset="0"/>
-                <a:cs typeface="Arial" panose="020B0604020202020204" pitchFamily="34" charset="0"/>
-              </a:rPr>
-              <a:t>Programming assignment due Thursday evening</a:t>
-            </a:r>
-          </a:p>
-          <a:p>
-            <a:pPr lvl="1"/>
-            <a:r>
-              <a:rPr lang="en-US" dirty="0">
-                <a:latin typeface="Arial" panose="020B0604020202020204" pitchFamily="34" charset="0"/>
-                <a:cs typeface="Arial" panose="020B0604020202020204" pitchFamily="34" charset="0"/>
-              </a:rPr>
-              <a:t>First Midterm is on Friday (no lecture on Friday)</a:t>
-            </a:r>
-          </a:p>
-          <a:p>
-            <a:r>
-              <a:rPr lang="en-US" dirty="0">
-                <a:latin typeface="Arial" panose="020B0604020202020204" pitchFamily="34" charset="0"/>
-                <a:cs typeface="Arial" panose="020B0604020202020204" pitchFamily="34" charset="0"/>
-              </a:rPr>
-              <a:t>Lecture recordings from last Fall are posted on Panopto on Canvas</a:t>
-            </a:r>
-          </a:p>
-          <a:p>
-            <a:pPr lvl="1"/>
-            <a:r>
-              <a:rPr lang="en-US" dirty="0">
-                <a:latin typeface="Arial" panose="020B0604020202020204" pitchFamily="34" charset="0"/>
-                <a:cs typeface="Arial" panose="020B0604020202020204" pitchFamily="34" charset="0"/>
-              </a:rPr>
-              <a:t>I posted ALL the videos FYI</a:t>
-            </a:r>
-          </a:p>
-          <a:p>
-            <a:pPr lvl="1"/>
-            <a:r>
-              <a:rPr lang="en-US" dirty="0">
-                <a:latin typeface="Arial" panose="020B0604020202020204" pitchFamily="34" charset="0"/>
-                <a:cs typeface="Arial" panose="020B0604020202020204" pitchFamily="34" charset="0"/>
-              </a:rPr>
-              <a:t>For this module, you watch from oldest through “Pump. Lemma + Begin Mod 3”</a:t>
-            </a:r>
-          </a:p>
-          <a:p>
-            <a:r>
-              <a:rPr lang="en-US" dirty="0">
-                <a:latin typeface="Arial" panose="020B0604020202020204" pitchFamily="34" charset="0"/>
-                <a:cs typeface="Arial" panose="020B0604020202020204" pitchFamily="34" charset="0"/>
-              </a:rPr>
-              <a:t>Please remember that I am asking for NO laptop / phones!</a:t>
-            </a:r>
-          </a:p>
-          <a:p>
-            <a:pPr lvl="1"/>
-            <a:r>
-              <a:rPr lang="en-US" dirty="0">
-                <a:latin typeface="Arial" panose="020B0604020202020204" pitchFamily="34" charset="0"/>
-                <a:cs typeface="Arial" panose="020B0604020202020204" pitchFamily="34" charset="0"/>
-              </a:rPr>
-              <a:t>This makes the learning environment better for everybody. I appreciate it!</a:t>
-            </a:r>
-          </a:p>
-          <a:p>
-            <a:r>
-              <a:rPr lang="en-US" dirty="0">
-                <a:latin typeface="Arial" panose="020B0604020202020204" pitchFamily="34" charset="0"/>
-                <a:cs typeface="Arial" panose="020B0604020202020204" pitchFamily="34" charset="0"/>
-              </a:rPr>
-              <a:t>Attendance continues today as usual.</a:t>
-            </a:r>
-          </a:p>
-          <a:p>
-            <a:r>
-              <a:rPr lang="en-US" dirty="0">
-                <a:latin typeface="Arial" panose="020B0604020202020204" pitchFamily="34" charset="0"/>
-                <a:cs typeface="Arial" panose="020B0604020202020204" pitchFamily="34" charset="0"/>
-              </a:rPr>
-              <a:t>Today we begin Module 2! The </a:t>
-            </a:r>
-            <a:r>
-              <a:rPr lang="en-US">
-                <a:latin typeface="Arial" panose="020B0604020202020204" pitchFamily="34" charset="0"/>
-                <a:cs typeface="Arial" panose="020B0604020202020204" pitchFamily="34" charset="0"/>
-              </a:rPr>
-              <a:t>Context-Free Languages!</a:t>
-            </a:r>
-            <a:endParaRPr lang="en-US" dirty="0">
-              <a:latin typeface="Arial" panose="020B0604020202020204" pitchFamily="34" charset="0"/>
-              <a:cs typeface="Arial" panose="020B0604020202020204" pitchFamily="34" charset="0"/>
-            </a:endParaRPr>
-          </a:p>
-          <a:p>
-            <a:endParaRPr lang="en-US" dirty="0">
-              <a:latin typeface="Arial" panose="020B0604020202020204" pitchFamily="34" charset="0"/>
-              <a:cs typeface="Arial" panose="020B0604020202020204" pitchFamily="34" charset="0"/>
-            </a:endParaRPr>
-          </a:p>
-        </p:txBody>
-      </p:sp>
-    </p:spTree>
-    <p:extLst>
-      <p:ext uri="{BB962C8B-B14F-4D97-AF65-F5344CB8AC3E}">
-        <p14:creationId xmlns:p14="http://schemas.microsoft.com/office/powerpoint/2010/main" val="105140071"/>
-      </p:ext>
-    </p:extLst>
-  </p:cSld>
-  <p:clrMapOvr>
-    <a:masterClrMapping/>
-  </p:clrMapOvr>
-</p:sld>
-</file>
-
-<file path=ppt/slides/slide8.xml><?xml version="1.0" encoding="utf-8"?>
-<p:sld xmlns:a="http://schemas.openxmlformats.org/drawingml/2006/main" xmlns:r="http://schemas.openxmlformats.org/officeDocument/2006/relationships" xmlns:p="http://schemas.openxmlformats.org/presentationml/2006/main">
-  <p:cSld>
-    <p:spTree>
-      <p:nvGrpSpPr>
-        <p:cNvPr id="1" name="">
-          <a:extLst>
-            <a:ext uri="{FF2B5EF4-FFF2-40B4-BE49-F238E27FC236}">
-              <a16:creationId xmlns:a16="http://schemas.microsoft.com/office/drawing/2014/main" id="{63DC3DD8-4F8B-8749-5855-A11573B83898}"/>
-            </a:ext>
-          </a:extLst>
-        </p:cNvPr>
-        <p:cNvGrpSpPr/>
-        <p:nvPr/>
-      </p:nvGrpSpPr>
-      <p:grpSpPr>
-        <a:xfrm>
-          <a:off x="0" y="0"/>
-          <a:ext cx="0" cy="0"/>
-          <a:chOff x="0" y="0"/>
-          <a:chExt cx="0" cy="0"/>
-        </a:xfrm>
-      </p:grpSpPr>
-      <p:sp>
-        <p:nvSpPr>
-          <p:cNvPr id="6146" name="Rectangle 2">
-            <a:extLst>
-              <a:ext uri="{FF2B5EF4-FFF2-40B4-BE49-F238E27FC236}">
-                <a16:creationId xmlns:a16="http://schemas.microsoft.com/office/drawing/2014/main" id="{E24F0431-C398-C850-F3EC-F25D9C4D7F33}"/>
-              </a:ext>
-            </a:extLst>
-          </p:cNvPr>
-          <p:cNvSpPr>
-            <a:spLocks noGrp="1" noChangeArrowheads="1"/>
-          </p:cNvSpPr>
-          <p:nvPr>
-            <p:ph type="title"/>
-            <p:custDataLst>
-              <p:tags r:id="rId1"/>
-            </p:custDataLst>
-          </p:nvPr>
-        </p:nvSpPr>
-        <p:spPr>
-          <a:xfrm>
-            <a:off x="1141413" y="284084"/>
-            <a:ext cx="9905998" cy="620791"/>
-          </a:xfrm>
-        </p:spPr>
-        <p:txBody>
-          <a:bodyPr/>
-          <a:lstStyle/>
-          <a:p>
-            <a:pPr algn="ctr"/>
-            <a:r>
-              <a:rPr lang="en-US" dirty="0"/>
-              <a:t>Week 2: Wednesday</a:t>
-            </a:r>
-          </a:p>
-        </p:txBody>
-      </p:sp>
-      <p:sp>
-        <p:nvSpPr>
-          <p:cNvPr id="6147" name="Rectangle 3">
-            <a:extLst>
-              <a:ext uri="{FF2B5EF4-FFF2-40B4-BE49-F238E27FC236}">
-                <a16:creationId xmlns:a16="http://schemas.microsoft.com/office/drawing/2014/main" id="{40F36F83-327D-A4E3-9A28-E1CB7B524CEB}"/>
-              </a:ext>
-            </a:extLst>
-          </p:cNvPr>
-          <p:cNvSpPr>
-            <a:spLocks noGrp="1" noChangeArrowheads="1"/>
-          </p:cNvSpPr>
-          <p:nvPr>
-            <p:ph idx="1"/>
-            <p:custDataLst>
-              <p:tags r:id="rId2"/>
-            </p:custDataLst>
-          </p:nvPr>
-        </p:nvSpPr>
-        <p:spPr>
-          <a:xfrm>
-            <a:off x="1294151" y="1098548"/>
-            <a:ext cx="9600522" cy="5475367"/>
-          </a:xfrm>
-        </p:spPr>
-        <p:txBody>
-          <a:bodyPr>
-            <a:normAutofit lnSpcReduction="10000"/>
-          </a:bodyPr>
-          <a:lstStyle/>
-          <a:p>
-            <a:r>
-              <a:rPr lang="en-US" dirty="0">
-                <a:latin typeface="Arial" panose="020B0604020202020204" pitchFamily="34" charset="0"/>
-                <a:cs typeface="Arial" panose="020B0604020202020204" pitchFamily="34" charset="0"/>
-              </a:rPr>
-              <a:t>Welcome to week 2!!</a:t>
-            </a:r>
-          </a:p>
-          <a:p>
-            <a:r>
-              <a:rPr lang="en-US" dirty="0">
-                <a:latin typeface="Arial" panose="020B0604020202020204" pitchFamily="34" charset="0"/>
-                <a:cs typeface="Arial" panose="020B0604020202020204" pitchFamily="34" charset="0"/>
-              </a:rPr>
-              <a:t>This week:</a:t>
-            </a:r>
-          </a:p>
-          <a:p>
-            <a:pPr lvl="1"/>
-            <a:r>
-              <a:rPr lang="en-US" dirty="0">
-                <a:latin typeface="Arial" panose="020B0604020202020204" pitchFamily="34" charset="0"/>
-                <a:cs typeface="Arial" panose="020B0604020202020204" pitchFamily="34" charset="0"/>
-              </a:rPr>
-              <a:t>Programming assignment due Thursday evening</a:t>
-            </a:r>
-          </a:p>
-          <a:p>
-            <a:pPr lvl="1"/>
-            <a:r>
-              <a:rPr lang="en-US" dirty="0">
-                <a:latin typeface="Arial" panose="020B0604020202020204" pitchFamily="34" charset="0"/>
-                <a:cs typeface="Arial" panose="020B0604020202020204" pitchFamily="34" charset="0"/>
-              </a:rPr>
-              <a:t>First Midterm is on Friday (no lecture on Friday)</a:t>
-            </a:r>
-          </a:p>
-          <a:p>
-            <a:r>
-              <a:rPr lang="en-US" dirty="0">
-                <a:latin typeface="Arial" panose="020B0604020202020204" pitchFamily="34" charset="0"/>
-                <a:cs typeface="Arial" panose="020B0604020202020204" pitchFamily="34" charset="0"/>
-              </a:rPr>
-              <a:t>Lecture recordings from last Fall are posted on Panopto on Canvas</a:t>
-            </a:r>
-          </a:p>
-          <a:p>
-            <a:pPr lvl="1"/>
-            <a:r>
-              <a:rPr lang="en-US" dirty="0">
-                <a:latin typeface="Arial" panose="020B0604020202020204" pitchFamily="34" charset="0"/>
-                <a:cs typeface="Arial" panose="020B0604020202020204" pitchFamily="34" charset="0"/>
-              </a:rPr>
-              <a:t>I posted ALL the videos FYI</a:t>
-            </a:r>
-          </a:p>
-          <a:p>
-            <a:pPr lvl="1"/>
-            <a:r>
-              <a:rPr lang="en-US" dirty="0">
-                <a:latin typeface="Arial" panose="020B0604020202020204" pitchFamily="34" charset="0"/>
-                <a:cs typeface="Arial" panose="020B0604020202020204" pitchFamily="34" charset="0"/>
-              </a:rPr>
-              <a:t>For this module, you watch from oldest through “Pump. Lemma + Begin Mod 3”</a:t>
-            </a:r>
-          </a:p>
-          <a:p>
-            <a:r>
-              <a:rPr lang="en-US" dirty="0">
-                <a:latin typeface="Arial" panose="020B0604020202020204" pitchFamily="34" charset="0"/>
-                <a:cs typeface="Arial" panose="020B0604020202020204" pitchFamily="34" charset="0"/>
-              </a:rPr>
-              <a:t>Please remember that I am asking for NO laptop / phones!</a:t>
-            </a:r>
-          </a:p>
-          <a:p>
-            <a:pPr lvl="1"/>
-            <a:r>
-              <a:rPr lang="en-US" dirty="0">
-                <a:latin typeface="Arial" panose="020B0604020202020204" pitchFamily="34" charset="0"/>
-                <a:cs typeface="Arial" panose="020B0604020202020204" pitchFamily="34" charset="0"/>
-              </a:rPr>
-              <a:t>This makes the learning environment better for everybody. I appreciate it!</a:t>
-            </a:r>
-          </a:p>
-          <a:p>
-            <a:r>
-              <a:rPr lang="en-US" dirty="0">
-                <a:latin typeface="Arial" panose="020B0604020202020204" pitchFamily="34" charset="0"/>
-                <a:cs typeface="Arial" panose="020B0604020202020204" pitchFamily="34" charset="0"/>
-              </a:rPr>
-              <a:t>Attendance continues today as usual.</a:t>
-            </a:r>
-          </a:p>
-          <a:p>
-            <a:r>
-              <a:rPr lang="en-US" dirty="0">
-                <a:latin typeface="Arial" panose="020B0604020202020204" pitchFamily="34" charset="0"/>
-                <a:cs typeface="Arial" panose="020B0604020202020204" pitchFamily="34" charset="0"/>
-              </a:rPr>
-              <a:t>Today </a:t>
-            </a:r>
-            <a:r>
-              <a:rPr lang="en-US">
-                <a:latin typeface="Arial" panose="020B0604020202020204" pitchFamily="34" charset="0"/>
-                <a:cs typeface="Arial" panose="020B0604020202020204" pitchFamily="34" charset="0"/>
-              </a:rPr>
-              <a:t>we continue </a:t>
-            </a:r>
-            <a:r>
-              <a:rPr lang="en-US" dirty="0">
-                <a:latin typeface="Arial" panose="020B0604020202020204" pitchFamily="34" charset="0"/>
-                <a:cs typeface="Arial" panose="020B0604020202020204" pitchFamily="34" charset="0"/>
-              </a:rPr>
-              <a:t>Module 2! The Context-Free Languages!</a:t>
-            </a:r>
-          </a:p>
-          <a:p>
-            <a:endParaRPr lang="en-US" dirty="0">
-              <a:latin typeface="Arial" panose="020B0604020202020204" pitchFamily="34" charset="0"/>
-              <a:cs typeface="Arial" panose="020B0604020202020204" pitchFamily="34" charset="0"/>
-            </a:endParaRPr>
-          </a:p>
-        </p:txBody>
-      </p:sp>
-    </p:spTree>
-    <p:extLst>
-      <p:ext uri="{BB962C8B-B14F-4D97-AF65-F5344CB8AC3E}">
-        <p14:creationId xmlns:p14="http://schemas.microsoft.com/office/powerpoint/2010/main" val="3983308769"/>
-      </p:ext>
-    </p:extLst>
-  </p:cSld>
-  <p:clrMapOvr>
-    <a:masterClrMapping/>
-  </p:clrMapOvr>
-</p:sld>
-</file>
-
-<file path=ppt/slides/slide9.xml><?xml version="1.0" encoding="utf-8"?>
+<file path=ppt/slides/slide10.xml><?xml version="1.0" encoding="utf-8"?>
 <p:sld xmlns:a="http://schemas.openxmlformats.org/drawingml/2006/main" xmlns:r="http://schemas.openxmlformats.org/officeDocument/2006/relationships" xmlns:p="http://schemas.openxmlformats.org/presentationml/2006/main">
   <p:cSld>
     <p:spTree>
@@ -16355,6 +14858,1745 @@
 </p:sld>
 </file>
 
+<file path=ppt/slides/slide2.xml><?xml version="1.0" encoding="utf-8"?>
+<p:sld xmlns:a="http://schemas.openxmlformats.org/drawingml/2006/main" xmlns:r="http://schemas.openxmlformats.org/officeDocument/2006/relationships" xmlns:p="http://schemas.openxmlformats.org/presentationml/2006/main">
+  <p:cSld>
+    <p:spTree>
+      <p:nvGrpSpPr>
+        <p:cNvPr id="1" name=""/>
+        <p:cNvGrpSpPr/>
+        <p:nvPr/>
+      </p:nvGrpSpPr>
+      <p:grpSpPr>
+        <a:xfrm>
+          <a:off x="0" y="0"/>
+          <a:ext cx="0" cy="0"/>
+          <a:chOff x="0" y="0"/>
+          <a:chExt cx="0" cy="0"/>
+        </a:xfrm>
+      </p:grpSpPr>
+      <p:sp>
+        <p:nvSpPr>
+          <p:cNvPr id="6146" name="Rectangle 2"/>
+          <p:cNvSpPr>
+            <a:spLocks noGrp="1" noChangeArrowheads="1"/>
+          </p:cNvSpPr>
+          <p:nvPr>
+            <p:ph type="title"/>
+            <p:custDataLst>
+              <p:tags r:id="rId1"/>
+            </p:custDataLst>
+          </p:nvPr>
+        </p:nvSpPr>
+        <p:spPr>
+          <a:xfrm>
+            <a:off x="1141413" y="284084"/>
+            <a:ext cx="9905998" cy="620791"/>
+          </a:xfrm>
+        </p:spPr>
+        <p:txBody>
+          <a:bodyPr/>
+          <a:lstStyle/>
+          <a:p>
+            <a:pPr algn="ctr"/>
+            <a:r>
+              <a:rPr lang="en-US" dirty="0"/>
+              <a:t>Week 1: Tuesday</a:t>
+            </a:r>
+          </a:p>
+        </p:txBody>
+      </p:sp>
+      <p:sp>
+        <p:nvSpPr>
+          <p:cNvPr id="6147" name="Rectangle 3"/>
+          <p:cNvSpPr>
+            <a:spLocks noGrp="1" noChangeArrowheads="1"/>
+          </p:cNvSpPr>
+          <p:nvPr>
+            <p:ph idx="1"/>
+            <p:custDataLst>
+              <p:tags r:id="rId2"/>
+            </p:custDataLst>
+          </p:nvPr>
+        </p:nvSpPr>
+        <p:spPr>
+          <a:xfrm>
+            <a:off x="1294151" y="1098549"/>
+            <a:ext cx="9600522" cy="5149850"/>
+          </a:xfrm>
+        </p:spPr>
+        <p:txBody>
+          <a:bodyPr>
+            <a:normAutofit/>
+          </a:bodyPr>
+          <a:lstStyle/>
+          <a:p>
+            <a:r>
+              <a:rPr lang="en-US" dirty="0">
+                <a:latin typeface="Arial" panose="020B0604020202020204" pitchFamily="34" charset="0"/>
+                <a:cs typeface="Arial" panose="020B0604020202020204" pitchFamily="34" charset="0"/>
+              </a:rPr>
+              <a:t>First homework is due Tomorrow evening (Wednesday)</a:t>
+            </a:r>
+          </a:p>
+          <a:p>
+            <a:pPr lvl="1"/>
+            <a:r>
+              <a:rPr lang="en-US" dirty="0">
+                <a:latin typeface="Arial" panose="020B0604020202020204" pitchFamily="34" charset="0"/>
+                <a:cs typeface="Arial" panose="020B0604020202020204" pitchFamily="34" charset="0"/>
+              </a:rPr>
+              <a:t>3 day extension if you really need it but you really should try not to use it for this one.</a:t>
+            </a:r>
+          </a:p>
+          <a:p>
+            <a:r>
+              <a:rPr lang="en-US" dirty="0">
+                <a:latin typeface="Arial" panose="020B0604020202020204" pitchFamily="34" charset="0"/>
+                <a:cs typeface="Arial" panose="020B0604020202020204" pitchFamily="34" charset="0"/>
+              </a:rPr>
+              <a:t>Please remember that I am asking for NO laptop / phones!</a:t>
+            </a:r>
+          </a:p>
+          <a:p>
+            <a:pPr lvl="1"/>
+            <a:r>
+              <a:rPr lang="en-US" dirty="0">
+                <a:latin typeface="Arial" panose="020B0604020202020204" pitchFamily="34" charset="0"/>
+                <a:cs typeface="Arial" panose="020B0604020202020204" pitchFamily="34" charset="0"/>
+              </a:rPr>
+              <a:t>This makes the learning environment better for everybody. I appreciate it!</a:t>
+            </a:r>
+          </a:p>
+          <a:p>
+            <a:r>
+              <a:rPr lang="en-US" dirty="0">
+                <a:latin typeface="Arial" panose="020B0604020202020204" pitchFamily="34" charset="0"/>
+                <a:cs typeface="Arial" panose="020B0604020202020204" pitchFamily="34" charset="0"/>
+              </a:rPr>
+              <a:t>I’ll start properly taking attendance today.</a:t>
+            </a:r>
+          </a:p>
+          <a:p>
+            <a:r>
+              <a:rPr lang="en-US" dirty="0">
+                <a:latin typeface="Arial" panose="020B0604020202020204" pitchFamily="34" charset="0"/>
+                <a:cs typeface="Arial" panose="020B0604020202020204" pitchFamily="34" charset="0"/>
+              </a:rPr>
+              <a:t>We will finish our warm-up / module 0 material today and hopefully begin module 1 (where the class REALLY begins)</a:t>
+            </a:r>
+          </a:p>
+          <a:p>
+            <a:endParaRPr lang="en-US" dirty="0">
+              <a:latin typeface="Arial" panose="020B0604020202020204" pitchFamily="34" charset="0"/>
+              <a:cs typeface="Arial" panose="020B0604020202020204" pitchFamily="34" charset="0"/>
+            </a:endParaRPr>
+          </a:p>
+        </p:txBody>
+      </p:sp>
+    </p:spTree>
+    <p:extLst>
+      <p:ext uri="{BB962C8B-B14F-4D97-AF65-F5344CB8AC3E}">
+        <p14:creationId xmlns:p14="http://schemas.microsoft.com/office/powerpoint/2010/main" val="2431754002"/>
+      </p:ext>
+    </p:extLst>
+  </p:cSld>
+  <p:clrMapOvr>
+    <a:masterClrMapping/>
+  </p:clrMapOvr>
+</p:sld>
+</file>
+
+<file path=ppt/slides/slide3.xml><?xml version="1.0" encoding="utf-8"?>
+<p:sld xmlns:a="http://schemas.openxmlformats.org/drawingml/2006/main" xmlns:r="http://schemas.openxmlformats.org/officeDocument/2006/relationships" xmlns:p="http://schemas.openxmlformats.org/presentationml/2006/main">
+  <p:cSld>
+    <p:spTree>
+      <p:nvGrpSpPr>
+        <p:cNvPr id="1" name="">
+          <a:extLst>
+            <a:ext uri="{FF2B5EF4-FFF2-40B4-BE49-F238E27FC236}">
+              <a16:creationId xmlns:a16="http://schemas.microsoft.com/office/drawing/2014/main" id="{FCA32411-328E-66E8-E6F4-EF539979CE9D}"/>
+            </a:ext>
+          </a:extLst>
+        </p:cNvPr>
+        <p:cNvGrpSpPr/>
+        <p:nvPr/>
+      </p:nvGrpSpPr>
+      <p:grpSpPr>
+        <a:xfrm>
+          <a:off x="0" y="0"/>
+          <a:ext cx="0" cy="0"/>
+          <a:chOff x="0" y="0"/>
+          <a:chExt cx="0" cy="0"/>
+        </a:xfrm>
+      </p:grpSpPr>
+      <p:sp>
+        <p:nvSpPr>
+          <p:cNvPr id="6146" name="Rectangle 2">
+            <a:extLst>
+              <a:ext uri="{FF2B5EF4-FFF2-40B4-BE49-F238E27FC236}">
+                <a16:creationId xmlns:a16="http://schemas.microsoft.com/office/drawing/2014/main" id="{D6CDF740-7CD2-4A8A-F4A5-5B9BBC68854B}"/>
+              </a:ext>
+            </a:extLst>
+          </p:cNvPr>
+          <p:cNvSpPr>
+            <a:spLocks noGrp="1" noChangeArrowheads="1"/>
+          </p:cNvSpPr>
+          <p:nvPr>
+            <p:ph type="title"/>
+            <p:custDataLst>
+              <p:tags r:id="rId1"/>
+            </p:custDataLst>
+          </p:nvPr>
+        </p:nvSpPr>
+        <p:spPr>
+          <a:xfrm>
+            <a:off x="1141413" y="284084"/>
+            <a:ext cx="9905998" cy="620791"/>
+          </a:xfrm>
+        </p:spPr>
+        <p:txBody>
+          <a:bodyPr/>
+          <a:lstStyle/>
+          <a:p>
+            <a:pPr algn="ctr"/>
+            <a:r>
+              <a:rPr lang="en-US" dirty="0"/>
+              <a:t>Week 1: Wednesday</a:t>
+            </a:r>
+          </a:p>
+        </p:txBody>
+      </p:sp>
+      <p:sp>
+        <p:nvSpPr>
+          <p:cNvPr id="6147" name="Rectangle 3">
+            <a:extLst>
+              <a:ext uri="{FF2B5EF4-FFF2-40B4-BE49-F238E27FC236}">
+                <a16:creationId xmlns:a16="http://schemas.microsoft.com/office/drawing/2014/main" id="{79392D12-A499-BDA8-BD1E-87BBE9A531AD}"/>
+              </a:ext>
+            </a:extLst>
+          </p:cNvPr>
+          <p:cNvSpPr>
+            <a:spLocks noGrp="1" noChangeArrowheads="1"/>
+          </p:cNvSpPr>
+          <p:nvPr>
+            <p:ph idx="1"/>
+            <p:custDataLst>
+              <p:tags r:id="rId2"/>
+            </p:custDataLst>
+          </p:nvPr>
+        </p:nvSpPr>
+        <p:spPr>
+          <a:xfrm>
+            <a:off x="1294151" y="1098549"/>
+            <a:ext cx="9600522" cy="5149850"/>
+          </a:xfrm>
+        </p:spPr>
+        <p:txBody>
+          <a:bodyPr>
+            <a:normAutofit/>
+          </a:bodyPr>
+          <a:lstStyle/>
+          <a:p>
+            <a:r>
+              <a:rPr lang="en-US" dirty="0">
+                <a:latin typeface="Arial" panose="020B0604020202020204" pitchFamily="34" charset="0"/>
+                <a:cs typeface="Arial" panose="020B0604020202020204" pitchFamily="34" charset="0"/>
+              </a:rPr>
+              <a:t>First homework is due Tonight! (Wednesday)</a:t>
+            </a:r>
+          </a:p>
+          <a:p>
+            <a:pPr lvl="1"/>
+            <a:r>
+              <a:rPr lang="en-US" dirty="0">
+                <a:latin typeface="Arial" panose="020B0604020202020204" pitchFamily="34" charset="0"/>
+                <a:cs typeface="Arial" panose="020B0604020202020204" pitchFamily="34" charset="0"/>
+              </a:rPr>
+              <a:t>3 day extension if you really need it but you really should try not to use it for this one.</a:t>
+            </a:r>
+          </a:p>
+          <a:p>
+            <a:r>
+              <a:rPr lang="en-US" dirty="0">
+                <a:latin typeface="Arial" panose="020B0604020202020204" pitchFamily="34" charset="0"/>
+                <a:cs typeface="Arial" panose="020B0604020202020204" pitchFamily="34" charset="0"/>
+              </a:rPr>
+              <a:t>Please remember that I am asking for NO laptop / phones!</a:t>
+            </a:r>
+          </a:p>
+          <a:p>
+            <a:pPr lvl="1"/>
+            <a:r>
+              <a:rPr lang="en-US" dirty="0">
+                <a:latin typeface="Arial" panose="020B0604020202020204" pitchFamily="34" charset="0"/>
+                <a:cs typeface="Arial" panose="020B0604020202020204" pitchFamily="34" charset="0"/>
+              </a:rPr>
+              <a:t>This makes the learning environment better for everybody. I appreciate it!</a:t>
+            </a:r>
+          </a:p>
+          <a:p>
+            <a:r>
+              <a:rPr lang="en-US" dirty="0">
+                <a:latin typeface="Arial" panose="020B0604020202020204" pitchFamily="34" charset="0"/>
+                <a:cs typeface="Arial" panose="020B0604020202020204" pitchFamily="34" charset="0"/>
+              </a:rPr>
+              <a:t>Attendance continues today as usual.</a:t>
+            </a:r>
+          </a:p>
+          <a:p>
+            <a:r>
+              <a:rPr lang="en-US" dirty="0">
+                <a:latin typeface="Arial" panose="020B0604020202020204" pitchFamily="34" charset="0"/>
+                <a:cs typeface="Arial" panose="020B0604020202020204" pitchFamily="34" charset="0"/>
+              </a:rPr>
+              <a:t>We begin module 1 today (the real class begins).</a:t>
+            </a:r>
+          </a:p>
+          <a:p>
+            <a:pPr lvl="1"/>
+            <a:r>
+              <a:rPr lang="en-US" dirty="0">
+                <a:latin typeface="Arial" panose="020B0604020202020204" pitchFamily="34" charset="0"/>
+                <a:cs typeface="Arial" panose="020B0604020202020204" pitchFamily="34" charset="0"/>
+              </a:rPr>
+              <a:t>It will likely take us at least the rest of this week to get through.</a:t>
+            </a:r>
+          </a:p>
+          <a:p>
+            <a:endParaRPr lang="en-US" dirty="0">
+              <a:latin typeface="Arial" panose="020B0604020202020204" pitchFamily="34" charset="0"/>
+              <a:cs typeface="Arial" panose="020B0604020202020204" pitchFamily="34" charset="0"/>
+            </a:endParaRPr>
+          </a:p>
+        </p:txBody>
+      </p:sp>
+    </p:spTree>
+    <p:extLst>
+      <p:ext uri="{BB962C8B-B14F-4D97-AF65-F5344CB8AC3E}">
+        <p14:creationId xmlns:p14="http://schemas.microsoft.com/office/powerpoint/2010/main" val="3784255301"/>
+      </p:ext>
+    </p:extLst>
+  </p:cSld>
+  <p:clrMapOvr>
+    <a:masterClrMapping/>
+  </p:clrMapOvr>
+</p:sld>
+</file>
+
+<file path=ppt/slides/slide4.xml><?xml version="1.0" encoding="utf-8"?>
+<p:sld xmlns:a="http://schemas.openxmlformats.org/drawingml/2006/main" xmlns:r="http://schemas.openxmlformats.org/officeDocument/2006/relationships" xmlns:p="http://schemas.openxmlformats.org/presentationml/2006/main">
+  <p:cSld>
+    <p:spTree>
+      <p:nvGrpSpPr>
+        <p:cNvPr id="1" name="">
+          <a:extLst>
+            <a:ext uri="{FF2B5EF4-FFF2-40B4-BE49-F238E27FC236}">
+              <a16:creationId xmlns:a16="http://schemas.microsoft.com/office/drawing/2014/main" id="{F30DD5C3-86C3-C7EE-D5BD-294A52F15C43}"/>
+            </a:ext>
+          </a:extLst>
+        </p:cNvPr>
+        <p:cNvGrpSpPr/>
+        <p:nvPr/>
+      </p:nvGrpSpPr>
+      <p:grpSpPr>
+        <a:xfrm>
+          <a:off x="0" y="0"/>
+          <a:ext cx="0" cy="0"/>
+          <a:chOff x="0" y="0"/>
+          <a:chExt cx="0" cy="0"/>
+        </a:xfrm>
+      </p:grpSpPr>
+      <p:sp>
+        <p:nvSpPr>
+          <p:cNvPr id="6146" name="Rectangle 2">
+            <a:extLst>
+              <a:ext uri="{FF2B5EF4-FFF2-40B4-BE49-F238E27FC236}">
+                <a16:creationId xmlns:a16="http://schemas.microsoft.com/office/drawing/2014/main" id="{53FBB78A-EE2B-4915-3BB5-0642F7776F81}"/>
+              </a:ext>
+            </a:extLst>
+          </p:cNvPr>
+          <p:cNvSpPr>
+            <a:spLocks noGrp="1" noChangeArrowheads="1"/>
+          </p:cNvSpPr>
+          <p:nvPr>
+            <p:ph type="title"/>
+            <p:custDataLst>
+              <p:tags r:id="rId1"/>
+            </p:custDataLst>
+          </p:nvPr>
+        </p:nvSpPr>
+        <p:spPr>
+          <a:xfrm>
+            <a:off x="1141413" y="284084"/>
+            <a:ext cx="9905998" cy="620791"/>
+          </a:xfrm>
+        </p:spPr>
+        <p:txBody>
+          <a:bodyPr/>
+          <a:lstStyle/>
+          <a:p>
+            <a:pPr algn="ctr"/>
+            <a:r>
+              <a:rPr lang="en-US" dirty="0"/>
+              <a:t>Week 1: Thursday</a:t>
+            </a:r>
+          </a:p>
+        </p:txBody>
+      </p:sp>
+      <p:sp>
+        <p:nvSpPr>
+          <p:cNvPr id="6147" name="Rectangle 3">
+            <a:extLst>
+              <a:ext uri="{FF2B5EF4-FFF2-40B4-BE49-F238E27FC236}">
+                <a16:creationId xmlns:a16="http://schemas.microsoft.com/office/drawing/2014/main" id="{696409BF-2B2C-9B95-39C5-A3B9EEEF888A}"/>
+              </a:ext>
+            </a:extLst>
+          </p:cNvPr>
+          <p:cNvSpPr>
+            <a:spLocks noGrp="1" noChangeArrowheads="1"/>
+          </p:cNvSpPr>
+          <p:nvPr>
+            <p:ph idx="1"/>
+            <p:custDataLst>
+              <p:tags r:id="rId2"/>
+            </p:custDataLst>
+          </p:nvPr>
+        </p:nvSpPr>
+        <p:spPr>
+          <a:xfrm>
+            <a:off x="1294151" y="1098549"/>
+            <a:ext cx="9600522" cy="5149850"/>
+          </a:xfrm>
+        </p:spPr>
+        <p:txBody>
+          <a:bodyPr>
+            <a:normAutofit fontScale="92500" lnSpcReduction="10000"/>
+          </a:bodyPr>
+          <a:lstStyle/>
+          <a:p>
+            <a:r>
+              <a:rPr lang="en-US" dirty="0">
+                <a:latin typeface="Arial" panose="020B0604020202020204" pitchFamily="34" charset="0"/>
+                <a:cs typeface="Arial" panose="020B0604020202020204" pitchFamily="34" charset="0"/>
+              </a:rPr>
+              <a:t>First homework was due last night! (Wednesday)</a:t>
+            </a:r>
+          </a:p>
+          <a:p>
+            <a:pPr lvl="1"/>
+            <a:r>
+              <a:rPr lang="en-US" dirty="0">
+                <a:latin typeface="Arial" panose="020B0604020202020204" pitchFamily="34" charset="0"/>
+                <a:cs typeface="Arial" panose="020B0604020202020204" pitchFamily="34" charset="0"/>
+              </a:rPr>
+              <a:t>How’d it go?</a:t>
+            </a:r>
+          </a:p>
+          <a:p>
+            <a:pPr lvl="1"/>
+            <a:r>
+              <a:rPr lang="en-US" dirty="0">
+                <a:latin typeface="Arial" panose="020B0604020202020204" pitchFamily="34" charset="0"/>
+                <a:cs typeface="Arial" panose="020B0604020202020204" pitchFamily="34" charset="0"/>
+              </a:rPr>
+              <a:t>3 day extension if you really need it but you really should try not to use it for this one.</a:t>
+            </a:r>
+          </a:p>
+          <a:p>
+            <a:r>
+              <a:rPr lang="en-US" dirty="0">
+                <a:latin typeface="Arial" panose="020B0604020202020204" pitchFamily="34" charset="0"/>
+                <a:cs typeface="Arial" panose="020B0604020202020204" pitchFamily="34" charset="0"/>
+              </a:rPr>
+              <a:t>Lecture recordings from last Fall are posted on Panopto on Canvas</a:t>
+            </a:r>
+          </a:p>
+          <a:p>
+            <a:pPr lvl="1"/>
+            <a:r>
+              <a:rPr lang="en-US" dirty="0">
+                <a:latin typeface="Arial" panose="020B0604020202020204" pitchFamily="34" charset="0"/>
+                <a:cs typeface="Arial" panose="020B0604020202020204" pitchFamily="34" charset="0"/>
+              </a:rPr>
+              <a:t>I posted ALL the videos FYI</a:t>
+            </a:r>
+          </a:p>
+          <a:p>
+            <a:pPr lvl="1"/>
+            <a:r>
+              <a:rPr lang="en-US" dirty="0">
+                <a:latin typeface="Arial" panose="020B0604020202020204" pitchFamily="34" charset="0"/>
+                <a:cs typeface="Arial" panose="020B0604020202020204" pitchFamily="34" charset="0"/>
+              </a:rPr>
+              <a:t>For this module, you watch from oldest through “Pump. Lemma + Begin Mod 3”</a:t>
+            </a:r>
+          </a:p>
+          <a:p>
+            <a:r>
+              <a:rPr lang="en-US" dirty="0">
+                <a:latin typeface="Arial" panose="020B0604020202020204" pitchFamily="34" charset="0"/>
+                <a:cs typeface="Arial" panose="020B0604020202020204" pitchFamily="34" charset="0"/>
+              </a:rPr>
+              <a:t>Please remember that I am asking for NO laptop / phones!</a:t>
+            </a:r>
+          </a:p>
+          <a:p>
+            <a:pPr lvl="1"/>
+            <a:r>
+              <a:rPr lang="en-US" dirty="0">
+                <a:latin typeface="Arial" panose="020B0604020202020204" pitchFamily="34" charset="0"/>
+                <a:cs typeface="Arial" panose="020B0604020202020204" pitchFamily="34" charset="0"/>
+              </a:rPr>
+              <a:t>This makes the learning environment better for everybody. I appreciate it!</a:t>
+            </a:r>
+          </a:p>
+          <a:p>
+            <a:r>
+              <a:rPr lang="en-US" dirty="0">
+                <a:latin typeface="Arial" panose="020B0604020202020204" pitchFamily="34" charset="0"/>
+                <a:cs typeface="Arial" panose="020B0604020202020204" pitchFamily="34" charset="0"/>
+              </a:rPr>
+              <a:t>Attendance continues today as usual.</a:t>
+            </a:r>
+          </a:p>
+          <a:p>
+            <a:r>
+              <a:rPr lang="en-US" dirty="0">
+                <a:latin typeface="Arial" panose="020B0604020202020204" pitchFamily="34" charset="0"/>
+                <a:cs typeface="Arial" panose="020B0604020202020204" pitchFamily="34" charset="0"/>
+              </a:rPr>
+              <a:t>We continue module 1 today.</a:t>
+            </a:r>
+          </a:p>
+          <a:p>
+            <a:pPr lvl="1"/>
+            <a:r>
+              <a:rPr lang="en-US" dirty="0">
+                <a:latin typeface="Arial" panose="020B0604020202020204" pitchFamily="34" charset="0"/>
+                <a:cs typeface="Arial" panose="020B0604020202020204" pitchFamily="34" charset="0"/>
+              </a:rPr>
+              <a:t>It will likely take us at least the rest of this week to get through.</a:t>
+            </a:r>
+          </a:p>
+          <a:p>
+            <a:endParaRPr lang="en-US" dirty="0">
+              <a:latin typeface="Arial" panose="020B0604020202020204" pitchFamily="34" charset="0"/>
+              <a:cs typeface="Arial" panose="020B0604020202020204" pitchFamily="34" charset="0"/>
+            </a:endParaRPr>
+          </a:p>
+        </p:txBody>
+      </p:sp>
+    </p:spTree>
+    <p:extLst>
+      <p:ext uri="{BB962C8B-B14F-4D97-AF65-F5344CB8AC3E}">
+        <p14:creationId xmlns:p14="http://schemas.microsoft.com/office/powerpoint/2010/main" val="1277214941"/>
+      </p:ext>
+    </p:extLst>
+  </p:cSld>
+  <p:clrMapOvr>
+    <a:masterClrMapping/>
+  </p:clrMapOvr>
+</p:sld>
+</file>
+
+<file path=ppt/slides/slide5.xml><?xml version="1.0" encoding="utf-8"?>
+<p:sld xmlns:a="http://schemas.openxmlformats.org/drawingml/2006/main" xmlns:r="http://schemas.openxmlformats.org/officeDocument/2006/relationships" xmlns:p="http://schemas.openxmlformats.org/presentationml/2006/main">
+  <p:cSld>
+    <p:spTree>
+      <p:nvGrpSpPr>
+        <p:cNvPr id="1" name="">
+          <a:extLst>
+            <a:ext uri="{FF2B5EF4-FFF2-40B4-BE49-F238E27FC236}">
+              <a16:creationId xmlns:a16="http://schemas.microsoft.com/office/drawing/2014/main" id="{E773EF14-B052-5E3A-8D08-B0118A24F73E}"/>
+            </a:ext>
+          </a:extLst>
+        </p:cNvPr>
+        <p:cNvGrpSpPr/>
+        <p:nvPr/>
+      </p:nvGrpSpPr>
+      <p:grpSpPr>
+        <a:xfrm>
+          <a:off x="0" y="0"/>
+          <a:ext cx="0" cy="0"/>
+          <a:chOff x="0" y="0"/>
+          <a:chExt cx="0" cy="0"/>
+        </a:xfrm>
+      </p:grpSpPr>
+      <p:sp>
+        <p:nvSpPr>
+          <p:cNvPr id="6146" name="Rectangle 2">
+            <a:extLst>
+              <a:ext uri="{FF2B5EF4-FFF2-40B4-BE49-F238E27FC236}">
+                <a16:creationId xmlns:a16="http://schemas.microsoft.com/office/drawing/2014/main" id="{15323A48-AB50-B349-6F02-2114F4A6D311}"/>
+              </a:ext>
+            </a:extLst>
+          </p:cNvPr>
+          <p:cNvSpPr>
+            <a:spLocks noGrp="1" noChangeArrowheads="1"/>
+          </p:cNvSpPr>
+          <p:nvPr>
+            <p:ph type="title"/>
+            <p:custDataLst>
+              <p:tags r:id="rId1"/>
+            </p:custDataLst>
+          </p:nvPr>
+        </p:nvSpPr>
+        <p:spPr>
+          <a:xfrm>
+            <a:off x="1141413" y="284084"/>
+            <a:ext cx="9905998" cy="620791"/>
+          </a:xfrm>
+        </p:spPr>
+        <p:txBody>
+          <a:bodyPr/>
+          <a:lstStyle/>
+          <a:p>
+            <a:pPr algn="ctr"/>
+            <a:r>
+              <a:rPr lang="en-US" dirty="0"/>
+              <a:t>Week 1: Friday</a:t>
+            </a:r>
+          </a:p>
+        </p:txBody>
+      </p:sp>
+      <p:sp>
+        <p:nvSpPr>
+          <p:cNvPr id="6147" name="Rectangle 3">
+            <a:extLst>
+              <a:ext uri="{FF2B5EF4-FFF2-40B4-BE49-F238E27FC236}">
+                <a16:creationId xmlns:a16="http://schemas.microsoft.com/office/drawing/2014/main" id="{B9696856-70BF-C0BE-54A8-02E39A481C9B}"/>
+              </a:ext>
+            </a:extLst>
+          </p:cNvPr>
+          <p:cNvSpPr>
+            <a:spLocks noGrp="1" noChangeArrowheads="1"/>
+          </p:cNvSpPr>
+          <p:nvPr>
+            <p:ph idx="1"/>
+            <p:custDataLst>
+              <p:tags r:id="rId2"/>
+            </p:custDataLst>
+          </p:nvPr>
+        </p:nvSpPr>
+        <p:spPr>
+          <a:xfrm>
+            <a:off x="1294151" y="1098549"/>
+            <a:ext cx="9600522" cy="5149850"/>
+          </a:xfrm>
+        </p:spPr>
+        <p:txBody>
+          <a:bodyPr>
+            <a:normAutofit fontScale="77500" lnSpcReduction="20000"/>
+          </a:bodyPr>
+          <a:lstStyle/>
+          <a:p>
+            <a:r>
+              <a:rPr lang="en-US" dirty="0">
+                <a:latin typeface="Arial" panose="020B0604020202020204" pitchFamily="34" charset="0"/>
+                <a:cs typeface="Arial" panose="020B0604020202020204" pitchFamily="34" charset="0"/>
+              </a:rPr>
+              <a:t>End of week 1!!</a:t>
+            </a:r>
+          </a:p>
+          <a:p>
+            <a:r>
+              <a:rPr lang="en-US" dirty="0">
+                <a:latin typeface="Arial" panose="020B0604020202020204" pitchFamily="34" charset="0"/>
+                <a:cs typeface="Arial" panose="020B0604020202020204" pitchFamily="34" charset="0"/>
+              </a:rPr>
+              <a:t>First homework is in extension period</a:t>
+            </a:r>
+          </a:p>
+          <a:p>
+            <a:pPr lvl="1"/>
+            <a:r>
+              <a:rPr lang="en-US" dirty="0">
+                <a:latin typeface="Arial" panose="020B0604020202020204" pitchFamily="34" charset="0"/>
+                <a:cs typeface="Arial" panose="020B0604020202020204" pitchFamily="34" charset="0"/>
+              </a:rPr>
+              <a:t>How’d it go?</a:t>
+            </a:r>
+          </a:p>
+          <a:p>
+            <a:r>
+              <a:rPr lang="en-US" dirty="0">
+                <a:latin typeface="Arial" panose="020B0604020202020204" pitchFamily="34" charset="0"/>
+                <a:cs typeface="Arial" panose="020B0604020202020204" pitchFamily="34" charset="0"/>
+              </a:rPr>
+              <a:t>Module 1 Written HW is due next Tuesday</a:t>
+            </a:r>
+          </a:p>
+          <a:p>
+            <a:pPr lvl="1"/>
+            <a:r>
+              <a:rPr lang="en-US" dirty="0">
+                <a:latin typeface="Arial" panose="020B0604020202020204" pitchFamily="34" charset="0"/>
+                <a:cs typeface="Arial" panose="020B0604020202020204" pitchFamily="34" charset="0"/>
+              </a:rPr>
+              <a:t>We will probably finish the module on Monday but you can get started over the weekend</a:t>
+            </a:r>
+          </a:p>
+          <a:p>
+            <a:r>
+              <a:rPr lang="en-US" dirty="0">
+                <a:latin typeface="Arial" panose="020B0604020202020204" pitchFamily="34" charset="0"/>
+                <a:cs typeface="Arial" panose="020B0604020202020204" pitchFamily="34" charset="0"/>
+              </a:rPr>
+              <a:t>Be aware there is a programming assignment due on Thursday as well!</a:t>
+            </a:r>
+          </a:p>
+          <a:p>
+            <a:r>
+              <a:rPr lang="en-US" dirty="0">
+                <a:latin typeface="Arial" panose="020B0604020202020204" pitchFamily="34" charset="0"/>
+                <a:cs typeface="Arial" panose="020B0604020202020204" pitchFamily="34" charset="0"/>
+              </a:rPr>
+              <a:t>Lecture recordings from last Fall are posted on Panopto on Canvas</a:t>
+            </a:r>
+          </a:p>
+          <a:p>
+            <a:pPr lvl="1"/>
+            <a:r>
+              <a:rPr lang="en-US" dirty="0">
+                <a:latin typeface="Arial" panose="020B0604020202020204" pitchFamily="34" charset="0"/>
+                <a:cs typeface="Arial" panose="020B0604020202020204" pitchFamily="34" charset="0"/>
+              </a:rPr>
+              <a:t>I posted ALL the videos FYI</a:t>
+            </a:r>
+          </a:p>
+          <a:p>
+            <a:pPr lvl="1"/>
+            <a:r>
+              <a:rPr lang="en-US" dirty="0">
+                <a:latin typeface="Arial" panose="020B0604020202020204" pitchFamily="34" charset="0"/>
+                <a:cs typeface="Arial" panose="020B0604020202020204" pitchFamily="34" charset="0"/>
+              </a:rPr>
+              <a:t>For this module, you watch from oldest through “Pump. Lemma + Begin Mod 3”</a:t>
+            </a:r>
+          </a:p>
+          <a:p>
+            <a:r>
+              <a:rPr lang="en-US" dirty="0">
+                <a:latin typeface="Arial" panose="020B0604020202020204" pitchFamily="34" charset="0"/>
+                <a:cs typeface="Arial" panose="020B0604020202020204" pitchFamily="34" charset="0"/>
+              </a:rPr>
+              <a:t>Please remember that I am asking for NO laptop / phones!</a:t>
+            </a:r>
+          </a:p>
+          <a:p>
+            <a:pPr lvl="1"/>
+            <a:r>
+              <a:rPr lang="en-US" dirty="0">
+                <a:latin typeface="Arial" panose="020B0604020202020204" pitchFamily="34" charset="0"/>
+                <a:cs typeface="Arial" panose="020B0604020202020204" pitchFamily="34" charset="0"/>
+              </a:rPr>
+              <a:t>This makes the learning environment better for everybody. I appreciate it!</a:t>
+            </a:r>
+          </a:p>
+          <a:p>
+            <a:r>
+              <a:rPr lang="en-US" dirty="0">
+                <a:latin typeface="Arial" panose="020B0604020202020204" pitchFamily="34" charset="0"/>
+                <a:cs typeface="Arial" panose="020B0604020202020204" pitchFamily="34" charset="0"/>
+              </a:rPr>
+              <a:t>Attendance continues today as usual.</a:t>
+            </a:r>
+          </a:p>
+          <a:p>
+            <a:r>
+              <a:rPr lang="en-US" dirty="0">
+                <a:latin typeface="Arial" panose="020B0604020202020204" pitchFamily="34" charset="0"/>
+                <a:cs typeface="Arial" panose="020B0604020202020204" pitchFamily="34" charset="0"/>
+              </a:rPr>
+              <a:t>We continue module 1 today.</a:t>
+            </a:r>
+          </a:p>
+          <a:p>
+            <a:pPr lvl="1"/>
+            <a:r>
+              <a:rPr lang="en-US" dirty="0">
+                <a:latin typeface="Arial" panose="020B0604020202020204" pitchFamily="34" charset="0"/>
+                <a:cs typeface="Arial" panose="020B0604020202020204" pitchFamily="34" charset="0"/>
+              </a:rPr>
+              <a:t>I doubt we will finish it today</a:t>
+            </a:r>
+          </a:p>
+          <a:p>
+            <a:endParaRPr lang="en-US" dirty="0">
+              <a:latin typeface="Arial" panose="020B0604020202020204" pitchFamily="34" charset="0"/>
+              <a:cs typeface="Arial" panose="020B0604020202020204" pitchFamily="34" charset="0"/>
+            </a:endParaRPr>
+          </a:p>
+        </p:txBody>
+      </p:sp>
+    </p:spTree>
+    <p:extLst>
+      <p:ext uri="{BB962C8B-B14F-4D97-AF65-F5344CB8AC3E}">
+        <p14:creationId xmlns:p14="http://schemas.microsoft.com/office/powerpoint/2010/main" val="2034039482"/>
+      </p:ext>
+    </p:extLst>
+  </p:cSld>
+  <p:clrMapOvr>
+    <a:masterClrMapping/>
+  </p:clrMapOvr>
+</p:sld>
+</file>
+
+<file path=ppt/slides/slide6.xml><?xml version="1.0" encoding="utf-8"?>
+<p:sld xmlns:a="http://schemas.openxmlformats.org/drawingml/2006/main" xmlns:r="http://schemas.openxmlformats.org/officeDocument/2006/relationships" xmlns:p="http://schemas.openxmlformats.org/presentationml/2006/main">
+  <p:cSld>
+    <p:spTree>
+      <p:nvGrpSpPr>
+        <p:cNvPr id="1" name="">
+          <a:extLst>
+            <a:ext uri="{FF2B5EF4-FFF2-40B4-BE49-F238E27FC236}">
+              <a16:creationId xmlns:a16="http://schemas.microsoft.com/office/drawing/2014/main" id="{F0060D86-CB61-694B-AA47-6AB7A1979855}"/>
+            </a:ext>
+          </a:extLst>
+        </p:cNvPr>
+        <p:cNvGrpSpPr/>
+        <p:nvPr/>
+      </p:nvGrpSpPr>
+      <p:grpSpPr>
+        <a:xfrm>
+          <a:off x="0" y="0"/>
+          <a:ext cx="0" cy="0"/>
+          <a:chOff x="0" y="0"/>
+          <a:chExt cx="0" cy="0"/>
+        </a:xfrm>
+      </p:grpSpPr>
+      <p:sp>
+        <p:nvSpPr>
+          <p:cNvPr id="6146" name="Rectangle 2">
+            <a:extLst>
+              <a:ext uri="{FF2B5EF4-FFF2-40B4-BE49-F238E27FC236}">
+                <a16:creationId xmlns:a16="http://schemas.microsoft.com/office/drawing/2014/main" id="{377F11AF-F344-C8D4-C139-9305CB2B84C9}"/>
+              </a:ext>
+            </a:extLst>
+          </p:cNvPr>
+          <p:cNvSpPr>
+            <a:spLocks noGrp="1" noChangeArrowheads="1"/>
+          </p:cNvSpPr>
+          <p:nvPr>
+            <p:ph type="title"/>
+            <p:custDataLst>
+              <p:tags r:id="rId1"/>
+            </p:custDataLst>
+          </p:nvPr>
+        </p:nvSpPr>
+        <p:spPr>
+          <a:xfrm>
+            <a:off x="1141413" y="284084"/>
+            <a:ext cx="9905998" cy="620791"/>
+          </a:xfrm>
+        </p:spPr>
+        <p:txBody>
+          <a:bodyPr/>
+          <a:lstStyle/>
+          <a:p>
+            <a:pPr algn="ctr"/>
+            <a:r>
+              <a:rPr lang="en-US" dirty="0"/>
+              <a:t>Week 2: Monday</a:t>
+            </a:r>
+          </a:p>
+        </p:txBody>
+      </p:sp>
+      <p:sp>
+        <p:nvSpPr>
+          <p:cNvPr id="6147" name="Rectangle 3">
+            <a:extLst>
+              <a:ext uri="{FF2B5EF4-FFF2-40B4-BE49-F238E27FC236}">
+                <a16:creationId xmlns:a16="http://schemas.microsoft.com/office/drawing/2014/main" id="{AB649171-4125-074F-B3EE-CC029B85A7F8}"/>
+              </a:ext>
+            </a:extLst>
+          </p:cNvPr>
+          <p:cNvSpPr>
+            <a:spLocks noGrp="1" noChangeArrowheads="1"/>
+          </p:cNvSpPr>
+          <p:nvPr>
+            <p:ph idx="1"/>
+            <p:custDataLst>
+              <p:tags r:id="rId2"/>
+            </p:custDataLst>
+          </p:nvPr>
+        </p:nvSpPr>
+        <p:spPr>
+          <a:xfrm>
+            <a:off x="1294151" y="1098548"/>
+            <a:ext cx="9600522" cy="5475367"/>
+          </a:xfrm>
+        </p:spPr>
+        <p:txBody>
+          <a:bodyPr>
+            <a:normAutofit fontScale="92500" lnSpcReduction="20000"/>
+          </a:bodyPr>
+          <a:lstStyle/>
+          <a:p>
+            <a:r>
+              <a:rPr lang="en-US" dirty="0">
+                <a:latin typeface="Arial" panose="020B0604020202020204" pitchFamily="34" charset="0"/>
+                <a:cs typeface="Arial" panose="020B0604020202020204" pitchFamily="34" charset="0"/>
+              </a:rPr>
+              <a:t>Welcome to week 2!!</a:t>
+            </a:r>
+          </a:p>
+          <a:p>
+            <a:r>
+              <a:rPr lang="en-US" dirty="0">
+                <a:latin typeface="Arial" panose="020B0604020202020204" pitchFamily="34" charset="0"/>
+                <a:cs typeface="Arial" panose="020B0604020202020204" pitchFamily="34" charset="0"/>
+              </a:rPr>
+              <a:t>First homework is “graded”. Remember that this was a spot-check grade</a:t>
+            </a:r>
+          </a:p>
+          <a:p>
+            <a:r>
+              <a:rPr lang="en-US" dirty="0">
+                <a:latin typeface="Arial" panose="020B0604020202020204" pitchFamily="34" charset="0"/>
+                <a:cs typeface="Arial" panose="020B0604020202020204" pitchFamily="34" charset="0"/>
+              </a:rPr>
+              <a:t>This week:</a:t>
+            </a:r>
+          </a:p>
+          <a:p>
+            <a:pPr lvl="1"/>
+            <a:r>
+              <a:rPr lang="en-US" dirty="0">
+                <a:latin typeface="Arial" panose="020B0604020202020204" pitchFamily="34" charset="0"/>
+                <a:cs typeface="Arial" panose="020B0604020202020204" pitchFamily="34" charset="0"/>
+              </a:rPr>
+              <a:t>Written Mod. 2 assignment due Tuesday evening</a:t>
+            </a:r>
+          </a:p>
+          <a:p>
+            <a:pPr lvl="1"/>
+            <a:r>
+              <a:rPr lang="en-US" dirty="0">
+                <a:latin typeface="Arial" panose="020B0604020202020204" pitchFamily="34" charset="0"/>
+                <a:cs typeface="Arial" panose="020B0604020202020204" pitchFamily="34" charset="0"/>
+              </a:rPr>
+              <a:t>Programming assignment due Thursday evening</a:t>
+            </a:r>
+          </a:p>
+          <a:p>
+            <a:pPr lvl="1"/>
+            <a:r>
+              <a:rPr lang="en-US" dirty="0">
+                <a:latin typeface="Arial" panose="020B0604020202020204" pitchFamily="34" charset="0"/>
+                <a:cs typeface="Arial" panose="020B0604020202020204" pitchFamily="34" charset="0"/>
+              </a:rPr>
+              <a:t>First Midterm is on Friday (no lecture on Friday)</a:t>
+            </a:r>
+          </a:p>
+          <a:p>
+            <a:r>
+              <a:rPr lang="en-US" dirty="0">
+                <a:latin typeface="Arial" panose="020B0604020202020204" pitchFamily="34" charset="0"/>
+                <a:cs typeface="Arial" panose="020B0604020202020204" pitchFamily="34" charset="0"/>
+              </a:rPr>
+              <a:t>Lecture recordings from last Fall are posted on Panopto on Canvas</a:t>
+            </a:r>
+          </a:p>
+          <a:p>
+            <a:pPr lvl="1"/>
+            <a:r>
+              <a:rPr lang="en-US" dirty="0">
+                <a:latin typeface="Arial" panose="020B0604020202020204" pitchFamily="34" charset="0"/>
+                <a:cs typeface="Arial" panose="020B0604020202020204" pitchFamily="34" charset="0"/>
+              </a:rPr>
+              <a:t>I posted ALL the videos FYI</a:t>
+            </a:r>
+          </a:p>
+          <a:p>
+            <a:pPr lvl="1"/>
+            <a:r>
+              <a:rPr lang="en-US" dirty="0">
+                <a:latin typeface="Arial" panose="020B0604020202020204" pitchFamily="34" charset="0"/>
+                <a:cs typeface="Arial" panose="020B0604020202020204" pitchFamily="34" charset="0"/>
+              </a:rPr>
+              <a:t>For this module, you watch from oldest through “Pump. Lemma + Begin Mod 3”</a:t>
+            </a:r>
+          </a:p>
+          <a:p>
+            <a:r>
+              <a:rPr lang="en-US" dirty="0">
+                <a:latin typeface="Arial" panose="020B0604020202020204" pitchFamily="34" charset="0"/>
+                <a:cs typeface="Arial" panose="020B0604020202020204" pitchFamily="34" charset="0"/>
+              </a:rPr>
+              <a:t>Please remember that I am asking for NO laptop / phones!</a:t>
+            </a:r>
+          </a:p>
+          <a:p>
+            <a:pPr lvl="1"/>
+            <a:r>
+              <a:rPr lang="en-US" dirty="0">
+                <a:latin typeface="Arial" panose="020B0604020202020204" pitchFamily="34" charset="0"/>
+                <a:cs typeface="Arial" panose="020B0604020202020204" pitchFamily="34" charset="0"/>
+              </a:rPr>
+              <a:t>This makes the learning environment better for everybody. I appreciate it!</a:t>
+            </a:r>
+          </a:p>
+          <a:p>
+            <a:r>
+              <a:rPr lang="en-US" dirty="0">
+                <a:latin typeface="Arial" panose="020B0604020202020204" pitchFamily="34" charset="0"/>
+                <a:cs typeface="Arial" panose="020B0604020202020204" pitchFamily="34" charset="0"/>
+              </a:rPr>
+              <a:t>Attendance continues today as usual.</a:t>
+            </a:r>
+          </a:p>
+          <a:p>
+            <a:r>
+              <a:rPr lang="en-US" dirty="0">
+                <a:latin typeface="Arial" panose="020B0604020202020204" pitchFamily="34" charset="0"/>
+                <a:cs typeface="Arial" panose="020B0604020202020204" pitchFamily="34" charset="0"/>
+              </a:rPr>
+              <a:t>We should finish module 1 today</a:t>
+            </a:r>
+          </a:p>
+          <a:p>
+            <a:endParaRPr lang="en-US" dirty="0">
+              <a:latin typeface="Arial" panose="020B0604020202020204" pitchFamily="34" charset="0"/>
+              <a:cs typeface="Arial" panose="020B0604020202020204" pitchFamily="34" charset="0"/>
+            </a:endParaRPr>
+          </a:p>
+        </p:txBody>
+      </p:sp>
+    </p:spTree>
+    <p:extLst>
+      <p:ext uri="{BB962C8B-B14F-4D97-AF65-F5344CB8AC3E}">
+        <p14:creationId xmlns:p14="http://schemas.microsoft.com/office/powerpoint/2010/main" val="2728786617"/>
+      </p:ext>
+    </p:extLst>
+  </p:cSld>
+  <p:clrMapOvr>
+    <a:masterClrMapping/>
+  </p:clrMapOvr>
+</p:sld>
+</file>
+
+<file path=ppt/slides/slide7.xml><?xml version="1.0" encoding="utf-8"?>
+<p:sld xmlns:a="http://schemas.openxmlformats.org/drawingml/2006/main" xmlns:r="http://schemas.openxmlformats.org/officeDocument/2006/relationships" xmlns:p="http://schemas.openxmlformats.org/presentationml/2006/main">
+  <p:cSld>
+    <p:spTree>
+      <p:nvGrpSpPr>
+        <p:cNvPr id="1" name="">
+          <a:extLst>
+            <a:ext uri="{FF2B5EF4-FFF2-40B4-BE49-F238E27FC236}">
+              <a16:creationId xmlns:a16="http://schemas.microsoft.com/office/drawing/2014/main" id="{10A534A6-C91A-6236-8C47-1EE87A38EC62}"/>
+            </a:ext>
+          </a:extLst>
+        </p:cNvPr>
+        <p:cNvGrpSpPr/>
+        <p:nvPr/>
+      </p:nvGrpSpPr>
+      <p:grpSpPr>
+        <a:xfrm>
+          <a:off x="0" y="0"/>
+          <a:ext cx="0" cy="0"/>
+          <a:chOff x="0" y="0"/>
+          <a:chExt cx="0" cy="0"/>
+        </a:xfrm>
+      </p:grpSpPr>
+      <p:sp>
+        <p:nvSpPr>
+          <p:cNvPr id="6146" name="Rectangle 2">
+            <a:extLst>
+              <a:ext uri="{FF2B5EF4-FFF2-40B4-BE49-F238E27FC236}">
+                <a16:creationId xmlns:a16="http://schemas.microsoft.com/office/drawing/2014/main" id="{8FA1C635-2C54-9B7E-1432-EEA3313AAA24}"/>
+              </a:ext>
+            </a:extLst>
+          </p:cNvPr>
+          <p:cNvSpPr>
+            <a:spLocks noGrp="1" noChangeArrowheads="1"/>
+          </p:cNvSpPr>
+          <p:nvPr>
+            <p:ph type="title"/>
+            <p:custDataLst>
+              <p:tags r:id="rId1"/>
+            </p:custDataLst>
+          </p:nvPr>
+        </p:nvSpPr>
+        <p:spPr>
+          <a:xfrm>
+            <a:off x="1141413" y="284084"/>
+            <a:ext cx="9905998" cy="620791"/>
+          </a:xfrm>
+        </p:spPr>
+        <p:txBody>
+          <a:bodyPr/>
+          <a:lstStyle/>
+          <a:p>
+            <a:pPr algn="ctr"/>
+            <a:r>
+              <a:rPr lang="en-US" dirty="0"/>
+              <a:t>Week 2: Tuesday</a:t>
+            </a:r>
+          </a:p>
+        </p:txBody>
+      </p:sp>
+      <p:sp>
+        <p:nvSpPr>
+          <p:cNvPr id="6147" name="Rectangle 3">
+            <a:extLst>
+              <a:ext uri="{FF2B5EF4-FFF2-40B4-BE49-F238E27FC236}">
+                <a16:creationId xmlns:a16="http://schemas.microsoft.com/office/drawing/2014/main" id="{A2A40684-18FF-B302-48CF-E12AF1B700D6}"/>
+              </a:ext>
+            </a:extLst>
+          </p:cNvPr>
+          <p:cNvSpPr>
+            <a:spLocks noGrp="1" noChangeArrowheads="1"/>
+          </p:cNvSpPr>
+          <p:nvPr>
+            <p:ph idx="1"/>
+            <p:custDataLst>
+              <p:tags r:id="rId2"/>
+            </p:custDataLst>
+          </p:nvPr>
+        </p:nvSpPr>
+        <p:spPr>
+          <a:xfrm>
+            <a:off x="1294151" y="1098548"/>
+            <a:ext cx="9600522" cy="5475367"/>
+          </a:xfrm>
+        </p:spPr>
+        <p:txBody>
+          <a:bodyPr>
+            <a:normAutofit fontScale="92500" lnSpcReduction="10000"/>
+          </a:bodyPr>
+          <a:lstStyle/>
+          <a:p>
+            <a:r>
+              <a:rPr lang="en-US" dirty="0">
+                <a:latin typeface="Arial" panose="020B0604020202020204" pitchFamily="34" charset="0"/>
+                <a:cs typeface="Arial" panose="020B0604020202020204" pitchFamily="34" charset="0"/>
+              </a:rPr>
+              <a:t>Welcome to week 2!!</a:t>
+            </a:r>
+          </a:p>
+          <a:p>
+            <a:r>
+              <a:rPr lang="en-US" dirty="0">
+                <a:latin typeface="Arial" panose="020B0604020202020204" pitchFamily="34" charset="0"/>
+                <a:cs typeface="Arial" panose="020B0604020202020204" pitchFamily="34" charset="0"/>
+              </a:rPr>
+              <a:t>This week:</a:t>
+            </a:r>
+          </a:p>
+          <a:p>
+            <a:pPr lvl="1"/>
+            <a:r>
+              <a:rPr lang="en-US" dirty="0">
+                <a:latin typeface="Arial" panose="020B0604020202020204" pitchFamily="34" charset="0"/>
+                <a:cs typeface="Arial" panose="020B0604020202020204" pitchFamily="34" charset="0"/>
+              </a:rPr>
+              <a:t>Written Mod. 2 assignment due </a:t>
+            </a:r>
+            <a:r>
+              <a:rPr lang="en-US" b="1" i="1" u="sng" dirty="0">
+                <a:latin typeface="Arial" panose="020B0604020202020204" pitchFamily="34" charset="0"/>
+                <a:cs typeface="Arial" panose="020B0604020202020204" pitchFamily="34" charset="0"/>
+              </a:rPr>
+              <a:t>TONIGHT</a:t>
+            </a:r>
+            <a:r>
+              <a:rPr lang="en-US" dirty="0">
+                <a:latin typeface="Arial" panose="020B0604020202020204" pitchFamily="34" charset="0"/>
+                <a:cs typeface="Arial" panose="020B0604020202020204" pitchFamily="34" charset="0"/>
+              </a:rPr>
+              <a:t>!!</a:t>
+            </a:r>
+          </a:p>
+          <a:p>
+            <a:pPr lvl="1"/>
+            <a:r>
+              <a:rPr lang="en-US" dirty="0">
+                <a:latin typeface="Arial" panose="020B0604020202020204" pitchFamily="34" charset="0"/>
+                <a:cs typeface="Arial" panose="020B0604020202020204" pitchFamily="34" charset="0"/>
+              </a:rPr>
+              <a:t>Programming assignment due Thursday evening</a:t>
+            </a:r>
+          </a:p>
+          <a:p>
+            <a:pPr lvl="1"/>
+            <a:r>
+              <a:rPr lang="en-US" dirty="0">
+                <a:latin typeface="Arial" panose="020B0604020202020204" pitchFamily="34" charset="0"/>
+                <a:cs typeface="Arial" panose="020B0604020202020204" pitchFamily="34" charset="0"/>
+              </a:rPr>
+              <a:t>First Midterm is on Friday (no lecture on Friday)</a:t>
+            </a:r>
+          </a:p>
+          <a:p>
+            <a:r>
+              <a:rPr lang="en-US" dirty="0">
+                <a:latin typeface="Arial" panose="020B0604020202020204" pitchFamily="34" charset="0"/>
+                <a:cs typeface="Arial" panose="020B0604020202020204" pitchFamily="34" charset="0"/>
+              </a:rPr>
+              <a:t>Lecture recordings from last Fall are posted on Panopto on Canvas</a:t>
+            </a:r>
+          </a:p>
+          <a:p>
+            <a:pPr lvl="1"/>
+            <a:r>
+              <a:rPr lang="en-US" dirty="0">
+                <a:latin typeface="Arial" panose="020B0604020202020204" pitchFamily="34" charset="0"/>
+                <a:cs typeface="Arial" panose="020B0604020202020204" pitchFamily="34" charset="0"/>
+              </a:rPr>
+              <a:t>I posted ALL the videos FYI</a:t>
+            </a:r>
+          </a:p>
+          <a:p>
+            <a:pPr lvl="1"/>
+            <a:r>
+              <a:rPr lang="en-US" dirty="0">
+                <a:latin typeface="Arial" panose="020B0604020202020204" pitchFamily="34" charset="0"/>
+                <a:cs typeface="Arial" panose="020B0604020202020204" pitchFamily="34" charset="0"/>
+              </a:rPr>
+              <a:t>For this module, you watch from oldest through “Pump. Lemma + Begin Mod 3”</a:t>
+            </a:r>
+          </a:p>
+          <a:p>
+            <a:r>
+              <a:rPr lang="en-US" dirty="0">
+                <a:latin typeface="Arial" panose="020B0604020202020204" pitchFamily="34" charset="0"/>
+                <a:cs typeface="Arial" panose="020B0604020202020204" pitchFamily="34" charset="0"/>
+              </a:rPr>
+              <a:t>Please remember that I am asking for NO laptop / phones!</a:t>
+            </a:r>
+          </a:p>
+          <a:p>
+            <a:pPr lvl="1"/>
+            <a:r>
+              <a:rPr lang="en-US" dirty="0">
+                <a:latin typeface="Arial" panose="020B0604020202020204" pitchFamily="34" charset="0"/>
+                <a:cs typeface="Arial" panose="020B0604020202020204" pitchFamily="34" charset="0"/>
+              </a:rPr>
+              <a:t>This makes the learning environment better for everybody. I appreciate it!</a:t>
+            </a:r>
+          </a:p>
+          <a:p>
+            <a:r>
+              <a:rPr lang="en-US" dirty="0">
+                <a:latin typeface="Arial" panose="020B0604020202020204" pitchFamily="34" charset="0"/>
+                <a:cs typeface="Arial" panose="020B0604020202020204" pitchFamily="34" charset="0"/>
+              </a:rPr>
+              <a:t>Attendance continues today as usual.</a:t>
+            </a:r>
+          </a:p>
+          <a:p>
+            <a:r>
+              <a:rPr lang="en-US" dirty="0">
+                <a:latin typeface="Arial" panose="020B0604020202020204" pitchFamily="34" charset="0"/>
+                <a:cs typeface="Arial" panose="020B0604020202020204" pitchFamily="34" charset="0"/>
+              </a:rPr>
+              <a:t>Today we begin Module 2! The </a:t>
+            </a:r>
+            <a:r>
+              <a:rPr lang="en-US">
+                <a:latin typeface="Arial" panose="020B0604020202020204" pitchFamily="34" charset="0"/>
+                <a:cs typeface="Arial" panose="020B0604020202020204" pitchFamily="34" charset="0"/>
+              </a:rPr>
+              <a:t>Context-Free Languages!</a:t>
+            </a:r>
+            <a:endParaRPr lang="en-US" dirty="0">
+              <a:latin typeface="Arial" panose="020B0604020202020204" pitchFamily="34" charset="0"/>
+              <a:cs typeface="Arial" panose="020B0604020202020204" pitchFamily="34" charset="0"/>
+            </a:endParaRPr>
+          </a:p>
+          <a:p>
+            <a:endParaRPr lang="en-US" dirty="0">
+              <a:latin typeface="Arial" panose="020B0604020202020204" pitchFamily="34" charset="0"/>
+              <a:cs typeface="Arial" panose="020B0604020202020204" pitchFamily="34" charset="0"/>
+            </a:endParaRPr>
+          </a:p>
+        </p:txBody>
+      </p:sp>
+    </p:spTree>
+    <p:extLst>
+      <p:ext uri="{BB962C8B-B14F-4D97-AF65-F5344CB8AC3E}">
+        <p14:creationId xmlns:p14="http://schemas.microsoft.com/office/powerpoint/2010/main" val="105140071"/>
+      </p:ext>
+    </p:extLst>
+  </p:cSld>
+  <p:clrMapOvr>
+    <a:masterClrMapping/>
+  </p:clrMapOvr>
+</p:sld>
+</file>
+
+<file path=ppt/slides/slide8.xml><?xml version="1.0" encoding="utf-8"?>
+<p:sld xmlns:a="http://schemas.openxmlformats.org/drawingml/2006/main" xmlns:r="http://schemas.openxmlformats.org/officeDocument/2006/relationships" xmlns:p="http://schemas.openxmlformats.org/presentationml/2006/main">
+  <p:cSld>
+    <p:spTree>
+      <p:nvGrpSpPr>
+        <p:cNvPr id="1" name="">
+          <a:extLst>
+            <a:ext uri="{FF2B5EF4-FFF2-40B4-BE49-F238E27FC236}">
+              <a16:creationId xmlns:a16="http://schemas.microsoft.com/office/drawing/2014/main" id="{63DC3DD8-4F8B-8749-5855-A11573B83898}"/>
+            </a:ext>
+          </a:extLst>
+        </p:cNvPr>
+        <p:cNvGrpSpPr/>
+        <p:nvPr/>
+      </p:nvGrpSpPr>
+      <p:grpSpPr>
+        <a:xfrm>
+          <a:off x="0" y="0"/>
+          <a:ext cx="0" cy="0"/>
+          <a:chOff x="0" y="0"/>
+          <a:chExt cx="0" cy="0"/>
+        </a:xfrm>
+      </p:grpSpPr>
+      <p:sp>
+        <p:nvSpPr>
+          <p:cNvPr id="6146" name="Rectangle 2">
+            <a:extLst>
+              <a:ext uri="{FF2B5EF4-FFF2-40B4-BE49-F238E27FC236}">
+                <a16:creationId xmlns:a16="http://schemas.microsoft.com/office/drawing/2014/main" id="{E24F0431-C398-C850-F3EC-F25D9C4D7F33}"/>
+              </a:ext>
+            </a:extLst>
+          </p:cNvPr>
+          <p:cNvSpPr>
+            <a:spLocks noGrp="1" noChangeArrowheads="1"/>
+          </p:cNvSpPr>
+          <p:nvPr>
+            <p:ph type="title"/>
+            <p:custDataLst>
+              <p:tags r:id="rId1"/>
+            </p:custDataLst>
+          </p:nvPr>
+        </p:nvSpPr>
+        <p:spPr>
+          <a:xfrm>
+            <a:off x="1141413" y="284084"/>
+            <a:ext cx="9905998" cy="620791"/>
+          </a:xfrm>
+        </p:spPr>
+        <p:txBody>
+          <a:bodyPr/>
+          <a:lstStyle/>
+          <a:p>
+            <a:pPr algn="ctr"/>
+            <a:r>
+              <a:rPr lang="en-US" dirty="0"/>
+              <a:t>Week 2: Wednesday</a:t>
+            </a:r>
+          </a:p>
+        </p:txBody>
+      </p:sp>
+      <p:sp>
+        <p:nvSpPr>
+          <p:cNvPr id="6147" name="Rectangle 3">
+            <a:extLst>
+              <a:ext uri="{FF2B5EF4-FFF2-40B4-BE49-F238E27FC236}">
+                <a16:creationId xmlns:a16="http://schemas.microsoft.com/office/drawing/2014/main" id="{40F36F83-327D-A4E3-9A28-E1CB7B524CEB}"/>
+              </a:ext>
+            </a:extLst>
+          </p:cNvPr>
+          <p:cNvSpPr>
+            <a:spLocks noGrp="1" noChangeArrowheads="1"/>
+          </p:cNvSpPr>
+          <p:nvPr>
+            <p:ph idx="1"/>
+            <p:custDataLst>
+              <p:tags r:id="rId2"/>
+            </p:custDataLst>
+          </p:nvPr>
+        </p:nvSpPr>
+        <p:spPr>
+          <a:xfrm>
+            <a:off x="1294151" y="1098548"/>
+            <a:ext cx="9600522" cy="5475367"/>
+          </a:xfrm>
+        </p:spPr>
+        <p:txBody>
+          <a:bodyPr>
+            <a:normAutofit lnSpcReduction="10000"/>
+          </a:bodyPr>
+          <a:lstStyle/>
+          <a:p>
+            <a:r>
+              <a:rPr lang="en-US" dirty="0">
+                <a:latin typeface="Arial" panose="020B0604020202020204" pitchFamily="34" charset="0"/>
+                <a:cs typeface="Arial" panose="020B0604020202020204" pitchFamily="34" charset="0"/>
+              </a:rPr>
+              <a:t>Welcome to week 2!!</a:t>
+            </a:r>
+          </a:p>
+          <a:p>
+            <a:r>
+              <a:rPr lang="en-US" dirty="0">
+                <a:latin typeface="Arial" panose="020B0604020202020204" pitchFamily="34" charset="0"/>
+                <a:cs typeface="Arial" panose="020B0604020202020204" pitchFamily="34" charset="0"/>
+              </a:rPr>
+              <a:t>This week:</a:t>
+            </a:r>
+          </a:p>
+          <a:p>
+            <a:pPr lvl="1"/>
+            <a:r>
+              <a:rPr lang="en-US" dirty="0">
+                <a:latin typeface="Arial" panose="020B0604020202020204" pitchFamily="34" charset="0"/>
+                <a:cs typeface="Arial" panose="020B0604020202020204" pitchFamily="34" charset="0"/>
+              </a:rPr>
+              <a:t>Programming assignment due Thursday evening</a:t>
+            </a:r>
+          </a:p>
+          <a:p>
+            <a:pPr lvl="1"/>
+            <a:r>
+              <a:rPr lang="en-US" dirty="0">
+                <a:latin typeface="Arial" panose="020B0604020202020204" pitchFamily="34" charset="0"/>
+                <a:cs typeface="Arial" panose="020B0604020202020204" pitchFamily="34" charset="0"/>
+              </a:rPr>
+              <a:t>First Midterm is on Friday (no lecture on Friday)</a:t>
+            </a:r>
+          </a:p>
+          <a:p>
+            <a:r>
+              <a:rPr lang="en-US" dirty="0">
+                <a:latin typeface="Arial" panose="020B0604020202020204" pitchFamily="34" charset="0"/>
+                <a:cs typeface="Arial" panose="020B0604020202020204" pitchFamily="34" charset="0"/>
+              </a:rPr>
+              <a:t>Lecture recordings from last Fall are posted on Panopto on Canvas</a:t>
+            </a:r>
+          </a:p>
+          <a:p>
+            <a:pPr lvl="1"/>
+            <a:r>
+              <a:rPr lang="en-US" dirty="0">
+                <a:latin typeface="Arial" panose="020B0604020202020204" pitchFamily="34" charset="0"/>
+                <a:cs typeface="Arial" panose="020B0604020202020204" pitchFamily="34" charset="0"/>
+              </a:rPr>
+              <a:t>I posted ALL the videos FYI</a:t>
+            </a:r>
+          </a:p>
+          <a:p>
+            <a:pPr lvl="1"/>
+            <a:r>
+              <a:rPr lang="en-US" dirty="0">
+                <a:latin typeface="Arial" panose="020B0604020202020204" pitchFamily="34" charset="0"/>
+                <a:cs typeface="Arial" panose="020B0604020202020204" pitchFamily="34" charset="0"/>
+              </a:rPr>
+              <a:t>For this module, you watch from oldest through “Pump. Lemma + Begin Mod 3”</a:t>
+            </a:r>
+          </a:p>
+          <a:p>
+            <a:r>
+              <a:rPr lang="en-US" dirty="0">
+                <a:latin typeface="Arial" panose="020B0604020202020204" pitchFamily="34" charset="0"/>
+                <a:cs typeface="Arial" panose="020B0604020202020204" pitchFamily="34" charset="0"/>
+              </a:rPr>
+              <a:t>Please remember that I am asking for NO laptop / phones!</a:t>
+            </a:r>
+          </a:p>
+          <a:p>
+            <a:pPr lvl="1"/>
+            <a:r>
+              <a:rPr lang="en-US" dirty="0">
+                <a:latin typeface="Arial" panose="020B0604020202020204" pitchFamily="34" charset="0"/>
+                <a:cs typeface="Arial" panose="020B0604020202020204" pitchFamily="34" charset="0"/>
+              </a:rPr>
+              <a:t>This makes the learning environment better for everybody. I appreciate it!</a:t>
+            </a:r>
+          </a:p>
+          <a:p>
+            <a:r>
+              <a:rPr lang="en-US" dirty="0">
+                <a:latin typeface="Arial" panose="020B0604020202020204" pitchFamily="34" charset="0"/>
+                <a:cs typeface="Arial" panose="020B0604020202020204" pitchFamily="34" charset="0"/>
+              </a:rPr>
+              <a:t>Attendance continues today as usual.</a:t>
+            </a:r>
+          </a:p>
+          <a:p>
+            <a:r>
+              <a:rPr lang="en-US" dirty="0">
+                <a:latin typeface="Arial" panose="020B0604020202020204" pitchFamily="34" charset="0"/>
+                <a:cs typeface="Arial" panose="020B0604020202020204" pitchFamily="34" charset="0"/>
+              </a:rPr>
+              <a:t>Today </a:t>
+            </a:r>
+            <a:r>
+              <a:rPr lang="en-US">
+                <a:latin typeface="Arial" panose="020B0604020202020204" pitchFamily="34" charset="0"/>
+                <a:cs typeface="Arial" panose="020B0604020202020204" pitchFamily="34" charset="0"/>
+              </a:rPr>
+              <a:t>we continue </a:t>
+            </a:r>
+            <a:r>
+              <a:rPr lang="en-US" dirty="0">
+                <a:latin typeface="Arial" panose="020B0604020202020204" pitchFamily="34" charset="0"/>
+                <a:cs typeface="Arial" panose="020B0604020202020204" pitchFamily="34" charset="0"/>
+              </a:rPr>
+              <a:t>Module 2! The Context-Free Languages!</a:t>
+            </a:r>
+          </a:p>
+          <a:p>
+            <a:endParaRPr lang="en-US" dirty="0">
+              <a:latin typeface="Arial" panose="020B0604020202020204" pitchFamily="34" charset="0"/>
+              <a:cs typeface="Arial" panose="020B0604020202020204" pitchFamily="34" charset="0"/>
+            </a:endParaRPr>
+          </a:p>
+        </p:txBody>
+      </p:sp>
+    </p:spTree>
+    <p:extLst>
+      <p:ext uri="{BB962C8B-B14F-4D97-AF65-F5344CB8AC3E}">
+        <p14:creationId xmlns:p14="http://schemas.microsoft.com/office/powerpoint/2010/main" val="3983308769"/>
+      </p:ext>
+    </p:extLst>
+  </p:cSld>
+  <p:clrMapOvr>
+    <a:masterClrMapping/>
+  </p:clrMapOvr>
+</p:sld>
+</file>
+
+<file path=ppt/slides/slide9.xml><?xml version="1.0" encoding="utf-8"?>
+<p:sld xmlns:a="http://schemas.openxmlformats.org/drawingml/2006/main" xmlns:r="http://schemas.openxmlformats.org/officeDocument/2006/relationships" xmlns:p="http://schemas.openxmlformats.org/presentationml/2006/main">
+  <p:cSld>
+    <p:spTree>
+      <p:nvGrpSpPr>
+        <p:cNvPr id="1" name="">
+          <a:extLst>
+            <a:ext uri="{FF2B5EF4-FFF2-40B4-BE49-F238E27FC236}">
+              <a16:creationId xmlns:a16="http://schemas.microsoft.com/office/drawing/2014/main" id="{D8D8F547-80A0-B12F-366F-50F54D4D3C27}"/>
+            </a:ext>
+          </a:extLst>
+        </p:cNvPr>
+        <p:cNvGrpSpPr/>
+        <p:nvPr/>
+      </p:nvGrpSpPr>
+      <p:grpSpPr>
+        <a:xfrm>
+          <a:off x="0" y="0"/>
+          <a:ext cx="0" cy="0"/>
+          <a:chOff x="0" y="0"/>
+          <a:chExt cx="0" cy="0"/>
+        </a:xfrm>
+      </p:grpSpPr>
+      <p:sp>
+        <p:nvSpPr>
+          <p:cNvPr id="6146" name="Rectangle 2">
+            <a:extLst>
+              <a:ext uri="{FF2B5EF4-FFF2-40B4-BE49-F238E27FC236}">
+                <a16:creationId xmlns:a16="http://schemas.microsoft.com/office/drawing/2014/main" id="{A80FFDE4-28E6-0BF7-0008-3ED194373D16}"/>
+              </a:ext>
+            </a:extLst>
+          </p:cNvPr>
+          <p:cNvSpPr>
+            <a:spLocks noGrp="1" noChangeArrowheads="1"/>
+          </p:cNvSpPr>
+          <p:nvPr>
+            <p:ph type="title"/>
+            <p:custDataLst>
+              <p:tags r:id="rId1"/>
+            </p:custDataLst>
+          </p:nvPr>
+        </p:nvSpPr>
+        <p:spPr>
+          <a:xfrm>
+            <a:off x="1141413" y="284084"/>
+            <a:ext cx="9905998" cy="620791"/>
+          </a:xfrm>
+        </p:spPr>
+        <p:txBody>
+          <a:bodyPr/>
+          <a:lstStyle/>
+          <a:p>
+            <a:pPr algn="ctr"/>
+            <a:r>
+              <a:rPr lang="en-US" dirty="0"/>
+              <a:t>Week 2: Thursday</a:t>
+            </a:r>
+          </a:p>
+        </p:txBody>
+      </p:sp>
+      <p:sp>
+        <p:nvSpPr>
+          <p:cNvPr id="6147" name="Rectangle 3">
+            <a:extLst>
+              <a:ext uri="{FF2B5EF4-FFF2-40B4-BE49-F238E27FC236}">
+                <a16:creationId xmlns:a16="http://schemas.microsoft.com/office/drawing/2014/main" id="{99F7EF8C-18CE-1D0E-479E-3E9FC7C83090}"/>
+              </a:ext>
+            </a:extLst>
+          </p:cNvPr>
+          <p:cNvSpPr>
+            <a:spLocks noGrp="1" noChangeArrowheads="1"/>
+          </p:cNvSpPr>
+          <p:nvPr>
+            <p:ph idx="1"/>
+            <p:custDataLst>
+              <p:tags r:id="rId2"/>
+            </p:custDataLst>
+          </p:nvPr>
+        </p:nvSpPr>
+        <p:spPr>
+          <a:xfrm>
+            <a:off x="1294151" y="1098548"/>
+            <a:ext cx="9600522" cy="5475367"/>
+          </a:xfrm>
+        </p:spPr>
+        <p:txBody>
+          <a:bodyPr>
+            <a:normAutofit fontScale="92500" lnSpcReduction="20000"/>
+          </a:bodyPr>
+          <a:lstStyle/>
+          <a:p>
+            <a:r>
+              <a:rPr lang="en-US" dirty="0">
+                <a:latin typeface="Arial" panose="020B0604020202020204" pitchFamily="34" charset="0"/>
+                <a:cs typeface="Arial" panose="020B0604020202020204" pitchFamily="34" charset="0"/>
+              </a:rPr>
+              <a:t>Welcome to week 2!!</a:t>
+            </a:r>
+          </a:p>
+          <a:p>
+            <a:r>
+              <a:rPr lang="en-US" dirty="0">
+                <a:latin typeface="Arial" panose="020B0604020202020204" pitchFamily="34" charset="0"/>
+                <a:cs typeface="Arial" panose="020B0604020202020204" pitchFamily="34" charset="0"/>
+              </a:rPr>
+              <a:t>This week:</a:t>
+            </a:r>
+          </a:p>
+          <a:p>
+            <a:pPr lvl="1"/>
+            <a:r>
+              <a:rPr lang="en-US" dirty="0">
+                <a:latin typeface="Arial" panose="020B0604020202020204" pitchFamily="34" charset="0"/>
+                <a:cs typeface="Arial" panose="020B0604020202020204" pitchFamily="34" charset="0"/>
+              </a:rPr>
+              <a:t>Programming assignment due </a:t>
+            </a:r>
+            <a:r>
+              <a:rPr lang="en-US" b="1" i="1" u="sng" dirty="0">
+                <a:latin typeface="Arial" panose="020B0604020202020204" pitchFamily="34" charset="0"/>
+                <a:cs typeface="Arial" panose="020B0604020202020204" pitchFamily="34" charset="0"/>
+              </a:rPr>
+              <a:t>Tonight!!</a:t>
+            </a:r>
+          </a:p>
+          <a:p>
+            <a:pPr lvl="1"/>
+            <a:r>
+              <a:rPr lang="en-US" dirty="0">
+                <a:latin typeface="Arial" panose="020B0604020202020204" pitchFamily="34" charset="0"/>
+                <a:cs typeface="Arial" panose="020B0604020202020204" pitchFamily="34" charset="0"/>
+              </a:rPr>
+              <a:t>First Midterm is on Friday (no lecture on Friday)</a:t>
+            </a:r>
+          </a:p>
+          <a:p>
+            <a:r>
+              <a:rPr lang="en-US" dirty="0">
+                <a:latin typeface="Arial" panose="020B0604020202020204" pitchFamily="34" charset="0"/>
+                <a:cs typeface="Arial" panose="020B0604020202020204" pitchFamily="34" charset="0"/>
+              </a:rPr>
+              <a:t>I’ve decided to drop the midterm time limit to 1hr 15min.</a:t>
+            </a:r>
+          </a:p>
+          <a:p>
+            <a:pPr lvl="1"/>
+            <a:r>
+              <a:rPr lang="en-US" dirty="0">
+                <a:latin typeface="Arial" panose="020B0604020202020204" pitchFamily="34" charset="0"/>
+                <a:cs typeface="Arial" panose="020B0604020202020204" pitchFamily="34" charset="0"/>
+              </a:rPr>
+              <a:t>More in line with the length of a midterm during the normal semester.</a:t>
+            </a:r>
+          </a:p>
+          <a:p>
+            <a:r>
+              <a:rPr lang="en-US" dirty="0">
+                <a:latin typeface="Arial" panose="020B0604020202020204" pitchFamily="34" charset="0"/>
+                <a:cs typeface="Arial" panose="020B0604020202020204" pitchFamily="34" charset="0"/>
+              </a:rPr>
+              <a:t>Lecture recordings from last Fall are posted on Panopto on Canvas</a:t>
+            </a:r>
+          </a:p>
+          <a:p>
+            <a:pPr lvl="1"/>
+            <a:r>
+              <a:rPr lang="en-US" dirty="0">
+                <a:latin typeface="Arial" panose="020B0604020202020204" pitchFamily="34" charset="0"/>
+                <a:cs typeface="Arial" panose="020B0604020202020204" pitchFamily="34" charset="0"/>
+              </a:rPr>
+              <a:t>I posted ALL the videos FYI</a:t>
+            </a:r>
+          </a:p>
+          <a:p>
+            <a:pPr lvl="1"/>
+            <a:r>
+              <a:rPr lang="en-US" dirty="0">
+                <a:latin typeface="Arial" panose="020B0604020202020204" pitchFamily="34" charset="0"/>
+                <a:cs typeface="Arial" panose="020B0604020202020204" pitchFamily="34" charset="0"/>
+              </a:rPr>
+              <a:t>For this module, you watch from oldest through “Pump. Lemma + Begin Mod 3”</a:t>
+            </a:r>
+          </a:p>
+          <a:p>
+            <a:r>
+              <a:rPr lang="en-US" dirty="0">
+                <a:latin typeface="Arial" panose="020B0604020202020204" pitchFamily="34" charset="0"/>
+                <a:cs typeface="Arial" panose="020B0604020202020204" pitchFamily="34" charset="0"/>
+              </a:rPr>
+              <a:t>Please remember that I am asking for NO laptop / phones!</a:t>
+            </a:r>
+          </a:p>
+          <a:p>
+            <a:pPr lvl="1"/>
+            <a:r>
+              <a:rPr lang="en-US" dirty="0">
+                <a:latin typeface="Arial" panose="020B0604020202020204" pitchFamily="34" charset="0"/>
+                <a:cs typeface="Arial" panose="020B0604020202020204" pitchFamily="34" charset="0"/>
+              </a:rPr>
+              <a:t>This makes the learning environment better for everybody. I appreciate it!</a:t>
+            </a:r>
+          </a:p>
+          <a:p>
+            <a:r>
+              <a:rPr lang="en-US" dirty="0">
+                <a:latin typeface="Arial" panose="020B0604020202020204" pitchFamily="34" charset="0"/>
+                <a:cs typeface="Arial" panose="020B0604020202020204" pitchFamily="34" charset="0"/>
+              </a:rPr>
+              <a:t>Attendance continues today as usual.</a:t>
+            </a:r>
+          </a:p>
+          <a:p>
+            <a:r>
+              <a:rPr lang="en-US" dirty="0">
+                <a:latin typeface="Arial" panose="020B0604020202020204" pitchFamily="34" charset="0"/>
+                <a:cs typeface="Arial" panose="020B0604020202020204" pitchFamily="34" charset="0"/>
+              </a:rPr>
+              <a:t>Today we finish Module 2 and begin Module 3</a:t>
+            </a:r>
+          </a:p>
+          <a:p>
+            <a:endParaRPr lang="en-US" dirty="0">
+              <a:latin typeface="Arial" panose="020B0604020202020204" pitchFamily="34" charset="0"/>
+              <a:cs typeface="Arial" panose="020B0604020202020204" pitchFamily="34" charset="0"/>
+            </a:endParaRPr>
+          </a:p>
+        </p:txBody>
+      </p:sp>
+    </p:spTree>
+    <p:extLst>
+      <p:ext uri="{BB962C8B-B14F-4D97-AF65-F5344CB8AC3E}">
+        <p14:creationId xmlns:p14="http://schemas.microsoft.com/office/powerpoint/2010/main" val="4060998642"/>
+      </p:ext>
+    </p:extLst>
+  </p:cSld>
+  <p:clrMapOvr>
+    <a:masterClrMapping/>
+  </p:clrMapOvr>
+</p:sld>
+</file>
+
 <file path=ppt/tags/tag1.xml><?xml version="1.0" encoding="utf-8"?>
 <p:tagLst xmlns:a="http://schemas.openxmlformats.org/drawingml/2006/main" xmlns:r="http://schemas.openxmlformats.org/officeDocument/2006/relationships" xmlns:p="http://schemas.openxmlformats.org/presentationml/2006/main">
   <p:tag name="_INSTRUCTOR VIEW19C14C36-AC8E-43BC-9DB6-C2AAF774C7DC|PANE__TAG" val="_"/>
@@ -16422,6 +16664,18 @@
 </file>
 
 <file path=ppt/tags/tag2.xml><?xml version="1.0" encoding="utf-8"?>
+<p:tagLst xmlns:a="http://schemas.openxmlformats.org/drawingml/2006/main" xmlns:r="http://schemas.openxmlformats.org/officeDocument/2006/relationships" xmlns:p="http://schemas.openxmlformats.org/presentationml/2006/main">
+  <p:tag name="_INSTRUCTOR VIEW19C14C36-AC8E-43BC-9DB6-C2AAF774C7DC|PANE__TAG" val="_"/>
+</p:tagLst>
+</file>
+
+<file path=ppt/tags/tag20.xml><?xml version="1.0" encoding="utf-8"?>
+<p:tagLst xmlns:a="http://schemas.openxmlformats.org/drawingml/2006/main" xmlns:r="http://schemas.openxmlformats.org/officeDocument/2006/relationships" xmlns:p="http://schemas.openxmlformats.org/presentationml/2006/main">
+  <p:tag name="_INSTRUCTOR VIEW19C14C36-AC8E-43BC-9DB6-C2AAF774C7DC|PANE__TAG" val="_"/>
+</p:tagLst>
+</file>
+
+<file path=ppt/tags/tag21.xml><?xml version="1.0" encoding="utf-8"?>
 <p:tagLst xmlns:a="http://schemas.openxmlformats.org/drawingml/2006/main" xmlns:r="http://schemas.openxmlformats.org/officeDocument/2006/relationships" xmlns:p="http://schemas.openxmlformats.org/presentationml/2006/main">
   <p:tag name="_INSTRUCTOR VIEW19C14C36-AC8E-43BC-9DB6-C2AAF774C7DC|PANE__TAG" val="_"/>
 </p:tagLst>

--- a/slides/00-DailyAnnouncements.pptx
+++ b/slides/00-DailyAnnouncements.pptx
@@ -5,7 +5,7 @@
     <p:sldMasterId id="2147484006" r:id="rId1"/>
   </p:sldMasterIdLst>
   <p:notesMasterIdLst>
-    <p:notesMasterId r:id="rId12"/>
+    <p:notesMasterId r:id="rId13"/>
   </p:notesMasterIdLst>
   <p:sldIdLst>
     <p:sldId id="256" r:id="rId2"/>
@@ -17,7 +17,8 @@
     <p:sldId id="520" r:id="rId8"/>
     <p:sldId id="521" r:id="rId9"/>
     <p:sldId id="522" r:id="rId10"/>
-    <p:sldId id="515" r:id="rId11"/>
+    <p:sldId id="523" r:id="rId11"/>
+    <p:sldId id="515" r:id="rId12"/>
   </p:sldIdLst>
   <p:sldSz cx="12192000" cy="6858000"/>
   <p:notesSz cx="6858000" cy="9144000"/>
@@ -206,7 +207,7 @@
           <a:p>
             <a:fld id="{C5B45307-6ED4-B142-BD64-10F739779302}" type="datetimeFigureOut">
               <a:rPr lang="en-US" smtClean="0"/>
-              <a:t>7/23/26</a:t>
+              <a:t>7/27/26</a:t>
             </a:fld>
             <a:endParaRPr lang="en-US"/>
           </a:p>
@@ -4839,7 +4840,7 @@
           <a:p>
             <a:fld id="{4313F670-7F9A-774D-B73D-573401E44297}" type="datetime1">
               <a:rPr lang="en-US" smtClean="0"/>
-              <a:t>7/23/26</a:t>
+              <a:t>7/27/26</a:t>
             </a:fld>
             <a:endParaRPr lang="en-US"/>
           </a:p>
@@ -5106,7 +5107,7 @@
           <a:p>
             <a:fld id="{446F9669-A8A7-2D40-9D01-B35FC337AA30}" type="datetime1">
               <a:rPr lang="en-US" smtClean="0"/>
-              <a:t>7/23/26</a:t>
+              <a:t>7/27/26</a:t>
             </a:fld>
             <a:endParaRPr lang="en-US"/>
           </a:p>
@@ -5302,7 +5303,7 @@
           <a:p>
             <a:fld id="{FA76CF18-F41B-6B48-B3E5-599E9795C2C3}" type="datetime1">
               <a:rPr lang="en-US" smtClean="0"/>
-              <a:t>7/23/26</a:t>
+              <a:t>7/27/26</a:t>
             </a:fld>
             <a:endParaRPr lang="en-US"/>
           </a:p>
@@ -5565,7 +5566,7 @@
           <a:p>
             <a:fld id="{B9654854-6457-164F-A077-6B3035079B82}" type="datetime1">
               <a:rPr lang="en-US" smtClean="0"/>
-              <a:t>7/23/26</a:t>
+              <a:t>7/27/26</a:t>
             </a:fld>
             <a:endParaRPr lang="en-US"/>
           </a:p>
@@ -5999,7 +6000,7 @@
           <a:p>
             <a:fld id="{CE3DBFD7-E611-8C40-AC73-0C29FF63F0CD}" type="datetime1">
               <a:rPr lang="en-US" smtClean="0"/>
-              <a:t>7/23/26</a:t>
+              <a:t>7/27/26</a:t>
             </a:fld>
             <a:endParaRPr lang="en-US"/>
           </a:p>
@@ -6545,7 +6546,7 @@
           <a:p>
             <a:fld id="{C8B63B06-0493-2840-9F37-30C9412BBF17}" type="datetime1">
               <a:rPr lang="en-US" smtClean="0"/>
-              <a:t>7/23/26</a:t>
+              <a:t>7/27/26</a:t>
             </a:fld>
             <a:endParaRPr lang="en-US"/>
           </a:p>
@@ -7265,7 +7266,7 @@
           <a:p>
             <a:fld id="{72B5C0FA-8C46-E84D-B6D7-B673F2CA0A0E}" type="datetime1">
               <a:rPr lang="en-US" smtClean="0"/>
-              <a:t>7/23/26</a:t>
+              <a:t>7/27/26</a:t>
             </a:fld>
             <a:endParaRPr lang="en-US"/>
           </a:p>
@@ -7435,7 +7436,7 @@
           <a:p>
             <a:fld id="{60B9CDE1-97B4-BF46-B69C-B86855B18820}" type="datetime1">
               <a:rPr lang="en-US" smtClean="0"/>
-              <a:t>7/23/26</a:t>
+              <a:t>7/27/26</a:t>
             </a:fld>
             <a:endParaRPr lang="en-US"/>
           </a:p>
@@ -7615,7 +7616,7 @@
           <a:p>
             <a:fld id="{BE51D3A4-F9E5-FD49-AA87-B395F50451DC}" type="datetime1">
               <a:rPr lang="en-US" smtClean="0"/>
-              <a:t>7/23/26</a:t>
+              <a:t>7/27/26</a:t>
             </a:fld>
             <a:endParaRPr lang="en-US"/>
           </a:p>
@@ -7785,7 +7786,7 @@
           <a:p>
             <a:fld id="{880DFB37-B0AE-9449-85EC-14F9C83B6084}" type="datetime1">
               <a:rPr lang="en-US" smtClean="0"/>
-              <a:t>7/23/26</a:t>
+              <a:t>7/27/26</a:t>
             </a:fld>
             <a:endParaRPr lang="en-US"/>
           </a:p>
@@ -8035,7 +8036,7 @@
           <a:p>
             <a:fld id="{C939124A-616E-6944-A21A-1839F5DBE7BB}" type="datetime1">
               <a:rPr lang="en-US" smtClean="0"/>
-              <a:t>7/23/26</a:t>
+              <a:t>7/27/26</a:t>
             </a:fld>
             <a:endParaRPr lang="en-US"/>
           </a:p>
@@ -8267,7 +8268,7 @@
           <a:p>
             <a:fld id="{C6E9A026-D48C-FD43-8676-CD625DD5D84B}" type="datetime1">
               <a:rPr lang="en-US" smtClean="0"/>
-              <a:t>7/23/26</a:t>
+              <a:t>7/27/26</a:t>
             </a:fld>
             <a:endParaRPr lang="en-US"/>
           </a:p>
@@ -8653,7 +8654,7 @@
           <a:p>
             <a:fld id="{EA35111E-23A3-1440-99A3-C4C665908E3D}" type="datetime1">
               <a:rPr lang="en-US" smtClean="0"/>
-              <a:t>7/23/26</a:t>
+              <a:t>7/27/26</a:t>
             </a:fld>
             <a:endParaRPr lang="en-US"/>
           </a:p>
@@ -8776,7 +8777,7 @@
           <a:p>
             <a:fld id="{249983B9-88EF-D74B-BA6D-6A3BF17C2B38}" type="datetime1">
               <a:rPr lang="en-US" smtClean="0"/>
-              <a:t>7/23/26</a:t>
+              <a:t>7/27/26</a:t>
             </a:fld>
             <a:endParaRPr lang="en-US"/>
           </a:p>
@@ -8871,7 +8872,7 @@
           <a:p>
             <a:fld id="{E2A00AEF-B4EC-084A-8DB8-A225C7981CBB}" type="datetime1">
               <a:rPr lang="en-US" smtClean="0"/>
-              <a:t>7/23/26</a:t>
+              <a:t>7/27/26</a:t>
             </a:fld>
             <a:endParaRPr lang="en-US"/>
           </a:p>
@@ -9120,7 +9121,7 @@
           <a:p>
             <a:fld id="{97860299-21CD-A94A-A7B0-44E787F8D42C}" type="datetime1">
               <a:rPr lang="en-US" smtClean="0"/>
-              <a:t>7/23/26</a:t>
+              <a:t>7/27/26</a:t>
             </a:fld>
             <a:endParaRPr lang="en-US"/>
           </a:p>
@@ -9405,7 +9406,7 @@
           <a:p>
             <a:fld id="{3DFD19CF-4E62-D246-BA61-7B528271315F}" type="datetime1">
               <a:rPr lang="en-US" smtClean="0"/>
-              <a:t>7/23/26</a:t>
+              <a:t>7/27/26</a:t>
             </a:fld>
             <a:endParaRPr lang="en-US"/>
           </a:p>
@@ -12472,7 +12473,7 @@
           <a:p>
             <a:fld id="{92FF8978-FE14-CC4A-93A6-934EB06543C0}" type="datetime1">
               <a:rPr lang="en-US" smtClean="0"/>
-              <a:t>7/23/26</a:t>
+              <a:t>7/27/26</a:t>
             </a:fld>
             <a:endParaRPr lang="en-US"/>
           </a:p>
@@ -12991,6 +12992,230 @@
 </file>
 
 <file path=ppt/slides/slide10.xml><?xml version="1.0" encoding="utf-8"?>
+<p:sld xmlns:a="http://schemas.openxmlformats.org/drawingml/2006/main" xmlns:r="http://schemas.openxmlformats.org/officeDocument/2006/relationships" xmlns:p="http://schemas.openxmlformats.org/presentationml/2006/main">
+  <p:cSld>
+    <p:spTree>
+      <p:nvGrpSpPr>
+        <p:cNvPr id="1" name="">
+          <a:extLst>
+            <a:ext uri="{FF2B5EF4-FFF2-40B4-BE49-F238E27FC236}">
+              <a16:creationId xmlns:a16="http://schemas.microsoft.com/office/drawing/2014/main" id="{DEA6F58D-69F9-3FD8-B596-684A1EE33079}"/>
+            </a:ext>
+          </a:extLst>
+        </p:cNvPr>
+        <p:cNvGrpSpPr/>
+        <p:nvPr/>
+      </p:nvGrpSpPr>
+      <p:grpSpPr>
+        <a:xfrm>
+          <a:off x="0" y="0"/>
+          <a:ext cx="0" cy="0"/>
+          <a:chOff x="0" y="0"/>
+          <a:chExt cx="0" cy="0"/>
+        </a:xfrm>
+      </p:grpSpPr>
+      <p:sp>
+        <p:nvSpPr>
+          <p:cNvPr id="6146" name="Rectangle 2">
+            <a:extLst>
+              <a:ext uri="{FF2B5EF4-FFF2-40B4-BE49-F238E27FC236}">
+                <a16:creationId xmlns:a16="http://schemas.microsoft.com/office/drawing/2014/main" id="{DFE0E98E-440D-A6DC-4BB5-67CCF9090E62}"/>
+              </a:ext>
+            </a:extLst>
+          </p:cNvPr>
+          <p:cNvSpPr>
+            <a:spLocks noGrp="1" noChangeArrowheads="1"/>
+          </p:cNvSpPr>
+          <p:nvPr>
+            <p:ph type="title"/>
+            <p:custDataLst>
+              <p:tags r:id="rId1"/>
+            </p:custDataLst>
+          </p:nvPr>
+        </p:nvSpPr>
+        <p:spPr>
+          <a:xfrm>
+            <a:off x="1141413" y="284084"/>
+            <a:ext cx="9905998" cy="620791"/>
+          </a:xfrm>
+        </p:spPr>
+        <p:txBody>
+          <a:bodyPr/>
+          <a:lstStyle/>
+          <a:p>
+            <a:pPr algn="ctr"/>
+            <a:r>
+              <a:rPr lang="en-US" dirty="0"/>
+              <a:t>Week 3: Monday</a:t>
+            </a:r>
+          </a:p>
+        </p:txBody>
+      </p:sp>
+      <p:sp>
+        <p:nvSpPr>
+          <p:cNvPr id="6147" name="Rectangle 3">
+            <a:extLst>
+              <a:ext uri="{FF2B5EF4-FFF2-40B4-BE49-F238E27FC236}">
+                <a16:creationId xmlns:a16="http://schemas.microsoft.com/office/drawing/2014/main" id="{8CDEF098-3261-365D-A7B1-B2749ECA313A}"/>
+              </a:ext>
+            </a:extLst>
+          </p:cNvPr>
+          <p:cNvSpPr>
+            <a:spLocks noGrp="1" noChangeArrowheads="1"/>
+          </p:cNvSpPr>
+          <p:nvPr>
+            <p:ph idx="1"/>
+            <p:custDataLst>
+              <p:tags r:id="rId2"/>
+            </p:custDataLst>
+          </p:nvPr>
+        </p:nvSpPr>
+        <p:spPr>
+          <a:xfrm>
+            <a:off x="1294151" y="1098548"/>
+            <a:ext cx="9600522" cy="5475367"/>
+          </a:xfrm>
+        </p:spPr>
+        <p:txBody>
+          <a:bodyPr>
+            <a:normAutofit fontScale="92500" lnSpcReduction="10000"/>
+          </a:bodyPr>
+          <a:lstStyle/>
+          <a:p>
+            <a:r>
+              <a:rPr lang="en-US" dirty="0">
+                <a:latin typeface="Arial" panose="020B0604020202020204" pitchFamily="34" charset="0"/>
+                <a:cs typeface="Arial" panose="020B0604020202020204" pitchFamily="34" charset="0"/>
+              </a:rPr>
+              <a:t>Welcome to week 3!! Halfway done with the course</a:t>
+            </a:r>
+          </a:p>
+          <a:p>
+            <a:r>
+              <a:rPr lang="en-US" dirty="0">
+                <a:latin typeface="Arial" panose="020B0604020202020204" pitchFamily="34" charset="0"/>
+                <a:cs typeface="Arial" panose="020B0604020202020204" pitchFamily="34" charset="0"/>
+              </a:rPr>
+              <a:t>This week:</a:t>
+            </a:r>
+          </a:p>
+          <a:p>
+            <a:pPr lvl="1"/>
+            <a:r>
+              <a:rPr lang="en-US" dirty="0">
+                <a:latin typeface="Arial" panose="020B0604020202020204" pitchFamily="34" charset="0"/>
+                <a:cs typeface="Arial" panose="020B0604020202020204" pitchFamily="34" charset="0"/>
+              </a:rPr>
+              <a:t>Module 2 (CFGs) Written Assignment Due Tuesday</a:t>
+            </a:r>
+          </a:p>
+          <a:p>
+            <a:pPr lvl="1"/>
+            <a:r>
+              <a:rPr lang="en-US" dirty="0">
+                <a:latin typeface="Arial" panose="020B0604020202020204" pitchFamily="34" charset="0"/>
+                <a:cs typeface="Arial" panose="020B0604020202020204" pitchFamily="34" charset="0"/>
+              </a:rPr>
+              <a:t>Second Midterm on Friday (Same procedure as last Friday)</a:t>
+            </a:r>
+          </a:p>
+          <a:p>
+            <a:r>
+              <a:rPr lang="en-US" dirty="0">
+                <a:latin typeface="Arial" panose="020B0604020202020204" pitchFamily="34" charset="0"/>
+                <a:cs typeface="Arial" panose="020B0604020202020204" pitchFamily="34" charset="0"/>
+              </a:rPr>
+              <a:t>Exams are graded. I’ll go over it a bit today</a:t>
+            </a:r>
+          </a:p>
+          <a:p>
+            <a:pPr lvl="1"/>
+            <a:r>
+              <a:rPr lang="en-US" dirty="0">
+                <a:latin typeface="Arial" panose="020B0604020202020204" pitchFamily="34" charset="0"/>
+                <a:cs typeface="Arial" panose="020B0604020202020204" pitchFamily="34" charset="0"/>
+              </a:rPr>
+              <a:t>Average was 17.49/29 (60.3%). Std. Deviation was 5.35/29 (18.4%).</a:t>
+            </a:r>
+          </a:p>
+          <a:p>
+            <a:r>
+              <a:rPr lang="en-US" dirty="0">
+                <a:latin typeface="Arial" panose="020B0604020202020204" pitchFamily="34" charset="0"/>
+                <a:cs typeface="Arial" panose="020B0604020202020204" pitchFamily="34" charset="0"/>
+              </a:rPr>
+              <a:t>Lecture recordings from last Fall are posted on Panopto on Canvas</a:t>
+            </a:r>
+          </a:p>
+          <a:p>
+            <a:pPr lvl="1"/>
+            <a:r>
+              <a:rPr lang="en-US" dirty="0">
+                <a:latin typeface="Arial" panose="020B0604020202020204" pitchFamily="34" charset="0"/>
+                <a:cs typeface="Arial" panose="020B0604020202020204" pitchFamily="34" charset="0"/>
+              </a:rPr>
+              <a:t>I posted ALL the videos FYI</a:t>
+            </a:r>
+          </a:p>
+          <a:p>
+            <a:r>
+              <a:rPr lang="en-US" dirty="0">
+                <a:latin typeface="Arial" panose="020B0604020202020204" pitchFamily="34" charset="0"/>
+                <a:cs typeface="Arial" panose="020B0604020202020204" pitchFamily="34" charset="0"/>
+              </a:rPr>
+              <a:t>Please remember that I am asking for NO laptop / phones!</a:t>
+            </a:r>
+          </a:p>
+          <a:p>
+            <a:pPr lvl="1"/>
+            <a:r>
+              <a:rPr lang="en-US" dirty="0">
+                <a:latin typeface="Arial" panose="020B0604020202020204" pitchFamily="34" charset="0"/>
+                <a:cs typeface="Arial" panose="020B0604020202020204" pitchFamily="34" charset="0"/>
+              </a:rPr>
+              <a:t>This makes the learning environment better for everybody. I appreciate it!</a:t>
+            </a:r>
+          </a:p>
+          <a:p>
+            <a:r>
+              <a:rPr lang="en-US" dirty="0">
+                <a:latin typeface="Arial" panose="020B0604020202020204" pitchFamily="34" charset="0"/>
+                <a:cs typeface="Arial" panose="020B0604020202020204" pitchFamily="34" charset="0"/>
+              </a:rPr>
+              <a:t>Attendance continues today as usual.</a:t>
+            </a:r>
+          </a:p>
+          <a:p>
+            <a:r>
+              <a:rPr lang="en-US" dirty="0">
+                <a:latin typeface="Arial" panose="020B0604020202020204" pitchFamily="34" charset="0"/>
+                <a:cs typeface="Arial" panose="020B0604020202020204" pitchFamily="34" charset="0"/>
+              </a:rPr>
+              <a:t>Today we continue Module 3 and the Turing Machine</a:t>
+            </a:r>
+          </a:p>
+          <a:p>
+            <a:endParaRPr lang="en-US" dirty="0">
+              <a:latin typeface="Arial" panose="020B0604020202020204" pitchFamily="34" charset="0"/>
+              <a:cs typeface="Arial" panose="020B0604020202020204" pitchFamily="34" charset="0"/>
+            </a:endParaRPr>
+          </a:p>
+        </p:txBody>
+      </p:sp>
+    </p:spTree>
+    <p:extLst>
+      <p:ext uri="{BB962C8B-B14F-4D97-AF65-F5344CB8AC3E}">
+        <p14:creationId xmlns:p14="http://schemas.microsoft.com/office/powerpoint/2010/main" val="4104932287"/>
+      </p:ext>
+    </p:extLst>
+  </p:cSld>
+  <p:clrMapOvr>
+    <a:masterClrMapping/>
+  </p:clrMapOvr>
+</p:sld>
+</file>
+
+<file path=ppt/slides/slide11.xml><?xml version="1.0" encoding="utf-8"?>
 <p:sld xmlns:a="http://schemas.openxmlformats.org/drawingml/2006/main" xmlns:r="http://schemas.openxmlformats.org/officeDocument/2006/relationships" xmlns:p="http://schemas.openxmlformats.org/presentationml/2006/main">
   <p:cSld>
     <p:spTree>
@@ -16681,6 +16906,18 @@
 </p:tagLst>
 </file>
 
+<file path=ppt/tags/tag22.xml><?xml version="1.0" encoding="utf-8"?>
+<p:tagLst xmlns:a="http://schemas.openxmlformats.org/drawingml/2006/main" xmlns:r="http://schemas.openxmlformats.org/officeDocument/2006/relationships" xmlns:p="http://schemas.openxmlformats.org/presentationml/2006/main">
+  <p:tag name="_INSTRUCTOR VIEW19C14C36-AC8E-43BC-9DB6-C2AAF774C7DC|PANE__TAG" val="_"/>
+</p:tagLst>
+</file>
+
+<file path=ppt/tags/tag23.xml><?xml version="1.0" encoding="utf-8"?>
+<p:tagLst xmlns:a="http://schemas.openxmlformats.org/drawingml/2006/main" xmlns:r="http://schemas.openxmlformats.org/officeDocument/2006/relationships" xmlns:p="http://schemas.openxmlformats.org/presentationml/2006/main">
+  <p:tag name="_INSTRUCTOR VIEW19C14C36-AC8E-43BC-9DB6-C2AAF774C7DC|PANE__TAG" val="_"/>
+</p:tagLst>
+</file>
+
 <file path=ppt/tags/tag3.xml><?xml version="1.0" encoding="utf-8"?>
 <p:tagLst xmlns:a="http://schemas.openxmlformats.org/drawingml/2006/main" xmlns:r="http://schemas.openxmlformats.org/officeDocument/2006/relationships" xmlns:p="http://schemas.openxmlformats.org/presentationml/2006/main">
   <p:tag name="_INSTRUCTOR VIEW19C14C36-AC8E-43BC-9DB6-C2AAF774C7DC|PANE__TAG" val="_"/>

--- a/slides/00-DailyAnnouncements.pptx
+++ b/slides/00-DailyAnnouncements.pptx
@@ -5,7 +5,7 @@
     <p:sldMasterId id="2147484006" r:id="rId1"/>
   </p:sldMasterIdLst>
   <p:notesMasterIdLst>
-    <p:notesMasterId r:id="rId13"/>
+    <p:notesMasterId r:id="rId14"/>
   </p:notesMasterIdLst>
   <p:sldIdLst>
     <p:sldId id="256" r:id="rId2"/>
@@ -18,7 +18,8 @@
     <p:sldId id="521" r:id="rId9"/>
     <p:sldId id="522" r:id="rId10"/>
     <p:sldId id="523" r:id="rId11"/>
-    <p:sldId id="515" r:id="rId12"/>
+    <p:sldId id="524" r:id="rId12"/>
+    <p:sldId id="515" r:id="rId13"/>
   </p:sldIdLst>
   <p:sldSz cx="12192000" cy="6858000"/>
   <p:notesSz cx="6858000" cy="9144000"/>
@@ -207,7 +208,7 @@
           <a:p>
             <a:fld id="{C5B45307-6ED4-B142-BD64-10F739779302}" type="datetimeFigureOut">
               <a:rPr lang="en-US" smtClean="0"/>
-              <a:t>7/27/26</a:t>
+              <a:t>7/28/26</a:t>
             </a:fld>
             <a:endParaRPr lang="en-US"/>
           </a:p>
@@ -615,7 +616,7 @@
           <a:noFill/>
           <a:extLst>
             <a:ext uri="{909E8E84-426E-40dd-AFC4-6F175D3DCCD1}">
-              <a14:hiddenFill xmlns="" xmlns:a14="http://schemas.microsoft.com/office/drawing/2010/main">
+              <a14:hiddenFill xmlns:a14="http://schemas.microsoft.com/office/drawing/2010/main" xmlns="">
                 <a:solidFill>
                   <a:srgbClr val="FFFFFF"/>
                 </a:solidFill>
@@ -674,7 +675,7 @@
             </a:ln>
             <a:extLst>
               <a:ext uri="{91240B29-F687-4f45-9708-019B960494DF}">
-                <a14:hiddenLine xmlns="" xmlns:a14="http://schemas.microsoft.com/office/drawing/2010/main" w="9525">
+                <a14:hiddenLine xmlns:a14="http://schemas.microsoft.com/office/drawing/2010/main" xmlns="" w="9525">
                   <a:solidFill>
                     <a:srgbClr val="000000"/>
                   </a:solidFill>
@@ -764,7 +765,7 @@
             </a:ln>
             <a:extLst>
               <a:ext uri="{91240B29-F687-4f45-9708-019B960494DF}">
-                <a14:hiddenLine xmlns="" xmlns:a14="http://schemas.microsoft.com/office/drawing/2010/main" w="9525">
+                <a14:hiddenLine xmlns:a14="http://schemas.microsoft.com/office/drawing/2010/main" xmlns="" w="9525">
                   <a:solidFill>
                     <a:srgbClr val="000000"/>
                   </a:solidFill>
@@ -854,7 +855,7 @@
             </a:ln>
             <a:extLst>
               <a:ext uri="{91240B29-F687-4f45-9708-019B960494DF}">
-                <a14:hiddenLine xmlns="" xmlns:a14="http://schemas.microsoft.com/office/drawing/2010/main" w="9525">
+                <a14:hiddenLine xmlns:a14="http://schemas.microsoft.com/office/drawing/2010/main" xmlns="" w="9525">
                   <a:solidFill>
                     <a:srgbClr val="000000"/>
                   </a:solidFill>
@@ -888,7 +889,7 @@
             </a:ln>
             <a:extLst>
               <a:ext uri="{91240B29-F687-4f45-9708-019B960494DF}">
-                <a14:hiddenLine xmlns="" xmlns:a14="http://schemas.microsoft.com/office/drawing/2010/main" w="9525">
+                <a14:hiddenLine xmlns:a14="http://schemas.microsoft.com/office/drawing/2010/main" xmlns="" w="9525">
                   <a:solidFill>
                     <a:srgbClr val="000000"/>
                   </a:solidFill>
@@ -978,7 +979,7 @@
             </a:ln>
             <a:extLst>
               <a:ext uri="{91240B29-F687-4f45-9708-019B960494DF}">
-                <a14:hiddenLine xmlns="" xmlns:a14="http://schemas.microsoft.com/office/drawing/2010/main" w="9525">
+                <a14:hiddenLine xmlns:a14="http://schemas.microsoft.com/office/drawing/2010/main" xmlns="" w="9525">
                   <a:solidFill>
                     <a:srgbClr val="000000"/>
                   </a:solidFill>
@@ -1040,7 +1041,7 @@
             </a:ln>
             <a:extLst>
               <a:ext uri="{91240B29-F687-4f45-9708-019B960494DF}">
-                <a14:hiddenLine xmlns="" xmlns:a14="http://schemas.microsoft.com/office/drawing/2010/main" w="9525">
+                <a14:hiddenLine xmlns:a14="http://schemas.microsoft.com/office/drawing/2010/main" xmlns="" w="9525">
                   <a:solidFill>
                     <a:srgbClr val="000000"/>
                   </a:solidFill>
@@ -1102,7 +1103,7 @@
             </a:ln>
             <a:extLst>
               <a:ext uri="{91240B29-F687-4f45-9708-019B960494DF}">
-                <a14:hiddenLine xmlns="" xmlns:a14="http://schemas.microsoft.com/office/drawing/2010/main" w="9525">
+                <a14:hiddenLine xmlns:a14="http://schemas.microsoft.com/office/drawing/2010/main" xmlns="" w="9525">
                   <a:solidFill>
                     <a:srgbClr val="000000"/>
                   </a:solidFill>
@@ -1192,7 +1193,7 @@
             </a:ln>
             <a:extLst>
               <a:ext uri="{91240B29-F687-4f45-9708-019B960494DF}">
-                <a14:hiddenLine xmlns="" xmlns:a14="http://schemas.microsoft.com/office/drawing/2010/main" w="9525">
+                <a14:hiddenLine xmlns:a14="http://schemas.microsoft.com/office/drawing/2010/main" xmlns="" w="9525">
                   <a:solidFill>
                     <a:srgbClr val="000000"/>
                   </a:solidFill>
@@ -1254,7 +1255,7 @@
             </a:ln>
             <a:extLst>
               <a:ext uri="{91240B29-F687-4f45-9708-019B960494DF}">
-                <a14:hiddenLine xmlns="" xmlns:a14="http://schemas.microsoft.com/office/drawing/2010/main" w="9525">
+                <a14:hiddenLine xmlns:a14="http://schemas.microsoft.com/office/drawing/2010/main" xmlns="" w="9525">
                   <a:solidFill>
                     <a:srgbClr val="000000"/>
                   </a:solidFill>
@@ -1316,7 +1317,7 @@
             </a:ln>
             <a:extLst>
               <a:ext uri="{91240B29-F687-4f45-9708-019B960494DF}">
-                <a14:hiddenLine xmlns="" xmlns:a14="http://schemas.microsoft.com/office/drawing/2010/main" w="9525">
+                <a14:hiddenLine xmlns:a14="http://schemas.microsoft.com/office/drawing/2010/main" xmlns="" w="9525">
                   <a:solidFill>
                     <a:srgbClr val="000000"/>
                   </a:solidFill>
@@ -1406,7 +1407,7 @@
             </a:ln>
             <a:extLst>
               <a:ext uri="{91240B29-F687-4f45-9708-019B960494DF}">
-                <a14:hiddenLine xmlns="" xmlns:a14="http://schemas.microsoft.com/office/drawing/2010/main" w="9525">
+                <a14:hiddenLine xmlns:a14="http://schemas.microsoft.com/office/drawing/2010/main" xmlns="" w="9525">
                   <a:solidFill>
                     <a:srgbClr val="000000"/>
                   </a:solidFill>
@@ -1496,7 +1497,7 @@
             </a:ln>
             <a:extLst>
               <a:ext uri="{91240B29-F687-4f45-9708-019B960494DF}">
-                <a14:hiddenLine xmlns="" xmlns:a14="http://schemas.microsoft.com/office/drawing/2010/main" w="9525">
+                <a14:hiddenLine xmlns:a14="http://schemas.microsoft.com/office/drawing/2010/main" xmlns="" w="9525">
                   <a:solidFill>
                     <a:srgbClr val="000000"/>
                   </a:solidFill>
@@ -1558,7 +1559,7 @@
             </a:ln>
             <a:extLst>
               <a:ext uri="{91240B29-F687-4f45-9708-019B960494DF}">
-                <a14:hiddenLine xmlns="" xmlns:a14="http://schemas.microsoft.com/office/drawing/2010/main" w="9525">
+                <a14:hiddenLine xmlns:a14="http://schemas.microsoft.com/office/drawing/2010/main" xmlns="" w="9525">
                   <a:solidFill>
                     <a:srgbClr val="000000"/>
                   </a:solidFill>
@@ -1668,7 +1669,7 @@
             </a:ln>
             <a:extLst>
               <a:ext uri="{91240B29-F687-4f45-9708-019B960494DF}">
-                <a14:hiddenLine xmlns="" xmlns:a14="http://schemas.microsoft.com/office/drawing/2010/main" w="9525">
+                <a14:hiddenLine xmlns:a14="http://schemas.microsoft.com/office/drawing/2010/main" xmlns="" w="9525">
                   <a:solidFill>
                     <a:srgbClr val="000000"/>
                   </a:solidFill>
@@ -1730,7 +1731,7 @@
             </a:ln>
             <a:extLst>
               <a:ext uri="{91240B29-F687-4f45-9708-019B960494DF}">
-                <a14:hiddenLine xmlns="" xmlns:a14="http://schemas.microsoft.com/office/drawing/2010/main" w="9525">
+                <a14:hiddenLine xmlns:a14="http://schemas.microsoft.com/office/drawing/2010/main" xmlns="" w="9525">
                   <a:solidFill>
                     <a:srgbClr val="000000"/>
                   </a:solidFill>
@@ -1820,7 +1821,7 @@
             </a:ln>
             <a:extLst>
               <a:ext uri="{91240B29-F687-4f45-9708-019B960494DF}">
-                <a14:hiddenLine xmlns="" xmlns:a14="http://schemas.microsoft.com/office/drawing/2010/main" w="9525">
+                <a14:hiddenLine xmlns:a14="http://schemas.microsoft.com/office/drawing/2010/main" xmlns="" w="9525">
                   <a:solidFill>
                     <a:srgbClr val="000000"/>
                   </a:solidFill>
@@ -1910,7 +1911,7 @@
             </a:ln>
             <a:extLst>
               <a:ext uri="{91240B29-F687-4f45-9708-019B960494DF}">
-                <a14:hiddenLine xmlns="" xmlns:a14="http://schemas.microsoft.com/office/drawing/2010/main" w="9525">
+                <a14:hiddenLine xmlns:a14="http://schemas.microsoft.com/office/drawing/2010/main" xmlns="" w="9525">
                   <a:solidFill>
                     <a:srgbClr val="000000"/>
                   </a:solidFill>
@@ -1972,7 +1973,7 @@
             </a:ln>
             <a:extLst>
               <a:ext uri="{91240B29-F687-4f45-9708-019B960494DF}">
-                <a14:hiddenLine xmlns="" xmlns:a14="http://schemas.microsoft.com/office/drawing/2010/main" w="9525">
+                <a14:hiddenLine xmlns:a14="http://schemas.microsoft.com/office/drawing/2010/main" xmlns="" w="9525">
                   <a:solidFill>
                     <a:srgbClr val="000000"/>
                   </a:solidFill>
@@ -2062,7 +2063,7 @@
             </a:ln>
             <a:extLst>
               <a:ext uri="{91240B29-F687-4f45-9708-019B960494DF}">
-                <a14:hiddenLine xmlns="" xmlns:a14="http://schemas.microsoft.com/office/drawing/2010/main" w="9525">
+                <a14:hiddenLine xmlns:a14="http://schemas.microsoft.com/office/drawing/2010/main" xmlns="" w="9525">
                   <a:solidFill>
                     <a:srgbClr val="000000"/>
                   </a:solidFill>
@@ -2152,7 +2153,7 @@
             </a:ln>
             <a:extLst>
               <a:ext uri="{91240B29-F687-4f45-9708-019B960494DF}">
-                <a14:hiddenLine xmlns="" xmlns:a14="http://schemas.microsoft.com/office/drawing/2010/main" w="9525">
+                <a14:hiddenLine xmlns:a14="http://schemas.microsoft.com/office/drawing/2010/main" xmlns="" w="9525">
                   <a:solidFill>
                     <a:srgbClr val="000000"/>
                   </a:solidFill>
@@ -2208,7 +2209,7 @@
             </a:ln>
             <a:extLst>
               <a:ext uri="{91240B29-F687-4f45-9708-019B960494DF}">
-                <a14:hiddenLine xmlns="" xmlns:a14="http://schemas.microsoft.com/office/drawing/2010/main" w="9525">
+                <a14:hiddenLine xmlns:a14="http://schemas.microsoft.com/office/drawing/2010/main" xmlns="" w="9525">
                   <a:solidFill>
                     <a:srgbClr val="000000"/>
                   </a:solidFill>
@@ -2298,7 +2299,7 @@
             </a:ln>
             <a:extLst>
               <a:ext uri="{91240B29-F687-4f45-9708-019B960494DF}">
-                <a14:hiddenLine xmlns="" xmlns:a14="http://schemas.microsoft.com/office/drawing/2010/main" w="9525">
+                <a14:hiddenLine xmlns:a14="http://schemas.microsoft.com/office/drawing/2010/main" xmlns="" w="9525">
                   <a:solidFill>
                     <a:srgbClr val="000000"/>
                   </a:solidFill>
@@ -2354,7 +2355,7 @@
             </a:ln>
             <a:extLst>
               <a:ext uri="{91240B29-F687-4f45-9708-019B960494DF}">
-                <a14:hiddenLine xmlns="" xmlns:a14="http://schemas.microsoft.com/office/drawing/2010/main" w="9525">
+                <a14:hiddenLine xmlns:a14="http://schemas.microsoft.com/office/drawing/2010/main" xmlns="" w="9525">
                   <a:solidFill>
                     <a:srgbClr val="000000"/>
                   </a:solidFill>
@@ -2444,7 +2445,7 @@
             </a:ln>
             <a:extLst>
               <a:ext uri="{91240B29-F687-4f45-9708-019B960494DF}">
-                <a14:hiddenLine xmlns="" xmlns:a14="http://schemas.microsoft.com/office/drawing/2010/main" w="9525">
+                <a14:hiddenLine xmlns:a14="http://schemas.microsoft.com/office/drawing/2010/main" xmlns="" w="9525">
                   <a:solidFill>
                     <a:srgbClr val="000000"/>
                   </a:solidFill>
@@ -2512,7 +2513,7 @@
             </a:ln>
             <a:extLst>
               <a:ext uri="{91240B29-F687-4f45-9708-019B960494DF}">
-                <a14:hiddenLine xmlns="" xmlns:a14="http://schemas.microsoft.com/office/drawing/2010/main" w="9525">
+                <a14:hiddenLine xmlns:a14="http://schemas.microsoft.com/office/drawing/2010/main" xmlns="" w="9525">
                   <a:solidFill>
                     <a:srgbClr val="000000"/>
                   </a:solidFill>
@@ -2602,7 +2603,7 @@
             </a:ln>
             <a:extLst>
               <a:ext uri="{91240B29-F687-4f45-9708-019B960494DF}">
-                <a14:hiddenLine xmlns="" xmlns:a14="http://schemas.microsoft.com/office/drawing/2010/main" w="9525">
+                <a14:hiddenLine xmlns:a14="http://schemas.microsoft.com/office/drawing/2010/main" xmlns="" w="9525">
                   <a:solidFill>
                     <a:srgbClr val="000000"/>
                   </a:solidFill>
@@ -2670,7 +2671,7 @@
             </a:ln>
             <a:extLst>
               <a:ext uri="{91240B29-F687-4f45-9708-019B960494DF}">
-                <a14:hiddenLine xmlns="" xmlns:a14="http://schemas.microsoft.com/office/drawing/2010/main" w="9525">
+                <a14:hiddenLine xmlns:a14="http://schemas.microsoft.com/office/drawing/2010/main" xmlns="" w="9525">
                   <a:solidFill>
                     <a:srgbClr val="000000"/>
                   </a:solidFill>
@@ -2760,7 +2761,7 @@
             </a:ln>
             <a:extLst>
               <a:ext uri="{91240B29-F687-4f45-9708-019B960494DF}">
-                <a14:hiddenLine xmlns="" xmlns:a14="http://schemas.microsoft.com/office/drawing/2010/main" w="9525">
+                <a14:hiddenLine xmlns:a14="http://schemas.microsoft.com/office/drawing/2010/main" xmlns="" w="9525">
                   <a:solidFill>
                     <a:srgbClr val="000000"/>
                   </a:solidFill>
@@ -2794,7 +2795,7 @@
             </a:ln>
             <a:extLst>
               <a:ext uri="{91240B29-F687-4f45-9708-019B960494DF}">
-                <a14:hiddenLine xmlns="" xmlns:a14="http://schemas.microsoft.com/office/drawing/2010/main" w="9525">
+                <a14:hiddenLine xmlns:a14="http://schemas.microsoft.com/office/drawing/2010/main" xmlns="" w="9525">
                   <a:solidFill>
                     <a:srgbClr val="000000"/>
                   </a:solidFill>
@@ -2884,7 +2885,7 @@
             </a:ln>
             <a:extLst>
               <a:ext uri="{91240B29-F687-4f45-9708-019B960494DF}">
-                <a14:hiddenLine xmlns="" xmlns:a14="http://schemas.microsoft.com/office/drawing/2010/main" w="9525">
+                <a14:hiddenLine xmlns:a14="http://schemas.microsoft.com/office/drawing/2010/main" xmlns="" w="9525">
                   <a:solidFill>
                     <a:srgbClr val="000000"/>
                   </a:solidFill>
@@ -2946,7 +2947,7 @@
             </a:ln>
             <a:extLst>
               <a:ext uri="{91240B29-F687-4f45-9708-019B960494DF}">
-                <a14:hiddenLine xmlns="" xmlns:a14="http://schemas.microsoft.com/office/drawing/2010/main" w="9525">
+                <a14:hiddenLine xmlns:a14="http://schemas.microsoft.com/office/drawing/2010/main" xmlns="" w="9525">
                   <a:solidFill>
                     <a:srgbClr val="000000"/>
                   </a:solidFill>
@@ -3008,7 +3009,7 @@
             </a:ln>
             <a:extLst>
               <a:ext uri="{91240B29-F687-4f45-9708-019B960494DF}">
-                <a14:hiddenLine xmlns="" xmlns:a14="http://schemas.microsoft.com/office/drawing/2010/main" w="9525">
+                <a14:hiddenLine xmlns:a14="http://schemas.microsoft.com/office/drawing/2010/main" xmlns="" w="9525">
                   <a:solidFill>
                     <a:srgbClr val="000000"/>
                   </a:solidFill>
@@ -3098,7 +3099,7 @@
             </a:ln>
             <a:extLst>
               <a:ext uri="{91240B29-F687-4f45-9708-019B960494DF}">
-                <a14:hiddenLine xmlns="" xmlns:a14="http://schemas.microsoft.com/office/drawing/2010/main" w="9525">
+                <a14:hiddenLine xmlns:a14="http://schemas.microsoft.com/office/drawing/2010/main" xmlns="" w="9525">
                   <a:solidFill>
                     <a:srgbClr val="000000"/>
                   </a:solidFill>
@@ -3166,7 +3167,7 @@
             </a:ln>
             <a:extLst>
               <a:ext uri="{91240B29-F687-4f45-9708-019B960494DF}">
-                <a14:hiddenLine xmlns="" xmlns:a14="http://schemas.microsoft.com/office/drawing/2010/main" w="9525">
+                <a14:hiddenLine xmlns:a14="http://schemas.microsoft.com/office/drawing/2010/main" xmlns="" w="9525">
                   <a:solidFill>
                     <a:srgbClr val="000000"/>
                   </a:solidFill>
@@ -3228,7 +3229,7 @@
             </a:ln>
             <a:extLst>
               <a:ext uri="{91240B29-F687-4f45-9708-019B960494DF}">
-                <a14:hiddenLine xmlns="" xmlns:a14="http://schemas.microsoft.com/office/drawing/2010/main" w="9525">
+                <a14:hiddenLine xmlns:a14="http://schemas.microsoft.com/office/drawing/2010/main" xmlns="" w="9525">
                   <a:solidFill>
                     <a:srgbClr val="000000"/>
                   </a:solidFill>
@@ -3318,7 +3319,7 @@
             </a:ln>
             <a:extLst>
               <a:ext uri="{91240B29-F687-4f45-9708-019B960494DF}">
-                <a14:hiddenLine xmlns="" xmlns:a14="http://schemas.microsoft.com/office/drawing/2010/main" w="9525">
+                <a14:hiddenLine xmlns:a14="http://schemas.microsoft.com/office/drawing/2010/main" xmlns="" w="9525">
                   <a:solidFill>
                     <a:srgbClr val="000000"/>
                   </a:solidFill>
@@ -3380,7 +3381,7 @@
             </a:ln>
             <a:extLst>
               <a:ext uri="{91240B29-F687-4f45-9708-019B960494DF}">
-                <a14:hiddenLine xmlns="" xmlns:a14="http://schemas.microsoft.com/office/drawing/2010/main" w="9525">
+                <a14:hiddenLine xmlns:a14="http://schemas.microsoft.com/office/drawing/2010/main" xmlns="" w="9525">
                   <a:solidFill>
                     <a:srgbClr val="000000"/>
                   </a:solidFill>
@@ -3470,7 +3471,7 @@
             </a:ln>
             <a:extLst>
               <a:ext uri="{91240B29-F687-4f45-9708-019B960494DF}">
-                <a14:hiddenLine xmlns="" xmlns:a14="http://schemas.microsoft.com/office/drawing/2010/main" w="9525">
+                <a14:hiddenLine xmlns:a14="http://schemas.microsoft.com/office/drawing/2010/main" xmlns="" w="9525">
                   <a:solidFill>
                     <a:srgbClr val="000000"/>
                   </a:solidFill>
@@ -3532,7 +3533,7 @@
             </a:ln>
             <a:extLst>
               <a:ext uri="{91240B29-F687-4f45-9708-019B960494DF}">
-                <a14:hiddenLine xmlns="" xmlns:a14="http://schemas.microsoft.com/office/drawing/2010/main" w="9525">
+                <a14:hiddenLine xmlns:a14="http://schemas.microsoft.com/office/drawing/2010/main" xmlns="" w="9525">
                   <a:solidFill>
                     <a:srgbClr val="000000"/>
                   </a:solidFill>
@@ -3622,7 +3623,7 @@
             </a:ln>
             <a:extLst>
               <a:ext uri="{91240B29-F687-4f45-9708-019B960494DF}">
-                <a14:hiddenLine xmlns="" xmlns:a14="http://schemas.microsoft.com/office/drawing/2010/main" w="9525">
+                <a14:hiddenLine xmlns:a14="http://schemas.microsoft.com/office/drawing/2010/main" xmlns="" w="9525">
                   <a:solidFill>
                     <a:srgbClr val="000000"/>
                   </a:solidFill>
@@ -3656,7 +3657,7 @@
             </a:ln>
             <a:extLst>
               <a:ext uri="{91240B29-F687-4f45-9708-019B960494DF}">
-                <a14:hiddenLine xmlns="" xmlns:a14="http://schemas.microsoft.com/office/drawing/2010/main" w="9525">
+                <a14:hiddenLine xmlns:a14="http://schemas.microsoft.com/office/drawing/2010/main" xmlns="" w="9525">
                   <a:solidFill>
                     <a:srgbClr val="000000"/>
                   </a:solidFill>
@@ -3721,7 +3722,7 @@
             </a:ln>
             <a:extLst>
               <a:ext uri="{91240B29-F687-4f45-9708-019B960494DF}">
-                <a14:hiddenLine xmlns="" xmlns:a14="http://schemas.microsoft.com/office/drawing/2010/main" w="9525">
+                <a14:hiddenLine xmlns:a14="http://schemas.microsoft.com/office/drawing/2010/main" xmlns="" w="9525">
                   <a:solidFill>
                     <a:srgbClr val="000000"/>
                   </a:solidFill>
@@ -3811,7 +3812,7 @@
             </a:ln>
             <a:extLst>
               <a:ext uri="{91240B29-F687-4f45-9708-019B960494DF}">
-                <a14:hiddenLine xmlns="" xmlns:a14="http://schemas.microsoft.com/office/drawing/2010/main" w="9525">
+                <a14:hiddenLine xmlns:a14="http://schemas.microsoft.com/office/drawing/2010/main" xmlns="" w="9525">
                   <a:solidFill>
                     <a:srgbClr val="000000"/>
                   </a:solidFill>
@@ -3873,7 +3874,7 @@
             </a:ln>
             <a:extLst>
               <a:ext uri="{91240B29-F687-4f45-9708-019B960494DF}">
-                <a14:hiddenLine xmlns="" xmlns:a14="http://schemas.microsoft.com/office/drawing/2010/main" w="9525">
+                <a14:hiddenLine xmlns:a14="http://schemas.microsoft.com/office/drawing/2010/main" xmlns="" w="9525">
                   <a:solidFill>
                     <a:srgbClr val="000000"/>
                   </a:solidFill>
@@ -3963,7 +3964,7 @@
             </a:ln>
             <a:extLst>
               <a:ext uri="{91240B29-F687-4f45-9708-019B960494DF}">
-                <a14:hiddenLine xmlns="" xmlns:a14="http://schemas.microsoft.com/office/drawing/2010/main" w="9525">
+                <a14:hiddenLine xmlns:a14="http://schemas.microsoft.com/office/drawing/2010/main" xmlns="" w="9525">
                   <a:solidFill>
                     <a:srgbClr val="000000"/>
                   </a:solidFill>
@@ -4053,7 +4054,7 @@
             </a:ln>
             <a:extLst>
               <a:ext uri="{91240B29-F687-4f45-9708-019B960494DF}">
-                <a14:hiddenLine xmlns="" xmlns:a14="http://schemas.microsoft.com/office/drawing/2010/main" w="9525">
+                <a14:hiddenLine xmlns:a14="http://schemas.microsoft.com/office/drawing/2010/main" xmlns="" w="9525">
                   <a:solidFill>
                     <a:srgbClr val="000000"/>
                   </a:solidFill>
@@ -4118,7 +4119,7 @@
             </a:ln>
             <a:extLst>
               <a:ext uri="{91240B29-F687-4f45-9708-019B960494DF}">
-                <a14:hiddenLine xmlns="" xmlns:a14="http://schemas.microsoft.com/office/drawing/2010/main" w="9525">
+                <a14:hiddenLine xmlns:a14="http://schemas.microsoft.com/office/drawing/2010/main" xmlns="" w="9525">
                   <a:solidFill>
                     <a:srgbClr val="000000"/>
                   </a:solidFill>
@@ -4180,7 +4181,7 @@
             </a:ln>
             <a:extLst>
               <a:ext uri="{91240B29-F687-4f45-9708-019B960494DF}">
-                <a14:hiddenLine xmlns="" xmlns:a14="http://schemas.microsoft.com/office/drawing/2010/main" w="9525">
+                <a14:hiddenLine xmlns:a14="http://schemas.microsoft.com/office/drawing/2010/main" xmlns="" w="9525">
                   <a:solidFill>
                     <a:srgbClr val="000000"/>
                   </a:solidFill>
@@ -4270,7 +4271,7 @@
             </a:ln>
             <a:extLst>
               <a:ext uri="{91240B29-F687-4f45-9708-019B960494DF}">
-                <a14:hiddenLine xmlns="" xmlns:a14="http://schemas.microsoft.com/office/drawing/2010/main" w="9525">
+                <a14:hiddenLine xmlns:a14="http://schemas.microsoft.com/office/drawing/2010/main" xmlns="" w="9525">
                   <a:solidFill>
                     <a:srgbClr val="000000"/>
                   </a:solidFill>
@@ -4360,7 +4361,7 @@
             </a:ln>
             <a:extLst>
               <a:ext uri="{91240B29-F687-4f45-9708-019B960494DF}">
-                <a14:hiddenLine xmlns="" xmlns:a14="http://schemas.microsoft.com/office/drawing/2010/main" w="9525">
+                <a14:hiddenLine xmlns:a14="http://schemas.microsoft.com/office/drawing/2010/main" xmlns="" w="9525">
                   <a:solidFill>
                     <a:srgbClr val="000000"/>
                   </a:solidFill>
@@ -4422,7 +4423,7 @@
             </a:ln>
             <a:extLst>
               <a:ext uri="{91240B29-F687-4f45-9708-019B960494DF}">
-                <a14:hiddenLine xmlns="" xmlns:a14="http://schemas.microsoft.com/office/drawing/2010/main" w="9525">
+                <a14:hiddenLine xmlns:a14="http://schemas.microsoft.com/office/drawing/2010/main" xmlns="" w="9525">
                   <a:solidFill>
                     <a:srgbClr val="000000"/>
                   </a:solidFill>
@@ -4542,7 +4543,7 @@
             </a:ln>
             <a:extLst>
               <a:ext uri="{91240B29-F687-4f45-9708-019B960494DF}">
-                <a14:hiddenLine xmlns="" xmlns:a14="http://schemas.microsoft.com/office/drawing/2010/main" w="9525">
+                <a14:hiddenLine xmlns:a14="http://schemas.microsoft.com/office/drawing/2010/main" xmlns="" w="9525">
                   <a:solidFill>
                     <a:srgbClr val="000000"/>
                   </a:solidFill>
@@ -4610,7 +4611,7 @@
             </a:ln>
             <a:extLst>
               <a:ext uri="{91240B29-F687-4f45-9708-019B960494DF}">
-                <a14:hiddenLine xmlns="" xmlns:a14="http://schemas.microsoft.com/office/drawing/2010/main" w="9525">
+                <a14:hiddenLine xmlns:a14="http://schemas.microsoft.com/office/drawing/2010/main" xmlns="" w="9525">
                   <a:solidFill>
                     <a:srgbClr val="000000"/>
                   </a:solidFill>
@@ -4700,7 +4701,7 @@
             </a:ln>
             <a:extLst>
               <a:ext uri="{91240B29-F687-4f45-9708-019B960494DF}">
-                <a14:hiddenLine xmlns="" xmlns:a14="http://schemas.microsoft.com/office/drawing/2010/main" w="9525">
+                <a14:hiddenLine xmlns:a14="http://schemas.microsoft.com/office/drawing/2010/main" xmlns="" w="9525">
                   <a:solidFill>
                     <a:srgbClr val="000000"/>
                   </a:solidFill>
@@ -4840,7 +4841,7 @@
           <a:p>
             <a:fld id="{4313F670-7F9A-774D-B73D-573401E44297}" type="datetime1">
               <a:rPr lang="en-US" smtClean="0"/>
-              <a:t>7/27/26</a:t>
+              <a:t>7/28/26</a:t>
             </a:fld>
             <a:endParaRPr lang="en-US"/>
           </a:p>
@@ -5107,7 +5108,7 @@
           <a:p>
             <a:fld id="{446F9669-A8A7-2D40-9D01-B35FC337AA30}" type="datetime1">
               <a:rPr lang="en-US" smtClean="0"/>
-              <a:t>7/27/26</a:t>
+              <a:t>7/28/26</a:t>
             </a:fld>
             <a:endParaRPr lang="en-US"/>
           </a:p>
@@ -5303,7 +5304,7 @@
           <a:p>
             <a:fld id="{FA76CF18-F41B-6B48-B3E5-599E9795C2C3}" type="datetime1">
               <a:rPr lang="en-US" smtClean="0"/>
-              <a:t>7/27/26</a:t>
+              <a:t>7/28/26</a:t>
             </a:fld>
             <a:endParaRPr lang="en-US"/>
           </a:p>
@@ -5566,7 +5567,7 @@
           <a:p>
             <a:fld id="{B9654854-6457-164F-A077-6B3035079B82}" type="datetime1">
               <a:rPr lang="en-US" smtClean="0"/>
-              <a:t>7/27/26</a:t>
+              <a:t>7/28/26</a:t>
             </a:fld>
             <a:endParaRPr lang="en-US"/>
           </a:p>
@@ -6000,7 +6001,7 @@
           <a:p>
             <a:fld id="{CE3DBFD7-E611-8C40-AC73-0C29FF63F0CD}" type="datetime1">
               <a:rPr lang="en-US" smtClean="0"/>
-              <a:t>7/27/26</a:t>
+              <a:t>7/28/26</a:t>
             </a:fld>
             <a:endParaRPr lang="en-US"/>
           </a:p>
@@ -6546,7 +6547,7 @@
           <a:p>
             <a:fld id="{C8B63B06-0493-2840-9F37-30C9412BBF17}" type="datetime1">
               <a:rPr lang="en-US" smtClean="0"/>
-              <a:t>7/27/26</a:t>
+              <a:t>7/28/26</a:t>
             </a:fld>
             <a:endParaRPr lang="en-US"/>
           </a:p>
@@ -7266,7 +7267,7 @@
           <a:p>
             <a:fld id="{72B5C0FA-8C46-E84D-B6D7-B673F2CA0A0E}" type="datetime1">
               <a:rPr lang="en-US" smtClean="0"/>
-              <a:t>7/27/26</a:t>
+              <a:t>7/28/26</a:t>
             </a:fld>
             <a:endParaRPr lang="en-US"/>
           </a:p>
@@ -7436,7 +7437,7 @@
           <a:p>
             <a:fld id="{60B9CDE1-97B4-BF46-B69C-B86855B18820}" type="datetime1">
               <a:rPr lang="en-US" smtClean="0"/>
-              <a:t>7/27/26</a:t>
+              <a:t>7/28/26</a:t>
             </a:fld>
             <a:endParaRPr lang="en-US"/>
           </a:p>
@@ -7616,7 +7617,7 @@
           <a:p>
             <a:fld id="{BE51D3A4-F9E5-FD49-AA87-B395F50451DC}" type="datetime1">
               <a:rPr lang="en-US" smtClean="0"/>
-              <a:t>7/27/26</a:t>
+              <a:t>7/28/26</a:t>
             </a:fld>
             <a:endParaRPr lang="en-US"/>
           </a:p>
@@ -7786,7 +7787,7 @@
           <a:p>
             <a:fld id="{880DFB37-B0AE-9449-85EC-14F9C83B6084}" type="datetime1">
               <a:rPr lang="en-US" smtClean="0"/>
-              <a:t>7/27/26</a:t>
+              <a:t>7/28/26</a:t>
             </a:fld>
             <a:endParaRPr lang="en-US"/>
           </a:p>
@@ -8036,7 +8037,7 @@
           <a:p>
             <a:fld id="{C939124A-616E-6944-A21A-1839F5DBE7BB}" type="datetime1">
               <a:rPr lang="en-US" smtClean="0"/>
-              <a:t>7/27/26</a:t>
+              <a:t>7/28/26</a:t>
             </a:fld>
             <a:endParaRPr lang="en-US"/>
           </a:p>
@@ -8268,7 +8269,7 @@
           <a:p>
             <a:fld id="{C6E9A026-D48C-FD43-8676-CD625DD5D84B}" type="datetime1">
               <a:rPr lang="en-US" smtClean="0"/>
-              <a:t>7/27/26</a:t>
+              <a:t>7/28/26</a:t>
             </a:fld>
             <a:endParaRPr lang="en-US"/>
           </a:p>
@@ -8654,7 +8655,7 @@
           <a:p>
             <a:fld id="{EA35111E-23A3-1440-99A3-C4C665908E3D}" type="datetime1">
               <a:rPr lang="en-US" smtClean="0"/>
-              <a:t>7/27/26</a:t>
+              <a:t>7/28/26</a:t>
             </a:fld>
             <a:endParaRPr lang="en-US"/>
           </a:p>
@@ -8777,7 +8778,7 @@
           <a:p>
             <a:fld id="{249983B9-88EF-D74B-BA6D-6A3BF17C2B38}" type="datetime1">
               <a:rPr lang="en-US" smtClean="0"/>
-              <a:t>7/27/26</a:t>
+              <a:t>7/28/26</a:t>
             </a:fld>
             <a:endParaRPr lang="en-US"/>
           </a:p>
@@ -8872,7 +8873,7 @@
           <a:p>
             <a:fld id="{E2A00AEF-B4EC-084A-8DB8-A225C7981CBB}" type="datetime1">
               <a:rPr lang="en-US" smtClean="0"/>
-              <a:t>7/27/26</a:t>
+              <a:t>7/28/26</a:t>
             </a:fld>
             <a:endParaRPr lang="en-US"/>
           </a:p>
@@ -9121,7 +9122,7 @@
           <a:p>
             <a:fld id="{97860299-21CD-A94A-A7B0-44E787F8D42C}" type="datetime1">
               <a:rPr lang="en-US" smtClean="0"/>
-              <a:t>7/27/26</a:t>
+              <a:t>7/28/26</a:t>
             </a:fld>
             <a:endParaRPr lang="en-US"/>
           </a:p>
@@ -9406,7 +9407,7 @@
           <a:p>
             <a:fld id="{3DFD19CF-4E62-D246-BA61-7B528271315F}" type="datetime1">
               <a:rPr lang="en-US" smtClean="0"/>
-              <a:t>7/27/26</a:t>
+              <a:t>7/28/26</a:t>
             </a:fld>
             <a:endParaRPr lang="en-US"/>
           </a:p>
@@ -9529,7 +9530,7 @@
           <a:noFill/>
           <a:extLst>
             <a:ext uri="{909E8E84-426E-40dd-AFC4-6F175D3DCCD1}">
-              <a14:hiddenFill xmlns="" xmlns:a14="http://schemas.microsoft.com/office/drawing/2010/main">
+              <a14:hiddenFill xmlns:a14="http://schemas.microsoft.com/office/drawing/2010/main" xmlns="">
                 <a:solidFill>
                   <a:srgbClr val="FFFFFF"/>
                 </a:solidFill>
@@ -9603,7 +9604,7 @@
               </a:ln>
               <a:extLst>
                 <a:ext uri="{91240B29-F687-4f45-9708-019B960494DF}">
-                  <a14:hiddenLine xmlns="" xmlns:a14="http://schemas.microsoft.com/office/drawing/2010/main" w="9525">
+                  <a14:hiddenLine xmlns:a14="http://schemas.microsoft.com/office/drawing/2010/main" xmlns="" w="9525">
                     <a:solidFill>
                       <a:srgbClr val="000000"/>
                     </a:solidFill>
@@ -9693,7 +9694,7 @@
               </a:ln>
               <a:extLst>
                 <a:ext uri="{91240B29-F687-4f45-9708-019B960494DF}">
-                  <a14:hiddenLine xmlns="" xmlns:a14="http://schemas.microsoft.com/office/drawing/2010/main" w="9525">
+                  <a14:hiddenLine xmlns:a14="http://schemas.microsoft.com/office/drawing/2010/main" xmlns="" w="9525">
                     <a:solidFill>
                       <a:srgbClr val="000000"/>
                     </a:solidFill>
@@ -9783,7 +9784,7 @@
               </a:ln>
               <a:extLst>
                 <a:ext uri="{91240B29-F687-4f45-9708-019B960494DF}">
-                  <a14:hiddenLine xmlns="" xmlns:a14="http://schemas.microsoft.com/office/drawing/2010/main" w="9525">
+                  <a14:hiddenLine xmlns:a14="http://schemas.microsoft.com/office/drawing/2010/main" xmlns="" w="9525">
                     <a:solidFill>
                       <a:srgbClr val="000000"/>
                     </a:solidFill>
@@ -9845,7 +9846,7 @@
               </a:ln>
               <a:extLst>
                 <a:ext uri="{91240B29-F687-4f45-9708-019B960494DF}">
-                  <a14:hiddenLine xmlns="" xmlns:a14="http://schemas.microsoft.com/office/drawing/2010/main" w="9525">
+                  <a14:hiddenLine xmlns:a14="http://schemas.microsoft.com/office/drawing/2010/main" xmlns="" w="9525">
                     <a:solidFill>
                       <a:srgbClr val="000000"/>
                     </a:solidFill>
@@ -9935,7 +9936,7 @@
               </a:ln>
               <a:extLst>
                 <a:ext uri="{91240B29-F687-4f45-9708-019B960494DF}">
-                  <a14:hiddenLine xmlns="" xmlns:a14="http://schemas.microsoft.com/office/drawing/2010/main" w="9525">
+                  <a14:hiddenLine xmlns:a14="http://schemas.microsoft.com/office/drawing/2010/main" xmlns="" w="9525">
                     <a:solidFill>
                       <a:srgbClr val="000000"/>
                     </a:solidFill>
@@ -9997,7 +9998,7 @@
               </a:ln>
               <a:extLst>
                 <a:ext uri="{91240B29-F687-4f45-9708-019B960494DF}">
-                  <a14:hiddenLine xmlns="" xmlns:a14="http://schemas.microsoft.com/office/drawing/2010/main" w="9525">
+                  <a14:hiddenLine xmlns:a14="http://schemas.microsoft.com/office/drawing/2010/main" xmlns="" w="9525">
                     <a:solidFill>
                       <a:srgbClr val="000000"/>
                     </a:solidFill>
@@ -10059,7 +10060,7 @@
               </a:ln>
               <a:extLst>
                 <a:ext uri="{91240B29-F687-4f45-9708-019B960494DF}">
-                  <a14:hiddenLine xmlns="" xmlns:a14="http://schemas.microsoft.com/office/drawing/2010/main" w="9525">
+                  <a14:hiddenLine xmlns:a14="http://schemas.microsoft.com/office/drawing/2010/main" xmlns="" w="9525">
                     <a:solidFill>
                       <a:srgbClr val="000000"/>
                     </a:solidFill>
@@ -10149,7 +10150,7 @@
               </a:ln>
               <a:extLst>
                 <a:ext uri="{91240B29-F687-4f45-9708-019B960494DF}">
-                  <a14:hiddenLine xmlns="" xmlns:a14="http://schemas.microsoft.com/office/drawing/2010/main" w="9525">
+                  <a14:hiddenLine xmlns:a14="http://schemas.microsoft.com/office/drawing/2010/main" xmlns="" w="9525">
                     <a:solidFill>
                       <a:srgbClr val="000000"/>
                     </a:solidFill>
@@ -10239,7 +10240,7 @@
               </a:ln>
               <a:extLst>
                 <a:ext uri="{91240B29-F687-4f45-9708-019B960494DF}">
-                  <a14:hiddenLine xmlns="" xmlns:a14="http://schemas.microsoft.com/office/drawing/2010/main" w="9525">
+                  <a14:hiddenLine xmlns:a14="http://schemas.microsoft.com/office/drawing/2010/main" xmlns="" w="9525">
                     <a:solidFill>
                       <a:srgbClr val="000000"/>
                     </a:solidFill>
@@ -10301,7 +10302,7 @@
               </a:ln>
               <a:extLst>
                 <a:ext uri="{91240B29-F687-4f45-9708-019B960494DF}">
-                  <a14:hiddenLine xmlns="" xmlns:a14="http://schemas.microsoft.com/office/drawing/2010/main" w="9525">
+                  <a14:hiddenLine xmlns:a14="http://schemas.microsoft.com/office/drawing/2010/main" xmlns="" w="9525">
                     <a:solidFill>
                       <a:srgbClr val="000000"/>
                     </a:solidFill>
@@ -10411,7 +10412,7 @@
               </a:ln>
               <a:extLst>
                 <a:ext uri="{91240B29-F687-4f45-9708-019B960494DF}">
-                  <a14:hiddenLine xmlns="" xmlns:a14="http://schemas.microsoft.com/office/drawing/2010/main" w="9525">
+                  <a14:hiddenLine xmlns:a14="http://schemas.microsoft.com/office/drawing/2010/main" xmlns="" w="9525">
                     <a:solidFill>
                       <a:srgbClr val="000000"/>
                     </a:solidFill>
@@ -10495,7 +10496,7 @@
               </a:ln>
               <a:extLst>
                 <a:ext uri="{91240B29-F687-4f45-9708-019B960494DF}">
-                  <a14:hiddenLine xmlns="" xmlns:a14="http://schemas.microsoft.com/office/drawing/2010/main" w="9525">
+                  <a14:hiddenLine xmlns:a14="http://schemas.microsoft.com/office/drawing/2010/main" xmlns="" w="9525">
                     <a:solidFill>
                       <a:srgbClr val="000000"/>
                     </a:solidFill>
@@ -10557,7 +10558,7 @@
               </a:ln>
               <a:extLst>
                 <a:ext uri="{91240B29-F687-4f45-9708-019B960494DF}">
-                  <a14:hiddenLine xmlns="" xmlns:a14="http://schemas.microsoft.com/office/drawing/2010/main" w="9525">
+                  <a14:hiddenLine xmlns:a14="http://schemas.microsoft.com/office/drawing/2010/main" xmlns="" w="9525">
                     <a:solidFill>
                       <a:srgbClr val="000000"/>
                     </a:solidFill>
@@ -10619,7 +10620,7 @@
               </a:ln>
               <a:extLst>
                 <a:ext uri="{91240B29-F687-4f45-9708-019B960494DF}">
-                  <a14:hiddenLine xmlns="" xmlns:a14="http://schemas.microsoft.com/office/drawing/2010/main" w="9525">
+                  <a14:hiddenLine xmlns:a14="http://schemas.microsoft.com/office/drawing/2010/main" xmlns="" w="9525">
                     <a:solidFill>
                       <a:srgbClr val="000000"/>
                     </a:solidFill>
@@ -10709,7 +10710,7 @@
               </a:ln>
               <a:extLst>
                 <a:ext uri="{91240B29-F687-4f45-9708-019B960494DF}">
-                  <a14:hiddenLine xmlns="" xmlns:a14="http://schemas.microsoft.com/office/drawing/2010/main" w="9525">
+                  <a14:hiddenLine xmlns:a14="http://schemas.microsoft.com/office/drawing/2010/main" xmlns="" w="9525">
                     <a:solidFill>
                       <a:srgbClr val="000000"/>
                     </a:solidFill>
@@ -10743,7 +10744,7 @@
               </a:ln>
               <a:extLst>
                 <a:ext uri="{91240B29-F687-4f45-9708-019B960494DF}">
-                  <a14:hiddenLine xmlns="" xmlns:a14="http://schemas.microsoft.com/office/drawing/2010/main" w="9525">
+                  <a14:hiddenLine xmlns:a14="http://schemas.microsoft.com/office/drawing/2010/main" xmlns="" w="9525">
                     <a:solidFill>
                       <a:srgbClr val="000000"/>
                     </a:solidFill>
@@ -10808,7 +10809,7 @@
               </a:ln>
               <a:extLst>
                 <a:ext uri="{91240B29-F687-4f45-9708-019B960494DF}">
-                  <a14:hiddenLine xmlns="" xmlns:a14="http://schemas.microsoft.com/office/drawing/2010/main" w="9525">
+                  <a14:hiddenLine xmlns:a14="http://schemas.microsoft.com/office/drawing/2010/main" xmlns="" w="9525">
                     <a:solidFill>
                       <a:srgbClr val="000000"/>
                     </a:solidFill>
@@ -10898,7 +10899,7 @@
               </a:ln>
               <a:extLst>
                 <a:ext uri="{91240B29-F687-4f45-9708-019B960494DF}">
-                  <a14:hiddenLine xmlns="" xmlns:a14="http://schemas.microsoft.com/office/drawing/2010/main" w="9525">
+                  <a14:hiddenLine xmlns:a14="http://schemas.microsoft.com/office/drawing/2010/main" xmlns="" w="9525">
                     <a:solidFill>
                       <a:srgbClr val="000000"/>
                     </a:solidFill>
@@ -10960,7 +10961,7 @@
               </a:ln>
               <a:extLst>
                 <a:ext uri="{91240B29-F687-4f45-9708-019B960494DF}">
-                  <a14:hiddenLine xmlns="" xmlns:a14="http://schemas.microsoft.com/office/drawing/2010/main" w="9525">
+                  <a14:hiddenLine xmlns:a14="http://schemas.microsoft.com/office/drawing/2010/main" xmlns="" w="9525">
                     <a:solidFill>
                       <a:srgbClr val="000000"/>
                     </a:solidFill>
@@ -11050,7 +11051,7 @@
               </a:ln>
               <a:extLst>
                 <a:ext uri="{91240B29-F687-4f45-9708-019B960494DF}">
-                  <a14:hiddenLine xmlns="" xmlns:a14="http://schemas.microsoft.com/office/drawing/2010/main" w="9525">
+                  <a14:hiddenLine xmlns:a14="http://schemas.microsoft.com/office/drawing/2010/main" xmlns="" w="9525">
                     <a:solidFill>
                       <a:srgbClr val="000000"/>
                     </a:solidFill>
@@ -11115,7 +11116,7 @@
               </a:ln>
               <a:extLst>
                 <a:ext uri="{91240B29-F687-4f45-9708-019B960494DF}">
-                  <a14:hiddenLine xmlns="" xmlns:a14="http://schemas.microsoft.com/office/drawing/2010/main" w="9525">
+                  <a14:hiddenLine xmlns:a14="http://schemas.microsoft.com/office/drawing/2010/main" xmlns="" w="9525">
                     <a:solidFill>
                       <a:srgbClr val="000000"/>
                     </a:solidFill>
@@ -11177,7 +11178,7 @@
               </a:ln>
               <a:extLst>
                 <a:ext uri="{91240B29-F687-4f45-9708-019B960494DF}">
-                  <a14:hiddenLine xmlns="" xmlns:a14="http://schemas.microsoft.com/office/drawing/2010/main" w="9525">
+                  <a14:hiddenLine xmlns:a14="http://schemas.microsoft.com/office/drawing/2010/main" xmlns="" w="9525">
                     <a:solidFill>
                       <a:srgbClr val="000000"/>
                     </a:solidFill>
@@ -11267,7 +11268,7 @@
               </a:ln>
               <a:extLst>
                 <a:ext uri="{91240B29-F687-4f45-9708-019B960494DF}">
-                  <a14:hiddenLine xmlns="" xmlns:a14="http://schemas.microsoft.com/office/drawing/2010/main" w="9525">
+                  <a14:hiddenLine xmlns:a14="http://schemas.microsoft.com/office/drawing/2010/main" xmlns="" w="9525">
                     <a:solidFill>
                       <a:srgbClr val="000000"/>
                     </a:solidFill>
@@ -11357,7 +11358,7 @@
               </a:ln>
               <a:extLst>
                 <a:ext uri="{91240B29-F687-4f45-9708-019B960494DF}">
-                  <a14:hiddenLine xmlns="" xmlns:a14="http://schemas.microsoft.com/office/drawing/2010/main" w="9525">
+                  <a14:hiddenLine xmlns:a14="http://schemas.microsoft.com/office/drawing/2010/main" xmlns="" w="9525">
                     <a:solidFill>
                       <a:srgbClr val="000000"/>
                     </a:solidFill>
@@ -11422,7 +11423,7 @@
               </a:ln>
               <a:extLst>
                 <a:ext uri="{91240B29-F687-4f45-9708-019B960494DF}">
-                  <a14:hiddenLine xmlns="" xmlns:a14="http://schemas.microsoft.com/office/drawing/2010/main" w="9525">
+                  <a14:hiddenLine xmlns:a14="http://schemas.microsoft.com/office/drawing/2010/main" xmlns="" w="9525">
                     <a:solidFill>
                       <a:srgbClr val="000000"/>
                     </a:solidFill>
@@ -11542,7 +11543,7 @@
               </a:ln>
               <a:extLst>
                 <a:ext uri="{91240B29-F687-4f45-9708-019B960494DF}">
-                  <a14:hiddenLine xmlns="" xmlns:a14="http://schemas.microsoft.com/office/drawing/2010/main" w="9525">
+                  <a14:hiddenLine xmlns:a14="http://schemas.microsoft.com/office/drawing/2010/main" xmlns="" w="9525">
                     <a:solidFill>
                       <a:srgbClr val="000000"/>
                     </a:solidFill>
@@ -11623,7 +11624,7 @@
               </a:ln>
               <a:extLst>
                 <a:ext uri="{91240B29-F687-4f45-9708-019B960494DF}">
-                  <a14:hiddenLine xmlns="" xmlns:a14="http://schemas.microsoft.com/office/drawing/2010/main" w="9525">
+                  <a14:hiddenLine xmlns:a14="http://schemas.microsoft.com/office/drawing/2010/main" xmlns="" w="9525">
                     <a:solidFill>
                       <a:srgbClr val="000000"/>
                     </a:solidFill>
@@ -11738,7 +11739,7 @@
               </a:ln>
               <a:extLst>
                 <a:ext uri="{91240B29-F687-4f45-9708-019B960494DF}">
-                  <a14:hiddenLine xmlns="" xmlns:a14="http://schemas.microsoft.com/office/drawing/2010/main" w="9525">
+                  <a14:hiddenLine xmlns:a14="http://schemas.microsoft.com/office/drawing/2010/main" xmlns="" w="9525">
                     <a:solidFill>
                       <a:srgbClr val="000000"/>
                     </a:solidFill>
@@ -11828,7 +11829,7 @@
               </a:ln>
               <a:extLst>
                 <a:ext uri="{91240B29-F687-4f45-9708-019B960494DF}">
-                  <a14:hiddenLine xmlns="" xmlns:a14="http://schemas.microsoft.com/office/drawing/2010/main" w="9525">
+                  <a14:hiddenLine xmlns:a14="http://schemas.microsoft.com/office/drawing/2010/main" xmlns="" w="9525">
                     <a:solidFill>
                       <a:srgbClr val="000000"/>
                     </a:solidFill>
@@ -11893,7 +11894,7 @@
               </a:ln>
               <a:extLst>
                 <a:ext uri="{91240B29-F687-4f45-9708-019B960494DF}">
-                  <a14:hiddenLine xmlns="" xmlns:a14="http://schemas.microsoft.com/office/drawing/2010/main" w="9525">
+                  <a14:hiddenLine xmlns:a14="http://schemas.microsoft.com/office/drawing/2010/main" xmlns="" w="9525">
                     <a:solidFill>
                       <a:srgbClr val="000000"/>
                     </a:solidFill>
@@ -11983,7 +11984,7 @@
               </a:ln>
               <a:extLst>
                 <a:ext uri="{91240B29-F687-4f45-9708-019B960494DF}">
-                  <a14:hiddenLine xmlns="" xmlns:a14="http://schemas.microsoft.com/office/drawing/2010/main" w="9525">
+                  <a14:hiddenLine xmlns:a14="http://schemas.microsoft.com/office/drawing/2010/main" xmlns="" w="9525">
                     <a:solidFill>
                       <a:srgbClr val="000000"/>
                     </a:solidFill>
@@ -12051,7 +12052,7 @@
               </a:ln>
               <a:extLst>
                 <a:ext uri="{91240B29-F687-4f45-9708-019B960494DF}">
-                  <a14:hiddenLine xmlns="" xmlns:a14="http://schemas.microsoft.com/office/drawing/2010/main" w="9525">
+                  <a14:hiddenLine xmlns:a14="http://schemas.microsoft.com/office/drawing/2010/main" xmlns="" w="9525">
                     <a:solidFill>
                       <a:srgbClr val="000000"/>
                     </a:solidFill>
@@ -12141,7 +12142,7 @@
               </a:ln>
               <a:extLst>
                 <a:ext uri="{91240B29-F687-4f45-9708-019B960494DF}">
-                  <a14:hiddenLine xmlns="" xmlns:a14="http://schemas.microsoft.com/office/drawing/2010/main" w="9525">
+                  <a14:hiddenLine xmlns:a14="http://schemas.microsoft.com/office/drawing/2010/main" xmlns="" w="9525">
                     <a:solidFill>
                       <a:srgbClr val="000000"/>
                     </a:solidFill>
@@ -12209,7 +12210,7 @@
               </a:ln>
               <a:extLst>
                 <a:ext uri="{91240B29-F687-4f45-9708-019B960494DF}">
-                  <a14:hiddenLine xmlns="" xmlns:a14="http://schemas.microsoft.com/office/drawing/2010/main" w="9525">
+                  <a14:hiddenLine xmlns:a14="http://schemas.microsoft.com/office/drawing/2010/main" xmlns="" w="9525">
                     <a:solidFill>
                       <a:srgbClr val="000000"/>
                     </a:solidFill>
@@ -12299,7 +12300,7 @@
               </a:ln>
               <a:extLst>
                 <a:ext uri="{91240B29-F687-4f45-9708-019B960494DF}">
-                  <a14:hiddenLine xmlns="" xmlns:a14="http://schemas.microsoft.com/office/drawing/2010/main" w="9525">
+                  <a14:hiddenLine xmlns:a14="http://schemas.microsoft.com/office/drawing/2010/main" xmlns="" w="9525">
                     <a:solidFill>
                       <a:srgbClr val="000000"/>
                     </a:solidFill>
@@ -12333,7 +12334,7 @@
               </a:ln>
               <a:extLst>
                 <a:ext uri="{91240B29-F687-4f45-9708-019B960494DF}">
-                  <a14:hiddenLine xmlns="" xmlns:a14="http://schemas.microsoft.com/office/drawing/2010/main" w="9525">
+                  <a14:hiddenLine xmlns:a14="http://schemas.microsoft.com/office/drawing/2010/main" xmlns="" w="9525">
                     <a:solidFill>
                       <a:srgbClr val="000000"/>
                     </a:solidFill>
@@ -12473,7 +12474,7 @@
           <a:p>
             <a:fld id="{92FF8978-FE14-CC4A-93A6-934EB06543C0}" type="datetime1">
               <a:rPr lang="en-US" smtClean="0"/>
-              <a:t>7/27/26</a:t>
+              <a:t>7/28/26</a:t>
             </a:fld>
             <a:endParaRPr lang="en-US"/>
           </a:p>
@@ -13216,6 +13217,237 @@
 </file>
 
 <file path=ppt/slides/slide11.xml><?xml version="1.0" encoding="utf-8"?>
+<p:sld xmlns:a="http://schemas.openxmlformats.org/drawingml/2006/main" xmlns:r="http://schemas.openxmlformats.org/officeDocument/2006/relationships" xmlns:p="http://schemas.openxmlformats.org/presentationml/2006/main">
+  <p:cSld>
+    <p:spTree>
+      <p:nvGrpSpPr>
+        <p:cNvPr id="1" name="">
+          <a:extLst>
+            <a:ext uri="{FF2B5EF4-FFF2-40B4-BE49-F238E27FC236}">
+              <a16:creationId xmlns:a16="http://schemas.microsoft.com/office/drawing/2014/main" id="{E21B1DC1-D043-BCC2-19DD-FAAB1A48F16F}"/>
+            </a:ext>
+          </a:extLst>
+        </p:cNvPr>
+        <p:cNvGrpSpPr/>
+        <p:nvPr/>
+      </p:nvGrpSpPr>
+      <p:grpSpPr>
+        <a:xfrm>
+          <a:off x="0" y="0"/>
+          <a:ext cx="0" cy="0"/>
+          <a:chOff x="0" y="0"/>
+          <a:chExt cx="0" cy="0"/>
+        </a:xfrm>
+      </p:grpSpPr>
+      <p:sp>
+        <p:nvSpPr>
+          <p:cNvPr id="6146" name="Rectangle 2">
+            <a:extLst>
+              <a:ext uri="{FF2B5EF4-FFF2-40B4-BE49-F238E27FC236}">
+                <a16:creationId xmlns:a16="http://schemas.microsoft.com/office/drawing/2014/main" id="{AF890841-263F-5C8C-2DFD-FC060A248FCA}"/>
+              </a:ext>
+            </a:extLst>
+          </p:cNvPr>
+          <p:cNvSpPr>
+            <a:spLocks noGrp="1" noChangeArrowheads="1"/>
+          </p:cNvSpPr>
+          <p:nvPr>
+            <p:ph type="title"/>
+            <p:custDataLst>
+              <p:tags r:id="rId1"/>
+            </p:custDataLst>
+          </p:nvPr>
+        </p:nvSpPr>
+        <p:spPr>
+          <a:xfrm>
+            <a:off x="1141413" y="284084"/>
+            <a:ext cx="9905998" cy="620791"/>
+          </a:xfrm>
+        </p:spPr>
+        <p:txBody>
+          <a:bodyPr/>
+          <a:lstStyle/>
+          <a:p>
+            <a:pPr algn="ctr"/>
+            <a:r>
+              <a:rPr lang="en-US" dirty="0"/>
+              <a:t>Week 3: Tuesday</a:t>
+            </a:r>
+          </a:p>
+        </p:txBody>
+      </p:sp>
+      <p:sp>
+        <p:nvSpPr>
+          <p:cNvPr id="6147" name="Rectangle 3">
+            <a:extLst>
+              <a:ext uri="{FF2B5EF4-FFF2-40B4-BE49-F238E27FC236}">
+                <a16:creationId xmlns:a16="http://schemas.microsoft.com/office/drawing/2014/main" id="{4BA29AE7-1631-7B6D-8956-0225A60DB4E2}"/>
+              </a:ext>
+            </a:extLst>
+          </p:cNvPr>
+          <p:cNvSpPr>
+            <a:spLocks noGrp="1" noChangeArrowheads="1"/>
+          </p:cNvSpPr>
+          <p:nvPr>
+            <p:ph idx="1"/>
+            <p:custDataLst>
+              <p:tags r:id="rId2"/>
+            </p:custDataLst>
+          </p:nvPr>
+        </p:nvSpPr>
+        <p:spPr>
+          <a:xfrm>
+            <a:off x="1294151" y="1098548"/>
+            <a:ext cx="9600522" cy="5475367"/>
+          </a:xfrm>
+        </p:spPr>
+        <p:txBody>
+          <a:bodyPr>
+            <a:normAutofit fontScale="92500" lnSpcReduction="10000"/>
+          </a:bodyPr>
+          <a:lstStyle/>
+          <a:p>
+            <a:r>
+              <a:rPr lang="en-US" dirty="0">
+                <a:latin typeface="Arial" panose="020B0604020202020204" pitchFamily="34" charset="0"/>
+                <a:cs typeface="Arial" panose="020B0604020202020204" pitchFamily="34" charset="0"/>
+              </a:rPr>
+              <a:t>Welcome to week 3!! Halfway done with the course</a:t>
+            </a:r>
+          </a:p>
+          <a:p>
+            <a:r>
+              <a:rPr lang="en-US" dirty="0">
+                <a:latin typeface="Arial" panose="020B0604020202020204" pitchFamily="34" charset="0"/>
+                <a:cs typeface="Arial" panose="020B0604020202020204" pitchFamily="34" charset="0"/>
+              </a:rPr>
+              <a:t>This week:</a:t>
+            </a:r>
+          </a:p>
+          <a:p>
+            <a:pPr lvl="1"/>
+            <a:r>
+              <a:rPr lang="en-US" dirty="0">
+                <a:latin typeface="Arial" panose="020B0604020202020204" pitchFamily="34" charset="0"/>
+                <a:cs typeface="Arial" panose="020B0604020202020204" pitchFamily="34" charset="0"/>
+              </a:rPr>
+              <a:t>Module 2 (CFGs) Written Assignment Due </a:t>
+            </a:r>
+            <a:r>
+              <a:rPr lang="en-US" b="1" i="1" dirty="0">
+                <a:latin typeface="Arial" panose="020B0604020202020204" pitchFamily="34" charset="0"/>
+                <a:cs typeface="Arial" panose="020B0604020202020204" pitchFamily="34" charset="0"/>
+              </a:rPr>
+              <a:t>TONIGHT</a:t>
+            </a:r>
+          </a:p>
+          <a:p>
+            <a:pPr lvl="1"/>
+            <a:r>
+              <a:rPr lang="en-US" dirty="0">
+                <a:latin typeface="Arial" panose="020B0604020202020204" pitchFamily="34" charset="0"/>
+                <a:cs typeface="Arial" panose="020B0604020202020204" pitchFamily="34" charset="0"/>
+              </a:rPr>
+              <a:t>Second Midterm on Friday (Same procedure as last Friday)</a:t>
+            </a:r>
+          </a:p>
+          <a:p>
+            <a:r>
+              <a:rPr lang="en-US" dirty="0">
+                <a:latin typeface="Arial" panose="020B0604020202020204" pitchFamily="34" charset="0"/>
+                <a:cs typeface="Arial" panose="020B0604020202020204" pitchFamily="34" charset="0"/>
+              </a:rPr>
+              <a:t>Exams are graded. I’ll go over it a bit today</a:t>
+            </a:r>
+          </a:p>
+          <a:p>
+            <a:pPr lvl="1"/>
+            <a:r>
+              <a:rPr lang="en-US" dirty="0">
+                <a:latin typeface="Arial" panose="020B0604020202020204" pitchFamily="34" charset="0"/>
+                <a:cs typeface="Arial" panose="020B0604020202020204" pitchFamily="34" charset="0"/>
+              </a:rPr>
+              <a:t>Average was 17.49/29 (60.3%). Std. Deviation was 5.35/29 (18.4%).</a:t>
+            </a:r>
+          </a:p>
+          <a:p>
+            <a:r>
+              <a:rPr lang="en-US" dirty="0">
+                <a:latin typeface="Arial" panose="020B0604020202020204" pitchFamily="34" charset="0"/>
+                <a:cs typeface="Arial" panose="020B0604020202020204" pitchFamily="34" charset="0"/>
+              </a:rPr>
+              <a:t>Lecture recordings from last Fall are posted on Panopto on Canvas</a:t>
+            </a:r>
+          </a:p>
+          <a:p>
+            <a:pPr lvl="1"/>
+            <a:r>
+              <a:rPr lang="en-US" dirty="0">
+                <a:latin typeface="Arial" panose="020B0604020202020204" pitchFamily="34" charset="0"/>
+                <a:cs typeface="Arial" panose="020B0604020202020204" pitchFamily="34" charset="0"/>
+              </a:rPr>
+              <a:t>I posted ALL the videos FYI</a:t>
+            </a:r>
+          </a:p>
+          <a:p>
+            <a:r>
+              <a:rPr lang="en-US" dirty="0">
+                <a:latin typeface="Arial" panose="020B0604020202020204" pitchFamily="34" charset="0"/>
+                <a:cs typeface="Arial" panose="020B0604020202020204" pitchFamily="34" charset="0"/>
+              </a:rPr>
+              <a:t>Please remember that I am asking for NO laptop / phones!</a:t>
+            </a:r>
+          </a:p>
+          <a:p>
+            <a:pPr lvl="1"/>
+            <a:r>
+              <a:rPr lang="en-US" dirty="0">
+                <a:latin typeface="Arial" panose="020B0604020202020204" pitchFamily="34" charset="0"/>
+                <a:cs typeface="Arial" panose="020B0604020202020204" pitchFamily="34" charset="0"/>
+              </a:rPr>
+              <a:t>This makes the learning environment better for everybody. I appreciate it!</a:t>
+            </a:r>
+          </a:p>
+          <a:p>
+            <a:r>
+              <a:rPr lang="en-US" dirty="0">
+                <a:latin typeface="Arial" panose="020B0604020202020204" pitchFamily="34" charset="0"/>
+                <a:cs typeface="Arial" panose="020B0604020202020204" pitchFamily="34" charset="0"/>
+              </a:rPr>
+              <a:t>Attendance continues today as usual.</a:t>
+            </a:r>
+          </a:p>
+          <a:p>
+            <a:r>
+              <a:rPr lang="en-US" dirty="0">
+                <a:latin typeface="Arial" panose="020B0604020202020204" pitchFamily="34" charset="0"/>
+                <a:cs typeface="Arial" panose="020B0604020202020204" pitchFamily="34" charset="0"/>
+              </a:rPr>
+              <a:t>Today we continue Module 3 and the Turing Machine</a:t>
+            </a:r>
+          </a:p>
+          <a:p>
+            <a:endParaRPr lang="en-US" dirty="0">
+              <a:latin typeface="Arial" panose="020B0604020202020204" pitchFamily="34" charset="0"/>
+              <a:cs typeface="Arial" panose="020B0604020202020204" pitchFamily="34" charset="0"/>
+            </a:endParaRPr>
+          </a:p>
+        </p:txBody>
+      </p:sp>
+    </p:spTree>
+    <p:extLst>
+      <p:ext uri="{BB962C8B-B14F-4D97-AF65-F5344CB8AC3E}">
+        <p14:creationId xmlns:p14="http://schemas.microsoft.com/office/powerpoint/2010/main" val="3586293736"/>
+      </p:ext>
+    </p:extLst>
+  </p:cSld>
+  <p:clrMapOvr>
+    <a:masterClrMapping/>
+  </p:clrMapOvr>
+</p:sld>
+</file>
+
+<file path=ppt/slides/slide12.xml><?xml version="1.0" encoding="utf-8"?>
 <p:sld xmlns:a="http://schemas.openxmlformats.org/drawingml/2006/main" xmlns:r="http://schemas.openxmlformats.org/officeDocument/2006/relationships" xmlns:p="http://schemas.openxmlformats.org/presentationml/2006/main">
   <p:cSld>
     <p:spTree>
@@ -16918,6 +17150,18 @@
 </p:tagLst>
 </file>
 
+<file path=ppt/tags/tag24.xml><?xml version="1.0" encoding="utf-8"?>
+<p:tagLst xmlns:a="http://schemas.openxmlformats.org/drawingml/2006/main" xmlns:r="http://schemas.openxmlformats.org/officeDocument/2006/relationships" xmlns:p="http://schemas.openxmlformats.org/presentationml/2006/main">
+  <p:tag name="_INSTRUCTOR VIEW19C14C36-AC8E-43BC-9DB6-C2AAF774C7DC|PANE__TAG" val="_"/>
+</p:tagLst>
+</file>
+
+<file path=ppt/tags/tag25.xml><?xml version="1.0" encoding="utf-8"?>
+<p:tagLst xmlns:a="http://schemas.openxmlformats.org/drawingml/2006/main" xmlns:r="http://schemas.openxmlformats.org/officeDocument/2006/relationships" xmlns:p="http://schemas.openxmlformats.org/presentationml/2006/main">
+  <p:tag name="_INSTRUCTOR VIEW19C14C36-AC8E-43BC-9DB6-C2AAF774C7DC|PANE__TAG" val="_"/>
+</p:tagLst>
+</file>
+
 <file path=ppt/tags/tag3.xml><?xml version="1.0" encoding="utf-8"?>
 <p:tagLst xmlns:a="http://schemas.openxmlformats.org/drawingml/2006/main" xmlns:r="http://schemas.openxmlformats.org/officeDocument/2006/relationships" xmlns:p="http://schemas.openxmlformats.org/presentationml/2006/main">
   <p:tag name="_INSTRUCTOR VIEW19C14C36-AC8E-43BC-9DB6-C2AAF774C7DC|PANE__TAG" val="_"/>

--- a/slides/00-DailyAnnouncements.pptx
+++ b/slides/00-DailyAnnouncements.pptx
@@ -5,7 +5,7 @@
     <p:sldMasterId id="2147484006" r:id="rId1"/>
   </p:sldMasterIdLst>
   <p:notesMasterIdLst>
-    <p:notesMasterId r:id="rId14"/>
+    <p:notesMasterId r:id="rId15"/>
   </p:notesMasterIdLst>
   <p:sldIdLst>
     <p:sldId id="256" r:id="rId2"/>
@@ -19,7 +19,8 @@
     <p:sldId id="522" r:id="rId10"/>
     <p:sldId id="523" r:id="rId11"/>
     <p:sldId id="524" r:id="rId12"/>
-    <p:sldId id="515" r:id="rId13"/>
+    <p:sldId id="525" r:id="rId13"/>
+    <p:sldId id="515" r:id="rId14"/>
   </p:sldIdLst>
   <p:sldSz cx="12192000" cy="6858000"/>
   <p:notesSz cx="6858000" cy="9144000"/>
@@ -208,7 +209,7 @@
           <a:p>
             <a:fld id="{C5B45307-6ED4-B142-BD64-10F739779302}" type="datetimeFigureOut">
               <a:rPr lang="en-US" smtClean="0"/>
-              <a:t>7/28/26</a:t>
+              <a:t>7/29/26</a:t>
             </a:fld>
             <a:endParaRPr lang="en-US"/>
           </a:p>
@@ -616,7 +617,7 @@
           <a:noFill/>
           <a:extLst>
             <a:ext uri="{909E8E84-426E-40dd-AFC4-6F175D3DCCD1}">
-              <a14:hiddenFill xmlns:a14="http://schemas.microsoft.com/office/drawing/2010/main" xmlns="">
+              <a14:hiddenFill xmlns="" xmlns:a14="http://schemas.microsoft.com/office/drawing/2010/main">
                 <a:solidFill>
                   <a:srgbClr val="FFFFFF"/>
                 </a:solidFill>
@@ -675,7 +676,7 @@
             </a:ln>
             <a:extLst>
               <a:ext uri="{91240B29-F687-4f45-9708-019B960494DF}">
-                <a14:hiddenLine xmlns:a14="http://schemas.microsoft.com/office/drawing/2010/main" xmlns="" w="9525">
+                <a14:hiddenLine xmlns="" xmlns:a14="http://schemas.microsoft.com/office/drawing/2010/main" w="9525">
                   <a:solidFill>
                     <a:srgbClr val="000000"/>
                   </a:solidFill>
@@ -765,7 +766,7 @@
             </a:ln>
             <a:extLst>
               <a:ext uri="{91240B29-F687-4f45-9708-019B960494DF}">
-                <a14:hiddenLine xmlns:a14="http://schemas.microsoft.com/office/drawing/2010/main" xmlns="" w="9525">
+                <a14:hiddenLine xmlns="" xmlns:a14="http://schemas.microsoft.com/office/drawing/2010/main" w="9525">
                   <a:solidFill>
                     <a:srgbClr val="000000"/>
                   </a:solidFill>
@@ -855,7 +856,7 @@
             </a:ln>
             <a:extLst>
               <a:ext uri="{91240B29-F687-4f45-9708-019B960494DF}">
-                <a14:hiddenLine xmlns:a14="http://schemas.microsoft.com/office/drawing/2010/main" xmlns="" w="9525">
+                <a14:hiddenLine xmlns="" xmlns:a14="http://schemas.microsoft.com/office/drawing/2010/main" w="9525">
                   <a:solidFill>
                     <a:srgbClr val="000000"/>
                   </a:solidFill>
@@ -889,7 +890,7 @@
             </a:ln>
             <a:extLst>
               <a:ext uri="{91240B29-F687-4f45-9708-019B960494DF}">
-                <a14:hiddenLine xmlns:a14="http://schemas.microsoft.com/office/drawing/2010/main" xmlns="" w="9525">
+                <a14:hiddenLine xmlns="" xmlns:a14="http://schemas.microsoft.com/office/drawing/2010/main" w="9525">
                   <a:solidFill>
                     <a:srgbClr val="000000"/>
                   </a:solidFill>
@@ -979,7 +980,7 @@
             </a:ln>
             <a:extLst>
               <a:ext uri="{91240B29-F687-4f45-9708-019B960494DF}">
-                <a14:hiddenLine xmlns:a14="http://schemas.microsoft.com/office/drawing/2010/main" xmlns="" w="9525">
+                <a14:hiddenLine xmlns="" xmlns:a14="http://schemas.microsoft.com/office/drawing/2010/main" w="9525">
                   <a:solidFill>
                     <a:srgbClr val="000000"/>
                   </a:solidFill>
@@ -1041,7 +1042,7 @@
             </a:ln>
             <a:extLst>
               <a:ext uri="{91240B29-F687-4f45-9708-019B960494DF}">
-                <a14:hiddenLine xmlns:a14="http://schemas.microsoft.com/office/drawing/2010/main" xmlns="" w="9525">
+                <a14:hiddenLine xmlns="" xmlns:a14="http://schemas.microsoft.com/office/drawing/2010/main" w="9525">
                   <a:solidFill>
                     <a:srgbClr val="000000"/>
                   </a:solidFill>
@@ -1103,7 +1104,7 @@
             </a:ln>
             <a:extLst>
               <a:ext uri="{91240B29-F687-4f45-9708-019B960494DF}">
-                <a14:hiddenLine xmlns:a14="http://schemas.microsoft.com/office/drawing/2010/main" xmlns="" w="9525">
+                <a14:hiddenLine xmlns="" xmlns:a14="http://schemas.microsoft.com/office/drawing/2010/main" w="9525">
                   <a:solidFill>
                     <a:srgbClr val="000000"/>
                   </a:solidFill>
@@ -1193,7 +1194,7 @@
             </a:ln>
             <a:extLst>
               <a:ext uri="{91240B29-F687-4f45-9708-019B960494DF}">
-                <a14:hiddenLine xmlns:a14="http://schemas.microsoft.com/office/drawing/2010/main" xmlns="" w="9525">
+                <a14:hiddenLine xmlns="" xmlns:a14="http://schemas.microsoft.com/office/drawing/2010/main" w="9525">
                   <a:solidFill>
                     <a:srgbClr val="000000"/>
                   </a:solidFill>
@@ -1255,7 +1256,7 @@
             </a:ln>
             <a:extLst>
               <a:ext uri="{91240B29-F687-4f45-9708-019B960494DF}">
-                <a14:hiddenLine xmlns:a14="http://schemas.microsoft.com/office/drawing/2010/main" xmlns="" w="9525">
+                <a14:hiddenLine xmlns="" xmlns:a14="http://schemas.microsoft.com/office/drawing/2010/main" w="9525">
                   <a:solidFill>
                     <a:srgbClr val="000000"/>
                   </a:solidFill>
@@ -1317,7 +1318,7 @@
             </a:ln>
             <a:extLst>
               <a:ext uri="{91240B29-F687-4f45-9708-019B960494DF}">
-                <a14:hiddenLine xmlns:a14="http://schemas.microsoft.com/office/drawing/2010/main" xmlns="" w="9525">
+                <a14:hiddenLine xmlns="" xmlns:a14="http://schemas.microsoft.com/office/drawing/2010/main" w="9525">
                   <a:solidFill>
                     <a:srgbClr val="000000"/>
                   </a:solidFill>
@@ -1407,7 +1408,7 @@
             </a:ln>
             <a:extLst>
               <a:ext uri="{91240B29-F687-4f45-9708-019B960494DF}">
-                <a14:hiddenLine xmlns:a14="http://schemas.microsoft.com/office/drawing/2010/main" xmlns="" w="9525">
+                <a14:hiddenLine xmlns="" xmlns:a14="http://schemas.microsoft.com/office/drawing/2010/main" w="9525">
                   <a:solidFill>
                     <a:srgbClr val="000000"/>
                   </a:solidFill>
@@ -1497,7 +1498,7 @@
             </a:ln>
             <a:extLst>
               <a:ext uri="{91240B29-F687-4f45-9708-019B960494DF}">
-                <a14:hiddenLine xmlns:a14="http://schemas.microsoft.com/office/drawing/2010/main" xmlns="" w="9525">
+                <a14:hiddenLine xmlns="" xmlns:a14="http://schemas.microsoft.com/office/drawing/2010/main" w="9525">
                   <a:solidFill>
                     <a:srgbClr val="000000"/>
                   </a:solidFill>
@@ -1559,7 +1560,7 @@
             </a:ln>
             <a:extLst>
               <a:ext uri="{91240B29-F687-4f45-9708-019B960494DF}">
-                <a14:hiddenLine xmlns:a14="http://schemas.microsoft.com/office/drawing/2010/main" xmlns="" w="9525">
+                <a14:hiddenLine xmlns="" xmlns:a14="http://schemas.microsoft.com/office/drawing/2010/main" w="9525">
                   <a:solidFill>
                     <a:srgbClr val="000000"/>
                   </a:solidFill>
@@ -1669,7 +1670,7 @@
             </a:ln>
             <a:extLst>
               <a:ext uri="{91240B29-F687-4f45-9708-019B960494DF}">
-                <a14:hiddenLine xmlns:a14="http://schemas.microsoft.com/office/drawing/2010/main" xmlns="" w="9525">
+                <a14:hiddenLine xmlns="" xmlns:a14="http://schemas.microsoft.com/office/drawing/2010/main" w="9525">
                   <a:solidFill>
                     <a:srgbClr val="000000"/>
                   </a:solidFill>
@@ -1731,7 +1732,7 @@
             </a:ln>
             <a:extLst>
               <a:ext uri="{91240B29-F687-4f45-9708-019B960494DF}">
-                <a14:hiddenLine xmlns:a14="http://schemas.microsoft.com/office/drawing/2010/main" xmlns="" w="9525">
+                <a14:hiddenLine xmlns="" xmlns:a14="http://schemas.microsoft.com/office/drawing/2010/main" w="9525">
                   <a:solidFill>
                     <a:srgbClr val="000000"/>
                   </a:solidFill>
@@ -1821,7 +1822,7 @@
             </a:ln>
             <a:extLst>
               <a:ext uri="{91240B29-F687-4f45-9708-019B960494DF}">
-                <a14:hiddenLine xmlns:a14="http://schemas.microsoft.com/office/drawing/2010/main" xmlns="" w="9525">
+                <a14:hiddenLine xmlns="" xmlns:a14="http://schemas.microsoft.com/office/drawing/2010/main" w="9525">
                   <a:solidFill>
                     <a:srgbClr val="000000"/>
                   </a:solidFill>
@@ -1911,7 +1912,7 @@
             </a:ln>
             <a:extLst>
               <a:ext uri="{91240B29-F687-4f45-9708-019B960494DF}">
-                <a14:hiddenLine xmlns:a14="http://schemas.microsoft.com/office/drawing/2010/main" xmlns="" w="9525">
+                <a14:hiddenLine xmlns="" xmlns:a14="http://schemas.microsoft.com/office/drawing/2010/main" w="9525">
                   <a:solidFill>
                     <a:srgbClr val="000000"/>
                   </a:solidFill>
@@ -1973,7 +1974,7 @@
             </a:ln>
             <a:extLst>
               <a:ext uri="{91240B29-F687-4f45-9708-019B960494DF}">
-                <a14:hiddenLine xmlns:a14="http://schemas.microsoft.com/office/drawing/2010/main" xmlns="" w="9525">
+                <a14:hiddenLine xmlns="" xmlns:a14="http://schemas.microsoft.com/office/drawing/2010/main" w="9525">
                   <a:solidFill>
                     <a:srgbClr val="000000"/>
                   </a:solidFill>
@@ -2063,7 +2064,7 @@
             </a:ln>
             <a:extLst>
               <a:ext uri="{91240B29-F687-4f45-9708-019B960494DF}">
-                <a14:hiddenLine xmlns:a14="http://schemas.microsoft.com/office/drawing/2010/main" xmlns="" w="9525">
+                <a14:hiddenLine xmlns="" xmlns:a14="http://schemas.microsoft.com/office/drawing/2010/main" w="9525">
                   <a:solidFill>
                     <a:srgbClr val="000000"/>
                   </a:solidFill>
@@ -2153,7 +2154,7 @@
             </a:ln>
             <a:extLst>
               <a:ext uri="{91240B29-F687-4f45-9708-019B960494DF}">
-                <a14:hiddenLine xmlns:a14="http://schemas.microsoft.com/office/drawing/2010/main" xmlns="" w="9525">
+                <a14:hiddenLine xmlns="" xmlns:a14="http://schemas.microsoft.com/office/drawing/2010/main" w="9525">
                   <a:solidFill>
                     <a:srgbClr val="000000"/>
                   </a:solidFill>
@@ -2209,7 +2210,7 @@
             </a:ln>
             <a:extLst>
               <a:ext uri="{91240B29-F687-4f45-9708-019B960494DF}">
-                <a14:hiddenLine xmlns:a14="http://schemas.microsoft.com/office/drawing/2010/main" xmlns="" w="9525">
+                <a14:hiddenLine xmlns="" xmlns:a14="http://schemas.microsoft.com/office/drawing/2010/main" w="9525">
                   <a:solidFill>
                     <a:srgbClr val="000000"/>
                   </a:solidFill>
@@ -2299,7 +2300,7 @@
             </a:ln>
             <a:extLst>
               <a:ext uri="{91240B29-F687-4f45-9708-019B960494DF}">
-                <a14:hiddenLine xmlns:a14="http://schemas.microsoft.com/office/drawing/2010/main" xmlns="" w="9525">
+                <a14:hiddenLine xmlns="" xmlns:a14="http://schemas.microsoft.com/office/drawing/2010/main" w="9525">
                   <a:solidFill>
                     <a:srgbClr val="000000"/>
                   </a:solidFill>
@@ -2355,7 +2356,7 @@
             </a:ln>
             <a:extLst>
               <a:ext uri="{91240B29-F687-4f45-9708-019B960494DF}">
-                <a14:hiddenLine xmlns:a14="http://schemas.microsoft.com/office/drawing/2010/main" xmlns="" w="9525">
+                <a14:hiddenLine xmlns="" xmlns:a14="http://schemas.microsoft.com/office/drawing/2010/main" w="9525">
                   <a:solidFill>
                     <a:srgbClr val="000000"/>
                   </a:solidFill>
@@ -2445,7 +2446,7 @@
             </a:ln>
             <a:extLst>
               <a:ext uri="{91240B29-F687-4f45-9708-019B960494DF}">
-                <a14:hiddenLine xmlns:a14="http://schemas.microsoft.com/office/drawing/2010/main" xmlns="" w="9525">
+                <a14:hiddenLine xmlns="" xmlns:a14="http://schemas.microsoft.com/office/drawing/2010/main" w="9525">
                   <a:solidFill>
                     <a:srgbClr val="000000"/>
                   </a:solidFill>
@@ -2513,7 +2514,7 @@
             </a:ln>
             <a:extLst>
               <a:ext uri="{91240B29-F687-4f45-9708-019B960494DF}">
-                <a14:hiddenLine xmlns:a14="http://schemas.microsoft.com/office/drawing/2010/main" xmlns="" w="9525">
+                <a14:hiddenLine xmlns="" xmlns:a14="http://schemas.microsoft.com/office/drawing/2010/main" w="9525">
                   <a:solidFill>
                     <a:srgbClr val="000000"/>
                   </a:solidFill>
@@ -2603,7 +2604,7 @@
             </a:ln>
             <a:extLst>
               <a:ext uri="{91240B29-F687-4f45-9708-019B960494DF}">
-                <a14:hiddenLine xmlns:a14="http://schemas.microsoft.com/office/drawing/2010/main" xmlns="" w="9525">
+                <a14:hiddenLine xmlns="" xmlns:a14="http://schemas.microsoft.com/office/drawing/2010/main" w="9525">
                   <a:solidFill>
                     <a:srgbClr val="000000"/>
                   </a:solidFill>
@@ -2671,7 +2672,7 @@
             </a:ln>
             <a:extLst>
               <a:ext uri="{91240B29-F687-4f45-9708-019B960494DF}">
-                <a14:hiddenLine xmlns:a14="http://schemas.microsoft.com/office/drawing/2010/main" xmlns="" w="9525">
+                <a14:hiddenLine xmlns="" xmlns:a14="http://schemas.microsoft.com/office/drawing/2010/main" w="9525">
                   <a:solidFill>
                     <a:srgbClr val="000000"/>
                   </a:solidFill>
@@ -2761,7 +2762,7 @@
             </a:ln>
             <a:extLst>
               <a:ext uri="{91240B29-F687-4f45-9708-019B960494DF}">
-                <a14:hiddenLine xmlns:a14="http://schemas.microsoft.com/office/drawing/2010/main" xmlns="" w="9525">
+                <a14:hiddenLine xmlns="" xmlns:a14="http://schemas.microsoft.com/office/drawing/2010/main" w="9525">
                   <a:solidFill>
                     <a:srgbClr val="000000"/>
                   </a:solidFill>
@@ -2795,7 +2796,7 @@
             </a:ln>
             <a:extLst>
               <a:ext uri="{91240B29-F687-4f45-9708-019B960494DF}">
-                <a14:hiddenLine xmlns:a14="http://schemas.microsoft.com/office/drawing/2010/main" xmlns="" w="9525">
+                <a14:hiddenLine xmlns="" xmlns:a14="http://schemas.microsoft.com/office/drawing/2010/main" w="9525">
                   <a:solidFill>
                     <a:srgbClr val="000000"/>
                   </a:solidFill>
@@ -2885,7 +2886,7 @@
             </a:ln>
             <a:extLst>
               <a:ext uri="{91240B29-F687-4f45-9708-019B960494DF}">
-                <a14:hiddenLine xmlns:a14="http://schemas.microsoft.com/office/drawing/2010/main" xmlns="" w="9525">
+                <a14:hiddenLine xmlns="" xmlns:a14="http://schemas.microsoft.com/office/drawing/2010/main" w="9525">
                   <a:solidFill>
                     <a:srgbClr val="000000"/>
                   </a:solidFill>
@@ -2947,7 +2948,7 @@
             </a:ln>
             <a:extLst>
               <a:ext uri="{91240B29-F687-4f45-9708-019B960494DF}">
-                <a14:hiddenLine xmlns:a14="http://schemas.microsoft.com/office/drawing/2010/main" xmlns="" w="9525">
+                <a14:hiddenLine xmlns="" xmlns:a14="http://schemas.microsoft.com/office/drawing/2010/main" w="9525">
                   <a:solidFill>
                     <a:srgbClr val="000000"/>
                   </a:solidFill>
@@ -3009,7 +3010,7 @@
             </a:ln>
             <a:extLst>
               <a:ext uri="{91240B29-F687-4f45-9708-019B960494DF}">
-                <a14:hiddenLine xmlns:a14="http://schemas.microsoft.com/office/drawing/2010/main" xmlns="" w="9525">
+                <a14:hiddenLine xmlns="" xmlns:a14="http://schemas.microsoft.com/office/drawing/2010/main" w="9525">
                   <a:solidFill>
                     <a:srgbClr val="000000"/>
                   </a:solidFill>
@@ -3099,7 +3100,7 @@
             </a:ln>
             <a:extLst>
               <a:ext uri="{91240B29-F687-4f45-9708-019B960494DF}">
-                <a14:hiddenLine xmlns:a14="http://schemas.microsoft.com/office/drawing/2010/main" xmlns="" w="9525">
+                <a14:hiddenLine xmlns="" xmlns:a14="http://schemas.microsoft.com/office/drawing/2010/main" w="9525">
                   <a:solidFill>
                     <a:srgbClr val="000000"/>
                   </a:solidFill>
@@ -3167,7 +3168,7 @@
             </a:ln>
             <a:extLst>
               <a:ext uri="{91240B29-F687-4f45-9708-019B960494DF}">
-                <a14:hiddenLine xmlns:a14="http://schemas.microsoft.com/office/drawing/2010/main" xmlns="" w="9525">
+                <a14:hiddenLine xmlns="" xmlns:a14="http://schemas.microsoft.com/office/drawing/2010/main" w="9525">
                   <a:solidFill>
                     <a:srgbClr val="000000"/>
                   </a:solidFill>
@@ -3229,7 +3230,7 @@
             </a:ln>
             <a:extLst>
               <a:ext uri="{91240B29-F687-4f45-9708-019B960494DF}">
-                <a14:hiddenLine xmlns:a14="http://schemas.microsoft.com/office/drawing/2010/main" xmlns="" w="9525">
+                <a14:hiddenLine xmlns="" xmlns:a14="http://schemas.microsoft.com/office/drawing/2010/main" w="9525">
                   <a:solidFill>
                     <a:srgbClr val="000000"/>
                   </a:solidFill>
@@ -3319,7 +3320,7 @@
             </a:ln>
             <a:extLst>
               <a:ext uri="{91240B29-F687-4f45-9708-019B960494DF}">
-                <a14:hiddenLine xmlns:a14="http://schemas.microsoft.com/office/drawing/2010/main" xmlns="" w="9525">
+                <a14:hiddenLine xmlns="" xmlns:a14="http://schemas.microsoft.com/office/drawing/2010/main" w="9525">
                   <a:solidFill>
                     <a:srgbClr val="000000"/>
                   </a:solidFill>
@@ -3381,7 +3382,7 @@
             </a:ln>
             <a:extLst>
               <a:ext uri="{91240B29-F687-4f45-9708-019B960494DF}">
-                <a14:hiddenLine xmlns:a14="http://schemas.microsoft.com/office/drawing/2010/main" xmlns="" w="9525">
+                <a14:hiddenLine xmlns="" xmlns:a14="http://schemas.microsoft.com/office/drawing/2010/main" w="9525">
                   <a:solidFill>
                     <a:srgbClr val="000000"/>
                   </a:solidFill>
@@ -3471,7 +3472,7 @@
             </a:ln>
             <a:extLst>
               <a:ext uri="{91240B29-F687-4f45-9708-019B960494DF}">
-                <a14:hiddenLine xmlns:a14="http://schemas.microsoft.com/office/drawing/2010/main" xmlns="" w="9525">
+                <a14:hiddenLine xmlns="" xmlns:a14="http://schemas.microsoft.com/office/drawing/2010/main" w="9525">
                   <a:solidFill>
                     <a:srgbClr val="000000"/>
                   </a:solidFill>
@@ -3533,7 +3534,7 @@
             </a:ln>
             <a:extLst>
               <a:ext uri="{91240B29-F687-4f45-9708-019B960494DF}">
-                <a14:hiddenLine xmlns:a14="http://schemas.microsoft.com/office/drawing/2010/main" xmlns="" w="9525">
+                <a14:hiddenLine xmlns="" xmlns:a14="http://schemas.microsoft.com/office/drawing/2010/main" w="9525">
                   <a:solidFill>
                     <a:srgbClr val="000000"/>
                   </a:solidFill>
@@ -3623,7 +3624,7 @@
             </a:ln>
             <a:extLst>
               <a:ext uri="{91240B29-F687-4f45-9708-019B960494DF}">
-                <a14:hiddenLine xmlns:a14="http://schemas.microsoft.com/office/drawing/2010/main" xmlns="" w="9525">
+                <a14:hiddenLine xmlns="" xmlns:a14="http://schemas.microsoft.com/office/drawing/2010/main" w="9525">
                   <a:solidFill>
                     <a:srgbClr val="000000"/>
                   </a:solidFill>
@@ -3657,7 +3658,7 @@
             </a:ln>
             <a:extLst>
               <a:ext uri="{91240B29-F687-4f45-9708-019B960494DF}">
-                <a14:hiddenLine xmlns:a14="http://schemas.microsoft.com/office/drawing/2010/main" xmlns="" w="9525">
+                <a14:hiddenLine xmlns="" xmlns:a14="http://schemas.microsoft.com/office/drawing/2010/main" w="9525">
                   <a:solidFill>
                     <a:srgbClr val="000000"/>
                   </a:solidFill>
@@ -3722,7 +3723,7 @@
             </a:ln>
             <a:extLst>
               <a:ext uri="{91240B29-F687-4f45-9708-019B960494DF}">
-                <a14:hiddenLine xmlns:a14="http://schemas.microsoft.com/office/drawing/2010/main" xmlns="" w="9525">
+                <a14:hiddenLine xmlns="" xmlns:a14="http://schemas.microsoft.com/office/drawing/2010/main" w="9525">
                   <a:solidFill>
                     <a:srgbClr val="000000"/>
                   </a:solidFill>
@@ -3812,7 +3813,7 @@
             </a:ln>
             <a:extLst>
               <a:ext uri="{91240B29-F687-4f45-9708-019B960494DF}">
-                <a14:hiddenLine xmlns:a14="http://schemas.microsoft.com/office/drawing/2010/main" xmlns="" w="9525">
+                <a14:hiddenLine xmlns="" xmlns:a14="http://schemas.microsoft.com/office/drawing/2010/main" w="9525">
                   <a:solidFill>
                     <a:srgbClr val="000000"/>
                   </a:solidFill>
@@ -3874,7 +3875,7 @@
             </a:ln>
             <a:extLst>
               <a:ext uri="{91240B29-F687-4f45-9708-019B960494DF}">
-                <a14:hiddenLine xmlns:a14="http://schemas.microsoft.com/office/drawing/2010/main" xmlns="" w="9525">
+                <a14:hiddenLine xmlns="" xmlns:a14="http://schemas.microsoft.com/office/drawing/2010/main" w="9525">
                   <a:solidFill>
                     <a:srgbClr val="000000"/>
                   </a:solidFill>
@@ -3964,7 +3965,7 @@
             </a:ln>
             <a:extLst>
               <a:ext uri="{91240B29-F687-4f45-9708-019B960494DF}">
-                <a14:hiddenLine xmlns:a14="http://schemas.microsoft.com/office/drawing/2010/main" xmlns="" w="9525">
+                <a14:hiddenLine xmlns="" xmlns:a14="http://schemas.microsoft.com/office/drawing/2010/main" w="9525">
                   <a:solidFill>
                     <a:srgbClr val="000000"/>
                   </a:solidFill>
@@ -4054,7 +4055,7 @@
             </a:ln>
             <a:extLst>
               <a:ext uri="{91240B29-F687-4f45-9708-019B960494DF}">
-                <a14:hiddenLine xmlns:a14="http://schemas.microsoft.com/office/drawing/2010/main" xmlns="" w="9525">
+                <a14:hiddenLine xmlns="" xmlns:a14="http://schemas.microsoft.com/office/drawing/2010/main" w="9525">
                   <a:solidFill>
                     <a:srgbClr val="000000"/>
                   </a:solidFill>
@@ -4119,7 +4120,7 @@
             </a:ln>
             <a:extLst>
               <a:ext uri="{91240B29-F687-4f45-9708-019B960494DF}">
-                <a14:hiddenLine xmlns:a14="http://schemas.microsoft.com/office/drawing/2010/main" xmlns="" w="9525">
+                <a14:hiddenLine xmlns="" xmlns:a14="http://schemas.microsoft.com/office/drawing/2010/main" w="9525">
                   <a:solidFill>
                     <a:srgbClr val="000000"/>
                   </a:solidFill>
@@ -4181,7 +4182,7 @@
             </a:ln>
             <a:extLst>
               <a:ext uri="{91240B29-F687-4f45-9708-019B960494DF}">
-                <a14:hiddenLine xmlns:a14="http://schemas.microsoft.com/office/drawing/2010/main" xmlns="" w="9525">
+                <a14:hiddenLine xmlns="" xmlns:a14="http://schemas.microsoft.com/office/drawing/2010/main" w="9525">
                   <a:solidFill>
                     <a:srgbClr val="000000"/>
                   </a:solidFill>
@@ -4271,7 +4272,7 @@
             </a:ln>
             <a:extLst>
               <a:ext uri="{91240B29-F687-4f45-9708-019B960494DF}">
-                <a14:hiddenLine xmlns:a14="http://schemas.microsoft.com/office/drawing/2010/main" xmlns="" w="9525">
+                <a14:hiddenLine xmlns="" xmlns:a14="http://schemas.microsoft.com/office/drawing/2010/main" w="9525">
                   <a:solidFill>
                     <a:srgbClr val="000000"/>
                   </a:solidFill>
@@ -4361,7 +4362,7 @@
             </a:ln>
             <a:extLst>
               <a:ext uri="{91240B29-F687-4f45-9708-019B960494DF}">
-                <a14:hiddenLine xmlns:a14="http://schemas.microsoft.com/office/drawing/2010/main" xmlns="" w="9525">
+                <a14:hiddenLine xmlns="" xmlns:a14="http://schemas.microsoft.com/office/drawing/2010/main" w="9525">
                   <a:solidFill>
                     <a:srgbClr val="000000"/>
                   </a:solidFill>
@@ -4423,7 +4424,7 @@
             </a:ln>
             <a:extLst>
               <a:ext uri="{91240B29-F687-4f45-9708-019B960494DF}">
-                <a14:hiddenLine xmlns:a14="http://schemas.microsoft.com/office/drawing/2010/main" xmlns="" w="9525">
+                <a14:hiddenLine xmlns="" xmlns:a14="http://schemas.microsoft.com/office/drawing/2010/main" w="9525">
                   <a:solidFill>
                     <a:srgbClr val="000000"/>
                   </a:solidFill>
@@ -4543,7 +4544,7 @@
             </a:ln>
             <a:extLst>
               <a:ext uri="{91240B29-F687-4f45-9708-019B960494DF}">
-                <a14:hiddenLine xmlns:a14="http://schemas.microsoft.com/office/drawing/2010/main" xmlns="" w="9525">
+                <a14:hiddenLine xmlns="" xmlns:a14="http://schemas.microsoft.com/office/drawing/2010/main" w="9525">
                   <a:solidFill>
                     <a:srgbClr val="000000"/>
                   </a:solidFill>
@@ -4611,7 +4612,7 @@
             </a:ln>
             <a:extLst>
               <a:ext uri="{91240B29-F687-4f45-9708-019B960494DF}">
-                <a14:hiddenLine xmlns:a14="http://schemas.microsoft.com/office/drawing/2010/main" xmlns="" w="9525">
+                <a14:hiddenLine xmlns="" xmlns:a14="http://schemas.microsoft.com/office/drawing/2010/main" w="9525">
                   <a:solidFill>
                     <a:srgbClr val="000000"/>
                   </a:solidFill>
@@ -4701,7 +4702,7 @@
             </a:ln>
             <a:extLst>
               <a:ext uri="{91240B29-F687-4f45-9708-019B960494DF}">
-                <a14:hiddenLine xmlns:a14="http://schemas.microsoft.com/office/drawing/2010/main" xmlns="" w="9525">
+                <a14:hiddenLine xmlns="" xmlns:a14="http://schemas.microsoft.com/office/drawing/2010/main" w="9525">
                   <a:solidFill>
                     <a:srgbClr val="000000"/>
                   </a:solidFill>
@@ -4841,7 +4842,7 @@
           <a:p>
             <a:fld id="{4313F670-7F9A-774D-B73D-573401E44297}" type="datetime1">
               <a:rPr lang="en-US" smtClean="0"/>
-              <a:t>7/28/26</a:t>
+              <a:t>7/29/26</a:t>
             </a:fld>
             <a:endParaRPr lang="en-US"/>
           </a:p>
@@ -5108,7 +5109,7 @@
           <a:p>
             <a:fld id="{446F9669-A8A7-2D40-9D01-B35FC337AA30}" type="datetime1">
               <a:rPr lang="en-US" smtClean="0"/>
-              <a:t>7/28/26</a:t>
+              <a:t>7/29/26</a:t>
             </a:fld>
             <a:endParaRPr lang="en-US"/>
           </a:p>
@@ -5304,7 +5305,7 @@
           <a:p>
             <a:fld id="{FA76CF18-F41B-6B48-B3E5-599E9795C2C3}" type="datetime1">
               <a:rPr lang="en-US" smtClean="0"/>
-              <a:t>7/28/26</a:t>
+              <a:t>7/29/26</a:t>
             </a:fld>
             <a:endParaRPr lang="en-US"/>
           </a:p>
@@ -5567,7 +5568,7 @@
           <a:p>
             <a:fld id="{B9654854-6457-164F-A077-6B3035079B82}" type="datetime1">
               <a:rPr lang="en-US" smtClean="0"/>
-              <a:t>7/28/26</a:t>
+              <a:t>7/29/26</a:t>
             </a:fld>
             <a:endParaRPr lang="en-US"/>
           </a:p>
@@ -6001,7 +6002,7 @@
           <a:p>
             <a:fld id="{CE3DBFD7-E611-8C40-AC73-0C29FF63F0CD}" type="datetime1">
               <a:rPr lang="en-US" smtClean="0"/>
-              <a:t>7/28/26</a:t>
+              <a:t>7/29/26</a:t>
             </a:fld>
             <a:endParaRPr lang="en-US"/>
           </a:p>
@@ -6547,7 +6548,7 @@
           <a:p>
             <a:fld id="{C8B63B06-0493-2840-9F37-30C9412BBF17}" type="datetime1">
               <a:rPr lang="en-US" smtClean="0"/>
-              <a:t>7/28/26</a:t>
+              <a:t>7/29/26</a:t>
             </a:fld>
             <a:endParaRPr lang="en-US"/>
           </a:p>
@@ -7267,7 +7268,7 @@
           <a:p>
             <a:fld id="{72B5C0FA-8C46-E84D-B6D7-B673F2CA0A0E}" type="datetime1">
               <a:rPr lang="en-US" smtClean="0"/>
-              <a:t>7/28/26</a:t>
+              <a:t>7/29/26</a:t>
             </a:fld>
             <a:endParaRPr lang="en-US"/>
           </a:p>
@@ -7437,7 +7438,7 @@
           <a:p>
             <a:fld id="{60B9CDE1-97B4-BF46-B69C-B86855B18820}" type="datetime1">
               <a:rPr lang="en-US" smtClean="0"/>
-              <a:t>7/28/26</a:t>
+              <a:t>7/29/26</a:t>
             </a:fld>
             <a:endParaRPr lang="en-US"/>
           </a:p>
@@ -7617,7 +7618,7 @@
           <a:p>
             <a:fld id="{BE51D3A4-F9E5-FD49-AA87-B395F50451DC}" type="datetime1">
               <a:rPr lang="en-US" smtClean="0"/>
-              <a:t>7/28/26</a:t>
+              <a:t>7/29/26</a:t>
             </a:fld>
             <a:endParaRPr lang="en-US"/>
           </a:p>
@@ -7787,7 +7788,7 @@
           <a:p>
             <a:fld id="{880DFB37-B0AE-9449-85EC-14F9C83B6084}" type="datetime1">
               <a:rPr lang="en-US" smtClean="0"/>
-              <a:t>7/28/26</a:t>
+              <a:t>7/29/26</a:t>
             </a:fld>
             <a:endParaRPr lang="en-US"/>
           </a:p>
@@ -8037,7 +8038,7 @@
           <a:p>
             <a:fld id="{C939124A-616E-6944-A21A-1839F5DBE7BB}" type="datetime1">
               <a:rPr lang="en-US" smtClean="0"/>
-              <a:t>7/28/26</a:t>
+              <a:t>7/29/26</a:t>
             </a:fld>
             <a:endParaRPr lang="en-US"/>
           </a:p>
@@ -8269,7 +8270,7 @@
           <a:p>
             <a:fld id="{C6E9A026-D48C-FD43-8676-CD625DD5D84B}" type="datetime1">
               <a:rPr lang="en-US" smtClean="0"/>
-              <a:t>7/28/26</a:t>
+              <a:t>7/29/26</a:t>
             </a:fld>
             <a:endParaRPr lang="en-US"/>
           </a:p>
@@ -8655,7 +8656,7 @@
           <a:p>
             <a:fld id="{EA35111E-23A3-1440-99A3-C4C665908E3D}" type="datetime1">
               <a:rPr lang="en-US" smtClean="0"/>
-              <a:t>7/28/26</a:t>
+              <a:t>7/29/26</a:t>
             </a:fld>
             <a:endParaRPr lang="en-US"/>
           </a:p>
@@ -8778,7 +8779,7 @@
           <a:p>
             <a:fld id="{249983B9-88EF-D74B-BA6D-6A3BF17C2B38}" type="datetime1">
               <a:rPr lang="en-US" smtClean="0"/>
-              <a:t>7/28/26</a:t>
+              <a:t>7/29/26</a:t>
             </a:fld>
             <a:endParaRPr lang="en-US"/>
           </a:p>
@@ -8873,7 +8874,7 @@
           <a:p>
             <a:fld id="{E2A00AEF-B4EC-084A-8DB8-A225C7981CBB}" type="datetime1">
               <a:rPr lang="en-US" smtClean="0"/>
-              <a:t>7/28/26</a:t>
+              <a:t>7/29/26</a:t>
             </a:fld>
             <a:endParaRPr lang="en-US"/>
           </a:p>
@@ -9122,7 +9123,7 @@
           <a:p>
             <a:fld id="{97860299-21CD-A94A-A7B0-44E787F8D42C}" type="datetime1">
               <a:rPr lang="en-US" smtClean="0"/>
-              <a:t>7/28/26</a:t>
+              <a:t>7/29/26</a:t>
             </a:fld>
             <a:endParaRPr lang="en-US"/>
           </a:p>
@@ -9407,7 +9408,7 @@
           <a:p>
             <a:fld id="{3DFD19CF-4E62-D246-BA61-7B528271315F}" type="datetime1">
               <a:rPr lang="en-US" smtClean="0"/>
-              <a:t>7/28/26</a:t>
+              <a:t>7/29/26</a:t>
             </a:fld>
             <a:endParaRPr lang="en-US"/>
           </a:p>
@@ -9530,7 +9531,7 @@
           <a:noFill/>
           <a:extLst>
             <a:ext uri="{909E8E84-426E-40dd-AFC4-6F175D3DCCD1}">
-              <a14:hiddenFill xmlns:a14="http://schemas.microsoft.com/office/drawing/2010/main" xmlns="">
+              <a14:hiddenFill xmlns="" xmlns:a14="http://schemas.microsoft.com/office/drawing/2010/main">
                 <a:solidFill>
                   <a:srgbClr val="FFFFFF"/>
                 </a:solidFill>
@@ -9604,7 +9605,7 @@
               </a:ln>
               <a:extLst>
                 <a:ext uri="{91240B29-F687-4f45-9708-019B960494DF}">
-                  <a14:hiddenLine xmlns:a14="http://schemas.microsoft.com/office/drawing/2010/main" xmlns="" w="9525">
+                  <a14:hiddenLine xmlns="" xmlns:a14="http://schemas.microsoft.com/office/drawing/2010/main" w="9525">
                     <a:solidFill>
                       <a:srgbClr val="000000"/>
                     </a:solidFill>
@@ -9694,7 +9695,7 @@
               </a:ln>
               <a:extLst>
                 <a:ext uri="{91240B29-F687-4f45-9708-019B960494DF}">
-                  <a14:hiddenLine xmlns:a14="http://schemas.microsoft.com/office/drawing/2010/main" xmlns="" w="9525">
+                  <a14:hiddenLine xmlns="" xmlns:a14="http://schemas.microsoft.com/office/drawing/2010/main" w="9525">
                     <a:solidFill>
                       <a:srgbClr val="000000"/>
                     </a:solidFill>
@@ -9784,7 +9785,7 @@
               </a:ln>
               <a:extLst>
                 <a:ext uri="{91240B29-F687-4f45-9708-019B960494DF}">
-                  <a14:hiddenLine xmlns:a14="http://schemas.microsoft.com/office/drawing/2010/main" xmlns="" w="9525">
+                  <a14:hiddenLine xmlns="" xmlns:a14="http://schemas.microsoft.com/office/drawing/2010/main" w="9525">
                     <a:solidFill>
                       <a:srgbClr val="000000"/>
                     </a:solidFill>
@@ -9846,7 +9847,7 @@
               </a:ln>
               <a:extLst>
                 <a:ext uri="{91240B29-F687-4f45-9708-019B960494DF}">
-                  <a14:hiddenLine xmlns:a14="http://schemas.microsoft.com/office/drawing/2010/main" xmlns="" w="9525">
+                  <a14:hiddenLine xmlns="" xmlns:a14="http://schemas.microsoft.com/office/drawing/2010/main" w="9525">
                     <a:solidFill>
                       <a:srgbClr val="000000"/>
                     </a:solidFill>
@@ -9936,7 +9937,7 @@
               </a:ln>
               <a:extLst>
                 <a:ext uri="{91240B29-F687-4f45-9708-019B960494DF}">
-                  <a14:hiddenLine xmlns:a14="http://schemas.microsoft.com/office/drawing/2010/main" xmlns="" w="9525">
+                  <a14:hiddenLine xmlns="" xmlns:a14="http://schemas.microsoft.com/office/drawing/2010/main" w="9525">
                     <a:solidFill>
                       <a:srgbClr val="000000"/>
                     </a:solidFill>
@@ -9998,7 +9999,7 @@
               </a:ln>
               <a:extLst>
                 <a:ext uri="{91240B29-F687-4f45-9708-019B960494DF}">
-                  <a14:hiddenLine xmlns:a14="http://schemas.microsoft.com/office/drawing/2010/main" xmlns="" w="9525">
+                  <a14:hiddenLine xmlns="" xmlns:a14="http://schemas.microsoft.com/office/drawing/2010/main" w="9525">
                     <a:solidFill>
                       <a:srgbClr val="000000"/>
                     </a:solidFill>
@@ -10060,7 +10061,7 @@
               </a:ln>
               <a:extLst>
                 <a:ext uri="{91240B29-F687-4f45-9708-019B960494DF}">
-                  <a14:hiddenLine xmlns:a14="http://schemas.microsoft.com/office/drawing/2010/main" xmlns="" w="9525">
+                  <a14:hiddenLine xmlns="" xmlns:a14="http://schemas.microsoft.com/office/drawing/2010/main" w="9525">
                     <a:solidFill>
                       <a:srgbClr val="000000"/>
                     </a:solidFill>
@@ -10150,7 +10151,7 @@
               </a:ln>
               <a:extLst>
                 <a:ext uri="{91240B29-F687-4f45-9708-019B960494DF}">
-                  <a14:hiddenLine xmlns:a14="http://schemas.microsoft.com/office/drawing/2010/main" xmlns="" w="9525">
+                  <a14:hiddenLine xmlns="" xmlns:a14="http://schemas.microsoft.com/office/drawing/2010/main" w="9525">
                     <a:solidFill>
                       <a:srgbClr val="000000"/>
                     </a:solidFill>
@@ -10240,7 +10241,7 @@
               </a:ln>
               <a:extLst>
                 <a:ext uri="{91240B29-F687-4f45-9708-019B960494DF}">
-                  <a14:hiddenLine xmlns:a14="http://schemas.microsoft.com/office/drawing/2010/main" xmlns="" w="9525">
+                  <a14:hiddenLine xmlns="" xmlns:a14="http://schemas.microsoft.com/office/drawing/2010/main" w="9525">
                     <a:solidFill>
                       <a:srgbClr val="000000"/>
                     </a:solidFill>
@@ -10302,7 +10303,7 @@
               </a:ln>
               <a:extLst>
                 <a:ext uri="{91240B29-F687-4f45-9708-019B960494DF}">
-                  <a14:hiddenLine xmlns:a14="http://schemas.microsoft.com/office/drawing/2010/main" xmlns="" w="9525">
+                  <a14:hiddenLine xmlns="" xmlns:a14="http://schemas.microsoft.com/office/drawing/2010/main" w="9525">
                     <a:solidFill>
                       <a:srgbClr val="000000"/>
                     </a:solidFill>
@@ -10412,7 +10413,7 @@
               </a:ln>
               <a:extLst>
                 <a:ext uri="{91240B29-F687-4f45-9708-019B960494DF}">
-                  <a14:hiddenLine xmlns:a14="http://schemas.microsoft.com/office/drawing/2010/main" xmlns="" w="9525">
+                  <a14:hiddenLine xmlns="" xmlns:a14="http://schemas.microsoft.com/office/drawing/2010/main" w="9525">
                     <a:solidFill>
                       <a:srgbClr val="000000"/>
                     </a:solidFill>
@@ -10496,7 +10497,7 @@
               </a:ln>
               <a:extLst>
                 <a:ext uri="{91240B29-F687-4f45-9708-019B960494DF}">
-                  <a14:hiddenLine xmlns:a14="http://schemas.microsoft.com/office/drawing/2010/main" xmlns="" w="9525">
+                  <a14:hiddenLine xmlns="" xmlns:a14="http://schemas.microsoft.com/office/drawing/2010/main" w="9525">
                     <a:solidFill>
                       <a:srgbClr val="000000"/>
                     </a:solidFill>
@@ -10558,7 +10559,7 @@
               </a:ln>
               <a:extLst>
                 <a:ext uri="{91240B29-F687-4f45-9708-019B960494DF}">
-                  <a14:hiddenLine xmlns:a14="http://schemas.microsoft.com/office/drawing/2010/main" xmlns="" w="9525">
+                  <a14:hiddenLine xmlns="" xmlns:a14="http://schemas.microsoft.com/office/drawing/2010/main" w="9525">
                     <a:solidFill>
                       <a:srgbClr val="000000"/>
                     </a:solidFill>
@@ -10620,7 +10621,7 @@
               </a:ln>
               <a:extLst>
                 <a:ext uri="{91240B29-F687-4f45-9708-019B960494DF}">
-                  <a14:hiddenLine xmlns:a14="http://schemas.microsoft.com/office/drawing/2010/main" xmlns="" w="9525">
+                  <a14:hiddenLine xmlns="" xmlns:a14="http://schemas.microsoft.com/office/drawing/2010/main" w="9525">
                     <a:solidFill>
                       <a:srgbClr val="000000"/>
                     </a:solidFill>
@@ -10710,7 +10711,7 @@
               </a:ln>
               <a:extLst>
                 <a:ext uri="{91240B29-F687-4f45-9708-019B960494DF}">
-                  <a14:hiddenLine xmlns:a14="http://schemas.microsoft.com/office/drawing/2010/main" xmlns="" w="9525">
+                  <a14:hiddenLine xmlns="" xmlns:a14="http://schemas.microsoft.com/office/drawing/2010/main" w="9525">
                     <a:solidFill>
                       <a:srgbClr val="000000"/>
                     </a:solidFill>
@@ -10744,7 +10745,7 @@
               </a:ln>
               <a:extLst>
                 <a:ext uri="{91240B29-F687-4f45-9708-019B960494DF}">
-                  <a14:hiddenLine xmlns:a14="http://schemas.microsoft.com/office/drawing/2010/main" xmlns="" w="9525">
+                  <a14:hiddenLine xmlns="" xmlns:a14="http://schemas.microsoft.com/office/drawing/2010/main" w="9525">
                     <a:solidFill>
                       <a:srgbClr val="000000"/>
                     </a:solidFill>
@@ -10809,7 +10810,7 @@
               </a:ln>
               <a:extLst>
                 <a:ext uri="{91240B29-F687-4f45-9708-019B960494DF}">
-                  <a14:hiddenLine xmlns:a14="http://schemas.microsoft.com/office/drawing/2010/main" xmlns="" w="9525">
+                  <a14:hiddenLine xmlns="" xmlns:a14="http://schemas.microsoft.com/office/drawing/2010/main" w="9525">
                     <a:solidFill>
                       <a:srgbClr val="000000"/>
                     </a:solidFill>
@@ -10899,7 +10900,7 @@
               </a:ln>
               <a:extLst>
                 <a:ext uri="{91240B29-F687-4f45-9708-019B960494DF}">
-                  <a14:hiddenLine xmlns:a14="http://schemas.microsoft.com/office/drawing/2010/main" xmlns="" w="9525">
+                  <a14:hiddenLine xmlns="" xmlns:a14="http://schemas.microsoft.com/office/drawing/2010/main" w="9525">
                     <a:solidFill>
                       <a:srgbClr val="000000"/>
                     </a:solidFill>
@@ -10961,7 +10962,7 @@
               </a:ln>
               <a:extLst>
                 <a:ext uri="{91240B29-F687-4f45-9708-019B960494DF}">
-                  <a14:hiddenLine xmlns:a14="http://schemas.microsoft.com/office/drawing/2010/main" xmlns="" w="9525">
+                  <a14:hiddenLine xmlns="" xmlns:a14="http://schemas.microsoft.com/office/drawing/2010/main" w="9525">
                     <a:solidFill>
                       <a:srgbClr val="000000"/>
                     </a:solidFill>
@@ -11051,7 +11052,7 @@
               </a:ln>
               <a:extLst>
                 <a:ext uri="{91240B29-F687-4f45-9708-019B960494DF}">
-                  <a14:hiddenLine xmlns:a14="http://schemas.microsoft.com/office/drawing/2010/main" xmlns="" w="9525">
+                  <a14:hiddenLine xmlns="" xmlns:a14="http://schemas.microsoft.com/office/drawing/2010/main" w="9525">
                     <a:solidFill>
                       <a:srgbClr val="000000"/>
                     </a:solidFill>
@@ -11116,7 +11117,7 @@
               </a:ln>
               <a:extLst>
                 <a:ext uri="{91240B29-F687-4f45-9708-019B960494DF}">
-                  <a14:hiddenLine xmlns:a14="http://schemas.microsoft.com/office/drawing/2010/main" xmlns="" w="9525">
+                  <a14:hiddenLine xmlns="" xmlns:a14="http://schemas.microsoft.com/office/drawing/2010/main" w="9525">
                     <a:solidFill>
                       <a:srgbClr val="000000"/>
                     </a:solidFill>
@@ -11178,7 +11179,7 @@
               </a:ln>
               <a:extLst>
                 <a:ext uri="{91240B29-F687-4f45-9708-019B960494DF}">
-                  <a14:hiddenLine xmlns:a14="http://schemas.microsoft.com/office/drawing/2010/main" xmlns="" w="9525">
+                  <a14:hiddenLine xmlns="" xmlns:a14="http://schemas.microsoft.com/office/drawing/2010/main" w="9525">
                     <a:solidFill>
                       <a:srgbClr val="000000"/>
                     </a:solidFill>
@@ -11268,7 +11269,7 @@
               </a:ln>
               <a:extLst>
                 <a:ext uri="{91240B29-F687-4f45-9708-019B960494DF}">
-                  <a14:hiddenLine xmlns:a14="http://schemas.microsoft.com/office/drawing/2010/main" xmlns="" w="9525">
+                  <a14:hiddenLine xmlns="" xmlns:a14="http://schemas.microsoft.com/office/drawing/2010/main" w="9525">
                     <a:solidFill>
                       <a:srgbClr val="000000"/>
                     </a:solidFill>
@@ -11358,7 +11359,7 @@
               </a:ln>
               <a:extLst>
                 <a:ext uri="{91240B29-F687-4f45-9708-019B960494DF}">
-                  <a14:hiddenLine xmlns:a14="http://schemas.microsoft.com/office/drawing/2010/main" xmlns="" w="9525">
+                  <a14:hiddenLine xmlns="" xmlns:a14="http://schemas.microsoft.com/office/drawing/2010/main" w="9525">
                     <a:solidFill>
                       <a:srgbClr val="000000"/>
                     </a:solidFill>
@@ -11423,7 +11424,7 @@
               </a:ln>
               <a:extLst>
                 <a:ext uri="{91240B29-F687-4f45-9708-019B960494DF}">
-                  <a14:hiddenLine xmlns:a14="http://schemas.microsoft.com/office/drawing/2010/main" xmlns="" w="9525">
+                  <a14:hiddenLine xmlns="" xmlns:a14="http://schemas.microsoft.com/office/drawing/2010/main" w="9525">
                     <a:solidFill>
                       <a:srgbClr val="000000"/>
                     </a:solidFill>
@@ -11543,7 +11544,7 @@
               </a:ln>
               <a:extLst>
                 <a:ext uri="{91240B29-F687-4f45-9708-019B960494DF}">
-                  <a14:hiddenLine xmlns:a14="http://schemas.microsoft.com/office/drawing/2010/main" xmlns="" w="9525">
+                  <a14:hiddenLine xmlns="" xmlns:a14="http://schemas.microsoft.com/office/drawing/2010/main" w="9525">
                     <a:solidFill>
                       <a:srgbClr val="000000"/>
                     </a:solidFill>
@@ -11624,7 +11625,7 @@
               </a:ln>
               <a:extLst>
                 <a:ext uri="{91240B29-F687-4f45-9708-019B960494DF}">
-                  <a14:hiddenLine xmlns:a14="http://schemas.microsoft.com/office/drawing/2010/main" xmlns="" w="9525">
+                  <a14:hiddenLine xmlns="" xmlns:a14="http://schemas.microsoft.com/office/drawing/2010/main" w="9525">
                     <a:solidFill>
                       <a:srgbClr val="000000"/>
                     </a:solidFill>
@@ -11739,7 +11740,7 @@
               </a:ln>
               <a:extLst>
                 <a:ext uri="{91240B29-F687-4f45-9708-019B960494DF}">
-                  <a14:hiddenLine xmlns:a14="http://schemas.microsoft.com/office/drawing/2010/main" xmlns="" w="9525">
+                  <a14:hiddenLine xmlns="" xmlns:a14="http://schemas.microsoft.com/office/drawing/2010/main" w="9525">
                     <a:solidFill>
                       <a:srgbClr val="000000"/>
                     </a:solidFill>
@@ -11829,7 +11830,7 @@
               </a:ln>
               <a:extLst>
                 <a:ext uri="{91240B29-F687-4f45-9708-019B960494DF}">
-                  <a14:hiddenLine xmlns:a14="http://schemas.microsoft.com/office/drawing/2010/main" xmlns="" w="9525">
+                  <a14:hiddenLine xmlns="" xmlns:a14="http://schemas.microsoft.com/office/drawing/2010/main" w="9525">
                     <a:solidFill>
                       <a:srgbClr val="000000"/>
                     </a:solidFill>
@@ -11894,7 +11895,7 @@
               </a:ln>
               <a:extLst>
                 <a:ext uri="{91240B29-F687-4f45-9708-019B960494DF}">
-                  <a14:hiddenLine xmlns:a14="http://schemas.microsoft.com/office/drawing/2010/main" xmlns="" w="9525">
+                  <a14:hiddenLine xmlns="" xmlns:a14="http://schemas.microsoft.com/office/drawing/2010/main" w="9525">
                     <a:solidFill>
                       <a:srgbClr val="000000"/>
                     </a:solidFill>
@@ -11984,7 +11985,7 @@
               </a:ln>
               <a:extLst>
                 <a:ext uri="{91240B29-F687-4f45-9708-019B960494DF}">
-                  <a14:hiddenLine xmlns:a14="http://schemas.microsoft.com/office/drawing/2010/main" xmlns="" w="9525">
+                  <a14:hiddenLine xmlns="" xmlns:a14="http://schemas.microsoft.com/office/drawing/2010/main" w="9525">
                     <a:solidFill>
                       <a:srgbClr val="000000"/>
                     </a:solidFill>
@@ -12052,7 +12053,7 @@
               </a:ln>
               <a:extLst>
                 <a:ext uri="{91240B29-F687-4f45-9708-019B960494DF}">
-                  <a14:hiddenLine xmlns:a14="http://schemas.microsoft.com/office/drawing/2010/main" xmlns="" w="9525">
+                  <a14:hiddenLine xmlns="" xmlns:a14="http://schemas.microsoft.com/office/drawing/2010/main" w="9525">
                     <a:solidFill>
                       <a:srgbClr val="000000"/>
                     </a:solidFill>
@@ -12142,7 +12143,7 @@
               </a:ln>
               <a:extLst>
                 <a:ext uri="{91240B29-F687-4f45-9708-019B960494DF}">
-                  <a14:hiddenLine xmlns:a14="http://schemas.microsoft.com/office/drawing/2010/main" xmlns="" w="9525">
+                  <a14:hiddenLine xmlns="" xmlns:a14="http://schemas.microsoft.com/office/drawing/2010/main" w="9525">
                     <a:solidFill>
                       <a:srgbClr val="000000"/>
                     </a:solidFill>
@@ -12210,7 +12211,7 @@
               </a:ln>
               <a:extLst>
                 <a:ext uri="{91240B29-F687-4f45-9708-019B960494DF}">
-                  <a14:hiddenLine xmlns:a14="http://schemas.microsoft.com/office/drawing/2010/main" xmlns="" w="9525">
+                  <a14:hiddenLine xmlns="" xmlns:a14="http://schemas.microsoft.com/office/drawing/2010/main" w="9525">
                     <a:solidFill>
                       <a:srgbClr val="000000"/>
                     </a:solidFill>
@@ -12300,7 +12301,7 @@
               </a:ln>
               <a:extLst>
                 <a:ext uri="{91240B29-F687-4f45-9708-019B960494DF}">
-                  <a14:hiddenLine xmlns:a14="http://schemas.microsoft.com/office/drawing/2010/main" xmlns="" w="9525">
+                  <a14:hiddenLine xmlns="" xmlns:a14="http://schemas.microsoft.com/office/drawing/2010/main" w="9525">
                     <a:solidFill>
                       <a:srgbClr val="000000"/>
                     </a:solidFill>
@@ -12334,7 +12335,7 @@
               </a:ln>
               <a:extLst>
                 <a:ext uri="{91240B29-F687-4f45-9708-019B960494DF}">
-                  <a14:hiddenLine xmlns:a14="http://schemas.microsoft.com/office/drawing/2010/main" xmlns="" w="9525">
+                  <a14:hiddenLine xmlns="" xmlns:a14="http://schemas.microsoft.com/office/drawing/2010/main" w="9525">
                     <a:solidFill>
                       <a:srgbClr val="000000"/>
                     </a:solidFill>
@@ -12474,7 +12475,7 @@
           <a:p>
             <a:fld id="{92FF8978-FE14-CC4A-93A6-934EB06543C0}" type="datetime1">
               <a:rPr lang="en-US" smtClean="0"/>
-              <a:t>7/28/26</a:t>
+              <a:t>7/29/26</a:t>
             </a:fld>
             <a:endParaRPr lang="en-US"/>
           </a:p>
@@ -13448,6 +13449,237 @@
 </file>
 
 <file path=ppt/slides/slide12.xml><?xml version="1.0" encoding="utf-8"?>
+<p:sld xmlns:a="http://schemas.openxmlformats.org/drawingml/2006/main" xmlns:r="http://schemas.openxmlformats.org/officeDocument/2006/relationships" xmlns:p="http://schemas.openxmlformats.org/presentationml/2006/main">
+  <p:cSld>
+    <p:spTree>
+      <p:nvGrpSpPr>
+        <p:cNvPr id="1" name="">
+          <a:extLst>
+            <a:ext uri="{FF2B5EF4-FFF2-40B4-BE49-F238E27FC236}">
+              <a16:creationId xmlns:a16="http://schemas.microsoft.com/office/drawing/2014/main" id="{91035108-5DE0-F56C-A093-6B9881249508}"/>
+            </a:ext>
+          </a:extLst>
+        </p:cNvPr>
+        <p:cNvGrpSpPr/>
+        <p:nvPr/>
+      </p:nvGrpSpPr>
+      <p:grpSpPr>
+        <a:xfrm>
+          <a:off x="0" y="0"/>
+          <a:ext cx="0" cy="0"/>
+          <a:chOff x="0" y="0"/>
+          <a:chExt cx="0" cy="0"/>
+        </a:xfrm>
+      </p:grpSpPr>
+      <p:sp>
+        <p:nvSpPr>
+          <p:cNvPr id="6146" name="Rectangle 2">
+            <a:extLst>
+              <a:ext uri="{FF2B5EF4-FFF2-40B4-BE49-F238E27FC236}">
+                <a16:creationId xmlns:a16="http://schemas.microsoft.com/office/drawing/2014/main" id="{BF0084C3-7F85-DE07-9B8B-D0EB83CD2713}"/>
+              </a:ext>
+            </a:extLst>
+          </p:cNvPr>
+          <p:cNvSpPr>
+            <a:spLocks noGrp="1" noChangeArrowheads="1"/>
+          </p:cNvSpPr>
+          <p:nvPr>
+            <p:ph type="title"/>
+            <p:custDataLst>
+              <p:tags r:id="rId1"/>
+            </p:custDataLst>
+          </p:nvPr>
+        </p:nvSpPr>
+        <p:spPr>
+          <a:xfrm>
+            <a:off x="1141413" y="284084"/>
+            <a:ext cx="9905998" cy="620791"/>
+          </a:xfrm>
+        </p:spPr>
+        <p:txBody>
+          <a:bodyPr/>
+          <a:lstStyle/>
+          <a:p>
+            <a:pPr algn="ctr"/>
+            <a:r>
+              <a:rPr lang="en-US" dirty="0"/>
+              <a:t>Week 3: Wednesday</a:t>
+            </a:r>
+          </a:p>
+        </p:txBody>
+      </p:sp>
+      <p:sp>
+        <p:nvSpPr>
+          <p:cNvPr id="6147" name="Rectangle 3">
+            <a:extLst>
+              <a:ext uri="{FF2B5EF4-FFF2-40B4-BE49-F238E27FC236}">
+                <a16:creationId xmlns:a16="http://schemas.microsoft.com/office/drawing/2014/main" id="{D0298A0A-9001-9A51-0658-572427FE3EF4}"/>
+              </a:ext>
+            </a:extLst>
+          </p:cNvPr>
+          <p:cNvSpPr>
+            <a:spLocks noGrp="1" noChangeArrowheads="1"/>
+          </p:cNvSpPr>
+          <p:nvPr>
+            <p:ph idx="1"/>
+            <p:custDataLst>
+              <p:tags r:id="rId2"/>
+            </p:custDataLst>
+          </p:nvPr>
+        </p:nvSpPr>
+        <p:spPr>
+          <a:xfrm>
+            <a:off x="1294151" y="1098548"/>
+            <a:ext cx="9600522" cy="5475367"/>
+          </a:xfrm>
+        </p:spPr>
+        <p:txBody>
+          <a:bodyPr>
+            <a:normAutofit fontScale="92500" lnSpcReduction="10000"/>
+          </a:bodyPr>
+          <a:lstStyle/>
+          <a:p>
+            <a:r>
+              <a:rPr lang="en-US" dirty="0">
+                <a:latin typeface="Arial" panose="020B0604020202020204" pitchFamily="34" charset="0"/>
+                <a:cs typeface="Arial" panose="020B0604020202020204" pitchFamily="34" charset="0"/>
+              </a:rPr>
+              <a:t>Week 3 going strong!! More than halfway done with the course</a:t>
+            </a:r>
+          </a:p>
+          <a:p>
+            <a:r>
+              <a:rPr lang="en-US" dirty="0">
+                <a:latin typeface="Arial" panose="020B0604020202020204" pitchFamily="34" charset="0"/>
+                <a:cs typeface="Arial" panose="020B0604020202020204" pitchFamily="34" charset="0"/>
+              </a:rPr>
+              <a:t>This week:</a:t>
+            </a:r>
+          </a:p>
+          <a:p>
+            <a:pPr lvl="1"/>
+            <a:r>
+              <a:rPr lang="en-US" dirty="0">
+                <a:latin typeface="Arial" panose="020B0604020202020204" pitchFamily="34" charset="0"/>
+                <a:cs typeface="Arial" panose="020B0604020202020204" pitchFamily="34" charset="0"/>
+              </a:rPr>
+              <a:t>Module 2 (CFGs) Written Assignment Due </a:t>
+            </a:r>
+            <a:r>
+              <a:rPr lang="en-US" b="1" i="1" dirty="0">
+                <a:latin typeface="Arial" panose="020B0604020202020204" pitchFamily="34" charset="0"/>
+                <a:cs typeface="Arial" panose="020B0604020202020204" pitchFamily="34" charset="0"/>
+              </a:rPr>
+              <a:t>Yesterday</a:t>
+            </a:r>
+          </a:p>
+          <a:p>
+            <a:pPr lvl="1"/>
+            <a:r>
+              <a:rPr lang="en-US" dirty="0">
+                <a:latin typeface="Arial" panose="020B0604020202020204" pitchFamily="34" charset="0"/>
+                <a:cs typeface="Arial" panose="020B0604020202020204" pitchFamily="34" charset="0"/>
+              </a:rPr>
+              <a:t>Second Midterm on Friday (Same procedure as last Friday)</a:t>
+            </a:r>
+          </a:p>
+          <a:p>
+            <a:r>
+              <a:rPr lang="en-US" dirty="0">
+                <a:latin typeface="Arial" panose="020B0604020202020204" pitchFamily="34" charset="0"/>
+                <a:cs typeface="Arial" panose="020B0604020202020204" pitchFamily="34" charset="0"/>
+              </a:rPr>
+              <a:t>Exams are graded. Swing by OH if you want/need to discuss.</a:t>
+            </a:r>
+          </a:p>
+          <a:p>
+            <a:pPr lvl="1"/>
+            <a:r>
+              <a:rPr lang="en-US" dirty="0">
+                <a:latin typeface="Arial" panose="020B0604020202020204" pitchFamily="34" charset="0"/>
+                <a:cs typeface="Arial" panose="020B0604020202020204" pitchFamily="34" charset="0"/>
+              </a:rPr>
+              <a:t>Average was 17.49/29 (60.3%). Std. Deviation was 5.35/29 (18.4%).</a:t>
+            </a:r>
+          </a:p>
+          <a:p>
+            <a:r>
+              <a:rPr lang="en-US" dirty="0">
+                <a:latin typeface="Arial" panose="020B0604020202020204" pitchFamily="34" charset="0"/>
+                <a:cs typeface="Arial" panose="020B0604020202020204" pitchFamily="34" charset="0"/>
+              </a:rPr>
+              <a:t>Lecture recordings from last Fall are posted on Panopto on Canvas</a:t>
+            </a:r>
+          </a:p>
+          <a:p>
+            <a:pPr lvl="1"/>
+            <a:r>
+              <a:rPr lang="en-US" dirty="0">
+                <a:latin typeface="Arial" panose="020B0604020202020204" pitchFamily="34" charset="0"/>
+                <a:cs typeface="Arial" panose="020B0604020202020204" pitchFamily="34" charset="0"/>
+              </a:rPr>
+              <a:t>I posted ALL the videos FYI</a:t>
+            </a:r>
+          </a:p>
+          <a:p>
+            <a:r>
+              <a:rPr lang="en-US" dirty="0">
+                <a:latin typeface="Arial" panose="020B0604020202020204" pitchFamily="34" charset="0"/>
+                <a:cs typeface="Arial" panose="020B0604020202020204" pitchFamily="34" charset="0"/>
+              </a:rPr>
+              <a:t>Please remember that I am asking for NO laptop / phones!</a:t>
+            </a:r>
+          </a:p>
+          <a:p>
+            <a:pPr lvl="1"/>
+            <a:r>
+              <a:rPr lang="en-US" dirty="0">
+                <a:latin typeface="Arial" panose="020B0604020202020204" pitchFamily="34" charset="0"/>
+                <a:cs typeface="Arial" panose="020B0604020202020204" pitchFamily="34" charset="0"/>
+              </a:rPr>
+              <a:t>This makes the learning environment better for everybody. I appreciate it!</a:t>
+            </a:r>
+          </a:p>
+          <a:p>
+            <a:r>
+              <a:rPr lang="en-US" dirty="0">
+                <a:latin typeface="Arial" panose="020B0604020202020204" pitchFamily="34" charset="0"/>
+                <a:cs typeface="Arial" panose="020B0604020202020204" pitchFamily="34" charset="0"/>
+              </a:rPr>
+              <a:t>Attendance continues today as usual.</a:t>
+            </a:r>
+          </a:p>
+          <a:p>
+            <a:r>
+              <a:rPr lang="en-US" dirty="0">
+                <a:latin typeface="Arial" panose="020B0604020202020204" pitchFamily="34" charset="0"/>
+                <a:cs typeface="Arial" panose="020B0604020202020204" pitchFamily="34" charset="0"/>
+              </a:rPr>
+              <a:t>Today we continue (and likely finish) Module 3</a:t>
+            </a:r>
+          </a:p>
+          <a:p>
+            <a:endParaRPr lang="en-US" dirty="0">
+              <a:latin typeface="Arial" panose="020B0604020202020204" pitchFamily="34" charset="0"/>
+              <a:cs typeface="Arial" panose="020B0604020202020204" pitchFamily="34" charset="0"/>
+            </a:endParaRPr>
+          </a:p>
+        </p:txBody>
+      </p:sp>
+    </p:spTree>
+    <p:extLst>
+      <p:ext uri="{BB962C8B-B14F-4D97-AF65-F5344CB8AC3E}">
+        <p14:creationId xmlns:p14="http://schemas.microsoft.com/office/powerpoint/2010/main" val="4000616010"/>
+      </p:ext>
+    </p:extLst>
+  </p:cSld>
+  <p:clrMapOvr>
+    <a:masterClrMapping/>
+  </p:clrMapOvr>
+</p:sld>
+</file>
+
+<file path=ppt/slides/slide13.xml><?xml version="1.0" encoding="utf-8"?>
 <p:sld xmlns:a="http://schemas.openxmlformats.org/drawingml/2006/main" xmlns:r="http://schemas.openxmlformats.org/officeDocument/2006/relationships" xmlns:p="http://schemas.openxmlformats.org/presentationml/2006/main">
   <p:cSld>
     <p:spTree>
@@ -17162,6 +17394,18 @@
 </p:tagLst>
 </file>
 
+<file path=ppt/tags/tag26.xml><?xml version="1.0" encoding="utf-8"?>
+<p:tagLst xmlns:a="http://schemas.openxmlformats.org/drawingml/2006/main" xmlns:r="http://schemas.openxmlformats.org/officeDocument/2006/relationships" xmlns:p="http://schemas.openxmlformats.org/presentationml/2006/main">
+  <p:tag name="_INSTRUCTOR VIEW19C14C36-AC8E-43BC-9DB6-C2AAF774C7DC|PANE__TAG" val="_"/>
+</p:tagLst>
+</file>
+
+<file path=ppt/tags/tag27.xml><?xml version="1.0" encoding="utf-8"?>
+<p:tagLst xmlns:a="http://schemas.openxmlformats.org/drawingml/2006/main" xmlns:r="http://schemas.openxmlformats.org/officeDocument/2006/relationships" xmlns:p="http://schemas.openxmlformats.org/presentationml/2006/main">
+  <p:tag name="_INSTRUCTOR VIEW19C14C36-AC8E-43BC-9DB6-C2AAF774C7DC|PANE__TAG" val="_"/>
+</p:tagLst>
+</file>
+
 <file path=ppt/tags/tag3.xml><?xml version="1.0" encoding="utf-8"?>
 <p:tagLst xmlns:a="http://schemas.openxmlformats.org/drawingml/2006/main" xmlns:r="http://schemas.openxmlformats.org/officeDocument/2006/relationships" xmlns:p="http://schemas.openxmlformats.org/presentationml/2006/main">
   <p:tag name="_INSTRUCTOR VIEW19C14C36-AC8E-43BC-9DB6-C2AAF774C7DC|PANE__TAG" val="_"/>

--- a/slides/00-DailyAnnouncements.pptx
+++ b/slides/00-DailyAnnouncements.pptx
@@ -5,7 +5,7 @@
     <p:sldMasterId id="2147484006" r:id="rId1"/>
   </p:sldMasterIdLst>
   <p:notesMasterIdLst>
-    <p:notesMasterId r:id="rId15"/>
+    <p:notesMasterId r:id="rId16"/>
   </p:notesMasterIdLst>
   <p:sldIdLst>
     <p:sldId id="256" r:id="rId2"/>
@@ -20,7 +20,8 @@
     <p:sldId id="523" r:id="rId11"/>
     <p:sldId id="524" r:id="rId12"/>
     <p:sldId id="525" r:id="rId13"/>
-    <p:sldId id="515" r:id="rId14"/>
+    <p:sldId id="526" r:id="rId14"/>
+    <p:sldId id="515" r:id="rId15"/>
   </p:sldIdLst>
   <p:sldSz cx="12192000" cy="6858000"/>
   <p:notesSz cx="6858000" cy="9144000"/>
@@ -209,7 +210,7 @@
           <a:p>
             <a:fld id="{C5B45307-6ED4-B142-BD64-10F739779302}" type="datetimeFigureOut">
               <a:rPr lang="en-US" smtClean="0"/>
-              <a:t>7/29/26</a:t>
+              <a:t>7/30/26</a:t>
             </a:fld>
             <a:endParaRPr lang="en-US"/>
           </a:p>
@@ -617,7 +618,7 @@
           <a:noFill/>
           <a:extLst>
             <a:ext uri="{909E8E84-426E-40dd-AFC4-6F175D3DCCD1}">
-              <a14:hiddenFill xmlns="" xmlns:a14="http://schemas.microsoft.com/office/drawing/2010/main">
+              <a14:hiddenFill xmlns:a14="http://schemas.microsoft.com/office/drawing/2010/main" xmlns="">
                 <a:solidFill>
                   <a:srgbClr val="FFFFFF"/>
                 </a:solidFill>
@@ -676,7 +677,7 @@
             </a:ln>
             <a:extLst>
               <a:ext uri="{91240B29-F687-4f45-9708-019B960494DF}">
-                <a14:hiddenLine xmlns="" xmlns:a14="http://schemas.microsoft.com/office/drawing/2010/main" w="9525">
+                <a14:hiddenLine xmlns:a14="http://schemas.microsoft.com/office/drawing/2010/main" xmlns="" w="9525">
                   <a:solidFill>
                     <a:srgbClr val="000000"/>
                   </a:solidFill>
@@ -766,7 +767,7 @@
             </a:ln>
             <a:extLst>
               <a:ext uri="{91240B29-F687-4f45-9708-019B960494DF}">
-                <a14:hiddenLine xmlns="" xmlns:a14="http://schemas.microsoft.com/office/drawing/2010/main" w="9525">
+                <a14:hiddenLine xmlns:a14="http://schemas.microsoft.com/office/drawing/2010/main" xmlns="" w="9525">
                   <a:solidFill>
                     <a:srgbClr val="000000"/>
                   </a:solidFill>
@@ -856,7 +857,7 @@
             </a:ln>
             <a:extLst>
               <a:ext uri="{91240B29-F687-4f45-9708-019B960494DF}">
-                <a14:hiddenLine xmlns="" xmlns:a14="http://schemas.microsoft.com/office/drawing/2010/main" w="9525">
+                <a14:hiddenLine xmlns:a14="http://schemas.microsoft.com/office/drawing/2010/main" xmlns="" w="9525">
                   <a:solidFill>
                     <a:srgbClr val="000000"/>
                   </a:solidFill>
@@ -890,7 +891,7 @@
             </a:ln>
             <a:extLst>
               <a:ext uri="{91240B29-F687-4f45-9708-019B960494DF}">
-                <a14:hiddenLine xmlns="" xmlns:a14="http://schemas.microsoft.com/office/drawing/2010/main" w="9525">
+                <a14:hiddenLine xmlns:a14="http://schemas.microsoft.com/office/drawing/2010/main" xmlns="" w="9525">
                   <a:solidFill>
                     <a:srgbClr val="000000"/>
                   </a:solidFill>
@@ -980,7 +981,7 @@
             </a:ln>
             <a:extLst>
               <a:ext uri="{91240B29-F687-4f45-9708-019B960494DF}">
-                <a14:hiddenLine xmlns="" xmlns:a14="http://schemas.microsoft.com/office/drawing/2010/main" w="9525">
+                <a14:hiddenLine xmlns:a14="http://schemas.microsoft.com/office/drawing/2010/main" xmlns="" w="9525">
                   <a:solidFill>
                     <a:srgbClr val="000000"/>
                   </a:solidFill>
@@ -1042,7 +1043,7 @@
             </a:ln>
             <a:extLst>
               <a:ext uri="{91240B29-F687-4f45-9708-019B960494DF}">
-                <a14:hiddenLine xmlns="" xmlns:a14="http://schemas.microsoft.com/office/drawing/2010/main" w="9525">
+                <a14:hiddenLine xmlns:a14="http://schemas.microsoft.com/office/drawing/2010/main" xmlns="" w="9525">
                   <a:solidFill>
                     <a:srgbClr val="000000"/>
                   </a:solidFill>
@@ -1104,7 +1105,7 @@
             </a:ln>
             <a:extLst>
               <a:ext uri="{91240B29-F687-4f45-9708-019B960494DF}">
-                <a14:hiddenLine xmlns="" xmlns:a14="http://schemas.microsoft.com/office/drawing/2010/main" w="9525">
+                <a14:hiddenLine xmlns:a14="http://schemas.microsoft.com/office/drawing/2010/main" xmlns="" w="9525">
                   <a:solidFill>
                     <a:srgbClr val="000000"/>
                   </a:solidFill>
@@ -1194,7 +1195,7 @@
             </a:ln>
             <a:extLst>
               <a:ext uri="{91240B29-F687-4f45-9708-019B960494DF}">
-                <a14:hiddenLine xmlns="" xmlns:a14="http://schemas.microsoft.com/office/drawing/2010/main" w="9525">
+                <a14:hiddenLine xmlns:a14="http://schemas.microsoft.com/office/drawing/2010/main" xmlns="" w="9525">
                   <a:solidFill>
                     <a:srgbClr val="000000"/>
                   </a:solidFill>
@@ -1256,7 +1257,7 @@
             </a:ln>
             <a:extLst>
               <a:ext uri="{91240B29-F687-4f45-9708-019B960494DF}">
-                <a14:hiddenLine xmlns="" xmlns:a14="http://schemas.microsoft.com/office/drawing/2010/main" w="9525">
+                <a14:hiddenLine xmlns:a14="http://schemas.microsoft.com/office/drawing/2010/main" xmlns="" w="9525">
                   <a:solidFill>
                     <a:srgbClr val="000000"/>
                   </a:solidFill>
@@ -1318,7 +1319,7 @@
             </a:ln>
             <a:extLst>
               <a:ext uri="{91240B29-F687-4f45-9708-019B960494DF}">
-                <a14:hiddenLine xmlns="" xmlns:a14="http://schemas.microsoft.com/office/drawing/2010/main" w="9525">
+                <a14:hiddenLine xmlns:a14="http://schemas.microsoft.com/office/drawing/2010/main" xmlns="" w="9525">
                   <a:solidFill>
                     <a:srgbClr val="000000"/>
                   </a:solidFill>
@@ -1408,7 +1409,7 @@
             </a:ln>
             <a:extLst>
               <a:ext uri="{91240B29-F687-4f45-9708-019B960494DF}">
-                <a14:hiddenLine xmlns="" xmlns:a14="http://schemas.microsoft.com/office/drawing/2010/main" w="9525">
+                <a14:hiddenLine xmlns:a14="http://schemas.microsoft.com/office/drawing/2010/main" xmlns="" w="9525">
                   <a:solidFill>
                     <a:srgbClr val="000000"/>
                   </a:solidFill>
@@ -1498,7 +1499,7 @@
             </a:ln>
             <a:extLst>
               <a:ext uri="{91240B29-F687-4f45-9708-019B960494DF}">
-                <a14:hiddenLine xmlns="" xmlns:a14="http://schemas.microsoft.com/office/drawing/2010/main" w="9525">
+                <a14:hiddenLine xmlns:a14="http://schemas.microsoft.com/office/drawing/2010/main" xmlns="" w="9525">
                   <a:solidFill>
                     <a:srgbClr val="000000"/>
                   </a:solidFill>
@@ -1560,7 +1561,7 @@
             </a:ln>
             <a:extLst>
               <a:ext uri="{91240B29-F687-4f45-9708-019B960494DF}">
-                <a14:hiddenLine xmlns="" xmlns:a14="http://schemas.microsoft.com/office/drawing/2010/main" w="9525">
+                <a14:hiddenLine xmlns:a14="http://schemas.microsoft.com/office/drawing/2010/main" xmlns="" w="9525">
                   <a:solidFill>
                     <a:srgbClr val="000000"/>
                   </a:solidFill>
@@ -1670,7 +1671,7 @@
             </a:ln>
             <a:extLst>
               <a:ext uri="{91240B29-F687-4f45-9708-019B960494DF}">
-                <a14:hiddenLine xmlns="" xmlns:a14="http://schemas.microsoft.com/office/drawing/2010/main" w="9525">
+                <a14:hiddenLine xmlns:a14="http://schemas.microsoft.com/office/drawing/2010/main" xmlns="" w="9525">
                   <a:solidFill>
                     <a:srgbClr val="000000"/>
                   </a:solidFill>
@@ -1732,7 +1733,7 @@
             </a:ln>
             <a:extLst>
               <a:ext uri="{91240B29-F687-4f45-9708-019B960494DF}">
-                <a14:hiddenLine xmlns="" xmlns:a14="http://schemas.microsoft.com/office/drawing/2010/main" w="9525">
+                <a14:hiddenLine xmlns:a14="http://schemas.microsoft.com/office/drawing/2010/main" xmlns="" w="9525">
                   <a:solidFill>
                     <a:srgbClr val="000000"/>
                   </a:solidFill>
@@ -1822,7 +1823,7 @@
             </a:ln>
             <a:extLst>
               <a:ext uri="{91240B29-F687-4f45-9708-019B960494DF}">
-                <a14:hiddenLine xmlns="" xmlns:a14="http://schemas.microsoft.com/office/drawing/2010/main" w="9525">
+                <a14:hiddenLine xmlns:a14="http://schemas.microsoft.com/office/drawing/2010/main" xmlns="" w="9525">
                   <a:solidFill>
                     <a:srgbClr val="000000"/>
                   </a:solidFill>
@@ -1912,7 +1913,7 @@
             </a:ln>
             <a:extLst>
               <a:ext uri="{91240B29-F687-4f45-9708-019B960494DF}">
-                <a14:hiddenLine xmlns="" xmlns:a14="http://schemas.microsoft.com/office/drawing/2010/main" w="9525">
+                <a14:hiddenLine xmlns:a14="http://schemas.microsoft.com/office/drawing/2010/main" xmlns="" w="9525">
                   <a:solidFill>
                     <a:srgbClr val="000000"/>
                   </a:solidFill>
@@ -1974,7 +1975,7 @@
             </a:ln>
             <a:extLst>
               <a:ext uri="{91240B29-F687-4f45-9708-019B960494DF}">
-                <a14:hiddenLine xmlns="" xmlns:a14="http://schemas.microsoft.com/office/drawing/2010/main" w="9525">
+                <a14:hiddenLine xmlns:a14="http://schemas.microsoft.com/office/drawing/2010/main" xmlns="" w="9525">
                   <a:solidFill>
                     <a:srgbClr val="000000"/>
                   </a:solidFill>
@@ -2064,7 +2065,7 @@
             </a:ln>
             <a:extLst>
               <a:ext uri="{91240B29-F687-4f45-9708-019B960494DF}">
-                <a14:hiddenLine xmlns="" xmlns:a14="http://schemas.microsoft.com/office/drawing/2010/main" w="9525">
+                <a14:hiddenLine xmlns:a14="http://schemas.microsoft.com/office/drawing/2010/main" xmlns="" w="9525">
                   <a:solidFill>
                     <a:srgbClr val="000000"/>
                   </a:solidFill>
@@ -2154,7 +2155,7 @@
             </a:ln>
             <a:extLst>
               <a:ext uri="{91240B29-F687-4f45-9708-019B960494DF}">
-                <a14:hiddenLine xmlns="" xmlns:a14="http://schemas.microsoft.com/office/drawing/2010/main" w="9525">
+                <a14:hiddenLine xmlns:a14="http://schemas.microsoft.com/office/drawing/2010/main" xmlns="" w="9525">
                   <a:solidFill>
                     <a:srgbClr val="000000"/>
                   </a:solidFill>
@@ -2210,7 +2211,7 @@
             </a:ln>
             <a:extLst>
               <a:ext uri="{91240B29-F687-4f45-9708-019B960494DF}">
-                <a14:hiddenLine xmlns="" xmlns:a14="http://schemas.microsoft.com/office/drawing/2010/main" w="9525">
+                <a14:hiddenLine xmlns:a14="http://schemas.microsoft.com/office/drawing/2010/main" xmlns="" w="9525">
                   <a:solidFill>
                     <a:srgbClr val="000000"/>
                   </a:solidFill>
@@ -2300,7 +2301,7 @@
             </a:ln>
             <a:extLst>
               <a:ext uri="{91240B29-F687-4f45-9708-019B960494DF}">
-                <a14:hiddenLine xmlns="" xmlns:a14="http://schemas.microsoft.com/office/drawing/2010/main" w="9525">
+                <a14:hiddenLine xmlns:a14="http://schemas.microsoft.com/office/drawing/2010/main" xmlns="" w="9525">
                   <a:solidFill>
                     <a:srgbClr val="000000"/>
                   </a:solidFill>
@@ -2356,7 +2357,7 @@
             </a:ln>
             <a:extLst>
               <a:ext uri="{91240B29-F687-4f45-9708-019B960494DF}">
-                <a14:hiddenLine xmlns="" xmlns:a14="http://schemas.microsoft.com/office/drawing/2010/main" w="9525">
+                <a14:hiddenLine xmlns:a14="http://schemas.microsoft.com/office/drawing/2010/main" xmlns="" w="9525">
                   <a:solidFill>
                     <a:srgbClr val="000000"/>
                   </a:solidFill>
@@ -2446,7 +2447,7 @@
             </a:ln>
             <a:extLst>
               <a:ext uri="{91240B29-F687-4f45-9708-019B960494DF}">
-                <a14:hiddenLine xmlns="" xmlns:a14="http://schemas.microsoft.com/office/drawing/2010/main" w="9525">
+                <a14:hiddenLine xmlns:a14="http://schemas.microsoft.com/office/drawing/2010/main" xmlns="" w="9525">
                   <a:solidFill>
                     <a:srgbClr val="000000"/>
                   </a:solidFill>
@@ -2514,7 +2515,7 @@
             </a:ln>
             <a:extLst>
               <a:ext uri="{91240B29-F687-4f45-9708-019B960494DF}">
-                <a14:hiddenLine xmlns="" xmlns:a14="http://schemas.microsoft.com/office/drawing/2010/main" w="9525">
+                <a14:hiddenLine xmlns:a14="http://schemas.microsoft.com/office/drawing/2010/main" xmlns="" w="9525">
                   <a:solidFill>
                     <a:srgbClr val="000000"/>
                   </a:solidFill>
@@ -2604,7 +2605,7 @@
             </a:ln>
             <a:extLst>
               <a:ext uri="{91240B29-F687-4f45-9708-019B960494DF}">
-                <a14:hiddenLine xmlns="" xmlns:a14="http://schemas.microsoft.com/office/drawing/2010/main" w="9525">
+                <a14:hiddenLine xmlns:a14="http://schemas.microsoft.com/office/drawing/2010/main" xmlns="" w="9525">
                   <a:solidFill>
                     <a:srgbClr val="000000"/>
                   </a:solidFill>
@@ -2672,7 +2673,7 @@
             </a:ln>
             <a:extLst>
               <a:ext uri="{91240B29-F687-4f45-9708-019B960494DF}">
-                <a14:hiddenLine xmlns="" xmlns:a14="http://schemas.microsoft.com/office/drawing/2010/main" w="9525">
+                <a14:hiddenLine xmlns:a14="http://schemas.microsoft.com/office/drawing/2010/main" xmlns="" w="9525">
                   <a:solidFill>
                     <a:srgbClr val="000000"/>
                   </a:solidFill>
@@ -2762,7 +2763,7 @@
             </a:ln>
             <a:extLst>
               <a:ext uri="{91240B29-F687-4f45-9708-019B960494DF}">
-                <a14:hiddenLine xmlns="" xmlns:a14="http://schemas.microsoft.com/office/drawing/2010/main" w="9525">
+                <a14:hiddenLine xmlns:a14="http://schemas.microsoft.com/office/drawing/2010/main" xmlns="" w="9525">
                   <a:solidFill>
                     <a:srgbClr val="000000"/>
                   </a:solidFill>
@@ -2796,7 +2797,7 @@
             </a:ln>
             <a:extLst>
               <a:ext uri="{91240B29-F687-4f45-9708-019B960494DF}">
-                <a14:hiddenLine xmlns="" xmlns:a14="http://schemas.microsoft.com/office/drawing/2010/main" w="9525">
+                <a14:hiddenLine xmlns:a14="http://schemas.microsoft.com/office/drawing/2010/main" xmlns="" w="9525">
                   <a:solidFill>
                     <a:srgbClr val="000000"/>
                   </a:solidFill>
@@ -2886,7 +2887,7 @@
             </a:ln>
             <a:extLst>
               <a:ext uri="{91240B29-F687-4f45-9708-019B960494DF}">
-                <a14:hiddenLine xmlns="" xmlns:a14="http://schemas.microsoft.com/office/drawing/2010/main" w="9525">
+                <a14:hiddenLine xmlns:a14="http://schemas.microsoft.com/office/drawing/2010/main" xmlns="" w="9525">
                   <a:solidFill>
                     <a:srgbClr val="000000"/>
                   </a:solidFill>
@@ -2948,7 +2949,7 @@
             </a:ln>
             <a:extLst>
               <a:ext uri="{91240B29-F687-4f45-9708-019B960494DF}">
-                <a14:hiddenLine xmlns="" xmlns:a14="http://schemas.microsoft.com/office/drawing/2010/main" w="9525">
+                <a14:hiddenLine xmlns:a14="http://schemas.microsoft.com/office/drawing/2010/main" xmlns="" w="9525">
                   <a:solidFill>
                     <a:srgbClr val="000000"/>
                   </a:solidFill>
@@ -3010,7 +3011,7 @@
             </a:ln>
             <a:extLst>
               <a:ext uri="{91240B29-F687-4f45-9708-019B960494DF}">
-                <a14:hiddenLine xmlns="" xmlns:a14="http://schemas.microsoft.com/office/drawing/2010/main" w="9525">
+                <a14:hiddenLine xmlns:a14="http://schemas.microsoft.com/office/drawing/2010/main" xmlns="" w="9525">
                   <a:solidFill>
                     <a:srgbClr val="000000"/>
                   </a:solidFill>
@@ -3100,7 +3101,7 @@
             </a:ln>
             <a:extLst>
               <a:ext uri="{91240B29-F687-4f45-9708-019B960494DF}">
-                <a14:hiddenLine xmlns="" xmlns:a14="http://schemas.microsoft.com/office/drawing/2010/main" w="9525">
+                <a14:hiddenLine xmlns:a14="http://schemas.microsoft.com/office/drawing/2010/main" xmlns="" w="9525">
                   <a:solidFill>
                     <a:srgbClr val="000000"/>
                   </a:solidFill>
@@ -3168,7 +3169,7 @@
             </a:ln>
             <a:extLst>
               <a:ext uri="{91240B29-F687-4f45-9708-019B960494DF}">
-                <a14:hiddenLine xmlns="" xmlns:a14="http://schemas.microsoft.com/office/drawing/2010/main" w="9525">
+                <a14:hiddenLine xmlns:a14="http://schemas.microsoft.com/office/drawing/2010/main" xmlns="" w="9525">
                   <a:solidFill>
                     <a:srgbClr val="000000"/>
                   </a:solidFill>
@@ -3230,7 +3231,7 @@
             </a:ln>
             <a:extLst>
               <a:ext uri="{91240B29-F687-4f45-9708-019B960494DF}">
-                <a14:hiddenLine xmlns="" xmlns:a14="http://schemas.microsoft.com/office/drawing/2010/main" w="9525">
+                <a14:hiddenLine xmlns:a14="http://schemas.microsoft.com/office/drawing/2010/main" xmlns="" w="9525">
                   <a:solidFill>
                     <a:srgbClr val="000000"/>
                   </a:solidFill>
@@ -3320,7 +3321,7 @@
             </a:ln>
             <a:extLst>
               <a:ext uri="{91240B29-F687-4f45-9708-019B960494DF}">
-                <a14:hiddenLine xmlns="" xmlns:a14="http://schemas.microsoft.com/office/drawing/2010/main" w="9525">
+                <a14:hiddenLine xmlns:a14="http://schemas.microsoft.com/office/drawing/2010/main" xmlns="" w="9525">
                   <a:solidFill>
                     <a:srgbClr val="000000"/>
                   </a:solidFill>
@@ -3382,7 +3383,7 @@
             </a:ln>
             <a:extLst>
               <a:ext uri="{91240B29-F687-4f45-9708-019B960494DF}">
-                <a14:hiddenLine xmlns="" xmlns:a14="http://schemas.microsoft.com/office/drawing/2010/main" w="9525">
+                <a14:hiddenLine xmlns:a14="http://schemas.microsoft.com/office/drawing/2010/main" xmlns="" w="9525">
                   <a:solidFill>
                     <a:srgbClr val="000000"/>
                   </a:solidFill>
@@ -3472,7 +3473,7 @@
             </a:ln>
             <a:extLst>
               <a:ext uri="{91240B29-F687-4f45-9708-019B960494DF}">
-                <a14:hiddenLine xmlns="" xmlns:a14="http://schemas.microsoft.com/office/drawing/2010/main" w="9525">
+                <a14:hiddenLine xmlns:a14="http://schemas.microsoft.com/office/drawing/2010/main" xmlns="" w="9525">
                   <a:solidFill>
                     <a:srgbClr val="000000"/>
                   </a:solidFill>
@@ -3534,7 +3535,7 @@
             </a:ln>
             <a:extLst>
               <a:ext uri="{91240B29-F687-4f45-9708-019B960494DF}">
-                <a14:hiddenLine xmlns="" xmlns:a14="http://schemas.microsoft.com/office/drawing/2010/main" w="9525">
+                <a14:hiddenLine xmlns:a14="http://schemas.microsoft.com/office/drawing/2010/main" xmlns="" w="9525">
                   <a:solidFill>
                     <a:srgbClr val="000000"/>
                   </a:solidFill>
@@ -3624,7 +3625,7 @@
             </a:ln>
             <a:extLst>
               <a:ext uri="{91240B29-F687-4f45-9708-019B960494DF}">
-                <a14:hiddenLine xmlns="" xmlns:a14="http://schemas.microsoft.com/office/drawing/2010/main" w="9525">
+                <a14:hiddenLine xmlns:a14="http://schemas.microsoft.com/office/drawing/2010/main" xmlns="" w="9525">
                   <a:solidFill>
                     <a:srgbClr val="000000"/>
                   </a:solidFill>
@@ -3658,7 +3659,7 @@
             </a:ln>
             <a:extLst>
               <a:ext uri="{91240B29-F687-4f45-9708-019B960494DF}">
-                <a14:hiddenLine xmlns="" xmlns:a14="http://schemas.microsoft.com/office/drawing/2010/main" w="9525">
+                <a14:hiddenLine xmlns:a14="http://schemas.microsoft.com/office/drawing/2010/main" xmlns="" w="9525">
                   <a:solidFill>
                     <a:srgbClr val="000000"/>
                   </a:solidFill>
@@ -3723,7 +3724,7 @@
             </a:ln>
             <a:extLst>
               <a:ext uri="{91240B29-F687-4f45-9708-019B960494DF}">
-                <a14:hiddenLine xmlns="" xmlns:a14="http://schemas.microsoft.com/office/drawing/2010/main" w="9525">
+                <a14:hiddenLine xmlns:a14="http://schemas.microsoft.com/office/drawing/2010/main" xmlns="" w="9525">
                   <a:solidFill>
                     <a:srgbClr val="000000"/>
                   </a:solidFill>
@@ -3813,7 +3814,7 @@
             </a:ln>
             <a:extLst>
               <a:ext uri="{91240B29-F687-4f45-9708-019B960494DF}">
-                <a14:hiddenLine xmlns="" xmlns:a14="http://schemas.microsoft.com/office/drawing/2010/main" w="9525">
+                <a14:hiddenLine xmlns:a14="http://schemas.microsoft.com/office/drawing/2010/main" xmlns="" w="9525">
                   <a:solidFill>
                     <a:srgbClr val="000000"/>
                   </a:solidFill>
@@ -3875,7 +3876,7 @@
             </a:ln>
             <a:extLst>
               <a:ext uri="{91240B29-F687-4f45-9708-019B960494DF}">
-                <a14:hiddenLine xmlns="" xmlns:a14="http://schemas.microsoft.com/office/drawing/2010/main" w="9525">
+                <a14:hiddenLine xmlns:a14="http://schemas.microsoft.com/office/drawing/2010/main" xmlns="" w="9525">
                   <a:solidFill>
                     <a:srgbClr val="000000"/>
                   </a:solidFill>
@@ -3965,7 +3966,7 @@
             </a:ln>
             <a:extLst>
               <a:ext uri="{91240B29-F687-4f45-9708-019B960494DF}">
-                <a14:hiddenLine xmlns="" xmlns:a14="http://schemas.microsoft.com/office/drawing/2010/main" w="9525">
+                <a14:hiddenLine xmlns:a14="http://schemas.microsoft.com/office/drawing/2010/main" xmlns="" w="9525">
                   <a:solidFill>
                     <a:srgbClr val="000000"/>
                   </a:solidFill>
@@ -4055,7 +4056,7 @@
             </a:ln>
             <a:extLst>
               <a:ext uri="{91240B29-F687-4f45-9708-019B960494DF}">
-                <a14:hiddenLine xmlns="" xmlns:a14="http://schemas.microsoft.com/office/drawing/2010/main" w="9525">
+                <a14:hiddenLine xmlns:a14="http://schemas.microsoft.com/office/drawing/2010/main" xmlns="" w="9525">
                   <a:solidFill>
                     <a:srgbClr val="000000"/>
                   </a:solidFill>
@@ -4120,7 +4121,7 @@
             </a:ln>
             <a:extLst>
               <a:ext uri="{91240B29-F687-4f45-9708-019B960494DF}">
-                <a14:hiddenLine xmlns="" xmlns:a14="http://schemas.microsoft.com/office/drawing/2010/main" w="9525">
+                <a14:hiddenLine xmlns:a14="http://schemas.microsoft.com/office/drawing/2010/main" xmlns="" w="9525">
                   <a:solidFill>
                     <a:srgbClr val="000000"/>
                   </a:solidFill>
@@ -4182,7 +4183,7 @@
             </a:ln>
             <a:extLst>
               <a:ext uri="{91240B29-F687-4f45-9708-019B960494DF}">
-                <a14:hiddenLine xmlns="" xmlns:a14="http://schemas.microsoft.com/office/drawing/2010/main" w="9525">
+                <a14:hiddenLine xmlns:a14="http://schemas.microsoft.com/office/drawing/2010/main" xmlns="" w="9525">
                   <a:solidFill>
                     <a:srgbClr val="000000"/>
                   </a:solidFill>
@@ -4272,7 +4273,7 @@
             </a:ln>
             <a:extLst>
               <a:ext uri="{91240B29-F687-4f45-9708-019B960494DF}">
-                <a14:hiddenLine xmlns="" xmlns:a14="http://schemas.microsoft.com/office/drawing/2010/main" w="9525">
+                <a14:hiddenLine xmlns:a14="http://schemas.microsoft.com/office/drawing/2010/main" xmlns="" w="9525">
                   <a:solidFill>
                     <a:srgbClr val="000000"/>
                   </a:solidFill>
@@ -4362,7 +4363,7 @@
             </a:ln>
             <a:extLst>
               <a:ext uri="{91240B29-F687-4f45-9708-019B960494DF}">
-                <a14:hiddenLine xmlns="" xmlns:a14="http://schemas.microsoft.com/office/drawing/2010/main" w="9525">
+                <a14:hiddenLine xmlns:a14="http://schemas.microsoft.com/office/drawing/2010/main" xmlns="" w="9525">
                   <a:solidFill>
                     <a:srgbClr val="000000"/>
                   </a:solidFill>
@@ -4424,7 +4425,7 @@
             </a:ln>
             <a:extLst>
               <a:ext uri="{91240B29-F687-4f45-9708-019B960494DF}">
-                <a14:hiddenLine xmlns="" xmlns:a14="http://schemas.microsoft.com/office/drawing/2010/main" w="9525">
+                <a14:hiddenLine xmlns:a14="http://schemas.microsoft.com/office/drawing/2010/main" xmlns="" w="9525">
                   <a:solidFill>
                     <a:srgbClr val="000000"/>
                   </a:solidFill>
@@ -4544,7 +4545,7 @@
             </a:ln>
             <a:extLst>
               <a:ext uri="{91240B29-F687-4f45-9708-019B960494DF}">
-                <a14:hiddenLine xmlns="" xmlns:a14="http://schemas.microsoft.com/office/drawing/2010/main" w="9525">
+                <a14:hiddenLine xmlns:a14="http://schemas.microsoft.com/office/drawing/2010/main" xmlns="" w="9525">
                   <a:solidFill>
                     <a:srgbClr val="000000"/>
                   </a:solidFill>
@@ -4612,7 +4613,7 @@
             </a:ln>
             <a:extLst>
               <a:ext uri="{91240B29-F687-4f45-9708-019B960494DF}">
-                <a14:hiddenLine xmlns="" xmlns:a14="http://schemas.microsoft.com/office/drawing/2010/main" w="9525">
+                <a14:hiddenLine xmlns:a14="http://schemas.microsoft.com/office/drawing/2010/main" xmlns="" w="9525">
                   <a:solidFill>
                     <a:srgbClr val="000000"/>
                   </a:solidFill>
@@ -4702,7 +4703,7 @@
             </a:ln>
             <a:extLst>
               <a:ext uri="{91240B29-F687-4f45-9708-019B960494DF}">
-                <a14:hiddenLine xmlns="" xmlns:a14="http://schemas.microsoft.com/office/drawing/2010/main" w="9525">
+                <a14:hiddenLine xmlns:a14="http://schemas.microsoft.com/office/drawing/2010/main" xmlns="" w="9525">
                   <a:solidFill>
                     <a:srgbClr val="000000"/>
                   </a:solidFill>
@@ -4842,7 +4843,7 @@
           <a:p>
             <a:fld id="{4313F670-7F9A-774D-B73D-573401E44297}" type="datetime1">
               <a:rPr lang="en-US" smtClean="0"/>
-              <a:t>7/29/26</a:t>
+              <a:t>7/30/26</a:t>
             </a:fld>
             <a:endParaRPr lang="en-US"/>
           </a:p>
@@ -5109,7 +5110,7 @@
           <a:p>
             <a:fld id="{446F9669-A8A7-2D40-9D01-B35FC337AA30}" type="datetime1">
               <a:rPr lang="en-US" smtClean="0"/>
-              <a:t>7/29/26</a:t>
+              <a:t>7/30/26</a:t>
             </a:fld>
             <a:endParaRPr lang="en-US"/>
           </a:p>
@@ -5305,7 +5306,7 @@
           <a:p>
             <a:fld id="{FA76CF18-F41B-6B48-B3E5-599E9795C2C3}" type="datetime1">
               <a:rPr lang="en-US" smtClean="0"/>
-              <a:t>7/29/26</a:t>
+              <a:t>7/30/26</a:t>
             </a:fld>
             <a:endParaRPr lang="en-US"/>
           </a:p>
@@ -5568,7 +5569,7 @@
           <a:p>
             <a:fld id="{B9654854-6457-164F-A077-6B3035079B82}" type="datetime1">
               <a:rPr lang="en-US" smtClean="0"/>
-              <a:t>7/29/26</a:t>
+              <a:t>7/30/26</a:t>
             </a:fld>
             <a:endParaRPr lang="en-US"/>
           </a:p>
@@ -6002,7 +6003,7 @@
           <a:p>
             <a:fld id="{CE3DBFD7-E611-8C40-AC73-0C29FF63F0CD}" type="datetime1">
               <a:rPr lang="en-US" smtClean="0"/>
-              <a:t>7/29/26</a:t>
+              <a:t>7/30/26</a:t>
             </a:fld>
             <a:endParaRPr lang="en-US"/>
           </a:p>
@@ -6548,7 +6549,7 @@
           <a:p>
             <a:fld id="{C8B63B06-0493-2840-9F37-30C9412BBF17}" type="datetime1">
               <a:rPr lang="en-US" smtClean="0"/>
-              <a:t>7/29/26</a:t>
+              <a:t>7/30/26</a:t>
             </a:fld>
             <a:endParaRPr lang="en-US"/>
           </a:p>
@@ -7268,7 +7269,7 @@
           <a:p>
             <a:fld id="{72B5C0FA-8C46-E84D-B6D7-B673F2CA0A0E}" type="datetime1">
               <a:rPr lang="en-US" smtClean="0"/>
-              <a:t>7/29/26</a:t>
+              <a:t>7/30/26</a:t>
             </a:fld>
             <a:endParaRPr lang="en-US"/>
           </a:p>
@@ -7438,7 +7439,7 @@
           <a:p>
             <a:fld id="{60B9CDE1-97B4-BF46-B69C-B86855B18820}" type="datetime1">
               <a:rPr lang="en-US" smtClean="0"/>
-              <a:t>7/29/26</a:t>
+              <a:t>7/30/26</a:t>
             </a:fld>
             <a:endParaRPr lang="en-US"/>
           </a:p>
@@ -7618,7 +7619,7 @@
           <a:p>
             <a:fld id="{BE51D3A4-F9E5-FD49-AA87-B395F50451DC}" type="datetime1">
               <a:rPr lang="en-US" smtClean="0"/>
-              <a:t>7/29/26</a:t>
+              <a:t>7/30/26</a:t>
             </a:fld>
             <a:endParaRPr lang="en-US"/>
           </a:p>
@@ -7788,7 +7789,7 @@
           <a:p>
             <a:fld id="{880DFB37-B0AE-9449-85EC-14F9C83B6084}" type="datetime1">
               <a:rPr lang="en-US" smtClean="0"/>
-              <a:t>7/29/26</a:t>
+              <a:t>7/30/26</a:t>
             </a:fld>
             <a:endParaRPr lang="en-US"/>
           </a:p>
@@ -8038,7 +8039,7 @@
           <a:p>
             <a:fld id="{C939124A-616E-6944-A21A-1839F5DBE7BB}" type="datetime1">
               <a:rPr lang="en-US" smtClean="0"/>
-              <a:t>7/29/26</a:t>
+              <a:t>7/30/26</a:t>
             </a:fld>
             <a:endParaRPr lang="en-US"/>
           </a:p>
@@ -8270,7 +8271,7 @@
           <a:p>
             <a:fld id="{C6E9A026-D48C-FD43-8676-CD625DD5D84B}" type="datetime1">
               <a:rPr lang="en-US" smtClean="0"/>
-              <a:t>7/29/26</a:t>
+              <a:t>7/30/26</a:t>
             </a:fld>
             <a:endParaRPr lang="en-US"/>
           </a:p>
@@ -8656,7 +8657,7 @@
           <a:p>
             <a:fld id="{EA35111E-23A3-1440-99A3-C4C665908E3D}" type="datetime1">
               <a:rPr lang="en-US" smtClean="0"/>
-              <a:t>7/29/26</a:t>
+              <a:t>7/30/26</a:t>
             </a:fld>
             <a:endParaRPr lang="en-US"/>
           </a:p>
@@ -8779,7 +8780,7 @@
           <a:p>
             <a:fld id="{249983B9-88EF-D74B-BA6D-6A3BF17C2B38}" type="datetime1">
               <a:rPr lang="en-US" smtClean="0"/>
-              <a:t>7/29/26</a:t>
+              <a:t>7/30/26</a:t>
             </a:fld>
             <a:endParaRPr lang="en-US"/>
           </a:p>
@@ -8874,7 +8875,7 @@
           <a:p>
             <a:fld id="{E2A00AEF-B4EC-084A-8DB8-A225C7981CBB}" type="datetime1">
               <a:rPr lang="en-US" smtClean="0"/>
-              <a:t>7/29/26</a:t>
+              <a:t>7/30/26</a:t>
             </a:fld>
             <a:endParaRPr lang="en-US"/>
           </a:p>
@@ -9123,7 +9124,7 @@
           <a:p>
             <a:fld id="{97860299-21CD-A94A-A7B0-44E787F8D42C}" type="datetime1">
               <a:rPr lang="en-US" smtClean="0"/>
-              <a:t>7/29/26</a:t>
+              <a:t>7/30/26</a:t>
             </a:fld>
             <a:endParaRPr lang="en-US"/>
           </a:p>
@@ -9408,7 +9409,7 @@
           <a:p>
             <a:fld id="{3DFD19CF-4E62-D246-BA61-7B528271315F}" type="datetime1">
               <a:rPr lang="en-US" smtClean="0"/>
-              <a:t>7/29/26</a:t>
+              <a:t>7/30/26</a:t>
             </a:fld>
             <a:endParaRPr lang="en-US"/>
           </a:p>
@@ -9531,7 +9532,7 @@
           <a:noFill/>
           <a:extLst>
             <a:ext uri="{909E8E84-426E-40dd-AFC4-6F175D3DCCD1}">
-              <a14:hiddenFill xmlns="" xmlns:a14="http://schemas.microsoft.com/office/drawing/2010/main">
+              <a14:hiddenFill xmlns:a14="http://schemas.microsoft.com/office/drawing/2010/main" xmlns="">
                 <a:solidFill>
                   <a:srgbClr val="FFFFFF"/>
                 </a:solidFill>
@@ -9605,7 +9606,7 @@
               </a:ln>
               <a:extLst>
                 <a:ext uri="{91240B29-F687-4f45-9708-019B960494DF}">
-                  <a14:hiddenLine xmlns="" xmlns:a14="http://schemas.microsoft.com/office/drawing/2010/main" w="9525">
+                  <a14:hiddenLine xmlns:a14="http://schemas.microsoft.com/office/drawing/2010/main" xmlns="" w="9525">
                     <a:solidFill>
                       <a:srgbClr val="000000"/>
                     </a:solidFill>
@@ -9695,7 +9696,7 @@
               </a:ln>
               <a:extLst>
                 <a:ext uri="{91240B29-F687-4f45-9708-019B960494DF}">
-                  <a14:hiddenLine xmlns="" xmlns:a14="http://schemas.microsoft.com/office/drawing/2010/main" w="9525">
+                  <a14:hiddenLine xmlns:a14="http://schemas.microsoft.com/office/drawing/2010/main" xmlns="" w="9525">
                     <a:solidFill>
                       <a:srgbClr val="000000"/>
                     </a:solidFill>
@@ -9785,7 +9786,7 @@
               </a:ln>
               <a:extLst>
                 <a:ext uri="{91240B29-F687-4f45-9708-019B960494DF}">
-                  <a14:hiddenLine xmlns="" xmlns:a14="http://schemas.microsoft.com/office/drawing/2010/main" w="9525">
+                  <a14:hiddenLine xmlns:a14="http://schemas.microsoft.com/office/drawing/2010/main" xmlns="" w="9525">
                     <a:solidFill>
                       <a:srgbClr val="000000"/>
                     </a:solidFill>
@@ -9847,7 +9848,7 @@
               </a:ln>
               <a:extLst>
                 <a:ext uri="{91240B29-F687-4f45-9708-019B960494DF}">
-                  <a14:hiddenLine xmlns="" xmlns:a14="http://schemas.microsoft.com/office/drawing/2010/main" w="9525">
+                  <a14:hiddenLine xmlns:a14="http://schemas.microsoft.com/office/drawing/2010/main" xmlns="" w="9525">
                     <a:solidFill>
                       <a:srgbClr val="000000"/>
                     </a:solidFill>
@@ -9937,7 +9938,7 @@
               </a:ln>
               <a:extLst>
                 <a:ext uri="{91240B29-F687-4f45-9708-019B960494DF}">
-                  <a14:hiddenLine xmlns="" xmlns:a14="http://schemas.microsoft.com/office/drawing/2010/main" w="9525">
+                  <a14:hiddenLine xmlns:a14="http://schemas.microsoft.com/office/drawing/2010/main" xmlns="" w="9525">
                     <a:solidFill>
                       <a:srgbClr val="000000"/>
                     </a:solidFill>
@@ -9999,7 +10000,7 @@
               </a:ln>
               <a:extLst>
                 <a:ext uri="{91240B29-F687-4f45-9708-019B960494DF}">
-                  <a14:hiddenLine xmlns="" xmlns:a14="http://schemas.microsoft.com/office/drawing/2010/main" w="9525">
+                  <a14:hiddenLine xmlns:a14="http://schemas.microsoft.com/office/drawing/2010/main" xmlns="" w="9525">
                     <a:solidFill>
                       <a:srgbClr val="000000"/>
                     </a:solidFill>
@@ -10061,7 +10062,7 @@
               </a:ln>
               <a:extLst>
                 <a:ext uri="{91240B29-F687-4f45-9708-019B960494DF}">
-                  <a14:hiddenLine xmlns="" xmlns:a14="http://schemas.microsoft.com/office/drawing/2010/main" w="9525">
+                  <a14:hiddenLine xmlns:a14="http://schemas.microsoft.com/office/drawing/2010/main" xmlns="" w="9525">
                     <a:solidFill>
                       <a:srgbClr val="000000"/>
                     </a:solidFill>
@@ -10151,7 +10152,7 @@
               </a:ln>
               <a:extLst>
                 <a:ext uri="{91240B29-F687-4f45-9708-019B960494DF}">
-                  <a14:hiddenLine xmlns="" xmlns:a14="http://schemas.microsoft.com/office/drawing/2010/main" w="9525">
+                  <a14:hiddenLine xmlns:a14="http://schemas.microsoft.com/office/drawing/2010/main" xmlns="" w="9525">
                     <a:solidFill>
                       <a:srgbClr val="000000"/>
                     </a:solidFill>
@@ -10241,7 +10242,7 @@
               </a:ln>
               <a:extLst>
                 <a:ext uri="{91240B29-F687-4f45-9708-019B960494DF}">
-                  <a14:hiddenLine xmlns="" xmlns:a14="http://schemas.microsoft.com/office/drawing/2010/main" w="9525">
+                  <a14:hiddenLine xmlns:a14="http://schemas.microsoft.com/office/drawing/2010/main" xmlns="" w="9525">
                     <a:solidFill>
                       <a:srgbClr val="000000"/>
                     </a:solidFill>
@@ -10303,7 +10304,7 @@
               </a:ln>
               <a:extLst>
                 <a:ext uri="{91240B29-F687-4f45-9708-019B960494DF}">
-                  <a14:hiddenLine xmlns="" xmlns:a14="http://schemas.microsoft.com/office/drawing/2010/main" w="9525">
+                  <a14:hiddenLine xmlns:a14="http://schemas.microsoft.com/office/drawing/2010/main" xmlns="" w="9525">
                     <a:solidFill>
                       <a:srgbClr val="000000"/>
                     </a:solidFill>
@@ -10413,7 +10414,7 @@
               </a:ln>
               <a:extLst>
                 <a:ext uri="{91240B29-F687-4f45-9708-019B960494DF}">
-                  <a14:hiddenLine xmlns="" xmlns:a14="http://schemas.microsoft.com/office/drawing/2010/main" w="9525">
+                  <a14:hiddenLine xmlns:a14="http://schemas.microsoft.com/office/drawing/2010/main" xmlns="" w="9525">
                     <a:solidFill>
                       <a:srgbClr val="000000"/>
                     </a:solidFill>
@@ -10497,7 +10498,7 @@
               </a:ln>
               <a:extLst>
                 <a:ext uri="{91240B29-F687-4f45-9708-019B960494DF}">
-                  <a14:hiddenLine xmlns="" xmlns:a14="http://schemas.microsoft.com/office/drawing/2010/main" w="9525">
+                  <a14:hiddenLine xmlns:a14="http://schemas.microsoft.com/office/drawing/2010/main" xmlns="" w="9525">
                     <a:solidFill>
                       <a:srgbClr val="000000"/>
                     </a:solidFill>
@@ -10559,7 +10560,7 @@
               </a:ln>
               <a:extLst>
                 <a:ext uri="{91240B29-F687-4f45-9708-019B960494DF}">
-                  <a14:hiddenLine xmlns="" xmlns:a14="http://schemas.microsoft.com/office/drawing/2010/main" w="9525">
+                  <a14:hiddenLine xmlns:a14="http://schemas.microsoft.com/office/drawing/2010/main" xmlns="" w="9525">
                     <a:solidFill>
                       <a:srgbClr val="000000"/>
                     </a:solidFill>
@@ -10621,7 +10622,7 @@
               </a:ln>
               <a:extLst>
                 <a:ext uri="{91240B29-F687-4f45-9708-019B960494DF}">
-                  <a14:hiddenLine xmlns="" xmlns:a14="http://schemas.microsoft.com/office/drawing/2010/main" w="9525">
+                  <a14:hiddenLine xmlns:a14="http://schemas.microsoft.com/office/drawing/2010/main" xmlns="" w="9525">
                     <a:solidFill>
                       <a:srgbClr val="000000"/>
                     </a:solidFill>
@@ -10711,7 +10712,7 @@
               </a:ln>
               <a:extLst>
                 <a:ext uri="{91240B29-F687-4f45-9708-019B960494DF}">
-                  <a14:hiddenLine xmlns="" xmlns:a14="http://schemas.microsoft.com/office/drawing/2010/main" w="9525">
+                  <a14:hiddenLine xmlns:a14="http://schemas.microsoft.com/office/drawing/2010/main" xmlns="" w="9525">
                     <a:solidFill>
                       <a:srgbClr val="000000"/>
                     </a:solidFill>
@@ -10745,7 +10746,7 @@
               </a:ln>
               <a:extLst>
                 <a:ext uri="{91240B29-F687-4f45-9708-019B960494DF}">
-                  <a14:hiddenLine xmlns="" xmlns:a14="http://schemas.microsoft.com/office/drawing/2010/main" w="9525">
+                  <a14:hiddenLine xmlns:a14="http://schemas.microsoft.com/office/drawing/2010/main" xmlns="" w="9525">
                     <a:solidFill>
                       <a:srgbClr val="000000"/>
                     </a:solidFill>
@@ -10810,7 +10811,7 @@
               </a:ln>
               <a:extLst>
                 <a:ext uri="{91240B29-F687-4f45-9708-019B960494DF}">
-                  <a14:hiddenLine xmlns="" xmlns:a14="http://schemas.microsoft.com/office/drawing/2010/main" w="9525">
+                  <a14:hiddenLine xmlns:a14="http://schemas.microsoft.com/office/drawing/2010/main" xmlns="" w="9525">
                     <a:solidFill>
                       <a:srgbClr val="000000"/>
                     </a:solidFill>
@@ -10900,7 +10901,7 @@
               </a:ln>
               <a:extLst>
                 <a:ext uri="{91240B29-F687-4f45-9708-019B960494DF}">
-                  <a14:hiddenLine xmlns="" xmlns:a14="http://schemas.microsoft.com/office/drawing/2010/main" w="9525">
+                  <a14:hiddenLine xmlns:a14="http://schemas.microsoft.com/office/drawing/2010/main" xmlns="" w="9525">
                     <a:solidFill>
                       <a:srgbClr val="000000"/>
                     </a:solidFill>
@@ -10962,7 +10963,7 @@
               </a:ln>
               <a:extLst>
                 <a:ext uri="{91240B29-F687-4f45-9708-019B960494DF}">
-                  <a14:hiddenLine xmlns="" xmlns:a14="http://schemas.microsoft.com/office/drawing/2010/main" w="9525">
+                  <a14:hiddenLine xmlns:a14="http://schemas.microsoft.com/office/drawing/2010/main" xmlns="" w="9525">
                     <a:solidFill>
                       <a:srgbClr val="000000"/>
                     </a:solidFill>
@@ -11052,7 +11053,7 @@
               </a:ln>
               <a:extLst>
                 <a:ext uri="{91240B29-F687-4f45-9708-019B960494DF}">
-                  <a14:hiddenLine xmlns="" xmlns:a14="http://schemas.microsoft.com/office/drawing/2010/main" w="9525">
+                  <a14:hiddenLine xmlns:a14="http://schemas.microsoft.com/office/drawing/2010/main" xmlns="" w="9525">
                     <a:solidFill>
                       <a:srgbClr val="000000"/>
                     </a:solidFill>
@@ -11117,7 +11118,7 @@
               </a:ln>
               <a:extLst>
                 <a:ext uri="{91240B29-F687-4f45-9708-019B960494DF}">
-                  <a14:hiddenLine xmlns="" xmlns:a14="http://schemas.microsoft.com/office/drawing/2010/main" w="9525">
+                  <a14:hiddenLine xmlns:a14="http://schemas.microsoft.com/office/drawing/2010/main" xmlns="" w="9525">
                     <a:solidFill>
                       <a:srgbClr val="000000"/>
                     </a:solidFill>
@@ -11179,7 +11180,7 @@
               </a:ln>
               <a:extLst>
                 <a:ext uri="{91240B29-F687-4f45-9708-019B960494DF}">
-                  <a14:hiddenLine xmlns="" xmlns:a14="http://schemas.microsoft.com/office/drawing/2010/main" w="9525">
+                  <a14:hiddenLine xmlns:a14="http://schemas.microsoft.com/office/drawing/2010/main" xmlns="" w="9525">
                     <a:solidFill>
                       <a:srgbClr val="000000"/>
                     </a:solidFill>
@@ -11269,7 +11270,7 @@
               </a:ln>
               <a:extLst>
                 <a:ext uri="{91240B29-F687-4f45-9708-019B960494DF}">
-                  <a14:hiddenLine xmlns="" xmlns:a14="http://schemas.microsoft.com/office/drawing/2010/main" w="9525">
+                  <a14:hiddenLine xmlns:a14="http://schemas.microsoft.com/office/drawing/2010/main" xmlns="" w="9525">
                     <a:solidFill>
                       <a:srgbClr val="000000"/>
                     </a:solidFill>
@@ -11359,7 +11360,7 @@
               </a:ln>
               <a:extLst>
                 <a:ext uri="{91240B29-F687-4f45-9708-019B960494DF}">
-                  <a14:hiddenLine xmlns="" xmlns:a14="http://schemas.microsoft.com/office/drawing/2010/main" w="9525">
+                  <a14:hiddenLine xmlns:a14="http://schemas.microsoft.com/office/drawing/2010/main" xmlns="" w="9525">
                     <a:solidFill>
                       <a:srgbClr val="000000"/>
                     </a:solidFill>
@@ -11424,7 +11425,7 @@
               </a:ln>
               <a:extLst>
                 <a:ext uri="{91240B29-F687-4f45-9708-019B960494DF}">
-                  <a14:hiddenLine xmlns="" xmlns:a14="http://schemas.microsoft.com/office/drawing/2010/main" w="9525">
+                  <a14:hiddenLine xmlns:a14="http://schemas.microsoft.com/office/drawing/2010/main" xmlns="" w="9525">
                     <a:solidFill>
                       <a:srgbClr val="000000"/>
                     </a:solidFill>
@@ -11544,7 +11545,7 @@
               </a:ln>
               <a:extLst>
                 <a:ext uri="{91240B29-F687-4f45-9708-019B960494DF}">
-                  <a14:hiddenLine xmlns="" xmlns:a14="http://schemas.microsoft.com/office/drawing/2010/main" w="9525">
+                  <a14:hiddenLine xmlns:a14="http://schemas.microsoft.com/office/drawing/2010/main" xmlns="" w="9525">
                     <a:solidFill>
                       <a:srgbClr val="000000"/>
                     </a:solidFill>
@@ -11625,7 +11626,7 @@
               </a:ln>
               <a:extLst>
                 <a:ext uri="{91240B29-F687-4f45-9708-019B960494DF}">
-                  <a14:hiddenLine xmlns="" xmlns:a14="http://schemas.microsoft.com/office/drawing/2010/main" w="9525">
+                  <a14:hiddenLine xmlns:a14="http://schemas.microsoft.com/office/drawing/2010/main" xmlns="" w="9525">
                     <a:solidFill>
                       <a:srgbClr val="000000"/>
                     </a:solidFill>
@@ -11740,7 +11741,7 @@
               </a:ln>
               <a:extLst>
                 <a:ext uri="{91240B29-F687-4f45-9708-019B960494DF}">
-                  <a14:hiddenLine xmlns="" xmlns:a14="http://schemas.microsoft.com/office/drawing/2010/main" w="9525">
+                  <a14:hiddenLine xmlns:a14="http://schemas.microsoft.com/office/drawing/2010/main" xmlns="" w="9525">
                     <a:solidFill>
                       <a:srgbClr val="000000"/>
                     </a:solidFill>
@@ -11830,7 +11831,7 @@
               </a:ln>
               <a:extLst>
                 <a:ext uri="{91240B29-F687-4f45-9708-019B960494DF}">
-                  <a14:hiddenLine xmlns="" xmlns:a14="http://schemas.microsoft.com/office/drawing/2010/main" w="9525">
+                  <a14:hiddenLine xmlns:a14="http://schemas.microsoft.com/office/drawing/2010/main" xmlns="" w="9525">
                     <a:solidFill>
                       <a:srgbClr val="000000"/>
                     </a:solidFill>
@@ -11895,7 +11896,7 @@
               </a:ln>
               <a:extLst>
                 <a:ext uri="{91240B29-F687-4f45-9708-019B960494DF}">
-                  <a14:hiddenLine xmlns="" xmlns:a14="http://schemas.microsoft.com/office/drawing/2010/main" w="9525">
+                  <a14:hiddenLine xmlns:a14="http://schemas.microsoft.com/office/drawing/2010/main" xmlns="" w="9525">
                     <a:solidFill>
                       <a:srgbClr val="000000"/>
                     </a:solidFill>
@@ -11985,7 +11986,7 @@
               </a:ln>
               <a:extLst>
                 <a:ext uri="{91240B29-F687-4f45-9708-019B960494DF}">
-                  <a14:hiddenLine xmlns="" xmlns:a14="http://schemas.microsoft.com/office/drawing/2010/main" w="9525">
+                  <a14:hiddenLine xmlns:a14="http://schemas.microsoft.com/office/drawing/2010/main" xmlns="" w="9525">
                     <a:solidFill>
                       <a:srgbClr val="000000"/>
                     </a:solidFill>
@@ -12053,7 +12054,7 @@
               </a:ln>
               <a:extLst>
                 <a:ext uri="{91240B29-F687-4f45-9708-019B960494DF}">
-                  <a14:hiddenLine xmlns="" xmlns:a14="http://schemas.microsoft.com/office/drawing/2010/main" w="9525">
+                  <a14:hiddenLine xmlns:a14="http://schemas.microsoft.com/office/drawing/2010/main" xmlns="" w="9525">
                     <a:solidFill>
                       <a:srgbClr val="000000"/>
                     </a:solidFill>
@@ -12143,7 +12144,7 @@
               </a:ln>
               <a:extLst>
                 <a:ext uri="{91240B29-F687-4f45-9708-019B960494DF}">
-                  <a14:hiddenLine xmlns="" xmlns:a14="http://schemas.microsoft.com/office/drawing/2010/main" w="9525">
+                  <a14:hiddenLine xmlns:a14="http://schemas.microsoft.com/office/drawing/2010/main" xmlns="" w="9525">
                     <a:solidFill>
                       <a:srgbClr val="000000"/>
                     </a:solidFill>
@@ -12211,7 +12212,7 @@
               </a:ln>
               <a:extLst>
                 <a:ext uri="{91240B29-F687-4f45-9708-019B960494DF}">
-                  <a14:hiddenLine xmlns="" xmlns:a14="http://schemas.microsoft.com/office/drawing/2010/main" w="9525">
+                  <a14:hiddenLine xmlns:a14="http://schemas.microsoft.com/office/drawing/2010/main" xmlns="" w="9525">
                     <a:solidFill>
                       <a:srgbClr val="000000"/>
                     </a:solidFill>
@@ -12301,7 +12302,7 @@
               </a:ln>
               <a:extLst>
                 <a:ext uri="{91240B29-F687-4f45-9708-019B960494DF}">
-                  <a14:hiddenLine xmlns="" xmlns:a14="http://schemas.microsoft.com/office/drawing/2010/main" w="9525">
+                  <a14:hiddenLine xmlns:a14="http://schemas.microsoft.com/office/drawing/2010/main" xmlns="" w="9525">
                     <a:solidFill>
                       <a:srgbClr val="000000"/>
                     </a:solidFill>
@@ -12335,7 +12336,7 @@
               </a:ln>
               <a:extLst>
                 <a:ext uri="{91240B29-F687-4f45-9708-019B960494DF}">
-                  <a14:hiddenLine xmlns="" xmlns:a14="http://schemas.microsoft.com/office/drawing/2010/main" w="9525">
+                  <a14:hiddenLine xmlns:a14="http://schemas.microsoft.com/office/drawing/2010/main" xmlns="" w="9525">
                     <a:solidFill>
                       <a:srgbClr val="000000"/>
                     </a:solidFill>
@@ -12475,7 +12476,7 @@
           <a:p>
             <a:fld id="{92FF8978-FE14-CC4A-93A6-934EB06543C0}" type="datetime1">
               <a:rPr lang="en-US" smtClean="0"/>
-              <a:t>7/29/26</a:t>
+              <a:t>7/30/26</a:t>
             </a:fld>
             <a:endParaRPr lang="en-US"/>
           </a:p>
@@ -13680,6 +13681,234 @@
 </file>
 
 <file path=ppt/slides/slide13.xml><?xml version="1.0" encoding="utf-8"?>
+<p:sld xmlns:a="http://schemas.openxmlformats.org/drawingml/2006/main" xmlns:r="http://schemas.openxmlformats.org/officeDocument/2006/relationships" xmlns:p="http://schemas.openxmlformats.org/presentationml/2006/main">
+  <p:cSld>
+    <p:spTree>
+      <p:nvGrpSpPr>
+        <p:cNvPr id="1" name="">
+          <a:extLst>
+            <a:ext uri="{FF2B5EF4-FFF2-40B4-BE49-F238E27FC236}">
+              <a16:creationId xmlns:a16="http://schemas.microsoft.com/office/drawing/2014/main" id="{1AB8D8E0-B735-8684-FF09-D3F676BF96F7}"/>
+            </a:ext>
+          </a:extLst>
+        </p:cNvPr>
+        <p:cNvGrpSpPr/>
+        <p:nvPr/>
+      </p:nvGrpSpPr>
+      <p:grpSpPr>
+        <a:xfrm>
+          <a:off x="0" y="0"/>
+          <a:ext cx="0" cy="0"/>
+          <a:chOff x="0" y="0"/>
+          <a:chExt cx="0" cy="0"/>
+        </a:xfrm>
+      </p:grpSpPr>
+      <p:sp>
+        <p:nvSpPr>
+          <p:cNvPr id="6146" name="Rectangle 2">
+            <a:extLst>
+              <a:ext uri="{FF2B5EF4-FFF2-40B4-BE49-F238E27FC236}">
+                <a16:creationId xmlns:a16="http://schemas.microsoft.com/office/drawing/2014/main" id="{233A718E-398E-54E8-A22D-9E35487F9D4D}"/>
+              </a:ext>
+            </a:extLst>
+          </p:cNvPr>
+          <p:cNvSpPr>
+            <a:spLocks noGrp="1" noChangeArrowheads="1"/>
+          </p:cNvSpPr>
+          <p:nvPr>
+            <p:ph type="title"/>
+            <p:custDataLst>
+              <p:tags r:id="rId1"/>
+            </p:custDataLst>
+          </p:nvPr>
+        </p:nvSpPr>
+        <p:spPr>
+          <a:xfrm>
+            <a:off x="1141413" y="284084"/>
+            <a:ext cx="9905998" cy="620791"/>
+          </a:xfrm>
+        </p:spPr>
+        <p:txBody>
+          <a:bodyPr/>
+          <a:lstStyle/>
+          <a:p>
+            <a:pPr algn="ctr"/>
+            <a:r>
+              <a:rPr lang="en-US" dirty="0"/>
+              <a:t>Week 3: Thursday</a:t>
+            </a:r>
+          </a:p>
+        </p:txBody>
+      </p:sp>
+      <p:sp>
+        <p:nvSpPr>
+          <p:cNvPr id="6147" name="Rectangle 3">
+            <a:extLst>
+              <a:ext uri="{FF2B5EF4-FFF2-40B4-BE49-F238E27FC236}">
+                <a16:creationId xmlns:a16="http://schemas.microsoft.com/office/drawing/2014/main" id="{427CEE8E-A31C-8018-BDDC-F65ABA484A10}"/>
+              </a:ext>
+            </a:extLst>
+          </p:cNvPr>
+          <p:cNvSpPr>
+            <a:spLocks noGrp="1" noChangeArrowheads="1"/>
+          </p:cNvSpPr>
+          <p:nvPr>
+            <p:ph idx="1"/>
+            <p:custDataLst>
+              <p:tags r:id="rId2"/>
+            </p:custDataLst>
+          </p:nvPr>
+        </p:nvSpPr>
+        <p:spPr>
+          <a:xfrm>
+            <a:off x="1294151" y="1098548"/>
+            <a:ext cx="9600522" cy="5475367"/>
+          </a:xfrm>
+        </p:spPr>
+        <p:txBody>
+          <a:bodyPr>
+            <a:normAutofit fontScale="92500" lnSpcReduction="10000"/>
+          </a:bodyPr>
+          <a:lstStyle/>
+          <a:p>
+            <a:r>
+              <a:rPr lang="en-US" dirty="0">
+                <a:latin typeface="Arial" panose="020B0604020202020204" pitchFamily="34" charset="0"/>
+                <a:cs typeface="Arial" panose="020B0604020202020204" pitchFamily="34" charset="0"/>
+              </a:rPr>
+              <a:t>Week 3 going strong!! More than halfway done with the course</a:t>
+            </a:r>
+          </a:p>
+          <a:p>
+            <a:r>
+              <a:rPr lang="en-US" dirty="0">
+                <a:latin typeface="Arial" panose="020B0604020202020204" pitchFamily="34" charset="0"/>
+                <a:cs typeface="Arial" panose="020B0604020202020204" pitchFamily="34" charset="0"/>
+              </a:rPr>
+              <a:t>This week:</a:t>
+            </a:r>
+            <a:endParaRPr lang="en-US" b="1" i="1" dirty="0">
+              <a:latin typeface="Arial" panose="020B0604020202020204" pitchFamily="34" charset="0"/>
+              <a:cs typeface="Arial" panose="020B0604020202020204" pitchFamily="34" charset="0"/>
+            </a:endParaRPr>
+          </a:p>
+          <a:p>
+            <a:pPr lvl="1"/>
+            <a:r>
+              <a:rPr lang="en-US" dirty="0">
+                <a:latin typeface="Arial" panose="020B0604020202020204" pitchFamily="34" charset="0"/>
+                <a:cs typeface="Arial" panose="020B0604020202020204" pitchFamily="34" charset="0"/>
+              </a:rPr>
+              <a:t>Second Midterm on Friday (Same procedure as last Friday)</a:t>
+            </a:r>
+          </a:p>
+          <a:p>
+            <a:pPr lvl="1"/>
+            <a:r>
+              <a:rPr lang="en-US" dirty="0">
+                <a:latin typeface="Arial" panose="020B0604020202020204" pitchFamily="34" charset="0"/>
+                <a:cs typeface="Arial" panose="020B0604020202020204" pitchFamily="34" charset="0"/>
+              </a:rPr>
+              <a:t>I decided to have 2/3 module 2 material, only 1/3 module 3.</a:t>
+            </a:r>
+          </a:p>
+          <a:p>
+            <a:r>
+              <a:rPr lang="en-US" dirty="0">
+                <a:latin typeface="Arial" panose="020B0604020202020204" pitchFamily="34" charset="0"/>
+                <a:cs typeface="Arial" panose="020B0604020202020204" pitchFamily="34" charset="0"/>
+              </a:rPr>
+              <a:t>I won’t be able to hold my OH after class today (sorry!)</a:t>
+            </a:r>
+          </a:p>
+          <a:p>
+            <a:pPr lvl="1"/>
+            <a:r>
+              <a:rPr lang="en-US" dirty="0">
+                <a:latin typeface="Arial" panose="020B0604020202020204" pitchFamily="34" charset="0"/>
+                <a:cs typeface="Arial" panose="020B0604020202020204" pitchFamily="34" charset="0"/>
+              </a:rPr>
+              <a:t>Another meeting came up that I cannot miss</a:t>
+            </a:r>
+          </a:p>
+          <a:p>
+            <a:r>
+              <a:rPr lang="en-US" dirty="0">
+                <a:latin typeface="Arial" panose="020B0604020202020204" pitchFamily="34" charset="0"/>
+                <a:cs typeface="Arial" panose="020B0604020202020204" pitchFamily="34" charset="0"/>
+              </a:rPr>
+              <a:t>Lecture recordings from last Fall are posted on Panopto on Canvas</a:t>
+            </a:r>
+          </a:p>
+          <a:p>
+            <a:pPr lvl="1"/>
+            <a:r>
+              <a:rPr lang="en-US" dirty="0">
+                <a:latin typeface="Arial" panose="020B0604020202020204" pitchFamily="34" charset="0"/>
+                <a:cs typeface="Arial" panose="020B0604020202020204" pitchFamily="34" charset="0"/>
+              </a:rPr>
+              <a:t>I posted ALL the videos FYI</a:t>
+            </a:r>
+          </a:p>
+          <a:p>
+            <a:r>
+              <a:rPr lang="en-US" dirty="0">
+                <a:latin typeface="Arial" panose="020B0604020202020204" pitchFamily="34" charset="0"/>
+                <a:cs typeface="Arial" panose="020B0604020202020204" pitchFamily="34" charset="0"/>
+              </a:rPr>
+              <a:t>Please remember that I am asking for NO laptop / phones!</a:t>
+            </a:r>
+          </a:p>
+          <a:p>
+            <a:pPr lvl="1"/>
+            <a:r>
+              <a:rPr lang="en-US" dirty="0">
+                <a:latin typeface="Arial" panose="020B0604020202020204" pitchFamily="34" charset="0"/>
+                <a:cs typeface="Arial" panose="020B0604020202020204" pitchFamily="34" charset="0"/>
+              </a:rPr>
+              <a:t>This makes the learning environment better for everybody. I appreciate it!</a:t>
+            </a:r>
+          </a:p>
+          <a:p>
+            <a:r>
+              <a:rPr lang="en-US" dirty="0">
+                <a:latin typeface="Arial" panose="020B0604020202020204" pitchFamily="34" charset="0"/>
+                <a:cs typeface="Arial" panose="020B0604020202020204" pitchFamily="34" charset="0"/>
+              </a:rPr>
+              <a:t>Attendance continues today as usual.</a:t>
+            </a:r>
+          </a:p>
+          <a:p>
+            <a:r>
+              <a:rPr lang="en-US" dirty="0">
+                <a:latin typeface="Arial" panose="020B0604020202020204" pitchFamily="34" charset="0"/>
+                <a:cs typeface="Arial" panose="020B0604020202020204" pitchFamily="34" charset="0"/>
+              </a:rPr>
+              <a:t>Today we pause and review for the exam</a:t>
+            </a:r>
+          </a:p>
+          <a:p>
+            <a:endParaRPr lang="en-US" dirty="0">
+              <a:latin typeface="Arial" panose="020B0604020202020204" pitchFamily="34" charset="0"/>
+              <a:cs typeface="Arial" panose="020B0604020202020204" pitchFamily="34" charset="0"/>
+            </a:endParaRPr>
+          </a:p>
+        </p:txBody>
+      </p:sp>
+    </p:spTree>
+    <p:extLst>
+      <p:ext uri="{BB962C8B-B14F-4D97-AF65-F5344CB8AC3E}">
+        <p14:creationId xmlns:p14="http://schemas.microsoft.com/office/powerpoint/2010/main" val="458716138"/>
+      </p:ext>
+    </p:extLst>
+  </p:cSld>
+  <p:clrMapOvr>
+    <a:masterClrMapping/>
+  </p:clrMapOvr>
+</p:sld>
+</file>
+
+<file path=ppt/slides/slide14.xml><?xml version="1.0" encoding="utf-8"?>
 <p:sld xmlns:a="http://schemas.openxmlformats.org/drawingml/2006/main" xmlns:r="http://schemas.openxmlformats.org/officeDocument/2006/relationships" xmlns:p="http://schemas.openxmlformats.org/presentationml/2006/main">
   <p:cSld>
     <p:spTree>
@@ -17406,6 +17635,18 @@
 </p:tagLst>
 </file>
 
+<file path=ppt/tags/tag28.xml><?xml version="1.0" encoding="utf-8"?>
+<p:tagLst xmlns:a="http://schemas.openxmlformats.org/drawingml/2006/main" xmlns:r="http://schemas.openxmlformats.org/officeDocument/2006/relationships" xmlns:p="http://schemas.openxmlformats.org/presentationml/2006/main">
+  <p:tag name="_INSTRUCTOR VIEW19C14C36-AC8E-43BC-9DB6-C2AAF774C7DC|PANE__TAG" val="_"/>
+</p:tagLst>
+</file>
+
+<file path=ppt/tags/tag29.xml><?xml version="1.0" encoding="utf-8"?>
+<p:tagLst xmlns:a="http://schemas.openxmlformats.org/drawingml/2006/main" xmlns:r="http://schemas.openxmlformats.org/officeDocument/2006/relationships" xmlns:p="http://schemas.openxmlformats.org/presentationml/2006/main">
+  <p:tag name="_INSTRUCTOR VIEW19C14C36-AC8E-43BC-9DB6-C2AAF774C7DC|PANE__TAG" val="_"/>
+</p:tagLst>
+</file>
+
 <file path=ppt/tags/tag3.xml><?xml version="1.0" encoding="utf-8"?>
 <p:tagLst xmlns:a="http://schemas.openxmlformats.org/drawingml/2006/main" xmlns:r="http://schemas.openxmlformats.org/officeDocument/2006/relationships" xmlns:p="http://schemas.openxmlformats.org/presentationml/2006/main">
   <p:tag name="_INSTRUCTOR VIEW19C14C36-AC8E-43BC-9DB6-C2AAF774C7DC|PANE__TAG" val="_"/>

--- a/slides/00-DailyAnnouncements.pptx
+++ b/slides/00-DailyAnnouncements.pptx
@@ -5,7 +5,7 @@
     <p:sldMasterId id="2147484006" r:id="rId1"/>
   </p:sldMasterIdLst>
   <p:notesMasterIdLst>
-    <p:notesMasterId r:id="rId16"/>
+    <p:notesMasterId r:id="rId17"/>
   </p:notesMasterIdLst>
   <p:sldIdLst>
     <p:sldId id="256" r:id="rId2"/>
@@ -21,7 +21,8 @@
     <p:sldId id="524" r:id="rId12"/>
     <p:sldId id="525" r:id="rId13"/>
     <p:sldId id="526" r:id="rId14"/>
-    <p:sldId id="515" r:id="rId15"/>
+    <p:sldId id="527" r:id="rId15"/>
+    <p:sldId id="515" r:id="rId16"/>
   </p:sldIdLst>
   <p:sldSz cx="12192000" cy="6858000"/>
   <p:notesSz cx="6858000" cy="9144000"/>
@@ -210,7 +211,7 @@
           <a:p>
             <a:fld id="{C5B45307-6ED4-B142-BD64-10F739779302}" type="datetimeFigureOut">
               <a:rPr lang="en-US" smtClean="0"/>
-              <a:t>7/30/26</a:t>
+              <a:t>8/3/26</a:t>
             </a:fld>
             <a:endParaRPr lang="en-US"/>
           </a:p>
@@ -618,7 +619,7 @@
           <a:noFill/>
           <a:extLst>
             <a:ext uri="{909E8E84-426E-40dd-AFC4-6F175D3DCCD1}">
-              <a14:hiddenFill xmlns:a14="http://schemas.microsoft.com/office/drawing/2010/main" xmlns="">
+              <a14:hiddenFill xmlns="" xmlns:a14="http://schemas.microsoft.com/office/drawing/2010/main">
                 <a:solidFill>
                   <a:srgbClr val="FFFFFF"/>
                 </a:solidFill>
@@ -677,7 +678,7 @@
             </a:ln>
             <a:extLst>
               <a:ext uri="{91240B29-F687-4f45-9708-019B960494DF}">
-                <a14:hiddenLine xmlns:a14="http://schemas.microsoft.com/office/drawing/2010/main" xmlns="" w="9525">
+                <a14:hiddenLine xmlns="" xmlns:a14="http://schemas.microsoft.com/office/drawing/2010/main" w="9525">
                   <a:solidFill>
                     <a:srgbClr val="000000"/>
                   </a:solidFill>
@@ -767,7 +768,7 @@
             </a:ln>
             <a:extLst>
               <a:ext uri="{91240B29-F687-4f45-9708-019B960494DF}">
-                <a14:hiddenLine xmlns:a14="http://schemas.microsoft.com/office/drawing/2010/main" xmlns="" w="9525">
+                <a14:hiddenLine xmlns="" xmlns:a14="http://schemas.microsoft.com/office/drawing/2010/main" w="9525">
                   <a:solidFill>
                     <a:srgbClr val="000000"/>
                   </a:solidFill>
@@ -857,7 +858,7 @@
             </a:ln>
             <a:extLst>
               <a:ext uri="{91240B29-F687-4f45-9708-019B960494DF}">
-                <a14:hiddenLine xmlns:a14="http://schemas.microsoft.com/office/drawing/2010/main" xmlns="" w="9525">
+                <a14:hiddenLine xmlns="" xmlns:a14="http://schemas.microsoft.com/office/drawing/2010/main" w="9525">
                   <a:solidFill>
                     <a:srgbClr val="000000"/>
                   </a:solidFill>
@@ -891,7 +892,7 @@
             </a:ln>
             <a:extLst>
               <a:ext uri="{91240B29-F687-4f45-9708-019B960494DF}">
-                <a14:hiddenLine xmlns:a14="http://schemas.microsoft.com/office/drawing/2010/main" xmlns="" w="9525">
+                <a14:hiddenLine xmlns="" xmlns:a14="http://schemas.microsoft.com/office/drawing/2010/main" w="9525">
                   <a:solidFill>
                     <a:srgbClr val="000000"/>
                   </a:solidFill>
@@ -981,7 +982,7 @@
             </a:ln>
             <a:extLst>
               <a:ext uri="{91240B29-F687-4f45-9708-019B960494DF}">
-                <a14:hiddenLine xmlns:a14="http://schemas.microsoft.com/office/drawing/2010/main" xmlns="" w="9525">
+                <a14:hiddenLine xmlns="" xmlns:a14="http://schemas.microsoft.com/office/drawing/2010/main" w="9525">
                   <a:solidFill>
                     <a:srgbClr val="000000"/>
                   </a:solidFill>
@@ -1043,7 +1044,7 @@
             </a:ln>
             <a:extLst>
               <a:ext uri="{91240B29-F687-4f45-9708-019B960494DF}">
-                <a14:hiddenLine xmlns:a14="http://schemas.microsoft.com/office/drawing/2010/main" xmlns="" w="9525">
+                <a14:hiddenLine xmlns="" xmlns:a14="http://schemas.microsoft.com/office/drawing/2010/main" w="9525">
                   <a:solidFill>
                     <a:srgbClr val="000000"/>
                   </a:solidFill>
@@ -1105,7 +1106,7 @@
             </a:ln>
             <a:extLst>
               <a:ext uri="{91240B29-F687-4f45-9708-019B960494DF}">
-                <a14:hiddenLine xmlns:a14="http://schemas.microsoft.com/office/drawing/2010/main" xmlns="" w="9525">
+                <a14:hiddenLine xmlns="" xmlns:a14="http://schemas.microsoft.com/office/drawing/2010/main" w="9525">
                   <a:solidFill>
                     <a:srgbClr val="000000"/>
                   </a:solidFill>
@@ -1195,7 +1196,7 @@
             </a:ln>
             <a:extLst>
               <a:ext uri="{91240B29-F687-4f45-9708-019B960494DF}">
-                <a14:hiddenLine xmlns:a14="http://schemas.microsoft.com/office/drawing/2010/main" xmlns="" w="9525">
+                <a14:hiddenLine xmlns="" xmlns:a14="http://schemas.microsoft.com/office/drawing/2010/main" w="9525">
                   <a:solidFill>
                     <a:srgbClr val="000000"/>
                   </a:solidFill>
@@ -1257,7 +1258,7 @@
             </a:ln>
             <a:extLst>
               <a:ext uri="{91240B29-F687-4f45-9708-019B960494DF}">
-                <a14:hiddenLine xmlns:a14="http://schemas.microsoft.com/office/drawing/2010/main" xmlns="" w="9525">
+                <a14:hiddenLine xmlns="" xmlns:a14="http://schemas.microsoft.com/office/drawing/2010/main" w="9525">
                   <a:solidFill>
                     <a:srgbClr val="000000"/>
                   </a:solidFill>
@@ -1319,7 +1320,7 @@
             </a:ln>
             <a:extLst>
               <a:ext uri="{91240B29-F687-4f45-9708-019B960494DF}">
-                <a14:hiddenLine xmlns:a14="http://schemas.microsoft.com/office/drawing/2010/main" xmlns="" w="9525">
+                <a14:hiddenLine xmlns="" xmlns:a14="http://schemas.microsoft.com/office/drawing/2010/main" w="9525">
                   <a:solidFill>
                     <a:srgbClr val="000000"/>
                   </a:solidFill>
@@ -1409,7 +1410,7 @@
             </a:ln>
             <a:extLst>
               <a:ext uri="{91240B29-F687-4f45-9708-019B960494DF}">
-                <a14:hiddenLine xmlns:a14="http://schemas.microsoft.com/office/drawing/2010/main" xmlns="" w="9525">
+                <a14:hiddenLine xmlns="" xmlns:a14="http://schemas.microsoft.com/office/drawing/2010/main" w="9525">
                   <a:solidFill>
                     <a:srgbClr val="000000"/>
                   </a:solidFill>
@@ -1499,7 +1500,7 @@
             </a:ln>
             <a:extLst>
               <a:ext uri="{91240B29-F687-4f45-9708-019B960494DF}">
-                <a14:hiddenLine xmlns:a14="http://schemas.microsoft.com/office/drawing/2010/main" xmlns="" w="9525">
+                <a14:hiddenLine xmlns="" xmlns:a14="http://schemas.microsoft.com/office/drawing/2010/main" w="9525">
                   <a:solidFill>
                     <a:srgbClr val="000000"/>
                   </a:solidFill>
@@ -1561,7 +1562,7 @@
             </a:ln>
             <a:extLst>
               <a:ext uri="{91240B29-F687-4f45-9708-019B960494DF}">
-                <a14:hiddenLine xmlns:a14="http://schemas.microsoft.com/office/drawing/2010/main" xmlns="" w="9525">
+                <a14:hiddenLine xmlns="" xmlns:a14="http://schemas.microsoft.com/office/drawing/2010/main" w="9525">
                   <a:solidFill>
                     <a:srgbClr val="000000"/>
                   </a:solidFill>
@@ -1671,7 +1672,7 @@
             </a:ln>
             <a:extLst>
               <a:ext uri="{91240B29-F687-4f45-9708-019B960494DF}">
-                <a14:hiddenLine xmlns:a14="http://schemas.microsoft.com/office/drawing/2010/main" xmlns="" w="9525">
+                <a14:hiddenLine xmlns="" xmlns:a14="http://schemas.microsoft.com/office/drawing/2010/main" w="9525">
                   <a:solidFill>
                     <a:srgbClr val="000000"/>
                   </a:solidFill>
@@ -1733,7 +1734,7 @@
             </a:ln>
             <a:extLst>
               <a:ext uri="{91240B29-F687-4f45-9708-019B960494DF}">
-                <a14:hiddenLine xmlns:a14="http://schemas.microsoft.com/office/drawing/2010/main" xmlns="" w="9525">
+                <a14:hiddenLine xmlns="" xmlns:a14="http://schemas.microsoft.com/office/drawing/2010/main" w="9525">
                   <a:solidFill>
                     <a:srgbClr val="000000"/>
                   </a:solidFill>
@@ -1823,7 +1824,7 @@
             </a:ln>
             <a:extLst>
               <a:ext uri="{91240B29-F687-4f45-9708-019B960494DF}">
-                <a14:hiddenLine xmlns:a14="http://schemas.microsoft.com/office/drawing/2010/main" xmlns="" w="9525">
+                <a14:hiddenLine xmlns="" xmlns:a14="http://schemas.microsoft.com/office/drawing/2010/main" w="9525">
                   <a:solidFill>
                     <a:srgbClr val="000000"/>
                   </a:solidFill>
@@ -1913,7 +1914,7 @@
             </a:ln>
             <a:extLst>
               <a:ext uri="{91240B29-F687-4f45-9708-019B960494DF}">
-                <a14:hiddenLine xmlns:a14="http://schemas.microsoft.com/office/drawing/2010/main" xmlns="" w="9525">
+                <a14:hiddenLine xmlns="" xmlns:a14="http://schemas.microsoft.com/office/drawing/2010/main" w="9525">
                   <a:solidFill>
                     <a:srgbClr val="000000"/>
                   </a:solidFill>
@@ -1975,7 +1976,7 @@
             </a:ln>
             <a:extLst>
               <a:ext uri="{91240B29-F687-4f45-9708-019B960494DF}">
-                <a14:hiddenLine xmlns:a14="http://schemas.microsoft.com/office/drawing/2010/main" xmlns="" w="9525">
+                <a14:hiddenLine xmlns="" xmlns:a14="http://schemas.microsoft.com/office/drawing/2010/main" w="9525">
                   <a:solidFill>
                     <a:srgbClr val="000000"/>
                   </a:solidFill>
@@ -2065,7 +2066,7 @@
             </a:ln>
             <a:extLst>
               <a:ext uri="{91240B29-F687-4f45-9708-019B960494DF}">
-                <a14:hiddenLine xmlns:a14="http://schemas.microsoft.com/office/drawing/2010/main" xmlns="" w="9525">
+                <a14:hiddenLine xmlns="" xmlns:a14="http://schemas.microsoft.com/office/drawing/2010/main" w="9525">
                   <a:solidFill>
                     <a:srgbClr val="000000"/>
                   </a:solidFill>
@@ -2155,7 +2156,7 @@
             </a:ln>
             <a:extLst>
               <a:ext uri="{91240B29-F687-4f45-9708-019B960494DF}">
-                <a14:hiddenLine xmlns:a14="http://schemas.microsoft.com/office/drawing/2010/main" xmlns="" w="9525">
+                <a14:hiddenLine xmlns="" xmlns:a14="http://schemas.microsoft.com/office/drawing/2010/main" w="9525">
                   <a:solidFill>
                     <a:srgbClr val="000000"/>
                   </a:solidFill>
@@ -2211,7 +2212,7 @@
             </a:ln>
             <a:extLst>
               <a:ext uri="{91240B29-F687-4f45-9708-019B960494DF}">
-                <a14:hiddenLine xmlns:a14="http://schemas.microsoft.com/office/drawing/2010/main" xmlns="" w="9525">
+                <a14:hiddenLine xmlns="" xmlns:a14="http://schemas.microsoft.com/office/drawing/2010/main" w="9525">
                   <a:solidFill>
                     <a:srgbClr val="000000"/>
                   </a:solidFill>
@@ -2301,7 +2302,7 @@
             </a:ln>
             <a:extLst>
               <a:ext uri="{91240B29-F687-4f45-9708-019B960494DF}">
-                <a14:hiddenLine xmlns:a14="http://schemas.microsoft.com/office/drawing/2010/main" xmlns="" w="9525">
+                <a14:hiddenLine xmlns="" xmlns:a14="http://schemas.microsoft.com/office/drawing/2010/main" w="9525">
                   <a:solidFill>
                     <a:srgbClr val="000000"/>
                   </a:solidFill>
@@ -2357,7 +2358,7 @@
             </a:ln>
             <a:extLst>
               <a:ext uri="{91240B29-F687-4f45-9708-019B960494DF}">
-                <a14:hiddenLine xmlns:a14="http://schemas.microsoft.com/office/drawing/2010/main" xmlns="" w="9525">
+                <a14:hiddenLine xmlns="" xmlns:a14="http://schemas.microsoft.com/office/drawing/2010/main" w="9525">
                   <a:solidFill>
                     <a:srgbClr val="000000"/>
                   </a:solidFill>
@@ -2447,7 +2448,7 @@
             </a:ln>
             <a:extLst>
               <a:ext uri="{91240B29-F687-4f45-9708-019B960494DF}">
-                <a14:hiddenLine xmlns:a14="http://schemas.microsoft.com/office/drawing/2010/main" xmlns="" w="9525">
+                <a14:hiddenLine xmlns="" xmlns:a14="http://schemas.microsoft.com/office/drawing/2010/main" w="9525">
                   <a:solidFill>
                     <a:srgbClr val="000000"/>
                   </a:solidFill>
@@ -2515,7 +2516,7 @@
             </a:ln>
             <a:extLst>
               <a:ext uri="{91240B29-F687-4f45-9708-019B960494DF}">
-                <a14:hiddenLine xmlns:a14="http://schemas.microsoft.com/office/drawing/2010/main" xmlns="" w="9525">
+                <a14:hiddenLine xmlns="" xmlns:a14="http://schemas.microsoft.com/office/drawing/2010/main" w="9525">
                   <a:solidFill>
                     <a:srgbClr val="000000"/>
                   </a:solidFill>
@@ -2605,7 +2606,7 @@
             </a:ln>
             <a:extLst>
               <a:ext uri="{91240B29-F687-4f45-9708-019B960494DF}">
-                <a14:hiddenLine xmlns:a14="http://schemas.microsoft.com/office/drawing/2010/main" xmlns="" w="9525">
+                <a14:hiddenLine xmlns="" xmlns:a14="http://schemas.microsoft.com/office/drawing/2010/main" w="9525">
                   <a:solidFill>
                     <a:srgbClr val="000000"/>
                   </a:solidFill>
@@ -2673,7 +2674,7 @@
             </a:ln>
             <a:extLst>
               <a:ext uri="{91240B29-F687-4f45-9708-019B960494DF}">
-                <a14:hiddenLine xmlns:a14="http://schemas.microsoft.com/office/drawing/2010/main" xmlns="" w="9525">
+                <a14:hiddenLine xmlns="" xmlns:a14="http://schemas.microsoft.com/office/drawing/2010/main" w="9525">
                   <a:solidFill>
                     <a:srgbClr val="000000"/>
                   </a:solidFill>
@@ -2763,7 +2764,7 @@
             </a:ln>
             <a:extLst>
               <a:ext uri="{91240B29-F687-4f45-9708-019B960494DF}">
-                <a14:hiddenLine xmlns:a14="http://schemas.microsoft.com/office/drawing/2010/main" xmlns="" w="9525">
+                <a14:hiddenLine xmlns="" xmlns:a14="http://schemas.microsoft.com/office/drawing/2010/main" w="9525">
                   <a:solidFill>
                     <a:srgbClr val="000000"/>
                   </a:solidFill>
@@ -2797,7 +2798,7 @@
             </a:ln>
             <a:extLst>
               <a:ext uri="{91240B29-F687-4f45-9708-019B960494DF}">
-                <a14:hiddenLine xmlns:a14="http://schemas.microsoft.com/office/drawing/2010/main" xmlns="" w="9525">
+                <a14:hiddenLine xmlns="" xmlns:a14="http://schemas.microsoft.com/office/drawing/2010/main" w="9525">
                   <a:solidFill>
                     <a:srgbClr val="000000"/>
                   </a:solidFill>
@@ -2887,7 +2888,7 @@
             </a:ln>
             <a:extLst>
               <a:ext uri="{91240B29-F687-4f45-9708-019B960494DF}">
-                <a14:hiddenLine xmlns:a14="http://schemas.microsoft.com/office/drawing/2010/main" xmlns="" w="9525">
+                <a14:hiddenLine xmlns="" xmlns:a14="http://schemas.microsoft.com/office/drawing/2010/main" w="9525">
                   <a:solidFill>
                     <a:srgbClr val="000000"/>
                   </a:solidFill>
@@ -2949,7 +2950,7 @@
             </a:ln>
             <a:extLst>
               <a:ext uri="{91240B29-F687-4f45-9708-019B960494DF}">
-                <a14:hiddenLine xmlns:a14="http://schemas.microsoft.com/office/drawing/2010/main" xmlns="" w="9525">
+                <a14:hiddenLine xmlns="" xmlns:a14="http://schemas.microsoft.com/office/drawing/2010/main" w="9525">
                   <a:solidFill>
                     <a:srgbClr val="000000"/>
                   </a:solidFill>
@@ -3011,7 +3012,7 @@
             </a:ln>
             <a:extLst>
               <a:ext uri="{91240B29-F687-4f45-9708-019B960494DF}">
-                <a14:hiddenLine xmlns:a14="http://schemas.microsoft.com/office/drawing/2010/main" xmlns="" w="9525">
+                <a14:hiddenLine xmlns="" xmlns:a14="http://schemas.microsoft.com/office/drawing/2010/main" w="9525">
                   <a:solidFill>
                     <a:srgbClr val="000000"/>
                   </a:solidFill>
@@ -3101,7 +3102,7 @@
             </a:ln>
             <a:extLst>
               <a:ext uri="{91240B29-F687-4f45-9708-019B960494DF}">
-                <a14:hiddenLine xmlns:a14="http://schemas.microsoft.com/office/drawing/2010/main" xmlns="" w="9525">
+                <a14:hiddenLine xmlns="" xmlns:a14="http://schemas.microsoft.com/office/drawing/2010/main" w="9525">
                   <a:solidFill>
                     <a:srgbClr val="000000"/>
                   </a:solidFill>
@@ -3169,7 +3170,7 @@
             </a:ln>
             <a:extLst>
               <a:ext uri="{91240B29-F687-4f45-9708-019B960494DF}">
-                <a14:hiddenLine xmlns:a14="http://schemas.microsoft.com/office/drawing/2010/main" xmlns="" w="9525">
+                <a14:hiddenLine xmlns="" xmlns:a14="http://schemas.microsoft.com/office/drawing/2010/main" w="9525">
                   <a:solidFill>
                     <a:srgbClr val="000000"/>
                   </a:solidFill>
@@ -3231,7 +3232,7 @@
             </a:ln>
             <a:extLst>
               <a:ext uri="{91240B29-F687-4f45-9708-019B960494DF}">
-                <a14:hiddenLine xmlns:a14="http://schemas.microsoft.com/office/drawing/2010/main" xmlns="" w="9525">
+                <a14:hiddenLine xmlns="" xmlns:a14="http://schemas.microsoft.com/office/drawing/2010/main" w="9525">
                   <a:solidFill>
                     <a:srgbClr val="000000"/>
                   </a:solidFill>
@@ -3321,7 +3322,7 @@
             </a:ln>
             <a:extLst>
               <a:ext uri="{91240B29-F687-4f45-9708-019B960494DF}">
-                <a14:hiddenLine xmlns:a14="http://schemas.microsoft.com/office/drawing/2010/main" xmlns="" w="9525">
+                <a14:hiddenLine xmlns="" xmlns:a14="http://schemas.microsoft.com/office/drawing/2010/main" w="9525">
                   <a:solidFill>
                     <a:srgbClr val="000000"/>
                   </a:solidFill>
@@ -3383,7 +3384,7 @@
             </a:ln>
             <a:extLst>
               <a:ext uri="{91240B29-F687-4f45-9708-019B960494DF}">
-                <a14:hiddenLine xmlns:a14="http://schemas.microsoft.com/office/drawing/2010/main" xmlns="" w="9525">
+                <a14:hiddenLine xmlns="" xmlns:a14="http://schemas.microsoft.com/office/drawing/2010/main" w="9525">
                   <a:solidFill>
                     <a:srgbClr val="000000"/>
                   </a:solidFill>
@@ -3473,7 +3474,7 @@
             </a:ln>
             <a:extLst>
               <a:ext uri="{91240B29-F687-4f45-9708-019B960494DF}">
-                <a14:hiddenLine xmlns:a14="http://schemas.microsoft.com/office/drawing/2010/main" xmlns="" w="9525">
+                <a14:hiddenLine xmlns="" xmlns:a14="http://schemas.microsoft.com/office/drawing/2010/main" w="9525">
                   <a:solidFill>
                     <a:srgbClr val="000000"/>
                   </a:solidFill>
@@ -3535,7 +3536,7 @@
             </a:ln>
             <a:extLst>
               <a:ext uri="{91240B29-F687-4f45-9708-019B960494DF}">
-                <a14:hiddenLine xmlns:a14="http://schemas.microsoft.com/office/drawing/2010/main" xmlns="" w="9525">
+                <a14:hiddenLine xmlns="" xmlns:a14="http://schemas.microsoft.com/office/drawing/2010/main" w="9525">
                   <a:solidFill>
                     <a:srgbClr val="000000"/>
                   </a:solidFill>
@@ -3625,7 +3626,7 @@
             </a:ln>
             <a:extLst>
               <a:ext uri="{91240B29-F687-4f45-9708-019B960494DF}">
-                <a14:hiddenLine xmlns:a14="http://schemas.microsoft.com/office/drawing/2010/main" xmlns="" w="9525">
+                <a14:hiddenLine xmlns="" xmlns:a14="http://schemas.microsoft.com/office/drawing/2010/main" w="9525">
                   <a:solidFill>
                     <a:srgbClr val="000000"/>
                   </a:solidFill>
@@ -3659,7 +3660,7 @@
             </a:ln>
             <a:extLst>
               <a:ext uri="{91240B29-F687-4f45-9708-019B960494DF}">
-                <a14:hiddenLine xmlns:a14="http://schemas.microsoft.com/office/drawing/2010/main" xmlns="" w="9525">
+                <a14:hiddenLine xmlns="" xmlns:a14="http://schemas.microsoft.com/office/drawing/2010/main" w="9525">
                   <a:solidFill>
                     <a:srgbClr val="000000"/>
                   </a:solidFill>
@@ -3724,7 +3725,7 @@
             </a:ln>
             <a:extLst>
               <a:ext uri="{91240B29-F687-4f45-9708-019B960494DF}">
-                <a14:hiddenLine xmlns:a14="http://schemas.microsoft.com/office/drawing/2010/main" xmlns="" w="9525">
+                <a14:hiddenLine xmlns="" xmlns:a14="http://schemas.microsoft.com/office/drawing/2010/main" w="9525">
                   <a:solidFill>
                     <a:srgbClr val="000000"/>
                   </a:solidFill>
@@ -3814,7 +3815,7 @@
             </a:ln>
             <a:extLst>
               <a:ext uri="{91240B29-F687-4f45-9708-019B960494DF}">
-                <a14:hiddenLine xmlns:a14="http://schemas.microsoft.com/office/drawing/2010/main" xmlns="" w="9525">
+                <a14:hiddenLine xmlns="" xmlns:a14="http://schemas.microsoft.com/office/drawing/2010/main" w="9525">
                   <a:solidFill>
                     <a:srgbClr val="000000"/>
                   </a:solidFill>
@@ -3876,7 +3877,7 @@
             </a:ln>
             <a:extLst>
               <a:ext uri="{91240B29-F687-4f45-9708-019B960494DF}">
-                <a14:hiddenLine xmlns:a14="http://schemas.microsoft.com/office/drawing/2010/main" xmlns="" w="9525">
+                <a14:hiddenLine xmlns="" xmlns:a14="http://schemas.microsoft.com/office/drawing/2010/main" w="9525">
                   <a:solidFill>
                     <a:srgbClr val="000000"/>
                   </a:solidFill>
@@ -3966,7 +3967,7 @@
             </a:ln>
             <a:extLst>
               <a:ext uri="{91240B29-F687-4f45-9708-019B960494DF}">
-                <a14:hiddenLine xmlns:a14="http://schemas.microsoft.com/office/drawing/2010/main" xmlns="" w="9525">
+                <a14:hiddenLine xmlns="" xmlns:a14="http://schemas.microsoft.com/office/drawing/2010/main" w="9525">
                   <a:solidFill>
                     <a:srgbClr val="000000"/>
                   </a:solidFill>
@@ -4056,7 +4057,7 @@
             </a:ln>
             <a:extLst>
               <a:ext uri="{91240B29-F687-4f45-9708-019B960494DF}">
-                <a14:hiddenLine xmlns:a14="http://schemas.microsoft.com/office/drawing/2010/main" xmlns="" w="9525">
+                <a14:hiddenLine xmlns="" xmlns:a14="http://schemas.microsoft.com/office/drawing/2010/main" w="9525">
                   <a:solidFill>
                     <a:srgbClr val="000000"/>
                   </a:solidFill>
@@ -4121,7 +4122,7 @@
             </a:ln>
             <a:extLst>
               <a:ext uri="{91240B29-F687-4f45-9708-019B960494DF}">
-                <a14:hiddenLine xmlns:a14="http://schemas.microsoft.com/office/drawing/2010/main" xmlns="" w="9525">
+                <a14:hiddenLine xmlns="" xmlns:a14="http://schemas.microsoft.com/office/drawing/2010/main" w="9525">
                   <a:solidFill>
                     <a:srgbClr val="000000"/>
                   </a:solidFill>
@@ -4183,7 +4184,7 @@
             </a:ln>
             <a:extLst>
               <a:ext uri="{91240B29-F687-4f45-9708-019B960494DF}">
-                <a14:hiddenLine xmlns:a14="http://schemas.microsoft.com/office/drawing/2010/main" xmlns="" w="9525">
+                <a14:hiddenLine xmlns="" xmlns:a14="http://schemas.microsoft.com/office/drawing/2010/main" w="9525">
                   <a:solidFill>
                     <a:srgbClr val="000000"/>
                   </a:solidFill>
@@ -4273,7 +4274,7 @@
             </a:ln>
             <a:extLst>
               <a:ext uri="{91240B29-F687-4f45-9708-019B960494DF}">
-                <a14:hiddenLine xmlns:a14="http://schemas.microsoft.com/office/drawing/2010/main" xmlns="" w="9525">
+                <a14:hiddenLine xmlns="" xmlns:a14="http://schemas.microsoft.com/office/drawing/2010/main" w="9525">
                   <a:solidFill>
                     <a:srgbClr val="000000"/>
                   </a:solidFill>
@@ -4363,7 +4364,7 @@
             </a:ln>
             <a:extLst>
               <a:ext uri="{91240B29-F687-4f45-9708-019B960494DF}">
-                <a14:hiddenLine xmlns:a14="http://schemas.microsoft.com/office/drawing/2010/main" xmlns="" w="9525">
+                <a14:hiddenLine xmlns="" xmlns:a14="http://schemas.microsoft.com/office/drawing/2010/main" w="9525">
                   <a:solidFill>
                     <a:srgbClr val="000000"/>
                   </a:solidFill>
@@ -4425,7 +4426,7 @@
             </a:ln>
             <a:extLst>
               <a:ext uri="{91240B29-F687-4f45-9708-019B960494DF}">
-                <a14:hiddenLine xmlns:a14="http://schemas.microsoft.com/office/drawing/2010/main" xmlns="" w="9525">
+                <a14:hiddenLine xmlns="" xmlns:a14="http://schemas.microsoft.com/office/drawing/2010/main" w="9525">
                   <a:solidFill>
                     <a:srgbClr val="000000"/>
                   </a:solidFill>
@@ -4545,7 +4546,7 @@
             </a:ln>
             <a:extLst>
               <a:ext uri="{91240B29-F687-4f45-9708-019B960494DF}">
-                <a14:hiddenLine xmlns:a14="http://schemas.microsoft.com/office/drawing/2010/main" xmlns="" w="9525">
+                <a14:hiddenLine xmlns="" xmlns:a14="http://schemas.microsoft.com/office/drawing/2010/main" w="9525">
                   <a:solidFill>
                     <a:srgbClr val="000000"/>
                   </a:solidFill>
@@ -4613,7 +4614,7 @@
             </a:ln>
             <a:extLst>
               <a:ext uri="{91240B29-F687-4f45-9708-019B960494DF}">
-                <a14:hiddenLine xmlns:a14="http://schemas.microsoft.com/office/drawing/2010/main" xmlns="" w="9525">
+                <a14:hiddenLine xmlns="" xmlns:a14="http://schemas.microsoft.com/office/drawing/2010/main" w="9525">
                   <a:solidFill>
                     <a:srgbClr val="000000"/>
                   </a:solidFill>
@@ -4703,7 +4704,7 @@
             </a:ln>
             <a:extLst>
               <a:ext uri="{91240B29-F687-4f45-9708-019B960494DF}">
-                <a14:hiddenLine xmlns:a14="http://schemas.microsoft.com/office/drawing/2010/main" xmlns="" w="9525">
+                <a14:hiddenLine xmlns="" xmlns:a14="http://schemas.microsoft.com/office/drawing/2010/main" w="9525">
                   <a:solidFill>
                     <a:srgbClr val="000000"/>
                   </a:solidFill>
@@ -4843,7 +4844,7 @@
           <a:p>
             <a:fld id="{4313F670-7F9A-774D-B73D-573401E44297}" type="datetime1">
               <a:rPr lang="en-US" smtClean="0"/>
-              <a:t>7/30/26</a:t>
+              <a:t>8/3/26</a:t>
             </a:fld>
             <a:endParaRPr lang="en-US"/>
           </a:p>
@@ -5110,7 +5111,7 @@
           <a:p>
             <a:fld id="{446F9669-A8A7-2D40-9D01-B35FC337AA30}" type="datetime1">
               <a:rPr lang="en-US" smtClean="0"/>
-              <a:t>7/30/26</a:t>
+              <a:t>8/3/26</a:t>
             </a:fld>
             <a:endParaRPr lang="en-US"/>
           </a:p>
@@ -5306,7 +5307,7 @@
           <a:p>
             <a:fld id="{FA76CF18-F41B-6B48-B3E5-599E9795C2C3}" type="datetime1">
               <a:rPr lang="en-US" smtClean="0"/>
-              <a:t>7/30/26</a:t>
+              <a:t>8/3/26</a:t>
             </a:fld>
             <a:endParaRPr lang="en-US"/>
           </a:p>
@@ -5569,7 +5570,7 @@
           <a:p>
             <a:fld id="{B9654854-6457-164F-A077-6B3035079B82}" type="datetime1">
               <a:rPr lang="en-US" smtClean="0"/>
-              <a:t>7/30/26</a:t>
+              <a:t>8/3/26</a:t>
             </a:fld>
             <a:endParaRPr lang="en-US"/>
           </a:p>
@@ -6003,7 +6004,7 @@
           <a:p>
             <a:fld id="{CE3DBFD7-E611-8C40-AC73-0C29FF63F0CD}" type="datetime1">
               <a:rPr lang="en-US" smtClean="0"/>
-              <a:t>7/30/26</a:t>
+              <a:t>8/3/26</a:t>
             </a:fld>
             <a:endParaRPr lang="en-US"/>
           </a:p>
@@ -6549,7 +6550,7 @@
           <a:p>
             <a:fld id="{C8B63B06-0493-2840-9F37-30C9412BBF17}" type="datetime1">
               <a:rPr lang="en-US" smtClean="0"/>
-              <a:t>7/30/26</a:t>
+              <a:t>8/3/26</a:t>
             </a:fld>
             <a:endParaRPr lang="en-US"/>
           </a:p>
@@ -7269,7 +7270,7 @@
           <a:p>
             <a:fld id="{72B5C0FA-8C46-E84D-B6D7-B673F2CA0A0E}" type="datetime1">
               <a:rPr lang="en-US" smtClean="0"/>
-              <a:t>7/30/26</a:t>
+              <a:t>8/3/26</a:t>
             </a:fld>
             <a:endParaRPr lang="en-US"/>
           </a:p>
@@ -7439,7 +7440,7 @@
           <a:p>
             <a:fld id="{60B9CDE1-97B4-BF46-B69C-B86855B18820}" type="datetime1">
               <a:rPr lang="en-US" smtClean="0"/>
-              <a:t>7/30/26</a:t>
+              <a:t>8/3/26</a:t>
             </a:fld>
             <a:endParaRPr lang="en-US"/>
           </a:p>
@@ -7619,7 +7620,7 @@
           <a:p>
             <a:fld id="{BE51D3A4-F9E5-FD49-AA87-B395F50451DC}" type="datetime1">
               <a:rPr lang="en-US" smtClean="0"/>
-              <a:t>7/30/26</a:t>
+              <a:t>8/3/26</a:t>
             </a:fld>
             <a:endParaRPr lang="en-US"/>
           </a:p>
@@ -7789,7 +7790,7 @@
           <a:p>
             <a:fld id="{880DFB37-B0AE-9449-85EC-14F9C83B6084}" type="datetime1">
               <a:rPr lang="en-US" smtClean="0"/>
-              <a:t>7/30/26</a:t>
+              <a:t>8/3/26</a:t>
             </a:fld>
             <a:endParaRPr lang="en-US"/>
           </a:p>
@@ -8039,7 +8040,7 @@
           <a:p>
             <a:fld id="{C939124A-616E-6944-A21A-1839F5DBE7BB}" type="datetime1">
               <a:rPr lang="en-US" smtClean="0"/>
-              <a:t>7/30/26</a:t>
+              <a:t>8/3/26</a:t>
             </a:fld>
             <a:endParaRPr lang="en-US"/>
           </a:p>
@@ -8271,7 +8272,7 @@
           <a:p>
             <a:fld id="{C6E9A026-D48C-FD43-8676-CD625DD5D84B}" type="datetime1">
               <a:rPr lang="en-US" smtClean="0"/>
-              <a:t>7/30/26</a:t>
+              <a:t>8/3/26</a:t>
             </a:fld>
             <a:endParaRPr lang="en-US"/>
           </a:p>
@@ -8657,7 +8658,7 @@
           <a:p>
             <a:fld id="{EA35111E-23A3-1440-99A3-C4C665908E3D}" type="datetime1">
               <a:rPr lang="en-US" smtClean="0"/>
-              <a:t>7/30/26</a:t>
+              <a:t>8/3/26</a:t>
             </a:fld>
             <a:endParaRPr lang="en-US"/>
           </a:p>
@@ -8780,7 +8781,7 @@
           <a:p>
             <a:fld id="{249983B9-88EF-D74B-BA6D-6A3BF17C2B38}" type="datetime1">
               <a:rPr lang="en-US" smtClean="0"/>
-              <a:t>7/30/26</a:t>
+              <a:t>8/3/26</a:t>
             </a:fld>
             <a:endParaRPr lang="en-US"/>
           </a:p>
@@ -8875,7 +8876,7 @@
           <a:p>
             <a:fld id="{E2A00AEF-B4EC-084A-8DB8-A225C7981CBB}" type="datetime1">
               <a:rPr lang="en-US" smtClean="0"/>
-              <a:t>7/30/26</a:t>
+              <a:t>8/3/26</a:t>
             </a:fld>
             <a:endParaRPr lang="en-US"/>
           </a:p>
@@ -9124,7 +9125,7 @@
           <a:p>
             <a:fld id="{97860299-21CD-A94A-A7B0-44E787F8D42C}" type="datetime1">
               <a:rPr lang="en-US" smtClean="0"/>
-              <a:t>7/30/26</a:t>
+              <a:t>8/3/26</a:t>
             </a:fld>
             <a:endParaRPr lang="en-US"/>
           </a:p>
@@ -9409,7 +9410,7 @@
           <a:p>
             <a:fld id="{3DFD19CF-4E62-D246-BA61-7B528271315F}" type="datetime1">
               <a:rPr lang="en-US" smtClean="0"/>
-              <a:t>7/30/26</a:t>
+              <a:t>8/3/26</a:t>
             </a:fld>
             <a:endParaRPr lang="en-US"/>
           </a:p>
@@ -9532,7 +9533,7 @@
           <a:noFill/>
           <a:extLst>
             <a:ext uri="{909E8E84-426E-40dd-AFC4-6F175D3DCCD1}">
-              <a14:hiddenFill xmlns:a14="http://schemas.microsoft.com/office/drawing/2010/main" xmlns="">
+              <a14:hiddenFill xmlns="" xmlns:a14="http://schemas.microsoft.com/office/drawing/2010/main">
                 <a:solidFill>
                   <a:srgbClr val="FFFFFF"/>
                 </a:solidFill>
@@ -9606,7 +9607,7 @@
               </a:ln>
               <a:extLst>
                 <a:ext uri="{91240B29-F687-4f45-9708-019B960494DF}">
-                  <a14:hiddenLine xmlns:a14="http://schemas.microsoft.com/office/drawing/2010/main" xmlns="" w="9525">
+                  <a14:hiddenLine xmlns="" xmlns:a14="http://schemas.microsoft.com/office/drawing/2010/main" w="9525">
                     <a:solidFill>
                       <a:srgbClr val="000000"/>
                     </a:solidFill>
@@ -9696,7 +9697,7 @@
               </a:ln>
               <a:extLst>
                 <a:ext uri="{91240B29-F687-4f45-9708-019B960494DF}">
-                  <a14:hiddenLine xmlns:a14="http://schemas.microsoft.com/office/drawing/2010/main" xmlns="" w="9525">
+                  <a14:hiddenLine xmlns="" xmlns:a14="http://schemas.microsoft.com/office/drawing/2010/main" w="9525">
                     <a:solidFill>
                       <a:srgbClr val="000000"/>
                     </a:solidFill>
@@ -9786,7 +9787,7 @@
               </a:ln>
               <a:extLst>
                 <a:ext uri="{91240B29-F687-4f45-9708-019B960494DF}">
-                  <a14:hiddenLine xmlns:a14="http://schemas.microsoft.com/office/drawing/2010/main" xmlns="" w="9525">
+                  <a14:hiddenLine xmlns="" xmlns:a14="http://schemas.microsoft.com/office/drawing/2010/main" w="9525">
                     <a:solidFill>
                       <a:srgbClr val="000000"/>
                     </a:solidFill>
@@ -9848,7 +9849,7 @@
               </a:ln>
               <a:extLst>
                 <a:ext uri="{91240B29-F687-4f45-9708-019B960494DF}">
-                  <a14:hiddenLine xmlns:a14="http://schemas.microsoft.com/office/drawing/2010/main" xmlns="" w="9525">
+                  <a14:hiddenLine xmlns="" xmlns:a14="http://schemas.microsoft.com/office/drawing/2010/main" w="9525">
                     <a:solidFill>
                       <a:srgbClr val="000000"/>
                     </a:solidFill>
@@ -9938,7 +9939,7 @@
               </a:ln>
               <a:extLst>
                 <a:ext uri="{91240B29-F687-4f45-9708-019B960494DF}">
-                  <a14:hiddenLine xmlns:a14="http://schemas.microsoft.com/office/drawing/2010/main" xmlns="" w="9525">
+                  <a14:hiddenLine xmlns="" xmlns:a14="http://schemas.microsoft.com/office/drawing/2010/main" w="9525">
                     <a:solidFill>
                       <a:srgbClr val="000000"/>
                     </a:solidFill>
@@ -10000,7 +10001,7 @@
               </a:ln>
               <a:extLst>
                 <a:ext uri="{91240B29-F687-4f45-9708-019B960494DF}">
-                  <a14:hiddenLine xmlns:a14="http://schemas.microsoft.com/office/drawing/2010/main" xmlns="" w="9525">
+                  <a14:hiddenLine xmlns="" xmlns:a14="http://schemas.microsoft.com/office/drawing/2010/main" w="9525">
                     <a:solidFill>
                       <a:srgbClr val="000000"/>
                     </a:solidFill>
@@ -10062,7 +10063,7 @@
               </a:ln>
               <a:extLst>
                 <a:ext uri="{91240B29-F687-4f45-9708-019B960494DF}">
-                  <a14:hiddenLine xmlns:a14="http://schemas.microsoft.com/office/drawing/2010/main" xmlns="" w="9525">
+                  <a14:hiddenLine xmlns="" xmlns:a14="http://schemas.microsoft.com/office/drawing/2010/main" w="9525">
                     <a:solidFill>
                       <a:srgbClr val="000000"/>
                     </a:solidFill>
@@ -10152,7 +10153,7 @@
               </a:ln>
               <a:extLst>
                 <a:ext uri="{91240B29-F687-4f45-9708-019B960494DF}">
-                  <a14:hiddenLine xmlns:a14="http://schemas.microsoft.com/office/drawing/2010/main" xmlns="" w="9525">
+                  <a14:hiddenLine xmlns="" xmlns:a14="http://schemas.microsoft.com/office/drawing/2010/main" w="9525">
                     <a:solidFill>
                       <a:srgbClr val="000000"/>
                     </a:solidFill>
@@ -10242,7 +10243,7 @@
               </a:ln>
               <a:extLst>
                 <a:ext uri="{91240B29-F687-4f45-9708-019B960494DF}">
-                  <a14:hiddenLine xmlns:a14="http://schemas.microsoft.com/office/drawing/2010/main" xmlns="" w="9525">
+                  <a14:hiddenLine xmlns="" xmlns:a14="http://schemas.microsoft.com/office/drawing/2010/main" w="9525">
                     <a:solidFill>
                       <a:srgbClr val="000000"/>
                     </a:solidFill>
@@ -10304,7 +10305,7 @@
               </a:ln>
               <a:extLst>
                 <a:ext uri="{91240B29-F687-4f45-9708-019B960494DF}">
-                  <a14:hiddenLine xmlns:a14="http://schemas.microsoft.com/office/drawing/2010/main" xmlns="" w="9525">
+                  <a14:hiddenLine xmlns="" xmlns:a14="http://schemas.microsoft.com/office/drawing/2010/main" w="9525">
                     <a:solidFill>
                       <a:srgbClr val="000000"/>
                     </a:solidFill>
@@ -10414,7 +10415,7 @@
               </a:ln>
               <a:extLst>
                 <a:ext uri="{91240B29-F687-4f45-9708-019B960494DF}">
-                  <a14:hiddenLine xmlns:a14="http://schemas.microsoft.com/office/drawing/2010/main" xmlns="" w="9525">
+                  <a14:hiddenLine xmlns="" xmlns:a14="http://schemas.microsoft.com/office/drawing/2010/main" w="9525">
                     <a:solidFill>
                       <a:srgbClr val="000000"/>
                     </a:solidFill>
@@ -10498,7 +10499,7 @@
               </a:ln>
               <a:extLst>
                 <a:ext uri="{91240B29-F687-4f45-9708-019B960494DF}">
-                  <a14:hiddenLine xmlns:a14="http://schemas.microsoft.com/office/drawing/2010/main" xmlns="" w="9525">
+                  <a14:hiddenLine xmlns="" xmlns:a14="http://schemas.microsoft.com/office/drawing/2010/main" w="9525">
                     <a:solidFill>
                       <a:srgbClr val="000000"/>
                     </a:solidFill>
@@ -10560,7 +10561,7 @@
               </a:ln>
               <a:extLst>
                 <a:ext uri="{91240B29-F687-4f45-9708-019B960494DF}">
-                  <a14:hiddenLine xmlns:a14="http://schemas.microsoft.com/office/drawing/2010/main" xmlns="" w="9525">
+                  <a14:hiddenLine xmlns="" xmlns:a14="http://schemas.microsoft.com/office/drawing/2010/main" w="9525">
                     <a:solidFill>
                       <a:srgbClr val="000000"/>
                     </a:solidFill>
@@ -10622,7 +10623,7 @@
               </a:ln>
               <a:extLst>
                 <a:ext uri="{91240B29-F687-4f45-9708-019B960494DF}">
-                  <a14:hiddenLine xmlns:a14="http://schemas.microsoft.com/office/drawing/2010/main" xmlns="" w="9525">
+                  <a14:hiddenLine xmlns="" xmlns:a14="http://schemas.microsoft.com/office/drawing/2010/main" w="9525">
                     <a:solidFill>
                       <a:srgbClr val="000000"/>
                     </a:solidFill>
@@ -10712,7 +10713,7 @@
               </a:ln>
               <a:extLst>
                 <a:ext uri="{91240B29-F687-4f45-9708-019B960494DF}">
-                  <a14:hiddenLine xmlns:a14="http://schemas.microsoft.com/office/drawing/2010/main" xmlns="" w="9525">
+                  <a14:hiddenLine xmlns="" xmlns:a14="http://schemas.microsoft.com/office/drawing/2010/main" w="9525">
                     <a:solidFill>
                       <a:srgbClr val="000000"/>
                     </a:solidFill>
@@ -10746,7 +10747,7 @@
               </a:ln>
               <a:extLst>
                 <a:ext uri="{91240B29-F687-4f45-9708-019B960494DF}">
-                  <a14:hiddenLine xmlns:a14="http://schemas.microsoft.com/office/drawing/2010/main" xmlns="" w="9525">
+                  <a14:hiddenLine xmlns="" xmlns:a14="http://schemas.microsoft.com/office/drawing/2010/main" w="9525">
                     <a:solidFill>
                       <a:srgbClr val="000000"/>
                     </a:solidFill>
@@ -10811,7 +10812,7 @@
               </a:ln>
               <a:extLst>
                 <a:ext uri="{91240B29-F687-4f45-9708-019B960494DF}">
-                  <a14:hiddenLine xmlns:a14="http://schemas.microsoft.com/office/drawing/2010/main" xmlns="" w="9525">
+                  <a14:hiddenLine xmlns="" xmlns:a14="http://schemas.microsoft.com/office/drawing/2010/main" w="9525">
                     <a:solidFill>
                       <a:srgbClr val="000000"/>
                     </a:solidFill>
@@ -10901,7 +10902,7 @@
               </a:ln>
               <a:extLst>
                 <a:ext uri="{91240B29-F687-4f45-9708-019B960494DF}">
-                  <a14:hiddenLine xmlns:a14="http://schemas.microsoft.com/office/drawing/2010/main" xmlns="" w="9525">
+                  <a14:hiddenLine xmlns="" xmlns:a14="http://schemas.microsoft.com/office/drawing/2010/main" w="9525">
                     <a:solidFill>
                       <a:srgbClr val="000000"/>
                     </a:solidFill>
@@ -10963,7 +10964,7 @@
               </a:ln>
               <a:extLst>
                 <a:ext uri="{91240B29-F687-4f45-9708-019B960494DF}">
-                  <a14:hiddenLine xmlns:a14="http://schemas.microsoft.com/office/drawing/2010/main" xmlns="" w="9525">
+                  <a14:hiddenLine xmlns="" xmlns:a14="http://schemas.microsoft.com/office/drawing/2010/main" w="9525">
                     <a:solidFill>
                       <a:srgbClr val="000000"/>
                     </a:solidFill>
@@ -11053,7 +11054,7 @@
               </a:ln>
               <a:extLst>
                 <a:ext uri="{91240B29-F687-4f45-9708-019B960494DF}">
-                  <a14:hiddenLine xmlns:a14="http://schemas.microsoft.com/office/drawing/2010/main" xmlns="" w="9525">
+                  <a14:hiddenLine xmlns="" xmlns:a14="http://schemas.microsoft.com/office/drawing/2010/main" w="9525">
                     <a:solidFill>
                       <a:srgbClr val="000000"/>
                     </a:solidFill>
@@ -11118,7 +11119,7 @@
               </a:ln>
               <a:extLst>
                 <a:ext uri="{91240B29-F687-4f45-9708-019B960494DF}">
-                  <a14:hiddenLine xmlns:a14="http://schemas.microsoft.com/office/drawing/2010/main" xmlns="" w="9525">
+                  <a14:hiddenLine xmlns="" xmlns:a14="http://schemas.microsoft.com/office/drawing/2010/main" w="9525">
                     <a:solidFill>
                       <a:srgbClr val="000000"/>
                     </a:solidFill>
@@ -11180,7 +11181,7 @@
               </a:ln>
               <a:extLst>
                 <a:ext uri="{91240B29-F687-4f45-9708-019B960494DF}">
-                  <a14:hiddenLine xmlns:a14="http://schemas.microsoft.com/office/drawing/2010/main" xmlns="" w="9525">
+                  <a14:hiddenLine xmlns="" xmlns:a14="http://schemas.microsoft.com/office/drawing/2010/main" w="9525">
                     <a:solidFill>
                       <a:srgbClr val="000000"/>
                     </a:solidFill>
@@ -11270,7 +11271,7 @@
               </a:ln>
               <a:extLst>
                 <a:ext uri="{91240B29-F687-4f45-9708-019B960494DF}">
-                  <a14:hiddenLine xmlns:a14="http://schemas.microsoft.com/office/drawing/2010/main" xmlns="" w="9525">
+                  <a14:hiddenLine xmlns="" xmlns:a14="http://schemas.microsoft.com/office/drawing/2010/main" w="9525">
                     <a:solidFill>
                       <a:srgbClr val="000000"/>
                     </a:solidFill>
@@ -11360,7 +11361,7 @@
               </a:ln>
               <a:extLst>
                 <a:ext uri="{91240B29-F687-4f45-9708-019B960494DF}">
-                  <a14:hiddenLine xmlns:a14="http://schemas.microsoft.com/office/drawing/2010/main" xmlns="" w="9525">
+                  <a14:hiddenLine xmlns="" xmlns:a14="http://schemas.microsoft.com/office/drawing/2010/main" w="9525">
                     <a:solidFill>
                       <a:srgbClr val="000000"/>
                     </a:solidFill>
@@ -11425,7 +11426,7 @@
               </a:ln>
               <a:extLst>
                 <a:ext uri="{91240B29-F687-4f45-9708-019B960494DF}">
-                  <a14:hiddenLine xmlns:a14="http://schemas.microsoft.com/office/drawing/2010/main" xmlns="" w="9525">
+                  <a14:hiddenLine xmlns="" xmlns:a14="http://schemas.microsoft.com/office/drawing/2010/main" w="9525">
                     <a:solidFill>
                       <a:srgbClr val="000000"/>
                     </a:solidFill>
@@ -11545,7 +11546,7 @@
               </a:ln>
               <a:extLst>
                 <a:ext uri="{91240B29-F687-4f45-9708-019B960494DF}">
-                  <a14:hiddenLine xmlns:a14="http://schemas.microsoft.com/office/drawing/2010/main" xmlns="" w="9525">
+                  <a14:hiddenLine xmlns="" xmlns:a14="http://schemas.microsoft.com/office/drawing/2010/main" w="9525">
                     <a:solidFill>
                       <a:srgbClr val="000000"/>
                     </a:solidFill>
@@ -11626,7 +11627,7 @@
               </a:ln>
               <a:extLst>
                 <a:ext uri="{91240B29-F687-4f45-9708-019B960494DF}">
-                  <a14:hiddenLine xmlns:a14="http://schemas.microsoft.com/office/drawing/2010/main" xmlns="" w="9525">
+                  <a14:hiddenLine xmlns="" xmlns:a14="http://schemas.microsoft.com/office/drawing/2010/main" w="9525">
                     <a:solidFill>
                       <a:srgbClr val="000000"/>
                     </a:solidFill>
@@ -11741,7 +11742,7 @@
               </a:ln>
               <a:extLst>
                 <a:ext uri="{91240B29-F687-4f45-9708-019B960494DF}">
-                  <a14:hiddenLine xmlns:a14="http://schemas.microsoft.com/office/drawing/2010/main" xmlns="" w="9525">
+                  <a14:hiddenLine xmlns="" xmlns:a14="http://schemas.microsoft.com/office/drawing/2010/main" w="9525">
                     <a:solidFill>
                       <a:srgbClr val="000000"/>
                     </a:solidFill>
@@ -11831,7 +11832,7 @@
               </a:ln>
               <a:extLst>
                 <a:ext uri="{91240B29-F687-4f45-9708-019B960494DF}">
-                  <a14:hiddenLine xmlns:a14="http://schemas.microsoft.com/office/drawing/2010/main" xmlns="" w="9525">
+                  <a14:hiddenLine xmlns="" xmlns:a14="http://schemas.microsoft.com/office/drawing/2010/main" w="9525">
                     <a:solidFill>
                       <a:srgbClr val="000000"/>
                     </a:solidFill>
@@ -11896,7 +11897,7 @@
               </a:ln>
               <a:extLst>
                 <a:ext uri="{91240B29-F687-4f45-9708-019B960494DF}">
-                  <a14:hiddenLine xmlns:a14="http://schemas.microsoft.com/office/drawing/2010/main" xmlns="" w="9525">
+                  <a14:hiddenLine xmlns="" xmlns:a14="http://schemas.microsoft.com/office/drawing/2010/main" w="9525">
                     <a:solidFill>
                       <a:srgbClr val="000000"/>
                     </a:solidFill>
@@ -11986,7 +11987,7 @@
               </a:ln>
               <a:extLst>
                 <a:ext uri="{91240B29-F687-4f45-9708-019B960494DF}">
-                  <a14:hiddenLine xmlns:a14="http://schemas.microsoft.com/office/drawing/2010/main" xmlns="" w="9525">
+                  <a14:hiddenLine xmlns="" xmlns:a14="http://schemas.microsoft.com/office/drawing/2010/main" w="9525">
                     <a:solidFill>
                       <a:srgbClr val="000000"/>
                     </a:solidFill>
@@ -12054,7 +12055,7 @@
               </a:ln>
               <a:extLst>
                 <a:ext uri="{91240B29-F687-4f45-9708-019B960494DF}">
-                  <a14:hiddenLine xmlns:a14="http://schemas.microsoft.com/office/drawing/2010/main" xmlns="" w="9525">
+                  <a14:hiddenLine xmlns="" xmlns:a14="http://schemas.microsoft.com/office/drawing/2010/main" w="9525">
                     <a:solidFill>
                       <a:srgbClr val="000000"/>
                     </a:solidFill>
@@ -12144,7 +12145,7 @@
               </a:ln>
               <a:extLst>
                 <a:ext uri="{91240B29-F687-4f45-9708-019B960494DF}">
-                  <a14:hiddenLine xmlns:a14="http://schemas.microsoft.com/office/drawing/2010/main" xmlns="" w="9525">
+                  <a14:hiddenLine xmlns="" xmlns:a14="http://schemas.microsoft.com/office/drawing/2010/main" w="9525">
                     <a:solidFill>
                       <a:srgbClr val="000000"/>
                     </a:solidFill>
@@ -12212,7 +12213,7 @@
               </a:ln>
               <a:extLst>
                 <a:ext uri="{91240B29-F687-4f45-9708-019B960494DF}">
-                  <a14:hiddenLine xmlns:a14="http://schemas.microsoft.com/office/drawing/2010/main" xmlns="" w="9525">
+                  <a14:hiddenLine xmlns="" xmlns:a14="http://schemas.microsoft.com/office/drawing/2010/main" w="9525">
                     <a:solidFill>
                       <a:srgbClr val="000000"/>
                     </a:solidFill>
@@ -12302,7 +12303,7 @@
               </a:ln>
               <a:extLst>
                 <a:ext uri="{91240B29-F687-4f45-9708-019B960494DF}">
-                  <a14:hiddenLine xmlns:a14="http://schemas.microsoft.com/office/drawing/2010/main" xmlns="" w="9525">
+                  <a14:hiddenLine xmlns="" xmlns:a14="http://schemas.microsoft.com/office/drawing/2010/main" w="9525">
                     <a:solidFill>
                       <a:srgbClr val="000000"/>
                     </a:solidFill>
@@ -12336,7 +12337,7 @@
               </a:ln>
               <a:extLst>
                 <a:ext uri="{91240B29-F687-4f45-9708-019B960494DF}">
-                  <a14:hiddenLine xmlns:a14="http://schemas.microsoft.com/office/drawing/2010/main" xmlns="" w="9525">
+                  <a14:hiddenLine xmlns="" xmlns:a14="http://schemas.microsoft.com/office/drawing/2010/main" w="9525">
                     <a:solidFill>
                       <a:srgbClr val="000000"/>
                     </a:solidFill>
@@ -12476,7 +12477,7 @@
           <a:p>
             <a:fld id="{92FF8978-FE14-CC4A-93A6-934EB06543C0}" type="datetime1">
               <a:rPr lang="en-US" smtClean="0"/>
-              <a:t>7/30/26</a:t>
+              <a:t>8/3/26</a:t>
             </a:fld>
             <a:endParaRPr lang="en-US"/>
           </a:p>
@@ -13909,6 +13910,296 @@
 </file>
 
 <file path=ppt/slides/slide14.xml><?xml version="1.0" encoding="utf-8"?>
+<p:sld xmlns:a="http://schemas.openxmlformats.org/drawingml/2006/main" xmlns:r="http://schemas.openxmlformats.org/officeDocument/2006/relationships" xmlns:p="http://schemas.openxmlformats.org/presentationml/2006/main">
+  <p:cSld>
+    <p:spTree>
+      <p:nvGrpSpPr>
+        <p:cNvPr id="1" name="">
+          <a:extLst>
+            <a:ext uri="{FF2B5EF4-FFF2-40B4-BE49-F238E27FC236}">
+              <a16:creationId xmlns:a16="http://schemas.microsoft.com/office/drawing/2014/main" id="{F1DF574A-7DD4-13AA-21AE-C41D6DC66C78}"/>
+            </a:ext>
+          </a:extLst>
+        </p:cNvPr>
+        <p:cNvGrpSpPr/>
+        <p:nvPr/>
+      </p:nvGrpSpPr>
+      <p:grpSpPr>
+        <a:xfrm>
+          <a:off x="0" y="0"/>
+          <a:ext cx="0" cy="0"/>
+          <a:chOff x="0" y="0"/>
+          <a:chExt cx="0" cy="0"/>
+        </a:xfrm>
+      </p:grpSpPr>
+      <p:sp>
+        <p:nvSpPr>
+          <p:cNvPr id="6146" name="Rectangle 2">
+            <a:extLst>
+              <a:ext uri="{FF2B5EF4-FFF2-40B4-BE49-F238E27FC236}">
+                <a16:creationId xmlns:a16="http://schemas.microsoft.com/office/drawing/2014/main" id="{86E6182E-FB84-1025-DD07-D031D935218B}"/>
+              </a:ext>
+            </a:extLst>
+          </p:cNvPr>
+          <p:cNvSpPr>
+            <a:spLocks noGrp="1" noChangeArrowheads="1"/>
+          </p:cNvSpPr>
+          <p:nvPr>
+            <p:ph type="title"/>
+            <p:custDataLst>
+              <p:tags r:id="rId1"/>
+            </p:custDataLst>
+          </p:nvPr>
+        </p:nvSpPr>
+        <p:spPr>
+          <a:xfrm>
+            <a:off x="1141413" y="284084"/>
+            <a:ext cx="9905998" cy="620791"/>
+          </a:xfrm>
+        </p:spPr>
+        <p:txBody>
+          <a:bodyPr/>
+          <a:lstStyle/>
+          <a:p>
+            <a:pPr algn="ctr"/>
+            <a:r>
+              <a:rPr lang="en-US" dirty="0"/>
+              <a:t>Week 4: Friday</a:t>
+            </a:r>
+          </a:p>
+        </p:txBody>
+      </p:sp>
+      <p:sp>
+        <p:nvSpPr>
+          <p:cNvPr id="6147" name="Rectangle 3">
+            <a:extLst>
+              <a:ext uri="{FF2B5EF4-FFF2-40B4-BE49-F238E27FC236}">
+                <a16:creationId xmlns:a16="http://schemas.microsoft.com/office/drawing/2014/main" id="{93AD5080-21F1-77E4-2468-4EF17E752A9D}"/>
+              </a:ext>
+            </a:extLst>
+          </p:cNvPr>
+          <p:cNvSpPr>
+            <a:spLocks noGrp="1" noChangeArrowheads="1"/>
+          </p:cNvSpPr>
+          <p:nvPr>
+            <p:ph idx="1"/>
+            <p:custDataLst>
+              <p:tags r:id="rId2"/>
+            </p:custDataLst>
+          </p:nvPr>
+        </p:nvSpPr>
+        <p:spPr>
+          <a:xfrm>
+            <a:off x="1294151" y="1098548"/>
+            <a:ext cx="9600522" cy="5475367"/>
+          </a:xfrm>
+        </p:spPr>
+        <p:txBody>
+          <a:bodyPr>
+            <a:normAutofit fontScale="70000" lnSpcReduction="20000"/>
+          </a:bodyPr>
+          <a:lstStyle/>
+          <a:p>
+            <a:r>
+              <a:rPr lang="en-US" dirty="0">
+                <a:latin typeface="Arial" panose="020B0604020202020204" pitchFamily="34" charset="0"/>
+                <a:cs typeface="Arial" panose="020B0604020202020204" pitchFamily="34" charset="0"/>
+              </a:rPr>
+              <a:t>Final week! You got this!!</a:t>
+            </a:r>
+          </a:p>
+          <a:p>
+            <a:r>
+              <a:rPr lang="en-US" dirty="0">
+                <a:latin typeface="Arial" panose="020B0604020202020204" pitchFamily="34" charset="0"/>
+                <a:cs typeface="Arial" panose="020B0604020202020204" pitchFamily="34" charset="0"/>
+              </a:rPr>
+              <a:t>This week:</a:t>
+            </a:r>
+            <a:endParaRPr lang="en-US" b="1" i="1" dirty="0">
+              <a:latin typeface="Arial" panose="020B0604020202020204" pitchFamily="34" charset="0"/>
+              <a:cs typeface="Arial" panose="020B0604020202020204" pitchFamily="34" charset="0"/>
+            </a:endParaRPr>
+          </a:p>
+          <a:p>
+            <a:pPr lvl="1"/>
+            <a:r>
+              <a:rPr lang="en-US" dirty="0">
+                <a:latin typeface="Arial" panose="020B0604020202020204" pitchFamily="34" charset="0"/>
+                <a:cs typeface="Arial" panose="020B0604020202020204" pitchFamily="34" charset="0"/>
+              </a:rPr>
+              <a:t>Mod 3 Written Assignment is Due </a:t>
+            </a:r>
+            <a:r>
+              <a:rPr lang="en-US" b="1" i="1" u="sng" dirty="0">
+                <a:latin typeface="Arial" panose="020B0604020202020204" pitchFamily="34" charset="0"/>
+                <a:cs typeface="Arial" panose="020B0604020202020204" pitchFamily="34" charset="0"/>
+              </a:rPr>
+              <a:t>TONIGHT</a:t>
+            </a:r>
+            <a:r>
+              <a:rPr lang="en-US" dirty="0">
+                <a:latin typeface="Arial" panose="020B0604020202020204" pitchFamily="34" charset="0"/>
+                <a:cs typeface="Arial" panose="020B0604020202020204" pitchFamily="34" charset="0"/>
+              </a:rPr>
+              <a:t>!</a:t>
+            </a:r>
+          </a:p>
+          <a:p>
+            <a:pPr lvl="1"/>
+            <a:r>
+              <a:rPr lang="en-US" dirty="0">
+                <a:latin typeface="Arial" panose="020B0604020202020204" pitchFamily="34" charset="0"/>
+                <a:cs typeface="Arial" panose="020B0604020202020204" pitchFamily="34" charset="0"/>
+              </a:rPr>
+              <a:t>Mod 4 Written Assignment Due THURSDAY NIGHT!</a:t>
+            </a:r>
+          </a:p>
+          <a:p>
+            <a:pPr lvl="1"/>
+            <a:r>
+              <a:rPr lang="en-US" dirty="0">
+                <a:latin typeface="Arial" panose="020B0604020202020204" pitchFamily="34" charset="0"/>
+                <a:cs typeface="Arial" panose="020B0604020202020204" pitchFamily="34" charset="0"/>
+              </a:rPr>
+              <a:t>Final Exam is on Friday</a:t>
+            </a:r>
+          </a:p>
+          <a:p>
+            <a:r>
+              <a:rPr lang="en-US" dirty="0">
+                <a:latin typeface="Arial" panose="020B0604020202020204" pitchFamily="34" charset="0"/>
+                <a:cs typeface="Arial" panose="020B0604020202020204" pitchFamily="34" charset="0"/>
+              </a:rPr>
+              <a:t>Mod 4 Written Assignment.</a:t>
+            </a:r>
+          </a:p>
+          <a:p>
+            <a:pPr lvl="1"/>
+            <a:r>
+              <a:rPr lang="en-US" dirty="0">
+                <a:latin typeface="Arial" panose="020B0604020202020204" pitchFamily="34" charset="0"/>
+                <a:cs typeface="Arial" panose="020B0604020202020204" pitchFamily="34" charset="0"/>
+              </a:rPr>
+              <a:t>Extension is only through Friday night (sorry) because I want to get final grades in Saturday</a:t>
+            </a:r>
+          </a:p>
+          <a:p>
+            <a:r>
+              <a:rPr lang="en-US" dirty="0">
+                <a:latin typeface="Arial" panose="020B0604020202020204" pitchFamily="34" charset="0"/>
+                <a:cs typeface="Arial" panose="020B0604020202020204" pitchFamily="34" charset="0"/>
+              </a:rPr>
+              <a:t>Final Exam</a:t>
+            </a:r>
+          </a:p>
+          <a:p>
+            <a:pPr lvl="1"/>
+            <a:r>
+              <a:rPr lang="en-US" dirty="0">
+                <a:latin typeface="Arial" panose="020B0604020202020204" pitchFamily="34" charset="0"/>
+                <a:cs typeface="Arial" panose="020B0604020202020204" pitchFamily="34" charset="0"/>
+              </a:rPr>
+              <a:t>You will have the full class period (10:30-12:45)</a:t>
+            </a:r>
+          </a:p>
+          <a:p>
+            <a:pPr lvl="1"/>
+            <a:r>
+              <a:rPr lang="en-US" dirty="0">
+                <a:latin typeface="Arial" panose="020B0604020202020204" pitchFamily="34" charset="0"/>
+                <a:cs typeface="Arial" panose="020B0604020202020204" pitchFamily="34" charset="0"/>
+              </a:rPr>
+              <a:t>Will cover the entire course, with an emphasis on modules 3 (Turing Machines) and 4 (Complexity Theory)</a:t>
+            </a:r>
+          </a:p>
+          <a:p>
+            <a:r>
+              <a:rPr lang="en-US" dirty="0">
+                <a:latin typeface="Arial" panose="020B0604020202020204" pitchFamily="34" charset="0"/>
+                <a:cs typeface="Arial" panose="020B0604020202020204" pitchFamily="34" charset="0"/>
+              </a:rPr>
+              <a:t>Lecture recordings from last Fall are posted on Panopto on Canvas</a:t>
+            </a:r>
+          </a:p>
+          <a:p>
+            <a:pPr lvl="1"/>
+            <a:r>
+              <a:rPr lang="en-US" dirty="0">
+                <a:latin typeface="Arial" panose="020B0604020202020204" pitchFamily="34" charset="0"/>
+                <a:cs typeface="Arial" panose="020B0604020202020204" pitchFamily="34" charset="0"/>
+              </a:rPr>
+              <a:t>I posted ALL the videos FYI</a:t>
+            </a:r>
+          </a:p>
+          <a:p>
+            <a:r>
+              <a:rPr lang="en-US" dirty="0">
+                <a:latin typeface="Arial" panose="020B0604020202020204" pitchFamily="34" charset="0"/>
+                <a:cs typeface="Arial" panose="020B0604020202020204" pitchFamily="34" charset="0"/>
+              </a:rPr>
+              <a:t>Please remember that I am asking for NO laptop / phones!</a:t>
+            </a:r>
+          </a:p>
+          <a:p>
+            <a:pPr lvl="1"/>
+            <a:r>
+              <a:rPr lang="en-US" dirty="0">
+                <a:latin typeface="Arial" panose="020B0604020202020204" pitchFamily="34" charset="0"/>
+                <a:cs typeface="Arial" panose="020B0604020202020204" pitchFamily="34" charset="0"/>
+              </a:rPr>
+              <a:t>This makes the learning environment better for everybody. I appreciate it!</a:t>
+            </a:r>
+          </a:p>
+          <a:p>
+            <a:r>
+              <a:rPr lang="en-US" dirty="0">
+                <a:latin typeface="Arial" panose="020B0604020202020204" pitchFamily="34" charset="0"/>
+                <a:cs typeface="Arial" panose="020B0604020202020204" pitchFamily="34" charset="0"/>
+              </a:rPr>
+              <a:t>Attendance continues today as usual.</a:t>
+            </a:r>
+          </a:p>
+          <a:p>
+            <a:r>
+              <a:rPr lang="en-US" dirty="0">
+                <a:latin typeface="Arial" panose="020B0604020202020204" pitchFamily="34" charset="0"/>
+                <a:cs typeface="Arial" panose="020B0604020202020204" pitchFamily="34" charset="0"/>
+              </a:rPr>
+              <a:t>Today we begin the last module</a:t>
+            </a:r>
+          </a:p>
+          <a:p>
+            <a:pPr marL="0" indent="0">
+              <a:buNone/>
+            </a:pPr>
+            <a:endParaRPr lang="en-US" dirty="0">
+              <a:latin typeface="Arial" panose="020B0604020202020204" pitchFamily="34" charset="0"/>
+              <a:cs typeface="Arial" panose="020B0604020202020204" pitchFamily="34" charset="0"/>
+            </a:endParaRPr>
+          </a:p>
+          <a:p>
+            <a:endParaRPr lang="en-US" dirty="0">
+              <a:latin typeface="Arial" panose="020B0604020202020204" pitchFamily="34" charset="0"/>
+              <a:cs typeface="Arial" panose="020B0604020202020204" pitchFamily="34" charset="0"/>
+            </a:endParaRPr>
+          </a:p>
+        </p:txBody>
+      </p:sp>
+    </p:spTree>
+    <p:extLst>
+      <p:ext uri="{BB962C8B-B14F-4D97-AF65-F5344CB8AC3E}">
+        <p14:creationId xmlns:p14="http://schemas.microsoft.com/office/powerpoint/2010/main" val="2964696306"/>
+      </p:ext>
+    </p:extLst>
+  </p:cSld>
+  <p:clrMapOvr>
+    <a:masterClrMapping/>
+  </p:clrMapOvr>
+</p:sld>
+</file>
+
+<file path=ppt/slides/slide15.xml><?xml version="1.0" encoding="utf-8"?>
 <p:sld xmlns:a="http://schemas.openxmlformats.org/drawingml/2006/main" xmlns:r="http://schemas.openxmlformats.org/officeDocument/2006/relationships" xmlns:p="http://schemas.openxmlformats.org/presentationml/2006/main">
   <p:cSld>
     <p:spTree>
@@ -17653,6 +17944,18 @@
 </p:tagLst>
 </file>
 
+<file path=ppt/tags/tag30.xml><?xml version="1.0" encoding="utf-8"?>
+<p:tagLst xmlns:a="http://schemas.openxmlformats.org/drawingml/2006/main" xmlns:r="http://schemas.openxmlformats.org/officeDocument/2006/relationships" xmlns:p="http://schemas.openxmlformats.org/presentationml/2006/main">
+  <p:tag name="_INSTRUCTOR VIEW19C14C36-AC8E-43BC-9DB6-C2AAF774C7DC|PANE__TAG" val="_"/>
+</p:tagLst>
+</file>
+
+<file path=ppt/tags/tag31.xml><?xml version="1.0" encoding="utf-8"?>
+<p:tagLst xmlns:a="http://schemas.openxmlformats.org/drawingml/2006/main" xmlns:r="http://schemas.openxmlformats.org/officeDocument/2006/relationships" xmlns:p="http://schemas.openxmlformats.org/presentationml/2006/main">
+  <p:tag name="_INSTRUCTOR VIEW19C14C36-AC8E-43BC-9DB6-C2AAF774C7DC|PANE__TAG" val="_"/>
+</p:tagLst>
+</file>
+
 <file path=ppt/tags/tag4.xml><?xml version="1.0" encoding="utf-8"?>
 <p:tagLst xmlns:a="http://schemas.openxmlformats.org/drawingml/2006/main" xmlns:r="http://schemas.openxmlformats.org/officeDocument/2006/relationships" xmlns:p="http://schemas.openxmlformats.org/presentationml/2006/main">
   <p:tag name="_INSTRUCTOR VIEW19C14C36-AC8E-43BC-9DB6-C2AAF774C7DC|PANE__TAG" val="_"/>

--- a/slides/00-DailyAnnouncements.pptx
+++ b/slides/00-DailyAnnouncements.pptx
@@ -619,7 +619,7 @@
           <a:noFill/>
           <a:extLst>
             <a:ext uri="{909E8E84-426E-40dd-AFC4-6F175D3DCCD1}">
-              <a14:hiddenFill xmlns="" xmlns:a14="http://schemas.microsoft.com/office/drawing/2010/main">
+              <a14:hiddenFill xmlns:a14="http://schemas.microsoft.com/office/drawing/2010/main" xmlns="">
                 <a:solidFill>
                   <a:srgbClr val="FFFFFF"/>
                 </a:solidFill>
@@ -678,7 +678,7 @@
             </a:ln>
             <a:extLst>
               <a:ext uri="{91240B29-F687-4f45-9708-019B960494DF}">
-                <a14:hiddenLine xmlns="" xmlns:a14="http://schemas.microsoft.com/office/drawing/2010/main" w="9525">
+                <a14:hiddenLine xmlns:a14="http://schemas.microsoft.com/office/drawing/2010/main" xmlns="" w="9525">
                   <a:solidFill>
                     <a:srgbClr val="000000"/>
                   </a:solidFill>
@@ -768,7 +768,7 @@
             </a:ln>
             <a:extLst>
               <a:ext uri="{91240B29-F687-4f45-9708-019B960494DF}">
-                <a14:hiddenLine xmlns="" xmlns:a14="http://schemas.microsoft.com/office/drawing/2010/main" w="9525">
+                <a14:hiddenLine xmlns:a14="http://schemas.microsoft.com/office/drawing/2010/main" xmlns="" w="9525">
                   <a:solidFill>
                     <a:srgbClr val="000000"/>
                   </a:solidFill>
@@ -858,7 +858,7 @@
             </a:ln>
             <a:extLst>
               <a:ext uri="{91240B29-F687-4f45-9708-019B960494DF}">
-                <a14:hiddenLine xmlns="" xmlns:a14="http://schemas.microsoft.com/office/drawing/2010/main" w="9525">
+                <a14:hiddenLine xmlns:a14="http://schemas.microsoft.com/office/drawing/2010/main" xmlns="" w="9525">
                   <a:solidFill>
                     <a:srgbClr val="000000"/>
                   </a:solidFill>
@@ -892,7 +892,7 @@
             </a:ln>
             <a:extLst>
               <a:ext uri="{91240B29-F687-4f45-9708-019B960494DF}">
-                <a14:hiddenLine xmlns="" xmlns:a14="http://schemas.microsoft.com/office/drawing/2010/main" w="9525">
+                <a14:hiddenLine xmlns:a14="http://schemas.microsoft.com/office/drawing/2010/main" xmlns="" w="9525">
                   <a:solidFill>
                     <a:srgbClr val="000000"/>
                   </a:solidFill>
@@ -982,7 +982,7 @@
             </a:ln>
             <a:extLst>
               <a:ext uri="{91240B29-F687-4f45-9708-019B960494DF}">
-                <a14:hiddenLine xmlns="" xmlns:a14="http://schemas.microsoft.com/office/drawing/2010/main" w="9525">
+                <a14:hiddenLine xmlns:a14="http://schemas.microsoft.com/office/drawing/2010/main" xmlns="" w="9525">
                   <a:solidFill>
                     <a:srgbClr val="000000"/>
                   </a:solidFill>
@@ -1044,7 +1044,7 @@
             </a:ln>
             <a:extLst>
               <a:ext uri="{91240B29-F687-4f45-9708-019B960494DF}">
-                <a14:hiddenLine xmlns="" xmlns:a14="http://schemas.microsoft.com/office/drawing/2010/main" w="9525">
+                <a14:hiddenLine xmlns:a14="http://schemas.microsoft.com/office/drawing/2010/main" xmlns="" w="9525">
                   <a:solidFill>
                     <a:srgbClr val="000000"/>
                   </a:solidFill>
@@ -1106,7 +1106,7 @@
             </a:ln>
             <a:extLst>
               <a:ext uri="{91240B29-F687-4f45-9708-019B960494DF}">
-                <a14:hiddenLine xmlns="" xmlns:a14="http://schemas.microsoft.com/office/drawing/2010/main" w="9525">
+                <a14:hiddenLine xmlns:a14="http://schemas.microsoft.com/office/drawing/2010/main" xmlns="" w="9525">
                   <a:solidFill>
                     <a:srgbClr val="000000"/>
                   </a:solidFill>
@@ -1196,7 +1196,7 @@
             </a:ln>
             <a:extLst>
               <a:ext uri="{91240B29-F687-4f45-9708-019B960494DF}">
-                <a14:hiddenLine xmlns="" xmlns:a14="http://schemas.microsoft.com/office/drawing/2010/main" w="9525">
+                <a14:hiddenLine xmlns:a14="http://schemas.microsoft.com/office/drawing/2010/main" xmlns="" w="9525">
                   <a:solidFill>
                     <a:srgbClr val="000000"/>
                   </a:solidFill>
@@ -1258,7 +1258,7 @@
             </a:ln>
             <a:extLst>
               <a:ext uri="{91240B29-F687-4f45-9708-019B960494DF}">
-                <a14:hiddenLine xmlns="" xmlns:a14="http://schemas.microsoft.com/office/drawing/2010/main" w="9525">
+                <a14:hiddenLine xmlns:a14="http://schemas.microsoft.com/office/drawing/2010/main" xmlns="" w="9525">
                   <a:solidFill>
                     <a:srgbClr val="000000"/>
                   </a:solidFill>
@@ -1320,7 +1320,7 @@
             </a:ln>
             <a:extLst>
               <a:ext uri="{91240B29-F687-4f45-9708-019B960494DF}">
-                <a14:hiddenLine xmlns="" xmlns:a14="http://schemas.microsoft.com/office/drawing/2010/main" w="9525">
+                <a14:hiddenLine xmlns:a14="http://schemas.microsoft.com/office/drawing/2010/main" xmlns="" w="9525">
                   <a:solidFill>
                     <a:srgbClr val="000000"/>
                   </a:solidFill>
@@ -1410,7 +1410,7 @@
             </a:ln>
             <a:extLst>
               <a:ext uri="{91240B29-F687-4f45-9708-019B960494DF}">
-                <a14:hiddenLine xmlns="" xmlns:a14="http://schemas.microsoft.com/office/drawing/2010/main" w="9525">
+                <a14:hiddenLine xmlns:a14="http://schemas.microsoft.com/office/drawing/2010/main" xmlns="" w="9525">
                   <a:solidFill>
                     <a:srgbClr val="000000"/>
                   </a:solidFill>
@@ -1500,7 +1500,7 @@
             </a:ln>
             <a:extLst>
               <a:ext uri="{91240B29-F687-4f45-9708-019B960494DF}">
-                <a14:hiddenLine xmlns="" xmlns:a14="http://schemas.microsoft.com/office/drawing/2010/main" w="9525">
+                <a14:hiddenLine xmlns:a14="http://schemas.microsoft.com/office/drawing/2010/main" xmlns="" w="9525">
                   <a:solidFill>
                     <a:srgbClr val="000000"/>
                   </a:solidFill>
@@ -1562,7 +1562,7 @@
             </a:ln>
             <a:extLst>
               <a:ext uri="{91240B29-F687-4f45-9708-019B960494DF}">
-                <a14:hiddenLine xmlns="" xmlns:a14="http://schemas.microsoft.com/office/drawing/2010/main" w="9525">
+                <a14:hiddenLine xmlns:a14="http://schemas.microsoft.com/office/drawing/2010/main" xmlns="" w="9525">
                   <a:solidFill>
                     <a:srgbClr val="000000"/>
                   </a:solidFill>
@@ -1672,7 +1672,7 @@
             </a:ln>
             <a:extLst>
               <a:ext uri="{91240B29-F687-4f45-9708-019B960494DF}">
-                <a14:hiddenLine xmlns="" xmlns:a14="http://schemas.microsoft.com/office/drawing/2010/main" w="9525">
+                <a14:hiddenLine xmlns:a14="http://schemas.microsoft.com/office/drawing/2010/main" xmlns="" w="9525">
                   <a:solidFill>
                     <a:srgbClr val="000000"/>
                   </a:solidFill>
@@ -1734,7 +1734,7 @@
             </a:ln>
             <a:extLst>
               <a:ext uri="{91240B29-F687-4f45-9708-019B960494DF}">
-                <a14:hiddenLine xmlns="" xmlns:a14="http://schemas.microsoft.com/office/drawing/2010/main" w="9525">
+                <a14:hiddenLine xmlns:a14="http://schemas.microsoft.com/office/drawing/2010/main" xmlns="" w="9525">
                   <a:solidFill>
                     <a:srgbClr val="000000"/>
                   </a:solidFill>
@@ -1824,7 +1824,7 @@
             </a:ln>
             <a:extLst>
               <a:ext uri="{91240B29-F687-4f45-9708-019B960494DF}">
-                <a14:hiddenLine xmlns="" xmlns:a14="http://schemas.microsoft.com/office/drawing/2010/main" w="9525">
+                <a14:hiddenLine xmlns:a14="http://schemas.microsoft.com/office/drawing/2010/main" xmlns="" w="9525">
                   <a:solidFill>
                     <a:srgbClr val="000000"/>
                   </a:solidFill>
@@ -1914,7 +1914,7 @@
             </a:ln>
             <a:extLst>
               <a:ext uri="{91240B29-F687-4f45-9708-019B960494DF}">
-                <a14:hiddenLine xmlns="" xmlns:a14="http://schemas.microsoft.com/office/drawing/2010/main" w="9525">
+                <a14:hiddenLine xmlns:a14="http://schemas.microsoft.com/office/drawing/2010/main" xmlns="" w="9525">
                   <a:solidFill>
                     <a:srgbClr val="000000"/>
                   </a:solidFill>
@@ -1976,7 +1976,7 @@
             </a:ln>
             <a:extLst>
               <a:ext uri="{91240B29-F687-4f45-9708-019B960494DF}">
-                <a14:hiddenLine xmlns="" xmlns:a14="http://schemas.microsoft.com/office/drawing/2010/main" w="9525">
+                <a14:hiddenLine xmlns:a14="http://schemas.microsoft.com/office/drawing/2010/main" xmlns="" w="9525">
                   <a:solidFill>
                     <a:srgbClr val="000000"/>
                   </a:solidFill>
@@ -2066,7 +2066,7 @@
             </a:ln>
             <a:extLst>
               <a:ext uri="{91240B29-F687-4f45-9708-019B960494DF}">
-                <a14:hiddenLine xmlns="" xmlns:a14="http://schemas.microsoft.com/office/drawing/2010/main" w="9525">
+                <a14:hiddenLine xmlns:a14="http://schemas.microsoft.com/office/drawing/2010/main" xmlns="" w="9525">
                   <a:solidFill>
                     <a:srgbClr val="000000"/>
                   </a:solidFill>
@@ -2156,7 +2156,7 @@
             </a:ln>
             <a:extLst>
               <a:ext uri="{91240B29-F687-4f45-9708-019B960494DF}">
-                <a14:hiddenLine xmlns="" xmlns:a14="http://schemas.microsoft.com/office/drawing/2010/main" w="9525">
+                <a14:hiddenLine xmlns:a14="http://schemas.microsoft.com/office/drawing/2010/main" xmlns="" w="9525">
                   <a:solidFill>
                     <a:srgbClr val="000000"/>
                   </a:solidFill>
@@ -2212,7 +2212,7 @@
             </a:ln>
             <a:extLst>
               <a:ext uri="{91240B29-F687-4f45-9708-019B960494DF}">
-                <a14:hiddenLine xmlns="" xmlns:a14="http://schemas.microsoft.com/office/drawing/2010/main" w="9525">
+                <a14:hiddenLine xmlns:a14="http://schemas.microsoft.com/office/drawing/2010/main" xmlns="" w="9525">
                   <a:solidFill>
                     <a:srgbClr val="000000"/>
                   </a:solidFill>
@@ -2302,7 +2302,7 @@
             </a:ln>
             <a:extLst>
               <a:ext uri="{91240B29-F687-4f45-9708-019B960494DF}">
-                <a14:hiddenLine xmlns="" xmlns:a14="http://schemas.microsoft.com/office/drawing/2010/main" w="9525">
+                <a14:hiddenLine xmlns:a14="http://schemas.microsoft.com/office/drawing/2010/main" xmlns="" w="9525">
                   <a:solidFill>
                     <a:srgbClr val="000000"/>
                   </a:solidFill>
@@ -2358,7 +2358,7 @@
             </a:ln>
             <a:extLst>
               <a:ext uri="{91240B29-F687-4f45-9708-019B960494DF}">
-                <a14:hiddenLine xmlns="" xmlns:a14="http://schemas.microsoft.com/office/drawing/2010/main" w="9525">
+                <a14:hiddenLine xmlns:a14="http://schemas.microsoft.com/office/drawing/2010/main" xmlns="" w="9525">
                   <a:solidFill>
                     <a:srgbClr val="000000"/>
                   </a:solidFill>
@@ -2448,7 +2448,7 @@
             </a:ln>
             <a:extLst>
               <a:ext uri="{91240B29-F687-4f45-9708-019B960494DF}">
-                <a14:hiddenLine xmlns="" xmlns:a14="http://schemas.microsoft.com/office/drawing/2010/main" w="9525">
+                <a14:hiddenLine xmlns:a14="http://schemas.microsoft.com/office/drawing/2010/main" xmlns="" w="9525">
                   <a:solidFill>
                     <a:srgbClr val="000000"/>
                   </a:solidFill>
@@ -2516,7 +2516,7 @@
             </a:ln>
             <a:extLst>
               <a:ext uri="{91240B29-F687-4f45-9708-019B960494DF}">
-                <a14:hiddenLine xmlns="" xmlns:a14="http://schemas.microsoft.com/office/drawing/2010/main" w="9525">
+                <a14:hiddenLine xmlns:a14="http://schemas.microsoft.com/office/drawing/2010/main" xmlns="" w="9525">
                   <a:solidFill>
                     <a:srgbClr val="000000"/>
                   </a:solidFill>
@@ -2606,7 +2606,7 @@
             </a:ln>
             <a:extLst>
               <a:ext uri="{91240B29-F687-4f45-9708-019B960494DF}">
-                <a14:hiddenLine xmlns="" xmlns:a14="http://schemas.microsoft.com/office/drawing/2010/main" w="9525">
+                <a14:hiddenLine xmlns:a14="http://schemas.microsoft.com/office/drawing/2010/main" xmlns="" w="9525">
                   <a:solidFill>
                     <a:srgbClr val="000000"/>
                   </a:solidFill>
@@ -2674,7 +2674,7 @@
             </a:ln>
             <a:extLst>
               <a:ext uri="{91240B29-F687-4f45-9708-019B960494DF}">
-                <a14:hiddenLine xmlns="" xmlns:a14="http://schemas.microsoft.com/office/drawing/2010/main" w="9525">
+                <a14:hiddenLine xmlns:a14="http://schemas.microsoft.com/office/drawing/2010/main" xmlns="" w="9525">
                   <a:solidFill>
                     <a:srgbClr val="000000"/>
                   </a:solidFill>
@@ -2764,7 +2764,7 @@
             </a:ln>
             <a:extLst>
               <a:ext uri="{91240B29-F687-4f45-9708-019B960494DF}">
-                <a14:hiddenLine xmlns="" xmlns:a14="http://schemas.microsoft.com/office/drawing/2010/main" w="9525">
+                <a14:hiddenLine xmlns:a14="http://schemas.microsoft.com/office/drawing/2010/main" xmlns="" w="9525">
                   <a:solidFill>
                     <a:srgbClr val="000000"/>
                   </a:solidFill>
@@ -2798,7 +2798,7 @@
             </a:ln>
             <a:extLst>
               <a:ext uri="{91240B29-F687-4f45-9708-019B960494DF}">
-                <a14:hiddenLine xmlns="" xmlns:a14="http://schemas.microsoft.com/office/drawing/2010/main" w="9525">
+                <a14:hiddenLine xmlns:a14="http://schemas.microsoft.com/office/drawing/2010/main" xmlns="" w="9525">
                   <a:solidFill>
                     <a:srgbClr val="000000"/>
                   </a:solidFill>
@@ -2888,7 +2888,7 @@
             </a:ln>
             <a:extLst>
               <a:ext uri="{91240B29-F687-4f45-9708-019B960494DF}">
-                <a14:hiddenLine xmlns="" xmlns:a14="http://schemas.microsoft.com/office/drawing/2010/main" w="9525">
+                <a14:hiddenLine xmlns:a14="http://schemas.microsoft.com/office/drawing/2010/main" xmlns="" w="9525">
                   <a:solidFill>
                     <a:srgbClr val="000000"/>
                   </a:solidFill>
@@ -2950,7 +2950,7 @@
             </a:ln>
             <a:extLst>
               <a:ext uri="{91240B29-F687-4f45-9708-019B960494DF}">
-                <a14:hiddenLine xmlns="" xmlns:a14="http://schemas.microsoft.com/office/drawing/2010/main" w="9525">
+                <a14:hiddenLine xmlns:a14="http://schemas.microsoft.com/office/drawing/2010/main" xmlns="" w="9525">
                   <a:solidFill>
                     <a:srgbClr val="000000"/>
                   </a:solidFill>
@@ -3012,7 +3012,7 @@
             </a:ln>
             <a:extLst>
               <a:ext uri="{91240B29-F687-4f45-9708-019B960494DF}">
-                <a14:hiddenLine xmlns="" xmlns:a14="http://schemas.microsoft.com/office/drawing/2010/main" w="9525">
+                <a14:hiddenLine xmlns:a14="http://schemas.microsoft.com/office/drawing/2010/main" xmlns="" w="9525">
                   <a:solidFill>
                     <a:srgbClr val="000000"/>
                   </a:solidFill>
@@ -3102,7 +3102,7 @@
             </a:ln>
             <a:extLst>
               <a:ext uri="{91240B29-F687-4f45-9708-019B960494DF}">
-                <a14:hiddenLine xmlns="" xmlns:a14="http://schemas.microsoft.com/office/drawing/2010/main" w="9525">
+                <a14:hiddenLine xmlns:a14="http://schemas.microsoft.com/office/drawing/2010/main" xmlns="" w="9525">
                   <a:solidFill>
                     <a:srgbClr val="000000"/>
                   </a:solidFill>
@@ -3170,7 +3170,7 @@
             </a:ln>
             <a:extLst>
               <a:ext uri="{91240B29-F687-4f45-9708-019B960494DF}">
-                <a14:hiddenLine xmlns="" xmlns:a14="http://schemas.microsoft.com/office/drawing/2010/main" w="9525">
+                <a14:hiddenLine xmlns:a14="http://schemas.microsoft.com/office/drawing/2010/main" xmlns="" w="9525">
                   <a:solidFill>
                     <a:srgbClr val="000000"/>
                   </a:solidFill>
@@ -3232,7 +3232,7 @@
             </a:ln>
             <a:extLst>
               <a:ext uri="{91240B29-F687-4f45-9708-019B960494DF}">
-                <a14:hiddenLine xmlns="" xmlns:a14="http://schemas.microsoft.com/office/drawing/2010/main" w="9525">
+                <a14:hiddenLine xmlns:a14="http://schemas.microsoft.com/office/drawing/2010/main" xmlns="" w="9525">
                   <a:solidFill>
                     <a:srgbClr val="000000"/>
                   </a:solidFill>
@@ -3322,7 +3322,7 @@
             </a:ln>
             <a:extLst>
               <a:ext uri="{91240B29-F687-4f45-9708-019B960494DF}">
-                <a14:hiddenLine xmlns="" xmlns:a14="http://schemas.microsoft.com/office/drawing/2010/main" w="9525">
+                <a14:hiddenLine xmlns:a14="http://schemas.microsoft.com/office/drawing/2010/main" xmlns="" w="9525">
                   <a:solidFill>
                     <a:srgbClr val="000000"/>
                   </a:solidFill>
@@ -3384,7 +3384,7 @@
             </a:ln>
             <a:extLst>
               <a:ext uri="{91240B29-F687-4f45-9708-019B960494DF}">
-                <a14:hiddenLine xmlns="" xmlns:a14="http://schemas.microsoft.com/office/drawing/2010/main" w="9525">
+                <a14:hiddenLine xmlns:a14="http://schemas.microsoft.com/office/drawing/2010/main" xmlns="" w="9525">
                   <a:solidFill>
                     <a:srgbClr val="000000"/>
                   </a:solidFill>
@@ -3474,7 +3474,7 @@
             </a:ln>
             <a:extLst>
               <a:ext uri="{91240B29-F687-4f45-9708-019B960494DF}">
-                <a14:hiddenLine xmlns="" xmlns:a14="http://schemas.microsoft.com/office/drawing/2010/main" w="9525">
+                <a14:hiddenLine xmlns:a14="http://schemas.microsoft.com/office/drawing/2010/main" xmlns="" w="9525">
                   <a:solidFill>
                     <a:srgbClr val="000000"/>
                   </a:solidFill>
@@ -3536,7 +3536,7 @@
             </a:ln>
             <a:extLst>
               <a:ext uri="{91240B29-F687-4f45-9708-019B960494DF}">
-                <a14:hiddenLine xmlns="" xmlns:a14="http://schemas.microsoft.com/office/drawing/2010/main" w="9525">
+                <a14:hiddenLine xmlns:a14="http://schemas.microsoft.com/office/drawing/2010/main" xmlns="" w="9525">
                   <a:solidFill>
                     <a:srgbClr val="000000"/>
                   </a:solidFill>
@@ -3626,7 +3626,7 @@
             </a:ln>
             <a:extLst>
               <a:ext uri="{91240B29-F687-4f45-9708-019B960494DF}">
-                <a14:hiddenLine xmlns="" xmlns:a14="http://schemas.microsoft.com/office/drawing/2010/main" w="9525">
+                <a14:hiddenLine xmlns:a14="http://schemas.microsoft.com/office/drawing/2010/main" xmlns="" w="9525">
                   <a:solidFill>
                     <a:srgbClr val="000000"/>
                   </a:solidFill>
@@ -3660,7 +3660,7 @@
             </a:ln>
             <a:extLst>
               <a:ext uri="{91240B29-F687-4f45-9708-019B960494DF}">
-                <a14:hiddenLine xmlns="" xmlns:a14="http://schemas.microsoft.com/office/drawing/2010/main" w="9525">
+                <a14:hiddenLine xmlns:a14="http://schemas.microsoft.com/office/drawing/2010/main" xmlns="" w="9525">
                   <a:solidFill>
                     <a:srgbClr val="000000"/>
                   </a:solidFill>
@@ -3725,7 +3725,7 @@
             </a:ln>
             <a:extLst>
               <a:ext uri="{91240B29-F687-4f45-9708-019B960494DF}">
-                <a14:hiddenLine xmlns="" xmlns:a14="http://schemas.microsoft.com/office/drawing/2010/main" w="9525">
+                <a14:hiddenLine xmlns:a14="http://schemas.microsoft.com/office/drawing/2010/main" xmlns="" w="9525">
                   <a:solidFill>
                     <a:srgbClr val="000000"/>
                   </a:solidFill>
@@ -3815,7 +3815,7 @@
             </a:ln>
             <a:extLst>
               <a:ext uri="{91240B29-F687-4f45-9708-019B960494DF}">
-                <a14:hiddenLine xmlns="" xmlns:a14="http://schemas.microsoft.com/office/drawing/2010/main" w="9525">
+                <a14:hiddenLine xmlns:a14="http://schemas.microsoft.com/office/drawing/2010/main" xmlns="" w="9525">
                   <a:solidFill>
                     <a:srgbClr val="000000"/>
                   </a:solidFill>
@@ -3877,7 +3877,7 @@
             </a:ln>
             <a:extLst>
               <a:ext uri="{91240B29-F687-4f45-9708-019B960494DF}">
-                <a14:hiddenLine xmlns="" xmlns:a14="http://schemas.microsoft.com/office/drawing/2010/main" w="9525">
+                <a14:hiddenLine xmlns:a14="http://schemas.microsoft.com/office/drawing/2010/main" xmlns="" w="9525">
                   <a:solidFill>
                     <a:srgbClr val="000000"/>
                   </a:solidFill>
@@ -3967,7 +3967,7 @@
             </a:ln>
             <a:extLst>
               <a:ext uri="{91240B29-F687-4f45-9708-019B960494DF}">
-                <a14:hiddenLine xmlns="" xmlns:a14="http://schemas.microsoft.com/office/drawing/2010/main" w="9525">
+                <a14:hiddenLine xmlns:a14="http://schemas.microsoft.com/office/drawing/2010/main" xmlns="" w="9525">
                   <a:solidFill>
                     <a:srgbClr val="000000"/>
                   </a:solidFill>
@@ -4057,7 +4057,7 @@
             </a:ln>
             <a:extLst>
               <a:ext uri="{91240B29-F687-4f45-9708-019B960494DF}">
-                <a14:hiddenLine xmlns="" xmlns:a14="http://schemas.microsoft.com/office/drawing/2010/main" w="9525">
+                <a14:hiddenLine xmlns:a14="http://schemas.microsoft.com/office/drawing/2010/main" xmlns="" w="9525">
                   <a:solidFill>
                     <a:srgbClr val="000000"/>
                   </a:solidFill>
@@ -4122,7 +4122,7 @@
             </a:ln>
             <a:extLst>
               <a:ext uri="{91240B29-F687-4f45-9708-019B960494DF}">
-                <a14:hiddenLine xmlns="" xmlns:a14="http://schemas.microsoft.com/office/drawing/2010/main" w="9525">
+                <a14:hiddenLine xmlns:a14="http://schemas.microsoft.com/office/drawing/2010/main" xmlns="" w="9525">
                   <a:solidFill>
                     <a:srgbClr val="000000"/>
                   </a:solidFill>
@@ -4184,7 +4184,7 @@
             </a:ln>
             <a:extLst>
               <a:ext uri="{91240B29-F687-4f45-9708-019B960494DF}">
-                <a14:hiddenLine xmlns="" xmlns:a14="http://schemas.microsoft.com/office/drawing/2010/main" w="9525">
+                <a14:hiddenLine xmlns:a14="http://schemas.microsoft.com/office/drawing/2010/main" xmlns="" w="9525">
                   <a:solidFill>
                     <a:srgbClr val="000000"/>
                   </a:solidFill>
@@ -4274,7 +4274,7 @@
             </a:ln>
             <a:extLst>
               <a:ext uri="{91240B29-F687-4f45-9708-019B960494DF}">
-                <a14:hiddenLine xmlns="" xmlns:a14="http://schemas.microsoft.com/office/drawing/2010/main" w="9525">
+                <a14:hiddenLine xmlns:a14="http://schemas.microsoft.com/office/drawing/2010/main" xmlns="" w="9525">
                   <a:solidFill>
                     <a:srgbClr val="000000"/>
                   </a:solidFill>
@@ -4364,7 +4364,7 @@
             </a:ln>
             <a:extLst>
               <a:ext uri="{91240B29-F687-4f45-9708-019B960494DF}">
-                <a14:hiddenLine xmlns="" xmlns:a14="http://schemas.microsoft.com/office/drawing/2010/main" w="9525">
+                <a14:hiddenLine xmlns:a14="http://schemas.microsoft.com/office/drawing/2010/main" xmlns="" w="9525">
                   <a:solidFill>
                     <a:srgbClr val="000000"/>
                   </a:solidFill>
@@ -4426,7 +4426,7 @@
             </a:ln>
             <a:extLst>
               <a:ext uri="{91240B29-F687-4f45-9708-019B960494DF}">
-                <a14:hiddenLine xmlns="" xmlns:a14="http://schemas.microsoft.com/office/drawing/2010/main" w="9525">
+                <a14:hiddenLine xmlns:a14="http://schemas.microsoft.com/office/drawing/2010/main" xmlns="" w="9525">
                   <a:solidFill>
                     <a:srgbClr val="000000"/>
                   </a:solidFill>
@@ -4546,7 +4546,7 @@
             </a:ln>
             <a:extLst>
               <a:ext uri="{91240B29-F687-4f45-9708-019B960494DF}">
-                <a14:hiddenLine xmlns="" xmlns:a14="http://schemas.microsoft.com/office/drawing/2010/main" w="9525">
+                <a14:hiddenLine xmlns:a14="http://schemas.microsoft.com/office/drawing/2010/main" xmlns="" w="9525">
                   <a:solidFill>
                     <a:srgbClr val="000000"/>
                   </a:solidFill>
@@ -4614,7 +4614,7 @@
             </a:ln>
             <a:extLst>
               <a:ext uri="{91240B29-F687-4f45-9708-019B960494DF}">
-                <a14:hiddenLine xmlns="" xmlns:a14="http://schemas.microsoft.com/office/drawing/2010/main" w="9525">
+                <a14:hiddenLine xmlns:a14="http://schemas.microsoft.com/office/drawing/2010/main" xmlns="" w="9525">
                   <a:solidFill>
                     <a:srgbClr val="000000"/>
                   </a:solidFill>
@@ -4704,7 +4704,7 @@
             </a:ln>
             <a:extLst>
               <a:ext uri="{91240B29-F687-4f45-9708-019B960494DF}">
-                <a14:hiddenLine xmlns="" xmlns:a14="http://schemas.microsoft.com/office/drawing/2010/main" w="9525">
+                <a14:hiddenLine xmlns:a14="http://schemas.microsoft.com/office/drawing/2010/main" xmlns="" w="9525">
                   <a:solidFill>
                     <a:srgbClr val="000000"/>
                   </a:solidFill>
@@ -9533,7 +9533,7 @@
           <a:noFill/>
           <a:extLst>
             <a:ext uri="{909E8E84-426E-40dd-AFC4-6F175D3DCCD1}">
-              <a14:hiddenFill xmlns="" xmlns:a14="http://schemas.microsoft.com/office/drawing/2010/main">
+              <a14:hiddenFill xmlns:a14="http://schemas.microsoft.com/office/drawing/2010/main" xmlns="">
                 <a:solidFill>
                   <a:srgbClr val="FFFFFF"/>
                 </a:solidFill>
@@ -9607,7 +9607,7 @@
               </a:ln>
               <a:extLst>
                 <a:ext uri="{91240B29-F687-4f45-9708-019B960494DF}">
-                  <a14:hiddenLine xmlns="" xmlns:a14="http://schemas.microsoft.com/office/drawing/2010/main" w="9525">
+                  <a14:hiddenLine xmlns:a14="http://schemas.microsoft.com/office/drawing/2010/main" xmlns="" w="9525">
                     <a:solidFill>
                       <a:srgbClr val="000000"/>
                     </a:solidFill>
@@ -9697,7 +9697,7 @@
               </a:ln>
               <a:extLst>
                 <a:ext uri="{91240B29-F687-4f45-9708-019B960494DF}">
-                  <a14:hiddenLine xmlns="" xmlns:a14="http://schemas.microsoft.com/office/drawing/2010/main" w="9525">
+                  <a14:hiddenLine xmlns:a14="http://schemas.microsoft.com/office/drawing/2010/main" xmlns="" w="9525">
                     <a:solidFill>
                       <a:srgbClr val="000000"/>
                     </a:solidFill>
@@ -9787,7 +9787,7 @@
               </a:ln>
               <a:extLst>
                 <a:ext uri="{91240B29-F687-4f45-9708-019B960494DF}">
-                  <a14:hiddenLine xmlns="" xmlns:a14="http://schemas.microsoft.com/office/drawing/2010/main" w="9525">
+                  <a14:hiddenLine xmlns:a14="http://schemas.microsoft.com/office/drawing/2010/main" xmlns="" w="9525">
                     <a:solidFill>
                       <a:srgbClr val="000000"/>
                     </a:solidFill>
@@ -9849,7 +9849,7 @@
               </a:ln>
               <a:extLst>
                 <a:ext uri="{91240B29-F687-4f45-9708-019B960494DF}">
-                  <a14:hiddenLine xmlns="" xmlns:a14="http://schemas.microsoft.com/office/drawing/2010/main" w="9525">
+                  <a14:hiddenLine xmlns:a14="http://schemas.microsoft.com/office/drawing/2010/main" xmlns="" w="9525">
                     <a:solidFill>
                       <a:srgbClr val="000000"/>
                     </a:solidFill>
@@ -9939,7 +9939,7 @@
               </a:ln>
               <a:extLst>
                 <a:ext uri="{91240B29-F687-4f45-9708-019B960494DF}">
-                  <a14:hiddenLine xmlns="" xmlns:a14="http://schemas.microsoft.com/office/drawing/2010/main" w="9525">
+                  <a14:hiddenLine xmlns:a14="http://schemas.microsoft.com/office/drawing/2010/main" xmlns="" w="9525">
                     <a:solidFill>
                       <a:srgbClr val="000000"/>
                     </a:solidFill>
@@ -10001,7 +10001,7 @@
               </a:ln>
               <a:extLst>
                 <a:ext uri="{91240B29-F687-4f45-9708-019B960494DF}">
-                  <a14:hiddenLine xmlns="" xmlns:a14="http://schemas.microsoft.com/office/drawing/2010/main" w="9525">
+                  <a14:hiddenLine xmlns:a14="http://schemas.microsoft.com/office/drawing/2010/main" xmlns="" w="9525">
                     <a:solidFill>
                       <a:srgbClr val="000000"/>
                     </a:solidFill>
@@ -10063,7 +10063,7 @@
               </a:ln>
               <a:extLst>
                 <a:ext uri="{91240B29-F687-4f45-9708-019B960494DF}">
-                  <a14:hiddenLine xmlns="" xmlns:a14="http://schemas.microsoft.com/office/drawing/2010/main" w="9525">
+                  <a14:hiddenLine xmlns:a14="http://schemas.microsoft.com/office/drawing/2010/main" xmlns="" w="9525">
                     <a:solidFill>
                       <a:srgbClr val="000000"/>
                     </a:solidFill>
@@ -10153,7 +10153,7 @@
               </a:ln>
               <a:extLst>
                 <a:ext uri="{91240B29-F687-4f45-9708-019B960494DF}">
-                  <a14:hiddenLine xmlns="" xmlns:a14="http://schemas.microsoft.com/office/drawing/2010/main" w="9525">
+                  <a14:hiddenLine xmlns:a14="http://schemas.microsoft.com/office/drawing/2010/main" xmlns="" w="9525">
                     <a:solidFill>
                       <a:srgbClr val="000000"/>
                     </a:solidFill>
@@ -10243,7 +10243,7 @@
               </a:ln>
               <a:extLst>
                 <a:ext uri="{91240B29-F687-4f45-9708-019B960494DF}">
-                  <a14:hiddenLine xmlns="" xmlns:a14="http://schemas.microsoft.com/office/drawing/2010/main" w="9525">
+                  <a14:hiddenLine xmlns:a14="http://schemas.microsoft.com/office/drawing/2010/main" xmlns="" w="9525">
                     <a:solidFill>
                       <a:srgbClr val="000000"/>
                     </a:solidFill>
@@ -10305,7 +10305,7 @@
               </a:ln>
               <a:extLst>
                 <a:ext uri="{91240B29-F687-4f45-9708-019B960494DF}">
-                  <a14:hiddenLine xmlns="" xmlns:a14="http://schemas.microsoft.com/office/drawing/2010/main" w="9525">
+                  <a14:hiddenLine xmlns:a14="http://schemas.microsoft.com/office/drawing/2010/main" xmlns="" w="9525">
                     <a:solidFill>
                       <a:srgbClr val="000000"/>
                     </a:solidFill>
@@ -10415,7 +10415,7 @@
               </a:ln>
               <a:extLst>
                 <a:ext uri="{91240B29-F687-4f45-9708-019B960494DF}">
-                  <a14:hiddenLine xmlns="" xmlns:a14="http://schemas.microsoft.com/office/drawing/2010/main" w="9525">
+                  <a14:hiddenLine xmlns:a14="http://schemas.microsoft.com/office/drawing/2010/main" xmlns="" w="9525">
                     <a:solidFill>
                       <a:srgbClr val="000000"/>
                     </a:solidFill>
@@ -10499,7 +10499,7 @@
               </a:ln>
               <a:extLst>
                 <a:ext uri="{91240B29-F687-4f45-9708-019B960494DF}">
-                  <a14:hiddenLine xmlns="" xmlns:a14="http://schemas.microsoft.com/office/drawing/2010/main" w="9525">
+                  <a14:hiddenLine xmlns:a14="http://schemas.microsoft.com/office/drawing/2010/main" xmlns="" w="9525">
                     <a:solidFill>
                       <a:srgbClr val="000000"/>
                     </a:solidFill>
@@ -10561,7 +10561,7 @@
               </a:ln>
               <a:extLst>
                 <a:ext uri="{91240B29-F687-4f45-9708-019B960494DF}">
-                  <a14:hiddenLine xmlns="" xmlns:a14="http://schemas.microsoft.com/office/drawing/2010/main" w="9525">
+                  <a14:hiddenLine xmlns:a14="http://schemas.microsoft.com/office/drawing/2010/main" xmlns="" w="9525">
                     <a:solidFill>
                       <a:srgbClr val="000000"/>
                     </a:solidFill>
@@ -10623,7 +10623,7 @@
               </a:ln>
               <a:extLst>
                 <a:ext uri="{91240B29-F687-4f45-9708-019B960494DF}">
-                  <a14:hiddenLine xmlns="" xmlns:a14="http://schemas.microsoft.com/office/drawing/2010/main" w="9525">
+                  <a14:hiddenLine xmlns:a14="http://schemas.microsoft.com/office/drawing/2010/main" xmlns="" w="9525">
                     <a:solidFill>
                       <a:srgbClr val="000000"/>
                     </a:solidFill>
@@ -10713,7 +10713,7 @@
               </a:ln>
               <a:extLst>
                 <a:ext uri="{91240B29-F687-4f45-9708-019B960494DF}">
-                  <a14:hiddenLine xmlns="" xmlns:a14="http://schemas.microsoft.com/office/drawing/2010/main" w="9525">
+                  <a14:hiddenLine xmlns:a14="http://schemas.microsoft.com/office/drawing/2010/main" xmlns="" w="9525">
                     <a:solidFill>
                       <a:srgbClr val="000000"/>
                     </a:solidFill>
@@ -10747,7 +10747,7 @@
               </a:ln>
               <a:extLst>
                 <a:ext uri="{91240B29-F687-4f45-9708-019B960494DF}">
-                  <a14:hiddenLine xmlns="" xmlns:a14="http://schemas.microsoft.com/office/drawing/2010/main" w="9525">
+                  <a14:hiddenLine xmlns:a14="http://schemas.microsoft.com/office/drawing/2010/main" xmlns="" w="9525">
                     <a:solidFill>
                       <a:srgbClr val="000000"/>
                     </a:solidFill>
@@ -10812,7 +10812,7 @@
               </a:ln>
               <a:extLst>
                 <a:ext uri="{91240B29-F687-4f45-9708-019B960494DF}">
-                  <a14:hiddenLine xmlns="" xmlns:a14="http://schemas.microsoft.com/office/drawing/2010/main" w="9525">
+                  <a14:hiddenLine xmlns:a14="http://schemas.microsoft.com/office/drawing/2010/main" xmlns="" w="9525">
                     <a:solidFill>
                       <a:srgbClr val="000000"/>
                     </a:solidFill>
@@ -10902,7 +10902,7 @@
               </a:ln>
               <a:extLst>
                 <a:ext uri="{91240B29-F687-4f45-9708-019B960494DF}">
-                  <a14:hiddenLine xmlns="" xmlns:a14="http://schemas.microsoft.com/office/drawing/2010/main" w="9525">
+                  <a14:hiddenLine xmlns:a14="http://schemas.microsoft.com/office/drawing/2010/main" xmlns="" w="9525">
                     <a:solidFill>
                       <a:srgbClr val="000000"/>
                     </a:solidFill>
@@ -10964,7 +10964,7 @@
               </a:ln>
               <a:extLst>
                 <a:ext uri="{91240B29-F687-4f45-9708-019B960494DF}">
-                  <a14:hiddenLine xmlns="" xmlns:a14="http://schemas.microsoft.com/office/drawing/2010/main" w="9525">
+                  <a14:hiddenLine xmlns:a14="http://schemas.microsoft.com/office/drawing/2010/main" xmlns="" w="9525">
                     <a:solidFill>
                       <a:srgbClr val="000000"/>
                     </a:solidFill>
@@ -11054,7 +11054,7 @@
               </a:ln>
               <a:extLst>
                 <a:ext uri="{91240B29-F687-4f45-9708-019B960494DF}">
-                  <a14:hiddenLine xmlns="" xmlns:a14="http://schemas.microsoft.com/office/drawing/2010/main" w="9525">
+                  <a14:hiddenLine xmlns:a14="http://schemas.microsoft.com/office/drawing/2010/main" xmlns="" w="9525">
                     <a:solidFill>
                       <a:srgbClr val="000000"/>
                     </a:solidFill>
@@ -11119,7 +11119,7 @@
               </a:ln>
               <a:extLst>
                 <a:ext uri="{91240B29-F687-4f45-9708-019B960494DF}">
-                  <a14:hiddenLine xmlns="" xmlns:a14="http://schemas.microsoft.com/office/drawing/2010/main" w="9525">
+                  <a14:hiddenLine xmlns:a14="http://schemas.microsoft.com/office/drawing/2010/main" xmlns="" w="9525">
                     <a:solidFill>
                       <a:srgbClr val="000000"/>
                     </a:solidFill>
@@ -11181,7 +11181,7 @@
               </a:ln>
               <a:extLst>
                 <a:ext uri="{91240B29-F687-4f45-9708-019B960494DF}">
-                  <a14:hiddenLine xmlns="" xmlns:a14="http://schemas.microsoft.com/office/drawing/2010/main" w="9525">
+                  <a14:hiddenLine xmlns:a14="http://schemas.microsoft.com/office/drawing/2010/main" xmlns="" w="9525">
                     <a:solidFill>
                       <a:srgbClr val="000000"/>
                     </a:solidFill>
@@ -11271,7 +11271,7 @@
               </a:ln>
               <a:extLst>
                 <a:ext uri="{91240B29-F687-4f45-9708-019B960494DF}">
-                  <a14:hiddenLine xmlns="" xmlns:a14="http://schemas.microsoft.com/office/drawing/2010/main" w="9525">
+                  <a14:hiddenLine xmlns:a14="http://schemas.microsoft.com/office/drawing/2010/main" xmlns="" w="9525">
                     <a:solidFill>
                       <a:srgbClr val="000000"/>
                     </a:solidFill>
@@ -11361,7 +11361,7 @@
               </a:ln>
               <a:extLst>
                 <a:ext uri="{91240B29-F687-4f45-9708-019B960494DF}">
-                  <a14:hiddenLine xmlns="" xmlns:a14="http://schemas.microsoft.com/office/drawing/2010/main" w="9525">
+                  <a14:hiddenLine xmlns:a14="http://schemas.microsoft.com/office/drawing/2010/main" xmlns="" w="9525">
                     <a:solidFill>
                       <a:srgbClr val="000000"/>
                     </a:solidFill>
@@ -11426,7 +11426,7 @@
               </a:ln>
               <a:extLst>
                 <a:ext uri="{91240B29-F687-4f45-9708-019B960494DF}">
-                  <a14:hiddenLine xmlns="" xmlns:a14="http://schemas.microsoft.com/office/drawing/2010/main" w="9525">
+                  <a14:hiddenLine xmlns:a14="http://schemas.microsoft.com/office/drawing/2010/main" xmlns="" w="9525">
                     <a:solidFill>
                       <a:srgbClr val="000000"/>
                     </a:solidFill>
@@ -11546,7 +11546,7 @@
               </a:ln>
               <a:extLst>
                 <a:ext uri="{91240B29-F687-4f45-9708-019B960494DF}">
-                  <a14:hiddenLine xmlns="" xmlns:a14="http://schemas.microsoft.com/office/drawing/2010/main" w="9525">
+                  <a14:hiddenLine xmlns:a14="http://schemas.microsoft.com/office/drawing/2010/main" xmlns="" w="9525">
                     <a:solidFill>
                       <a:srgbClr val="000000"/>
                     </a:solidFill>
@@ -11627,7 +11627,7 @@
               </a:ln>
               <a:extLst>
                 <a:ext uri="{91240B29-F687-4f45-9708-019B960494DF}">
-                  <a14:hiddenLine xmlns="" xmlns:a14="http://schemas.microsoft.com/office/drawing/2010/main" w="9525">
+                  <a14:hiddenLine xmlns:a14="http://schemas.microsoft.com/office/drawing/2010/main" xmlns="" w="9525">
                     <a:solidFill>
                       <a:srgbClr val="000000"/>
                     </a:solidFill>
@@ -11742,7 +11742,7 @@
               </a:ln>
               <a:extLst>
                 <a:ext uri="{91240B29-F687-4f45-9708-019B960494DF}">
-                  <a14:hiddenLine xmlns="" xmlns:a14="http://schemas.microsoft.com/office/drawing/2010/main" w="9525">
+                  <a14:hiddenLine xmlns:a14="http://schemas.microsoft.com/office/drawing/2010/main" xmlns="" w="9525">
                     <a:solidFill>
                       <a:srgbClr val="000000"/>
                     </a:solidFill>
@@ -11832,7 +11832,7 @@
               </a:ln>
               <a:extLst>
                 <a:ext uri="{91240B29-F687-4f45-9708-019B960494DF}">
-                  <a14:hiddenLine xmlns="" xmlns:a14="http://schemas.microsoft.com/office/drawing/2010/main" w="9525">
+                  <a14:hiddenLine xmlns:a14="http://schemas.microsoft.com/office/drawing/2010/main" xmlns="" w="9525">
                     <a:solidFill>
                       <a:srgbClr val="000000"/>
                     </a:solidFill>
@@ -11897,7 +11897,7 @@
               </a:ln>
               <a:extLst>
                 <a:ext uri="{91240B29-F687-4f45-9708-019B960494DF}">
-                  <a14:hiddenLine xmlns="" xmlns:a14="http://schemas.microsoft.com/office/drawing/2010/main" w="9525">
+                  <a14:hiddenLine xmlns:a14="http://schemas.microsoft.com/office/drawing/2010/main" xmlns="" w="9525">
                     <a:solidFill>
                       <a:srgbClr val="000000"/>
                     </a:solidFill>
@@ -11987,7 +11987,7 @@
               </a:ln>
               <a:extLst>
                 <a:ext uri="{91240B29-F687-4f45-9708-019B960494DF}">
-                  <a14:hiddenLine xmlns="" xmlns:a14="http://schemas.microsoft.com/office/drawing/2010/main" w="9525">
+                  <a14:hiddenLine xmlns:a14="http://schemas.microsoft.com/office/drawing/2010/main" xmlns="" w="9525">
                     <a:solidFill>
                       <a:srgbClr val="000000"/>
                     </a:solidFill>
@@ -12055,7 +12055,7 @@
               </a:ln>
               <a:extLst>
                 <a:ext uri="{91240B29-F687-4f45-9708-019B960494DF}">
-                  <a14:hiddenLine xmlns="" xmlns:a14="http://schemas.microsoft.com/office/drawing/2010/main" w="9525">
+                  <a14:hiddenLine xmlns:a14="http://schemas.microsoft.com/office/drawing/2010/main" xmlns="" w="9525">
                     <a:solidFill>
                       <a:srgbClr val="000000"/>
                     </a:solidFill>
@@ -12145,7 +12145,7 @@
               </a:ln>
               <a:extLst>
                 <a:ext uri="{91240B29-F687-4f45-9708-019B960494DF}">
-                  <a14:hiddenLine xmlns="" xmlns:a14="http://schemas.microsoft.com/office/drawing/2010/main" w="9525">
+                  <a14:hiddenLine xmlns:a14="http://schemas.microsoft.com/office/drawing/2010/main" xmlns="" w="9525">
                     <a:solidFill>
                       <a:srgbClr val="000000"/>
                     </a:solidFill>
@@ -12213,7 +12213,7 @@
               </a:ln>
               <a:extLst>
                 <a:ext uri="{91240B29-F687-4f45-9708-019B960494DF}">
-                  <a14:hiddenLine xmlns="" xmlns:a14="http://schemas.microsoft.com/office/drawing/2010/main" w="9525">
+                  <a14:hiddenLine xmlns:a14="http://schemas.microsoft.com/office/drawing/2010/main" xmlns="" w="9525">
                     <a:solidFill>
                       <a:srgbClr val="000000"/>
                     </a:solidFill>
@@ -12303,7 +12303,7 @@
               </a:ln>
               <a:extLst>
                 <a:ext uri="{91240B29-F687-4f45-9708-019B960494DF}">
-                  <a14:hiddenLine xmlns="" xmlns:a14="http://schemas.microsoft.com/office/drawing/2010/main" w="9525">
+                  <a14:hiddenLine xmlns:a14="http://schemas.microsoft.com/office/drawing/2010/main" xmlns="" w="9525">
                     <a:solidFill>
                       <a:srgbClr val="000000"/>
                     </a:solidFill>
@@ -12337,7 +12337,7 @@
               </a:ln>
               <a:extLst>
                 <a:ext uri="{91240B29-F687-4f45-9708-019B960494DF}">
-                  <a14:hiddenLine xmlns="" xmlns:a14="http://schemas.microsoft.com/office/drawing/2010/main" w="9525">
+                  <a14:hiddenLine xmlns:a14="http://schemas.microsoft.com/office/drawing/2010/main" xmlns="" w="9525">
                     <a:solidFill>
                       <a:srgbClr val="000000"/>
                     </a:solidFill>
@@ -13991,12 +13991,12 @@
         <p:spPr>
           <a:xfrm>
             <a:off x="1294151" y="1098548"/>
-            <a:ext cx="9600522" cy="5475367"/>
+            <a:ext cx="9600522" cy="5817641"/>
           </a:xfrm>
         </p:spPr>
         <p:txBody>
           <a:bodyPr>
-            <a:normAutofit fontScale="70000" lnSpcReduction="20000"/>
+            <a:normAutofit fontScale="62500" lnSpcReduction="20000"/>
           </a:bodyPr>
           <a:lstStyle/>
           <a:p>
@@ -14014,6 +14014,25 @@
                 <a:latin typeface="Arial" panose="020B0604020202020204" pitchFamily="34" charset="0"/>
                 <a:cs typeface="Arial" panose="020B0604020202020204" pitchFamily="34" charset="0"/>
               </a:rPr>
+              <a:t>Exam is graded, we will go over it today</a:t>
+            </a:r>
+          </a:p>
+          <a:p>
+            <a:pPr lvl="1"/>
+            <a:r>
+              <a:rPr lang="en-US" dirty="0">
+                <a:latin typeface="Arial" panose="020B0604020202020204" pitchFamily="34" charset="0"/>
+                <a:cs typeface="Arial" panose="020B0604020202020204" pitchFamily="34" charset="0"/>
+              </a:rPr>
+              <a:t>Average was 21.8/29 (~75%). Much better. Std. Dev. Was 6.43</a:t>
+            </a:r>
+          </a:p>
+          <a:p>
+            <a:r>
+              <a:rPr lang="en-US" dirty="0">
+                <a:latin typeface="Arial" panose="020B0604020202020204" pitchFamily="34" charset="0"/>
+                <a:cs typeface="Arial" panose="020B0604020202020204" pitchFamily="34" charset="0"/>
+              </a:rPr>
               <a:t>This week:</a:t>
             </a:r>
             <a:endParaRPr lang="en-US" b="1" i="1" dirty="0">
@@ -14168,21 +14187,6 @@
               </a:rPr>
               <a:t>Today we begin the last module</a:t>
             </a:r>
-          </a:p>
-          <a:p>
-            <a:pPr marL="0" indent="0">
-              <a:buNone/>
-            </a:pPr>
-            <a:endParaRPr lang="en-US" dirty="0">
-              <a:latin typeface="Arial" panose="020B0604020202020204" pitchFamily="34" charset="0"/>
-              <a:cs typeface="Arial" panose="020B0604020202020204" pitchFamily="34" charset="0"/>
-            </a:endParaRPr>
-          </a:p>
-          <a:p>
-            <a:endParaRPr lang="en-US" dirty="0">
-              <a:latin typeface="Arial" panose="020B0604020202020204" pitchFamily="34" charset="0"/>
-              <a:cs typeface="Arial" panose="020B0604020202020204" pitchFamily="34" charset="0"/>
-            </a:endParaRPr>
           </a:p>
         </p:txBody>
       </p:sp>

--- a/slides/00-DailyAnnouncements.pptx
+++ b/slides/00-DailyAnnouncements.pptx
@@ -5,7 +5,7 @@
     <p:sldMasterId id="2147484006" r:id="rId1"/>
   </p:sldMasterIdLst>
   <p:notesMasterIdLst>
-    <p:notesMasterId r:id="rId17"/>
+    <p:notesMasterId r:id="rId18"/>
   </p:notesMasterIdLst>
   <p:sldIdLst>
     <p:sldId id="256" r:id="rId2"/>
@@ -22,7 +22,8 @@
     <p:sldId id="525" r:id="rId13"/>
     <p:sldId id="526" r:id="rId14"/>
     <p:sldId id="527" r:id="rId15"/>
-    <p:sldId id="515" r:id="rId16"/>
+    <p:sldId id="528" r:id="rId16"/>
+    <p:sldId id="515" r:id="rId17"/>
   </p:sldIdLst>
   <p:sldSz cx="12192000" cy="6858000"/>
   <p:notesSz cx="6858000" cy="9144000"/>
@@ -211,7 +212,7 @@
           <a:p>
             <a:fld id="{C5B45307-6ED4-B142-BD64-10F739779302}" type="datetimeFigureOut">
               <a:rPr lang="en-US" smtClean="0"/>
-              <a:t>8/3/26</a:t>
+              <a:t>8/4/26</a:t>
             </a:fld>
             <a:endParaRPr lang="en-US"/>
           </a:p>
@@ -619,7 +620,7 @@
           <a:noFill/>
           <a:extLst>
             <a:ext uri="{909E8E84-426E-40dd-AFC4-6F175D3DCCD1}">
-              <a14:hiddenFill xmlns:a14="http://schemas.microsoft.com/office/drawing/2010/main" xmlns="">
+              <a14:hiddenFill xmlns="" xmlns:a14="http://schemas.microsoft.com/office/drawing/2010/main">
                 <a:solidFill>
                   <a:srgbClr val="FFFFFF"/>
                 </a:solidFill>
@@ -678,7 +679,7 @@
             </a:ln>
             <a:extLst>
               <a:ext uri="{91240B29-F687-4f45-9708-019B960494DF}">
-                <a14:hiddenLine xmlns:a14="http://schemas.microsoft.com/office/drawing/2010/main" xmlns="" w="9525">
+                <a14:hiddenLine xmlns="" xmlns:a14="http://schemas.microsoft.com/office/drawing/2010/main" w="9525">
                   <a:solidFill>
                     <a:srgbClr val="000000"/>
                   </a:solidFill>
@@ -768,7 +769,7 @@
             </a:ln>
             <a:extLst>
               <a:ext uri="{91240B29-F687-4f45-9708-019B960494DF}">
-                <a14:hiddenLine xmlns:a14="http://schemas.microsoft.com/office/drawing/2010/main" xmlns="" w="9525">
+                <a14:hiddenLine xmlns="" xmlns:a14="http://schemas.microsoft.com/office/drawing/2010/main" w="9525">
                   <a:solidFill>
                     <a:srgbClr val="000000"/>
                   </a:solidFill>
@@ -858,7 +859,7 @@
             </a:ln>
             <a:extLst>
               <a:ext uri="{91240B29-F687-4f45-9708-019B960494DF}">
-                <a14:hiddenLine xmlns:a14="http://schemas.microsoft.com/office/drawing/2010/main" xmlns="" w="9525">
+                <a14:hiddenLine xmlns="" xmlns:a14="http://schemas.microsoft.com/office/drawing/2010/main" w="9525">
                   <a:solidFill>
                     <a:srgbClr val="000000"/>
                   </a:solidFill>
@@ -892,7 +893,7 @@
             </a:ln>
             <a:extLst>
               <a:ext uri="{91240B29-F687-4f45-9708-019B960494DF}">
-                <a14:hiddenLine xmlns:a14="http://schemas.microsoft.com/office/drawing/2010/main" xmlns="" w="9525">
+                <a14:hiddenLine xmlns="" xmlns:a14="http://schemas.microsoft.com/office/drawing/2010/main" w="9525">
                   <a:solidFill>
                     <a:srgbClr val="000000"/>
                   </a:solidFill>
@@ -982,7 +983,7 @@
             </a:ln>
             <a:extLst>
               <a:ext uri="{91240B29-F687-4f45-9708-019B960494DF}">
-                <a14:hiddenLine xmlns:a14="http://schemas.microsoft.com/office/drawing/2010/main" xmlns="" w="9525">
+                <a14:hiddenLine xmlns="" xmlns:a14="http://schemas.microsoft.com/office/drawing/2010/main" w="9525">
                   <a:solidFill>
                     <a:srgbClr val="000000"/>
                   </a:solidFill>
@@ -1044,7 +1045,7 @@
             </a:ln>
             <a:extLst>
               <a:ext uri="{91240B29-F687-4f45-9708-019B960494DF}">
-                <a14:hiddenLine xmlns:a14="http://schemas.microsoft.com/office/drawing/2010/main" xmlns="" w="9525">
+                <a14:hiddenLine xmlns="" xmlns:a14="http://schemas.microsoft.com/office/drawing/2010/main" w="9525">
                   <a:solidFill>
                     <a:srgbClr val="000000"/>
                   </a:solidFill>
@@ -1106,7 +1107,7 @@
             </a:ln>
             <a:extLst>
               <a:ext uri="{91240B29-F687-4f45-9708-019B960494DF}">
-                <a14:hiddenLine xmlns:a14="http://schemas.microsoft.com/office/drawing/2010/main" xmlns="" w="9525">
+                <a14:hiddenLine xmlns="" xmlns:a14="http://schemas.microsoft.com/office/drawing/2010/main" w="9525">
                   <a:solidFill>
                     <a:srgbClr val="000000"/>
                   </a:solidFill>
@@ -1196,7 +1197,7 @@
             </a:ln>
             <a:extLst>
               <a:ext uri="{91240B29-F687-4f45-9708-019B960494DF}">
-                <a14:hiddenLine xmlns:a14="http://schemas.microsoft.com/office/drawing/2010/main" xmlns="" w="9525">
+                <a14:hiddenLine xmlns="" xmlns:a14="http://schemas.microsoft.com/office/drawing/2010/main" w="9525">
                   <a:solidFill>
                     <a:srgbClr val="000000"/>
                   </a:solidFill>
@@ -1258,7 +1259,7 @@
             </a:ln>
             <a:extLst>
               <a:ext uri="{91240B29-F687-4f45-9708-019B960494DF}">
-                <a14:hiddenLine xmlns:a14="http://schemas.microsoft.com/office/drawing/2010/main" xmlns="" w="9525">
+                <a14:hiddenLine xmlns="" xmlns:a14="http://schemas.microsoft.com/office/drawing/2010/main" w="9525">
                   <a:solidFill>
                     <a:srgbClr val="000000"/>
                   </a:solidFill>
@@ -1320,7 +1321,7 @@
             </a:ln>
             <a:extLst>
               <a:ext uri="{91240B29-F687-4f45-9708-019B960494DF}">
-                <a14:hiddenLine xmlns:a14="http://schemas.microsoft.com/office/drawing/2010/main" xmlns="" w="9525">
+                <a14:hiddenLine xmlns="" xmlns:a14="http://schemas.microsoft.com/office/drawing/2010/main" w="9525">
                   <a:solidFill>
                     <a:srgbClr val="000000"/>
                   </a:solidFill>
@@ -1410,7 +1411,7 @@
             </a:ln>
             <a:extLst>
               <a:ext uri="{91240B29-F687-4f45-9708-019B960494DF}">
-                <a14:hiddenLine xmlns:a14="http://schemas.microsoft.com/office/drawing/2010/main" xmlns="" w="9525">
+                <a14:hiddenLine xmlns="" xmlns:a14="http://schemas.microsoft.com/office/drawing/2010/main" w="9525">
                   <a:solidFill>
                     <a:srgbClr val="000000"/>
                   </a:solidFill>
@@ -1500,7 +1501,7 @@
             </a:ln>
             <a:extLst>
               <a:ext uri="{91240B29-F687-4f45-9708-019B960494DF}">
-                <a14:hiddenLine xmlns:a14="http://schemas.microsoft.com/office/drawing/2010/main" xmlns="" w="9525">
+                <a14:hiddenLine xmlns="" xmlns:a14="http://schemas.microsoft.com/office/drawing/2010/main" w="9525">
                   <a:solidFill>
                     <a:srgbClr val="000000"/>
                   </a:solidFill>
@@ -1562,7 +1563,7 @@
             </a:ln>
             <a:extLst>
               <a:ext uri="{91240B29-F687-4f45-9708-019B960494DF}">
-                <a14:hiddenLine xmlns:a14="http://schemas.microsoft.com/office/drawing/2010/main" xmlns="" w="9525">
+                <a14:hiddenLine xmlns="" xmlns:a14="http://schemas.microsoft.com/office/drawing/2010/main" w="9525">
                   <a:solidFill>
                     <a:srgbClr val="000000"/>
                   </a:solidFill>
@@ -1672,7 +1673,7 @@
             </a:ln>
             <a:extLst>
               <a:ext uri="{91240B29-F687-4f45-9708-019B960494DF}">
-                <a14:hiddenLine xmlns:a14="http://schemas.microsoft.com/office/drawing/2010/main" xmlns="" w="9525">
+                <a14:hiddenLine xmlns="" xmlns:a14="http://schemas.microsoft.com/office/drawing/2010/main" w="9525">
                   <a:solidFill>
                     <a:srgbClr val="000000"/>
                   </a:solidFill>
@@ -1734,7 +1735,7 @@
             </a:ln>
             <a:extLst>
               <a:ext uri="{91240B29-F687-4f45-9708-019B960494DF}">
-                <a14:hiddenLine xmlns:a14="http://schemas.microsoft.com/office/drawing/2010/main" xmlns="" w="9525">
+                <a14:hiddenLine xmlns="" xmlns:a14="http://schemas.microsoft.com/office/drawing/2010/main" w="9525">
                   <a:solidFill>
                     <a:srgbClr val="000000"/>
                   </a:solidFill>
@@ -1824,7 +1825,7 @@
             </a:ln>
             <a:extLst>
               <a:ext uri="{91240B29-F687-4f45-9708-019B960494DF}">
-                <a14:hiddenLine xmlns:a14="http://schemas.microsoft.com/office/drawing/2010/main" xmlns="" w="9525">
+                <a14:hiddenLine xmlns="" xmlns:a14="http://schemas.microsoft.com/office/drawing/2010/main" w="9525">
                   <a:solidFill>
                     <a:srgbClr val="000000"/>
                   </a:solidFill>
@@ -1914,7 +1915,7 @@
             </a:ln>
             <a:extLst>
               <a:ext uri="{91240B29-F687-4f45-9708-019B960494DF}">
-                <a14:hiddenLine xmlns:a14="http://schemas.microsoft.com/office/drawing/2010/main" xmlns="" w="9525">
+                <a14:hiddenLine xmlns="" xmlns:a14="http://schemas.microsoft.com/office/drawing/2010/main" w="9525">
                   <a:solidFill>
                     <a:srgbClr val="000000"/>
                   </a:solidFill>
@@ -1976,7 +1977,7 @@
             </a:ln>
             <a:extLst>
               <a:ext uri="{91240B29-F687-4f45-9708-019B960494DF}">
-                <a14:hiddenLine xmlns:a14="http://schemas.microsoft.com/office/drawing/2010/main" xmlns="" w="9525">
+                <a14:hiddenLine xmlns="" xmlns:a14="http://schemas.microsoft.com/office/drawing/2010/main" w="9525">
                   <a:solidFill>
                     <a:srgbClr val="000000"/>
                   </a:solidFill>
@@ -2066,7 +2067,7 @@
             </a:ln>
             <a:extLst>
               <a:ext uri="{91240B29-F687-4f45-9708-019B960494DF}">
-                <a14:hiddenLine xmlns:a14="http://schemas.microsoft.com/office/drawing/2010/main" xmlns="" w="9525">
+                <a14:hiddenLine xmlns="" xmlns:a14="http://schemas.microsoft.com/office/drawing/2010/main" w="9525">
                   <a:solidFill>
                     <a:srgbClr val="000000"/>
                   </a:solidFill>
@@ -2156,7 +2157,7 @@
             </a:ln>
             <a:extLst>
               <a:ext uri="{91240B29-F687-4f45-9708-019B960494DF}">
-                <a14:hiddenLine xmlns:a14="http://schemas.microsoft.com/office/drawing/2010/main" xmlns="" w="9525">
+                <a14:hiddenLine xmlns="" xmlns:a14="http://schemas.microsoft.com/office/drawing/2010/main" w="9525">
                   <a:solidFill>
                     <a:srgbClr val="000000"/>
                   </a:solidFill>
@@ -2212,7 +2213,7 @@
             </a:ln>
             <a:extLst>
               <a:ext uri="{91240B29-F687-4f45-9708-019B960494DF}">
-                <a14:hiddenLine xmlns:a14="http://schemas.microsoft.com/office/drawing/2010/main" xmlns="" w="9525">
+                <a14:hiddenLine xmlns="" xmlns:a14="http://schemas.microsoft.com/office/drawing/2010/main" w="9525">
                   <a:solidFill>
                     <a:srgbClr val="000000"/>
                   </a:solidFill>
@@ -2302,7 +2303,7 @@
             </a:ln>
             <a:extLst>
               <a:ext uri="{91240B29-F687-4f45-9708-019B960494DF}">
-                <a14:hiddenLine xmlns:a14="http://schemas.microsoft.com/office/drawing/2010/main" xmlns="" w="9525">
+                <a14:hiddenLine xmlns="" xmlns:a14="http://schemas.microsoft.com/office/drawing/2010/main" w="9525">
                   <a:solidFill>
                     <a:srgbClr val="000000"/>
                   </a:solidFill>
@@ -2358,7 +2359,7 @@
             </a:ln>
             <a:extLst>
               <a:ext uri="{91240B29-F687-4f45-9708-019B960494DF}">
-                <a14:hiddenLine xmlns:a14="http://schemas.microsoft.com/office/drawing/2010/main" xmlns="" w="9525">
+                <a14:hiddenLine xmlns="" xmlns:a14="http://schemas.microsoft.com/office/drawing/2010/main" w="9525">
                   <a:solidFill>
                     <a:srgbClr val="000000"/>
                   </a:solidFill>
@@ -2448,7 +2449,7 @@
             </a:ln>
             <a:extLst>
               <a:ext uri="{91240B29-F687-4f45-9708-019B960494DF}">
-                <a14:hiddenLine xmlns:a14="http://schemas.microsoft.com/office/drawing/2010/main" xmlns="" w="9525">
+                <a14:hiddenLine xmlns="" xmlns:a14="http://schemas.microsoft.com/office/drawing/2010/main" w="9525">
                   <a:solidFill>
                     <a:srgbClr val="000000"/>
                   </a:solidFill>
@@ -2516,7 +2517,7 @@
             </a:ln>
             <a:extLst>
               <a:ext uri="{91240B29-F687-4f45-9708-019B960494DF}">
-                <a14:hiddenLine xmlns:a14="http://schemas.microsoft.com/office/drawing/2010/main" xmlns="" w="9525">
+                <a14:hiddenLine xmlns="" xmlns:a14="http://schemas.microsoft.com/office/drawing/2010/main" w="9525">
                   <a:solidFill>
                     <a:srgbClr val="000000"/>
                   </a:solidFill>
@@ -2606,7 +2607,7 @@
             </a:ln>
             <a:extLst>
               <a:ext uri="{91240B29-F687-4f45-9708-019B960494DF}">
-                <a14:hiddenLine xmlns:a14="http://schemas.microsoft.com/office/drawing/2010/main" xmlns="" w="9525">
+                <a14:hiddenLine xmlns="" xmlns:a14="http://schemas.microsoft.com/office/drawing/2010/main" w="9525">
                   <a:solidFill>
                     <a:srgbClr val="000000"/>
                   </a:solidFill>
@@ -2674,7 +2675,7 @@
             </a:ln>
             <a:extLst>
               <a:ext uri="{91240B29-F687-4f45-9708-019B960494DF}">
-                <a14:hiddenLine xmlns:a14="http://schemas.microsoft.com/office/drawing/2010/main" xmlns="" w="9525">
+                <a14:hiddenLine xmlns="" xmlns:a14="http://schemas.microsoft.com/office/drawing/2010/main" w="9525">
                   <a:solidFill>
                     <a:srgbClr val="000000"/>
                   </a:solidFill>
@@ -2764,7 +2765,7 @@
             </a:ln>
             <a:extLst>
               <a:ext uri="{91240B29-F687-4f45-9708-019B960494DF}">
-                <a14:hiddenLine xmlns:a14="http://schemas.microsoft.com/office/drawing/2010/main" xmlns="" w="9525">
+                <a14:hiddenLine xmlns="" xmlns:a14="http://schemas.microsoft.com/office/drawing/2010/main" w="9525">
                   <a:solidFill>
                     <a:srgbClr val="000000"/>
                   </a:solidFill>
@@ -2798,7 +2799,7 @@
             </a:ln>
             <a:extLst>
               <a:ext uri="{91240B29-F687-4f45-9708-019B960494DF}">
-                <a14:hiddenLine xmlns:a14="http://schemas.microsoft.com/office/drawing/2010/main" xmlns="" w="9525">
+                <a14:hiddenLine xmlns="" xmlns:a14="http://schemas.microsoft.com/office/drawing/2010/main" w="9525">
                   <a:solidFill>
                     <a:srgbClr val="000000"/>
                   </a:solidFill>
@@ -2888,7 +2889,7 @@
             </a:ln>
             <a:extLst>
               <a:ext uri="{91240B29-F687-4f45-9708-019B960494DF}">
-                <a14:hiddenLine xmlns:a14="http://schemas.microsoft.com/office/drawing/2010/main" xmlns="" w="9525">
+                <a14:hiddenLine xmlns="" xmlns:a14="http://schemas.microsoft.com/office/drawing/2010/main" w="9525">
                   <a:solidFill>
                     <a:srgbClr val="000000"/>
                   </a:solidFill>
@@ -2950,7 +2951,7 @@
             </a:ln>
             <a:extLst>
               <a:ext uri="{91240B29-F687-4f45-9708-019B960494DF}">
-                <a14:hiddenLine xmlns:a14="http://schemas.microsoft.com/office/drawing/2010/main" xmlns="" w="9525">
+                <a14:hiddenLine xmlns="" xmlns:a14="http://schemas.microsoft.com/office/drawing/2010/main" w="9525">
                   <a:solidFill>
                     <a:srgbClr val="000000"/>
                   </a:solidFill>
@@ -3012,7 +3013,7 @@
             </a:ln>
             <a:extLst>
               <a:ext uri="{91240B29-F687-4f45-9708-019B960494DF}">
-                <a14:hiddenLine xmlns:a14="http://schemas.microsoft.com/office/drawing/2010/main" xmlns="" w="9525">
+                <a14:hiddenLine xmlns="" xmlns:a14="http://schemas.microsoft.com/office/drawing/2010/main" w="9525">
                   <a:solidFill>
                     <a:srgbClr val="000000"/>
                   </a:solidFill>
@@ -3102,7 +3103,7 @@
             </a:ln>
             <a:extLst>
               <a:ext uri="{91240B29-F687-4f45-9708-019B960494DF}">
-                <a14:hiddenLine xmlns:a14="http://schemas.microsoft.com/office/drawing/2010/main" xmlns="" w="9525">
+                <a14:hiddenLine xmlns="" xmlns:a14="http://schemas.microsoft.com/office/drawing/2010/main" w="9525">
                   <a:solidFill>
                     <a:srgbClr val="000000"/>
                   </a:solidFill>
@@ -3170,7 +3171,7 @@
             </a:ln>
             <a:extLst>
               <a:ext uri="{91240B29-F687-4f45-9708-019B960494DF}">
-                <a14:hiddenLine xmlns:a14="http://schemas.microsoft.com/office/drawing/2010/main" xmlns="" w="9525">
+                <a14:hiddenLine xmlns="" xmlns:a14="http://schemas.microsoft.com/office/drawing/2010/main" w="9525">
                   <a:solidFill>
                     <a:srgbClr val="000000"/>
                   </a:solidFill>
@@ -3232,7 +3233,7 @@
             </a:ln>
             <a:extLst>
               <a:ext uri="{91240B29-F687-4f45-9708-019B960494DF}">
-                <a14:hiddenLine xmlns:a14="http://schemas.microsoft.com/office/drawing/2010/main" xmlns="" w="9525">
+                <a14:hiddenLine xmlns="" xmlns:a14="http://schemas.microsoft.com/office/drawing/2010/main" w="9525">
                   <a:solidFill>
                     <a:srgbClr val="000000"/>
                   </a:solidFill>
@@ -3322,7 +3323,7 @@
             </a:ln>
             <a:extLst>
               <a:ext uri="{91240B29-F687-4f45-9708-019B960494DF}">
-                <a14:hiddenLine xmlns:a14="http://schemas.microsoft.com/office/drawing/2010/main" xmlns="" w="9525">
+                <a14:hiddenLine xmlns="" xmlns:a14="http://schemas.microsoft.com/office/drawing/2010/main" w="9525">
                   <a:solidFill>
                     <a:srgbClr val="000000"/>
                   </a:solidFill>
@@ -3384,7 +3385,7 @@
             </a:ln>
             <a:extLst>
               <a:ext uri="{91240B29-F687-4f45-9708-019B960494DF}">
-                <a14:hiddenLine xmlns:a14="http://schemas.microsoft.com/office/drawing/2010/main" xmlns="" w="9525">
+                <a14:hiddenLine xmlns="" xmlns:a14="http://schemas.microsoft.com/office/drawing/2010/main" w="9525">
                   <a:solidFill>
                     <a:srgbClr val="000000"/>
                   </a:solidFill>
@@ -3474,7 +3475,7 @@
             </a:ln>
             <a:extLst>
               <a:ext uri="{91240B29-F687-4f45-9708-019B960494DF}">
-                <a14:hiddenLine xmlns:a14="http://schemas.microsoft.com/office/drawing/2010/main" xmlns="" w="9525">
+                <a14:hiddenLine xmlns="" xmlns:a14="http://schemas.microsoft.com/office/drawing/2010/main" w="9525">
                   <a:solidFill>
                     <a:srgbClr val="000000"/>
                   </a:solidFill>
@@ -3536,7 +3537,7 @@
             </a:ln>
             <a:extLst>
               <a:ext uri="{91240B29-F687-4f45-9708-019B960494DF}">
-                <a14:hiddenLine xmlns:a14="http://schemas.microsoft.com/office/drawing/2010/main" xmlns="" w="9525">
+                <a14:hiddenLine xmlns="" xmlns:a14="http://schemas.microsoft.com/office/drawing/2010/main" w="9525">
                   <a:solidFill>
                     <a:srgbClr val="000000"/>
                   </a:solidFill>
@@ -3626,7 +3627,7 @@
             </a:ln>
             <a:extLst>
               <a:ext uri="{91240B29-F687-4f45-9708-019B960494DF}">
-                <a14:hiddenLine xmlns:a14="http://schemas.microsoft.com/office/drawing/2010/main" xmlns="" w="9525">
+                <a14:hiddenLine xmlns="" xmlns:a14="http://schemas.microsoft.com/office/drawing/2010/main" w="9525">
                   <a:solidFill>
                     <a:srgbClr val="000000"/>
                   </a:solidFill>
@@ -3660,7 +3661,7 @@
             </a:ln>
             <a:extLst>
               <a:ext uri="{91240B29-F687-4f45-9708-019B960494DF}">
-                <a14:hiddenLine xmlns:a14="http://schemas.microsoft.com/office/drawing/2010/main" xmlns="" w="9525">
+                <a14:hiddenLine xmlns="" xmlns:a14="http://schemas.microsoft.com/office/drawing/2010/main" w="9525">
                   <a:solidFill>
                     <a:srgbClr val="000000"/>
                   </a:solidFill>
@@ -3725,7 +3726,7 @@
             </a:ln>
             <a:extLst>
               <a:ext uri="{91240B29-F687-4f45-9708-019B960494DF}">
-                <a14:hiddenLine xmlns:a14="http://schemas.microsoft.com/office/drawing/2010/main" xmlns="" w="9525">
+                <a14:hiddenLine xmlns="" xmlns:a14="http://schemas.microsoft.com/office/drawing/2010/main" w="9525">
                   <a:solidFill>
                     <a:srgbClr val="000000"/>
                   </a:solidFill>
@@ -3815,7 +3816,7 @@
             </a:ln>
             <a:extLst>
               <a:ext uri="{91240B29-F687-4f45-9708-019B960494DF}">
-                <a14:hiddenLine xmlns:a14="http://schemas.microsoft.com/office/drawing/2010/main" xmlns="" w="9525">
+                <a14:hiddenLine xmlns="" xmlns:a14="http://schemas.microsoft.com/office/drawing/2010/main" w="9525">
                   <a:solidFill>
                     <a:srgbClr val="000000"/>
                   </a:solidFill>
@@ -3877,7 +3878,7 @@
             </a:ln>
             <a:extLst>
               <a:ext uri="{91240B29-F687-4f45-9708-019B960494DF}">
-                <a14:hiddenLine xmlns:a14="http://schemas.microsoft.com/office/drawing/2010/main" xmlns="" w="9525">
+                <a14:hiddenLine xmlns="" xmlns:a14="http://schemas.microsoft.com/office/drawing/2010/main" w="9525">
                   <a:solidFill>
                     <a:srgbClr val="000000"/>
                   </a:solidFill>
@@ -3967,7 +3968,7 @@
             </a:ln>
             <a:extLst>
               <a:ext uri="{91240B29-F687-4f45-9708-019B960494DF}">
-                <a14:hiddenLine xmlns:a14="http://schemas.microsoft.com/office/drawing/2010/main" xmlns="" w="9525">
+                <a14:hiddenLine xmlns="" xmlns:a14="http://schemas.microsoft.com/office/drawing/2010/main" w="9525">
                   <a:solidFill>
                     <a:srgbClr val="000000"/>
                   </a:solidFill>
@@ -4057,7 +4058,7 @@
             </a:ln>
             <a:extLst>
               <a:ext uri="{91240B29-F687-4f45-9708-019B960494DF}">
-                <a14:hiddenLine xmlns:a14="http://schemas.microsoft.com/office/drawing/2010/main" xmlns="" w="9525">
+                <a14:hiddenLine xmlns="" xmlns:a14="http://schemas.microsoft.com/office/drawing/2010/main" w="9525">
                   <a:solidFill>
                     <a:srgbClr val="000000"/>
                   </a:solidFill>
@@ -4122,7 +4123,7 @@
             </a:ln>
             <a:extLst>
               <a:ext uri="{91240B29-F687-4f45-9708-019B960494DF}">
-                <a14:hiddenLine xmlns:a14="http://schemas.microsoft.com/office/drawing/2010/main" xmlns="" w="9525">
+                <a14:hiddenLine xmlns="" xmlns:a14="http://schemas.microsoft.com/office/drawing/2010/main" w="9525">
                   <a:solidFill>
                     <a:srgbClr val="000000"/>
                   </a:solidFill>
@@ -4184,7 +4185,7 @@
             </a:ln>
             <a:extLst>
               <a:ext uri="{91240B29-F687-4f45-9708-019B960494DF}">
-                <a14:hiddenLine xmlns:a14="http://schemas.microsoft.com/office/drawing/2010/main" xmlns="" w="9525">
+                <a14:hiddenLine xmlns="" xmlns:a14="http://schemas.microsoft.com/office/drawing/2010/main" w="9525">
                   <a:solidFill>
                     <a:srgbClr val="000000"/>
                   </a:solidFill>
@@ -4274,7 +4275,7 @@
             </a:ln>
             <a:extLst>
               <a:ext uri="{91240B29-F687-4f45-9708-019B960494DF}">
-                <a14:hiddenLine xmlns:a14="http://schemas.microsoft.com/office/drawing/2010/main" xmlns="" w="9525">
+                <a14:hiddenLine xmlns="" xmlns:a14="http://schemas.microsoft.com/office/drawing/2010/main" w="9525">
                   <a:solidFill>
                     <a:srgbClr val="000000"/>
                   </a:solidFill>
@@ -4364,7 +4365,7 @@
             </a:ln>
             <a:extLst>
               <a:ext uri="{91240B29-F687-4f45-9708-019B960494DF}">
-                <a14:hiddenLine xmlns:a14="http://schemas.microsoft.com/office/drawing/2010/main" xmlns="" w="9525">
+                <a14:hiddenLine xmlns="" xmlns:a14="http://schemas.microsoft.com/office/drawing/2010/main" w="9525">
                   <a:solidFill>
                     <a:srgbClr val="000000"/>
                   </a:solidFill>
@@ -4426,7 +4427,7 @@
             </a:ln>
             <a:extLst>
               <a:ext uri="{91240B29-F687-4f45-9708-019B960494DF}">
-                <a14:hiddenLine xmlns:a14="http://schemas.microsoft.com/office/drawing/2010/main" xmlns="" w="9525">
+                <a14:hiddenLine xmlns="" xmlns:a14="http://schemas.microsoft.com/office/drawing/2010/main" w="9525">
                   <a:solidFill>
                     <a:srgbClr val="000000"/>
                   </a:solidFill>
@@ -4546,7 +4547,7 @@
             </a:ln>
             <a:extLst>
               <a:ext uri="{91240B29-F687-4f45-9708-019B960494DF}">
-                <a14:hiddenLine xmlns:a14="http://schemas.microsoft.com/office/drawing/2010/main" xmlns="" w="9525">
+                <a14:hiddenLine xmlns="" xmlns:a14="http://schemas.microsoft.com/office/drawing/2010/main" w="9525">
                   <a:solidFill>
                     <a:srgbClr val="000000"/>
                   </a:solidFill>
@@ -4614,7 +4615,7 @@
             </a:ln>
             <a:extLst>
               <a:ext uri="{91240B29-F687-4f45-9708-019B960494DF}">
-                <a14:hiddenLine xmlns:a14="http://schemas.microsoft.com/office/drawing/2010/main" xmlns="" w="9525">
+                <a14:hiddenLine xmlns="" xmlns:a14="http://schemas.microsoft.com/office/drawing/2010/main" w="9525">
                   <a:solidFill>
                     <a:srgbClr val="000000"/>
                   </a:solidFill>
@@ -4704,7 +4705,7 @@
             </a:ln>
             <a:extLst>
               <a:ext uri="{91240B29-F687-4f45-9708-019B960494DF}">
-                <a14:hiddenLine xmlns:a14="http://schemas.microsoft.com/office/drawing/2010/main" xmlns="" w="9525">
+                <a14:hiddenLine xmlns="" xmlns:a14="http://schemas.microsoft.com/office/drawing/2010/main" w="9525">
                   <a:solidFill>
                     <a:srgbClr val="000000"/>
                   </a:solidFill>
@@ -4844,7 +4845,7 @@
           <a:p>
             <a:fld id="{4313F670-7F9A-774D-B73D-573401E44297}" type="datetime1">
               <a:rPr lang="en-US" smtClean="0"/>
-              <a:t>8/3/26</a:t>
+              <a:t>8/4/26</a:t>
             </a:fld>
             <a:endParaRPr lang="en-US"/>
           </a:p>
@@ -5111,7 +5112,7 @@
           <a:p>
             <a:fld id="{446F9669-A8A7-2D40-9D01-B35FC337AA30}" type="datetime1">
               <a:rPr lang="en-US" smtClean="0"/>
-              <a:t>8/3/26</a:t>
+              <a:t>8/4/26</a:t>
             </a:fld>
             <a:endParaRPr lang="en-US"/>
           </a:p>
@@ -5307,7 +5308,7 @@
           <a:p>
             <a:fld id="{FA76CF18-F41B-6B48-B3E5-599E9795C2C3}" type="datetime1">
               <a:rPr lang="en-US" smtClean="0"/>
-              <a:t>8/3/26</a:t>
+              <a:t>8/4/26</a:t>
             </a:fld>
             <a:endParaRPr lang="en-US"/>
           </a:p>
@@ -5570,7 +5571,7 @@
           <a:p>
             <a:fld id="{B9654854-6457-164F-A077-6B3035079B82}" type="datetime1">
               <a:rPr lang="en-US" smtClean="0"/>
-              <a:t>8/3/26</a:t>
+              <a:t>8/4/26</a:t>
             </a:fld>
             <a:endParaRPr lang="en-US"/>
           </a:p>
@@ -6004,7 +6005,7 @@
           <a:p>
             <a:fld id="{CE3DBFD7-E611-8C40-AC73-0C29FF63F0CD}" type="datetime1">
               <a:rPr lang="en-US" smtClean="0"/>
-              <a:t>8/3/26</a:t>
+              <a:t>8/4/26</a:t>
             </a:fld>
             <a:endParaRPr lang="en-US"/>
           </a:p>
@@ -6550,7 +6551,7 @@
           <a:p>
             <a:fld id="{C8B63B06-0493-2840-9F37-30C9412BBF17}" type="datetime1">
               <a:rPr lang="en-US" smtClean="0"/>
-              <a:t>8/3/26</a:t>
+              <a:t>8/4/26</a:t>
             </a:fld>
             <a:endParaRPr lang="en-US"/>
           </a:p>
@@ -7270,7 +7271,7 @@
           <a:p>
             <a:fld id="{72B5C0FA-8C46-E84D-B6D7-B673F2CA0A0E}" type="datetime1">
               <a:rPr lang="en-US" smtClean="0"/>
-              <a:t>8/3/26</a:t>
+              <a:t>8/4/26</a:t>
             </a:fld>
             <a:endParaRPr lang="en-US"/>
           </a:p>
@@ -7440,7 +7441,7 @@
           <a:p>
             <a:fld id="{60B9CDE1-97B4-BF46-B69C-B86855B18820}" type="datetime1">
               <a:rPr lang="en-US" smtClean="0"/>
-              <a:t>8/3/26</a:t>
+              <a:t>8/4/26</a:t>
             </a:fld>
             <a:endParaRPr lang="en-US"/>
           </a:p>
@@ -7620,7 +7621,7 @@
           <a:p>
             <a:fld id="{BE51D3A4-F9E5-FD49-AA87-B395F50451DC}" type="datetime1">
               <a:rPr lang="en-US" smtClean="0"/>
-              <a:t>8/3/26</a:t>
+              <a:t>8/4/26</a:t>
             </a:fld>
             <a:endParaRPr lang="en-US"/>
           </a:p>
@@ -7790,7 +7791,7 @@
           <a:p>
             <a:fld id="{880DFB37-B0AE-9449-85EC-14F9C83B6084}" type="datetime1">
               <a:rPr lang="en-US" smtClean="0"/>
-              <a:t>8/3/26</a:t>
+              <a:t>8/4/26</a:t>
             </a:fld>
             <a:endParaRPr lang="en-US"/>
           </a:p>
@@ -8040,7 +8041,7 @@
           <a:p>
             <a:fld id="{C939124A-616E-6944-A21A-1839F5DBE7BB}" type="datetime1">
               <a:rPr lang="en-US" smtClean="0"/>
-              <a:t>8/3/26</a:t>
+              <a:t>8/4/26</a:t>
             </a:fld>
             <a:endParaRPr lang="en-US"/>
           </a:p>
@@ -8272,7 +8273,7 @@
           <a:p>
             <a:fld id="{C6E9A026-D48C-FD43-8676-CD625DD5D84B}" type="datetime1">
               <a:rPr lang="en-US" smtClean="0"/>
-              <a:t>8/3/26</a:t>
+              <a:t>8/4/26</a:t>
             </a:fld>
             <a:endParaRPr lang="en-US"/>
           </a:p>
@@ -8658,7 +8659,7 @@
           <a:p>
             <a:fld id="{EA35111E-23A3-1440-99A3-C4C665908E3D}" type="datetime1">
               <a:rPr lang="en-US" smtClean="0"/>
-              <a:t>8/3/26</a:t>
+              <a:t>8/4/26</a:t>
             </a:fld>
             <a:endParaRPr lang="en-US"/>
           </a:p>
@@ -8781,7 +8782,7 @@
           <a:p>
             <a:fld id="{249983B9-88EF-D74B-BA6D-6A3BF17C2B38}" type="datetime1">
               <a:rPr lang="en-US" smtClean="0"/>
-              <a:t>8/3/26</a:t>
+              <a:t>8/4/26</a:t>
             </a:fld>
             <a:endParaRPr lang="en-US"/>
           </a:p>
@@ -8876,7 +8877,7 @@
           <a:p>
             <a:fld id="{E2A00AEF-B4EC-084A-8DB8-A225C7981CBB}" type="datetime1">
               <a:rPr lang="en-US" smtClean="0"/>
-              <a:t>8/3/26</a:t>
+              <a:t>8/4/26</a:t>
             </a:fld>
             <a:endParaRPr lang="en-US"/>
           </a:p>
@@ -9125,7 +9126,7 @@
           <a:p>
             <a:fld id="{97860299-21CD-A94A-A7B0-44E787F8D42C}" type="datetime1">
               <a:rPr lang="en-US" smtClean="0"/>
-              <a:t>8/3/26</a:t>
+              <a:t>8/4/26</a:t>
             </a:fld>
             <a:endParaRPr lang="en-US"/>
           </a:p>
@@ -9410,7 +9411,7 @@
           <a:p>
             <a:fld id="{3DFD19CF-4E62-D246-BA61-7B528271315F}" type="datetime1">
               <a:rPr lang="en-US" smtClean="0"/>
-              <a:t>8/3/26</a:t>
+              <a:t>8/4/26</a:t>
             </a:fld>
             <a:endParaRPr lang="en-US"/>
           </a:p>
@@ -9533,7 +9534,7 @@
           <a:noFill/>
           <a:extLst>
             <a:ext uri="{909E8E84-426E-40dd-AFC4-6F175D3DCCD1}">
-              <a14:hiddenFill xmlns:a14="http://schemas.microsoft.com/office/drawing/2010/main" xmlns="">
+              <a14:hiddenFill xmlns="" xmlns:a14="http://schemas.microsoft.com/office/drawing/2010/main">
                 <a:solidFill>
                   <a:srgbClr val="FFFFFF"/>
                 </a:solidFill>
@@ -9607,7 +9608,7 @@
               </a:ln>
               <a:extLst>
                 <a:ext uri="{91240B29-F687-4f45-9708-019B960494DF}">
-                  <a14:hiddenLine xmlns:a14="http://schemas.microsoft.com/office/drawing/2010/main" xmlns="" w="9525">
+                  <a14:hiddenLine xmlns="" xmlns:a14="http://schemas.microsoft.com/office/drawing/2010/main" w="9525">
                     <a:solidFill>
                       <a:srgbClr val="000000"/>
                     </a:solidFill>
@@ -9697,7 +9698,7 @@
               </a:ln>
               <a:extLst>
                 <a:ext uri="{91240B29-F687-4f45-9708-019B960494DF}">
-                  <a14:hiddenLine xmlns:a14="http://schemas.microsoft.com/office/drawing/2010/main" xmlns="" w="9525">
+                  <a14:hiddenLine xmlns="" xmlns:a14="http://schemas.microsoft.com/office/drawing/2010/main" w="9525">
                     <a:solidFill>
                       <a:srgbClr val="000000"/>
                     </a:solidFill>
@@ -9787,7 +9788,7 @@
               </a:ln>
               <a:extLst>
                 <a:ext uri="{91240B29-F687-4f45-9708-019B960494DF}">
-                  <a14:hiddenLine xmlns:a14="http://schemas.microsoft.com/office/drawing/2010/main" xmlns="" w="9525">
+                  <a14:hiddenLine xmlns="" xmlns:a14="http://schemas.microsoft.com/office/drawing/2010/main" w="9525">
                     <a:solidFill>
                       <a:srgbClr val="000000"/>
                     </a:solidFill>
@@ -9849,7 +9850,7 @@
               </a:ln>
               <a:extLst>
                 <a:ext uri="{91240B29-F687-4f45-9708-019B960494DF}">
-                  <a14:hiddenLine xmlns:a14="http://schemas.microsoft.com/office/drawing/2010/main" xmlns="" w="9525">
+                  <a14:hiddenLine xmlns="" xmlns:a14="http://schemas.microsoft.com/office/drawing/2010/main" w="9525">
                     <a:solidFill>
                       <a:srgbClr val="000000"/>
                     </a:solidFill>
@@ -9939,7 +9940,7 @@
               </a:ln>
               <a:extLst>
                 <a:ext uri="{91240B29-F687-4f45-9708-019B960494DF}">
-                  <a14:hiddenLine xmlns:a14="http://schemas.microsoft.com/office/drawing/2010/main" xmlns="" w="9525">
+                  <a14:hiddenLine xmlns="" xmlns:a14="http://schemas.microsoft.com/office/drawing/2010/main" w="9525">
                     <a:solidFill>
                       <a:srgbClr val="000000"/>
                     </a:solidFill>
@@ -10001,7 +10002,7 @@
               </a:ln>
               <a:extLst>
                 <a:ext uri="{91240B29-F687-4f45-9708-019B960494DF}">
-                  <a14:hiddenLine xmlns:a14="http://schemas.microsoft.com/office/drawing/2010/main" xmlns="" w="9525">
+                  <a14:hiddenLine xmlns="" xmlns:a14="http://schemas.microsoft.com/office/drawing/2010/main" w="9525">
                     <a:solidFill>
                       <a:srgbClr val="000000"/>
                     </a:solidFill>
@@ -10063,7 +10064,7 @@
               </a:ln>
               <a:extLst>
                 <a:ext uri="{91240B29-F687-4f45-9708-019B960494DF}">
-                  <a14:hiddenLine xmlns:a14="http://schemas.microsoft.com/office/drawing/2010/main" xmlns="" w="9525">
+                  <a14:hiddenLine xmlns="" xmlns:a14="http://schemas.microsoft.com/office/drawing/2010/main" w="9525">
                     <a:solidFill>
                       <a:srgbClr val="000000"/>
                     </a:solidFill>
@@ -10153,7 +10154,7 @@
               </a:ln>
               <a:extLst>
                 <a:ext uri="{91240B29-F687-4f45-9708-019B960494DF}">
-                  <a14:hiddenLine xmlns:a14="http://schemas.microsoft.com/office/drawing/2010/main" xmlns="" w="9525">
+                  <a14:hiddenLine xmlns="" xmlns:a14="http://schemas.microsoft.com/office/drawing/2010/main" w="9525">
                     <a:solidFill>
                       <a:srgbClr val="000000"/>
                     </a:solidFill>
@@ -10243,7 +10244,7 @@
               </a:ln>
               <a:extLst>
                 <a:ext uri="{91240B29-F687-4f45-9708-019B960494DF}">
-                  <a14:hiddenLine xmlns:a14="http://schemas.microsoft.com/office/drawing/2010/main" xmlns="" w="9525">
+                  <a14:hiddenLine xmlns="" xmlns:a14="http://schemas.microsoft.com/office/drawing/2010/main" w="9525">
                     <a:solidFill>
                       <a:srgbClr val="000000"/>
                     </a:solidFill>
@@ -10305,7 +10306,7 @@
               </a:ln>
               <a:extLst>
                 <a:ext uri="{91240B29-F687-4f45-9708-019B960494DF}">
-                  <a14:hiddenLine xmlns:a14="http://schemas.microsoft.com/office/drawing/2010/main" xmlns="" w="9525">
+                  <a14:hiddenLine xmlns="" xmlns:a14="http://schemas.microsoft.com/office/drawing/2010/main" w="9525">
                     <a:solidFill>
                       <a:srgbClr val="000000"/>
                     </a:solidFill>
@@ -10415,7 +10416,7 @@
               </a:ln>
               <a:extLst>
                 <a:ext uri="{91240B29-F687-4f45-9708-019B960494DF}">
-                  <a14:hiddenLine xmlns:a14="http://schemas.microsoft.com/office/drawing/2010/main" xmlns="" w="9525">
+                  <a14:hiddenLine xmlns="" xmlns:a14="http://schemas.microsoft.com/office/drawing/2010/main" w="9525">
                     <a:solidFill>
                       <a:srgbClr val="000000"/>
                     </a:solidFill>
@@ -10499,7 +10500,7 @@
               </a:ln>
               <a:extLst>
                 <a:ext uri="{91240B29-F687-4f45-9708-019B960494DF}">
-                  <a14:hiddenLine xmlns:a14="http://schemas.microsoft.com/office/drawing/2010/main" xmlns="" w="9525">
+                  <a14:hiddenLine xmlns="" xmlns:a14="http://schemas.microsoft.com/office/drawing/2010/main" w="9525">
                     <a:solidFill>
                       <a:srgbClr val="000000"/>
                     </a:solidFill>
@@ -10561,7 +10562,7 @@
               </a:ln>
               <a:extLst>
                 <a:ext uri="{91240B29-F687-4f45-9708-019B960494DF}">
-                  <a14:hiddenLine xmlns:a14="http://schemas.microsoft.com/office/drawing/2010/main" xmlns="" w="9525">
+                  <a14:hiddenLine xmlns="" xmlns:a14="http://schemas.microsoft.com/office/drawing/2010/main" w="9525">
                     <a:solidFill>
                       <a:srgbClr val="000000"/>
                     </a:solidFill>
@@ -10623,7 +10624,7 @@
               </a:ln>
               <a:extLst>
                 <a:ext uri="{91240B29-F687-4f45-9708-019B960494DF}">
-                  <a14:hiddenLine xmlns:a14="http://schemas.microsoft.com/office/drawing/2010/main" xmlns="" w="9525">
+                  <a14:hiddenLine xmlns="" xmlns:a14="http://schemas.microsoft.com/office/drawing/2010/main" w="9525">
                     <a:solidFill>
                       <a:srgbClr val="000000"/>
                     </a:solidFill>
@@ -10713,7 +10714,7 @@
               </a:ln>
               <a:extLst>
                 <a:ext uri="{91240B29-F687-4f45-9708-019B960494DF}">
-                  <a14:hiddenLine xmlns:a14="http://schemas.microsoft.com/office/drawing/2010/main" xmlns="" w="9525">
+                  <a14:hiddenLine xmlns="" xmlns:a14="http://schemas.microsoft.com/office/drawing/2010/main" w="9525">
                     <a:solidFill>
                       <a:srgbClr val="000000"/>
                     </a:solidFill>
@@ -10747,7 +10748,7 @@
               </a:ln>
               <a:extLst>
                 <a:ext uri="{91240B29-F687-4f45-9708-019B960494DF}">
-                  <a14:hiddenLine xmlns:a14="http://schemas.microsoft.com/office/drawing/2010/main" xmlns="" w="9525">
+                  <a14:hiddenLine xmlns="" xmlns:a14="http://schemas.microsoft.com/office/drawing/2010/main" w="9525">
                     <a:solidFill>
                       <a:srgbClr val="000000"/>
                     </a:solidFill>
@@ -10812,7 +10813,7 @@
               </a:ln>
               <a:extLst>
                 <a:ext uri="{91240B29-F687-4f45-9708-019B960494DF}">
-                  <a14:hiddenLine xmlns:a14="http://schemas.microsoft.com/office/drawing/2010/main" xmlns="" w="9525">
+                  <a14:hiddenLine xmlns="" xmlns:a14="http://schemas.microsoft.com/office/drawing/2010/main" w="9525">
                     <a:solidFill>
                       <a:srgbClr val="000000"/>
                     </a:solidFill>
@@ -10902,7 +10903,7 @@
               </a:ln>
               <a:extLst>
                 <a:ext uri="{91240B29-F687-4f45-9708-019B960494DF}">
-                  <a14:hiddenLine xmlns:a14="http://schemas.microsoft.com/office/drawing/2010/main" xmlns="" w="9525">
+                  <a14:hiddenLine xmlns="" xmlns:a14="http://schemas.microsoft.com/office/drawing/2010/main" w="9525">
                     <a:solidFill>
                       <a:srgbClr val="000000"/>
                     </a:solidFill>
@@ -10964,7 +10965,7 @@
               </a:ln>
               <a:extLst>
                 <a:ext uri="{91240B29-F687-4f45-9708-019B960494DF}">
-                  <a14:hiddenLine xmlns:a14="http://schemas.microsoft.com/office/drawing/2010/main" xmlns="" w="9525">
+                  <a14:hiddenLine xmlns="" xmlns:a14="http://schemas.microsoft.com/office/drawing/2010/main" w="9525">
                     <a:solidFill>
                       <a:srgbClr val="000000"/>
                     </a:solidFill>
@@ -11054,7 +11055,7 @@
               </a:ln>
               <a:extLst>
                 <a:ext uri="{91240B29-F687-4f45-9708-019B960494DF}">
-                  <a14:hiddenLine xmlns:a14="http://schemas.microsoft.com/office/drawing/2010/main" xmlns="" w="9525">
+                  <a14:hiddenLine xmlns="" xmlns:a14="http://schemas.microsoft.com/office/drawing/2010/main" w="9525">
                     <a:solidFill>
                       <a:srgbClr val="000000"/>
                     </a:solidFill>
@@ -11119,7 +11120,7 @@
               </a:ln>
               <a:extLst>
                 <a:ext uri="{91240B29-F687-4f45-9708-019B960494DF}">
-                  <a14:hiddenLine xmlns:a14="http://schemas.microsoft.com/office/drawing/2010/main" xmlns="" w="9525">
+                  <a14:hiddenLine xmlns="" xmlns:a14="http://schemas.microsoft.com/office/drawing/2010/main" w="9525">
                     <a:solidFill>
                       <a:srgbClr val="000000"/>
                     </a:solidFill>
@@ -11181,7 +11182,7 @@
               </a:ln>
               <a:extLst>
                 <a:ext uri="{91240B29-F687-4f45-9708-019B960494DF}">
-                  <a14:hiddenLine xmlns:a14="http://schemas.microsoft.com/office/drawing/2010/main" xmlns="" w="9525">
+                  <a14:hiddenLine xmlns="" xmlns:a14="http://schemas.microsoft.com/office/drawing/2010/main" w="9525">
                     <a:solidFill>
                       <a:srgbClr val="000000"/>
                     </a:solidFill>
@@ -11271,7 +11272,7 @@
               </a:ln>
               <a:extLst>
                 <a:ext uri="{91240B29-F687-4f45-9708-019B960494DF}">
-                  <a14:hiddenLine xmlns:a14="http://schemas.microsoft.com/office/drawing/2010/main" xmlns="" w="9525">
+                  <a14:hiddenLine xmlns="" xmlns:a14="http://schemas.microsoft.com/office/drawing/2010/main" w="9525">
                     <a:solidFill>
                       <a:srgbClr val="000000"/>
                     </a:solidFill>
@@ -11361,7 +11362,7 @@
               </a:ln>
               <a:extLst>
                 <a:ext uri="{91240B29-F687-4f45-9708-019B960494DF}">
-                  <a14:hiddenLine xmlns:a14="http://schemas.microsoft.com/office/drawing/2010/main" xmlns="" w="9525">
+                  <a14:hiddenLine xmlns="" xmlns:a14="http://schemas.microsoft.com/office/drawing/2010/main" w="9525">
                     <a:solidFill>
                       <a:srgbClr val="000000"/>
                     </a:solidFill>
@@ -11426,7 +11427,7 @@
               </a:ln>
               <a:extLst>
                 <a:ext uri="{91240B29-F687-4f45-9708-019B960494DF}">
-                  <a14:hiddenLine xmlns:a14="http://schemas.microsoft.com/office/drawing/2010/main" xmlns="" w="9525">
+                  <a14:hiddenLine xmlns="" xmlns:a14="http://schemas.microsoft.com/office/drawing/2010/main" w="9525">
                     <a:solidFill>
                       <a:srgbClr val="000000"/>
                     </a:solidFill>
@@ -11546,7 +11547,7 @@
               </a:ln>
               <a:extLst>
                 <a:ext uri="{91240B29-F687-4f45-9708-019B960494DF}">
-                  <a14:hiddenLine xmlns:a14="http://schemas.microsoft.com/office/drawing/2010/main" xmlns="" w="9525">
+                  <a14:hiddenLine xmlns="" xmlns:a14="http://schemas.microsoft.com/office/drawing/2010/main" w="9525">
                     <a:solidFill>
                       <a:srgbClr val="000000"/>
                     </a:solidFill>
@@ -11627,7 +11628,7 @@
               </a:ln>
               <a:extLst>
                 <a:ext uri="{91240B29-F687-4f45-9708-019B960494DF}">
-                  <a14:hiddenLine xmlns:a14="http://schemas.microsoft.com/office/drawing/2010/main" xmlns="" w="9525">
+                  <a14:hiddenLine xmlns="" xmlns:a14="http://schemas.microsoft.com/office/drawing/2010/main" w="9525">
                     <a:solidFill>
                       <a:srgbClr val="000000"/>
                     </a:solidFill>
@@ -11742,7 +11743,7 @@
               </a:ln>
               <a:extLst>
                 <a:ext uri="{91240B29-F687-4f45-9708-019B960494DF}">
-                  <a14:hiddenLine xmlns:a14="http://schemas.microsoft.com/office/drawing/2010/main" xmlns="" w="9525">
+                  <a14:hiddenLine xmlns="" xmlns:a14="http://schemas.microsoft.com/office/drawing/2010/main" w="9525">
                     <a:solidFill>
                       <a:srgbClr val="000000"/>
                     </a:solidFill>
@@ -11832,7 +11833,7 @@
               </a:ln>
               <a:extLst>
                 <a:ext uri="{91240B29-F687-4f45-9708-019B960494DF}">
-                  <a14:hiddenLine xmlns:a14="http://schemas.microsoft.com/office/drawing/2010/main" xmlns="" w="9525">
+                  <a14:hiddenLine xmlns="" xmlns:a14="http://schemas.microsoft.com/office/drawing/2010/main" w="9525">
                     <a:solidFill>
                       <a:srgbClr val="000000"/>
                     </a:solidFill>
@@ -11897,7 +11898,7 @@
               </a:ln>
               <a:extLst>
                 <a:ext uri="{91240B29-F687-4f45-9708-019B960494DF}">
-                  <a14:hiddenLine xmlns:a14="http://schemas.microsoft.com/office/drawing/2010/main" xmlns="" w="9525">
+                  <a14:hiddenLine xmlns="" xmlns:a14="http://schemas.microsoft.com/office/drawing/2010/main" w="9525">
                     <a:solidFill>
                       <a:srgbClr val="000000"/>
                     </a:solidFill>
@@ -11987,7 +11988,7 @@
               </a:ln>
               <a:extLst>
                 <a:ext uri="{91240B29-F687-4f45-9708-019B960494DF}">
-                  <a14:hiddenLine xmlns:a14="http://schemas.microsoft.com/office/drawing/2010/main" xmlns="" w="9525">
+                  <a14:hiddenLine xmlns="" xmlns:a14="http://schemas.microsoft.com/office/drawing/2010/main" w="9525">
                     <a:solidFill>
                       <a:srgbClr val="000000"/>
                     </a:solidFill>
@@ -12055,7 +12056,7 @@
               </a:ln>
               <a:extLst>
                 <a:ext uri="{91240B29-F687-4f45-9708-019B960494DF}">
-                  <a14:hiddenLine xmlns:a14="http://schemas.microsoft.com/office/drawing/2010/main" xmlns="" w="9525">
+                  <a14:hiddenLine xmlns="" xmlns:a14="http://schemas.microsoft.com/office/drawing/2010/main" w="9525">
                     <a:solidFill>
                       <a:srgbClr val="000000"/>
                     </a:solidFill>
@@ -12145,7 +12146,7 @@
               </a:ln>
               <a:extLst>
                 <a:ext uri="{91240B29-F687-4f45-9708-019B960494DF}">
-                  <a14:hiddenLine xmlns:a14="http://schemas.microsoft.com/office/drawing/2010/main" xmlns="" w="9525">
+                  <a14:hiddenLine xmlns="" xmlns:a14="http://schemas.microsoft.com/office/drawing/2010/main" w="9525">
                     <a:solidFill>
                       <a:srgbClr val="000000"/>
                     </a:solidFill>
@@ -12213,7 +12214,7 @@
               </a:ln>
               <a:extLst>
                 <a:ext uri="{91240B29-F687-4f45-9708-019B960494DF}">
-                  <a14:hiddenLine xmlns:a14="http://schemas.microsoft.com/office/drawing/2010/main" xmlns="" w="9525">
+                  <a14:hiddenLine xmlns="" xmlns:a14="http://schemas.microsoft.com/office/drawing/2010/main" w="9525">
                     <a:solidFill>
                       <a:srgbClr val="000000"/>
                     </a:solidFill>
@@ -12303,7 +12304,7 @@
               </a:ln>
               <a:extLst>
                 <a:ext uri="{91240B29-F687-4f45-9708-019B960494DF}">
-                  <a14:hiddenLine xmlns:a14="http://schemas.microsoft.com/office/drawing/2010/main" xmlns="" w="9525">
+                  <a14:hiddenLine xmlns="" xmlns:a14="http://schemas.microsoft.com/office/drawing/2010/main" w="9525">
                     <a:solidFill>
                       <a:srgbClr val="000000"/>
                     </a:solidFill>
@@ -12337,7 +12338,7 @@
               </a:ln>
               <a:extLst>
                 <a:ext uri="{91240B29-F687-4f45-9708-019B960494DF}">
-                  <a14:hiddenLine xmlns:a14="http://schemas.microsoft.com/office/drawing/2010/main" xmlns="" w="9525">
+                  <a14:hiddenLine xmlns="" xmlns:a14="http://schemas.microsoft.com/office/drawing/2010/main" w="9525">
                     <a:solidFill>
                       <a:srgbClr val="000000"/>
                     </a:solidFill>
@@ -12477,7 +12478,7 @@
           <a:p>
             <a:fld id="{92FF8978-FE14-CC4A-93A6-934EB06543C0}" type="datetime1">
               <a:rPr lang="en-US" smtClean="0"/>
-              <a:t>8/3/26</a:t>
+              <a:t>8/4/26</a:t>
             </a:fld>
             <a:endParaRPr lang="en-US"/>
           </a:p>
@@ -13964,7 +13965,7 @@
             <a:pPr algn="ctr"/>
             <a:r>
               <a:rPr lang="en-US" dirty="0"/>
-              <a:t>Week 4: Friday</a:t>
+              <a:t>Week 4: Monday</a:t>
             </a:r>
           </a:p>
         </p:txBody>
@@ -14204,6 +14205,281 @@
 </file>
 
 <file path=ppt/slides/slide15.xml><?xml version="1.0" encoding="utf-8"?>
+<p:sld xmlns:a="http://schemas.openxmlformats.org/drawingml/2006/main" xmlns:r="http://schemas.openxmlformats.org/officeDocument/2006/relationships" xmlns:p="http://schemas.openxmlformats.org/presentationml/2006/main">
+  <p:cSld>
+    <p:spTree>
+      <p:nvGrpSpPr>
+        <p:cNvPr id="1" name="">
+          <a:extLst>
+            <a:ext uri="{FF2B5EF4-FFF2-40B4-BE49-F238E27FC236}">
+              <a16:creationId xmlns:a16="http://schemas.microsoft.com/office/drawing/2014/main" id="{B1E5EF10-6888-E692-EC0E-E22AA95EE23A}"/>
+            </a:ext>
+          </a:extLst>
+        </p:cNvPr>
+        <p:cNvGrpSpPr/>
+        <p:nvPr/>
+      </p:nvGrpSpPr>
+      <p:grpSpPr>
+        <a:xfrm>
+          <a:off x="0" y="0"/>
+          <a:ext cx="0" cy="0"/>
+          <a:chOff x="0" y="0"/>
+          <a:chExt cx="0" cy="0"/>
+        </a:xfrm>
+      </p:grpSpPr>
+      <p:sp>
+        <p:nvSpPr>
+          <p:cNvPr id="6146" name="Rectangle 2">
+            <a:extLst>
+              <a:ext uri="{FF2B5EF4-FFF2-40B4-BE49-F238E27FC236}">
+                <a16:creationId xmlns:a16="http://schemas.microsoft.com/office/drawing/2014/main" id="{CD13B91B-2499-5DD1-51FA-8147BD4394A5}"/>
+              </a:ext>
+            </a:extLst>
+          </p:cNvPr>
+          <p:cNvSpPr>
+            <a:spLocks noGrp="1" noChangeArrowheads="1"/>
+          </p:cNvSpPr>
+          <p:nvPr>
+            <p:ph type="title"/>
+            <p:custDataLst>
+              <p:tags r:id="rId1"/>
+            </p:custDataLst>
+          </p:nvPr>
+        </p:nvSpPr>
+        <p:spPr>
+          <a:xfrm>
+            <a:off x="1141413" y="284084"/>
+            <a:ext cx="9905998" cy="620791"/>
+          </a:xfrm>
+        </p:spPr>
+        <p:txBody>
+          <a:bodyPr/>
+          <a:lstStyle/>
+          <a:p>
+            <a:pPr algn="ctr"/>
+            <a:r>
+              <a:rPr lang="en-US" dirty="0"/>
+              <a:t>Week 4: Tuesday</a:t>
+            </a:r>
+          </a:p>
+        </p:txBody>
+      </p:sp>
+      <p:sp>
+        <p:nvSpPr>
+          <p:cNvPr id="6147" name="Rectangle 3">
+            <a:extLst>
+              <a:ext uri="{FF2B5EF4-FFF2-40B4-BE49-F238E27FC236}">
+                <a16:creationId xmlns:a16="http://schemas.microsoft.com/office/drawing/2014/main" id="{3AAE769C-A2E8-39C0-5203-E8796D9F1BEE}"/>
+              </a:ext>
+            </a:extLst>
+          </p:cNvPr>
+          <p:cNvSpPr>
+            <a:spLocks noGrp="1" noChangeArrowheads="1"/>
+          </p:cNvSpPr>
+          <p:nvPr>
+            <p:ph idx="1"/>
+            <p:custDataLst>
+              <p:tags r:id="rId2"/>
+            </p:custDataLst>
+          </p:nvPr>
+        </p:nvSpPr>
+        <p:spPr>
+          <a:xfrm>
+            <a:off x="1294151" y="1098549"/>
+            <a:ext cx="9600522" cy="5475368"/>
+          </a:xfrm>
+        </p:spPr>
+        <p:txBody>
+          <a:bodyPr>
+            <a:normAutofit fontScale="70000" lnSpcReduction="20000"/>
+          </a:bodyPr>
+          <a:lstStyle/>
+          <a:p>
+            <a:r>
+              <a:rPr lang="en-US" dirty="0">
+                <a:latin typeface="Arial" panose="020B0604020202020204" pitchFamily="34" charset="0"/>
+                <a:cs typeface="Arial" panose="020B0604020202020204" pitchFamily="34" charset="0"/>
+              </a:rPr>
+              <a:t>Final week! You got this!!</a:t>
+            </a:r>
+          </a:p>
+          <a:p>
+            <a:r>
+              <a:rPr lang="en-US" dirty="0">
+                <a:latin typeface="Arial" panose="020B0604020202020204" pitchFamily="34" charset="0"/>
+                <a:cs typeface="Arial" panose="020B0604020202020204" pitchFamily="34" charset="0"/>
+              </a:rPr>
+              <a:t>This week:</a:t>
+            </a:r>
+            <a:endParaRPr lang="en-US" b="1" i="1" dirty="0">
+              <a:latin typeface="Arial" panose="020B0604020202020204" pitchFamily="34" charset="0"/>
+              <a:cs typeface="Arial" panose="020B0604020202020204" pitchFamily="34" charset="0"/>
+            </a:endParaRPr>
+          </a:p>
+          <a:p>
+            <a:pPr lvl="1"/>
+            <a:r>
+              <a:rPr lang="en-US" dirty="0">
+                <a:latin typeface="Arial" panose="020B0604020202020204" pitchFamily="34" charset="0"/>
+                <a:cs typeface="Arial" panose="020B0604020202020204" pitchFamily="34" charset="0"/>
+              </a:rPr>
+              <a:t>Mod 3 Written Assignment was Due Yesterday!</a:t>
+            </a:r>
+          </a:p>
+          <a:p>
+            <a:pPr lvl="1"/>
+            <a:r>
+              <a:rPr lang="en-US" dirty="0">
+                <a:latin typeface="Arial" panose="020B0604020202020204" pitchFamily="34" charset="0"/>
+                <a:cs typeface="Arial" panose="020B0604020202020204" pitchFamily="34" charset="0"/>
+              </a:rPr>
+              <a:t>Mod 4 Written Assignment Due THURSDAY NIGHT!</a:t>
+            </a:r>
+          </a:p>
+          <a:p>
+            <a:pPr lvl="1"/>
+            <a:r>
+              <a:rPr lang="en-US" dirty="0">
+                <a:latin typeface="Arial" panose="020B0604020202020204" pitchFamily="34" charset="0"/>
+                <a:cs typeface="Arial" panose="020B0604020202020204" pitchFamily="34" charset="0"/>
+              </a:rPr>
+              <a:t>Final Exam is on Friday</a:t>
+            </a:r>
+          </a:p>
+          <a:p>
+            <a:r>
+              <a:rPr lang="en-US" dirty="0">
+                <a:latin typeface="Arial" panose="020B0604020202020204" pitchFamily="34" charset="0"/>
+                <a:cs typeface="Arial" panose="020B0604020202020204" pitchFamily="34" charset="0"/>
+              </a:rPr>
+              <a:t>Mod 4 Written Assignment.</a:t>
+            </a:r>
+          </a:p>
+          <a:p>
+            <a:pPr lvl="1"/>
+            <a:r>
+              <a:rPr lang="en-US" dirty="0">
+                <a:latin typeface="Arial" panose="020B0604020202020204" pitchFamily="34" charset="0"/>
+                <a:cs typeface="Arial" panose="020B0604020202020204" pitchFamily="34" charset="0"/>
+              </a:rPr>
+              <a:t>Extension is only through Friday night (sorry) because I want to get final grades in Saturday</a:t>
+            </a:r>
+          </a:p>
+          <a:p>
+            <a:r>
+              <a:rPr lang="en-US" dirty="0">
+                <a:latin typeface="Arial" panose="020B0604020202020204" pitchFamily="34" charset="0"/>
+                <a:cs typeface="Arial" panose="020B0604020202020204" pitchFamily="34" charset="0"/>
+              </a:rPr>
+              <a:t>Final Exam</a:t>
+            </a:r>
+          </a:p>
+          <a:p>
+            <a:pPr lvl="1"/>
+            <a:r>
+              <a:rPr lang="en-US" dirty="0">
+                <a:latin typeface="Arial" panose="020B0604020202020204" pitchFamily="34" charset="0"/>
+                <a:cs typeface="Arial" panose="020B0604020202020204" pitchFamily="34" charset="0"/>
+              </a:rPr>
+              <a:t>You will have the full class period (10:30-12:45)</a:t>
+            </a:r>
+          </a:p>
+          <a:p>
+            <a:pPr lvl="1"/>
+            <a:r>
+              <a:rPr lang="en-US" dirty="0">
+                <a:latin typeface="Arial" panose="020B0604020202020204" pitchFamily="34" charset="0"/>
+                <a:cs typeface="Arial" panose="020B0604020202020204" pitchFamily="34" charset="0"/>
+              </a:rPr>
+              <a:t>Will cover the entire course, with an emphasis on modules 3 (Turing Machines) and 4 (Complexity Theory)</a:t>
+            </a:r>
+          </a:p>
+          <a:p>
+            <a:r>
+              <a:rPr lang="en-US" dirty="0">
+                <a:latin typeface="Arial" panose="020B0604020202020204" pitchFamily="34" charset="0"/>
+                <a:cs typeface="Arial" panose="020B0604020202020204" pitchFamily="34" charset="0"/>
+              </a:rPr>
+              <a:t>Lecture recordings from last Fall are posted on Panopto on Canvas</a:t>
+            </a:r>
+          </a:p>
+          <a:p>
+            <a:pPr lvl="1"/>
+            <a:r>
+              <a:rPr lang="en-US" dirty="0">
+                <a:latin typeface="Arial" panose="020B0604020202020204" pitchFamily="34" charset="0"/>
+                <a:cs typeface="Arial" panose="020B0604020202020204" pitchFamily="34" charset="0"/>
+              </a:rPr>
+              <a:t>I posted ALL the videos FYI</a:t>
+            </a:r>
+          </a:p>
+          <a:p>
+            <a:r>
+              <a:rPr lang="en-US" dirty="0">
+                <a:latin typeface="Arial" panose="020B0604020202020204" pitchFamily="34" charset="0"/>
+                <a:cs typeface="Arial" panose="020B0604020202020204" pitchFamily="34" charset="0"/>
+              </a:rPr>
+              <a:t>Please remember that I am asking for NO laptop / phones!</a:t>
+            </a:r>
+          </a:p>
+          <a:p>
+            <a:pPr lvl="1"/>
+            <a:r>
+              <a:rPr lang="en-US" dirty="0">
+                <a:latin typeface="Arial" panose="020B0604020202020204" pitchFamily="34" charset="0"/>
+                <a:cs typeface="Arial" panose="020B0604020202020204" pitchFamily="34" charset="0"/>
+              </a:rPr>
+              <a:t>This makes the learning environment better for everybody. I appreciate it!</a:t>
+            </a:r>
+          </a:p>
+          <a:p>
+            <a:r>
+              <a:rPr lang="en-US" dirty="0">
+                <a:latin typeface="Arial" panose="020B0604020202020204" pitchFamily="34" charset="0"/>
+                <a:cs typeface="Arial" panose="020B0604020202020204" pitchFamily="34" charset="0"/>
+              </a:rPr>
+              <a:t>Attendance continues today as usual.</a:t>
+            </a:r>
+          </a:p>
+          <a:p>
+            <a:r>
+              <a:rPr lang="en-US" dirty="0">
+                <a:latin typeface="Arial" panose="020B0604020202020204" pitchFamily="34" charset="0"/>
+                <a:cs typeface="Arial" panose="020B0604020202020204" pitchFamily="34" charset="0"/>
+              </a:rPr>
+              <a:t>Today </a:t>
+            </a:r>
+            <a:r>
+              <a:rPr lang="en-US">
+                <a:latin typeface="Arial" panose="020B0604020202020204" pitchFamily="34" charset="0"/>
+                <a:cs typeface="Arial" panose="020B0604020202020204" pitchFamily="34" charset="0"/>
+              </a:rPr>
+              <a:t>we continue </a:t>
+            </a:r>
+            <a:r>
+              <a:rPr lang="en-US" dirty="0">
+                <a:latin typeface="Arial" panose="020B0604020202020204" pitchFamily="34" charset="0"/>
+                <a:cs typeface="Arial" panose="020B0604020202020204" pitchFamily="34" charset="0"/>
+              </a:rPr>
+              <a:t>the last module</a:t>
+            </a:r>
+          </a:p>
+        </p:txBody>
+      </p:sp>
+    </p:spTree>
+    <p:extLst>
+      <p:ext uri="{BB962C8B-B14F-4D97-AF65-F5344CB8AC3E}">
+        <p14:creationId xmlns:p14="http://schemas.microsoft.com/office/powerpoint/2010/main" val="2623573409"/>
+      </p:ext>
+    </p:extLst>
+  </p:cSld>
+  <p:clrMapOvr>
+    <a:masterClrMapping/>
+  </p:clrMapOvr>
+</p:sld>
+</file>
+
+<file path=ppt/slides/slide16.xml><?xml version="1.0" encoding="utf-8"?>
 <p:sld xmlns:a="http://schemas.openxmlformats.org/drawingml/2006/main" xmlns:r="http://schemas.openxmlformats.org/officeDocument/2006/relationships" xmlns:p="http://schemas.openxmlformats.org/presentationml/2006/main">
   <p:cSld>
     <p:spTree>
@@ -17960,6 +18236,18 @@
 </p:tagLst>
 </file>
 
+<file path=ppt/tags/tag32.xml><?xml version="1.0" encoding="utf-8"?>
+<p:tagLst xmlns:a="http://schemas.openxmlformats.org/drawingml/2006/main" xmlns:r="http://schemas.openxmlformats.org/officeDocument/2006/relationships" xmlns:p="http://schemas.openxmlformats.org/presentationml/2006/main">
+  <p:tag name="_INSTRUCTOR VIEW19C14C36-AC8E-43BC-9DB6-C2AAF774C7DC|PANE__TAG" val="_"/>
+</p:tagLst>
+</file>
+
+<file path=ppt/tags/tag33.xml><?xml version="1.0" encoding="utf-8"?>
+<p:tagLst xmlns:a="http://schemas.openxmlformats.org/drawingml/2006/main" xmlns:r="http://schemas.openxmlformats.org/officeDocument/2006/relationships" xmlns:p="http://schemas.openxmlformats.org/presentationml/2006/main">
+  <p:tag name="_INSTRUCTOR VIEW19C14C36-AC8E-43BC-9DB6-C2AAF774C7DC|PANE__TAG" val="_"/>
+</p:tagLst>
+</file>
+
 <file path=ppt/tags/tag4.xml><?xml version="1.0" encoding="utf-8"?>
 <p:tagLst xmlns:a="http://schemas.openxmlformats.org/drawingml/2006/main" xmlns:r="http://schemas.openxmlformats.org/officeDocument/2006/relationships" xmlns:p="http://schemas.openxmlformats.org/presentationml/2006/main">
   <p:tag name="_INSTRUCTOR VIEW19C14C36-AC8E-43BC-9DB6-C2AAF774C7DC|PANE__TAG" val="_"/>

--- a/slides/00-DailyAnnouncements.pptx
+++ b/slides/00-DailyAnnouncements.pptx
@@ -5,7 +5,7 @@
     <p:sldMasterId id="2147484006" r:id="rId1"/>
   </p:sldMasterIdLst>
   <p:notesMasterIdLst>
-    <p:notesMasterId r:id="rId18"/>
+    <p:notesMasterId r:id="rId19"/>
   </p:notesMasterIdLst>
   <p:sldIdLst>
     <p:sldId id="256" r:id="rId2"/>
@@ -23,7 +23,8 @@
     <p:sldId id="526" r:id="rId14"/>
     <p:sldId id="527" r:id="rId15"/>
     <p:sldId id="528" r:id="rId16"/>
-    <p:sldId id="515" r:id="rId17"/>
+    <p:sldId id="529" r:id="rId17"/>
+    <p:sldId id="515" r:id="rId18"/>
   </p:sldIdLst>
   <p:sldSz cx="12192000" cy="6858000"/>
   <p:notesSz cx="6858000" cy="9144000"/>
@@ -212,7 +213,7 @@
           <a:p>
             <a:fld id="{C5B45307-6ED4-B142-BD64-10F739779302}" type="datetimeFigureOut">
               <a:rPr lang="en-US" smtClean="0"/>
-              <a:t>8/4/26</a:t>
+              <a:t>8/5/26</a:t>
             </a:fld>
             <a:endParaRPr lang="en-US"/>
           </a:p>
@@ -620,7 +621,7 @@
           <a:noFill/>
           <a:extLst>
             <a:ext uri="{909E8E84-426E-40dd-AFC4-6F175D3DCCD1}">
-              <a14:hiddenFill xmlns="" xmlns:a14="http://schemas.microsoft.com/office/drawing/2010/main">
+              <a14:hiddenFill xmlns:a14="http://schemas.microsoft.com/office/drawing/2010/main" xmlns="">
                 <a:solidFill>
                   <a:srgbClr val="FFFFFF"/>
                 </a:solidFill>
@@ -679,7 +680,7 @@
             </a:ln>
             <a:extLst>
               <a:ext uri="{91240B29-F687-4f45-9708-019B960494DF}">
-                <a14:hiddenLine xmlns="" xmlns:a14="http://schemas.microsoft.com/office/drawing/2010/main" w="9525">
+                <a14:hiddenLine xmlns:a14="http://schemas.microsoft.com/office/drawing/2010/main" xmlns="" w="9525">
                   <a:solidFill>
                     <a:srgbClr val="000000"/>
                   </a:solidFill>
@@ -769,7 +770,7 @@
             </a:ln>
             <a:extLst>
               <a:ext uri="{91240B29-F687-4f45-9708-019B960494DF}">
-                <a14:hiddenLine xmlns="" xmlns:a14="http://schemas.microsoft.com/office/drawing/2010/main" w="9525">
+                <a14:hiddenLine xmlns:a14="http://schemas.microsoft.com/office/drawing/2010/main" xmlns="" w="9525">
                   <a:solidFill>
                     <a:srgbClr val="000000"/>
                   </a:solidFill>
@@ -859,7 +860,7 @@
             </a:ln>
             <a:extLst>
               <a:ext uri="{91240B29-F687-4f45-9708-019B960494DF}">
-                <a14:hiddenLine xmlns="" xmlns:a14="http://schemas.microsoft.com/office/drawing/2010/main" w="9525">
+                <a14:hiddenLine xmlns:a14="http://schemas.microsoft.com/office/drawing/2010/main" xmlns="" w="9525">
                   <a:solidFill>
                     <a:srgbClr val="000000"/>
                   </a:solidFill>
@@ -893,7 +894,7 @@
             </a:ln>
             <a:extLst>
               <a:ext uri="{91240B29-F687-4f45-9708-019B960494DF}">
-                <a14:hiddenLine xmlns="" xmlns:a14="http://schemas.microsoft.com/office/drawing/2010/main" w="9525">
+                <a14:hiddenLine xmlns:a14="http://schemas.microsoft.com/office/drawing/2010/main" xmlns="" w="9525">
                   <a:solidFill>
                     <a:srgbClr val="000000"/>
                   </a:solidFill>
@@ -983,7 +984,7 @@
             </a:ln>
             <a:extLst>
               <a:ext uri="{91240B29-F687-4f45-9708-019B960494DF}">
-                <a14:hiddenLine xmlns="" xmlns:a14="http://schemas.microsoft.com/office/drawing/2010/main" w="9525">
+                <a14:hiddenLine xmlns:a14="http://schemas.microsoft.com/office/drawing/2010/main" xmlns="" w="9525">
                   <a:solidFill>
                     <a:srgbClr val="000000"/>
                   </a:solidFill>
@@ -1045,7 +1046,7 @@
             </a:ln>
             <a:extLst>
               <a:ext uri="{91240B29-F687-4f45-9708-019B960494DF}">
-                <a14:hiddenLine xmlns="" xmlns:a14="http://schemas.microsoft.com/office/drawing/2010/main" w="9525">
+                <a14:hiddenLine xmlns:a14="http://schemas.microsoft.com/office/drawing/2010/main" xmlns="" w="9525">
                   <a:solidFill>
                     <a:srgbClr val="000000"/>
                   </a:solidFill>
@@ -1107,7 +1108,7 @@
             </a:ln>
             <a:extLst>
               <a:ext uri="{91240B29-F687-4f45-9708-019B960494DF}">
-                <a14:hiddenLine xmlns="" xmlns:a14="http://schemas.microsoft.com/office/drawing/2010/main" w="9525">
+                <a14:hiddenLine xmlns:a14="http://schemas.microsoft.com/office/drawing/2010/main" xmlns="" w="9525">
                   <a:solidFill>
                     <a:srgbClr val="000000"/>
                   </a:solidFill>
@@ -1197,7 +1198,7 @@
             </a:ln>
             <a:extLst>
               <a:ext uri="{91240B29-F687-4f45-9708-019B960494DF}">
-                <a14:hiddenLine xmlns="" xmlns:a14="http://schemas.microsoft.com/office/drawing/2010/main" w="9525">
+                <a14:hiddenLine xmlns:a14="http://schemas.microsoft.com/office/drawing/2010/main" xmlns="" w="9525">
                   <a:solidFill>
                     <a:srgbClr val="000000"/>
                   </a:solidFill>
@@ -1259,7 +1260,7 @@
             </a:ln>
             <a:extLst>
               <a:ext uri="{91240B29-F687-4f45-9708-019B960494DF}">
-                <a14:hiddenLine xmlns="" xmlns:a14="http://schemas.microsoft.com/office/drawing/2010/main" w="9525">
+                <a14:hiddenLine xmlns:a14="http://schemas.microsoft.com/office/drawing/2010/main" xmlns="" w="9525">
                   <a:solidFill>
                     <a:srgbClr val="000000"/>
                   </a:solidFill>
@@ -1321,7 +1322,7 @@
             </a:ln>
             <a:extLst>
               <a:ext uri="{91240B29-F687-4f45-9708-019B960494DF}">
-                <a14:hiddenLine xmlns="" xmlns:a14="http://schemas.microsoft.com/office/drawing/2010/main" w="9525">
+                <a14:hiddenLine xmlns:a14="http://schemas.microsoft.com/office/drawing/2010/main" xmlns="" w="9525">
                   <a:solidFill>
                     <a:srgbClr val="000000"/>
                   </a:solidFill>
@@ -1411,7 +1412,7 @@
             </a:ln>
             <a:extLst>
               <a:ext uri="{91240B29-F687-4f45-9708-019B960494DF}">
-                <a14:hiddenLine xmlns="" xmlns:a14="http://schemas.microsoft.com/office/drawing/2010/main" w="9525">
+                <a14:hiddenLine xmlns:a14="http://schemas.microsoft.com/office/drawing/2010/main" xmlns="" w="9525">
                   <a:solidFill>
                     <a:srgbClr val="000000"/>
                   </a:solidFill>
@@ -1501,7 +1502,7 @@
             </a:ln>
             <a:extLst>
               <a:ext uri="{91240B29-F687-4f45-9708-019B960494DF}">
-                <a14:hiddenLine xmlns="" xmlns:a14="http://schemas.microsoft.com/office/drawing/2010/main" w="9525">
+                <a14:hiddenLine xmlns:a14="http://schemas.microsoft.com/office/drawing/2010/main" xmlns="" w="9525">
                   <a:solidFill>
                     <a:srgbClr val="000000"/>
                   </a:solidFill>
@@ -1563,7 +1564,7 @@
             </a:ln>
             <a:extLst>
               <a:ext uri="{91240B29-F687-4f45-9708-019B960494DF}">
-                <a14:hiddenLine xmlns="" xmlns:a14="http://schemas.microsoft.com/office/drawing/2010/main" w="9525">
+                <a14:hiddenLine xmlns:a14="http://schemas.microsoft.com/office/drawing/2010/main" xmlns="" w="9525">
                   <a:solidFill>
                     <a:srgbClr val="000000"/>
                   </a:solidFill>
@@ -1673,7 +1674,7 @@
             </a:ln>
             <a:extLst>
               <a:ext uri="{91240B29-F687-4f45-9708-019B960494DF}">
-                <a14:hiddenLine xmlns="" xmlns:a14="http://schemas.microsoft.com/office/drawing/2010/main" w="9525">
+                <a14:hiddenLine xmlns:a14="http://schemas.microsoft.com/office/drawing/2010/main" xmlns="" w="9525">
                   <a:solidFill>
                     <a:srgbClr val="000000"/>
                   </a:solidFill>
@@ -1735,7 +1736,7 @@
             </a:ln>
             <a:extLst>
               <a:ext uri="{91240B29-F687-4f45-9708-019B960494DF}">
-                <a14:hiddenLine xmlns="" xmlns:a14="http://schemas.microsoft.com/office/drawing/2010/main" w="9525">
+                <a14:hiddenLine xmlns:a14="http://schemas.microsoft.com/office/drawing/2010/main" xmlns="" w="9525">
                   <a:solidFill>
                     <a:srgbClr val="000000"/>
                   </a:solidFill>
@@ -1825,7 +1826,7 @@
             </a:ln>
             <a:extLst>
               <a:ext uri="{91240B29-F687-4f45-9708-019B960494DF}">
-                <a14:hiddenLine xmlns="" xmlns:a14="http://schemas.microsoft.com/office/drawing/2010/main" w="9525">
+                <a14:hiddenLine xmlns:a14="http://schemas.microsoft.com/office/drawing/2010/main" xmlns="" w="9525">
                   <a:solidFill>
                     <a:srgbClr val="000000"/>
                   </a:solidFill>
@@ -1915,7 +1916,7 @@
             </a:ln>
             <a:extLst>
               <a:ext uri="{91240B29-F687-4f45-9708-019B960494DF}">
-                <a14:hiddenLine xmlns="" xmlns:a14="http://schemas.microsoft.com/office/drawing/2010/main" w="9525">
+                <a14:hiddenLine xmlns:a14="http://schemas.microsoft.com/office/drawing/2010/main" xmlns="" w="9525">
                   <a:solidFill>
                     <a:srgbClr val="000000"/>
                   </a:solidFill>
@@ -1977,7 +1978,7 @@
             </a:ln>
             <a:extLst>
               <a:ext uri="{91240B29-F687-4f45-9708-019B960494DF}">
-                <a14:hiddenLine xmlns="" xmlns:a14="http://schemas.microsoft.com/office/drawing/2010/main" w="9525">
+                <a14:hiddenLine xmlns:a14="http://schemas.microsoft.com/office/drawing/2010/main" xmlns="" w="9525">
                   <a:solidFill>
                     <a:srgbClr val="000000"/>
                   </a:solidFill>
@@ -2067,7 +2068,7 @@
             </a:ln>
             <a:extLst>
               <a:ext uri="{91240B29-F687-4f45-9708-019B960494DF}">
-                <a14:hiddenLine xmlns="" xmlns:a14="http://schemas.microsoft.com/office/drawing/2010/main" w="9525">
+                <a14:hiddenLine xmlns:a14="http://schemas.microsoft.com/office/drawing/2010/main" xmlns="" w="9525">
                   <a:solidFill>
                     <a:srgbClr val="000000"/>
                   </a:solidFill>
@@ -2157,7 +2158,7 @@
             </a:ln>
             <a:extLst>
               <a:ext uri="{91240B29-F687-4f45-9708-019B960494DF}">
-                <a14:hiddenLine xmlns="" xmlns:a14="http://schemas.microsoft.com/office/drawing/2010/main" w="9525">
+                <a14:hiddenLine xmlns:a14="http://schemas.microsoft.com/office/drawing/2010/main" xmlns="" w="9525">
                   <a:solidFill>
                     <a:srgbClr val="000000"/>
                   </a:solidFill>
@@ -2213,7 +2214,7 @@
             </a:ln>
             <a:extLst>
               <a:ext uri="{91240B29-F687-4f45-9708-019B960494DF}">
-                <a14:hiddenLine xmlns="" xmlns:a14="http://schemas.microsoft.com/office/drawing/2010/main" w="9525">
+                <a14:hiddenLine xmlns:a14="http://schemas.microsoft.com/office/drawing/2010/main" xmlns="" w="9525">
                   <a:solidFill>
                     <a:srgbClr val="000000"/>
                   </a:solidFill>
@@ -2303,7 +2304,7 @@
             </a:ln>
             <a:extLst>
               <a:ext uri="{91240B29-F687-4f45-9708-019B960494DF}">
-                <a14:hiddenLine xmlns="" xmlns:a14="http://schemas.microsoft.com/office/drawing/2010/main" w="9525">
+                <a14:hiddenLine xmlns:a14="http://schemas.microsoft.com/office/drawing/2010/main" xmlns="" w="9525">
                   <a:solidFill>
                     <a:srgbClr val="000000"/>
                   </a:solidFill>
@@ -2359,7 +2360,7 @@
             </a:ln>
             <a:extLst>
               <a:ext uri="{91240B29-F687-4f45-9708-019B960494DF}">
-                <a14:hiddenLine xmlns="" xmlns:a14="http://schemas.microsoft.com/office/drawing/2010/main" w="9525">
+                <a14:hiddenLine xmlns:a14="http://schemas.microsoft.com/office/drawing/2010/main" xmlns="" w="9525">
                   <a:solidFill>
                     <a:srgbClr val="000000"/>
                   </a:solidFill>
@@ -2449,7 +2450,7 @@
             </a:ln>
             <a:extLst>
               <a:ext uri="{91240B29-F687-4f45-9708-019B960494DF}">
-                <a14:hiddenLine xmlns="" xmlns:a14="http://schemas.microsoft.com/office/drawing/2010/main" w="9525">
+                <a14:hiddenLine xmlns:a14="http://schemas.microsoft.com/office/drawing/2010/main" xmlns="" w="9525">
                   <a:solidFill>
                     <a:srgbClr val="000000"/>
                   </a:solidFill>
@@ -2517,7 +2518,7 @@
             </a:ln>
             <a:extLst>
               <a:ext uri="{91240B29-F687-4f45-9708-019B960494DF}">
-                <a14:hiddenLine xmlns="" xmlns:a14="http://schemas.microsoft.com/office/drawing/2010/main" w="9525">
+                <a14:hiddenLine xmlns:a14="http://schemas.microsoft.com/office/drawing/2010/main" xmlns="" w="9525">
                   <a:solidFill>
                     <a:srgbClr val="000000"/>
                   </a:solidFill>
@@ -2607,7 +2608,7 @@
             </a:ln>
             <a:extLst>
               <a:ext uri="{91240B29-F687-4f45-9708-019B960494DF}">
-                <a14:hiddenLine xmlns="" xmlns:a14="http://schemas.microsoft.com/office/drawing/2010/main" w="9525">
+                <a14:hiddenLine xmlns:a14="http://schemas.microsoft.com/office/drawing/2010/main" xmlns="" w="9525">
                   <a:solidFill>
                     <a:srgbClr val="000000"/>
                   </a:solidFill>
@@ -2675,7 +2676,7 @@
             </a:ln>
             <a:extLst>
               <a:ext uri="{91240B29-F687-4f45-9708-019B960494DF}">
-                <a14:hiddenLine xmlns="" xmlns:a14="http://schemas.microsoft.com/office/drawing/2010/main" w="9525">
+                <a14:hiddenLine xmlns:a14="http://schemas.microsoft.com/office/drawing/2010/main" xmlns="" w="9525">
                   <a:solidFill>
                     <a:srgbClr val="000000"/>
                   </a:solidFill>
@@ -2765,7 +2766,7 @@
             </a:ln>
             <a:extLst>
               <a:ext uri="{91240B29-F687-4f45-9708-019B960494DF}">
-                <a14:hiddenLine xmlns="" xmlns:a14="http://schemas.microsoft.com/office/drawing/2010/main" w="9525">
+                <a14:hiddenLine xmlns:a14="http://schemas.microsoft.com/office/drawing/2010/main" xmlns="" w="9525">
                   <a:solidFill>
                     <a:srgbClr val="000000"/>
                   </a:solidFill>
@@ -2799,7 +2800,7 @@
             </a:ln>
             <a:extLst>
               <a:ext uri="{91240B29-F687-4f45-9708-019B960494DF}">
-                <a14:hiddenLine xmlns="" xmlns:a14="http://schemas.microsoft.com/office/drawing/2010/main" w="9525">
+                <a14:hiddenLine xmlns:a14="http://schemas.microsoft.com/office/drawing/2010/main" xmlns="" w="9525">
                   <a:solidFill>
                     <a:srgbClr val="000000"/>
                   </a:solidFill>
@@ -2889,7 +2890,7 @@
             </a:ln>
             <a:extLst>
               <a:ext uri="{91240B29-F687-4f45-9708-019B960494DF}">
-                <a14:hiddenLine xmlns="" xmlns:a14="http://schemas.microsoft.com/office/drawing/2010/main" w="9525">
+                <a14:hiddenLine xmlns:a14="http://schemas.microsoft.com/office/drawing/2010/main" xmlns="" w="9525">
                   <a:solidFill>
                     <a:srgbClr val="000000"/>
                   </a:solidFill>
@@ -2951,7 +2952,7 @@
             </a:ln>
             <a:extLst>
               <a:ext uri="{91240B29-F687-4f45-9708-019B960494DF}">
-                <a14:hiddenLine xmlns="" xmlns:a14="http://schemas.microsoft.com/office/drawing/2010/main" w="9525">
+                <a14:hiddenLine xmlns:a14="http://schemas.microsoft.com/office/drawing/2010/main" xmlns="" w="9525">
                   <a:solidFill>
                     <a:srgbClr val="000000"/>
                   </a:solidFill>
@@ -3013,7 +3014,7 @@
             </a:ln>
             <a:extLst>
               <a:ext uri="{91240B29-F687-4f45-9708-019B960494DF}">
-                <a14:hiddenLine xmlns="" xmlns:a14="http://schemas.microsoft.com/office/drawing/2010/main" w="9525">
+                <a14:hiddenLine xmlns:a14="http://schemas.microsoft.com/office/drawing/2010/main" xmlns="" w="9525">
                   <a:solidFill>
                     <a:srgbClr val="000000"/>
                   </a:solidFill>
@@ -3103,7 +3104,7 @@
             </a:ln>
             <a:extLst>
               <a:ext uri="{91240B29-F687-4f45-9708-019B960494DF}">
-                <a14:hiddenLine xmlns="" xmlns:a14="http://schemas.microsoft.com/office/drawing/2010/main" w="9525">
+                <a14:hiddenLine xmlns:a14="http://schemas.microsoft.com/office/drawing/2010/main" xmlns="" w="9525">
                   <a:solidFill>
                     <a:srgbClr val="000000"/>
                   </a:solidFill>
@@ -3171,7 +3172,7 @@
             </a:ln>
             <a:extLst>
               <a:ext uri="{91240B29-F687-4f45-9708-019B960494DF}">
-                <a14:hiddenLine xmlns="" xmlns:a14="http://schemas.microsoft.com/office/drawing/2010/main" w="9525">
+                <a14:hiddenLine xmlns:a14="http://schemas.microsoft.com/office/drawing/2010/main" xmlns="" w="9525">
                   <a:solidFill>
                     <a:srgbClr val="000000"/>
                   </a:solidFill>
@@ -3233,7 +3234,7 @@
             </a:ln>
             <a:extLst>
               <a:ext uri="{91240B29-F687-4f45-9708-019B960494DF}">
-                <a14:hiddenLine xmlns="" xmlns:a14="http://schemas.microsoft.com/office/drawing/2010/main" w="9525">
+                <a14:hiddenLine xmlns:a14="http://schemas.microsoft.com/office/drawing/2010/main" xmlns="" w="9525">
                   <a:solidFill>
                     <a:srgbClr val="000000"/>
                   </a:solidFill>
@@ -3323,7 +3324,7 @@
             </a:ln>
             <a:extLst>
               <a:ext uri="{91240B29-F687-4f45-9708-019B960494DF}">
-                <a14:hiddenLine xmlns="" xmlns:a14="http://schemas.microsoft.com/office/drawing/2010/main" w="9525">
+                <a14:hiddenLine xmlns:a14="http://schemas.microsoft.com/office/drawing/2010/main" xmlns="" w="9525">
                   <a:solidFill>
                     <a:srgbClr val="000000"/>
                   </a:solidFill>
@@ -3385,7 +3386,7 @@
             </a:ln>
             <a:extLst>
               <a:ext uri="{91240B29-F687-4f45-9708-019B960494DF}">
-                <a14:hiddenLine xmlns="" xmlns:a14="http://schemas.microsoft.com/office/drawing/2010/main" w="9525">
+                <a14:hiddenLine xmlns:a14="http://schemas.microsoft.com/office/drawing/2010/main" xmlns="" w="9525">
                   <a:solidFill>
                     <a:srgbClr val="000000"/>
                   </a:solidFill>
@@ -3475,7 +3476,7 @@
             </a:ln>
             <a:extLst>
               <a:ext uri="{91240B29-F687-4f45-9708-019B960494DF}">
-                <a14:hiddenLine xmlns="" xmlns:a14="http://schemas.microsoft.com/office/drawing/2010/main" w="9525">
+                <a14:hiddenLine xmlns:a14="http://schemas.microsoft.com/office/drawing/2010/main" xmlns="" w="9525">
                   <a:solidFill>
                     <a:srgbClr val="000000"/>
                   </a:solidFill>
@@ -3537,7 +3538,7 @@
             </a:ln>
             <a:extLst>
               <a:ext uri="{91240B29-F687-4f45-9708-019B960494DF}">
-                <a14:hiddenLine xmlns="" xmlns:a14="http://schemas.microsoft.com/office/drawing/2010/main" w="9525">
+                <a14:hiddenLine xmlns:a14="http://schemas.microsoft.com/office/drawing/2010/main" xmlns="" w="9525">
                   <a:solidFill>
                     <a:srgbClr val="000000"/>
                   </a:solidFill>
@@ -3627,7 +3628,7 @@
             </a:ln>
             <a:extLst>
               <a:ext uri="{91240B29-F687-4f45-9708-019B960494DF}">
-                <a14:hiddenLine xmlns="" xmlns:a14="http://schemas.microsoft.com/office/drawing/2010/main" w="9525">
+                <a14:hiddenLine xmlns:a14="http://schemas.microsoft.com/office/drawing/2010/main" xmlns="" w="9525">
                   <a:solidFill>
                     <a:srgbClr val="000000"/>
                   </a:solidFill>
@@ -3661,7 +3662,7 @@
             </a:ln>
             <a:extLst>
               <a:ext uri="{91240B29-F687-4f45-9708-019B960494DF}">
-                <a14:hiddenLine xmlns="" xmlns:a14="http://schemas.microsoft.com/office/drawing/2010/main" w="9525">
+                <a14:hiddenLine xmlns:a14="http://schemas.microsoft.com/office/drawing/2010/main" xmlns="" w="9525">
                   <a:solidFill>
                     <a:srgbClr val="000000"/>
                   </a:solidFill>
@@ -3726,7 +3727,7 @@
             </a:ln>
             <a:extLst>
               <a:ext uri="{91240B29-F687-4f45-9708-019B960494DF}">
-                <a14:hiddenLine xmlns="" xmlns:a14="http://schemas.microsoft.com/office/drawing/2010/main" w="9525">
+                <a14:hiddenLine xmlns:a14="http://schemas.microsoft.com/office/drawing/2010/main" xmlns="" w="9525">
                   <a:solidFill>
                     <a:srgbClr val="000000"/>
                   </a:solidFill>
@@ -3816,7 +3817,7 @@
             </a:ln>
             <a:extLst>
               <a:ext uri="{91240B29-F687-4f45-9708-019B960494DF}">
-                <a14:hiddenLine xmlns="" xmlns:a14="http://schemas.microsoft.com/office/drawing/2010/main" w="9525">
+                <a14:hiddenLine xmlns:a14="http://schemas.microsoft.com/office/drawing/2010/main" xmlns="" w="9525">
                   <a:solidFill>
                     <a:srgbClr val="000000"/>
                   </a:solidFill>
@@ -3878,7 +3879,7 @@
             </a:ln>
             <a:extLst>
               <a:ext uri="{91240B29-F687-4f45-9708-019B960494DF}">
-                <a14:hiddenLine xmlns="" xmlns:a14="http://schemas.microsoft.com/office/drawing/2010/main" w="9525">
+                <a14:hiddenLine xmlns:a14="http://schemas.microsoft.com/office/drawing/2010/main" xmlns="" w="9525">
                   <a:solidFill>
                     <a:srgbClr val="000000"/>
                   </a:solidFill>
@@ -3968,7 +3969,7 @@
             </a:ln>
             <a:extLst>
               <a:ext uri="{91240B29-F687-4f45-9708-019B960494DF}">
-                <a14:hiddenLine xmlns="" xmlns:a14="http://schemas.microsoft.com/office/drawing/2010/main" w="9525">
+                <a14:hiddenLine xmlns:a14="http://schemas.microsoft.com/office/drawing/2010/main" xmlns="" w="9525">
                   <a:solidFill>
                     <a:srgbClr val="000000"/>
                   </a:solidFill>
@@ -4058,7 +4059,7 @@
             </a:ln>
             <a:extLst>
               <a:ext uri="{91240B29-F687-4f45-9708-019B960494DF}">
-                <a14:hiddenLine xmlns="" xmlns:a14="http://schemas.microsoft.com/office/drawing/2010/main" w="9525">
+                <a14:hiddenLine xmlns:a14="http://schemas.microsoft.com/office/drawing/2010/main" xmlns="" w="9525">
                   <a:solidFill>
                     <a:srgbClr val="000000"/>
                   </a:solidFill>
@@ -4123,7 +4124,7 @@
             </a:ln>
             <a:extLst>
               <a:ext uri="{91240B29-F687-4f45-9708-019B960494DF}">
-                <a14:hiddenLine xmlns="" xmlns:a14="http://schemas.microsoft.com/office/drawing/2010/main" w="9525">
+                <a14:hiddenLine xmlns:a14="http://schemas.microsoft.com/office/drawing/2010/main" xmlns="" w="9525">
                   <a:solidFill>
                     <a:srgbClr val="000000"/>
                   </a:solidFill>
@@ -4185,7 +4186,7 @@
             </a:ln>
             <a:extLst>
               <a:ext uri="{91240B29-F687-4f45-9708-019B960494DF}">
-                <a14:hiddenLine xmlns="" xmlns:a14="http://schemas.microsoft.com/office/drawing/2010/main" w="9525">
+                <a14:hiddenLine xmlns:a14="http://schemas.microsoft.com/office/drawing/2010/main" xmlns="" w="9525">
                   <a:solidFill>
                     <a:srgbClr val="000000"/>
                   </a:solidFill>
@@ -4275,7 +4276,7 @@
             </a:ln>
             <a:extLst>
               <a:ext uri="{91240B29-F687-4f45-9708-019B960494DF}">
-                <a14:hiddenLine xmlns="" xmlns:a14="http://schemas.microsoft.com/office/drawing/2010/main" w="9525">
+                <a14:hiddenLine xmlns:a14="http://schemas.microsoft.com/office/drawing/2010/main" xmlns="" w="9525">
                   <a:solidFill>
                     <a:srgbClr val="000000"/>
                   </a:solidFill>
@@ -4365,7 +4366,7 @@
             </a:ln>
             <a:extLst>
               <a:ext uri="{91240B29-F687-4f45-9708-019B960494DF}">
-                <a14:hiddenLine xmlns="" xmlns:a14="http://schemas.microsoft.com/office/drawing/2010/main" w="9525">
+                <a14:hiddenLine xmlns:a14="http://schemas.microsoft.com/office/drawing/2010/main" xmlns="" w="9525">
                   <a:solidFill>
                     <a:srgbClr val="000000"/>
                   </a:solidFill>
@@ -4427,7 +4428,7 @@
             </a:ln>
             <a:extLst>
               <a:ext uri="{91240B29-F687-4f45-9708-019B960494DF}">
-                <a14:hiddenLine xmlns="" xmlns:a14="http://schemas.microsoft.com/office/drawing/2010/main" w="9525">
+                <a14:hiddenLine xmlns:a14="http://schemas.microsoft.com/office/drawing/2010/main" xmlns="" w="9525">
                   <a:solidFill>
                     <a:srgbClr val="000000"/>
                   </a:solidFill>
@@ -4547,7 +4548,7 @@
             </a:ln>
             <a:extLst>
               <a:ext uri="{91240B29-F687-4f45-9708-019B960494DF}">
-                <a14:hiddenLine xmlns="" xmlns:a14="http://schemas.microsoft.com/office/drawing/2010/main" w="9525">
+                <a14:hiddenLine xmlns:a14="http://schemas.microsoft.com/office/drawing/2010/main" xmlns="" w="9525">
                   <a:solidFill>
                     <a:srgbClr val="000000"/>
                   </a:solidFill>
@@ -4615,7 +4616,7 @@
             </a:ln>
             <a:extLst>
               <a:ext uri="{91240B29-F687-4f45-9708-019B960494DF}">
-                <a14:hiddenLine xmlns="" xmlns:a14="http://schemas.microsoft.com/office/drawing/2010/main" w="9525">
+                <a14:hiddenLine xmlns:a14="http://schemas.microsoft.com/office/drawing/2010/main" xmlns="" w="9525">
                   <a:solidFill>
                     <a:srgbClr val="000000"/>
                   </a:solidFill>
@@ -4705,7 +4706,7 @@
             </a:ln>
             <a:extLst>
               <a:ext uri="{91240B29-F687-4f45-9708-019B960494DF}">
-                <a14:hiddenLine xmlns="" xmlns:a14="http://schemas.microsoft.com/office/drawing/2010/main" w="9525">
+                <a14:hiddenLine xmlns:a14="http://schemas.microsoft.com/office/drawing/2010/main" xmlns="" w="9525">
                   <a:solidFill>
                     <a:srgbClr val="000000"/>
                   </a:solidFill>
@@ -4845,7 +4846,7 @@
           <a:p>
             <a:fld id="{4313F670-7F9A-774D-B73D-573401E44297}" type="datetime1">
               <a:rPr lang="en-US" smtClean="0"/>
-              <a:t>8/4/26</a:t>
+              <a:t>8/5/26</a:t>
             </a:fld>
             <a:endParaRPr lang="en-US"/>
           </a:p>
@@ -5112,7 +5113,7 @@
           <a:p>
             <a:fld id="{446F9669-A8A7-2D40-9D01-B35FC337AA30}" type="datetime1">
               <a:rPr lang="en-US" smtClean="0"/>
-              <a:t>8/4/26</a:t>
+              <a:t>8/5/26</a:t>
             </a:fld>
             <a:endParaRPr lang="en-US"/>
           </a:p>
@@ -5308,7 +5309,7 @@
           <a:p>
             <a:fld id="{FA76CF18-F41B-6B48-B3E5-599E9795C2C3}" type="datetime1">
               <a:rPr lang="en-US" smtClean="0"/>
-              <a:t>8/4/26</a:t>
+              <a:t>8/5/26</a:t>
             </a:fld>
             <a:endParaRPr lang="en-US"/>
           </a:p>
@@ -5571,7 +5572,7 @@
           <a:p>
             <a:fld id="{B9654854-6457-164F-A077-6B3035079B82}" type="datetime1">
               <a:rPr lang="en-US" smtClean="0"/>
-              <a:t>8/4/26</a:t>
+              <a:t>8/5/26</a:t>
             </a:fld>
             <a:endParaRPr lang="en-US"/>
           </a:p>
@@ -6005,7 +6006,7 @@
           <a:p>
             <a:fld id="{CE3DBFD7-E611-8C40-AC73-0C29FF63F0CD}" type="datetime1">
               <a:rPr lang="en-US" smtClean="0"/>
-              <a:t>8/4/26</a:t>
+              <a:t>8/5/26</a:t>
             </a:fld>
             <a:endParaRPr lang="en-US"/>
           </a:p>
@@ -6551,7 +6552,7 @@
           <a:p>
             <a:fld id="{C8B63B06-0493-2840-9F37-30C9412BBF17}" type="datetime1">
               <a:rPr lang="en-US" smtClean="0"/>
-              <a:t>8/4/26</a:t>
+              <a:t>8/5/26</a:t>
             </a:fld>
             <a:endParaRPr lang="en-US"/>
           </a:p>
@@ -7271,7 +7272,7 @@
           <a:p>
             <a:fld id="{72B5C0FA-8C46-E84D-B6D7-B673F2CA0A0E}" type="datetime1">
               <a:rPr lang="en-US" smtClean="0"/>
-              <a:t>8/4/26</a:t>
+              <a:t>8/5/26</a:t>
             </a:fld>
             <a:endParaRPr lang="en-US"/>
           </a:p>
@@ -7441,7 +7442,7 @@
           <a:p>
             <a:fld id="{60B9CDE1-97B4-BF46-B69C-B86855B18820}" type="datetime1">
               <a:rPr lang="en-US" smtClean="0"/>
-              <a:t>8/4/26</a:t>
+              <a:t>8/5/26</a:t>
             </a:fld>
             <a:endParaRPr lang="en-US"/>
           </a:p>
@@ -7621,7 +7622,7 @@
           <a:p>
             <a:fld id="{BE51D3A4-F9E5-FD49-AA87-B395F50451DC}" type="datetime1">
               <a:rPr lang="en-US" smtClean="0"/>
-              <a:t>8/4/26</a:t>
+              <a:t>8/5/26</a:t>
             </a:fld>
             <a:endParaRPr lang="en-US"/>
           </a:p>
@@ -7791,7 +7792,7 @@
           <a:p>
             <a:fld id="{880DFB37-B0AE-9449-85EC-14F9C83B6084}" type="datetime1">
               <a:rPr lang="en-US" smtClean="0"/>
-              <a:t>8/4/26</a:t>
+              <a:t>8/5/26</a:t>
             </a:fld>
             <a:endParaRPr lang="en-US"/>
           </a:p>
@@ -8041,7 +8042,7 @@
           <a:p>
             <a:fld id="{C939124A-616E-6944-A21A-1839F5DBE7BB}" type="datetime1">
               <a:rPr lang="en-US" smtClean="0"/>
-              <a:t>8/4/26</a:t>
+              <a:t>8/5/26</a:t>
             </a:fld>
             <a:endParaRPr lang="en-US"/>
           </a:p>
@@ -8273,7 +8274,7 @@
           <a:p>
             <a:fld id="{C6E9A026-D48C-FD43-8676-CD625DD5D84B}" type="datetime1">
               <a:rPr lang="en-US" smtClean="0"/>
-              <a:t>8/4/26</a:t>
+              <a:t>8/5/26</a:t>
             </a:fld>
             <a:endParaRPr lang="en-US"/>
           </a:p>
@@ -8659,7 +8660,7 @@
           <a:p>
             <a:fld id="{EA35111E-23A3-1440-99A3-C4C665908E3D}" type="datetime1">
               <a:rPr lang="en-US" smtClean="0"/>
-              <a:t>8/4/26</a:t>
+              <a:t>8/5/26</a:t>
             </a:fld>
             <a:endParaRPr lang="en-US"/>
           </a:p>
@@ -8782,7 +8783,7 @@
           <a:p>
             <a:fld id="{249983B9-88EF-D74B-BA6D-6A3BF17C2B38}" type="datetime1">
               <a:rPr lang="en-US" smtClean="0"/>
-              <a:t>8/4/26</a:t>
+              <a:t>8/5/26</a:t>
             </a:fld>
             <a:endParaRPr lang="en-US"/>
           </a:p>
@@ -8877,7 +8878,7 @@
           <a:p>
             <a:fld id="{E2A00AEF-B4EC-084A-8DB8-A225C7981CBB}" type="datetime1">
               <a:rPr lang="en-US" smtClean="0"/>
-              <a:t>8/4/26</a:t>
+              <a:t>8/5/26</a:t>
             </a:fld>
             <a:endParaRPr lang="en-US"/>
           </a:p>
@@ -9126,7 +9127,7 @@
           <a:p>
             <a:fld id="{97860299-21CD-A94A-A7B0-44E787F8D42C}" type="datetime1">
               <a:rPr lang="en-US" smtClean="0"/>
-              <a:t>8/4/26</a:t>
+              <a:t>8/5/26</a:t>
             </a:fld>
             <a:endParaRPr lang="en-US"/>
           </a:p>
@@ -9411,7 +9412,7 @@
           <a:p>
             <a:fld id="{3DFD19CF-4E62-D246-BA61-7B528271315F}" type="datetime1">
               <a:rPr lang="en-US" smtClean="0"/>
-              <a:t>8/4/26</a:t>
+              <a:t>8/5/26</a:t>
             </a:fld>
             <a:endParaRPr lang="en-US"/>
           </a:p>
@@ -9534,7 +9535,7 @@
           <a:noFill/>
           <a:extLst>
             <a:ext uri="{909E8E84-426E-40dd-AFC4-6F175D3DCCD1}">
-              <a14:hiddenFill xmlns="" xmlns:a14="http://schemas.microsoft.com/office/drawing/2010/main">
+              <a14:hiddenFill xmlns:a14="http://schemas.microsoft.com/office/drawing/2010/main" xmlns="">
                 <a:solidFill>
                   <a:srgbClr val="FFFFFF"/>
                 </a:solidFill>
@@ -9608,7 +9609,7 @@
               </a:ln>
               <a:extLst>
                 <a:ext uri="{91240B29-F687-4f45-9708-019B960494DF}">
-                  <a14:hiddenLine xmlns="" xmlns:a14="http://schemas.microsoft.com/office/drawing/2010/main" w="9525">
+                  <a14:hiddenLine xmlns:a14="http://schemas.microsoft.com/office/drawing/2010/main" xmlns="" w="9525">
                     <a:solidFill>
                       <a:srgbClr val="000000"/>
                     </a:solidFill>
@@ -9698,7 +9699,7 @@
               </a:ln>
               <a:extLst>
                 <a:ext uri="{91240B29-F687-4f45-9708-019B960494DF}">
-                  <a14:hiddenLine xmlns="" xmlns:a14="http://schemas.microsoft.com/office/drawing/2010/main" w="9525">
+                  <a14:hiddenLine xmlns:a14="http://schemas.microsoft.com/office/drawing/2010/main" xmlns="" w="9525">
                     <a:solidFill>
                       <a:srgbClr val="000000"/>
                     </a:solidFill>
@@ -9788,7 +9789,7 @@
               </a:ln>
               <a:extLst>
                 <a:ext uri="{91240B29-F687-4f45-9708-019B960494DF}">
-                  <a14:hiddenLine xmlns="" xmlns:a14="http://schemas.microsoft.com/office/drawing/2010/main" w="9525">
+                  <a14:hiddenLine xmlns:a14="http://schemas.microsoft.com/office/drawing/2010/main" xmlns="" w="9525">
                     <a:solidFill>
                       <a:srgbClr val="000000"/>
                     </a:solidFill>
@@ -9850,7 +9851,7 @@
               </a:ln>
               <a:extLst>
                 <a:ext uri="{91240B29-F687-4f45-9708-019B960494DF}">
-                  <a14:hiddenLine xmlns="" xmlns:a14="http://schemas.microsoft.com/office/drawing/2010/main" w="9525">
+                  <a14:hiddenLine xmlns:a14="http://schemas.microsoft.com/office/drawing/2010/main" xmlns="" w="9525">
                     <a:solidFill>
                       <a:srgbClr val="000000"/>
                     </a:solidFill>
@@ -9940,7 +9941,7 @@
               </a:ln>
               <a:extLst>
                 <a:ext uri="{91240B29-F687-4f45-9708-019B960494DF}">
-                  <a14:hiddenLine xmlns="" xmlns:a14="http://schemas.microsoft.com/office/drawing/2010/main" w="9525">
+                  <a14:hiddenLine xmlns:a14="http://schemas.microsoft.com/office/drawing/2010/main" xmlns="" w="9525">
                     <a:solidFill>
                       <a:srgbClr val="000000"/>
                     </a:solidFill>
@@ -10002,7 +10003,7 @@
               </a:ln>
               <a:extLst>
                 <a:ext uri="{91240B29-F687-4f45-9708-019B960494DF}">
-                  <a14:hiddenLine xmlns="" xmlns:a14="http://schemas.microsoft.com/office/drawing/2010/main" w="9525">
+                  <a14:hiddenLine xmlns:a14="http://schemas.microsoft.com/office/drawing/2010/main" xmlns="" w="9525">
                     <a:solidFill>
                       <a:srgbClr val="000000"/>
                     </a:solidFill>
@@ -10064,7 +10065,7 @@
               </a:ln>
               <a:extLst>
                 <a:ext uri="{91240B29-F687-4f45-9708-019B960494DF}">
-                  <a14:hiddenLine xmlns="" xmlns:a14="http://schemas.microsoft.com/office/drawing/2010/main" w="9525">
+                  <a14:hiddenLine xmlns:a14="http://schemas.microsoft.com/office/drawing/2010/main" xmlns="" w="9525">
                     <a:solidFill>
                       <a:srgbClr val="000000"/>
                     </a:solidFill>
@@ -10154,7 +10155,7 @@
               </a:ln>
               <a:extLst>
                 <a:ext uri="{91240B29-F687-4f45-9708-019B960494DF}">
-                  <a14:hiddenLine xmlns="" xmlns:a14="http://schemas.microsoft.com/office/drawing/2010/main" w="9525">
+                  <a14:hiddenLine xmlns:a14="http://schemas.microsoft.com/office/drawing/2010/main" xmlns="" w="9525">
                     <a:solidFill>
                       <a:srgbClr val="000000"/>
                     </a:solidFill>
@@ -10244,7 +10245,7 @@
               </a:ln>
               <a:extLst>
                 <a:ext uri="{91240B29-F687-4f45-9708-019B960494DF}">
-                  <a14:hiddenLine xmlns="" xmlns:a14="http://schemas.microsoft.com/office/drawing/2010/main" w="9525">
+                  <a14:hiddenLine xmlns:a14="http://schemas.microsoft.com/office/drawing/2010/main" xmlns="" w="9525">
                     <a:solidFill>
                       <a:srgbClr val="000000"/>
                     </a:solidFill>
@@ -10306,7 +10307,7 @@
               </a:ln>
               <a:extLst>
                 <a:ext uri="{91240B29-F687-4f45-9708-019B960494DF}">
-                  <a14:hiddenLine xmlns="" xmlns:a14="http://schemas.microsoft.com/office/drawing/2010/main" w="9525">
+                  <a14:hiddenLine xmlns:a14="http://schemas.microsoft.com/office/drawing/2010/main" xmlns="" w="9525">
                     <a:solidFill>
                       <a:srgbClr val="000000"/>
                     </a:solidFill>
@@ -10416,7 +10417,7 @@
               </a:ln>
               <a:extLst>
                 <a:ext uri="{91240B29-F687-4f45-9708-019B960494DF}">
-                  <a14:hiddenLine xmlns="" xmlns:a14="http://schemas.microsoft.com/office/drawing/2010/main" w="9525">
+                  <a14:hiddenLine xmlns:a14="http://schemas.microsoft.com/office/drawing/2010/main" xmlns="" w="9525">
                     <a:solidFill>
                       <a:srgbClr val="000000"/>
                     </a:solidFill>
@@ -10500,7 +10501,7 @@
               </a:ln>
               <a:extLst>
                 <a:ext uri="{91240B29-F687-4f45-9708-019B960494DF}">
-                  <a14:hiddenLine xmlns="" xmlns:a14="http://schemas.microsoft.com/office/drawing/2010/main" w="9525">
+                  <a14:hiddenLine xmlns:a14="http://schemas.microsoft.com/office/drawing/2010/main" xmlns="" w="9525">
                     <a:solidFill>
                       <a:srgbClr val="000000"/>
                     </a:solidFill>
@@ -10562,7 +10563,7 @@
               </a:ln>
               <a:extLst>
                 <a:ext uri="{91240B29-F687-4f45-9708-019B960494DF}">
-                  <a14:hiddenLine xmlns="" xmlns:a14="http://schemas.microsoft.com/office/drawing/2010/main" w="9525">
+                  <a14:hiddenLine xmlns:a14="http://schemas.microsoft.com/office/drawing/2010/main" xmlns="" w="9525">
                     <a:solidFill>
                       <a:srgbClr val="000000"/>
                     </a:solidFill>
@@ -10624,7 +10625,7 @@
               </a:ln>
               <a:extLst>
                 <a:ext uri="{91240B29-F687-4f45-9708-019B960494DF}">
-                  <a14:hiddenLine xmlns="" xmlns:a14="http://schemas.microsoft.com/office/drawing/2010/main" w="9525">
+                  <a14:hiddenLine xmlns:a14="http://schemas.microsoft.com/office/drawing/2010/main" xmlns="" w="9525">
                     <a:solidFill>
                       <a:srgbClr val="000000"/>
                     </a:solidFill>
@@ -10714,7 +10715,7 @@
               </a:ln>
               <a:extLst>
                 <a:ext uri="{91240B29-F687-4f45-9708-019B960494DF}">
-                  <a14:hiddenLine xmlns="" xmlns:a14="http://schemas.microsoft.com/office/drawing/2010/main" w="9525">
+                  <a14:hiddenLine xmlns:a14="http://schemas.microsoft.com/office/drawing/2010/main" xmlns="" w="9525">
                     <a:solidFill>
                       <a:srgbClr val="000000"/>
                     </a:solidFill>
@@ -10748,7 +10749,7 @@
               </a:ln>
               <a:extLst>
                 <a:ext uri="{91240B29-F687-4f45-9708-019B960494DF}">
-                  <a14:hiddenLine xmlns="" xmlns:a14="http://schemas.microsoft.com/office/drawing/2010/main" w="9525">
+                  <a14:hiddenLine xmlns:a14="http://schemas.microsoft.com/office/drawing/2010/main" xmlns="" w="9525">
                     <a:solidFill>
                       <a:srgbClr val="000000"/>
                     </a:solidFill>
@@ -10813,7 +10814,7 @@
               </a:ln>
               <a:extLst>
                 <a:ext uri="{91240B29-F687-4f45-9708-019B960494DF}">
-                  <a14:hiddenLine xmlns="" xmlns:a14="http://schemas.microsoft.com/office/drawing/2010/main" w="9525">
+                  <a14:hiddenLine xmlns:a14="http://schemas.microsoft.com/office/drawing/2010/main" xmlns="" w="9525">
                     <a:solidFill>
                       <a:srgbClr val="000000"/>
                     </a:solidFill>
@@ -10903,7 +10904,7 @@
               </a:ln>
               <a:extLst>
                 <a:ext uri="{91240B29-F687-4f45-9708-019B960494DF}">
-                  <a14:hiddenLine xmlns="" xmlns:a14="http://schemas.microsoft.com/office/drawing/2010/main" w="9525">
+                  <a14:hiddenLine xmlns:a14="http://schemas.microsoft.com/office/drawing/2010/main" xmlns="" w="9525">
                     <a:solidFill>
                       <a:srgbClr val="000000"/>
                     </a:solidFill>
@@ -10965,7 +10966,7 @@
               </a:ln>
               <a:extLst>
                 <a:ext uri="{91240B29-F687-4f45-9708-019B960494DF}">
-                  <a14:hiddenLine xmlns="" xmlns:a14="http://schemas.microsoft.com/office/drawing/2010/main" w="9525">
+                  <a14:hiddenLine xmlns:a14="http://schemas.microsoft.com/office/drawing/2010/main" xmlns="" w="9525">
                     <a:solidFill>
                       <a:srgbClr val="000000"/>
                     </a:solidFill>
@@ -11055,7 +11056,7 @@
               </a:ln>
               <a:extLst>
                 <a:ext uri="{91240B29-F687-4f45-9708-019B960494DF}">
-                  <a14:hiddenLine xmlns="" xmlns:a14="http://schemas.microsoft.com/office/drawing/2010/main" w="9525">
+                  <a14:hiddenLine xmlns:a14="http://schemas.microsoft.com/office/drawing/2010/main" xmlns="" w="9525">
                     <a:solidFill>
                       <a:srgbClr val="000000"/>
                     </a:solidFill>
@@ -11120,7 +11121,7 @@
               </a:ln>
               <a:extLst>
                 <a:ext uri="{91240B29-F687-4f45-9708-019B960494DF}">
-                  <a14:hiddenLine xmlns="" xmlns:a14="http://schemas.microsoft.com/office/drawing/2010/main" w="9525">
+                  <a14:hiddenLine xmlns:a14="http://schemas.microsoft.com/office/drawing/2010/main" xmlns="" w="9525">
                     <a:solidFill>
                       <a:srgbClr val="000000"/>
                     </a:solidFill>
@@ -11182,7 +11183,7 @@
               </a:ln>
               <a:extLst>
                 <a:ext uri="{91240B29-F687-4f45-9708-019B960494DF}">
-                  <a14:hiddenLine xmlns="" xmlns:a14="http://schemas.microsoft.com/office/drawing/2010/main" w="9525">
+                  <a14:hiddenLine xmlns:a14="http://schemas.microsoft.com/office/drawing/2010/main" xmlns="" w="9525">
                     <a:solidFill>
                       <a:srgbClr val="000000"/>
                     </a:solidFill>
@@ -11272,7 +11273,7 @@
               </a:ln>
               <a:extLst>
                 <a:ext uri="{91240B29-F687-4f45-9708-019B960494DF}">
-                  <a14:hiddenLine xmlns="" xmlns:a14="http://schemas.microsoft.com/office/drawing/2010/main" w="9525">
+                  <a14:hiddenLine xmlns:a14="http://schemas.microsoft.com/office/drawing/2010/main" xmlns="" w="9525">
                     <a:solidFill>
                       <a:srgbClr val="000000"/>
                     </a:solidFill>
@@ -11362,7 +11363,7 @@
               </a:ln>
               <a:extLst>
                 <a:ext uri="{91240B29-F687-4f45-9708-019B960494DF}">
-                  <a14:hiddenLine xmlns="" xmlns:a14="http://schemas.microsoft.com/office/drawing/2010/main" w="9525">
+                  <a14:hiddenLine xmlns:a14="http://schemas.microsoft.com/office/drawing/2010/main" xmlns="" w="9525">
                     <a:solidFill>
                       <a:srgbClr val="000000"/>
                     </a:solidFill>
@@ -11427,7 +11428,7 @@
               </a:ln>
               <a:extLst>
                 <a:ext uri="{91240B29-F687-4f45-9708-019B960494DF}">
-                  <a14:hiddenLine xmlns="" xmlns:a14="http://schemas.microsoft.com/office/drawing/2010/main" w="9525">
+                  <a14:hiddenLine xmlns:a14="http://schemas.microsoft.com/office/drawing/2010/main" xmlns="" w="9525">
                     <a:solidFill>
                       <a:srgbClr val="000000"/>
                     </a:solidFill>
@@ -11547,7 +11548,7 @@
               </a:ln>
               <a:extLst>
                 <a:ext uri="{91240B29-F687-4f45-9708-019B960494DF}">
-                  <a14:hiddenLine xmlns="" xmlns:a14="http://schemas.microsoft.com/office/drawing/2010/main" w="9525">
+                  <a14:hiddenLine xmlns:a14="http://schemas.microsoft.com/office/drawing/2010/main" xmlns="" w="9525">
                     <a:solidFill>
                       <a:srgbClr val="000000"/>
                     </a:solidFill>
@@ -11628,7 +11629,7 @@
               </a:ln>
               <a:extLst>
                 <a:ext uri="{91240B29-F687-4f45-9708-019B960494DF}">
-                  <a14:hiddenLine xmlns="" xmlns:a14="http://schemas.microsoft.com/office/drawing/2010/main" w="9525">
+                  <a14:hiddenLine xmlns:a14="http://schemas.microsoft.com/office/drawing/2010/main" xmlns="" w="9525">
                     <a:solidFill>
                       <a:srgbClr val="000000"/>
                     </a:solidFill>
@@ -11743,7 +11744,7 @@
               </a:ln>
               <a:extLst>
                 <a:ext uri="{91240B29-F687-4f45-9708-019B960494DF}">
-                  <a14:hiddenLine xmlns="" xmlns:a14="http://schemas.microsoft.com/office/drawing/2010/main" w="9525">
+                  <a14:hiddenLine xmlns:a14="http://schemas.microsoft.com/office/drawing/2010/main" xmlns="" w="9525">
                     <a:solidFill>
                       <a:srgbClr val="000000"/>
                     </a:solidFill>
@@ -11833,7 +11834,7 @@
               </a:ln>
               <a:extLst>
                 <a:ext uri="{91240B29-F687-4f45-9708-019B960494DF}">
-                  <a14:hiddenLine xmlns="" xmlns:a14="http://schemas.microsoft.com/office/drawing/2010/main" w="9525">
+                  <a14:hiddenLine xmlns:a14="http://schemas.microsoft.com/office/drawing/2010/main" xmlns="" w="9525">
                     <a:solidFill>
                       <a:srgbClr val="000000"/>
                     </a:solidFill>
@@ -11898,7 +11899,7 @@
               </a:ln>
               <a:extLst>
                 <a:ext uri="{91240B29-F687-4f45-9708-019B960494DF}">
-                  <a14:hiddenLine xmlns="" xmlns:a14="http://schemas.microsoft.com/office/drawing/2010/main" w="9525">
+                  <a14:hiddenLine xmlns:a14="http://schemas.microsoft.com/office/drawing/2010/main" xmlns="" w="9525">
                     <a:solidFill>
                       <a:srgbClr val="000000"/>
                     </a:solidFill>
@@ -11988,7 +11989,7 @@
               </a:ln>
               <a:extLst>
                 <a:ext uri="{91240B29-F687-4f45-9708-019B960494DF}">
-                  <a14:hiddenLine xmlns="" xmlns:a14="http://schemas.microsoft.com/office/drawing/2010/main" w="9525">
+                  <a14:hiddenLine xmlns:a14="http://schemas.microsoft.com/office/drawing/2010/main" xmlns="" w="9525">
                     <a:solidFill>
                       <a:srgbClr val="000000"/>
                     </a:solidFill>
@@ -12056,7 +12057,7 @@
               </a:ln>
               <a:extLst>
                 <a:ext uri="{91240B29-F687-4f45-9708-019B960494DF}">
-                  <a14:hiddenLine xmlns="" xmlns:a14="http://schemas.microsoft.com/office/drawing/2010/main" w="9525">
+                  <a14:hiddenLine xmlns:a14="http://schemas.microsoft.com/office/drawing/2010/main" xmlns="" w="9525">
                     <a:solidFill>
                       <a:srgbClr val="000000"/>
                     </a:solidFill>
@@ -12146,7 +12147,7 @@
               </a:ln>
               <a:extLst>
                 <a:ext uri="{91240B29-F687-4f45-9708-019B960494DF}">
-                  <a14:hiddenLine xmlns="" xmlns:a14="http://schemas.microsoft.com/office/drawing/2010/main" w="9525">
+                  <a14:hiddenLine xmlns:a14="http://schemas.microsoft.com/office/drawing/2010/main" xmlns="" w="9525">
                     <a:solidFill>
                       <a:srgbClr val="000000"/>
                     </a:solidFill>
@@ -12214,7 +12215,7 @@
               </a:ln>
               <a:extLst>
                 <a:ext uri="{91240B29-F687-4f45-9708-019B960494DF}">
-                  <a14:hiddenLine xmlns="" xmlns:a14="http://schemas.microsoft.com/office/drawing/2010/main" w="9525">
+                  <a14:hiddenLine xmlns:a14="http://schemas.microsoft.com/office/drawing/2010/main" xmlns="" w="9525">
                     <a:solidFill>
                       <a:srgbClr val="000000"/>
                     </a:solidFill>
@@ -12304,7 +12305,7 @@
               </a:ln>
               <a:extLst>
                 <a:ext uri="{91240B29-F687-4f45-9708-019B960494DF}">
-                  <a14:hiddenLine xmlns="" xmlns:a14="http://schemas.microsoft.com/office/drawing/2010/main" w="9525">
+                  <a14:hiddenLine xmlns:a14="http://schemas.microsoft.com/office/drawing/2010/main" xmlns="" w="9525">
                     <a:solidFill>
                       <a:srgbClr val="000000"/>
                     </a:solidFill>
@@ -12338,7 +12339,7 @@
               </a:ln>
               <a:extLst>
                 <a:ext uri="{91240B29-F687-4f45-9708-019B960494DF}">
-                  <a14:hiddenLine xmlns="" xmlns:a14="http://schemas.microsoft.com/office/drawing/2010/main" w="9525">
+                  <a14:hiddenLine xmlns:a14="http://schemas.microsoft.com/office/drawing/2010/main" xmlns="" w="9525">
                     <a:solidFill>
                       <a:srgbClr val="000000"/>
                     </a:solidFill>
@@ -12478,7 +12479,7 @@
           <a:p>
             <a:fld id="{92FF8978-FE14-CC4A-93A6-934EB06543C0}" type="datetime1">
               <a:rPr lang="en-US" smtClean="0"/>
-              <a:t>8/4/26</a:t>
+              <a:t>8/5/26</a:t>
             </a:fld>
             <a:endParaRPr lang="en-US"/>
           </a:p>
@@ -14480,6 +14481,253 @@
 </file>
 
 <file path=ppt/slides/slide16.xml><?xml version="1.0" encoding="utf-8"?>
+<p:sld xmlns:a="http://schemas.openxmlformats.org/drawingml/2006/main" xmlns:r="http://schemas.openxmlformats.org/officeDocument/2006/relationships" xmlns:p="http://schemas.openxmlformats.org/presentationml/2006/main">
+  <p:cSld>
+    <p:spTree>
+      <p:nvGrpSpPr>
+        <p:cNvPr id="1" name="">
+          <a:extLst>
+            <a:ext uri="{FF2B5EF4-FFF2-40B4-BE49-F238E27FC236}">
+              <a16:creationId xmlns:a16="http://schemas.microsoft.com/office/drawing/2014/main" id="{D78AA09B-DA9F-894B-F506-51083C339E11}"/>
+            </a:ext>
+          </a:extLst>
+        </p:cNvPr>
+        <p:cNvGrpSpPr/>
+        <p:nvPr/>
+      </p:nvGrpSpPr>
+      <p:grpSpPr>
+        <a:xfrm>
+          <a:off x="0" y="0"/>
+          <a:ext cx="0" cy="0"/>
+          <a:chOff x="0" y="0"/>
+          <a:chExt cx="0" cy="0"/>
+        </a:xfrm>
+      </p:grpSpPr>
+      <p:sp>
+        <p:nvSpPr>
+          <p:cNvPr id="6146" name="Rectangle 2">
+            <a:extLst>
+              <a:ext uri="{FF2B5EF4-FFF2-40B4-BE49-F238E27FC236}">
+                <a16:creationId xmlns:a16="http://schemas.microsoft.com/office/drawing/2014/main" id="{EC33BCF7-B01D-80BC-4B64-D376CA2C1983}"/>
+              </a:ext>
+            </a:extLst>
+          </p:cNvPr>
+          <p:cNvSpPr>
+            <a:spLocks noGrp="1" noChangeArrowheads="1"/>
+          </p:cNvSpPr>
+          <p:nvPr>
+            <p:ph type="title"/>
+            <p:custDataLst>
+              <p:tags r:id="rId1"/>
+            </p:custDataLst>
+          </p:nvPr>
+        </p:nvSpPr>
+        <p:spPr>
+          <a:xfrm>
+            <a:off x="1141413" y="284084"/>
+            <a:ext cx="9905998" cy="620791"/>
+          </a:xfrm>
+        </p:spPr>
+        <p:txBody>
+          <a:bodyPr/>
+          <a:lstStyle/>
+          <a:p>
+            <a:pPr algn="ctr"/>
+            <a:r>
+              <a:rPr lang="en-US" dirty="0"/>
+              <a:t>Week 4: Wednesday</a:t>
+            </a:r>
+          </a:p>
+        </p:txBody>
+      </p:sp>
+      <p:sp>
+        <p:nvSpPr>
+          <p:cNvPr id="6147" name="Rectangle 3">
+            <a:extLst>
+              <a:ext uri="{FF2B5EF4-FFF2-40B4-BE49-F238E27FC236}">
+                <a16:creationId xmlns:a16="http://schemas.microsoft.com/office/drawing/2014/main" id="{9F41845A-8A12-2A3F-54E8-B921FD223F8B}"/>
+              </a:ext>
+            </a:extLst>
+          </p:cNvPr>
+          <p:cNvSpPr>
+            <a:spLocks noGrp="1" noChangeArrowheads="1"/>
+          </p:cNvSpPr>
+          <p:nvPr>
+            <p:ph idx="1"/>
+            <p:custDataLst>
+              <p:tags r:id="rId2"/>
+            </p:custDataLst>
+          </p:nvPr>
+        </p:nvSpPr>
+        <p:spPr>
+          <a:xfrm>
+            <a:off x="1294151" y="1098549"/>
+            <a:ext cx="9600522" cy="5475368"/>
+          </a:xfrm>
+        </p:spPr>
+        <p:txBody>
+          <a:bodyPr>
+            <a:normAutofit fontScale="70000" lnSpcReduction="20000"/>
+          </a:bodyPr>
+          <a:lstStyle/>
+          <a:p>
+            <a:r>
+              <a:rPr lang="en-US" dirty="0">
+                <a:latin typeface="Arial" panose="020B0604020202020204" pitchFamily="34" charset="0"/>
+                <a:cs typeface="Arial" panose="020B0604020202020204" pitchFamily="34" charset="0"/>
+              </a:rPr>
+              <a:t>Final week! You got this!!</a:t>
+            </a:r>
+          </a:p>
+          <a:p>
+            <a:r>
+              <a:rPr lang="en-US" dirty="0">
+                <a:latin typeface="Arial" panose="020B0604020202020204" pitchFamily="34" charset="0"/>
+                <a:cs typeface="Arial" panose="020B0604020202020204" pitchFamily="34" charset="0"/>
+              </a:rPr>
+              <a:t>This week:</a:t>
+            </a:r>
+          </a:p>
+          <a:p>
+            <a:pPr lvl="1"/>
+            <a:r>
+              <a:rPr lang="en-US" dirty="0">
+                <a:latin typeface="Arial" panose="020B0604020202020204" pitchFamily="34" charset="0"/>
+                <a:cs typeface="Arial" panose="020B0604020202020204" pitchFamily="34" charset="0"/>
+              </a:rPr>
+              <a:t>Mod 4 Written Assignment Due THURSDAY NIGHT!</a:t>
+            </a:r>
+          </a:p>
+          <a:p>
+            <a:pPr lvl="1"/>
+            <a:r>
+              <a:rPr lang="en-US" dirty="0">
+                <a:latin typeface="Arial" panose="020B0604020202020204" pitchFamily="34" charset="0"/>
+                <a:cs typeface="Arial" panose="020B0604020202020204" pitchFamily="34" charset="0"/>
+              </a:rPr>
+              <a:t>Final Exam is on Friday</a:t>
+            </a:r>
+          </a:p>
+          <a:p>
+            <a:r>
+              <a:rPr lang="en-US" dirty="0">
+                <a:latin typeface="Arial" panose="020B0604020202020204" pitchFamily="34" charset="0"/>
+                <a:cs typeface="Arial" panose="020B0604020202020204" pitchFamily="34" charset="0"/>
+              </a:rPr>
+              <a:t>Mod 4 Written Assignment.</a:t>
+            </a:r>
+          </a:p>
+          <a:p>
+            <a:pPr lvl="1"/>
+            <a:r>
+              <a:rPr lang="en-US" dirty="0">
+                <a:latin typeface="Arial" panose="020B0604020202020204" pitchFamily="34" charset="0"/>
+                <a:cs typeface="Arial" panose="020B0604020202020204" pitchFamily="34" charset="0"/>
+              </a:rPr>
+              <a:t>Extension is only through Friday night (sorry) because I want to get final grades in Saturday</a:t>
+            </a:r>
+          </a:p>
+          <a:p>
+            <a:r>
+              <a:rPr lang="en-US" dirty="0">
+                <a:latin typeface="Arial" panose="020B0604020202020204" pitchFamily="34" charset="0"/>
+                <a:cs typeface="Arial" panose="020B0604020202020204" pitchFamily="34" charset="0"/>
+              </a:rPr>
+              <a:t>Final Exam</a:t>
+            </a:r>
+          </a:p>
+          <a:p>
+            <a:pPr lvl="1"/>
+            <a:r>
+              <a:rPr lang="en-US" dirty="0">
+                <a:latin typeface="Arial" panose="020B0604020202020204" pitchFamily="34" charset="0"/>
+                <a:cs typeface="Arial" panose="020B0604020202020204" pitchFamily="34" charset="0"/>
+              </a:rPr>
+              <a:t>You will have the full class period (10:30-12:45)</a:t>
+            </a:r>
+          </a:p>
+          <a:p>
+            <a:pPr lvl="1"/>
+            <a:r>
+              <a:rPr lang="en-US" dirty="0">
+                <a:latin typeface="Arial" panose="020B0604020202020204" pitchFamily="34" charset="0"/>
+                <a:cs typeface="Arial" panose="020B0604020202020204" pitchFamily="34" charset="0"/>
+              </a:rPr>
+              <a:t>Will cover the entire course, with an emphasis on modules 3 (Turing Machines) and 4 (Complexity Theory)</a:t>
+            </a:r>
+          </a:p>
+          <a:p>
+            <a:r>
+              <a:rPr lang="en-US" dirty="0">
+                <a:latin typeface="Arial" panose="020B0604020202020204" pitchFamily="34" charset="0"/>
+                <a:cs typeface="Arial" panose="020B0604020202020204" pitchFamily="34" charset="0"/>
+              </a:rPr>
+              <a:t>Lecture recordings from last Fall are posted on Panopto on Canvas</a:t>
+            </a:r>
+          </a:p>
+          <a:p>
+            <a:pPr lvl="1"/>
+            <a:r>
+              <a:rPr lang="en-US" dirty="0">
+                <a:latin typeface="Arial" panose="020B0604020202020204" pitchFamily="34" charset="0"/>
+                <a:cs typeface="Arial" panose="020B0604020202020204" pitchFamily="34" charset="0"/>
+              </a:rPr>
+              <a:t>I posted ALL the videos FYI</a:t>
+            </a:r>
+          </a:p>
+          <a:p>
+            <a:r>
+              <a:rPr lang="en-US" dirty="0">
+                <a:latin typeface="Arial" panose="020B0604020202020204" pitchFamily="34" charset="0"/>
+                <a:cs typeface="Arial" panose="020B0604020202020204" pitchFamily="34" charset="0"/>
+              </a:rPr>
+              <a:t>Please remember that I am asking for NO laptop / phones!</a:t>
+            </a:r>
+          </a:p>
+          <a:p>
+            <a:pPr lvl="1"/>
+            <a:r>
+              <a:rPr lang="en-US" dirty="0">
+                <a:latin typeface="Arial" panose="020B0604020202020204" pitchFamily="34" charset="0"/>
+                <a:cs typeface="Arial" panose="020B0604020202020204" pitchFamily="34" charset="0"/>
+              </a:rPr>
+              <a:t>This makes the learning environment better for everybody. I appreciate it!</a:t>
+            </a:r>
+          </a:p>
+          <a:p>
+            <a:r>
+              <a:rPr lang="en-US" dirty="0">
+                <a:latin typeface="Arial" panose="020B0604020202020204" pitchFamily="34" charset="0"/>
+                <a:cs typeface="Arial" panose="020B0604020202020204" pitchFamily="34" charset="0"/>
+              </a:rPr>
+              <a:t>Attendance continues today as usual.</a:t>
+            </a:r>
+          </a:p>
+          <a:p>
+            <a:r>
+              <a:rPr lang="en-US" dirty="0">
+                <a:latin typeface="Arial" panose="020B0604020202020204" pitchFamily="34" charset="0"/>
+                <a:cs typeface="Arial" panose="020B0604020202020204" pitchFamily="34" charset="0"/>
+              </a:rPr>
+              <a:t>Today we continue the last module</a:t>
+            </a:r>
+          </a:p>
+        </p:txBody>
+      </p:sp>
+    </p:spTree>
+    <p:extLst>
+      <p:ext uri="{BB962C8B-B14F-4D97-AF65-F5344CB8AC3E}">
+        <p14:creationId xmlns:p14="http://schemas.microsoft.com/office/powerpoint/2010/main" val="3414554098"/>
+      </p:ext>
+    </p:extLst>
+  </p:cSld>
+  <p:clrMapOvr>
+    <a:masterClrMapping/>
+  </p:clrMapOvr>
+</p:sld>
+</file>
+
+<file path=ppt/slides/slide17.xml><?xml version="1.0" encoding="utf-8"?>
 <p:sld xmlns:a="http://schemas.openxmlformats.org/drawingml/2006/main" xmlns:r="http://schemas.openxmlformats.org/officeDocument/2006/relationships" xmlns:p="http://schemas.openxmlformats.org/presentationml/2006/main">
   <p:cSld>
     <p:spTree>
@@ -18248,6 +18496,18 @@
 </p:tagLst>
 </file>
 
+<file path=ppt/tags/tag34.xml><?xml version="1.0" encoding="utf-8"?>
+<p:tagLst xmlns:a="http://schemas.openxmlformats.org/drawingml/2006/main" xmlns:r="http://schemas.openxmlformats.org/officeDocument/2006/relationships" xmlns:p="http://schemas.openxmlformats.org/presentationml/2006/main">
+  <p:tag name="_INSTRUCTOR VIEW19C14C36-AC8E-43BC-9DB6-C2AAF774C7DC|PANE__TAG" val="_"/>
+</p:tagLst>
+</file>
+
+<file path=ppt/tags/tag35.xml><?xml version="1.0" encoding="utf-8"?>
+<p:tagLst xmlns:a="http://schemas.openxmlformats.org/drawingml/2006/main" xmlns:r="http://schemas.openxmlformats.org/officeDocument/2006/relationships" xmlns:p="http://schemas.openxmlformats.org/presentationml/2006/main">
+  <p:tag name="_INSTRUCTOR VIEW19C14C36-AC8E-43BC-9DB6-C2AAF774C7DC|PANE__TAG" val="_"/>
+</p:tagLst>
+</file>
+
 <file path=ppt/tags/tag4.xml><?xml version="1.0" encoding="utf-8"?>
 <p:tagLst xmlns:a="http://schemas.openxmlformats.org/drawingml/2006/main" xmlns:r="http://schemas.openxmlformats.org/officeDocument/2006/relationships" xmlns:p="http://schemas.openxmlformats.org/presentationml/2006/main">
   <p:tag name="_INSTRUCTOR VIEW19C14C36-AC8E-43BC-9DB6-C2AAF774C7DC|PANE__TAG" val="_"/>

--- a/slides/00-DailyAnnouncements.pptx
+++ b/slides/00-DailyAnnouncements.pptx
@@ -5,7 +5,7 @@
     <p:sldMasterId id="2147484006" r:id="rId1"/>
   </p:sldMasterIdLst>
   <p:notesMasterIdLst>
-    <p:notesMasterId r:id="rId19"/>
+    <p:notesMasterId r:id="rId20"/>
   </p:notesMasterIdLst>
   <p:sldIdLst>
     <p:sldId id="256" r:id="rId2"/>
@@ -24,7 +24,8 @@
     <p:sldId id="527" r:id="rId15"/>
     <p:sldId id="528" r:id="rId16"/>
     <p:sldId id="529" r:id="rId17"/>
-    <p:sldId id="515" r:id="rId18"/>
+    <p:sldId id="530" r:id="rId18"/>
+    <p:sldId id="515" r:id="rId19"/>
   </p:sldIdLst>
   <p:sldSz cx="12192000" cy="6858000"/>
   <p:notesSz cx="6858000" cy="9144000"/>
@@ -213,7 +214,7 @@
           <a:p>
             <a:fld id="{C5B45307-6ED4-B142-BD64-10F739779302}" type="datetimeFigureOut">
               <a:rPr lang="en-US" smtClean="0"/>
-              <a:t>8/5/26</a:t>
+              <a:t>8/6/26</a:t>
             </a:fld>
             <a:endParaRPr lang="en-US"/>
           </a:p>
@@ -621,7 +622,7 @@
           <a:noFill/>
           <a:extLst>
             <a:ext uri="{909E8E84-426E-40dd-AFC4-6F175D3DCCD1}">
-              <a14:hiddenFill xmlns:a14="http://schemas.microsoft.com/office/drawing/2010/main" xmlns="">
+              <a14:hiddenFill xmlns="" xmlns:a14="http://schemas.microsoft.com/office/drawing/2010/main">
                 <a:solidFill>
                   <a:srgbClr val="FFFFFF"/>
                 </a:solidFill>
@@ -680,7 +681,7 @@
             </a:ln>
             <a:extLst>
               <a:ext uri="{91240B29-F687-4f45-9708-019B960494DF}">
-                <a14:hiddenLine xmlns:a14="http://schemas.microsoft.com/office/drawing/2010/main" xmlns="" w="9525">
+                <a14:hiddenLine xmlns="" xmlns:a14="http://schemas.microsoft.com/office/drawing/2010/main" w="9525">
                   <a:solidFill>
                     <a:srgbClr val="000000"/>
                   </a:solidFill>
@@ -770,7 +771,7 @@
             </a:ln>
             <a:extLst>
               <a:ext uri="{91240B29-F687-4f45-9708-019B960494DF}">
-                <a14:hiddenLine xmlns:a14="http://schemas.microsoft.com/office/drawing/2010/main" xmlns="" w="9525">
+                <a14:hiddenLine xmlns="" xmlns:a14="http://schemas.microsoft.com/office/drawing/2010/main" w="9525">
                   <a:solidFill>
                     <a:srgbClr val="000000"/>
                   </a:solidFill>
@@ -860,7 +861,7 @@
             </a:ln>
             <a:extLst>
               <a:ext uri="{91240B29-F687-4f45-9708-019B960494DF}">
-                <a14:hiddenLine xmlns:a14="http://schemas.microsoft.com/office/drawing/2010/main" xmlns="" w="9525">
+                <a14:hiddenLine xmlns="" xmlns:a14="http://schemas.microsoft.com/office/drawing/2010/main" w="9525">
                   <a:solidFill>
                     <a:srgbClr val="000000"/>
                   </a:solidFill>
@@ -894,7 +895,7 @@
             </a:ln>
             <a:extLst>
               <a:ext uri="{91240B29-F687-4f45-9708-019B960494DF}">
-                <a14:hiddenLine xmlns:a14="http://schemas.microsoft.com/office/drawing/2010/main" xmlns="" w="9525">
+                <a14:hiddenLine xmlns="" xmlns:a14="http://schemas.microsoft.com/office/drawing/2010/main" w="9525">
                   <a:solidFill>
                     <a:srgbClr val="000000"/>
                   </a:solidFill>
@@ -984,7 +985,7 @@
             </a:ln>
             <a:extLst>
               <a:ext uri="{91240B29-F687-4f45-9708-019B960494DF}">
-                <a14:hiddenLine xmlns:a14="http://schemas.microsoft.com/office/drawing/2010/main" xmlns="" w="9525">
+                <a14:hiddenLine xmlns="" xmlns:a14="http://schemas.microsoft.com/office/drawing/2010/main" w="9525">
                   <a:solidFill>
                     <a:srgbClr val="000000"/>
                   </a:solidFill>
@@ -1046,7 +1047,7 @@
             </a:ln>
             <a:extLst>
               <a:ext uri="{91240B29-F687-4f45-9708-019B960494DF}">
-                <a14:hiddenLine xmlns:a14="http://schemas.microsoft.com/office/drawing/2010/main" xmlns="" w="9525">
+                <a14:hiddenLine xmlns="" xmlns:a14="http://schemas.microsoft.com/office/drawing/2010/main" w="9525">
                   <a:solidFill>
                     <a:srgbClr val="000000"/>
                   </a:solidFill>
@@ -1108,7 +1109,7 @@
             </a:ln>
             <a:extLst>
               <a:ext uri="{91240B29-F687-4f45-9708-019B960494DF}">
-                <a14:hiddenLine xmlns:a14="http://schemas.microsoft.com/office/drawing/2010/main" xmlns="" w="9525">
+                <a14:hiddenLine xmlns="" xmlns:a14="http://schemas.microsoft.com/office/drawing/2010/main" w="9525">
                   <a:solidFill>
                     <a:srgbClr val="000000"/>
                   </a:solidFill>
@@ -1198,7 +1199,7 @@
             </a:ln>
             <a:extLst>
               <a:ext uri="{91240B29-F687-4f45-9708-019B960494DF}">
-                <a14:hiddenLine xmlns:a14="http://schemas.microsoft.com/office/drawing/2010/main" xmlns="" w="9525">
+                <a14:hiddenLine xmlns="" xmlns:a14="http://schemas.microsoft.com/office/drawing/2010/main" w="9525">
                   <a:solidFill>
                     <a:srgbClr val="000000"/>
                   </a:solidFill>
@@ -1260,7 +1261,7 @@
             </a:ln>
             <a:extLst>
               <a:ext uri="{91240B29-F687-4f45-9708-019B960494DF}">
-                <a14:hiddenLine xmlns:a14="http://schemas.microsoft.com/office/drawing/2010/main" xmlns="" w="9525">
+                <a14:hiddenLine xmlns="" xmlns:a14="http://schemas.microsoft.com/office/drawing/2010/main" w="9525">
                   <a:solidFill>
                     <a:srgbClr val="000000"/>
                   </a:solidFill>
@@ -1322,7 +1323,7 @@
             </a:ln>
             <a:extLst>
               <a:ext uri="{91240B29-F687-4f45-9708-019B960494DF}">
-                <a14:hiddenLine xmlns:a14="http://schemas.microsoft.com/office/drawing/2010/main" xmlns="" w="9525">
+                <a14:hiddenLine xmlns="" xmlns:a14="http://schemas.microsoft.com/office/drawing/2010/main" w="9525">
                   <a:solidFill>
                     <a:srgbClr val="000000"/>
                   </a:solidFill>
@@ -1412,7 +1413,7 @@
             </a:ln>
             <a:extLst>
               <a:ext uri="{91240B29-F687-4f45-9708-019B960494DF}">
-                <a14:hiddenLine xmlns:a14="http://schemas.microsoft.com/office/drawing/2010/main" xmlns="" w="9525">
+                <a14:hiddenLine xmlns="" xmlns:a14="http://schemas.microsoft.com/office/drawing/2010/main" w="9525">
                   <a:solidFill>
                     <a:srgbClr val="000000"/>
                   </a:solidFill>
@@ -1502,7 +1503,7 @@
             </a:ln>
             <a:extLst>
               <a:ext uri="{91240B29-F687-4f45-9708-019B960494DF}">
-                <a14:hiddenLine xmlns:a14="http://schemas.microsoft.com/office/drawing/2010/main" xmlns="" w="9525">
+                <a14:hiddenLine xmlns="" xmlns:a14="http://schemas.microsoft.com/office/drawing/2010/main" w="9525">
                   <a:solidFill>
                     <a:srgbClr val="000000"/>
                   </a:solidFill>
@@ -1564,7 +1565,7 @@
             </a:ln>
             <a:extLst>
               <a:ext uri="{91240B29-F687-4f45-9708-019B960494DF}">
-                <a14:hiddenLine xmlns:a14="http://schemas.microsoft.com/office/drawing/2010/main" xmlns="" w="9525">
+                <a14:hiddenLine xmlns="" xmlns:a14="http://schemas.microsoft.com/office/drawing/2010/main" w="9525">
                   <a:solidFill>
                     <a:srgbClr val="000000"/>
                   </a:solidFill>
@@ -1674,7 +1675,7 @@
             </a:ln>
             <a:extLst>
               <a:ext uri="{91240B29-F687-4f45-9708-019B960494DF}">
-                <a14:hiddenLine xmlns:a14="http://schemas.microsoft.com/office/drawing/2010/main" xmlns="" w="9525">
+                <a14:hiddenLine xmlns="" xmlns:a14="http://schemas.microsoft.com/office/drawing/2010/main" w="9525">
                   <a:solidFill>
                     <a:srgbClr val="000000"/>
                   </a:solidFill>
@@ -1736,7 +1737,7 @@
             </a:ln>
             <a:extLst>
               <a:ext uri="{91240B29-F687-4f45-9708-019B960494DF}">
-                <a14:hiddenLine xmlns:a14="http://schemas.microsoft.com/office/drawing/2010/main" xmlns="" w="9525">
+                <a14:hiddenLine xmlns="" xmlns:a14="http://schemas.microsoft.com/office/drawing/2010/main" w="9525">
                   <a:solidFill>
                     <a:srgbClr val="000000"/>
                   </a:solidFill>
@@ -1826,7 +1827,7 @@
             </a:ln>
             <a:extLst>
               <a:ext uri="{91240B29-F687-4f45-9708-019B960494DF}">
-                <a14:hiddenLine xmlns:a14="http://schemas.microsoft.com/office/drawing/2010/main" xmlns="" w="9525">
+                <a14:hiddenLine xmlns="" xmlns:a14="http://schemas.microsoft.com/office/drawing/2010/main" w="9525">
                   <a:solidFill>
                     <a:srgbClr val="000000"/>
                   </a:solidFill>
@@ -1916,7 +1917,7 @@
             </a:ln>
             <a:extLst>
               <a:ext uri="{91240B29-F687-4f45-9708-019B960494DF}">
-                <a14:hiddenLine xmlns:a14="http://schemas.microsoft.com/office/drawing/2010/main" xmlns="" w="9525">
+                <a14:hiddenLine xmlns="" xmlns:a14="http://schemas.microsoft.com/office/drawing/2010/main" w="9525">
                   <a:solidFill>
                     <a:srgbClr val="000000"/>
                   </a:solidFill>
@@ -1978,7 +1979,7 @@
             </a:ln>
             <a:extLst>
               <a:ext uri="{91240B29-F687-4f45-9708-019B960494DF}">
-                <a14:hiddenLine xmlns:a14="http://schemas.microsoft.com/office/drawing/2010/main" xmlns="" w="9525">
+                <a14:hiddenLine xmlns="" xmlns:a14="http://schemas.microsoft.com/office/drawing/2010/main" w="9525">
                   <a:solidFill>
                     <a:srgbClr val="000000"/>
                   </a:solidFill>
@@ -2068,7 +2069,7 @@
             </a:ln>
             <a:extLst>
               <a:ext uri="{91240B29-F687-4f45-9708-019B960494DF}">
-                <a14:hiddenLine xmlns:a14="http://schemas.microsoft.com/office/drawing/2010/main" xmlns="" w="9525">
+                <a14:hiddenLine xmlns="" xmlns:a14="http://schemas.microsoft.com/office/drawing/2010/main" w="9525">
                   <a:solidFill>
                     <a:srgbClr val="000000"/>
                   </a:solidFill>
@@ -2158,7 +2159,7 @@
             </a:ln>
             <a:extLst>
               <a:ext uri="{91240B29-F687-4f45-9708-019B960494DF}">
-                <a14:hiddenLine xmlns:a14="http://schemas.microsoft.com/office/drawing/2010/main" xmlns="" w="9525">
+                <a14:hiddenLine xmlns="" xmlns:a14="http://schemas.microsoft.com/office/drawing/2010/main" w="9525">
                   <a:solidFill>
                     <a:srgbClr val="000000"/>
                   </a:solidFill>
@@ -2214,7 +2215,7 @@
             </a:ln>
             <a:extLst>
               <a:ext uri="{91240B29-F687-4f45-9708-019B960494DF}">
-                <a14:hiddenLine xmlns:a14="http://schemas.microsoft.com/office/drawing/2010/main" xmlns="" w="9525">
+                <a14:hiddenLine xmlns="" xmlns:a14="http://schemas.microsoft.com/office/drawing/2010/main" w="9525">
                   <a:solidFill>
                     <a:srgbClr val="000000"/>
                   </a:solidFill>
@@ -2304,7 +2305,7 @@
             </a:ln>
             <a:extLst>
               <a:ext uri="{91240B29-F687-4f45-9708-019B960494DF}">
-                <a14:hiddenLine xmlns:a14="http://schemas.microsoft.com/office/drawing/2010/main" xmlns="" w="9525">
+                <a14:hiddenLine xmlns="" xmlns:a14="http://schemas.microsoft.com/office/drawing/2010/main" w="9525">
                   <a:solidFill>
                     <a:srgbClr val="000000"/>
                   </a:solidFill>
@@ -2360,7 +2361,7 @@
             </a:ln>
             <a:extLst>
               <a:ext uri="{91240B29-F687-4f45-9708-019B960494DF}">
-                <a14:hiddenLine xmlns:a14="http://schemas.microsoft.com/office/drawing/2010/main" xmlns="" w="9525">
+                <a14:hiddenLine xmlns="" xmlns:a14="http://schemas.microsoft.com/office/drawing/2010/main" w="9525">
                   <a:solidFill>
                     <a:srgbClr val="000000"/>
                   </a:solidFill>
@@ -2450,7 +2451,7 @@
             </a:ln>
             <a:extLst>
               <a:ext uri="{91240B29-F687-4f45-9708-019B960494DF}">
-                <a14:hiddenLine xmlns:a14="http://schemas.microsoft.com/office/drawing/2010/main" xmlns="" w="9525">
+                <a14:hiddenLine xmlns="" xmlns:a14="http://schemas.microsoft.com/office/drawing/2010/main" w="9525">
                   <a:solidFill>
                     <a:srgbClr val="000000"/>
                   </a:solidFill>
@@ -2518,7 +2519,7 @@
             </a:ln>
             <a:extLst>
               <a:ext uri="{91240B29-F687-4f45-9708-019B960494DF}">
-                <a14:hiddenLine xmlns:a14="http://schemas.microsoft.com/office/drawing/2010/main" xmlns="" w="9525">
+                <a14:hiddenLine xmlns="" xmlns:a14="http://schemas.microsoft.com/office/drawing/2010/main" w="9525">
                   <a:solidFill>
                     <a:srgbClr val="000000"/>
                   </a:solidFill>
@@ -2608,7 +2609,7 @@
             </a:ln>
             <a:extLst>
               <a:ext uri="{91240B29-F687-4f45-9708-019B960494DF}">
-                <a14:hiddenLine xmlns:a14="http://schemas.microsoft.com/office/drawing/2010/main" xmlns="" w="9525">
+                <a14:hiddenLine xmlns="" xmlns:a14="http://schemas.microsoft.com/office/drawing/2010/main" w="9525">
                   <a:solidFill>
                     <a:srgbClr val="000000"/>
                   </a:solidFill>
@@ -2676,7 +2677,7 @@
             </a:ln>
             <a:extLst>
               <a:ext uri="{91240B29-F687-4f45-9708-019B960494DF}">
-                <a14:hiddenLine xmlns:a14="http://schemas.microsoft.com/office/drawing/2010/main" xmlns="" w="9525">
+                <a14:hiddenLine xmlns="" xmlns:a14="http://schemas.microsoft.com/office/drawing/2010/main" w="9525">
                   <a:solidFill>
                     <a:srgbClr val="000000"/>
                   </a:solidFill>
@@ -2766,7 +2767,7 @@
             </a:ln>
             <a:extLst>
               <a:ext uri="{91240B29-F687-4f45-9708-019B960494DF}">
-                <a14:hiddenLine xmlns:a14="http://schemas.microsoft.com/office/drawing/2010/main" xmlns="" w="9525">
+                <a14:hiddenLine xmlns="" xmlns:a14="http://schemas.microsoft.com/office/drawing/2010/main" w="9525">
                   <a:solidFill>
                     <a:srgbClr val="000000"/>
                   </a:solidFill>
@@ -2800,7 +2801,7 @@
             </a:ln>
             <a:extLst>
               <a:ext uri="{91240B29-F687-4f45-9708-019B960494DF}">
-                <a14:hiddenLine xmlns:a14="http://schemas.microsoft.com/office/drawing/2010/main" xmlns="" w="9525">
+                <a14:hiddenLine xmlns="" xmlns:a14="http://schemas.microsoft.com/office/drawing/2010/main" w="9525">
                   <a:solidFill>
                     <a:srgbClr val="000000"/>
                   </a:solidFill>
@@ -2890,7 +2891,7 @@
             </a:ln>
             <a:extLst>
               <a:ext uri="{91240B29-F687-4f45-9708-019B960494DF}">
-                <a14:hiddenLine xmlns:a14="http://schemas.microsoft.com/office/drawing/2010/main" xmlns="" w="9525">
+                <a14:hiddenLine xmlns="" xmlns:a14="http://schemas.microsoft.com/office/drawing/2010/main" w="9525">
                   <a:solidFill>
                     <a:srgbClr val="000000"/>
                   </a:solidFill>
@@ -2952,7 +2953,7 @@
             </a:ln>
             <a:extLst>
               <a:ext uri="{91240B29-F687-4f45-9708-019B960494DF}">
-                <a14:hiddenLine xmlns:a14="http://schemas.microsoft.com/office/drawing/2010/main" xmlns="" w="9525">
+                <a14:hiddenLine xmlns="" xmlns:a14="http://schemas.microsoft.com/office/drawing/2010/main" w="9525">
                   <a:solidFill>
                     <a:srgbClr val="000000"/>
                   </a:solidFill>
@@ -3014,7 +3015,7 @@
             </a:ln>
             <a:extLst>
               <a:ext uri="{91240B29-F687-4f45-9708-019B960494DF}">
-                <a14:hiddenLine xmlns:a14="http://schemas.microsoft.com/office/drawing/2010/main" xmlns="" w="9525">
+                <a14:hiddenLine xmlns="" xmlns:a14="http://schemas.microsoft.com/office/drawing/2010/main" w="9525">
                   <a:solidFill>
                     <a:srgbClr val="000000"/>
                   </a:solidFill>
@@ -3104,7 +3105,7 @@
             </a:ln>
             <a:extLst>
               <a:ext uri="{91240B29-F687-4f45-9708-019B960494DF}">
-                <a14:hiddenLine xmlns:a14="http://schemas.microsoft.com/office/drawing/2010/main" xmlns="" w="9525">
+                <a14:hiddenLine xmlns="" xmlns:a14="http://schemas.microsoft.com/office/drawing/2010/main" w="9525">
                   <a:solidFill>
                     <a:srgbClr val="000000"/>
                   </a:solidFill>
@@ -3172,7 +3173,7 @@
             </a:ln>
             <a:extLst>
               <a:ext uri="{91240B29-F687-4f45-9708-019B960494DF}">
-                <a14:hiddenLine xmlns:a14="http://schemas.microsoft.com/office/drawing/2010/main" xmlns="" w="9525">
+                <a14:hiddenLine xmlns="" xmlns:a14="http://schemas.microsoft.com/office/drawing/2010/main" w="9525">
                   <a:solidFill>
                     <a:srgbClr val="000000"/>
                   </a:solidFill>
@@ -3234,7 +3235,7 @@
             </a:ln>
             <a:extLst>
               <a:ext uri="{91240B29-F687-4f45-9708-019B960494DF}">
-                <a14:hiddenLine xmlns:a14="http://schemas.microsoft.com/office/drawing/2010/main" xmlns="" w="9525">
+                <a14:hiddenLine xmlns="" xmlns:a14="http://schemas.microsoft.com/office/drawing/2010/main" w="9525">
                   <a:solidFill>
                     <a:srgbClr val="000000"/>
                   </a:solidFill>
@@ -3324,7 +3325,7 @@
             </a:ln>
             <a:extLst>
               <a:ext uri="{91240B29-F687-4f45-9708-019B960494DF}">
-                <a14:hiddenLine xmlns:a14="http://schemas.microsoft.com/office/drawing/2010/main" xmlns="" w="9525">
+                <a14:hiddenLine xmlns="" xmlns:a14="http://schemas.microsoft.com/office/drawing/2010/main" w="9525">
                   <a:solidFill>
                     <a:srgbClr val="000000"/>
                   </a:solidFill>
@@ -3386,7 +3387,7 @@
             </a:ln>
             <a:extLst>
               <a:ext uri="{91240B29-F687-4f45-9708-019B960494DF}">
-                <a14:hiddenLine xmlns:a14="http://schemas.microsoft.com/office/drawing/2010/main" xmlns="" w="9525">
+                <a14:hiddenLine xmlns="" xmlns:a14="http://schemas.microsoft.com/office/drawing/2010/main" w="9525">
                   <a:solidFill>
                     <a:srgbClr val="000000"/>
                   </a:solidFill>
@@ -3476,7 +3477,7 @@
             </a:ln>
             <a:extLst>
               <a:ext uri="{91240B29-F687-4f45-9708-019B960494DF}">
-                <a14:hiddenLine xmlns:a14="http://schemas.microsoft.com/office/drawing/2010/main" xmlns="" w="9525">
+                <a14:hiddenLine xmlns="" xmlns:a14="http://schemas.microsoft.com/office/drawing/2010/main" w="9525">
                   <a:solidFill>
                     <a:srgbClr val="000000"/>
                   </a:solidFill>
@@ -3538,7 +3539,7 @@
             </a:ln>
             <a:extLst>
               <a:ext uri="{91240B29-F687-4f45-9708-019B960494DF}">
-                <a14:hiddenLine xmlns:a14="http://schemas.microsoft.com/office/drawing/2010/main" xmlns="" w="9525">
+                <a14:hiddenLine xmlns="" xmlns:a14="http://schemas.microsoft.com/office/drawing/2010/main" w="9525">
                   <a:solidFill>
                     <a:srgbClr val="000000"/>
                   </a:solidFill>
@@ -3628,7 +3629,7 @@
             </a:ln>
             <a:extLst>
               <a:ext uri="{91240B29-F687-4f45-9708-019B960494DF}">
-                <a14:hiddenLine xmlns:a14="http://schemas.microsoft.com/office/drawing/2010/main" xmlns="" w="9525">
+                <a14:hiddenLine xmlns="" xmlns:a14="http://schemas.microsoft.com/office/drawing/2010/main" w="9525">
                   <a:solidFill>
                     <a:srgbClr val="000000"/>
                   </a:solidFill>
@@ -3662,7 +3663,7 @@
             </a:ln>
             <a:extLst>
               <a:ext uri="{91240B29-F687-4f45-9708-019B960494DF}">
-                <a14:hiddenLine xmlns:a14="http://schemas.microsoft.com/office/drawing/2010/main" xmlns="" w="9525">
+                <a14:hiddenLine xmlns="" xmlns:a14="http://schemas.microsoft.com/office/drawing/2010/main" w="9525">
                   <a:solidFill>
                     <a:srgbClr val="000000"/>
                   </a:solidFill>
@@ -3727,7 +3728,7 @@
             </a:ln>
             <a:extLst>
               <a:ext uri="{91240B29-F687-4f45-9708-019B960494DF}">
-                <a14:hiddenLine xmlns:a14="http://schemas.microsoft.com/office/drawing/2010/main" xmlns="" w="9525">
+                <a14:hiddenLine xmlns="" xmlns:a14="http://schemas.microsoft.com/office/drawing/2010/main" w="9525">
                   <a:solidFill>
                     <a:srgbClr val="000000"/>
                   </a:solidFill>
@@ -3817,7 +3818,7 @@
             </a:ln>
             <a:extLst>
               <a:ext uri="{91240B29-F687-4f45-9708-019B960494DF}">
-                <a14:hiddenLine xmlns:a14="http://schemas.microsoft.com/office/drawing/2010/main" xmlns="" w="9525">
+                <a14:hiddenLine xmlns="" xmlns:a14="http://schemas.microsoft.com/office/drawing/2010/main" w="9525">
                   <a:solidFill>
                     <a:srgbClr val="000000"/>
                   </a:solidFill>
@@ -3879,7 +3880,7 @@
             </a:ln>
             <a:extLst>
               <a:ext uri="{91240B29-F687-4f45-9708-019B960494DF}">
-                <a14:hiddenLine xmlns:a14="http://schemas.microsoft.com/office/drawing/2010/main" xmlns="" w="9525">
+                <a14:hiddenLine xmlns="" xmlns:a14="http://schemas.microsoft.com/office/drawing/2010/main" w="9525">
                   <a:solidFill>
                     <a:srgbClr val="000000"/>
                   </a:solidFill>
@@ -3969,7 +3970,7 @@
             </a:ln>
             <a:extLst>
               <a:ext uri="{91240B29-F687-4f45-9708-019B960494DF}">
-                <a14:hiddenLine xmlns:a14="http://schemas.microsoft.com/office/drawing/2010/main" xmlns="" w="9525">
+                <a14:hiddenLine xmlns="" xmlns:a14="http://schemas.microsoft.com/office/drawing/2010/main" w="9525">
                   <a:solidFill>
                     <a:srgbClr val="000000"/>
                   </a:solidFill>
@@ -4059,7 +4060,7 @@
             </a:ln>
             <a:extLst>
               <a:ext uri="{91240B29-F687-4f45-9708-019B960494DF}">
-                <a14:hiddenLine xmlns:a14="http://schemas.microsoft.com/office/drawing/2010/main" xmlns="" w="9525">
+                <a14:hiddenLine xmlns="" xmlns:a14="http://schemas.microsoft.com/office/drawing/2010/main" w="9525">
                   <a:solidFill>
                     <a:srgbClr val="000000"/>
                   </a:solidFill>
@@ -4124,7 +4125,7 @@
             </a:ln>
             <a:extLst>
               <a:ext uri="{91240B29-F687-4f45-9708-019B960494DF}">
-                <a14:hiddenLine xmlns:a14="http://schemas.microsoft.com/office/drawing/2010/main" xmlns="" w="9525">
+                <a14:hiddenLine xmlns="" xmlns:a14="http://schemas.microsoft.com/office/drawing/2010/main" w="9525">
                   <a:solidFill>
                     <a:srgbClr val="000000"/>
                   </a:solidFill>
@@ -4186,7 +4187,7 @@
             </a:ln>
             <a:extLst>
               <a:ext uri="{91240B29-F687-4f45-9708-019B960494DF}">
-                <a14:hiddenLine xmlns:a14="http://schemas.microsoft.com/office/drawing/2010/main" xmlns="" w="9525">
+                <a14:hiddenLine xmlns="" xmlns:a14="http://schemas.microsoft.com/office/drawing/2010/main" w="9525">
                   <a:solidFill>
                     <a:srgbClr val="000000"/>
                   </a:solidFill>
@@ -4276,7 +4277,7 @@
             </a:ln>
             <a:extLst>
               <a:ext uri="{91240B29-F687-4f45-9708-019B960494DF}">
-                <a14:hiddenLine xmlns:a14="http://schemas.microsoft.com/office/drawing/2010/main" xmlns="" w="9525">
+                <a14:hiddenLine xmlns="" xmlns:a14="http://schemas.microsoft.com/office/drawing/2010/main" w="9525">
                   <a:solidFill>
                     <a:srgbClr val="000000"/>
                   </a:solidFill>
@@ -4366,7 +4367,7 @@
             </a:ln>
             <a:extLst>
               <a:ext uri="{91240B29-F687-4f45-9708-019B960494DF}">
-                <a14:hiddenLine xmlns:a14="http://schemas.microsoft.com/office/drawing/2010/main" xmlns="" w="9525">
+                <a14:hiddenLine xmlns="" xmlns:a14="http://schemas.microsoft.com/office/drawing/2010/main" w="9525">
                   <a:solidFill>
                     <a:srgbClr val="000000"/>
                   </a:solidFill>
@@ -4428,7 +4429,7 @@
             </a:ln>
             <a:extLst>
               <a:ext uri="{91240B29-F687-4f45-9708-019B960494DF}">
-                <a14:hiddenLine xmlns:a14="http://schemas.microsoft.com/office/drawing/2010/main" xmlns="" w="9525">
+                <a14:hiddenLine xmlns="" xmlns:a14="http://schemas.microsoft.com/office/drawing/2010/main" w="9525">
                   <a:solidFill>
                     <a:srgbClr val="000000"/>
                   </a:solidFill>
@@ -4548,7 +4549,7 @@
             </a:ln>
             <a:extLst>
               <a:ext uri="{91240B29-F687-4f45-9708-019B960494DF}">
-                <a14:hiddenLine xmlns:a14="http://schemas.microsoft.com/office/drawing/2010/main" xmlns="" w="9525">
+                <a14:hiddenLine xmlns="" xmlns:a14="http://schemas.microsoft.com/office/drawing/2010/main" w="9525">
                   <a:solidFill>
                     <a:srgbClr val="000000"/>
                   </a:solidFill>
@@ -4616,7 +4617,7 @@
             </a:ln>
             <a:extLst>
               <a:ext uri="{91240B29-F687-4f45-9708-019B960494DF}">
-                <a14:hiddenLine xmlns:a14="http://schemas.microsoft.com/office/drawing/2010/main" xmlns="" w="9525">
+                <a14:hiddenLine xmlns="" xmlns:a14="http://schemas.microsoft.com/office/drawing/2010/main" w="9525">
                   <a:solidFill>
                     <a:srgbClr val="000000"/>
                   </a:solidFill>
@@ -4706,7 +4707,7 @@
             </a:ln>
             <a:extLst>
               <a:ext uri="{91240B29-F687-4f45-9708-019B960494DF}">
-                <a14:hiddenLine xmlns:a14="http://schemas.microsoft.com/office/drawing/2010/main" xmlns="" w="9525">
+                <a14:hiddenLine xmlns="" xmlns:a14="http://schemas.microsoft.com/office/drawing/2010/main" w="9525">
                   <a:solidFill>
                     <a:srgbClr val="000000"/>
                   </a:solidFill>
@@ -4846,7 +4847,7 @@
           <a:p>
             <a:fld id="{4313F670-7F9A-774D-B73D-573401E44297}" type="datetime1">
               <a:rPr lang="en-US" smtClean="0"/>
-              <a:t>8/5/26</a:t>
+              <a:t>8/6/26</a:t>
             </a:fld>
             <a:endParaRPr lang="en-US"/>
           </a:p>
@@ -5113,7 +5114,7 @@
           <a:p>
             <a:fld id="{446F9669-A8A7-2D40-9D01-B35FC337AA30}" type="datetime1">
               <a:rPr lang="en-US" smtClean="0"/>
-              <a:t>8/5/26</a:t>
+              <a:t>8/6/26</a:t>
             </a:fld>
             <a:endParaRPr lang="en-US"/>
           </a:p>
@@ -5309,7 +5310,7 @@
           <a:p>
             <a:fld id="{FA76CF18-F41B-6B48-B3E5-599E9795C2C3}" type="datetime1">
               <a:rPr lang="en-US" smtClean="0"/>
-              <a:t>8/5/26</a:t>
+              <a:t>8/6/26</a:t>
             </a:fld>
             <a:endParaRPr lang="en-US"/>
           </a:p>
@@ -5572,7 +5573,7 @@
           <a:p>
             <a:fld id="{B9654854-6457-164F-A077-6B3035079B82}" type="datetime1">
               <a:rPr lang="en-US" smtClean="0"/>
-              <a:t>8/5/26</a:t>
+              <a:t>8/6/26</a:t>
             </a:fld>
             <a:endParaRPr lang="en-US"/>
           </a:p>
@@ -6006,7 +6007,7 @@
           <a:p>
             <a:fld id="{CE3DBFD7-E611-8C40-AC73-0C29FF63F0CD}" type="datetime1">
               <a:rPr lang="en-US" smtClean="0"/>
-              <a:t>8/5/26</a:t>
+              <a:t>8/6/26</a:t>
             </a:fld>
             <a:endParaRPr lang="en-US"/>
           </a:p>
@@ -6552,7 +6553,7 @@
           <a:p>
             <a:fld id="{C8B63B06-0493-2840-9F37-30C9412BBF17}" type="datetime1">
               <a:rPr lang="en-US" smtClean="0"/>
-              <a:t>8/5/26</a:t>
+              <a:t>8/6/26</a:t>
             </a:fld>
             <a:endParaRPr lang="en-US"/>
           </a:p>
@@ -7272,7 +7273,7 @@
           <a:p>
             <a:fld id="{72B5C0FA-8C46-E84D-B6D7-B673F2CA0A0E}" type="datetime1">
               <a:rPr lang="en-US" smtClean="0"/>
-              <a:t>8/5/26</a:t>
+              <a:t>8/6/26</a:t>
             </a:fld>
             <a:endParaRPr lang="en-US"/>
           </a:p>
@@ -7442,7 +7443,7 @@
           <a:p>
             <a:fld id="{60B9CDE1-97B4-BF46-B69C-B86855B18820}" type="datetime1">
               <a:rPr lang="en-US" smtClean="0"/>
-              <a:t>8/5/26</a:t>
+              <a:t>8/6/26</a:t>
             </a:fld>
             <a:endParaRPr lang="en-US"/>
           </a:p>
@@ -7622,7 +7623,7 @@
           <a:p>
             <a:fld id="{BE51D3A4-F9E5-FD49-AA87-B395F50451DC}" type="datetime1">
               <a:rPr lang="en-US" smtClean="0"/>
-              <a:t>8/5/26</a:t>
+              <a:t>8/6/26</a:t>
             </a:fld>
             <a:endParaRPr lang="en-US"/>
           </a:p>
@@ -7792,7 +7793,7 @@
           <a:p>
             <a:fld id="{880DFB37-B0AE-9449-85EC-14F9C83B6084}" type="datetime1">
               <a:rPr lang="en-US" smtClean="0"/>
-              <a:t>8/5/26</a:t>
+              <a:t>8/6/26</a:t>
             </a:fld>
             <a:endParaRPr lang="en-US"/>
           </a:p>
@@ -8042,7 +8043,7 @@
           <a:p>
             <a:fld id="{C939124A-616E-6944-A21A-1839F5DBE7BB}" type="datetime1">
               <a:rPr lang="en-US" smtClean="0"/>
-              <a:t>8/5/26</a:t>
+              <a:t>8/6/26</a:t>
             </a:fld>
             <a:endParaRPr lang="en-US"/>
           </a:p>
@@ -8274,7 +8275,7 @@
           <a:p>
             <a:fld id="{C6E9A026-D48C-FD43-8676-CD625DD5D84B}" type="datetime1">
               <a:rPr lang="en-US" smtClean="0"/>
-              <a:t>8/5/26</a:t>
+              <a:t>8/6/26</a:t>
             </a:fld>
             <a:endParaRPr lang="en-US"/>
           </a:p>
@@ -8660,7 +8661,7 @@
           <a:p>
             <a:fld id="{EA35111E-23A3-1440-99A3-C4C665908E3D}" type="datetime1">
               <a:rPr lang="en-US" smtClean="0"/>
-              <a:t>8/5/26</a:t>
+              <a:t>8/6/26</a:t>
             </a:fld>
             <a:endParaRPr lang="en-US"/>
           </a:p>
@@ -8783,7 +8784,7 @@
           <a:p>
             <a:fld id="{249983B9-88EF-D74B-BA6D-6A3BF17C2B38}" type="datetime1">
               <a:rPr lang="en-US" smtClean="0"/>
-              <a:t>8/5/26</a:t>
+              <a:t>8/6/26</a:t>
             </a:fld>
             <a:endParaRPr lang="en-US"/>
           </a:p>
@@ -8878,7 +8879,7 @@
           <a:p>
             <a:fld id="{E2A00AEF-B4EC-084A-8DB8-A225C7981CBB}" type="datetime1">
               <a:rPr lang="en-US" smtClean="0"/>
-              <a:t>8/5/26</a:t>
+              <a:t>8/6/26</a:t>
             </a:fld>
             <a:endParaRPr lang="en-US"/>
           </a:p>
@@ -9127,7 +9128,7 @@
           <a:p>
             <a:fld id="{97860299-21CD-A94A-A7B0-44E787F8D42C}" type="datetime1">
               <a:rPr lang="en-US" smtClean="0"/>
-              <a:t>8/5/26</a:t>
+              <a:t>8/6/26</a:t>
             </a:fld>
             <a:endParaRPr lang="en-US"/>
           </a:p>
@@ -9412,7 +9413,7 @@
           <a:p>
             <a:fld id="{3DFD19CF-4E62-D246-BA61-7B528271315F}" type="datetime1">
               <a:rPr lang="en-US" smtClean="0"/>
-              <a:t>8/5/26</a:t>
+              <a:t>8/6/26</a:t>
             </a:fld>
             <a:endParaRPr lang="en-US"/>
           </a:p>
@@ -9535,7 +9536,7 @@
           <a:noFill/>
           <a:extLst>
             <a:ext uri="{909E8E84-426E-40dd-AFC4-6F175D3DCCD1}">
-              <a14:hiddenFill xmlns:a14="http://schemas.microsoft.com/office/drawing/2010/main" xmlns="">
+              <a14:hiddenFill xmlns="" xmlns:a14="http://schemas.microsoft.com/office/drawing/2010/main">
                 <a:solidFill>
                   <a:srgbClr val="FFFFFF"/>
                 </a:solidFill>
@@ -9609,7 +9610,7 @@
               </a:ln>
               <a:extLst>
                 <a:ext uri="{91240B29-F687-4f45-9708-019B960494DF}">
-                  <a14:hiddenLine xmlns:a14="http://schemas.microsoft.com/office/drawing/2010/main" xmlns="" w="9525">
+                  <a14:hiddenLine xmlns="" xmlns:a14="http://schemas.microsoft.com/office/drawing/2010/main" w="9525">
                     <a:solidFill>
                       <a:srgbClr val="000000"/>
                     </a:solidFill>
@@ -9699,7 +9700,7 @@
               </a:ln>
               <a:extLst>
                 <a:ext uri="{91240B29-F687-4f45-9708-019B960494DF}">
-                  <a14:hiddenLine xmlns:a14="http://schemas.microsoft.com/office/drawing/2010/main" xmlns="" w="9525">
+                  <a14:hiddenLine xmlns="" xmlns:a14="http://schemas.microsoft.com/office/drawing/2010/main" w="9525">
                     <a:solidFill>
                       <a:srgbClr val="000000"/>
                     </a:solidFill>
@@ -9789,7 +9790,7 @@
               </a:ln>
               <a:extLst>
                 <a:ext uri="{91240B29-F687-4f45-9708-019B960494DF}">
-                  <a14:hiddenLine xmlns:a14="http://schemas.microsoft.com/office/drawing/2010/main" xmlns="" w="9525">
+                  <a14:hiddenLine xmlns="" xmlns:a14="http://schemas.microsoft.com/office/drawing/2010/main" w="9525">
                     <a:solidFill>
                       <a:srgbClr val="000000"/>
                     </a:solidFill>
@@ -9851,7 +9852,7 @@
               </a:ln>
               <a:extLst>
                 <a:ext uri="{91240B29-F687-4f45-9708-019B960494DF}">
-                  <a14:hiddenLine xmlns:a14="http://schemas.microsoft.com/office/drawing/2010/main" xmlns="" w="9525">
+                  <a14:hiddenLine xmlns="" xmlns:a14="http://schemas.microsoft.com/office/drawing/2010/main" w="9525">
                     <a:solidFill>
                       <a:srgbClr val="000000"/>
                     </a:solidFill>
@@ -9941,7 +9942,7 @@
               </a:ln>
               <a:extLst>
                 <a:ext uri="{91240B29-F687-4f45-9708-019B960494DF}">
-                  <a14:hiddenLine xmlns:a14="http://schemas.microsoft.com/office/drawing/2010/main" xmlns="" w="9525">
+                  <a14:hiddenLine xmlns="" xmlns:a14="http://schemas.microsoft.com/office/drawing/2010/main" w="9525">
                     <a:solidFill>
                       <a:srgbClr val="000000"/>
                     </a:solidFill>
@@ -10003,7 +10004,7 @@
               </a:ln>
               <a:extLst>
                 <a:ext uri="{91240B29-F687-4f45-9708-019B960494DF}">
-                  <a14:hiddenLine xmlns:a14="http://schemas.microsoft.com/office/drawing/2010/main" xmlns="" w="9525">
+                  <a14:hiddenLine xmlns="" xmlns:a14="http://schemas.microsoft.com/office/drawing/2010/main" w="9525">
                     <a:solidFill>
                       <a:srgbClr val="000000"/>
                     </a:solidFill>
@@ -10065,7 +10066,7 @@
               </a:ln>
               <a:extLst>
                 <a:ext uri="{91240B29-F687-4f45-9708-019B960494DF}">
-                  <a14:hiddenLine xmlns:a14="http://schemas.microsoft.com/office/drawing/2010/main" xmlns="" w="9525">
+                  <a14:hiddenLine xmlns="" xmlns:a14="http://schemas.microsoft.com/office/drawing/2010/main" w="9525">
                     <a:solidFill>
                       <a:srgbClr val="000000"/>
                     </a:solidFill>
@@ -10155,7 +10156,7 @@
               </a:ln>
               <a:extLst>
                 <a:ext uri="{91240B29-F687-4f45-9708-019B960494DF}">
-                  <a14:hiddenLine xmlns:a14="http://schemas.microsoft.com/office/drawing/2010/main" xmlns="" w="9525">
+                  <a14:hiddenLine xmlns="" xmlns:a14="http://schemas.microsoft.com/office/drawing/2010/main" w="9525">
                     <a:solidFill>
                       <a:srgbClr val="000000"/>
                     </a:solidFill>
@@ -10245,7 +10246,7 @@
               </a:ln>
               <a:extLst>
                 <a:ext uri="{91240B29-F687-4f45-9708-019B960494DF}">
-                  <a14:hiddenLine xmlns:a14="http://schemas.microsoft.com/office/drawing/2010/main" xmlns="" w="9525">
+                  <a14:hiddenLine xmlns="" xmlns:a14="http://schemas.microsoft.com/office/drawing/2010/main" w="9525">
                     <a:solidFill>
                       <a:srgbClr val="000000"/>
                     </a:solidFill>
@@ -10307,7 +10308,7 @@
               </a:ln>
               <a:extLst>
                 <a:ext uri="{91240B29-F687-4f45-9708-019B960494DF}">
-                  <a14:hiddenLine xmlns:a14="http://schemas.microsoft.com/office/drawing/2010/main" xmlns="" w="9525">
+                  <a14:hiddenLine xmlns="" xmlns:a14="http://schemas.microsoft.com/office/drawing/2010/main" w="9525">
                     <a:solidFill>
                       <a:srgbClr val="000000"/>
                     </a:solidFill>
@@ -10417,7 +10418,7 @@
               </a:ln>
               <a:extLst>
                 <a:ext uri="{91240B29-F687-4f45-9708-019B960494DF}">
-                  <a14:hiddenLine xmlns:a14="http://schemas.microsoft.com/office/drawing/2010/main" xmlns="" w="9525">
+                  <a14:hiddenLine xmlns="" xmlns:a14="http://schemas.microsoft.com/office/drawing/2010/main" w="9525">
                     <a:solidFill>
                       <a:srgbClr val="000000"/>
                     </a:solidFill>
@@ -10501,7 +10502,7 @@
               </a:ln>
               <a:extLst>
                 <a:ext uri="{91240B29-F687-4f45-9708-019B960494DF}">
-                  <a14:hiddenLine xmlns:a14="http://schemas.microsoft.com/office/drawing/2010/main" xmlns="" w="9525">
+                  <a14:hiddenLine xmlns="" xmlns:a14="http://schemas.microsoft.com/office/drawing/2010/main" w="9525">
                     <a:solidFill>
                       <a:srgbClr val="000000"/>
                     </a:solidFill>
@@ -10563,7 +10564,7 @@
               </a:ln>
               <a:extLst>
                 <a:ext uri="{91240B29-F687-4f45-9708-019B960494DF}">
-                  <a14:hiddenLine xmlns:a14="http://schemas.microsoft.com/office/drawing/2010/main" xmlns="" w="9525">
+                  <a14:hiddenLine xmlns="" xmlns:a14="http://schemas.microsoft.com/office/drawing/2010/main" w="9525">
                     <a:solidFill>
                       <a:srgbClr val="000000"/>
                     </a:solidFill>
@@ -10625,7 +10626,7 @@
               </a:ln>
               <a:extLst>
                 <a:ext uri="{91240B29-F687-4f45-9708-019B960494DF}">
-                  <a14:hiddenLine xmlns:a14="http://schemas.microsoft.com/office/drawing/2010/main" xmlns="" w="9525">
+                  <a14:hiddenLine xmlns="" xmlns:a14="http://schemas.microsoft.com/office/drawing/2010/main" w="9525">
                     <a:solidFill>
                       <a:srgbClr val="000000"/>
                     </a:solidFill>
@@ -10715,7 +10716,7 @@
               </a:ln>
               <a:extLst>
                 <a:ext uri="{91240B29-F687-4f45-9708-019B960494DF}">
-                  <a14:hiddenLine xmlns:a14="http://schemas.microsoft.com/office/drawing/2010/main" xmlns="" w="9525">
+                  <a14:hiddenLine xmlns="" xmlns:a14="http://schemas.microsoft.com/office/drawing/2010/main" w="9525">
                     <a:solidFill>
                       <a:srgbClr val="000000"/>
                     </a:solidFill>
@@ -10749,7 +10750,7 @@
               </a:ln>
               <a:extLst>
                 <a:ext uri="{91240B29-F687-4f45-9708-019B960494DF}">
-                  <a14:hiddenLine xmlns:a14="http://schemas.microsoft.com/office/drawing/2010/main" xmlns="" w="9525">
+                  <a14:hiddenLine xmlns="" xmlns:a14="http://schemas.microsoft.com/office/drawing/2010/main" w="9525">
                     <a:solidFill>
                       <a:srgbClr val="000000"/>
                     </a:solidFill>
@@ -10814,7 +10815,7 @@
               </a:ln>
               <a:extLst>
                 <a:ext uri="{91240B29-F687-4f45-9708-019B960494DF}">
-                  <a14:hiddenLine xmlns:a14="http://schemas.microsoft.com/office/drawing/2010/main" xmlns="" w="9525">
+                  <a14:hiddenLine xmlns="" xmlns:a14="http://schemas.microsoft.com/office/drawing/2010/main" w="9525">
                     <a:solidFill>
                       <a:srgbClr val="000000"/>
                     </a:solidFill>
@@ -10904,7 +10905,7 @@
               </a:ln>
               <a:extLst>
                 <a:ext uri="{91240B29-F687-4f45-9708-019B960494DF}">
-                  <a14:hiddenLine xmlns:a14="http://schemas.microsoft.com/office/drawing/2010/main" xmlns="" w="9525">
+                  <a14:hiddenLine xmlns="" xmlns:a14="http://schemas.microsoft.com/office/drawing/2010/main" w="9525">
                     <a:solidFill>
                       <a:srgbClr val="000000"/>
                     </a:solidFill>
@@ -10966,7 +10967,7 @@
               </a:ln>
               <a:extLst>
                 <a:ext uri="{91240B29-F687-4f45-9708-019B960494DF}">
-                  <a14:hiddenLine xmlns:a14="http://schemas.microsoft.com/office/drawing/2010/main" xmlns="" w="9525">
+                  <a14:hiddenLine xmlns="" xmlns:a14="http://schemas.microsoft.com/office/drawing/2010/main" w="9525">
                     <a:solidFill>
                       <a:srgbClr val="000000"/>
                     </a:solidFill>
@@ -11056,7 +11057,7 @@
               </a:ln>
               <a:extLst>
                 <a:ext uri="{91240B29-F687-4f45-9708-019B960494DF}">
-                  <a14:hiddenLine xmlns:a14="http://schemas.microsoft.com/office/drawing/2010/main" xmlns="" w="9525">
+                  <a14:hiddenLine xmlns="" xmlns:a14="http://schemas.microsoft.com/office/drawing/2010/main" w="9525">
                     <a:solidFill>
                       <a:srgbClr val="000000"/>
                     </a:solidFill>
@@ -11121,7 +11122,7 @@
               </a:ln>
               <a:extLst>
                 <a:ext uri="{91240B29-F687-4f45-9708-019B960494DF}">
-                  <a14:hiddenLine xmlns:a14="http://schemas.microsoft.com/office/drawing/2010/main" xmlns="" w="9525">
+                  <a14:hiddenLine xmlns="" xmlns:a14="http://schemas.microsoft.com/office/drawing/2010/main" w="9525">
                     <a:solidFill>
                       <a:srgbClr val="000000"/>
                     </a:solidFill>
@@ -11183,7 +11184,7 @@
               </a:ln>
               <a:extLst>
                 <a:ext uri="{91240B29-F687-4f45-9708-019B960494DF}">
-                  <a14:hiddenLine xmlns:a14="http://schemas.microsoft.com/office/drawing/2010/main" xmlns="" w="9525">
+                  <a14:hiddenLine xmlns="" xmlns:a14="http://schemas.microsoft.com/office/drawing/2010/main" w="9525">
                     <a:solidFill>
                       <a:srgbClr val="000000"/>
                     </a:solidFill>
@@ -11273,7 +11274,7 @@
               </a:ln>
               <a:extLst>
                 <a:ext uri="{91240B29-F687-4f45-9708-019B960494DF}">
-                  <a14:hiddenLine xmlns:a14="http://schemas.microsoft.com/office/drawing/2010/main" xmlns="" w="9525">
+                  <a14:hiddenLine xmlns="" xmlns:a14="http://schemas.microsoft.com/office/drawing/2010/main" w="9525">
                     <a:solidFill>
                       <a:srgbClr val="000000"/>
                     </a:solidFill>
@@ -11363,7 +11364,7 @@
               </a:ln>
               <a:extLst>
                 <a:ext uri="{91240B29-F687-4f45-9708-019B960494DF}">
-                  <a14:hiddenLine xmlns:a14="http://schemas.microsoft.com/office/drawing/2010/main" xmlns="" w="9525">
+                  <a14:hiddenLine xmlns="" xmlns:a14="http://schemas.microsoft.com/office/drawing/2010/main" w="9525">
                     <a:solidFill>
                       <a:srgbClr val="000000"/>
                     </a:solidFill>
@@ -11428,7 +11429,7 @@
               </a:ln>
               <a:extLst>
                 <a:ext uri="{91240B29-F687-4f45-9708-019B960494DF}">
-                  <a14:hiddenLine xmlns:a14="http://schemas.microsoft.com/office/drawing/2010/main" xmlns="" w="9525">
+                  <a14:hiddenLine xmlns="" xmlns:a14="http://schemas.microsoft.com/office/drawing/2010/main" w="9525">
                     <a:solidFill>
                       <a:srgbClr val="000000"/>
                     </a:solidFill>
@@ -11548,7 +11549,7 @@
               </a:ln>
               <a:extLst>
                 <a:ext uri="{91240B29-F687-4f45-9708-019B960494DF}">
-                  <a14:hiddenLine xmlns:a14="http://schemas.microsoft.com/office/drawing/2010/main" xmlns="" w="9525">
+                  <a14:hiddenLine xmlns="" xmlns:a14="http://schemas.microsoft.com/office/drawing/2010/main" w="9525">
                     <a:solidFill>
                       <a:srgbClr val="000000"/>
                     </a:solidFill>
@@ -11629,7 +11630,7 @@
               </a:ln>
               <a:extLst>
                 <a:ext uri="{91240B29-F687-4f45-9708-019B960494DF}">
-                  <a14:hiddenLine xmlns:a14="http://schemas.microsoft.com/office/drawing/2010/main" xmlns="" w="9525">
+                  <a14:hiddenLine xmlns="" xmlns:a14="http://schemas.microsoft.com/office/drawing/2010/main" w="9525">
                     <a:solidFill>
                       <a:srgbClr val="000000"/>
                     </a:solidFill>
@@ -11744,7 +11745,7 @@
               </a:ln>
               <a:extLst>
                 <a:ext uri="{91240B29-F687-4f45-9708-019B960494DF}">
-                  <a14:hiddenLine xmlns:a14="http://schemas.microsoft.com/office/drawing/2010/main" xmlns="" w="9525">
+                  <a14:hiddenLine xmlns="" xmlns:a14="http://schemas.microsoft.com/office/drawing/2010/main" w="9525">
                     <a:solidFill>
                       <a:srgbClr val="000000"/>
                     </a:solidFill>
@@ -11834,7 +11835,7 @@
               </a:ln>
               <a:extLst>
                 <a:ext uri="{91240B29-F687-4f45-9708-019B960494DF}">
-                  <a14:hiddenLine xmlns:a14="http://schemas.microsoft.com/office/drawing/2010/main" xmlns="" w="9525">
+                  <a14:hiddenLine xmlns="" xmlns:a14="http://schemas.microsoft.com/office/drawing/2010/main" w="9525">
                     <a:solidFill>
                       <a:srgbClr val="000000"/>
                     </a:solidFill>
@@ -11899,7 +11900,7 @@
               </a:ln>
               <a:extLst>
                 <a:ext uri="{91240B29-F687-4f45-9708-019B960494DF}">
-                  <a14:hiddenLine xmlns:a14="http://schemas.microsoft.com/office/drawing/2010/main" xmlns="" w="9525">
+                  <a14:hiddenLine xmlns="" xmlns:a14="http://schemas.microsoft.com/office/drawing/2010/main" w="9525">
                     <a:solidFill>
                       <a:srgbClr val="000000"/>
                     </a:solidFill>
@@ -11989,7 +11990,7 @@
               </a:ln>
               <a:extLst>
                 <a:ext uri="{91240B29-F687-4f45-9708-019B960494DF}">
-                  <a14:hiddenLine xmlns:a14="http://schemas.microsoft.com/office/drawing/2010/main" xmlns="" w="9525">
+                  <a14:hiddenLine xmlns="" xmlns:a14="http://schemas.microsoft.com/office/drawing/2010/main" w="9525">
                     <a:solidFill>
                       <a:srgbClr val="000000"/>
                     </a:solidFill>
@@ -12057,7 +12058,7 @@
               </a:ln>
               <a:extLst>
                 <a:ext uri="{91240B29-F687-4f45-9708-019B960494DF}">
-                  <a14:hiddenLine xmlns:a14="http://schemas.microsoft.com/office/drawing/2010/main" xmlns="" w="9525">
+                  <a14:hiddenLine xmlns="" xmlns:a14="http://schemas.microsoft.com/office/drawing/2010/main" w="9525">
                     <a:solidFill>
                       <a:srgbClr val="000000"/>
                     </a:solidFill>
@@ -12147,7 +12148,7 @@
               </a:ln>
               <a:extLst>
                 <a:ext uri="{91240B29-F687-4f45-9708-019B960494DF}">
-                  <a14:hiddenLine xmlns:a14="http://schemas.microsoft.com/office/drawing/2010/main" xmlns="" w="9525">
+                  <a14:hiddenLine xmlns="" xmlns:a14="http://schemas.microsoft.com/office/drawing/2010/main" w="9525">
                     <a:solidFill>
                       <a:srgbClr val="000000"/>
                     </a:solidFill>
@@ -12215,7 +12216,7 @@
               </a:ln>
               <a:extLst>
                 <a:ext uri="{91240B29-F687-4f45-9708-019B960494DF}">
-                  <a14:hiddenLine xmlns:a14="http://schemas.microsoft.com/office/drawing/2010/main" xmlns="" w="9525">
+                  <a14:hiddenLine xmlns="" xmlns:a14="http://schemas.microsoft.com/office/drawing/2010/main" w="9525">
                     <a:solidFill>
                       <a:srgbClr val="000000"/>
                     </a:solidFill>
@@ -12305,7 +12306,7 @@
               </a:ln>
               <a:extLst>
                 <a:ext uri="{91240B29-F687-4f45-9708-019B960494DF}">
-                  <a14:hiddenLine xmlns:a14="http://schemas.microsoft.com/office/drawing/2010/main" xmlns="" w="9525">
+                  <a14:hiddenLine xmlns="" xmlns:a14="http://schemas.microsoft.com/office/drawing/2010/main" w="9525">
                     <a:solidFill>
                       <a:srgbClr val="000000"/>
                     </a:solidFill>
@@ -12339,7 +12340,7 @@
               </a:ln>
               <a:extLst>
                 <a:ext uri="{91240B29-F687-4f45-9708-019B960494DF}">
-                  <a14:hiddenLine xmlns:a14="http://schemas.microsoft.com/office/drawing/2010/main" xmlns="" w="9525">
+                  <a14:hiddenLine xmlns="" xmlns:a14="http://schemas.microsoft.com/office/drawing/2010/main" w="9525">
                     <a:solidFill>
                       <a:srgbClr val="000000"/>
                     </a:solidFill>
@@ -12479,7 +12480,7 @@
           <a:p>
             <a:fld id="{92FF8978-FE14-CC4A-93A6-934EB06543C0}" type="datetime1">
               <a:rPr lang="en-US" smtClean="0"/>
-              <a:t>8/5/26</a:t>
+              <a:t>8/6/26</a:t>
             </a:fld>
             <a:endParaRPr lang="en-US"/>
           </a:p>
@@ -14728,6 +14729,267 @@
 </file>
 
 <file path=ppt/slides/slide17.xml><?xml version="1.0" encoding="utf-8"?>
+<p:sld xmlns:a="http://schemas.openxmlformats.org/drawingml/2006/main" xmlns:r="http://schemas.openxmlformats.org/officeDocument/2006/relationships" xmlns:p="http://schemas.openxmlformats.org/presentationml/2006/main">
+  <p:cSld>
+    <p:spTree>
+      <p:nvGrpSpPr>
+        <p:cNvPr id="1" name="">
+          <a:extLst>
+            <a:ext uri="{FF2B5EF4-FFF2-40B4-BE49-F238E27FC236}">
+              <a16:creationId xmlns:a16="http://schemas.microsoft.com/office/drawing/2014/main" id="{85D1A3B7-0E46-46DA-743E-0F0F408BB376}"/>
+            </a:ext>
+          </a:extLst>
+        </p:cNvPr>
+        <p:cNvGrpSpPr/>
+        <p:nvPr/>
+      </p:nvGrpSpPr>
+      <p:grpSpPr>
+        <a:xfrm>
+          <a:off x="0" y="0"/>
+          <a:ext cx="0" cy="0"/>
+          <a:chOff x="0" y="0"/>
+          <a:chExt cx="0" cy="0"/>
+        </a:xfrm>
+      </p:grpSpPr>
+      <p:sp>
+        <p:nvSpPr>
+          <p:cNvPr id="6146" name="Rectangle 2">
+            <a:extLst>
+              <a:ext uri="{FF2B5EF4-FFF2-40B4-BE49-F238E27FC236}">
+                <a16:creationId xmlns:a16="http://schemas.microsoft.com/office/drawing/2014/main" id="{15E3CEFF-4634-D587-57D8-9D6DA9ACB8FB}"/>
+              </a:ext>
+            </a:extLst>
+          </p:cNvPr>
+          <p:cNvSpPr>
+            <a:spLocks noGrp="1" noChangeArrowheads="1"/>
+          </p:cNvSpPr>
+          <p:nvPr>
+            <p:ph type="title"/>
+            <p:custDataLst>
+              <p:tags r:id="rId1"/>
+            </p:custDataLst>
+          </p:nvPr>
+        </p:nvSpPr>
+        <p:spPr>
+          <a:xfrm>
+            <a:off x="1141413" y="284084"/>
+            <a:ext cx="9905998" cy="620791"/>
+          </a:xfrm>
+        </p:spPr>
+        <p:txBody>
+          <a:bodyPr/>
+          <a:lstStyle/>
+          <a:p>
+            <a:pPr algn="ctr"/>
+            <a:r>
+              <a:rPr lang="en-US" dirty="0"/>
+              <a:t>Week 4: Thursday</a:t>
+            </a:r>
+          </a:p>
+        </p:txBody>
+      </p:sp>
+      <p:sp>
+        <p:nvSpPr>
+          <p:cNvPr id="6147" name="Rectangle 3">
+            <a:extLst>
+              <a:ext uri="{FF2B5EF4-FFF2-40B4-BE49-F238E27FC236}">
+                <a16:creationId xmlns:a16="http://schemas.microsoft.com/office/drawing/2014/main" id="{A262A1FE-7504-C23A-9807-32B849709643}"/>
+              </a:ext>
+            </a:extLst>
+          </p:cNvPr>
+          <p:cNvSpPr>
+            <a:spLocks noGrp="1" noChangeArrowheads="1"/>
+          </p:cNvSpPr>
+          <p:nvPr>
+            <p:ph idx="1"/>
+            <p:custDataLst>
+              <p:tags r:id="rId2"/>
+            </p:custDataLst>
+          </p:nvPr>
+        </p:nvSpPr>
+        <p:spPr>
+          <a:xfrm>
+            <a:off x="1294151" y="1098549"/>
+            <a:ext cx="9600522" cy="5475368"/>
+          </a:xfrm>
+        </p:spPr>
+        <p:txBody>
+          <a:bodyPr>
+            <a:normAutofit fontScale="70000" lnSpcReduction="20000"/>
+          </a:bodyPr>
+          <a:lstStyle/>
+          <a:p>
+            <a:r>
+              <a:rPr lang="en-US" dirty="0">
+                <a:latin typeface="Arial" panose="020B0604020202020204" pitchFamily="34" charset="0"/>
+                <a:cs typeface="Arial" panose="020B0604020202020204" pitchFamily="34" charset="0"/>
+              </a:rPr>
+              <a:t>Last Lecture Day!!</a:t>
+            </a:r>
+          </a:p>
+          <a:p>
+            <a:r>
+              <a:rPr lang="en-US" dirty="0">
+                <a:latin typeface="Arial" panose="020B0604020202020204" pitchFamily="34" charset="0"/>
+                <a:cs typeface="Arial" panose="020B0604020202020204" pitchFamily="34" charset="0"/>
+              </a:rPr>
+              <a:t>This week:</a:t>
+            </a:r>
+          </a:p>
+          <a:p>
+            <a:pPr lvl="1"/>
+            <a:r>
+              <a:rPr lang="en-US" dirty="0">
+                <a:latin typeface="Arial" panose="020B0604020202020204" pitchFamily="34" charset="0"/>
+                <a:cs typeface="Arial" panose="020B0604020202020204" pitchFamily="34" charset="0"/>
+              </a:rPr>
+              <a:t>Mod 4 Written Assignment Due </a:t>
+            </a:r>
+            <a:r>
+              <a:rPr lang="en-US" b="1" i="1" u="sng" dirty="0">
+                <a:latin typeface="Arial" panose="020B0604020202020204" pitchFamily="34" charset="0"/>
+                <a:cs typeface="Arial" panose="020B0604020202020204" pitchFamily="34" charset="0"/>
+              </a:rPr>
+              <a:t>TONIGHT</a:t>
+            </a:r>
+            <a:r>
+              <a:rPr lang="en-US" dirty="0">
+                <a:latin typeface="Arial" panose="020B0604020202020204" pitchFamily="34" charset="0"/>
+                <a:cs typeface="Arial" panose="020B0604020202020204" pitchFamily="34" charset="0"/>
+              </a:rPr>
+              <a:t>!</a:t>
+            </a:r>
+          </a:p>
+          <a:p>
+            <a:pPr lvl="1"/>
+            <a:r>
+              <a:rPr lang="en-US" dirty="0">
+                <a:latin typeface="Arial" panose="020B0604020202020204" pitchFamily="34" charset="0"/>
+                <a:cs typeface="Arial" panose="020B0604020202020204" pitchFamily="34" charset="0"/>
+              </a:rPr>
+              <a:t>Final Exam is TOMORROW!</a:t>
+            </a:r>
+          </a:p>
+          <a:p>
+            <a:r>
+              <a:rPr lang="en-US" dirty="0">
+                <a:latin typeface="Arial" panose="020B0604020202020204" pitchFamily="34" charset="0"/>
+                <a:cs typeface="Arial" panose="020B0604020202020204" pitchFamily="34" charset="0"/>
+              </a:rPr>
+              <a:t>Mod 4 Written Assignment.</a:t>
+            </a:r>
+          </a:p>
+          <a:p>
+            <a:pPr lvl="1"/>
+            <a:r>
+              <a:rPr lang="en-US" dirty="0">
+                <a:latin typeface="Arial" panose="020B0604020202020204" pitchFamily="34" charset="0"/>
+                <a:cs typeface="Arial" panose="020B0604020202020204" pitchFamily="34" charset="0"/>
+              </a:rPr>
+              <a:t>Extension is only through Friday night (sorry) because I want to get final grades in Saturday</a:t>
+            </a:r>
+          </a:p>
+          <a:p>
+            <a:r>
+              <a:rPr lang="en-US" dirty="0">
+                <a:latin typeface="Arial" panose="020B0604020202020204" pitchFamily="34" charset="0"/>
+                <a:cs typeface="Arial" panose="020B0604020202020204" pitchFamily="34" charset="0"/>
+              </a:rPr>
+              <a:t>Final Exam</a:t>
+            </a:r>
+          </a:p>
+          <a:p>
+            <a:pPr lvl="1"/>
+            <a:r>
+              <a:rPr lang="en-US" dirty="0">
+                <a:latin typeface="Arial" panose="020B0604020202020204" pitchFamily="34" charset="0"/>
+                <a:cs typeface="Arial" panose="020B0604020202020204" pitchFamily="34" charset="0"/>
+              </a:rPr>
+              <a:t>You will have the full class period (10:30-12:45)</a:t>
+            </a:r>
+          </a:p>
+          <a:p>
+            <a:pPr lvl="1"/>
+            <a:r>
+              <a:rPr lang="en-US" dirty="0">
+                <a:latin typeface="Arial" panose="020B0604020202020204" pitchFamily="34" charset="0"/>
+                <a:cs typeface="Arial" panose="020B0604020202020204" pitchFamily="34" charset="0"/>
+              </a:rPr>
+              <a:t>Will cover the entire course, with an emphasis on modules 3 (Turing Machines) and 4 (Complexity Theory)</a:t>
+            </a:r>
+          </a:p>
+          <a:p>
+            <a:r>
+              <a:rPr lang="en-US" dirty="0">
+                <a:latin typeface="Arial" panose="020B0604020202020204" pitchFamily="34" charset="0"/>
+                <a:cs typeface="Arial" panose="020B0604020202020204" pitchFamily="34" charset="0"/>
+              </a:rPr>
+              <a:t>Lecture recordings from last Fall are posted on Panopto on Canvas</a:t>
+            </a:r>
+          </a:p>
+          <a:p>
+            <a:pPr lvl="1"/>
+            <a:r>
+              <a:rPr lang="en-US" dirty="0">
+                <a:latin typeface="Arial" panose="020B0604020202020204" pitchFamily="34" charset="0"/>
+                <a:cs typeface="Arial" panose="020B0604020202020204" pitchFamily="34" charset="0"/>
+              </a:rPr>
+              <a:t>I posted ALL the videos FYI</a:t>
+            </a:r>
+          </a:p>
+          <a:p>
+            <a:r>
+              <a:rPr lang="en-US" dirty="0">
+                <a:latin typeface="Arial" panose="020B0604020202020204" pitchFamily="34" charset="0"/>
+                <a:cs typeface="Arial" panose="020B0604020202020204" pitchFamily="34" charset="0"/>
+              </a:rPr>
+              <a:t>Please remember that I am asking for NO laptop / phones!</a:t>
+            </a:r>
+          </a:p>
+          <a:p>
+            <a:pPr lvl="1"/>
+            <a:r>
+              <a:rPr lang="en-US" dirty="0">
+                <a:latin typeface="Arial" panose="020B0604020202020204" pitchFamily="34" charset="0"/>
+                <a:cs typeface="Arial" panose="020B0604020202020204" pitchFamily="34" charset="0"/>
+              </a:rPr>
+              <a:t>This makes the learning environment better for everybody. I appreciate it!</a:t>
+            </a:r>
+          </a:p>
+          <a:p>
+            <a:r>
+              <a:rPr lang="en-US" dirty="0">
+                <a:latin typeface="Arial" panose="020B0604020202020204" pitchFamily="34" charset="0"/>
+                <a:cs typeface="Arial" panose="020B0604020202020204" pitchFamily="34" charset="0"/>
+              </a:rPr>
+              <a:t>Attendance continues today as usual.</a:t>
+            </a:r>
+          </a:p>
+          <a:p>
+            <a:r>
+              <a:rPr lang="en-US" dirty="0">
+                <a:latin typeface="Arial" panose="020B0604020202020204" pitchFamily="34" charset="0"/>
+                <a:cs typeface="Arial" panose="020B0604020202020204" pitchFamily="34" charset="0"/>
+              </a:rPr>
+              <a:t>Today we finish the last module and possibly review if time.</a:t>
+            </a:r>
+          </a:p>
+        </p:txBody>
+      </p:sp>
+    </p:spTree>
+    <p:extLst>
+      <p:ext uri="{BB962C8B-B14F-4D97-AF65-F5344CB8AC3E}">
+        <p14:creationId xmlns:p14="http://schemas.microsoft.com/office/powerpoint/2010/main" val="669073853"/>
+      </p:ext>
+    </p:extLst>
+  </p:cSld>
+  <p:clrMapOvr>
+    <a:masterClrMapping/>
+  </p:clrMapOvr>
+</p:sld>
+</file>
+
+<file path=ppt/slides/slide18.xml><?xml version="1.0" encoding="utf-8"?>
 <p:sld xmlns:a="http://schemas.openxmlformats.org/drawingml/2006/main" xmlns:r="http://schemas.openxmlformats.org/officeDocument/2006/relationships" xmlns:p="http://schemas.openxmlformats.org/presentationml/2006/main">
   <p:cSld>
     <p:spTree>
@@ -18508,6 +18770,18 @@
 </p:tagLst>
 </file>
 
+<file path=ppt/tags/tag36.xml><?xml version="1.0" encoding="utf-8"?>
+<p:tagLst xmlns:a="http://schemas.openxmlformats.org/drawingml/2006/main" xmlns:r="http://schemas.openxmlformats.org/officeDocument/2006/relationships" xmlns:p="http://schemas.openxmlformats.org/presentationml/2006/main">
+  <p:tag name="_INSTRUCTOR VIEW19C14C36-AC8E-43BC-9DB6-C2AAF774C7DC|PANE__TAG" val="_"/>
+</p:tagLst>
+</file>
+
+<file path=ppt/tags/tag37.xml><?xml version="1.0" encoding="utf-8"?>
+<p:tagLst xmlns:a="http://schemas.openxmlformats.org/drawingml/2006/main" xmlns:r="http://schemas.openxmlformats.org/officeDocument/2006/relationships" xmlns:p="http://schemas.openxmlformats.org/presentationml/2006/main">
+  <p:tag name="_INSTRUCTOR VIEW19C14C36-AC8E-43BC-9DB6-C2AAF774C7DC|PANE__TAG" val="_"/>
+</p:tagLst>
+</file>
+
 <file path=ppt/tags/tag4.xml><?xml version="1.0" encoding="utf-8"?>
 <p:tagLst xmlns:a="http://schemas.openxmlformats.org/drawingml/2006/main" xmlns:r="http://schemas.openxmlformats.org/officeDocument/2006/relationships" xmlns:p="http://schemas.openxmlformats.org/presentationml/2006/main">
   <p:tag name="_INSTRUCTOR VIEW19C14C36-AC8E-43BC-9DB6-C2AAF774C7DC|PANE__TAG" val="_"/>

--- a/slides/00-DailyAnnouncements.pptx
+++ b/slides/00-DailyAnnouncements.pptx
@@ -622,7 +622,7 @@
           <a:noFill/>
           <a:extLst>
             <a:ext uri="{909E8E84-426E-40dd-AFC4-6F175D3DCCD1}">
-              <a14:hiddenFill xmlns="" xmlns:a14="http://schemas.microsoft.com/office/drawing/2010/main">
+              <a14:hiddenFill xmlns:a14="http://schemas.microsoft.com/office/drawing/2010/main" xmlns="">
                 <a:solidFill>
                   <a:srgbClr val="FFFFFF"/>
                 </a:solidFill>
@@ -681,7 +681,7 @@
             </a:ln>
             <a:extLst>
               <a:ext uri="{91240B29-F687-4f45-9708-019B960494DF}">
-                <a14:hiddenLine xmlns="" xmlns:a14="http://schemas.microsoft.com/office/drawing/2010/main" w="9525">
+                <a14:hiddenLine xmlns:a14="http://schemas.microsoft.com/office/drawing/2010/main" xmlns="" w="9525">
                   <a:solidFill>
                     <a:srgbClr val="000000"/>
                   </a:solidFill>
@@ -771,7 +771,7 @@
             </a:ln>
             <a:extLst>
               <a:ext uri="{91240B29-F687-4f45-9708-019B960494DF}">
-                <a14:hiddenLine xmlns="" xmlns:a14="http://schemas.microsoft.com/office/drawing/2010/main" w="9525">
+                <a14:hiddenLine xmlns:a14="http://schemas.microsoft.com/office/drawing/2010/main" xmlns="" w="9525">
                   <a:solidFill>
                     <a:srgbClr val="000000"/>
                   </a:solidFill>
@@ -861,7 +861,7 @@
             </a:ln>
             <a:extLst>
               <a:ext uri="{91240B29-F687-4f45-9708-019B960494DF}">
-                <a14:hiddenLine xmlns="" xmlns:a14="http://schemas.microsoft.com/office/drawing/2010/main" w="9525">
+                <a14:hiddenLine xmlns:a14="http://schemas.microsoft.com/office/drawing/2010/main" xmlns="" w="9525">
                   <a:solidFill>
                     <a:srgbClr val="000000"/>
                   </a:solidFill>
@@ -895,7 +895,7 @@
             </a:ln>
             <a:extLst>
               <a:ext uri="{91240B29-F687-4f45-9708-019B960494DF}">
-                <a14:hiddenLine xmlns="" xmlns:a14="http://schemas.microsoft.com/office/drawing/2010/main" w="9525">
+                <a14:hiddenLine xmlns:a14="http://schemas.microsoft.com/office/drawing/2010/main" xmlns="" w="9525">
                   <a:solidFill>
                     <a:srgbClr val="000000"/>
                   </a:solidFill>
@@ -985,7 +985,7 @@
             </a:ln>
             <a:extLst>
               <a:ext uri="{91240B29-F687-4f45-9708-019B960494DF}">
-                <a14:hiddenLine xmlns="" xmlns:a14="http://schemas.microsoft.com/office/drawing/2010/main" w="9525">
+                <a14:hiddenLine xmlns:a14="http://schemas.microsoft.com/office/drawing/2010/main" xmlns="" w="9525">
                   <a:solidFill>
                     <a:srgbClr val="000000"/>
                   </a:solidFill>
@@ -1047,7 +1047,7 @@
             </a:ln>
             <a:extLst>
               <a:ext uri="{91240B29-F687-4f45-9708-019B960494DF}">
-                <a14:hiddenLine xmlns="" xmlns:a14="http://schemas.microsoft.com/office/drawing/2010/main" w="9525">
+                <a14:hiddenLine xmlns:a14="http://schemas.microsoft.com/office/drawing/2010/main" xmlns="" w="9525">
                   <a:solidFill>
                     <a:srgbClr val="000000"/>
                   </a:solidFill>
@@ -1109,7 +1109,7 @@
             </a:ln>
             <a:extLst>
               <a:ext uri="{91240B29-F687-4f45-9708-019B960494DF}">
-                <a14:hiddenLine xmlns="" xmlns:a14="http://schemas.microsoft.com/office/drawing/2010/main" w="9525">
+                <a14:hiddenLine xmlns:a14="http://schemas.microsoft.com/office/drawing/2010/main" xmlns="" w="9525">
                   <a:solidFill>
                     <a:srgbClr val="000000"/>
                   </a:solidFill>
@@ -1199,7 +1199,7 @@
             </a:ln>
             <a:extLst>
               <a:ext uri="{91240B29-F687-4f45-9708-019B960494DF}">
-                <a14:hiddenLine xmlns="" xmlns:a14="http://schemas.microsoft.com/office/drawing/2010/main" w="9525">
+                <a14:hiddenLine xmlns:a14="http://schemas.microsoft.com/office/drawing/2010/main" xmlns="" w="9525">
                   <a:solidFill>
                     <a:srgbClr val="000000"/>
                   </a:solidFill>
@@ -1261,7 +1261,7 @@
             </a:ln>
             <a:extLst>
               <a:ext uri="{91240B29-F687-4f45-9708-019B960494DF}">
-                <a14:hiddenLine xmlns="" xmlns:a14="http://schemas.microsoft.com/office/drawing/2010/main" w="9525">
+                <a14:hiddenLine xmlns:a14="http://schemas.microsoft.com/office/drawing/2010/main" xmlns="" w="9525">
                   <a:solidFill>
                     <a:srgbClr val="000000"/>
                   </a:solidFill>
@@ -1323,7 +1323,7 @@
             </a:ln>
             <a:extLst>
               <a:ext uri="{91240B29-F687-4f45-9708-019B960494DF}">
-                <a14:hiddenLine xmlns="" xmlns:a14="http://schemas.microsoft.com/office/drawing/2010/main" w="9525">
+                <a14:hiddenLine xmlns:a14="http://schemas.microsoft.com/office/drawing/2010/main" xmlns="" w="9525">
                   <a:solidFill>
                     <a:srgbClr val="000000"/>
                   </a:solidFill>
@@ -1413,7 +1413,7 @@
             </a:ln>
             <a:extLst>
               <a:ext uri="{91240B29-F687-4f45-9708-019B960494DF}">
-                <a14:hiddenLine xmlns="" xmlns:a14="http://schemas.microsoft.com/office/drawing/2010/main" w="9525">
+                <a14:hiddenLine xmlns:a14="http://schemas.microsoft.com/office/drawing/2010/main" xmlns="" w="9525">
                   <a:solidFill>
                     <a:srgbClr val="000000"/>
                   </a:solidFill>
@@ -1503,7 +1503,7 @@
             </a:ln>
             <a:extLst>
               <a:ext uri="{91240B29-F687-4f45-9708-019B960494DF}">
-                <a14:hiddenLine xmlns="" xmlns:a14="http://schemas.microsoft.com/office/drawing/2010/main" w="9525">
+                <a14:hiddenLine xmlns:a14="http://schemas.microsoft.com/office/drawing/2010/main" xmlns="" w="9525">
                   <a:solidFill>
                     <a:srgbClr val="000000"/>
                   </a:solidFill>
@@ -1565,7 +1565,7 @@
             </a:ln>
             <a:extLst>
               <a:ext uri="{91240B29-F687-4f45-9708-019B960494DF}">
-                <a14:hiddenLine xmlns="" xmlns:a14="http://schemas.microsoft.com/office/drawing/2010/main" w="9525">
+                <a14:hiddenLine xmlns:a14="http://schemas.microsoft.com/office/drawing/2010/main" xmlns="" w="9525">
                   <a:solidFill>
                     <a:srgbClr val="000000"/>
                   </a:solidFill>
@@ -1675,7 +1675,7 @@
             </a:ln>
             <a:extLst>
               <a:ext uri="{91240B29-F687-4f45-9708-019B960494DF}">
-                <a14:hiddenLine xmlns="" xmlns:a14="http://schemas.microsoft.com/office/drawing/2010/main" w="9525">
+                <a14:hiddenLine xmlns:a14="http://schemas.microsoft.com/office/drawing/2010/main" xmlns="" w="9525">
                   <a:solidFill>
                     <a:srgbClr val="000000"/>
                   </a:solidFill>
@@ -1737,7 +1737,7 @@
             </a:ln>
             <a:extLst>
               <a:ext uri="{91240B29-F687-4f45-9708-019B960494DF}">
-                <a14:hiddenLine xmlns="" xmlns:a14="http://schemas.microsoft.com/office/drawing/2010/main" w="9525">
+                <a14:hiddenLine xmlns:a14="http://schemas.microsoft.com/office/drawing/2010/main" xmlns="" w="9525">
                   <a:solidFill>
                     <a:srgbClr val="000000"/>
                   </a:solidFill>
@@ -1827,7 +1827,7 @@
             </a:ln>
             <a:extLst>
               <a:ext uri="{91240B29-F687-4f45-9708-019B960494DF}">
-                <a14:hiddenLine xmlns="" xmlns:a14="http://schemas.microsoft.com/office/drawing/2010/main" w="9525">
+                <a14:hiddenLine xmlns:a14="http://schemas.microsoft.com/office/drawing/2010/main" xmlns="" w="9525">
                   <a:solidFill>
                     <a:srgbClr val="000000"/>
                   </a:solidFill>
@@ -1917,7 +1917,7 @@
             </a:ln>
             <a:extLst>
               <a:ext uri="{91240B29-F687-4f45-9708-019B960494DF}">
-                <a14:hiddenLine xmlns="" xmlns:a14="http://schemas.microsoft.com/office/drawing/2010/main" w="9525">
+                <a14:hiddenLine xmlns:a14="http://schemas.microsoft.com/office/drawing/2010/main" xmlns="" w="9525">
                   <a:solidFill>
                     <a:srgbClr val="000000"/>
                   </a:solidFill>
@@ -1979,7 +1979,7 @@
             </a:ln>
             <a:extLst>
               <a:ext uri="{91240B29-F687-4f45-9708-019B960494DF}">
-                <a14:hiddenLine xmlns="" xmlns:a14="http://schemas.microsoft.com/office/drawing/2010/main" w="9525">
+                <a14:hiddenLine xmlns:a14="http://schemas.microsoft.com/office/drawing/2010/main" xmlns="" w="9525">
                   <a:solidFill>
                     <a:srgbClr val="000000"/>
                   </a:solidFill>
@@ -2069,7 +2069,7 @@
             </a:ln>
             <a:extLst>
               <a:ext uri="{91240B29-F687-4f45-9708-019B960494DF}">
-                <a14:hiddenLine xmlns="" xmlns:a14="http://schemas.microsoft.com/office/drawing/2010/main" w="9525">
+                <a14:hiddenLine xmlns:a14="http://schemas.microsoft.com/office/drawing/2010/main" xmlns="" w="9525">
                   <a:solidFill>
                     <a:srgbClr val="000000"/>
                   </a:solidFill>
@@ -2159,7 +2159,7 @@
             </a:ln>
             <a:extLst>
               <a:ext uri="{91240B29-F687-4f45-9708-019B960494DF}">
-                <a14:hiddenLine xmlns="" xmlns:a14="http://schemas.microsoft.com/office/drawing/2010/main" w="9525">
+                <a14:hiddenLine xmlns:a14="http://schemas.microsoft.com/office/drawing/2010/main" xmlns="" w="9525">
                   <a:solidFill>
                     <a:srgbClr val="000000"/>
                   </a:solidFill>
@@ -2215,7 +2215,7 @@
             </a:ln>
             <a:extLst>
               <a:ext uri="{91240B29-F687-4f45-9708-019B960494DF}">
-                <a14:hiddenLine xmlns="" xmlns:a14="http://schemas.microsoft.com/office/drawing/2010/main" w="9525">
+                <a14:hiddenLine xmlns:a14="http://schemas.microsoft.com/office/drawing/2010/main" xmlns="" w="9525">
                   <a:solidFill>
                     <a:srgbClr val="000000"/>
                   </a:solidFill>
@@ -2305,7 +2305,7 @@
             </a:ln>
             <a:extLst>
               <a:ext uri="{91240B29-F687-4f45-9708-019B960494DF}">
-                <a14:hiddenLine xmlns="" xmlns:a14="http://schemas.microsoft.com/office/drawing/2010/main" w="9525">
+                <a14:hiddenLine xmlns:a14="http://schemas.microsoft.com/office/drawing/2010/main" xmlns="" w="9525">
                   <a:solidFill>
                     <a:srgbClr val="000000"/>
                   </a:solidFill>
@@ -2361,7 +2361,7 @@
             </a:ln>
             <a:extLst>
               <a:ext uri="{91240B29-F687-4f45-9708-019B960494DF}">
-                <a14:hiddenLine xmlns="" xmlns:a14="http://schemas.microsoft.com/office/drawing/2010/main" w="9525">
+                <a14:hiddenLine xmlns:a14="http://schemas.microsoft.com/office/drawing/2010/main" xmlns="" w="9525">
                   <a:solidFill>
                     <a:srgbClr val="000000"/>
                   </a:solidFill>
@@ -2451,7 +2451,7 @@
             </a:ln>
             <a:extLst>
               <a:ext uri="{91240B29-F687-4f45-9708-019B960494DF}">
-                <a14:hiddenLine xmlns="" xmlns:a14="http://schemas.microsoft.com/office/drawing/2010/main" w="9525">
+                <a14:hiddenLine xmlns:a14="http://schemas.microsoft.com/office/drawing/2010/main" xmlns="" w="9525">
                   <a:solidFill>
                     <a:srgbClr val="000000"/>
                   </a:solidFill>
@@ -2519,7 +2519,7 @@
             </a:ln>
             <a:extLst>
               <a:ext uri="{91240B29-F687-4f45-9708-019B960494DF}">
-                <a14:hiddenLine xmlns="" xmlns:a14="http://schemas.microsoft.com/office/drawing/2010/main" w="9525">
+                <a14:hiddenLine xmlns:a14="http://schemas.microsoft.com/office/drawing/2010/main" xmlns="" w="9525">
                   <a:solidFill>
                     <a:srgbClr val="000000"/>
                   </a:solidFill>
@@ -2609,7 +2609,7 @@
             </a:ln>
             <a:extLst>
               <a:ext uri="{91240B29-F687-4f45-9708-019B960494DF}">
-                <a14:hiddenLine xmlns="" xmlns:a14="http://schemas.microsoft.com/office/drawing/2010/main" w="9525">
+                <a14:hiddenLine xmlns:a14="http://schemas.microsoft.com/office/drawing/2010/main" xmlns="" w="9525">
                   <a:solidFill>
                     <a:srgbClr val="000000"/>
                   </a:solidFill>
@@ -2677,7 +2677,7 @@
             </a:ln>
             <a:extLst>
               <a:ext uri="{91240B29-F687-4f45-9708-019B960494DF}">
-                <a14:hiddenLine xmlns="" xmlns:a14="http://schemas.microsoft.com/office/drawing/2010/main" w="9525">
+                <a14:hiddenLine xmlns:a14="http://schemas.microsoft.com/office/drawing/2010/main" xmlns="" w="9525">
                   <a:solidFill>
                     <a:srgbClr val="000000"/>
                   </a:solidFill>
@@ -2767,7 +2767,7 @@
             </a:ln>
             <a:extLst>
               <a:ext uri="{91240B29-F687-4f45-9708-019B960494DF}">
-                <a14:hiddenLine xmlns="" xmlns:a14="http://schemas.microsoft.com/office/drawing/2010/main" w="9525">
+                <a14:hiddenLine xmlns:a14="http://schemas.microsoft.com/office/drawing/2010/main" xmlns="" w="9525">
                   <a:solidFill>
                     <a:srgbClr val="000000"/>
                   </a:solidFill>
@@ -2801,7 +2801,7 @@
             </a:ln>
             <a:extLst>
               <a:ext uri="{91240B29-F687-4f45-9708-019B960494DF}">
-                <a14:hiddenLine xmlns="" xmlns:a14="http://schemas.microsoft.com/office/drawing/2010/main" w="9525">
+                <a14:hiddenLine xmlns:a14="http://schemas.microsoft.com/office/drawing/2010/main" xmlns="" w="9525">
                   <a:solidFill>
                     <a:srgbClr val="000000"/>
                   </a:solidFill>
@@ -2891,7 +2891,7 @@
             </a:ln>
             <a:extLst>
               <a:ext uri="{91240B29-F687-4f45-9708-019B960494DF}">
-                <a14:hiddenLine xmlns="" xmlns:a14="http://schemas.microsoft.com/office/drawing/2010/main" w="9525">
+                <a14:hiddenLine xmlns:a14="http://schemas.microsoft.com/office/drawing/2010/main" xmlns="" w="9525">
                   <a:solidFill>
                     <a:srgbClr val="000000"/>
                   </a:solidFill>
@@ -2953,7 +2953,7 @@
             </a:ln>
             <a:extLst>
               <a:ext uri="{91240B29-F687-4f45-9708-019B960494DF}">
-                <a14:hiddenLine xmlns="" xmlns:a14="http://schemas.microsoft.com/office/drawing/2010/main" w="9525">
+                <a14:hiddenLine xmlns:a14="http://schemas.microsoft.com/office/drawing/2010/main" xmlns="" w="9525">
                   <a:solidFill>
                     <a:srgbClr val="000000"/>
                   </a:solidFill>
@@ -3015,7 +3015,7 @@
             </a:ln>
             <a:extLst>
               <a:ext uri="{91240B29-F687-4f45-9708-019B960494DF}">
-                <a14:hiddenLine xmlns="" xmlns:a14="http://schemas.microsoft.com/office/drawing/2010/main" w="9525">
+                <a14:hiddenLine xmlns:a14="http://schemas.microsoft.com/office/drawing/2010/main" xmlns="" w="9525">
                   <a:solidFill>
                     <a:srgbClr val="000000"/>
                   </a:solidFill>
@@ -3105,7 +3105,7 @@
             </a:ln>
             <a:extLst>
               <a:ext uri="{91240B29-F687-4f45-9708-019B960494DF}">
-                <a14:hiddenLine xmlns="" xmlns:a14="http://schemas.microsoft.com/office/drawing/2010/main" w="9525">
+                <a14:hiddenLine xmlns:a14="http://schemas.microsoft.com/office/drawing/2010/main" xmlns="" w="9525">
                   <a:solidFill>
                     <a:srgbClr val="000000"/>
                   </a:solidFill>
@@ -3173,7 +3173,7 @@
             </a:ln>
             <a:extLst>
               <a:ext uri="{91240B29-F687-4f45-9708-019B960494DF}">
-                <a14:hiddenLine xmlns="" xmlns:a14="http://schemas.microsoft.com/office/drawing/2010/main" w="9525">
+                <a14:hiddenLine xmlns:a14="http://schemas.microsoft.com/office/drawing/2010/main" xmlns="" w="9525">
                   <a:solidFill>
                     <a:srgbClr val="000000"/>
                   </a:solidFill>
@@ -3235,7 +3235,7 @@
             </a:ln>
             <a:extLst>
               <a:ext uri="{91240B29-F687-4f45-9708-019B960494DF}">
-                <a14:hiddenLine xmlns="" xmlns:a14="http://schemas.microsoft.com/office/drawing/2010/main" w="9525">
+                <a14:hiddenLine xmlns:a14="http://schemas.microsoft.com/office/drawing/2010/main" xmlns="" w="9525">
                   <a:solidFill>
                     <a:srgbClr val="000000"/>
                   </a:solidFill>
@@ -3325,7 +3325,7 @@
             </a:ln>
             <a:extLst>
               <a:ext uri="{91240B29-F687-4f45-9708-019B960494DF}">
-                <a14:hiddenLine xmlns="" xmlns:a14="http://schemas.microsoft.com/office/drawing/2010/main" w="9525">
+                <a14:hiddenLine xmlns:a14="http://schemas.microsoft.com/office/drawing/2010/main" xmlns="" w="9525">
                   <a:solidFill>
                     <a:srgbClr val="000000"/>
                   </a:solidFill>
@@ -3387,7 +3387,7 @@
             </a:ln>
             <a:extLst>
               <a:ext uri="{91240B29-F687-4f45-9708-019B960494DF}">
-                <a14:hiddenLine xmlns="" xmlns:a14="http://schemas.microsoft.com/office/drawing/2010/main" w="9525">
+                <a14:hiddenLine xmlns:a14="http://schemas.microsoft.com/office/drawing/2010/main" xmlns="" w="9525">
                   <a:solidFill>
                     <a:srgbClr val="000000"/>
                   </a:solidFill>
@@ -3477,7 +3477,7 @@
             </a:ln>
             <a:extLst>
               <a:ext uri="{91240B29-F687-4f45-9708-019B960494DF}">
-                <a14:hiddenLine xmlns="" xmlns:a14="http://schemas.microsoft.com/office/drawing/2010/main" w="9525">
+                <a14:hiddenLine xmlns:a14="http://schemas.microsoft.com/office/drawing/2010/main" xmlns="" w="9525">
                   <a:solidFill>
                     <a:srgbClr val="000000"/>
                   </a:solidFill>
@@ -3539,7 +3539,7 @@
             </a:ln>
             <a:extLst>
               <a:ext uri="{91240B29-F687-4f45-9708-019B960494DF}">
-                <a14:hiddenLine xmlns="" xmlns:a14="http://schemas.microsoft.com/office/drawing/2010/main" w="9525">
+                <a14:hiddenLine xmlns:a14="http://schemas.microsoft.com/office/drawing/2010/main" xmlns="" w="9525">
                   <a:solidFill>
                     <a:srgbClr val="000000"/>
                   </a:solidFill>
@@ -3629,7 +3629,7 @@
             </a:ln>
             <a:extLst>
               <a:ext uri="{91240B29-F687-4f45-9708-019B960494DF}">
-                <a14:hiddenLine xmlns="" xmlns:a14="http://schemas.microsoft.com/office/drawing/2010/main" w="9525">
+                <a14:hiddenLine xmlns:a14="http://schemas.microsoft.com/office/drawing/2010/main" xmlns="" w="9525">
                   <a:solidFill>
                     <a:srgbClr val="000000"/>
                   </a:solidFill>
@@ -3663,7 +3663,7 @@
             </a:ln>
             <a:extLst>
               <a:ext uri="{91240B29-F687-4f45-9708-019B960494DF}">
-                <a14:hiddenLine xmlns="" xmlns:a14="http://schemas.microsoft.com/office/drawing/2010/main" w="9525">
+                <a14:hiddenLine xmlns:a14="http://schemas.microsoft.com/office/drawing/2010/main" xmlns="" w="9525">
                   <a:solidFill>
                     <a:srgbClr val="000000"/>
                   </a:solidFill>
@@ -3728,7 +3728,7 @@
             </a:ln>
             <a:extLst>
               <a:ext uri="{91240B29-F687-4f45-9708-019B960494DF}">
-                <a14:hiddenLine xmlns="" xmlns:a14="http://schemas.microsoft.com/office/drawing/2010/main" w="9525">
+                <a14:hiddenLine xmlns:a14="http://schemas.microsoft.com/office/drawing/2010/main" xmlns="" w="9525">
                   <a:solidFill>
                     <a:srgbClr val="000000"/>
                   </a:solidFill>
@@ -3818,7 +3818,7 @@
             </a:ln>
             <a:extLst>
               <a:ext uri="{91240B29-F687-4f45-9708-019B960494DF}">
-                <a14:hiddenLine xmlns="" xmlns:a14="http://schemas.microsoft.com/office/drawing/2010/main" w="9525">
+                <a14:hiddenLine xmlns:a14="http://schemas.microsoft.com/office/drawing/2010/main" xmlns="" w="9525">
                   <a:solidFill>
                     <a:srgbClr val="000000"/>
                   </a:solidFill>
@@ -3880,7 +3880,7 @@
             </a:ln>
             <a:extLst>
               <a:ext uri="{91240B29-F687-4f45-9708-019B960494DF}">
-                <a14:hiddenLine xmlns="" xmlns:a14="http://schemas.microsoft.com/office/drawing/2010/main" w="9525">
+                <a14:hiddenLine xmlns:a14="http://schemas.microsoft.com/office/drawing/2010/main" xmlns="" w="9525">
                   <a:solidFill>
                     <a:srgbClr val="000000"/>
                   </a:solidFill>
@@ -3970,7 +3970,7 @@
             </a:ln>
             <a:extLst>
               <a:ext uri="{91240B29-F687-4f45-9708-019B960494DF}">
-                <a14:hiddenLine xmlns="" xmlns:a14="http://schemas.microsoft.com/office/drawing/2010/main" w="9525">
+                <a14:hiddenLine xmlns:a14="http://schemas.microsoft.com/office/drawing/2010/main" xmlns="" w="9525">
                   <a:solidFill>
                     <a:srgbClr val="000000"/>
                   </a:solidFill>
@@ -4060,7 +4060,7 @@
             </a:ln>
             <a:extLst>
               <a:ext uri="{91240B29-F687-4f45-9708-019B960494DF}">
-                <a14:hiddenLine xmlns="" xmlns:a14="http://schemas.microsoft.com/office/drawing/2010/main" w="9525">
+                <a14:hiddenLine xmlns:a14="http://schemas.microsoft.com/office/drawing/2010/main" xmlns="" w="9525">
                   <a:solidFill>
                     <a:srgbClr val="000000"/>
                   </a:solidFill>
@@ -4125,7 +4125,7 @@
             </a:ln>
             <a:extLst>
               <a:ext uri="{91240B29-F687-4f45-9708-019B960494DF}">
-                <a14:hiddenLine xmlns="" xmlns:a14="http://schemas.microsoft.com/office/drawing/2010/main" w="9525">
+                <a14:hiddenLine xmlns:a14="http://schemas.microsoft.com/office/drawing/2010/main" xmlns="" w="9525">
                   <a:solidFill>
                     <a:srgbClr val="000000"/>
                   </a:solidFill>
@@ -4187,7 +4187,7 @@
             </a:ln>
             <a:extLst>
               <a:ext uri="{91240B29-F687-4f45-9708-019B960494DF}">
-                <a14:hiddenLine xmlns="" xmlns:a14="http://schemas.microsoft.com/office/drawing/2010/main" w="9525">
+                <a14:hiddenLine xmlns:a14="http://schemas.microsoft.com/office/drawing/2010/main" xmlns="" w="9525">
                   <a:solidFill>
                     <a:srgbClr val="000000"/>
                   </a:solidFill>
@@ -4277,7 +4277,7 @@
             </a:ln>
             <a:extLst>
               <a:ext uri="{91240B29-F687-4f45-9708-019B960494DF}">
-                <a14:hiddenLine xmlns="" xmlns:a14="http://schemas.microsoft.com/office/drawing/2010/main" w="9525">
+                <a14:hiddenLine xmlns:a14="http://schemas.microsoft.com/office/drawing/2010/main" xmlns="" w="9525">
                   <a:solidFill>
                     <a:srgbClr val="000000"/>
                   </a:solidFill>
@@ -4367,7 +4367,7 @@
             </a:ln>
             <a:extLst>
               <a:ext uri="{91240B29-F687-4f45-9708-019B960494DF}">
-                <a14:hiddenLine xmlns="" xmlns:a14="http://schemas.microsoft.com/office/drawing/2010/main" w="9525">
+                <a14:hiddenLine xmlns:a14="http://schemas.microsoft.com/office/drawing/2010/main" xmlns="" w="9525">
                   <a:solidFill>
                     <a:srgbClr val="000000"/>
                   </a:solidFill>
@@ -4429,7 +4429,7 @@
             </a:ln>
             <a:extLst>
               <a:ext uri="{91240B29-F687-4f45-9708-019B960494DF}">
-                <a14:hiddenLine xmlns="" xmlns:a14="http://schemas.microsoft.com/office/drawing/2010/main" w="9525">
+                <a14:hiddenLine xmlns:a14="http://schemas.microsoft.com/office/drawing/2010/main" xmlns="" w="9525">
                   <a:solidFill>
                     <a:srgbClr val="000000"/>
                   </a:solidFill>
@@ -4549,7 +4549,7 @@
             </a:ln>
             <a:extLst>
               <a:ext uri="{91240B29-F687-4f45-9708-019B960494DF}">
-                <a14:hiddenLine xmlns="" xmlns:a14="http://schemas.microsoft.com/office/drawing/2010/main" w="9525">
+                <a14:hiddenLine xmlns:a14="http://schemas.microsoft.com/office/drawing/2010/main" xmlns="" w="9525">
                   <a:solidFill>
                     <a:srgbClr val="000000"/>
                   </a:solidFill>
@@ -4617,7 +4617,7 @@
             </a:ln>
             <a:extLst>
               <a:ext uri="{91240B29-F687-4f45-9708-019B960494DF}">
-                <a14:hiddenLine xmlns="" xmlns:a14="http://schemas.microsoft.com/office/drawing/2010/main" w="9525">
+                <a14:hiddenLine xmlns:a14="http://schemas.microsoft.com/office/drawing/2010/main" xmlns="" w="9525">
                   <a:solidFill>
                     <a:srgbClr val="000000"/>
                   </a:solidFill>
@@ -4707,7 +4707,7 @@
             </a:ln>
             <a:extLst>
               <a:ext uri="{91240B29-F687-4f45-9708-019B960494DF}">
-                <a14:hiddenLine xmlns="" xmlns:a14="http://schemas.microsoft.com/office/drawing/2010/main" w="9525">
+                <a14:hiddenLine xmlns:a14="http://schemas.microsoft.com/office/drawing/2010/main" xmlns="" w="9525">
                   <a:solidFill>
                     <a:srgbClr val="000000"/>
                   </a:solidFill>
@@ -9536,7 +9536,7 @@
           <a:noFill/>
           <a:extLst>
             <a:ext uri="{909E8E84-426E-40dd-AFC4-6F175D3DCCD1}">
-              <a14:hiddenFill xmlns="" xmlns:a14="http://schemas.microsoft.com/office/drawing/2010/main">
+              <a14:hiddenFill xmlns:a14="http://schemas.microsoft.com/office/drawing/2010/main" xmlns="">
                 <a:solidFill>
                   <a:srgbClr val="FFFFFF"/>
                 </a:solidFill>
@@ -9610,7 +9610,7 @@
               </a:ln>
               <a:extLst>
                 <a:ext uri="{91240B29-F687-4f45-9708-019B960494DF}">
-                  <a14:hiddenLine xmlns="" xmlns:a14="http://schemas.microsoft.com/office/drawing/2010/main" w="9525">
+                  <a14:hiddenLine xmlns:a14="http://schemas.microsoft.com/office/drawing/2010/main" xmlns="" w="9525">
                     <a:solidFill>
                       <a:srgbClr val="000000"/>
                     </a:solidFill>
@@ -9700,7 +9700,7 @@
               </a:ln>
               <a:extLst>
                 <a:ext uri="{91240B29-F687-4f45-9708-019B960494DF}">
-                  <a14:hiddenLine xmlns="" xmlns:a14="http://schemas.microsoft.com/office/drawing/2010/main" w="9525">
+                  <a14:hiddenLine xmlns:a14="http://schemas.microsoft.com/office/drawing/2010/main" xmlns="" w="9525">
                     <a:solidFill>
                       <a:srgbClr val="000000"/>
                     </a:solidFill>
@@ -9790,7 +9790,7 @@
               </a:ln>
               <a:extLst>
                 <a:ext uri="{91240B29-F687-4f45-9708-019B960494DF}">
-                  <a14:hiddenLine xmlns="" xmlns:a14="http://schemas.microsoft.com/office/drawing/2010/main" w="9525">
+                  <a14:hiddenLine xmlns:a14="http://schemas.microsoft.com/office/drawing/2010/main" xmlns="" w="9525">
                     <a:solidFill>
                       <a:srgbClr val="000000"/>
                     </a:solidFill>
@@ -9852,7 +9852,7 @@
               </a:ln>
               <a:extLst>
                 <a:ext uri="{91240B29-F687-4f45-9708-019B960494DF}">
-                  <a14:hiddenLine xmlns="" xmlns:a14="http://schemas.microsoft.com/office/drawing/2010/main" w="9525">
+                  <a14:hiddenLine xmlns:a14="http://schemas.microsoft.com/office/drawing/2010/main" xmlns="" w="9525">
                     <a:solidFill>
                       <a:srgbClr val="000000"/>
                     </a:solidFill>
@@ -9942,7 +9942,7 @@
               </a:ln>
               <a:extLst>
                 <a:ext uri="{91240B29-F687-4f45-9708-019B960494DF}">
-                  <a14:hiddenLine xmlns="" xmlns:a14="http://schemas.microsoft.com/office/drawing/2010/main" w="9525">
+                  <a14:hiddenLine xmlns:a14="http://schemas.microsoft.com/office/drawing/2010/main" xmlns="" w="9525">
                     <a:solidFill>
                       <a:srgbClr val="000000"/>
                     </a:solidFill>
@@ -10004,7 +10004,7 @@
               </a:ln>
               <a:extLst>
                 <a:ext uri="{91240B29-F687-4f45-9708-019B960494DF}">
-                  <a14:hiddenLine xmlns="" xmlns:a14="http://schemas.microsoft.com/office/drawing/2010/main" w="9525">
+                  <a14:hiddenLine xmlns:a14="http://schemas.microsoft.com/office/drawing/2010/main" xmlns="" w="9525">
                     <a:solidFill>
                       <a:srgbClr val="000000"/>
                     </a:solidFill>
@@ -10066,7 +10066,7 @@
               </a:ln>
               <a:extLst>
                 <a:ext uri="{91240B29-F687-4f45-9708-019B960494DF}">
-                  <a14:hiddenLine xmlns="" xmlns:a14="http://schemas.microsoft.com/office/drawing/2010/main" w="9525">
+                  <a14:hiddenLine xmlns:a14="http://schemas.microsoft.com/office/drawing/2010/main" xmlns="" w="9525">
                     <a:solidFill>
                       <a:srgbClr val="000000"/>
                     </a:solidFill>
@@ -10156,7 +10156,7 @@
               </a:ln>
               <a:extLst>
                 <a:ext uri="{91240B29-F687-4f45-9708-019B960494DF}">
-                  <a14:hiddenLine xmlns="" xmlns:a14="http://schemas.microsoft.com/office/drawing/2010/main" w="9525">
+                  <a14:hiddenLine xmlns:a14="http://schemas.microsoft.com/office/drawing/2010/main" xmlns="" w="9525">
                     <a:solidFill>
                       <a:srgbClr val="000000"/>
                     </a:solidFill>
@@ -10246,7 +10246,7 @@
               </a:ln>
               <a:extLst>
                 <a:ext uri="{91240B29-F687-4f45-9708-019B960494DF}">
-                  <a14:hiddenLine xmlns="" xmlns:a14="http://schemas.microsoft.com/office/drawing/2010/main" w="9525">
+                  <a14:hiddenLine xmlns:a14="http://schemas.microsoft.com/office/drawing/2010/main" xmlns="" w="9525">
                     <a:solidFill>
                       <a:srgbClr val="000000"/>
                     </a:solidFill>
@@ -10308,7 +10308,7 @@
               </a:ln>
               <a:extLst>
                 <a:ext uri="{91240B29-F687-4f45-9708-019B960494DF}">
-                  <a14:hiddenLine xmlns="" xmlns:a14="http://schemas.microsoft.com/office/drawing/2010/main" w="9525">
+                  <a14:hiddenLine xmlns:a14="http://schemas.microsoft.com/office/drawing/2010/main" xmlns="" w="9525">
                     <a:solidFill>
                       <a:srgbClr val="000000"/>
                     </a:solidFill>
@@ -10418,7 +10418,7 @@
               </a:ln>
               <a:extLst>
                 <a:ext uri="{91240B29-F687-4f45-9708-019B960494DF}">
-                  <a14:hiddenLine xmlns="" xmlns:a14="http://schemas.microsoft.com/office/drawing/2010/main" w="9525">
+                  <a14:hiddenLine xmlns:a14="http://schemas.microsoft.com/office/drawing/2010/main" xmlns="" w="9525">
                     <a:solidFill>
                       <a:srgbClr val="000000"/>
                     </a:solidFill>
@@ -10502,7 +10502,7 @@
               </a:ln>
               <a:extLst>
                 <a:ext uri="{91240B29-F687-4f45-9708-019B960494DF}">
-                  <a14:hiddenLine xmlns="" xmlns:a14="http://schemas.microsoft.com/office/drawing/2010/main" w="9525">
+                  <a14:hiddenLine xmlns:a14="http://schemas.microsoft.com/office/drawing/2010/main" xmlns="" w="9525">
                     <a:solidFill>
                       <a:srgbClr val="000000"/>
                     </a:solidFill>
@@ -10564,7 +10564,7 @@
               </a:ln>
               <a:extLst>
                 <a:ext uri="{91240B29-F687-4f45-9708-019B960494DF}">
-                  <a14:hiddenLine xmlns="" xmlns:a14="http://schemas.microsoft.com/office/drawing/2010/main" w="9525">
+                  <a14:hiddenLine xmlns:a14="http://schemas.microsoft.com/office/drawing/2010/main" xmlns="" w="9525">
                     <a:solidFill>
                       <a:srgbClr val="000000"/>
                     </a:solidFill>
@@ -10626,7 +10626,7 @@
               </a:ln>
               <a:extLst>
                 <a:ext uri="{91240B29-F687-4f45-9708-019B960494DF}">
-                  <a14:hiddenLine xmlns="" xmlns:a14="http://schemas.microsoft.com/office/drawing/2010/main" w="9525">
+                  <a14:hiddenLine xmlns:a14="http://schemas.microsoft.com/office/drawing/2010/main" xmlns="" w="9525">
                     <a:solidFill>
                       <a:srgbClr val="000000"/>
                     </a:solidFill>
@@ -10716,7 +10716,7 @@
               </a:ln>
               <a:extLst>
                 <a:ext uri="{91240B29-F687-4f45-9708-019B960494DF}">
-                  <a14:hiddenLine xmlns="" xmlns:a14="http://schemas.microsoft.com/office/drawing/2010/main" w="9525">
+                  <a14:hiddenLine xmlns:a14="http://schemas.microsoft.com/office/drawing/2010/main" xmlns="" w="9525">
                     <a:solidFill>
                       <a:srgbClr val="000000"/>
                     </a:solidFill>
@@ -10750,7 +10750,7 @@
               </a:ln>
               <a:extLst>
                 <a:ext uri="{91240B29-F687-4f45-9708-019B960494DF}">
-                  <a14:hiddenLine xmlns="" xmlns:a14="http://schemas.microsoft.com/office/drawing/2010/main" w="9525">
+                  <a14:hiddenLine xmlns:a14="http://schemas.microsoft.com/office/drawing/2010/main" xmlns="" w="9525">
                     <a:solidFill>
                       <a:srgbClr val="000000"/>
                     </a:solidFill>
@@ -10815,7 +10815,7 @@
               </a:ln>
               <a:extLst>
                 <a:ext uri="{91240B29-F687-4f45-9708-019B960494DF}">
-                  <a14:hiddenLine xmlns="" xmlns:a14="http://schemas.microsoft.com/office/drawing/2010/main" w="9525">
+                  <a14:hiddenLine xmlns:a14="http://schemas.microsoft.com/office/drawing/2010/main" xmlns="" w="9525">
                     <a:solidFill>
                       <a:srgbClr val="000000"/>
                     </a:solidFill>
@@ -10905,7 +10905,7 @@
               </a:ln>
               <a:extLst>
                 <a:ext uri="{91240B29-F687-4f45-9708-019B960494DF}">
-                  <a14:hiddenLine xmlns="" xmlns:a14="http://schemas.microsoft.com/office/drawing/2010/main" w="9525">
+                  <a14:hiddenLine xmlns:a14="http://schemas.microsoft.com/office/drawing/2010/main" xmlns="" w="9525">
                     <a:solidFill>
                       <a:srgbClr val="000000"/>
                     </a:solidFill>
@@ -10967,7 +10967,7 @@
               </a:ln>
               <a:extLst>
                 <a:ext uri="{91240B29-F687-4f45-9708-019B960494DF}">
-                  <a14:hiddenLine xmlns="" xmlns:a14="http://schemas.microsoft.com/office/drawing/2010/main" w="9525">
+                  <a14:hiddenLine xmlns:a14="http://schemas.microsoft.com/office/drawing/2010/main" xmlns="" w="9525">
                     <a:solidFill>
                       <a:srgbClr val="000000"/>
                     </a:solidFill>
@@ -11057,7 +11057,7 @@
               </a:ln>
               <a:extLst>
                 <a:ext uri="{91240B29-F687-4f45-9708-019B960494DF}">
-                  <a14:hiddenLine xmlns="" xmlns:a14="http://schemas.microsoft.com/office/drawing/2010/main" w="9525">
+                  <a14:hiddenLine xmlns:a14="http://schemas.microsoft.com/office/drawing/2010/main" xmlns="" w="9525">
                     <a:solidFill>
                       <a:srgbClr val="000000"/>
                     </a:solidFill>
@@ -11122,7 +11122,7 @@
               </a:ln>
               <a:extLst>
                 <a:ext uri="{91240B29-F687-4f45-9708-019B960494DF}">
-                  <a14:hiddenLine xmlns="" xmlns:a14="http://schemas.microsoft.com/office/drawing/2010/main" w="9525">
+                  <a14:hiddenLine xmlns:a14="http://schemas.microsoft.com/office/drawing/2010/main" xmlns="" w="9525">
                     <a:solidFill>
                       <a:srgbClr val="000000"/>
                     </a:solidFill>
@@ -11184,7 +11184,7 @@
               </a:ln>
               <a:extLst>
                 <a:ext uri="{91240B29-F687-4f45-9708-019B960494DF}">
-                  <a14:hiddenLine xmlns="" xmlns:a14="http://schemas.microsoft.com/office/drawing/2010/main" w="9525">
+                  <a14:hiddenLine xmlns:a14="http://schemas.microsoft.com/office/drawing/2010/main" xmlns="" w="9525">
                     <a:solidFill>
                       <a:srgbClr val="000000"/>
                     </a:solidFill>
@@ -11274,7 +11274,7 @@
               </a:ln>
               <a:extLst>
                 <a:ext uri="{91240B29-F687-4f45-9708-019B960494DF}">
-                  <a14:hiddenLine xmlns="" xmlns:a14="http://schemas.microsoft.com/office/drawing/2010/main" w="9525">
+                  <a14:hiddenLine xmlns:a14="http://schemas.microsoft.com/office/drawing/2010/main" xmlns="" w="9525">
                     <a:solidFill>
                       <a:srgbClr val="000000"/>
                     </a:solidFill>
@@ -11364,7 +11364,7 @@
               </a:ln>
               <a:extLst>
                 <a:ext uri="{91240B29-F687-4f45-9708-019B960494DF}">
-                  <a14:hiddenLine xmlns="" xmlns:a14="http://schemas.microsoft.com/office/drawing/2010/main" w="9525">
+                  <a14:hiddenLine xmlns:a14="http://schemas.microsoft.com/office/drawing/2010/main" xmlns="" w="9525">
                     <a:solidFill>
                       <a:srgbClr val="000000"/>
                     </a:solidFill>
@@ -11429,7 +11429,7 @@
               </a:ln>
               <a:extLst>
                 <a:ext uri="{91240B29-F687-4f45-9708-019B960494DF}">
-                  <a14:hiddenLine xmlns="" xmlns:a14="http://schemas.microsoft.com/office/drawing/2010/main" w="9525">
+                  <a14:hiddenLine xmlns:a14="http://schemas.microsoft.com/office/drawing/2010/main" xmlns="" w="9525">
                     <a:solidFill>
                       <a:srgbClr val="000000"/>
                     </a:solidFill>
@@ -11549,7 +11549,7 @@
               </a:ln>
               <a:extLst>
                 <a:ext uri="{91240B29-F687-4f45-9708-019B960494DF}">
-                  <a14:hiddenLine xmlns="" xmlns:a14="http://schemas.microsoft.com/office/drawing/2010/main" w="9525">
+                  <a14:hiddenLine xmlns:a14="http://schemas.microsoft.com/office/drawing/2010/main" xmlns="" w="9525">
                     <a:solidFill>
                       <a:srgbClr val="000000"/>
                     </a:solidFill>
@@ -11630,7 +11630,7 @@
               </a:ln>
               <a:extLst>
                 <a:ext uri="{91240B29-F687-4f45-9708-019B960494DF}">
-                  <a14:hiddenLine xmlns="" xmlns:a14="http://schemas.microsoft.com/office/drawing/2010/main" w="9525">
+                  <a14:hiddenLine xmlns:a14="http://schemas.microsoft.com/office/drawing/2010/main" xmlns="" w="9525">
                     <a:solidFill>
                       <a:srgbClr val="000000"/>
                     </a:solidFill>
@@ -11745,7 +11745,7 @@
               </a:ln>
               <a:extLst>
                 <a:ext uri="{91240B29-F687-4f45-9708-019B960494DF}">
-                  <a14:hiddenLine xmlns="" xmlns:a14="http://schemas.microsoft.com/office/drawing/2010/main" w="9525">
+                  <a14:hiddenLine xmlns:a14="http://schemas.microsoft.com/office/drawing/2010/main" xmlns="" w="9525">
                     <a:solidFill>
                       <a:srgbClr val="000000"/>
                     </a:solidFill>
@@ -11835,7 +11835,7 @@
               </a:ln>
               <a:extLst>
                 <a:ext uri="{91240B29-F687-4f45-9708-019B960494DF}">
-                  <a14:hiddenLine xmlns="" xmlns:a14="http://schemas.microsoft.com/office/drawing/2010/main" w="9525">
+                  <a14:hiddenLine xmlns:a14="http://schemas.microsoft.com/office/drawing/2010/main" xmlns="" w="9525">
                     <a:solidFill>
                       <a:srgbClr val="000000"/>
                     </a:solidFill>
@@ -11900,7 +11900,7 @@
               </a:ln>
               <a:extLst>
                 <a:ext uri="{91240B29-F687-4f45-9708-019B960494DF}">
-                  <a14:hiddenLine xmlns="" xmlns:a14="http://schemas.microsoft.com/office/drawing/2010/main" w="9525">
+                  <a14:hiddenLine xmlns:a14="http://schemas.microsoft.com/office/drawing/2010/main" xmlns="" w="9525">
                     <a:solidFill>
                       <a:srgbClr val="000000"/>
                     </a:solidFill>
@@ -11990,7 +11990,7 @@
               </a:ln>
               <a:extLst>
                 <a:ext uri="{91240B29-F687-4f45-9708-019B960494DF}">
-                  <a14:hiddenLine xmlns="" xmlns:a14="http://schemas.microsoft.com/office/drawing/2010/main" w="9525">
+                  <a14:hiddenLine xmlns:a14="http://schemas.microsoft.com/office/drawing/2010/main" xmlns="" w="9525">
                     <a:solidFill>
                       <a:srgbClr val="000000"/>
                     </a:solidFill>
@@ -12058,7 +12058,7 @@
               </a:ln>
               <a:extLst>
                 <a:ext uri="{91240B29-F687-4f45-9708-019B960494DF}">
-                  <a14:hiddenLine xmlns="" xmlns:a14="http://schemas.microsoft.com/office/drawing/2010/main" w="9525">
+                  <a14:hiddenLine xmlns:a14="http://schemas.microsoft.com/office/drawing/2010/main" xmlns="" w="9525">
                     <a:solidFill>
                       <a:srgbClr val="000000"/>
                     </a:solidFill>
@@ -12148,7 +12148,7 @@
               </a:ln>
               <a:extLst>
                 <a:ext uri="{91240B29-F687-4f45-9708-019B960494DF}">
-                  <a14:hiddenLine xmlns="" xmlns:a14="http://schemas.microsoft.com/office/drawing/2010/main" w="9525">
+                  <a14:hiddenLine xmlns:a14="http://schemas.microsoft.com/office/drawing/2010/main" xmlns="" w="9525">
                     <a:solidFill>
                       <a:srgbClr val="000000"/>
                     </a:solidFill>
@@ -12216,7 +12216,7 @@
               </a:ln>
               <a:extLst>
                 <a:ext uri="{91240B29-F687-4f45-9708-019B960494DF}">
-                  <a14:hiddenLine xmlns="" xmlns:a14="http://schemas.microsoft.com/office/drawing/2010/main" w="9525">
+                  <a14:hiddenLine xmlns:a14="http://schemas.microsoft.com/office/drawing/2010/main" xmlns="" w="9525">
                     <a:solidFill>
                       <a:srgbClr val="000000"/>
                     </a:solidFill>
@@ -12306,7 +12306,7 @@
               </a:ln>
               <a:extLst>
                 <a:ext uri="{91240B29-F687-4f45-9708-019B960494DF}">
-                  <a14:hiddenLine xmlns="" xmlns:a14="http://schemas.microsoft.com/office/drawing/2010/main" w="9525">
+                  <a14:hiddenLine xmlns:a14="http://schemas.microsoft.com/office/drawing/2010/main" xmlns="" w="9525">
                     <a:solidFill>
                       <a:srgbClr val="000000"/>
                     </a:solidFill>
@@ -12340,7 +12340,7 @@
               </a:ln>
               <a:extLst>
                 <a:ext uri="{91240B29-F687-4f45-9708-019B960494DF}">
-                  <a14:hiddenLine xmlns="" xmlns:a14="http://schemas.microsoft.com/office/drawing/2010/main" w="9525">
+                  <a14:hiddenLine xmlns:a14="http://schemas.microsoft.com/office/drawing/2010/main" xmlns="" w="9525">
                     <a:solidFill>
                       <a:srgbClr val="000000"/>
                     </a:solidFill>
@@ -16931,11 +16931,18 @@
           <a:lstStyle/>
           <a:p>
             <a:r>
-              <a:rPr lang="en-US" dirty="0">
-                <a:latin typeface="Arial" panose="020B0604020202020204" pitchFamily="34" charset="0"/>
-                <a:cs typeface="Arial" panose="020B0604020202020204" pitchFamily="34" charset="0"/>
-              </a:rPr>
-              <a:t>First homework is due Tomorrow evening (Wednesday)</a:t>
+              <a:rPr lang="en-US">
+                <a:latin typeface="Arial" panose="020B0604020202020204" pitchFamily="34" charset="0"/>
+                <a:cs typeface="Arial" panose="020B0604020202020204" pitchFamily="34" charset="0"/>
+              </a:rPr>
+              <a:t>First homework  </a:t>
+            </a:r>
+            <a:r>
+              <a:rPr lang="en-US" dirty="0">
+                <a:latin typeface="Arial" panose="020B0604020202020204" pitchFamily="34" charset="0"/>
+                <a:cs typeface="Arial" panose="020B0604020202020204" pitchFamily="34" charset="0"/>
+              </a:rPr>
+              <a:t>is due Tomorrow evening (Wednesday)</a:t>
             </a:r>
           </a:p>
           <a:p>

--- a/slides/00-DailyAnnouncements.pptx
+++ b/slides/00-DailyAnnouncements.pptx
@@ -5,27 +5,12 @@
     <p:sldMasterId id="2147484006" r:id="rId1"/>
   </p:sldMasterIdLst>
   <p:notesMasterIdLst>
-    <p:notesMasterId r:id="rId20"/>
+    <p:notesMasterId r:id="rId5"/>
   </p:notesMasterIdLst>
   <p:sldIdLst>
     <p:sldId id="256" r:id="rId2"/>
     <p:sldId id="505" r:id="rId3"/>
-    <p:sldId id="516" r:id="rId4"/>
-    <p:sldId id="517" r:id="rId5"/>
-    <p:sldId id="518" r:id="rId6"/>
-    <p:sldId id="519" r:id="rId7"/>
-    <p:sldId id="520" r:id="rId8"/>
-    <p:sldId id="521" r:id="rId9"/>
-    <p:sldId id="522" r:id="rId10"/>
-    <p:sldId id="523" r:id="rId11"/>
-    <p:sldId id="524" r:id="rId12"/>
-    <p:sldId id="525" r:id="rId13"/>
-    <p:sldId id="526" r:id="rId14"/>
-    <p:sldId id="527" r:id="rId15"/>
-    <p:sldId id="528" r:id="rId16"/>
-    <p:sldId id="529" r:id="rId17"/>
-    <p:sldId id="530" r:id="rId18"/>
-    <p:sldId id="515" r:id="rId19"/>
+    <p:sldId id="515" r:id="rId4"/>
   </p:sldIdLst>
   <p:sldSz cx="12192000" cy="6858000"/>
   <p:notesSz cx="6858000" cy="9144000"/>
@@ -214,7 +199,7 @@
           <a:p>
             <a:fld id="{C5B45307-6ED4-B142-BD64-10F739779302}" type="datetimeFigureOut">
               <a:rPr lang="en-US" smtClean="0"/>
-              <a:t>8/6/26</a:t>
+              <a:t>8/27/26</a:t>
             </a:fld>
             <a:endParaRPr lang="en-US"/>
           </a:p>
@@ -622,7 +607,7 @@
           <a:noFill/>
           <a:extLst>
             <a:ext uri="{909E8E84-426E-40dd-AFC4-6F175D3DCCD1}">
-              <a14:hiddenFill xmlns:a14="http://schemas.microsoft.com/office/drawing/2010/main" xmlns="">
+              <a14:hiddenFill xmlns="" xmlns:a14="http://schemas.microsoft.com/office/drawing/2010/main">
                 <a:solidFill>
                   <a:srgbClr val="FFFFFF"/>
                 </a:solidFill>
@@ -681,7 +666,7 @@
             </a:ln>
             <a:extLst>
               <a:ext uri="{91240B29-F687-4f45-9708-019B960494DF}">
-                <a14:hiddenLine xmlns:a14="http://schemas.microsoft.com/office/drawing/2010/main" xmlns="" w="9525">
+                <a14:hiddenLine xmlns="" xmlns:a14="http://schemas.microsoft.com/office/drawing/2010/main" w="9525">
                   <a:solidFill>
                     <a:srgbClr val="000000"/>
                   </a:solidFill>
@@ -771,7 +756,7 @@
             </a:ln>
             <a:extLst>
               <a:ext uri="{91240B29-F687-4f45-9708-019B960494DF}">
-                <a14:hiddenLine xmlns:a14="http://schemas.microsoft.com/office/drawing/2010/main" xmlns="" w="9525">
+                <a14:hiddenLine xmlns="" xmlns:a14="http://schemas.microsoft.com/office/drawing/2010/main" w="9525">
                   <a:solidFill>
                     <a:srgbClr val="000000"/>
                   </a:solidFill>
@@ -861,7 +846,7 @@
             </a:ln>
             <a:extLst>
               <a:ext uri="{91240B29-F687-4f45-9708-019B960494DF}">
-                <a14:hiddenLine xmlns:a14="http://schemas.microsoft.com/office/drawing/2010/main" xmlns="" w="9525">
+                <a14:hiddenLine xmlns="" xmlns:a14="http://schemas.microsoft.com/office/drawing/2010/main" w="9525">
                   <a:solidFill>
                     <a:srgbClr val="000000"/>
                   </a:solidFill>
@@ -895,7 +880,7 @@
             </a:ln>
             <a:extLst>
               <a:ext uri="{91240B29-F687-4f45-9708-019B960494DF}">
-                <a14:hiddenLine xmlns:a14="http://schemas.microsoft.com/office/drawing/2010/main" xmlns="" w="9525">
+                <a14:hiddenLine xmlns="" xmlns:a14="http://schemas.microsoft.com/office/drawing/2010/main" w="9525">
                   <a:solidFill>
                     <a:srgbClr val="000000"/>
                   </a:solidFill>
@@ -985,7 +970,7 @@
             </a:ln>
             <a:extLst>
               <a:ext uri="{91240B29-F687-4f45-9708-019B960494DF}">
-                <a14:hiddenLine xmlns:a14="http://schemas.microsoft.com/office/drawing/2010/main" xmlns="" w="9525">
+                <a14:hiddenLine xmlns="" xmlns:a14="http://schemas.microsoft.com/office/drawing/2010/main" w="9525">
                   <a:solidFill>
                     <a:srgbClr val="000000"/>
                   </a:solidFill>
@@ -1047,7 +1032,7 @@
             </a:ln>
             <a:extLst>
               <a:ext uri="{91240B29-F687-4f45-9708-019B960494DF}">
-                <a14:hiddenLine xmlns:a14="http://schemas.microsoft.com/office/drawing/2010/main" xmlns="" w="9525">
+                <a14:hiddenLine xmlns="" xmlns:a14="http://schemas.microsoft.com/office/drawing/2010/main" w="9525">
                   <a:solidFill>
                     <a:srgbClr val="000000"/>
                   </a:solidFill>
@@ -1109,7 +1094,7 @@
             </a:ln>
             <a:extLst>
               <a:ext uri="{91240B29-F687-4f45-9708-019B960494DF}">
-                <a14:hiddenLine xmlns:a14="http://schemas.microsoft.com/office/drawing/2010/main" xmlns="" w="9525">
+                <a14:hiddenLine xmlns="" xmlns:a14="http://schemas.microsoft.com/office/drawing/2010/main" w="9525">
                   <a:solidFill>
                     <a:srgbClr val="000000"/>
                   </a:solidFill>
@@ -1199,7 +1184,7 @@
             </a:ln>
             <a:extLst>
               <a:ext uri="{91240B29-F687-4f45-9708-019B960494DF}">
-                <a14:hiddenLine xmlns:a14="http://schemas.microsoft.com/office/drawing/2010/main" xmlns="" w="9525">
+                <a14:hiddenLine xmlns="" xmlns:a14="http://schemas.microsoft.com/office/drawing/2010/main" w="9525">
                   <a:solidFill>
                     <a:srgbClr val="000000"/>
                   </a:solidFill>
@@ -1261,7 +1246,7 @@
             </a:ln>
             <a:extLst>
               <a:ext uri="{91240B29-F687-4f45-9708-019B960494DF}">
-                <a14:hiddenLine xmlns:a14="http://schemas.microsoft.com/office/drawing/2010/main" xmlns="" w="9525">
+                <a14:hiddenLine xmlns="" xmlns:a14="http://schemas.microsoft.com/office/drawing/2010/main" w="9525">
                   <a:solidFill>
                     <a:srgbClr val="000000"/>
                   </a:solidFill>
@@ -1323,7 +1308,7 @@
             </a:ln>
             <a:extLst>
               <a:ext uri="{91240B29-F687-4f45-9708-019B960494DF}">
-                <a14:hiddenLine xmlns:a14="http://schemas.microsoft.com/office/drawing/2010/main" xmlns="" w="9525">
+                <a14:hiddenLine xmlns="" xmlns:a14="http://schemas.microsoft.com/office/drawing/2010/main" w="9525">
                   <a:solidFill>
                     <a:srgbClr val="000000"/>
                   </a:solidFill>
@@ -1413,7 +1398,7 @@
             </a:ln>
             <a:extLst>
               <a:ext uri="{91240B29-F687-4f45-9708-019B960494DF}">
-                <a14:hiddenLine xmlns:a14="http://schemas.microsoft.com/office/drawing/2010/main" xmlns="" w="9525">
+                <a14:hiddenLine xmlns="" xmlns:a14="http://schemas.microsoft.com/office/drawing/2010/main" w="9525">
                   <a:solidFill>
                     <a:srgbClr val="000000"/>
                   </a:solidFill>
@@ -1503,7 +1488,7 @@
             </a:ln>
             <a:extLst>
               <a:ext uri="{91240B29-F687-4f45-9708-019B960494DF}">
-                <a14:hiddenLine xmlns:a14="http://schemas.microsoft.com/office/drawing/2010/main" xmlns="" w="9525">
+                <a14:hiddenLine xmlns="" xmlns:a14="http://schemas.microsoft.com/office/drawing/2010/main" w="9525">
                   <a:solidFill>
                     <a:srgbClr val="000000"/>
                   </a:solidFill>
@@ -1565,7 +1550,7 @@
             </a:ln>
             <a:extLst>
               <a:ext uri="{91240B29-F687-4f45-9708-019B960494DF}">
-                <a14:hiddenLine xmlns:a14="http://schemas.microsoft.com/office/drawing/2010/main" xmlns="" w="9525">
+                <a14:hiddenLine xmlns="" xmlns:a14="http://schemas.microsoft.com/office/drawing/2010/main" w="9525">
                   <a:solidFill>
                     <a:srgbClr val="000000"/>
                   </a:solidFill>
@@ -1675,7 +1660,7 @@
             </a:ln>
             <a:extLst>
               <a:ext uri="{91240B29-F687-4f45-9708-019B960494DF}">
-                <a14:hiddenLine xmlns:a14="http://schemas.microsoft.com/office/drawing/2010/main" xmlns="" w="9525">
+                <a14:hiddenLine xmlns="" xmlns:a14="http://schemas.microsoft.com/office/drawing/2010/main" w="9525">
                   <a:solidFill>
                     <a:srgbClr val="000000"/>
                   </a:solidFill>
@@ -1737,7 +1722,7 @@
             </a:ln>
             <a:extLst>
               <a:ext uri="{91240B29-F687-4f45-9708-019B960494DF}">
-                <a14:hiddenLine xmlns:a14="http://schemas.microsoft.com/office/drawing/2010/main" xmlns="" w="9525">
+                <a14:hiddenLine xmlns="" xmlns:a14="http://schemas.microsoft.com/office/drawing/2010/main" w="9525">
                   <a:solidFill>
                     <a:srgbClr val="000000"/>
                   </a:solidFill>
@@ -1827,7 +1812,7 @@
             </a:ln>
             <a:extLst>
               <a:ext uri="{91240B29-F687-4f45-9708-019B960494DF}">
-                <a14:hiddenLine xmlns:a14="http://schemas.microsoft.com/office/drawing/2010/main" xmlns="" w="9525">
+                <a14:hiddenLine xmlns="" xmlns:a14="http://schemas.microsoft.com/office/drawing/2010/main" w="9525">
                   <a:solidFill>
                     <a:srgbClr val="000000"/>
                   </a:solidFill>
@@ -1917,7 +1902,7 @@
             </a:ln>
             <a:extLst>
               <a:ext uri="{91240B29-F687-4f45-9708-019B960494DF}">
-                <a14:hiddenLine xmlns:a14="http://schemas.microsoft.com/office/drawing/2010/main" xmlns="" w="9525">
+                <a14:hiddenLine xmlns="" xmlns:a14="http://schemas.microsoft.com/office/drawing/2010/main" w="9525">
                   <a:solidFill>
                     <a:srgbClr val="000000"/>
                   </a:solidFill>
@@ -1979,7 +1964,7 @@
             </a:ln>
             <a:extLst>
               <a:ext uri="{91240B29-F687-4f45-9708-019B960494DF}">
-                <a14:hiddenLine xmlns:a14="http://schemas.microsoft.com/office/drawing/2010/main" xmlns="" w="9525">
+                <a14:hiddenLine xmlns="" xmlns:a14="http://schemas.microsoft.com/office/drawing/2010/main" w="9525">
                   <a:solidFill>
                     <a:srgbClr val="000000"/>
                   </a:solidFill>
@@ -2069,7 +2054,7 @@
             </a:ln>
             <a:extLst>
               <a:ext uri="{91240B29-F687-4f45-9708-019B960494DF}">
-                <a14:hiddenLine xmlns:a14="http://schemas.microsoft.com/office/drawing/2010/main" xmlns="" w="9525">
+                <a14:hiddenLine xmlns="" xmlns:a14="http://schemas.microsoft.com/office/drawing/2010/main" w="9525">
                   <a:solidFill>
                     <a:srgbClr val="000000"/>
                   </a:solidFill>
@@ -2159,7 +2144,7 @@
             </a:ln>
             <a:extLst>
               <a:ext uri="{91240B29-F687-4f45-9708-019B960494DF}">
-                <a14:hiddenLine xmlns:a14="http://schemas.microsoft.com/office/drawing/2010/main" xmlns="" w="9525">
+                <a14:hiddenLine xmlns="" xmlns:a14="http://schemas.microsoft.com/office/drawing/2010/main" w="9525">
                   <a:solidFill>
                     <a:srgbClr val="000000"/>
                   </a:solidFill>
@@ -2215,7 +2200,7 @@
             </a:ln>
             <a:extLst>
               <a:ext uri="{91240B29-F687-4f45-9708-019B960494DF}">
-                <a14:hiddenLine xmlns:a14="http://schemas.microsoft.com/office/drawing/2010/main" xmlns="" w="9525">
+                <a14:hiddenLine xmlns="" xmlns:a14="http://schemas.microsoft.com/office/drawing/2010/main" w="9525">
                   <a:solidFill>
                     <a:srgbClr val="000000"/>
                   </a:solidFill>
@@ -2305,7 +2290,7 @@
             </a:ln>
             <a:extLst>
               <a:ext uri="{91240B29-F687-4f45-9708-019B960494DF}">
-                <a14:hiddenLine xmlns:a14="http://schemas.microsoft.com/office/drawing/2010/main" xmlns="" w="9525">
+                <a14:hiddenLine xmlns="" xmlns:a14="http://schemas.microsoft.com/office/drawing/2010/main" w="9525">
                   <a:solidFill>
                     <a:srgbClr val="000000"/>
                   </a:solidFill>
@@ -2361,7 +2346,7 @@
             </a:ln>
             <a:extLst>
               <a:ext uri="{91240B29-F687-4f45-9708-019B960494DF}">
-                <a14:hiddenLine xmlns:a14="http://schemas.microsoft.com/office/drawing/2010/main" xmlns="" w="9525">
+                <a14:hiddenLine xmlns="" xmlns:a14="http://schemas.microsoft.com/office/drawing/2010/main" w="9525">
                   <a:solidFill>
                     <a:srgbClr val="000000"/>
                   </a:solidFill>
@@ -2451,7 +2436,7 @@
             </a:ln>
             <a:extLst>
               <a:ext uri="{91240B29-F687-4f45-9708-019B960494DF}">
-                <a14:hiddenLine xmlns:a14="http://schemas.microsoft.com/office/drawing/2010/main" xmlns="" w="9525">
+                <a14:hiddenLine xmlns="" xmlns:a14="http://schemas.microsoft.com/office/drawing/2010/main" w="9525">
                   <a:solidFill>
                     <a:srgbClr val="000000"/>
                   </a:solidFill>
@@ -2519,7 +2504,7 @@
             </a:ln>
             <a:extLst>
               <a:ext uri="{91240B29-F687-4f45-9708-019B960494DF}">
-                <a14:hiddenLine xmlns:a14="http://schemas.microsoft.com/office/drawing/2010/main" xmlns="" w="9525">
+                <a14:hiddenLine xmlns="" xmlns:a14="http://schemas.microsoft.com/office/drawing/2010/main" w="9525">
                   <a:solidFill>
                     <a:srgbClr val="000000"/>
                   </a:solidFill>
@@ -2609,7 +2594,7 @@
             </a:ln>
             <a:extLst>
               <a:ext uri="{91240B29-F687-4f45-9708-019B960494DF}">
-                <a14:hiddenLine xmlns:a14="http://schemas.microsoft.com/office/drawing/2010/main" xmlns="" w="9525">
+                <a14:hiddenLine xmlns="" xmlns:a14="http://schemas.microsoft.com/office/drawing/2010/main" w="9525">
                   <a:solidFill>
                     <a:srgbClr val="000000"/>
                   </a:solidFill>
@@ -2677,7 +2662,7 @@
             </a:ln>
             <a:extLst>
               <a:ext uri="{91240B29-F687-4f45-9708-019B960494DF}">
-                <a14:hiddenLine xmlns:a14="http://schemas.microsoft.com/office/drawing/2010/main" xmlns="" w="9525">
+                <a14:hiddenLine xmlns="" xmlns:a14="http://schemas.microsoft.com/office/drawing/2010/main" w="9525">
                   <a:solidFill>
                     <a:srgbClr val="000000"/>
                   </a:solidFill>
@@ -2767,7 +2752,7 @@
             </a:ln>
             <a:extLst>
               <a:ext uri="{91240B29-F687-4f45-9708-019B960494DF}">
-                <a14:hiddenLine xmlns:a14="http://schemas.microsoft.com/office/drawing/2010/main" xmlns="" w="9525">
+                <a14:hiddenLine xmlns="" xmlns:a14="http://schemas.microsoft.com/office/drawing/2010/main" w="9525">
                   <a:solidFill>
                     <a:srgbClr val="000000"/>
                   </a:solidFill>
@@ -2801,7 +2786,7 @@
             </a:ln>
             <a:extLst>
               <a:ext uri="{91240B29-F687-4f45-9708-019B960494DF}">
-                <a14:hiddenLine xmlns:a14="http://schemas.microsoft.com/office/drawing/2010/main" xmlns="" w="9525">
+                <a14:hiddenLine xmlns="" xmlns:a14="http://schemas.microsoft.com/office/drawing/2010/main" w="9525">
                   <a:solidFill>
                     <a:srgbClr val="000000"/>
                   </a:solidFill>
@@ -2891,7 +2876,7 @@
             </a:ln>
             <a:extLst>
               <a:ext uri="{91240B29-F687-4f45-9708-019B960494DF}">
-                <a14:hiddenLine xmlns:a14="http://schemas.microsoft.com/office/drawing/2010/main" xmlns="" w="9525">
+                <a14:hiddenLine xmlns="" xmlns:a14="http://schemas.microsoft.com/office/drawing/2010/main" w="9525">
                   <a:solidFill>
                     <a:srgbClr val="000000"/>
                   </a:solidFill>
@@ -2953,7 +2938,7 @@
             </a:ln>
             <a:extLst>
               <a:ext uri="{91240B29-F687-4f45-9708-019B960494DF}">
-                <a14:hiddenLine xmlns:a14="http://schemas.microsoft.com/office/drawing/2010/main" xmlns="" w="9525">
+                <a14:hiddenLine xmlns="" xmlns:a14="http://schemas.microsoft.com/office/drawing/2010/main" w="9525">
                   <a:solidFill>
                     <a:srgbClr val="000000"/>
                   </a:solidFill>
@@ -3015,7 +3000,7 @@
             </a:ln>
             <a:extLst>
               <a:ext uri="{91240B29-F687-4f45-9708-019B960494DF}">
-                <a14:hiddenLine xmlns:a14="http://schemas.microsoft.com/office/drawing/2010/main" xmlns="" w="9525">
+                <a14:hiddenLine xmlns="" xmlns:a14="http://schemas.microsoft.com/office/drawing/2010/main" w="9525">
                   <a:solidFill>
                     <a:srgbClr val="000000"/>
                   </a:solidFill>
@@ -3105,7 +3090,7 @@
             </a:ln>
             <a:extLst>
               <a:ext uri="{91240B29-F687-4f45-9708-019B960494DF}">
-                <a14:hiddenLine xmlns:a14="http://schemas.microsoft.com/office/drawing/2010/main" xmlns="" w="9525">
+                <a14:hiddenLine xmlns="" xmlns:a14="http://schemas.microsoft.com/office/drawing/2010/main" w="9525">
                   <a:solidFill>
                     <a:srgbClr val="000000"/>
                   </a:solidFill>
@@ -3173,7 +3158,7 @@
             </a:ln>
             <a:extLst>
               <a:ext uri="{91240B29-F687-4f45-9708-019B960494DF}">
-                <a14:hiddenLine xmlns:a14="http://schemas.microsoft.com/office/drawing/2010/main" xmlns="" w="9525">
+                <a14:hiddenLine xmlns="" xmlns:a14="http://schemas.microsoft.com/office/drawing/2010/main" w="9525">
                   <a:solidFill>
                     <a:srgbClr val="000000"/>
                   </a:solidFill>
@@ -3235,7 +3220,7 @@
             </a:ln>
             <a:extLst>
               <a:ext uri="{91240B29-F687-4f45-9708-019B960494DF}">
-                <a14:hiddenLine xmlns:a14="http://schemas.microsoft.com/office/drawing/2010/main" xmlns="" w="9525">
+                <a14:hiddenLine xmlns="" xmlns:a14="http://schemas.microsoft.com/office/drawing/2010/main" w="9525">
                   <a:solidFill>
                     <a:srgbClr val="000000"/>
                   </a:solidFill>
@@ -3325,7 +3310,7 @@
             </a:ln>
             <a:extLst>
               <a:ext uri="{91240B29-F687-4f45-9708-019B960494DF}">
-                <a14:hiddenLine xmlns:a14="http://schemas.microsoft.com/office/drawing/2010/main" xmlns="" w="9525">
+                <a14:hiddenLine xmlns="" xmlns:a14="http://schemas.microsoft.com/office/drawing/2010/main" w="9525">
                   <a:solidFill>
                     <a:srgbClr val="000000"/>
                   </a:solidFill>
@@ -3387,7 +3372,7 @@
             </a:ln>
             <a:extLst>
               <a:ext uri="{91240B29-F687-4f45-9708-019B960494DF}">
-                <a14:hiddenLine xmlns:a14="http://schemas.microsoft.com/office/drawing/2010/main" xmlns="" w="9525">
+                <a14:hiddenLine xmlns="" xmlns:a14="http://schemas.microsoft.com/office/drawing/2010/main" w="9525">
                   <a:solidFill>
                     <a:srgbClr val="000000"/>
                   </a:solidFill>
@@ -3477,7 +3462,7 @@
             </a:ln>
             <a:extLst>
               <a:ext uri="{91240B29-F687-4f45-9708-019B960494DF}">
-                <a14:hiddenLine xmlns:a14="http://schemas.microsoft.com/office/drawing/2010/main" xmlns="" w="9525">
+                <a14:hiddenLine xmlns="" xmlns:a14="http://schemas.microsoft.com/office/drawing/2010/main" w="9525">
                   <a:solidFill>
                     <a:srgbClr val="000000"/>
                   </a:solidFill>
@@ -3539,7 +3524,7 @@
             </a:ln>
             <a:extLst>
               <a:ext uri="{91240B29-F687-4f45-9708-019B960494DF}">
-                <a14:hiddenLine xmlns:a14="http://schemas.microsoft.com/office/drawing/2010/main" xmlns="" w="9525">
+                <a14:hiddenLine xmlns="" xmlns:a14="http://schemas.microsoft.com/office/drawing/2010/main" w="9525">
                   <a:solidFill>
                     <a:srgbClr val="000000"/>
                   </a:solidFill>
@@ -3629,7 +3614,7 @@
             </a:ln>
             <a:extLst>
               <a:ext uri="{91240B29-F687-4f45-9708-019B960494DF}">
-                <a14:hiddenLine xmlns:a14="http://schemas.microsoft.com/office/drawing/2010/main" xmlns="" w="9525">
+                <a14:hiddenLine xmlns="" xmlns:a14="http://schemas.microsoft.com/office/drawing/2010/main" w="9525">
                   <a:solidFill>
                     <a:srgbClr val="000000"/>
                   </a:solidFill>
@@ -3663,7 +3648,7 @@
             </a:ln>
             <a:extLst>
               <a:ext uri="{91240B29-F687-4f45-9708-019B960494DF}">
-                <a14:hiddenLine xmlns:a14="http://schemas.microsoft.com/office/drawing/2010/main" xmlns="" w="9525">
+                <a14:hiddenLine xmlns="" xmlns:a14="http://schemas.microsoft.com/office/drawing/2010/main" w="9525">
                   <a:solidFill>
                     <a:srgbClr val="000000"/>
                   </a:solidFill>
@@ -3728,7 +3713,7 @@
             </a:ln>
             <a:extLst>
               <a:ext uri="{91240B29-F687-4f45-9708-019B960494DF}">
-                <a14:hiddenLine xmlns:a14="http://schemas.microsoft.com/office/drawing/2010/main" xmlns="" w="9525">
+                <a14:hiddenLine xmlns="" xmlns:a14="http://schemas.microsoft.com/office/drawing/2010/main" w="9525">
                   <a:solidFill>
                     <a:srgbClr val="000000"/>
                   </a:solidFill>
@@ -3818,7 +3803,7 @@
             </a:ln>
             <a:extLst>
               <a:ext uri="{91240B29-F687-4f45-9708-019B960494DF}">
-                <a14:hiddenLine xmlns:a14="http://schemas.microsoft.com/office/drawing/2010/main" xmlns="" w="9525">
+                <a14:hiddenLine xmlns="" xmlns:a14="http://schemas.microsoft.com/office/drawing/2010/main" w="9525">
                   <a:solidFill>
                     <a:srgbClr val="000000"/>
                   </a:solidFill>
@@ -3880,7 +3865,7 @@
             </a:ln>
             <a:extLst>
               <a:ext uri="{91240B29-F687-4f45-9708-019B960494DF}">
-                <a14:hiddenLine xmlns:a14="http://schemas.microsoft.com/office/drawing/2010/main" xmlns="" w="9525">
+                <a14:hiddenLine xmlns="" xmlns:a14="http://schemas.microsoft.com/office/drawing/2010/main" w="9525">
                   <a:solidFill>
                     <a:srgbClr val="000000"/>
                   </a:solidFill>
@@ -3970,7 +3955,7 @@
             </a:ln>
             <a:extLst>
               <a:ext uri="{91240B29-F687-4f45-9708-019B960494DF}">
-                <a14:hiddenLine xmlns:a14="http://schemas.microsoft.com/office/drawing/2010/main" xmlns="" w="9525">
+                <a14:hiddenLine xmlns="" xmlns:a14="http://schemas.microsoft.com/office/drawing/2010/main" w="9525">
                   <a:solidFill>
                     <a:srgbClr val="000000"/>
                   </a:solidFill>
@@ -4060,7 +4045,7 @@
             </a:ln>
             <a:extLst>
               <a:ext uri="{91240B29-F687-4f45-9708-019B960494DF}">
-                <a14:hiddenLine xmlns:a14="http://schemas.microsoft.com/office/drawing/2010/main" xmlns="" w="9525">
+                <a14:hiddenLine xmlns="" xmlns:a14="http://schemas.microsoft.com/office/drawing/2010/main" w="9525">
                   <a:solidFill>
                     <a:srgbClr val="000000"/>
                   </a:solidFill>
@@ -4125,7 +4110,7 @@
             </a:ln>
             <a:extLst>
               <a:ext uri="{91240B29-F687-4f45-9708-019B960494DF}">
-                <a14:hiddenLine xmlns:a14="http://schemas.microsoft.com/office/drawing/2010/main" xmlns="" w="9525">
+                <a14:hiddenLine xmlns="" xmlns:a14="http://schemas.microsoft.com/office/drawing/2010/main" w="9525">
                   <a:solidFill>
                     <a:srgbClr val="000000"/>
                   </a:solidFill>
@@ -4187,7 +4172,7 @@
             </a:ln>
             <a:extLst>
               <a:ext uri="{91240B29-F687-4f45-9708-019B960494DF}">
-                <a14:hiddenLine xmlns:a14="http://schemas.microsoft.com/office/drawing/2010/main" xmlns="" w="9525">
+                <a14:hiddenLine xmlns="" xmlns:a14="http://schemas.microsoft.com/office/drawing/2010/main" w="9525">
                   <a:solidFill>
                     <a:srgbClr val="000000"/>
                   </a:solidFill>
@@ -4277,7 +4262,7 @@
             </a:ln>
             <a:extLst>
               <a:ext uri="{91240B29-F687-4f45-9708-019B960494DF}">
-                <a14:hiddenLine xmlns:a14="http://schemas.microsoft.com/office/drawing/2010/main" xmlns="" w="9525">
+                <a14:hiddenLine xmlns="" xmlns:a14="http://schemas.microsoft.com/office/drawing/2010/main" w="9525">
                   <a:solidFill>
                     <a:srgbClr val="000000"/>
                   </a:solidFill>
@@ -4367,7 +4352,7 @@
             </a:ln>
             <a:extLst>
               <a:ext uri="{91240B29-F687-4f45-9708-019B960494DF}">
-                <a14:hiddenLine xmlns:a14="http://schemas.microsoft.com/office/drawing/2010/main" xmlns="" w="9525">
+                <a14:hiddenLine xmlns="" xmlns:a14="http://schemas.microsoft.com/office/drawing/2010/main" w="9525">
                   <a:solidFill>
                     <a:srgbClr val="000000"/>
                   </a:solidFill>
@@ -4429,7 +4414,7 @@
             </a:ln>
             <a:extLst>
               <a:ext uri="{91240B29-F687-4f45-9708-019B960494DF}">
-                <a14:hiddenLine xmlns:a14="http://schemas.microsoft.com/office/drawing/2010/main" xmlns="" w="9525">
+                <a14:hiddenLine xmlns="" xmlns:a14="http://schemas.microsoft.com/office/drawing/2010/main" w="9525">
                   <a:solidFill>
                     <a:srgbClr val="000000"/>
                   </a:solidFill>
@@ -4549,7 +4534,7 @@
             </a:ln>
             <a:extLst>
               <a:ext uri="{91240B29-F687-4f45-9708-019B960494DF}">
-                <a14:hiddenLine xmlns:a14="http://schemas.microsoft.com/office/drawing/2010/main" xmlns="" w="9525">
+                <a14:hiddenLine xmlns="" xmlns:a14="http://schemas.microsoft.com/office/drawing/2010/main" w="9525">
                   <a:solidFill>
                     <a:srgbClr val="000000"/>
                   </a:solidFill>
@@ -4617,7 +4602,7 @@
             </a:ln>
             <a:extLst>
               <a:ext uri="{91240B29-F687-4f45-9708-019B960494DF}">
-                <a14:hiddenLine xmlns:a14="http://schemas.microsoft.com/office/drawing/2010/main" xmlns="" w="9525">
+                <a14:hiddenLine xmlns="" xmlns:a14="http://schemas.microsoft.com/office/drawing/2010/main" w="9525">
                   <a:solidFill>
                     <a:srgbClr val="000000"/>
                   </a:solidFill>
@@ -4707,7 +4692,7 @@
             </a:ln>
             <a:extLst>
               <a:ext uri="{91240B29-F687-4f45-9708-019B960494DF}">
-                <a14:hiddenLine xmlns:a14="http://schemas.microsoft.com/office/drawing/2010/main" xmlns="" w="9525">
+                <a14:hiddenLine xmlns="" xmlns:a14="http://schemas.microsoft.com/office/drawing/2010/main" w="9525">
                   <a:solidFill>
                     <a:srgbClr val="000000"/>
                   </a:solidFill>
@@ -4847,7 +4832,7 @@
           <a:p>
             <a:fld id="{4313F670-7F9A-774D-B73D-573401E44297}" type="datetime1">
               <a:rPr lang="en-US" smtClean="0"/>
-              <a:t>8/6/26</a:t>
+              <a:t>8/27/26</a:t>
             </a:fld>
             <a:endParaRPr lang="en-US"/>
           </a:p>
@@ -5114,7 +5099,7 @@
           <a:p>
             <a:fld id="{446F9669-A8A7-2D40-9D01-B35FC337AA30}" type="datetime1">
               <a:rPr lang="en-US" smtClean="0"/>
-              <a:t>8/6/26</a:t>
+              <a:t>8/27/26</a:t>
             </a:fld>
             <a:endParaRPr lang="en-US"/>
           </a:p>
@@ -5310,7 +5295,7 @@
           <a:p>
             <a:fld id="{FA76CF18-F41B-6B48-B3E5-599E9795C2C3}" type="datetime1">
               <a:rPr lang="en-US" smtClean="0"/>
-              <a:t>8/6/26</a:t>
+              <a:t>8/27/26</a:t>
             </a:fld>
             <a:endParaRPr lang="en-US"/>
           </a:p>
@@ -5573,7 +5558,7 @@
           <a:p>
             <a:fld id="{B9654854-6457-164F-A077-6B3035079B82}" type="datetime1">
               <a:rPr lang="en-US" smtClean="0"/>
-              <a:t>8/6/26</a:t>
+              <a:t>8/27/26</a:t>
             </a:fld>
             <a:endParaRPr lang="en-US"/>
           </a:p>
@@ -6007,7 +5992,7 @@
           <a:p>
             <a:fld id="{CE3DBFD7-E611-8C40-AC73-0C29FF63F0CD}" type="datetime1">
               <a:rPr lang="en-US" smtClean="0"/>
-              <a:t>8/6/26</a:t>
+              <a:t>8/27/26</a:t>
             </a:fld>
             <a:endParaRPr lang="en-US"/>
           </a:p>
@@ -6553,7 +6538,7 @@
           <a:p>
             <a:fld id="{C8B63B06-0493-2840-9F37-30C9412BBF17}" type="datetime1">
               <a:rPr lang="en-US" smtClean="0"/>
-              <a:t>8/6/26</a:t>
+              <a:t>8/27/26</a:t>
             </a:fld>
             <a:endParaRPr lang="en-US"/>
           </a:p>
@@ -7273,7 +7258,7 @@
           <a:p>
             <a:fld id="{72B5C0FA-8C46-E84D-B6D7-B673F2CA0A0E}" type="datetime1">
               <a:rPr lang="en-US" smtClean="0"/>
-              <a:t>8/6/26</a:t>
+              <a:t>8/27/26</a:t>
             </a:fld>
             <a:endParaRPr lang="en-US"/>
           </a:p>
@@ -7443,7 +7428,7 @@
           <a:p>
             <a:fld id="{60B9CDE1-97B4-BF46-B69C-B86855B18820}" type="datetime1">
               <a:rPr lang="en-US" smtClean="0"/>
-              <a:t>8/6/26</a:t>
+              <a:t>8/27/26</a:t>
             </a:fld>
             <a:endParaRPr lang="en-US"/>
           </a:p>
@@ -7623,7 +7608,7 @@
           <a:p>
             <a:fld id="{BE51D3A4-F9E5-FD49-AA87-B395F50451DC}" type="datetime1">
               <a:rPr lang="en-US" smtClean="0"/>
-              <a:t>8/6/26</a:t>
+              <a:t>8/27/26</a:t>
             </a:fld>
             <a:endParaRPr lang="en-US"/>
           </a:p>
@@ -7793,7 +7778,7 @@
           <a:p>
             <a:fld id="{880DFB37-B0AE-9449-85EC-14F9C83B6084}" type="datetime1">
               <a:rPr lang="en-US" smtClean="0"/>
-              <a:t>8/6/26</a:t>
+              <a:t>8/27/26</a:t>
             </a:fld>
             <a:endParaRPr lang="en-US"/>
           </a:p>
@@ -8043,7 +8028,7 @@
           <a:p>
             <a:fld id="{C939124A-616E-6944-A21A-1839F5DBE7BB}" type="datetime1">
               <a:rPr lang="en-US" smtClean="0"/>
-              <a:t>8/6/26</a:t>
+              <a:t>8/27/26</a:t>
             </a:fld>
             <a:endParaRPr lang="en-US"/>
           </a:p>
@@ -8275,7 +8260,7 @@
           <a:p>
             <a:fld id="{C6E9A026-D48C-FD43-8676-CD625DD5D84B}" type="datetime1">
               <a:rPr lang="en-US" smtClean="0"/>
-              <a:t>8/6/26</a:t>
+              <a:t>8/27/26</a:t>
             </a:fld>
             <a:endParaRPr lang="en-US"/>
           </a:p>
@@ -8661,7 +8646,7 @@
           <a:p>
             <a:fld id="{EA35111E-23A3-1440-99A3-C4C665908E3D}" type="datetime1">
               <a:rPr lang="en-US" smtClean="0"/>
-              <a:t>8/6/26</a:t>
+              <a:t>8/27/26</a:t>
             </a:fld>
             <a:endParaRPr lang="en-US"/>
           </a:p>
@@ -8784,7 +8769,7 @@
           <a:p>
             <a:fld id="{249983B9-88EF-D74B-BA6D-6A3BF17C2B38}" type="datetime1">
               <a:rPr lang="en-US" smtClean="0"/>
-              <a:t>8/6/26</a:t>
+              <a:t>8/27/26</a:t>
             </a:fld>
             <a:endParaRPr lang="en-US"/>
           </a:p>
@@ -8879,7 +8864,7 @@
           <a:p>
             <a:fld id="{E2A00AEF-B4EC-084A-8DB8-A225C7981CBB}" type="datetime1">
               <a:rPr lang="en-US" smtClean="0"/>
-              <a:t>8/6/26</a:t>
+              <a:t>8/27/26</a:t>
             </a:fld>
             <a:endParaRPr lang="en-US"/>
           </a:p>
@@ -9128,7 +9113,7 @@
           <a:p>
             <a:fld id="{97860299-21CD-A94A-A7B0-44E787F8D42C}" type="datetime1">
               <a:rPr lang="en-US" smtClean="0"/>
-              <a:t>8/6/26</a:t>
+              <a:t>8/27/26</a:t>
             </a:fld>
             <a:endParaRPr lang="en-US"/>
           </a:p>
@@ -9413,7 +9398,7 @@
           <a:p>
             <a:fld id="{3DFD19CF-4E62-D246-BA61-7B528271315F}" type="datetime1">
               <a:rPr lang="en-US" smtClean="0"/>
-              <a:t>8/6/26</a:t>
+              <a:t>8/27/26</a:t>
             </a:fld>
             <a:endParaRPr lang="en-US"/>
           </a:p>
@@ -9536,7 +9521,7 @@
           <a:noFill/>
           <a:extLst>
             <a:ext uri="{909E8E84-426E-40dd-AFC4-6F175D3DCCD1}">
-              <a14:hiddenFill xmlns:a14="http://schemas.microsoft.com/office/drawing/2010/main" xmlns="">
+              <a14:hiddenFill xmlns="" xmlns:a14="http://schemas.microsoft.com/office/drawing/2010/main">
                 <a:solidFill>
                   <a:srgbClr val="FFFFFF"/>
                 </a:solidFill>
@@ -9610,7 +9595,7 @@
               </a:ln>
               <a:extLst>
                 <a:ext uri="{91240B29-F687-4f45-9708-019B960494DF}">
-                  <a14:hiddenLine xmlns:a14="http://schemas.microsoft.com/office/drawing/2010/main" xmlns="" w="9525">
+                  <a14:hiddenLine xmlns="" xmlns:a14="http://schemas.microsoft.com/office/drawing/2010/main" w="9525">
                     <a:solidFill>
                       <a:srgbClr val="000000"/>
                     </a:solidFill>
@@ -9700,7 +9685,7 @@
               </a:ln>
               <a:extLst>
                 <a:ext uri="{91240B29-F687-4f45-9708-019B960494DF}">
-                  <a14:hiddenLine xmlns:a14="http://schemas.microsoft.com/office/drawing/2010/main" xmlns="" w="9525">
+                  <a14:hiddenLine xmlns="" xmlns:a14="http://schemas.microsoft.com/office/drawing/2010/main" w="9525">
                     <a:solidFill>
                       <a:srgbClr val="000000"/>
                     </a:solidFill>
@@ -9790,7 +9775,7 @@
               </a:ln>
               <a:extLst>
                 <a:ext uri="{91240B29-F687-4f45-9708-019B960494DF}">
-                  <a14:hiddenLine xmlns:a14="http://schemas.microsoft.com/office/drawing/2010/main" xmlns="" w="9525">
+                  <a14:hiddenLine xmlns="" xmlns:a14="http://schemas.microsoft.com/office/drawing/2010/main" w="9525">
                     <a:solidFill>
                       <a:srgbClr val="000000"/>
                     </a:solidFill>
@@ -9852,7 +9837,7 @@
               </a:ln>
               <a:extLst>
                 <a:ext uri="{91240B29-F687-4f45-9708-019B960494DF}">
-                  <a14:hiddenLine xmlns:a14="http://schemas.microsoft.com/office/drawing/2010/main" xmlns="" w="9525">
+                  <a14:hiddenLine xmlns="" xmlns:a14="http://schemas.microsoft.com/office/drawing/2010/main" w="9525">
                     <a:solidFill>
                       <a:srgbClr val="000000"/>
                     </a:solidFill>
@@ -9942,7 +9927,7 @@
               </a:ln>
               <a:extLst>
                 <a:ext uri="{91240B29-F687-4f45-9708-019B960494DF}">
-                  <a14:hiddenLine xmlns:a14="http://schemas.microsoft.com/office/drawing/2010/main" xmlns="" w="9525">
+                  <a14:hiddenLine xmlns="" xmlns:a14="http://schemas.microsoft.com/office/drawing/2010/main" w="9525">
                     <a:solidFill>
                       <a:srgbClr val="000000"/>
                     </a:solidFill>
@@ -10004,7 +9989,7 @@
               </a:ln>
               <a:extLst>
                 <a:ext uri="{91240B29-F687-4f45-9708-019B960494DF}">
-                  <a14:hiddenLine xmlns:a14="http://schemas.microsoft.com/office/drawing/2010/main" xmlns="" w="9525">
+                  <a14:hiddenLine xmlns="" xmlns:a14="http://schemas.microsoft.com/office/drawing/2010/main" w="9525">
                     <a:solidFill>
                       <a:srgbClr val="000000"/>
                     </a:solidFill>
@@ -10066,7 +10051,7 @@
               </a:ln>
               <a:extLst>
                 <a:ext uri="{91240B29-F687-4f45-9708-019B960494DF}">
-                  <a14:hiddenLine xmlns:a14="http://schemas.microsoft.com/office/drawing/2010/main" xmlns="" w="9525">
+                  <a14:hiddenLine xmlns="" xmlns:a14="http://schemas.microsoft.com/office/drawing/2010/main" w="9525">
                     <a:solidFill>
                       <a:srgbClr val="000000"/>
                     </a:solidFill>
@@ -10156,7 +10141,7 @@
               </a:ln>
               <a:extLst>
                 <a:ext uri="{91240B29-F687-4f45-9708-019B960494DF}">
-                  <a14:hiddenLine xmlns:a14="http://schemas.microsoft.com/office/drawing/2010/main" xmlns="" w="9525">
+                  <a14:hiddenLine xmlns="" xmlns:a14="http://schemas.microsoft.com/office/drawing/2010/main" w="9525">
                     <a:solidFill>
                       <a:srgbClr val="000000"/>
                     </a:solidFill>
@@ -10246,7 +10231,7 @@
               </a:ln>
               <a:extLst>
                 <a:ext uri="{91240B29-F687-4f45-9708-019B960494DF}">
-                  <a14:hiddenLine xmlns:a14="http://schemas.microsoft.com/office/drawing/2010/main" xmlns="" w="9525">
+                  <a14:hiddenLine xmlns="" xmlns:a14="http://schemas.microsoft.com/office/drawing/2010/main" w="9525">
                     <a:solidFill>
                       <a:srgbClr val="000000"/>
                     </a:solidFill>
@@ -10308,7 +10293,7 @@
               </a:ln>
               <a:extLst>
                 <a:ext uri="{91240B29-F687-4f45-9708-019B960494DF}">
-                  <a14:hiddenLine xmlns:a14="http://schemas.microsoft.com/office/drawing/2010/main" xmlns="" w="9525">
+                  <a14:hiddenLine xmlns="" xmlns:a14="http://schemas.microsoft.com/office/drawing/2010/main" w="9525">
                     <a:solidFill>
                       <a:srgbClr val="000000"/>
                     </a:solidFill>
@@ -10418,7 +10403,7 @@
               </a:ln>
               <a:extLst>
                 <a:ext uri="{91240B29-F687-4f45-9708-019B960494DF}">
-                  <a14:hiddenLine xmlns:a14="http://schemas.microsoft.com/office/drawing/2010/main" xmlns="" w="9525">
+                  <a14:hiddenLine xmlns="" xmlns:a14="http://schemas.microsoft.com/office/drawing/2010/main" w="9525">
                     <a:solidFill>
                       <a:srgbClr val="000000"/>
                     </a:solidFill>
@@ -10502,7 +10487,7 @@
               </a:ln>
               <a:extLst>
                 <a:ext uri="{91240B29-F687-4f45-9708-019B960494DF}">
-                  <a14:hiddenLine xmlns:a14="http://schemas.microsoft.com/office/drawing/2010/main" xmlns="" w="9525">
+                  <a14:hiddenLine xmlns="" xmlns:a14="http://schemas.microsoft.com/office/drawing/2010/main" w="9525">
                     <a:solidFill>
                       <a:srgbClr val="000000"/>
                     </a:solidFill>
@@ -10564,7 +10549,7 @@
               </a:ln>
               <a:extLst>
                 <a:ext uri="{91240B29-F687-4f45-9708-019B960494DF}">
-                  <a14:hiddenLine xmlns:a14="http://schemas.microsoft.com/office/drawing/2010/main" xmlns="" w="9525">
+                  <a14:hiddenLine xmlns="" xmlns:a14="http://schemas.microsoft.com/office/drawing/2010/main" w="9525">
                     <a:solidFill>
                       <a:srgbClr val="000000"/>
                     </a:solidFill>
@@ -10626,7 +10611,7 @@
               </a:ln>
               <a:extLst>
                 <a:ext uri="{91240B29-F687-4f45-9708-019B960494DF}">
-                  <a14:hiddenLine xmlns:a14="http://schemas.microsoft.com/office/drawing/2010/main" xmlns="" w="9525">
+                  <a14:hiddenLine xmlns="" xmlns:a14="http://schemas.microsoft.com/office/drawing/2010/main" w="9525">
                     <a:solidFill>
                       <a:srgbClr val="000000"/>
                     </a:solidFill>
@@ -10716,7 +10701,7 @@
               </a:ln>
               <a:extLst>
                 <a:ext uri="{91240B29-F687-4f45-9708-019B960494DF}">
-                  <a14:hiddenLine xmlns:a14="http://schemas.microsoft.com/office/drawing/2010/main" xmlns="" w="9525">
+                  <a14:hiddenLine xmlns="" xmlns:a14="http://schemas.microsoft.com/office/drawing/2010/main" w="9525">
                     <a:solidFill>
                       <a:srgbClr val="000000"/>
                     </a:solidFill>
@@ -10750,7 +10735,7 @@
               </a:ln>
               <a:extLst>
                 <a:ext uri="{91240B29-F687-4f45-9708-019B960494DF}">
-                  <a14:hiddenLine xmlns:a14="http://schemas.microsoft.com/office/drawing/2010/main" xmlns="" w="9525">
+                  <a14:hiddenLine xmlns="" xmlns:a14="http://schemas.microsoft.com/office/drawing/2010/main" w="9525">
                     <a:solidFill>
                       <a:srgbClr val="000000"/>
                     </a:solidFill>
@@ -10815,7 +10800,7 @@
               </a:ln>
               <a:extLst>
                 <a:ext uri="{91240B29-F687-4f45-9708-019B960494DF}">
-                  <a14:hiddenLine xmlns:a14="http://schemas.microsoft.com/office/drawing/2010/main" xmlns="" w="9525">
+                  <a14:hiddenLine xmlns="" xmlns:a14="http://schemas.microsoft.com/office/drawing/2010/main" w="9525">
                     <a:solidFill>
                       <a:srgbClr val="000000"/>
                     </a:solidFill>
@@ -10905,7 +10890,7 @@
               </a:ln>
               <a:extLst>
                 <a:ext uri="{91240B29-F687-4f45-9708-019B960494DF}">
-                  <a14:hiddenLine xmlns:a14="http://schemas.microsoft.com/office/drawing/2010/main" xmlns="" w="9525">
+                  <a14:hiddenLine xmlns="" xmlns:a14="http://schemas.microsoft.com/office/drawing/2010/main" w="9525">
                     <a:solidFill>
                       <a:srgbClr val="000000"/>
                     </a:solidFill>
@@ -10967,7 +10952,7 @@
               </a:ln>
               <a:extLst>
                 <a:ext uri="{91240B29-F687-4f45-9708-019B960494DF}">
-                  <a14:hiddenLine xmlns:a14="http://schemas.microsoft.com/office/drawing/2010/main" xmlns="" w="9525">
+                  <a14:hiddenLine xmlns="" xmlns:a14="http://schemas.microsoft.com/office/drawing/2010/main" w="9525">
                     <a:solidFill>
                       <a:srgbClr val="000000"/>
                     </a:solidFill>
@@ -11057,7 +11042,7 @@
               </a:ln>
               <a:extLst>
                 <a:ext uri="{91240B29-F687-4f45-9708-019B960494DF}">
-                  <a14:hiddenLine xmlns:a14="http://schemas.microsoft.com/office/drawing/2010/main" xmlns="" w="9525">
+                  <a14:hiddenLine xmlns="" xmlns:a14="http://schemas.microsoft.com/office/drawing/2010/main" w="9525">
                     <a:solidFill>
                       <a:srgbClr val="000000"/>
                     </a:solidFill>
@@ -11122,7 +11107,7 @@
               </a:ln>
               <a:extLst>
                 <a:ext uri="{91240B29-F687-4f45-9708-019B960494DF}">
-                  <a14:hiddenLine xmlns:a14="http://schemas.microsoft.com/office/drawing/2010/main" xmlns="" w="9525">
+                  <a14:hiddenLine xmlns="" xmlns:a14="http://schemas.microsoft.com/office/drawing/2010/main" w="9525">
                     <a:solidFill>
                       <a:srgbClr val="000000"/>
                     </a:solidFill>
@@ -11184,7 +11169,7 @@
               </a:ln>
               <a:extLst>
                 <a:ext uri="{91240B29-F687-4f45-9708-019B960494DF}">
-                  <a14:hiddenLine xmlns:a14="http://schemas.microsoft.com/office/drawing/2010/main" xmlns="" w="9525">
+                  <a14:hiddenLine xmlns="" xmlns:a14="http://schemas.microsoft.com/office/drawing/2010/main" w="9525">
                     <a:solidFill>
                       <a:srgbClr val="000000"/>
                     </a:solidFill>
@@ -11274,7 +11259,7 @@
               </a:ln>
               <a:extLst>
                 <a:ext uri="{91240B29-F687-4f45-9708-019B960494DF}">
-                  <a14:hiddenLine xmlns:a14="http://schemas.microsoft.com/office/drawing/2010/main" xmlns="" w="9525">
+                  <a14:hiddenLine xmlns="" xmlns:a14="http://schemas.microsoft.com/office/drawing/2010/main" w="9525">
                     <a:solidFill>
                       <a:srgbClr val="000000"/>
                     </a:solidFill>
@@ -11364,7 +11349,7 @@
               </a:ln>
               <a:extLst>
                 <a:ext uri="{91240B29-F687-4f45-9708-019B960494DF}">
-                  <a14:hiddenLine xmlns:a14="http://schemas.microsoft.com/office/drawing/2010/main" xmlns="" w="9525">
+                  <a14:hiddenLine xmlns="" xmlns:a14="http://schemas.microsoft.com/office/drawing/2010/main" w="9525">
                     <a:solidFill>
                       <a:srgbClr val="000000"/>
                     </a:solidFill>
@@ -11429,7 +11414,7 @@
               </a:ln>
               <a:extLst>
                 <a:ext uri="{91240B29-F687-4f45-9708-019B960494DF}">
-                  <a14:hiddenLine xmlns:a14="http://schemas.microsoft.com/office/drawing/2010/main" xmlns="" w="9525">
+                  <a14:hiddenLine xmlns="" xmlns:a14="http://schemas.microsoft.com/office/drawing/2010/main" w="9525">
                     <a:solidFill>
                       <a:srgbClr val="000000"/>
                     </a:solidFill>
@@ -11549,7 +11534,7 @@
               </a:ln>
               <a:extLst>
                 <a:ext uri="{91240B29-F687-4f45-9708-019B960494DF}">
-                  <a14:hiddenLine xmlns:a14="http://schemas.microsoft.com/office/drawing/2010/main" xmlns="" w="9525">
+                  <a14:hiddenLine xmlns="" xmlns:a14="http://schemas.microsoft.com/office/drawing/2010/main" w="9525">
                     <a:solidFill>
                       <a:srgbClr val="000000"/>
                     </a:solidFill>
@@ -11630,7 +11615,7 @@
               </a:ln>
               <a:extLst>
                 <a:ext uri="{91240B29-F687-4f45-9708-019B960494DF}">
-                  <a14:hiddenLine xmlns:a14="http://schemas.microsoft.com/office/drawing/2010/main" xmlns="" w="9525">
+                  <a14:hiddenLine xmlns="" xmlns:a14="http://schemas.microsoft.com/office/drawing/2010/main" w="9525">
                     <a:solidFill>
                       <a:srgbClr val="000000"/>
                     </a:solidFill>
@@ -11745,7 +11730,7 @@
               </a:ln>
               <a:extLst>
                 <a:ext uri="{91240B29-F687-4f45-9708-019B960494DF}">
-                  <a14:hiddenLine xmlns:a14="http://schemas.microsoft.com/office/drawing/2010/main" xmlns="" w="9525">
+                  <a14:hiddenLine xmlns="" xmlns:a14="http://schemas.microsoft.com/office/drawing/2010/main" w="9525">
                     <a:solidFill>
                       <a:srgbClr val="000000"/>
                     </a:solidFill>
@@ -11835,7 +11820,7 @@
               </a:ln>
               <a:extLst>
                 <a:ext uri="{91240B29-F687-4f45-9708-019B960494DF}">
-                  <a14:hiddenLine xmlns:a14="http://schemas.microsoft.com/office/drawing/2010/main" xmlns="" w="9525">
+                  <a14:hiddenLine xmlns="" xmlns:a14="http://schemas.microsoft.com/office/drawing/2010/main" w="9525">
                     <a:solidFill>
                       <a:srgbClr val="000000"/>
                     </a:solidFill>
@@ -11900,7 +11885,7 @@
               </a:ln>
               <a:extLst>
                 <a:ext uri="{91240B29-F687-4f45-9708-019B960494DF}">
-                  <a14:hiddenLine xmlns:a14="http://schemas.microsoft.com/office/drawing/2010/main" xmlns="" w="9525">
+                  <a14:hiddenLine xmlns="" xmlns:a14="http://schemas.microsoft.com/office/drawing/2010/main" w="9525">
                     <a:solidFill>
                       <a:srgbClr val="000000"/>
                     </a:solidFill>
@@ -11990,7 +11975,7 @@
               </a:ln>
               <a:extLst>
                 <a:ext uri="{91240B29-F687-4f45-9708-019B960494DF}">
-                  <a14:hiddenLine xmlns:a14="http://schemas.microsoft.com/office/drawing/2010/main" xmlns="" w="9525">
+                  <a14:hiddenLine xmlns="" xmlns:a14="http://schemas.microsoft.com/office/drawing/2010/main" w="9525">
                     <a:solidFill>
                       <a:srgbClr val="000000"/>
                     </a:solidFill>
@@ -12058,7 +12043,7 @@
               </a:ln>
               <a:extLst>
                 <a:ext uri="{91240B29-F687-4f45-9708-019B960494DF}">
-                  <a14:hiddenLine xmlns:a14="http://schemas.microsoft.com/office/drawing/2010/main" xmlns="" w="9525">
+                  <a14:hiddenLine xmlns="" xmlns:a14="http://schemas.microsoft.com/office/drawing/2010/main" w="9525">
                     <a:solidFill>
                       <a:srgbClr val="000000"/>
                     </a:solidFill>
@@ -12148,7 +12133,7 @@
               </a:ln>
               <a:extLst>
                 <a:ext uri="{91240B29-F687-4f45-9708-019B960494DF}">
-                  <a14:hiddenLine xmlns:a14="http://schemas.microsoft.com/office/drawing/2010/main" xmlns="" w="9525">
+                  <a14:hiddenLine xmlns="" xmlns:a14="http://schemas.microsoft.com/office/drawing/2010/main" w="9525">
                     <a:solidFill>
                       <a:srgbClr val="000000"/>
                     </a:solidFill>
@@ -12216,7 +12201,7 @@
               </a:ln>
               <a:extLst>
                 <a:ext uri="{91240B29-F687-4f45-9708-019B960494DF}">
-                  <a14:hiddenLine xmlns:a14="http://schemas.microsoft.com/office/drawing/2010/main" xmlns="" w="9525">
+                  <a14:hiddenLine xmlns="" xmlns:a14="http://schemas.microsoft.com/office/drawing/2010/main" w="9525">
                     <a:solidFill>
                       <a:srgbClr val="000000"/>
                     </a:solidFill>
@@ -12306,7 +12291,7 @@
               </a:ln>
               <a:extLst>
                 <a:ext uri="{91240B29-F687-4f45-9708-019B960494DF}">
-                  <a14:hiddenLine xmlns:a14="http://schemas.microsoft.com/office/drawing/2010/main" xmlns="" w="9525">
+                  <a14:hiddenLine xmlns="" xmlns:a14="http://schemas.microsoft.com/office/drawing/2010/main" w="9525">
                     <a:solidFill>
                       <a:srgbClr val="000000"/>
                     </a:solidFill>
@@ -12340,7 +12325,7 @@
               </a:ln>
               <a:extLst>
                 <a:ext uri="{91240B29-F687-4f45-9708-019B960494DF}">
-                  <a14:hiddenLine xmlns:a14="http://schemas.microsoft.com/office/drawing/2010/main" xmlns="" w="9525">
+                  <a14:hiddenLine xmlns="" xmlns:a14="http://schemas.microsoft.com/office/drawing/2010/main" w="9525">
                     <a:solidFill>
                       <a:srgbClr val="000000"/>
                     </a:solidFill>
@@ -12480,7 +12465,7 @@
           <a:p>
             <a:fld id="{92FF8978-FE14-CC4A-93A6-934EB06543C0}" type="datetime1">
               <a:rPr lang="en-US" smtClean="0"/>
-              <a:t>8/6/26</a:t>
+              <a:t>8/27/26</a:t>
             </a:fld>
             <a:endParaRPr lang="en-US"/>
           </a:p>
@@ -12998,1998 +12983,7 @@
 </p:sld>
 </file>
 
-<file path=ppt/slides/slide10.xml><?xml version="1.0" encoding="utf-8"?>
-<p:sld xmlns:a="http://schemas.openxmlformats.org/drawingml/2006/main" xmlns:r="http://schemas.openxmlformats.org/officeDocument/2006/relationships" xmlns:p="http://schemas.openxmlformats.org/presentationml/2006/main">
-  <p:cSld>
-    <p:spTree>
-      <p:nvGrpSpPr>
-        <p:cNvPr id="1" name="">
-          <a:extLst>
-            <a:ext uri="{FF2B5EF4-FFF2-40B4-BE49-F238E27FC236}">
-              <a16:creationId xmlns:a16="http://schemas.microsoft.com/office/drawing/2014/main" id="{DEA6F58D-69F9-3FD8-B596-684A1EE33079}"/>
-            </a:ext>
-          </a:extLst>
-        </p:cNvPr>
-        <p:cNvGrpSpPr/>
-        <p:nvPr/>
-      </p:nvGrpSpPr>
-      <p:grpSpPr>
-        <a:xfrm>
-          <a:off x="0" y="0"/>
-          <a:ext cx="0" cy="0"/>
-          <a:chOff x="0" y="0"/>
-          <a:chExt cx="0" cy="0"/>
-        </a:xfrm>
-      </p:grpSpPr>
-      <p:sp>
-        <p:nvSpPr>
-          <p:cNvPr id="6146" name="Rectangle 2">
-            <a:extLst>
-              <a:ext uri="{FF2B5EF4-FFF2-40B4-BE49-F238E27FC236}">
-                <a16:creationId xmlns:a16="http://schemas.microsoft.com/office/drawing/2014/main" id="{DFE0E98E-440D-A6DC-4BB5-67CCF9090E62}"/>
-              </a:ext>
-            </a:extLst>
-          </p:cNvPr>
-          <p:cNvSpPr>
-            <a:spLocks noGrp="1" noChangeArrowheads="1"/>
-          </p:cNvSpPr>
-          <p:nvPr>
-            <p:ph type="title"/>
-            <p:custDataLst>
-              <p:tags r:id="rId1"/>
-            </p:custDataLst>
-          </p:nvPr>
-        </p:nvSpPr>
-        <p:spPr>
-          <a:xfrm>
-            <a:off x="1141413" y="284084"/>
-            <a:ext cx="9905998" cy="620791"/>
-          </a:xfrm>
-        </p:spPr>
-        <p:txBody>
-          <a:bodyPr/>
-          <a:lstStyle/>
-          <a:p>
-            <a:pPr algn="ctr"/>
-            <a:r>
-              <a:rPr lang="en-US" dirty="0"/>
-              <a:t>Week 3: Monday</a:t>
-            </a:r>
-          </a:p>
-        </p:txBody>
-      </p:sp>
-      <p:sp>
-        <p:nvSpPr>
-          <p:cNvPr id="6147" name="Rectangle 3">
-            <a:extLst>
-              <a:ext uri="{FF2B5EF4-FFF2-40B4-BE49-F238E27FC236}">
-                <a16:creationId xmlns:a16="http://schemas.microsoft.com/office/drawing/2014/main" id="{8CDEF098-3261-365D-A7B1-B2749ECA313A}"/>
-              </a:ext>
-            </a:extLst>
-          </p:cNvPr>
-          <p:cNvSpPr>
-            <a:spLocks noGrp="1" noChangeArrowheads="1"/>
-          </p:cNvSpPr>
-          <p:nvPr>
-            <p:ph idx="1"/>
-            <p:custDataLst>
-              <p:tags r:id="rId2"/>
-            </p:custDataLst>
-          </p:nvPr>
-        </p:nvSpPr>
-        <p:spPr>
-          <a:xfrm>
-            <a:off x="1294151" y="1098548"/>
-            <a:ext cx="9600522" cy="5475367"/>
-          </a:xfrm>
-        </p:spPr>
-        <p:txBody>
-          <a:bodyPr>
-            <a:normAutofit fontScale="92500" lnSpcReduction="10000"/>
-          </a:bodyPr>
-          <a:lstStyle/>
-          <a:p>
-            <a:r>
-              <a:rPr lang="en-US" dirty="0">
-                <a:latin typeface="Arial" panose="020B0604020202020204" pitchFamily="34" charset="0"/>
-                <a:cs typeface="Arial" panose="020B0604020202020204" pitchFamily="34" charset="0"/>
-              </a:rPr>
-              <a:t>Welcome to week 3!! Halfway done with the course</a:t>
-            </a:r>
-          </a:p>
-          <a:p>
-            <a:r>
-              <a:rPr lang="en-US" dirty="0">
-                <a:latin typeface="Arial" panose="020B0604020202020204" pitchFamily="34" charset="0"/>
-                <a:cs typeface="Arial" panose="020B0604020202020204" pitchFamily="34" charset="0"/>
-              </a:rPr>
-              <a:t>This week:</a:t>
-            </a:r>
-          </a:p>
-          <a:p>
-            <a:pPr lvl="1"/>
-            <a:r>
-              <a:rPr lang="en-US" dirty="0">
-                <a:latin typeface="Arial" panose="020B0604020202020204" pitchFamily="34" charset="0"/>
-                <a:cs typeface="Arial" panose="020B0604020202020204" pitchFamily="34" charset="0"/>
-              </a:rPr>
-              <a:t>Module 2 (CFGs) Written Assignment Due Tuesday</a:t>
-            </a:r>
-          </a:p>
-          <a:p>
-            <a:pPr lvl="1"/>
-            <a:r>
-              <a:rPr lang="en-US" dirty="0">
-                <a:latin typeface="Arial" panose="020B0604020202020204" pitchFamily="34" charset="0"/>
-                <a:cs typeface="Arial" panose="020B0604020202020204" pitchFamily="34" charset="0"/>
-              </a:rPr>
-              <a:t>Second Midterm on Friday (Same procedure as last Friday)</a:t>
-            </a:r>
-          </a:p>
-          <a:p>
-            <a:r>
-              <a:rPr lang="en-US" dirty="0">
-                <a:latin typeface="Arial" panose="020B0604020202020204" pitchFamily="34" charset="0"/>
-                <a:cs typeface="Arial" panose="020B0604020202020204" pitchFamily="34" charset="0"/>
-              </a:rPr>
-              <a:t>Exams are graded. I’ll go over it a bit today</a:t>
-            </a:r>
-          </a:p>
-          <a:p>
-            <a:pPr lvl="1"/>
-            <a:r>
-              <a:rPr lang="en-US" dirty="0">
-                <a:latin typeface="Arial" panose="020B0604020202020204" pitchFamily="34" charset="0"/>
-                <a:cs typeface="Arial" panose="020B0604020202020204" pitchFamily="34" charset="0"/>
-              </a:rPr>
-              <a:t>Average was 17.49/29 (60.3%). Std. Deviation was 5.35/29 (18.4%).</a:t>
-            </a:r>
-          </a:p>
-          <a:p>
-            <a:r>
-              <a:rPr lang="en-US" dirty="0">
-                <a:latin typeface="Arial" panose="020B0604020202020204" pitchFamily="34" charset="0"/>
-                <a:cs typeface="Arial" panose="020B0604020202020204" pitchFamily="34" charset="0"/>
-              </a:rPr>
-              <a:t>Lecture recordings from last Fall are posted on Panopto on Canvas</a:t>
-            </a:r>
-          </a:p>
-          <a:p>
-            <a:pPr lvl="1"/>
-            <a:r>
-              <a:rPr lang="en-US" dirty="0">
-                <a:latin typeface="Arial" panose="020B0604020202020204" pitchFamily="34" charset="0"/>
-                <a:cs typeface="Arial" panose="020B0604020202020204" pitchFamily="34" charset="0"/>
-              </a:rPr>
-              <a:t>I posted ALL the videos FYI</a:t>
-            </a:r>
-          </a:p>
-          <a:p>
-            <a:r>
-              <a:rPr lang="en-US" dirty="0">
-                <a:latin typeface="Arial" panose="020B0604020202020204" pitchFamily="34" charset="0"/>
-                <a:cs typeface="Arial" panose="020B0604020202020204" pitchFamily="34" charset="0"/>
-              </a:rPr>
-              <a:t>Please remember that I am asking for NO laptop / phones!</a:t>
-            </a:r>
-          </a:p>
-          <a:p>
-            <a:pPr lvl="1"/>
-            <a:r>
-              <a:rPr lang="en-US" dirty="0">
-                <a:latin typeface="Arial" panose="020B0604020202020204" pitchFamily="34" charset="0"/>
-                <a:cs typeface="Arial" panose="020B0604020202020204" pitchFamily="34" charset="0"/>
-              </a:rPr>
-              <a:t>This makes the learning environment better for everybody. I appreciate it!</a:t>
-            </a:r>
-          </a:p>
-          <a:p>
-            <a:r>
-              <a:rPr lang="en-US" dirty="0">
-                <a:latin typeface="Arial" panose="020B0604020202020204" pitchFamily="34" charset="0"/>
-                <a:cs typeface="Arial" panose="020B0604020202020204" pitchFamily="34" charset="0"/>
-              </a:rPr>
-              <a:t>Attendance continues today as usual.</a:t>
-            </a:r>
-          </a:p>
-          <a:p>
-            <a:r>
-              <a:rPr lang="en-US" dirty="0">
-                <a:latin typeface="Arial" panose="020B0604020202020204" pitchFamily="34" charset="0"/>
-                <a:cs typeface="Arial" panose="020B0604020202020204" pitchFamily="34" charset="0"/>
-              </a:rPr>
-              <a:t>Today we continue Module 3 and the Turing Machine</a:t>
-            </a:r>
-          </a:p>
-          <a:p>
-            <a:endParaRPr lang="en-US" dirty="0">
-              <a:latin typeface="Arial" panose="020B0604020202020204" pitchFamily="34" charset="0"/>
-              <a:cs typeface="Arial" panose="020B0604020202020204" pitchFamily="34" charset="0"/>
-            </a:endParaRPr>
-          </a:p>
-        </p:txBody>
-      </p:sp>
-    </p:spTree>
-    <p:extLst>
-      <p:ext uri="{BB962C8B-B14F-4D97-AF65-F5344CB8AC3E}">
-        <p14:creationId xmlns:p14="http://schemas.microsoft.com/office/powerpoint/2010/main" val="4104932287"/>
-      </p:ext>
-    </p:extLst>
-  </p:cSld>
-  <p:clrMapOvr>
-    <a:masterClrMapping/>
-  </p:clrMapOvr>
-</p:sld>
-</file>
-
-<file path=ppt/slides/slide11.xml><?xml version="1.0" encoding="utf-8"?>
-<p:sld xmlns:a="http://schemas.openxmlformats.org/drawingml/2006/main" xmlns:r="http://schemas.openxmlformats.org/officeDocument/2006/relationships" xmlns:p="http://schemas.openxmlformats.org/presentationml/2006/main">
-  <p:cSld>
-    <p:spTree>
-      <p:nvGrpSpPr>
-        <p:cNvPr id="1" name="">
-          <a:extLst>
-            <a:ext uri="{FF2B5EF4-FFF2-40B4-BE49-F238E27FC236}">
-              <a16:creationId xmlns:a16="http://schemas.microsoft.com/office/drawing/2014/main" id="{E21B1DC1-D043-BCC2-19DD-FAAB1A48F16F}"/>
-            </a:ext>
-          </a:extLst>
-        </p:cNvPr>
-        <p:cNvGrpSpPr/>
-        <p:nvPr/>
-      </p:nvGrpSpPr>
-      <p:grpSpPr>
-        <a:xfrm>
-          <a:off x="0" y="0"/>
-          <a:ext cx="0" cy="0"/>
-          <a:chOff x="0" y="0"/>
-          <a:chExt cx="0" cy="0"/>
-        </a:xfrm>
-      </p:grpSpPr>
-      <p:sp>
-        <p:nvSpPr>
-          <p:cNvPr id="6146" name="Rectangle 2">
-            <a:extLst>
-              <a:ext uri="{FF2B5EF4-FFF2-40B4-BE49-F238E27FC236}">
-                <a16:creationId xmlns:a16="http://schemas.microsoft.com/office/drawing/2014/main" id="{AF890841-263F-5C8C-2DFD-FC060A248FCA}"/>
-              </a:ext>
-            </a:extLst>
-          </p:cNvPr>
-          <p:cNvSpPr>
-            <a:spLocks noGrp="1" noChangeArrowheads="1"/>
-          </p:cNvSpPr>
-          <p:nvPr>
-            <p:ph type="title"/>
-            <p:custDataLst>
-              <p:tags r:id="rId1"/>
-            </p:custDataLst>
-          </p:nvPr>
-        </p:nvSpPr>
-        <p:spPr>
-          <a:xfrm>
-            <a:off x="1141413" y="284084"/>
-            <a:ext cx="9905998" cy="620791"/>
-          </a:xfrm>
-        </p:spPr>
-        <p:txBody>
-          <a:bodyPr/>
-          <a:lstStyle/>
-          <a:p>
-            <a:pPr algn="ctr"/>
-            <a:r>
-              <a:rPr lang="en-US" dirty="0"/>
-              <a:t>Week 3: Tuesday</a:t>
-            </a:r>
-          </a:p>
-        </p:txBody>
-      </p:sp>
-      <p:sp>
-        <p:nvSpPr>
-          <p:cNvPr id="6147" name="Rectangle 3">
-            <a:extLst>
-              <a:ext uri="{FF2B5EF4-FFF2-40B4-BE49-F238E27FC236}">
-                <a16:creationId xmlns:a16="http://schemas.microsoft.com/office/drawing/2014/main" id="{4BA29AE7-1631-7B6D-8956-0225A60DB4E2}"/>
-              </a:ext>
-            </a:extLst>
-          </p:cNvPr>
-          <p:cNvSpPr>
-            <a:spLocks noGrp="1" noChangeArrowheads="1"/>
-          </p:cNvSpPr>
-          <p:nvPr>
-            <p:ph idx="1"/>
-            <p:custDataLst>
-              <p:tags r:id="rId2"/>
-            </p:custDataLst>
-          </p:nvPr>
-        </p:nvSpPr>
-        <p:spPr>
-          <a:xfrm>
-            <a:off x="1294151" y="1098548"/>
-            <a:ext cx="9600522" cy="5475367"/>
-          </a:xfrm>
-        </p:spPr>
-        <p:txBody>
-          <a:bodyPr>
-            <a:normAutofit fontScale="92500" lnSpcReduction="10000"/>
-          </a:bodyPr>
-          <a:lstStyle/>
-          <a:p>
-            <a:r>
-              <a:rPr lang="en-US" dirty="0">
-                <a:latin typeface="Arial" panose="020B0604020202020204" pitchFamily="34" charset="0"/>
-                <a:cs typeface="Arial" panose="020B0604020202020204" pitchFamily="34" charset="0"/>
-              </a:rPr>
-              <a:t>Welcome to week 3!! Halfway done with the course</a:t>
-            </a:r>
-          </a:p>
-          <a:p>
-            <a:r>
-              <a:rPr lang="en-US" dirty="0">
-                <a:latin typeface="Arial" panose="020B0604020202020204" pitchFamily="34" charset="0"/>
-                <a:cs typeface="Arial" panose="020B0604020202020204" pitchFamily="34" charset="0"/>
-              </a:rPr>
-              <a:t>This week:</a:t>
-            </a:r>
-          </a:p>
-          <a:p>
-            <a:pPr lvl="1"/>
-            <a:r>
-              <a:rPr lang="en-US" dirty="0">
-                <a:latin typeface="Arial" panose="020B0604020202020204" pitchFamily="34" charset="0"/>
-                <a:cs typeface="Arial" panose="020B0604020202020204" pitchFamily="34" charset="0"/>
-              </a:rPr>
-              <a:t>Module 2 (CFGs) Written Assignment Due </a:t>
-            </a:r>
-            <a:r>
-              <a:rPr lang="en-US" b="1" i="1" dirty="0">
-                <a:latin typeface="Arial" panose="020B0604020202020204" pitchFamily="34" charset="0"/>
-                <a:cs typeface="Arial" panose="020B0604020202020204" pitchFamily="34" charset="0"/>
-              </a:rPr>
-              <a:t>TONIGHT</a:t>
-            </a:r>
-          </a:p>
-          <a:p>
-            <a:pPr lvl="1"/>
-            <a:r>
-              <a:rPr lang="en-US" dirty="0">
-                <a:latin typeface="Arial" panose="020B0604020202020204" pitchFamily="34" charset="0"/>
-                <a:cs typeface="Arial" panose="020B0604020202020204" pitchFamily="34" charset="0"/>
-              </a:rPr>
-              <a:t>Second Midterm on Friday (Same procedure as last Friday)</a:t>
-            </a:r>
-          </a:p>
-          <a:p>
-            <a:r>
-              <a:rPr lang="en-US" dirty="0">
-                <a:latin typeface="Arial" panose="020B0604020202020204" pitchFamily="34" charset="0"/>
-                <a:cs typeface="Arial" panose="020B0604020202020204" pitchFamily="34" charset="0"/>
-              </a:rPr>
-              <a:t>Exams are graded. I’ll go over it a bit today</a:t>
-            </a:r>
-          </a:p>
-          <a:p>
-            <a:pPr lvl="1"/>
-            <a:r>
-              <a:rPr lang="en-US" dirty="0">
-                <a:latin typeface="Arial" panose="020B0604020202020204" pitchFamily="34" charset="0"/>
-                <a:cs typeface="Arial" panose="020B0604020202020204" pitchFamily="34" charset="0"/>
-              </a:rPr>
-              <a:t>Average was 17.49/29 (60.3%). Std. Deviation was 5.35/29 (18.4%).</a:t>
-            </a:r>
-          </a:p>
-          <a:p>
-            <a:r>
-              <a:rPr lang="en-US" dirty="0">
-                <a:latin typeface="Arial" panose="020B0604020202020204" pitchFamily="34" charset="0"/>
-                <a:cs typeface="Arial" panose="020B0604020202020204" pitchFamily="34" charset="0"/>
-              </a:rPr>
-              <a:t>Lecture recordings from last Fall are posted on Panopto on Canvas</a:t>
-            </a:r>
-          </a:p>
-          <a:p>
-            <a:pPr lvl="1"/>
-            <a:r>
-              <a:rPr lang="en-US" dirty="0">
-                <a:latin typeface="Arial" panose="020B0604020202020204" pitchFamily="34" charset="0"/>
-                <a:cs typeface="Arial" panose="020B0604020202020204" pitchFamily="34" charset="0"/>
-              </a:rPr>
-              <a:t>I posted ALL the videos FYI</a:t>
-            </a:r>
-          </a:p>
-          <a:p>
-            <a:r>
-              <a:rPr lang="en-US" dirty="0">
-                <a:latin typeface="Arial" panose="020B0604020202020204" pitchFamily="34" charset="0"/>
-                <a:cs typeface="Arial" panose="020B0604020202020204" pitchFamily="34" charset="0"/>
-              </a:rPr>
-              <a:t>Please remember that I am asking for NO laptop / phones!</a:t>
-            </a:r>
-          </a:p>
-          <a:p>
-            <a:pPr lvl="1"/>
-            <a:r>
-              <a:rPr lang="en-US" dirty="0">
-                <a:latin typeface="Arial" panose="020B0604020202020204" pitchFamily="34" charset="0"/>
-                <a:cs typeface="Arial" panose="020B0604020202020204" pitchFamily="34" charset="0"/>
-              </a:rPr>
-              <a:t>This makes the learning environment better for everybody. I appreciate it!</a:t>
-            </a:r>
-          </a:p>
-          <a:p>
-            <a:r>
-              <a:rPr lang="en-US" dirty="0">
-                <a:latin typeface="Arial" panose="020B0604020202020204" pitchFamily="34" charset="0"/>
-                <a:cs typeface="Arial" panose="020B0604020202020204" pitchFamily="34" charset="0"/>
-              </a:rPr>
-              <a:t>Attendance continues today as usual.</a:t>
-            </a:r>
-          </a:p>
-          <a:p>
-            <a:r>
-              <a:rPr lang="en-US" dirty="0">
-                <a:latin typeface="Arial" panose="020B0604020202020204" pitchFamily="34" charset="0"/>
-                <a:cs typeface="Arial" panose="020B0604020202020204" pitchFamily="34" charset="0"/>
-              </a:rPr>
-              <a:t>Today we continue Module 3 and the Turing Machine</a:t>
-            </a:r>
-          </a:p>
-          <a:p>
-            <a:endParaRPr lang="en-US" dirty="0">
-              <a:latin typeface="Arial" panose="020B0604020202020204" pitchFamily="34" charset="0"/>
-              <a:cs typeface="Arial" panose="020B0604020202020204" pitchFamily="34" charset="0"/>
-            </a:endParaRPr>
-          </a:p>
-        </p:txBody>
-      </p:sp>
-    </p:spTree>
-    <p:extLst>
-      <p:ext uri="{BB962C8B-B14F-4D97-AF65-F5344CB8AC3E}">
-        <p14:creationId xmlns:p14="http://schemas.microsoft.com/office/powerpoint/2010/main" val="3586293736"/>
-      </p:ext>
-    </p:extLst>
-  </p:cSld>
-  <p:clrMapOvr>
-    <a:masterClrMapping/>
-  </p:clrMapOvr>
-</p:sld>
-</file>
-
-<file path=ppt/slides/slide12.xml><?xml version="1.0" encoding="utf-8"?>
-<p:sld xmlns:a="http://schemas.openxmlformats.org/drawingml/2006/main" xmlns:r="http://schemas.openxmlformats.org/officeDocument/2006/relationships" xmlns:p="http://schemas.openxmlformats.org/presentationml/2006/main">
-  <p:cSld>
-    <p:spTree>
-      <p:nvGrpSpPr>
-        <p:cNvPr id="1" name="">
-          <a:extLst>
-            <a:ext uri="{FF2B5EF4-FFF2-40B4-BE49-F238E27FC236}">
-              <a16:creationId xmlns:a16="http://schemas.microsoft.com/office/drawing/2014/main" id="{91035108-5DE0-F56C-A093-6B9881249508}"/>
-            </a:ext>
-          </a:extLst>
-        </p:cNvPr>
-        <p:cNvGrpSpPr/>
-        <p:nvPr/>
-      </p:nvGrpSpPr>
-      <p:grpSpPr>
-        <a:xfrm>
-          <a:off x="0" y="0"/>
-          <a:ext cx="0" cy="0"/>
-          <a:chOff x="0" y="0"/>
-          <a:chExt cx="0" cy="0"/>
-        </a:xfrm>
-      </p:grpSpPr>
-      <p:sp>
-        <p:nvSpPr>
-          <p:cNvPr id="6146" name="Rectangle 2">
-            <a:extLst>
-              <a:ext uri="{FF2B5EF4-FFF2-40B4-BE49-F238E27FC236}">
-                <a16:creationId xmlns:a16="http://schemas.microsoft.com/office/drawing/2014/main" id="{BF0084C3-7F85-DE07-9B8B-D0EB83CD2713}"/>
-              </a:ext>
-            </a:extLst>
-          </p:cNvPr>
-          <p:cNvSpPr>
-            <a:spLocks noGrp="1" noChangeArrowheads="1"/>
-          </p:cNvSpPr>
-          <p:nvPr>
-            <p:ph type="title"/>
-            <p:custDataLst>
-              <p:tags r:id="rId1"/>
-            </p:custDataLst>
-          </p:nvPr>
-        </p:nvSpPr>
-        <p:spPr>
-          <a:xfrm>
-            <a:off x="1141413" y="284084"/>
-            <a:ext cx="9905998" cy="620791"/>
-          </a:xfrm>
-        </p:spPr>
-        <p:txBody>
-          <a:bodyPr/>
-          <a:lstStyle/>
-          <a:p>
-            <a:pPr algn="ctr"/>
-            <a:r>
-              <a:rPr lang="en-US" dirty="0"/>
-              <a:t>Week 3: Wednesday</a:t>
-            </a:r>
-          </a:p>
-        </p:txBody>
-      </p:sp>
-      <p:sp>
-        <p:nvSpPr>
-          <p:cNvPr id="6147" name="Rectangle 3">
-            <a:extLst>
-              <a:ext uri="{FF2B5EF4-FFF2-40B4-BE49-F238E27FC236}">
-                <a16:creationId xmlns:a16="http://schemas.microsoft.com/office/drawing/2014/main" id="{D0298A0A-9001-9A51-0658-572427FE3EF4}"/>
-              </a:ext>
-            </a:extLst>
-          </p:cNvPr>
-          <p:cNvSpPr>
-            <a:spLocks noGrp="1" noChangeArrowheads="1"/>
-          </p:cNvSpPr>
-          <p:nvPr>
-            <p:ph idx="1"/>
-            <p:custDataLst>
-              <p:tags r:id="rId2"/>
-            </p:custDataLst>
-          </p:nvPr>
-        </p:nvSpPr>
-        <p:spPr>
-          <a:xfrm>
-            <a:off x="1294151" y="1098548"/>
-            <a:ext cx="9600522" cy="5475367"/>
-          </a:xfrm>
-        </p:spPr>
-        <p:txBody>
-          <a:bodyPr>
-            <a:normAutofit fontScale="92500" lnSpcReduction="10000"/>
-          </a:bodyPr>
-          <a:lstStyle/>
-          <a:p>
-            <a:r>
-              <a:rPr lang="en-US" dirty="0">
-                <a:latin typeface="Arial" panose="020B0604020202020204" pitchFamily="34" charset="0"/>
-                <a:cs typeface="Arial" panose="020B0604020202020204" pitchFamily="34" charset="0"/>
-              </a:rPr>
-              <a:t>Week 3 going strong!! More than halfway done with the course</a:t>
-            </a:r>
-          </a:p>
-          <a:p>
-            <a:r>
-              <a:rPr lang="en-US" dirty="0">
-                <a:latin typeface="Arial" panose="020B0604020202020204" pitchFamily="34" charset="0"/>
-                <a:cs typeface="Arial" panose="020B0604020202020204" pitchFamily="34" charset="0"/>
-              </a:rPr>
-              <a:t>This week:</a:t>
-            </a:r>
-          </a:p>
-          <a:p>
-            <a:pPr lvl="1"/>
-            <a:r>
-              <a:rPr lang="en-US" dirty="0">
-                <a:latin typeface="Arial" panose="020B0604020202020204" pitchFamily="34" charset="0"/>
-                <a:cs typeface="Arial" panose="020B0604020202020204" pitchFamily="34" charset="0"/>
-              </a:rPr>
-              <a:t>Module 2 (CFGs) Written Assignment Due </a:t>
-            </a:r>
-            <a:r>
-              <a:rPr lang="en-US" b="1" i="1" dirty="0">
-                <a:latin typeface="Arial" panose="020B0604020202020204" pitchFamily="34" charset="0"/>
-                <a:cs typeface="Arial" panose="020B0604020202020204" pitchFamily="34" charset="0"/>
-              </a:rPr>
-              <a:t>Yesterday</a:t>
-            </a:r>
-          </a:p>
-          <a:p>
-            <a:pPr lvl="1"/>
-            <a:r>
-              <a:rPr lang="en-US" dirty="0">
-                <a:latin typeface="Arial" panose="020B0604020202020204" pitchFamily="34" charset="0"/>
-                <a:cs typeface="Arial" panose="020B0604020202020204" pitchFamily="34" charset="0"/>
-              </a:rPr>
-              <a:t>Second Midterm on Friday (Same procedure as last Friday)</a:t>
-            </a:r>
-          </a:p>
-          <a:p>
-            <a:r>
-              <a:rPr lang="en-US" dirty="0">
-                <a:latin typeface="Arial" panose="020B0604020202020204" pitchFamily="34" charset="0"/>
-                <a:cs typeface="Arial" panose="020B0604020202020204" pitchFamily="34" charset="0"/>
-              </a:rPr>
-              <a:t>Exams are graded. Swing by OH if you want/need to discuss.</a:t>
-            </a:r>
-          </a:p>
-          <a:p>
-            <a:pPr lvl="1"/>
-            <a:r>
-              <a:rPr lang="en-US" dirty="0">
-                <a:latin typeface="Arial" panose="020B0604020202020204" pitchFamily="34" charset="0"/>
-                <a:cs typeface="Arial" panose="020B0604020202020204" pitchFamily="34" charset="0"/>
-              </a:rPr>
-              <a:t>Average was 17.49/29 (60.3%). Std. Deviation was 5.35/29 (18.4%).</a:t>
-            </a:r>
-          </a:p>
-          <a:p>
-            <a:r>
-              <a:rPr lang="en-US" dirty="0">
-                <a:latin typeface="Arial" panose="020B0604020202020204" pitchFamily="34" charset="0"/>
-                <a:cs typeface="Arial" panose="020B0604020202020204" pitchFamily="34" charset="0"/>
-              </a:rPr>
-              <a:t>Lecture recordings from last Fall are posted on Panopto on Canvas</a:t>
-            </a:r>
-          </a:p>
-          <a:p>
-            <a:pPr lvl="1"/>
-            <a:r>
-              <a:rPr lang="en-US" dirty="0">
-                <a:latin typeface="Arial" panose="020B0604020202020204" pitchFamily="34" charset="0"/>
-                <a:cs typeface="Arial" panose="020B0604020202020204" pitchFamily="34" charset="0"/>
-              </a:rPr>
-              <a:t>I posted ALL the videos FYI</a:t>
-            </a:r>
-          </a:p>
-          <a:p>
-            <a:r>
-              <a:rPr lang="en-US" dirty="0">
-                <a:latin typeface="Arial" panose="020B0604020202020204" pitchFamily="34" charset="0"/>
-                <a:cs typeface="Arial" panose="020B0604020202020204" pitchFamily="34" charset="0"/>
-              </a:rPr>
-              <a:t>Please remember that I am asking for NO laptop / phones!</a:t>
-            </a:r>
-          </a:p>
-          <a:p>
-            <a:pPr lvl="1"/>
-            <a:r>
-              <a:rPr lang="en-US" dirty="0">
-                <a:latin typeface="Arial" panose="020B0604020202020204" pitchFamily="34" charset="0"/>
-                <a:cs typeface="Arial" panose="020B0604020202020204" pitchFamily="34" charset="0"/>
-              </a:rPr>
-              <a:t>This makes the learning environment better for everybody. I appreciate it!</a:t>
-            </a:r>
-          </a:p>
-          <a:p>
-            <a:r>
-              <a:rPr lang="en-US" dirty="0">
-                <a:latin typeface="Arial" panose="020B0604020202020204" pitchFamily="34" charset="0"/>
-                <a:cs typeface="Arial" panose="020B0604020202020204" pitchFamily="34" charset="0"/>
-              </a:rPr>
-              <a:t>Attendance continues today as usual.</a:t>
-            </a:r>
-          </a:p>
-          <a:p>
-            <a:r>
-              <a:rPr lang="en-US" dirty="0">
-                <a:latin typeface="Arial" panose="020B0604020202020204" pitchFamily="34" charset="0"/>
-                <a:cs typeface="Arial" panose="020B0604020202020204" pitchFamily="34" charset="0"/>
-              </a:rPr>
-              <a:t>Today we continue (and likely finish) Module 3</a:t>
-            </a:r>
-          </a:p>
-          <a:p>
-            <a:endParaRPr lang="en-US" dirty="0">
-              <a:latin typeface="Arial" panose="020B0604020202020204" pitchFamily="34" charset="0"/>
-              <a:cs typeface="Arial" panose="020B0604020202020204" pitchFamily="34" charset="0"/>
-            </a:endParaRPr>
-          </a:p>
-        </p:txBody>
-      </p:sp>
-    </p:spTree>
-    <p:extLst>
-      <p:ext uri="{BB962C8B-B14F-4D97-AF65-F5344CB8AC3E}">
-        <p14:creationId xmlns:p14="http://schemas.microsoft.com/office/powerpoint/2010/main" val="4000616010"/>
-      </p:ext>
-    </p:extLst>
-  </p:cSld>
-  <p:clrMapOvr>
-    <a:masterClrMapping/>
-  </p:clrMapOvr>
-</p:sld>
-</file>
-
-<file path=ppt/slides/slide13.xml><?xml version="1.0" encoding="utf-8"?>
-<p:sld xmlns:a="http://schemas.openxmlformats.org/drawingml/2006/main" xmlns:r="http://schemas.openxmlformats.org/officeDocument/2006/relationships" xmlns:p="http://schemas.openxmlformats.org/presentationml/2006/main">
-  <p:cSld>
-    <p:spTree>
-      <p:nvGrpSpPr>
-        <p:cNvPr id="1" name="">
-          <a:extLst>
-            <a:ext uri="{FF2B5EF4-FFF2-40B4-BE49-F238E27FC236}">
-              <a16:creationId xmlns:a16="http://schemas.microsoft.com/office/drawing/2014/main" id="{1AB8D8E0-B735-8684-FF09-D3F676BF96F7}"/>
-            </a:ext>
-          </a:extLst>
-        </p:cNvPr>
-        <p:cNvGrpSpPr/>
-        <p:nvPr/>
-      </p:nvGrpSpPr>
-      <p:grpSpPr>
-        <a:xfrm>
-          <a:off x="0" y="0"/>
-          <a:ext cx="0" cy="0"/>
-          <a:chOff x="0" y="0"/>
-          <a:chExt cx="0" cy="0"/>
-        </a:xfrm>
-      </p:grpSpPr>
-      <p:sp>
-        <p:nvSpPr>
-          <p:cNvPr id="6146" name="Rectangle 2">
-            <a:extLst>
-              <a:ext uri="{FF2B5EF4-FFF2-40B4-BE49-F238E27FC236}">
-                <a16:creationId xmlns:a16="http://schemas.microsoft.com/office/drawing/2014/main" id="{233A718E-398E-54E8-A22D-9E35487F9D4D}"/>
-              </a:ext>
-            </a:extLst>
-          </p:cNvPr>
-          <p:cNvSpPr>
-            <a:spLocks noGrp="1" noChangeArrowheads="1"/>
-          </p:cNvSpPr>
-          <p:nvPr>
-            <p:ph type="title"/>
-            <p:custDataLst>
-              <p:tags r:id="rId1"/>
-            </p:custDataLst>
-          </p:nvPr>
-        </p:nvSpPr>
-        <p:spPr>
-          <a:xfrm>
-            <a:off x="1141413" y="284084"/>
-            <a:ext cx="9905998" cy="620791"/>
-          </a:xfrm>
-        </p:spPr>
-        <p:txBody>
-          <a:bodyPr/>
-          <a:lstStyle/>
-          <a:p>
-            <a:pPr algn="ctr"/>
-            <a:r>
-              <a:rPr lang="en-US" dirty="0"/>
-              <a:t>Week 3: Thursday</a:t>
-            </a:r>
-          </a:p>
-        </p:txBody>
-      </p:sp>
-      <p:sp>
-        <p:nvSpPr>
-          <p:cNvPr id="6147" name="Rectangle 3">
-            <a:extLst>
-              <a:ext uri="{FF2B5EF4-FFF2-40B4-BE49-F238E27FC236}">
-                <a16:creationId xmlns:a16="http://schemas.microsoft.com/office/drawing/2014/main" id="{427CEE8E-A31C-8018-BDDC-F65ABA484A10}"/>
-              </a:ext>
-            </a:extLst>
-          </p:cNvPr>
-          <p:cNvSpPr>
-            <a:spLocks noGrp="1" noChangeArrowheads="1"/>
-          </p:cNvSpPr>
-          <p:nvPr>
-            <p:ph idx="1"/>
-            <p:custDataLst>
-              <p:tags r:id="rId2"/>
-            </p:custDataLst>
-          </p:nvPr>
-        </p:nvSpPr>
-        <p:spPr>
-          <a:xfrm>
-            <a:off x="1294151" y="1098548"/>
-            <a:ext cx="9600522" cy="5475367"/>
-          </a:xfrm>
-        </p:spPr>
-        <p:txBody>
-          <a:bodyPr>
-            <a:normAutofit fontScale="92500" lnSpcReduction="10000"/>
-          </a:bodyPr>
-          <a:lstStyle/>
-          <a:p>
-            <a:r>
-              <a:rPr lang="en-US" dirty="0">
-                <a:latin typeface="Arial" panose="020B0604020202020204" pitchFamily="34" charset="0"/>
-                <a:cs typeface="Arial" panose="020B0604020202020204" pitchFamily="34" charset="0"/>
-              </a:rPr>
-              <a:t>Week 3 going strong!! More than halfway done with the course</a:t>
-            </a:r>
-          </a:p>
-          <a:p>
-            <a:r>
-              <a:rPr lang="en-US" dirty="0">
-                <a:latin typeface="Arial" panose="020B0604020202020204" pitchFamily="34" charset="0"/>
-                <a:cs typeface="Arial" panose="020B0604020202020204" pitchFamily="34" charset="0"/>
-              </a:rPr>
-              <a:t>This week:</a:t>
-            </a:r>
-            <a:endParaRPr lang="en-US" b="1" i="1" dirty="0">
-              <a:latin typeface="Arial" panose="020B0604020202020204" pitchFamily="34" charset="0"/>
-              <a:cs typeface="Arial" panose="020B0604020202020204" pitchFamily="34" charset="0"/>
-            </a:endParaRPr>
-          </a:p>
-          <a:p>
-            <a:pPr lvl="1"/>
-            <a:r>
-              <a:rPr lang="en-US" dirty="0">
-                <a:latin typeface="Arial" panose="020B0604020202020204" pitchFamily="34" charset="0"/>
-                <a:cs typeface="Arial" panose="020B0604020202020204" pitchFamily="34" charset="0"/>
-              </a:rPr>
-              <a:t>Second Midterm on Friday (Same procedure as last Friday)</a:t>
-            </a:r>
-          </a:p>
-          <a:p>
-            <a:pPr lvl="1"/>
-            <a:r>
-              <a:rPr lang="en-US" dirty="0">
-                <a:latin typeface="Arial" panose="020B0604020202020204" pitchFamily="34" charset="0"/>
-                <a:cs typeface="Arial" panose="020B0604020202020204" pitchFamily="34" charset="0"/>
-              </a:rPr>
-              <a:t>I decided to have 2/3 module 2 material, only 1/3 module 3.</a:t>
-            </a:r>
-          </a:p>
-          <a:p>
-            <a:r>
-              <a:rPr lang="en-US" dirty="0">
-                <a:latin typeface="Arial" panose="020B0604020202020204" pitchFamily="34" charset="0"/>
-                <a:cs typeface="Arial" panose="020B0604020202020204" pitchFamily="34" charset="0"/>
-              </a:rPr>
-              <a:t>I won’t be able to hold my OH after class today (sorry!)</a:t>
-            </a:r>
-          </a:p>
-          <a:p>
-            <a:pPr lvl="1"/>
-            <a:r>
-              <a:rPr lang="en-US" dirty="0">
-                <a:latin typeface="Arial" panose="020B0604020202020204" pitchFamily="34" charset="0"/>
-                <a:cs typeface="Arial" panose="020B0604020202020204" pitchFamily="34" charset="0"/>
-              </a:rPr>
-              <a:t>Another meeting came up that I cannot miss</a:t>
-            </a:r>
-          </a:p>
-          <a:p>
-            <a:r>
-              <a:rPr lang="en-US" dirty="0">
-                <a:latin typeface="Arial" panose="020B0604020202020204" pitchFamily="34" charset="0"/>
-                <a:cs typeface="Arial" panose="020B0604020202020204" pitchFamily="34" charset="0"/>
-              </a:rPr>
-              <a:t>Lecture recordings from last Fall are posted on Panopto on Canvas</a:t>
-            </a:r>
-          </a:p>
-          <a:p>
-            <a:pPr lvl="1"/>
-            <a:r>
-              <a:rPr lang="en-US" dirty="0">
-                <a:latin typeface="Arial" panose="020B0604020202020204" pitchFamily="34" charset="0"/>
-                <a:cs typeface="Arial" panose="020B0604020202020204" pitchFamily="34" charset="0"/>
-              </a:rPr>
-              <a:t>I posted ALL the videos FYI</a:t>
-            </a:r>
-          </a:p>
-          <a:p>
-            <a:r>
-              <a:rPr lang="en-US" dirty="0">
-                <a:latin typeface="Arial" panose="020B0604020202020204" pitchFamily="34" charset="0"/>
-                <a:cs typeface="Arial" panose="020B0604020202020204" pitchFamily="34" charset="0"/>
-              </a:rPr>
-              <a:t>Please remember that I am asking for NO laptop / phones!</a:t>
-            </a:r>
-          </a:p>
-          <a:p>
-            <a:pPr lvl="1"/>
-            <a:r>
-              <a:rPr lang="en-US" dirty="0">
-                <a:latin typeface="Arial" panose="020B0604020202020204" pitchFamily="34" charset="0"/>
-                <a:cs typeface="Arial" panose="020B0604020202020204" pitchFamily="34" charset="0"/>
-              </a:rPr>
-              <a:t>This makes the learning environment better for everybody. I appreciate it!</a:t>
-            </a:r>
-          </a:p>
-          <a:p>
-            <a:r>
-              <a:rPr lang="en-US" dirty="0">
-                <a:latin typeface="Arial" panose="020B0604020202020204" pitchFamily="34" charset="0"/>
-                <a:cs typeface="Arial" panose="020B0604020202020204" pitchFamily="34" charset="0"/>
-              </a:rPr>
-              <a:t>Attendance continues today as usual.</a:t>
-            </a:r>
-          </a:p>
-          <a:p>
-            <a:r>
-              <a:rPr lang="en-US" dirty="0">
-                <a:latin typeface="Arial" panose="020B0604020202020204" pitchFamily="34" charset="0"/>
-                <a:cs typeface="Arial" panose="020B0604020202020204" pitchFamily="34" charset="0"/>
-              </a:rPr>
-              <a:t>Today we pause and review for the exam</a:t>
-            </a:r>
-          </a:p>
-          <a:p>
-            <a:endParaRPr lang="en-US" dirty="0">
-              <a:latin typeface="Arial" panose="020B0604020202020204" pitchFamily="34" charset="0"/>
-              <a:cs typeface="Arial" panose="020B0604020202020204" pitchFamily="34" charset="0"/>
-            </a:endParaRPr>
-          </a:p>
-        </p:txBody>
-      </p:sp>
-    </p:spTree>
-    <p:extLst>
-      <p:ext uri="{BB962C8B-B14F-4D97-AF65-F5344CB8AC3E}">
-        <p14:creationId xmlns:p14="http://schemas.microsoft.com/office/powerpoint/2010/main" val="458716138"/>
-      </p:ext>
-    </p:extLst>
-  </p:cSld>
-  <p:clrMapOvr>
-    <a:masterClrMapping/>
-  </p:clrMapOvr>
-</p:sld>
-</file>
-
-<file path=ppt/slides/slide14.xml><?xml version="1.0" encoding="utf-8"?>
-<p:sld xmlns:a="http://schemas.openxmlformats.org/drawingml/2006/main" xmlns:r="http://schemas.openxmlformats.org/officeDocument/2006/relationships" xmlns:p="http://schemas.openxmlformats.org/presentationml/2006/main">
-  <p:cSld>
-    <p:spTree>
-      <p:nvGrpSpPr>
-        <p:cNvPr id="1" name="">
-          <a:extLst>
-            <a:ext uri="{FF2B5EF4-FFF2-40B4-BE49-F238E27FC236}">
-              <a16:creationId xmlns:a16="http://schemas.microsoft.com/office/drawing/2014/main" id="{F1DF574A-7DD4-13AA-21AE-C41D6DC66C78}"/>
-            </a:ext>
-          </a:extLst>
-        </p:cNvPr>
-        <p:cNvGrpSpPr/>
-        <p:nvPr/>
-      </p:nvGrpSpPr>
-      <p:grpSpPr>
-        <a:xfrm>
-          <a:off x="0" y="0"/>
-          <a:ext cx="0" cy="0"/>
-          <a:chOff x="0" y="0"/>
-          <a:chExt cx="0" cy="0"/>
-        </a:xfrm>
-      </p:grpSpPr>
-      <p:sp>
-        <p:nvSpPr>
-          <p:cNvPr id="6146" name="Rectangle 2">
-            <a:extLst>
-              <a:ext uri="{FF2B5EF4-FFF2-40B4-BE49-F238E27FC236}">
-                <a16:creationId xmlns:a16="http://schemas.microsoft.com/office/drawing/2014/main" id="{86E6182E-FB84-1025-DD07-D031D935218B}"/>
-              </a:ext>
-            </a:extLst>
-          </p:cNvPr>
-          <p:cNvSpPr>
-            <a:spLocks noGrp="1" noChangeArrowheads="1"/>
-          </p:cNvSpPr>
-          <p:nvPr>
-            <p:ph type="title"/>
-            <p:custDataLst>
-              <p:tags r:id="rId1"/>
-            </p:custDataLst>
-          </p:nvPr>
-        </p:nvSpPr>
-        <p:spPr>
-          <a:xfrm>
-            <a:off x="1141413" y="284084"/>
-            <a:ext cx="9905998" cy="620791"/>
-          </a:xfrm>
-        </p:spPr>
-        <p:txBody>
-          <a:bodyPr/>
-          <a:lstStyle/>
-          <a:p>
-            <a:pPr algn="ctr"/>
-            <a:r>
-              <a:rPr lang="en-US" dirty="0"/>
-              <a:t>Week 4: Monday</a:t>
-            </a:r>
-          </a:p>
-        </p:txBody>
-      </p:sp>
-      <p:sp>
-        <p:nvSpPr>
-          <p:cNvPr id="6147" name="Rectangle 3">
-            <a:extLst>
-              <a:ext uri="{FF2B5EF4-FFF2-40B4-BE49-F238E27FC236}">
-                <a16:creationId xmlns:a16="http://schemas.microsoft.com/office/drawing/2014/main" id="{93AD5080-21F1-77E4-2468-4EF17E752A9D}"/>
-              </a:ext>
-            </a:extLst>
-          </p:cNvPr>
-          <p:cNvSpPr>
-            <a:spLocks noGrp="1" noChangeArrowheads="1"/>
-          </p:cNvSpPr>
-          <p:nvPr>
-            <p:ph idx="1"/>
-            <p:custDataLst>
-              <p:tags r:id="rId2"/>
-            </p:custDataLst>
-          </p:nvPr>
-        </p:nvSpPr>
-        <p:spPr>
-          <a:xfrm>
-            <a:off x="1294151" y="1098548"/>
-            <a:ext cx="9600522" cy="5817641"/>
-          </a:xfrm>
-        </p:spPr>
-        <p:txBody>
-          <a:bodyPr>
-            <a:normAutofit fontScale="62500" lnSpcReduction="20000"/>
-          </a:bodyPr>
-          <a:lstStyle/>
-          <a:p>
-            <a:r>
-              <a:rPr lang="en-US" dirty="0">
-                <a:latin typeface="Arial" panose="020B0604020202020204" pitchFamily="34" charset="0"/>
-                <a:cs typeface="Arial" panose="020B0604020202020204" pitchFamily="34" charset="0"/>
-              </a:rPr>
-              <a:t>Final week! You got this!!</a:t>
-            </a:r>
-          </a:p>
-          <a:p>
-            <a:r>
-              <a:rPr lang="en-US" dirty="0">
-                <a:latin typeface="Arial" panose="020B0604020202020204" pitchFamily="34" charset="0"/>
-                <a:cs typeface="Arial" panose="020B0604020202020204" pitchFamily="34" charset="0"/>
-              </a:rPr>
-              <a:t>Exam is graded, we will go over it today</a:t>
-            </a:r>
-          </a:p>
-          <a:p>
-            <a:pPr lvl="1"/>
-            <a:r>
-              <a:rPr lang="en-US" dirty="0">
-                <a:latin typeface="Arial" panose="020B0604020202020204" pitchFamily="34" charset="0"/>
-                <a:cs typeface="Arial" panose="020B0604020202020204" pitchFamily="34" charset="0"/>
-              </a:rPr>
-              <a:t>Average was 21.8/29 (~75%). Much better. Std. Dev. Was 6.43</a:t>
-            </a:r>
-          </a:p>
-          <a:p>
-            <a:r>
-              <a:rPr lang="en-US" dirty="0">
-                <a:latin typeface="Arial" panose="020B0604020202020204" pitchFamily="34" charset="0"/>
-                <a:cs typeface="Arial" panose="020B0604020202020204" pitchFamily="34" charset="0"/>
-              </a:rPr>
-              <a:t>This week:</a:t>
-            </a:r>
-            <a:endParaRPr lang="en-US" b="1" i="1" dirty="0">
-              <a:latin typeface="Arial" panose="020B0604020202020204" pitchFamily="34" charset="0"/>
-              <a:cs typeface="Arial" panose="020B0604020202020204" pitchFamily="34" charset="0"/>
-            </a:endParaRPr>
-          </a:p>
-          <a:p>
-            <a:pPr lvl="1"/>
-            <a:r>
-              <a:rPr lang="en-US" dirty="0">
-                <a:latin typeface="Arial" panose="020B0604020202020204" pitchFamily="34" charset="0"/>
-                <a:cs typeface="Arial" panose="020B0604020202020204" pitchFamily="34" charset="0"/>
-              </a:rPr>
-              <a:t>Mod 3 Written Assignment is Due </a:t>
-            </a:r>
-            <a:r>
-              <a:rPr lang="en-US" b="1" i="1" u="sng" dirty="0">
-                <a:latin typeface="Arial" panose="020B0604020202020204" pitchFamily="34" charset="0"/>
-                <a:cs typeface="Arial" panose="020B0604020202020204" pitchFamily="34" charset="0"/>
-              </a:rPr>
-              <a:t>TONIGHT</a:t>
-            </a:r>
-            <a:r>
-              <a:rPr lang="en-US" dirty="0">
-                <a:latin typeface="Arial" panose="020B0604020202020204" pitchFamily="34" charset="0"/>
-                <a:cs typeface="Arial" panose="020B0604020202020204" pitchFamily="34" charset="0"/>
-              </a:rPr>
-              <a:t>!</a:t>
-            </a:r>
-          </a:p>
-          <a:p>
-            <a:pPr lvl="1"/>
-            <a:r>
-              <a:rPr lang="en-US" dirty="0">
-                <a:latin typeface="Arial" panose="020B0604020202020204" pitchFamily="34" charset="0"/>
-                <a:cs typeface="Arial" panose="020B0604020202020204" pitchFamily="34" charset="0"/>
-              </a:rPr>
-              <a:t>Mod 4 Written Assignment Due THURSDAY NIGHT!</a:t>
-            </a:r>
-          </a:p>
-          <a:p>
-            <a:pPr lvl="1"/>
-            <a:r>
-              <a:rPr lang="en-US" dirty="0">
-                <a:latin typeface="Arial" panose="020B0604020202020204" pitchFamily="34" charset="0"/>
-                <a:cs typeface="Arial" panose="020B0604020202020204" pitchFamily="34" charset="0"/>
-              </a:rPr>
-              <a:t>Final Exam is on Friday</a:t>
-            </a:r>
-          </a:p>
-          <a:p>
-            <a:r>
-              <a:rPr lang="en-US" dirty="0">
-                <a:latin typeface="Arial" panose="020B0604020202020204" pitchFamily="34" charset="0"/>
-                <a:cs typeface="Arial" panose="020B0604020202020204" pitchFamily="34" charset="0"/>
-              </a:rPr>
-              <a:t>Mod 4 Written Assignment.</a:t>
-            </a:r>
-          </a:p>
-          <a:p>
-            <a:pPr lvl="1"/>
-            <a:r>
-              <a:rPr lang="en-US" dirty="0">
-                <a:latin typeface="Arial" panose="020B0604020202020204" pitchFamily="34" charset="0"/>
-                <a:cs typeface="Arial" panose="020B0604020202020204" pitchFamily="34" charset="0"/>
-              </a:rPr>
-              <a:t>Extension is only through Friday night (sorry) because I want to get final grades in Saturday</a:t>
-            </a:r>
-          </a:p>
-          <a:p>
-            <a:r>
-              <a:rPr lang="en-US" dirty="0">
-                <a:latin typeface="Arial" panose="020B0604020202020204" pitchFamily="34" charset="0"/>
-                <a:cs typeface="Arial" panose="020B0604020202020204" pitchFamily="34" charset="0"/>
-              </a:rPr>
-              <a:t>Final Exam</a:t>
-            </a:r>
-          </a:p>
-          <a:p>
-            <a:pPr lvl="1"/>
-            <a:r>
-              <a:rPr lang="en-US" dirty="0">
-                <a:latin typeface="Arial" panose="020B0604020202020204" pitchFamily="34" charset="0"/>
-                <a:cs typeface="Arial" panose="020B0604020202020204" pitchFamily="34" charset="0"/>
-              </a:rPr>
-              <a:t>You will have the full class period (10:30-12:45)</a:t>
-            </a:r>
-          </a:p>
-          <a:p>
-            <a:pPr lvl="1"/>
-            <a:r>
-              <a:rPr lang="en-US" dirty="0">
-                <a:latin typeface="Arial" panose="020B0604020202020204" pitchFamily="34" charset="0"/>
-                <a:cs typeface="Arial" panose="020B0604020202020204" pitchFamily="34" charset="0"/>
-              </a:rPr>
-              <a:t>Will cover the entire course, with an emphasis on modules 3 (Turing Machines) and 4 (Complexity Theory)</a:t>
-            </a:r>
-          </a:p>
-          <a:p>
-            <a:r>
-              <a:rPr lang="en-US" dirty="0">
-                <a:latin typeface="Arial" panose="020B0604020202020204" pitchFamily="34" charset="0"/>
-                <a:cs typeface="Arial" panose="020B0604020202020204" pitchFamily="34" charset="0"/>
-              </a:rPr>
-              <a:t>Lecture recordings from last Fall are posted on Panopto on Canvas</a:t>
-            </a:r>
-          </a:p>
-          <a:p>
-            <a:pPr lvl="1"/>
-            <a:r>
-              <a:rPr lang="en-US" dirty="0">
-                <a:latin typeface="Arial" panose="020B0604020202020204" pitchFamily="34" charset="0"/>
-                <a:cs typeface="Arial" panose="020B0604020202020204" pitchFamily="34" charset="0"/>
-              </a:rPr>
-              <a:t>I posted ALL the videos FYI</a:t>
-            </a:r>
-          </a:p>
-          <a:p>
-            <a:r>
-              <a:rPr lang="en-US" dirty="0">
-                <a:latin typeface="Arial" panose="020B0604020202020204" pitchFamily="34" charset="0"/>
-                <a:cs typeface="Arial" panose="020B0604020202020204" pitchFamily="34" charset="0"/>
-              </a:rPr>
-              <a:t>Please remember that I am asking for NO laptop / phones!</a:t>
-            </a:r>
-          </a:p>
-          <a:p>
-            <a:pPr lvl="1"/>
-            <a:r>
-              <a:rPr lang="en-US" dirty="0">
-                <a:latin typeface="Arial" panose="020B0604020202020204" pitchFamily="34" charset="0"/>
-                <a:cs typeface="Arial" panose="020B0604020202020204" pitchFamily="34" charset="0"/>
-              </a:rPr>
-              <a:t>This makes the learning environment better for everybody. I appreciate it!</a:t>
-            </a:r>
-          </a:p>
-          <a:p>
-            <a:r>
-              <a:rPr lang="en-US" dirty="0">
-                <a:latin typeface="Arial" panose="020B0604020202020204" pitchFamily="34" charset="0"/>
-                <a:cs typeface="Arial" panose="020B0604020202020204" pitchFamily="34" charset="0"/>
-              </a:rPr>
-              <a:t>Attendance continues today as usual.</a:t>
-            </a:r>
-          </a:p>
-          <a:p>
-            <a:r>
-              <a:rPr lang="en-US" dirty="0">
-                <a:latin typeface="Arial" panose="020B0604020202020204" pitchFamily="34" charset="0"/>
-                <a:cs typeface="Arial" panose="020B0604020202020204" pitchFamily="34" charset="0"/>
-              </a:rPr>
-              <a:t>Today we begin the last module</a:t>
-            </a:r>
-          </a:p>
-        </p:txBody>
-      </p:sp>
-    </p:spTree>
-    <p:extLst>
-      <p:ext uri="{BB962C8B-B14F-4D97-AF65-F5344CB8AC3E}">
-        <p14:creationId xmlns:p14="http://schemas.microsoft.com/office/powerpoint/2010/main" val="2964696306"/>
-      </p:ext>
-    </p:extLst>
-  </p:cSld>
-  <p:clrMapOvr>
-    <a:masterClrMapping/>
-  </p:clrMapOvr>
-</p:sld>
-</file>
-
-<file path=ppt/slides/slide15.xml><?xml version="1.0" encoding="utf-8"?>
-<p:sld xmlns:a="http://schemas.openxmlformats.org/drawingml/2006/main" xmlns:r="http://schemas.openxmlformats.org/officeDocument/2006/relationships" xmlns:p="http://schemas.openxmlformats.org/presentationml/2006/main">
-  <p:cSld>
-    <p:spTree>
-      <p:nvGrpSpPr>
-        <p:cNvPr id="1" name="">
-          <a:extLst>
-            <a:ext uri="{FF2B5EF4-FFF2-40B4-BE49-F238E27FC236}">
-              <a16:creationId xmlns:a16="http://schemas.microsoft.com/office/drawing/2014/main" id="{B1E5EF10-6888-E692-EC0E-E22AA95EE23A}"/>
-            </a:ext>
-          </a:extLst>
-        </p:cNvPr>
-        <p:cNvGrpSpPr/>
-        <p:nvPr/>
-      </p:nvGrpSpPr>
-      <p:grpSpPr>
-        <a:xfrm>
-          <a:off x="0" y="0"/>
-          <a:ext cx="0" cy="0"/>
-          <a:chOff x="0" y="0"/>
-          <a:chExt cx="0" cy="0"/>
-        </a:xfrm>
-      </p:grpSpPr>
-      <p:sp>
-        <p:nvSpPr>
-          <p:cNvPr id="6146" name="Rectangle 2">
-            <a:extLst>
-              <a:ext uri="{FF2B5EF4-FFF2-40B4-BE49-F238E27FC236}">
-                <a16:creationId xmlns:a16="http://schemas.microsoft.com/office/drawing/2014/main" id="{CD13B91B-2499-5DD1-51FA-8147BD4394A5}"/>
-              </a:ext>
-            </a:extLst>
-          </p:cNvPr>
-          <p:cNvSpPr>
-            <a:spLocks noGrp="1" noChangeArrowheads="1"/>
-          </p:cNvSpPr>
-          <p:nvPr>
-            <p:ph type="title"/>
-            <p:custDataLst>
-              <p:tags r:id="rId1"/>
-            </p:custDataLst>
-          </p:nvPr>
-        </p:nvSpPr>
-        <p:spPr>
-          <a:xfrm>
-            <a:off x="1141413" y="284084"/>
-            <a:ext cx="9905998" cy="620791"/>
-          </a:xfrm>
-        </p:spPr>
-        <p:txBody>
-          <a:bodyPr/>
-          <a:lstStyle/>
-          <a:p>
-            <a:pPr algn="ctr"/>
-            <a:r>
-              <a:rPr lang="en-US" dirty="0"/>
-              <a:t>Week 4: Tuesday</a:t>
-            </a:r>
-          </a:p>
-        </p:txBody>
-      </p:sp>
-      <p:sp>
-        <p:nvSpPr>
-          <p:cNvPr id="6147" name="Rectangle 3">
-            <a:extLst>
-              <a:ext uri="{FF2B5EF4-FFF2-40B4-BE49-F238E27FC236}">
-                <a16:creationId xmlns:a16="http://schemas.microsoft.com/office/drawing/2014/main" id="{3AAE769C-A2E8-39C0-5203-E8796D9F1BEE}"/>
-              </a:ext>
-            </a:extLst>
-          </p:cNvPr>
-          <p:cNvSpPr>
-            <a:spLocks noGrp="1" noChangeArrowheads="1"/>
-          </p:cNvSpPr>
-          <p:nvPr>
-            <p:ph idx="1"/>
-            <p:custDataLst>
-              <p:tags r:id="rId2"/>
-            </p:custDataLst>
-          </p:nvPr>
-        </p:nvSpPr>
-        <p:spPr>
-          <a:xfrm>
-            <a:off x="1294151" y="1098549"/>
-            <a:ext cx="9600522" cy="5475368"/>
-          </a:xfrm>
-        </p:spPr>
-        <p:txBody>
-          <a:bodyPr>
-            <a:normAutofit fontScale="70000" lnSpcReduction="20000"/>
-          </a:bodyPr>
-          <a:lstStyle/>
-          <a:p>
-            <a:r>
-              <a:rPr lang="en-US" dirty="0">
-                <a:latin typeface="Arial" panose="020B0604020202020204" pitchFamily="34" charset="0"/>
-                <a:cs typeface="Arial" panose="020B0604020202020204" pitchFamily="34" charset="0"/>
-              </a:rPr>
-              <a:t>Final week! You got this!!</a:t>
-            </a:r>
-          </a:p>
-          <a:p>
-            <a:r>
-              <a:rPr lang="en-US" dirty="0">
-                <a:latin typeface="Arial" panose="020B0604020202020204" pitchFamily="34" charset="0"/>
-                <a:cs typeface="Arial" panose="020B0604020202020204" pitchFamily="34" charset="0"/>
-              </a:rPr>
-              <a:t>This week:</a:t>
-            </a:r>
-            <a:endParaRPr lang="en-US" b="1" i="1" dirty="0">
-              <a:latin typeface="Arial" panose="020B0604020202020204" pitchFamily="34" charset="0"/>
-              <a:cs typeface="Arial" panose="020B0604020202020204" pitchFamily="34" charset="0"/>
-            </a:endParaRPr>
-          </a:p>
-          <a:p>
-            <a:pPr lvl="1"/>
-            <a:r>
-              <a:rPr lang="en-US" dirty="0">
-                <a:latin typeface="Arial" panose="020B0604020202020204" pitchFamily="34" charset="0"/>
-                <a:cs typeface="Arial" panose="020B0604020202020204" pitchFamily="34" charset="0"/>
-              </a:rPr>
-              <a:t>Mod 3 Written Assignment was Due Yesterday!</a:t>
-            </a:r>
-          </a:p>
-          <a:p>
-            <a:pPr lvl="1"/>
-            <a:r>
-              <a:rPr lang="en-US" dirty="0">
-                <a:latin typeface="Arial" panose="020B0604020202020204" pitchFamily="34" charset="0"/>
-                <a:cs typeface="Arial" panose="020B0604020202020204" pitchFamily="34" charset="0"/>
-              </a:rPr>
-              <a:t>Mod 4 Written Assignment Due THURSDAY NIGHT!</a:t>
-            </a:r>
-          </a:p>
-          <a:p>
-            <a:pPr lvl="1"/>
-            <a:r>
-              <a:rPr lang="en-US" dirty="0">
-                <a:latin typeface="Arial" panose="020B0604020202020204" pitchFamily="34" charset="0"/>
-                <a:cs typeface="Arial" panose="020B0604020202020204" pitchFamily="34" charset="0"/>
-              </a:rPr>
-              <a:t>Final Exam is on Friday</a:t>
-            </a:r>
-          </a:p>
-          <a:p>
-            <a:r>
-              <a:rPr lang="en-US" dirty="0">
-                <a:latin typeface="Arial" panose="020B0604020202020204" pitchFamily="34" charset="0"/>
-                <a:cs typeface="Arial" panose="020B0604020202020204" pitchFamily="34" charset="0"/>
-              </a:rPr>
-              <a:t>Mod 4 Written Assignment.</a:t>
-            </a:r>
-          </a:p>
-          <a:p>
-            <a:pPr lvl="1"/>
-            <a:r>
-              <a:rPr lang="en-US" dirty="0">
-                <a:latin typeface="Arial" panose="020B0604020202020204" pitchFamily="34" charset="0"/>
-                <a:cs typeface="Arial" panose="020B0604020202020204" pitchFamily="34" charset="0"/>
-              </a:rPr>
-              <a:t>Extension is only through Friday night (sorry) because I want to get final grades in Saturday</a:t>
-            </a:r>
-          </a:p>
-          <a:p>
-            <a:r>
-              <a:rPr lang="en-US" dirty="0">
-                <a:latin typeface="Arial" panose="020B0604020202020204" pitchFamily="34" charset="0"/>
-                <a:cs typeface="Arial" panose="020B0604020202020204" pitchFamily="34" charset="0"/>
-              </a:rPr>
-              <a:t>Final Exam</a:t>
-            </a:r>
-          </a:p>
-          <a:p>
-            <a:pPr lvl="1"/>
-            <a:r>
-              <a:rPr lang="en-US" dirty="0">
-                <a:latin typeface="Arial" panose="020B0604020202020204" pitchFamily="34" charset="0"/>
-                <a:cs typeface="Arial" panose="020B0604020202020204" pitchFamily="34" charset="0"/>
-              </a:rPr>
-              <a:t>You will have the full class period (10:30-12:45)</a:t>
-            </a:r>
-          </a:p>
-          <a:p>
-            <a:pPr lvl="1"/>
-            <a:r>
-              <a:rPr lang="en-US" dirty="0">
-                <a:latin typeface="Arial" panose="020B0604020202020204" pitchFamily="34" charset="0"/>
-                <a:cs typeface="Arial" panose="020B0604020202020204" pitchFamily="34" charset="0"/>
-              </a:rPr>
-              <a:t>Will cover the entire course, with an emphasis on modules 3 (Turing Machines) and 4 (Complexity Theory)</a:t>
-            </a:r>
-          </a:p>
-          <a:p>
-            <a:r>
-              <a:rPr lang="en-US" dirty="0">
-                <a:latin typeface="Arial" panose="020B0604020202020204" pitchFamily="34" charset="0"/>
-                <a:cs typeface="Arial" panose="020B0604020202020204" pitchFamily="34" charset="0"/>
-              </a:rPr>
-              <a:t>Lecture recordings from last Fall are posted on Panopto on Canvas</a:t>
-            </a:r>
-          </a:p>
-          <a:p>
-            <a:pPr lvl="1"/>
-            <a:r>
-              <a:rPr lang="en-US" dirty="0">
-                <a:latin typeface="Arial" panose="020B0604020202020204" pitchFamily="34" charset="0"/>
-                <a:cs typeface="Arial" panose="020B0604020202020204" pitchFamily="34" charset="0"/>
-              </a:rPr>
-              <a:t>I posted ALL the videos FYI</a:t>
-            </a:r>
-          </a:p>
-          <a:p>
-            <a:r>
-              <a:rPr lang="en-US" dirty="0">
-                <a:latin typeface="Arial" panose="020B0604020202020204" pitchFamily="34" charset="0"/>
-                <a:cs typeface="Arial" panose="020B0604020202020204" pitchFamily="34" charset="0"/>
-              </a:rPr>
-              <a:t>Please remember that I am asking for NO laptop / phones!</a:t>
-            </a:r>
-          </a:p>
-          <a:p>
-            <a:pPr lvl="1"/>
-            <a:r>
-              <a:rPr lang="en-US" dirty="0">
-                <a:latin typeface="Arial" panose="020B0604020202020204" pitchFamily="34" charset="0"/>
-                <a:cs typeface="Arial" panose="020B0604020202020204" pitchFamily="34" charset="0"/>
-              </a:rPr>
-              <a:t>This makes the learning environment better for everybody. I appreciate it!</a:t>
-            </a:r>
-          </a:p>
-          <a:p>
-            <a:r>
-              <a:rPr lang="en-US" dirty="0">
-                <a:latin typeface="Arial" panose="020B0604020202020204" pitchFamily="34" charset="0"/>
-                <a:cs typeface="Arial" panose="020B0604020202020204" pitchFamily="34" charset="0"/>
-              </a:rPr>
-              <a:t>Attendance continues today as usual.</a:t>
-            </a:r>
-          </a:p>
-          <a:p>
-            <a:r>
-              <a:rPr lang="en-US" dirty="0">
-                <a:latin typeface="Arial" panose="020B0604020202020204" pitchFamily="34" charset="0"/>
-                <a:cs typeface="Arial" panose="020B0604020202020204" pitchFamily="34" charset="0"/>
-              </a:rPr>
-              <a:t>Today </a:t>
-            </a:r>
-            <a:r>
-              <a:rPr lang="en-US">
-                <a:latin typeface="Arial" panose="020B0604020202020204" pitchFamily="34" charset="0"/>
-                <a:cs typeface="Arial" panose="020B0604020202020204" pitchFamily="34" charset="0"/>
-              </a:rPr>
-              <a:t>we continue </a:t>
-            </a:r>
-            <a:r>
-              <a:rPr lang="en-US" dirty="0">
-                <a:latin typeface="Arial" panose="020B0604020202020204" pitchFamily="34" charset="0"/>
-                <a:cs typeface="Arial" panose="020B0604020202020204" pitchFamily="34" charset="0"/>
-              </a:rPr>
-              <a:t>the last module</a:t>
-            </a:r>
-          </a:p>
-        </p:txBody>
-      </p:sp>
-    </p:spTree>
-    <p:extLst>
-      <p:ext uri="{BB962C8B-B14F-4D97-AF65-F5344CB8AC3E}">
-        <p14:creationId xmlns:p14="http://schemas.microsoft.com/office/powerpoint/2010/main" val="2623573409"/>
-      </p:ext>
-    </p:extLst>
-  </p:cSld>
-  <p:clrMapOvr>
-    <a:masterClrMapping/>
-  </p:clrMapOvr>
-</p:sld>
-</file>
-
-<file path=ppt/slides/slide16.xml><?xml version="1.0" encoding="utf-8"?>
-<p:sld xmlns:a="http://schemas.openxmlformats.org/drawingml/2006/main" xmlns:r="http://schemas.openxmlformats.org/officeDocument/2006/relationships" xmlns:p="http://schemas.openxmlformats.org/presentationml/2006/main">
-  <p:cSld>
-    <p:spTree>
-      <p:nvGrpSpPr>
-        <p:cNvPr id="1" name="">
-          <a:extLst>
-            <a:ext uri="{FF2B5EF4-FFF2-40B4-BE49-F238E27FC236}">
-              <a16:creationId xmlns:a16="http://schemas.microsoft.com/office/drawing/2014/main" id="{D78AA09B-DA9F-894B-F506-51083C339E11}"/>
-            </a:ext>
-          </a:extLst>
-        </p:cNvPr>
-        <p:cNvGrpSpPr/>
-        <p:nvPr/>
-      </p:nvGrpSpPr>
-      <p:grpSpPr>
-        <a:xfrm>
-          <a:off x="0" y="0"/>
-          <a:ext cx="0" cy="0"/>
-          <a:chOff x="0" y="0"/>
-          <a:chExt cx="0" cy="0"/>
-        </a:xfrm>
-      </p:grpSpPr>
-      <p:sp>
-        <p:nvSpPr>
-          <p:cNvPr id="6146" name="Rectangle 2">
-            <a:extLst>
-              <a:ext uri="{FF2B5EF4-FFF2-40B4-BE49-F238E27FC236}">
-                <a16:creationId xmlns:a16="http://schemas.microsoft.com/office/drawing/2014/main" id="{EC33BCF7-B01D-80BC-4B64-D376CA2C1983}"/>
-              </a:ext>
-            </a:extLst>
-          </p:cNvPr>
-          <p:cNvSpPr>
-            <a:spLocks noGrp="1" noChangeArrowheads="1"/>
-          </p:cNvSpPr>
-          <p:nvPr>
-            <p:ph type="title"/>
-            <p:custDataLst>
-              <p:tags r:id="rId1"/>
-            </p:custDataLst>
-          </p:nvPr>
-        </p:nvSpPr>
-        <p:spPr>
-          <a:xfrm>
-            <a:off x="1141413" y="284084"/>
-            <a:ext cx="9905998" cy="620791"/>
-          </a:xfrm>
-        </p:spPr>
-        <p:txBody>
-          <a:bodyPr/>
-          <a:lstStyle/>
-          <a:p>
-            <a:pPr algn="ctr"/>
-            <a:r>
-              <a:rPr lang="en-US" dirty="0"/>
-              <a:t>Week 4: Wednesday</a:t>
-            </a:r>
-          </a:p>
-        </p:txBody>
-      </p:sp>
-      <p:sp>
-        <p:nvSpPr>
-          <p:cNvPr id="6147" name="Rectangle 3">
-            <a:extLst>
-              <a:ext uri="{FF2B5EF4-FFF2-40B4-BE49-F238E27FC236}">
-                <a16:creationId xmlns:a16="http://schemas.microsoft.com/office/drawing/2014/main" id="{9F41845A-8A12-2A3F-54E8-B921FD223F8B}"/>
-              </a:ext>
-            </a:extLst>
-          </p:cNvPr>
-          <p:cNvSpPr>
-            <a:spLocks noGrp="1" noChangeArrowheads="1"/>
-          </p:cNvSpPr>
-          <p:nvPr>
-            <p:ph idx="1"/>
-            <p:custDataLst>
-              <p:tags r:id="rId2"/>
-            </p:custDataLst>
-          </p:nvPr>
-        </p:nvSpPr>
-        <p:spPr>
-          <a:xfrm>
-            <a:off x="1294151" y="1098549"/>
-            <a:ext cx="9600522" cy="5475368"/>
-          </a:xfrm>
-        </p:spPr>
-        <p:txBody>
-          <a:bodyPr>
-            <a:normAutofit fontScale="70000" lnSpcReduction="20000"/>
-          </a:bodyPr>
-          <a:lstStyle/>
-          <a:p>
-            <a:r>
-              <a:rPr lang="en-US" dirty="0">
-                <a:latin typeface="Arial" panose="020B0604020202020204" pitchFamily="34" charset="0"/>
-                <a:cs typeface="Arial" panose="020B0604020202020204" pitchFamily="34" charset="0"/>
-              </a:rPr>
-              <a:t>Final week! You got this!!</a:t>
-            </a:r>
-          </a:p>
-          <a:p>
-            <a:r>
-              <a:rPr lang="en-US" dirty="0">
-                <a:latin typeface="Arial" panose="020B0604020202020204" pitchFamily="34" charset="0"/>
-                <a:cs typeface="Arial" panose="020B0604020202020204" pitchFamily="34" charset="0"/>
-              </a:rPr>
-              <a:t>This week:</a:t>
-            </a:r>
-          </a:p>
-          <a:p>
-            <a:pPr lvl="1"/>
-            <a:r>
-              <a:rPr lang="en-US" dirty="0">
-                <a:latin typeface="Arial" panose="020B0604020202020204" pitchFamily="34" charset="0"/>
-                <a:cs typeface="Arial" panose="020B0604020202020204" pitchFamily="34" charset="0"/>
-              </a:rPr>
-              <a:t>Mod 4 Written Assignment Due THURSDAY NIGHT!</a:t>
-            </a:r>
-          </a:p>
-          <a:p>
-            <a:pPr lvl="1"/>
-            <a:r>
-              <a:rPr lang="en-US" dirty="0">
-                <a:latin typeface="Arial" panose="020B0604020202020204" pitchFamily="34" charset="0"/>
-                <a:cs typeface="Arial" panose="020B0604020202020204" pitchFamily="34" charset="0"/>
-              </a:rPr>
-              <a:t>Final Exam is on Friday</a:t>
-            </a:r>
-          </a:p>
-          <a:p>
-            <a:r>
-              <a:rPr lang="en-US" dirty="0">
-                <a:latin typeface="Arial" panose="020B0604020202020204" pitchFamily="34" charset="0"/>
-                <a:cs typeface="Arial" panose="020B0604020202020204" pitchFamily="34" charset="0"/>
-              </a:rPr>
-              <a:t>Mod 4 Written Assignment.</a:t>
-            </a:r>
-          </a:p>
-          <a:p>
-            <a:pPr lvl="1"/>
-            <a:r>
-              <a:rPr lang="en-US" dirty="0">
-                <a:latin typeface="Arial" panose="020B0604020202020204" pitchFamily="34" charset="0"/>
-                <a:cs typeface="Arial" panose="020B0604020202020204" pitchFamily="34" charset="0"/>
-              </a:rPr>
-              <a:t>Extension is only through Friday night (sorry) because I want to get final grades in Saturday</a:t>
-            </a:r>
-          </a:p>
-          <a:p>
-            <a:r>
-              <a:rPr lang="en-US" dirty="0">
-                <a:latin typeface="Arial" panose="020B0604020202020204" pitchFamily="34" charset="0"/>
-                <a:cs typeface="Arial" panose="020B0604020202020204" pitchFamily="34" charset="0"/>
-              </a:rPr>
-              <a:t>Final Exam</a:t>
-            </a:r>
-          </a:p>
-          <a:p>
-            <a:pPr lvl="1"/>
-            <a:r>
-              <a:rPr lang="en-US" dirty="0">
-                <a:latin typeface="Arial" panose="020B0604020202020204" pitchFamily="34" charset="0"/>
-                <a:cs typeface="Arial" panose="020B0604020202020204" pitchFamily="34" charset="0"/>
-              </a:rPr>
-              <a:t>You will have the full class period (10:30-12:45)</a:t>
-            </a:r>
-          </a:p>
-          <a:p>
-            <a:pPr lvl="1"/>
-            <a:r>
-              <a:rPr lang="en-US" dirty="0">
-                <a:latin typeface="Arial" panose="020B0604020202020204" pitchFamily="34" charset="0"/>
-                <a:cs typeface="Arial" panose="020B0604020202020204" pitchFamily="34" charset="0"/>
-              </a:rPr>
-              <a:t>Will cover the entire course, with an emphasis on modules 3 (Turing Machines) and 4 (Complexity Theory)</a:t>
-            </a:r>
-          </a:p>
-          <a:p>
-            <a:r>
-              <a:rPr lang="en-US" dirty="0">
-                <a:latin typeface="Arial" panose="020B0604020202020204" pitchFamily="34" charset="0"/>
-                <a:cs typeface="Arial" panose="020B0604020202020204" pitchFamily="34" charset="0"/>
-              </a:rPr>
-              <a:t>Lecture recordings from last Fall are posted on Panopto on Canvas</a:t>
-            </a:r>
-          </a:p>
-          <a:p>
-            <a:pPr lvl="1"/>
-            <a:r>
-              <a:rPr lang="en-US" dirty="0">
-                <a:latin typeface="Arial" panose="020B0604020202020204" pitchFamily="34" charset="0"/>
-                <a:cs typeface="Arial" panose="020B0604020202020204" pitchFamily="34" charset="0"/>
-              </a:rPr>
-              <a:t>I posted ALL the videos FYI</a:t>
-            </a:r>
-          </a:p>
-          <a:p>
-            <a:r>
-              <a:rPr lang="en-US" dirty="0">
-                <a:latin typeface="Arial" panose="020B0604020202020204" pitchFamily="34" charset="0"/>
-                <a:cs typeface="Arial" panose="020B0604020202020204" pitchFamily="34" charset="0"/>
-              </a:rPr>
-              <a:t>Please remember that I am asking for NO laptop / phones!</a:t>
-            </a:r>
-          </a:p>
-          <a:p>
-            <a:pPr lvl="1"/>
-            <a:r>
-              <a:rPr lang="en-US" dirty="0">
-                <a:latin typeface="Arial" panose="020B0604020202020204" pitchFamily="34" charset="0"/>
-                <a:cs typeface="Arial" panose="020B0604020202020204" pitchFamily="34" charset="0"/>
-              </a:rPr>
-              <a:t>This makes the learning environment better for everybody. I appreciate it!</a:t>
-            </a:r>
-          </a:p>
-          <a:p>
-            <a:r>
-              <a:rPr lang="en-US" dirty="0">
-                <a:latin typeface="Arial" panose="020B0604020202020204" pitchFamily="34" charset="0"/>
-                <a:cs typeface="Arial" panose="020B0604020202020204" pitchFamily="34" charset="0"/>
-              </a:rPr>
-              <a:t>Attendance continues today as usual.</a:t>
-            </a:r>
-          </a:p>
-          <a:p>
-            <a:r>
-              <a:rPr lang="en-US" dirty="0">
-                <a:latin typeface="Arial" panose="020B0604020202020204" pitchFamily="34" charset="0"/>
-                <a:cs typeface="Arial" panose="020B0604020202020204" pitchFamily="34" charset="0"/>
-              </a:rPr>
-              <a:t>Today we continue the last module</a:t>
-            </a:r>
-          </a:p>
-        </p:txBody>
-      </p:sp>
-    </p:spTree>
-    <p:extLst>
-      <p:ext uri="{BB962C8B-B14F-4D97-AF65-F5344CB8AC3E}">
-        <p14:creationId xmlns:p14="http://schemas.microsoft.com/office/powerpoint/2010/main" val="3414554098"/>
-      </p:ext>
-    </p:extLst>
-  </p:cSld>
-  <p:clrMapOvr>
-    <a:masterClrMapping/>
-  </p:clrMapOvr>
-</p:sld>
-</file>
-
-<file path=ppt/slides/slide17.xml><?xml version="1.0" encoding="utf-8"?>
-<p:sld xmlns:a="http://schemas.openxmlformats.org/drawingml/2006/main" xmlns:r="http://schemas.openxmlformats.org/officeDocument/2006/relationships" xmlns:p="http://schemas.openxmlformats.org/presentationml/2006/main">
-  <p:cSld>
-    <p:spTree>
-      <p:nvGrpSpPr>
-        <p:cNvPr id="1" name="">
-          <a:extLst>
-            <a:ext uri="{FF2B5EF4-FFF2-40B4-BE49-F238E27FC236}">
-              <a16:creationId xmlns:a16="http://schemas.microsoft.com/office/drawing/2014/main" id="{85D1A3B7-0E46-46DA-743E-0F0F408BB376}"/>
-            </a:ext>
-          </a:extLst>
-        </p:cNvPr>
-        <p:cNvGrpSpPr/>
-        <p:nvPr/>
-      </p:nvGrpSpPr>
-      <p:grpSpPr>
-        <a:xfrm>
-          <a:off x="0" y="0"/>
-          <a:ext cx="0" cy="0"/>
-          <a:chOff x="0" y="0"/>
-          <a:chExt cx="0" cy="0"/>
-        </a:xfrm>
-      </p:grpSpPr>
-      <p:sp>
-        <p:nvSpPr>
-          <p:cNvPr id="6146" name="Rectangle 2">
-            <a:extLst>
-              <a:ext uri="{FF2B5EF4-FFF2-40B4-BE49-F238E27FC236}">
-                <a16:creationId xmlns:a16="http://schemas.microsoft.com/office/drawing/2014/main" id="{15E3CEFF-4634-D587-57D8-9D6DA9ACB8FB}"/>
-              </a:ext>
-            </a:extLst>
-          </p:cNvPr>
-          <p:cNvSpPr>
-            <a:spLocks noGrp="1" noChangeArrowheads="1"/>
-          </p:cNvSpPr>
-          <p:nvPr>
-            <p:ph type="title"/>
-            <p:custDataLst>
-              <p:tags r:id="rId1"/>
-            </p:custDataLst>
-          </p:nvPr>
-        </p:nvSpPr>
-        <p:spPr>
-          <a:xfrm>
-            <a:off x="1141413" y="284084"/>
-            <a:ext cx="9905998" cy="620791"/>
-          </a:xfrm>
-        </p:spPr>
-        <p:txBody>
-          <a:bodyPr/>
-          <a:lstStyle/>
-          <a:p>
-            <a:pPr algn="ctr"/>
-            <a:r>
-              <a:rPr lang="en-US" dirty="0"/>
-              <a:t>Week 4: Thursday</a:t>
-            </a:r>
-          </a:p>
-        </p:txBody>
-      </p:sp>
-      <p:sp>
-        <p:nvSpPr>
-          <p:cNvPr id="6147" name="Rectangle 3">
-            <a:extLst>
-              <a:ext uri="{FF2B5EF4-FFF2-40B4-BE49-F238E27FC236}">
-                <a16:creationId xmlns:a16="http://schemas.microsoft.com/office/drawing/2014/main" id="{A262A1FE-7504-C23A-9807-32B849709643}"/>
-              </a:ext>
-            </a:extLst>
-          </p:cNvPr>
-          <p:cNvSpPr>
-            <a:spLocks noGrp="1" noChangeArrowheads="1"/>
-          </p:cNvSpPr>
-          <p:nvPr>
-            <p:ph idx="1"/>
-            <p:custDataLst>
-              <p:tags r:id="rId2"/>
-            </p:custDataLst>
-          </p:nvPr>
-        </p:nvSpPr>
-        <p:spPr>
-          <a:xfrm>
-            <a:off x="1294151" y="1098549"/>
-            <a:ext cx="9600522" cy="5475368"/>
-          </a:xfrm>
-        </p:spPr>
-        <p:txBody>
-          <a:bodyPr>
-            <a:normAutofit fontScale="70000" lnSpcReduction="20000"/>
-          </a:bodyPr>
-          <a:lstStyle/>
-          <a:p>
-            <a:r>
-              <a:rPr lang="en-US" dirty="0">
-                <a:latin typeface="Arial" panose="020B0604020202020204" pitchFamily="34" charset="0"/>
-                <a:cs typeface="Arial" panose="020B0604020202020204" pitchFamily="34" charset="0"/>
-              </a:rPr>
-              <a:t>Last Lecture Day!!</a:t>
-            </a:r>
-          </a:p>
-          <a:p>
-            <a:r>
-              <a:rPr lang="en-US" dirty="0">
-                <a:latin typeface="Arial" panose="020B0604020202020204" pitchFamily="34" charset="0"/>
-                <a:cs typeface="Arial" panose="020B0604020202020204" pitchFamily="34" charset="0"/>
-              </a:rPr>
-              <a:t>This week:</a:t>
-            </a:r>
-          </a:p>
-          <a:p>
-            <a:pPr lvl="1"/>
-            <a:r>
-              <a:rPr lang="en-US" dirty="0">
-                <a:latin typeface="Arial" panose="020B0604020202020204" pitchFamily="34" charset="0"/>
-                <a:cs typeface="Arial" panose="020B0604020202020204" pitchFamily="34" charset="0"/>
-              </a:rPr>
-              <a:t>Mod 4 Written Assignment Due </a:t>
-            </a:r>
-            <a:r>
-              <a:rPr lang="en-US" b="1" i="1" u="sng" dirty="0">
-                <a:latin typeface="Arial" panose="020B0604020202020204" pitchFamily="34" charset="0"/>
-                <a:cs typeface="Arial" panose="020B0604020202020204" pitchFamily="34" charset="0"/>
-              </a:rPr>
-              <a:t>TONIGHT</a:t>
-            </a:r>
-            <a:r>
-              <a:rPr lang="en-US" dirty="0">
-                <a:latin typeface="Arial" panose="020B0604020202020204" pitchFamily="34" charset="0"/>
-                <a:cs typeface="Arial" panose="020B0604020202020204" pitchFamily="34" charset="0"/>
-              </a:rPr>
-              <a:t>!</a:t>
-            </a:r>
-          </a:p>
-          <a:p>
-            <a:pPr lvl="1"/>
-            <a:r>
-              <a:rPr lang="en-US" dirty="0">
-                <a:latin typeface="Arial" panose="020B0604020202020204" pitchFamily="34" charset="0"/>
-                <a:cs typeface="Arial" panose="020B0604020202020204" pitchFamily="34" charset="0"/>
-              </a:rPr>
-              <a:t>Final Exam is TOMORROW!</a:t>
-            </a:r>
-          </a:p>
-          <a:p>
-            <a:r>
-              <a:rPr lang="en-US" dirty="0">
-                <a:latin typeface="Arial" panose="020B0604020202020204" pitchFamily="34" charset="0"/>
-                <a:cs typeface="Arial" panose="020B0604020202020204" pitchFamily="34" charset="0"/>
-              </a:rPr>
-              <a:t>Mod 4 Written Assignment.</a:t>
-            </a:r>
-          </a:p>
-          <a:p>
-            <a:pPr lvl="1"/>
-            <a:r>
-              <a:rPr lang="en-US" dirty="0">
-                <a:latin typeface="Arial" panose="020B0604020202020204" pitchFamily="34" charset="0"/>
-                <a:cs typeface="Arial" panose="020B0604020202020204" pitchFamily="34" charset="0"/>
-              </a:rPr>
-              <a:t>Extension is only through Friday night (sorry) because I want to get final grades in Saturday</a:t>
-            </a:r>
-          </a:p>
-          <a:p>
-            <a:r>
-              <a:rPr lang="en-US" dirty="0">
-                <a:latin typeface="Arial" panose="020B0604020202020204" pitchFamily="34" charset="0"/>
-                <a:cs typeface="Arial" panose="020B0604020202020204" pitchFamily="34" charset="0"/>
-              </a:rPr>
-              <a:t>Final Exam</a:t>
-            </a:r>
-          </a:p>
-          <a:p>
-            <a:pPr lvl="1"/>
-            <a:r>
-              <a:rPr lang="en-US" dirty="0">
-                <a:latin typeface="Arial" panose="020B0604020202020204" pitchFamily="34" charset="0"/>
-                <a:cs typeface="Arial" panose="020B0604020202020204" pitchFamily="34" charset="0"/>
-              </a:rPr>
-              <a:t>You will have the full class period (10:30-12:45)</a:t>
-            </a:r>
-          </a:p>
-          <a:p>
-            <a:pPr lvl="1"/>
-            <a:r>
-              <a:rPr lang="en-US" dirty="0">
-                <a:latin typeface="Arial" panose="020B0604020202020204" pitchFamily="34" charset="0"/>
-                <a:cs typeface="Arial" panose="020B0604020202020204" pitchFamily="34" charset="0"/>
-              </a:rPr>
-              <a:t>Will cover the entire course, with an emphasis on modules 3 (Turing Machines) and 4 (Complexity Theory)</a:t>
-            </a:r>
-          </a:p>
-          <a:p>
-            <a:r>
-              <a:rPr lang="en-US" dirty="0">
-                <a:latin typeface="Arial" panose="020B0604020202020204" pitchFamily="34" charset="0"/>
-                <a:cs typeface="Arial" panose="020B0604020202020204" pitchFamily="34" charset="0"/>
-              </a:rPr>
-              <a:t>Lecture recordings from last Fall are posted on Panopto on Canvas</a:t>
-            </a:r>
-          </a:p>
-          <a:p>
-            <a:pPr lvl="1"/>
-            <a:r>
-              <a:rPr lang="en-US" dirty="0">
-                <a:latin typeface="Arial" panose="020B0604020202020204" pitchFamily="34" charset="0"/>
-                <a:cs typeface="Arial" panose="020B0604020202020204" pitchFamily="34" charset="0"/>
-              </a:rPr>
-              <a:t>I posted ALL the videos FYI</a:t>
-            </a:r>
-          </a:p>
-          <a:p>
-            <a:r>
-              <a:rPr lang="en-US" dirty="0">
-                <a:latin typeface="Arial" panose="020B0604020202020204" pitchFamily="34" charset="0"/>
-                <a:cs typeface="Arial" panose="020B0604020202020204" pitchFamily="34" charset="0"/>
-              </a:rPr>
-              <a:t>Please remember that I am asking for NO laptop / phones!</a:t>
-            </a:r>
-          </a:p>
-          <a:p>
-            <a:pPr lvl="1"/>
-            <a:r>
-              <a:rPr lang="en-US" dirty="0">
-                <a:latin typeface="Arial" panose="020B0604020202020204" pitchFamily="34" charset="0"/>
-                <a:cs typeface="Arial" panose="020B0604020202020204" pitchFamily="34" charset="0"/>
-              </a:rPr>
-              <a:t>This makes the learning environment better for everybody. I appreciate it!</a:t>
-            </a:r>
-          </a:p>
-          <a:p>
-            <a:r>
-              <a:rPr lang="en-US" dirty="0">
-                <a:latin typeface="Arial" panose="020B0604020202020204" pitchFamily="34" charset="0"/>
-                <a:cs typeface="Arial" panose="020B0604020202020204" pitchFamily="34" charset="0"/>
-              </a:rPr>
-              <a:t>Attendance continues today as usual.</a:t>
-            </a:r>
-          </a:p>
-          <a:p>
-            <a:r>
-              <a:rPr lang="en-US" dirty="0">
-                <a:latin typeface="Arial" panose="020B0604020202020204" pitchFamily="34" charset="0"/>
-                <a:cs typeface="Arial" panose="020B0604020202020204" pitchFamily="34" charset="0"/>
-              </a:rPr>
-              <a:t>Today we finish the last module and possibly review if time.</a:t>
-            </a:r>
-          </a:p>
-        </p:txBody>
-      </p:sp>
-    </p:spTree>
-    <p:extLst>
-      <p:ext uri="{BB962C8B-B14F-4D97-AF65-F5344CB8AC3E}">
-        <p14:creationId xmlns:p14="http://schemas.microsoft.com/office/powerpoint/2010/main" val="669073853"/>
-      </p:ext>
-    </p:extLst>
-  </p:cSld>
-  <p:clrMapOvr>
-    <a:masterClrMapping/>
-  </p:clrMapOvr>
-</p:sld>
-</file>
-
-<file path=ppt/slides/slide18.xml><?xml version="1.0" encoding="utf-8"?>
+<file path=ppt/slides/slide2.xml><?xml version="1.0" encoding="utf-8"?>
 <p:sld xmlns:a="http://schemas.openxmlformats.org/drawingml/2006/main" xmlns:r="http://schemas.openxmlformats.org/officeDocument/2006/relationships" xmlns:p="http://schemas.openxmlformats.org/presentationml/2006/main">
   <p:cSld>
     <p:spTree>
@@ -15032,7 +13026,195 @@
             <a:pPr algn="ctr"/>
             <a:r>
               <a:rPr lang="en-US" dirty="0"/>
-              <a:t>Status of Curve Data</a:t>
+              <a:t>Lecture 2 - Thursday, Aug. 27</a:t>
+            </a:r>
+          </a:p>
+        </p:txBody>
+      </p:sp>
+      <p:sp>
+        <p:nvSpPr>
+          <p:cNvPr id="6147" name="Rectangle 3"/>
+          <p:cNvSpPr>
+            <a:spLocks noGrp="1" noChangeArrowheads="1"/>
+          </p:cNvSpPr>
+          <p:nvPr>
+            <p:ph idx="1"/>
+            <p:custDataLst>
+              <p:tags r:id="rId2"/>
+            </p:custDataLst>
+          </p:nvPr>
+        </p:nvSpPr>
+        <p:spPr>
+          <a:xfrm>
+            <a:off x="1294151" y="1098549"/>
+            <a:ext cx="9600522" cy="5149850"/>
+          </a:xfrm>
+        </p:spPr>
+        <p:txBody>
+          <a:bodyPr>
+            <a:normAutofit/>
+          </a:bodyPr>
+          <a:lstStyle/>
+          <a:p>
+            <a:r>
+              <a:rPr lang="en-US" dirty="0">
+                <a:latin typeface="Arial" panose="020B0604020202020204" pitchFamily="34" charset="0"/>
+                <a:cs typeface="Arial" panose="020B0604020202020204" pitchFamily="34" charset="0"/>
+              </a:rPr>
+              <a:t>Any questions about course policies from last time?</a:t>
+            </a:r>
+          </a:p>
+          <a:p>
+            <a:r>
+              <a:rPr lang="en-US" dirty="0">
+                <a:latin typeface="Arial" panose="020B0604020202020204" pitchFamily="34" charset="0"/>
+                <a:cs typeface="Arial" panose="020B0604020202020204" pitchFamily="34" charset="0"/>
+              </a:rPr>
+              <a:t>Please remember </a:t>
+            </a:r>
+            <a:r>
+              <a:rPr lang="en-US" b="1" i="1" u="sng" dirty="0">
+                <a:latin typeface="Arial" panose="020B0604020202020204" pitchFamily="34" charset="0"/>
+                <a:cs typeface="Arial" panose="020B0604020202020204" pitchFamily="34" charset="0"/>
+              </a:rPr>
+              <a:t>no laptops / phones</a:t>
+            </a:r>
+            <a:r>
+              <a:rPr lang="en-US" dirty="0">
+                <a:latin typeface="Arial" panose="020B0604020202020204" pitchFamily="34" charset="0"/>
+                <a:cs typeface="Arial" panose="020B0604020202020204" pitchFamily="34" charset="0"/>
+              </a:rPr>
+              <a:t> and </a:t>
+            </a:r>
+            <a:r>
+              <a:rPr lang="en-US" b="1" i="1" u="sng" dirty="0">
+                <a:latin typeface="Arial" panose="020B0604020202020204" pitchFamily="34" charset="0"/>
+                <a:cs typeface="Arial" panose="020B0604020202020204" pitchFamily="34" charset="0"/>
+              </a:rPr>
+              <a:t>attendance policy</a:t>
+            </a:r>
+          </a:p>
+          <a:p>
+            <a:r>
+              <a:rPr lang="en-US" dirty="0">
+                <a:latin typeface="Arial" panose="020B0604020202020204" pitchFamily="34" charset="0"/>
+                <a:cs typeface="Arial" panose="020B0604020202020204" pitchFamily="34" charset="0"/>
+              </a:rPr>
+              <a:t>First homework  is due one week from today (Thursday)</a:t>
+            </a:r>
+          </a:p>
+          <a:p>
+            <a:pPr lvl="1"/>
+            <a:r>
+              <a:rPr lang="en-US" dirty="0">
+                <a:latin typeface="Arial" panose="020B0604020202020204" pitchFamily="34" charset="0"/>
+                <a:cs typeface="Arial" panose="020B0604020202020204" pitchFamily="34" charset="0"/>
+              </a:rPr>
+              <a:t>Remember you can get an extension by filling out form linked on HW page</a:t>
+            </a:r>
+          </a:p>
+          <a:p>
+            <a:pPr lvl="1"/>
+            <a:r>
+              <a:rPr lang="en-US" dirty="0">
+                <a:latin typeface="Arial" panose="020B0604020202020204" pitchFamily="34" charset="0"/>
+                <a:cs typeface="Arial" panose="020B0604020202020204" pitchFamily="34" charset="0"/>
+              </a:rPr>
+              <a:t>Hopefully we get through enough material. Might be tight.</a:t>
+            </a:r>
+          </a:p>
+          <a:p>
+            <a:r>
+              <a:rPr lang="en-US" dirty="0">
+                <a:latin typeface="Arial" panose="020B0604020202020204" pitchFamily="34" charset="0"/>
+                <a:cs typeface="Arial" panose="020B0604020202020204" pitchFamily="34" charset="0"/>
+              </a:rPr>
+              <a:t>First quiz is 9/22 (but we have some time before that arrives)</a:t>
+            </a:r>
+          </a:p>
+          <a:p>
+            <a:r>
+              <a:rPr lang="en-US" dirty="0">
+                <a:latin typeface="Arial" panose="020B0604020202020204" pitchFamily="34" charset="0"/>
+                <a:cs typeface="Arial" panose="020B0604020202020204" pitchFamily="34" charset="0"/>
+              </a:rPr>
+              <a:t>These slides are linked on the course webpage “slides” page.</a:t>
+            </a:r>
+          </a:p>
+          <a:p>
+            <a:r>
+              <a:rPr lang="en-US" dirty="0">
+                <a:latin typeface="Arial" panose="020B0604020202020204" pitchFamily="34" charset="0"/>
+                <a:cs typeface="Arial" panose="020B0604020202020204" pitchFamily="34" charset="0"/>
+              </a:rPr>
+              <a:t>Today we will start module 0 which is a half review, half overview of what to expect in the course.</a:t>
+            </a:r>
+          </a:p>
+          <a:p>
+            <a:endParaRPr lang="en-US" dirty="0">
+              <a:latin typeface="Arial" panose="020B0604020202020204" pitchFamily="34" charset="0"/>
+              <a:cs typeface="Arial" panose="020B0604020202020204" pitchFamily="34" charset="0"/>
+            </a:endParaRPr>
+          </a:p>
+        </p:txBody>
+      </p:sp>
+    </p:spTree>
+    <p:extLst>
+      <p:ext uri="{BB962C8B-B14F-4D97-AF65-F5344CB8AC3E}">
+        <p14:creationId xmlns:p14="http://schemas.microsoft.com/office/powerpoint/2010/main" val="2431754002"/>
+      </p:ext>
+    </p:extLst>
+  </p:cSld>
+  <p:clrMapOvr>
+    <a:masterClrMapping/>
+  </p:clrMapOvr>
+</p:sld>
+</file>
+
+<file path=ppt/slides/slide3.xml><?xml version="1.0" encoding="utf-8"?>
+<p:sld xmlns:a="http://schemas.openxmlformats.org/drawingml/2006/main" xmlns:r="http://schemas.openxmlformats.org/officeDocument/2006/relationships" xmlns:p="http://schemas.openxmlformats.org/presentationml/2006/main">
+  <p:cSld>
+    <p:spTree>
+      <p:nvGrpSpPr>
+        <p:cNvPr id="1" name=""/>
+        <p:cNvGrpSpPr/>
+        <p:nvPr/>
+      </p:nvGrpSpPr>
+      <p:grpSpPr>
+        <a:xfrm>
+          <a:off x="0" y="0"/>
+          <a:ext cx="0" cy="0"/>
+          <a:chOff x="0" y="0"/>
+          <a:chExt cx="0" cy="0"/>
+        </a:xfrm>
+      </p:grpSpPr>
+      <p:sp>
+        <p:nvSpPr>
+          <p:cNvPr id="6146" name="Rectangle 2"/>
+          <p:cNvSpPr>
+            <a:spLocks noGrp="1" noChangeArrowheads="1"/>
+          </p:cNvSpPr>
+          <p:nvPr>
+            <p:ph type="title"/>
+            <p:custDataLst>
+              <p:tags r:id="rId1"/>
+            </p:custDataLst>
+          </p:nvPr>
+        </p:nvSpPr>
+        <p:spPr>
+          <a:xfrm>
+            <a:off x="1141413" y="284084"/>
+            <a:ext cx="9905998" cy="620791"/>
+          </a:xfrm>
+        </p:spPr>
+        <p:txBody>
+          <a:bodyPr/>
+          <a:lstStyle/>
+          <a:p>
+            <a:pPr algn="ctr"/>
+            <a:r>
+              <a:rPr lang="en-US" dirty="0"/>
+              <a:t>Status of Attendance Grade</a:t>
             </a:r>
           </a:p>
         </p:txBody>
@@ -15330,7 +13512,7 @@
           <p:nvPr>
             <p:extLst>
               <p:ext uri="{D42A27DB-BD31-4B8C-83A1-F6EECF244321}">
-                <p14:modId xmlns:p14="http://schemas.microsoft.com/office/powerpoint/2010/main" val="1250329912"/>
+                <p14:modId xmlns:p14="http://schemas.microsoft.com/office/powerpoint/2010/main" val="4210067486"/>
               </p:ext>
             </p:extLst>
           </p:nvPr>
@@ -15426,7 +13608,7 @@
                       <a:pPr algn="ctr"/>
                       <a:r>
                         <a:rPr lang="en-US" i="0" dirty="0"/>
-                        <a:t>15</a:t>
+                        <a:t>1</a:t>
                       </a:r>
                     </a:p>
                   </a:txBody>
@@ -15440,7 +13622,7 @@
                       <a:pPr algn="ctr"/>
                       <a:r>
                         <a:rPr lang="en-US" i="0" dirty="0"/>
-                        <a:t>21</a:t>
+                        <a:t>1</a:t>
                       </a:r>
                     </a:p>
                   </a:txBody>
@@ -15454,7 +13636,7 @@
                       <a:pPr algn="ctr"/>
                       <a:r>
                         <a:rPr lang="en-US" b="1" i="0" dirty="0"/>
-                        <a:t>71.4%</a:t>
+                        <a:t>100%</a:t>
                       </a:r>
                     </a:p>
                   </a:txBody>
@@ -15485,7 +13667,7 @@
           <p:nvPr>
             <p:extLst>
               <p:ext uri="{D42A27DB-BD31-4B8C-83A1-F6EECF244321}">
-                <p14:modId xmlns:p14="http://schemas.microsoft.com/office/powerpoint/2010/main" val="1069840390"/>
+                <p14:modId xmlns:p14="http://schemas.microsoft.com/office/powerpoint/2010/main" val="921337569"/>
               </p:ext>
             </p:extLst>
           </p:nvPr>
@@ -15616,7 +13798,7 @@
                       <a:pPr algn="ctr"/>
                       <a:r>
                         <a:rPr lang="en-US" dirty="0"/>
-                        <a:t>152</a:t>
+                        <a:t>-</a:t>
                       </a:r>
                     </a:p>
                   </a:txBody>
@@ -15630,7 +13812,7 @@
                       <a:pPr algn="ctr"/>
                       <a:r>
                         <a:rPr lang="en-US" dirty="0"/>
-                        <a:t>213</a:t>
+                        <a:t>-</a:t>
                       </a:r>
                     </a:p>
                   </a:txBody>
@@ -15644,12 +13826,9 @@
                       <a:pPr algn="ctr"/>
                       <a:r>
                         <a:rPr lang="en-US" b="0" i="0" dirty="0"/>
-                        <a:t>71.4</a:t>
+                        <a:t>N/A</a:t>
                       </a:r>
-                      <a:r>
-                        <a:rPr lang="en-US" b="0" dirty="0"/>
-                        <a:t>%</a:t>
-                      </a:r>
+                      <a:endParaRPr lang="en-US" b="0" dirty="0"/>
                     </a:p>
                   </a:txBody>
                   <a:tcPr/>
@@ -15683,7 +13862,7 @@
                       <a:pPr algn="ctr"/>
                       <a:r>
                         <a:rPr lang="en-US" dirty="0"/>
-                        <a:t>97</a:t>
+                        <a:t>-</a:t>
                       </a:r>
                     </a:p>
                   </a:txBody>
@@ -15697,7 +13876,7 @@
                       <a:pPr algn="ctr"/>
                       <a:r>
                         <a:rPr lang="en-US" dirty="0"/>
-                        <a:t>202</a:t>
+                        <a:t>-</a:t>
                       </a:r>
                     </a:p>
                   </a:txBody>
@@ -15711,12 +13890,9 @@
                       <a:pPr algn="ctr"/>
                       <a:r>
                         <a:rPr lang="en-US" b="0" i="0" dirty="0"/>
-                        <a:t>48.0</a:t>
+                        <a:t>N/A</a:t>
                       </a:r>
-                      <a:r>
-                        <a:rPr lang="en-US" b="0" dirty="0"/>
-                        <a:t>%</a:t>
-                      </a:r>
+                      <a:endParaRPr lang="en-US" b="0" dirty="0"/>
                     </a:p>
                   </a:txBody>
                   <a:tcPr/>
@@ -15750,7 +13926,7 @@
                       <a:pPr algn="ctr"/>
                       <a:r>
                         <a:rPr lang="en-US" dirty="0"/>
-                        <a:t>130</a:t>
+                        <a:t>-</a:t>
                       </a:r>
                     </a:p>
                   </a:txBody>
@@ -15764,7 +13940,7 @@
                       <a:pPr algn="ctr"/>
                       <a:r>
                         <a:rPr lang="en-US" dirty="0"/>
-                        <a:t>269</a:t>
+                        <a:t>-</a:t>
                       </a:r>
                     </a:p>
                   </a:txBody>
@@ -15778,12 +13954,9 @@
                       <a:pPr algn="ctr"/>
                       <a:r>
                         <a:rPr lang="en-US" b="0" i="0" dirty="0"/>
-                        <a:t>48.3</a:t>
+                        <a:t>N/A</a:t>
                       </a:r>
-                      <a:r>
-                        <a:rPr lang="en-US" b="0" dirty="0"/>
-                        <a:t>%</a:t>
-                      </a:r>
+                      <a:endParaRPr lang="en-US" b="0" dirty="0"/>
                     </a:p>
                   </a:txBody>
                   <a:tcPr/>
@@ -15817,7 +13990,7 @@
                       <a:pPr algn="ctr"/>
                       <a:r>
                         <a:rPr lang="en-US" dirty="0"/>
-                        <a:t>104</a:t>
+                        <a:t>-</a:t>
                       </a:r>
                     </a:p>
                   </a:txBody>
@@ -15831,7 +14004,7 @@
                       <a:pPr algn="ctr"/>
                       <a:r>
                         <a:rPr lang="en-US" dirty="0"/>
-                        <a:t>198</a:t>
+                        <a:t>-</a:t>
                       </a:r>
                     </a:p>
                   </a:txBody>
@@ -15845,12 +14018,9 @@
                       <a:pPr algn="ctr"/>
                       <a:r>
                         <a:rPr lang="en-US" b="0" i="0" dirty="0"/>
-                        <a:t>52.5</a:t>
+                        <a:t>N/A</a:t>
                       </a:r>
-                      <a:r>
-                        <a:rPr lang="en-US" b="0" dirty="0"/>
-                        <a:t>%</a:t>
-                      </a:r>
+                      <a:endParaRPr lang="en-US" b="0" dirty="0"/>
                     </a:p>
                   </a:txBody>
                   <a:tcPr/>
@@ -15884,7 +14054,7 @@
                       <a:pPr algn="ctr"/>
                       <a:r>
                         <a:rPr lang="en-US" dirty="0"/>
-                        <a:t>91</a:t>
+                        <a:t>-</a:t>
                       </a:r>
                     </a:p>
                   </a:txBody>
@@ -15898,7 +14068,7 @@
                       <a:pPr algn="ctr"/>
                       <a:r>
                         <a:rPr lang="en-US" dirty="0"/>
-                        <a:t>200</a:t>
+                        <a:t>-</a:t>
                       </a:r>
                     </a:p>
                   </a:txBody>
@@ -15912,12 +14082,9 @@
                       <a:pPr algn="ctr"/>
                       <a:r>
                         <a:rPr lang="en-US" b="0" i="0" dirty="0"/>
-                        <a:t>45.5</a:t>
+                        <a:t>N/A</a:t>
                       </a:r>
-                      <a:r>
-                        <a:rPr lang="en-US" b="0" dirty="0"/>
-                        <a:t>%</a:t>
-                      </a:r>
+                      <a:endParaRPr lang="en-US" b="0" dirty="0"/>
                     </a:p>
                   </a:txBody>
                   <a:tcPr/>
@@ -15950,9 +14117,10 @@
                     <a:p>
                       <a:pPr algn="ctr"/>
                       <a:r>
-                        <a:rPr lang="en-US" b="1" dirty="0"/>
-                        <a:t>574</a:t>
+                        <a:rPr lang="en-US" dirty="0"/>
+                        <a:t>-</a:t>
                       </a:r>
+                      <a:endParaRPr lang="en-US" b="1" dirty="0"/>
                     </a:p>
                   </a:txBody>
                   <a:tcPr/>
@@ -15964,9 +14132,10 @@
                     <a:p>
                       <a:pPr algn="ctr"/>
                       <a:r>
-                        <a:rPr lang="en-US" b="1" dirty="0"/>
-                        <a:t>1082</a:t>
+                        <a:rPr lang="en-US" dirty="0"/>
+                        <a:t>-</a:t>
                       </a:r>
+                      <a:endParaRPr lang="en-US" b="1" dirty="0"/>
                     </a:p>
                   </a:txBody>
                   <a:tcPr/>
@@ -15978,9 +14147,10 @@
                     <a:p>
                       <a:pPr algn="ctr"/>
                       <a:r>
-                        <a:rPr lang="en-US" b="1" dirty="0"/>
-                        <a:t>53.0%</a:t>
+                        <a:rPr lang="en-US" b="1" i="0" dirty="0"/>
+                        <a:t>N/A</a:t>
                       </a:r>
+                      <a:endParaRPr lang="en-US" b="1" dirty="0"/>
                     </a:p>
                   </a:txBody>
                   <a:tcPr/>
@@ -16236,7 +14406,7 @@
           <p:nvPr>
             <p:extLst>
               <p:ext uri="{D42A27DB-BD31-4B8C-83A1-F6EECF244321}">
-                <p14:modId xmlns:p14="http://schemas.microsoft.com/office/powerpoint/2010/main" val="2121723403"/>
+                <p14:modId xmlns:p14="http://schemas.microsoft.com/office/powerpoint/2010/main" val="666245484"/>
               </p:ext>
             </p:extLst>
           </p:nvPr>
@@ -16332,7 +14502,7 @@
                       <a:pPr algn="ctr"/>
                       <a:r>
                         <a:rPr lang="en-US" i="0" dirty="0"/>
-                        <a:t>12</a:t>
+                        <a:t>0</a:t>
                       </a:r>
                     </a:p>
                   </a:txBody>
@@ -16346,7 +14516,7 @@
                       <a:pPr algn="ctr"/>
                       <a:r>
                         <a:rPr lang="en-US" i="0" dirty="0"/>
-                        <a:t>12</a:t>
+                        <a:t>0</a:t>
                       </a:r>
                     </a:p>
                   </a:txBody>
@@ -16360,7 +14530,7 @@
                       <a:pPr algn="ctr"/>
                       <a:r>
                         <a:rPr lang="en-US" b="1" i="0" dirty="0"/>
-                        <a:t>100%</a:t>
+                        <a:t>N/A</a:t>
                       </a:r>
                     </a:p>
                   </a:txBody>
@@ -16590,7 +14760,7 @@
                 <a:latin typeface="Arial" panose="020B0604020202020204" pitchFamily="34" charset="0"/>
                 <a:cs typeface="Arial" panose="020B0604020202020204" pitchFamily="34" charset="0"/>
               </a:rPr>
-              <a:t>3:30 </a:t>
+              <a:t>11:00 </a:t>
             </a:r>
             <a:r>
               <a:rPr lang="en-US" b="1" i="1" u="sng" dirty="0" err="1">
@@ -16624,7 +14794,7 @@
           <p:nvPr>
             <p:extLst>
               <p:ext uri="{D42A27DB-BD31-4B8C-83A1-F6EECF244321}">
-                <p14:modId xmlns:p14="http://schemas.microsoft.com/office/powerpoint/2010/main" val="158929332"/>
+                <p14:modId xmlns:p14="http://schemas.microsoft.com/office/powerpoint/2010/main" val="2635874360"/>
               </p:ext>
             </p:extLst>
           </p:nvPr>
@@ -16720,7 +14890,7 @@
                       <a:pPr algn="ctr"/>
                       <a:r>
                         <a:rPr lang="en-US" i="0" dirty="0"/>
-                        <a:t>4</a:t>
+                        <a:t>1</a:t>
                       </a:r>
                     </a:p>
                   </a:txBody>
@@ -16734,7 +14904,7 @@
                       <a:pPr algn="ctr"/>
                       <a:r>
                         <a:rPr lang="en-US" i="0" dirty="0"/>
-                        <a:t>21</a:t>
+                        <a:t>1</a:t>
                       </a:r>
                     </a:p>
                   </a:txBody>
@@ -16748,7 +14918,7 @@
                       <a:pPr algn="ctr"/>
                       <a:r>
                         <a:rPr lang="en-US" b="1" i="0" dirty="0"/>
-                        <a:t>19.0%</a:t>
+                        <a:t>100%</a:t>
                       </a:r>
                     </a:p>
                   </a:txBody>
@@ -16764,1836 +14934,10 @@
           </a:graphicData>
         </a:graphic>
       </p:graphicFrame>
-      <p:sp>
-        <p:nvSpPr>
-          <p:cNvPr id="7" name="TextBox 6">
-            <a:extLst>
-              <a:ext uri="{FF2B5EF4-FFF2-40B4-BE49-F238E27FC236}">
-                <a16:creationId xmlns:a16="http://schemas.microsoft.com/office/drawing/2014/main" id="{73FCAE82-CCB9-8659-B5FE-5D1BF385BBC8}"/>
-              </a:ext>
-            </a:extLst>
-          </p:cNvPr>
-          <p:cNvSpPr txBox="1"/>
-          <p:nvPr/>
-        </p:nvSpPr>
-        <p:spPr>
-          <a:xfrm>
-            <a:off x="7156351" y="2877504"/>
-            <a:ext cx="3708259" cy="369332"/>
-          </a:xfrm>
-          <a:prstGeom prst="rect">
-            <a:avLst/>
-          </a:prstGeom>
-          <a:noFill/>
-        </p:spPr>
-        <p:txBody>
-          <a:bodyPr wrap="none" rtlCol="0">
-            <a:spAutoFit/>
-          </a:bodyPr>
-          <a:lstStyle/>
-          <a:p>
-            <a:r>
-              <a:rPr lang="en-US" dirty="0"/>
-              <a:t>Need to find updated numbers for this</a:t>
-            </a:r>
-          </a:p>
-        </p:txBody>
-      </p:sp>
-      <p:cxnSp>
-        <p:nvCxnSpPr>
-          <p:cNvPr id="11" name="Straight Connector 10">
-            <a:extLst>
-              <a:ext uri="{FF2B5EF4-FFF2-40B4-BE49-F238E27FC236}">
-                <a16:creationId xmlns:a16="http://schemas.microsoft.com/office/drawing/2014/main" id="{3D07ADA1-B890-D978-E211-014AAEC1357B}"/>
-              </a:ext>
-            </a:extLst>
-          </p:cNvPr>
-          <p:cNvCxnSpPr>
-            <a:endCxn id="7" idx="1"/>
-          </p:cNvCxnSpPr>
-          <p:nvPr/>
-        </p:nvCxnSpPr>
-        <p:spPr>
-          <a:xfrm>
-            <a:off x="6345138" y="2712359"/>
-            <a:ext cx="811213" cy="349811"/>
-          </a:xfrm>
-          <a:prstGeom prst="line">
-            <a:avLst/>
-          </a:prstGeom>
-          <a:ln>
-            <a:solidFill>
-              <a:schemeClr val="tx1">
-                <a:lumMod val="95000"/>
-              </a:schemeClr>
-            </a:solidFill>
-          </a:ln>
-        </p:spPr>
-        <p:style>
-          <a:lnRef idx="1">
-            <a:schemeClr val="accent1"/>
-          </a:lnRef>
-          <a:fillRef idx="0">
-            <a:schemeClr val="accent1"/>
-          </a:fillRef>
-          <a:effectRef idx="0">
-            <a:schemeClr val="accent1"/>
-          </a:effectRef>
-          <a:fontRef idx="minor">
-            <a:schemeClr val="tx1"/>
-          </a:fontRef>
-        </p:style>
-      </p:cxnSp>
     </p:spTree>
     <p:extLst>
       <p:ext uri="{BB962C8B-B14F-4D97-AF65-F5344CB8AC3E}">
         <p14:creationId xmlns:p14="http://schemas.microsoft.com/office/powerpoint/2010/main" val="748716362"/>
-      </p:ext>
-    </p:extLst>
-  </p:cSld>
-  <p:clrMapOvr>
-    <a:masterClrMapping/>
-  </p:clrMapOvr>
-</p:sld>
-</file>
-
-<file path=ppt/slides/slide2.xml><?xml version="1.0" encoding="utf-8"?>
-<p:sld xmlns:a="http://schemas.openxmlformats.org/drawingml/2006/main" xmlns:r="http://schemas.openxmlformats.org/officeDocument/2006/relationships" xmlns:p="http://schemas.openxmlformats.org/presentationml/2006/main">
-  <p:cSld>
-    <p:spTree>
-      <p:nvGrpSpPr>
-        <p:cNvPr id="1" name=""/>
-        <p:cNvGrpSpPr/>
-        <p:nvPr/>
-      </p:nvGrpSpPr>
-      <p:grpSpPr>
-        <a:xfrm>
-          <a:off x="0" y="0"/>
-          <a:ext cx="0" cy="0"/>
-          <a:chOff x="0" y="0"/>
-          <a:chExt cx="0" cy="0"/>
-        </a:xfrm>
-      </p:grpSpPr>
-      <p:sp>
-        <p:nvSpPr>
-          <p:cNvPr id="6146" name="Rectangle 2"/>
-          <p:cNvSpPr>
-            <a:spLocks noGrp="1" noChangeArrowheads="1"/>
-          </p:cNvSpPr>
-          <p:nvPr>
-            <p:ph type="title"/>
-            <p:custDataLst>
-              <p:tags r:id="rId1"/>
-            </p:custDataLst>
-          </p:nvPr>
-        </p:nvSpPr>
-        <p:spPr>
-          <a:xfrm>
-            <a:off x="1141413" y="284084"/>
-            <a:ext cx="9905998" cy="620791"/>
-          </a:xfrm>
-        </p:spPr>
-        <p:txBody>
-          <a:bodyPr/>
-          <a:lstStyle/>
-          <a:p>
-            <a:pPr algn="ctr"/>
-            <a:r>
-              <a:rPr lang="en-US" dirty="0"/>
-              <a:t>Week 1: Tuesday</a:t>
-            </a:r>
-          </a:p>
-        </p:txBody>
-      </p:sp>
-      <p:sp>
-        <p:nvSpPr>
-          <p:cNvPr id="6147" name="Rectangle 3"/>
-          <p:cNvSpPr>
-            <a:spLocks noGrp="1" noChangeArrowheads="1"/>
-          </p:cNvSpPr>
-          <p:nvPr>
-            <p:ph idx="1"/>
-            <p:custDataLst>
-              <p:tags r:id="rId2"/>
-            </p:custDataLst>
-          </p:nvPr>
-        </p:nvSpPr>
-        <p:spPr>
-          <a:xfrm>
-            <a:off x="1294151" y="1098549"/>
-            <a:ext cx="9600522" cy="5149850"/>
-          </a:xfrm>
-        </p:spPr>
-        <p:txBody>
-          <a:bodyPr>
-            <a:normAutofit/>
-          </a:bodyPr>
-          <a:lstStyle/>
-          <a:p>
-            <a:r>
-              <a:rPr lang="en-US">
-                <a:latin typeface="Arial" panose="020B0604020202020204" pitchFamily="34" charset="0"/>
-                <a:cs typeface="Arial" panose="020B0604020202020204" pitchFamily="34" charset="0"/>
-              </a:rPr>
-              <a:t>First homework  </a:t>
-            </a:r>
-            <a:r>
-              <a:rPr lang="en-US" dirty="0">
-                <a:latin typeface="Arial" panose="020B0604020202020204" pitchFamily="34" charset="0"/>
-                <a:cs typeface="Arial" panose="020B0604020202020204" pitchFamily="34" charset="0"/>
-              </a:rPr>
-              <a:t>is due Tomorrow evening (Wednesday)</a:t>
-            </a:r>
-          </a:p>
-          <a:p>
-            <a:pPr lvl="1"/>
-            <a:r>
-              <a:rPr lang="en-US" dirty="0">
-                <a:latin typeface="Arial" panose="020B0604020202020204" pitchFamily="34" charset="0"/>
-                <a:cs typeface="Arial" panose="020B0604020202020204" pitchFamily="34" charset="0"/>
-              </a:rPr>
-              <a:t>3 day extension if you really need it but you really should try not to use it for this one.</a:t>
-            </a:r>
-          </a:p>
-          <a:p>
-            <a:r>
-              <a:rPr lang="en-US" dirty="0">
-                <a:latin typeface="Arial" panose="020B0604020202020204" pitchFamily="34" charset="0"/>
-                <a:cs typeface="Arial" panose="020B0604020202020204" pitchFamily="34" charset="0"/>
-              </a:rPr>
-              <a:t>Please remember that I am asking for NO laptop / phones!</a:t>
-            </a:r>
-          </a:p>
-          <a:p>
-            <a:pPr lvl="1"/>
-            <a:r>
-              <a:rPr lang="en-US" dirty="0">
-                <a:latin typeface="Arial" panose="020B0604020202020204" pitchFamily="34" charset="0"/>
-                <a:cs typeface="Arial" panose="020B0604020202020204" pitchFamily="34" charset="0"/>
-              </a:rPr>
-              <a:t>This makes the learning environment better for everybody. I appreciate it!</a:t>
-            </a:r>
-          </a:p>
-          <a:p>
-            <a:r>
-              <a:rPr lang="en-US" dirty="0">
-                <a:latin typeface="Arial" panose="020B0604020202020204" pitchFamily="34" charset="0"/>
-                <a:cs typeface="Arial" panose="020B0604020202020204" pitchFamily="34" charset="0"/>
-              </a:rPr>
-              <a:t>I’ll start properly taking attendance today.</a:t>
-            </a:r>
-          </a:p>
-          <a:p>
-            <a:r>
-              <a:rPr lang="en-US" dirty="0">
-                <a:latin typeface="Arial" panose="020B0604020202020204" pitchFamily="34" charset="0"/>
-                <a:cs typeface="Arial" panose="020B0604020202020204" pitchFamily="34" charset="0"/>
-              </a:rPr>
-              <a:t>We will finish our warm-up / module 0 material today and hopefully begin module 1 (where the class REALLY begins)</a:t>
-            </a:r>
-          </a:p>
-          <a:p>
-            <a:endParaRPr lang="en-US" dirty="0">
-              <a:latin typeface="Arial" panose="020B0604020202020204" pitchFamily="34" charset="0"/>
-              <a:cs typeface="Arial" panose="020B0604020202020204" pitchFamily="34" charset="0"/>
-            </a:endParaRPr>
-          </a:p>
-        </p:txBody>
-      </p:sp>
-    </p:spTree>
-    <p:extLst>
-      <p:ext uri="{BB962C8B-B14F-4D97-AF65-F5344CB8AC3E}">
-        <p14:creationId xmlns:p14="http://schemas.microsoft.com/office/powerpoint/2010/main" val="2431754002"/>
-      </p:ext>
-    </p:extLst>
-  </p:cSld>
-  <p:clrMapOvr>
-    <a:masterClrMapping/>
-  </p:clrMapOvr>
-</p:sld>
-</file>
-
-<file path=ppt/slides/slide3.xml><?xml version="1.0" encoding="utf-8"?>
-<p:sld xmlns:a="http://schemas.openxmlformats.org/drawingml/2006/main" xmlns:r="http://schemas.openxmlformats.org/officeDocument/2006/relationships" xmlns:p="http://schemas.openxmlformats.org/presentationml/2006/main">
-  <p:cSld>
-    <p:spTree>
-      <p:nvGrpSpPr>
-        <p:cNvPr id="1" name="">
-          <a:extLst>
-            <a:ext uri="{FF2B5EF4-FFF2-40B4-BE49-F238E27FC236}">
-              <a16:creationId xmlns:a16="http://schemas.microsoft.com/office/drawing/2014/main" id="{FCA32411-328E-66E8-E6F4-EF539979CE9D}"/>
-            </a:ext>
-          </a:extLst>
-        </p:cNvPr>
-        <p:cNvGrpSpPr/>
-        <p:nvPr/>
-      </p:nvGrpSpPr>
-      <p:grpSpPr>
-        <a:xfrm>
-          <a:off x="0" y="0"/>
-          <a:ext cx="0" cy="0"/>
-          <a:chOff x="0" y="0"/>
-          <a:chExt cx="0" cy="0"/>
-        </a:xfrm>
-      </p:grpSpPr>
-      <p:sp>
-        <p:nvSpPr>
-          <p:cNvPr id="6146" name="Rectangle 2">
-            <a:extLst>
-              <a:ext uri="{FF2B5EF4-FFF2-40B4-BE49-F238E27FC236}">
-                <a16:creationId xmlns:a16="http://schemas.microsoft.com/office/drawing/2014/main" id="{D6CDF740-7CD2-4A8A-F4A5-5B9BBC68854B}"/>
-              </a:ext>
-            </a:extLst>
-          </p:cNvPr>
-          <p:cNvSpPr>
-            <a:spLocks noGrp="1" noChangeArrowheads="1"/>
-          </p:cNvSpPr>
-          <p:nvPr>
-            <p:ph type="title"/>
-            <p:custDataLst>
-              <p:tags r:id="rId1"/>
-            </p:custDataLst>
-          </p:nvPr>
-        </p:nvSpPr>
-        <p:spPr>
-          <a:xfrm>
-            <a:off x="1141413" y="284084"/>
-            <a:ext cx="9905998" cy="620791"/>
-          </a:xfrm>
-        </p:spPr>
-        <p:txBody>
-          <a:bodyPr/>
-          <a:lstStyle/>
-          <a:p>
-            <a:pPr algn="ctr"/>
-            <a:r>
-              <a:rPr lang="en-US" dirty="0"/>
-              <a:t>Week 1: Wednesday</a:t>
-            </a:r>
-          </a:p>
-        </p:txBody>
-      </p:sp>
-      <p:sp>
-        <p:nvSpPr>
-          <p:cNvPr id="6147" name="Rectangle 3">
-            <a:extLst>
-              <a:ext uri="{FF2B5EF4-FFF2-40B4-BE49-F238E27FC236}">
-                <a16:creationId xmlns:a16="http://schemas.microsoft.com/office/drawing/2014/main" id="{79392D12-A499-BDA8-BD1E-87BBE9A531AD}"/>
-              </a:ext>
-            </a:extLst>
-          </p:cNvPr>
-          <p:cNvSpPr>
-            <a:spLocks noGrp="1" noChangeArrowheads="1"/>
-          </p:cNvSpPr>
-          <p:nvPr>
-            <p:ph idx="1"/>
-            <p:custDataLst>
-              <p:tags r:id="rId2"/>
-            </p:custDataLst>
-          </p:nvPr>
-        </p:nvSpPr>
-        <p:spPr>
-          <a:xfrm>
-            <a:off x="1294151" y="1098549"/>
-            <a:ext cx="9600522" cy="5149850"/>
-          </a:xfrm>
-        </p:spPr>
-        <p:txBody>
-          <a:bodyPr>
-            <a:normAutofit/>
-          </a:bodyPr>
-          <a:lstStyle/>
-          <a:p>
-            <a:r>
-              <a:rPr lang="en-US" dirty="0">
-                <a:latin typeface="Arial" panose="020B0604020202020204" pitchFamily="34" charset="0"/>
-                <a:cs typeface="Arial" panose="020B0604020202020204" pitchFamily="34" charset="0"/>
-              </a:rPr>
-              <a:t>First homework is due Tonight! (Wednesday)</a:t>
-            </a:r>
-          </a:p>
-          <a:p>
-            <a:pPr lvl="1"/>
-            <a:r>
-              <a:rPr lang="en-US" dirty="0">
-                <a:latin typeface="Arial" panose="020B0604020202020204" pitchFamily="34" charset="0"/>
-                <a:cs typeface="Arial" panose="020B0604020202020204" pitchFamily="34" charset="0"/>
-              </a:rPr>
-              <a:t>3 day extension if you really need it but you really should try not to use it for this one.</a:t>
-            </a:r>
-          </a:p>
-          <a:p>
-            <a:r>
-              <a:rPr lang="en-US" dirty="0">
-                <a:latin typeface="Arial" panose="020B0604020202020204" pitchFamily="34" charset="0"/>
-                <a:cs typeface="Arial" panose="020B0604020202020204" pitchFamily="34" charset="0"/>
-              </a:rPr>
-              <a:t>Please remember that I am asking for NO laptop / phones!</a:t>
-            </a:r>
-          </a:p>
-          <a:p>
-            <a:pPr lvl="1"/>
-            <a:r>
-              <a:rPr lang="en-US" dirty="0">
-                <a:latin typeface="Arial" panose="020B0604020202020204" pitchFamily="34" charset="0"/>
-                <a:cs typeface="Arial" panose="020B0604020202020204" pitchFamily="34" charset="0"/>
-              </a:rPr>
-              <a:t>This makes the learning environment better for everybody. I appreciate it!</a:t>
-            </a:r>
-          </a:p>
-          <a:p>
-            <a:r>
-              <a:rPr lang="en-US" dirty="0">
-                <a:latin typeface="Arial" panose="020B0604020202020204" pitchFamily="34" charset="0"/>
-                <a:cs typeface="Arial" panose="020B0604020202020204" pitchFamily="34" charset="0"/>
-              </a:rPr>
-              <a:t>Attendance continues today as usual.</a:t>
-            </a:r>
-          </a:p>
-          <a:p>
-            <a:r>
-              <a:rPr lang="en-US" dirty="0">
-                <a:latin typeface="Arial" panose="020B0604020202020204" pitchFamily="34" charset="0"/>
-                <a:cs typeface="Arial" panose="020B0604020202020204" pitchFamily="34" charset="0"/>
-              </a:rPr>
-              <a:t>We begin module 1 today (the real class begins).</a:t>
-            </a:r>
-          </a:p>
-          <a:p>
-            <a:pPr lvl="1"/>
-            <a:r>
-              <a:rPr lang="en-US" dirty="0">
-                <a:latin typeface="Arial" panose="020B0604020202020204" pitchFamily="34" charset="0"/>
-                <a:cs typeface="Arial" panose="020B0604020202020204" pitchFamily="34" charset="0"/>
-              </a:rPr>
-              <a:t>It will likely take us at least the rest of this week to get through.</a:t>
-            </a:r>
-          </a:p>
-          <a:p>
-            <a:endParaRPr lang="en-US" dirty="0">
-              <a:latin typeface="Arial" panose="020B0604020202020204" pitchFamily="34" charset="0"/>
-              <a:cs typeface="Arial" panose="020B0604020202020204" pitchFamily="34" charset="0"/>
-            </a:endParaRPr>
-          </a:p>
-        </p:txBody>
-      </p:sp>
-    </p:spTree>
-    <p:extLst>
-      <p:ext uri="{BB962C8B-B14F-4D97-AF65-F5344CB8AC3E}">
-        <p14:creationId xmlns:p14="http://schemas.microsoft.com/office/powerpoint/2010/main" val="3784255301"/>
-      </p:ext>
-    </p:extLst>
-  </p:cSld>
-  <p:clrMapOvr>
-    <a:masterClrMapping/>
-  </p:clrMapOvr>
-</p:sld>
-</file>
-
-<file path=ppt/slides/slide4.xml><?xml version="1.0" encoding="utf-8"?>
-<p:sld xmlns:a="http://schemas.openxmlformats.org/drawingml/2006/main" xmlns:r="http://schemas.openxmlformats.org/officeDocument/2006/relationships" xmlns:p="http://schemas.openxmlformats.org/presentationml/2006/main">
-  <p:cSld>
-    <p:spTree>
-      <p:nvGrpSpPr>
-        <p:cNvPr id="1" name="">
-          <a:extLst>
-            <a:ext uri="{FF2B5EF4-FFF2-40B4-BE49-F238E27FC236}">
-              <a16:creationId xmlns:a16="http://schemas.microsoft.com/office/drawing/2014/main" id="{F30DD5C3-86C3-C7EE-D5BD-294A52F15C43}"/>
-            </a:ext>
-          </a:extLst>
-        </p:cNvPr>
-        <p:cNvGrpSpPr/>
-        <p:nvPr/>
-      </p:nvGrpSpPr>
-      <p:grpSpPr>
-        <a:xfrm>
-          <a:off x="0" y="0"/>
-          <a:ext cx="0" cy="0"/>
-          <a:chOff x="0" y="0"/>
-          <a:chExt cx="0" cy="0"/>
-        </a:xfrm>
-      </p:grpSpPr>
-      <p:sp>
-        <p:nvSpPr>
-          <p:cNvPr id="6146" name="Rectangle 2">
-            <a:extLst>
-              <a:ext uri="{FF2B5EF4-FFF2-40B4-BE49-F238E27FC236}">
-                <a16:creationId xmlns:a16="http://schemas.microsoft.com/office/drawing/2014/main" id="{53FBB78A-EE2B-4915-3BB5-0642F7776F81}"/>
-              </a:ext>
-            </a:extLst>
-          </p:cNvPr>
-          <p:cNvSpPr>
-            <a:spLocks noGrp="1" noChangeArrowheads="1"/>
-          </p:cNvSpPr>
-          <p:nvPr>
-            <p:ph type="title"/>
-            <p:custDataLst>
-              <p:tags r:id="rId1"/>
-            </p:custDataLst>
-          </p:nvPr>
-        </p:nvSpPr>
-        <p:spPr>
-          <a:xfrm>
-            <a:off x="1141413" y="284084"/>
-            <a:ext cx="9905998" cy="620791"/>
-          </a:xfrm>
-        </p:spPr>
-        <p:txBody>
-          <a:bodyPr/>
-          <a:lstStyle/>
-          <a:p>
-            <a:pPr algn="ctr"/>
-            <a:r>
-              <a:rPr lang="en-US" dirty="0"/>
-              <a:t>Week 1: Thursday</a:t>
-            </a:r>
-          </a:p>
-        </p:txBody>
-      </p:sp>
-      <p:sp>
-        <p:nvSpPr>
-          <p:cNvPr id="6147" name="Rectangle 3">
-            <a:extLst>
-              <a:ext uri="{FF2B5EF4-FFF2-40B4-BE49-F238E27FC236}">
-                <a16:creationId xmlns:a16="http://schemas.microsoft.com/office/drawing/2014/main" id="{696409BF-2B2C-9B95-39C5-A3B9EEEF888A}"/>
-              </a:ext>
-            </a:extLst>
-          </p:cNvPr>
-          <p:cNvSpPr>
-            <a:spLocks noGrp="1" noChangeArrowheads="1"/>
-          </p:cNvSpPr>
-          <p:nvPr>
-            <p:ph idx="1"/>
-            <p:custDataLst>
-              <p:tags r:id="rId2"/>
-            </p:custDataLst>
-          </p:nvPr>
-        </p:nvSpPr>
-        <p:spPr>
-          <a:xfrm>
-            <a:off x="1294151" y="1098549"/>
-            <a:ext cx="9600522" cy="5149850"/>
-          </a:xfrm>
-        </p:spPr>
-        <p:txBody>
-          <a:bodyPr>
-            <a:normAutofit fontScale="92500" lnSpcReduction="10000"/>
-          </a:bodyPr>
-          <a:lstStyle/>
-          <a:p>
-            <a:r>
-              <a:rPr lang="en-US" dirty="0">
-                <a:latin typeface="Arial" panose="020B0604020202020204" pitchFamily="34" charset="0"/>
-                <a:cs typeface="Arial" panose="020B0604020202020204" pitchFamily="34" charset="0"/>
-              </a:rPr>
-              <a:t>First homework was due last night! (Wednesday)</a:t>
-            </a:r>
-          </a:p>
-          <a:p>
-            <a:pPr lvl="1"/>
-            <a:r>
-              <a:rPr lang="en-US" dirty="0">
-                <a:latin typeface="Arial" panose="020B0604020202020204" pitchFamily="34" charset="0"/>
-                <a:cs typeface="Arial" panose="020B0604020202020204" pitchFamily="34" charset="0"/>
-              </a:rPr>
-              <a:t>How’d it go?</a:t>
-            </a:r>
-          </a:p>
-          <a:p>
-            <a:pPr lvl="1"/>
-            <a:r>
-              <a:rPr lang="en-US" dirty="0">
-                <a:latin typeface="Arial" panose="020B0604020202020204" pitchFamily="34" charset="0"/>
-                <a:cs typeface="Arial" panose="020B0604020202020204" pitchFamily="34" charset="0"/>
-              </a:rPr>
-              <a:t>3 day extension if you really need it but you really should try not to use it for this one.</a:t>
-            </a:r>
-          </a:p>
-          <a:p>
-            <a:r>
-              <a:rPr lang="en-US" dirty="0">
-                <a:latin typeface="Arial" panose="020B0604020202020204" pitchFamily="34" charset="0"/>
-                <a:cs typeface="Arial" panose="020B0604020202020204" pitchFamily="34" charset="0"/>
-              </a:rPr>
-              <a:t>Lecture recordings from last Fall are posted on Panopto on Canvas</a:t>
-            </a:r>
-          </a:p>
-          <a:p>
-            <a:pPr lvl="1"/>
-            <a:r>
-              <a:rPr lang="en-US" dirty="0">
-                <a:latin typeface="Arial" panose="020B0604020202020204" pitchFamily="34" charset="0"/>
-                <a:cs typeface="Arial" panose="020B0604020202020204" pitchFamily="34" charset="0"/>
-              </a:rPr>
-              <a:t>I posted ALL the videos FYI</a:t>
-            </a:r>
-          </a:p>
-          <a:p>
-            <a:pPr lvl="1"/>
-            <a:r>
-              <a:rPr lang="en-US" dirty="0">
-                <a:latin typeface="Arial" panose="020B0604020202020204" pitchFamily="34" charset="0"/>
-                <a:cs typeface="Arial" panose="020B0604020202020204" pitchFamily="34" charset="0"/>
-              </a:rPr>
-              <a:t>For this module, you watch from oldest through “Pump. Lemma + Begin Mod 3”</a:t>
-            </a:r>
-          </a:p>
-          <a:p>
-            <a:r>
-              <a:rPr lang="en-US" dirty="0">
-                <a:latin typeface="Arial" panose="020B0604020202020204" pitchFamily="34" charset="0"/>
-                <a:cs typeface="Arial" panose="020B0604020202020204" pitchFamily="34" charset="0"/>
-              </a:rPr>
-              <a:t>Please remember that I am asking for NO laptop / phones!</a:t>
-            </a:r>
-          </a:p>
-          <a:p>
-            <a:pPr lvl="1"/>
-            <a:r>
-              <a:rPr lang="en-US" dirty="0">
-                <a:latin typeface="Arial" panose="020B0604020202020204" pitchFamily="34" charset="0"/>
-                <a:cs typeface="Arial" panose="020B0604020202020204" pitchFamily="34" charset="0"/>
-              </a:rPr>
-              <a:t>This makes the learning environment better for everybody. I appreciate it!</a:t>
-            </a:r>
-          </a:p>
-          <a:p>
-            <a:r>
-              <a:rPr lang="en-US" dirty="0">
-                <a:latin typeface="Arial" panose="020B0604020202020204" pitchFamily="34" charset="0"/>
-                <a:cs typeface="Arial" panose="020B0604020202020204" pitchFamily="34" charset="0"/>
-              </a:rPr>
-              <a:t>Attendance continues today as usual.</a:t>
-            </a:r>
-          </a:p>
-          <a:p>
-            <a:r>
-              <a:rPr lang="en-US" dirty="0">
-                <a:latin typeface="Arial" panose="020B0604020202020204" pitchFamily="34" charset="0"/>
-                <a:cs typeface="Arial" panose="020B0604020202020204" pitchFamily="34" charset="0"/>
-              </a:rPr>
-              <a:t>We continue module 1 today.</a:t>
-            </a:r>
-          </a:p>
-          <a:p>
-            <a:pPr lvl="1"/>
-            <a:r>
-              <a:rPr lang="en-US" dirty="0">
-                <a:latin typeface="Arial" panose="020B0604020202020204" pitchFamily="34" charset="0"/>
-                <a:cs typeface="Arial" panose="020B0604020202020204" pitchFamily="34" charset="0"/>
-              </a:rPr>
-              <a:t>It will likely take us at least the rest of this week to get through.</a:t>
-            </a:r>
-          </a:p>
-          <a:p>
-            <a:endParaRPr lang="en-US" dirty="0">
-              <a:latin typeface="Arial" panose="020B0604020202020204" pitchFamily="34" charset="0"/>
-              <a:cs typeface="Arial" panose="020B0604020202020204" pitchFamily="34" charset="0"/>
-            </a:endParaRPr>
-          </a:p>
-        </p:txBody>
-      </p:sp>
-    </p:spTree>
-    <p:extLst>
-      <p:ext uri="{BB962C8B-B14F-4D97-AF65-F5344CB8AC3E}">
-        <p14:creationId xmlns:p14="http://schemas.microsoft.com/office/powerpoint/2010/main" val="1277214941"/>
-      </p:ext>
-    </p:extLst>
-  </p:cSld>
-  <p:clrMapOvr>
-    <a:masterClrMapping/>
-  </p:clrMapOvr>
-</p:sld>
-</file>
-
-<file path=ppt/slides/slide5.xml><?xml version="1.0" encoding="utf-8"?>
-<p:sld xmlns:a="http://schemas.openxmlformats.org/drawingml/2006/main" xmlns:r="http://schemas.openxmlformats.org/officeDocument/2006/relationships" xmlns:p="http://schemas.openxmlformats.org/presentationml/2006/main">
-  <p:cSld>
-    <p:spTree>
-      <p:nvGrpSpPr>
-        <p:cNvPr id="1" name="">
-          <a:extLst>
-            <a:ext uri="{FF2B5EF4-FFF2-40B4-BE49-F238E27FC236}">
-              <a16:creationId xmlns:a16="http://schemas.microsoft.com/office/drawing/2014/main" id="{E773EF14-B052-5E3A-8D08-B0118A24F73E}"/>
-            </a:ext>
-          </a:extLst>
-        </p:cNvPr>
-        <p:cNvGrpSpPr/>
-        <p:nvPr/>
-      </p:nvGrpSpPr>
-      <p:grpSpPr>
-        <a:xfrm>
-          <a:off x="0" y="0"/>
-          <a:ext cx="0" cy="0"/>
-          <a:chOff x="0" y="0"/>
-          <a:chExt cx="0" cy="0"/>
-        </a:xfrm>
-      </p:grpSpPr>
-      <p:sp>
-        <p:nvSpPr>
-          <p:cNvPr id="6146" name="Rectangle 2">
-            <a:extLst>
-              <a:ext uri="{FF2B5EF4-FFF2-40B4-BE49-F238E27FC236}">
-                <a16:creationId xmlns:a16="http://schemas.microsoft.com/office/drawing/2014/main" id="{15323A48-AB50-B349-6F02-2114F4A6D311}"/>
-              </a:ext>
-            </a:extLst>
-          </p:cNvPr>
-          <p:cNvSpPr>
-            <a:spLocks noGrp="1" noChangeArrowheads="1"/>
-          </p:cNvSpPr>
-          <p:nvPr>
-            <p:ph type="title"/>
-            <p:custDataLst>
-              <p:tags r:id="rId1"/>
-            </p:custDataLst>
-          </p:nvPr>
-        </p:nvSpPr>
-        <p:spPr>
-          <a:xfrm>
-            <a:off x="1141413" y="284084"/>
-            <a:ext cx="9905998" cy="620791"/>
-          </a:xfrm>
-        </p:spPr>
-        <p:txBody>
-          <a:bodyPr/>
-          <a:lstStyle/>
-          <a:p>
-            <a:pPr algn="ctr"/>
-            <a:r>
-              <a:rPr lang="en-US" dirty="0"/>
-              <a:t>Week 1: Friday</a:t>
-            </a:r>
-          </a:p>
-        </p:txBody>
-      </p:sp>
-      <p:sp>
-        <p:nvSpPr>
-          <p:cNvPr id="6147" name="Rectangle 3">
-            <a:extLst>
-              <a:ext uri="{FF2B5EF4-FFF2-40B4-BE49-F238E27FC236}">
-                <a16:creationId xmlns:a16="http://schemas.microsoft.com/office/drawing/2014/main" id="{B9696856-70BF-C0BE-54A8-02E39A481C9B}"/>
-              </a:ext>
-            </a:extLst>
-          </p:cNvPr>
-          <p:cNvSpPr>
-            <a:spLocks noGrp="1" noChangeArrowheads="1"/>
-          </p:cNvSpPr>
-          <p:nvPr>
-            <p:ph idx="1"/>
-            <p:custDataLst>
-              <p:tags r:id="rId2"/>
-            </p:custDataLst>
-          </p:nvPr>
-        </p:nvSpPr>
-        <p:spPr>
-          <a:xfrm>
-            <a:off x="1294151" y="1098549"/>
-            <a:ext cx="9600522" cy="5149850"/>
-          </a:xfrm>
-        </p:spPr>
-        <p:txBody>
-          <a:bodyPr>
-            <a:normAutofit fontScale="77500" lnSpcReduction="20000"/>
-          </a:bodyPr>
-          <a:lstStyle/>
-          <a:p>
-            <a:r>
-              <a:rPr lang="en-US" dirty="0">
-                <a:latin typeface="Arial" panose="020B0604020202020204" pitchFamily="34" charset="0"/>
-                <a:cs typeface="Arial" panose="020B0604020202020204" pitchFamily="34" charset="0"/>
-              </a:rPr>
-              <a:t>End of week 1!!</a:t>
-            </a:r>
-          </a:p>
-          <a:p>
-            <a:r>
-              <a:rPr lang="en-US" dirty="0">
-                <a:latin typeface="Arial" panose="020B0604020202020204" pitchFamily="34" charset="0"/>
-                <a:cs typeface="Arial" panose="020B0604020202020204" pitchFamily="34" charset="0"/>
-              </a:rPr>
-              <a:t>First homework is in extension period</a:t>
-            </a:r>
-          </a:p>
-          <a:p>
-            <a:pPr lvl="1"/>
-            <a:r>
-              <a:rPr lang="en-US" dirty="0">
-                <a:latin typeface="Arial" panose="020B0604020202020204" pitchFamily="34" charset="0"/>
-                <a:cs typeface="Arial" panose="020B0604020202020204" pitchFamily="34" charset="0"/>
-              </a:rPr>
-              <a:t>How’d it go?</a:t>
-            </a:r>
-          </a:p>
-          <a:p>
-            <a:r>
-              <a:rPr lang="en-US" dirty="0">
-                <a:latin typeface="Arial" panose="020B0604020202020204" pitchFamily="34" charset="0"/>
-                <a:cs typeface="Arial" panose="020B0604020202020204" pitchFamily="34" charset="0"/>
-              </a:rPr>
-              <a:t>Module 1 Written HW is due next Tuesday</a:t>
-            </a:r>
-          </a:p>
-          <a:p>
-            <a:pPr lvl="1"/>
-            <a:r>
-              <a:rPr lang="en-US" dirty="0">
-                <a:latin typeface="Arial" panose="020B0604020202020204" pitchFamily="34" charset="0"/>
-                <a:cs typeface="Arial" panose="020B0604020202020204" pitchFamily="34" charset="0"/>
-              </a:rPr>
-              <a:t>We will probably finish the module on Monday but you can get started over the weekend</a:t>
-            </a:r>
-          </a:p>
-          <a:p>
-            <a:r>
-              <a:rPr lang="en-US" dirty="0">
-                <a:latin typeface="Arial" panose="020B0604020202020204" pitchFamily="34" charset="0"/>
-                <a:cs typeface="Arial" panose="020B0604020202020204" pitchFamily="34" charset="0"/>
-              </a:rPr>
-              <a:t>Be aware there is a programming assignment due on Thursday as well!</a:t>
-            </a:r>
-          </a:p>
-          <a:p>
-            <a:r>
-              <a:rPr lang="en-US" dirty="0">
-                <a:latin typeface="Arial" panose="020B0604020202020204" pitchFamily="34" charset="0"/>
-                <a:cs typeface="Arial" panose="020B0604020202020204" pitchFamily="34" charset="0"/>
-              </a:rPr>
-              <a:t>Lecture recordings from last Fall are posted on Panopto on Canvas</a:t>
-            </a:r>
-          </a:p>
-          <a:p>
-            <a:pPr lvl="1"/>
-            <a:r>
-              <a:rPr lang="en-US" dirty="0">
-                <a:latin typeface="Arial" panose="020B0604020202020204" pitchFamily="34" charset="0"/>
-                <a:cs typeface="Arial" panose="020B0604020202020204" pitchFamily="34" charset="0"/>
-              </a:rPr>
-              <a:t>I posted ALL the videos FYI</a:t>
-            </a:r>
-          </a:p>
-          <a:p>
-            <a:pPr lvl="1"/>
-            <a:r>
-              <a:rPr lang="en-US" dirty="0">
-                <a:latin typeface="Arial" panose="020B0604020202020204" pitchFamily="34" charset="0"/>
-                <a:cs typeface="Arial" panose="020B0604020202020204" pitchFamily="34" charset="0"/>
-              </a:rPr>
-              <a:t>For this module, you watch from oldest through “Pump. Lemma + Begin Mod 3”</a:t>
-            </a:r>
-          </a:p>
-          <a:p>
-            <a:r>
-              <a:rPr lang="en-US" dirty="0">
-                <a:latin typeface="Arial" panose="020B0604020202020204" pitchFamily="34" charset="0"/>
-                <a:cs typeface="Arial" panose="020B0604020202020204" pitchFamily="34" charset="0"/>
-              </a:rPr>
-              <a:t>Please remember that I am asking for NO laptop / phones!</a:t>
-            </a:r>
-          </a:p>
-          <a:p>
-            <a:pPr lvl="1"/>
-            <a:r>
-              <a:rPr lang="en-US" dirty="0">
-                <a:latin typeface="Arial" panose="020B0604020202020204" pitchFamily="34" charset="0"/>
-                <a:cs typeface="Arial" panose="020B0604020202020204" pitchFamily="34" charset="0"/>
-              </a:rPr>
-              <a:t>This makes the learning environment better for everybody. I appreciate it!</a:t>
-            </a:r>
-          </a:p>
-          <a:p>
-            <a:r>
-              <a:rPr lang="en-US" dirty="0">
-                <a:latin typeface="Arial" panose="020B0604020202020204" pitchFamily="34" charset="0"/>
-                <a:cs typeface="Arial" panose="020B0604020202020204" pitchFamily="34" charset="0"/>
-              </a:rPr>
-              <a:t>Attendance continues today as usual.</a:t>
-            </a:r>
-          </a:p>
-          <a:p>
-            <a:r>
-              <a:rPr lang="en-US" dirty="0">
-                <a:latin typeface="Arial" panose="020B0604020202020204" pitchFamily="34" charset="0"/>
-                <a:cs typeface="Arial" panose="020B0604020202020204" pitchFamily="34" charset="0"/>
-              </a:rPr>
-              <a:t>We continue module 1 today.</a:t>
-            </a:r>
-          </a:p>
-          <a:p>
-            <a:pPr lvl="1"/>
-            <a:r>
-              <a:rPr lang="en-US" dirty="0">
-                <a:latin typeface="Arial" panose="020B0604020202020204" pitchFamily="34" charset="0"/>
-                <a:cs typeface="Arial" panose="020B0604020202020204" pitchFamily="34" charset="0"/>
-              </a:rPr>
-              <a:t>I doubt we will finish it today</a:t>
-            </a:r>
-          </a:p>
-          <a:p>
-            <a:endParaRPr lang="en-US" dirty="0">
-              <a:latin typeface="Arial" panose="020B0604020202020204" pitchFamily="34" charset="0"/>
-              <a:cs typeface="Arial" panose="020B0604020202020204" pitchFamily="34" charset="0"/>
-            </a:endParaRPr>
-          </a:p>
-        </p:txBody>
-      </p:sp>
-    </p:spTree>
-    <p:extLst>
-      <p:ext uri="{BB962C8B-B14F-4D97-AF65-F5344CB8AC3E}">
-        <p14:creationId xmlns:p14="http://schemas.microsoft.com/office/powerpoint/2010/main" val="2034039482"/>
-      </p:ext>
-    </p:extLst>
-  </p:cSld>
-  <p:clrMapOvr>
-    <a:masterClrMapping/>
-  </p:clrMapOvr>
-</p:sld>
-</file>
-
-<file path=ppt/slides/slide6.xml><?xml version="1.0" encoding="utf-8"?>
-<p:sld xmlns:a="http://schemas.openxmlformats.org/drawingml/2006/main" xmlns:r="http://schemas.openxmlformats.org/officeDocument/2006/relationships" xmlns:p="http://schemas.openxmlformats.org/presentationml/2006/main">
-  <p:cSld>
-    <p:spTree>
-      <p:nvGrpSpPr>
-        <p:cNvPr id="1" name="">
-          <a:extLst>
-            <a:ext uri="{FF2B5EF4-FFF2-40B4-BE49-F238E27FC236}">
-              <a16:creationId xmlns:a16="http://schemas.microsoft.com/office/drawing/2014/main" id="{F0060D86-CB61-694B-AA47-6AB7A1979855}"/>
-            </a:ext>
-          </a:extLst>
-        </p:cNvPr>
-        <p:cNvGrpSpPr/>
-        <p:nvPr/>
-      </p:nvGrpSpPr>
-      <p:grpSpPr>
-        <a:xfrm>
-          <a:off x="0" y="0"/>
-          <a:ext cx="0" cy="0"/>
-          <a:chOff x="0" y="0"/>
-          <a:chExt cx="0" cy="0"/>
-        </a:xfrm>
-      </p:grpSpPr>
-      <p:sp>
-        <p:nvSpPr>
-          <p:cNvPr id="6146" name="Rectangle 2">
-            <a:extLst>
-              <a:ext uri="{FF2B5EF4-FFF2-40B4-BE49-F238E27FC236}">
-                <a16:creationId xmlns:a16="http://schemas.microsoft.com/office/drawing/2014/main" id="{377F11AF-F344-C8D4-C139-9305CB2B84C9}"/>
-              </a:ext>
-            </a:extLst>
-          </p:cNvPr>
-          <p:cNvSpPr>
-            <a:spLocks noGrp="1" noChangeArrowheads="1"/>
-          </p:cNvSpPr>
-          <p:nvPr>
-            <p:ph type="title"/>
-            <p:custDataLst>
-              <p:tags r:id="rId1"/>
-            </p:custDataLst>
-          </p:nvPr>
-        </p:nvSpPr>
-        <p:spPr>
-          <a:xfrm>
-            <a:off x="1141413" y="284084"/>
-            <a:ext cx="9905998" cy="620791"/>
-          </a:xfrm>
-        </p:spPr>
-        <p:txBody>
-          <a:bodyPr/>
-          <a:lstStyle/>
-          <a:p>
-            <a:pPr algn="ctr"/>
-            <a:r>
-              <a:rPr lang="en-US" dirty="0"/>
-              <a:t>Week 2: Monday</a:t>
-            </a:r>
-          </a:p>
-        </p:txBody>
-      </p:sp>
-      <p:sp>
-        <p:nvSpPr>
-          <p:cNvPr id="6147" name="Rectangle 3">
-            <a:extLst>
-              <a:ext uri="{FF2B5EF4-FFF2-40B4-BE49-F238E27FC236}">
-                <a16:creationId xmlns:a16="http://schemas.microsoft.com/office/drawing/2014/main" id="{AB649171-4125-074F-B3EE-CC029B85A7F8}"/>
-              </a:ext>
-            </a:extLst>
-          </p:cNvPr>
-          <p:cNvSpPr>
-            <a:spLocks noGrp="1" noChangeArrowheads="1"/>
-          </p:cNvSpPr>
-          <p:nvPr>
-            <p:ph idx="1"/>
-            <p:custDataLst>
-              <p:tags r:id="rId2"/>
-            </p:custDataLst>
-          </p:nvPr>
-        </p:nvSpPr>
-        <p:spPr>
-          <a:xfrm>
-            <a:off x="1294151" y="1098548"/>
-            <a:ext cx="9600522" cy="5475367"/>
-          </a:xfrm>
-        </p:spPr>
-        <p:txBody>
-          <a:bodyPr>
-            <a:normAutofit fontScale="92500" lnSpcReduction="20000"/>
-          </a:bodyPr>
-          <a:lstStyle/>
-          <a:p>
-            <a:r>
-              <a:rPr lang="en-US" dirty="0">
-                <a:latin typeface="Arial" panose="020B0604020202020204" pitchFamily="34" charset="0"/>
-                <a:cs typeface="Arial" panose="020B0604020202020204" pitchFamily="34" charset="0"/>
-              </a:rPr>
-              <a:t>Welcome to week 2!!</a:t>
-            </a:r>
-          </a:p>
-          <a:p>
-            <a:r>
-              <a:rPr lang="en-US" dirty="0">
-                <a:latin typeface="Arial" panose="020B0604020202020204" pitchFamily="34" charset="0"/>
-                <a:cs typeface="Arial" panose="020B0604020202020204" pitchFamily="34" charset="0"/>
-              </a:rPr>
-              <a:t>First homework is “graded”. Remember that this was a spot-check grade</a:t>
-            </a:r>
-          </a:p>
-          <a:p>
-            <a:r>
-              <a:rPr lang="en-US" dirty="0">
-                <a:latin typeface="Arial" panose="020B0604020202020204" pitchFamily="34" charset="0"/>
-                <a:cs typeface="Arial" panose="020B0604020202020204" pitchFamily="34" charset="0"/>
-              </a:rPr>
-              <a:t>This week:</a:t>
-            </a:r>
-          </a:p>
-          <a:p>
-            <a:pPr lvl="1"/>
-            <a:r>
-              <a:rPr lang="en-US" dirty="0">
-                <a:latin typeface="Arial" panose="020B0604020202020204" pitchFamily="34" charset="0"/>
-                <a:cs typeface="Arial" panose="020B0604020202020204" pitchFamily="34" charset="0"/>
-              </a:rPr>
-              <a:t>Written Mod. 2 assignment due Tuesday evening</a:t>
-            </a:r>
-          </a:p>
-          <a:p>
-            <a:pPr lvl="1"/>
-            <a:r>
-              <a:rPr lang="en-US" dirty="0">
-                <a:latin typeface="Arial" panose="020B0604020202020204" pitchFamily="34" charset="0"/>
-                <a:cs typeface="Arial" panose="020B0604020202020204" pitchFamily="34" charset="0"/>
-              </a:rPr>
-              <a:t>Programming assignment due Thursday evening</a:t>
-            </a:r>
-          </a:p>
-          <a:p>
-            <a:pPr lvl="1"/>
-            <a:r>
-              <a:rPr lang="en-US" dirty="0">
-                <a:latin typeface="Arial" panose="020B0604020202020204" pitchFamily="34" charset="0"/>
-                <a:cs typeface="Arial" panose="020B0604020202020204" pitchFamily="34" charset="0"/>
-              </a:rPr>
-              <a:t>First Midterm is on Friday (no lecture on Friday)</a:t>
-            </a:r>
-          </a:p>
-          <a:p>
-            <a:r>
-              <a:rPr lang="en-US" dirty="0">
-                <a:latin typeface="Arial" panose="020B0604020202020204" pitchFamily="34" charset="0"/>
-                <a:cs typeface="Arial" panose="020B0604020202020204" pitchFamily="34" charset="0"/>
-              </a:rPr>
-              <a:t>Lecture recordings from last Fall are posted on Panopto on Canvas</a:t>
-            </a:r>
-          </a:p>
-          <a:p>
-            <a:pPr lvl="1"/>
-            <a:r>
-              <a:rPr lang="en-US" dirty="0">
-                <a:latin typeface="Arial" panose="020B0604020202020204" pitchFamily="34" charset="0"/>
-                <a:cs typeface="Arial" panose="020B0604020202020204" pitchFamily="34" charset="0"/>
-              </a:rPr>
-              <a:t>I posted ALL the videos FYI</a:t>
-            </a:r>
-          </a:p>
-          <a:p>
-            <a:pPr lvl="1"/>
-            <a:r>
-              <a:rPr lang="en-US" dirty="0">
-                <a:latin typeface="Arial" panose="020B0604020202020204" pitchFamily="34" charset="0"/>
-                <a:cs typeface="Arial" panose="020B0604020202020204" pitchFamily="34" charset="0"/>
-              </a:rPr>
-              <a:t>For this module, you watch from oldest through “Pump. Lemma + Begin Mod 3”</a:t>
-            </a:r>
-          </a:p>
-          <a:p>
-            <a:r>
-              <a:rPr lang="en-US" dirty="0">
-                <a:latin typeface="Arial" panose="020B0604020202020204" pitchFamily="34" charset="0"/>
-                <a:cs typeface="Arial" panose="020B0604020202020204" pitchFamily="34" charset="0"/>
-              </a:rPr>
-              <a:t>Please remember that I am asking for NO laptop / phones!</a:t>
-            </a:r>
-          </a:p>
-          <a:p>
-            <a:pPr lvl="1"/>
-            <a:r>
-              <a:rPr lang="en-US" dirty="0">
-                <a:latin typeface="Arial" panose="020B0604020202020204" pitchFamily="34" charset="0"/>
-                <a:cs typeface="Arial" panose="020B0604020202020204" pitchFamily="34" charset="0"/>
-              </a:rPr>
-              <a:t>This makes the learning environment better for everybody. I appreciate it!</a:t>
-            </a:r>
-          </a:p>
-          <a:p>
-            <a:r>
-              <a:rPr lang="en-US" dirty="0">
-                <a:latin typeface="Arial" panose="020B0604020202020204" pitchFamily="34" charset="0"/>
-                <a:cs typeface="Arial" panose="020B0604020202020204" pitchFamily="34" charset="0"/>
-              </a:rPr>
-              <a:t>Attendance continues today as usual.</a:t>
-            </a:r>
-          </a:p>
-          <a:p>
-            <a:r>
-              <a:rPr lang="en-US" dirty="0">
-                <a:latin typeface="Arial" panose="020B0604020202020204" pitchFamily="34" charset="0"/>
-                <a:cs typeface="Arial" panose="020B0604020202020204" pitchFamily="34" charset="0"/>
-              </a:rPr>
-              <a:t>We should finish module 1 today</a:t>
-            </a:r>
-          </a:p>
-          <a:p>
-            <a:endParaRPr lang="en-US" dirty="0">
-              <a:latin typeface="Arial" panose="020B0604020202020204" pitchFamily="34" charset="0"/>
-              <a:cs typeface="Arial" panose="020B0604020202020204" pitchFamily="34" charset="0"/>
-            </a:endParaRPr>
-          </a:p>
-        </p:txBody>
-      </p:sp>
-    </p:spTree>
-    <p:extLst>
-      <p:ext uri="{BB962C8B-B14F-4D97-AF65-F5344CB8AC3E}">
-        <p14:creationId xmlns:p14="http://schemas.microsoft.com/office/powerpoint/2010/main" val="2728786617"/>
-      </p:ext>
-    </p:extLst>
-  </p:cSld>
-  <p:clrMapOvr>
-    <a:masterClrMapping/>
-  </p:clrMapOvr>
-</p:sld>
-</file>
-
-<file path=ppt/slides/slide7.xml><?xml version="1.0" encoding="utf-8"?>
-<p:sld xmlns:a="http://schemas.openxmlformats.org/drawingml/2006/main" xmlns:r="http://schemas.openxmlformats.org/officeDocument/2006/relationships" xmlns:p="http://schemas.openxmlformats.org/presentationml/2006/main">
-  <p:cSld>
-    <p:spTree>
-      <p:nvGrpSpPr>
-        <p:cNvPr id="1" name="">
-          <a:extLst>
-            <a:ext uri="{FF2B5EF4-FFF2-40B4-BE49-F238E27FC236}">
-              <a16:creationId xmlns:a16="http://schemas.microsoft.com/office/drawing/2014/main" id="{10A534A6-C91A-6236-8C47-1EE87A38EC62}"/>
-            </a:ext>
-          </a:extLst>
-        </p:cNvPr>
-        <p:cNvGrpSpPr/>
-        <p:nvPr/>
-      </p:nvGrpSpPr>
-      <p:grpSpPr>
-        <a:xfrm>
-          <a:off x="0" y="0"/>
-          <a:ext cx="0" cy="0"/>
-          <a:chOff x="0" y="0"/>
-          <a:chExt cx="0" cy="0"/>
-        </a:xfrm>
-      </p:grpSpPr>
-      <p:sp>
-        <p:nvSpPr>
-          <p:cNvPr id="6146" name="Rectangle 2">
-            <a:extLst>
-              <a:ext uri="{FF2B5EF4-FFF2-40B4-BE49-F238E27FC236}">
-                <a16:creationId xmlns:a16="http://schemas.microsoft.com/office/drawing/2014/main" id="{8FA1C635-2C54-9B7E-1432-EEA3313AAA24}"/>
-              </a:ext>
-            </a:extLst>
-          </p:cNvPr>
-          <p:cNvSpPr>
-            <a:spLocks noGrp="1" noChangeArrowheads="1"/>
-          </p:cNvSpPr>
-          <p:nvPr>
-            <p:ph type="title"/>
-            <p:custDataLst>
-              <p:tags r:id="rId1"/>
-            </p:custDataLst>
-          </p:nvPr>
-        </p:nvSpPr>
-        <p:spPr>
-          <a:xfrm>
-            <a:off x="1141413" y="284084"/>
-            <a:ext cx="9905998" cy="620791"/>
-          </a:xfrm>
-        </p:spPr>
-        <p:txBody>
-          <a:bodyPr/>
-          <a:lstStyle/>
-          <a:p>
-            <a:pPr algn="ctr"/>
-            <a:r>
-              <a:rPr lang="en-US" dirty="0"/>
-              <a:t>Week 2: Tuesday</a:t>
-            </a:r>
-          </a:p>
-        </p:txBody>
-      </p:sp>
-      <p:sp>
-        <p:nvSpPr>
-          <p:cNvPr id="6147" name="Rectangle 3">
-            <a:extLst>
-              <a:ext uri="{FF2B5EF4-FFF2-40B4-BE49-F238E27FC236}">
-                <a16:creationId xmlns:a16="http://schemas.microsoft.com/office/drawing/2014/main" id="{A2A40684-18FF-B302-48CF-E12AF1B700D6}"/>
-              </a:ext>
-            </a:extLst>
-          </p:cNvPr>
-          <p:cNvSpPr>
-            <a:spLocks noGrp="1" noChangeArrowheads="1"/>
-          </p:cNvSpPr>
-          <p:nvPr>
-            <p:ph idx="1"/>
-            <p:custDataLst>
-              <p:tags r:id="rId2"/>
-            </p:custDataLst>
-          </p:nvPr>
-        </p:nvSpPr>
-        <p:spPr>
-          <a:xfrm>
-            <a:off x="1294151" y="1098548"/>
-            <a:ext cx="9600522" cy="5475367"/>
-          </a:xfrm>
-        </p:spPr>
-        <p:txBody>
-          <a:bodyPr>
-            <a:normAutofit fontScale="92500" lnSpcReduction="10000"/>
-          </a:bodyPr>
-          <a:lstStyle/>
-          <a:p>
-            <a:r>
-              <a:rPr lang="en-US" dirty="0">
-                <a:latin typeface="Arial" panose="020B0604020202020204" pitchFamily="34" charset="0"/>
-                <a:cs typeface="Arial" panose="020B0604020202020204" pitchFamily="34" charset="0"/>
-              </a:rPr>
-              <a:t>Welcome to week 2!!</a:t>
-            </a:r>
-          </a:p>
-          <a:p>
-            <a:r>
-              <a:rPr lang="en-US" dirty="0">
-                <a:latin typeface="Arial" panose="020B0604020202020204" pitchFamily="34" charset="0"/>
-                <a:cs typeface="Arial" panose="020B0604020202020204" pitchFamily="34" charset="0"/>
-              </a:rPr>
-              <a:t>This week:</a:t>
-            </a:r>
-          </a:p>
-          <a:p>
-            <a:pPr lvl="1"/>
-            <a:r>
-              <a:rPr lang="en-US" dirty="0">
-                <a:latin typeface="Arial" panose="020B0604020202020204" pitchFamily="34" charset="0"/>
-                <a:cs typeface="Arial" panose="020B0604020202020204" pitchFamily="34" charset="0"/>
-              </a:rPr>
-              <a:t>Written Mod. 2 assignment due </a:t>
-            </a:r>
-            <a:r>
-              <a:rPr lang="en-US" b="1" i="1" u="sng" dirty="0">
-                <a:latin typeface="Arial" panose="020B0604020202020204" pitchFamily="34" charset="0"/>
-                <a:cs typeface="Arial" panose="020B0604020202020204" pitchFamily="34" charset="0"/>
-              </a:rPr>
-              <a:t>TONIGHT</a:t>
-            </a:r>
-            <a:r>
-              <a:rPr lang="en-US" dirty="0">
-                <a:latin typeface="Arial" panose="020B0604020202020204" pitchFamily="34" charset="0"/>
-                <a:cs typeface="Arial" panose="020B0604020202020204" pitchFamily="34" charset="0"/>
-              </a:rPr>
-              <a:t>!!</a:t>
-            </a:r>
-          </a:p>
-          <a:p>
-            <a:pPr lvl="1"/>
-            <a:r>
-              <a:rPr lang="en-US" dirty="0">
-                <a:latin typeface="Arial" panose="020B0604020202020204" pitchFamily="34" charset="0"/>
-                <a:cs typeface="Arial" panose="020B0604020202020204" pitchFamily="34" charset="0"/>
-              </a:rPr>
-              <a:t>Programming assignment due Thursday evening</a:t>
-            </a:r>
-          </a:p>
-          <a:p>
-            <a:pPr lvl="1"/>
-            <a:r>
-              <a:rPr lang="en-US" dirty="0">
-                <a:latin typeface="Arial" panose="020B0604020202020204" pitchFamily="34" charset="0"/>
-                <a:cs typeface="Arial" panose="020B0604020202020204" pitchFamily="34" charset="0"/>
-              </a:rPr>
-              <a:t>First Midterm is on Friday (no lecture on Friday)</a:t>
-            </a:r>
-          </a:p>
-          <a:p>
-            <a:r>
-              <a:rPr lang="en-US" dirty="0">
-                <a:latin typeface="Arial" panose="020B0604020202020204" pitchFamily="34" charset="0"/>
-                <a:cs typeface="Arial" panose="020B0604020202020204" pitchFamily="34" charset="0"/>
-              </a:rPr>
-              <a:t>Lecture recordings from last Fall are posted on Panopto on Canvas</a:t>
-            </a:r>
-          </a:p>
-          <a:p>
-            <a:pPr lvl="1"/>
-            <a:r>
-              <a:rPr lang="en-US" dirty="0">
-                <a:latin typeface="Arial" panose="020B0604020202020204" pitchFamily="34" charset="0"/>
-                <a:cs typeface="Arial" panose="020B0604020202020204" pitchFamily="34" charset="0"/>
-              </a:rPr>
-              <a:t>I posted ALL the videos FYI</a:t>
-            </a:r>
-          </a:p>
-          <a:p>
-            <a:pPr lvl="1"/>
-            <a:r>
-              <a:rPr lang="en-US" dirty="0">
-                <a:latin typeface="Arial" panose="020B0604020202020204" pitchFamily="34" charset="0"/>
-                <a:cs typeface="Arial" panose="020B0604020202020204" pitchFamily="34" charset="0"/>
-              </a:rPr>
-              <a:t>For this module, you watch from oldest through “Pump. Lemma + Begin Mod 3”</a:t>
-            </a:r>
-          </a:p>
-          <a:p>
-            <a:r>
-              <a:rPr lang="en-US" dirty="0">
-                <a:latin typeface="Arial" panose="020B0604020202020204" pitchFamily="34" charset="0"/>
-                <a:cs typeface="Arial" panose="020B0604020202020204" pitchFamily="34" charset="0"/>
-              </a:rPr>
-              <a:t>Please remember that I am asking for NO laptop / phones!</a:t>
-            </a:r>
-          </a:p>
-          <a:p>
-            <a:pPr lvl="1"/>
-            <a:r>
-              <a:rPr lang="en-US" dirty="0">
-                <a:latin typeface="Arial" panose="020B0604020202020204" pitchFamily="34" charset="0"/>
-                <a:cs typeface="Arial" panose="020B0604020202020204" pitchFamily="34" charset="0"/>
-              </a:rPr>
-              <a:t>This makes the learning environment better for everybody. I appreciate it!</a:t>
-            </a:r>
-          </a:p>
-          <a:p>
-            <a:r>
-              <a:rPr lang="en-US" dirty="0">
-                <a:latin typeface="Arial" panose="020B0604020202020204" pitchFamily="34" charset="0"/>
-                <a:cs typeface="Arial" panose="020B0604020202020204" pitchFamily="34" charset="0"/>
-              </a:rPr>
-              <a:t>Attendance continues today as usual.</a:t>
-            </a:r>
-          </a:p>
-          <a:p>
-            <a:r>
-              <a:rPr lang="en-US" dirty="0">
-                <a:latin typeface="Arial" panose="020B0604020202020204" pitchFamily="34" charset="0"/>
-                <a:cs typeface="Arial" panose="020B0604020202020204" pitchFamily="34" charset="0"/>
-              </a:rPr>
-              <a:t>Today we begin Module 2! The </a:t>
-            </a:r>
-            <a:r>
-              <a:rPr lang="en-US">
-                <a:latin typeface="Arial" panose="020B0604020202020204" pitchFamily="34" charset="0"/>
-                <a:cs typeface="Arial" panose="020B0604020202020204" pitchFamily="34" charset="0"/>
-              </a:rPr>
-              <a:t>Context-Free Languages!</a:t>
-            </a:r>
-            <a:endParaRPr lang="en-US" dirty="0">
-              <a:latin typeface="Arial" panose="020B0604020202020204" pitchFamily="34" charset="0"/>
-              <a:cs typeface="Arial" panose="020B0604020202020204" pitchFamily="34" charset="0"/>
-            </a:endParaRPr>
-          </a:p>
-          <a:p>
-            <a:endParaRPr lang="en-US" dirty="0">
-              <a:latin typeface="Arial" panose="020B0604020202020204" pitchFamily="34" charset="0"/>
-              <a:cs typeface="Arial" panose="020B0604020202020204" pitchFamily="34" charset="0"/>
-            </a:endParaRPr>
-          </a:p>
-        </p:txBody>
-      </p:sp>
-    </p:spTree>
-    <p:extLst>
-      <p:ext uri="{BB962C8B-B14F-4D97-AF65-F5344CB8AC3E}">
-        <p14:creationId xmlns:p14="http://schemas.microsoft.com/office/powerpoint/2010/main" val="105140071"/>
-      </p:ext>
-    </p:extLst>
-  </p:cSld>
-  <p:clrMapOvr>
-    <a:masterClrMapping/>
-  </p:clrMapOvr>
-</p:sld>
-</file>
-
-<file path=ppt/slides/slide8.xml><?xml version="1.0" encoding="utf-8"?>
-<p:sld xmlns:a="http://schemas.openxmlformats.org/drawingml/2006/main" xmlns:r="http://schemas.openxmlformats.org/officeDocument/2006/relationships" xmlns:p="http://schemas.openxmlformats.org/presentationml/2006/main">
-  <p:cSld>
-    <p:spTree>
-      <p:nvGrpSpPr>
-        <p:cNvPr id="1" name="">
-          <a:extLst>
-            <a:ext uri="{FF2B5EF4-FFF2-40B4-BE49-F238E27FC236}">
-              <a16:creationId xmlns:a16="http://schemas.microsoft.com/office/drawing/2014/main" id="{63DC3DD8-4F8B-8749-5855-A11573B83898}"/>
-            </a:ext>
-          </a:extLst>
-        </p:cNvPr>
-        <p:cNvGrpSpPr/>
-        <p:nvPr/>
-      </p:nvGrpSpPr>
-      <p:grpSpPr>
-        <a:xfrm>
-          <a:off x="0" y="0"/>
-          <a:ext cx="0" cy="0"/>
-          <a:chOff x="0" y="0"/>
-          <a:chExt cx="0" cy="0"/>
-        </a:xfrm>
-      </p:grpSpPr>
-      <p:sp>
-        <p:nvSpPr>
-          <p:cNvPr id="6146" name="Rectangle 2">
-            <a:extLst>
-              <a:ext uri="{FF2B5EF4-FFF2-40B4-BE49-F238E27FC236}">
-                <a16:creationId xmlns:a16="http://schemas.microsoft.com/office/drawing/2014/main" id="{E24F0431-C398-C850-F3EC-F25D9C4D7F33}"/>
-              </a:ext>
-            </a:extLst>
-          </p:cNvPr>
-          <p:cNvSpPr>
-            <a:spLocks noGrp="1" noChangeArrowheads="1"/>
-          </p:cNvSpPr>
-          <p:nvPr>
-            <p:ph type="title"/>
-            <p:custDataLst>
-              <p:tags r:id="rId1"/>
-            </p:custDataLst>
-          </p:nvPr>
-        </p:nvSpPr>
-        <p:spPr>
-          <a:xfrm>
-            <a:off x="1141413" y="284084"/>
-            <a:ext cx="9905998" cy="620791"/>
-          </a:xfrm>
-        </p:spPr>
-        <p:txBody>
-          <a:bodyPr/>
-          <a:lstStyle/>
-          <a:p>
-            <a:pPr algn="ctr"/>
-            <a:r>
-              <a:rPr lang="en-US" dirty="0"/>
-              <a:t>Week 2: Wednesday</a:t>
-            </a:r>
-          </a:p>
-        </p:txBody>
-      </p:sp>
-      <p:sp>
-        <p:nvSpPr>
-          <p:cNvPr id="6147" name="Rectangle 3">
-            <a:extLst>
-              <a:ext uri="{FF2B5EF4-FFF2-40B4-BE49-F238E27FC236}">
-                <a16:creationId xmlns:a16="http://schemas.microsoft.com/office/drawing/2014/main" id="{40F36F83-327D-A4E3-9A28-E1CB7B524CEB}"/>
-              </a:ext>
-            </a:extLst>
-          </p:cNvPr>
-          <p:cNvSpPr>
-            <a:spLocks noGrp="1" noChangeArrowheads="1"/>
-          </p:cNvSpPr>
-          <p:nvPr>
-            <p:ph idx="1"/>
-            <p:custDataLst>
-              <p:tags r:id="rId2"/>
-            </p:custDataLst>
-          </p:nvPr>
-        </p:nvSpPr>
-        <p:spPr>
-          <a:xfrm>
-            <a:off x="1294151" y="1098548"/>
-            <a:ext cx="9600522" cy="5475367"/>
-          </a:xfrm>
-        </p:spPr>
-        <p:txBody>
-          <a:bodyPr>
-            <a:normAutofit lnSpcReduction="10000"/>
-          </a:bodyPr>
-          <a:lstStyle/>
-          <a:p>
-            <a:r>
-              <a:rPr lang="en-US" dirty="0">
-                <a:latin typeface="Arial" panose="020B0604020202020204" pitchFamily="34" charset="0"/>
-                <a:cs typeface="Arial" panose="020B0604020202020204" pitchFamily="34" charset="0"/>
-              </a:rPr>
-              <a:t>Welcome to week 2!!</a:t>
-            </a:r>
-          </a:p>
-          <a:p>
-            <a:r>
-              <a:rPr lang="en-US" dirty="0">
-                <a:latin typeface="Arial" panose="020B0604020202020204" pitchFamily="34" charset="0"/>
-                <a:cs typeface="Arial" panose="020B0604020202020204" pitchFamily="34" charset="0"/>
-              </a:rPr>
-              <a:t>This week:</a:t>
-            </a:r>
-          </a:p>
-          <a:p>
-            <a:pPr lvl="1"/>
-            <a:r>
-              <a:rPr lang="en-US" dirty="0">
-                <a:latin typeface="Arial" panose="020B0604020202020204" pitchFamily="34" charset="0"/>
-                <a:cs typeface="Arial" panose="020B0604020202020204" pitchFamily="34" charset="0"/>
-              </a:rPr>
-              <a:t>Programming assignment due Thursday evening</a:t>
-            </a:r>
-          </a:p>
-          <a:p>
-            <a:pPr lvl="1"/>
-            <a:r>
-              <a:rPr lang="en-US" dirty="0">
-                <a:latin typeface="Arial" panose="020B0604020202020204" pitchFamily="34" charset="0"/>
-                <a:cs typeface="Arial" panose="020B0604020202020204" pitchFamily="34" charset="0"/>
-              </a:rPr>
-              <a:t>First Midterm is on Friday (no lecture on Friday)</a:t>
-            </a:r>
-          </a:p>
-          <a:p>
-            <a:r>
-              <a:rPr lang="en-US" dirty="0">
-                <a:latin typeface="Arial" panose="020B0604020202020204" pitchFamily="34" charset="0"/>
-                <a:cs typeface="Arial" panose="020B0604020202020204" pitchFamily="34" charset="0"/>
-              </a:rPr>
-              <a:t>Lecture recordings from last Fall are posted on Panopto on Canvas</a:t>
-            </a:r>
-          </a:p>
-          <a:p>
-            <a:pPr lvl="1"/>
-            <a:r>
-              <a:rPr lang="en-US" dirty="0">
-                <a:latin typeface="Arial" panose="020B0604020202020204" pitchFamily="34" charset="0"/>
-                <a:cs typeface="Arial" panose="020B0604020202020204" pitchFamily="34" charset="0"/>
-              </a:rPr>
-              <a:t>I posted ALL the videos FYI</a:t>
-            </a:r>
-          </a:p>
-          <a:p>
-            <a:pPr lvl="1"/>
-            <a:r>
-              <a:rPr lang="en-US" dirty="0">
-                <a:latin typeface="Arial" panose="020B0604020202020204" pitchFamily="34" charset="0"/>
-                <a:cs typeface="Arial" panose="020B0604020202020204" pitchFamily="34" charset="0"/>
-              </a:rPr>
-              <a:t>For this module, you watch from oldest through “Pump. Lemma + Begin Mod 3”</a:t>
-            </a:r>
-          </a:p>
-          <a:p>
-            <a:r>
-              <a:rPr lang="en-US" dirty="0">
-                <a:latin typeface="Arial" panose="020B0604020202020204" pitchFamily="34" charset="0"/>
-                <a:cs typeface="Arial" panose="020B0604020202020204" pitchFamily="34" charset="0"/>
-              </a:rPr>
-              <a:t>Please remember that I am asking for NO laptop / phones!</a:t>
-            </a:r>
-          </a:p>
-          <a:p>
-            <a:pPr lvl="1"/>
-            <a:r>
-              <a:rPr lang="en-US" dirty="0">
-                <a:latin typeface="Arial" panose="020B0604020202020204" pitchFamily="34" charset="0"/>
-                <a:cs typeface="Arial" panose="020B0604020202020204" pitchFamily="34" charset="0"/>
-              </a:rPr>
-              <a:t>This makes the learning environment better for everybody. I appreciate it!</a:t>
-            </a:r>
-          </a:p>
-          <a:p>
-            <a:r>
-              <a:rPr lang="en-US" dirty="0">
-                <a:latin typeface="Arial" panose="020B0604020202020204" pitchFamily="34" charset="0"/>
-                <a:cs typeface="Arial" panose="020B0604020202020204" pitchFamily="34" charset="0"/>
-              </a:rPr>
-              <a:t>Attendance continues today as usual.</a:t>
-            </a:r>
-          </a:p>
-          <a:p>
-            <a:r>
-              <a:rPr lang="en-US" dirty="0">
-                <a:latin typeface="Arial" panose="020B0604020202020204" pitchFamily="34" charset="0"/>
-                <a:cs typeface="Arial" panose="020B0604020202020204" pitchFamily="34" charset="0"/>
-              </a:rPr>
-              <a:t>Today </a:t>
-            </a:r>
-            <a:r>
-              <a:rPr lang="en-US">
-                <a:latin typeface="Arial" panose="020B0604020202020204" pitchFamily="34" charset="0"/>
-                <a:cs typeface="Arial" panose="020B0604020202020204" pitchFamily="34" charset="0"/>
-              </a:rPr>
-              <a:t>we continue </a:t>
-            </a:r>
-            <a:r>
-              <a:rPr lang="en-US" dirty="0">
-                <a:latin typeface="Arial" panose="020B0604020202020204" pitchFamily="34" charset="0"/>
-                <a:cs typeface="Arial" panose="020B0604020202020204" pitchFamily="34" charset="0"/>
-              </a:rPr>
-              <a:t>Module 2! The Context-Free Languages!</a:t>
-            </a:r>
-          </a:p>
-          <a:p>
-            <a:endParaRPr lang="en-US" dirty="0">
-              <a:latin typeface="Arial" panose="020B0604020202020204" pitchFamily="34" charset="0"/>
-              <a:cs typeface="Arial" panose="020B0604020202020204" pitchFamily="34" charset="0"/>
-            </a:endParaRPr>
-          </a:p>
-        </p:txBody>
-      </p:sp>
-    </p:spTree>
-    <p:extLst>
-      <p:ext uri="{BB962C8B-B14F-4D97-AF65-F5344CB8AC3E}">
-        <p14:creationId xmlns:p14="http://schemas.microsoft.com/office/powerpoint/2010/main" val="3983308769"/>
-      </p:ext>
-    </p:extLst>
-  </p:cSld>
-  <p:clrMapOvr>
-    <a:masterClrMapping/>
-  </p:clrMapOvr>
-</p:sld>
-</file>
-
-<file path=ppt/slides/slide9.xml><?xml version="1.0" encoding="utf-8"?>
-<p:sld xmlns:a="http://schemas.openxmlformats.org/drawingml/2006/main" xmlns:r="http://schemas.openxmlformats.org/officeDocument/2006/relationships" xmlns:p="http://schemas.openxmlformats.org/presentationml/2006/main">
-  <p:cSld>
-    <p:spTree>
-      <p:nvGrpSpPr>
-        <p:cNvPr id="1" name="">
-          <a:extLst>
-            <a:ext uri="{FF2B5EF4-FFF2-40B4-BE49-F238E27FC236}">
-              <a16:creationId xmlns:a16="http://schemas.microsoft.com/office/drawing/2014/main" id="{D8D8F547-80A0-B12F-366F-50F54D4D3C27}"/>
-            </a:ext>
-          </a:extLst>
-        </p:cNvPr>
-        <p:cNvGrpSpPr/>
-        <p:nvPr/>
-      </p:nvGrpSpPr>
-      <p:grpSpPr>
-        <a:xfrm>
-          <a:off x="0" y="0"/>
-          <a:ext cx="0" cy="0"/>
-          <a:chOff x="0" y="0"/>
-          <a:chExt cx="0" cy="0"/>
-        </a:xfrm>
-      </p:grpSpPr>
-      <p:sp>
-        <p:nvSpPr>
-          <p:cNvPr id="6146" name="Rectangle 2">
-            <a:extLst>
-              <a:ext uri="{FF2B5EF4-FFF2-40B4-BE49-F238E27FC236}">
-                <a16:creationId xmlns:a16="http://schemas.microsoft.com/office/drawing/2014/main" id="{A80FFDE4-28E6-0BF7-0008-3ED194373D16}"/>
-              </a:ext>
-            </a:extLst>
-          </p:cNvPr>
-          <p:cNvSpPr>
-            <a:spLocks noGrp="1" noChangeArrowheads="1"/>
-          </p:cNvSpPr>
-          <p:nvPr>
-            <p:ph type="title"/>
-            <p:custDataLst>
-              <p:tags r:id="rId1"/>
-            </p:custDataLst>
-          </p:nvPr>
-        </p:nvSpPr>
-        <p:spPr>
-          <a:xfrm>
-            <a:off x="1141413" y="284084"/>
-            <a:ext cx="9905998" cy="620791"/>
-          </a:xfrm>
-        </p:spPr>
-        <p:txBody>
-          <a:bodyPr/>
-          <a:lstStyle/>
-          <a:p>
-            <a:pPr algn="ctr"/>
-            <a:r>
-              <a:rPr lang="en-US" dirty="0"/>
-              <a:t>Week 2: Thursday</a:t>
-            </a:r>
-          </a:p>
-        </p:txBody>
-      </p:sp>
-      <p:sp>
-        <p:nvSpPr>
-          <p:cNvPr id="6147" name="Rectangle 3">
-            <a:extLst>
-              <a:ext uri="{FF2B5EF4-FFF2-40B4-BE49-F238E27FC236}">
-                <a16:creationId xmlns:a16="http://schemas.microsoft.com/office/drawing/2014/main" id="{99F7EF8C-18CE-1D0E-479E-3E9FC7C83090}"/>
-              </a:ext>
-            </a:extLst>
-          </p:cNvPr>
-          <p:cNvSpPr>
-            <a:spLocks noGrp="1" noChangeArrowheads="1"/>
-          </p:cNvSpPr>
-          <p:nvPr>
-            <p:ph idx="1"/>
-            <p:custDataLst>
-              <p:tags r:id="rId2"/>
-            </p:custDataLst>
-          </p:nvPr>
-        </p:nvSpPr>
-        <p:spPr>
-          <a:xfrm>
-            <a:off x="1294151" y="1098548"/>
-            <a:ext cx="9600522" cy="5475367"/>
-          </a:xfrm>
-        </p:spPr>
-        <p:txBody>
-          <a:bodyPr>
-            <a:normAutofit fontScale="92500" lnSpcReduction="20000"/>
-          </a:bodyPr>
-          <a:lstStyle/>
-          <a:p>
-            <a:r>
-              <a:rPr lang="en-US" dirty="0">
-                <a:latin typeface="Arial" panose="020B0604020202020204" pitchFamily="34" charset="0"/>
-                <a:cs typeface="Arial" panose="020B0604020202020204" pitchFamily="34" charset="0"/>
-              </a:rPr>
-              <a:t>Welcome to week 2!!</a:t>
-            </a:r>
-          </a:p>
-          <a:p>
-            <a:r>
-              <a:rPr lang="en-US" dirty="0">
-                <a:latin typeface="Arial" panose="020B0604020202020204" pitchFamily="34" charset="0"/>
-                <a:cs typeface="Arial" panose="020B0604020202020204" pitchFamily="34" charset="0"/>
-              </a:rPr>
-              <a:t>This week:</a:t>
-            </a:r>
-          </a:p>
-          <a:p>
-            <a:pPr lvl="1"/>
-            <a:r>
-              <a:rPr lang="en-US" dirty="0">
-                <a:latin typeface="Arial" panose="020B0604020202020204" pitchFamily="34" charset="0"/>
-                <a:cs typeface="Arial" panose="020B0604020202020204" pitchFamily="34" charset="0"/>
-              </a:rPr>
-              <a:t>Programming assignment due </a:t>
-            </a:r>
-            <a:r>
-              <a:rPr lang="en-US" b="1" i="1" u="sng" dirty="0">
-                <a:latin typeface="Arial" panose="020B0604020202020204" pitchFamily="34" charset="0"/>
-                <a:cs typeface="Arial" panose="020B0604020202020204" pitchFamily="34" charset="0"/>
-              </a:rPr>
-              <a:t>Tonight!!</a:t>
-            </a:r>
-          </a:p>
-          <a:p>
-            <a:pPr lvl="1"/>
-            <a:r>
-              <a:rPr lang="en-US" dirty="0">
-                <a:latin typeface="Arial" panose="020B0604020202020204" pitchFamily="34" charset="0"/>
-                <a:cs typeface="Arial" panose="020B0604020202020204" pitchFamily="34" charset="0"/>
-              </a:rPr>
-              <a:t>First Midterm is on Friday (no lecture on Friday)</a:t>
-            </a:r>
-          </a:p>
-          <a:p>
-            <a:r>
-              <a:rPr lang="en-US" dirty="0">
-                <a:latin typeface="Arial" panose="020B0604020202020204" pitchFamily="34" charset="0"/>
-                <a:cs typeface="Arial" panose="020B0604020202020204" pitchFamily="34" charset="0"/>
-              </a:rPr>
-              <a:t>I’ve decided to drop the midterm time limit to 1hr 15min.</a:t>
-            </a:r>
-          </a:p>
-          <a:p>
-            <a:pPr lvl="1"/>
-            <a:r>
-              <a:rPr lang="en-US" dirty="0">
-                <a:latin typeface="Arial" panose="020B0604020202020204" pitchFamily="34" charset="0"/>
-                <a:cs typeface="Arial" panose="020B0604020202020204" pitchFamily="34" charset="0"/>
-              </a:rPr>
-              <a:t>More in line with the length of a midterm during the normal semester.</a:t>
-            </a:r>
-          </a:p>
-          <a:p>
-            <a:r>
-              <a:rPr lang="en-US" dirty="0">
-                <a:latin typeface="Arial" panose="020B0604020202020204" pitchFamily="34" charset="0"/>
-                <a:cs typeface="Arial" panose="020B0604020202020204" pitchFamily="34" charset="0"/>
-              </a:rPr>
-              <a:t>Lecture recordings from last Fall are posted on Panopto on Canvas</a:t>
-            </a:r>
-          </a:p>
-          <a:p>
-            <a:pPr lvl="1"/>
-            <a:r>
-              <a:rPr lang="en-US" dirty="0">
-                <a:latin typeface="Arial" panose="020B0604020202020204" pitchFamily="34" charset="0"/>
-                <a:cs typeface="Arial" panose="020B0604020202020204" pitchFamily="34" charset="0"/>
-              </a:rPr>
-              <a:t>I posted ALL the videos FYI</a:t>
-            </a:r>
-          </a:p>
-          <a:p>
-            <a:pPr lvl="1"/>
-            <a:r>
-              <a:rPr lang="en-US" dirty="0">
-                <a:latin typeface="Arial" panose="020B0604020202020204" pitchFamily="34" charset="0"/>
-                <a:cs typeface="Arial" panose="020B0604020202020204" pitchFamily="34" charset="0"/>
-              </a:rPr>
-              <a:t>For this module, you watch from oldest through “Pump. Lemma + Begin Mod 3”</a:t>
-            </a:r>
-          </a:p>
-          <a:p>
-            <a:r>
-              <a:rPr lang="en-US" dirty="0">
-                <a:latin typeface="Arial" panose="020B0604020202020204" pitchFamily="34" charset="0"/>
-                <a:cs typeface="Arial" panose="020B0604020202020204" pitchFamily="34" charset="0"/>
-              </a:rPr>
-              <a:t>Please remember that I am asking for NO laptop / phones!</a:t>
-            </a:r>
-          </a:p>
-          <a:p>
-            <a:pPr lvl="1"/>
-            <a:r>
-              <a:rPr lang="en-US" dirty="0">
-                <a:latin typeface="Arial" panose="020B0604020202020204" pitchFamily="34" charset="0"/>
-                <a:cs typeface="Arial" panose="020B0604020202020204" pitchFamily="34" charset="0"/>
-              </a:rPr>
-              <a:t>This makes the learning environment better for everybody. I appreciate it!</a:t>
-            </a:r>
-          </a:p>
-          <a:p>
-            <a:r>
-              <a:rPr lang="en-US" dirty="0">
-                <a:latin typeface="Arial" panose="020B0604020202020204" pitchFamily="34" charset="0"/>
-                <a:cs typeface="Arial" panose="020B0604020202020204" pitchFamily="34" charset="0"/>
-              </a:rPr>
-              <a:t>Attendance continues today as usual.</a:t>
-            </a:r>
-          </a:p>
-          <a:p>
-            <a:r>
-              <a:rPr lang="en-US" dirty="0">
-                <a:latin typeface="Arial" panose="020B0604020202020204" pitchFamily="34" charset="0"/>
-                <a:cs typeface="Arial" panose="020B0604020202020204" pitchFamily="34" charset="0"/>
-              </a:rPr>
-              <a:t>Today we finish Module 2 and begin Module 3</a:t>
-            </a:r>
-          </a:p>
-          <a:p>
-            <a:endParaRPr lang="en-US" dirty="0">
-              <a:latin typeface="Arial" panose="020B0604020202020204" pitchFamily="34" charset="0"/>
-              <a:cs typeface="Arial" panose="020B0604020202020204" pitchFamily="34" charset="0"/>
-            </a:endParaRPr>
-          </a:p>
-        </p:txBody>
-      </p:sp>
-    </p:spTree>
-    <p:extLst>
-      <p:ext uri="{BB962C8B-B14F-4D97-AF65-F5344CB8AC3E}">
-        <p14:creationId xmlns:p14="http://schemas.microsoft.com/office/powerpoint/2010/main" val="4060998642"/>
       </p:ext>
     </p:extLst>
   </p:cSld>
@@ -18609,181 +14953,13 @@
 </p:tagLst>
 </file>
 
-<file path=ppt/tags/tag10.xml><?xml version="1.0" encoding="utf-8"?>
-<p:tagLst xmlns:a="http://schemas.openxmlformats.org/drawingml/2006/main" xmlns:r="http://schemas.openxmlformats.org/officeDocument/2006/relationships" xmlns:p="http://schemas.openxmlformats.org/presentationml/2006/main">
-  <p:tag name="_INSTRUCTOR VIEW19C14C36-AC8E-43BC-9DB6-C2AAF774C7DC|PANE__TAG" val="_"/>
-</p:tagLst>
-</file>
-
-<file path=ppt/tags/tag11.xml><?xml version="1.0" encoding="utf-8"?>
-<p:tagLst xmlns:a="http://schemas.openxmlformats.org/drawingml/2006/main" xmlns:r="http://schemas.openxmlformats.org/officeDocument/2006/relationships" xmlns:p="http://schemas.openxmlformats.org/presentationml/2006/main">
-  <p:tag name="_INSTRUCTOR VIEW19C14C36-AC8E-43BC-9DB6-C2AAF774C7DC|PANE__TAG" val="_"/>
-</p:tagLst>
-</file>
-
-<file path=ppt/tags/tag12.xml><?xml version="1.0" encoding="utf-8"?>
-<p:tagLst xmlns:a="http://schemas.openxmlformats.org/drawingml/2006/main" xmlns:r="http://schemas.openxmlformats.org/officeDocument/2006/relationships" xmlns:p="http://schemas.openxmlformats.org/presentationml/2006/main">
-  <p:tag name="_INSTRUCTOR VIEW19C14C36-AC8E-43BC-9DB6-C2AAF774C7DC|PANE__TAG" val="_"/>
-</p:tagLst>
-</file>
-
-<file path=ppt/tags/tag13.xml><?xml version="1.0" encoding="utf-8"?>
-<p:tagLst xmlns:a="http://schemas.openxmlformats.org/drawingml/2006/main" xmlns:r="http://schemas.openxmlformats.org/officeDocument/2006/relationships" xmlns:p="http://schemas.openxmlformats.org/presentationml/2006/main">
-  <p:tag name="_INSTRUCTOR VIEW19C14C36-AC8E-43BC-9DB6-C2AAF774C7DC|PANE__TAG" val="_"/>
-</p:tagLst>
-</file>
-
-<file path=ppt/tags/tag14.xml><?xml version="1.0" encoding="utf-8"?>
-<p:tagLst xmlns:a="http://schemas.openxmlformats.org/drawingml/2006/main" xmlns:r="http://schemas.openxmlformats.org/officeDocument/2006/relationships" xmlns:p="http://schemas.openxmlformats.org/presentationml/2006/main">
-  <p:tag name="_INSTRUCTOR VIEW19C14C36-AC8E-43BC-9DB6-C2AAF774C7DC|PANE__TAG" val="_"/>
-</p:tagLst>
-</file>
-
-<file path=ppt/tags/tag15.xml><?xml version="1.0" encoding="utf-8"?>
-<p:tagLst xmlns:a="http://schemas.openxmlformats.org/drawingml/2006/main" xmlns:r="http://schemas.openxmlformats.org/officeDocument/2006/relationships" xmlns:p="http://schemas.openxmlformats.org/presentationml/2006/main">
-  <p:tag name="_INSTRUCTOR VIEW19C14C36-AC8E-43BC-9DB6-C2AAF774C7DC|PANE__TAG" val="_"/>
-</p:tagLst>
-</file>
-
-<file path=ppt/tags/tag16.xml><?xml version="1.0" encoding="utf-8"?>
-<p:tagLst xmlns:a="http://schemas.openxmlformats.org/drawingml/2006/main" xmlns:r="http://schemas.openxmlformats.org/officeDocument/2006/relationships" xmlns:p="http://schemas.openxmlformats.org/presentationml/2006/main">
-  <p:tag name="_INSTRUCTOR VIEW19C14C36-AC8E-43BC-9DB6-C2AAF774C7DC|PANE__TAG" val="_"/>
-</p:tagLst>
-</file>
-
-<file path=ppt/tags/tag17.xml><?xml version="1.0" encoding="utf-8"?>
-<p:tagLst xmlns:a="http://schemas.openxmlformats.org/drawingml/2006/main" xmlns:r="http://schemas.openxmlformats.org/officeDocument/2006/relationships" xmlns:p="http://schemas.openxmlformats.org/presentationml/2006/main">
-  <p:tag name="_INSTRUCTOR VIEW19C14C36-AC8E-43BC-9DB6-C2AAF774C7DC|PANE__TAG" val="_"/>
-</p:tagLst>
-</file>
-
-<file path=ppt/tags/tag18.xml><?xml version="1.0" encoding="utf-8"?>
-<p:tagLst xmlns:a="http://schemas.openxmlformats.org/drawingml/2006/main" xmlns:r="http://schemas.openxmlformats.org/officeDocument/2006/relationships" xmlns:p="http://schemas.openxmlformats.org/presentationml/2006/main">
-  <p:tag name="_INSTRUCTOR VIEW19C14C36-AC8E-43BC-9DB6-C2AAF774C7DC|PANE__TAG" val="_"/>
-</p:tagLst>
-</file>
-
-<file path=ppt/tags/tag19.xml><?xml version="1.0" encoding="utf-8"?>
-<p:tagLst xmlns:a="http://schemas.openxmlformats.org/drawingml/2006/main" xmlns:r="http://schemas.openxmlformats.org/officeDocument/2006/relationships" xmlns:p="http://schemas.openxmlformats.org/presentationml/2006/main">
-  <p:tag name="_INSTRUCTOR VIEW19C14C36-AC8E-43BC-9DB6-C2AAF774C7DC|PANE__TAG" val="_"/>
-</p:tagLst>
-</file>
-
 <file path=ppt/tags/tag2.xml><?xml version="1.0" encoding="utf-8"?>
 <p:tagLst xmlns:a="http://schemas.openxmlformats.org/drawingml/2006/main" xmlns:r="http://schemas.openxmlformats.org/officeDocument/2006/relationships" xmlns:p="http://schemas.openxmlformats.org/presentationml/2006/main">
   <p:tag name="_INSTRUCTOR VIEW19C14C36-AC8E-43BC-9DB6-C2AAF774C7DC|PANE__TAG" val="_"/>
 </p:tagLst>
 </file>
 
-<file path=ppt/tags/tag20.xml><?xml version="1.0" encoding="utf-8"?>
-<p:tagLst xmlns:a="http://schemas.openxmlformats.org/drawingml/2006/main" xmlns:r="http://schemas.openxmlformats.org/officeDocument/2006/relationships" xmlns:p="http://schemas.openxmlformats.org/presentationml/2006/main">
-  <p:tag name="_INSTRUCTOR VIEW19C14C36-AC8E-43BC-9DB6-C2AAF774C7DC|PANE__TAG" val="_"/>
-</p:tagLst>
-</file>
-
-<file path=ppt/tags/tag21.xml><?xml version="1.0" encoding="utf-8"?>
-<p:tagLst xmlns:a="http://schemas.openxmlformats.org/drawingml/2006/main" xmlns:r="http://schemas.openxmlformats.org/officeDocument/2006/relationships" xmlns:p="http://schemas.openxmlformats.org/presentationml/2006/main">
-  <p:tag name="_INSTRUCTOR VIEW19C14C36-AC8E-43BC-9DB6-C2AAF774C7DC|PANE__TAG" val="_"/>
-</p:tagLst>
-</file>
-
-<file path=ppt/tags/tag22.xml><?xml version="1.0" encoding="utf-8"?>
-<p:tagLst xmlns:a="http://schemas.openxmlformats.org/drawingml/2006/main" xmlns:r="http://schemas.openxmlformats.org/officeDocument/2006/relationships" xmlns:p="http://schemas.openxmlformats.org/presentationml/2006/main">
-  <p:tag name="_INSTRUCTOR VIEW19C14C36-AC8E-43BC-9DB6-C2AAF774C7DC|PANE__TAG" val="_"/>
-</p:tagLst>
-</file>
-
-<file path=ppt/tags/tag23.xml><?xml version="1.0" encoding="utf-8"?>
-<p:tagLst xmlns:a="http://schemas.openxmlformats.org/drawingml/2006/main" xmlns:r="http://schemas.openxmlformats.org/officeDocument/2006/relationships" xmlns:p="http://schemas.openxmlformats.org/presentationml/2006/main">
-  <p:tag name="_INSTRUCTOR VIEW19C14C36-AC8E-43BC-9DB6-C2AAF774C7DC|PANE__TAG" val="_"/>
-</p:tagLst>
-</file>
-
-<file path=ppt/tags/tag24.xml><?xml version="1.0" encoding="utf-8"?>
-<p:tagLst xmlns:a="http://schemas.openxmlformats.org/drawingml/2006/main" xmlns:r="http://schemas.openxmlformats.org/officeDocument/2006/relationships" xmlns:p="http://schemas.openxmlformats.org/presentationml/2006/main">
-  <p:tag name="_INSTRUCTOR VIEW19C14C36-AC8E-43BC-9DB6-C2AAF774C7DC|PANE__TAG" val="_"/>
-</p:tagLst>
-</file>
-
-<file path=ppt/tags/tag25.xml><?xml version="1.0" encoding="utf-8"?>
-<p:tagLst xmlns:a="http://schemas.openxmlformats.org/drawingml/2006/main" xmlns:r="http://schemas.openxmlformats.org/officeDocument/2006/relationships" xmlns:p="http://schemas.openxmlformats.org/presentationml/2006/main">
-  <p:tag name="_INSTRUCTOR VIEW19C14C36-AC8E-43BC-9DB6-C2AAF774C7DC|PANE__TAG" val="_"/>
-</p:tagLst>
-</file>
-
-<file path=ppt/tags/tag26.xml><?xml version="1.0" encoding="utf-8"?>
-<p:tagLst xmlns:a="http://schemas.openxmlformats.org/drawingml/2006/main" xmlns:r="http://schemas.openxmlformats.org/officeDocument/2006/relationships" xmlns:p="http://schemas.openxmlformats.org/presentationml/2006/main">
-  <p:tag name="_INSTRUCTOR VIEW19C14C36-AC8E-43BC-9DB6-C2AAF774C7DC|PANE__TAG" val="_"/>
-</p:tagLst>
-</file>
-
-<file path=ppt/tags/tag27.xml><?xml version="1.0" encoding="utf-8"?>
-<p:tagLst xmlns:a="http://schemas.openxmlformats.org/drawingml/2006/main" xmlns:r="http://schemas.openxmlformats.org/officeDocument/2006/relationships" xmlns:p="http://schemas.openxmlformats.org/presentationml/2006/main">
-  <p:tag name="_INSTRUCTOR VIEW19C14C36-AC8E-43BC-9DB6-C2AAF774C7DC|PANE__TAG" val="_"/>
-</p:tagLst>
-</file>
-
-<file path=ppt/tags/tag28.xml><?xml version="1.0" encoding="utf-8"?>
-<p:tagLst xmlns:a="http://schemas.openxmlformats.org/drawingml/2006/main" xmlns:r="http://schemas.openxmlformats.org/officeDocument/2006/relationships" xmlns:p="http://schemas.openxmlformats.org/presentationml/2006/main">
-  <p:tag name="_INSTRUCTOR VIEW19C14C36-AC8E-43BC-9DB6-C2AAF774C7DC|PANE__TAG" val="_"/>
-</p:tagLst>
-</file>
-
-<file path=ppt/tags/tag29.xml><?xml version="1.0" encoding="utf-8"?>
-<p:tagLst xmlns:a="http://schemas.openxmlformats.org/drawingml/2006/main" xmlns:r="http://schemas.openxmlformats.org/officeDocument/2006/relationships" xmlns:p="http://schemas.openxmlformats.org/presentationml/2006/main">
-  <p:tag name="_INSTRUCTOR VIEW19C14C36-AC8E-43BC-9DB6-C2AAF774C7DC|PANE__TAG" val="_"/>
-</p:tagLst>
-</file>
-
 <file path=ppt/tags/tag3.xml><?xml version="1.0" encoding="utf-8"?>
-<p:tagLst xmlns:a="http://schemas.openxmlformats.org/drawingml/2006/main" xmlns:r="http://schemas.openxmlformats.org/officeDocument/2006/relationships" xmlns:p="http://schemas.openxmlformats.org/presentationml/2006/main">
-  <p:tag name="_INSTRUCTOR VIEW19C14C36-AC8E-43BC-9DB6-C2AAF774C7DC|PANE__TAG" val="_"/>
-</p:tagLst>
-</file>
-
-<file path=ppt/tags/tag30.xml><?xml version="1.0" encoding="utf-8"?>
-<p:tagLst xmlns:a="http://schemas.openxmlformats.org/drawingml/2006/main" xmlns:r="http://schemas.openxmlformats.org/officeDocument/2006/relationships" xmlns:p="http://schemas.openxmlformats.org/presentationml/2006/main">
-  <p:tag name="_INSTRUCTOR VIEW19C14C36-AC8E-43BC-9DB6-C2AAF774C7DC|PANE__TAG" val="_"/>
-</p:tagLst>
-</file>
-
-<file path=ppt/tags/tag31.xml><?xml version="1.0" encoding="utf-8"?>
-<p:tagLst xmlns:a="http://schemas.openxmlformats.org/drawingml/2006/main" xmlns:r="http://schemas.openxmlformats.org/officeDocument/2006/relationships" xmlns:p="http://schemas.openxmlformats.org/presentationml/2006/main">
-  <p:tag name="_INSTRUCTOR VIEW19C14C36-AC8E-43BC-9DB6-C2AAF774C7DC|PANE__TAG" val="_"/>
-</p:tagLst>
-</file>
-
-<file path=ppt/tags/tag32.xml><?xml version="1.0" encoding="utf-8"?>
-<p:tagLst xmlns:a="http://schemas.openxmlformats.org/drawingml/2006/main" xmlns:r="http://schemas.openxmlformats.org/officeDocument/2006/relationships" xmlns:p="http://schemas.openxmlformats.org/presentationml/2006/main">
-  <p:tag name="_INSTRUCTOR VIEW19C14C36-AC8E-43BC-9DB6-C2AAF774C7DC|PANE__TAG" val="_"/>
-</p:tagLst>
-</file>
-
-<file path=ppt/tags/tag33.xml><?xml version="1.0" encoding="utf-8"?>
-<p:tagLst xmlns:a="http://schemas.openxmlformats.org/drawingml/2006/main" xmlns:r="http://schemas.openxmlformats.org/officeDocument/2006/relationships" xmlns:p="http://schemas.openxmlformats.org/presentationml/2006/main">
-  <p:tag name="_INSTRUCTOR VIEW19C14C36-AC8E-43BC-9DB6-C2AAF774C7DC|PANE__TAG" val="_"/>
-</p:tagLst>
-</file>
-
-<file path=ppt/tags/tag34.xml><?xml version="1.0" encoding="utf-8"?>
-<p:tagLst xmlns:a="http://schemas.openxmlformats.org/drawingml/2006/main" xmlns:r="http://schemas.openxmlformats.org/officeDocument/2006/relationships" xmlns:p="http://schemas.openxmlformats.org/presentationml/2006/main">
-  <p:tag name="_INSTRUCTOR VIEW19C14C36-AC8E-43BC-9DB6-C2AAF774C7DC|PANE__TAG" val="_"/>
-</p:tagLst>
-</file>
-
-<file path=ppt/tags/tag35.xml><?xml version="1.0" encoding="utf-8"?>
-<p:tagLst xmlns:a="http://schemas.openxmlformats.org/drawingml/2006/main" xmlns:r="http://schemas.openxmlformats.org/officeDocument/2006/relationships" xmlns:p="http://schemas.openxmlformats.org/presentationml/2006/main">
-  <p:tag name="_INSTRUCTOR VIEW19C14C36-AC8E-43BC-9DB6-C2AAF774C7DC|PANE__TAG" val="_"/>
-</p:tagLst>
-</file>
-
-<file path=ppt/tags/tag36.xml><?xml version="1.0" encoding="utf-8"?>
-<p:tagLst xmlns:a="http://schemas.openxmlformats.org/drawingml/2006/main" xmlns:r="http://schemas.openxmlformats.org/officeDocument/2006/relationships" xmlns:p="http://schemas.openxmlformats.org/presentationml/2006/main">
-  <p:tag name="_INSTRUCTOR VIEW19C14C36-AC8E-43BC-9DB6-C2AAF774C7DC|PANE__TAG" val="_"/>
-</p:tagLst>
-</file>
-
-<file path=ppt/tags/tag37.xml><?xml version="1.0" encoding="utf-8"?>
 <p:tagLst xmlns:a="http://schemas.openxmlformats.org/drawingml/2006/main" xmlns:r="http://schemas.openxmlformats.org/officeDocument/2006/relationships" xmlns:p="http://schemas.openxmlformats.org/presentationml/2006/main">
   <p:tag name="_INSTRUCTOR VIEW19C14C36-AC8E-43BC-9DB6-C2AAF774C7DC|PANE__TAG" val="_"/>
 </p:tagLst>
@@ -18808,18 +14984,6 @@
 </file>
 
 <file path=ppt/tags/tag7.xml><?xml version="1.0" encoding="utf-8"?>
-<p:tagLst xmlns:a="http://schemas.openxmlformats.org/drawingml/2006/main" xmlns:r="http://schemas.openxmlformats.org/officeDocument/2006/relationships" xmlns:p="http://schemas.openxmlformats.org/presentationml/2006/main">
-  <p:tag name="_INSTRUCTOR VIEW19C14C36-AC8E-43BC-9DB6-C2AAF774C7DC|PANE__TAG" val="_"/>
-</p:tagLst>
-</file>
-
-<file path=ppt/tags/tag8.xml><?xml version="1.0" encoding="utf-8"?>
-<p:tagLst xmlns:a="http://schemas.openxmlformats.org/drawingml/2006/main" xmlns:r="http://schemas.openxmlformats.org/officeDocument/2006/relationships" xmlns:p="http://schemas.openxmlformats.org/presentationml/2006/main">
-  <p:tag name="_INSTRUCTOR VIEW19C14C36-AC8E-43BC-9DB6-C2AAF774C7DC|PANE__TAG" val="_"/>
-</p:tagLst>
-</file>
-
-<file path=ppt/tags/tag9.xml><?xml version="1.0" encoding="utf-8"?>
 <p:tagLst xmlns:a="http://schemas.openxmlformats.org/drawingml/2006/main" xmlns:r="http://schemas.openxmlformats.org/officeDocument/2006/relationships" xmlns:p="http://schemas.openxmlformats.org/presentationml/2006/main">
   <p:tag name="_INSTRUCTOR VIEW19C14C36-AC8E-43BC-9DB6-C2AAF774C7DC|PANE__TAG" val="_"/>
 </p:tagLst>

--- a/slides/00-DailyAnnouncements.pptx
+++ b/slides/00-DailyAnnouncements.pptx
@@ -5,12 +5,13 @@
     <p:sldMasterId id="2147484006" r:id="rId1"/>
   </p:sldMasterIdLst>
   <p:notesMasterIdLst>
-    <p:notesMasterId r:id="rId5"/>
+    <p:notesMasterId r:id="rId6"/>
   </p:notesMasterIdLst>
   <p:sldIdLst>
     <p:sldId id="256" r:id="rId2"/>
     <p:sldId id="505" r:id="rId3"/>
-    <p:sldId id="515" r:id="rId4"/>
+    <p:sldId id="516" r:id="rId4"/>
+    <p:sldId id="515" r:id="rId5"/>
   </p:sldIdLst>
   <p:sldSz cx="12192000" cy="6858000"/>
   <p:notesSz cx="6858000" cy="9144000"/>
@@ -199,7 +200,7 @@
           <a:p>
             <a:fld id="{C5B45307-6ED4-B142-BD64-10F739779302}" type="datetimeFigureOut">
               <a:rPr lang="en-US" smtClean="0"/>
-              <a:t>8/27/26</a:t>
+              <a:t>8/31/26</a:t>
             </a:fld>
             <a:endParaRPr lang="en-US"/>
           </a:p>
@@ -607,7 +608,7 @@
           <a:noFill/>
           <a:extLst>
             <a:ext uri="{909E8E84-426E-40dd-AFC4-6F175D3DCCD1}">
-              <a14:hiddenFill xmlns="" xmlns:a14="http://schemas.microsoft.com/office/drawing/2010/main">
+              <a14:hiddenFill xmlns:a14="http://schemas.microsoft.com/office/drawing/2010/main" xmlns="">
                 <a:solidFill>
                   <a:srgbClr val="FFFFFF"/>
                 </a:solidFill>
@@ -666,7 +667,7 @@
             </a:ln>
             <a:extLst>
               <a:ext uri="{91240B29-F687-4f45-9708-019B960494DF}">
-                <a14:hiddenLine xmlns="" xmlns:a14="http://schemas.microsoft.com/office/drawing/2010/main" w="9525">
+                <a14:hiddenLine xmlns:a14="http://schemas.microsoft.com/office/drawing/2010/main" xmlns="" w="9525">
                   <a:solidFill>
                     <a:srgbClr val="000000"/>
                   </a:solidFill>
@@ -756,7 +757,7 @@
             </a:ln>
             <a:extLst>
               <a:ext uri="{91240B29-F687-4f45-9708-019B960494DF}">
-                <a14:hiddenLine xmlns="" xmlns:a14="http://schemas.microsoft.com/office/drawing/2010/main" w="9525">
+                <a14:hiddenLine xmlns:a14="http://schemas.microsoft.com/office/drawing/2010/main" xmlns="" w="9525">
                   <a:solidFill>
                     <a:srgbClr val="000000"/>
                   </a:solidFill>
@@ -846,7 +847,7 @@
             </a:ln>
             <a:extLst>
               <a:ext uri="{91240B29-F687-4f45-9708-019B960494DF}">
-                <a14:hiddenLine xmlns="" xmlns:a14="http://schemas.microsoft.com/office/drawing/2010/main" w="9525">
+                <a14:hiddenLine xmlns:a14="http://schemas.microsoft.com/office/drawing/2010/main" xmlns="" w="9525">
                   <a:solidFill>
                     <a:srgbClr val="000000"/>
                   </a:solidFill>
@@ -880,7 +881,7 @@
             </a:ln>
             <a:extLst>
               <a:ext uri="{91240B29-F687-4f45-9708-019B960494DF}">
-                <a14:hiddenLine xmlns="" xmlns:a14="http://schemas.microsoft.com/office/drawing/2010/main" w="9525">
+                <a14:hiddenLine xmlns:a14="http://schemas.microsoft.com/office/drawing/2010/main" xmlns="" w="9525">
                   <a:solidFill>
                     <a:srgbClr val="000000"/>
                   </a:solidFill>
@@ -970,7 +971,7 @@
             </a:ln>
             <a:extLst>
               <a:ext uri="{91240B29-F687-4f45-9708-019B960494DF}">
-                <a14:hiddenLine xmlns="" xmlns:a14="http://schemas.microsoft.com/office/drawing/2010/main" w="9525">
+                <a14:hiddenLine xmlns:a14="http://schemas.microsoft.com/office/drawing/2010/main" xmlns="" w="9525">
                   <a:solidFill>
                     <a:srgbClr val="000000"/>
                   </a:solidFill>
@@ -1032,7 +1033,7 @@
             </a:ln>
             <a:extLst>
               <a:ext uri="{91240B29-F687-4f45-9708-019B960494DF}">
-                <a14:hiddenLine xmlns="" xmlns:a14="http://schemas.microsoft.com/office/drawing/2010/main" w="9525">
+                <a14:hiddenLine xmlns:a14="http://schemas.microsoft.com/office/drawing/2010/main" xmlns="" w="9525">
                   <a:solidFill>
                     <a:srgbClr val="000000"/>
                   </a:solidFill>
@@ -1094,7 +1095,7 @@
             </a:ln>
             <a:extLst>
               <a:ext uri="{91240B29-F687-4f45-9708-019B960494DF}">
-                <a14:hiddenLine xmlns="" xmlns:a14="http://schemas.microsoft.com/office/drawing/2010/main" w="9525">
+                <a14:hiddenLine xmlns:a14="http://schemas.microsoft.com/office/drawing/2010/main" xmlns="" w="9525">
                   <a:solidFill>
                     <a:srgbClr val="000000"/>
                   </a:solidFill>
@@ -1184,7 +1185,7 @@
             </a:ln>
             <a:extLst>
               <a:ext uri="{91240B29-F687-4f45-9708-019B960494DF}">
-                <a14:hiddenLine xmlns="" xmlns:a14="http://schemas.microsoft.com/office/drawing/2010/main" w="9525">
+                <a14:hiddenLine xmlns:a14="http://schemas.microsoft.com/office/drawing/2010/main" xmlns="" w="9525">
                   <a:solidFill>
                     <a:srgbClr val="000000"/>
                   </a:solidFill>
@@ -1246,7 +1247,7 @@
             </a:ln>
             <a:extLst>
               <a:ext uri="{91240B29-F687-4f45-9708-019B960494DF}">
-                <a14:hiddenLine xmlns="" xmlns:a14="http://schemas.microsoft.com/office/drawing/2010/main" w="9525">
+                <a14:hiddenLine xmlns:a14="http://schemas.microsoft.com/office/drawing/2010/main" xmlns="" w="9525">
                   <a:solidFill>
                     <a:srgbClr val="000000"/>
                   </a:solidFill>
@@ -1308,7 +1309,7 @@
             </a:ln>
             <a:extLst>
               <a:ext uri="{91240B29-F687-4f45-9708-019B960494DF}">
-                <a14:hiddenLine xmlns="" xmlns:a14="http://schemas.microsoft.com/office/drawing/2010/main" w="9525">
+                <a14:hiddenLine xmlns:a14="http://schemas.microsoft.com/office/drawing/2010/main" xmlns="" w="9525">
                   <a:solidFill>
                     <a:srgbClr val="000000"/>
                   </a:solidFill>
@@ -1398,7 +1399,7 @@
             </a:ln>
             <a:extLst>
               <a:ext uri="{91240B29-F687-4f45-9708-019B960494DF}">
-                <a14:hiddenLine xmlns="" xmlns:a14="http://schemas.microsoft.com/office/drawing/2010/main" w="9525">
+                <a14:hiddenLine xmlns:a14="http://schemas.microsoft.com/office/drawing/2010/main" xmlns="" w="9525">
                   <a:solidFill>
                     <a:srgbClr val="000000"/>
                   </a:solidFill>
@@ -1488,7 +1489,7 @@
             </a:ln>
             <a:extLst>
               <a:ext uri="{91240B29-F687-4f45-9708-019B960494DF}">
-                <a14:hiddenLine xmlns="" xmlns:a14="http://schemas.microsoft.com/office/drawing/2010/main" w="9525">
+                <a14:hiddenLine xmlns:a14="http://schemas.microsoft.com/office/drawing/2010/main" xmlns="" w="9525">
                   <a:solidFill>
                     <a:srgbClr val="000000"/>
                   </a:solidFill>
@@ -1550,7 +1551,7 @@
             </a:ln>
             <a:extLst>
               <a:ext uri="{91240B29-F687-4f45-9708-019B960494DF}">
-                <a14:hiddenLine xmlns="" xmlns:a14="http://schemas.microsoft.com/office/drawing/2010/main" w="9525">
+                <a14:hiddenLine xmlns:a14="http://schemas.microsoft.com/office/drawing/2010/main" xmlns="" w="9525">
                   <a:solidFill>
                     <a:srgbClr val="000000"/>
                   </a:solidFill>
@@ -1660,7 +1661,7 @@
             </a:ln>
             <a:extLst>
               <a:ext uri="{91240B29-F687-4f45-9708-019B960494DF}">
-                <a14:hiddenLine xmlns="" xmlns:a14="http://schemas.microsoft.com/office/drawing/2010/main" w="9525">
+                <a14:hiddenLine xmlns:a14="http://schemas.microsoft.com/office/drawing/2010/main" xmlns="" w="9525">
                   <a:solidFill>
                     <a:srgbClr val="000000"/>
                   </a:solidFill>
@@ -1722,7 +1723,7 @@
             </a:ln>
             <a:extLst>
               <a:ext uri="{91240B29-F687-4f45-9708-019B960494DF}">
-                <a14:hiddenLine xmlns="" xmlns:a14="http://schemas.microsoft.com/office/drawing/2010/main" w="9525">
+                <a14:hiddenLine xmlns:a14="http://schemas.microsoft.com/office/drawing/2010/main" xmlns="" w="9525">
                   <a:solidFill>
                     <a:srgbClr val="000000"/>
                   </a:solidFill>
@@ -1812,7 +1813,7 @@
             </a:ln>
             <a:extLst>
               <a:ext uri="{91240B29-F687-4f45-9708-019B960494DF}">
-                <a14:hiddenLine xmlns="" xmlns:a14="http://schemas.microsoft.com/office/drawing/2010/main" w="9525">
+                <a14:hiddenLine xmlns:a14="http://schemas.microsoft.com/office/drawing/2010/main" xmlns="" w="9525">
                   <a:solidFill>
                     <a:srgbClr val="000000"/>
                   </a:solidFill>
@@ -1902,7 +1903,7 @@
             </a:ln>
             <a:extLst>
               <a:ext uri="{91240B29-F687-4f45-9708-019B960494DF}">
-                <a14:hiddenLine xmlns="" xmlns:a14="http://schemas.microsoft.com/office/drawing/2010/main" w="9525">
+                <a14:hiddenLine xmlns:a14="http://schemas.microsoft.com/office/drawing/2010/main" xmlns="" w="9525">
                   <a:solidFill>
                     <a:srgbClr val="000000"/>
                   </a:solidFill>
@@ -1964,7 +1965,7 @@
             </a:ln>
             <a:extLst>
               <a:ext uri="{91240B29-F687-4f45-9708-019B960494DF}">
-                <a14:hiddenLine xmlns="" xmlns:a14="http://schemas.microsoft.com/office/drawing/2010/main" w="9525">
+                <a14:hiddenLine xmlns:a14="http://schemas.microsoft.com/office/drawing/2010/main" xmlns="" w="9525">
                   <a:solidFill>
                     <a:srgbClr val="000000"/>
                   </a:solidFill>
@@ -2054,7 +2055,7 @@
             </a:ln>
             <a:extLst>
               <a:ext uri="{91240B29-F687-4f45-9708-019B960494DF}">
-                <a14:hiddenLine xmlns="" xmlns:a14="http://schemas.microsoft.com/office/drawing/2010/main" w="9525">
+                <a14:hiddenLine xmlns:a14="http://schemas.microsoft.com/office/drawing/2010/main" xmlns="" w="9525">
                   <a:solidFill>
                     <a:srgbClr val="000000"/>
                   </a:solidFill>
@@ -2144,7 +2145,7 @@
             </a:ln>
             <a:extLst>
               <a:ext uri="{91240B29-F687-4f45-9708-019B960494DF}">
-                <a14:hiddenLine xmlns="" xmlns:a14="http://schemas.microsoft.com/office/drawing/2010/main" w="9525">
+                <a14:hiddenLine xmlns:a14="http://schemas.microsoft.com/office/drawing/2010/main" xmlns="" w="9525">
                   <a:solidFill>
                     <a:srgbClr val="000000"/>
                   </a:solidFill>
@@ -2200,7 +2201,7 @@
             </a:ln>
             <a:extLst>
               <a:ext uri="{91240B29-F687-4f45-9708-019B960494DF}">
-                <a14:hiddenLine xmlns="" xmlns:a14="http://schemas.microsoft.com/office/drawing/2010/main" w="9525">
+                <a14:hiddenLine xmlns:a14="http://schemas.microsoft.com/office/drawing/2010/main" xmlns="" w="9525">
                   <a:solidFill>
                     <a:srgbClr val="000000"/>
                   </a:solidFill>
@@ -2290,7 +2291,7 @@
             </a:ln>
             <a:extLst>
               <a:ext uri="{91240B29-F687-4f45-9708-019B960494DF}">
-                <a14:hiddenLine xmlns="" xmlns:a14="http://schemas.microsoft.com/office/drawing/2010/main" w="9525">
+                <a14:hiddenLine xmlns:a14="http://schemas.microsoft.com/office/drawing/2010/main" xmlns="" w="9525">
                   <a:solidFill>
                     <a:srgbClr val="000000"/>
                   </a:solidFill>
@@ -2346,7 +2347,7 @@
             </a:ln>
             <a:extLst>
               <a:ext uri="{91240B29-F687-4f45-9708-019B960494DF}">
-                <a14:hiddenLine xmlns="" xmlns:a14="http://schemas.microsoft.com/office/drawing/2010/main" w="9525">
+                <a14:hiddenLine xmlns:a14="http://schemas.microsoft.com/office/drawing/2010/main" xmlns="" w="9525">
                   <a:solidFill>
                     <a:srgbClr val="000000"/>
                   </a:solidFill>
@@ -2436,7 +2437,7 @@
             </a:ln>
             <a:extLst>
               <a:ext uri="{91240B29-F687-4f45-9708-019B960494DF}">
-                <a14:hiddenLine xmlns="" xmlns:a14="http://schemas.microsoft.com/office/drawing/2010/main" w="9525">
+                <a14:hiddenLine xmlns:a14="http://schemas.microsoft.com/office/drawing/2010/main" xmlns="" w="9525">
                   <a:solidFill>
                     <a:srgbClr val="000000"/>
                   </a:solidFill>
@@ -2504,7 +2505,7 @@
             </a:ln>
             <a:extLst>
               <a:ext uri="{91240B29-F687-4f45-9708-019B960494DF}">
-                <a14:hiddenLine xmlns="" xmlns:a14="http://schemas.microsoft.com/office/drawing/2010/main" w="9525">
+                <a14:hiddenLine xmlns:a14="http://schemas.microsoft.com/office/drawing/2010/main" xmlns="" w="9525">
                   <a:solidFill>
                     <a:srgbClr val="000000"/>
                   </a:solidFill>
@@ -2594,7 +2595,7 @@
             </a:ln>
             <a:extLst>
               <a:ext uri="{91240B29-F687-4f45-9708-019B960494DF}">
-                <a14:hiddenLine xmlns="" xmlns:a14="http://schemas.microsoft.com/office/drawing/2010/main" w="9525">
+                <a14:hiddenLine xmlns:a14="http://schemas.microsoft.com/office/drawing/2010/main" xmlns="" w="9525">
                   <a:solidFill>
                     <a:srgbClr val="000000"/>
                   </a:solidFill>
@@ -2662,7 +2663,7 @@
             </a:ln>
             <a:extLst>
               <a:ext uri="{91240B29-F687-4f45-9708-019B960494DF}">
-                <a14:hiddenLine xmlns="" xmlns:a14="http://schemas.microsoft.com/office/drawing/2010/main" w="9525">
+                <a14:hiddenLine xmlns:a14="http://schemas.microsoft.com/office/drawing/2010/main" xmlns="" w="9525">
                   <a:solidFill>
                     <a:srgbClr val="000000"/>
                   </a:solidFill>
@@ -2752,7 +2753,7 @@
             </a:ln>
             <a:extLst>
               <a:ext uri="{91240B29-F687-4f45-9708-019B960494DF}">
-                <a14:hiddenLine xmlns="" xmlns:a14="http://schemas.microsoft.com/office/drawing/2010/main" w="9525">
+                <a14:hiddenLine xmlns:a14="http://schemas.microsoft.com/office/drawing/2010/main" xmlns="" w="9525">
                   <a:solidFill>
                     <a:srgbClr val="000000"/>
                   </a:solidFill>
@@ -2786,7 +2787,7 @@
             </a:ln>
             <a:extLst>
               <a:ext uri="{91240B29-F687-4f45-9708-019B960494DF}">
-                <a14:hiddenLine xmlns="" xmlns:a14="http://schemas.microsoft.com/office/drawing/2010/main" w="9525">
+                <a14:hiddenLine xmlns:a14="http://schemas.microsoft.com/office/drawing/2010/main" xmlns="" w="9525">
                   <a:solidFill>
                     <a:srgbClr val="000000"/>
                   </a:solidFill>
@@ -2876,7 +2877,7 @@
             </a:ln>
             <a:extLst>
               <a:ext uri="{91240B29-F687-4f45-9708-019B960494DF}">
-                <a14:hiddenLine xmlns="" xmlns:a14="http://schemas.microsoft.com/office/drawing/2010/main" w="9525">
+                <a14:hiddenLine xmlns:a14="http://schemas.microsoft.com/office/drawing/2010/main" xmlns="" w="9525">
                   <a:solidFill>
                     <a:srgbClr val="000000"/>
                   </a:solidFill>
@@ -2938,7 +2939,7 @@
             </a:ln>
             <a:extLst>
               <a:ext uri="{91240B29-F687-4f45-9708-019B960494DF}">
-                <a14:hiddenLine xmlns="" xmlns:a14="http://schemas.microsoft.com/office/drawing/2010/main" w="9525">
+                <a14:hiddenLine xmlns:a14="http://schemas.microsoft.com/office/drawing/2010/main" xmlns="" w="9525">
                   <a:solidFill>
                     <a:srgbClr val="000000"/>
                   </a:solidFill>
@@ -3000,7 +3001,7 @@
             </a:ln>
             <a:extLst>
               <a:ext uri="{91240B29-F687-4f45-9708-019B960494DF}">
-                <a14:hiddenLine xmlns="" xmlns:a14="http://schemas.microsoft.com/office/drawing/2010/main" w="9525">
+                <a14:hiddenLine xmlns:a14="http://schemas.microsoft.com/office/drawing/2010/main" xmlns="" w="9525">
                   <a:solidFill>
                     <a:srgbClr val="000000"/>
                   </a:solidFill>
@@ -3090,7 +3091,7 @@
             </a:ln>
             <a:extLst>
               <a:ext uri="{91240B29-F687-4f45-9708-019B960494DF}">
-                <a14:hiddenLine xmlns="" xmlns:a14="http://schemas.microsoft.com/office/drawing/2010/main" w="9525">
+                <a14:hiddenLine xmlns:a14="http://schemas.microsoft.com/office/drawing/2010/main" xmlns="" w="9525">
                   <a:solidFill>
                     <a:srgbClr val="000000"/>
                   </a:solidFill>
@@ -3158,7 +3159,7 @@
             </a:ln>
             <a:extLst>
               <a:ext uri="{91240B29-F687-4f45-9708-019B960494DF}">
-                <a14:hiddenLine xmlns="" xmlns:a14="http://schemas.microsoft.com/office/drawing/2010/main" w="9525">
+                <a14:hiddenLine xmlns:a14="http://schemas.microsoft.com/office/drawing/2010/main" xmlns="" w="9525">
                   <a:solidFill>
                     <a:srgbClr val="000000"/>
                   </a:solidFill>
@@ -3220,7 +3221,7 @@
             </a:ln>
             <a:extLst>
               <a:ext uri="{91240B29-F687-4f45-9708-019B960494DF}">
-                <a14:hiddenLine xmlns="" xmlns:a14="http://schemas.microsoft.com/office/drawing/2010/main" w="9525">
+                <a14:hiddenLine xmlns:a14="http://schemas.microsoft.com/office/drawing/2010/main" xmlns="" w="9525">
                   <a:solidFill>
                     <a:srgbClr val="000000"/>
                   </a:solidFill>
@@ -3310,7 +3311,7 @@
             </a:ln>
             <a:extLst>
               <a:ext uri="{91240B29-F687-4f45-9708-019B960494DF}">
-                <a14:hiddenLine xmlns="" xmlns:a14="http://schemas.microsoft.com/office/drawing/2010/main" w="9525">
+                <a14:hiddenLine xmlns:a14="http://schemas.microsoft.com/office/drawing/2010/main" xmlns="" w="9525">
                   <a:solidFill>
                     <a:srgbClr val="000000"/>
                   </a:solidFill>
@@ -3372,7 +3373,7 @@
             </a:ln>
             <a:extLst>
               <a:ext uri="{91240B29-F687-4f45-9708-019B960494DF}">
-                <a14:hiddenLine xmlns="" xmlns:a14="http://schemas.microsoft.com/office/drawing/2010/main" w="9525">
+                <a14:hiddenLine xmlns:a14="http://schemas.microsoft.com/office/drawing/2010/main" xmlns="" w="9525">
                   <a:solidFill>
                     <a:srgbClr val="000000"/>
                   </a:solidFill>
@@ -3462,7 +3463,7 @@
             </a:ln>
             <a:extLst>
               <a:ext uri="{91240B29-F687-4f45-9708-019B960494DF}">
-                <a14:hiddenLine xmlns="" xmlns:a14="http://schemas.microsoft.com/office/drawing/2010/main" w="9525">
+                <a14:hiddenLine xmlns:a14="http://schemas.microsoft.com/office/drawing/2010/main" xmlns="" w="9525">
                   <a:solidFill>
                     <a:srgbClr val="000000"/>
                   </a:solidFill>
@@ -3524,7 +3525,7 @@
             </a:ln>
             <a:extLst>
               <a:ext uri="{91240B29-F687-4f45-9708-019B960494DF}">
-                <a14:hiddenLine xmlns="" xmlns:a14="http://schemas.microsoft.com/office/drawing/2010/main" w="9525">
+                <a14:hiddenLine xmlns:a14="http://schemas.microsoft.com/office/drawing/2010/main" xmlns="" w="9525">
                   <a:solidFill>
                     <a:srgbClr val="000000"/>
                   </a:solidFill>
@@ -3614,7 +3615,7 @@
             </a:ln>
             <a:extLst>
               <a:ext uri="{91240B29-F687-4f45-9708-019B960494DF}">
-                <a14:hiddenLine xmlns="" xmlns:a14="http://schemas.microsoft.com/office/drawing/2010/main" w="9525">
+                <a14:hiddenLine xmlns:a14="http://schemas.microsoft.com/office/drawing/2010/main" xmlns="" w="9525">
                   <a:solidFill>
                     <a:srgbClr val="000000"/>
                   </a:solidFill>
@@ -3648,7 +3649,7 @@
             </a:ln>
             <a:extLst>
               <a:ext uri="{91240B29-F687-4f45-9708-019B960494DF}">
-                <a14:hiddenLine xmlns="" xmlns:a14="http://schemas.microsoft.com/office/drawing/2010/main" w="9525">
+                <a14:hiddenLine xmlns:a14="http://schemas.microsoft.com/office/drawing/2010/main" xmlns="" w="9525">
                   <a:solidFill>
                     <a:srgbClr val="000000"/>
                   </a:solidFill>
@@ -3713,7 +3714,7 @@
             </a:ln>
             <a:extLst>
               <a:ext uri="{91240B29-F687-4f45-9708-019B960494DF}">
-                <a14:hiddenLine xmlns="" xmlns:a14="http://schemas.microsoft.com/office/drawing/2010/main" w="9525">
+                <a14:hiddenLine xmlns:a14="http://schemas.microsoft.com/office/drawing/2010/main" xmlns="" w="9525">
                   <a:solidFill>
                     <a:srgbClr val="000000"/>
                   </a:solidFill>
@@ -3803,7 +3804,7 @@
             </a:ln>
             <a:extLst>
               <a:ext uri="{91240B29-F687-4f45-9708-019B960494DF}">
-                <a14:hiddenLine xmlns="" xmlns:a14="http://schemas.microsoft.com/office/drawing/2010/main" w="9525">
+                <a14:hiddenLine xmlns:a14="http://schemas.microsoft.com/office/drawing/2010/main" xmlns="" w="9525">
                   <a:solidFill>
                     <a:srgbClr val="000000"/>
                   </a:solidFill>
@@ -3865,7 +3866,7 @@
             </a:ln>
             <a:extLst>
               <a:ext uri="{91240B29-F687-4f45-9708-019B960494DF}">
-                <a14:hiddenLine xmlns="" xmlns:a14="http://schemas.microsoft.com/office/drawing/2010/main" w="9525">
+                <a14:hiddenLine xmlns:a14="http://schemas.microsoft.com/office/drawing/2010/main" xmlns="" w="9525">
                   <a:solidFill>
                     <a:srgbClr val="000000"/>
                   </a:solidFill>
@@ -3955,7 +3956,7 @@
             </a:ln>
             <a:extLst>
               <a:ext uri="{91240B29-F687-4f45-9708-019B960494DF}">
-                <a14:hiddenLine xmlns="" xmlns:a14="http://schemas.microsoft.com/office/drawing/2010/main" w="9525">
+                <a14:hiddenLine xmlns:a14="http://schemas.microsoft.com/office/drawing/2010/main" xmlns="" w="9525">
                   <a:solidFill>
                     <a:srgbClr val="000000"/>
                   </a:solidFill>
@@ -4045,7 +4046,7 @@
             </a:ln>
             <a:extLst>
               <a:ext uri="{91240B29-F687-4f45-9708-019B960494DF}">
-                <a14:hiddenLine xmlns="" xmlns:a14="http://schemas.microsoft.com/office/drawing/2010/main" w="9525">
+                <a14:hiddenLine xmlns:a14="http://schemas.microsoft.com/office/drawing/2010/main" xmlns="" w="9525">
                   <a:solidFill>
                     <a:srgbClr val="000000"/>
                   </a:solidFill>
@@ -4110,7 +4111,7 @@
             </a:ln>
             <a:extLst>
               <a:ext uri="{91240B29-F687-4f45-9708-019B960494DF}">
-                <a14:hiddenLine xmlns="" xmlns:a14="http://schemas.microsoft.com/office/drawing/2010/main" w="9525">
+                <a14:hiddenLine xmlns:a14="http://schemas.microsoft.com/office/drawing/2010/main" xmlns="" w="9525">
                   <a:solidFill>
                     <a:srgbClr val="000000"/>
                   </a:solidFill>
@@ -4172,7 +4173,7 @@
             </a:ln>
             <a:extLst>
               <a:ext uri="{91240B29-F687-4f45-9708-019B960494DF}">
-                <a14:hiddenLine xmlns="" xmlns:a14="http://schemas.microsoft.com/office/drawing/2010/main" w="9525">
+                <a14:hiddenLine xmlns:a14="http://schemas.microsoft.com/office/drawing/2010/main" xmlns="" w="9525">
                   <a:solidFill>
                     <a:srgbClr val="000000"/>
                   </a:solidFill>
@@ -4262,7 +4263,7 @@
             </a:ln>
             <a:extLst>
               <a:ext uri="{91240B29-F687-4f45-9708-019B960494DF}">
-                <a14:hiddenLine xmlns="" xmlns:a14="http://schemas.microsoft.com/office/drawing/2010/main" w="9525">
+                <a14:hiddenLine xmlns:a14="http://schemas.microsoft.com/office/drawing/2010/main" xmlns="" w="9525">
                   <a:solidFill>
                     <a:srgbClr val="000000"/>
                   </a:solidFill>
@@ -4352,7 +4353,7 @@
             </a:ln>
             <a:extLst>
               <a:ext uri="{91240B29-F687-4f45-9708-019B960494DF}">
-                <a14:hiddenLine xmlns="" xmlns:a14="http://schemas.microsoft.com/office/drawing/2010/main" w="9525">
+                <a14:hiddenLine xmlns:a14="http://schemas.microsoft.com/office/drawing/2010/main" xmlns="" w="9525">
                   <a:solidFill>
                     <a:srgbClr val="000000"/>
                   </a:solidFill>
@@ -4414,7 +4415,7 @@
             </a:ln>
             <a:extLst>
               <a:ext uri="{91240B29-F687-4f45-9708-019B960494DF}">
-                <a14:hiddenLine xmlns="" xmlns:a14="http://schemas.microsoft.com/office/drawing/2010/main" w="9525">
+                <a14:hiddenLine xmlns:a14="http://schemas.microsoft.com/office/drawing/2010/main" xmlns="" w="9525">
                   <a:solidFill>
                     <a:srgbClr val="000000"/>
                   </a:solidFill>
@@ -4534,7 +4535,7 @@
             </a:ln>
             <a:extLst>
               <a:ext uri="{91240B29-F687-4f45-9708-019B960494DF}">
-                <a14:hiddenLine xmlns="" xmlns:a14="http://schemas.microsoft.com/office/drawing/2010/main" w="9525">
+                <a14:hiddenLine xmlns:a14="http://schemas.microsoft.com/office/drawing/2010/main" xmlns="" w="9525">
                   <a:solidFill>
                     <a:srgbClr val="000000"/>
                   </a:solidFill>
@@ -4602,7 +4603,7 @@
             </a:ln>
             <a:extLst>
               <a:ext uri="{91240B29-F687-4f45-9708-019B960494DF}">
-                <a14:hiddenLine xmlns="" xmlns:a14="http://schemas.microsoft.com/office/drawing/2010/main" w="9525">
+                <a14:hiddenLine xmlns:a14="http://schemas.microsoft.com/office/drawing/2010/main" xmlns="" w="9525">
                   <a:solidFill>
                     <a:srgbClr val="000000"/>
                   </a:solidFill>
@@ -4692,7 +4693,7 @@
             </a:ln>
             <a:extLst>
               <a:ext uri="{91240B29-F687-4f45-9708-019B960494DF}">
-                <a14:hiddenLine xmlns="" xmlns:a14="http://schemas.microsoft.com/office/drawing/2010/main" w="9525">
+                <a14:hiddenLine xmlns:a14="http://schemas.microsoft.com/office/drawing/2010/main" xmlns="" w="9525">
                   <a:solidFill>
                     <a:srgbClr val="000000"/>
                   </a:solidFill>
@@ -4832,7 +4833,7 @@
           <a:p>
             <a:fld id="{4313F670-7F9A-774D-B73D-573401E44297}" type="datetime1">
               <a:rPr lang="en-US" smtClean="0"/>
-              <a:t>8/27/26</a:t>
+              <a:t>8/31/26</a:t>
             </a:fld>
             <a:endParaRPr lang="en-US"/>
           </a:p>
@@ -5099,7 +5100,7 @@
           <a:p>
             <a:fld id="{446F9669-A8A7-2D40-9D01-B35FC337AA30}" type="datetime1">
               <a:rPr lang="en-US" smtClean="0"/>
-              <a:t>8/27/26</a:t>
+              <a:t>8/31/26</a:t>
             </a:fld>
             <a:endParaRPr lang="en-US"/>
           </a:p>
@@ -5295,7 +5296,7 @@
           <a:p>
             <a:fld id="{FA76CF18-F41B-6B48-B3E5-599E9795C2C3}" type="datetime1">
               <a:rPr lang="en-US" smtClean="0"/>
-              <a:t>8/27/26</a:t>
+              <a:t>8/31/26</a:t>
             </a:fld>
             <a:endParaRPr lang="en-US"/>
           </a:p>
@@ -5558,7 +5559,7 @@
           <a:p>
             <a:fld id="{B9654854-6457-164F-A077-6B3035079B82}" type="datetime1">
               <a:rPr lang="en-US" smtClean="0"/>
-              <a:t>8/27/26</a:t>
+              <a:t>8/31/26</a:t>
             </a:fld>
             <a:endParaRPr lang="en-US"/>
           </a:p>
@@ -5992,7 +5993,7 @@
           <a:p>
             <a:fld id="{CE3DBFD7-E611-8C40-AC73-0C29FF63F0CD}" type="datetime1">
               <a:rPr lang="en-US" smtClean="0"/>
-              <a:t>8/27/26</a:t>
+              <a:t>8/31/26</a:t>
             </a:fld>
             <a:endParaRPr lang="en-US"/>
           </a:p>
@@ -6538,7 +6539,7 @@
           <a:p>
             <a:fld id="{C8B63B06-0493-2840-9F37-30C9412BBF17}" type="datetime1">
               <a:rPr lang="en-US" smtClean="0"/>
-              <a:t>8/27/26</a:t>
+              <a:t>8/31/26</a:t>
             </a:fld>
             <a:endParaRPr lang="en-US"/>
           </a:p>
@@ -7258,7 +7259,7 @@
           <a:p>
             <a:fld id="{72B5C0FA-8C46-E84D-B6D7-B673F2CA0A0E}" type="datetime1">
               <a:rPr lang="en-US" smtClean="0"/>
-              <a:t>8/27/26</a:t>
+              <a:t>8/31/26</a:t>
             </a:fld>
             <a:endParaRPr lang="en-US"/>
           </a:p>
@@ -7428,7 +7429,7 @@
           <a:p>
             <a:fld id="{60B9CDE1-97B4-BF46-B69C-B86855B18820}" type="datetime1">
               <a:rPr lang="en-US" smtClean="0"/>
-              <a:t>8/27/26</a:t>
+              <a:t>8/31/26</a:t>
             </a:fld>
             <a:endParaRPr lang="en-US"/>
           </a:p>
@@ -7608,7 +7609,7 @@
           <a:p>
             <a:fld id="{BE51D3A4-F9E5-FD49-AA87-B395F50451DC}" type="datetime1">
               <a:rPr lang="en-US" smtClean="0"/>
-              <a:t>8/27/26</a:t>
+              <a:t>8/31/26</a:t>
             </a:fld>
             <a:endParaRPr lang="en-US"/>
           </a:p>
@@ -7778,7 +7779,7 @@
           <a:p>
             <a:fld id="{880DFB37-B0AE-9449-85EC-14F9C83B6084}" type="datetime1">
               <a:rPr lang="en-US" smtClean="0"/>
-              <a:t>8/27/26</a:t>
+              <a:t>8/31/26</a:t>
             </a:fld>
             <a:endParaRPr lang="en-US"/>
           </a:p>
@@ -8028,7 +8029,7 @@
           <a:p>
             <a:fld id="{C939124A-616E-6944-A21A-1839F5DBE7BB}" type="datetime1">
               <a:rPr lang="en-US" smtClean="0"/>
-              <a:t>8/27/26</a:t>
+              <a:t>8/31/26</a:t>
             </a:fld>
             <a:endParaRPr lang="en-US"/>
           </a:p>
@@ -8260,7 +8261,7 @@
           <a:p>
             <a:fld id="{C6E9A026-D48C-FD43-8676-CD625DD5D84B}" type="datetime1">
               <a:rPr lang="en-US" smtClean="0"/>
-              <a:t>8/27/26</a:t>
+              <a:t>8/31/26</a:t>
             </a:fld>
             <a:endParaRPr lang="en-US"/>
           </a:p>
@@ -8646,7 +8647,7 @@
           <a:p>
             <a:fld id="{EA35111E-23A3-1440-99A3-C4C665908E3D}" type="datetime1">
               <a:rPr lang="en-US" smtClean="0"/>
-              <a:t>8/27/26</a:t>
+              <a:t>8/31/26</a:t>
             </a:fld>
             <a:endParaRPr lang="en-US"/>
           </a:p>
@@ -8769,7 +8770,7 @@
           <a:p>
             <a:fld id="{249983B9-88EF-D74B-BA6D-6A3BF17C2B38}" type="datetime1">
               <a:rPr lang="en-US" smtClean="0"/>
-              <a:t>8/27/26</a:t>
+              <a:t>8/31/26</a:t>
             </a:fld>
             <a:endParaRPr lang="en-US"/>
           </a:p>
@@ -8864,7 +8865,7 @@
           <a:p>
             <a:fld id="{E2A00AEF-B4EC-084A-8DB8-A225C7981CBB}" type="datetime1">
               <a:rPr lang="en-US" smtClean="0"/>
-              <a:t>8/27/26</a:t>
+              <a:t>8/31/26</a:t>
             </a:fld>
             <a:endParaRPr lang="en-US"/>
           </a:p>
@@ -9113,7 +9114,7 @@
           <a:p>
             <a:fld id="{97860299-21CD-A94A-A7B0-44E787F8D42C}" type="datetime1">
               <a:rPr lang="en-US" smtClean="0"/>
-              <a:t>8/27/26</a:t>
+              <a:t>8/31/26</a:t>
             </a:fld>
             <a:endParaRPr lang="en-US"/>
           </a:p>
@@ -9398,7 +9399,7 @@
           <a:p>
             <a:fld id="{3DFD19CF-4E62-D246-BA61-7B528271315F}" type="datetime1">
               <a:rPr lang="en-US" smtClean="0"/>
-              <a:t>8/27/26</a:t>
+              <a:t>8/31/26</a:t>
             </a:fld>
             <a:endParaRPr lang="en-US"/>
           </a:p>
@@ -9521,7 +9522,7 @@
           <a:noFill/>
           <a:extLst>
             <a:ext uri="{909E8E84-426E-40dd-AFC4-6F175D3DCCD1}">
-              <a14:hiddenFill xmlns="" xmlns:a14="http://schemas.microsoft.com/office/drawing/2010/main">
+              <a14:hiddenFill xmlns:a14="http://schemas.microsoft.com/office/drawing/2010/main" xmlns="">
                 <a:solidFill>
                   <a:srgbClr val="FFFFFF"/>
                 </a:solidFill>
@@ -9595,7 +9596,7 @@
               </a:ln>
               <a:extLst>
                 <a:ext uri="{91240B29-F687-4f45-9708-019B960494DF}">
-                  <a14:hiddenLine xmlns="" xmlns:a14="http://schemas.microsoft.com/office/drawing/2010/main" w="9525">
+                  <a14:hiddenLine xmlns:a14="http://schemas.microsoft.com/office/drawing/2010/main" xmlns="" w="9525">
                     <a:solidFill>
                       <a:srgbClr val="000000"/>
                     </a:solidFill>
@@ -9685,7 +9686,7 @@
               </a:ln>
               <a:extLst>
                 <a:ext uri="{91240B29-F687-4f45-9708-019B960494DF}">
-                  <a14:hiddenLine xmlns="" xmlns:a14="http://schemas.microsoft.com/office/drawing/2010/main" w="9525">
+                  <a14:hiddenLine xmlns:a14="http://schemas.microsoft.com/office/drawing/2010/main" xmlns="" w="9525">
                     <a:solidFill>
                       <a:srgbClr val="000000"/>
                     </a:solidFill>
@@ -9775,7 +9776,7 @@
               </a:ln>
               <a:extLst>
                 <a:ext uri="{91240B29-F687-4f45-9708-019B960494DF}">
-                  <a14:hiddenLine xmlns="" xmlns:a14="http://schemas.microsoft.com/office/drawing/2010/main" w="9525">
+                  <a14:hiddenLine xmlns:a14="http://schemas.microsoft.com/office/drawing/2010/main" xmlns="" w="9525">
                     <a:solidFill>
                       <a:srgbClr val="000000"/>
                     </a:solidFill>
@@ -9837,7 +9838,7 @@
               </a:ln>
               <a:extLst>
                 <a:ext uri="{91240B29-F687-4f45-9708-019B960494DF}">
-                  <a14:hiddenLine xmlns="" xmlns:a14="http://schemas.microsoft.com/office/drawing/2010/main" w="9525">
+                  <a14:hiddenLine xmlns:a14="http://schemas.microsoft.com/office/drawing/2010/main" xmlns="" w="9525">
                     <a:solidFill>
                       <a:srgbClr val="000000"/>
                     </a:solidFill>
@@ -9927,7 +9928,7 @@
               </a:ln>
               <a:extLst>
                 <a:ext uri="{91240B29-F687-4f45-9708-019B960494DF}">
-                  <a14:hiddenLine xmlns="" xmlns:a14="http://schemas.microsoft.com/office/drawing/2010/main" w="9525">
+                  <a14:hiddenLine xmlns:a14="http://schemas.microsoft.com/office/drawing/2010/main" xmlns="" w="9525">
                     <a:solidFill>
                       <a:srgbClr val="000000"/>
                     </a:solidFill>
@@ -9989,7 +9990,7 @@
               </a:ln>
               <a:extLst>
                 <a:ext uri="{91240B29-F687-4f45-9708-019B960494DF}">
-                  <a14:hiddenLine xmlns="" xmlns:a14="http://schemas.microsoft.com/office/drawing/2010/main" w="9525">
+                  <a14:hiddenLine xmlns:a14="http://schemas.microsoft.com/office/drawing/2010/main" xmlns="" w="9525">
                     <a:solidFill>
                       <a:srgbClr val="000000"/>
                     </a:solidFill>
@@ -10051,7 +10052,7 @@
               </a:ln>
               <a:extLst>
                 <a:ext uri="{91240B29-F687-4f45-9708-019B960494DF}">
-                  <a14:hiddenLine xmlns="" xmlns:a14="http://schemas.microsoft.com/office/drawing/2010/main" w="9525">
+                  <a14:hiddenLine xmlns:a14="http://schemas.microsoft.com/office/drawing/2010/main" xmlns="" w="9525">
                     <a:solidFill>
                       <a:srgbClr val="000000"/>
                     </a:solidFill>
@@ -10141,7 +10142,7 @@
               </a:ln>
               <a:extLst>
                 <a:ext uri="{91240B29-F687-4f45-9708-019B960494DF}">
-                  <a14:hiddenLine xmlns="" xmlns:a14="http://schemas.microsoft.com/office/drawing/2010/main" w="9525">
+                  <a14:hiddenLine xmlns:a14="http://schemas.microsoft.com/office/drawing/2010/main" xmlns="" w="9525">
                     <a:solidFill>
                       <a:srgbClr val="000000"/>
                     </a:solidFill>
@@ -10231,7 +10232,7 @@
               </a:ln>
               <a:extLst>
                 <a:ext uri="{91240B29-F687-4f45-9708-019B960494DF}">
-                  <a14:hiddenLine xmlns="" xmlns:a14="http://schemas.microsoft.com/office/drawing/2010/main" w="9525">
+                  <a14:hiddenLine xmlns:a14="http://schemas.microsoft.com/office/drawing/2010/main" xmlns="" w="9525">
                     <a:solidFill>
                       <a:srgbClr val="000000"/>
                     </a:solidFill>
@@ -10293,7 +10294,7 @@
               </a:ln>
               <a:extLst>
                 <a:ext uri="{91240B29-F687-4f45-9708-019B960494DF}">
-                  <a14:hiddenLine xmlns="" xmlns:a14="http://schemas.microsoft.com/office/drawing/2010/main" w="9525">
+                  <a14:hiddenLine xmlns:a14="http://schemas.microsoft.com/office/drawing/2010/main" xmlns="" w="9525">
                     <a:solidFill>
                       <a:srgbClr val="000000"/>
                     </a:solidFill>
@@ -10403,7 +10404,7 @@
               </a:ln>
               <a:extLst>
                 <a:ext uri="{91240B29-F687-4f45-9708-019B960494DF}">
-                  <a14:hiddenLine xmlns="" xmlns:a14="http://schemas.microsoft.com/office/drawing/2010/main" w="9525">
+                  <a14:hiddenLine xmlns:a14="http://schemas.microsoft.com/office/drawing/2010/main" xmlns="" w="9525">
                     <a:solidFill>
                       <a:srgbClr val="000000"/>
                     </a:solidFill>
@@ -10487,7 +10488,7 @@
               </a:ln>
               <a:extLst>
                 <a:ext uri="{91240B29-F687-4f45-9708-019B960494DF}">
-                  <a14:hiddenLine xmlns="" xmlns:a14="http://schemas.microsoft.com/office/drawing/2010/main" w="9525">
+                  <a14:hiddenLine xmlns:a14="http://schemas.microsoft.com/office/drawing/2010/main" xmlns="" w="9525">
                     <a:solidFill>
                       <a:srgbClr val="000000"/>
                     </a:solidFill>
@@ -10549,7 +10550,7 @@
               </a:ln>
               <a:extLst>
                 <a:ext uri="{91240B29-F687-4f45-9708-019B960494DF}">
-                  <a14:hiddenLine xmlns="" xmlns:a14="http://schemas.microsoft.com/office/drawing/2010/main" w="9525">
+                  <a14:hiddenLine xmlns:a14="http://schemas.microsoft.com/office/drawing/2010/main" xmlns="" w="9525">
                     <a:solidFill>
                       <a:srgbClr val="000000"/>
                     </a:solidFill>
@@ -10611,7 +10612,7 @@
               </a:ln>
               <a:extLst>
                 <a:ext uri="{91240B29-F687-4f45-9708-019B960494DF}">
-                  <a14:hiddenLine xmlns="" xmlns:a14="http://schemas.microsoft.com/office/drawing/2010/main" w="9525">
+                  <a14:hiddenLine xmlns:a14="http://schemas.microsoft.com/office/drawing/2010/main" xmlns="" w="9525">
                     <a:solidFill>
                       <a:srgbClr val="000000"/>
                     </a:solidFill>
@@ -10701,7 +10702,7 @@
               </a:ln>
               <a:extLst>
                 <a:ext uri="{91240B29-F687-4f45-9708-019B960494DF}">
-                  <a14:hiddenLine xmlns="" xmlns:a14="http://schemas.microsoft.com/office/drawing/2010/main" w="9525">
+                  <a14:hiddenLine xmlns:a14="http://schemas.microsoft.com/office/drawing/2010/main" xmlns="" w="9525">
                     <a:solidFill>
                       <a:srgbClr val="000000"/>
                     </a:solidFill>
@@ -10735,7 +10736,7 @@
               </a:ln>
               <a:extLst>
                 <a:ext uri="{91240B29-F687-4f45-9708-019B960494DF}">
-                  <a14:hiddenLine xmlns="" xmlns:a14="http://schemas.microsoft.com/office/drawing/2010/main" w="9525">
+                  <a14:hiddenLine xmlns:a14="http://schemas.microsoft.com/office/drawing/2010/main" xmlns="" w="9525">
                     <a:solidFill>
                       <a:srgbClr val="000000"/>
                     </a:solidFill>
@@ -10800,7 +10801,7 @@
               </a:ln>
               <a:extLst>
                 <a:ext uri="{91240B29-F687-4f45-9708-019B960494DF}">
-                  <a14:hiddenLine xmlns="" xmlns:a14="http://schemas.microsoft.com/office/drawing/2010/main" w="9525">
+                  <a14:hiddenLine xmlns:a14="http://schemas.microsoft.com/office/drawing/2010/main" xmlns="" w="9525">
                     <a:solidFill>
                       <a:srgbClr val="000000"/>
                     </a:solidFill>
@@ -10890,7 +10891,7 @@
               </a:ln>
               <a:extLst>
                 <a:ext uri="{91240B29-F687-4f45-9708-019B960494DF}">
-                  <a14:hiddenLine xmlns="" xmlns:a14="http://schemas.microsoft.com/office/drawing/2010/main" w="9525">
+                  <a14:hiddenLine xmlns:a14="http://schemas.microsoft.com/office/drawing/2010/main" xmlns="" w="9525">
                     <a:solidFill>
                       <a:srgbClr val="000000"/>
                     </a:solidFill>
@@ -10952,7 +10953,7 @@
               </a:ln>
               <a:extLst>
                 <a:ext uri="{91240B29-F687-4f45-9708-019B960494DF}">
-                  <a14:hiddenLine xmlns="" xmlns:a14="http://schemas.microsoft.com/office/drawing/2010/main" w="9525">
+                  <a14:hiddenLine xmlns:a14="http://schemas.microsoft.com/office/drawing/2010/main" xmlns="" w="9525">
                     <a:solidFill>
                       <a:srgbClr val="000000"/>
                     </a:solidFill>
@@ -11042,7 +11043,7 @@
               </a:ln>
               <a:extLst>
                 <a:ext uri="{91240B29-F687-4f45-9708-019B960494DF}">
-                  <a14:hiddenLine xmlns="" xmlns:a14="http://schemas.microsoft.com/office/drawing/2010/main" w="9525">
+                  <a14:hiddenLine xmlns:a14="http://schemas.microsoft.com/office/drawing/2010/main" xmlns="" w="9525">
                     <a:solidFill>
                       <a:srgbClr val="000000"/>
                     </a:solidFill>
@@ -11107,7 +11108,7 @@
               </a:ln>
               <a:extLst>
                 <a:ext uri="{91240B29-F687-4f45-9708-019B960494DF}">
-                  <a14:hiddenLine xmlns="" xmlns:a14="http://schemas.microsoft.com/office/drawing/2010/main" w="9525">
+                  <a14:hiddenLine xmlns:a14="http://schemas.microsoft.com/office/drawing/2010/main" xmlns="" w="9525">
                     <a:solidFill>
                       <a:srgbClr val="000000"/>
                     </a:solidFill>
@@ -11169,7 +11170,7 @@
               </a:ln>
               <a:extLst>
                 <a:ext uri="{91240B29-F687-4f45-9708-019B960494DF}">
-                  <a14:hiddenLine xmlns="" xmlns:a14="http://schemas.microsoft.com/office/drawing/2010/main" w="9525">
+                  <a14:hiddenLine xmlns:a14="http://schemas.microsoft.com/office/drawing/2010/main" xmlns="" w="9525">
                     <a:solidFill>
                       <a:srgbClr val="000000"/>
                     </a:solidFill>
@@ -11259,7 +11260,7 @@
               </a:ln>
               <a:extLst>
                 <a:ext uri="{91240B29-F687-4f45-9708-019B960494DF}">
-                  <a14:hiddenLine xmlns="" xmlns:a14="http://schemas.microsoft.com/office/drawing/2010/main" w="9525">
+                  <a14:hiddenLine xmlns:a14="http://schemas.microsoft.com/office/drawing/2010/main" xmlns="" w="9525">
                     <a:solidFill>
                       <a:srgbClr val="000000"/>
                     </a:solidFill>
@@ -11349,7 +11350,7 @@
               </a:ln>
               <a:extLst>
                 <a:ext uri="{91240B29-F687-4f45-9708-019B960494DF}">
-                  <a14:hiddenLine xmlns="" xmlns:a14="http://schemas.microsoft.com/office/drawing/2010/main" w="9525">
+                  <a14:hiddenLine xmlns:a14="http://schemas.microsoft.com/office/drawing/2010/main" xmlns="" w="9525">
                     <a:solidFill>
                       <a:srgbClr val="000000"/>
                     </a:solidFill>
@@ -11414,7 +11415,7 @@
               </a:ln>
               <a:extLst>
                 <a:ext uri="{91240B29-F687-4f45-9708-019B960494DF}">
-                  <a14:hiddenLine xmlns="" xmlns:a14="http://schemas.microsoft.com/office/drawing/2010/main" w="9525">
+                  <a14:hiddenLine xmlns:a14="http://schemas.microsoft.com/office/drawing/2010/main" xmlns="" w="9525">
                     <a:solidFill>
                       <a:srgbClr val="000000"/>
                     </a:solidFill>
@@ -11534,7 +11535,7 @@
               </a:ln>
               <a:extLst>
                 <a:ext uri="{91240B29-F687-4f45-9708-019B960494DF}">
-                  <a14:hiddenLine xmlns="" xmlns:a14="http://schemas.microsoft.com/office/drawing/2010/main" w="9525">
+                  <a14:hiddenLine xmlns:a14="http://schemas.microsoft.com/office/drawing/2010/main" xmlns="" w="9525">
                     <a:solidFill>
                       <a:srgbClr val="000000"/>
                     </a:solidFill>
@@ -11615,7 +11616,7 @@
               </a:ln>
               <a:extLst>
                 <a:ext uri="{91240B29-F687-4f45-9708-019B960494DF}">
-                  <a14:hiddenLine xmlns="" xmlns:a14="http://schemas.microsoft.com/office/drawing/2010/main" w="9525">
+                  <a14:hiddenLine xmlns:a14="http://schemas.microsoft.com/office/drawing/2010/main" xmlns="" w="9525">
                     <a:solidFill>
                       <a:srgbClr val="000000"/>
                     </a:solidFill>
@@ -11730,7 +11731,7 @@
               </a:ln>
               <a:extLst>
                 <a:ext uri="{91240B29-F687-4f45-9708-019B960494DF}">
-                  <a14:hiddenLine xmlns="" xmlns:a14="http://schemas.microsoft.com/office/drawing/2010/main" w="9525">
+                  <a14:hiddenLine xmlns:a14="http://schemas.microsoft.com/office/drawing/2010/main" xmlns="" w="9525">
                     <a:solidFill>
                       <a:srgbClr val="000000"/>
                     </a:solidFill>
@@ -11820,7 +11821,7 @@
               </a:ln>
               <a:extLst>
                 <a:ext uri="{91240B29-F687-4f45-9708-019B960494DF}">
-                  <a14:hiddenLine xmlns="" xmlns:a14="http://schemas.microsoft.com/office/drawing/2010/main" w="9525">
+                  <a14:hiddenLine xmlns:a14="http://schemas.microsoft.com/office/drawing/2010/main" xmlns="" w="9525">
                     <a:solidFill>
                       <a:srgbClr val="000000"/>
                     </a:solidFill>
@@ -11885,7 +11886,7 @@
               </a:ln>
               <a:extLst>
                 <a:ext uri="{91240B29-F687-4f45-9708-019B960494DF}">
-                  <a14:hiddenLine xmlns="" xmlns:a14="http://schemas.microsoft.com/office/drawing/2010/main" w="9525">
+                  <a14:hiddenLine xmlns:a14="http://schemas.microsoft.com/office/drawing/2010/main" xmlns="" w="9525">
                     <a:solidFill>
                       <a:srgbClr val="000000"/>
                     </a:solidFill>
@@ -11975,7 +11976,7 @@
               </a:ln>
               <a:extLst>
                 <a:ext uri="{91240B29-F687-4f45-9708-019B960494DF}">
-                  <a14:hiddenLine xmlns="" xmlns:a14="http://schemas.microsoft.com/office/drawing/2010/main" w="9525">
+                  <a14:hiddenLine xmlns:a14="http://schemas.microsoft.com/office/drawing/2010/main" xmlns="" w="9525">
                     <a:solidFill>
                       <a:srgbClr val="000000"/>
                     </a:solidFill>
@@ -12043,7 +12044,7 @@
               </a:ln>
               <a:extLst>
                 <a:ext uri="{91240B29-F687-4f45-9708-019B960494DF}">
-                  <a14:hiddenLine xmlns="" xmlns:a14="http://schemas.microsoft.com/office/drawing/2010/main" w="9525">
+                  <a14:hiddenLine xmlns:a14="http://schemas.microsoft.com/office/drawing/2010/main" xmlns="" w="9525">
                     <a:solidFill>
                       <a:srgbClr val="000000"/>
                     </a:solidFill>
@@ -12133,7 +12134,7 @@
               </a:ln>
               <a:extLst>
                 <a:ext uri="{91240B29-F687-4f45-9708-019B960494DF}">
-                  <a14:hiddenLine xmlns="" xmlns:a14="http://schemas.microsoft.com/office/drawing/2010/main" w="9525">
+                  <a14:hiddenLine xmlns:a14="http://schemas.microsoft.com/office/drawing/2010/main" xmlns="" w="9525">
                     <a:solidFill>
                       <a:srgbClr val="000000"/>
                     </a:solidFill>
@@ -12201,7 +12202,7 @@
               </a:ln>
               <a:extLst>
                 <a:ext uri="{91240B29-F687-4f45-9708-019B960494DF}">
-                  <a14:hiddenLine xmlns="" xmlns:a14="http://schemas.microsoft.com/office/drawing/2010/main" w="9525">
+                  <a14:hiddenLine xmlns:a14="http://schemas.microsoft.com/office/drawing/2010/main" xmlns="" w="9525">
                     <a:solidFill>
                       <a:srgbClr val="000000"/>
                     </a:solidFill>
@@ -12291,7 +12292,7 @@
               </a:ln>
               <a:extLst>
                 <a:ext uri="{91240B29-F687-4f45-9708-019B960494DF}">
-                  <a14:hiddenLine xmlns="" xmlns:a14="http://schemas.microsoft.com/office/drawing/2010/main" w="9525">
+                  <a14:hiddenLine xmlns:a14="http://schemas.microsoft.com/office/drawing/2010/main" xmlns="" w="9525">
                     <a:solidFill>
                       <a:srgbClr val="000000"/>
                     </a:solidFill>
@@ -12325,7 +12326,7 @@
               </a:ln>
               <a:extLst>
                 <a:ext uri="{91240B29-F687-4f45-9708-019B960494DF}">
-                  <a14:hiddenLine xmlns="" xmlns:a14="http://schemas.microsoft.com/office/drawing/2010/main" w="9525">
+                  <a14:hiddenLine xmlns:a14="http://schemas.microsoft.com/office/drawing/2010/main" xmlns="" w="9525">
                     <a:solidFill>
                       <a:srgbClr val="000000"/>
                     </a:solidFill>
@@ -12465,7 +12466,7 @@
           <a:p>
             <a:fld id="{92FF8978-FE14-CC4A-93A6-934EB06543C0}" type="datetime1">
               <a:rPr lang="en-US" smtClean="0"/>
-              <a:t>8/27/26</a:t>
+              <a:t>8/31/26</a:t>
             </a:fld>
             <a:endParaRPr lang="en-US"/>
           </a:p>
@@ -13176,6 +13177,276 @@
   <p:cSld>
     <p:spTree>
       <p:nvGrpSpPr>
+        <p:cNvPr id="1" name="">
+          <a:extLst>
+            <a:ext uri="{FF2B5EF4-FFF2-40B4-BE49-F238E27FC236}">
+              <a16:creationId xmlns:a16="http://schemas.microsoft.com/office/drawing/2014/main" id="{00419291-25F8-18DA-FFB0-F2D78FAFA6E5}"/>
+            </a:ext>
+          </a:extLst>
+        </p:cNvPr>
+        <p:cNvGrpSpPr/>
+        <p:nvPr/>
+      </p:nvGrpSpPr>
+      <p:grpSpPr>
+        <a:xfrm>
+          <a:off x="0" y="0"/>
+          <a:ext cx="0" cy="0"/>
+          <a:chOff x="0" y="0"/>
+          <a:chExt cx="0" cy="0"/>
+        </a:xfrm>
+      </p:grpSpPr>
+      <p:sp>
+        <p:nvSpPr>
+          <p:cNvPr id="6146" name="Rectangle 2">
+            <a:extLst>
+              <a:ext uri="{FF2B5EF4-FFF2-40B4-BE49-F238E27FC236}">
+                <a16:creationId xmlns:a16="http://schemas.microsoft.com/office/drawing/2014/main" id="{BC245597-867F-85D8-54E8-C994C2B86CC0}"/>
+              </a:ext>
+            </a:extLst>
+          </p:cNvPr>
+          <p:cNvSpPr>
+            <a:spLocks noGrp="1" noChangeArrowheads="1"/>
+          </p:cNvSpPr>
+          <p:nvPr>
+            <p:ph type="title"/>
+            <p:custDataLst>
+              <p:tags r:id="rId1"/>
+            </p:custDataLst>
+          </p:nvPr>
+        </p:nvSpPr>
+        <p:spPr>
+          <a:xfrm>
+            <a:off x="1141413" y="284084"/>
+            <a:ext cx="9905998" cy="620791"/>
+          </a:xfrm>
+        </p:spPr>
+        <p:txBody>
+          <a:bodyPr/>
+          <a:lstStyle/>
+          <a:p>
+            <a:pPr algn="ctr"/>
+            <a:r>
+              <a:rPr lang="en-US" dirty="0"/>
+              <a:t>Lecture 3 - Tuesday, Sep. 1</a:t>
+            </a:r>
+          </a:p>
+        </p:txBody>
+      </p:sp>
+      <p:sp>
+        <p:nvSpPr>
+          <p:cNvPr id="6147" name="Rectangle 3">
+            <a:extLst>
+              <a:ext uri="{FF2B5EF4-FFF2-40B4-BE49-F238E27FC236}">
+                <a16:creationId xmlns:a16="http://schemas.microsoft.com/office/drawing/2014/main" id="{CADA2C73-9E49-295C-F482-FE94D3E2E9E2}"/>
+              </a:ext>
+            </a:extLst>
+          </p:cNvPr>
+          <p:cNvSpPr>
+            <a:spLocks noGrp="1" noChangeArrowheads="1"/>
+          </p:cNvSpPr>
+          <p:nvPr>
+            <p:ph idx="1"/>
+            <p:custDataLst>
+              <p:tags r:id="rId2"/>
+            </p:custDataLst>
+          </p:nvPr>
+        </p:nvSpPr>
+        <p:spPr>
+          <a:xfrm>
+            <a:off x="1294151" y="1098549"/>
+            <a:ext cx="9600522" cy="5149850"/>
+          </a:xfrm>
+        </p:spPr>
+        <p:txBody>
+          <a:bodyPr>
+            <a:normAutofit fontScale="92500" lnSpcReduction="20000"/>
+          </a:bodyPr>
+          <a:lstStyle/>
+          <a:p>
+            <a:r>
+              <a:rPr lang="en-US" dirty="0">
+                <a:latin typeface="Arial" panose="020B0604020202020204" pitchFamily="34" charset="0"/>
+                <a:cs typeface="Arial" panose="020B0604020202020204" pitchFamily="34" charset="0"/>
+              </a:rPr>
+              <a:t>Welcome to September, hopefully temp cools down soon?</a:t>
+            </a:r>
+          </a:p>
+          <a:p>
+            <a:r>
+              <a:rPr lang="en-US" dirty="0">
+                <a:latin typeface="Arial" panose="020B0604020202020204" pitchFamily="34" charset="0"/>
+                <a:cs typeface="Arial" panose="020B0604020202020204" pitchFamily="34" charset="0"/>
+              </a:rPr>
+              <a:t>Please remember </a:t>
+            </a:r>
+            <a:r>
+              <a:rPr lang="en-US" b="1" i="1" u="sng" dirty="0">
+                <a:latin typeface="Arial" panose="020B0604020202020204" pitchFamily="34" charset="0"/>
+                <a:cs typeface="Arial" panose="020B0604020202020204" pitchFamily="34" charset="0"/>
+              </a:rPr>
+              <a:t>no laptops / phones</a:t>
+            </a:r>
+            <a:r>
+              <a:rPr lang="en-US" dirty="0">
+                <a:latin typeface="Arial" panose="020B0604020202020204" pitchFamily="34" charset="0"/>
+                <a:cs typeface="Arial" panose="020B0604020202020204" pitchFamily="34" charset="0"/>
+              </a:rPr>
+              <a:t> and </a:t>
+            </a:r>
+            <a:r>
+              <a:rPr lang="en-US" b="1" i="1" u="sng" dirty="0">
+                <a:latin typeface="Arial" panose="020B0604020202020204" pitchFamily="34" charset="0"/>
+                <a:cs typeface="Arial" panose="020B0604020202020204" pitchFamily="34" charset="0"/>
+              </a:rPr>
+              <a:t>attendance policy</a:t>
+            </a:r>
+          </a:p>
+          <a:p>
+            <a:r>
+              <a:rPr lang="en-US" dirty="0">
+                <a:latin typeface="Arial" panose="020B0604020202020204" pitchFamily="34" charset="0"/>
+                <a:cs typeface="Arial" panose="020B0604020202020204" pitchFamily="34" charset="0"/>
+              </a:rPr>
+              <a:t>First homework  is due </a:t>
+            </a:r>
+            <a:r>
+              <a:rPr lang="en-US" b="1" i="1" u="sng" dirty="0">
+                <a:latin typeface="Arial" panose="020B0604020202020204" pitchFamily="34" charset="0"/>
+                <a:cs typeface="Arial" panose="020B0604020202020204" pitchFamily="34" charset="0"/>
+              </a:rPr>
+              <a:t>THIS Thursday</a:t>
+            </a:r>
+          </a:p>
+          <a:p>
+            <a:pPr lvl="1"/>
+            <a:r>
+              <a:rPr lang="en-US" dirty="0">
+                <a:latin typeface="Arial" panose="020B0604020202020204" pitchFamily="34" charset="0"/>
+                <a:cs typeface="Arial" panose="020B0604020202020204" pitchFamily="34" charset="0"/>
+              </a:rPr>
+              <a:t>Remember you can get an extension by filling out form linked on HW page</a:t>
+            </a:r>
+          </a:p>
+          <a:p>
+            <a:pPr lvl="1"/>
+            <a:r>
+              <a:rPr lang="en-US" dirty="0">
+                <a:latin typeface="Arial" panose="020B0604020202020204" pitchFamily="34" charset="0"/>
+                <a:cs typeface="Arial" panose="020B0604020202020204" pitchFamily="34" charset="0"/>
+              </a:rPr>
+              <a:t>Hopefully we get through enough material. Might be tight.</a:t>
+            </a:r>
+          </a:p>
+          <a:p>
+            <a:r>
+              <a:rPr lang="en-US" dirty="0">
+                <a:latin typeface="Arial" panose="020B0604020202020204" pitchFamily="34" charset="0"/>
+                <a:cs typeface="Arial" panose="020B0604020202020204" pitchFamily="34" charset="0"/>
+              </a:rPr>
+              <a:t>CBTF Practice Quiz</a:t>
+            </a:r>
+          </a:p>
+          <a:p>
+            <a:pPr lvl="1"/>
+            <a:r>
+              <a:rPr lang="en-US" dirty="0">
+                <a:latin typeface="Arial" panose="020B0604020202020204" pitchFamily="34" charset="0"/>
+                <a:cs typeface="Arial" panose="020B0604020202020204" pitchFamily="34" charset="0"/>
+              </a:rPr>
+              <a:t>Please make a </a:t>
+            </a:r>
+            <a:r>
+              <a:rPr lang="en-US" dirty="0" err="1">
+                <a:latin typeface="Arial" panose="020B0604020202020204" pitchFamily="34" charset="0"/>
+                <a:cs typeface="Arial" panose="020B0604020202020204" pitchFamily="34" charset="0"/>
+              </a:rPr>
+              <a:t>PrairieLearn</a:t>
+            </a:r>
+            <a:r>
+              <a:rPr lang="en-US" dirty="0">
+                <a:latin typeface="Arial" panose="020B0604020202020204" pitchFamily="34" charset="0"/>
+                <a:cs typeface="Arial" panose="020B0604020202020204" pitchFamily="34" charset="0"/>
+              </a:rPr>
+              <a:t>/</a:t>
+            </a:r>
+            <a:r>
+              <a:rPr lang="en-US" dirty="0" err="1">
+                <a:latin typeface="Arial" panose="020B0604020202020204" pitchFamily="34" charset="0"/>
+                <a:cs typeface="Arial" panose="020B0604020202020204" pitchFamily="34" charset="0"/>
+              </a:rPr>
+              <a:t>PrairieTest</a:t>
+            </a:r>
+            <a:r>
+              <a:rPr lang="en-US" dirty="0">
+                <a:latin typeface="Arial" panose="020B0604020202020204" pitchFamily="34" charset="0"/>
+                <a:cs typeface="Arial" panose="020B0604020202020204" pitchFamily="34" charset="0"/>
+              </a:rPr>
+              <a:t> account NOW</a:t>
+            </a:r>
+          </a:p>
+          <a:p>
+            <a:pPr lvl="1"/>
+            <a:r>
+              <a:rPr lang="en-US" dirty="0">
+                <a:latin typeface="Arial" panose="020B0604020202020204" pitchFamily="34" charset="0"/>
+                <a:cs typeface="Arial" panose="020B0604020202020204" pitchFamily="34" charset="0"/>
+              </a:rPr>
+              <a:t>Practice Quiz is LIVE now. Make a reservation. You have until 9/11!!!</a:t>
+            </a:r>
+          </a:p>
+          <a:p>
+            <a:r>
+              <a:rPr lang="en-US" dirty="0">
+                <a:latin typeface="Arial" panose="020B0604020202020204" pitchFamily="34" charset="0"/>
+                <a:cs typeface="Arial" panose="020B0604020202020204" pitchFamily="34" charset="0"/>
+              </a:rPr>
+              <a:t>First real quiz is 9/22 (but we have some time before that arrives)</a:t>
+            </a:r>
+          </a:p>
+          <a:p>
+            <a:r>
+              <a:rPr lang="en-US" dirty="0">
+                <a:latin typeface="Arial" panose="020B0604020202020204" pitchFamily="34" charset="0"/>
+                <a:cs typeface="Arial" panose="020B0604020202020204" pitchFamily="34" charset="0"/>
+              </a:rPr>
+              <a:t>These slides are linked on the course webpage “slides” page.</a:t>
+            </a:r>
+          </a:p>
+          <a:p>
+            <a:r>
+              <a:rPr lang="en-US" dirty="0">
+                <a:latin typeface="Arial" panose="020B0604020202020204" pitchFamily="34" charset="0"/>
+                <a:cs typeface="Arial" panose="020B0604020202020204" pitchFamily="34" charset="0"/>
+              </a:rPr>
+              <a:t>Today we will try to finish module 0 which is a half review, half overview of what to expect in the course.</a:t>
+            </a:r>
+          </a:p>
+          <a:p>
+            <a:endParaRPr lang="en-US" dirty="0">
+              <a:latin typeface="Arial" panose="020B0604020202020204" pitchFamily="34" charset="0"/>
+              <a:cs typeface="Arial" panose="020B0604020202020204" pitchFamily="34" charset="0"/>
+            </a:endParaRPr>
+          </a:p>
+        </p:txBody>
+      </p:sp>
+    </p:spTree>
+    <p:extLst>
+      <p:ext uri="{BB962C8B-B14F-4D97-AF65-F5344CB8AC3E}">
+        <p14:creationId xmlns:p14="http://schemas.microsoft.com/office/powerpoint/2010/main" val="3593160646"/>
+      </p:ext>
+    </p:extLst>
+  </p:cSld>
+  <p:clrMapOvr>
+    <a:masterClrMapping/>
+  </p:clrMapOvr>
+</p:sld>
+</file>
+
+<file path=ppt/slides/slide4.xml><?xml version="1.0" encoding="utf-8"?>
+<p:sld xmlns:a="http://schemas.openxmlformats.org/drawingml/2006/main" xmlns:r="http://schemas.openxmlformats.org/officeDocument/2006/relationships" xmlns:p="http://schemas.openxmlformats.org/presentationml/2006/main">
+  <p:cSld>
+    <p:spTree>
+      <p:nvGrpSpPr>
         <p:cNvPr id="1" name=""/>
         <p:cNvGrpSpPr/>
         <p:nvPr/>
@@ -13512,7 +13783,7 @@
           <p:nvPr>
             <p:extLst>
               <p:ext uri="{D42A27DB-BD31-4B8C-83A1-F6EECF244321}">
-                <p14:modId xmlns:p14="http://schemas.microsoft.com/office/powerpoint/2010/main" val="4210067486"/>
+                <p14:modId xmlns:p14="http://schemas.microsoft.com/office/powerpoint/2010/main" val="828126631"/>
               </p:ext>
             </p:extLst>
           </p:nvPr>
@@ -13608,7 +13879,7 @@
                       <a:pPr algn="ctr"/>
                       <a:r>
                         <a:rPr lang="en-US" i="0" dirty="0"/>
-                        <a:t>1</a:t>
+                        <a:t>2</a:t>
                       </a:r>
                     </a:p>
                   </a:txBody>
@@ -13622,7 +13893,7 @@
                       <a:pPr algn="ctr"/>
                       <a:r>
                         <a:rPr lang="en-US" i="0" dirty="0"/>
-                        <a:t>1</a:t>
+                        <a:t>2</a:t>
                       </a:r>
                     </a:p>
                   </a:txBody>
@@ -14794,7 +15065,7 @@
           <p:nvPr>
             <p:extLst>
               <p:ext uri="{D42A27DB-BD31-4B8C-83A1-F6EECF244321}">
-                <p14:modId xmlns:p14="http://schemas.microsoft.com/office/powerpoint/2010/main" val="2635874360"/>
+                <p14:modId xmlns:p14="http://schemas.microsoft.com/office/powerpoint/2010/main" val="2827406846"/>
               </p:ext>
             </p:extLst>
           </p:nvPr>
@@ -14890,7 +15161,7 @@
                       <a:pPr algn="ctr"/>
                       <a:r>
                         <a:rPr lang="en-US" i="0" dirty="0"/>
-                        <a:t>1</a:t>
+                        <a:t>2</a:t>
                       </a:r>
                     </a:p>
                   </a:txBody>
@@ -14904,7 +15175,7 @@
                       <a:pPr algn="ctr"/>
                       <a:r>
                         <a:rPr lang="en-US" i="0" dirty="0"/>
-                        <a:t>1</a:t>
+                        <a:t>2</a:t>
                       </a:r>
                     </a:p>
                   </a:txBody>
@@ -14984,6 +15255,18 @@
 </file>
 
 <file path=ppt/tags/tag7.xml><?xml version="1.0" encoding="utf-8"?>
+<p:tagLst xmlns:a="http://schemas.openxmlformats.org/drawingml/2006/main" xmlns:r="http://schemas.openxmlformats.org/officeDocument/2006/relationships" xmlns:p="http://schemas.openxmlformats.org/presentationml/2006/main">
+  <p:tag name="_INSTRUCTOR VIEW19C14C36-AC8E-43BC-9DB6-C2AAF774C7DC|PANE__TAG" val="_"/>
+</p:tagLst>
+</file>
+
+<file path=ppt/tags/tag8.xml><?xml version="1.0" encoding="utf-8"?>
+<p:tagLst xmlns:a="http://schemas.openxmlformats.org/drawingml/2006/main" xmlns:r="http://schemas.openxmlformats.org/officeDocument/2006/relationships" xmlns:p="http://schemas.openxmlformats.org/presentationml/2006/main">
+  <p:tag name="_INSTRUCTOR VIEW19C14C36-AC8E-43BC-9DB6-C2AAF774C7DC|PANE__TAG" val="_"/>
+</p:tagLst>
+</file>
+
+<file path=ppt/tags/tag9.xml><?xml version="1.0" encoding="utf-8"?>
 <p:tagLst xmlns:a="http://schemas.openxmlformats.org/drawingml/2006/main" xmlns:r="http://schemas.openxmlformats.org/officeDocument/2006/relationships" xmlns:p="http://schemas.openxmlformats.org/presentationml/2006/main">
   <p:tag name="_INSTRUCTOR VIEW19C14C36-AC8E-43BC-9DB6-C2AAF774C7DC|PANE__TAG" val="_"/>
 </p:tagLst>

--- a/slides/00-DailyAnnouncements.pptx
+++ b/slides/00-DailyAnnouncements.pptx
@@ -5,13 +5,14 @@
     <p:sldMasterId id="2147484006" r:id="rId1"/>
   </p:sldMasterIdLst>
   <p:notesMasterIdLst>
-    <p:notesMasterId r:id="rId6"/>
+    <p:notesMasterId r:id="rId7"/>
   </p:notesMasterIdLst>
   <p:sldIdLst>
     <p:sldId id="256" r:id="rId2"/>
     <p:sldId id="505" r:id="rId3"/>
     <p:sldId id="516" r:id="rId4"/>
-    <p:sldId id="515" r:id="rId5"/>
+    <p:sldId id="517" r:id="rId5"/>
+    <p:sldId id="515" r:id="rId6"/>
   </p:sldIdLst>
   <p:sldSz cx="12192000" cy="6858000"/>
   <p:notesSz cx="6858000" cy="9144000"/>
@@ -200,7 +201,7 @@
           <a:p>
             <a:fld id="{C5B45307-6ED4-B142-BD64-10F739779302}" type="datetimeFigureOut">
               <a:rPr lang="en-US" smtClean="0"/>
-              <a:t>8/31/26</a:t>
+              <a:t>9/3/26</a:t>
             </a:fld>
             <a:endParaRPr lang="en-US"/>
           </a:p>
@@ -608,7 +609,7 @@
           <a:noFill/>
           <a:extLst>
             <a:ext uri="{909E8E84-426E-40dd-AFC4-6F175D3DCCD1}">
-              <a14:hiddenFill xmlns:a14="http://schemas.microsoft.com/office/drawing/2010/main" xmlns="">
+              <a14:hiddenFill xmlns="" xmlns:a14="http://schemas.microsoft.com/office/drawing/2010/main">
                 <a:solidFill>
                   <a:srgbClr val="FFFFFF"/>
                 </a:solidFill>
@@ -667,7 +668,7 @@
             </a:ln>
             <a:extLst>
               <a:ext uri="{91240B29-F687-4f45-9708-019B960494DF}">
-                <a14:hiddenLine xmlns:a14="http://schemas.microsoft.com/office/drawing/2010/main" xmlns="" w="9525">
+                <a14:hiddenLine xmlns="" xmlns:a14="http://schemas.microsoft.com/office/drawing/2010/main" w="9525">
                   <a:solidFill>
                     <a:srgbClr val="000000"/>
                   </a:solidFill>
@@ -757,7 +758,7 @@
             </a:ln>
             <a:extLst>
               <a:ext uri="{91240B29-F687-4f45-9708-019B960494DF}">
-                <a14:hiddenLine xmlns:a14="http://schemas.microsoft.com/office/drawing/2010/main" xmlns="" w="9525">
+                <a14:hiddenLine xmlns="" xmlns:a14="http://schemas.microsoft.com/office/drawing/2010/main" w="9525">
                   <a:solidFill>
                     <a:srgbClr val="000000"/>
                   </a:solidFill>
@@ -847,7 +848,7 @@
             </a:ln>
             <a:extLst>
               <a:ext uri="{91240B29-F687-4f45-9708-019B960494DF}">
-                <a14:hiddenLine xmlns:a14="http://schemas.microsoft.com/office/drawing/2010/main" xmlns="" w="9525">
+                <a14:hiddenLine xmlns="" xmlns:a14="http://schemas.microsoft.com/office/drawing/2010/main" w="9525">
                   <a:solidFill>
                     <a:srgbClr val="000000"/>
                   </a:solidFill>
@@ -881,7 +882,7 @@
             </a:ln>
             <a:extLst>
               <a:ext uri="{91240B29-F687-4f45-9708-019B960494DF}">
-                <a14:hiddenLine xmlns:a14="http://schemas.microsoft.com/office/drawing/2010/main" xmlns="" w="9525">
+                <a14:hiddenLine xmlns="" xmlns:a14="http://schemas.microsoft.com/office/drawing/2010/main" w="9525">
                   <a:solidFill>
                     <a:srgbClr val="000000"/>
                   </a:solidFill>
@@ -971,7 +972,7 @@
             </a:ln>
             <a:extLst>
               <a:ext uri="{91240B29-F687-4f45-9708-019B960494DF}">
-                <a14:hiddenLine xmlns:a14="http://schemas.microsoft.com/office/drawing/2010/main" xmlns="" w="9525">
+                <a14:hiddenLine xmlns="" xmlns:a14="http://schemas.microsoft.com/office/drawing/2010/main" w="9525">
                   <a:solidFill>
                     <a:srgbClr val="000000"/>
                   </a:solidFill>
@@ -1033,7 +1034,7 @@
             </a:ln>
             <a:extLst>
               <a:ext uri="{91240B29-F687-4f45-9708-019B960494DF}">
-                <a14:hiddenLine xmlns:a14="http://schemas.microsoft.com/office/drawing/2010/main" xmlns="" w="9525">
+                <a14:hiddenLine xmlns="" xmlns:a14="http://schemas.microsoft.com/office/drawing/2010/main" w="9525">
                   <a:solidFill>
                     <a:srgbClr val="000000"/>
                   </a:solidFill>
@@ -1095,7 +1096,7 @@
             </a:ln>
             <a:extLst>
               <a:ext uri="{91240B29-F687-4f45-9708-019B960494DF}">
-                <a14:hiddenLine xmlns:a14="http://schemas.microsoft.com/office/drawing/2010/main" xmlns="" w="9525">
+                <a14:hiddenLine xmlns="" xmlns:a14="http://schemas.microsoft.com/office/drawing/2010/main" w="9525">
                   <a:solidFill>
                     <a:srgbClr val="000000"/>
                   </a:solidFill>
@@ -1185,7 +1186,7 @@
             </a:ln>
             <a:extLst>
               <a:ext uri="{91240B29-F687-4f45-9708-019B960494DF}">
-                <a14:hiddenLine xmlns:a14="http://schemas.microsoft.com/office/drawing/2010/main" xmlns="" w="9525">
+                <a14:hiddenLine xmlns="" xmlns:a14="http://schemas.microsoft.com/office/drawing/2010/main" w="9525">
                   <a:solidFill>
                     <a:srgbClr val="000000"/>
                   </a:solidFill>
@@ -1247,7 +1248,7 @@
             </a:ln>
             <a:extLst>
               <a:ext uri="{91240B29-F687-4f45-9708-019B960494DF}">
-                <a14:hiddenLine xmlns:a14="http://schemas.microsoft.com/office/drawing/2010/main" xmlns="" w="9525">
+                <a14:hiddenLine xmlns="" xmlns:a14="http://schemas.microsoft.com/office/drawing/2010/main" w="9525">
                   <a:solidFill>
                     <a:srgbClr val="000000"/>
                   </a:solidFill>
@@ -1309,7 +1310,7 @@
             </a:ln>
             <a:extLst>
               <a:ext uri="{91240B29-F687-4f45-9708-019B960494DF}">
-                <a14:hiddenLine xmlns:a14="http://schemas.microsoft.com/office/drawing/2010/main" xmlns="" w="9525">
+                <a14:hiddenLine xmlns="" xmlns:a14="http://schemas.microsoft.com/office/drawing/2010/main" w="9525">
                   <a:solidFill>
                     <a:srgbClr val="000000"/>
                   </a:solidFill>
@@ -1399,7 +1400,7 @@
             </a:ln>
             <a:extLst>
               <a:ext uri="{91240B29-F687-4f45-9708-019B960494DF}">
-                <a14:hiddenLine xmlns:a14="http://schemas.microsoft.com/office/drawing/2010/main" xmlns="" w="9525">
+                <a14:hiddenLine xmlns="" xmlns:a14="http://schemas.microsoft.com/office/drawing/2010/main" w="9525">
                   <a:solidFill>
                     <a:srgbClr val="000000"/>
                   </a:solidFill>
@@ -1489,7 +1490,7 @@
             </a:ln>
             <a:extLst>
               <a:ext uri="{91240B29-F687-4f45-9708-019B960494DF}">
-                <a14:hiddenLine xmlns:a14="http://schemas.microsoft.com/office/drawing/2010/main" xmlns="" w="9525">
+                <a14:hiddenLine xmlns="" xmlns:a14="http://schemas.microsoft.com/office/drawing/2010/main" w="9525">
                   <a:solidFill>
                     <a:srgbClr val="000000"/>
                   </a:solidFill>
@@ -1551,7 +1552,7 @@
             </a:ln>
             <a:extLst>
               <a:ext uri="{91240B29-F687-4f45-9708-019B960494DF}">
-                <a14:hiddenLine xmlns:a14="http://schemas.microsoft.com/office/drawing/2010/main" xmlns="" w="9525">
+                <a14:hiddenLine xmlns="" xmlns:a14="http://schemas.microsoft.com/office/drawing/2010/main" w="9525">
                   <a:solidFill>
                     <a:srgbClr val="000000"/>
                   </a:solidFill>
@@ -1661,7 +1662,7 @@
             </a:ln>
             <a:extLst>
               <a:ext uri="{91240B29-F687-4f45-9708-019B960494DF}">
-                <a14:hiddenLine xmlns:a14="http://schemas.microsoft.com/office/drawing/2010/main" xmlns="" w="9525">
+                <a14:hiddenLine xmlns="" xmlns:a14="http://schemas.microsoft.com/office/drawing/2010/main" w="9525">
                   <a:solidFill>
                     <a:srgbClr val="000000"/>
                   </a:solidFill>
@@ -1723,7 +1724,7 @@
             </a:ln>
             <a:extLst>
               <a:ext uri="{91240B29-F687-4f45-9708-019B960494DF}">
-                <a14:hiddenLine xmlns:a14="http://schemas.microsoft.com/office/drawing/2010/main" xmlns="" w="9525">
+                <a14:hiddenLine xmlns="" xmlns:a14="http://schemas.microsoft.com/office/drawing/2010/main" w="9525">
                   <a:solidFill>
                     <a:srgbClr val="000000"/>
                   </a:solidFill>
@@ -1813,7 +1814,7 @@
             </a:ln>
             <a:extLst>
               <a:ext uri="{91240B29-F687-4f45-9708-019B960494DF}">
-                <a14:hiddenLine xmlns:a14="http://schemas.microsoft.com/office/drawing/2010/main" xmlns="" w="9525">
+                <a14:hiddenLine xmlns="" xmlns:a14="http://schemas.microsoft.com/office/drawing/2010/main" w="9525">
                   <a:solidFill>
                     <a:srgbClr val="000000"/>
                   </a:solidFill>
@@ -1903,7 +1904,7 @@
             </a:ln>
             <a:extLst>
               <a:ext uri="{91240B29-F687-4f45-9708-019B960494DF}">
-                <a14:hiddenLine xmlns:a14="http://schemas.microsoft.com/office/drawing/2010/main" xmlns="" w="9525">
+                <a14:hiddenLine xmlns="" xmlns:a14="http://schemas.microsoft.com/office/drawing/2010/main" w="9525">
                   <a:solidFill>
                     <a:srgbClr val="000000"/>
                   </a:solidFill>
@@ -1965,7 +1966,7 @@
             </a:ln>
             <a:extLst>
               <a:ext uri="{91240B29-F687-4f45-9708-019B960494DF}">
-                <a14:hiddenLine xmlns:a14="http://schemas.microsoft.com/office/drawing/2010/main" xmlns="" w="9525">
+                <a14:hiddenLine xmlns="" xmlns:a14="http://schemas.microsoft.com/office/drawing/2010/main" w="9525">
                   <a:solidFill>
                     <a:srgbClr val="000000"/>
                   </a:solidFill>
@@ -2055,7 +2056,7 @@
             </a:ln>
             <a:extLst>
               <a:ext uri="{91240B29-F687-4f45-9708-019B960494DF}">
-                <a14:hiddenLine xmlns:a14="http://schemas.microsoft.com/office/drawing/2010/main" xmlns="" w="9525">
+                <a14:hiddenLine xmlns="" xmlns:a14="http://schemas.microsoft.com/office/drawing/2010/main" w="9525">
                   <a:solidFill>
                     <a:srgbClr val="000000"/>
                   </a:solidFill>
@@ -2145,7 +2146,7 @@
             </a:ln>
             <a:extLst>
               <a:ext uri="{91240B29-F687-4f45-9708-019B960494DF}">
-                <a14:hiddenLine xmlns:a14="http://schemas.microsoft.com/office/drawing/2010/main" xmlns="" w="9525">
+                <a14:hiddenLine xmlns="" xmlns:a14="http://schemas.microsoft.com/office/drawing/2010/main" w="9525">
                   <a:solidFill>
                     <a:srgbClr val="000000"/>
                   </a:solidFill>
@@ -2201,7 +2202,7 @@
             </a:ln>
             <a:extLst>
               <a:ext uri="{91240B29-F687-4f45-9708-019B960494DF}">
-                <a14:hiddenLine xmlns:a14="http://schemas.microsoft.com/office/drawing/2010/main" xmlns="" w="9525">
+                <a14:hiddenLine xmlns="" xmlns:a14="http://schemas.microsoft.com/office/drawing/2010/main" w="9525">
                   <a:solidFill>
                     <a:srgbClr val="000000"/>
                   </a:solidFill>
@@ -2291,7 +2292,7 @@
             </a:ln>
             <a:extLst>
               <a:ext uri="{91240B29-F687-4f45-9708-019B960494DF}">
-                <a14:hiddenLine xmlns:a14="http://schemas.microsoft.com/office/drawing/2010/main" xmlns="" w="9525">
+                <a14:hiddenLine xmlns="" xmlns:a14="http://schemas.microsoft.com/office/drawing/2010/main" w="9525">
                   <a:solidFill>
                     <a:srgbClr val="000000"/>
                   </a:solidFill>
@@ -2347,7 +2348,7 @@
             </a:ln>
             <a:extLst>
               <a:ext uri="{91240B29-F687-4f45-9708-019B960494DF}">
-                <a14:hiddenLine xmlns:a14="http://schemas.microsoft.com/office/drawing/2010/main" xmlns="" w="9525">
+                <a14:hiddenLine xmlns="" xmlns:a14="http://schemas.microsoft.com/office/drawing/2010/main" w="9525">
                   <a:solidFill>
                     <a:srgbClr val="000000"/>
                   </a:solidFill>
@@ -2437,7 +2438,7 @@
             </a:ln>
             <a:extLst>
               <a:ext uri="{91240B29-F687-4f45-9708-019B960494DF}">
-                <a14:hiddenLine xmlns:a14="http://schemas.microsoft.com/office/drawing/2010/main" xmlns="" w="9525">
+                <a14:hiddenLine xmlns="" xmlns:a14="http://schemas.microsoft.com/office/drawing/2010/main" w="9525">
                   <a:solidFill>
                     <a:srgbClr val="000000"/>
                   </a:solidFill>
@@ -2505,7 +2506,7 @@
             </a:ln>
             <a:extLst>
               <a:ext uri="{91240B29-F687-4f45-9708-019B960494DF}">
-                <a14:hiddenLine xmlns:a14="http://schemas.microsoft.com/office/drawing/2010/main" xmlns="" w="9525">
+                <a14:hiddenLine xmlns="" xmlns:a14="http://schemas.microsoft.com/office/drawing/2010/main" w="9525">
                   <a:solidFill>
                     <a:srgbClr val="000000"/>
                   </a:solidFill>
@@ -2595,7 +2596,7 @@
             </a:ln>
             <a:extLst>
               <a:ext uri="{91240B29-F687-4f45-9708-019B960494DF}">
-                <a14:hiddenLine xmlns:a14="http://schemas.microsoft.com/office/drawing/2010/main" xmlns="" w="9525">
+                <a14:hiddenLine xmlns="" xmlns:a14="http://schemas.microsoft.com/office/drawing/2010/main" w="9525">
                   <a:solidFill>
                     <a:srgbClr val="000000"/>
                   </a:solidFill>
@@ -2663,7 +2664,7 @@
             </a:ln>
             <a:extLst>
               <a:ext uri="{91240B29-F687-4f45-9708-019B960494DF}">
-                <a14:hiddenLine xmlns:a14="http://schemas.microsoft.com/office/drawing/2010/main" xmlns="" w="9525">
+                <a14:hiddenLine xmlns="" xmlns:a14="http://schemas.microsoft.com/office/drawing/2010/main" w="9525">
                   <a:solidFill>
                     <a:srgbClr val="000000"/>
                   </a:solidFill>
@@ -2753,7 +2754,7 @@
             </a:ln>
             <a:extLst>
               <a:ext uri="{91240B29-F687-4f45-9708-019B960494DF}">
-                <a14:hiddenLine xmlns:a14="http://schemas.microsoft.com/office/drawing/2010/main" xmlns="" w="9525">
+                <a14:hiddenLine xmlns="" xmlns:a14="http://schemas.microsoft.com/office/drawing/2010/main" w="9525">
                   <a:solidFill>
                     <a:srgbClr val="000000"/>
                   </a:solidFill>
@@ -2787,7 +2788,7 @@
             </a:ln>
             <a:extLst>
               <a:ext uri="{91240B29-F687-4f45-9708-019B960494DF}">
-                <a14:hiddenLine xmlns:a14="http://schemas.microsoft.com/office/drawing/2010/main" xmlns="" w="9525">
+                <a14:hiddenLine xmlns="" xmlns:a14="http://schemas.microsoft.com/office/drawing/2010/main" w="9525">
                   <a:solidFill>
                     <a:srgbClr val="000000"/>
                   </a:solidFill>
@@ -2877,7 +2878,7 @@
             </a:ln>
             <a:extLst>
               <a:ext uri="{91240B29-F687-4f45-9708-019B960494DF}">
-                <a14:hiddenLine xmlns:a14="http://schemas.microsoft.com/office/drawing/2010/main" xmlns="" w="9525">
+                <a14:hiddenLine xmlns="" xmlns:a14="http://schemas.microsoft.com/office/drawing/2010/main" w="9525">
                   <a:solidFill>
                     <a:srgbClr val="000000"/>
                   </a:solidFill>
@@ -2939,7 +2940,7 @@
             </a:ln>
             <a:extLst>
               <a:ext uri="{91240B29-F687-4f45-9708-019B960494DF}">
-                <a14:hiddenLine xmlns:a14="http://schemas.microsoft.com/office/drawing/2010/main" xmlns="" w="9525">
+                <a14:hiddenLine xmlns="" xmlns:a14="http://schemas.microsoft.com/office/drawing/2010/main" w="9525">
                   <a:solidFill>
                     <a:srgbClr val="000000"/>
                   </a:solidFill>
@@ -3001,7 +3002,7 @@
             </a:ln>
             <a:extLst>
               <a:ext uri="{91240B29-F687-4f45-9708-019B960494DF}">
-                <a14:hiddenLine xmlns:a14="http://schemas.microsoft.com/office/drawing/2010/main" xmlns="" w="9525">
+                <a14:hiddenLine xmlns="" xmlns:a14="http://schemas.microsoft.com/office/drawing/2010/main" w="9525">
                   <a:solidFill>
                     <a:srgbClr val="000000"/>
                   </a:solidFill>
@@ -3091,7 +3092,7 @@
             </a:ln>
             <a:extLst>
               <a:ext uri="{91240B29-F687-4f45-9708-019B960494DF}">
-                <a14:hiddenLine xmlns:a14="http://schemas.microsoft.com/office/drawing/2010/main" xmlns="" w="9525">
+                <a14:hiddenLine xmlns="" xmlns:a14="http://schemas.microsoft.com/office/drawing/2010/main" w="9525">
                   <a:solidFill>
                     <a:srgbClr val="000000"/>
                   </a:solidFill>
@@ -3159,7 +3160,7 @@
             </a:ln>
             <a:extLst>
               <a:ext uri="{91240B29-F687-4f45-9708-019B960494DF}">
-                <a14:hiddenLine xmlns:a14="http://schemas.microsoft.com/office/drawing/2010/main" xmlns="" w="9525">
+                <a14:hiddenLine xmlns="" xmlns:a14="http://schemas.microsoft.com/office/drawing/2010/main" w="9525">
                   <a:solidFill>
                     <a:srgbClr val="000000"/>
                   </a:solidFill>
@@ -3221,7 +3222,7 @@
             </a:ln>
             <a:extLst>
               <a:ext uri="{91240B29-F687-4f45-9708-019B960494DF}">
-                <a14:hiddenLine xmlns:a14="http://schemas.microsoft.com/office/drawing/2010/main" xmlns="" w="9525">
+                <a14:hiddenLine xmlns="" xmlns:a14="http://schemas.microsoft.com/office/drawing/2010/main" w="9525">
                   <a:solidFill>
                     <a:srgbClr val="000000"/>
                   </a:solidFill>
@@ -3311,7 +3312,7 @@
             </a:ln>
             <a:extLst>
               <a:ext uri="{91240B29-F687-4f45-9708-019B960494DF}">
-                <a14:hiddenLine xmlns:a14="http://schemas.microsoft.com/office/drawing/2010/main" xmlns="" w="9525">
+                <a14:hiddenLine xmlns="" xmlns:a14="http://schemas.microsoft.com/office/drawing/2010/main" w="9525">
                   <a:solidFill>
                     <a:srgbClr val="000000"/>
                   </a:solidFill>
@@ -3373,7 +3374,7 @@
             </a:ln>
             <a:extLst>
               <a:ext uri="{91240B29-F687-4f45-9708-019B960494DF}">
-                <a14:hiddenLine xmlns:a14="http://schemas.microsoft.com/office/drawing/2010/main" xmlns="" w="9525">
+                <a14:hiddenLine xmlns="" xmlns:a14="http://schemas.microsoft.com/office/drawing/2010/main" w="9525">
                   <a:solidFill>
                     <a:srgbClr val="000000"/>
                   </a:solidFill>
@@ -3463,7 +3464,7 @@
             </a:ln>
             <a:extLst>
               <a:ext uri="{91240B29-F687-4f45-9708-019B960494DF}">
-                <a14:hiddenLine xmlns:a14="http://schemas.microsoft.com/office/drawing/2010/main" xmlns="" w="9525">
+                <a14:hiddenLine xmlns="" xmlns:a14="http://schemas.microsoft.com/office/drawing/2010/main" w="9525">
                   <a:solidFill>
                     <a:srgbClr val="000000"/>
                   </a:solidFill>
@@ -3525,7 +3526,7 @@
             </a:ln>
             <a:extLst>
               <a:ext uri="{91240B29-F687-4f45-9708-019B960494DF}">
-                <a14:hiddenLine xmlns:a14="http://schemas.microsoft.com/office/drawing/2010/main" xmlns="" w="9525">
+                <a14:hiddenLine xmlns="" xmlns:a14="http://schemas.microsoft.com/office/drawing/2010/main" w="9525">
                   <a:solidFill>
                     <a:srgbClr val="000000"/>
                   </a:solidFill>
@@ -3615,7 +3616,7 @@
             </a:ln>
             <a:extLst>
               <a:ext uri="{91240B29-F687-4f45-9708-019B960494DF}">
-                <a14:hiddenLine xmlns:a14="http://schemas.microsoft.com/office/drawing/2010/main" xmlns="" w="9525">
+                <a14:hiddenLine xmlns="" xmlns:a14="http://schemas.microsoft.com/office/drawing/2010/main" w="9525">
                   <a:solidFill>
                     <a:srgbClr val="000000"/>
                   </a:solidFill>
@@ -3649,7 +3650,7 @@
             </a:ln>
             <a:extLst>
               <a:ext uri="{91240B29-F687-4f45-9708-019B960494DF}">
-                <a14:hiddenLine xmlns:a14="http://schemas.microsoft.com/office/drawing/2010/main" xmlns="" w="9525">
+                <a14:hiddenLine xmlns="" xmlns:a14="http://schemas.microsoft.com/office/drawing/2010/main" w="9525">
                   <a:solidFill>
                     <a:srgbClr val="000000"/>
                   </a:solidFill>
@@ -3714,7 +3715,7 @@
             </a:ln>
             <a:extLst>
               <a:ext uri="{91240B29-F687-4f45-9708-019B960494DF}">
-                <a14:hiddenLine xmlns:a14="http://schemas.microsoft.com/office/drawing/2010/main" xmlns="" w="9525">
+                <a14:hiddenLine xmlns="" xmlns:a14="http://schemas.microsoft.com/office/drawing/2010/main" w="9525">
                   <a:solidFill>
                     <a:srgbClr val="000000"/>
                   </a:solidFill>
@@ -3804,7 +3805,7 @@
             </a:ln>
             <a:extLst>
               <a:ext uri="{91240B29-F687-4f45-9708-019B960494DF}">
-                <a14:hiddenLine xmlns:a14="http://schemas.microsoft.com/office/drawing/2010/main" xmlns="" w="9525">
+                <a14:hiddenLine xmlns="" xmlns:a14="http://schemas.microsoft.com/office/drawing/2010/main" w="9525">
                   <a:solidFill>
                     <a:srgbClr val="000000"/>
                   </a:solidFill>
@@ -3866,7 +3867,7 @@
             </a:ln>
             <a:extLst>
               <a:ext uri="{91240B29-F687-4f45-9708-019B960494DF}">
-                <a14:hiddenLine xmlns:a14="http://schemas.microsoft.com/office/drawing/2010/main" xmlns="" w="9525">
+                <a14:hiddenLine xmlns="" xmlns:a14="http://schemas.microsoft.com/office/drawing/2010/main" w="9525">
                   <a:solidFill>
                     <a:srgbClr val="000000"/>
                   </a:solidFill>
@@ -3956,7 +3957,7 @@
             </a:ln>
             <a:extLst>
               <a:ext uri="{91240B29-F687-4f45-9708-019B960494DF}">
-                <a14:hiddenLine xmlns:a14="http://schemas.microsoft.com/office/drawing/2010/main" xmlns="" w="9525">
+                <a14:hiddenLine xmlns="" xmlns:a14="http://schemas.microsoft.com/office/drawing/2010/main" w="9525">
                   <a:solidFill>
                     <a:srgbClr val="000000"/>
                   </a:solidFill>
@@ -4046,7 +4047,7 @@
             </a:ln>
             <a:extLst>
               <a:ext uri="{91240B29-F687-4f45-9708-019B960494DF}">
-                <a14:hiddenLine xmlns:a14="http://schemas.microsoft.com/office/drawing/2010/main" xmlns="" w="9525">
+                <a14:hiddenLine xmlns="" xmlns:a14="http://schemas.microsoft.com/office/drawing/2010/main" w="9525">
                   <a:solidFill>
                     <a:srgbClr val="000000"/>
                   </a:solidFill>
@@ -4111,7 +4112,7 @@
             </a:ln>
             <a:extLst>
               <a:ext uri="{91240B29-F687-4f45-9708-019B960494DF}">
-                <a14:hiddenLine xmlns:a14="http://schemas.microsoft.com/office/drawing/2010/main" xmlns="" w="9525">
+                <a14:hiddenLine xmlns="" xmlns:a14="http://schemas.microsoft.com/office/drawing/2010/main" w="9525">
                   <a:solidFill>
                     <a:srgbClr val="000000"/>
                   </a:solidFill>
@@ -4173,7 +4174,7 @@
             </a:ln>
             <a:extLst>
               <a:ext uri="{91240B29-F687-4f45-9708-019B960494DF}">
-                <a14:hiddenLine xmlns:a14="http://schemas.microsoft.com/office/drawing/2010/main" xmlns="" w="9525">
+                <a14:hiddenLine xmlns="" xmlns:a14="http://schemas.microsoft.com/office/drawing/2010/main" w="9525">
                   <a:solidFill>
                     <a:srgbClr val="000000"/>
                   </a:solidFill>
@@ -4263,7 +4264,7 @@
             </a:ln>
             <a:extLst>
               <a:ext uri="{91240B29-F687-4f45-9708-019B960494DF}">
-                <a14:hiddenLine xmlns:a14="http://schemas.microsoft.com/office/drawing/2010/main" xmlns="" w="9525">
+                <a14:hiddenLine xmlns="" xmlns:a14="http://schemas.microsoft.com/office/drawing/2010/main" w="9525">
                   <a:solidFill>
                     <a:srgbClr val="000000"/>
                   </a:solidFill>
@@ -4353,7 +4354,7 @@
             </a:ln>
             <a:extLst>
               <a:ext uri="{91240B29-F687-4f45-9708-019B960494DF}">
-                <a14:hiddenLine xmlns:a14="http://schemas.microsoft.com/office/drawing/2010/main" xmlns="" w="9525">
+                <a14:hiddenLine xmlns="" xmlns:a14="http://schemas.microsoft.com/office/drawing/2010/main" w="9525">
                   <a:solidFill>
                     <a:srgbClr val="000000"/>
                   </a:solidFill>
@@ -4415,7 +4416,7 @@
             </a:ln>
             <a:extLst>
               <a:ext uri="{91240B29-F687-4f45-9708-019B960494DF}">
-                <a14:hiddenLine xmlns:a14="http://schemas.microsoft.com/office/drawing/2010/main" xmlns="" w="9525">
+                <a14:hiddenLine xmlns="" xmlns:a14="http://schemas.microsoft.com/office/drawing/2010/main" w="9525">
                   <a:solidFill>
                     <a:srgbClr val="000000"/>
                   </a:solidFill>
@@ -4535,7 +4536,7 @@
             </a:ln>
             <a:extLst>
               <a:ext uri="{91240B29-F687-4f45-9708-019B960494DF}">
-                <a14:hiddenLine xmlns:a14="http://schemas.microsoft.com/office/drawing/2010/main" xmlns="" w="9525">
+                <a14:hiddenLine xmlns="" xmlns:a14="http://schemas.microsoft.com/office/drawing/2010/main" w="9525">
                   <a:solidFill>
                     <a:srgbClr val="000000"/>
                   </a:solidFill>
@@ -4603,7 +4604,7 @@
             </a:ln>
             <a:extLst>
               <a:ext uri="{91240B29-F687-4f45-9708-019B960494DF}">
-                <a14:hiddenLine xmlns:a14="http://schemas.microsoft.com/office/drawing/2010/main" xmlns="" w="9525">
+                <a14:hiddenLine xmlns="" xmlns:a14="http://schemas.microsoft.com/office/drawing/2010/main" w="9525">
                   <a:solidFill>
                     <a:srgbClr val="000000"/>
                   </a:solidFill>
@@ -4693,7 +4694,7 @@
             </a:ln>
             <a:extLst>
               <a:ext uri="{91240B29-F687-4f45-9708-019B960494DF}">
-                <a14:hiddenLine xmlns:a14="http://schemas.microsoft.com/office/drawing/2010/main" xmlns="" w="9525">
+                <a14:hiddenLine xmlns="" xmlns:a14="http://schemas.microsoft.com/office/drawing/2010/main" w="9525">
                   <a:solidFill>
                     <a:srgbClr val="000000"/>
                   </a:solidFill>
@@ -4833,7 +4834,7 @@
           <a:p>
             <a:fld id="{4313F670-7F9A-774D-B73D-573401E44297}" type="datetime1">
               <a:rPr lang="en-US" smtClean="0"/>
-              <a:t>8/31/26</a:t>
+              <a:t>9/3/26</a:t>
             </a:fld>
             <a:endParaRPr lang="en-US"/>
           </a:p>
@@ -5100,7 +5101,7 @@
           <a:p>
             <a:fld id="{446F9669-A8A7-2D40-9D01-B35FC337AA30}" type="datetime1">
               <a:rPr lang="en-US" smtClean="0"/>
-              <a:t>8/31/26</a:t>
+              <a:t>9/3/26</a:t>
             </a:fld>
             <a:endParaRPr lang="en-US"/>
           </a:p>
@@ -5296,7 +5297,7 @@
           <a:p>
             <a:fld id="{FA76CF18-F41B-6B48-B3E5-599E9795C2C3}" type="datetime1">
               <a:rPr lang="en-US" smtClean="0"/>
-              <a:t>8/31/26</a:t>
+              <a:t>9/3/26</a:t>
             </a:fld>
             <a:endParaRPr lang="en-US"/>
           </a:p>
@@ -5559,7 +5560,7 @@
           <a:p>
             <a:fld id="{B9654854-6457-164F-A077-6B3035079B82}" type="datetime1">
               <a:rPr lang="en-US" smtClean="0"/>
-              <a:t>8/31/26</a:t>
+              <a:t>9/3/26</a:t>
             </a:fld>
             <a:endParaRPr lang="en-US"/>
           </a:p>
@@ -5993,7 +5994,7 @@
           <a:p>
             <a:fld id="{CE3DBFD7-E611-8C40-AC73-0C29FF63F0CD}" type="datetime1">
               <a:rPr lang="en-US" smtClean="0"/>
-              <a:t>8/31/26</a:t>
+              <a:t>9/3/26</a:t>
             </a:fld>
             <a:endParaRPr lang="en-US"/>
           </a:p>
@@ -6539,7 +6540,7 @@
           <a:p>
             <a:fld id="{C8B63B06-0493-2840-9F37-30C9412BBF17}" type="datetime1">
               <a:rPr lang="en-US" smtClean="0"/>
-              <a:t>8/31/26</a:t>
+              <a:t>9/3/26</a:t>
             </a:fld>
             <a:endParaRPr lang="en-US"/>
           </a:p>
@@ -7259,7 +7260,7 @@
           <a:p>
             <a:fld id="{72B5C0FA-8C46-E84D-B6D7-B673F2CA0A0E}" type="datetime1">
               <a:rPr lang="en-US" smtClean="0"/>
-              <a:t>8/31/26</a:t>
+              <a:t>9/3/26</a:t>
             </a:fld>
             <a:endParaRPr lang="en-US"/>
           </a:p>
@@ -7429,7 +7430,7 @@
           <a:p>
             <a:fld id="{60B9CDE1-97B4-BF46-B69C-B86855B18820}" type="datetime1">
               <a:rPr lang="en-US" smtClean="0"/>
-              <a:t>8/31/26</a:t>
+              <a:t>9/3/26</a:t>
             </a:fld>
             <a:endParaRPr lang="en-US"/>
           </a:p>
@@ -7609,7 +7610,7 @@
           <a:p>
             <a:fld id="{BE51D3A4-F9E5-FD49-AA87-B395F50451DC}" type="datetime1">
               <a:rPr lang="en-US" smtClean="0"/>
-              <a:t>8/31/26</a:t>
+              <a:t>9/3/26</a:t>
             </a:fld>
             <a:endParaRPr lang="en-US"/>
           </a:p>
@@ -7779,7 +7780,7 @@
           <a:p>
             <a:fld id="{880DFB37-B0AE-9449-85EC-14F9C83B6084}" type="datetime1">
               <a:rPr lang="en-US" smtClean="0"/>
-              <a:t>8/31/26</a:t>
+              <a:t>9/3/26</a:t>
             </a:fld>
             <a:endParaRPr lang="en-US"/>
           </a:p>
@@ -8029,7 +8030,7 @@
           <a:p>
             <a:fld id="{C939124A-616E-6944-A21A-1839F5DBE7BB}" type="datetime1">
               <a:rPr lang="en-US" smtClean="0"/>
-              <a:t>8/31/26</a:t>
+              <a:t>9/3/26</a:t>
             </a:fld>
             <a:endParaRPr lang="en-US"/>
           </a:p>
@@ -8261,7 +8262,7 @@
           <a:p>
             <a:fld id="{C6E9A026-D48C-FD43-8676-CD625DD5D84B}" type="datetime1">
               <a:rPr lang="en-US" smtClean="0"/>
-              <a:t>8/31/26</a:t>
+              <a:t>9/3/26</a:t>
             </a:fld>
             <a:endParaRPr lang="en-US"/>
           </a:p>
@@ -8647,7 +8648,7 @@
           <a:p>
             <a:fld id="{EA35111E-23A3-1440-99A3-C4C665908E3D}" type="datetime1">
               <a:rPr lang="en-US" smtClean="0"/>
-              <a:t>8/31/26</a:t>
+              <a:t>9/3/26</a:t>
             </a:fld>
             <a:endParaRPr lang="en-US"/>
           </a:p>
@@ -8770,7 +8771,7 @@
           <a:p>
             <a:fld id="{249983B9-88EF-D74B-BA6D-6A3BF17C2B38}" type="datetime1">
               <a:rPr lang="en-US" smtClean="0"/>
-              <a:t>8/31/26</a:t>
+              <a:t>9/3/26</a:t>
             </a:fld>
             <a:endParaRPr lang="en-US"/>
           </a:p>
@@ -8865,7 +8866,7 @@
           <a:p>
             <a:fld id="{E2A00AEF-B4EC-084A-8DB8-A225C7981CBB}" type="datetime1">
               <a:rPr lang="en-US" smtClean="0"/>
-              <a:t>8/31/26</a:t>
+              <a:t>9/3/26</a:t>
             </a:fld>
             <a:endParaRPr lang="en-US"/>
           </a:p>
@@ -9114,7 +9115,7 @@
           <a:p>
             <a:fld id="{97860299-21CD-A94A-A7B0-44E787F8D42C}" type="datetime1">
               <a:rPr lang="en-US" smtClean="0"/>
-              <a:t>8/31/26</a:t>
+              <a:t>9/3/26</a:t>
             </a:fld>
             <a:endParaRPr lang="en-US"/>
           </a:p>
@@ -9399,7 +9400,7 @@
           <a:p>
             <a:fld id="{3DFD19CF-4E62-D246-BA61-7B528271315F}" type="datetime1">
               <a:rPr lang="en-US" smtClean="0"/>
-              <a:t>8/31/26</a:t>
+              <a:t>9/3/26</a:t>
             </a:fld>
             <a:endParaRPr lang="en-US"/>
           </a:p>
@@ -9522,7 +9523,7 @@
           <a:noFill/>
           <a:extLst>
             <a:ext uri="{909E8E84-426E-40dd-AFC4-6F175D3DCCD1}">
-              <a14:hiddenFill xmlns:a14="http://schemas.microsoft.com/office/drawing/2010/main" xmlns="">
+              <a14:hiddenFill xmlns="" xmlns:a14="http://schemas.microsoft.com/office/drawing/2010/main">
                 <a:solidFill>
                   <a:srgbClr val="FFFFFF"/>
                 </a:solidFill>
@@ -9596,7 +9597,7 @@
               </a:ln>
               <a:extLst>
                 <a:ext uri="{91240B29-F687-4f45-9708-019B960494DF}">
-                  <a14:hiddenLine xmlns:a14="http://schemas.microsoft.com/office/drawing/2010/main" xmlns="" w="9525">
+                  <a14:hiddenLine xmlns="" xmlns:a14="http://schemas.microsoft.com/office/drawing/2010/main" w="9525">
                     <a:solidFill>
                       <a:srgbClr val="000000"/>
                     </a:solidFill>
@@ -9686,7 +9687,7 @@
               </a:ln>
               <a:extLst>
                 <a:ext uri="{91240B29-F687-4f45-9708-019B960494DF}">
-                  <a14:hiddenLine xmlns:a14="http://schemas.microsoft.com/office/drawing/2010/main" xmlns="" w="9525">
+                  <a14:hiddenLine xmlns="" xmlns:a14="http://schemas.microsoft.com/office/drawing/2010/main" w="9525">
                     <a:solidFill>
                       <a:srgbClr val="000000"/>
                     </a:solidFill>
@@ -9776,7 +9777,7 @@
               </a:ln>
               <a:extLst>
                 <a:ext uri="{91240B29-F687-4f45-9708-019B960494DF}">
-                  <a14:hiddenLine xmlns:a14="http://schemas.microsoft.com/office/drawing/2010/main" xmlns="" w="9525">
+                  <a14:hiddenLine xmlns="" xmlns:a14="http://schemas.microsoft.com/office/drawing/2010/main" w="9525">
                     <a:solidFill>
                       <a:srgbClr val="000000"/>
                     </a:solidFill>
@@ -9838,7 +9839,7 @@
               </a:ln>
               <a:extLst>
                 <a:ext uri="{91240B29-F687-4f45-9708-019B960494DF}">
-                  <a14:hiddenLine xmlns:a14="http://schemas.microsoft.com/office/drawing/2010/main" xmlns="" w="9525">
+                  <a14:hiddenLine xmlns="" xmlns:a14="http://schemas.microsoft.com/office/drawing/2010/main" w="9525">
                     <a:solidFill>
                       <a:srgbClr val="000000"/>
                     </a:solidFill>
@@ -9928,7 +9929,7 @@
               </a:ln>
               <a:extLst>
                 <a:ext uri="{91240B29-F687-4f45-9708-019B960494DF}">
-                  <a14:hiddenLine xmlns:a14="http://schemas.microsoft.com/office/drawing/2010/main" xmlns="" w="9525">
+                  <a14:hiddenLine xmlns="" xmlns:a14="http://schemas.microsoft.com/office/drawing/2010/main" w="9525">
                     <a:solidFill>
                       <a:srgbClr val="000000"/>
                     </a:solidFill>
@@ -9990,7 +9991,7 @@
               </a:ln>
               <a:extLst>
                 <a:ext uri="{91240B29-F687-4f45-9708-019B960494DF}">
-                  <a14:hiddenLine xmlns:a14="http://schemas.microsoft.com/office/drawing/2010/main" xmlns="" w="9525">
+                  <a14:hiddenLine xmlns="" xmlns:a14="http://schemas.microsoft.com/office/drawing/2010/main" w="9525">
                     <a:solidFill>
                       <a:srgbClr val="000000"/>
                     </a:solidFill>
@@ -10052,7 +10053,7 @@
               </a:ln>
               <a:extLst>
                 <a:ext uri="{91240B29-F687-4f45-9708-019B960494DF}">
-                  <a14:hiddenLine xmlns:a14="http://schemas.microsoft.com/office/drawing/2010/main" xmlns="" w="9525">
+                  <a14:hiddenLine xmlns="" xmlns:a14="http://schemas.microsoft.com/office/drawing/2010/main" w="9525">
                     <a:solidFill>
                       <a:srgbClr val="000000"/>
                     </a:solidFill>
@@ -10142,7 +10143,7 @@
               </a:ln>
               <a:extLst>
                 <a:ext uri="{91240B29-F687-4f45-9708-019B960494DF}">
-                  <a14:hiddenLine xmlns:a14="http://schemas.microsoft.com/office/drawing/2010/main" xmlns="" w="9525">
+                  <a14:hiddenLine xmlns="" xmlns:a14="http://schemas.microsoft.com/office/drawing/2010/main" w="9525">
                     <a:solidFill>
                       <a:srgbClr val="000000"/>
                     </a:solidFill>
@@ -10232,7 +10233,7 @@
               </a:ln>
               <a:extLst>
                 <a:ext uri="{91240B29-F687-4f45-9708-019B960494DF}">
-                  <a14:hiddenLine xmlns:a14="http://schemas.microsoft.com/office/drawing/2010/main" xmlns="" w="9525">
+                  <a14:hiddenLine xmlns="" xmlns:a14="http://schemas.microsoft.com/office/drawing/2010/main" w="9525">
                     <a:solidFill>
                       <a:srgbClr val="000000"/>
                     </a:solidFill>
@@ -10294,7 +10295,7 @@
               </a:ln>
               <a:extLst>
                 <a:ext uri="{91240B29-F687-4f45-9708-019B960494DF}">
-                  <a14:hiddenLine xmlns:a14="http://schemas.microsoft.com/office/drawing/2010/main" xmlns="" w="9525">
+                  <a14:hiddenLine xmlns="" xmlns:a14="http://schemas.microsoft.com/office/drawing/2010/main" w="9525">
                     <a:solidFill>
                       <a:srgbClr val="000000"/>
                     </a:solidFill>
@@ -10404,7 +10405,7 @@
               </a:ln>
               <a:extLst>
                 <a:ext uri="{91240B29-F687-4f45-9708-019B960494DF}">
-                  <a14:hiddenLine xmlns:a14="http://schemas.microsoft.com/office/drawing/2010/main" xmlns="" w="9525">
+                  <a14:hiddenLine xmlns="" xmlns:a14="http://schemas.microsoft.com/office/drawing/2010/main" w="9525">
                     <a:solidFill>
                       <a:srgbClr val="000000"/>
                     </a:solidFill>
@@ -10488,7 +10489,7 @@
               </a:ln>
               <a:extLst>
                 <a:ext uri="{91240B29-F687-4f45-9708-019B960494DF}">
-                  <a14:hiddenLine xmlns:a14="http://schemas.microsoft.com/office/drawing/2010/main" xmlns="" w="9525">
+                  <a14:hiddenLine xmlns="" xmlns:a14="http://schemas.microsoft.com/office/drawing/2010/main" w="9525">
                     <a:solidFill>
                       <a:srgbClr val="000000"/>
                     </a:solidFill>
@@ -10550,7 +10551,7 @@
               </a:ln>
               <a:extLst>
                 <a:ext uri="{91240B29-F687-4f45-9708-019B960494DF}">
-                  <a14:hiddenLine xmlns:a14="http://schemas.microsoft.com/office/drawing/2010/main" xmlns="" w="9525">
+                  <a14:hiddenLine xmlns="" xmlns:a14="http://schemas.microsoft.com/office/drawing/2010/main" w="9525">
                     <a:solidFill>
                       <a:srgbClr val="000000"/>
                     </a:solidFill>
@@ -10612,7 +10613,7 @@
               </a:ln>
               <a:extLst>
                 <a:ext uri="{91240B29-F687-4f45-9708-019B960494DF}">
-                  <a14:hiddenLine xmlns:a14="http://schemas.microsoft.com/office/drawing/2010/main" xmlns="" w="9525">
+                  <a14:hiddenLine xmlns="" xmlns:a14="http://schemas.microsoft.com/office/drawing/2010/main" w="9525">
                     <a:solidFill>
                       <a:srgbClr val="000000"/>
                     </a:solidFill>
@@ -10702,7 +10703,7 @@
               </a:ln>
               <a:extLst>
                 <a:ext uri="{91240B29-F687-4f45-9708-019B960494DF}">
-                  <a14:hiddenLine xmlns:a14="http://schemas.microsoft.com/office/drawing/2010/main" xmlns="" w="9525">
+                  <a14:hiddenLine xmlns="" xmlns:a14="http://schemas.microsoft.com/office/drawing/2010/main" w="9525">
                     <a:solidFill>
                       <a:srgbClr val="000000"/>
                     </a:solidFill>
@@ -10736,7 +10737,7 @@
               </a:ln>
               <a:extLst>
                 <a:ext uri="{91240B29-F687-4f45-9708-019B960494DF}">
-                  <a14:hiddenLine xmlns:a14="http://schemas.microsoft.com/office/drawing/2010/main" xmlns="" w="9525">
+                  <a14:hiddenLine xmlns="" xmlns:a14="http://schemas.microsoft.com/office/drawing/2010/main" w="9525">
                     <a:solidFill>
                       <a:srgbClr val="000000"/>
                     </a:solidFill>
@@ -10801,7 +10802,7 @@
               </a:ln>
               <a:extLst>
                 <a:ext uri="{91240B29-F687-4f45-9708-019B960494DF}">
-                  <a14:hiddenLine xmlns:a14="http://schemas.microsoft.com/office/drawing/2010/main" xmlns="" w="9525">
+                  <a14:hiddenLine xmlns="" xmlns:a14="http://schemas.microsoft.com/office/drawing/2010/main" w="9525">
                     <a:solidFill>
                       <a:srgbClr val="000000"/>
                     </a:solidFill>
@@ -10891,7 +10892,7 @@
               </a:ln>
               <a:extLst>
                 <a:ext uri="{91240B29-F687-4f45-9708-019B960494DF}">
-                  <a14:hiddenLine xmlns:a14="http://schemas.microsoft.com/office/drawing/2010/main" xmlns="" w="9525">
+                  <a14:hiddenLine xmlns="" xmlns:a14="http://schemas.microsoft.com/office/drawing/2010/main" w="9525">
                     <a:solidFill>
                       <a:srgbClr val="000000"/>
                     </a:solidFill>
@@ -10953,7 +10954,7 @@
               </a:ln>
               <a:extLst>
                 <a:ext uri="{91240B29-F687-4f45-9708-019B960494DF}">
-                  <a14:hiddenLine xmlns:a14="http://schemas.microsoft.com/office/drawing/2010/main" xmlns="" w="9525">
+                  <a14:hiddenLine xmlns="" xmlns:a14="http://schemas.microsoft.com/office/drawing/2010/main" w="9525">
                     <a:solidFill>
                       <a:srgbClr val="000000"/>
                     </a:solidFill>
@@ -11043,7 +11044,7 @@
               </a:ln>
               <a:extLst>
                 <a:ext uri="{91240B29-F687-4f45-9708-019B960494DF}">
-                  <a14:hiddenLine xmlns:a14="http://schemas.microsoft.com/office/drawing/2010/main" xmlns="" w="9525">
+                  <a14:hiddenLine xmlns="" xmlns:a14="http://schemas.microsoft.com/office/drawing/2010/main" w="9525">
                     <a:solidFill>
                       <a:srgbClr val="000000"/>
                     </a:solidFill>
@@ -11108,7 +11109,7 @@
               </a:ln>
               <a:extLst>
                 <a:ext uri="{91240B29-F687-4f45-9708-019B960494DF}">
-                  <a14:hiddenLine xmlns:a14="http://schemas.microsoft.com/office/drawing/2010/main" xmlns="" w="9525">
+                  <a14:hiddenLine xmlns="" xmlns:a14="http://schemas.microsoft.com/office/drawing/2010/main" w="9525">
                     <a:solidFill>
                       <a:srgbClr val="000000"/>
                     </a:solidFill>
@@ -11170,7 +11171,7 @@
               </a:ln>
               <a:extLst>
                 <a:ext uri="{91240B29-F687-4f45-9708-019B960494DF}">
-                  <a14:hiddenLine xmlns:a14="http://schemas.microsoft.com/office/drawing/2010/main" xmlns="" w="9525">
+                  <a14:hiddenLine xmlns="" xmlns:a14="http://schemas.microsoft.com/office/drawing/2010/main" w="9525">
                     <a:solidFill>
                       <a:srgbClr val="000000"/>
                     </a:solidFill>
@@ -11260,7 +11261,7 @@
               </a:ln>
               <a:extLst>
                 <a:ext uri="{91240B29-F687-4f45-9708-019B960494DF}">
-                  <a14:hiddenLine xmlns:a14="http://schemas.microsoft.com/office/drawing/2010/main" xmlns="" w="9525">
+                  <a14:hiddenLine xmlns="" xmlns:a14="http://schemas.microsoft.com/office/drawing/2010/main" w="9525">
                     <a:solidFill>
                       <a:srgbClr val="000000"/>
                     </a:solidFill>
@@ -11350,7 +11351,7 @@
               </a:ln>
               <a:extLst>
                 <a:ext uri="{91240B29-F687-4f45-9708-019B960494DF}">
-                  <a14:hiddenLine xmlns:a14="http://schemas.microsoft.com/office/drawing/2010/main" xmlns="" w="9525">
+                  <a14:hiddenLine xmlns="" xmlns:a14="http://schemas.microsoft.com/office/drawing/2010/main" w="9525">
                     <a:solidFill>
                       <a:srgbClr val="000000"/>
                     </a:solidFill>
@@ -11415,7 +11416,7 @@
               </a:ln>
               <a:extLst>
                 <a:ext uri="{91240B29-F687-4f45-9708-019B960494DF}">
-                  <a14:hiddenLine xmlns:a14="http://schemas.microsoft.com/office/drawing/2010/main" xmlns="" w="9525">
+                  <a14:hiddenLine xmlns="" xmlns:a14="http://schemas.microsoft.com/office/drawing/2010/main" w="9525">
                     <a:solidFill>
                       <a:srgbClr val="000000"/>
                     </a:solidFill>
@@ -11535,7 +11536,7 @@
               </a:ln>
               <a:extLst>
                 <a:ext uri="{91240B29-F687-4f45-9708-019B960494DF}">
-                  <a14:hiddenLine xmlns:a14="http://schemas.microsoft.com/office/drawing/2010/main" xmlns="" w="9525">
+                  <a14:hiddenLine xmlns="" xmlns:a14="http://schemas.microsoft.com/office/drawing/2010/main" w="9525">
                     <a:solidFill>
                       <a:srgbClr val="000000"/>
                     </a:solidFill>
@@ -11616,7 +11617,7 @@
               </a:ln>
               <a:extLst>
                 <a:ext uri="{91240B29-F687-4f45-9708-019B960494DF}">
-                  <a14:hiddenLine xmlns:a14="http://schemas.microsoft.com/office/drawing/2010/main" xmlns="" w="9525">
+                  <a14:hiddenLine xmlns="" xmlns:a14="http://schemas.microsoft.com/office/drawing/2010/main" w="9525">
                     <a:solidFill>
                       <a:srgbClr val="000000"/>
                     </a:solidFill>
@@ -11731,7 +11732,7 @@
               </a:ln>
               <a:extLst>
                 <a:ext uri="{91240B29-F687-4f45-9708-019B960494DF}">
-                  <a14:hiddenLine xmlns:a14="http://schemas.microsoft.com/office/drawing/2010/main" xmlns="" w="9525">
+                  <a14:hiddenLine xmlns="" xmlns:a14="http://schemas.microsoft.com/office/drawing/2010/main" w="9525">
                     <a:solidFill>
                       <a:srgbClr val="000000"/>
                     </a:solidFill>
@@ -11821,7 +11822,7 @@
               </a:ln>
               <a:extLst>
                 <a:ext uri="{91240B29-F687-4f45-9708-019B960494DF}">
-                  <a14:hiddenLine xmlns:a14="http://schemas.microsoft.com/office/drawing/2010/main" xmlns="" w="9525">
+                  <a14:hiddenLine xmlns="" xmlns:a14="http://schemas.microsoft.com/office/drawing/2010/main" w="9525">
                     <a:solidFill>
                       <a:srgbClr val="000000"/>
                     </a:solidFill>
@@ -11886,7 +11887,7 @@
               </a:ln>
               <a:extLst>
                 <a:ext uri="{91240B29-F687-4f45-9708-019B960494DF}">
-                  <a14:hiddenLine xmlns:a14="http://schemas.microsoft.com/office/drawing/2010/main" xmlns="" w="9525">
+                  <a14:hiddenLine xmlns="" xmlns:a14="http://schemas.microsoft.com/office/drawing/2010/main" w="9525">
                     <a:solidFill>
                       <a:srgbClr val="000000"/>
                     </a:solidFill>
@@ -11976,7 +11977,7 @@
               </a:ln>
               <a:extLst>
                 <a:ext uri="{91240B29-F687-4f45-9708-019B960494DF}">
-                  <a14:hiddenLine xmlns:a14="http://schemas.microsoft.com/office/drawing/2010/main" xmlns="" w="9525">
+                  <a14:hiddenLine xmlns="" xmlns:a14="http://schemas.microsoft.com/office/drawing/2010/main" w="9525">
                     <a:solidFill>
                       <a:srgbClr val="000000"/>
                     </a:solidFill>
@@ -12044,7 +12045,7 @@
               </a:ln>
               <a:extLst>
                 <a:ext uri="{91240B29-F687-4f45-9708-019B960494DF}">
-                  <a14:hiddenLine xmlns:a14="http://schemas.microsoft.com/office/drawing/2010/main" xmlns="" w="9525">
+                  <a14:hiddenLine xmlns="" xmlns:a14="http://schemas.microsoft.com/office/drawing/2010/main" w="9525">
                     <a:solidFill>
                       <a:srgbClr val="000000"/>
                     </a:solidFill>
@@ -12134,7 +12135,7 @@
               </a:ln>
               <a:extLst>
                 <a:ext uri="{91240B29-F687-4f45-9708-019B960494DF}">
-                  <a14:hiddenLine xmlns:a14="http://schemas.microsoft.com/office/drawing/2010/main" xmlns="" w="9525">
+                  <a14:hiddenLine xmlns="" xmlns:a14="http://schemas.microsoft.com/office/drawing/2010/main" w="9525">
                     <a:solidFill>
                       <a:srgbClr val="000000"/>
                     </a:solidFill>
@@ -12202,7 +12203,7 @@
               </a:ln>
               <a:extLst>
                 <a:ext uri="{91240B29-F687-4f45-9708-019B960494DF}">
-                  <a14:hiddenLine xmlns:a14="http://schemas.microsoft.com/office/drawing/2010/main" xmlns="" w="9525">
+                  <a14:hiddenLine xmlns="" xmlns:a14="http://schemas.microsoft.com/office/drawing/2010/main" w="9525">
                     <a:solidFill>
                       <a:srgbClr val="000000"/>
                     </a:solidFill>
@@ -12292,7 +12293,7 @@
               </a:ln>
               <a:extLst>
                 <a:ext uri="{91240B29-F687-4f45-9708-019B960494DF}">
-                  <a14:hiddenLine xmlns:a14="http://schemas.microsoft.com/office/drawing/2010/main" xmlns="" w="9525">
+                  <a14:hiddenLine xmlns="" xmlns:a14="http://schemas.microsoft.com/office/drawing/2010/main" w="9525">
                     <a:solidFill>
                       <a:srgbClr val="000000"/>
                     </a:solidFill>
@@ -12326,7 +12327,7 @@
               </a:ln>
               <a:extLst>
                 <a:ext uri="{91240B29-F687-4f45-9708-019B960494DF}">
-                  <a14:hiddenLine xmlns:a14="http://schemas.microsoft.com/office/drawing/2010/main" xmlns="" w="9525">
+                  <a14:hiddenLine xmlns="" xmlns:a14="http://schemas.microsoft.com/office/drawing/2010/main" w="9525">
                     <a:solidFill>
                       <a:srgbClr val="000000"/>
                     </a:solidFill>
@@ -12466,7 +12467,7 @@
           <a:p>
             <a:fld id="{92FF8978-FE14-CC4A-93A6-934EB06543C0}" type="datetime1">
               <a:rPr lang="en-US" smtClean="0"/>
-              <a:t>8/31/26</a:t>
+              <a:t>9/3/26</a:t>
             </a:fld>
             <a:endParaRPr lang="en-US"/>
           </a:p>
@@ -13447,6 +13448,304 @@
   <p:cSld>
     <p:spTree>
       <p:nvGrpSpPr>
+        <p:cNvPr id="1" name="">
+          <a:extLst>
+            <a:ext uri="{FF2B5EF4-FFF2-40B4-BE49-F238E27FC236}">
+              <a16:creationId xmlns:a16="http://schemas.microsoft.com/office/drawing/2014/main" id="{907B1675-49DF-67C9-1FAF-5C90913689D9}"/>
+            </a:ext>
+          </a:extLst>
+        </p:cNvPr>
+        <p:cNvGrpSpPr/>
+        <p:nvPr/>
+      </p:nvGrpSpPr>
+      <p:grpSpPr>
+        <a:xfrm>
+          <a:off x="0" y="0"/>
+          <a:ext cx="0" cy="0"/>
+          <a:chOff x="0" y="0"/>
+          <a:chExt cx="0" cy="0"/>
+        </a:xfrm>
+      </p:grpSpPr>
+      <p:sp>
+        <p:nvSpPr>
+          <p:cNvPr id="6146" name="Rectangle 2">
+            <a:extLst>
+              <a:ext uri="{FF2B5EF4-FFF2-40B4-BE49-F238E27FC236}">
+                <a16:creationId xmlns:a16="http://schemas.microsoft.com/office/drawing/2014/main" id="{ABFB7E90-8A54-F2EA-2394-86E45E5E40AC}"/>
+              </a:ext>
+            </a:extLst>
+          </p:cNvPr>
+          <p:cNvSpPr>
+            <a:spLocks noGrp="1" noChangeArrowheads="1"/>
+          </p:cNvSpPr>
+          <p:nvPr>
+            <p:ph type="title"/>
+            <p:custDataLst>
+              <p:tags r:id="rId1"/>
+            </p:custDataLst>
+          </p:nvPr>
+        </p:nvSpPr>
+        <p:spPr>
+          <a:xfrm>
+            <a:off x="1141413" y="284084"/>
+            <a:ext cx="9905998" cy="620791"/>
+          </a:xfrm>
+        </p:spPr>
+        <p:txBody>
+          <a:bodyPr/>
+          <a:lstStyle/>
+          <a:p>
+            <a:pPr algn="ctr"/>
+            <a:r>
+              <a:rPr lang="en-US" dirty="0"/>
+              <a:t>Lecture 4 - Thursday, Sep. 3</a:t>
+            </a:r>
+          </a:p>
+        </p:txBody>
+      </p:sp>
+      <p:sp>
+        <p:nvSpPr>
+          <p:cNvPr id="6147" name="Rectangle 3">
+            <a:extLst>
+              <a:ext uri="{FF2B5EF4-FFF2-40B4-BE49-F238E27FC236}">
+                <a16:creationId xmlns:a16="http://schemas.microsoft.com/office/drawing/2014/main" id="{7211D196-1060-AFCA-137B-4611930C381A}"/>
+              </a:ext>
+            </a:extLst>
+          </p:cNvPr>
+          <p:cNvSpPr>
+            <a:spLocks noGrp="1" noChangeArrowheads="1"/>
+          </p:cNvSpPr>
+          <p:nvPr>
+            <p:ph idx="1"/>
+            <p:custDataLst>
+              <p:tags r:id="rId2"/>
+            </p:custDataLst>
+          </p:nvPr>
+        </p:nvSpPr>
+        <p:spPr>
+          <a:xfrm>
+            <a:off x="1294151" y="1098549"/>
+            <a:ext cx="9600522" cy="5149850"/>
+          </a:xfrm>
+        </p:spPr>
+        <p:txBody>
+          <a:bodyPr>
+            <a:normAutofit fontScale="92500" lnSpcReduction="10000"/>
+          </a:bodyPr>
+          <a:lstStyle/>
+          <a:p>
+            <a:r>
+              <a:rPr lang="en-US" dirty="0">
+                <a:latin typeface="Arial" panose="020B0604020202020204" pitchFamily="34" charset="0"/>
+                <a:cs typeface="Arial" panose="020B0604020202020204" pitchFamily="34" charset="0"/>
+              </a:rPr>
+              <a:t>Welcome to September, hopefully temp cools down soon?</a:t>
+            </a:r>
+          </a:p>
+          <a:p>
+            <a:r>
+              <a:rPr lang="en-US" dirty="0">
+                <a:latin typeface="Arial" panose="020B0604020202020204" pitchFamily="34" charset="0"/>
+                <a:cs typeface="Arial" panose="020B0604020202020204" pitchFamily="34" charset="0"/>
+              </a:rPr>
+              <a:t>Please remember </a:t>
+            </a:r>
+            <a:r>
+              <a:rPr lang="en-US" b="1" i="1" u="sng" dirty="0">
+                <a:latin typeface="Arial" panose="020B0604020202020204" pitchFamily="34" charset="0"/>
+                <a:cs typeface="Arial" panose="020B0604020202020204" pitchFamily="34" charset="0"/>
+              </a:rPr>
+              <a:t>no laptops / phones</a:t>
+            </a:r>
+            <a:r>
+              <a:rPr lang="en-US" dirty="0">
+                <a:latin typeface="Arial" panose="020B0604020202020204" pitchFamily="34" charset="0"/>
+                <a:cs typeface="Arial" panose="020B0604020202020204" pitchFamily="34" charset="0"/>
+              </a:rPr>
+              <a:t> and </a:t>
+            </a:r>
+            <a:r>
+              <a:rPr lang="en-US" b="1" i="1" u="sng" dirty="0">
+                <a:latin typeface="Arial" panose="020B0604020202020204" pitchFamily="34" charset="0"/>
+                <a:cs typeface="Arial" panose="020B0604020202020204" pitchFamily="34" charset="0"/>
+              </a:rPr>
+              <a:t>attendance policy</a:t>
+            </a:r>
+          </a:p>
+          <a:p>
+            <a:r>
+              <a:rPr lang="en-US" dirty="0">
+                <a:latin typeface="Arial" panose="020B0604020202020204" pitchFamily="34" charset="0"/>
+                <a:cs typeface="Arial" panose="020B0604020202020204" pitchFamily="34" charset="0"/>
+              </a:rPr>
+              <a:t>First homework  is due </a:t>
+            </a:r>
+            <a:r>
+              <a:rPr lang="en-US" b="1" i="1" u="sng" dirty="0">
+                <a:latin typeface="Arial" panose="020B0604020202020204" pitchFamily="34" charset="0"/>
+                <a:cs typeface="Arial" panose="020B0604020202020204" pitchFamily="34" charset="0"/>
+              </a:rPr>
+              <a:t>Tonight!</a:t>
+            </a:r>
+          </a:p>
+          <a:p>
+            <a:pPr lvl="1"/>
+            <a:r>
+              <a:rPr lang="en-US" dirty="0">
+                <a:latin typeface="Arial" panose="020B0604020202020204" pitchFamily="34" charset="0"/>
+                <a:cs typeface="Arial" panose="020B0604020202020204" pitchFamily="34" charset="0"/>
+              </a:rPr>
+              <a:t>Remember you can get an extension by filling out form linked on HW page</a:t>
+            </a:r>
+          </a:p>
+          <a:p>
+            <a:pPr lvl="1"/>
+            <a:r>
+              <a:rPr lang="en-US" dirty="0">
+                <a:latin typeface="Arial" panose="020B0604020202020204" pitchFamily="34" charset="0"/>
+                <a:cs typeface="Arial" panose="020B0604020202020204" pitchFamily="34" charset="0"/>
+              </a:rPr>
+              <a:t>Remember that we want count(</a:t>
+            </a:r>
+            <a:r>
+              <a:rPr lang="en-US" dirty="0" err="1">
+                <a:latin typeface="Arial" panose="020B0604020202020204" pitchFamily="34" charset="0"/>
+                <a:cs typeface="Arial" panose="020B0604020202020204" pitchFamily="34" charset="0"/>
+              </a:rPr>
+              <a:t>on_time_submissions</a:t>
+            </a:r>
+            <a:r>
+              <a:rPr lang="en-US" dirty="0">
+                <a:latin typeface="Arial" panose="020B0604020202020204" pitchFamily="34" charset="0"/>
+                <a:cs typeface="Arial" panose="020B0604020202020204" pitchFamily="34" charset="0"/>
+              </a:rPr>
+              <a:t>)/</a:t>
+            </a:r>
+            <a:r>
+              <a:rPr lang="en-US" dirty="0" err="1">
+                <a:latin typeface="Arial" panose="020B0604020202020204" pitchFamily="34" charset="0"/>
+                <a:cs typeface="Arial" panose="020B0604020202020204" pitchFamily="34" charset="0"/>
+              </a:rPr>
+              <a:t>num_students</a:t>
+            </a:r>
+            <a:r>
+              <a:rPr lang="en-US" dirty="0">
+                <a:latin typeface="Arial" panose="020B0604020202020204" pitchFamily="34" charset="0"/>
+                <a:cs typeface="Arial" panose="020B0604020202020204" pitchFamily="34" charset="0"/>
+              </a:rPr>
+              <a:t> &gt;= -.75</a:t>
+            </a:r>
+          </a:p>
+          <a:p>
+            <a:r>
+              <a:rPr lang="en-US" dirty="0">
+                <a:latin typeface="Arial" panose="020B0604020202020204" pitchFamily="34" charset="0"/>
+                <a:cs typeface="Arial" panose="020B0604020202020204" pitchFamily="34" charset="0"/>
+              </a:rPr>
+              <a:t>CBTF Practice Quiz</a:t>
+            </a:r>
+          </a:p>
+          <a:p>
+            <a:pPr lvl="1"/>
+            <a:r>
+              <a:rPr lang="en-US" dirty="0">
+                <a:latin typeface="Arial" panose="020B0604020202020204" pitchFamily="34" charset="0"/>
+                <a:cs typeface="Arial" panose="020B0604020202020204" pitchFamily="34" charset="0"/>
+              </a:rPr>
+              <a:t>Please make a </a:t>
+            </a:r>
+            <a:r>
+              <a:rPr lang="en-US" dirty="0" err="1">
+                <a:latin typeface="Arial" panose="020B0604020202020204" pitchFamily="34" charset="0"/>
+                <a:cs typeface="Arial" panose="020B0604020202020204" pitchFamily="34" charset="0"/>
+              </a:rPr>
+              <a:t>PrairieLearn</a:t>
+            </a:r>
+            <a:r>
+              <a:rPr lang="en-US" dirty="0">
+                <a:latin typeface="Arial" panose="020B0604020202020204" pitchFamily="34" charset="0"/>
+                <a:cs typeface="Arial" panose="020B0604020202020204" pitchFamily="34" charset="0"/>
+              </a:rPr>
+              <a:t>/</a:t>
+            </a:r>
+            <a:r>
+              <a:rPr lang="en-US" dirty="0" err="1">
+                <a:latin typeface="Arial" panose="020B0604020202020204" pitchFamily="34" charset="0"/>
+                <a:cs typeface="Arial" panose="020B0604020202020204" pitchFamily="34" charset="0"/>
+              </a:rPr>
+              <a:t>PrairieTest</a:t>
+            </a:r>
+            <a:r>
+              <a:rPr lang="en-US" dirty="0">
+                <a:latin typeface="Arial" panose="020B0604020202020204" pitchFamily="34" charset="0"/>
+                <a:cs typeface="Arial" panose="020B0604020202020204" pitchFamily="34" charset="0"/>
+              </a:rPr>
+              <a:t> account NOW</a:t>
+            </a:r>
+          </a:p>
+          <a:p>
+            <a:pPr lvl="1"/>
+            <a:r>
+              <a:rPr lang="en-US" dirty="0">
+                <a:latin typeface="Arial" panose="020B0604020202020204" pitchFamily="34" charset="0"/>
+                <a:cs typeface="Arial" panose="020B0604020202020204" pitchFamily="34" charset="0"/>
+              </a:rPr>
+              <a:t>Practice Quiz is LIVE now. Make a reservation. You have until 9/11!!!</a:t>
+            </a:r>
+          </a:p>
+          <a:p>
+            <a:r>
+              <a:rPr lang="en-US" dirty="0">
+                <a:latin typeface="Arial" panose="020B0604020202020204" pitchFamily="34" charset="0"/>
+                <a:cs typeface="Arial" panose="020B0604020202020204" pitchFamily="34" charset="0"/>
+              </a:rPr>
+              <a:t>First real quiz is 9/22 (but we have some time before that arrives)</a:t>
+            </a:r>
+          </a:p>
+          <a:p>
+            <a:r>
+              <a:rPr lang="en-US" dirty="0">
+                <a:latin typeface="Arial" panose="020B0604020202020204" pitchFamily="34" charset="0"/>
+                <a:cs typeface="Arial" panose="020B0604020202020204" pitchFamily="34" charset="0"/>
+              </a:rPr>
+              <a:t>These slides are linked on the course webpage “slides” page.</a:t>
+            </a:r>
+          </a:p>
+          <a:p>
+            <a:r>
+              <a:rPr lang="en-US" dirty="0">
+                <a:latin typeface="Arial" panose="020B0604020202020204" pitchFamily="34" charset="0"/>
+                <a:cs typeface="Arial" panose="020B0604020202020204" pitchFamily="34" charset="0"/>
+              </a:rPr>
+              <a:t>Today we will continue with module 1 on regular languages.</a:t>
+            </a:r>
+          </a:p>
+          <a:p>
+            <a:endParaRPr lang="en-US" dirty="0">
+              <a:latin typeface="Arial" panose="020B0604020202020204" pitchFamily="34" charset="0"/>
+              <a:cs typeface="Arial" panose="020B0604020202020204" pitchFamily="34" charset="0"/>
+            </a:endParaRPr>
+          </a:p>
+        </p:txBody>
+      </p:sp>
+    </p:spTree>
+    <p:extLst>
+      <p:ext uri="{BB962C8B-B14F-4D97-AF65-F5344CB8AC3E}">
+        <p14:creationId xmlns:p14="http://schemas.microsoft.com/office/powerpoint/2010/main" val="3993108104"/>
+      </p:ext>
+    </p:extLst>
+  </p:cSld>
+  <p:clrMapOvr>
+    <a:masterClrMapping/>
+  </p:clrMapOvr>
+</p:sld>
+</file>
+
+<file path=ppt/slides/slide5.xml><?xml version="1.0" encoding="utf-8"?>
+<p:sld xmlns:a="http://schemas.openxmlformats.org/drawingml/2006/main" xmlns:r="http://schemas.openxmlformats.org/officeDocument/2006/relationships" xmlns:p="http://schemas.openxmlformats.org/presentationml/2006/main">
+  <p:cSld>
+    <p:spTree>
+      <p:nvGrpSpPr>
         <p:cNvPr id="1" name=""/>
         <p:cNvGrpSpPr/>
         <p:nvPr/>
@@ -13783,7 +14082,7 @@
           <p:nvPr>
             <p:extLst>
               <p:ext uri="{D42A27DB-BD31-4B8C-83A1-F6EECF244321}">
-                <p14:modId xmlns:p14="http://schemas.microsoft.com/office/powerpoint/2010/main" val="828126631"/>
+                <p14:modId xmlns:p14="http://schemas.microsoft.com/office/powerpoint/2010/main" val="2563026776"/>
               </p:ext>
             </p:extLst>
           </p:nvPr>
@@ -13879,7 +14178,7 @@
                       <a:pPr algn="ctr"/>
                       <a:r>
                         <a:rPr lang="en-US" i="0" dirty="0"/>
-                        <a:t>2</a:t>
+                        <a:t>3</a:t>
                       </a:r>
                     </a:p>
                   </a:txBody>
@@ -13893,7 +14192,7 @@
                       <a:pPr algn="ctr"/>
                       <a:r>
                         <a:rPr lang="en-US" i="0" dirty="0"/>
-                        <a:t>2</a:t>
+                        <a:t>3</a:t>
                       </a:r>
                     </a:p>
                   </a:txBody>
@@ -14456,7 +14755,7 @@
         </p:nvSpPr>
         <p:spPr>
           <a:xfrm>
-            <a:off x="6914097" y="1455136"/>
+            <a:off x="6914097" y="1078065"/>
             <a:ext cx="1251889" cy="733064"/>
           </a:xfrm>
           <a:prstGeom prst="rect">
@@ -14677,13 +14976,13 @@
           <p:nvPr>
             <p:extLst>
               <p:ext uri="{D42A27DB-BD31-4B8C-83A1-F6EECF244321}">
-                <p14:modId xmlns:p14="http://schemas.microsoft.com/office/powerpoint/2010/main" val="666245484"/>
+                <p14:modId xmlns:p14="http://schemas.microsoft.com/office/powerpoint/2010/main" val="2364054325"/>
               </p:ext>
             </p:extLst>
           </p:nvPr>
         </p:nvGraphicFramePr>
         <p:xfrm>
-          <a:off x="8062617" y="1379730"/>
+          <a:off x="8062617" y="1002659"/>
           <a:ext cx="2751151" cy="741680"/>
         </p:xfrm>
         <a:graphic>
@@ -14773,7 +15072,7 @@
                       <a:pPr algn="ctr"/>
                       <a:r>
                         <a:rPr lang="en-US" i="0" dirty="0"/>
-                        <a:t>0</a:t>
+                        <a:t>1</a:t>
                       </a:r>
                     </a:p>
                   </a:txBody>
@@ -14787,7 +15086,7 @@
                       <a:pPr algn="ctr"/>
                       <a:r>
                         <a:rPr lang="en-US" i="0" dirty="0"/>
-                        <a:t>0</a:t>
+                        <a:t>1</a:t>
                       </a:r>
                     </a:p>
                   </a:txBody>
@@ -14801,7 +15100,7 @@
                       <a:pPr algn="ctr"/>
                       <a:r>
                         <a:rPr lang="en-US" b="1" i="0" dirty="0"/>
-                        <a:t>N/A</a:t>
+                        <a:t>100%</a:t>
                       </a:r>
                     </a:p>
                   </a:txBody>
@@ -15065,7 +15364,7 @@
           <p:nvPr>
             <p:extLst>
               <p:ext uri="{D42A27DB-BD31-4B8C-83A1-F6EECF244321}">
-                <p14:modId xmlns:p14="http://schemas.microsoft.com/office/powerpoint/2010/main" val="2827406846"/>
+                <p14:modId xmlns:p14="http://schemas.microsoft.com/office/powerpoint/2010/main" val="2368157879"/>
               </p:ext>
             </p:extLst>
           </p:nvPr>
@@ -15161,7 +15460,7 @@
                       <a:pPr algn="ctr"/>
                       <a:r>
                         <a:rPr lang="en-US" i="0" dirty="0"/>
-                        <a:t>2</a:t>
+                        <a:t>3</a:t>
                       </a:r>
                     </a:p>
                   </a:txBody>
@@ -15175,7 +15474,7 @@
                       <a:pPr algn="ctr"/>
                       <a:r>
                         <a:rPr lang="en-US" i="0" dirty="0"/>
-                        <a:t>2</a:t>
+                        <a:t>3</a:t>
                       </a:r>
                     </a:p>
                   </a:txBody>
@@ -15205,6 +15504,387 @@
           </a:graphicData>
         </a:graphic>
       </p:graphicFrame>
+      <p:sp>
+        <p:nvSpPr>
+          <p:cNvPr id="7" name="Rectangle 3">
+            <a:extLst>
+              <a:ext uri="{FF2B5EF4-FFF2-40B4-BE49-F238E27FC236}">
+                <a16:creationId xmlns:a16="http://schemas.microsoft.com/office/drawing/2014/main" id="{43CE6A2D-8C72-768E-6CFF-93DD583C6C20}"/>
+              </a:ext>
+            </a:extLst>
+          </p:cNvPr>
+          <p:cNvSpPr txBox="1">
+            <a:spLocks noChangeArrowheads="1"/>
+          </p:cNvSpPr>
+          <p:nvPr>
+            <p:custDataLst>
+              <p:tags r:id="rId6"/>
+            </p:custDataLst>
+          </p:nvPr>
+        </p:nvSpPr>
+        <p:spPr>
+          <a:xfrm>
+            <a:off x="6906238" y="1994037"/>
+            <a:ext cx="1251889" cy="733064"/>
+          </a:xfrm>
+          <a:prstGeom prst="rect">
+            <a:avLst/>
+          </a:prstGeom>
+        </p:spPr>
+        <p:txBody>
+          <a:bodyPr vert="horz" lIns="91440" tIns="45720" rIns="91440" bIns="45720" rtlCol="0">
+            <a:normAutofit fontScale="92500"/>
+          </a:bodyPr>
+          <a:lstStyle>
+            <a:lvl1pPr marL="228600" indent="-228600" algn="l" defTabSz="914400" rtl="0" eaLnBrk="1" latinLnBrk="0" hangingPunct="1">
+              <a:lnSpc>
+                <a:spcPct val="120000"/>
+              </a:lnSpc>
+              <a:spcBef>
+                <a:spcPts val="1000"/>
+              </a:spcBef>
+              <a:buSzPct val="125000"/>
+              <a:buFont typeface="Arial" panose="020B0604020202020204" pitchFamily="34" charset="0"/>
+              <a:buChar char="•"/>
+              <a:defRPr sz="2400" kern="1200">
+                <a:solidFill>
+                  <a:schemeClr val="tx1"/>
+                </a:solidFill>
+                <a:latin typeface="+mn-lt"/>
+                <a:ea typeface="+mn-ea"/>
+                <a:cs typeface="+mn-cs"/>
+              </a:defRPr>
+            </a:lvl1pPr>
+            <a:lvl2pPr marL="685800" indent="-228600" algn="l" defTabSz="914400" rtl="0" eaLnBrk="1" latinLnBrk="0" hangingPunct="1">
+              <a:lnSpc>
+                <a:spcPct val="120000"/>
+              </a:lnSpc>
+              <a:spcBef>
+                <a:spcPts val="500"/>
+              </a:spcBef>
+              <a:buSzPct val="125000"/>
+              <a:buFont typeface="Arial" panose="020B0604020202020204" pitchFamily="34" charset="0"/>
+              <a:buChar char="•"/>
+              <a:defRPr sz="2000" kern="1200">
+                <a:solidFill>
+                  <a:schemeClr val="tx1"/>
+                </a:solidFill>
+                <a:latin typeface="+mn-lt"/>
+                <a:ea typeface="+mn-ea"/>
+                <a:cs typeface="+mn-cs"/>
+              </a:defRPr>
+            </a:lvl2pPr>
+            <a:lvl3pPr marL="1143000" indent="-228600" algn="l" defTabSz="914400" rtl="0" eaLnBrk="1" latinLnBrk="0" hangingPunct="1">
+              <a:lnSpc>
+                <a:spcPct val="120000"/>
+              </a:lnSpc>
+              <a:spcBef>
+                <a:spcPts val="500"/>
+              </a:spcBef>
+              <a:buSzPct val="125000"/>
+              <a:buFont typeface="Arial" panose="020B0604020202020204" pitchFamily="34" charset="0"/>
+              <a:buChar char="•"/>
+              <a:defRPr sz="1800" kern="1200">
+                <a:solidFill>
+                  <a:schemeClr val="tx1"/>
+                </a:solidFill>
+                <a:latin typeface="+mn-lt"/>
+                <a:ea typeface="+mn-ea"/>
+                <a:cs typeface="+mn-cs"/>
+              </a:defRPr>
+            </a:lvl3pPr>
+            <a:lvl4pPr marL="1600200" indent="-228600" algn="l" defTabSz="914400" rtl="0" eaLnBrk="1" latinLnBrk="0" hangingPunct="1">
+              <a:lnSpc>
+                <a:spcPct val="120000"/>
+              </a:lnSpc>
+              <a:spcBef>
+                <a:spcPts val="500"/>
+              </a:spcBef>
+              <a:buSzPct val="125000"/>
+              <a:buFont typeface="Arial" panose="020B0604020202020204" pitchFamily="34" charset="0"/>
+              <a:buChar char="•"/>
+              <a:defRPr sz="1600" kern="1200">
+                <a:solidFill>
+                  <a:schemeClr val="tx1"/>
+                </a:solidFill>
+                <a:latin typeface="+mn-lt"/>
+                <a:ea typeface="+mn-ea"/>
+                <a:cs typeface="+mn-cs"/>
+              </a:defRPr>
+            </a:lvl4pPr>
+            <a:lvl5pPr marL="2057400" indent="-228600" algn="l" defTabSz="914400" rtl="0" eaLnBrk="1" latinLnBrk="0" hangingPunct="1">
+              <a:lnSpc>
+                <a:spcPct val="120000"/>
+              </a:lnSpc>
+              <a:spcBef>
+                <a:spcPts val="500"/>
+              </a:spcBef>
+              <a:buSzPct val="125000"/>
+              <a:buFont typeface="Arial" panose="020B0604020202020204" pitchFamily="34" charset="0"/>
+              <a:buChar char="•"/>
+              <a:defRPr sz="1600" kern="1200">
+                <a:solidFill>
+                  <a:schemeClr val="tx1"/>
+                </a:solidFill>
+                <a:latin typeface="+mn-lt"/>
+                <a:ea typeface="+mn-ea"/>
+                <a:cs typeface="+mn-cs"/>
+              </a:defRPr>
+            </a:lvl5pPr>
+            <a:lvl6pPr marL="2514600" indent="-228600" algn="l" defTabSz="914400" rtl="0" eaLnBrk="1" latinLnBrk="0" hangingPunct="1">
+              <a:lnSpc>
+                <a:spcPct val="120000"/>
+              </a:lnSpc>
+              <a:spcBef>
+                <a:spcPts val="500"/>
+              </a:spcBef>
+              <a:buSzPct val="125000"/>
+              <a:buFont typeface="Arial" panose="020B0604020202020204" pitchFamily="34" charset="0"/>
+              <a:buChar char="•"/>
+              <a:defRPr sz="1400" kern="1200">
+                <a:solidFill>
+                  <a:schemeClr val="tx1"/>
+                </a:solidFill>
+                <a:latin typeface="+mn-lt"/>
+                <a:ea typeface="+mn-ea"/>
+                <a:cs typeface="+mn-cs"/>
+              </a:defRPr>
+            </a:lvl6pPr>
+            <a:lvl7pPr marL="2971800" indent="-228600" algn="l" defTabSz="914400" rtl="0" eaLnBrk="1" latinLnBrk="0" hangingPunct="1">
+              <a:lnSpc>
+                <a:spcPct val="120000"/>
+              </a:lnSpc>
+              <a:spcBef>
+                <a:spcPts val="500"/>
+              </a:spcBef>
+              <a:buSzPct val="125000"/>
+              <a:buFont typeface="Arial" panose="020B0604020202020204" pitchFamily="34" charset="0"/>
+              <a:buChar char="•"/>
+              <a:defRPr sz="1400" kern="1200">
+                <a:solidFill>
+                  <a:schemeClr val="tx1"/>
+                </a:solidFill>
+                <a:latin typeface="+mn-lt"/>
+                <a:ea typeface="+mn-ea"/>
+                <a:cs typeface="+mn-cs"/>
+              </a:defRPr>
+            </a:lvl7pPr>
+            <a:lvl8pPr marL="3429000" indent="-228600" algn="l" defTabSz="914400" rtl="0" eaLnBrk="1" latinLnBrk="0" hangingPunct="1">
+              <a:lnSpc>
+                <a:spcPct val="120000"/>
+              </a:lnSpc>
+              <a:spcBef>
+                <a:spcPts val="500"/>
+              </a:spcBef>
+              <a:buSzPct val="125000"/>
+              <a:buFont typeface="Arial" panose="020B0604020202020204" pitchFamily="34" charset="0"/>
+              <a:buChar char="•"/>
+              <a:defRPr sz="1400" kern="1200">
+                <a:solidFill>
+                  <a:schemeClr val="tx1"/>
+                </a:solidFill>
+                <a:latin typeface="+mn-lt"/>
+                <a:ea typeface="+mn-ea"/>
+                <a:cs typeface="+mn-cs"/>
+              </a:defRPr>
+            </a:lvl8pPr>
+            <a:lvl9pPr marL="3886200" indent="-228600" algn="l" defTabSz="914400" rtl="0" eaLnBrk="1" latinLnBrk="0" hangingPunct="1">
+              <a:lnSpc>
+                <a:spcPct val="120000"/>
+              </a:lnSpc>
+              <a:spcBef>
+                <a:spcPts val="500"/>
+              </a:spcBef>
+              <a:buSzPct val="125000"/>
+              <a:buFont typeface="Arial" panose="020B0604020202020204" pitchFamily="34" charset="0"/>
+              <a:buChar char="•"/>
+              <a:defRPr sz="1400" kern="1200">
+                <a:solidFill>
+                  <a:schemeClr val="tx1"/>
+                </a:solidFill>
+                <a:latin typeface="+mn-lt"/>
+                <a:ea typeface="+mn-ea"/>
+                <a:cs typeface="+mn-cs"/>
+              </a:defRPr>
+            </a:lvl9pPr>
+          </a:lstStyle>
+          <a:p>
+            <a:pPr marL="0" indent="0">
+              <a:buFont typeface="Arial" panose="020B0604020202020204" pitchFamily="34" charset="0"/>
+              <a:buNone/>
+            </a:pPr>
+            <a:r>
+              <a:rPr lang="en-US" b="1" i="1" u="sng" dirty="0" err="1">
+                <a:latin typeface="Arial" panose="020B0604020202020204" pitchFamily="34" charset="0"/>
+                <a:cs typeface="Arial" panose="020B0604020202020204" pitchFamily="34" charset="0"/>
+              </a:rPr>
+              <a:t>Wordle</a:t>
+            </a:r>
+            <a:r>
+              <a:rPr lang="en-US" dirty="0">
+                <a:latin typeface="Arial" panose="020B0604020202020204" pitchFamily="34" charset="0"/>
+                <a:cs typeface="Arial" panose="020B0604020202020204" pitchFamily="34" charset="0"/>
+              </a:rPr>
+              <a:t>:</a:t>
+            </a:r>
+          </a:p>
+        </p:txBody>
+      </p:sp>
+      <p:graphicFrame>
+        <p:nvGraphicFramePr>
+          <p:cNvPr id="10" name="Table 9">
+            <a:extLst>
+              <a:ext uri="{FF2B5EF4-FFF2-40B4-BE49-F238E27FC236}">
+                <a16:creationId xmlns:a16="http://schemas.microsoft.com/office/drawing/2014/main" id="{39CEB34F-A4E3-4330-CEB1-A4F0D4DE6DA6}"/>
+              </a:ext>
+            </a:extLst>
+          </p:cNvPr>
+          <p:cNvGraphicFramePr>
+            <a:graphicFrameLocks noGrp="1"/>
+          </p:cNvGraphicFramePr>
+          <p:nvPr>
+            <p:extLst>
+              <p:ext uri="{D42A27DB-BD31-4B8C-83A1-F6EECF244321}">
+                <p14:modId xmlns:p14="http://schemas.microsoft.com/office/powerpoint/2010/main" val="1830120710"/>
+              </p:ext>
+            </p:extLst>
+          </p:nvPr>
+        </p:nvGraphicFramePr>
+        <p:xfrm>
+          <a:off x="8054758" y="1918631"/>
+          <a:ext cx="2751151" cy="741680"/>
+        </p:xfrm>
+        <a:graphic>
+          <a:graphicData uri="http://schemas.openxmlformats.org/drawingml/2006/table">
+            <a:tbl>
+              <a:tblPr firstRow="1" bandRow="1">
+                <a:tableStyleId>{5C22544A-7EE6-4342-B048-85BDC9FD1C3A}</a:tableStyleId>
+              </a:tblPr>
+              <a:tblGrid>
+                <a:gridCol w="985962">
+                  <a:extLst>
+                    <a:ext uri="{9D8B030D-6E8A-4147-A177-3AD203B41FA5}">
+                      <a16:colId xmlns:a16="http://schemas.microsoft.com/office/drawing/2014/main" val="659906099"/>
+                    </a:ext>
+                  </a:extLst>
+                </a:gridCol>
+                <a:gridCol w="811033">
+                  <a:extLst>
+                    <a:ext uri="{9D8B030D-6E8A-4147-A177-3AD203B41FA5}">
+                      <a16:colId xmlns:a16="http://schemas.microsoft.com/office/drawing/2014/main" val="2842208557"/>
+                    </a:ext>
+                  </a:extLst>
+                </a:gridCol>
+                <a:gridCol w="954156">
+                  <a:extLst>
+                    <a:ext uri="{9D8B030D-6E8A-4147-A177-3AD203B41FA5}">
+                      <a16:colId xmlns:a16="http://schemas.microsoft.com/office/drawing/2014/main" val="2881465603"/>
+                    </a:ext>
+                  </a:extLst>
+                </a:gridCol>
+              </a:tblGrid>
+              <a:tr h="370840">
+                <a:tc>
+                  <a:txBody>
+                    <a:bodyPr/>
+                    <a:lstStyle/>
+                    <a:p>
+                      <a:pPr algn="ctr"/>
+                      <a:r>
+                        <a:rPr lang="en-US" b="1" i="0" u="none" dirty="0"/>
+                        <a:t>Success</a:t>
+                      </a:r>
+                    </a:p>
+                  </a:txBody>
+                  <a:tcPr/>
+                </a:tc>
+                <a:tc>
+                  <a:txBody>
+                    <a:bodyPr/>
+                    <a:lstStyle/>
+                    <a:p>
+                      <a:pPr algn="ctr"/>
+                      <a:r>
+                        <a:rPr lang="en-US" b="1" i="0" u="none" dirty="0"/>
+                        <a:t>Total</a:t>
+                      </a:r>
+                    </a:p>
+                  </a:txBody>
+                  <a:tcPr/>
+                </a:tc>
+                <a:tc>
+                  <a:txBody>
+                    <a:bodyPr/>
+                    <a:lstStyle/>
+                    <a:p>
+                      <a:pPr algn="ctr"/>
+                      <a:r>
+                        <a:rPr lang="en-US" b="1" i="0" u="none" dirty="0"/>
+                        <a:t>%</a:t>
+                      </a:r>
+                    </a:p>
+                  </a:txBody>
+                  <a:tcPr/>
+                </a:tc>
+                <a:extLst>
+                  <a:ext uri="{0D108BD9-81ED-4DB2-BD59-A6C34878D82A}">
+                    <a16:rowId xmlns:a16="http://schemas.microsoft.com/office/drawing/2014/main" val="386381463"/>
+                  </a:ext>
+                </a:extLst>
+              </a:tr>
+              <a:tr h="370840">
+                <a:tc>
+                  <a:txBody>
+                    <a:bodyPr/>
+                    <a:lstStyle/>
+                    <a:p>
+                      <a:pPr algn="ctr"/>
+                      <a:r>
+                        <a:rPr lang="en-US" i="0" dirty="0"/>
+                        <a:t>0</a:t>
+                      </a:r>
+                    </a:p>
+                  </a:txBody>
+                  <a:tcPr/>
+                </a:tc>
+                <a:tc>
+                  <a:txBody>
+                    <a:bodyPr/>
+                    <a:lstStyle/>
+                    <a:p>
+                      <a:pPr algn="ctr"/>
+                      <a:r>
+                        <a:rPr lang="en-US" i="0" dirty="0"/>
+                        <a:t>0</a:t>
+                      </a:r>
+                    </a:p>
+                  </a:txBody>
+                  <a:tcPr/>
+                </a:tc>
+                <a:tc>
+                  <a:txBody>
+                    <a:bodyPr/>
+                    <a:lstStyle/>
+                    <a:p>
+                      <a:pPr algn="ctr"/>
+                      <a:r>
+                        <a:rPr lang="en-US" b="1" i="0" dirty="0"/>
+                        <a:t>N/A</a:t>
+                      </a:r>
+                    </a:p>
+                  </a:txBody>
+                  <a:tcPr/>
+                </a:tc>
+                <a:extLst>
+                  <a:ext uri="{0D108BD9-81ED-4DB2-BD59-A6C34878D82A}">
+                    <a16:rowId xmlns:a16="http://schemas.microsoft.com/office/drawing/2014/main" val="3437585930"/>
+                  </a:ext>
+                </a:extLst>
+              </a:tr>
+            </a:tbl>
+          </a:graphicData>
+        </a:graphic>
+      </p:graphicFrame>
     </p:spTree>
     <p:extLst>
       <p:ext uri="{BB962C8B-B14F-4D97-AF65-F5344CB8AC3E}">
@@ -15219,6 +15899,24 @@
 </file>
 
 <file path=ppt/tags/tag1.xml><?xml version="1.0" encoding="utf-8"?>
+<p:tagLst xmlns:a="http://schemas.openxmlformats.org/drawingml/2006/main" xmlns:r="http://schemas.openxmlformats.org/officeDocument/2006/relationships" xmlns:p="http://schemas.openxmlformats.org/presentationml/2006/main">
+  <p:tag name="_INSTRUCTOR VIEW19C14C36-AC8E-43BC-9DB6-C2AAF774C7DC|PANE__TAG" val="_"/>
+</p:tagLst>
+</file>
+
+<file path=ppt/tags/tag10.xml><?xml version="1.0" encoding="utf-8"?>
+<p:tagLst xmlns:a="http://schemas.openxmlformats.org/drawingml/2006/main" xmlns:r="http://schemas.openxmlformats.org/officeDocument/2006/relationships" xmlns:p="http://schemas.openxmlformats.org/presentationml/2006/main">
+  <p:tag name="_INSTRUCTOR VIEW19C14C36-AC8E-43BC-9DB6-C2AAF774C7DC|PANE__TAG" val="_"/>
+</p:tagLst>
+</file>
+
+<file path=ppt/tags/tag11.xml><?xml version="1.0" encoding="utf-8"?>
+<p:tagLst xmlns:a="http://schemas.openxmlformats.org/drawingml/2006/main" xmlns:r="http://schemas.openxmlformats.org/officeDocument/2006/relationships" xmlns:p="http://schemas.openxmlformats.org/presentationml/2006/main">
+  <p:tag name="_INSTRUCTOR VIEW19C14C36-AC8E-43BC-9DB6-C2AAF774C7DC|PANE__TAG" val="_"/>
+</p:tagLst>
+</file>
+
+<file path=ppt/tags/tag12.xml><?xml version="1.0" encoding="utf-8"?>
 <p:tagLst xmlns:a="http://schemas.openxmlformats.org/drawingml/2006/main" xmlns:r="http://schemas.openxmlformats.org/officeDocument/2006/relationships" xmlns:p="http://schemas.openxmlformats.org/presentationml/2006/main">
   <p:tag name="_INSTRUCTOR VIEW19C14C36-AC8E-43BC-9DB6-C2AAF774C7DC|PANE__TAG" val="_"/>
 </p:tagLst>

--- a/slides/00-DailyAnnouncements.pptx
+++ b/slides/00-DailyAnnouncements.pptx
@@ -609,7 +609,7 @@
           <a:noFill/>
           <a:extLst>
             <a:ext uri="{909E8E84-426E-40dd-AFC4-6F175D3DCCD1}">
-              <a14:hiddenFill xmlns="" xmlns:a14="http://schemas.microsoft.com/office/drawing/2010/main">
+              <a14:hiddenFill xmlns:a14="http://schemas.microsoft.com/office/drawing/2010/main" xmlns="">
                 <a:solidFill>
                   <a:srgbClr val="FFFFFF"/>
                 </a:solidFill>
@@ -668,7 +668,7 @@
             </a:ln>
             <a:extLst>
               <a:ext uri="{91240B29-F687-4f45-9708-019B960494DF}">
-                <a14:hiddenLine xmlns="" xmlns:a14="http://schemas.microsoft.com/office/drawing/2010/main" w="9525">
+                <a14:hiddenLine xmlns:a14="http://schemas.microsoft.com/office/drawing/2010/main" xmlns="" w="9525">
                   <a:solidFill>
                     <a:srgbClr val="000000"/>
                   </a:solidFill>
@@ -758,7 +758,7 @@
             </a:ln>
             <a:extLst>
               <a:ext uri="{91240B29-F687-4f45-9708-019B960494DF}">
-                <a14:hiddenLine xmlns="" xmlns:a14="http://schemas.microsoft.com/office/drawing/2010/main" w="9525">
+                <a14:hiddenLine xmlns:a14="http://schemas.microsoft.com/office/drawing/2010/main" xmlns="" w="9525">
                   <a:solidFill>
                     <a:srgbClr val="000000"/>
                   </a:solidFill>
@@ -848,7 +848,7 @@
             </a:ln>
             <a:extLst>
               <a:ext uri="{91240B29-F687-4f45-9708-019B960494DF}">
-                <a14:hiddenLine xmlns="" xmlns:a14="http://schemas.microsoft.com/office/drawing/2010/main" w="9525">
+                <a14:hiddenLine xmlns:a14="http://schemas.microsoft.com/office/drawing/2010/main" xmlns="" w="9525">
                   <a:solidFill>
                     <a:srgbClr val="000000"/>
                   </a:solidFill>
@@ -882,7 +882,7 @@
             </a:ln>
             <a:extLst>
               <a:ext uri="{91240B29-F687-4f45-9708-019B960494DF}">
-                <a14:hiddenLine xmlns="" xmlns:a14="http://schemas.microsoft.com/office/drawing/2010/main" w="9525">
+                <a14:hiddenLine xmlns:a14="http://schemas.microsoft.com/office/drawing/2010/main" xmlns="" w="9525">
                   <a:solidFill>
                     <a:srgbClr val="000000"/>
                   </a:solidFill>
@@ -972,7 +972,7 @@
             </a:ln>
             <a:extLst>
               <a:ext uri="{91240B29-F687-4f45-9708-019B960494DF}">
-                <a14:hiddenLine xmlns="" xmlns:a14="http://schemas.microsoft.com/office/drawing/2010/main" w="9525">
+                <a14:hiddenLine xmlns:a14="http://schemas.microsoft.com/office/drawing/2010/main" xmlns="" w="9525">
                   <a:solidFill>
                     <a:srgbClr val="000000"/>
                   </a:solidFill>
@@ -1034,7 +1034,7 @@
             </a:ln>
             <a:extLst>
               <a:ext uri="{91240B29-F687-4f45-9708-019B960494DF}">
-                <a14:hiddenLine xmlns="" xmlns:a14="http://schemas.microsoft.com/office/drawing/2010/main" w="9525">
+                <a14:hiddenLine xmlns:a14="http://schemas.microsoft.com/office/drawing/2010/main" xmlns="" w="9525">
                   <a:solidFill>
                     <a:srgbClr val="000000"/>
                   </a:solidFill>
@@ -1096,7 +1096,7 @@
             </a:ln>
             <a:extLst>
               <a:ext uri="{91240B29-F687-4f45-9708-019B960494DF}">
-                <a14:hiddenLine xmlns="" xmlns:a14="http://schemas.microsoft.com/office/drawing/2010/main" w="9525">
+                <a14:hiddenLine xmlns:a14="http://schemas.microsoft.com/office/drawing/2010/main" xmlns="" w="9525">
                   <a:solidFill>
                     <a:srgbClr val="000000"/>
                   </a:solidFill>
@@ -1186,7 +1186,7 @@
             </a:ln>
             <a:extLst>
               <a:ext uri="{91240B29-F687-4f45-9708-019B960494DF}">
-                <a14:hiddenLine xmlns="" xmlns:a14="http://schemas.microsoft.com/office/drawing/2010/main" w="9525">
+                <a14:hiddenLine xmlns:a14="http://schemas.microsoft.com/office/drawing/2010/main" xmlns="" w="9525">
                   <a:solidFill>
                     <a:srgbClr val="000000"/>
                   </a:solidFill>
@@ -1248,7 +1248,7 @@
             </a:ln>
             <a:extLst>
               <a:ext uri="{91240B29-F687-4f45-9708-019B960494DF}">
-                <a14:hiddenLine xmlns="" xmlns:a14="http://schemas.microsoft.com/office/drawing/2010/main" w="9525">
+                <a14:hiddenLine xmlns:a14="http://schemas.microsoft.com/office/drawing/2010/main" xmlns="" w="9525">
                   <a:solidFill>
                     <a:srgbClr val="000000"/>
                   </a:solidFill>
@@ -1310,7 +1310,7 @@
             </a:ln>
             <a:extLst>
               <a:ext uri="{91240B29-F687-4f45-9708-019B960494DF}">
-                <a14:hiddenLine xmlns="" xmlns:a14="http://schemas.microsoft.com/office/drawing/2010/main" w="9525">
+                <a14:hiddenLine xmlns:a14="http://schemas.microsoft.com/office/drawing/2010/main" xmlns="" w="9525">
                   <a:solidFill>
                     <a:srgbClr val="000000"/>
                   </a:solidFill>
@@ -1400,7 +1400,7 @@
             </a:ln>
             <a:extLst>
               <a:ext uri="{91240B29-F687-4f45-9708-019B960494DF}">
-                <a14:hiddenLine xmlns="" xmlns:a14="http://schemas.microsoft.com/office/drawing/2010/main" w="9525">
+                <a14:hiddenLine xmlns:a14="http://schemas.microsoft.com/office/drawing/2010/main" xmlns="" w="9525">
                   <a:solidFill>
                     <a:srgbClr val="000000"/>
                   </a:solidFill>
@@ -1490,7 +1490,7 @@
             </a:ln>
             <a:extLst>
               <a:ext uri="{91240B29-F687-4f45-9708-019B960494DF}">
-                <a14:hiddenLine xmlns="" xmlns:a14="http://schemas.microsoft.com/office/drawing/2010/main" w="9525">
+                <a14:hiddenLine xmlns:a14="http://schemas.microsoft.com/office/drawing/2010/main" xmlns="" w="9525">
                   <a:solidFill>
                     <a:srgbClr val="000000"/>
                   </a:solidFill>
@@ -1552,7 +1552,7 @@
             </a:ln>
             <a:extLst>
               <a:ext uri="{91240B29-F687-4f45-9708-019B960494DF}">
-                <a14:hiddenLine xmlns="" xmlns:a14="http://schemas.microsoft.com/office/drawing/2010/main" w="9525">
+                <a14:hiddenLine xmlns:a14="http://schemas.microsoft.com/office/drawing/2010/main" xmlns="" w="9525">
                   <a:solidFill>
                     <a:srgbClr val="000000"/>
                   </a:solidFill>
@@ -1662,7 +1662,7 @@
             </a:ln>
             <a:extLst>
               <a:ext uri="{91240B29-F687-4f45-9708-019B960494DF}">
-                <a14:hiddenLine xmlns="" xmlns:a14="http://schemas.microsoft.com/office/drawing/2010/main" w="9525">
+                <a14:hiddenLine xmlns:a14="http://schemas.microsoft.com/office/drawing/2010/main" xmlns="" w="9525">
                   <a:solidFill>
                     <a:srgbClr val="000000"/>
                   </a:solidFill>
@@ -1724,7 +1724,7 @@
             </a:ln>
             <a:extLst>
               <a:ext uri="{91240B29-F687-4f45-9708-019B960494DF}">
-                <a14:hiddenLine xmlns="" xmlns:a14="http://schemas.microsoft.com/office/drawing/2010/main" w="9525">
+                <a14:hiddenLine xmlns:a14="http://schemas.microsoft.com/office/drawing/2010/main" xmlns="" w="9525">
                   <a:solidFill>
                     <a:srgbClr val="000000"/>
                   </a:solidFill>
@@ -1814,7 +1814,7 @@
             </a:ln>
             <a:extLst>
               <a:ext uri="{91240B29-F687-4f45-9708-019B960494DF}">
-                <a14:hiddenLine xmlns="" xmlns:a14="http://schemas.microsoft.com/office/drawing/2010/main" w="9525">
+                <a14:hiddenLine xmlns:a14="http://schemas.microsoft.com/office/drawing/2010/main" xmlns="" w="9525">
                   <a:solidFill>
                     <a:srgbClr val="000000"/>
                   </a:solidFill>
@@ -1904,7 +1904,7 @@
             </a:ln>
             <a:extLst>
               <a:ext uri="{91240B29-F687-4f45-9708-019B960494DF}">
-                <a14:hiddenLine xmlns="" xmlns:a14="http://schemas.microsoft.com/office/drawing/2010/main" w="9525">
+                <a14:hiddenLine xmlns:a14="http://schemas.microsoft.com/office/drawing/2010/main" xmlns="" w="9525">
                   <a:solidFill>
                     <a:srgbClr val="000000"/>
                   </a:solidFill>
@@ -1966,7 +1966,7 @@
             </a:ln>
             <a:extLst>
               <a:ext uri="{91240B29-F687-4f45-9708-019B960494DF}">
-                <a14:hiddenLine xmlns="" xmlns:a14="http://schemas.microsoft.com/office/drawing/2010/main" w="9525">
+                <a14:hiddenLine xmlns:a14="http://schemas.microsoft.com/office/drawing/2010/main" xmlns="" w="9525">
                   <a:solidFill>
                     <a:srgbClr val="000000"/>
                   </a:solidFill>
@@ -2056,7 +2056,7 @@
             </a:ln>
             <a:extLst>
               <a:ext uri="{91240B29-F687-4f45-9708-019B960494DF}">
-                <a14:hiddenLine xmlns="" xmlns:a14="http://schemas.microsoft.com/office/drawing/2010/main" w="9525">
+                <a14:hiddenLine xmlns:a14="http://schemas.microsoft.com/office/drawing/2010/main" xmlns="" w="9525">
                   <a:solidFill>
                     <a:srgbClr val="000000"/>
                   </a:solidFill>
@@ -2146,7 +2146,7 @@
             </a:ln>
             <a:extLst>
               <a:ext uri="{91240B29-F687-4f45-9708-019B960494DF}">
-                <a14:hiddenLine xmlns="" xmlns:a14="http://schemas.microsoft.com/office/drawing/2010/main" w="9525">
+                <a14:hiddenLine xmlns:a14="http://schemas.microsoft.com/office/drawing/2010/main" xmlns="" w="9525">
                   <a:solidFill>
                     <a:srgbClr val="000000"/>
                   </a:solidFill>
@@ -2202,7 +2202,7 @@
             </a:ln>
             <a:extLst>
               <a:ext uri="{91240B29-F687-4f45-9708-019B960494DF}">
-                <a14:hiddenLine xmlns="" xmlns:a14="http://schemas.microsoft.com/office/drawing/2010/main" w="9525">
+                <a14:hiddenLine xmlns:a14="http://schemas.microsoft.com/office/drawing/2010/main" xmlns="" w="9525">
                   <a:solidFill>
                     <a:srgbClr val="000000"/>
                   </a:solidFill>
@@ -2292,7 +2292,7 @@
             </a:ln>
             <a:extLst>
               <a:ext uri="{91240B29-F687-4f45-9708-019B960494DF}">
-                <a14:hiddenLine xmlns="" xmlns:a14="http://schemas.microsoft.com/office/drawing/2010/main" w="9525">
+                <a14:hiddenLine xmlns:a14="http://schemas.microsoft.com/office/drawing/2010/main" xmlns="" w="9525">
                   <a:solidFill>
                     <a:srgbClr val="000000"/>
                   </a:solidFill>
@@ -2348,7 +2348,7 @@
             </a:ln>
             <a:extLst>
               <a:ext uri="{91240B29-F687-4f45-9708-019B960494DF}">
-                <a14:hiddenLine xmlns="" xmlns:a14="http://schemas.microsoft.com/office/drawing/2010/main" w="9525">
+                <a14:hiddenLine xmlns:a14="http://schemas.microsoft.com/office/drawing/2010/main" xmlns="" w="9525">
                   <a:solidFill>
                     <a:srgbClr val="000000"/>
                   </a:solidFill>
@@ -2438,7 +2438,7 @@
             </a:ln>
             <a:extLst>
               <a:ext uri="{91240B29-F687-4f45-9708-019B960494DF}">
-                <a14:hiddenLine xmlns="" xmlns:a14="http://schemas.microsoft.com/office/drawing/2010/main" w="9525">
+                <a14:hiddenLine xmlns:a14="http://schemas.microsoft.com/office/drawing/2010/main" xmlns="" w="9525">
                   <a:solidFill>
                     <a:srgbClr val="000000"/>
                   </a:solidFill>
@@ -2506,7 +2506,7 @@
             </a:ln>
             <a:extLst>
               <a:ext uri="{91240B29-F687-4f45-9708-019B960494DF}">
-                <a14:hiddenLine xmlns="" xmlns:a14="http://schemas.microsoft.com/office/drawing/2010/main" w="9525">
+                <a14:hiddenLine xmlns:a14="http://schemas.microsoft.com/office/drawing/2010/main" xmlns="" w="9525">
                   <a:solidFill>
                     <a:srgbClr val="000000"/>
                   </a:solidFill>
@@ -2596,7 +2596,7 @@
             </a:ln>
             <a:extLst>
               <a:ext uri="{91240B29-F687-4f45-9708-019B960494DF}">
-                <a14:hiddenLine xmlns="" xmlns:a14="http://schemas.microsoft.com/office/drawing/2010/main" w="9525">
+                <a14:hiddenLine xmlns:a14="http://schemas.microsoft.com/office/drawing/2010/main" xmlns="" w="9525">
                   <a:solidFill>
                     <a:srgbClr val="000000"/>
                   </a:solidFill>
@@ -2664,7 +2664,7 @@
             </a:ln>
             <a:extLst>
               <a:ext uri="{91240B29-F687-4f45-9708-019B960494DF}">
-                <a14:hiddenLine xmlns="" xmlns:a14="http://schemas.microsoft.com/office/drawing/2010/main" w="9525">
+                <a14:hiddenLine xmlns:a14="http://schemas.microsoft.com/office/drawing/2010/main" xmlns="" w="9525">
                   <a:solidFill>
                     <a:srgbClr val="000000"/>
                   </a:solidFill>
@@ -2754,7 +2754,7 @@
             </a:ln>
             <a:extLst>
               <a:ext uri="{91240B29-F687-4f45-9708-019B960494DF}">
-                <a14:hiddenLine xmlns="" xmlns:a14="http://schemas.microsoft.com/office/drawing/2010/main" w="9525">
+                <a14:hiddenLine xmlns:a14="http://schemas.microsoft.com/office/drawing/2010/main" xmlns="" w="9525">
                   <a:solidFill>
                     <a:srgbClr val="000000"/>
                   </a:solidFill>
@@ -2788,7 +2788,7 @@
             </a:ln>
             <a:extLst>
               <a:ext uri="{91240B29-F687-4f45-9708-019B960494DF}">
-                <a14:hiddenLine xmlns="" xmlns:a14="http://schemas.microsoft.com/office/drawing/2010/main" w="9525">
+                <a14:hiddenLine xmlns:a14="http://schemas.microsoft.com/office/drawing/2010/main" xmlns="" w="9525">
                   <a:solidFill>
                     <a:srgbClr val="000000"/>
                   </a:solidFill>
@@ -2878,7 +2878,7 @@
             </a:ln>
             <a:extLst>
               <a:ext uri="{91240B29-F687-4f45-9708-019B960494DF}">
-                <a14:hiddenLine xmlns="" xmlns:a14="http://schemas.microsoft.com/office/drawing/2010/main" w="9525">
+                <a14:hiddenLine xmlns:a14="http://schemas.microsoft.com/office/drawing/2010/main" xmlns="" w="9525">
                   <a:solidFill>
                     <a:srgbClr val="000000"/>
                   </a:solidFill>
@@ -2940,7 +2940,7 @@
             </a:ln>
             <a:extLst>
               <a:ext uri="{91240B29-F687-4f45-9708-019B960494DF}">
-                <a14:hiddenLine xmlns="" xmlns:a14="http://schemas.microsoft.com/office/drawing/2010/main" w="9525">
+                <a14:hiddenLine xmlns:a14="http://schemas.microsoft.com/office/drawing/2010/main" xmlns="" w="9525">
                   <a:solidFill>
                     <a:srgbClr val="000000"/>
                   </a:solidFill>
@@ -3002,7 +3002,7 @@
             </a:ln>
             <a:extLst>
               <a:ext uri="{91240B29-F687-4f45-9708-019B960494DF}">
-                <a14:hiddenLine xmlns="" xmlns:a14="http://schemas.microsoft.com/office/drawing/2010/main" w="9525">
+                <a14:hiddenLine xmlns:a14="http://schemas.microsoft.com/office/drawing/2010/main" xmlns="" w="9525">
                   <a:solidFill>
                     <a:srgbClr val="000000"/>
                   </a:solidFill>
@@ -3092,7 +3092,7 @@
             </a:ln>
             <a:extLst>
               <a:ext uri="{91240B29-F687-4f45-9708-019B960494DF}">
-                <a14:hiddenLine xmlns="" xmlns:a14="http://schemas.microsoft.com/office/drawing/2010/main" w="9525">
+                <a14:hiddenLine xmlns:a14="http://schemas.microsoft.com/office/drawing/2010/main" xmlns="" w="9525">
                   <a:solidFill>
                     <a:srgbClr val="000000"/>
                   </a:solidFill>
@@ -3160,7 +3160,7 @@
             </a:ln>
             <a:extLst>
               <a:ext uri="{91240B29-F687-4f45-9708-019B960494DF}">
-                <a14:hiddenLine xmlns="" xmlns:a14="http://schemas.microsoft.com/office/drawing/2010/main" w="9525">
+                <a14:hiddenLine xmlns:a14="http://schemas.microsoft.com/office/drawing/2010/main" xmlns="" w="9525">
                   <a:solidFill>
                     <a:srgbClr val="000000"/>
                   </a:solidFill>
@@ -3222,7 +3222,7 @@
             </a:ln>
             <a:extLst>
               <a:ext uri="{91240B29-F687-4f45-9708-019B960494DF}">
-                <a14:hiddenLine xmlns="" xmlns:a14="http://schemas.microsoft.com/office/drawing/2010/main" w="9525">
+                <a14:hiddenLine xmlns:a14="http://schemas.microsoft.com/office/drawing/2010/main" xmlns="" w="9525">
                   <a:solidFill>
                     <a:srgbClr val="000000"/>
                   </a:solidFill>
@@ -3312,7 +3312,7 @@
             </a:ln>
             <a:extLst>
               <a:ext uri="{91240B29-F687-4f45-9708-019B960494DF}">
-                <a14:hiddenLine xmlns="" xmlns:a14="http://schemas.microsoft.com/office/drawing/2010/main" w="9525">
+                <a14:hiddenLine xmlns:a14="http://schemas.microsoft.com/office/drawing/2010/main" xmlns="" w="9525">
                   <a:solidFill>
                     <a:srgbClr val="000000"/>
                   </a:solidFill>
@@ -3374,7 +3374,7 @@
             </a:ln>
             <a:extLst>
               <a:ext uri="{91240B29-F687-4f45-9708-019B960494DF}">
-                <a14:hiddenLine xmlns="" xmlns:a14="http://schemas.microsoft.com/office/drawing/2010/main" w="9525">
+                <a14:hiddenLine xmlns:a14="http://schemas.microsoft.com/office/drawing/2010/main" xmlns="" w="9525">
                   <a:solidFill>
                     <a:srgbClr val="000000"/>
                   </a:solidFill>
@@ -3464,7 +3464,7 @@
             </a:ln>
             <a:extLst>
               <a:ext uri="{91240B29-F687-4f45-9708-019B960494DF}">
-                <a14:hiddenLine xmlns="" xmlns:a14="http://schemas.microsoft.com/office/drawing/2010/main" w="9525">
+                <a14:hiddenLine xmlns:a14="http://schemas.microsoft.com/office/drawing/2010/main" xmlns="" w="9525">
                   <a:solidFill>
                     <a:srgbClr val="000000"/>
                   </a:solidFill>
@@ -3526,7 +3526,7 @@
             </a:ln>
             <a:extLst>
               <a:ext uri="{91240B29-F687-4f45-9708-019B960494DF}">
-                <a14:hiddenLine xmlns="" xmlns:a14="http://schemas.microsoft.com/office/drawing/2010/main" w="9525">
+                <a14:hiddenLine xmlns:a14="http://schemas.microsoft.com/office/drawing/2010/main" xmlns="" w="9525">
                   <a:solidFill>
                     <a:srgbClr val="000000"/>
                   </a:solidFill>
@@ -3616,7 +3616,7 @@
             </a:ln>
             <a:extLst>
               <a:ext uri="{91240B29-F687-4f45-9708-019B960494DF}">
-                <a14:hiddenLine xmlns="" xmlns:a14="http://schemas.microsoft.com/office/drawing/2010/main" w="9525">
+                <a14:hiddenLine xmlns:a14="http://schemas.microsoft.com/office/drawing/2010/main" xmlns="" w="9525">
                   <a:solidFill>
                     <a:srgbClr val="000000"/>
                   </a:solidFill>
@@ -3650,7 +3650,7 @@
             </a:ln>
             <a:extLst>
               <a:ext uri="{91240B29-F687-4f45-9708-019B960494DF}">
-                <a14:hiddenLine xmlns="" xmlns:a14="http://schemas.microsoft.com/office/drawing/2010/main" w="9525">
+                <a14:hiddenLine xmlns:a14="http://schemas.microsoft.com/office/drawing/2010/main" xmlns="" w="9525">
                   <a:solidFill>
                     <a:srgbClr val="000000"/>
                   </a:solidFill>
@@ -3715,7 +3715,7 @@
             </a:ln>
             <a:extLst>
               <a:ext uri="{91240B29-F687-4f45-9708-019B960494DF}">
-                <a14:hiddenLine xmlns="" xmlns:a14="http://schemas.microsoft.com/office/drawing/2010/main" w="9525">
+                <a14:hiddenLine xmlns:a14="http://schemas.microsoft.com/office/drawing/2010/main" xmlns="" w="9525">
                   <a:solidFill>
                     <a:srgbClr val="000000"/>
                   </a:solidFill>
@@ -3805,7 +3805,7 @@
             </a:ln>
             <a:extLst>
               <a:ext uri="{91240B29-F687-4f45-9708-019B960494DF}">
-                <a14:hiddenLine xmlns="" xmlns:a14="http://schemas.microsoft.com/office/drawing/2010/main" w="9525">
+                <a14:hiddenLine xmlns:a14="http://schemas.microsoft.com/office/drawing/2010/main" xmlns="" w="9525">
                   <a:solidFill>
                     <a:srgbClr val="000000"/>
                   </a:solidFill>
@@ -3867,7 +3867,7 @@
             </a:ln>
             <a:extLst>
               <a:ext uri="{91240B29-F687-4f45-9708-019B960494DF}">
-                <a14:hiddenLine xmlns="" xmlns:a14="http://schemas.microsoft.com/office/drawing/2010/main" w="9525">
+                <a14:hiddenLine xmlns:a14="http://schemas.microsoft.com/office/drawing/2010/main" xmlns="" w="9525">
                   <a:solidFill>
                     <a:srgbClr val="000000"/>
                   </a:solidFill>
@@ -3957,7 +3957,7 @@
             </a:ln>
             <a:extLst>
               <a:ext uri="{91240B29-F687-4f45-9708-019B960494DF}">
-                <a14:hiddenLine xmlns="" xmlns:a14="http://schemas.microsoft.com/office/drawing/2010/main" w="9525">
+                <a14:hiddenLine xmlns:a14="http://schemas.microsoft.com/office/drawing/2010/main" xmlns="" w="9525">
                   <a:solidFill>
                     <a:srgbClr val="000000"/>
                   </a:solidFill>
@@ -4047,7 +4047,7 @@
             </a:ln>
             <a:extLst>
               <a:ext uri="{91240B29-F687-4f45-9708-019B960494DF}">
-                <a14:hiddenLine xmlns="" xmlns:a14="http://schemas.microsoft.com/office/drawing/2010/main" w="9525">
+                <a14:hiddenLine xmlns:a14="http://schemas.microsoft.com/office/drawing/2010/main" xmlns="" w="9525">
                   <a:solidFill>
                     <a:srgbClr val="000000"/>
                   </a:solidFill>
@@ -4112,7 +4112,7 @@
             </a:ln>
             <a:extLst>
               <a:ext uri="{91240B29-F687-4f45-9708-019B960494DF}">
-                <a14:hiddenLine xmlns="" xmlns:a14="http://schemas.microsoft.com/office/drawing/2010/main" w="9525">
+                <a14:hiddenLine xmlns:a14="http://schemas.microsoft.com/office/drawing/2010/main" xmlns="" w="9525">
                   <a:solidFill>
                     <a:srgbClr val="000000"/>
                   </a:solidFill>
@@ -4174,7 +4174,7 @@
             </a:ln>
             <a:extLst>
               <a:ext uri="{91240B29-F687-4f45-9708-019B960494DF}">
-                <a14:hiddenLine xmlns="" xmlns:a14="http://schemas.microsoft.com/office/drawing/2010/main" w="9525">
+                <a14:hiddenLine xmlns:a14="http://schemas.microsoft.com/office/drawing/2010/main" xmlns="" w="9525">
                   <a:solidFill>
                     <a:srgbClr val="000000"/>
                   </a:solidFill>
@@ -4264,7 +4264,7 @@
             </a:ln>
             <a:extLst>
               <a:ext uri="{91240B29-F687-4f45-9708-019B960494DF}">
-                <a14:hiddenLine xmlns="" xmlns:a14="http://schemas.microsoft.com/office/drawing/2010/main" w="9525">
+                <a14:hiddenLine xmlns:a14="http://schemas.microsoft.com/office/drawing/2010/main" xmlns="" w="9525">
                   <a:solidFill>
                     <a:srgbClr val="000000"/>
                   </a:solidFill>
@@ -4354,7 +4354,7 @@
             </a:ln>
             <a:extLst>
               <a:ext uri="{91240B29-F687-4f45-9708-019B960494DF}">
-                <a14:hiddenLine xmlns="" xmlns:a14="http://schemas.microsoft.com/office/drawing/2010/main" w="9525">
+                <a14:hiddenLine xmlns:a14="http://schemas.microsoft.com/office/drawing/2010/main" xmlns="" w="9525">
                   <a:solidFill>
                     <a:srgbClr val="000000"/>
                   </a:solidFill>
@@ -4416,7 +4416,7 @@
             </a:ln>
             <a:extLst>
               <a:ext uri="{91240B29-F687-4f45-9708-019B960494DF}">
-                <a14:hiddenLine xmlns="" xmlns:a14="http://schemas.microsoft.com/office/drawing/2010/main" w="9525">
+                <a14:hiddenLine xmlns:a14="http://schemas.microsoft.com/office/drawing/2010/main" xmlns="" w="9525">
                   <a:solidFill>
                     <a:srgbClr val="000000"/>
                   </a:solidFill>
@@ -4536,7 +4536,7 @@
             </a:ln>
             <a:extLst>
               <a:ext uri="{91240B29-F687-4f45-9708-019B960494DF}">
-                <a14:hiddenLine xmlns="" xmlns:a14="http://schemas.microsoft.com/office/drawing/2010/main" w="9525">
+                <a14:hiddenLine xmlns:a14="http://schemas.microsoft.com/office/drawing/2010/main" xmlns="" w="9525">
                   <a:solidFill>
                     <a:srgbClr val="000000"/>
                   </a:solidFill>
@@ -4604,7 +4604,7 @@
             </a:ln>
             <a:extLst>
               <a:ext uri="{91240B29-F687-4f45-9708-019B960494DF}">
-                <a14:hiddenLine xmlns="" xmlns:a14="http://schemas.microsoft.com/office/drawing/2010/main" w="9525">
+                <a14:hiddenLine xmlns:a14="http://schemas.microsoft.com/office/drawing/2010/main" xmlns="" w="9525">
                   <a:solidFill>
                     <a:srgbClr val="000000"/>
                   </a:solidFill>
@@ -4694,7 +4694,7 @@
             </a:ln>
             <a:extLst>
               <a:ext uri="{91240B29-F687-4f45-9708-019B960494DF}">
-                <a14:hiddenLine xmlns="" xmlns:a14="http://schemas.microsoft.com/office/drawing/2010/main" w="9525">
+                <a14:hiddenLine xmlns:a14="http://schemas.microsoft.com/office/drawing/2010/main" xmlns="" w="9525">
                   <a:solidFill>
                     <a:srgbClr val="000000"/>
                   </a:solidFill>
@@ -9523,7 +9523,7 @@
           <a:noFill/>
           <a:extLst>
             <a:ext uri="{909E8E84-426E-40dd-AFC4-6F175D3DCCD1}">
-              <a14:hiddenFill xmlns="" xmlns:a14="http://schemas.microsoft.com/office/drawing/2010/main">
+              <a14:hiddenFill xmlns:a14="http://schemas.microsoft.com/office/drawing/2010/main" xmlns="">
                 <a:solidFill>
                   <a:srgbClr val="FFFFFF"/>
                 </a:solidFill>
@@ -9597,7 +9597,7 @@
               </a:ln>
               <a:extLst>
                 <a:ext uri="{91240B29-F687-4f45-9708-019B960494DF}">
-                  <a14:hiddenLine xmlns="" xmlns:a14="http://schemas.microsoft.com/office/drawing/2010/main" w="9525">
+                  <a14:hiddenLine xmlns:a14="http://schemas.microsoft.com/office/drawing/2010/main" xmlns="" w="9525">
                     <a:solidFill>
                       <a:srgbClr val="000000"/>
                     </a:solidFill>
@@ -9687,7 +9687,7 @@
               </a:ln>
               <a:extLst>
                 <a:ext uri="{91240B29-F687-4f45-9708-019B960494DF}">
-                  <a14:hiddenLine xmlns="" xmlns:a14="http://schemas.microsoft.com/office/drawing/2010/main" w="9525">
+                  <a14:hiddenLine xmlns:a14="http://schemas.microsoft.com/office/drawing/2010/main" xmlns="" w="9525">
                     <a:solidFill>
                       <a:srgbClr val="000000"/>
                     </a:solidFill>
@@ -9777,7 +9777,7 @@
               </a:ln>
               <a:extLst>
                 <a:ext uri="{91240B29-F687-4f45-9708-019B960494DF}">
-                  <a14:hiddenLine xmlns="" xmlns:a14="http://schemas.microsoft.com/office/drawing/2010/main" w="9525">
+                  <a14:hiddenLine xmlns:a14="http://schemas.microsoft.com/office/drawing/2010/main" xmlns="" w="9525">
                     <a:solidFill>
                       <a:srgbClr val="000000"/>
                     </a:solidFill>
@@ -9839,7 +9839,7 @@
               </a:ln>
               <a:extLst>
                 <a:ext uri="{91240B29-F687-4f45-9708-019B960494DF}">
-                  <a14:hiddenLine xmlns="" xmlns:a14="http://schemas.microsoft.com/office/drawing/2010/main" w="9525">
+                  <a14:hiddenLine xmlns:a14="http://schemas.microsoft.com/office/drawing/2010/main" xmlns="" w="9525">
                     <a:solidFill>
                       <a:srgbClr val="000000"/>
                     </a:solidFill>
@@ -9929,7 +9929,7 @@
               </a:ln>
               <a:extLst>
                 <a:ext uri="{91240B29-F687-4f45-9708-019B960494DF}">
-                  <a14:hiddenLine xmlns="" xmlns:a14="http://schemas.microsoft.com/office/drawing/2010/main" w="9525">
+                  <a14:hiddenLine xmlns:a14="http://schemas.microsoft.com/office/drawing/2010/main" xmlns="" w="9525">
                     <a:solidFill>
                       <a:srgbClr val="000000"/>
                     </a:solidFill>
@@ -9991,7 +9991,7 @@
               </a:ln>
               <a:extLst>
                 <a:ext uri="{91240B29-F687-4f45-9708-019B960494DF}">
-                  <a14:hiddenLine xmlns="" xmlns:a14="http://schemas.microsoft.com/office/drawing/2010/main" w="9525">
+                  <a14:hiddenLine xmlns:a14="http://schemas.microsoft.com/office/drawing/2010/main" xmlns="" w="9525">
                     <a:solidFill>
                       <a:srgbClr val="000000"/>
                     </a:solidFill>
@@ -10053,7 +10053,7 @@
               </a:ln>
               <a:extLst>
                 <a:ext uri="{91240B29-F687-4f45-9708-019B960494DF}">
-                  <a14:hiddenLine xmlns="" xmlns:a14="http://schemas.microsoft.com/office/drawing/2010/main" w="9525">
+                  <a14:hiddenLine xmlns:a14="http://schemas.microsoft.com/office/drawing/2010/main" xmlns="" w="9525">
                     <a:solidFill>
                       <a:srgbClr val="000000"/>
                     </a:solidFill>
@@ -10143,7 +10143,7 @@
               </a:ln>
               <a:extLst>
                 <a:ext uri="{91240B29-F687-4f45-9708-019B960494DF}">
-                  <a14:hiddenLine xmlns="" xmlns:a14="http://schemas.microsoft.com/office/drawing/2010/main" w="9525">
+                  <a14:hiddenLine xmlns:a14="http://schemas.microsoft.com/office/drawing/2010/main" xmlns="" w="9525">
                     <a:solidFill>
                       <a:srgbClr val="000000"/>
                     </a:solidFill>
@@ -10233,7 +10233,7 @@
               </a:ln>
               <a:extLst>
                 <a:ext uri="{91240B29-F687-4f45-9708-019B960494DF}">
-                  <a14:hiddenLine xmlns="" xmlns:a14="http://schemas.microsoft.com/office/drawing/2010/main" w="9525">
+                  <a14:hiddenLine xmlns:a14="http://schemas.microsoft.com/office/drawing/2010/main" xmlns="" w="9525">
                     <a:solidFill>
                       <a:srgbClr val="000000"/>
                     </a:solidFill>
@@ -10295,7 +10295,7 @@
               </a:ln>
               <a:extLst>
                 <a:ext uri="{91240B29-F687-4f45-9708-019B960494DF}">
-                  <a14:hiddenLine xmlns="" xmlns:a14="http://schemas.microsoft.com/office/drawing/2010/main" w="9525">
+                  <a14:hiddenLine xmlns:a14="http://schemas.microsoft.com/office/drawing/2010/main" xmlns="" w="9525">
                     <a:solidFill>
                       <a:srgbClr val="000000"/>
                     </a:solidFill>
@@ -10405,7 +10405,7 @@
               </a:ln>
               <a:extLst>
                 <a:ext uri="{91240B29-F687-4f45-9708-019B960494DF}">
-                  <a14:hiddenLine xmlns="" xmlns:a14="http://schemas.microsoft.com/office/drawing/2010/main" w="9525">
+                  <a14:hiddenLine xmlns:a14="http://schemas.microsoft.com/office/drawing/2010/main" xmlns="" w="9525">
                     <a:solidFill>
                       <a:srgbClr val="000000"/>
                     </a:solidFill>
@@ -10489,7 +10489,7 @@
               </a:ln>
               <a:extLst>
                 <a:ext uri="{91240B29-F687-4f45-9708-019B960494DF}">
-                  <a14:hiddenLine xmlns="" xmlns:a14="http://schemas.microsoft.com/office/drawing/2010/main" w="9525">
+                  <a14:hiddenLine xmlns:a14="http://schemas.microsoft.com/office/drawing/2010/main" xmlns="" w="9525">
                     <a:solidFill>
                       <a:srgbClr val="000000"/>
                     </a:solidFill>
@@ -10551,7 +10551,7 @@
               </a:ln>
               <a:extLst>
                 <a:ext uri="{91240B29-F687-4f45-9708-019B960494DF}">
-                  <a14:hiddenLine xmlns="" xmlns:a14="http://schemas.microsoft.com/office/drawing/2010/main" w="9525">
+                  <a14:hiddenLine xmlns:a14="http://schemas.microsoft.com/office/drawing/2010/main" xmlns="" w="9525">
                     <a:solidFill>
                       <a:srgbClr val="000000"/>
                     </a:solidFill>
@@ -10613,7 +10613,7 @@
               </a:ln>
               <a:extLst>
                 <a:ext uri="{91240B29-F687-4f45-9708-019B960494DF}">
-                  <a14:hiddenLine xmlns="" xmlns:a14="http://schemas.microsoft.com/office/drawing/2010/main" w="9525">
+                  <a14:hiddenLine xmlns:a14="http://schemas.microsoft.com/office/drawing/2010/main" xmlns="" w="9525">
                     <a:solidFill>
                       <a:srgbClr val="000000"/>
                     </a:solidFill>
@@ -10703,7 +10703,7 @@
               </a:ln>
               <a:extLst>
                 <a:ext uri="{91240B29-F687-4f45-9708-019B960494DF}">
-                  <a14:hiddenLine xmlns="" xmlns:a14="http://schemas.microsoft.com/office/drawing/2010/main" w="9525">
+                  <a14:hiddenLine xmlns:a14="http://schemas.microsoft.com/office/drawing/2010/main" xmlns="" w="9525">
                     <a:solidFill>
                       <a:srgbClr val="000000"/>
                     </a:solidFill>
@@ -10737,7 +10737,7 @@
               </a:ln>
               <a:extLst>
                 <a:ext uri="{91240B29-F687-4f45-9708-019B960494DF}">
-                  <a14:hiddenLine xmlns="" xmlns:a14="http://schemas.microsoft.com/office/drawing/2010/main" w="9525">
+                  <a14:hiddenLine xmlns:a14="http://schemas.microsoft.com/office/drawing/2010/main" xmlns="" w="9525">
                     <a:solidFill>
                       <a:srgbClr val="000000"/>
                     </a:solidFill>
@@ -10802,7 +10802,7 @@
               </a:ln>
               <a:extLst>
                 <a:ext uri="{91240B29-F687-4f45-9708-019B960494DF}">
-                  <a14:hiddenLine xmlns="" xmlns:a14="http://schemas.microsoft.com/office/drawing/2010/main" w="9525">
+                  <a14:hiddenLine xmlns:a14="http://schemas.microsoft.com/office/drawing/2010/main" xmlns="" w="9525">
                     <a:solidFill>
                       <a:srgbClr val="000000"/>
                     </a:solidFill>
@@ -10892,7 +10892,7 @@
               </a:ln>
               <a:extLst>
                 <a:ext uri="{91240B29-F687-4f45-9708-019B960494DF}">
-                  <a14:hiddenLine xmlns="" xmlns:a14="http://schemas.microsoft.com/office/drawing/2010/main" w="9525">
+                  <a14:hiddenLine xmlns:a14="http://schemas.microsoft.com/office/drawing/2010/main" xmlns="" w="9525">
                     <a:solidFill>
                       <a:srgbClr val="000000"/>
                     </a:solidFill>
@@ -10954,7 +10954,7 @@
               </a:ln>
               <a:extLst>
                 <a:ext uri="{91240B29-F687-4f45-9708-019B960494DF}">
-                  <a14:hiddenLine xmlns="" xmlns:a14="http://schemas.microsoft.com/office/drawing/2010/main" w="9525">
+                  <a14:hiddenLine xmlns:a14="http://schemas.microsoft.com/office/drawing/2010/main" xmlns="" w="9525">
                     <a:solidFill>
                       <a:srgbClr val="000000"/>
                     </a:solidFill>
@@ -11044,7 +11044,7 @@
               </a:ln>
               <a:extLst>
                 <a:ext uri="{91240B29-F687-4f45-9708-019B960494DF}">
-                  <a14:hiddenLine xmlns="" xmlns:a14="http://schemas.microsoft.com/office/drawing/2010/main" w="9525">
+                  <a14:hiddenLine xmlns:a14="http://schemas.microsoft.com/office/drawing/2010/main" xmlns="" w="9525">
                     <a:solidFill>
                       <a:srgbClr val="000000"/>
                     </a:solidFill>
@@ -11109,7 +11109,7 @@
               </a:ln>
               <a:extLst>
                 <a:ext uri="{91240B29-F687-4f45-9708-019B960494DF}">
-                  <a14:hiddenLine xmlns="" xmlns:a14="http://schemas.microsoft.com/office/drawing/2010/main" w="9525">
+                  <a14:hiddenLine xmlns:a14="http://schemas.microsoft.com/office/drawing/2010/main" xmlns="" w="9525">
                     <a:solidFill>
                       <a:srgbClr val="000000"/>
                     </a:solidFill>
@@ -11171,7 +11171,7 @@
               </a:ln>
               <a:extLst>
                 <a:ext uri="{91240B29-F687-4f45-9708-019B960494DF}">
-                  <a14:hiddenLine xmlns="" xmlns:a14="http://schemas.microsoft.com/office/drawing/2010/main" w="9525">
+                  <a14:hiddenLine xmlns:a14="http://schemas.microsoft.com/office/drawing/2010/main" xmlns="" w="9525">
                     <a:solidFill>
                       <a:srgbClr val="000000"/>
                     </a:solidFill>
@@ -11261,7 +11261,7 @@
               </a:ln>
               <a:extLst>
                 <a:ext uri="{91240B29-F687-4f45-9708-019B960494DF}">
-                  <a14:hiddenLine xmlns="" xmlns:a14="http://schemas.microsoft.com/office/drawing/2010/main" w="9525">
+                  <a14:hiddenLine xmlns:a14="http://schemas.microsoft.com/office/drawing/2010/main" xmlns="" w="9525">
                     <a:solidFill>
                       <a:srgbClr val="000000"/>
                     </a:solidFill>
@@ -11351,7 +11351,7 @@
               </a:ln>
               <a:extLst>
                 <a:ext uri="{91240B29-F687-4f45-9708-019B960494DF}">
-                  <a14:hiddenLine xmlns="" xmlns:a14="http://schemas.microsoft.com/office/drawing/2010/main" w="9525">
+                  <a14:hiddenLine xmlns:a14="http://schemas.microsoft.com/office/drawing/2010/main" xmlns="" w="9525">
                     <a:solidFill>
                       <a:srgbClr val="000000"/>
                     </a:solidFill>
@@ -11416,7 +11416,7 @@
               </a:ln>
               <a:extLst>
                 <a:ext uri="{91240B29-F687-4f45-9708-019B960494DF}">
-                  <a14:hiddenLine xmlns="" xmlns:a14="http://schemas.microsoft.com/office/drawing/2010/main" w="9525">
+                  <a14:hiddenLine xmlns:a14="http://schemas.microsoft.com/office/drawing/2010/main" xmlns="" w="9525">
                     <a:solidFill>
                       <a:srgbClr val="000000"/>
                     </a:solidFill>
@@ -11536,7 +11536,7 @@
               </a:ln>
               <a:extLst>
                 <a:ext uri="{91240B29-F687-4f45-9708-019B960494DF}">
-                  <a14:hiddenLine xmlns="" xmlns:a14="http://schemas.microsoft.com/office/drawing/2010/main" w="9525">
+                  <a14:hiddenLine xmlns:a14="http://schemas.microsoft.com/office/drawing/2010/main" xmlns="" w="9525">
                     <a:solidFill>
                       <a:srgbClr val="000000"/>
                     </a:solidFill>
@@ -11617,7 +11617,7 @@
               </a:ln>
               <a:extLst>
                 <a:ext uri="{91240B29-F687-4f45-9708-019B960494DF}">
-                  <a14:hiddenLine xmlns="" xmlns:a14="http://schemas.microsoft.com/office/drawing/2010/main" w="9525">
+                  <a14:hiddenLine xmlns:a14="http://schemas.microsoft.com/office/drawing/2010/main" xmlns="" w="9525">
                     <a:solidFill>
                       <a:srgbClr val="000000"/>
                     </a:solidFill>
@@ -11732,7 +11732,7 @@
               </a:ln>
               <a:extLst>
                 <a:ext uri="{91240B29-F687-4f45-9708-019B960494DF}">
-                  <a14:hiddenLine xmlns="" xmlns:a14="http://schemas.microsoft.com/office/drawing/2010/main" w="9525">
+                  <a14:hiddenLine xmlns:a14="http://schemas.microsoft.com/office/drawing/2010/main" xmlns="" w="9525">
                     <a:solidFill>
                       <a:srgbClr val="000000"/>
                     </a:solidFill>
@@ -11822,7 +11822,7 @@
               </a:ln>
               <a:extLst>
                 <a:ext uri="{91240B29-F687-4f45-9708-019B960494DF}">
-                  <a14:hiddenLine xmlns="" xmlns:a14="http://schemas.microsoft.com/office/drawing/2010/main" w="9525">
+                  <a14:hiddenLine xmlns:a14="http://schemas.microsoft.com/office/drawing/2010/main" xmlns="" w="9525">
                     <a:solidFill>
                       <a:srgbClr val="000000"/>
                     </a:solidFill>
@@ -11887,7 +11887,7 @@
               </a:ln>
               <a:extLst>
                 <a:ext uri="{91240B29-F687-4f45-9708-019B960494DF}">
-                  <a14:hiddenLine xmlns="" xmlns:a14="http://schemas.microsoft.com/office/drawing/2010/main" w="9525">
+                  <a14:hiddenLine xmlns:a14="http://schemas.microsoft.com/office/drawing/2010/main" xmlns="" w="9525">
                     <a:solidFill>
                       <a:srgbClr val="000000"/>
                     </a:solidFill>
@@ -11977,7 +11977,7 @@
               </a:ln>
               <a:extLst>
                 <a:ext uri="{91240B29-F687-4f45-9708-019B960494DF}">
-                  <a14:hiddenLine xmlns="" xmlns:a14="http://schemas.microsoft.com/office/drawing/2010/main" w="9525">
+                  <a14:hiddenLine xmlns:a14="http://schemas.microsoft.com/office/drawing/2010/main" xmlns="" w="9525">
                     <a:solidFill>
                       <a:srgbClr val="000000"/>
                     </a:solidFill>
@@ -12045,7 +12045,7 @@
               </a:ln>
               <a:extLst>
                 <a:ext uri="{91240B29-F687-4f45-9708-019B960494DF}">
-                  <a14:hiddenLine xmlns="" xmlns:a14="http://schemas.microsoft.com/office/drawing/2010/main" w="9525">
+                  <a14:hiddenLine xmlns:a14="http://schemas.microsoft.com/office/drawing/2010/main" xmlns="" w="9525">
                     <a:solidFill>
                       <a:srgbClr val="000000"/>
                     </a:solidFill>
@@ -12135,7 +12135,7 @@
               </a:ln>
               <a:extLst>
                 <a:ext uri="{91240B29-F687-4f45-9708-019B960494DF}">
-                  <a14:hiddenLine xmlns="" xmlns:a14="http://schemas.microsoft.com/office/drawing/2010/main" w="9525">
+                  <a14:hiddenLine xmlns:a14="http://schemas.microsoft.com/office/drawing/2010/main" xmlns="" w="9525">
                     <a:solidFill>
                       <a:srgbClr val="000000"/>
                     </a:solidFill>
@@ -12203,7 +12203,7 @@
               </a:ln>
               <a:extLst>
                 <a:ext uri="{91240B29-F687-4f45-9708-019B960494DF}">
-                  <a14:hiddenLine xmlns="" xmlns:a14="http://schemas.microsoft.com/office/drawing/2010/main" w="9525">
+                  <a14:hiddenLine xmlns:a14="http://schemas.microsoft.com/office/drawing/2010/main" xmlns="" w="9525">
                     <a:solidFill>
                       <a:srgbClr val="000000"/>
                     </a:solidFill>
@@ -12293,7 +12293,7 @@
               </a:ln>
               <a:extLst>
                 <a:ext uri="{91240B29-F687-4f45-9708-019B960494DF}">
-                  <a14:hiddenLine xmlns="" xmlns:a14="http://schemas.microsoft.com/office/drawing/2010/main" w="9525">
+                  <a14:hiddenLine xmlns:a14="http://schemas.microsoft.com/office/drawing/2010/main" xmlns="" w="9525">
                     <a:solidFill>
                       <a:srgbClr val="000000"/>
                     </a:solidFill>
@@ -12327,7 +12327,7 @@
               </a:ln>
               <a:extLst>
                 <a:ext uri="{91240B29-F687-4f45-9708-019B960494DF}">
-                  <a14:hiddenLine xmlns="" xmlns:a14="http://schemas.microsoft.com/office/drawing/2010/main" w="9525">
+                  <a14:hiddenLine xmlns:a14="http://schemas.microsoft.com/office/drawing/2010/main" xmlns="" w="9525">
                     <a:solidFill>
                       <a:srgbClr val="000000"/>
                     </a:solidFill>
@@ -13530,7 +13530,7 @@
         </p:spPr>
         <p:txBody>
           <a:bodyPr>
-            <a:normAutofit fontScale="92500" lnSpcReduction="10000"/>
+            <a:normAutofit fontScale="92500" lnSpcReduction="20000"/>
           </a:bodyPr>
           <a:lstStyle/>
           <a:p>
@@ -13692,6 +13692,27 @@
               </a:rPr>
               <a:t>Practice Quiz is LIVE now. Make a reservation. You have until 9/11!!!</a:t>
             </a:r>
+          </a:p>
+          <a:p>
+            <a:pPr lvl="1"/>
+            <a:r>
+              <a:rPr lang="en-US" dirty="0">
+                <a:latin typeface="Arial" panose="020B0604020202020204" pitchFamily="34" charset="0"/>
+                <a:cs typeface="Arial" panose="020B0604020202020204" pitchFamily="34" charset="0"/>
+              </a:rPr>
+              <a:t>On the subject of changing / </a:t>
+            </a:r>
+            <a:r>
+              <a:rPr lang="en-US">
+                <a:latin typeface="Arial" panose="020B0604020202020204" pitchFamily="34" charset="0"/>
+                <a:cs typeface="Arial" panose="020B0604020202020204" pitchFamily="34" charset="0"/>
+              </a:rPr>
+              <a:t>missing reservations…</a:t>
+            </a:r>
+            <a:endParaRPr lang="en-US" dirty="0">
+              <a:latin typeface="Arial" panose="020B0604020202020204" pitchFamily="34" charset="0"/>
+              <a:cs typeface="Arial" panose="020B0604020202020204" pitchFamily="34" charset="0"/>
+            </a:endParaRPr>
           </a:p>
           <a:p>
             <a:r>

--- a/slides/00-DailyAnnouncements.pptx
+++ b/slides/00-DailyAnnouncements.pptx
@@ -5,14 +5,15 @@
     <p:sldMasterId id="2147484006" r:id="rId1"/>
   </p:sldMasterIdLst>
   <p:notesMasterIdLst>
-    <p:notesMasterId r:id="rId7"/>
+    <p:notesMasterId r:id="rId8"/>
   </p:notesMasterIdLst>
   <p:sldIdLst>
     <p:sldId id="256" r:id="rId2"/>
     <p:sldId id="505" r:id="rId3"/>
     <p:sldId id="516" r:id="rId4"/>
     <p:sldId id="517" r:id="rId5"/>
-    <p:sldId id="515" r:id="rId6"/>
+    <p:sldId id="518" r:id="rId6"/>
+    <p:sldId id="515" r:id="rId7"/>
   </p:sldIdLst>
   <p:sldSz cx="12192000" cy="6858000"/>
   <p:notesSz cx="6858000" cy="9144000"/>
@@ -201,7 +202,7 @@
           <a:p>
             <a:fld id="{C5B45307-6ED4-B142-BD64-10F739779302}" type="datetimeFigureOut">
               <a:rPr lang="en-US" smtClean="0"/>
-              <a:t>9/3/26</a:t>
+              <a:t>9/8/26</a:t>
             </a:fld>
             <a:endParaRPr lang="en-US"/>
           </a:p>
@@ -609,7 +610,7 @@
           <a:noFill/>
           <a:extLst>
             <a:ext uri="{909E8E84-426E-40dd-AFC4-6F175D3DCCD1}">
-              <a14:hiddenFill xmlns:a14="http://schemas.microsoft.com/office/drawing/2010/main" xmlns="">
+              <a14:hiddenFill xmlns="" xmlns:a14="http://schemas.microsoft.com/office/drawing/2010/main">
                 <a:solidFill>
                   <a:srgbClr val="FFFFFF"/>
                 </a:solidFill>
@@ -668,7 +669,7 @@
             </a:ln>
             <a:extLst>
               <a:ext uri="{91240B29-F687-4f45-9708-019B960494DF}">
-                <a14:hiddenLine xmlns:a14="http://schemas.microsoft.com/office/drawing/2010/main" xmlns="" w="9525">
+                <a14:hiddenLine xmlns="" xmlns:a14="http://schemas.microsoft.com/office/drawing/2010/main" w="9525">
                   <a:solidFill>
                     <a:srgbClr val="000000"/>
                   </a:solidFill>
@@ -758,7 +759,7 @@
             </a:ln>
             <a:extLst>
               <a:ext uri="{91240B29-F687-4f45-9708-019B960494DF}">
-                <a14:hiddenLine xmlns:a14="http://schemas.microsoft.com/office/drawing/2010/main" xmlns="" w="9525">
+                <a14:hiddenLine xmlns="" xmlns:a14="http://schemas.microsoft.com/office/drawing/2010/main" w="9525">
                   <a:solidFill>
                     <a:srgbClr val="000000"/>
                   </a:solidFill>
@@ -848,7 +849,7 @@
             </a:ln>
             <a:extLst>
               <a:ext uri="{91240B29-F687-4f45-9708-019B960494DF}">
-                <a14:hiddenLine xmlns:a14="http://schemas.microsoft.com/office/drawing/2010/main" xmlns="" w="9525">
+                <a14:hiddenLine xmlns="" xmlns:a14="http://schemas.microsoft.com/office/drawing/2010/main" w="9525">
                   <a:solidFill>
                     <a:srgbClr val="000000"/>
                   </a:solidFill>
@@ -882,7 +883,7 @@
             </a:ln>
             <a:extLst>
               <a:ext uri="{91240B29-F687-4f45-9708-019B960494DF}">
-                <a14:hiddenLine xmlns:a14="http://schemas.microsoft.com/office/drawing/2010/main" xmlns="" w="9525">
+                <a14:hiddenLine xmlns="" xmlns:a14="http://schemas.microsoft.com/office/drawing/2010/main" w="9525">
                   <a:solidFill>
                     <a:srgbClr val="000000"/>
                   </a:solidFill>
@@ -972,7 +973,7 @@
             </a:ln>
             <a:extLst>
               <a:ext uri="{91240B29-F687-4f45-9708-019B960494DF}">
-                <a14:hiddenLine xmlns:a14="http://schemas.microsoft.com/office/drawing/2010/main" xmlns="" w="9525">
+                <a14:hiddenLine xmlns="" xmlns:a14="http://schemas.microsoft.com/office/drawing/2010/main" w="9525">
                   <a:solidFill>
                     <a:srgbClr val="000000"/>
                   </a:solidFill>
@@ -1034,7 +1035,7 @@
             </a:ln>
             <a:extLst>
               <a:ext uri="{91240B29-F687-4f45-9708-019B960494DF}">
-                <a14:hiddenLine xmlns:a14="http://schemas.microsoft.com/office/drawing/2010/main" xmlns="" w="9525">
+                <a14:hiddenLine xmlns="" xmlns:a14="http://schemas.microsoft.com/office/drawing/2010/main" w="9525">
                   <a:solidFill>
                     <a:srgbClr val="000000"/>
                   </a:solidFill>
@@ -1096,7 +1097,7 @@
             </a:ln>
             <a:extLst>
               <a:ext uri="{91240B29-F687-4f45-9708-019B960494DF}">
-                <a14:hiddenLine xmlns:a14="http://schemas.microsoft.com/office/drawing/2010/main" xmlns="" w="9525">
+                <a14:hiddenLine xmlns="" xmlns:a14="http://schemas.microsoft.com/office/drawing/2010/main" w="9525">
                   <a:solidFill>
                     <a:srgbClr val="000000"/>
                   </a:solidFill>
@@ -1186,7 +1187,7 @@
             </a:ln>
             <a:extLst>
               <a:ext uri="{91240B29-F687-4f45-9708-019B960494DF}">
-                <a14:hiddenLine xmlns:a14="http://schemas.microsoft.com/office/drawing/2010/main" xmlns="" w="9525">
+                <a14:hiddenLine xmlns="" xmlns:a14="http://schemas.microsoft.com/office/drawing/2010/main" w="9525">
                   <a:solidFill>
                     <a:srgbClr val="000000"/>
                   </a:solidFill>
@@ -1248,7 +1249,7 @@
             </a:ln>
             <a:extLst>
               <a:ext uri="{91240B29-F687-4f45-9708-019B960494DF}">
-                <a14:hiddenLine xmlns:a14="http://schemas.microsoft.com/office/drawing/2010/main" xmlns="" w="9525">
+                <a14:hiddenLine xmlns="" xmlns:a14="http://schemas.microsoft.com/office/drawing/2010/main" w="9525">
                   <a:solidFill>
                     <a:srgbClr val="000000"/>
                   </a:solidFill>
@@ -1310,7 +1311,7 @@
             </a:ln>
             <a:extLst>
               <a:ext uri="{91240B29-F687-4f45-9708-019B960494DF}">
-                <a14:hiddenLine xmlns:a14="http://schemas.microsoft.com/office/drawing/2010/main" xmlns="" w="9525">
+                <a14:hiddenLine xmlns="" xmlns:a14="http://schemas.microsoft.com/office/drawing/2010/main" w="9525">
                   <a:solidFill>
                     <a:srgbClr val="000000"/>
                   </a:solidFill>
@@ -1400,7 +1401,7 @@
             </a:ln>
             <a:extLst>
               <a:ext uri="{91240B29-F687-4f45-9708-019B960494DF}">
-                <a14:hiddenLine xmlns:a14="http://schemas.microsoft.com/office/drawing/2010/main" xmlns="" w="9525">
+                <a14:hiddenLine xmlns="" xmlns:a14="http://schemas.microsoft.com/office/drawing/2010/main" w="9525">
                   <a:solidFill>
                     <a:srgbClr val="000000"/>
                   </a:solidFill>
@@ -1490,7 +1491,7 @@
             </a:ln>
             <a:extLst>
               <a:ext uri="{91240B29-F687-4f45-9708-019B960494DF}">
-                <a14:hiddenLine xmlns:a14="http://schemas.microsoft.com/office/drawing/2010/main" xmlns="" w="9525">
+                <a14:hiddenLine xmlns="" xmlns:a14="http://schemas.microsoft.com/office/drawing/2010/main" w="9525">
                   <a:solidFill>
                     <a:srgbClr val="000000"/>
                   </a:solidFill>
@@ -1552,7 +1553,7 @@
             </a:ln>
             <a:extLst>
               <a:ext uri="{91240B29-F687-4f45-9708-019B960494DF}">
-                <a14:hiddenLine xmlns:a14="http://schemas.microsoft.com/office/drawing/2010/main" xmlns="" w="9525">
+                <a14:hiddenLine xmlns="" xmlns:a14="http://schemas.microsoft.com/office/drawing/2010/main" w="9525">
                   <a:solidFill>
                     <a:srgbClr val="000000"/>
                   </a:solidFill>
@@ -1662,7 +1663,7 @@
             </a:ln>
             <a:extLst>
               <a:ext uri="{91240B29-F687-4f45-9708-019B960494DF}">
-                <a14:hiddenLine xmlns:a14="http://schemas.microsoft.com/office/drawing/2010/main" xmlns="" w="9525">
+                <a14:hiddenLine xmlns="" xmlns:a14="http://schemas.microsoft.com/office/drawing/2010/main" w="9525">
                   <a:solidFill>
                     <a:srgbClr val="000000"/>
                   </a:solidFill>
@@ -1724,7 +1725,7 @@
             </a:ln>
             <a:extLst>
               <a:ext uri="{91240B29-F687-4f45-9708-019B960494DF}">
-                <a14:hiddenLine xmlns:a14="http://schemas.microsoft.com/office/drawing/2010/main" xmlns="" w="9525">
+                <a14:hiddenLine xmlns="" xmlns:a14="http://schemas.microsoft.com/office/drawing/2010/main" w="9525">
                   <a:solidFill>
                     <a:srgbClr val="000000"/>
                   </a:solidFill>
@@ -1814,7 +1815,7 @@
             </a:ln>
             <a:extLst>
               <a:ext uri="{91240B29-F687-4f45-9708-019B960494DF}">
-                <a14:hiddenLine xmlns:a14="http://schemas.microsoft.com/office/drawing/2010/main" xmlns="" w="9525">
+                <a14:hiddenLine xmlns="" xmlns:a14="http://schemas.microsoft.com/office/drawing/2010/main" w="9525">
                   <a:solidFill>
                     <a:srgbClr val="000000"/>
                   </a:solidFill>
@@ -1904,7 +1905,7 @@
             </a:ln>
             <a:extLst>
               <a:ext uri="{91240B29-F687-4f45-9708-019B960494DF}">
-                <a14:hiddenLine xmlns:a14="http://schemas.microsoft.com/office/drawing/2010/main" xmlns="" w="9525">
+                <a14:hiddenLine xmlns="" xmlns:a14="http://schemas.microsoft.com/office/drawing/2010/main" w="9525">
                   <a:solidFill>
                     <a:srgbClr val="000000"/>
                   </a:solidFill>
@@ -1966,7 +1967,7 @@
             </a:ln>
             <a:extLst>
               <a:ext uri="{91240B29-F687-4f45-9708-019B960494DF}">
-                <a14:hiddenLine xmlns:a14="http://schemas.microsoft.com/office/drawing/2010/main" xmlns="" w="9525">
+                <a14:hiddenLine xmlns="" xmlns:a14="http://schemas.microsoft.com/office/drawing/2010/main" w="9525">
                   <a:solidFill>
                     <a:srgbClr val="000000"/>
                   </a:solidFill>
@@ -2056,7 +2057,7 @@
             </a:ln>
             <a:extLst>
               <a:ext uri="{91240B29-F687-4f45-9708-019B960494DF}">
-                <a14:hiddenLine xmlns:a14="http://schemas.microsoft.com/office/drawing/2010/main" xmlns="" w="9525">
+                <a14:hiddenLine xmlns="" xmlns:a14="http://schemas.microsoft.com/office/drawing/2010/main" w="9525">
                   <a:solidFill>
                     <a:srgbClr val="000000"/>
                   </a:solidFill>
@@ -2146,7 +2147,7 @@
             </a:ln>
             <a:extLst>
               <a:ext uri="{91240B29-F687-4f45-9708-019B960494DF}">
-                <a14:hiddenLine xmlns:a14="http://schemas.microsoft.com/office/drawing/2010/main" xmlns="" w="9525">
+                <a14:hiddenLine xmlns="" xmlns:a14="http://schemas.microsoft.com/office/drawing/2010/main" w="9525">
                   <a:solidFill>
                     <a:srgbClr val="000000"/>
                   </a:solidFill>
@@ -2202,7 +2203,7 @@
             </a:ln>
             <a:extLst>
               <a:ext uri="{91240B29-F687-4f45-9708-019B960494DF}">
-                <a14:hiddenLine xmlns:a14="http://schemas.microsoft.com/office/drawing/2010/main" xmlns="" w="9525">
+                <a14:hiddenLine xmlns="" xmlns:a14="http://schemas.microsoft.com/office/drawing/2010/main" w="9525">
                   <a:solidFill>
                     <a:srgbClr val="000000"/>
                   </a:solidFill>
@@ -2292,7 +2293,7 @@
             </a:ln>
             <a:extLst>
               <a:ext uri="{91240B29-F687-4f45-9708-019B960494DF}">
-                <a14:hiddenLine xmlns:a14="http://schemas.microsoft.com/office/drawing/2010/main" xmlns="" w="9525">
+                <a14:hiddenLine xmlns="" xmlns:a14="http://schemas.microsoft.com/office/drawing/2010/main" w="9525">
                   <a:solidFill>
                     <a:srgbClr val="000000"/>
                   </a:solidFill>
@@ -2348,7 +2349,7 @@
             </a:ln>
             <a:extLst>
               <a:ext uri="{91240B29-F687-4f45-9708-019B960494DF}">
-                <a14:hiddenLine xmlns:a14="http://schemas.microsoft.com/office/drawing/2010/main" xmlns="" w="9525">
+                <a14:hiddenLine xmlns="" xmlns:a14="http://schemas.microsoft.com/office/drawing/2010/main" w="9525">
                   <a:solidFill>
                     <a:srgbClr val="000000"/>
                   </a:solidFill>
@@ -2438,7 +2439,7 @@
             </a:ln>
             <a:extLst>
               <a:ext uri="{91240B29-F687-4f45-9708-019B960494DF}">
-                <a14:hiddenLine xmlns:a14="http://schemas.microsoft.com/office/drawing/2010/main" xmlns="" w="9525">
+                <a14:hiddenLine xmlns="" xmlns:a14="http://schemas.microsoft.com/office/drawing/2010/main" w="9525">
                   <a:solidFill>
                     <a:srgbClr val="000000"/>
                   </a:solidFill>
@@ -2506,7 +2507,7 @@
             </a:ln>
             <a:extLst>
               <a:ext uri="{91240B29-F687-4f45-9708-019B960494DF}">
-                <a14:hiddenLine xmlns:a14="http://schemas.microsoft.com/office/drawing/2010/main" xmlns="" w="9525">
+                <a14:hiddenLine xmlns="" xmlns:a14="http://schemas.microsoft.com/office/drawing/2010/main" w="9525">
                   <a:solidFill>
                     <a:srgbClr val="000000"/>
                   </a:solidFill>
@@ -2596,7 +2597,7 @@
             </a:ln>
             <a:extLst>
               <a:ext uri="{91240B29-F687-4f45-9708-019B960494DF}">
-                <a14:hiddenLine xmlns:a14="http://schemas.microsoft.com/office/drawing/2010/main" xmlns="" w="9525">
+                <a14:hiddenLine xmlns="" xmlns:a14="http://schemas.microsoft.com/office/drawing/2010/main" w="9525">
                   <a:solidFill>
                     <a:srgbClr val="000000"/>
                   </a:solidFill>
@@ -2664,7 +2665,7 @@
             </a:ln>
             <a:extLst>
               <a:ext uri="{91240B29-F687-4f45-9708-019B960494DF}">
-                <a14:hiddenLine xmlns:a14="http://schemas.microsoft.com/office/drawing/2010/main" xmlns="" w="9525">
+                <a14:hiddenLine xmlns="" xmlns:a14="http://schemas.microsoft.com/office/drawing/2010/main" w="9525">
                   <a:solidFill>
                     <a:srgbClr val="000000"/>
                   </a:solidFill>
@@ -2754,7 +2755,7 @@
             </a:ln>
             <a:extLst>
               <a:ext uri="{91240B29-F687-4f45-9708-019B960494DF}">
-                <a14:hiddenLine xmlns:a14="http://schemas.microsoft.com/office/drawing/2010/main" xmlns="" w="9525">
+                <a14:hiddenLine xmlns="" xmlns:a14="http://schemas.microsoft.com/office/drawing/2010/main" w="9525">
                   <a:solidFill>
                     <a:srgbClr val="000000"/>
                   </a:solidFill>
@@ -2788,7 +2789,7 @@
             </a:ln>
             <a:extLst>
               <a:ext uri="{91240B29-F687-4f45-9708-019B960494DF}">
-                <a14:hiddenLine xmlns:a14="http://schemas.microsoft.com/office/drawing/2010/main" xmlns="" w="9525">
+                <a14:hiddenLine xmlns="" xmlns:a14="http://schemas.microsoft.com/office/drawing/2010/main" w="9525">
                   <a:solidFill>
                     <a:srgbClr val="000000"/>
                   </a:solidFill>
@@ -2878,7 +2879,7 @@
             </a:ln>
             <a:extLst>
               <a:ext uri="{91240B29-F687-4f45-9708-019B960494DF}">
-                <a14:hiddenLine xmlns:a14="http://schemas.microsoft.com/office/drawing/2010/main" xmlns="" w="9525">
+                <a14:hiddenLine xmlns="" xmlns:a14="http://schemas.microsoft.com/office/drawing/2010/main" w="9525">
                   <a:solidFill>
                     <a:srgbClr val="000000"/>
                   </a:solidFill>
@@ -2940,7 +2941,7 @@
             </a:ln>
             <a:extLst>
               <a:ext uri="{91240B29-F687-4f45-9708-019B960494DF}">
-                <a14:hiddenLine xmlns:a14="http://schemas.microsoft.com/office/drawing/2010/main" xmlns="" w="9525">
+                <a14:hiddenLine xmlns="" xmlns:a14="http://schemas.microsoft.com/office/drawing/2010/main" w="9525">
                   <a:solidFill>
                     <a:srgbClr val="000000"/>
                   </a:solidFill>
@@ -3002,7 +3003,7 @@
             </a:ln>
             <a:extLst>
               <a:ext uri="{91240B29-F687-4f45-9708-019B960494DF}">
-                <a14:hiddenLine xmlns:a14="http://schemas.microsoft.com/office/drawing/2010/main" xmlns="" w="9525">
+                <a14:hiddenLine xmlns="" xmlns:a14="http://schemas.microsoft.com/office/drawing/2010/main" w="9525">
                   <a:solidFill>
                     <a:srgbClr val="000000"/>
                   </a:solidFill>
@@ -3092,7 +3093,7 @@
             </a:ln>
             <a:extLst>
               <a:ext uri="{91240B29-F687-4f45-9708-019B960494DF}">
-                <a14:hiddenLine xmlns:a14="http://schemas.microsoft.com/office/drawing/2010/main" xmlns="" w="9525">
+                <a14:hiddenLine xmlns="" xmlns:a14="http://schemas.microsoft.com/office/drawing/2010/main" w="9525">
                   <a:solidFill>
                     <a:srgbClr val="000000"/>
                   </a:solidFill>
@@ -3160,7 +3161,7 @@
             </a:ln>
             <a:extLst>
               <a:ext uri="{91240B29-F687-4f45-9708-019B960494DF}">
-                <a14:hiddenLine xmlns:a14="http://schemas.microsoft.com/office/drawing/2010/main" xmlns="" w="9525">
+                <a14:hiddenLine xmlns="" xmlns:a14="http://schemas.microsoft.com/office/drawing/2010/main" w="9525">
                   <a:solidFill>
                     <a:srgbClr val="000000"/>
                   </a:solidFill>
@@ -3222,7 +3223,7 @@
             </a:ln>
             <a:extLst>
               <a:ext uri="{91240B29-F687-4f45-9708-019B960494DF}">
-                <a14:hiddenLine xmlns:a14="http://schemas.microsoft.com/office/drawing/2010/main" xmlns="" w="9525">
+                <a14:hiddenLine xmlns="" xmlns:a14="http://schemas.microsoft.com/office/drawing/2010/main" w="9525">
                   <a:solidFill>
                     <a:srgbClr val="000000"/>
                   </a:solidFill>
@@ -3312,7 +3313,7 @@
             </a:ln>
             <a:extLst>
               <a:ext uri="{91240B29-F687-4f45-9708-019B960494DF}">
-                <a14:hiddenLine xmlns:a14="http://schemas.microsoft.com/office/drawing/2010/main" xmlns="" w="9525">
+                <a14:hiddenLine xmlns="" xmlns:a14="http://schemas.microsoft.com/office/drawing/2010/main" w="9525">
                   <a:solidFill>
                     <a:srgbClr val="000000"/>
                   </a:solidFill>
@@ -3374,7 +3375,7 @@
             </a:ln>
             <a:extLst>
               <a:ext uri="{91240B29-F687-4f45-9708-019B960494DF}">
-                <a14:hiddenLine xmlns:a14="http://schemas.microsoft.com/office/drawing/2010/main" xmlns="" w="9525">
+                <a14:hiddenLine xmlns="" xmlns:a14="http://schemas.microsoft.com/office/drawing/2010/main" w="9525">
                   <a:solidFill>
                     <a:srgbClr val="000000"/>
                   </a:solidFill>
@@ -3464,7 +3465,7 @@
             </a:ln>
             <a:extLst>
               <a:ext uri="{91240B29-F687-4f45-9708-019B960494DF}">
-                <a14:hiddenLine xmlns:a14="http://schemas.microsoft.com/office/drawing/2010/main" xmlns="" w="9525">
+                <a14:hiddenLine xmlns="" xmlns:a14="http://schemas.microsoft.com/office/drawing/2010/main" w="9525">
                   <a:solidFill>
                     <a:srgbClr val="000000"/>
                   </a:solidFill>
@@ -3526,7 +3527,7 @@
             </a:ln>
             <a:extLst>
               <a:ext uri="{91240B29-F687-4f45-9708-019B960494DF}">
-                <a14:hiddenLine xmlns:a14="http://schemas.microsoft.com/office/drawing/2010/main" xmlns="" w="9525">
+                <a14:hiddenLine xmlns="" xmlns:a14="http://schemas.microsoft.com/office/drawing/2010/main" w="9525">
                   <a:solidFill>
                     <a:srgbClr val="000000"/>
                   </a:solidFill>
@@ -3616,7 +3617,7 @@
             </a:ln>
             <a:extLst>
               <a:ext uri="{91240B29-F687-4f45-9708-019B960494DF}">
-                <a14:hiddenLine xmlns:a14="http://schemas.microsoft.com/office/drawing/2010/main" xmlns="" w="9525">
+                <a14:hiddenLine xmlns="" xmlns:a14="http://schemas.microsoft.com/office/drawing/2010/main" w="9525">
                   <a:solidFill>
                     <a:srgbClr val="000000"/>
                   </a:solidFill>
@@ -3650,7 +3651,7 @@
             </a:ln>
             <a:extLst>
               <a:ext uri="{91240B29-F687-4f45-9708-019B960494DF}">
-                <a14:hiddenLine xmlns:a14="http://schemas.microsoft.com/office/drawing/2010/main" xmlns="" w="9525">
+                <a14:hiddenLine xmlns="" xmlns:a14="http://schemas.microsoft.com/office/drawing/2010/main" w="9525">
                   <a:solidFill>
                     <a:srgbClr val="000000"/>
                   </a:solidFill>
@@ -3715,7 +3716,7 @@
             </a:ln>
             <a:extLst>
               <a:ext uri="{91240B29-F687-4f45-9708-019B960494DF}">
-                <a14:hiddenLine xmlns:a14="http://schemas.microsoft.com/office/drawing/2010/main" xmlns="" w="9525">
+                <a14:hiddenLine xmlns="" xmlns:a14="http://schemas.microsoft.com/office/drawing/2010/main" w="9525">
                   <a:solidFill>
                     <a:srgbClr val="000000"/>
                   </a:solidFill>
@@ -3805,7 +3806,7 @@
             </a:ln>
             <a:extLst>
               <a:ext uri="{91240B29-F687-4f45-9708-019B960494DF}">
-                <a14:hiddenLine xmlns:a14="http://schemas.microsoft.com/office/drawing/2010/main" xmlns="" w="9525">
+                <a14:hiddenLine xmlns="" xmlns:a14="http://schemas.microsoft.com/office/drawing/2010/main" w="9525">
                   <a:solidFill>
                     <a:srgbClr val="000000"/>
                   </a:solidFill>
@@ -3867,7 +3868,7 @@
             </a:ln>
             <a:extLst>
               <a:ext uri="{91240B29-F687-4f45-9708-019B960494DF}">
-                <a14:hiddenLine xmlns:a14="http://schemas.microsoft.com/office/drawing/2010/main" xmlns="" w="9525">
+                <a14:hiddenLine xmlns="" xmlns:a14="http://schemas.microsoft.com/office/drawing/2010/main" w="9525">
                   <a:solidFill>
                     <a:srgbClr val="000000"/>
                   </a:solidFill>
@@ -3957,7 +3958,7 @@
             </a:ln>
             <a:extLst>
               <a:ext uri="{91240B29-F687-4f45-9708-019B960494DF}">
-                <a14:hiddenLine xmlns:a14="http://schemas.microsoft.com/office/drawing/2010/main" xmlns="" w="9525">
+                <a14:hiddenLine xmlns="" xmlns:a14="http://schemas.microsoft.com/office/drawing/2010/main" w="9525">
                   <a:solidFill>
                     <a:srgbClr val="000000"/>
                   </a:solidFill>
@@ -4047,7 +4048,7 @@
             </a:ln>
             <a:extLst>
               <a:ext uri="{91240B29-F687-4f45-9708-019B960494DF}">
-                <a14:hiddenLine xmlns:a14="http://schemas.microsoft.com/office/drawing/2010/main" xmlns="" w="9525">
+                <a14:hiddenLine xmlns="" xmlns:a14="http://schemas.microsoft.com/office/drawing/2010/main" w="9525">
                   <a:solidFill>
                     <a:srgbClr val="000000"/>
                   </a:solidFill>
@@ -4112,7 +4113,7 @@
             </a:ln>
             <a:extLst>
               <a:ext uri="{91240B29-F687-4f45-9708-019B960494DF}">
-                <a14:hiddenLine xmlns:a14="http://schemas.microsoft.com/office/drawing/2010/main" xmlns="" w="9525">
+                <a14:hiddenLine xmlns="" xmlns:a14="http://schemas.microsoft.com/office/drawing/2010/main" w="9525">
                   <a:solidFill>
                     <a:srgbClr val="000000"/>
                   </a:solidFill>
@@ -4174,7 +4175,7 @@
             </a:ln>
             <a:extLst>
               <a:ext uri="{91240B29-F687-4f45-9708-019B960494DF}">
-                <a14:hiddenLine xmlns:a14="http://schemas.microsoft.com/office/drawing/2010/main" xmlns="" w="9525">
+                <a14:hiddenLine xmlns="" xmlns:a14="http://schemas.microsoft.com/office/drawing/2010/main" w="9525">
                   <a:solidFill>
                     <a:srgbClr val="000000"/>
                   </a:solidFill>
@@ -4264,7 +4265,7 @@
             </a:ln>
             <a:extLst>
               <a:ext uri="{91240B29-F687-4f45-9708-019B960494DF}">
-                <a14:hiddenLine xmlns:a14="http://schemas.microsoft.com/office/drawing/2010/main" xmlns="" w="9525">
+                <a14:hiddenLine xmlns="" xmlns:a14="http://schemas.microsoft.com/office/drawing/2010/main" w="9525">
                   <a:solidFill>
                     <a:srgbClr val="000000"/>
                   </a:solidFill>
@@ -4354,7 +4355,7 @@
             </a:ln>
             <a:extLst>
               <a:ext uri="{91240B29-F687-4f45-9708-019B960494DF}">
-                <a14:hiddenLine xmlns:a14="http://schemas.microsoft.com/office/drawing/2010/main" xmlns="" w="9525">
+                <a14:hiddenLine xmlns="" xmlns:a14="http://schemas.microsoft.com/office/drawing/2010/main" w="9525">
                   <a:solidFill>
                     <a:srgbClr val="000000"/>
                   </a:solidFill>
@@ -4416,7 +4417,7 @@
             </a:ln>
             <a:extLst>
               <a:ext uri="{91240B29-F687-4f45-9708-019B960494DF}">
-                <a14:hiddenLine xmlns:a14="http://schemas.microsoft.com/office/drawing/2010/main" xmlns="" w="9525">
+                <a14:hiddenLine xmlns="" xmlns:a14="http://schemas.microsoft.com/office/drawing/2010/main" w="9525">
                   <a:solidFill>
                     <a:srgbClr val="000000"/>
                   </a:solidFill>
@@ -4536,7 +4537,7 @@
             </a:ln>
             <a:extLst>
               <a:ext uri="{91240B29-F687-4f45-9708-019B960494DF}">
-                <a14:hiddenLine xmlns:a14="http://schemas.microsoft.com/office/drawing/2010/main" xmlns="" w="9525">
+                <a14:hiddenLine xmlns="" xmlns:a14="http://schemas.microsoft.com/office/drawing/2010/main" w="9525">
                   <a:solidFill>
                     <a:srgbClr val="000000"/>
                   </a:solidFill>
@@ -4604,7 +4605,7 @@
             </a:ln>
             <a:extLst>
               <a:ext uri="{91240B29-F687-4f45-9708-019B960494DF}">
-                <a14:hiddenLine xmlns:a14="http://schemas.microsoft.com/office/drawing/2010/main" xmlns="" w="9525">
+                <a14:hiddenLine xmlns="" xmlns:a14="http://schemas.microsoft.com/office/drawing/2010/main" w="9525">
                   <a:solidFill>
                     <a:srgbClr val="000000"/>
                   </a:solidFill>
@@ -4694,7 +4695,7 @@
             </a:ln>
             <a:extLst>
               <a:ext uri="{91240B29-F687-4f45-9708-019B960494DF}">
-                <a14:hiddenLine xmlns:a14="http://schemas.microsoft.com/office/drawing/2010/main" xmlns="" w="9525">
+                <a14:hiddenLine xmlns="" xmlns:a14="http://schemas.microsoft.com/office/drawing/2010/main" w="9525">
                   <a:solidFill>
                     <a:srgbClr val="000000"/>
                   </a:solidFill>
@@ -4834,7 +4835,7 @@
           <a:p>
             <a:fld id="{4313F670-7F9A-774D-B73D-573401E44297}" type="datetime1">
               <a:rPr lang="en-US" smtClean="0"/>
-              <a:t>9/3/26</a:t>
+              <a:t>9/8/26</a:t>
             </a:fld>
             <a:endParaRPr lang="en-US"/>
           </a:p>
@@ -5101,7 +5102,7 @@
           <a:p>
             <a:fld id="{446F9669-A8A7-2D40-9D01-B35FC337AA30}" type="datetime1">
               <a:rPr lang="en-US" smtClean="0"/>
-              <a:t>9/3/26</a:t>
+              <a:t>9/8/26</a:t>
             </a:fld>
             <a:endParaRPr lang="en-US"/>
           </a:p>
@@ -5297,7 +5298,7 @@
           <a:p>
             <a:fld id="{FA76CF18-F41B-6B48-B3E5-599E9795C2C3}" type="datetime1">
               <a:rPr lang="en-US" smtClean="0"/>
-              <a:t>9/3/26</a:t>
+              <a:t>9/8/26</a:t>
             </a:fld>
             <a:endParaRPr lang="en-US"/>
           </a:p>
@@ -5560,7 +5561,7 @@
           <a:p>
             <a:fld id="{B9654854-6457-164F-A077-6B3035079B82}" type="datetime1">
               <a:rPr lang="en-US" smtClean="0"/>
-              <a:t>9/3/26</a:t>
+              <a:t>9/8/26</a:t>
             </a:fld>
             <a:endParaRPr lang="en-US"/>
           </a:p>
@@ -5994,7 +5995,7 @@
           <a:p>
             <a:fld id="{CE3DBFD7-E611-8C40-AC73-0C29FF63F0CD}" type="datetime1">
               <a:rPr lang="en-US" smtClean="0"/>
-              <a:t>9/3/26</a:t>
+              <a:t>9/8/26</a:t>
             </a:fld>
             <a:endParaRPr lang="en-US"/>
           </a:p>
@@ -6540,7 +6541,7 @@
           <a:p>
             <a:fld id="{C8B63B06-0493-2840-9F37-30C9412BBF17}" type="datetime1">
               <a:rPr lang="en-US" smtClean="0"/>
-              <a:t>9/3/26</a:t>
+              <a:t>9/8/26</a:t>
             </a:fld>
             <a:endParaRPr lang="en-US"/>
           </a:p>
@@ -7260,7 +7261,7 @@
           <a:p>
             <a:fld id="{72B5C0FA-8C46-E84D-B6D7-B673F2CA0A0E}" type="datetime1">
               <a:rPr lang="en-US" smtClean="0"/>
-              <a:t>9/3/26</a:t>
+              <a:t>9/8/26</a:t>
             </a:fld>
             <a:endParaRPr lang="en-US"/>
           </a:p>
@@ -7430,7 +7431,7 @@
           <a:p>
             <a:fld id="{60B9CDE1-97B4-BF46-B69C-B86855B18820}" type="datetime1">
               <a:rPr lang="en-US" smtClean="0"/>
-              <a:t>9/3/26</a:t>
+              <a:t>9/8/26</a:t>
             </a:fld>
             <a:endParaRPr lang="en-US"/>
           </a:p>
@@ -7610,7 +7611,7 @@
           <a:p>
             <a:fld id="{BE51D3A4-F9E5-FD49-AA87-B395F50451DC}" type="datetime1">
               <a:rPr lang="en-US" smtClean="0"/>
-              <a:t>9/3/26</a:t>
+              <a:t>9/8/26</a:t>
             </a:fld>
             <a:endParaRPr lang="en-US"/>
           </a:p>
@@ -7780,7 +7781,7 @@
           <a:p>
             <a:fld id="{880DFB37-B0AE-9449-85EC-14F9C83B6084}" type="datetime1">
               <a:rPr lang="en-US" smtClean="0"/>
-              <a:t>9/3/26</a:t>
+              <a:t>9/8/26</a:t>
             </a:fld>
             <a:endParaRPr lang="en-US"/>
           </a:p>
@@ -8030,7 +8031,7 @@
           <a:p>
             <a:fld id="{C939124A-616E-6944-A21A-1839F5DBE7BB}" type="datetime1">
               <a:rPr lang="en-US" smtClean="0"/>
-              <a:t>9/3/26</a:t>
+              <a:t>9/8/26</a:t>
             </a:fld>
             <a:endParaRPr lang="en-US"/>
           </a:p>
@@ -8262,7 +8263,7 @@
           <a:p>
             <a:fld id="{C6E9A026-D48C-FD43-8676-CD625DD5D84B}" type="datetime1">
               <a:rPr lang="en-US" smtClean="0"/>
-              <a:t>9/3/26</a:t>
+              <a:t>9/8/26</a:t>
             </a:fld>
             <a:endParaRPr lang="en-US"/>
           </a:p>
@@ -8648,7 +8649,7 @@
           <a:p>
             <a:fld id="{EA35111E-23A3-1440-99A3-C4C665908E3D}" type="datetime1">
               <a:rPr lang="en-US" smtClean="0"/>
-              <a:t>9/3/26</a:t>
+              <a:t>9/8/26</a:t>
             </a:fld>
             <a:endParaRPr lang="en-US"/>
           </a:p>
@@ -8771,7 +8772,7 @@
           <a:p>
             <a:fld id="{249983B9-88EF-D74B-BA6D-6A3BF17C2B38}" type="datetime1">
               <a:rPr lang="en-US" smtClean="0"/>
-              <a:t>9/3/26</a:t>
+              <a:t>9/8/26</a:t>
             </a:fld>
             <a:endParaRPr lang="en-US"/>
           </a:p>
@@ -8866,7 +8867,7 @@
           <a:p>
             <a:fld id="{E2A00AEF-B4EC-084A-8DB8-A225C7981CBB}" type="datetime1">
               <a:rPr lang="en-US" smtClean="0"/>
-              <a:t>9/3/26</a:t>
+              <a:t>9/8/26</a:t>
             </a:fld>
             <a:endParaRPr lang="en-US"/>
           </a:p>
@@ -9115,7 +9116,7 @@
           <a:p>
             <a:fld id="{97860299-21CD-A94A-A7B0-44E787F8D42C}" type="datetime1">
               <a:rPr lang="en-US" smtClean="0"/>
-              <a:t>9/3/26</a:t>
+              <a:t>9/8/26</a:t>
             </a:fld>
             <a:endParaRPr lang="en-US"/>
           </a:p>
@@ -9400,7 +9401,7 @@
           <a:p>
             <a:fld id="{3DFD19CF-4E62-D246-BA61-7B528271315F}" type="datetime1">
               <a:rPr lang="en-US" smtClean="0"/>
-              <a:t>9/3/26</a:t>
+              <a:t>9/8/26</a:t>
             </a:fld>
             <a:endParaRPr lang="en-US"/>
           </a:p>
@@ -9523,7 +9524,7 @@
           <a:noFill/>
           <a:extLst>
             <a:ext uri="{909E8E84-426E-40dd-AFC4-6F175D3DCCD1}">
-              <a14:hiddenFill xmlns:a14="http://schemas.microsoft.com/office/drawing/2010/main" xmlns="">
+              <a14:hiddenFill xmlns="" xmlns:a14="http://schemas.microsoft.com/office/drawing/2010/main">
                 <a:solidFill>
                   <a:srgbClr val="FFFFFF"/>
                 </a:solidFill>
@@ -9597,7 +9598,7 @@
               </a:ln>
               <a:extLst>
                 <a:ext uri="{91240B29-F687-4f45-9708-019B960494DF}">
-                  <a14:hiddenLine xmlns:a14="http://schemas.microsoft.com/office/drawing/2010/main" xmlns="" w="9525">
+                  <a14:hiddenLine xmlns="" xmlns:a14="http://schemas.microsoft.com/office/drawing/2010/main" w="9525">
                     <a:solidFill>
                       <a:srgbClr val="000000"/>
                     </a:solidFill>
@@ -9687,7 +9688,7 @@
               </a:ln>
               <a:extLst>
                 <a:ext uri="{91240B29-F687-4f45-9708-019B960494DF}">
-                  <a14:hiddenLine xmlns:a14="http://schemas.microsoft.com/office/drawing/2010/main" xmlns="" w="9525">
+                  <a14:hiddenLine xmlns="" xmlns:a14="http://schemas.microsoft.com/office/drawing/2010/main" w="9525">
                     <a:solidFill>
                       <a:srgbClr val="000000"/>
                     </a:solidFill>
@@ -9777,7 +9778,7 @@
               </a:ln>
               <a:extLst>
                 <a:ext uri="{91240B29-F687-4f45-9708-019B960494DF}">
-                  <a14:hiddenLine xmlns:a14="http://schemas.microsoft.com/office/drawing/2010/main" xmlns="" w="9525">
+                  <a14:hiddenLine xmlns="" xmlns:a14="http://schemas.microsoft.com/office/drawing/2010/main" w="9525">
                     <a:solidFill>
                       <a:srgbClr val="000000"/>
                     </a:solidFill>
@@ -9839,7 +9840,7 @@
               </a:ln>
               <a:extLst>
                 <a:ext uri="{91240B29-F687-4f45-9708-019B960494DF}">
-                  <a14:hiddenLine xmlns:a14="http://schemas.microsoft.com/office/drawing/2010/main" xmlns="" w="9525">
+                  <a14:hiddenLine xmlns="" xmlns:a14="http://schemas.microsoft.com/office/drawing/2010/main" w="9525">
                     <a:solidFill>
                       <a:srgbClr val="000000"/>
                     </a:solidFill>
@@ -9929,7 +9930,7 @@
               </a:ln>
               <a:extLst>
                 <a:ext uri="{91240B29-F687-4f45-9708-019B960494DF}">
-                  <a14:hiddenLine xmlns:a14="http://schemas.microsoft.com/office/drawing/2010/main" xmlns="" w="9525">
+                  <a14:hiddenLine xmlns="" xmlns:a14="http://schemas.microsoft.com/office/drawing/2010/main" w="9525">
                     <a:solidFill>
                       <a:srgbClr val="000000"/>
                     </a:solidFill>
@@ -9991,7 +9992,7 @@
               </a:ln>
               <a:extLst>
                 <a:ext uri="{91240B29-F687-4f45-9708-019B960494DF}">
-                  <a14:hiddenLine xmlns:a14="http://schemas.microsoft.com/office/drawing/2010/main" xmlns="" w="9525">
+                  <a14:hiddenLine xmlns="" xmlns:a14="http://schemas.microsoft.com/office/drawing/2010/main" w="9525">
                     <a:solidFill>
                       <a:srgbClr val="000000"/>
                     </a:solidFill>
@@ -10053,7 +10054,7 @@
               </a:ln>
               <a:extLst>
                 <a:ext uri="{91240B29-F687-4f45-9708-019B960494DF}">
-                  <a14:hiddenLine xmlns:a14="http://schemas.microsoft.com/office/drawing/2010/main" xmlns="" w="9525">
+                  <a14:hiddenLine xmlns="" xmlns:a14="http://schemas.microsoft.com/office/drawing/2010/main" w="9525">
                     <a:solidFill>
                       <a:srgbClr val="000000"/>
                     </a:solidFill>
@@ -10143,7 +10144,7 @@
               </a:ln>
               <a:extLst>
                 <a:ext uri="{91240B29-F687-4f45-9708-019B960494DF}">
-                  <a14:hiddenLine xmlns:a14="http://schemas.microsoft.com/office/drawing/2010/main" xmlns="" w="9525">
+                  <a14:hiddenLine xmlns="" xmlns:a14="http://schemas.microsoft.com/office/drawing/2010/main" w="9525">
                     <a:solidFill>
                       <a:srgbClr val="000000"/>
                     </a:solidFill>
@@ -10233,7 +10234,7 @@
               </a:ln>
               <a:extLst>
                 <a:ext uri="{91240B29-F687-4f45-9708-019B960494DF}">
-                  <a14:hiddenLine xmlns:a14="http://schemas.microsoft.com/office/drawing/2010/main" xmlns="" w="9525">
+                  <a14:hiddenLine xmlns="" xmlns:a14="http://schemas.microsoft.com/office/drawing/2010/main" w="9525">
                     <a:solidFill>
                       <a:srgbClr val="000000"/>
                     </a:solidFill>
@@ -10295,7 +10296,7 @@
               </a:ln>
               <a:extLst>
                 <a:ext uri="{91240B29-F687-4f45-9708-019B960494DF}">
-                  <a14:hiddenLine xmlns:a14="http://schemas.microsoft.com/office/drawing/2010/main" xmlns="" w="9525">
+                  <a14:hiddenLine xmlns="" xmlns:a14="http://schemas.microsoft.com/office/drawing/2010/main" w="9525">
                     <a:solidFill>
                       <a:srgbClr val="000000"/>
                     </a:solidFill>
@@ -10405,7 +10406,7 @@
               </a:ln>
               <a:extLst>
                 <a:ext uri="{91240B29-F687-4f45-9708-019B960494DF}">
-                  <a14:hiddenLine xmlns:a14="http://schemas.microsoft.com/office/drawing/2010/main" xmlns="" w="9525">
+                  <a14:hiddenLine xmlns="" xmlns:a14="http://schemas.microsoft.com/office/drawing/2010/main" w="9525">
                     <a:solidFill>
                       <a:srgbClr val="000000"/>
                     </a:solidFill>
@@ -10489,7 +10490,7 @@
               </a:ln>
               <a:extLst>
                 <a:ext uri="{91240B29-F687-4f45-9708-019B960494DF}">
-                  <a14:hiddenLine xmlns:a14="http://schemas.microsoft.com/office/drawing/2010/main" xmlns="" w="9525">
+                  <a14:hiddenLine xmlns="" xmlns:a14="http://schemas.microsoft.com/office/drawing/2010/main" w="9525">
                     <a:solidFill>
                       <a:srgbClr val="000000"/>
                     </a:solidFill>
@@ -10551,7 +10552,7 @@
               </a:ln>
               <a:extLst>
                 <a:ext uri="{91240B29-F687-4f45-9708-019B960494DF}">
-                  <a14:hiddenLine xmlns:a14="http://schemas.microsoft.com/office/drawing/2010/main" xmlns="" w="9525">
+                  <a14:hiddenLine xmlns="" xmlns:a14="http://schemas.microsoft.com/office/drawing/2010/main" w="9525">
                     <a:solidFill>
                       <a:srgbClr val="000000"/>
                     </a:solidFill>
@@ -10613,7 +10614,7 @@
               </a:ln>
               <a:extLst>
                 <a:ext uri="{91240B29-F687-4f45-9708-019B960494DF}">
-                  <a14:hiddenLine xmlns:a14="http://schemas.microsoft.com/office/drawing/2010/main" xmlns="" w="9525">
+                  <a14:hiddenLine xmlns="" xmlns:a14="http://schemas.microsoft.com/office/drawing/2010/main" w="9525">
                     <a:solidFill>
                       <a:srgbClr val="000000"/>
                     </a:solidFill>
@@ -10703,7 +10704,7 @@
               </a:ln>
               <a:extLst>
                 <a:ext uri="{91240B29-F687-4f45-9708-019B960494DF}">
-                  <a14:hiddenLine xmlns:a14="http://schemas.microsoft.com/office/drawing/2010/main" xmlns="" w="9525">
+                  <a14:hiddenLine xmlns="" xmlns:a14="http://schemas.microsoft.com/office/drawing/2010/main" w="9525">
                     <a:solidFill>
                       <a:srgbClr val="000000"/>
                     </a:solidFill>
@@ -10737,7 +10738,7 @@
               </a:ln>
               <a:extLst>
                 <a:ext uri="{91240B29-F687-4f45-9708-019B960494DF}">
-                  <a14:hiddenLine xmlns:a14="http://schemas.microsoft.com/office/drawing/2010/main" xmlns="" w="9525">
+                  <a14:hiddenLine xmlns="" xmlns:a14="http://schemas.microsoft.com/office/drawing/2010/main" w="9525">
                     <a:solidFill>
                       <a:srgbClr val="000000"/>
                     </a:solidFill>
@@ -10802,7 +10803,7 @@
               </a:ln>
               <a:extLst>
                 <a:ext uri="{91240B29-F687-4f45-9708-019B960494DF}">
-                  <a14:hiddenLine xmlns:a14="http://schemas.microsoft.com/office/drawing/2010/main" xmlns="" w="9525">
+                  <a14:hiddenLine xmlns="" xmlns:a14="http://schemas.microsoft.com/office/drawing/2010/main" w="9525">
                     <a:solidFill>
                       <a:srgbClr val="000000"/>
                     </a:solidFill>
@@ -10892,7 +10893,7 @@
               </a:ln>
               <a:extLst>
                 <a:ext uri="{91240B29-F687-4f45-9708-019B960494DF}">
-                  <a14:hiddenLine xmlns:a14="http://schemas.microsoft.com/office/drawing/2010/main" xmlns="" w="9525">
+                  <a14:hiddenLine xmlns="" xmlns:a14="http://schemas.microsoft.com/office/drawing/2010/main" w="9525">
                     <a:solidFill>
                       <a:srgbClr val="000000"/>
                     </a:solidFill>
@@ -10954,7 +10955,7 @@
               </a:ln>
               <a:extLst>
                 <a:ext uri="{91240B29-F687-4f45-9708-019B960494DF}">
-                  <a14:hiddenLine xmlns:a14="http://schemas.microsoft.com/office/drawing/2010/main" xmlns="" w="9525">
+                  <a14:hiddenLine xmlns="" xmlns:a14="http://schemas.microsoft.com/office/drawing/2010/main" w="9525">
                     <a:solidFill>
                       <a:srgbClr val="000000"/>
                     </a:solidFill>
@@ -11044,7 +11045,7 @@
               </a:ln>
               <a:extLst>
                 <a:ext uri="{91240B29-F687-4f45-9708-019B960494DF}">
-                  <a14:hiddenLine xmlns:a14="http://schemas.microsoft.com/office/drawing/2010/main" xmlns="" w="9525">
+                  <a14:hiddenLine xmlns="" xmlns:a14="http://schemas.microsoft.com/office/drawing/2010/main" w="9525">
                     <a:solidFill>
                       <a:srgbClr val="000000"/>
                     </a:solidFill>
@@ -11109,7 +11110,7 @@
               </a:ln>
               <a:extLst>
                 <a:ext uri="{91240B29-F687-4f45-9708-019B960494DF}">
-                  <a14:hiddenLine xmlns:a14="http://schemas.microsoft.com/office/drawing/2010/main" xmlns="" w="9525">
+                  <a14:hiddenLine xmlns="" xmlns:a14="http://schemas.microsoft.com/office/drawing/2010/main" w="9525">
                     <a:solidFill>
                       <a:srgbClr val="000000"/>
                     </a:solidFill>
@@ -11171,7 +11172,7 @@
               </a:ln>
               <a:extLst>
                 <a:ext uri="{91240B29-F687-4f45-9708-019B960494DF}">
-                  <a14:hiddenLine xmlns:a14="http://schemas.microsoft.com/office/drawing/2010/main" xmlns="" w="9525">
+                  <a14:hiddenLine xmlns="" xmlns:a14="http://schemas.microsoft.com/office/drawing/2010/main" w="9525">
                     <a:solidFill>
                       <a:srgbClr val="000000"/>
                     </a:solidFill>
@@ -11261,7 +11262,7 @@
               </a:ln>
               <a:extLst>
                 <a:ext uri="{91240B29-F687-4f45-9708-019B960494DF}">
-                  <a14:hiddenLine xmlns:a14="http://schemas.microsoft.com/office/drawing/2010/main" xmlns="" w="9525">
+                  <a14:hiddenLine xmlns="" xmlns:a14="http://schemas.microsoft.com/office/drawing/2010/main" w="9525">
                     <a:solidFill>
                       <a:srgbClr val="000000"/>
                     </a:solidFill>
@@ -11351,7 +11352,7 @@
               </a:ln>
               <a:extLst>
                 <a:ext uri="{91240B29-F687-4f45-9708-019B960494DF}">
-                  <a14:hiddenLine xmlns:a14="http://schemas.microsoft.com/office/drawing/2010/main" xmlns="" w="9525">
+                  <a14:hiddenLine xmlns="" xmlns:a14="http://schemas.microsoft.com/office/drawing/2010/main" w="9525">
                     <a:solidFill>
                       <a:srgbClr val="000000"/>
                     </a:solidFill>
@@ -11416,7 +11417,7 @@
               </a:ln>
               <a:extLst>
                 <a:ext uri="{91240B29-F687-4f45-9708-019B960494DF}">
-                  <a14:hiddenLine xmlns:a14="http://schemas.microsoft.com/office/drawing/2010/main" xmlns="" w="9525">
+                  <a14:hiddenLine xmlns="" xmlns:a14="http://schemas.microsoft.com/office/drawing/2010/main" w="9525">
                     <a:solidFill>
                       <a:srgbClr val="000000"/>
                     </a:solidFill>
@@ -11536,7 +11537,7 @@
               </a:ln>
               <a:extLst>
                 <a:ext uri="{91240B29-F687-4f45-9708-019B960494DF}">
-                  <a14:hiddenLine xmlns:a14="http://schemas.microsoft.com/office/drawing/2010/main" xmlns="" w="9525">
+                  <a14:hiddenLine xmlns="" xmlns:a14="http://schemas.microsoft.com/office/drawing/2010/main" w="9525">
                     <a:solidFill>
                       <a:srgbClr val="000000"/>
                     </a:solidFill>
@@ -11617,7 +11618,7 @@
               </a:ln>
               <a:extLst>
                 <a:ext uri="{91240B29-F687-4f45-9708-019B960494DF}">
-                  <a14:hiddenLine xmlns:a14="http://schemas.microsoft.com/office/drawing/2010/main" xmlns="" w="9525">
+                  <a14:hiddenLine xmlns="" xmlns:a14="http://schemas.microsoft.com/office/drawing/2010/main" w="9525">
                     <a:solidFill>
                       <a:srgbClr val="000000"/>
                     </a:solidFill>
@@ -11732,7 +11733,7 @@
               </a:ln>
               <a:extLst>
                 <a:ext uri="{91240B29-F687-4f45-9708-019B960494DF}">
-                  <a14:hiddenLine xmlns:a14="http://schemas.microsoft.com/office/drawing/2010/main" xmlns="" w="9525">
+                  <a14:hiddenLine xmlns="" xmlns:a14="http://schemas.microsoft.com/office/drawing/2010/main" w="9525">
                     <a:solidFill>
                       <a:srgbClr val="000000"/>
                     </a:solidFill>
@@ -11822,7 +11823,7 @@
               </a:ln>
               <a:extLst>
                 <a:ext uri="{91240B29-F687-4f45-9708-019B960494DF}">
-                  <a14:hiddenLine xmlns:a14="http://schemas.microsoft.com/office/drawing/2010/main" xmlns="" w="9525">
+                  <a14:hiddenLine xmlns="" xmlns:a14="http://schemas.microsoft.com/office/drawing/2010/main" w="9525">
                     <a:solidFill>
                       <a:srgbClr val="000000"/>
                     </a:solidFill>
@@ -11887,7 +11888,7 @@
               </a:ln>
               <a:extLst>
                 <a:ext uri="{91240B29-F687-4f45-9708-019B960494DF}">
-                  <a14:hiddenLine xmlns:a14="http://schemas.microsoft.com/office/drawing/2010/main" xmlns="" w="9525">
+                  <a14:hiddenLine xmlns="" xmlns:a14="http://schemas.microsoft.com/office/drawing/2010/main" w="9525">
                     <a:solidFill>
                       <a:srgbClr val="000000"/>
                     </a:solidFill>
@@ -11977,7 +11978,7 @@
               </a:ln>
               <a:extLst>
                 <a:ext uri="{91240B29-F687-4f45-9708-019B960494DF}">
-                  <a14:hiddenLine xmlns:a14="http://schemas.microsoft.com/office/drawing/2010/main" xmlns="" w="9525">
+                  <a14:hiddenLine xmlns="" xmlns:a14="http://schemas.microsoft.com/office/drawing/2010/main" w="9525">
                     <a:solidFill>
                       <a:srgbClr val="000000"/>
                     </a:solidFill>
@@ -12045,7 +12046,7 @@
               </a:ln>
               <a:extLst>
                 <a:ext uri="{91240B29-F687-4f45-9708-019B960494DF}">
-                  <a14:hiddenLine xmlns:a14="http://schemas.microsoft.com/office/drawing/2010/main" xmlns="" w="9525">
+                  <a14:hiddenLine xmlns="" xmlns:a14="http://schemas.microsoft.com/office/drawing/2010/main" w="9525">
                     <a:solidFill>
                       <a:srgbClr val="000000"/>
                     </a:solidFill>
@@ -12135,7 +12136,7 @@
               </a:ln>
               <a:extLst>
                 <a:ext uri="{91240B29-F687-4f45-9708-019B960494DF}">
-                  <a14:hiddenLine xmlns:a14="http://schemas.microsoft.com/office/drawing/2010/main" xmlns="" w="9525">
+                  <a14:hiddenLine xmlns="" xmlns:a14="http://schemas.microsoft.com/office/drawing/2010/main" w="9525">
                     <a:solidFill>
                       <a:srgbClr val="000000"/>
                     </a:solidFill>
@@ -12203,7 +12204,7 @@
               </a:ln>
               <a:extLst>
                 <a:ext uri="{91240B29-F687-4f45-9708-019B960494DF}">
-                  <a14:hiddenLine xmlns:a14="http://schemas.microsoft.com/office/drawing/2010/main" xmlns="" w="9525">
+                  <a14:hiddenLine xmlns="" xmlns:a14="http://schemas.microsoft.com/office/drawing/2010/main" w="9525">
                     <a:solidFill>
                       <a:srgbClr val="000000"/>
                     </a:solidFill>
@@ -12293,7 +12294,7 @@
               </a:ln>
               <a:extLst>
                 <a:ext uri="{91240B29-F687-4f45-9708-019B960494DF}">
-                  <a14:hiddenLine xmlns:a14="http://schemas.microsoft.com/office/drawing/2010/main" xmlns="" w="9525">
+                  <a14:hiddenLine xmlns="" xmlns:a14="http://schemas.microsoft.com/office/drawing/2010/main" w="9525">
                     <a:solidFill>
                       <a:srgbClr val="000000"/>
                     </a:solidFill>
@@ -12327,7 +12328,7 @@
               </a:ln>
               <a:extLst>
                 <a:ext uri="{91240B29-F687-4f45-9708-019B960494DF}">
-                  <a14:hiddenLine xmlns:a14="http://schemas.microsoft.com/office/drawing/2010/main" xmlns="" w="9525">
+                  <a14:hiddenLine xmlns="" xmlns:a14="http://schemas.microsoft.com/office/drawing/2010/main" w="9525">
                     <a:solidFill>
                       <a:srgbClr val="000000"/>
                     </a:solidFill>
@@ -12467,7 +12468,7 @@
           <a:p>
             <a:fld id="{92FF8978-FE14-CC4A-93A6-934EB06543C0}" type="datetime1">
               <a:rPr lang="en-US" smtClean="0"/>
-              <a:t>9/3/26</a:t>
+              <a:t>9/8/26</a:t>
             </a:fld>
             <a:endParaRPr lang="en-US"/>
           </a:p>
@@ -13767,6 +13768,298 @@
   <p:cSld>
     <p:spTree>
       <p:nvGrpSpPr>
+        <p:cNvPr id="1" name="">
+          <a:extLst>
+            <a:ext uri="{FF2B5EF4-FFF2-40B4-BE49-F238E27FC236}">
+              <a16:creationId xmlns:a16="http://schemas.microsoft.com/office/drawing/2014/main" id="{7EEC5B83-0D05-973D-10B8-618E407513DC}"/>
+            </a:ext>
+          </a:extLst>
+        </p:cNvPr>
+        <p:cNvGrpSpPr/>
+        <p:nvPr/>
+      </p:nvGrpSpPr>
+      <p:grpSpPr>
+        <a:xfrm>
+          <a:off x="0" y="0"/>
+          <a:ext cx="0" cy="0"/>
+          <a:chOff x="0" y="0"/>
+          <a:chExt cx="0" cy="0"/>
+        </a:xfrm>
+      </p:grpSpPr>
+      <p:sp>
+        <p:nvSpPr>
+          <p:cNvPr id="6146" name="Rectangle 2">
+            <a:extLst>
+              <a:ext uri="{FF2B5EF4-FFF2-40B4-BE49-F238E27FC236}">
+                <a16:creationId xmlns:a16="http://schemas.microsoft.com/office/drawing/2014/main" id="{E00A8CCF-6475-47C1-2674-1A77A783997F}"/>
+              </a:ext>
+            </a:extLst>
+          </p:cNvPr>
+          <p:cNvSpPr>
+            <a:spLocks noGrp="1" noChangeArrowheads="1"/>
+          </p:cNvSpPr>
+          <p:nvPr>
+            <p:ph type="title"/>
+            <p:custDataLst>
+              <p:tags r:id="rId1"/>
+            </p:custDataLst>
+          </p:nvPr>
+        </p:nvSpPr>
+        <p:spPr>
+          <a:xfrm>
+            <a:off x="1141413" y="284084"/>
+            <a:ext cx="9905998" cy="620791"/>
+          </a:xfrm>
+        </p:spPr>
+        <p:txBody>
+          <a:bodyPr/>
+          <a:lstStyle/>
+          <a:p>
+            <a:pPr algn="ctr"/>
+            <a:r>
+              <a:rPr lang="en-US" dirty="0"/>
+              <a:t>Lecture 5 - Tuesday, Sep. 8</a:t>
+            </a:r>
+          </a:p>
+        </p:txBody>
+      </p:sp>
+      <p:sp>
+        <p:nvSpPr>
+          <p:cNvPr id="6147" name="Rectangle 3">
+            <a:extLst>
+              <a:ext uri="{FF2B5EF4-FFF2-40B4-BE49-F238E27FC236}">
+                <a16:creationId xmlns:a16="http://schemas.microsoft.com/office/drawing/2014/main" id="{6AD7214A-D852-5E38-8C7E-1CA40550B5C7}"/>
+              </a:ext>
+            </a:extLst>
+          </p:cNvPr>
+          <p:cNvSpPr>
+            <a:spLocks noGrp="1" noChangeArrowheads="1"/>
+          </p:cNvSpPr>
+          <p:nvPr>
+            <p:ph idx="1"/>
+            <p:custDataLst>
+              <p:tags r:id="rId2"/>
+            </p:custDataLst>
+          </p:nvPr>
+        </p:nvSpPr>
+        <p:spPr>
+          <a:xfrm>
+            <a:off x="1294151" y="1098549"/>
+            <a:ext cx="9600522" cy="5149850"/>
+          </a:xfrm>
+        </p:spPr>
+        <p:txBody>
+          <a:bodyPr>
+            <a:normAutofit fontScale="77500" lnSpcReduction="20000"/>
+          </a:bodyPr>
+          <a:lstStyle/>
+          <a:p>
+            <a:r>
+              <a:rPr lang="en-US" dirty="0">
+                <a:latin typeface="Arial" panose="020B0604020202020204" pitchFamily="34" charset="0"/>
+                <a:cs typeface="Arial" panose="020B0604020202020204" pitchFamily="34" charset="0"/>
+              </a:rPr>
+              <a:t>Weather is actually nice today! Hooray!</a:t>
+            </a:r>
+          </a:p>
+          <a:p>
+            <a:r>
+              <a:rPr lang="en-US" dirty="0">
+                <a:latin typeface="Arial" panose="020B0604020202020204" pitchFamily="34" charset="0"/>
+                <a:cs typeface="Arial" panose="020B0604020202020204" pitchFamily="34" charset="0"/>
+              </a:rPr>
+              <a:t>Please remember </a:t>
+            </a:r>
+            <a:r>
+              <a:rPr lang="en-US" b="1" i="1" u="sng" dirty="0">
+                <a:latin typeface="Arial" panose="020B0604020202020204" pitchFamily="34" charset="0"/>
+                <a:cs typeface="Arial" panose="020B0604020202020204" pitchFamily="34" charset="0"/>
+              </a:rPr>
+              <a:t>no laptops / phones</a:t>
+            </a:r>
+            <a:r>
+              <a:rPr lang="en-US" dirty="0">
+                <a:latin typeface="Arial" panose="020B0604020202020204" pitchFamily="34" charset="0"/>
+                <a:cs typeface="Arial" panose="020B0604020202020204" pitchFamily="34" charset="0"/>
+              </a:rPr>
+              <a:t> and </a:t>
+            </a:r>
+            <a:r>
+              <a:rPr lang="en-US" b="1" i="1" u="sng" dirty="0">
+                <a:latin typeface="Arial" panose="020B0604020202020204" pitchFamily="34" charset="0"/>
+                <a:cs typeface="Arial" panose="020B0604020202020204" pitchFamily="34" charset="0"/>
+              </a:rPr>
+              <a:t>attendance policy</a:t>
+            </a:r>
+          </a:p>
+          <a:p>
+            <a:r>
+              <a:rPr lang="en-US" dirty="0">
+                <a:latin typeface="Arial" panose="020B0604020202020204" pitchFamily="34" charset="0"/>
+                <a:cs typeface="Arial" panose="020B0604020202020204" pitchFamily="34" charset="0"/>
+              </a:rPr>
+              <a:t>First homework is past due</a:t>
+            </a:r>
+          </a:p>
+          <a:p>
+            <a:pPr lvl="1"/>
+            <a:r>
+              <a:rPr lang="en-US" dirty="0">
+                <a:latin typeface="Arial" panose="020B0604020202020204" pitchFamily="34" charset="0"/>
+                <a:cs typeface="Arial" panose="020B0604020202020204" pitchFamily="34" charset="0"/>
+              </a:rPr>
+              <a:t>Unless you took extension in which case you have until tonight</a:t>
+            </a:r>
+          </a:p>
+          <a:p>
+            <a:pPr lvl="1"/>
+            <a:r>
+              <a:rPr lang="en-US" dirty="0">
+                <a:latin typeface="Arial" panose="020B0604020202020204" pitchFamily="34" charset="0"/>
+                <a:cs typeface="Arial" panose="020B0604020202020204" pitchFamily="34" charset="0"/>
+              </a:rPr>
+              <a:t>It is currently being graded. We will be spot grading some Qs for correctness.</a:t>
+            </a:r>
+          </a:p>
+          <a:p>
+            <a:r>
+              <a:rPr lang="en-US" dirty="0">
+                <a:latin typeface="Arial" panose="020B0604020202020204" pitchFamily="34" charset="0"/>
+                <a:cs typeface="Arial" panose="020B0604020202020204" pitchFamily="34" charset="0"/>
+              </a:rPr>
+              <a:t>This week:</a:t>
+            </a:r>
+          </a:p>
+          <a:p>
+            <a:pPr lvl="1"/>
+            <a:r>
+              <a:rPr lang="en-US" dirty="0">
+                <a:latin typeface="Arial" panose="020B0604020202020204" pitchFamily="34" charset="0"/>
+                <a:cs typeface="Arial" panose="020B0604020202020204" pitchFamily="34" charset="0"/>
+              </a:rPr>
+              <a:t>No homework, but you can start working on module 1 written assignment!</a:t>
+            </a:r>
+          </a:p>
+          <a:p>
+            <a:r>
+              <a:rPr lang="en-US" dirty="0">
+                <a:latin typeface="Arial" panose="020B0604020202020204" pitchFamily="34" charset="0"/>
+                <a:cs typeface="Arial" panose="020B0604020202020204" pitchFamily="34" charset="0"/>
+              </a:rPr>
+              <a:t>CBTF Practice Quiz</a:t>
+            </a:r>
+          </a:p>
+          <a:p>
+            <a:pPr lvl="1"/>
+            <a:r>
+              <a:rPr lang="en-US" dirty="0">
+                <a:latin typeface="Arial" panose="020B0604020202020204" pitchFamily="34" charset="0"/>
+                <a:cs typeface="Arial" panose="020B0604020202020204" pitchFamily="34" charset="0"/>
+              </a:rPr>
+              <a:t>Please make a </a:t>
+            </a:r>
+            <a:r>
+              <a:rPr lang="en-US" dirty="0" err="1">
+                <a:latin typeface="Arial" panose="020B0604020202020204" pitchFamily="34" charset="0"/>
+                <a:cs typeface="Arial" panose="020B0604020202020204" pitchFamily="34" charset="0"/>
+              </a:rPr>
+              <a:t>PrairieLearn</a:t>
+            </a:r>
+            <a:r>
+              <a:rPr lang="en-US" dirty="0">
+                <a:latin typeface="Arial" panose="020B0604020202020204" pitchFamily="34" charset="0"/>
+                <a:cs typeface="Arial" panose="020B0604020202020204" pitchFamily="34" charset="0"/>
+              </a:rPr>
+              <a:t>/</a:t>
+            </a:r>
+            <a:r>
+              <a:rPr lang="en-US" dirty="0" err="1">
+                <a:latin typeface="Arial" panose="020B0604020202020204" pitchFamily="34" charset="0"/>
+                <a:cs typeface="Arial" panose="020B0604020202020204" pitchFamily="34" charset="0"/>
+              </a:rPr>
+              <a:t>PrairieTest</a:t>
+            </a:r>
+            <a:r>
+              <a:rPr lang="en-US" dirty="0">
+                <a:latin typeface="Arial" panose="020B0604020202020204" pitchFamily="34" charset="0"/>
+                <a:cs typeface="Arial" panose="020B0604020202020204" pitchFamily="34" charset="0"/>
+              </a:rPr>
+              <a:t> account NOW</a:t>
+            </a:r>
+          </a:p>
+          <a:p>
+            <a:pPr lvl="1"/>
+            <a:r>
+              <a:rPr lang="en-US" dirty="0">
+                <a:latin typeface="Arial" panose="020B0604020202020204" pitchFamily="34" charset="0"/>
+                <a:cs typeface="Arial" panose="020B0604020202020204" pitchFamily="34" charset="0"/>
+              </a:rPr>
+              <a:t>Practice Quiz is LIVE now. Make a reservation. You have until 9/11!!!</a:t>
+            </a:r>
+          </a:p>
+          <a:p>
+            <a:pPr lvl="1"/>
+            <a:r>
+              <a:rPr lang="en-US" dirty="0">
+                <a:latin typeface="Arial" panose="020B0604020202020204" pitchFamily="34" charset="0"/>
+                <a:cs typeface="Arial" panose="020B0604020202020204" pitchFamily="34" charset="0"/>
+              </a:rPr>
+              <a:t>I added a CBTF FAQ, contains info about changing reservations (check webpage)</a:t>
+            </a:r>
+          </a:p>
+          <a:p>
+            <a:r>
+              <a:rPr lang="en-US" dirty="0">
+                <a:latin typeface="Arial" panose="020B0604020202020204" pitchFamily="34" charset="0"/>
+                <a:cs typeface="Arial" panose="020B0604020202020204" pitchFamily="34" charset="0"/>
+              </a:rPr>
+              <a:t>First real quiz is 9/22 (but we have some time before that arrives)</a:t>
+            </a:r>
+          </a:p>
+          <a:p>
+            <a:r>
+              <a:rPr lang="en-US" dirty="0">
+                <a:latin typeface="Arial" panose="020B0604020202020204" pitchFamily="34" charset="0"/>
+                <a:cs typeface="Arial" panose="020B0604020202020204" pitchFamily="34" charset="0"/>
+              </a:rPr>
+              <a:t>These slides are linked on the course webpage “slides” page.</a:t>
+            </a:r>
+          </a:p>
+          <a:p>
+            <a:r>
+              <a:rPr lang="en-US" dirty="0">
+                <a:latin typeface="Arial" panose="020B0604020202020204" pitchFamily="34" charset="0"/>
+                <a:cs typeface="Arial" panose="020B0604020202020204" pitchFamily="34" charset="0"/>
+              </a:rPr>
+              <a:t>Today we will continue with module 1 on regular languages.</a:t>
+            </a:r>
+          </a:p>
+          <a:p>
+            <a:endParaRPr lang="en-US" dirty="0">
+              <a:latin typeface="Arial" panose="020B0604020202020204" pitchFamily="34" charset="0"/>
+              <a:cs typeface="Arial" panose="020B0604020202020204" pitchFamily="34" charset="0"/>
+            </a:endParaRPr>
+          </a:p>
+        </p:txBody>
+      </p:sp>
+    </p:spTree>
+    <p:extLst>
+      <p:ext uri="{BB962C8B-B14F-4D97-AF65-F5344CB8AC3E}">
+        <p14:creationId xmlns:p14="http://schemas.microsoft.com/office/powerpoint/2010/main" val="1812451809"/>
+      </p:ext>
+    </p:extLst>
+  </p:cSld>
+  <p:clrMapOvr>
+    <a:masterClrMapping/>
+  </p:clrMapOvr>
+</p:sld>
+</file>
+
+<file path=ppt/slides/slide6.xml><?xml version="1.0" encoding="utf-8"?>
+<p:sld xmlns:a="http://schemas.openxmlformats.org/drawingml/2006/main" xmlns:r="http://schemas.openxmlformats.org/officeDocument/2006/relationships" xmlns:p="http://schemas.openxmlformats.org/presentationml/2006/main">
+  <p:cSld>
+    <p:spTree>
+      <p:nvGrpSpPr>
         <p:cNvPr id="1" name=""/>
         <p:cNvGrpSpPr/>
         <p:nvPr/>
@@ -14103,7 +14396,7 @@
           <p:nvPr>
             <p:extLst>
               <p:ext uri="{D42A27DB-BD31-4B8C-83A1-F6EECF244321}">
-                <p14:modId xmlns:p14="http://schemas.microsoft.com/office/powerpoint/2010/main" val="2563026776"/>
+                <p14:modId xmlns:p14="http://schemas.microsoft.com/office/powerpoint/2010/main" val="643258091"/>
               </p:ext>
             </p:extLst>
           </p:nvPr>
@@ -14199,7 +14492,7 @@
                       <a:pPr algn="ctr"/>
                       <a:r>
                         <a:rPr lang="en-US" i="0" dirty="0"/>
-                        <a:t>3</a:t>
+                        <a:t>4</a:t>
                       </a:r>
                     </a:p>
                   </a:txBody>
@@ -14213,7 +14506,7 @@
                       <a:pPr algn="ctr"/>
                       <a:r>
                         <a:rPr lang="en-US" i="0" dirty="0"/>
-                        <a:t>3</a:t>
+                        <a:t>4</a:t>
                       </a:r>
                     </a:p>
                   </a:txBody>
@@ -14258,7 +14551,7 @@
           <p:nvPr>
             <p:extLst>
               <p:ext uri="{D42A27DB-BD31-4B8C-83A1-F6EECF244321}">
-                <p14:modId xmlns:p14="http://schemas.microsoft.com/office/powerpoint/2010/main" val="921337569"/>
+                <p14:modId xmlns:p14="http://schemas.microsoft.com/office/powerpoint/2010/main" val="4197850331"/>
               </p:ext>
             </p:extLst>
           </p:nvPr>
@@ -14389,7 +14682,7 @@
                       <a:pPr algn="ctr"/>
                       <a:r>
                         <a:rPr lang="en-US" dirty="0"/>
-                        <a:t>-</a:t>
+                        <a:t>142</a:t>
                       </a:r>
                     </a:p>
                   </a:txBody>
@@ -14403,7 +14696,7 @@
                       <a:pPr algn="ctr"/>
                       <a:r>
                         <a:rPr lang="en-US" dirty="0"/>
-                        <a:t>-</a:t>
+                        <a:t>165+</a:t>
                       </a:r>
                     </a:p>
                   </a:txBody>
@@ -14417,7 +14710,7 @@
                       <a:pPr algn="ctr"/>
                       <a:r>
                         <a:rPr lang="en-US" b="0" i="0" dirty="0"/>
-                        <a:t>N/A</a:t>
+                        <a:t>86.06%-</a:t>
                       </a:r>
                       <a:endParaRPr lang="en-US" b="0" dirty="0"/>
                     </a:p>
@@ -15385,7 +15678,7 @@
           <p:nvPr>
             <p:extLst>
               <p:ext uri="{D42A27DB-BD31-4B8C-83A1-F6EECF244321}">
-                <p14:modId xmlns:p14="http://schemas.microsoft.com/office/powerpoint/2010/main" val="2368157879"/>
+                <p14:modId xmlns:p14="http://schemas.microsoft.com/office/powerpoint/2010/main" val="1762797728"/>
               </p:ext>
             </p:extLst>
           </p:nvPr>
@@ -15481,7 +15774,7 @@
                       <a:pPr algn="ctr"/>
                       <a:r>
                         <a:rPr lang="en-US" i="0" dirty="0"/>
-                        <a:t>3</a:t>
+                        <a:t>4</a:t>
                       </a:r>
                     </a:p>
                   </a:txBody>
@@ -15495,7 +15788,7 @@
                       <a:pPr algn="ctr"/>
                       <a:r>
                         <a:rPr lang="en-US" i="0" dirty="0"/>
-                        <a:t>3</a:t>
+                        <a:t>4</a:t>
                       </a:r>
                     </a:p>
                   </a:txBody>
@@ -15545,8 +15838,8 @@
         </p:nvSpPr>
         <p:spPr>
           <a:xfrm>
-            <a:off x="6906238" y="1994037"/>
-            <a:ext cx="1251889" cy="733064"/>
+            <a:off x="6787301" y="1994037"/>
+            <a:ext cx="1436816" cy="733064"/>
           </a:xfrm>
           <a:prstGeom prst="rect">
             <a:avLst/>
@@ -15554,7 +15847,7 @@
         </p:spPr>
         <p:txBody>
           <a:bodyPr vert="horz" lIns="91440" tIns="45720" rIns="91440" bIns="45720" rtlCol="0">
-            <a:normAutofit fontScale="92500"/>
+            <a:normAutofit/>
           </a:bodyPr>
           <a:lstStyle>
             <a:lvl1pPr marL="228600" indent="-228600" algn="l" defTabSz="914400" rtl="0" eaLnBrk="1" latinLnBrk="0" hangingPunct="1">
@@ -15735,14 +16028,14 @@
               <a:buNone/>
             </a:pPr>
             <a:r>
-              <a:rPr lang="en-US" b="1" i="1" u="sng" dirty="0" err="1">
+              <a:rPr lang="en-US" sz="1400" b="1" i="1" u="sng" dirty="0">
                 <a:latin typeface="Arial" panose="020B0604020202020204" pitchFamily="34" charset="0"/>
                 <a:cs typeface="Arial" panose="020B0604020202020204" pitchFamily="34" charset="0"/>
               </a:rPr>
-              <a:t>Wordle</a:t>
-            </a:r>
-            <a:r>
-              <a:rPr lang="en-US" dirty="0">
+              <a:t>Connections</a:t>
+            </a:r>
+            <a:r>
+              <a:rPr lang="en-US" sz="1400" dirty="0">
                 <a:latin typeface="Arial" panose="020B0604020202020204" pitchFamily="34" charset="0"/>
                 <a:cs typeface="Arial" panose="020B0604020202020204" pitchFamily="34" charset="0"/>
               </a:rPr>
@@ -15766,7 +16059,7 @@
           <p:nvPr>
             <p:extLst>
               <p:ext uri="{D42A27DB-BD31-4B8C-83A1-F6EECF244321}">
-                <p14:modId xmlns:p14="http://schemas.microsoft.com/office/powerpoint/2010/main" val="1830120710"/>
+                <p14:modId xmlns:p14="http://schemas.microsoft.com/office/powerpoint/2010/main" val="2280910900"/>
               </p:ext>
             </p:extLst>
           </p:nvPr>
@@ -15862,7 +16155,7 @@
                       <a:pPr algn="ctr"/>
                       <a:r>
                         <a:rPr lang="en-US" i="0" dirty="0"/>
-                        <a:t>0</a:t>
+                        <a:t>1</a:t>
                       </a:r>
                     </a:p>
                   </a:txBody>
@@ -15876,7 +16169,7 @@
                       <a:pPr algn="ctr"/>
                       <a:r>
                         <a:rPr lang="en-US" i="0" dirty="0"/>
-                        <a:t>0</a:t>
+                        <a:t>1</a:t>
                       </a:r>
                     </a:p>
                   </a:txBody>
@@ -15890,7 +16183,7 @@
                       <a:pPr algn="ctr"/>
                       <a:r>
                         <a:rPr lang="en-US" b="1" i="0" dirty="0"/>
-                        <a:t>N/A</a:t>
+                        <a:t>100%</a:t>
                       </a:r>
                     </a:p>
                   </a:txBody>
@@ -15938,6 +16231,18 @@
 </file>
 
 <file path=ppt/tags/tag12.xml><?xml version="1.0" encoding="utf-8"?>
+<p:tagLst xmlns:a="http://schemas.openxmlformats.org/drawingml/2006/main" xmlns:r="http://schemas.openxmlformats.org/officeDocument/2006/relationships" xmlns:p="http://schemas.openxmlformats.org/presentationml/2006/main">
+  <p:tag name="_INSTRUCTOR VIEW19C14C36-AC8E-43BC-9DB6-C2AAF774C7DC|PANE__TAG" val="_"/>
+</p:tagLst>
+</file>
+
+<file path=ppt/tags/tag13.xml><?xml version="1.0" encoding="utf-8"?>
+<p:tagLst xmlns:a="http://schemas.openxmlformats.org/drawingml/2006/main" xmlns:r="http://schemas.openxmlformats.org/officeDocument/2006/relationships" xmlns:p="http://schemas.openxmlformats.org/presentationml/2006/main">
+  <p:tag name="_INSTRUCTOR VIEW19C14C36-AC8E-43BC-9DB6-C2AAF774C7DC|PANE__TAG" val="_"/>
+</p:tagLst>
+</file>
+
+<file path=ppt/tags/tag14.xml><?xml version="1.0" encoding="utf-8"?>
 <p:tagLst xmlns:a="http://schemas.openxmlformats.org/drawingml/2006/main" xmlns:r="http://schemas.openxmlformats.org/officeDocument/2006/relationships" xmlns:p="http://schemas.openxmlformats.org/presentationml/2006/main">
   <p:tag name="_INSTRUCTOR VIEW19C14C36-AC8E-43BC-9DB6-C2AAF774C7DC|PANE__TAG" val="_"/>
 </p:tagLst>

--- a/slides/00-DailyAnnouncements.pptx
+++ b/slides/00-DailyAnnouncements.pptx
@@ -5,7 +5,7 @@
     <p:sldMasterId id="2147484006" r:id="rId1"/>
   </p:sldMasterIdLst>
   <p:notesMasterIdLst>
-    <p:notesMasterId r:id="rId8"/>
+    <p:notesMasterId r:id="rId9"/>
   </p:notesMasterIdLst>
   <p:sldIdLst>
     <p:sldId id="256" r:id="rId2"/>
@@ -13,7 +13,8 @@
     <p:sldId id="516" r:id="rId4"/>
     <p:sldId id="517" r:id="rId5"/>
     <p:sldId id="518" r:id="rId6"/>
-    <p:sldId id="515" r:id="rId7"/>
+    <p:sldId id="519" r:id="rId7"/>
+    <p:sldId id="515" r:id="rId8"/>
   </p:sldIdLst>
   <p:sldSz cx="12192000" cy="6858000"/>
   <p:notesSz cx="6858000" cy="9144000"/>
@@ -202,7 +203,7 @@
           <a:p>
             <a:fld id="{C5B45307-6ED4-B142-BD64-10F739779302}" type="datetimeFigureOut">
               <a:rPr lang="en-US" smtClean="0"/>
-              <a:t>9/8/26</a:t>
+              <a:t>9/10/26</a:t>
             </a:fld>
             <a:endParaRPr lang="en-US"/>
           </a:p>
@@ -610,7 +611,7 @@
           <a:noFill/>
           <a:extLst>
             <a:ext uri="{909E8E84-426E-40dd-AFC4-6F175D3DCCD1}">
-              <a14:hiddenFill xmlns="" xmlns:a14="http://schemas.microsoft.com/office/drawing/2010/main">
+              <a14:hiddenFill xmlns:a14="http://schemas.microsoft.com/office/drawing/2010/main" xmlns="">
                 <a:solidFill>
                   <a:srgbClr val="FFFFFF"/>
                 </a:solidFill>
@@ -669,7 +670,7 @@
             </a:ln>
             <a:extLst>
               <a:ext uri="{91240B29-F687-4f45-9708-019B960494DF}">
-                <a14:hiddenLine xmlns="" xmlns:a14="http://schemas.microsoft.com/office/drawing/2010/main" w="9525">
+                <a14:hiddenLine xmlns:a14="http://schemas.microsoft.com/office/drawing/2010/main" xmlns="" w="9525">
                   <a:solidFill>
                     <a:srgbClr val="000000"/>
                   </a:solidFill>
@@ -759,7 +760,7 @@
             </a:ln>
             <a:extLst>
               <a:ext uri="{91240B29-F687-4f45-9708-019B960494DF}">
-                <a14:hiddenLine xmlns="" xmlns:a14="http://schemas.microsoft.com/office/drawing/2010/main" w="9525">
+                <a14:hiddenLine xmlns:a14="http://schemas.microsoft.com/office/drawing/2010/main" xmlns="" w="9525">
                   <a:solidFill>
                     <a:srgbClr val="000000"/>
                   </a:solidFill>
@@ -849,7 +850,7 @@
             </a:ln>
             <a:extLst>
               <a:ext uri="{91240B29-F687-4f45-9708-019B960494DF}">
-                <a14:hiddenLine xmlns="" xmlns:a14="http://schemas.microsoft.com/office/drawing/2010/main" w="9525">
+                <a14:hiddenLine xmlns:a14="http://schemas.microsoft.com/office/drawing/2010/main" xmlns="" w="9525">
                   <a:solidFill>
                     <a:srgbClr val="000000"/>
                   </a:solidFill>
@@ -883,7 +884,7 @@
             </a:ln>
             <a:extLst>
               <a:ext uri="{91240B29-F687-4f45-9708-019B960494DF}">
-                <a14:hiddenLine xmlns="" xmlns:a14="http://schemas.microsoft.com/office/drawing/2010/main" w="9525">
+                <a14:hiddenLine xmlns:a14="http://schemas.microsoft.com/office/drawing/2010/main" xmlns="" w="9525">
                   <a:solidFill>
                     <a:srgbClr val="000000"/>
                   </a:solidFill>
@@ -973,7 +974,7 @@
             </a:ln>
             <a:extLst>
               <a:ext uri="{91240B29-F687-4f45-9708-019B960494DF}">
-                <a14:hiddenLine xmlns="" xmlns:a14="http://schemas.microsoft.com/office/drawing/2010/main" w="9525">
+                <a14:hiddenLine xmlns:a14="http://schemas.microsoft.com/office/drawing/2010/main" xmlns="" w="9525">
                   <a:solidFill>
                     <a:srgbClr val="000000"/>
                   </a:solidFill>
@@ -1035,7 +1036,7 @@
             </a:ln>
             <a:extLst>
               <a:ext uri="{91240B29-F687-4f45-9708-019B960494DF}">
-                <a14:hiddenLine xmlns="" xmlns:a14="http://schemas.microsoft.com/office/drawing/2010/main" w="9525">
+                <a14:hiddenLine xmlns:a14="http://schemas.microsoft.com/office/drawing/2010/main" xmlns="" w="9525">
                   <a:solidFill>
                     <a:srgbClr val="000000"/>
                   </a:solidFill>
@@ -1097,7 +1098,7 @@
             </a:ln>
             <a:extLst>
               <a:ext uri="{91240B29-F687-4f45-9708-019B960494DF}">
-                <a14:hiddenLine xmlns="" xmlns:a14="http://schemas.microsoft.com/office/drawing/2010/main" w="9525">
+                <a14:hiddenLine xmlns:a14="http://schemas.microsoft.com/office/drawing/2010/main" xmlns="" w="9525">
                   <a:solidFill>
                     <a:srgbClr val="000000"/>
                   </a:solidFill>
@@ -1187,7 +1188,7 @@
             </a:ln>
             <a:extLst>
               <a:ext uri="{91240B29-F687-4f45-9708-019B960494DF}">
-                <a14:hiddenLine xmlns="" xmlns:a14="http://schemas.microsoft.com/office/drawing/2010/main" w="9525">
+                <a14:hiddenLine xmlns:a14="http://schemas.microsoft.com/office/drawing/2010/main" xmlns="" w="9525">
                   <a:solidFill>
                     <a:srgbClr val="000000"/>
                   </a:solidFill>
@@ -1249,7 +1250,7 @@
             </a:ln>
             <a:extLst>
               <a:ext uri="{91240B29-F687-4f45-9708-019B960494DF}">
-                <a14:hiddenLine xmlns="" xmlns:a14="http://schemas.microsoft.com/office/drawing/2010/main" w="9525">
+                <a14:hiddenLine xmlns:a14="http://schemas.microsoft.com/office/drawing/2010/main" xmlns="" w="9525">
                   <a:solidFill>
                     <a:srgbClr val="000000"/>
                   </a:solidFill>
@@ -1311,7 +1312,7 @@
             </a:ln>
             <a:extLst>
               <a:ext uri="{91240B29-F687-4f45-9708-019B960494DF}">
-                <a14:hiddenLine xmlns="" xmlns:a14="http://schemas.microsoft.com/office/drawing/2010/main" w="9525">
+                <a14:hiddenLine xmlns:a14="http://schemas.microsoft.com/office/drawing/2010/main" xmlns="" w="9525">
                   <a:solidFill>
                     <a:srgbClr val="000000"/>
                   </a:solidFill>
@@ -1401,7 +1402,7 @@
             </a:ln>
             <a:extLst>
               <a:ext uri="{91240B29-F687-4f45-9708-019B960494DF}">
-                <a14:hiddenLine xmlns="" xmlns:a14="http://schemas.microsoft.com/office/drawing/2010/main" w="9525">
+                <a14:hiddenLine xmlns:a14="http://schemas.microsoft.com/office/drawing/2010/main" xmlns="" w="9525">
                   <a:solidFill>
                     <a:srgbClr val="000000"/>
                   </a:solidFill>
@@ -1491,7 +1492,7 @@
             </a:ln>
             <a:extLst>
               <a:ext uri="{91240B29-F687-4f45-9708-019B960494DF}">
-                <a14:hiddenLine xmlns="" xmlns:a14="http://schemas.microsoft.com/office/drawing/2010/main" w="9525">
+                <a14:hiddenLine xmlns:a14="http://schemas.microsoft.com/office/drawing/2010/main" xmlns="" w="9525">
                   <a:solidFill>
                     <a:srgbClr val="000000"/>
                   </a:solidFill>
@@ -1553,7 +1554,7 @@
             </a:ln>
             <a:extLst>
               <a:ext uri="{91240B29-F687-4f45-9708-019B960494DF}">
-                <a14:hiddenLine xmlns="" xmlns:a14="http://schemas.microsoft.com/office/drawing/2010/main" w="9525">
+                <a14:hiddenLine xmlns:a14="http://schemas.microsoft.com/office/drawing/2010/main" xmlns="" w="9525">
                   <a:solidFill>
                     <a:srgbClr val="000000"/>
                   </a:solidFill>
@@ -1663,7 +1664,7 @@
             </a:ln>
             <a:extLst>
               <a:ext uri="{91240B29-F687-4f45-9708-019B960494DF}">
-                <a14:hiddenLine xmlns="" xmlns:a14="http://schemas.microsoft.com/office/drawing/2010/main" w="9525">
+                <a14:hiddenLine xmlns:a14="http://schemas.microsoft.com/office/drawing/2010/main" xmlns="" w="9525">
                   <a:solidFill>
                     <a:srgbClr val="000000"/>
                   </a:solidFill>
@@ -1725,7 +1726,7 @@
             </a:ln>
             <a:extLst>
               <a:ext uri="{91240B29-F687-4f45-9708-019B960494DF}">
-                <a14:hiddenLine xmlns="" xmlns:a14="http://schemas.microsoft.com/office/drawing/2010/main" w="9525">
+                <a14:hiddenLine xmlns:a14="http://schemas.microsoft.com/office/drawing/2010/main" xmlns="" w="9525">
                   <a:solidFill>
                     <a:srgbClr val="000000"/>
                   </a:solidFill>
@@ -1815,7 +1816,7 @@
             </a:ln>
             <a:extLst>
               <a:ext uri="{91240B29-F687-4f45-9708-019B960494DF}">
-                <a14:hiddenLine xmlns="" xmlns:a14="http://schemas.microsoft.com/office/drawing/2010/main" w="9525">
+                <a14:hiddenLine xmlns:a14="http://schemas.microsoft.com/office/drawing/2010/main" xmlns="" w="9525">
                   <a:solidFill>
                     <a:srgbClr val="000000"/>
                   </a:solidFill>
@@ -1905,7 +1906,7 @@
             </a:ln>
             <a:extLst>
               <a:ext uri="{91240B29-F687-4f45-9708-019B960494DF}">
-                <a14:hiddenLine xmlns="" xmlns:a14="http://schemas.microsoft.com/office/drawing/2010/main" w="9525">
+                <a14:hiddenLine xmlns:a14="http://schemas.microsoft.com/office/drawing/2010/main" xmlns="" w="9525">
                   <a:solidFill>
                     <a:srgbClr val="000000"/>
                   </a:solidFill>
@@ -1967,7 +1968,7 @@
             </a:ln>
             <a:extLst>
               <a:ext uri="{91240B29-F687-4f45-9708-019B960494DF}">
-                <a14:hiddenLine xmlns="" xmlns:a14="http://schemas.microsoft.com/office/drawing/2010/main" w="9525">
+                <a14:hiddenLine xmlns:a14="http://schemas.microsoft.com/office/drawing/2010/main" xmlns="" w="9525">
                   <a:solidFill>
                     <a:srgbClr val="000000"/>
                   </a:solidFill>
@@ -2057,7 +2058,7 @@
             </a:ln>
             <a:extLst>
               <a:ext uri="{91240B29-F687-4f45-9708-019B960494DF}">
-                <a14:hiddenLine xmlns="" xmlns:a14="http://schemas.microsoft.com/office/drawing/2010/main" w="9525">
+                <a14:hiddenLine xmlns:a14="http://schemas.microsoft.com/office/drawing/2010/main" xmlns="" w="9525">
                   <a:solidFill>
                     <a:srgbClr val="000000"/>
                   </a:solidFill>
@@ -2147,7 +2148,7 @@
             </a:ln>
             <a:extLst>
               <a:ext uri="{91240B29-F687-4f45-9708-019B960494DF}">
-                <a14:hiddenLine xmlns="" xmlns:a14="http://schemas.microsoft.com/office/drawing/2010/main" w="9525">
+                <a14:hiddenLine xmlns:a14="http://schemas.microsoft.com/office/drawing/2010/main" xmlns="" w="9525">
                   <a:solidFill>
                     <a:srgbClr val="000000"/>
                   </a:solidFill>
@@ -2203,7 +2204,7 @@
             </a:ln>
             <a:extLst>
               <a:ext uri="{91240B29-F687-4f45-9708-019B960494DF}">
-                <a14:hiddenLine xmlns="" xmlns:a14="http://schemas.microsoft.com/office/drawing/2010/main" w="9525">
+                <a14:hiddenLine xmlns:a14="http://schemas.microsoft.com/office/drawing/2010/main" xmlns="" w="9525">
                   <a:solidFill>
                     <a:srgbClr val="000000"/>
                   </a:solidFill>
@@ -2293,7 +2294,7 @@
             </a:ln>
             <a:extLst>
               <a:ext uri="{91240B29-F687-4f45-9708-019B960494DF}">
-                <a14:hiddenLine xmlns="" xmlns:a14="http://schemas.microsoft.com/office/drawing/2010/main" w="9525">
+                <a14:hiddenLine xmlns:a14="http://schemas.microsoft.com/office/drawing/2010/main" xmlns="" w="9525">
                   <a:solidFill>
                     <a:srgbClr val="000000"/>
                   </a:solidFill>
@@ -2349,7 +2350,7 @@
             </a:ln>
             <a:extLst>
               <a:ext uri="{91240B29-F687-4f45-9708-019B960494DF}">
-                <a14:hiddenLine xmlns="" xmlns:a14="http://schemas.microsoft.com/office/drawing/2010/main" w="9525">
+                <a14:hiddenLine xmlns:a14="http://schemas.microsoft.com/office/drawing/2010/main" xmlns="" w="9525">
                   <a:solidFill>
                     <a:srgbClr val="000000"/>
                   </a:solidFill>
@@ -2439,7 +2440,7 @@
             </a:ln>
             <a:extLst>
               <a:ext uri="{91240B29-F687-4f45-9708-019B960494DF}">
-                <a14:hiddenLine xmlns="" xmlns:a14="http://schemas.microsoft.com/office/drawing/2010/main" w="9525">
+                <a14:hiddenLine xmlns:a14="http://schemas.microsoft.com/office/drawing/2010/main" xmlns="" w="9525">
                   <a:solidFill>
                     <a:srgbClr val="000000"/>
                   </a:solidFill>
@@ -2507,7 +2508,7 @@
             </a:ln>
             <a:extLst>
               <a:ext uri="{91240B29-F687-4f45-9708-019B960494DF}">
-                <a14:hiddenLine xmlns="" xmlns:a14="http://schemas.microsoft.com/office/drawing/2010/main" w="9525">
+                <a14:hiddenLine xmlns:a14="http://schemas.microsoft.com/office/drawing/2010/main" xmlns="" w="9525">
                   <a:solidFill>
                     <a:srgbClr val="000000"/>
                   </a:solidFill>
@@ -2597,7 +2598,7 @@
             </a:ln>
             <a:extLst>
               <a:ext uri="{91240B29-F687-4f45-9708-019B960494DF}">
-                <a14:hiddenLine xmlns="" xmlns:a14="http://schemas.microsoft.com/office/drawing/2010/main" w="9525">
+                <a14:hiddenLine xmlns:a14="http://schemas.microsoft.com/office/drawing/2010/main" xmlns="" w="9525">
                   <a:solidFill>
                     <a:srgbClr val="000000"/>
                   </a:solidFill>
@@ -2665,7 +2666,7 @@
             </a:ln>
             <a:extLst>
               <a:ext uri="{91240B29-F687-4f45-9708-019B960494DF}">
-                <a14:hiddenLine xmlns="" xmlns:a14="http://schemas.microsoft.com/office/drawing/2010/main" w="9525">
+                <a14:hiddenLine xmlns:a14="http://schemas.microsoft.com/office/drawing/2010/main" xmlns="" w="9525">
                   <a:solidFill>
                     <a:srgbClr val="000000"/>
                   </a:solidFill>
@@ -2755,7 +2756,7 @@
             </a:ln>
             <a:extLst>
               <a:ext uri="{91240B29-F687-4f45-9708-019B960494DF}">
-                <a14:hiddenLine xmlns="" xmlns:a14="http://schemas.microsoft.com/office/drawing/2010/main" w="9525">
+                <a14:hiddenLine xmlns:a14="http://schemas.microsoft.com/office/drawing/2010/main" xmlns="" w="9525">
                   <a:solidFill>
                     <a:srgbClr val="000000"/>
                   </a:solidFill>
@@ -2789,7 +2790,7 @@
             </a:ln>
             <a:extLst>
               <a:ext uri="{91240B29-F687-4f45-9708-019B960494DF}">
-                <a14:hiddenLine xmlns="" xmlns:a14="http://schemas.microsoft.com/office/drawing/2010/main" w="9525">
+                <a14:hiddenLine xmlns:a14="http://schemas.microsoft.com/office/drawing/2010/main" xmlns="" w="9525">
                   <a:solidFill>
                     <a:srgbClr val="000000"/>
                   </a:solidFill>
@@ -2879,7 +2880,7 @@
             </a:ln>
             <a:extLst>
               <a:ext uri="{91240B29-F687-4f45-9708-019B960494DF}">
-                <a14:hiddenLine xmlns="" xmlns:a14="http://schemas.microsoft.com/office/drawing/2010/main" w="9525">
+                <a14:hiddenLine xmlns:a14="http://schemas.microsoft.com/office/drawing/2010/main" xmlns="" w="9525">
                   <a:solidFill>
                     <a:srgbClr val="000000"/>
                   </a:solidFill>
@@ -2941,7 +2942,7 @@
             </a:ln>
             <a:extLst>
               <a:ext uri="{91240B29-F687-4f45-9708-019B960494DF}">
-                <a14:hiddenLine xmlns="" xmlns:a14="http://schemas.microsoft.com/office/drawing/2010/main" w="9525">
+                <a14:hiddenLine xmlns:a14="http://schemas.microsoft.com/office/drawing/2010/main" xmlns="" w="9525">
                   <a:solidFill>
                     <a:srgbClr val="000000"/>
                   </a:solidFill>
@@ -3003,7 +3004,7 @@
             </a:ln>
             <a:extLst>
               <a:ext uri="{91240B29-F687-4f45-9708-019B960494DF}">
-                <a14:hiddenLine xmlns="" xmlns:a14="http://schemas.microsoft.com/office/drawing/2010/main" w="9525">
+                <a14:hiddenLine xmlns:a14="http://schemas.microsoft.com/office/drawing/2010/main" xmlns="" w="9525">
                   <a:solidFill>
                     <a:srgbClr val="000000"/>
                   </a:solidFill>
@@ -3093,7 +3094,7 @@
             </a:ln>
             <a:extLst>
               <a:ext uri="{91240B29-F687-4f45-9708-019B960494DF}">
-                <a14:hiddenLine xmlns="" xmlns:a14="http://schemas.microsoft.com/office/drawing/2010/main" w="9525">
+                <a14:hiddenLine xmlns:a14="http://schemas.microsoft.com/office/drawing/2010/main" xmlns="" w="9525">
                   <a:solidFill>
                     <a:srgbClr val="000000"/>
                   </a:solidFill>
@@ -3161,7 +3162,7 @@
             </a:ln>
             <a:extLst>
               <a:ext uri="{91240B29-F687-4f45-9708-019B960494DF}">
-                <a14:hiddenLine xmlns="" xmlns:a14="http://schemas.microsoft.com/office/drawing/2010/main" w="9525">
+                <a14:hiddenLine xmlns:a14="http://schemas.microsoft.com/office/drawing/2010/main" xmlns="" w="9525">
                   <a:solidFill>
                     <a:srgbClr val="000000"/>
                   </a:solidFill>
@@ -3223,7 +3224,7 @@
             </a:ln>
             <a:extLst>
               <a:ext uri="{91240B29-F687-4f45-9708-019B960494DF}">
-                <a14:hiddenLine xmlns="" xmlns:a14="http://schemas.microsoft.com/office/drawing/2010/main" w="9525">
+                <a14:hiddenLine xmlns:a14="http://schemas.microsoft.com/office/drawing/2010/main" xmlns="" w="9525">
                   <a:solidFill>
                     <a:srgbClr val="000000"/>
                   </a:solidFill>
@@ -3313,7 +3314,7 @@
             </a:ln>
             <a:extLst>
               <a:ext uri="{91240B29-F687-4f45-9708-019B960494DF}">
-                <a14:hiddenLine xmlns="" xmlns:a14="http://schemas.microsoft.com/office/drawing/2010/main" w="9525">
+                <a14:hiddenLine xmlns:a14="http://schemas.microsoft.com/office/drawing/2010/main" xmlns="" w="9525">
                   <a:solidFill>
                     <a:srgbClr val="000000"/>
                   </a:solidFill>
@@ -3375,7 +3376,7 @@
             </a:ln>
             <a:extLst>
               <a:ext uri="{91240B29-F687-4f45-9708-019B960494DF}">
-                <a14:hiddenLine xmlns="" xmlns:a14="http://schemas.microsoft.com/office/drawing/2010/main" w="9525">
+                <a14:hiddenLine xmlns:a14="http://schemas.microsoft.com/office/drawing/2010/main" xmlns="" w="9525">
                   <a:solidFill>
                     <a:srgbClr val="000000"/>
                   </a:solidFill>
@@ -3465,7 +3466,7 @@
             </a:ln>
             <a:extLst>
               <a:ext uri="{91240B29-F687-4f45-9708-019B960494DF}">
-                <a14:hiddenLine xmlns="" xmlns:a14="http://schemas.microsoft.com/office/drawing/2010/main" w="9525">
+                <a14:hiddenLine xmlns:a14="http://schemas.microsoft.com/office/drawing/2010/main" xmlns="" w="9525">
                   <a:solidFill>
                     <a:srgbClr val="000000"/>
                   </a:solidFill>
@@ -3527,7 +3528,7 @@
             </a:ln>
             <a:extLst>
               <a:ext uri="{91240B29-F687-4f45-9708-019B960494DF}">
-                <a14:hiddenLine xmlns="" xmlns:a14="http://schemas.microsoft.com/office/drawing/2010/main" w="9525">
+                <a14:hiddenLine xmlns:a14="http://schemas.microsoft.com/office/drawing/2010/main" xmlns="" w="9525">
                   <a:solidFill>
                     <a:srgbClr val="000000"/>
                   </a:solidFill>
@@ -3617,7 +3618,7 @@
             </a:ln>
             <a:extLst>
               <a:ext uri="{91240B29-F687-4f45-9708-019B960494DF}">
-                <a14:hiddenLine xmlns="" xmlns:a14="http://schemas.microsoft.com/office/drawing/2010/main" w="9525">
+                <a14:hiddenLine xmlns:a14="http://schemas.microsoft.com/office/drawing/2010/main" xmlns="" w="9525">
                   <a:solidFill>
                     <a:srgbClr val="000000"/>
                   </a:solidFill>
@@ -3651,7 +3652,7 @@
             </a:ln>
             <a:extLst>
               <a:ext uri="{91240B29-F687-4f45-9708-019B960494DF}">
-                <a14:hiddenLine xmlns="" xmlns:a14="http://schemas.microsoft.com/office/drawing/2010/main" w="9525">
+                <a14:hiddenLine xmlns:a14="http://schemas.microsoft.com/office/drawing/2010/main" xmlns="" w="9525">
                   <a:solidFill>
                     <a:srgbClr val="000000"/>
                   </a:solidFill>
@@ -3716,7 +3717,7 @@
             </a:ln>
             <a:extLst>
               <a:ext uri="{91240B29-F687-4f45-9708-019B960494DF}">
-                <a14:hiddenLine xmlns="" xmlns:a14="http://schemas.microsoft.com/office/drawing/2010/main" w="9525">
+                <a14:hiddenLine xmlns:a14="http://schemas.microsoft.com/office/drawing/2010/main" xmlns="" w="9525">
                   <a:solidFill>
                     <a:srgbClr val="000000"/>
                   </a:solidFill>
@@ -3806,7 +3807,7 @@
             </a:ln>
             <a:extLst>
               <a:ext uri="{91240B29-F687-4f45-9708-019B960494DF}">
-                <a14:hiddenLine xmlns="" xmlns:a14="http://schemas.microsoft.com/office/drawing/2010/main" w="9525">
+                <a14:hiddenLine xmlns:a14="http://schemas.microsoft.com/office/drawing/2010/main" xmlns="" w="9525">
                   <a:solidFill>
                     <a:srgbClr val="000000"/>
                   </a:solidFill>
@@ -3868,7 +3869,7 @@
             </a:ln>
             <a:extLst>
               <a:ext uri="{91240B29-F687-4f45-9708-019B960494DF}">
-                <a14:hiddenLine xmlns="" xmlns:a14="http://schemas.microsoft.com/office/drawing/2010/main" w="9525">
+                <a14:hiddenLine xmlns:a14="http://schemas.microsoft.com/office/drawing/2010/main" xmlns="" w="9525">
                   <a:solidFill>
                     <a:srgbClr val="000000"/>
                   </a:solidFill>
@@ -3958,7 +3959,7 @@
             </a:ln>
             <a:extLst>
               <a:ext uri="{91240B29-F687-4f45-9708-019B960494DF}">
-                <a14:hiddenLine xmlns="" xmlns:a14="http://schemas.microsoft.com/office/drawing/2010/main" w="9525">
+                <a14:hiddenLine xmlns:a14="http://schemas.microsoft.com/office/drawing/2010/main" xmlns="" w="9525">
                   <a:solidFill>
                     <a:srgbClr val="000000"/>
                   </a:solidFill>
@@ -4048,7 +4049,7 @@
             </a:ln>
             <a:extLst>
               <a:ext uri="{91240B29-F687-4f45-9708-019B960494DF}">
-                <a14:hiddenLine xmlns="" xmlns:a14="http://schemas.microsoft.com/office/drawing/2010/main" w="9525">
+                <a14:hiddenLine xmlns:a14="http://schemas.microsoft.com/office/drawing/2010/main" xmlns="" w="9525">
                   <a:solidFill>
                     <a:srgbClr val="000000"/>
                   </a:solidFill>
@@ -4113,7 +4114,7 @@
             </a:ln>
             <a:extLst>
               <a:ext uri="{91240B29-F687-4f45-9708-019B960494DF}">
-                <a14:hiddenLine xmlns="" xmlns:a14="http://schemas.microsoft.com/office/drawing/2010/main" w="9525">
+                <a14:hiddenLine xmlns:a14="http://schemas.microsoft.com/office/drawing/2010/main" xmlns="" w="9525">
                   <a:solidFill>
                     <a:srgbClr val="000000"/>
                   </a:solidFill>
@@ -4175,7 +4176,7 @@
             </a:ln>
             <a:extLst>
               <a:ext uri="{91240B29-F687-4f45-9708-019B960494DF}">
-                <a14:hiddenLine xmlns="" xmlns:a14="http://schemas.microsoft.com/office/drawing/2010/main" w="9525">
+                <a14:hiddenLine xmlns:a14="http://schemas.microsoft.com/office/drawing/2010/main" xmlns="" w="9525">
                   <a:solidFill>
                     <a:srgbClr val="000000"/>
                   </a:solidFill>
@@ -4265,7 +4266,7 @@
             </a:ln>
             <a:extLst>
               <a:ext uri="{91240B29-F687-4f45-9708-019B960494DF}">
-                <a14:hiddenLine xmlns="" xmlns:a14="http://schemas.microsoft.com/office/drawing/2010/main" w="9525">
+                <a14:hiddenLine xmlns:a14="http://schemas.microsoft.com/office/drawing/2010/main" xmlns="" w="9525">
                   <a:solidFill>
                     <a:srgbClr val="000000"/>
                   </a:solidFill>
@@ -4355,7 +4356,7 @@
             </a:ln>
             <a:extLst>
               <a:ext uri="{91240B29-F687-4f45-9708-019B960494DF}">
-                <a14:hiddenLine xmlns="" xmlns:a14="http://schemas.microsoft.com/office/drawing/2010/main" w="9525">
+                <a14:hiddenLine xmlns:a14="http://schemas.microsoft.com/office/drawing/2010/main" xmlns="" w="9525">
                   <a:solidFill>
                     <a:srgbClr val="000000"/>
                   </a:solidFill>
@@ -4417,7 +4418,7 @@
             </a:ln>
             <a:extLst>
               <a:ext uri="{91240B29-F687-4f45-9708-019B960494DF}">
-                <a14:hiddenLine xmlns="" xmlns:a14="http://schemas.microsoft.com/office/drawing/2010/main" w="9525">
+                <a14:hiddenLine xmlns:a14="http://schemas.microsoft.com/office/drawing/2010/main" xmlns="" w="9525">
                   <a:solidFill>
                     <a:srgbClr val="000000"/>
                   </a:solidFill>
@@ -4537,7 +4538,7 @@
             </a:ln>
             <a:extLst>
               <a:ext uri="{91240B29-F687-4f45-9708-019B960494DF}">
-                <a14:hiddenLine xmlns="" xmlns:a14="http://schemas.microsoft.com/office/drawing/2010/main" w="9525">
+                <a14:hiddenLine xmlns:a14="http://schemas.microsoft.com/office/drawing/2010/main" xmlns="" w="9525">
                   <a:solidFill>
                     <a:srgbClr val="000000"/>
                   </a:solidFill>
@@ -4605,7 +4606,7 @@
             </a:ln>
             <a:extLst>
               <a:ext uri="{91240B29-F687-4f45-9708-019B960494DF}">
-                <a14:hiddenLine xmlns="" xmlns:a14="http://schemas.microsoft.com/office/drawing/2010/main" w="9525">
+                <a14:hiddenLine xmlns:a14="http://schemas.microsoft.com/office/drawing/2010/main" xmlns="" w="9525">
                   <a:solidFill>
                     <a:srgbClr val="000000"/>
                   </a:solidFill>
@@ -4695,7 +4696,7 @@
             </a:ln>
             <a:extLst>
               <a:ext uri="{91240B29-F687-4f45-9708-019B960494DF}">
-                <a14:hiddenLine xmlns="" xmlns:a14="http://schemas.microsoft.com/office/drawing/2010/main" w="9525">
+                <a14:hiddenLine xmlns:a14="http://schemas.microsoft.com/office/drawing/2010/main" xmlns="" w="9525">
                   <a:solidFill>
                     <a:srgbClr val="000000"/>
                   </a:solidFill>
@@ -4835,7 +4836,7 @@
           <a:p>
             <a:fld id="{4313F670-7F9A-774D-B73D-573401E44297}" type="datetime1">
               <a:rPr lang="en-US" smtClean="0"/>
-              <a:t>9/8/26</a:t>
+              <a:t>9/10/26</a:t>
             </a:fld>
             <a:endParaRPr lang="en-US"/>
           </a:p>
@@ -5102,7 +5103,7 @@
           <a:p>
             <a:fld id="{446F9669-A8A7-2D40-9D01-B35FC337AA30}" type="datetime1">
               <a:rPr lang="en-US" smtClean="0"/>
-              <a:t>9/8/26</a:t>
+              <a:t>9/10/26</a:t>
             </a:fld>
             <a:endParaRPr lang="en-US"/>
           </a:p>
@@ -5298,7 +5299,7 @@
           <a:p>
             <a:fld id="{FA76CF18-F41B-6B48-B3E5-599E9795C2C3}" type="datetime1">
               <a:rPr lang="en-US" smtClean="0"/>
-              <a:t>9/8/26</a:t>
+              <a:t>9/10/26</a:t>
             </a:fld>
             <a:endParaRPr lang="en-US"/>
           </a:p>
@@ -5561,7 +5562,7 @@
           <a:p>
             <a:fld id="{B9654854-6457-164F-A077-6B3035079B82}" type="datetime1">
               <a:rPr lang="en-US" smtClean="0"/>
-              <a:t>9/8/26</a:t>
+              <a:t>9/10/26</a:t>
             </a:fld>
             <a:endParaRPr lang="en-US"/>
           </a:p>
@@ -5995,7 +5996,7 @@
           <a:p>
             <a:fld id="{CE3DBFD7-E611-8C40-AC73-0C29FF63F0CD}" type="datetime1">
               <a:rPr lang="en-US" smtClean="0"/>
-              <a:t>9/8/26</a:t>
+              <a:t>9/10/26</a:t>
             </a:fld>
             <a:endParaRPr lang="en-US"/>
           </a:p>
@@ -6541,7 +6542,7 @@
           <a:p>
             <a:fld id="{C8B63B06-0493-2840-9F37-30C9412BBF17}" type="datetime1">
               <a:rPr lang="en-US" smtClean="0"/>
-              <a:t>9/8/26</a:t>
+              <a:t>9/10/26</a:t>
             </a:fld>
             <a:endParaRPr lang="en-US"/>
           </a:p>
@@ -7261,7 +7262,7 @@
           <a:p>
             <a:fld id="{72B5C0FA-8C46-E84D-B6D7-B673F2CA0A0E}" type="datetime1">
               <a:rPr lang="en-US" smtClean="0"/>
-              <a:t>9/8/26</a:t>
+              <a:t>9/10/26</a:t>
             </a:fld>
             <a:endParaRPr lang="en-US"/>
           </a:p>
@@ -7431,7 +7432,7 @@
           <a:p>
             <a:fld id="{60B9CDE1-97B4-BF46-B69C-B86855B18820}" type="datetime1">
               <a:rPr lang="en-US" smtClean="0"/>
-              <a:t>9/8/26</a:t>
+              <a:t>9/10/26</a:t>
             </a:fld>
             <a:endParaRPr lang="en-US"/>
           </a:p>
@@ -7611,7 +7612,7 @@
           <a:p>
             <a:fld id="{BE51D3A4-F9E5-FD49-AA87-B395F50451DC}" type="datetime1">
               <a:rPr lang="en-US" smtClean="0"/>
-              <a:t>9/8/26</a:t>
+              <a:t>9/10/26</a:t>
             </a:fld>
             <a:endParaRPr lang="en-US"/>
           </a:p>
@@ -7781,7 +7782,7 @@
           <a:p>
             <a:fld id="{880DFB37-B0AE-9449-85EC-14F9C83B6084}" type="datetime1">
               <a:rPr lang="en-US" smtClean="0"/>
-              <a:t>9/8/26</a:t>
+              <a:t>9/10/26</a:t>
             </a:fld>
             <a:endParaRPr lang="en-US"/>
           </a:p>
@@ -8031,7 +8032,7 @@
           <a:p>
             <a:fld id="{C939124A-616E-6944-A21A-1839F5DBE7BB}" type="datetime1">
               <a:rPr lang="en-US" smtClean="0"/>
-              <a:t>9/8/26</a:t>
+              <a:t>9/10/26</a:t>
             </a:fld>
             <a:endParaRPr lang="en-US"/>
           </a:p>
@@ -8263,7 +8264,7 @@
           <a:p>
             <a:fld id="{C6E9A026-D48C-FD43-8676-CD625DD5D84B}" type="datetime1">
               <a:rPr lang="en-US" smtClean="0"/>
-              <a:t>9/8/26</a:t>
+              <a:t>9/10/26</a:t>
             </a:fld>
             <a:endParaRPr lang="en-US"/>
           </a:p>
@@ -8649,7 +8650,7 @@
           <a:p>
             <a:fld id="{EA35111E-23A3-1440-99A3-C4C665908E3D}" type="datetime1">
               <a:rPr lang="en-US" smtClean="0"/>
-              <a:t>9/8/26</a:t>
+              <a:t>9/10/26</a:t>
             </a:fld>
             <a:endParaRPr lang="en-US"/>
           </a:p>
@@ -8772,7 +8773,7 @@
           <a:p>
             <a:fld id="{249983B9-88EF-D74B-BA6D-6A3BF17C2B38}" type="datetime1">
               <a:rPr lang="en-US" smtClean="0"/>
-              <a:t>9/8/26</a:t>
+              <a:t>9/10/26</a:t>
             </a:fld>
             <a:endParaRPr lang="en-US"/>
           </a:p>
@@ -8867,7 +8868,7 @@
           <a:p>
             <a:fld id="{E2A00AEF-B4EC-084A-8DB8-A225C7981CBB}" type="datetime1">
               <a:rPr lang="en-US" smtClean="0"/>
-              <a:t>9/8/26</a:t>
+              <a:t>9/10/26</a:t>
             </a:fld>
             <a:endParaRPr lang="en-US"/>
           </a:p>
@@ -9116,7 +9117,7 @@
           <a:p>
             <a:fld id="{97860299-21CD-A94A-A7B0-44E787F8D42C}" type="datetime1">
               <a:rPr lang="en-US" smtClean="0"/>
-              <a:t>9/8/26</a:t>
+              <a:t>9/10/26</a:t>
             </a:fld>
             <a:endParaRPr lang="en-US"/>
           </a:p>
@@ -9401,7 +9402,7 @@
           <a:p>
             <a:fld id="{3DFD19CF-4E62-D246-BA61-7B528271315F}" type="datetime1">
               <a:rPr lang="en-US" smtClean="0"/>
-              <a:t>9/8/26</a:t>
+              <a:t>9/10/26</a:t>
             </a:fld>
             <a:endParaRPr lang="en-US"/>
           </a:p>
@@ -9524,7 +9525,7 @@
           <a:noFill/>
           <a:extLst>
             <a:ext uri="{909E8E84-426E-40dd-AFC4-6F175D3DCCD1}">
-              <a14:hiddenFill xmlns="" xmlns:a14="http://schemas.microsoft.com/office/drawing/2010/main">
+              <a14:hiddenFill xmlns:a14="http://schemas.microsoft.com/office/drawing/2010/main" xmlns="">
                 <a:solidFill>
                   <a:srgbClr val="FFFFFF"/>
                 </a:solidFill>
@@ -9598,7 +9599,7 @@
               </a:ln>
               <a:extLst>
                 <a:ext uri="{91240B29-F687-4f45-9708-019B960494DF}">
-                  <a14:hiddenLine xmlns="" xmlns:a14="http://schemas.microsoft.com/office/drawing/2010/main" w="9525">
+                  <a14:hiddenLine xmlns:a14="http://schemas.microsoft.com/office/drawing/2010/main" xmlns="" w="9525">
                     <a:solidFill>
                       <a:srgbClr val="000000"/>
                     </a:solidFill>
@@ -9688,7 +9689,7 @@
               </a:ln>
               <a:extLst>
                 <a:ext uri="{91240B29-F687-4f45-9708-019B960494DF}">
-                  <a14:hiddenLine xmlns="" xmlns:a14="http://schemas.microsoft.com/office/drawing/2010/main" w="9525">
+                  <a14:hiddenLine xmlns:a14="http://schemas.microsoft.com/office/drawing/2010/main" xmlns="" w="9525">
                     <a:solidFill>
                       <a:srgbClr val="000000"/>
                     </a:solidFill>
@@ -9778,7 +9779,7 @@
               </a:ln>
               <a:extLst>
                 <a:ext uri="{91240B29-F687-4f45-9708-019B960494DF}">
-                  <a14:hiddenLine xmlns="" xmlns:a14="http://schemas.microsoft.com/office/drawing/2010/main" w="9525">
+                  <a14:hiddenLine xmlns:a14="http://schemas.microsoft.com/office/drawing/2010/main" xmlns="" w="9525">
                     <a:solidFill>
                       <a:srgbClr val="000000"/>
                     </a:solidFill>
@@ -9840,7 +9841,7 @@
               </a:ln>
               <a:extLst>
                 <a:ext uri="{91240B29-F687-4f45-9708-019B960494DF}">
-                  <a14:hiddenLine xmlns="" xmlns:a14="http://schemas.microsoft.com/office/drawing/2010/main" w="9525">
+                  <a14:hiddenLine xmlns:a14="http://schemas.microsoft.com/office/drawing/2010/main" xmlns="" w="9525">
                     <a:solidFill>
                       <a:srgbClr val="000000"/>
                     </a:solidFill>
@@ -9930,7 +9931,7 @@
               </a:ln>
               <a:extLst>
                 <a:ext uri="{91240B29-F687-4f45-9708-019B960494DF}">
-                  <a14:hiddenLine xmlns="" xmlns:a14="http://schemas.microsoft.com/office/drawing/2010/main" w="9525">
+                  <a14:hiddenLine xmlns:a14="http://schemas.microsoft.com/office/drawing/2010/main" xmlns="" w="9525">
                     <a:solidFill>
                       <a:srgbClr val="000000"/>
                     </a:solidFill>
@@ -9992,7 +9993,7 @@
               </a:ln>
               <a:extLst>
                 <a:ext uri="{91240B29-F687-4f45-9708-019B960494DF}">
-                  <a14:hiddenLine xmlns="" xmlns:a14="http://schemas.microsoft.com/office/drawing/2010/main" w="9525">
+                  <a14:hiddenLine xmlns:a14="http://schemas.microsoft.com/office/drawing/2010/main" xmlns="" w="9525">
                     <a:solidFill>
                       <a:srgbClr val="000000"/>
                     </a:solidFill>
@@ -10054,7 +10055,7 @@
               </a:ln>
               <a:extLst>
                 <a:ext uri="{91240B29-F687-4f45-9708-019B960494DF}">
-                  <a14:hiddenLine xmlns="" xmlns:a14="http://schemas.microsoft.com/office/drawing/2010/main" w="9525">
+                  <a14:hiddenLine xmlns:a14="http://schemas.microsoft.com/office/drawing/2010/main" xmlns="" w="9525">
                     <a:solidFill>
                       <a:srgbClr val="000000"/>
                     </a:solidFill>
@@ -10144,7 +10145,7 @@
               </a:ln>
               <a:extLst>
                 <a:ext uri="{91240B29-F687-4f45-9708-019B960494DF}">
-                  <a14:hiddenLine xmlns="" xmlns:a14="http://schemas.microsoft.com/office/drawing/2010/main" w="9525">
+                  <a14:hiddenLine xmlns:a14="http://schemas.microsoft.com/office/drawing/2010/main" xmlns="" w="9525">
                     <a:solidFill>
                       <a:srgbClr val="000000"/>
                     </a:solidFill>
@@ -10234,7 +10235,7 @@
               </a:ln>
               <a:extLst>
                 <a:ext uri="{91240B29-F687-4f45-9708-019B960494DF}">
-                  <a14:hiddenLine xmlns="" xmlns:a14="http://schemas.microsoft.com/office/drawing/2010/main" w="9525">
+                  <a14:hiddenLine xmlns:a14="http://schemas.microsoft.com/office/drawing/2010/main" xmlns="" w="9525">
                     <a:solidFill>
                       <a:srgbClr val="000000"/>
                     </a:solidFill>
@@ -10296,7 +10297,7 @@
               </a:ln>
               <a:extLst>
                 <a:ext uri="{91240B29-F687-4f45-9708-019B960494DF}">
-                  <a14:hiddenLine xmlns="" xmlns:a14="http://schemas.microsoft.com/office/drawing/2010/main" w="9525">
+                  <a14:hiddenLine xmlns:a14="http://schemas.microsoft.com/office/drawing/2010/main" xmlns="" w="9525">
                     <a:solidFill>
                       <a:srgbClr val="000000"/>
                     </a:solidFill>
@@ -10406,7 +10407,7 @@
               </a:ln>
               <a:extLst>
                 <a:ext uri="{91240B29-F687-4f45-9708-019B960494DF}">
-                  <a14:hiddenLine xmlns="" xmlns:a14="http://schemas.microsoft.com/office/drawing/2010/main" w="9525">
+                  <a14:hiddenLine xmlns:a14="http://schemas.microsoft.com/office/drawing/2010/main" xmlns="" w="9525">
                     <a:solidFill>
                       <a:srgbClr val="000000"/>
                     </a:solidFill>
@@ -10490,7 +10491,7 @@
               </a:ln>
               <a:extLst>
                 <a:ext uri="{91240B29-F687-4f45-9708-019B960494DF}">
-                  <a14:hiddenLine xmlns="" xmlns:a14="http://schemas.microsoft.com/office/drawing/2010/main" w="9525">
+                  <a14:hiddenLine xmlns:a14="http://schemas.microsoft.com/office/drawing/2010/main" xmlns="" w="9525">
                     <a:solidFill>
                       <a:srgbClr val="000000"/>
                     </a:solidFill>
@@ -10552,7 +10553,7 @@
               </a:ln>
               <a:extLst>
                 <a:ext uri="{91240B29-F687-4f45-9708-019B960494DF}">
-                  <a14:hiddenLine xmlns="" xmlns:a14="http://schemas.microsoft.com/office/drawing/2010/main" w="9525">
+                  <a14:hiddenLine xmlns:a14="http://schemas.microsoft.com/office/drawing/2010/main" xmlns="" w="9525">
                     <a:solidFill>
                       <a:srgbClr val="000000"/>
                     </a:solidFill>
@@ -10614,7 +10615,7 @@
               </a:ln>
               <a:extLst>
                 <a:ext uri="{91240B29-F687-4f45-9708-019B960494DF}">
-                  <a14:hiddenLine xmlns="" xmlns:a14="http://schemas.microsoft.com/office/drawing/2010/main" w="9525">
+                  <a14:hiddenLine xmlns:a14="http://schemas.microsoft.com/office/drawing/2010/main" xmlns="" w="9525">
                     <a:solidFill>
                       <a:srgbClr val="000000"/>
                     </a:solidFill>
@@ -10704,7 +10705,7 @@
               </a:ln>
               <a:extLst>
                 <a:ext uri="{91240B29-F687-4f45-9708-019B960494DF}">
-                  <a14:hiddenLine xmlns="" xmlns:a14="http://schemas.microsoft.com/office/drawing/2010/main" w="9525">
+                  <a14:hiddenLine xmlns:a14="http://schemas.microsoft.com/office/drawing/2010/main" xmlns="" w="9525">
                     <a:solidFill>
                       <a:srgbClr val="000000"/>
                     </a:solidFill>
@@ -10738,7 +10739,7 @@
               </a:ln>
               <a:extLst>
                 <a:ext uri="{91240B29-F687-4f45-9708-019B960494DF}">
-                  <a14:hiddenLine xmlns="" xmlns:a14="http://schemas.microsoft.com/office/drawing/2010/main" w="9525">
+                  <a14:hiddenLine xmlns:a14="http://schemas.microsoft.com/office/drawing/2010/main" xmlns="" w="9525">
                     <a:solidFill>
                       <a:srgbClr val="000000"/>
                     </a:solidFill>
@@ -10803,7 +10804,7 @@
               </a:ln>
               <a:extLst>
                 <a:ext uri="{91240B29-F687-4f45-9708-019B960494DF}">
-                  <a14:hiddenLine xmlns="" xmlns:a14="http://schemas.microsoft.com/office/drawing/2010/main" w="9525">
+                  <a14:hiddenLine xmlns:a14="http://schemas.microsoft.com/office/drawing/2010/main" xmlns="" w="9525">
                     <a:solidFill>
                       <a:srgbClr val="000000"/>
                     </a:solidFill>
@@ -10893,7 +10894,7 @@
               </a:ln>
               <a:extLst>
                 <a:ext uri="{91240B29-F687-4f45-9708-019B960494DF}">
-                  <a14:hiddenLine xmlns="" xmlns:a14="http://schemas.microsoft.com/office/drawing/2010/main" w="9525">
+                  <a14:hiddenLine xmlns:a14="http://schemas.microsoft.com/office/drawing/2010/main" xmlns="" w="9525">
                     <a:solidFill>
                       <a:srgbClr val="000000"/>
                     </a:solidFill>
@@ -10955,7 +10956,7 @@
               </a:ln>
               <a:extLst>
                 <a:ext uri="{91240B29-F687-4f45-9708-019B960494DF}">
-                  <a14:hiddenLine xmlns="" xmlns:a14="http://schemas.microsoft.com/office/drawing/2010/main" w="9525">
+                  <a14:hiddenLine xmlns:a14="http://schemas.microsoft.com/office/drawing/2010/main" xmlns="" w="9525">
                     <a:solidFill>
                       <a:srgbClr val="000000"/>
                     </a:solidFill>
@@ -11045,7 +11046,7 @@
               </a:ln>
               <a:extLst>
                 <a:ext uri="{91240B29-F687-4f45-9708-019B960494DF}">
-                  <a14:hiddenLine xmlns="" xmlns:a14="http://schemas.microsoft.com/office/drawing/2010/main" w="9525">
+                  <a14:hiddenLine xmlns:a14="http://schemas.microsoft.com/office/drawing/2010/main" xmlns="" w="9525">
                     <a:solidFill>
                       <a:srgbClr val="000000"/>
                     </a:solidFill>
@@ -11110,7 +11111,7 @@
               </a:ln>
               <a:extLst>
                 <a:ext uri="{91240B29-F687-4f45-9708-019B960494DF}">
-                  <a14:hiddenLine xmlns="" xmlns:a14="http://schemas.microsoft.com/office/drawing/2010/main" w="9525">
+                  <a14:hiddenLine xmlns:a14="http://schemas.microsoft.com/office/drawing/2010/main" xmlns="" w="9525">
                     <a:solidFill>
                       <a:srgbClr val="000000"/>
                     </a:solidFill>
@@ -11172,7 +11173,7 @@
               </a:ln>
               <a:extLst>
                 <a:ext uri="{91240B29-F687-4f45-9708-019B960494DF}">
-                  <a14:hiddenLine xmlns="" xmlns:a14="http://schemas.microsoft.com/office/drawing/2010/main" w="9525">
+                  <a14:hiddenLine xmlns:a14="http://schemas.microsoft.com/office/drawing/2010/main" xmlns="" w="9525">
                     <a:solidFill>
                       <a:srgbClr val="000000"/>
                     </a:solidFill>
@@ -11262,7 +11263,7 @@
               </a:ln>
               <a:extLst>
                 <a:ext uri="{91240B29-F687-4f45-9708-019B960494DF}">
-                  <a14:hiddenLine xmlns="" xmlns:a14="http://schemas.microsoft.com/office/drawing/2010/main" w="9525">
+                  <a14:hiddenLine xmlns:a14="http://schemas.microsoft.com/office/drawing/2010/main" xmlns="" w="9525">
                     <a:solidFill>
                       <a:srgbClr val="000000"/>
                     </a:solidFill>
@@ -11352,7 +11353,7 @@
               </a:ln>
               <a:extLst>
                 <a:ext uri="{91240B29-F687-4f45-9708-019B960494DF}">
-                  <a14:hiddenLine xmlns="" xmlns:a14="http://schemas.microsoft.com/office/drawing/2010/main" w="9525">
+                  <a14:hiddenLine xmlns:a14="http://schemas.microsoft.com/office/drawing/2010/main" xmlns="" w="9525">
                     <a:solidFill>
                       <a:srgbClr val="000000"/>
                     </a:solidFill>
@@ -11417,7 +11418,7 @@
               </a:ln>
               <a:extLst>
                 <a:ext uri="{91240B29-F687-4f45-9708-019B960494DF}">
-                  <a14:hiddenLine xmlns="" xmlns:a14="http://schemas.microsoft.com/office/drawing/2010/main" w="9525">
+                  <a14:hiddenLine xmlns:a14="http://schemas.microsoft.com/office/drawing/2010/main" xmlns="" w="9525">
                     <a:solidFill>
                       <a:srgbClr val="000000"/>
                     </a:solidFill>
@@ -11537,7 +11538,7 @@
               </a:ln>
               <a:extLst>
                 <a:ext uri="{91240B29-F687-4f45-9708-019B960494DF}">
-                  <a14:hiddenLine xmlns="" xmlns:a14="http://schemas.microsoft.com/office/drawing/2010/main" w="9525">
+                  <a14:hiddenLine xmlns:a14="http://schemas.microsoft.com/office/drawing/2010/main" xmlns="" w="9525">
                     <a:solidFill>
                       <a:srgbClr val="000000"/>
                     </a:solidFill>
@@ -11618,7 +11619,7 @@
               </a:ln>
               <a:extLst>
                 <a:ext uri="{91240B29-F687-4f45-9708-019B960494DF}">
-                  <a14:hiddenLine xmlns="" xmlns:a14="http://schemas.microsoft.com/office/drawing/2010/main" w="9525">
+                  <a14:hiddenLine xmlns:a14="http://schemas.microsoft.com/office/drawing/2010/main" xmlns="" w="9525">
                     <a:solidFill>
                       <a:srgbClr val="000000"/>
                     </a:solidFill>
@@ -11733,7 +11734,7 @@
               </a:ln>
               <a:extLst>
                 <a:ext uri="{91240B29-F687-4f45-9708-019B960494DF}">
-                  <a14:hiddenLine xmlns="" xmlns:a14="http://schemas.microsoft.com/office/drawing/2010/main" w="9525">
+                  <a14:hiddenLine xmlns:a14="http://schemas.microsoft.com/office/drawing/2010/main" xmlns="" w="9525">
                     <a:solidFill>
                       <a:srgbClr val="000000"/>
                     </a:solidFill>
@@ -11823,7 +11824,7 @@
               </a:ln>
               <a:extLst>
                 <a:ext uri="{91240B29-F687-4f45-9708-019B960494DF}">
-                  <a14:hiddenLine xmlns="" xmlns:a14="http://schemas.microsoft.com/office/drawing/2010/main" w="9525">
+                  <a14:hiddenLine xmlns:a14="http://schemas.microsoft.com/office/drawing/2010/main" xmlns="" w="9525">
                     <a:solidFill>
                       <a:srgbClr val="000000"/>
                     </a:solidFill>
@@ -11888,7 +11889,7 @@
               </a:ln>
               <a:extLst>
                 <a:ext uri="{91240B29-F687-4f45-9708-019B960494DF}">
-                  <a14:hiddenLine xmlns="" xmlns:a14="http://schemas.microsoft.com/office/drawing/2010/main" w="9525">
+                  <a14:hiddenLine xmlns:a14="http://schemas.microsoft.com/office/drawing/2010/main" xmlns="" w="9525">
                     <a:solidFill>
                       <a:srgbClr val="000000"/>
                     </a:solidFill>
@@ -11978,7 +11979,7 @@
               </a:ln>
               <a:extLst>
                 <a:ext uri="{91240B29-F687-4f45-9708-019B960494DF}">
-                  <a14:hiddenLine xmlns="" xmlns:a14="http://schemas.microsoft.com/office/drawing/2010/main" w="9525">
+                  <a14:hiddenLine xmlns:a14="http://schemas.microsoft.com/office/drawing/2010/main" xmlns="" w="9525">
                     <a:solidFill>
                       <a:srgbClr val="000000"/>
                     </a:solidFill>
@@ -12046,7 +12047,7 @@
               </a:ln>
               <a:extLst>
                 <a:ext uri="{91240B29-F687-4f45-9708-019B960494DF}">
-                  <a14:hiddenLine xmlns="" xmlns:a14="http://schemas.microsoft.com/office/drawing/2010/main" w="9525">
+                  <a14:hiddenLine xmlns:a14="http://schemas.microsoft.com/office/drawing/2010/main" xmlns="" w="9525">
                     <a:solidFill>
                       <a:srgbClr val="000000"/>
                     </a:solidFill>
@@ -12136,7 +12137,7 @@
               </a:ln>
               <a:extLst>
                 <a:ext uri="{91240B29-F687-4f45-9708-019B960494DF}">
-                  <a14:hiddenLine xmlns="" xmlns:a14="http://schemas.microsoft.com/office/drawing/2010/main" w="9525">
+                  <a14:hiddenLine xmlns:a14="http://schemas.microsoft.com/office/drawing/2010/main" xmlns="" w="9525">
                     <a:solidFill>
                       <a:srgbClr val="000000"/>
                     </a:solidFill>
@@ -12204,7 +12205,7 @@
               </a:ln>
               <a:extLst>
                 <a:ext uri="{91240B29-F687-4f45-9708-019B960494DF}">
-                  <a14:hiddenLine xmlns="" xmlns:a14="http://schemas.microsoft.com/office/drawing/2010/main" w="9525">
+                  <a14:hiddenLine xmlns:a14="http://schemas.microsoft.com/office/drawing/2010/main" xmlns="" w="9525">
                     <a:solidFill>
                       <a:srgbClr val="000000"/>
                     </a:solidFill>
@@ -12294,7 +12295,7 @@
               </a:ln>
               <a:extLst>
                 <a:ext uri="{91240B29-F687-4f45-9708-019B960494DF}">
-                  <a14:hiddenLine xmlns="" xmlns:a14="http://schemas.microsoft.com/office/drawing/2010/main" w="9525">
+                  <a14:hiddenLine xmlns:a14="http://schemas.microsoft.com/office/drawing/2010/main" xmlns="" w="9525">
                     <a:solidFill>
                       <a:srgbClr val="000000"/>
                     </a:solidFill>
@@ -12328,7 +12329,7 @@
               </a:ln>
               <a:extLst>
                 <a:ext uri="{91240B29-F687-4f45-9708-019B960494DF}">
-                  <a14:hiddenLine xmlns="" xmlns:a14="http://schemas.microsoft.com/office/drawing/2010/main" w="9525">
+                  <a14:hiddenLine xmlns:a14="http://schemas.microsoft.com/office/drawing/2010/main" xmlns="" w="9525">
                     <a:solidFill>
                       <a:srgbClr val="000000"/>
                     </a:solidFill>
@@ -12468,7 +12469,7 @@
           <a:p>
             <a:fld id="{92FF8978-FE14-CC4A-93A6-934EB06543C0}" type="datetime1">
               <a:rPr lang="en-US" smtClean="0"/>
-              <a:t>9/8/26</a:t>
+              <a:t>9/10/26</a:t>
             </a:fld>
             <a:endParaRPr lang="en-US"/>
           </a:p>
@@ -14060,6 +14061,251 @@
   <p:cSld>
     <p:spTree>
       <p:nvGrpSpPr>
+        <p:cNvPr id="1" name="">
+          <a:extLst>
+            <a:ext uri="{FF2B5EF4-FFF2-40B4-BE49-F238E27FC236}">
+              <a16:creationId xmlns:a16="http://schemas.microsoft.com/office/drawing/2014/main" id="{DE7F56D7-6C7F-69E1-753E-9EE25F64A713}"/>
+            </a:ext>
+          </a:extLst>
+        </p:cNvPr>
+        <p:cNvGrpSpPr/>
+        <p:nvPr/>
+      </p:nvGrpSpPr>
+      <p:grpSpPr>
+        <a:xfrm>
+          <a:off x="0" y="0"/>
+          <a:ext cx="0" cy="0"/>
+          <a:chOff x="0" y="0"/>
+          <a:chExt cx="0" cy="0"/>
+        </a:xfrm>
+      </p:grpSpPr>
+      <p:sp>
+        <p:nvSpPr>
+          <p:cNvPr id="6146" name="Rectangle 2">
+            <a:extLst>
+              <a:ext uri="{FF2B5EF4-FFF2-40B4-BE49-F238E27FC236}">
+                <a16:creationId xmlns:a16="http://schemas.microsoft.com/office/drawing/2014/main" id="{D65F6D1A-0C39-2701-2A7D-5A983C8D9AA9}"/>
+              </a:ext>
+            </a:extLst>
+          </p:cNvPr>
+          <p:cNvSpPr>
+            <a:spLocks noGrp="1" noChangeArrowheads="1"/>
+          </p:cNvSpPr>
+          <p:nvPr>
+            <p:ph type="title"/>
+            <p:custDataLst>
+              <p:tags r:id="rId1"/>
+            </p:custDataLst>
+          </p:nvPr>
+        </p:nvSpPr>
+        <p:spPr>
+          <a:xfrm>
+            <a:off x="1141413" y="284084"/>
+            <a:ext cx="9905998" cy="620791"/>
+          </a:xfrm>
+        </p:spPr>
+        <p:txBody>
+          <a:bodyPr/>
+          <a:lstStyle/>
+          <a:p>
+            <a:pPr algn="ctr"/>
+            <a:r>
+              <a:rPr lang="en-US" dirty="0"/>
+              <a:t>Lecture 6 - Thursday, Sep. 10</a:t>
+            </a:r>
+          </a:p>
+        </p:txBody>
+      </p:sp>
+      <p:sp>
+        <p:nvSpPr>
+          <p:cNvPr id="6147" name="Rectangle 3">
+            <a:extLst>
+              <a:ext uri="{FF2B5EF4-FFF2-40B4-BE49-F238E27FC236}">
+                <a16:creationId xmlns:a16="http://schemas.microsoft.com/office/drawing/2014/main" id="{1BD10984-63D9-8622-4339-6AC9C6AE47D3}"/>
+              </a:ext>
+            </a:extLst>
+          </p:cNvPr>
+          <p:cNvSpPr>
+            <a:spLocks noGrp="1" noChangeArrowheads="1"/>
+          </p:cNvSpPr>
+          <p:nvPr>
+            <p:ph idx="1"/>
+            <p:custDataLst>
+              <p:tags r:id="rId2"/>
+            </p:custDataLst>
+          </p:nvPr>
+        </p:nvSpPr>
+        <p:spPr>
+          <a:xfrm>
+            <a:off x="1294151" y="1098549"/>
+            <a:ext cx="9600522" cy="5149850"/>
+          </a:xfrm>
+        </p:spPr>
+        <p:txBody>
+          <a:bodyPr>
+            <a:normAutofit fontScale="85000" lnSpcReduction="20000"/>
+          </a:bodyPr>
+          <a:lstStyle/>
+          <a:p>
+            <a:r>
+              <a:rPr lang="en-US" dirty="0">
+                <a:latin typeface="Arial" panose="020B0604020202020204" pitchFamily="34" charset="0"/>
+                <a:cs typeface="Arial" panose="020B0604020202020204" pitchFamily="34" charset="0"/>
+              </a:rPr>
+              <a:t>Please remember </a:t>
+            </a:r>
+            <a:r>
+              <a:rPr lang="en-US" b="1" i="1" u="sng" dirty="0">
+                <a:latin typeface="Arial" panose="020B0604020202020204" pitchFamily="34" charset="0"/>
+                <a:cs typeface="Arial" panose="020B0604020202020204" pitchFamily="34" charset="0"/>
+              </a:rPr>
+              <a:t>no laptops / phones</a:t>
+            </a:r>
+            <a:r>
+              <a:rPr lang="en-US" dirty="0">
+                <a:latin typeface="Arial" panose="020B0604020202020204" pitchFamily="34" charset="0"/>
+                <a:cs typeface="Arial" panose="020B0604020202020204" pitchFamily="34" charset="0"/>
+              </a:rPr>
+              <a:t> and </a:t>
+            </a:r>
+            <a:r>
+              <a:rPr lang="en-US" b="1" i="1" u="sng" dirty="0">
+                <a:latin typeface="Arial" panose="020B0604020202020204" pitchFamily="34" charset="0"/>
+                <a:cs typeface="Arial" panose="020B0604020202020204" pitchFamily="34" charset="0"/>
+              </a:rPr>
+              <a:t>attendance policy</a:t>
+            </a:r>
+          </a:p>
+          <a:p>
+            <a:r>
+              <a:rPr lang="en-US" dirty="0">
+                <a:latin typeface="Arial" panose="020B0604020202020204" pitchFamily="34" charset="0"/>
+                <a:cs typeface="Arial" panose="020B0604020202020204" pitchFamily="34" charset="0"/>
+              </a:rPr>
+              <a:t>Module 0 homework is almost graded. Sit tight.</a:t>
+            </a:r>
+          </a:p>
+          <a:p>
+            <a:r>
+              <a:rPr lang="en-US" dirty="0">
+                <a:latin typeface="Arial" panose="020B0604020202020204" pitchFamily="34" charset="0"/>
+                <a:cs typeface="Arial" panose="020B0604020202020204" pitchFamily="34" charset="0"/>
+              </a:rPr>
+              <a:t>This week:</a:t>
+            </a:r>
+          </a:p>
+          <a:p>
+            <a:pPr lvl="1"/>
+            <a:r>
+              <a:rPr lang="en-US" dirty="0">
+                <a:latin typeface="Arial" panose="020B0604020202020204" pitchFamily="34" charset="0"/>
+                <a:cs typeface="Arial" panose="020B0604020202020204" pitchFamily="34" charset="0"/>
+              </a:rPr>
+              <a:t>No homework, but you can start working on module 1 written assignment!</a:t>
+            </a:r>
+          </a:p>
+          <a:p>
+            <a:r>
+              <a:rPr lang="en-US" dirty="0">
+                <a:latin typeface="Arial" panose="020B0604020202020204" pitchFamily="34" charset="0"/>
+                <a:cs typeface="Arial" panose="020B0604020202020204" pitchFamily="34" charset="0"/>
+              </a:rPr>
+              <a:t>CBTF Practice Quiz</a:t>
+            </a:r>
+          </a:p>
+          <a:p>
+            <a:pPr lvl="1"/>
+            <a:r>
+              <a:rPr lang="en-US" dirty="0">
+                <a:latin typeface="Arial" panose="020B0604020202020204" pitchFamily="34" charset="0"/>
+                <a:cs typeface="Arial" panose="020B0604020202020204" pitchFamily="34" charset="0"/>
+              </a:rPr>
+              <a:t>You have been invited to the Prairie Learn / Test classes now. Please go in and accept the invitation ASAP!</a:t>
+            </a:r>
+          </a:p>
+          <a:p>
+            <a:pPr lvl="1"/>
+            <a:r>
+              <a:rPr lang="en-US" dirty="0">
+                <a:latin typeface="Arial" panose="020B0604020202020204" pitchFamily="34" charset="0"/>
+                <a:cs typeface="Arial" panose="020B0604020202020204" pitchFamily="34" charset="0"/>
+              </a:rPr>
+              <a:t>Practice Quiz extended through 9/15 if you want to do it still.</a:t>
+            </a:r>
+          </a:p>
+          <a:p>
+            <a:r>
+              <a:rPr lang="en-US" dirty="0">
+                <a:latin typeface="Arial" panose="020B0604020202020204" pitchFamily="34" charset="0"/>
+                <a:cs typeface="Arial" panose="020B0604020202020204" pitchFamily="34" charset="0"/>
+              </a:rPr>
+              <a:t>First real quiz is 9/22 (week after next)</a:t>
+            </a:r>
+          </a:p>
+          <a:p>
+            <a:pPr lvl="1"/>
+            <a:r>
+              <a:rPr lang="en-US" dirty="0">
+                <a:latin typeface="Arial" panose="020B0604020202020204" pitchFamily="34" charset="0"/>
+                <a:cs typeface="Arial" panose="020B0604020202020204" pitchFamily="34" charset="0"/>
+              </a:rPr>
+              <a:t>I will release a practice quiz on Prairie Learn. It is for controls / procedure mostly, not really meant to be content rich. Will be released early next week.</a:t>
+            </a:r>
+          </a:p>
+          <a:p>
+            <a:pPr lvl="1"/>
+            <a:r>
+              <a:rPr lang="en-US" dirty="0">
+                <a:latin typeface="Arial" panose="020B0604020202020204" pitchFamily="34" charset="0"/>
+                <a:cs typeface="Arial" panose="020B0604020202020204" pitchFamily="34" charset="0"/>
+              </a:rPr>
+              <a:t>Sign ups for the first real quiz in CBTF should start next week as well.</a:t>
+            </a:r>
+          </a:p>
+          <a:p>
+            <a:r>
+              <a:rPr lang="en-US" dirty="0">
+                <a:latin typeface="Arial" panose="020B0604020202020204" pitchFamily="34" charset="0"/>
+                <a:cs typeface="Arial" panose="020B0604020202020204" pitchFamily="34" charset="0"/>
+              </a:rPr>
+              <a:t>These slides are linked on the course webpage “slides” page.</a:t>
+            </a:r>
+          </a:p>
+          <a:p>
+            <a:r>
+              <a:rPr lang="en-US" dirty="0">
+                <a:latin typeface="Arial" panose="020B0604020202020204" pitchFamily="34" charset="0"/>
+                <a:cs typeface="Arial" panose="020B0604020202020204" pitchFamily="34" charset="0"/>
+              </a:rPr>
+              <a:t>Today we will continue with module 1 on regular languages.</a:t>
+            </a:r>
+          </a:p>
+          <a:p>
+            <a:endParaRPr lang="en-US" dirty="0">
+              <a:latin typeface="Arial" panose="020B0604020202020204" pitchFamily="34" charset="0"/>
+              <a:cs typeface="Arial" panose="020B0604020202020204" pitchFamily="34" charset="0"/>
+            </a:endParaRPr>
+          </a:p>
+        </p:txBody>
+      </p:sp>
+    </p:spTree>
+    <p:extLst>
+      <p:ext uri="{BB962C8B-B14F-4D97-AF65-F5344CB8AC3E}">
+        <p14:creationId xmlns:p14="http://schemas.microsoft.com/office/powerpoint/2010/main" val="1050830353"/>
+      </p:ext>
+    </p:extLst>
+  </p:cSld>
+  <p:clrMapOvr>
+    <a:masterClrMapping/>
+  </p:clrMapOvr>
+</p:sld>
+</file>
+
+<file path=ppt/slides/slide7.xml><?xml version="1.0" encoding="utf-8"?>
+<p:sld xmlns:a="http://schemas.openxmlformats.org/drawingml/2006/main" xmlns:r="http://schemas.openxmlformats.org/officeDocument/2006/relationships" xmlns:p="http://schemas.openxmlformats.org/presentationml/2006/main">
+  <p:cSld>
+    <p:spTree>
+      <p:nvGrpSpPr>
         <p:cNvPr id="1" name=""/>
         <p:cNvGrpSpPr/>
         <p:nvPr/>
@@ -14396,7 +14642,7 @@
           <p:nvPr>
             <p:extLst>
               <p:ext uri="{D42A27DB-BD31-4B8C-83A1-F6EECF244321}">
-                <p14:modId xmlns:p14="http://schemas.microsoft.com/office/powerpoint/2010/main" val="643258091"/>
+                <p14:modId xmlns:p14="http://schemas.microsoft.com/office/powerpoint/2010/main" val="1569035790"/>
               </p:ext>
             </p:extLst>
           </p:nvPr>
@@ -14492,7 +14738,7 @@
                       <a:pPr algn="ctr"/>
                       <a:r>
                         <a:rPr lang="en-US" i="0" dirty="0"/>
-                        <a:t>4</a:t>
+                        <a:t>5</a:t>
                       </a:r>
                     </a:p>
                   </a:txBody>
@@ -14506,7 +14752,7 @@
                       <a:pPr algn="ctr"/>
                       <a:r>
                         <a:rPr lang="en-US" i="0" dirty="0"/>
-                        <a:t>4</a:t>
+                        <a:t>5</a:t>
                       </a:r>
                     </a:p>
                   </a:txBody>
@@ -14551,7 +14797,7 @@
           <p:nvPr>
             <p:extLst>
               <p:ext uri="{D42A27DB-BD31-4B8C-83A1-F6EECF244321}">
-                <p14:modId xmlns:p14="http://schemas.microsoft.com/office/powerpoint/2010/main" val="4197850331"/>
+                <p14:modId xmlns:p14="http://schemas.microsoft.com/office/powerpoint/2010/main" val="3808041916"/>
               </p:ext>
             </p:extLst>
           </p:nvPr>
@@ -14696,7 +14942,7 @@
                       <a:pPr algn="ctr"/>
                       <a:r>
                         <a:rPr lang="en-US" dirty="0"/>
-                        <a:t>165+</a:t>
+                        <a:t>201</a:t>
                       </a:r>
                     </a:p>
                   </a:txBody>
@@ -14710,7 +14956,7 @@
                       <a:pPr algn="ctr"/>
                       <a:r>
                         <a:rPr lang="en-US" b="0" i="0" dirty="0"/>
-                        <a:t>86.06%-</a:t>
+                        <a:t>70.65%</a:t>
                       </a:r>
                       <a:endParaRPr lang="en-US" b="0" dirty="0"/>
                     </a:p>
@@ -15001,10 +15247,9 @@
                     <a:p>
                       <a:pPr algn="ctr"/>
                       <a:r>
-                        <a:rPr lang="en-US" dirty="0"/>
-                        <a:t>-</a:t>
+                        <a:rPr lang="en-US" b="1" dirty="0"/>
+                        <a:t>142</a:t>
                       </a:r>
-                      <a:endParaRPr lang="en-US" b="1" dirty="0"/>
                     </a:p>
                   </a:txBody>
                   <a:tcPr/>
@@ -15016,10 +15261,9 @@
                     <a:p>
                       <a:pPr algn="ctr"/>
                       <a:r>
-                        <a:rPr lang="en-US" dirty="0"/>
-                        <a:t>-</a:t>
+                        <a:rPr lang="en-US" b="1" dirty="0"/>
+                        <a:t>201</a:t>
                       </a:r>
-                      <a:endParaRPr lang="en-US" b="1" dirty="0"/>
                     </a:p>
                   </a:txBody>
                   <a:tcPr/>
@@ -15032,7 +15276,7 @@
                       <a:pPr algn="ctr"/>
                       <a:r>
                         <a:rPr lang="en-US" b="1" i="0" dirty="0"/>
-                        <a:t>N/A</a:t>
+                        <a:t>70.65%</a:t>
                       </a:r>
                       <a:endParaRPr lang="en-US" b="1" dirty="0"/>
                     </a:p>
@@ -15290,7 +15534,7 @@
           <p:nvPr>
             <p:extLst>
               <p:ext uri="{D42A27DB-BD31-4B8C-83A1-F6EECF244321}">
-                <p14:modId xmlns:p14="http://schemas.microsoft.com/office/powerpoint/2010/main" val="2364054325"/>
+                <p14:modId xmlns:p14="http://schemas.microsoft.com/office/powerpoint/2010/main" val="2425957762"/>
               </p:ext>
             </p:extLst>
           </p:nvPr>
@@ -15386,7 +15630,7 @@
                       <a:pPr algn="ctr"/>
                       <a:r>
                         <a:rPr lang="en-US" i="0" dirty="0"/>
-                        <a:t>1</a:t>
+                        <a:t>2</a:t>
                       </a:r>
                     </a:p>
                   </a:txBody>
@@ -15400,7 +15644,7 @@
                       <a:pPr algn="ctr"/>
                       <a:r>
                         <a:rPr lang="en-US" i="0" dirty="0"/>
-                        <a:t>1</a:t>
+                        <a:t>2</a:t>
                       </a:r>
                     </a:p>
                   </a:txBody>
@@ -15678,7 +15922,7 @@
           <p:nvPr>
             <p:extLst>
               <p:ext uri="{D42A27DB-BD31-4B8C-83A1-F6EECF244321}">
-                <p14:modId xmlns:p14="http://schemas.microsoft.com/office/powerpoint/2010/main" val="1762797728"/>
+                <p14:modId xmlns:p14="http://schemas.microsoft.com/office/powerpoint/2010/main" val="2180148324"/>
               </p:ext>
             </p:extLst>
           </p:nvPr>
@@ -15774,7 +16018,7 @@
                       <a:pPr algn="ctr"/>
                       <a:r>
                         <a:rPr lang="en-US" i="0" dirty="0"/>
-                        <a:t>4</a:t>
+                        <a:t>5</a:t>
                       </a:r>
                     </a:p>
                   </a:txBody>
@@ -15788,7 +16032,7 @@
                       <a:pPr algn="ctr"/>
                       <a:r>
                         <a:rPr lang="en-US" i="0" dirty="0"/>
-                        <a:t>4</a:t>
+                        <a:t>5</a:t>
                       </a:r>
                     </a:p>
                   </a:txBody>
@@ -16059,7 +16303,7 @@
           <p:nvPr>
             <p:extLst>
               <p:ext uri="{D42A27DB-BD31-4B8C-83A1-F6EECF244321}">
-                <p14:modId xmlns:p14="http://schemas.microsoft.com/office/powerpoint/2010/main" val="2280910900"/>
+                <p14:modId xmlns:p14="http://schemas.microsoft.com/office/powerpoint/2010/main" val="1809022337"/>
               </p:ext>
             </p:extLst>
           </p:nvPr>
@@ -16155,7 +16399,7 @@
                       <a:pPr algn="ctr"/>
                       <a:r>
                         <a:rPr lang="en-US" i="0" dirty="0"/>
-                        <a:t>1</a:t>
+                        <a:t>2</a:t>
                       </a:r>
                     </a:p>
                   </a:txBody>
@@ -16169,7 +16413,7 @@
                       <a:pPr algn="ctr"/>
                       <a:r>
                         <a:rPr lang="en-US" i="0" dirty="0"/>
-                        <a:t>1</a:t>
+                        <a:t>2</a:t>
                       </a:r>
                     </a:p>
                   </a:txBody>
@@ -16243,6 +16487,18 @@
 </file>
 
 <file path=ppt/tags/tag14.xml><?xml version="1.0" encoding="utf-8"?>
+<p:tagLst xmlns:a="http://schemas.openxmlformats.org/drawingml/2006/main" xmlns:r="http://schemas.openxmlformats.org/officeDocument/2006/relationships" xmlns:p="http://schemas.openxmlformats.org/presentationml/2006/main">
+  <p:tag name="_INSTRUCTOR VIEW19C14C36-AC8E-43BC-9DB6-C2AAF774C7DC|PANE__TAG" val="_"/>
+</p:tagLst>
+</file>
+
+<file path=ppt/tags/tag15.xml><?xml version="1.0" encoding="utf-8"?>
+<p:tagLst xmlns:a="http://schemas.openxmlformats.org/drawingml/2006/main" xmlns:r="http://schemas.openxmlformats.org/officeDocument/2006/relationships" xmlns:p="http://schemas.openxmlformats.org/presentationml/2006/main">
+  <p:tag name="_INSTRUCTOR VIEW19C14C36-AC8E-43BC-9DB6-C2AAF774C7DC|PANE__TAG" val="_"/>
+</p:tagLst>
+</file>
+
+<file path=ppt/tags/tag16.xml><?xml version="1.0" encoding="utf-8"?>
 <p:tagLst xmlns:a="http://schemas.openxmlformats.org/drawingml/2006/main" xmlns:r="http://schemas.openxmlformats.org/officeDocument/2006/relationships" xmlns:p="http://schemas.openxmlformats.org/presentationml/2006/main">
   <p:tag name="_INSTRUCTOR VIEW19C14C36-AC8E-43BC-9DB6-C2AAF774C7DC|PANE__TAG" val="_"/>
 </p:tagLst>
